--- a/demo_full.pptx
+++ b/demo_full.pptx
@@ -6098,21 +6098,27 @@
           <a:bodyPr wrap="square"/>
           <a:lstStyle/>
           <a:p>
-            <a:pPr/>
+            <a:pPr>
+              <a:buAutoNum type="arabicPeriod"/>
+            </a:pPr>
             <a:r>
               <a:rPr sz="1800"/>
               <a:t>最初のステップ</a:t>
             </a:r>
           </a:p>
           <a:p>
-            <a:pPr/>
+            <a:pPr>
+              <a:buAutoNum type="arabicPeriod"/>
+            </a:pPr>
             <a:r>
               <a:rPr sz="1800"/>
               <a:t>二番目のステップ</a:t>
             </a:r>
           </a:p>
           <a:p>
-            <a:pPr/>
+            <a:pPr>
+              <a:buAutoNum type="arabicPeriod"/>
+            </a:pPr>
             <a:r>
               <a:rPr sz="1800"/>
               <a:t>三番目のステップ</a:t>

--- a/demo_full.pptx
+++ b/demo_full.pptx
@@ -4494,13 +4494,16 @@
       <p:cxnSp>
         <p:nvCxnSpPr>
           <p:cNvPr id="9" name="Connector 8"/>
-          <p:cNvCxnSpPr/>
+          <p:cNvCxnSpPr>
+            <a:stCxn id="4" idx="1"/>
+            <a:endCxn id="5" idx="3"/>
+          </p:cNvCxnSpPr>
           <p:nvPr/>
         </p:nvCxnSpPr>
         <p:spPr>
           <a:xfrm>
-            <a:off x="1057200" y="3016604"/>
-            <a:ext cx="2561253" cy="584173"/>
+            <a:off x="457200" y="3016604"/>
+            <a:ext cx="3761253" cy="584173"/>
           </a:xfrm>
           <a:prstGeom prst="line">
             <a:avLst/>
@@ -4524,13 +4527,16 @@
       <p:cxnSp>
         <p:nvCxnSpPr>
           <p:cNvPr id="10" name="Connector 9"/>
-          <p:cNvCxnSpPr/>
+          <p:cNvCxnSpPr>
+            <a:stCxn id="5" idx="1"/>
+            <a:endCxn id="6" idx="3"/>
+          </p:cNvCxnSpPr>
           <p:nvPr/>
         </p:nvCxnSpPr>
         <p:spPr>
           <a:xfrm flipV="1">
-            <a:off x="3618453" y="3135282"/>
-            <a:ext cx="2399698" cy="465495"/>
+            <a:off x="3018453" y="3135282"/>
+            <a:ext cx="3599698" cy="465495"/>
           </a:xfrm>
           <a:prstGeom prst="line">
             <a:avLst/>
@@ -4554,13 +4560,16 @@
       <p:cxnSp>
         <p:nvCxnSpPr>
           <p:cNvPr id="11" name="Connector 10"/>
-          <p:cNvCxnSpPr/>
+          <p:cNvCxnSpPr>
+            <a:stCxn id="5" idx="2"/>
+            <a:endCxn id="7" idx="0"/>
+          </p:cNvCxnSpPr>
           <p:nvPr/>
         </p:nvCxnSpPr>
         <p:spPr>
           <a:xfrm>
-            <a:off x="3618453" y="3600777"/>
-            <a:ext cx="819884" cy="1333290"/>
+            <a:off x="3618453" y="3850777"/>
+            <a:ext cx="819884" cy="833290"/>
           </a:xfrm>
           <a:prstGeom prst="line">
             <a:avLst/>
@@ -4584,13 +4593,16 @@
       <p:cxnSp>
         <p:nvCxnSpPr>
           <p:cNvPr id="12" name="Connector 11"/>
-          <p:cNvCxnSpPr/>
+          <p:cNvCxnSpPr>
+            <a:stCxn id="6" idx="2"/>
+            <a:endCxn id="8" idx="0"/>
+          </p:cNvCxnSpPr>
           <p:nvPr/>
         </p:nvCxnSpPr>
         <p:spPr>
           <a:xfrm>
-            <a:off x="6018151" y="3135282"/>
-            <a:ext cx="1709707" cy="1493892"/>
+            <a:off x="6018151" y="3385282"/>
+            <a:ext cx="1709707" cy="993892"/>
           </a:xfrm>
           <a:prstGeom prst="line">
             <a:avLst/>
@@ -4614,13 +4626,16 @@
       <p:cxnSp>
         <p:nvCxnSpPr>
           <p:cNvPr id="13" name="Connector 12"/>
-          <p:cNvCxnSpPr/>
+          <p:cNvCxnSpPr>
+            <a:stCxn id="7" idx="1"/>
+            <a:endCxn id="8" idx="3"/>
+          </p:cNvCxnSpPr>
           <p:nvPr/>
         </p:nvCxnSpPr>
         <p:spPr>
           <a:xfrm flipV="1">
-            <a:off x="4438337" y="4629174"/>
-            <a:ext cx="3289521" cy="304893"/>
+            <a:off x="3838337" y="4629174"/>
+            <a:ext cx="4489521" cy="304893"/>
           </a:xfrm>
           <a:prstGeom prst="line">
             <a:avLst/>
@@ -4820,13 +4835,16 @@
       <p:cxnSp>
         <p:nvCxnSpPr>
           <p:cNvPr id="7" name="Connector 6"/>
-          <p:cNvCxnSpPr/>
+          <p:cNvCxnSpPr>
+            <a:stCxn id="4" idx="0"/>
+            <a:endCxn id="5" idx="2"/>
+          </p:cNvCxnSpPr>
           <p:nvPr/>
         </p:nvCxnSpPr>
         <p:spPr>
           <a:xfrm flipH="1" flipV="1">
-            <a:off x="4571218" y="3859717"/>
-            <a:ext cx="454902" cy="2016446"/>
+            <a:off x="4571218" y="4109717"/>
+            <a:ext cx="454902" cy="1516446"/>
           </a:xfrm>
           <a:prstGeom prst="line">
             <a:avLst/>
@@ -4850,13 +4868,16 @@
       <p:cxnSp>
         <p:nvCxnSpPr>
           <p:cNvPr id="8" name="Connector 7"/>
-          <p:cNvCxnSpPr/>
+          <p:cNvCxnSpPr>
+            <a:stCxn id="5" idx="0"/>
+            <a:endCxn id="6" idx="2"/>
+          </p:cNvCxnSpPr>
           <p:nvPr/>
         </p:nvCxnSpPr>
         <p:spPr>
           <a:xfrm flipH="1" flipV="1">
-            <a:off x="4118660" y="1853663"/>
-            <a:ext cx="452558" cy="2006054"/>
+            <a:off x="4118660" y="2103663"/>
+            <a:ext cx="452558" cy="1506054"/>
           </a:xfrm>
           <a:prstGeom prst="line">
             <a:avLst/>
@@ -4880,13 +4901,16 @@
       <p:cxnSp>
         <p:nvCxnSpPr>
           <p:cNvPr id="9" name="Connector 8"/>
-          <p:cNvCxnSpPr/>
+          <p:cNvCxnSpPr>
+            <a:stCxn id="6" idx="2"/>
+            <a:endCxn id="5" idx="0"/>
+          </p:cNvCxnSpPr>
           <p:nvPr/>
         </p:nvCxnSpPr>
         <p:spPr>
           <a:xfrm>
-            <a:off x="4118660" y="1853663"/>
-            <a:ext cx="452558" cy="2006054"/>
+            <a:off x="4118660" y="2103663"/>
+            <a:ext cx="452558" cy="1506054"/>
           </a:xfrm>
           <a:prstGeom prst="line">
             <a:avLst/>
@@ -4910,13 +4934,16 @@
       <p:cxnSp>
         <p:nvCxnSpPr>
           <p:cNvPr id="10" name="Connector 9"/>
-          <p:cNvCxnSpPr/>
+          <p:cNvCxnSpPr>
+            <a:stCxn id="5" idx="2"/>
+            <a:endCxn id="4" idx="0"/>
+          </p:cNvCxnSpPr>
           <p:nvPr/>
         </p:nvCxnSpPr>
         <p:spPr>
           <a:xfrm>
-            <a:off x="4571218" y="3859717"/>
-            <a:ext cx="454902" cy="2016446"/>
+            <a:off x="4571218" y="4109717"/>
+            <a:ext cx="454902" cy="1516446"/>
           </a:xfrm>
           <a:prstGeom prst="line">
             <a:avLst/>
@@ -5116,13 +5143,16 @@
       <p:cxnSp>
         <p:nvCxnSpPr>
           <p:cNvPr id="7" name="Connector 6"/>
-          <p:cNvCxnSpPr/>
+          <p:cNvCxnSpPr>
+            <a:stCxn id="4" idx="3"/>
+            <a:endCxn id="5" idx="1"/>
+          </p:cNvCxnSpPr>
           <p:nvPr/>
         </p:nvCxnSpPr>
         <p:spPr>
           <a:xfrm flipH="1" flipV="1">
-            <a:off x="4787029" y="3831520"/>
-            <a:ext cx="3084741" cy="767293"/>
+            <a:off x="4187029" y="3831520"/>
+            <a:ext cx="4284741" cy="767293"/>
           </a:xfrm>
           <a:prstGeom prst="line">
             <a:avLst/>
@@ -5146,13 +5176,16 @@
       <p:cxnSp>
         <p:nvCxnSpPr>
           <p:cNvPr id="8" name="Connector 7"/>
-          <p:cNvCxnSpPr/>
+          <p:cNvCxnSpPr>
+            <a:stCxn id="5" idx="3"/>
+            <a:endCxn id="6" idx="1"/>
+          </p:cNvCxnSpPr>
           <p:nvPr/>
         </p:nvCxnSpPr>
         <p:spPr>
           <a:xfrm flipH="1" flipV="1">
-            <a:off x="1057200" y="3159210"/>
-            <a:ext cx="3729829" cy="672310"/>
+            <a:off x="457200" y="3159210"/>
+            <a:ext cx="4929829" cy="672310"/>
           </a:xfrm>
           <a:prstGeom prst="line">
             <a:avLst/>

--- a/demo_full.pptx
+++ b/demo_full.pptx
@@ -5,7 +5,7 @@
     <p:sldMasterId id="2147483648" r:id="rId1"/>
   </p:sldMasterIdLst>
   <p:notesMasterIdLst>
-    <p:notesMasterId r:id="rId28"/>
+    <p:notesMasterId r:id="rId47"/>
   </p:notesMasterIdLst>
   <p:sldIdLst>
     <p:sldId id="256" r:id="rId7"/>
@@ -29,9 +29,28 @@
     <p:sldId id="274" r:id="rId25"/>
     <p:sldId id="275" r:id="rId26"/>
     <p:sldId id="276" r:id="rId27"/>
-    <p:sldId id="277" r:id="rId29"/>
-    <p:sldId id="278" r:id="rId30"/>
-    <p:sldId id="279" r:id="rId31"/>
+    <p:sldId id="277" r:id="rId28"/>
+    <p:sldId id="278" r:id="rId29"/>
+    <p:sldId id="279" r:id="rId30"/>
+    <p:sldId id="280" r:id="rId31"/>
+    <p:sldId id="281" r:id="rId32"/>
+    <p:sldId id="282" r:id="rId33"/>
+    <p:sldId id="283" r:id="rId34"/>
+    <p:sldId id="284" r:id="rId35"/>
+    <p:sldId id="285" r:id="rId36"/>
+    <p:sldId id="286" r:id="rId37"/>
+    <p:sldId id="287" r:id="rId38"/>
+    <p:sldId id="288" r:id="rId39"/>
+    <p:sldId id="289" r:id="rId40"/>
+    <p:sldId id="290" r:id="rId41"/>
+    <p:sldId id="291" r:id="rId42"/>
+    <p:sldId id="292" r:id="rId43"/>
+    <p:sldId id="293" r:id="rId44"/>
+    <p:sldId id="294" r:id="rId45"/>
+    <p:sldId id="295" r:id="rId46"/>
+    <p:sldId id="296" r:id="rId48"/>
+    <p:sldId id="297" r:id="rId49"/>
+    <p:sldId id="298" r:id="rId50"/>
   </p:sldIdLst>
   <p:sldSz cx="9144000" cy="6858000" type="screen4x3"/>
   <p:notesSz cx="6858000" cy="9144000"/>
@@ -4269,7 +4288,7 @@
           <a:lstStyle/>
           <a:p>
             <a:r>
-              <a:t>フローチャート（標準記法）</a:t>
+              <a:t>1. フローチャート（Flowchart）</a:t>
             </a:r>
           </a:p>
         </p:txBody>
@@ -4690,7 +4709,7 @@
           <a:lstStyle/>
           <a:p>
             <a:r>
-              <a:t>シーケンス図</a:t>
+              <a:t>2. シーケンス図（Sequence Diagram）</a:t>
             </a:r>
           </a:p>
         </p:txBody>
@@ -4714,256 +4733,42 @@
       </p:sp>
       <p:sp>
         <p:nvSpPr>
-          <p:cNvPr id="4" name="Rectangle 3"/>
-          <p:cNvSpPr/>
+          <p:cNvPr id="4" name="TextBox 3"/>
+          <p:cNvSpPr txBox="1"/>
           <p:nvPr/>
         </p:nvSpPr>
         <p:spPr>
           <a:xfrm>
-            <a:off x="4426120" y="5626163"/>
-            <a:ext cx="1200000" cy="500000"/>
+            <a:off x="457200" y="1600200"/>
+            <a:ext cx="8229600" cy="4525963"/>
           </a:xfrm>
           <a:prstGeom prst="rect">
             <a:avLst/>
           </a:prstGeom>
+          <a:noFill/>
         </p:spPr>
-        <p:style>
-          <a:lnRef idx="1">
-            <a:schemeClr val="accent1"/>
-          </a:lnRef>
-          <a:fillRef idx="3">
-            <a:schemeClr val="accent1"/>
-          </a:fillRef>
-          <a:effectRef idx="2">
-            <a:schemeClr val="accent1"/>
-          </a:effectRef>
-          <a:fontRef idx="minor">
-            <a:schemeClr val="lt1"/>
-          </a:fontRef>
-        </p:style>
-        <p:txBody>
-          <a:bodyPr rtlCol="0" anchor="ctr"/>
-          <a:lstStyle/>
-          <a:p>
-            <a:r>
-              <a:rPr sz="1200"/>
-              <a:t>Client</a:t>
-            </a:r>
-          </a:p>
-        </p:txBody>
-      </p:sp>
-      <p:sp>
-        <p:nvSpPr>
-          <p:cNvPr id="5" name="Rectangle 4"/>
-          <p:cNvSpPr/>
-          <p:nvPr/>
-        </p:nvSpPr>
-        <p:spPr>
-          <a:xfrm>
-            <a:off x="3971218" y="3609717"/>
-            <a:ext cx="1200000" cy="500000"/>
-          </a:xfrm>
-          <a:prstGeom prst="rect">
-            <a:avLst/>
-          </a:prstGeom>
-        </p:spPr>
-        <p:style>
-          <a:lnRef idx="1">
-            <a:schemeClr val="accent1"/>
-          </a:lnRef>
-          <a:fillRef idx="3">
-            <a:schemeClr val="accent1"/>
-          </a:fillRef>
-          <a:effectRef idx="2">
-            <a:schemeClr val="accent1"/>
-          </a:effectRef>
-          <a:fontRef idx="minor">
-            <a:schemeClr val="lt1"/>
-          </a:fontRef>
-        </p:style>
-        <p:txBody>
-          <a:bodyPr rtlCol="0" anchor="ctr"/>
-          <a:lstStyle/>
-          <a:p>
-            <a:r>
-              <a:rPr sz="1200"/>
-              <a:t>Server</a:t>
-            </a:r>
-          </a:p>
-        </p:txBody>
-      </p:sp>
-      <p:sp>
-        <p:nvSpPr>
-          <p:cNvPr id="6" name="Rectangle 5"/>
-          <p:cNvSpPr/>
-          <p:nvPr/>
-        </p:nvSpPr>
-        <p:spPr>
-          <a:xfrm>
-            <a:off x="3518660" y="1603663"/>
-            <a:ext cx="1200000" cy="500000"/>
-          </a:xfrm>
-          <a:prstGeom prst="rect">
-            <a:avLst/>
-          </a:prstGeom>
-        </p:spPr>
-        <p:style>
-          <a:lnRef idx="1">
-            <a:schemeClr val="accent1"/>
-          </a:lnRef>
-          <a:fillRef idx="3">
-            <a:schemeClr val="accent1"/>
-          </a:fillRef>
-          <a:effectRef idx="2">
-            <a:schemeClr val="accent1"/>
-          </a:effectRef>
-          <a:fontRef idx="minor">
-            <a:schemeClr val="lt1"/>
-          </a:fontRef>
-        </p:style>
-        <p:txBody>
-          <a:bodyPr rtlCol="0" anchor="ctr"/>
-          <a:lstStyle/>
-          <a:p>
-            <a:r>
-              <a:rPr sz="1200"/>
-              <a:t>DB</a:t>
-            </a:r>
-          </a:p>
-        </p:txBody>
-      </p:sp>
-      <p:cxnSp>
-        <p:nvCxnSpPr>
-          <p:cNvPr id="7" name="Connector 6"/>
-          <p:cNvCxnSpPr>
-            <a:stCxn id="4" idx="0"/>
-            <a:endCxn id="5" idx="2"/>
-          </p:cNvCxnSpPr>
-          <p:nvPr/>
-        </p:nvCxnSpPr>
-        <p:spPr>
-          <a:xfrm flipH="1" flipV="1">
-            <a:off x="4571218" y="4109717"/>
-            <a:ext cx="454902" cy="1516446"/>
-          </a:xfrm>
-          <a:prstGeom prst="line">
-            <a:avLst/>
-          </a:prstGeom>
-        </p:spPr>
-        <p:style>
-          <a:lnRef idx="2">
-            <a:schemeClr val="accent1"/>
-          </a:lnRef>
-          <a:fillRef idx="0">
-            <a:schemeClr val="accent1"/>
-          </a:fillRef>
-          <a:effectRef idx="1">
-            <a:schemeClr val="accent1"/>
-          </a:effectRef>
-          <a:fontRef idx="minor">
-            <a:schemeClr val="tx1"/>
-          </a:fontRef>
-        </p:style>
-      </p:cxnSp>
-      <p:cxnSp>
-        <p:nvCxnSpPr>
-          <p:cNvPr id="8" name="Connector 7"/>
-          <p:cNvCxnSpPr>
-            <a:stCxn id="5" idx="0"/>
-            <a:endCxn id="6" idx="2"/>
-          </p:cNvCxnSpPr>
-          <p:nvPr/>
-        </p:nvCxnSpPr>
-        <p:spPr>
-          <a:xfrm flipH="1" flipV="1">
-            <a:off x="4118660" y="2103663"/>
-            <a:ext cx="452558" cy="1506054"/>
-          </a:xfrm>
-          <a:prstGeom prst="line">
-            <a:avLst/>
-          </a:prstGeom>
-        </p:spPr>
-        <p:style>
-          <a:lnRef idx="2">
-            <a:schemeClr val="accent1"/>
-          </a:lnRef>
-          <a:fillRef idx="0">
-            <a:schemeClr val="accent1"/>
-          </a:fillRef>
-          <a:effectRef idx="1">
-            <a:schemeClr val="accent1"/>
-          </a:effectRef>
-          <a:fontRef idx="minor">
-            <a:schemeClr val="tx1"/>
-          </a:fontRef>
-        </p:style>
-      </p:cxnSp>
-      <p:cxnSp>
-        <p:nvCxnSpPr>
-          <p:cNvPr id="9" name="Connector 8"/>
-          <p:cNvCxnSpPr>
-            <a:stCxn id="6" idx="2"/>
-            <a:endCxn id="5" idx="0"/>
-          </p:cNvCxnSpPr>
-          <p:nvPr/>
-        </p:nvCxnSpPr>
-        <p:spPr>
-          <a:xfrm>
-            <a:off x="4118660" y="2103663"/>
-            <a:ext cx="452558" cy="1506054"/>
-          </a:xfrm>
-          <a:prstGeom prst="line">
-            <a:avLst/>
-          </a:prstGeom>
-        </p:spPr>
-        <p:style>
-          <a:lnRef idx="2">
-            <a:schemeClr val="accent1"/>
-          </a:lnRef>
-          <a:fillRef idx="0">
-            <a:schemeClr val="accent1"/>
-          </a:fillRef>
-          <a:effectRef idx="1">
-            <a:schemeClr val="accent1"/>
-          </a:effectRef>
-          <a:fontRef idx="minor">
-            <a:schemeClr val="tx1"/>
-          </a:fontRef>
-        </p:style>
-      </p:cxnSp>
-      <p:cxnSp>
-        <p:nvCxnSpPr>
-          <p:cNvPr id="10" name="Connector 9"/>
-          <p:cNvCxnSpPr>
-            <a:stCxn id="5" idx="2"/>
-            <a:endCxn id="4" idx="0"/>
-          </p:cNvCxnSpPr>
-          <p:nvPr/>
-        </p:nvCxnSpPr>
-        <p:spPr>
-          <a:xfrm>
-            <a:off x="4571218" y="4109717"/>
-            <a:ext cx="454902" cy="1516446"/>
-          </a:xfrm>
-          <a:prstGeom prst="line">
-            <a:avLst/>
-          </a:prstGeom>
-        </p:spPr>
-        <p:style>
-          <a:lnRef idx="2">
-            <a:schemeClr val="accent1"/>
-          </a:lnRef>
-          <a:fillRef idx="0">
-            <a:schemeClr val="accent1"/>
-          </a:fillRef>
-          <a:effectRef idx="1">
-            <a:schemeClr val="accent1"/>
-          </a:effectRef>
-          <a:fontRef idx="minor">
-            <a:schemeClr val="tx1"/>
-          </a:fontRef>
-        </p:style>
-      </p:cxnSp>
+        <p:txBody>
+          <a:bodyPr wrap="square">
+            <a:spAutoFit/>
+          </a:bodyPr>
+          <a:lstStyle/>
+          <a:p>
+            <a:r>
+              <a:rPr sz="1000">
+                <a:latin typeface="Courier New"/>
+              </a:rPr>
+              <a:t>sequenceDiagram
+    participant A as クライアント
+    participant B as サーバー
+    participant C as データベース
+    A-&gt;&gt;B: リクエスト送信
+    B-&gt;&gt;C: クエリ実行
+    C--&gt;&gt;B: 結果返却
+    B--&gt;&gt;A: レスポンス返却</a:t>
+            </a:r>
+          </a:p>
+        </p:txBody>
+      </p:sp>
     </p:spTree>
   </p:cSld>
   <p:clrMapOvr>
@@ -4998,7 +4803,1957 @@
           <a:lstStyle/>
           <a:p>
             <a:r>
-              <a:t>Quartoネイティブ記法</a:t>
+              <a:t>3. ガントチャート（Gantt Diagram）</a:t>
+            </a:r>
+          </a:p>
+        </p:txBody>
+      </p:sp>
+      <p:sp>
+        <p:nvSpPr>
+          <p:cNvPr id="3" name="Content Placeholder 2"/>
+          <p:cNvSpPr>
+            <a:spLocks noGrp="1"/>
+          </p:cNvSpPr>
+          <p:nvPr>
+            <p:ph idx="1"/>
+          </p:nvPr>
+        </p:nvSpPr>
+        <p:spPr/>
+        <p:txBody>
+          <a:bodyPr/>
+          <a:lstStyle/>
+          <a:p/>
+        </p:txBody>
+      </p:sp>
+      <p:sp>
+        <p:nvSpPr>
+          <p:cNvPr id="4" name="TextBox 3"/>
+          <p:cNvSpPr txBox="1"/>
+          <p:nvPr/>
+        </p:nvSpPr>
+        <p:spPr>
+          <a:xfrm>
+            <a:off x="457200" y="1600200"/>
+            <a:ext cx="8229600" cy="4525963"/>
+          </a:xfrm>
+          <a:prstGeom prst="rect">
+            <a:avLst/>
+          </a:prstGeom>
+          <a:noFill/>
+        </p:spPr>
+        <p:txBody>
+          <a:bodyPr wrap="square">
+            <a:spAutoFit/>
+          </a:bodyPr>
+          <a:lstStyle/>
+          <a:p>
+            <a:r>
+              <a:rPr sz="1000">
+                <a:latin typeface="Courier New"/>
+              </a:rPr>
+              <a:t>gantt
+    title プロジェクト計画
+    dateFormat YYYY-MM-DD
+    section 設計
+        要件定義  :done, des1, 2024-01-01, 2024-01-07
+        基本設計  :done, des2, 2024-01-08, 7d
+    section 実装
+        コーディング :active, dev1, 2024-01-15, 14d
+        テスト       :        dev2, after dev1, 7d
+    section リリース
+        デプロイ :milestone, 2024-02-05, 1d</a:t>
+            </a:r>
+          </a:p>
+        </p:txBody>
+      </p:sp>
+    </p:spTree>
+  </p:cSld>
+  <p:clrMapOvr>
+    <a:masterClrMapping/>
+  </p:clrMapOvr>
+</p:sld>
+</file>
+
+<file path=ppt/slides/slide16.xml><?xml version="1.0" encoding="utf-8"?>
+<p:sld xmlns:a="http://schemas.openxmlformats.org/drawingml/2006/main" xmlns:p="http://schemas.openxmlformats.org/presentationml/2006/main" xmlns:r="http://schemas.openxmlformats.org/officeDocument/2006/relationships">
+  <p:cSld>
+    <p:spTree>
+      <p:nvGrpSpPr>
+        <p:cNvPr id="1" name=""/>
+        <p:cNvGrpSpPr/>
+        <p:nvPr/>
+      </p:nvGrpSpPr>
+      <p:grpSpPr/>
+      <p:sp>
+        <p:nvSpPr>
+          <p:cNvPr id="2" name="Title 1"/>
+          <p:cNvSpPr>
+            <a:spLocks noGrp="1"/>
+          </p:cNvSpPr>
+          <p:nvPr>
+            <p:ph type="title"/>
+          </p:nvPr>
+        </p:nvSpPr>
+        <p:spPr/>
+        <p:txBody>
+          <a:bodyPr/>
+          <a:lstStyle/>
+          <a:p>
+            <a:r>
+              <a:t>4. クラス図（Class Diagram）</a:t>
+            </a:r>
+          </a:p>
+        </p:txBody>
+      </p:sp>
+      <p:sp>
+        <p:nvSpPr>
+          <p:cNvPr id="3" name="Content Placeholder 2"/>
+          <p:cNvSpPr>
+            <a:spLocks noGrp="1"/>
+          </p:cNvSpPr>
+          <p:nvPr>
+            <p:ph idx="1"/>
+          </p:nvPr>
+        </p:nvSpPr>
+        <p:spPr/>
+        <p:txBody>
+          <a:bodyPr/>
+          <a:lstStyle/>
+          <a:p/>
+        </p:txBody>
+      </p:sp>
+      <p:sp>
+        <p:nvSpPr>
+          <p:cNvPr id="4" name="TextBox 3"/>
+          <p:cNvSpPr txBox="1"/>
+          <p:nvPr/>
+        </p:nvSpPr>
+        <p:spPr>
+          <a:xfrm>
+            <a:off x="457200" y="1600200"/>
+            <a:ext cx="8229600" cy="4525963"/>
+          </a:xfrm>
+          <a:prstGeom prst="rect">
+            <a:avLst/>
+          </a:prstGeom>
+          <a:noFill/>
+        </p:spPr>
+        <p:txBody>
+          <a:bodyPr wrap="square">
+            <a:spAutoFit/>
+          </a:bodyPr>
+          <a:lstStyle/>
+          <a:p>
+            <a:r>
+              <a:rPr sz="1000">
+                <a:latin typeface="Courier New"/>
+              </a:rPr>
+              <a:t>classDiagram
+    class Animal {
+        +String name
+        +int age
+        +makeSound() void
+    }
+    class Dog {
+        +String breed
+        +fetch() void
+    }
+    class Cat {
+        +bool indoor
+        +purr() void
+    }
+    Animal &lt;|-- Dog
+    Animal &lt;|-- Cat</a:t>
+            </a:r>
+          </a:p>
+        </p:txBody>
+      </p:sp>
+    </p:spTree>
+  </p:cSld>
+  <p:clrMapOvr>
+    <a:masterClrMapping/>
+  </p:clrMapOvr>
+</p:sld>
+</file>
+
+<file path=ppt/slides/slide17.xml><?xml version="1.0" encoding="utf-8"?>
+<p:sld xmlns:a="http://schemas.openxmlformats.org/drawingml/2006/main" xmlns:p="http://schemas.openxmlformats.org/presentationml/2006/main" xmlns:r="http://schemas.openxmlformats.org/officeDocument/2006/relationships">
+  <p:cSld>
+    <p:spTree>
+      <p:nvGrpSpPr>
+        <p:cNvPr id="1" name=""/>
+        <p:cNvGrpSpPr/>
+        <p:nvPr/>
+      </p:nvGrpSpPr>
+      <p:grpSpPr/>
+      <p:sp>
+        <p:nvSpPr>
+          <p:cNvPr id="2" name="Title 1"/>
+          <p:cNvSpPr>
+            <a:spLocks noGrp="1"/>
+          </p:cNvSpPr>
+          <p:nvPr>
+            <p:ph type="title"/>
+          </p:nvPr>
+        </p:nvSpPr>
+        <p:spPr/>
+        <p:txBody>
+          <a:bodyPr/>
+          <a:lstStyle/>
+          <a:p>
+            <a:r>
+              <a:t>5. 状態図（State Diagram）</a:t>
+            </a:r>
+          </a:p>
+        </p:txBody>
+      </p:sp>
+      <p:sp>
+        <p:nvSpPr>
+          <p:cNvPr id="3" name="Content Placeholder 2"/>
+          <p:cNvSpPr>
+            <a:spLocks noGrp="1"/>
+          </p:cNvSpPr>
+          <p:nvPr>
+            <p:ph idx="1"/>
+          </p:nvPr>
+        </p:nvSpPr>
+        <p:spPr/>
+        <p:txBody>
+          <a:bodyPr/>
+          <a:lstStyle/>
+          <a:p/>
+        </p:txBody>
+      </p:sp>
+      <p:sp>
+        <p:nvSpPr>
+          <p:cNvPr id="4" name="TextBox 3"/>
+          <p:cNvSpPr txBox="1"/>
+          <p:nvPr/>
+        </p:nvSpPr>
+        <p:spPr>
+          <a:xfrm>
+            <a:off x="457200" y="1600200"/>
+            <a:ext cx="8229600" cy="4525963"/>
+          </a:xfrm>
+          <a:prstGeom prst="rect">
+            <a:avLst/>
+          </a:prstGeom>
+          <a:noFill/>
+        </p:spPr>
+        <p:txBody>
+          <a:bodyPr wrap="square">
+            <a:spAutoFit/>
+          </a:bodyPr>
+          <a:lstStyle/>
+          <a:p>
+            <a:r>
+              <a:rPr sz="1000">
+                <a:latin typeface="Courier New"/>
+              </a:rPr>
+              <a:t>stateDiagram-v2
+    [*] --&gt; 待機中
+    待機中 --&gt; 処理中 : 開始
+    処理中 --&gt; 完了 : 成功
+    処理中 --&gt; エラー : 失敗
+    エラー --&gt; 待機中 : リトライ
+    完了 --&gt; [*]</a:t>
+            </a:r>
+          </a:p>
+        </p:txBody>
+      </p:sp>
+    </p:spTree>
+  </p:cSld>
+  <p:clrMapOvr>
+    <a:masterClrMapping/>
+  </p:clrMapOvr>
+</p:sld>
+</file>
+
+<file path=ppt/slides/slide18.xml><?xml version="1.0" encoding="utf-8"?>
+<p:sld xmlns:a="http://schemas.openxmlformats.org/drawingml/2006/main" xmlns:p="http://schemas.openxmlformats.org/presentationml/2006/main" xmlns:r="http://schemas.openxmlformats.org/officeDocument/2006/relationships">
+  <p:cSld>
+    <p:spTree>
+      <p:nvGrpSpPr>
+        <p:cNvPr id="1" name=""/>
+        <p:cNvGrpSpPr/>
+        <p:nvPr/>
+      </p:nvGrpSpPr>
+      <p:grpSpPr/>
+      <p:sp>
+        <p:nvSpPr>
+          <p:cNvPr id="2" name="Title 1"/>
+          <p:cNvSpPr>
+            <a:spLocks noGrp="1"/>
+          </p:cNvSpPr>
+          <p:nvPr>
+            <p:ph type="title"/>
+          </p:nvPr>
+        </p:nvSpPr>
+        <p:spPr/>
+        <p:txBody>
+          <a:bodyPr/>
+          <a:lstStyle/>
+          <a:p>
+            <a:r>
+              <a:t>6. ER図（Entity Relationship Diagram）</a:t>
+            </a:r>
+          </a:p>
+        </p:txBody>
+      </p:sp>
+      <p:sp>
+        <p:nvSpPr>
+          <p:cNvPr id="3" name="Content Placeholder 2"/>
+          <p:cNvSpPr>
+            <a:spLocks noGrp="1"/>
+          </p:cNvSpPr>
+          <p:nvPr>
+            <p:ph idx="1"/>
+          </p:nvPr>
+        </p:nvSpPr>
+        <p:spPr/>
+        <p:txBody>
+          <a:bodyPr/>
+          <a:lstStyle/>
+          <a:p/>
+        </p:txBody>
+      </p:sp>
+      <p:sp>
+        <p:nvSpPr>
+          <p:cNvPr id="4" name="TextBox 3"/>
+          <p:cNvSpPr txBox="1"/>
+          <p:nvPr/>
+        </p:nvSpPr>
+        <p:spPr>
+          <a:xfrm>
+            <a:off x="457200" y="1600200"/>
+            <a:ext cx="8229600" cy="4525963"/>
+          </a:xfrm>
+          <a:prstGeom prst="rect">
+            <a:avLst/>
+          </a:prstGeom>
+          <a:noFill/>
+        </p:spPr>
+        <p:txBody>
+          <a:bodyPr wrap="square">
+            <a:spAutoFit/>
+          </a:bodyPr>
+          <a:lstStyle/>
+          <a:p>
+            <a:r>
+              <a:rPr sz="1000">
+                <a:latin typeface="Courier New"/>
+              </a:rPr>
+              <a:t>erDiagram
+    CUSTOMER ||--o{ ORDER : places
+    ORDER ||--|{ LINE-ITEM : contains
+    PRODUCT ||--o{ LINE-ITEM : includes
+    CUSTOMER {
+        int id
+        string name
+        string email
+    }
+    ORDER {
+        int id
+        date ordered_at
+    }</a:t>
+            </a:r>
+          </a:p>
+        </p:txBody>
+      </p:sp>
+    </p:spTree>
+  </p:cSld>
+  <p:clrMapOvr>
+    <a:masterClrMapping/>
+  </p:clrMapOvr>
+</p:sld>
+</file>
+
+<file path=ppt/slides/slide19.xml><?xml version="1.0" encoding="utf-8"?>
+<p:sld xmlns:a="http://schemas.openxmlformats.org/drawingml/2006/main" xmlns:p="http://schemas.openxmlformats.org/presentationml/2006/main" xmlns:r="http://schemas.openxmlformats.org/officeDocument/2006/relationships">
+  <p:cSld>
+    <p:spTree>
+      <p:nvGrpSpPr>
+        <p:cNvPr id="1" name=""/>
+        <p:cNvGrpSpPr/>
+        <p:nvPr/>
+      </p:nvGrpSpPr>
+      <p:grpSpPr/>
+      <p:sp>
+        <p:nvSpPr>
+          <p:cNvPr id="2" name="Title 1"/>
+          <p:cNvSpPr>
+            <a:spLocks noGrp="1"/>
+          </p:cNvSpPr>
+          <p:nvPr>
+            <p:ph type="title"/>
+          </p:nvPr>
+        </p:nvSpPr>
+        <p:spPr/>
+        <p:txBody>
+          <a:bodyPr/>
+          <a:lstStyle/>
+          <a:p>
+            <a:r>
+              <a:t>7. ユーザージャーニー図（User Journey）</a:t>
+            </a:r>
+          </a:p>
+        </p:txBody>
+      </p:sp>
+      <p:sp>
+        <p:nvSpPr>
+          <p:cNvPr id="3" name="Content Placeholder 2"/>
+          <p:cNvSpPr>
+            <a:spLocks noGrp="1"/>
+          </p:cNvSpPr>
+          <p:nvPr>
+            <p:ph idx="1"/>
+          </p:nvPr>
+        </p:nvSpPr>
+        <p:spPr/>
+        <p:txBody>
+          <a:bodyPr/>
+          <a:lstStyle/>
+          <a:p/>
+        </p:txBody>
+      </p:sp>
+      <p:sp>
+        <p:nvSpPr>
+          <p:cNvPr id="4" name="TextBox 3"/>
+          <p:cNvSpPr txBox="1"/>
+          <p:nvPr/>
+        </p:nvSpPr>
+        <p:spPr>
+          <a:xfrm>
+            <a:off x="457200" y="1600200"/>
+            <a:ext cx="8229600" cy="4525963"/>
+          </a:xfrm>
+          <a:prstGeom prst="rect">
+            <a:avLst/>
+          </a:prstGeom>
+          <a:noFill/>
+        </p:spPr>
+        <p:txBody>
+          <a:bodyPr wrap="square">
+            <a:spAutoFit/>
+          </a:bodyPr>
+          <a:lstStyle/>
+          <a:p>
+            <a:r>
+              <a:rPr sz="1000">
+                <a:latin typeface="Courier New"/>
+              </a:rPr>
+              <a:t>journey
+    title オンラインショッピング体験
+    section 商品探し
+        サイト訪問    : 5: ユーザー
+        検索実行      : 3: ユーザー
+        商品選択      : 4: ユーザー
+    section 購入
+        カートに追加  : 5: ユーザー
+        決済手続き    : 2: ユーザー
+        注文完了      : 5: ユーザー</a:t>
+            </a:r>
+          </a:p>
+        </p:txBody>
+      </p:sp>
+    </p:spTree>
+  </p:cSld>
+  <p:clrMapOvr>
+    <a:masterClrMapping/>
+  </p:clrMapOvr>
+</p:sld>
+</file>
+
+<file path=ppt/slides/slide2.xml><?xml version="1.0" encoding="utf-8"?>
+<p:sld xmlns:a="http://schemas.openxmlformats.org/drawingml/2006/main" xmlns:p="http://schemas.openxmlformats.org/presentationml/2006/main" xmlns:r="http://schemas.openxmlformats.org/officeDocument/2006/relationships">
+  <p:cSld>
+    <p:spTree>
+      <p:nvGrpSpPr>
+        <p:cNvPr id="1" name=""/>
+        <p:cNvGrpSpPr/>
+        <p:nvPr/>
+      </p:nvGrpSpPr>
+      <p:grpSpPr/>
+      <p:sp>
+        <p:nvSpPr>
+          <p:cNvPr id="2" name="Title 1"/>
+          <p:cNvSpPr>
+            <a:spLocks noGrp="1"/>
+          </p:cNvSpPr>
+          <p:nvPr>
+            <p:ph type="title"/>
+          </p:nvPr>
+        </p:nvSpPr>
+        <p:spPr/>
+        <p:txBody>
+          <a:bodyPr/>
+          <a:lstStyle/>
+          <a:p>
+            <a:r>
+              <a:t>テキスト系機能</a:t>
+            </a:r>
+          </a:p>
+        </p:txBody>
+      </p:sp>
+      <p:sp>
+        <p:nvSpPr>
+          <p:cNvPr id="3" name="Text Placeholder 2"/>
+          <p:cNvSpPr>
+            <a:spLocks noGrp="1"/>
+          </p:cNvSpPr>
+          <p:nvPr>
+            <p:ph type="body" idx="1"/>
+          </p:nvPr>
+        </p:nvSpPr>
+        <p:spPr/>
+        <p:txBody>
+          <a:bodyPr/>
+          <a:lstStyle/>
+          <a:p/>
+        </p:txBody>
+      </p:sp>
+    </p:spTree>
+  </p:cSld>
+  <p:clrMapOvr>
+    <a:masterClrMapping/>
+  </p:clrMapOvr>
+</p:sld>
+</file>
+
+<file path=ppt/slides/slide20.xml><?xml version="1.0" encoding="utf-8"?>
+<p:sld xmlns:a="http://schemas.openxmlformats.org/drawingml/2006/main" xmlns:p="http://schemas.openxmlformats.org/presentationml/2006/main" xmlns:r="http://schemas.openxmlformats.org/officeDocument/2006/relationships">
+  <p:cSld>
+    <p:spTree>
+      <p:nvGrpSpPr>
+        <p:cNvPr id="1" name=""/>
+        <p:cNvGrpSpPr/>
+        <p:nvPr/>
+      </p:nvGrpSpPr>
+      <p:grpSpPr/>
+      <p:sp>
+        <p:nvSpPr>
+          <p:cNvPr id="2" name="Title 1"/>
+          <p:cNvSpPr>
+            <a:spLocks noGrp="1"/>
+          </p:cNvSpPr>
+          <p:nvPr>
+            <p:ph type="title"/>
+          </p:nvPr>
+        </p:nvSpPr>
+        <p:spPr/>
+        <p:txBody>
+          <a:bodyPr/>
+          <a:lstStyle/>
+          <a:p>
+            <a:r>
+              <a:t>8. 円グラフ（Pie Chart）</a:t>
+            </a:r>
+          </a:p>
+        </p:txBody>
+      </p:sp>
+      <p:sp>
+        <p:nvSpPr>
+          <p:cNvPr id="3" name="Content Placeholder 2"/>
+          <p:cNvSpPr>
+            <a:spLocks noGrp="1"/>
+          </p:cNvSpPr>
+          <p:nvPr>
+            <p:ph idx="1"/>
+          </p:nvPr>
+        </p:nvSpPr>
+        <p:spPr/>
+        <p:txBody>
+          <a:bodyPr/>
+          <a:lstStyle/>
+          <a:p/>
+        </p:txBody>
+      </p:sp>
+      <p:sp>
+        <p:nvSpPr>
+          <p:cNvPr id="4" name="TextBox 3"/>
+          <p:cNvSpPr txBox="1"/>
+          <p:nvPr/>
+        </p:nvSpPr>
+        <p:spPr>
+          <a:xfrm>
+            <a:off x="457200" y="1600200"/>
+            <a:ext cx="8229600" cy="4525963"/>
+          </a:xfrm>
+          <a:prstGeom prst="rect">
+            <a:avLst/>
+          </a:prstGeom>
+          <a:noFill/>
+        </p:spPr>
+        <p:txBody>
+          <a:bodyPr wrap="square">
+            <a:spAutoFit/>
+          </a:bodyPr>
+          <a:lstStyle/>
+          <a:p>
+            <a:r>
+              <a:rPr sz="1000">
+                <a:latin typeface="Courier New"/>
+              </a:rPr>
+              <a:t>pie title 言語別コード比率
+    "Python" : 42
+    "TypeScript" : 28
+    "Rust" : 15
+    "Go" : 10
+    "その他" : 5</a:t>
+            </a:r>
+          </a:p>
+        </p:txBody>
+      </p:sp>
+    </p:spTree>
+  </p:cSld>
+  <p:clrMapOvr>
+    <a:masterClrMapping/>
+  </p:clrMapOvr>
+</p:sld>
+</file>
+
+<file path=ppt/slides/slide21.xml><?xml version="1.0" encoding="utf-8"?>
+<p:sld xmlns:a="http://schemas.openxmlformats.org/drawingml/2006/main" xmlns:p="http://schemas.openxmlformats.org/presentationml/2006/main" xmlns:r="http://schemas.openxmlformats.org/officeDocument/2006/relationships">
+  <p:cSld>
+    <p:spTree>
+      <p:nvGrpSpPr>
+        <p:cNvPr id="1" name=""/>
+        <p:cNvGrpSpPr/>
+        <p:nvPr/>
+      </p:nvGrpSpPr>
+      <p:grpSpPr/>
+      <p:sp>
+        <p:nvSpPr>
+          <p:cNvPr id="2" name="Title 1"/>
+          <p:cNvSpPr>
+            <a:spLocks noGrp="1"/>
+          </p:cNvSpPr>
+          <p:nvPr>
+            <p:ph type="title"/>
+          </p:nvPr>
+        </p:nvSpPr>
+        <p:spPr/>
+        <p:txBody>
+          <a:bodyPr/>
+          <a:lstStyle/>
+          <a:p>
+            <a:r>
+              <a:t>9. 象限チャート（Quadrant Chart）</a:t>
+            </a:r>
+          </a:p>
+        </p:txBody>
+      </p:sp>
+      <p:sp>
+        <p:nvSpPr>
+          <p:cNvPr id="3" name="Content Placeholder 2"/>
+          <p:cNvSpPr>
+            <a:spLocks noGrp="1"/>
+          </p:cNvSpPr>
+          <p:nvPr>
+            <p:ph idx="1"/>
+          </p:nvPr>
+        </p:nvSpPr>
+        <p:spPr/>
+        <p:txBody>
+          <a:bodyPr/>
+          <a:lstStyle/>
+          <a:p/>
+        </p:txBody>
+      </p:sp>
+      <p:sp>
+        <p:nvSpPr>
+          <p:cNvPr id="4" name="TextBox 3"/>
+          <p:cNvSpPr txBox="1"/>
+          <p:nvPr/>
+        </p:nvSpPr>
+        <p:spPr>
+          <a:xfrm>
+            <a:off x="457200" y="1600200"/>
+            <a:ext cx="8229600" cy="4525963"/>
+          </a:xfrm>
+          <a:prstGeom prst="rect">
+            <a:avLst/>
+          </a:prstGeom>
+          <a:noFill/>
+        </p:spPr>
+        <p:txBody>
+          <a:bodyPr wrap="square">
+            <a:spAutoFit/>
+          </a:bodyPr>
+          <a:lstStyle/>
+          <a:p>
+            <a:r>
+              <a:rPr sz="1000">
+                <a:latin typeface="Courier New"/>
+              </a:rPr>
+              <a:t>quadrantChart
+    title 製品ポートフォリオ分析
+    x-axis 低成長 --&gt; 高成長
+    y-axis 低シェア --&gt; 高シェア
+    quadrant-1 スター
+    quadrant-2 問題児
+    quadrant-3 負け犬
+    quadrant-4 金のなる木
+    製品A: [0.7, 0.8]
+    製品B: [0.3, 0.7]
+    製品C: [0.2, 0.3]
+    製品D: [0.8, 0.3]</a:t>
+            </a:r>
+          </a:p>
+        </p:txBody>
+      </p:sp>
+    </p:spTree>
+  </p:cSld>
+  <p:clrMapOvr>
+    <a:masterClrMapping/>
+  </p:clrMapOvr>
+</p:sld>
+</file>
+
+<file path=ppt/slides/slide22.xml><?xml version="1.0" encoding="utf-8"?>
+<p:sld xmlns:a="http://schemas.openxmlformats.org/drawingml/2006/main" xmlns:p="http://schemas.openxmlformats.org/presentationml/2006/main" xmlns:r="http://schemas.openxmlformats.org/officeDocument/2006/relationships">
+  <p:cSld>
+    <p:spTree>
+      <p:nvGrpSpPr>
+        <p:cNvPr id="1" name=""/>
+        <p:cNvGrpSpPr/>
+        <p:nvPr/>
+      </p:nvGrpSpPr>
+      <p:grpSpPr/>
+      <p:sp>
+        <p:nvSpPr>
+          <p:cNvPr id="2" name="Title 1"/>
+          <p:cNvSpPr>
+            <a:spLocks noGrp="1"/>
+          </p:cNvSpPr>
+          <p:nvPr>
+            <p:ph type="title"/>
+          </p:nvPr>
+        </p:nvSpPr>
+        <p:spPr/>
+        <p:txBody>
+          <a:bodyPr/>
+          <a:lstStyle/>
+          <a:p>
+            <a:r>
+              <a:t>10. 要件図（Requirement Diagram）</a:t>
+            </a:r>
+          </a:p>
+        </p:txBody>
+      </p:sp>
+      <p:sp>
+        <p:nvSpPr>
+          <p:cNvPr id="3" name="Content Placeholder 2"/>
+          <p:cNvSpPr>
+            <a:spLocks noGrp="1"/>
+          </p:cNvSpPr>
+          <p:nvPr>
+            <p:ph idx="1"/>
+          </p:nvPr>
+        </p:nvSpPr>
+        <p:spPr/>
+        <p:txBody>
+          <a:bodyPr/>
+          <a:lstStyle/>
+          <a:p/>
+        </p:txBody>
+      </p:sp>
+      <p:sp>
+        <p:nvSpPr>
+          <p:cNvPr id="4" name="TextBox 3"/>
+          <p:cNvSpPr txBox="1"/>
+          <p:nvPr/>
+        </p:nvSpPr>
+        <p:spPr>
+          <a:xfrm>
+            <a:off x="457200" y="1600200"/>
+            <a:ext cx="8229600" cy="4525963"/>
+          </a:xfrm>
+          <a:prstGeom prst="rect">
+            <a:avLst/>
+          </a:prstGeom>
+          <a:noFill/>
+        </p:spPr>
+        <p:txBody>
+          <a:bodyPr wrap="square">
+            <a:spAutoFit/>
+          </a:bodyPr>
+          <a:lstStyle/>
+          <a:p>
+            <a:r>
+              <a:rPr sz="1000">
+                <a:latin typeface="Courier New"/>
+              </a:rPr>
+              <a:t>requirementDiagram
+    requirement test_req {
+        id: 1
+        text: システムは99.9%の可用性を持つこと
+        risk: high
+        verifymethod: test
+    }
+    functionalRequirement login_req {
+        id: 2
+        text: ユーザーはログインできること
+        risk: medium
+        verifymethod: inspection
+    }
+    test_req - traces -&gt; login_req</a:t>
+            </a:r>
+          </a:p>
+        </p:txBody>
+      </p:sp>
+    </p:spTree>
+  </p:cSld>
+  <p:clrMapOvr>
+    <a:masterClrMapping/>
+  </p:clrMapOvr>
+</p:sld>
+</file>
+
+<file path=ppt/slides/slide23.xml><?xml version="1.0" encoding="utf-8"?>
+<p:sld xmlns:a="http://schemas.openxmlformats.org/drawingml/2006/main" xmlns:p="http://schemas.openxmlformats.org/presentationml/2006/main" xmlns:r="http://schemas.openxmlformats.org/officeDocument/2006/relationships">
+  <p:cSld>
+    <p:spTree>
+      <p:nvGrpSpPr>
+        <p:cNvPr id="1" name=""/>
+        <p:cNvGrpSpPr/>
+        <p:nvPr/>
+      </p:nvGrpSpPr>
+      <p:grpSpPr/>
+      <p:sp>
+        <p:nvSpPr>
+          <p:cNvPr id="2" name="Title 1"/>
+          <p:cNvSpPr>
+            <a:spLocks noGrp="1"/>
+          </p:cNvSpPr>
+          <p:nvPr>
+            <p:ph type="title"/>
+          </p:nvPr>
+        </p:nvSpPr>
+        <p:spPr/>
+        <p:txBody>
+          <a:bodyPr/>
+          <a:lstStyle/>
+          <a:p>
+            <a:r>
+              <a:t>11. Gitグラフ（Git Graph）</a:t>
+            </a:r>
+          </a:p>
+        </p:txBody>
+      </p:sp>
+      <p:sp>
+        <p:nvSpPr>
+          <p:cNvPr id="3" name="Content Placeholder 2"/>
+          <p:cNvSpPr>
+            <a:spLocks noGrp="1"/>
+          </p:cNvSpPr>
+          <p:nvPr>
+            <p:ph idx="1"/>
+          </p:nvPr>
+        </p:nvSpPr>
+        <p:spPr/>
+        <p:txBody>
+          <a:bodyPr/>
+          <a:lstStyle/>
+          <a:p/>
+        </p:txBody>
+      </p:sp>
+      <p:sp>
+        <p:nvSpPr>
+          <p:cNvPr id="4" name="TextBox 3"/>
+          <p:cNvSpPr txBox="1"/>
+          <p:nvPr/>
+        </p:nvSpPr>
+        <p:spPr>
+          <a:xfrm>
+            <a:off x="457200" y="1600200"/>
+            <a:ext cx="8229600" cy="4525963"/>
+          </a:xfrm>
+          <a:prstGeom prst="rect">
+            <a:avLst/>
+          </a:prstGeom>
+          <a:noFill/>
+        </p:spPr>
+        <p:txBody>
+          <a:bodyPr wrap="square">
+            <a:spAutoFit/>
+          </a:bodyPr>
+          <a:lstStyle/>
+          <a:p>
+            <a:r>
+              <a:rPr sz="1000">
+                <a:latin typeface="Courier New"/>
+              </a:rPr>
+              <a:t>gitGraph
+    commit id: "initial"
+    commit id: "feat: add login"
+    branch develop
+    checkout develop
+    commit id: "fix: typo"
+    commit id: "feat: add API"
+    checkout main
+    merge develop id: "merge develop"
+    commit id: "release: v1.0"</a:t>
+            </a:r>
+          </a:p>
+        </p:txBody>
+      </p:sp>
+    </p:spTree>
+  </p:cSld>
+  <p:clrMapOvr>
+    <a:masterClrMapping/>
+  </p:clrMapOvr>
+</p:sld>
+</file>
+
+<file path=ppt/slides/slide24.xml><?xml version="1.0" encoding="utf-8"?>
+<p:sld xmlns:a="http://schemas.openxmlformats.org/drawingml/2006/main" xmlns:p="http://schemas.openxmlformats.org/presentationml/2006/main" xmlns:r="http://schemas.openxmlformats.org/officeDocument/2006/relationships">
+  <p:cSld>
+    <p:spTree>
+      <p:nvGrpSpPr>
+        <p:cNvPr id="1" name=""/>
+        <p:cNvGrpSpPr/>
+        <p:nvPr/>
+      </p:nvGrpSpPr>
+      <p:grpSpPr/>
+      <p:sp>
+        <p:nvSpPr>
+          <p:cNvPr id="2" name="Title 1"/>
+          <p:cNvSpPr>
+            <a:spLocks noGrp="1"/>
+          </p:cNvSpPr>
+          <p:nvPr>
+            <p:ph type="title"/>
+          </p:nvPr>
+        </p:nvSpPr>
+        <p:spPr/>
+        <p:txBody>
+          <a:bodyPr/>
+          <a:lstStyle/>
+          <a:p>
+            <a:r>
+              <a:t>12. マインドマップ（Mindmap）</a:t>
+            </a:r>
+          </a:p>
+        </p:txBody>
+      </p:sp>
+      <p:sp>
+        <p:nvSpPr>
+          <p:cNvPr id="3" name="Content Placeholder 2"/>
+          <p:cNvSpPr>
+            <a:spLocks noGrp="1"/>
+          </p:cNvSpPr>
+          <p:nvPr>
+            <p:ph idx="1"/>
+          </p:nvPr>
+        </p:nvSpPr>
+        <p:spPr/>
+        <p:txBody>
+          <a:bodyPr/>
+          <a:lstStyle/>
+          <a:p/>
+        </p:txBody>
+      </p:sp>
+      <p:sp>
+        <p:nvSpPr>
+          <p:cNvPr id="4" name="TextBox 3"/>
+          <p:cNvSpPr txBox="1"/>
+          <p:nvPr/>
+        </p:nvSpPr>
+        <p:spPr>
+          <a:xfrm>
+            <a:off x="457200" y="1600200"/>
+            <a:ext cx="8229600" cy="4525963"/>
+          </a:xfrm>
+          <a:prstGeom prst="rect">
+            <a:avLst/>
+          </a:prstGeom>
+          <a:noFill/>
+        </p:spPr>
+        <p:txBody>
+          <a:bodyPr wrap="square">
+            <a:spAutoFit/>
+          </a:bodyPr>
+          <a:lstStyle/>
+          <a:p>
+            <a:r>
+              <a:rPr sz="1000">
+                <a:latin typeface="Courier New"/>
+              </a:rPr>
+              <a:t>mindmap
+    root((qmd_to_pptx))
+        入力形式
+            QMD
+            Markdown
+        出力
+            PPTX
+        機能
+            数式
+            Mermaid図
+            テーブル
+            コード
+        利用方法
+            ライブラリ
+            MCPサーバー</a:t>
+            </a:r>
+          </a:p>
+        </p:txBody>
+      </p:sp>
+    </p:spTree>
+  </p:cSld>
+  <p:clrMapOvr>
+    <a:masterClrMapping/>
+  </p:clrMapOvr>
+</p:sld>
+</file>
+
+<file path=ppt/slides/slide25.xml><?xml version="1.0" encoding="utf-8"?>
+<p:sld xmlns:a="http://schemas.openxmlformats.org/drawingml/2006/main" xmlns:p="http://schemas.openxmlformats.org/presentationml/2006/main" xmlns:r="http://schemas.openxmlformats.org/officeDocument/2006/relationships">
+  <p:cSld>
+    <p:spTree>
+      <p:nvGrpSpPr>
+        <p:cNvPr id="1" name=""/>
+        <p:cNvGrpSpPr/>
+        <p:nvPr/>
+      </p:nvGrpSpPr>
+      <p:grpSpPr/>
+      <p:sp>
+        <p:nvSpPr>
+          <p:cNvPr id="2" name="Title 1"/>
+          <p:cNvSpPr>
+            <a:spLocks noGrp="1"/>
+          </p:cNvSpPr>
+          <p:nvPr>
+            <p:ph type="title"/>
+          </p:nvPr>
+        </p:nvSpPr>
+        <p:spPr/>
+        <p:txBody>
+          <a:bodyPr/>
+          <a:lstStyle/>
+          <a:p>
+            <a:r>
+              <a:t>13. タイムライン（Timeline）</a:t>
+            </a:r>
+          </a:p>
+        </p:txBody>
+      </p:sp>
+      <p:sp>
+        <p:nvSpPr>
+          <p:cNvPr id="3" name="Content Placeholder 2"/>
+          <p:cNvSpPr>
+            <a:spLocks noGrp="1"/>
+          </p:cNvSpPr>
+          <p:nvPr>
+            <p:ph idx="1"/>
+          </p:nvPr>
+        </p:nvSpPr>
+        <p:spPr/>
+        <p:txBody>
+          <a:bodyPr/>
+          <a:lstStyle/>
+          <a:p/>
+        </p:txBody>
+      </p:sp>
+      <p:sp>
+        <p:nvSpPr>
+          <p:cNvPr id="4" name="TextBox 3"/>
+          <p:cNvSpPr txBox="1"/>
+          <p:nvPr/>
+        </p:nvSpPr>
+        <p:spPr>
+          <a:xfrm>
+            <a:off x="457200" y="1600200"/>
+            <a:ext cx="8229600" cy="4525963"/>
+          </a:xfrm>
+          <a:prstGeom prst="rect">
+            <a:avLst/>
+          </a:prstGeom>
+          <a:noFill/>
+        </p:spPr>
+        <p:txBody>
+          <a:bodyPr wrap="square">
+            <a:spAutoFit/>
+          </a:bodyPr>
+          <a:lstStyle/>
+          <a:p>
+            <a:r>
+              <a:rPr sz="1000">
+                <a:latin typeface="Courier New"/>
+              </a:rPr>
+              <a:t>timeline
+    title ソフトウェア開発史
+    1960 : アセンブリ言語
+    1970 : C言語
+         : Unix
+    1980 : C++
+         : Macintosh
+    1990 : Java
+         : World Wide Web
+    2000 : Python普及
+         : Agile開発
+    2010 : クラウドコンピューティング
+    2020 : AI・機械学習</a:t>
+            </a:r>
+          </a:p>
+        </p:txBody>
+      </p:sp>
+    </p:spTree>
+  </p:cSld>
+  <p:clrMapOvr>
+    <a:masterClrMapping/>
+  </p:clrMapOvr>
+</p:sld>
+</file>
+
+<file path=ppt/slides/slide26.xml><?xml version="1.0" encoding="utf-8"?>
+<p:sld xmlns:a="http://schemas.openxmlformats.org/drawingml/2006/main" xmlns:p="http://schemas.openxmlformats.org/presentationml/2006/main" xmlns:r="http://schemas.openxmlformats.org/officeDocument/2006/relationships">
+  <p:cSld>
+    <p:spTree>
+      <p:nvGrpSpPr>
+        <p:cNvPr id="1" name=""/>
+        <p:cNvGrpSpPr/>
+        <p:nvPr/>
+      </p:nvGrpSpPr>
+      <p:grpSpPr/>
+      <p:sp>
+        <p:nvSpPr>
+          <p:cNvPr id="2" name="Title 1"/>
+          <p:cNvSpPr>
+            <a:spLocks noGrp="1"/>
+          </p:cNvSpPr>
+          <p:nvPr>
+            <p:ph type="title"/>
+          </p:nvPr>
+        </p:nvSpPr>
+        <p:spPr/>
+        <p:txBody>
+          <a:bodyPr/>
+          <a:lstStyle/>
+          <a:p>
+            <a:r>
+              <a:t>14. ZenUML</a:t>
+            </a:r>
+          </a:p>
+        </p:txBody>
+      </p:sp>
+      <p:sp>
+        <p:nvSpPr>
+          <p:cNvPr id="3" name="Content Placeholder 2"/>
+          <p:cNvSpPr>
+            <a:spLocks noGrp="1"/>
+          </p:cNvSpPr>
+          <p:nvPr>
+            <p:ph idx="1"/>
+          </p:nvPr>
+        </p:nvSpPr>
+        <p:spPr/>
+        <p:txBody>
+          <a:bodyPr/>
+          <a:lstStyle/>
+          <a:p/>
+        </p:txBody>
+      </p:sp>
+      <p:sp>
+        <p:nvSpPr>
+          <p:cNvPr id="4" name="TextBox 3"/>
+          <p:cNvSpPr txBox="1"/>
+          <p:nvPr/>
+        </p:nvSpPr>
+        <p:spPr>
+          <a:xfrm>
+            <a:off x="457200" y="1600200"/>
+            <a:ext cx="8229600" cy="4525963"/>
+          </a:xfrm>
+          <a:prstGeom prst="rect">
+            <a:avLst/>
+          </a:prstGeom>
+          <a:noFill/>
+        </p:spPr>
+        <p:txBody>
+          <a:bodyPr wrap="square">
+            <a:spAutoFit/>
+          </a:bodyPr>
+          <a:lstStyle/>
+          <a:p>
+            <a:r>
+              <a:rPr sz="1000">
+                <a:latin typeface="Courier New"/>
+              </a:rPr>
+              <a:t>zenuml
+    title 注文処理
+    @Actor Client
+    @Database DB
+    Client -&gt; Server.process(order) {
+        Server -&gt; DB.save(order)
+        return orderId
+    }</a:t>
+            </a:r>
+          </a:p>
+        </p:txBody>
+      </p:sp>
+    </p:spTree>
+  </p:cSld>
+  <p:clrMapOvr>
+    <a:masterClrMapping/>
+  </p:clrMapOvr>
+</p:sld>
+</file>
+
+<file path=ppt/slides/slide27.xml><?xml version="1.0" encoding="utf-8"?>
+<p:sld xmlns:a="http://schemas.openxmlformats.org/drawingml/2006/main" xmlns:p="http://schemas.openxmlformats.org/presentationml/2006/main" xmlns:r="http://schemas.openxmlformats.org/officeDocument/2006/relationships">
+  <p:cSld>
+    <p:spTree>
+      <p:nvGrpSpPr>
+        <p:cNvPr id="1" name=""/>
+        <p:cNvGrpSpPr/>
+        <p:nvPr/>
+      </p:nvGrpSpPr>
+      <p:grpSpPr/>
+      <p:sp>
+        <p:nvSpPr>
+          <p:cNvPr id="2" name="Title 1"/>
+          <p:cNvSpPr>
+            <a:spLocks noGrp="1"/>
+          </p:cNvSpPr>
+          <p:nvPr>
+            <p:ph type="title"/>
+          </p:nvPr>
+        </p:nvSpPr>
+        <p:spPr/>
+        <p:txBody>
+          <a:bodyPr/>
+          <a:lstStyle/>
+          <a:p>
+            <a:r>
+              <a:t>15. サンキー図（Sankey Diagram）</a:t>
+            </a:r>
+          </a:p>
+        </p:txBody>
+      </p:sp>
+      <p:sp>
+        <p:nvSpPr>
+          <p:cNvPr id="3" name="Content Placeholder 2"/>
+          <p:cNvSpPr>
+            <a:spLocks noGrp="1"/>
+          </p:cNvSpPr>
+          <p:nvPr>
+            <p:ph idx="1"/>
+          </p:nvPr>
+        </p:nvSpPr>
+        <p:spPr/>
+        <p:txBody>
+          <a:bodyPr/>
+          <a:lstStyle/>
+          <a:p/>
+        </p:txBody>
+      </p:sp>
+      <p:sp>
+        <p:nvSpPr>
+          <p:cNvPr id="4" name="TextBox 3"/>
+          <p:cNvSpPr txBox="1"/>
+          <p:nvPr/>
+        </p:nvSpPr>
+        <p:spPr>
+          <a:xfrm>
+            <a:off x="457200" y="1600200"/>
+            <a:ext cx="8229600" cy="4525963"/>
+          </a:xfrm>
+          <a:prstGeom prst="rect">
+            <a:avLst/>
+          </a:prstGeom>
+          <a:noFill/>
+        </p:spPr>
+        <p:txBody>
+          <a:bodyPr wrap="square">
+            <a:spAutoFit/>
+          </a:bodyPr>
+          <a:lstStyle/>
+          <a:p>
+            <a:r>
+              <a:rPr sz="1000">
+                <a:latin typeface="Courier New"/>
+              </a:rPr>
+              <a:t>sankey-beta
+    エネルギー源,電力,60
+    エネルギー源,熱,40
+    電力,家庭用,25
+    電力,産業用,35
+    熱,暖房,30
+    熱,給湯,10</a:t>
+            </a:r>
+          </a:p>
+        </p:txBody>
+      </p:sp>
+    </p:spTree>
+  </p:cSld>
+  <p:clrMapOvr>
+    <a:masterClrMapping/>
+  </p:clrMapOvr>
+</p:sld>
+</file>
+
+<file path=ppt/slides/slide28.xml><?xml version="1.0" encoding="utf-8"?>
+<p:sld xmlns:a="http://schemas.openxmlformats.org/drawingml/2006/main" xmlns:p="http://schemas.openxmlformats.org/presentationml/2006/main" xmlns:r="http://schemas.openxmlformats.org/officeDocument/2006/relationships">
+  <p:cSld>
+    <p:spTree>
+      <p:nvGrpSpPr>
+        <p:cNvPr id="1" name=""/>
+        <p:cNvGrpSpPr/>
+        <p:nvPr/>
+      </p:nvGrpSpPr>
+      <p:grpSpPr/>
+      <p:sp>
+        <p:nvSpPr>
+          <p:cNvPr id="2" name="Title 1"/>
+          <p:cNvSpPr>
+            <a:spLocks noGrp="1"/>
+          </p:cNvSpPr>
+          <p:nvPr>
+            <p:ph type="title"/>
+          </p:nvPr>
+        </p:nvSpPr>
+        <p:spPr/>
+        <p:txBody>
+          <a:bodyPr/>
+          <a:lstStyle/>
+          <a:p>
+            <a:r>
+              <a:t>16. XYチャート（XY Chart）</a:t>
+            </a:r>
+          </a:p>
+        </p:txBody>
+      </p:sp>
+      <p:sp>
+        <p:nvSpPr>
+          <p:cNvPr id="3" name="Content Placeholder 2"/>
+          <p:cNvSpPr>
+            <a:spLocks noGrp="1"/>
+          </p:cNvSpPr>
+          <p:nvPr>
+            <p:ph idx="1"/>
+          </p:nvPr>
+        </p:nvSpPr>
+        <p:spPr/>
+        <p:txBody>
+          <a:bodyPr/>
+          <a:lstStyle/>
+          <a:p/>
+        </p:txBody>
+      </p:sp>
+      <p:sp>
+        <p:nvSpPr>
+          <p:cNvPr id="4" name="TextBox 3"/>
+          <p:cNvSpPr txBox="1"/>
+          <p:nvPr/>
+        </p:nvSpPr>
+        <p:spPr>
+          <a:xfrm>
+            <a:off x="457200" y="1600200"/>
+            <a:ext cx="8229600" cy="4525963"/>
+          </a:xfrm>
+          <a:prstGeom prst="rect">
+            <a:avLst/>
+          </a:prstGeom>
+          <a:noFill/>
+        </p:spPr>
+        <p:txBody>
+          <a:bodyPr wrap="square">
+            <a:spAutoFit/>
+          </a:bodyPr>
+          <a:lstStyle/>
+          <a:p>
+            <a:r>
+              <a:rPr sz="1000">
+                <a:latin typeface="Courier New"/>
+              </a:rPr>
+              <a:t>xychart-beta
+    title "月別売上推移"
+    x-axis [1月, 2月, 3月, 4月, 5月, 6月]
+    y-axis "売上（万円）" 0 --&gt; 1000
+    bar [400, 500, 650, 720, 850, 900]
+    line [400, 500, 650, 720, 850, 900]</a:t>
+            </a:r>
+          </a:p>
+        </p:txBody>
+      </p:sp>
+    </p:spTree>
+  </p:cSld>
+  <p:clrMapOvr>
+    <a:masterClrMapping/>
+  </p:clrMapOvr>
+</p:sld>
+</file>
+
+<file path=ppt/slides/slide29.xml><?xml version="1.0" encoding="utf-8"?>
+<p:sld xmlns:a="http://schemas.openxmlformats.org/drawingml/2006/main" xmlns:p="http://schemas.openxmlformats.org/presentationml/2006/main" xmlns:r="http://schemas.openxmlformats.org/officeDocument/2006/relationships">
+  <p:cSld>
+    <p:spTree>
+      <p:nvGrpSpPr>
+        <p:cNvPr id="1" name=""/>
+        <p:cNvGrpSpPr/>
+        <p:nvPr/>
+      </p:nvGrpSpPr>
+      <p:grpSpPr/>
+      <p:sp>
+        <p:nvSpPr>
+          <p:cNvPr id="2" name="Title 1"/>
+          <p:cNvSpPr>
+            <a:spLocks noGrp="1"/>
+          </p:cNvSpPr>
+          <p:nvPr>
+            <p:ph type="title"/>
+          </p:nvPr>
+        </p:nvSpPr>
+        <p:spPr/>
+        <p:txBody>
+          <a:bodyPr/>
+          <a:lstStyle/>
+          <a:p>
+            <a:r>
+              <a:t>17. ブロック図（Block Diagram）</a:t>
+            </a:r>
+          </a:p>
+        </p:txBody>
+      </p:sp>
+      <p:sp>
+        <p:nvSpPr>
+          <p:cNvPr id="3" name="Content Placeholder 2"/>
+          <p:cNvSpPr>
+            <a:spLocks noGrp="1"/>
+          </p:cNvSpPr>
+          <p:nvPr>
+            <p:ph idx="1"/>
+          </p:nvPr>
+        </p:nvSpPr>
+        <p:spPr/>
+        <p:txBody>
+          <a:bodyPr/>
+          <a:lstStyle/>
+          <a:p/>
+        </p:txBody>
+      </p:sp>
+      <p:sp>
+        <p:nvSpPr>
+          <p:cNvPr id="4" name="TextBox 3"/>
+          <p:cNvSpPr txBox="1"/>
+          <p:nvPr/>
+        </p:nvSpPr>
+        <p:spPr>
+          <a:xfrm>
+            <a:off x="457200" y="1600200"/>
+            <a:ext cx="8229600" cy="4525963"/>
+          </a:xfrm>
+          <a:prstGeom prst="rect">
+            <a:avLst/>
+          </a:prstGeom>
+          <a:noFill/>
+        </p:spPr>
+        <p:txBody>
+          <a:bodyPr wrap="square">
+            <a:spAutoFit/>
+          </a:bodyPr>
+          <a:lstStyle/>
+          <a:p>
+            <a:r>
+              <a:rPr sz="1000">
+                <a:latin typeface="Courier New"/>
+              </a:rPr>
+              <a:t>block-beta
+    columns 3
+    A["フロントエンド"]:1
+    B["APIゲートウェイ"]:1
+    C["バックエンド"]:1
+    D["認証サービス"]:1
+    E["データベース"]:1
+    F["キャッシュ"]:1
+    A --&gt; B
+    B --&gt; C
+    B --&gt; D
+    C --&gt; E
+    C --&gt; F</a:t>
+            </a:r>
+          </a:p>
+        </p:txBody>
+      </p:sp>
+    </p:spTree>
+  </p:cSld>
+  <p:clrMapOvr>
+    <a:masterClrMapping/>
+  </p:clrMapOvr>
+</p:sld>
+</file>
+
+<file path=ppt/slides/slide3.xml><?xml version="1.0" encoding="utf-8"?>
+<p:sld xmlns:a="http://schemas.openxmlformats.org/drawingml/2006/main" xmlns:p="http://schemas.openxmlformats.org/presentationml/2006/main" xmlns:r="http://schemas.openxmlformats.org/officeDocument/2006/relationships">
+  <p:cSld>
+    <p:spTree>
+      <p:nvGrpSpPr>
+        <p:cNvPr id="1" name=""/>
+        <p:cNvGrpSpPr/>
+        <p:nvPr/>
+      </p:nvGrpSpPr>
+      <p:grpSpPr/>
+      <p:sp>
+        <p:nvSpPr>
+          <p:cNvPr id="2" name="Title 1"/>
+          <p:cNvSpPr>
+            <a:spLocks noGrp="1"/>
+          </p:cNvSpPr>
+          <p:nvPr>
+            <p:ph type="title"/>
+          </p:nvPr>
+        </p:nvSpPr>
+        <p:spPr/>
+        <p:txBody>
+          <a:bodyPr/>
+          <a:lstStyle/>
+          <a:p>
+            <a:r>
+              <a:t>段落テスト</a:t>
+            </a:r>
+          </a:p>
+        </p:txBody>
+      </p:sp>
+      <p:sp>
+        <p:nvSpPr>
+          <p:cNvPr id="3" name="Content Placeholder 2"/>
+          <p:cNvSpPr>
+            <a:spLocks noGrp="1"/>
+          </p:cNvSpPr>
+          <p:nvPr>
+            <p:ph idx="1"/>
+          </p:nvPr>
+        </p:nvSpPr>
+        <p:spPr/>
+        <p:txBody>
+          <a:bodyPr wrap="square"/>
+          <a:lstStyle/>
+          <a:p>
+            <a:r>
+              <a:rPr sz="1800"/>
+              <a:t>複数の段落を含むスライドも正しく処理されます。</a:t>
+            </a:r>
+          </a:p>
+        </p:txBody>
+      </p:sp>
+    </p:spTree>
+  </p:cSld>
+  <p:clrMapOvr>
+    <a:masterClrMapping/>
+  </p:clrMapOvr>
+</p:sld>
+</file>
+
+<file path=ppt/slides/slide30.xml><?xml version="1.0" encoding="utf-8"?>
+<p:sld xmlns:a="http://schemas.openxmlformats.org/drawingml/2006/main" xmlns:p="http://schemas.openxmlformats.org/presentationml/2006/main" xmlns:r="http://schemas.openxmlformats.org/officeDocument/2006/relationships">
+  <p:cSld>
+    <p:spTree>
+      <p:nvGrpSpPr>
+        <p:cNvPr id="1" name=""/>
+        <p:cNvGrpSpPr/>
+        <p:nvPr/>
+      </p:nvGrpSpPr>
+      <p:grpSpPr/>
+      <p:sp>
+        <p:nvSpPr>
+          <p:cNvPr id="2" name="Title 1"/>
+          <p:cNvSpPr>
+            <a:spLocks noGrp="1"/>
+          </p:cNvSpPr>
+          <p:nvPr>
+            <p:ph type="title"/>
+          </p:nvPr>
+        </p:nvSpPr>
+        <p:spPr/>
+        <p:txBody>
+          <a:bodyPr/>
+          <a:lstStyle/>
+          <a:p>
+            <a:r>
+              <a:t>18. パケット図（Packet Diagram）</a:t>
+            </a:r>
+          </a:p>
+        </p:txBody>
+      </p:sp>
+      <p:sp>
+        <p:nvSpPr>
+          <p:cNvPr id="3" name="Content Placeholder 2"/>
+          <p:cNvSpPr>
+            <a:spLocks noGrp="1"/>
+          </p:cNvSpPr>
+          <p:nvPr>
+            <p:ph idx="1"/>
+          </p:nvPr>
+        </p:nvSpPr>
+        <p:spPr/>
+        <p:txBody>
+          <a:bodyPr/>
+          <a:lstStyle/>
+          <a:p/>
+        </p:txBody>
+      </p:sp>
+      <p:sp>
+        <p:nvSpPr>
+          <p:cNvPr id="4" name="TextBox 3"/>
+          <p:cNvSpPr txBox="1"/>
+          <p:nvPr/>
+        </p:nvSpPr>
+        <p:spPr>
+          <a:xfrm>
+            <a:off x="457200" y="1600200"/>
+            <a:ext cx="8229600" cy="4525963"/>
+          </a:xfrm>
+          <a:prstGeom prst="rect">
+            <a:avLst/>
+          </a:prstGeom>
+          <a:noFill/>
+        </p:spPr>
+        <p:txBody>
+          <a:bodyPr wrap="square">
+            <a:spAutoFit/>
+          </a:bodyPr>
+          <a:lstStyle/>
+          <a:p>
+            <a:r>
+              <a:rPr sz="1000">
+                <a:latin typeface="Courier New"/>
+              </a:rPr>
+              <a:t>packet-beta
+    title TCP パケット構造
+    0-15: "送信元ポート"
+    16-31: "宛先ポート"
+    32-63: "シーケンス番号"
+    64-95: "確認応答番号"
+    96-99: "データオフセット"
+    100-105: "予約"
+    106-111: "フラグ"
+    112-127: "ウィンドウサイズ"</a:t>
+            </a:r>
+          </a:p>
+        </p:txBody>
+      </p:sp>
+    </p:spTree>
+  </p:cSld>
+  <p:clrMapOvr>
+    <a:masterClrMapping/>
+  </p:clrMapOvr>
+</p:sld>
+</file>
+
+<file path=ppt/slides/slide31.xml><?xml version="1.0" encoding="utf-8"?>
+<p:sld xmlns:a="http://schemas.openxmlformats.org/drawingml/2006/main" xmlns:p="http://schemas.openxmlformats.org/presentationml/2006/main" xmlns:r="http://schemas.openxmlformats.org/officeDocument/2006/relationships">
+  <p:cSld>
+    <p:spTree>
+      <p:nvGrpSpPr>
+        <p:cNvPr id="1" name=""/>
+        <p:cNvGrpSpPr/>
+        <p:nvPr/>
+      </p:nvGrpSpPr>
+      <p:grpSpPr/>
+      <p:sp>
+        <p:nvSpPr>
+          <p:cNvPr id="2" name="Title 1"/>
+          <p:cNvSpPr>
+            <a:spLocks noGrp="1"/>
+          </p:cNvSpPr>
+          <p:nvPr>
+            <p:ph type="title"/>
+          </p:nvPr>
+        </p:nvSpPr>
+        <p:spPr/>
+        <p:txBody>
+          <a:bodyPr/>
+          <a:lstStyle/>
+          <a:p>
+            <a:r>
+              <a:t>19. カンバン（Kanban）</a:t>
+            </a:r>
+          </a:p>
+        </p:txBody>
+      </p:sp>
+      <p:sp>
+        <p:nvSpPr>
+          <p:cNvPr id="3" name="Content Placeholder 2"/>
+          <p:cNvSpPr>
+            <a:spLocks noGrp="1"/>
+          </p:cNvSpPr>
+          <p:nvPr>
+            <p:ph idx="1"/>
+          </p:nvPr>
+        </p:nvSpPr>
+        <p:spPr/>
+        <p:txBody>
+          <a:bodyPr/>
+          <a:lstStyle/>
+          <a:p/>
+        </p:txBody>
+      </p:sp>
+      <p:sp>
+        <p:nvSpPr>
+          <p:cNvPr id="4" name="TextBox 3"/>
+          <p:cNvSpPr txBox="1"/>
+          <p:nvPr/>
+        </p:nvSpPr>
+        <p:spPr>
+          <a:xfrm>
+            <a:off x="457200" y="1600200"/>
+            <a:ext cx="8229600" cy="4525963"/>
+          </a:xfrm>
+          <a:prstGeom prst="rect">
+            <a:avLst/>
+          </a:prstGeom>
+          <a:noFill/>
+        </p:spPr>
+        <p:txBody>
+          <a:bodyPr wrap="square">
+            <a:spAutoFit/>
+          </a:bodyPr>
+          <a:lstStyle/>
+          <a:p>
+            <a:r>
+              <a:rPr sz="1000">
+                <a:latin typeface="Courier New"/>
+              </a:rPr>
+              <a:t>kanban
+    todo["To Do"]
+        task1["要件定義"]
+        task2["DB設計"]
+    inprogress["In Progress"]
+        task3["API実装"]
+        task4["テスト作成"]
+    done["Done"]
+        task5["環境構築"]
+        task6["仕様策定"]</a:t>
+            </a:r>
+          </a:p>
+        </p:txBody>
+      </p:sp>
+    </p:spTree>
+  </p:cSld>
+  <p:clrMapOvr>
+    <a:masterClrMapping/>
+  </p:clrMapOvr>
+</p:sld>
+</file>
+
+<file path=ppt/slides/slide32.xml><?xml version="1.0" encoding="utf-8"?>
+<p:sld xmlns:a="http://schemas.openxmlformats.org/drawingml/2006/main" xmlns:p="http://schemas.openxmlformats.org/presentationml/2006/main" xmlns:r="http://schemas.openxmlformats.org/officeDocument/2006/relationships">
+  <p:cSld>
+    <p:spTree>
+      <p:nvGrpSpPr>
+        <p:cNvPr id="1" name=""/>
+        <p:cNvGrpSpPr/>
+        <p:nvPr/>
+      </p:nvGrpSpPr>
+      <p:grpSpPr/>
+      <p:sp>
+        <p:nvSpPr>
+          <p:cNvPr id="2" name="Title 1"/>
+          <p:cNvSpPr>
+            <a:spLocks noGrp="1"/>
+          </p:cNvSpPr>
+          <p:nvPr>
+            <p:ph type="title"/>
+          </p:nvPr>
+        </p:nvSpPr>
+        <p:spPr/>
+        <p:txBody>
+          <a:bodyPr/>
+          <a:lstStyle/>
+          <a:p>
+            <a:r>
+              <a:t>20. アーキテクチャ図（Architecture Diagram）</a:t>
+            </a:r>
+          </a:p>
+        </p:txBody>
+      </p:sp>
+      <p:sp>
+        <p:nvSpPr>
+          <p:cNvPr id="3" name="Content Placeholder 2"/>
+          <p:cNvSpPr>
+            <a:spLocks noGrp="1"/>
+          </p:cNvSpPr>
+          <p:nvPr>
+            <p:ph idx="1"/>
+          </p:nvPr>
+        </p:nvSpPr>
+        <p:spPr/>
+        <p:txBody>
+          <a:bodyPr/>
+          <a:lstStyle/>
+          <a:p/>
+        </p:txBody>
+      </p:sp>
+      <p:sp>
+        <p:nvSpPr>
+          <p:cNvPr id="4" name="TextBox 3"/>
+          <p:cNvSpPr txBox="1"/>
+          <p:nvPr/>
+        </p:nvSpPr>
+        <p:spPr>
+          <a:xfrm>
+            <a:off x="457200" y="1600200"/>
+            <a:ext cx="8229600" cy="4525963"/>
+          </a:xfrm>
+          <a:prstGeom prst="rect">
+            <a:avLst/>
+          </a:prstGeom>
+          <a:noFill/>
+        </p:spPr>
+        <p:txBody>
+          <a:bodyPr wrap="square">
+            <a:spAutoFit/>
+          </a:bodyPr>
+          <a:lstStyle/>
+          <a:p>
+            <a:r>
+              <a:rPr sz="1000">
+                <a:latin typeface="Courier New"/>
+              </a:rPr>
+              <a:t>architecture-beta
+    group cloud(cloud)[クラウド]
+    service web(internet)[Webサーバー] in cloud
+    service api(server)[APIサーバー] in cloud
+    service db(database)[データベース] in cloud
+    service cache(disk)[キャッシュ] in cloud
+    web:R --&gt; L:api
+    api:R --&gt; L:db
+    api:B --&gt; T:cache</a:t>
+            </a:r>
+          </a:p>
+        </p:txBody>
+      </p:sp>
+    </p:spTree>
+  </p:cSld>
+  <p:clrMapOvr>
+    <a:masterClrMapping/>
+  </p:clrMapOvr>
+</p:sld>
+</file>
+
+<file path=ppt/slides/slide33.xml><?xml version="1.0" encoding="utf-8"?>
+<p:sld xmlns:a="http://schemas.openxmlformats.org/drawingml/2006/main" xmlns:p="http://schemas.openxmlformats.org/presentationml/2006/main" xmlns:r="http://schemas.openxmlformats.org/officeDocument/2006/relationships">
+  <p:cSld>
+    <p:spTree>
+      <p:nvGrpSpPr>
+        <p:cNvPr id="1" name=""/>
+        <p:cNvGrpSpPr/>
+        <p:nvPr/>
+      </p:nvGrpSpPr>
+      <p:grpSpPr/>
+      <p:sp>
+        <p:nvSpPr>
+          <p:cNvPr id="2" name="Title 1"/>
+          <p:cNvSpPr>
+            <a:spLocks noGrp="1"/>
+          </p:cNvSpPr>
+          <p:nvPr>
+            <p:ph type="title"/>
+          </p:nvPr>
+        </p:nvSpPr>
+        <p:spPr/>
+        <p:txBody>
+          <a:bodyPr/>
+          <a:lstStyle/>
+          <a:p>
+            <a:r>
+              <a:t>21. C4図（C4 Diagram）</a:t>
+            </a:r>
+          </a:p>
+        </p:txBody>
+      </p:sp>
+      <p:sp>
+        <p:nvSpPr>
+          <p:cNvPr id="3" name="Content Placeholder 2"/>
+          <p:cNvSpPr>
+            <a:spLocks noGrp="1"/>
+          </p:cNvSpPr>
+          <p:nvPr>
+            <p:ph idx="1"/>
+          </p:nvPr>
+        </p:nvSpPr>
+        <p:spPr/>
+        <p:txBody>
+          <a:bodyPr/>
+          <a:lstStyle/>
+          <a:p/>
+        </p:txBody>
+      </p:sp>
+      <p:sp>
+        <p:nvSpPr>
+          <p:cNvPr id="4" name="TextBox 3"/>
+          <p:cNvSpPr txBox="1"/>
+          <p:nvPr/>
+        </p:nvSpPr>
+        <p:spPr>
+          <a:xfrm>
+            <a:off x="457200" y="1600200"/>
+            <a:ext cx="8229600" cy="4525963"/>
+          </a:xfrm>
+          <a:prstGeom prst="rect">
+            <a:avLst/>
+          </a:prstGeom>
+          <a:noFill/>
+        </p:spPr>
+        <p:txBody>
+          <a:bodyPr wrap="square">
+            <a:spAutoFit/>
+          </a:bodyPr>
+          <a:lstStyle/>
+          <a:p>
+            <a:r>
+              <a:rPr sz="1000">
+                <a:latin typeface="Courier New"/>
+              </a:rPr>
+              <a:t>C4Context
+    title システムコンテキスト図
+    Person(user, "ユーザー", "アプリケーションを利用する人")
+    System(app, "Webアプリ", "主要なシステム")
+    System_Ext(email, "メールサービス", "通知送信")
+    System_Ext(payment, "決済サービス", "支払い処理")
+    Rel(user, app, "利用する", "HTTPS")
+    Rel(app, email, "送信する", "SMTP")
+    Rel(app, payment, "呼び出す", "API")</a:t>
+            </a:r>
+          </a:p>
+        </p:txBody>
+      </p:sp>
+    </p:spTree>
+  </p:cSld>
+  <p:clrMapOvr>
+    <a:masterClrMapping/>
+  </p:clrMapOvr>
+</p:sld>
+</file>
+
+<file path=ppt/slides/slide34.xml><?xml version="1.0" encoding="utf-8"?>
+<p:sld xmlns:a="http://schemas.openxmlformats.org/drawingml/2006/main" xmlns:p="http://schemas.openxmlformats.org/presentationml/2006/main" xmlns:r="http://schemas.openxmlformats.org/officeDocument/2006/relationships">
+  <p:cSld>
+    <p:spTree>
+      <p:nvGrpSpPr>
+        <p:cNvPr id="1" name=""/>
+        <p:cNvGrpSpPr/>
+        <p:nvPr/>
+      </p:nvGrpSpPr>
+      <p:grpSpPr/>
+      <p:sp>
+        <p:nvSpPr>
+          <p:cNvPr id="2" name="Title 1"/>
+          <p:cNvSpPr>
+            <a:spLocks noGrp="1"/>
+          </p:cNvSpPr>
+          <p:nvPr>
+            <p:ph type="title"/>
+          </p:nvPr>
+        </p:nvSpPr>
+        <p:spPr/>
+        <p:txBody>
+          <a:bodyPr/>
+          <a:lstStyle/>
+          <a:p>
+            <a:r>
+              <a:t>22. Quartoネイティブ記法</a:t>
             </a:r>
           </a:p>
         </p:txBody>
@@ -5214,7 +6969,7 @@
 </p:sld>
 </file>
 
-<file path=ppt/slides/slide16.xml><?xml version="1.0" encoding="utf-8"?>
+<file path=ppt/slides/slide35.xml><?xml version="1.0" encoding="utf-8"?>
 <p:sld xmlns:a="http://schemas.openxmlformats.org/drawingml/2006/main" xmlns:p="http://schemas.openxmlformats.org/presentationml/2006/main" xmlns:r="http://schemas.openxmlformats.org/officeDocument/2006/relationships">
   <p:cSld>
     <p:spTree>
@@ -5279,7 +7034,7 @@
 </p:sld>
 </file>
 
-<file path=ppt/slides/slide17.xml><?xml version="1.0" encoding="utf-8"?>
+<file path=ppt/slides/slide36.xml><?xml version="1.0" encoding="utf-8"?>
 <p:sld xmlns:a="http://schemas.openxmlformats.org/drawingml/2006/main" xmlns:p="http://schemas.openxmlformats.org/presentationml/2006/main" xmlns:r="http://schemas.openxmlformats.org/officeDocument/2006/relationships">
   <p:cSld>
     <p:spTree>
@@ -5335,7 +7090,7 @@
 </p:sld>
 </file>
 
-<file path=ppt/slides/slide18.xml><?xml version="1.0" encoding="utf-8"?>
+<file path=ppt/slides/slide37.xml><?xml version="1.0" encoding="utf-8"?>
 <p:sld xmlns:a="http://schemas.openxmlformats.org/drawingml/2006/main" xmlns:p="http://schemas.openxmlformats.org/presentationml/2006/main" xmlns:r="http://schemas.openxmlformats.org/officeDocument/2006/relationships">
   <p:cSld>
     <p:spTree>
@@ -5411,7 +7166,7 @@
 </p:sld>
 </file>
 
-<file path=ppt/slides/slide19.xml><?xml version="1.0" encoding="utf-8"?>
+<file path=ppt/slides/slide38.xml><?xml version="1.0" encoding="utf-8"?>
 <p:sld xmlns:a="http://schemas.openxmlformats.org/drawingml/2006/main" xmlns:p="http://schemas.openxmlformats.org/presentationml/2006/main" xmlns:r="http://schemas.openxmlformats.org/officeDocument/2006/relationships">
   <p:cSld>
     <p:spTree>
@@ -5487,7 +7242,7 @@
 </p:sld>
 </file>
 
-<file path=ppt/slides/slide2.xml><?xml version="1.0" encoding="utf-8"?>
+<file path=ppt/slides/slide39.xml><?xml version="1.0" encoding="utf-8"?>
 <p:sld xmlns:a="http://schemas.openxmlformats.org/drawingml/2006/main" xmlns:p="http://schemas.openxmlformats.org/presentationml/2006/main" xmlns:r="http://schemas.openxmlformats.org/officeDocument/2006/relationships">
   <p:cSld>
     <p:spTree>
@@ -5513,62 +7268,6 @@
           <a:lstStyle/>
           <a:p>
             <a:r>
-              <a:t>テキスト系機能</a:t>
-            </a:r>
-          </a:p>
-        </p:txBody>
-      </p:sp>
-      <p:sp>
-        <p:nvSpPr>
-          <p:cNvPr id="3" name="Text Placeholder 2"/>
-          <p:cNvSpPr>
-            <a:spLocks noGrp="1"/>
-          </p:cNvSpPr>
-          <p:nvPr>
-            <p:ph type="body" idx="1"/>
-          </p:nvPr>
-        </p:nvSpPr>
-        <p:spPr/>
-        <p:txBody>
-          <a:bodyPr/>
-          <a:lstStyle/>
-          <a:p/>
-        </p:txBody>
-      </p:sp>
-    </p:spTree>
-  </p:cSld>
-  <p:clrMapOvr>
-    <a:masterClrMapping/>
-  </p:clrMapOvr>
-</p:sld>
-</file>
-
-<file path=ppt/slides/slide20.xml><?xml version="1.0" encoding="utf-8"?>
-<p:sld xmlns:a="http://schemas.openxmlformats.org/drawingml/2006/main" xmlns:p="http://schemas.openxmlformats.org/presentationml/2006/main" xmlns:r="http://schemas.openxmlformats.org/officeDocument/2006/relationships">
-  <p:cSld>
-    <p:spTree>
-      <p:nvGrpSpPr>
-        <p:cNvPr id="1" name=""/>
-        <p:cNvGrpSpPr/>
-        <p:nvPr/>
-      </p:nvGrpSpPr>
-      <p:grpSpPr/>
-      <p:sp>
-        <p:nvSpPr>
-          <p:cNvPr id="2" name="Title 1"/>
-          <p:cNvSpPr>
-            <a:spLocks noGrp="1"/>
-          </p:cNvSpPr>
-          <p:nvPr>
-            <p:ph type="title"/>
-          </p:nvPr>
-        </p:nvSpPr>
-        <p:spPr/>
-        <p:txBody>
-          <a:bodyPr/>
-          <a:lstStyle/>
-          <a:p>
-            <a:r>
               <a:t>2カラムレイアウト</a:t>
             </a:r>
           </a:p>
@@ -5644,345 +7343,6 @@
             <a:r>
               <a:rPr sz="1800"/>
               <a:t>右の項目3</a:t>
-            </a:r>
-          </a:p>
-        </p:txBody>
-      </p:sp>
-    </p:spTree>
-  </p:cSld>
-  <p:clrMapOvr>
-    <a:masterClrMapping/>
-  </p:clrMapOvr>
-</p:sld>
-</file>
-
-<file path=ppt/slides/slide21.xml><?xml version="1.0" encoding="utf-8"?>
-<p:sld xmlns:a="http://schemas.openxmlformats.org/drawingml/2006/main" xmlns:p="http://schemas.openxmlformats.org/presentationml/2006/main" xmlns:r="http://schemas.openxmlformats.org/officeDocument/2006/relationships">
-  <p:cSld>
-    <p:spTree>
-      <p:nvGrpSpPr>
-        <p:cNvPr id="1" name=""/>
-        <p:cNvGrpSpPr/>
-        <p:nvPr/>
-      </p:nvGrpSpPr>
-      <p:grpSpPr/>
-      <p:sp>
-        <p:nvSpPr>
-          <p:cNvPr id="2" name="Title 1"/>
-          <p:cNvSpPr>
-            <a:spLocks noGrp="1"/>
-          </p:cNvSpPr>
-          <p:nvPr>
-            <p:ph type="title"/>
-          </p:nvPr>
-        </p:nvSpPr>
-        <p:spPr/>
-        <p:txBody>
-          <a:bodyPr/>
-          <a:lstStyle/>
-          <a:p>
-            <a:r>
-              <a:t>スピーカーノート付きスライド</a:t>
-            </a:r>
-          </a:p>
-        </p:txBody>
-      </p:sp>
-      <p:sp>
-        <p:nvSpPr>
-          <p:cNvPr id="3" name="Content Placeholder 2"/>
-          <p:cNvSpPr>
-            <a:spLocks noGrp="1"/>
-          </p:cNvSpPr>
-          <p:nvPr>
-            <p:ph idx="1"/>
-          </p:nvPr>
-        </p:nvSpPr>
-        <p:spPr/>
-        <p:txBody>
-          <a:bodyPr wrap="square"/>
-          <a:lstStyle/>
-          <a:p>
-            <a:r>
-              <a:rPr sz="1800"/>
-              <a:t>このスライドには発表者向けのノートが埋め込まれています。</a:t>
-            </a:r>
-          </a:p>
-        </p:txBody>
-      </p:sp>
-    </p:spTree>
-  </p:cSld>
-  <p:clrMapOvr>
-    <a:masterClrMapping/>
-  </p:clrMapOvr>
-</p:sld>
-</file>
-
-<file path=ppt/slides/slide22.xml><?xml version="1.0" encoding="utf-8"?>
-<p:sld xmlns:a="http://schemas.openxmlformats.org/drawingml/2006/main" xmlns:p="http://schemas.openxmlformats.org/presentationml/2006/main" xmlns:r="http://schemas.openxmlformats.org/officeDocument/2006/relationships">
-  <p:cSld>
-    <p:spTree>
-      <p:nvGrpSpPr>
-        <p:cNvPr id="1" name=""/>
-        <p:cNvGrpSpPr/>
-        <p:nvPr/>
-      </p:nvGrpSpPr>
-      <p:grpSpPr/>
-      <p:sp>
-        <p:nvSpPr>
-          <p:cNvPr id="2" name="Title 1"/>
-          <p:cNvSpPr>
-            <a:spLocks noGrp="1"/>
-          </p:cNvSpPr>
-          <p:nvPr>
-            <p:ph type="title"/>
-          </p:nvPr>
-        </p:nvSpPr>
-        <p:spPr/>
-        <p:txBody>
-          <a:bodyPr/>
-          <a:lstStyle/>
-          <a:p/>
-        </p:txBody>
-      </p:sp>
-      <p:sp>
-        <p:nvSpPr>
-          <p:cNvPr id="3" name="Content Placeholder 2"/>
-          <p:cNvSpPr>
-            <a:spLocks noGrp="1"/>
-          </p:cNvSpPr>
-          <p:nvPr>
-            <p:ph idx="1"/>
-          </p:nvPr>
-        </p:nvSpPr>
-        <p:spPr/>
-        <p:txBody>
-          <a:bodyPr wrap="square"/>
-          <a:lstStyle/>
-          <a:p>
-            <a:r>
-              <a:rPr sz="1800"/>
-              <a:t>水平区切り線（---）によって生成されたタイトルなしスライドです。</a:t>
-            </a:r>
-          </a:p>
-        </p:txBody>
-      </p:sp>
-    </p:spTree>
-  </p:cSld>
-  <p:clrMapOvr>
-    <a:masterClrMapping/>
-  </p:clrMapOvr>
-</p:sld>
-</file>
-
-<file path=ppt/slides/slide23.xml><?xml version="1.0" encoding="utf-8"?>
-<p:sld xmlns:a="http://schemas.openxmlformats.org/drawingml/2006/main" xmlns:p="http://schemas.openxmlformats.org/presentationml/2006/main" xmlns:r="http://schemas.openxmlformats.org/officeDocument/2006/relationships">
-  <p:cSld>
-    <p:spTree>
-      <p:nvGrpSpPr>
-        <p:cNvPr id="1" name=""/>
-        <p:cNvGrpSpPr/>
-        <p:nvPr/>
-      </p:nvGrpSpPr>
-      <p:grpSpPr/>
-      <p:sp>
-        <p:nvSpPr>
-          <p:cNvPr id="2" name="Title 1"/>
-          <p:cNvSpPr>
-            <a:spLocks noGrp="1"/>
-          </p:cNvSpPr>
-          <p:nvPr>
-            <p:ph type="title"/>
-          </p:nvPr>
-        </p:nvSpPr>
-        <p:spPr/>
-        <p:txBody>
-          <a:bodyPr/>
-          <a:lstStyle/>
-          <a:p>
-            <a:r>
-              <a:t>まとめ</a:t>
-            </a:r>
-          </a:p>
-        </p:txBody>
-      </p:sp>
-      <p:sp>
-        <p:nvSpPr>
-          <p:cNvPr id="3" name="Text Placeholder 2"/>
-          <p:cNvSpPr>
-            <a:spLocks noGrp="1"/>
-          </p:cNvSpPr>
-          <p:nvPr>
-            <p:ph type="body" idx="1"/>
-          </p:nvPr>
-        </p:nvSpPr>
-        <p:spPr/>
-        <p:txBody>
-          <a:bodyPr/>
-          <a:lstStyle/>
-          <a:p/>
-        </p:txBody>
-      </p:sp>
-    </p:spTree>
-  </p:cSld>
-  <p:clrMapOvr>
-    <a:masterClrMapping/>
-  </p:clrMapOvr>
-</p:sld>
-</file>
-
-<file path=ppt/slides/slide24.xml><?xml version="1.0" encoding="utf-8"?>
-<p:sld xmlns:a="http://schemas.openxmlformats.org/drawingml/2006/main" xmlns:p="http://schemas.openxmlformats.org/presentationml/2006/main" xmlns:r="http://schemas.openxmlformats.org/officeDocument/2006/relationships">
-  <p:cSld>
-    <p:spTree>
-      <p:nvGrpSpPr>
-        <p:cNvPr id="1" name=""/>
-        <p:cNvGrpSpPr/>
-        <p:nvPr/>
-      </p:nvGrpSpPr>
-      <p:grpSpPr/>
-      <p:sp>
-        <p:nvSpPr>
-          <p:cNvPr id="2" name="Title 1"/>
-          <p:cNvSpPr>
-            <a:spLocks noGrp="1"/>
-          </p:cNvSpPr>
-          <p:nvPr>
-            <p:ph type="title"/>
-          </p:nvPr>
-        </p:nvSpPr>
-        <p:spPr/>
-        <p:txBody>
-          <a:bodyPr/>
-          <a:lstStyle/>
-          <a:p>
-            <a:r>
-              <a:t>全機能確認完了</a:t>
-            </a:r>
-          </a:p>
-        </p:txBody>
-      </p:sp>
-      <p:sp>
-        <p:nvSpPr>
-          <p:cNvPr id="3" name="Content Placeholder 2"/>
-          <p:cNvSpPr>
-            <a:spLocks noGrp="1"/>
-          </p:cNvSpPr>
-          <p:nvPr>
-            <p:ph idx="1"/>
-          </p:nvPr>
-        </p:nvSpPr>
-        <p:spPr/>
-        <p:txBody>
-          <a:bodyPr wrap="square"/>
-          <a:lstStyle/>
-          <a:p>
-            <a:pPr/>
-            <a:r>
-              <a:rPr sz="1800"/>
-              <a:t>テキスト（段落・リスト・テーブル・コード）</a:t>
-            </a:r>
-          </a:p>
-          <a:p>
-            <a:pPr/>
-            <a:r>
-              <a:rPr sz="1800"/>
-              <a:t>数式（インライン・ブロック）</a:t>
-            </a:r>
-          </a:p>
-          <a:p>
-            <a:pPr/>
-            <a:r>
-              <a:rPr sz="1800"/>
-              <a:t>Mermaid図（標準・Quartoネイティブ記法）</a:t>
-            </a:r>
-          </a:p>
-          <a:p>
-            <a:pPr/>
-            <a:r>
-              <a:rPr sz="1800"/>
-              <a:t>アニメーション（インクリメンタル・非インクリメンタル）</a:t>
-            </a:r>
-          </a:p>
-          <a:p>
-            <a:pPr/>
-            <a:r>
-              <a:rPr sz="1800"/>
-              <a:t>2カラムレイアウト</a:t>
-            </a:r>
-          </a:p>
-          <a:p>
-            <a:pPr/>
-            <a:r>
-              <a:rPr sz="1800"/>
-              <a:t>スピーカーノート</a:t>
-            </a:r>
-          </a:p>
-          <a:p>
-            <a:pPr/>
-            <a:r>
-              <a:rPr sz="1800"/>
-              <a:t>Blank スライド（水平区切り線）</a:t>
-            </a:r>
-          </a:p>
-        </p:txBody>
-      </p:sp>
-    </p:spTree>
-  </p:cSld>
-  <p:clrMapOvr>
-    <a:masterClrMapping/>
-  </p:clrMapOvr>
-</p:sld>
-</file>
-
-<file path=ppt/slides/slide3.xml><?xml version="1.0" encoding="utf-8"?>
-<p:sld xmlns:a="http://schemas.openxmlformats.org/drawingml/2006/main" xmlns:p="http://schemas.openxmlformats.org/presentationml/2006/main" xmlns:r="http://schemas.openxmlformats.org/officeDocument/2006/relationships">
-  <p:cSld>
-    <p:spTree>
-      <p:nvGrpSpPr>
-        <p:cNvPr id="1" name=""/>
-        <p:cNvGrpSpPr/>
-        <p:nvPr/>
-      </p:nvGrpSpPr>
-      <p:grpSpPr/>
-      <p:sp>
-        <p:nvSpPr>
-          <p:cNvPr id="2" name="Title 1"/>
-          <p:cNvSpPr>
-            <a:spLocks noGrp="1"/>
-          </p:cNvSpPr>
-          <p:nvPr>
-            <p:ph type="title"/>
-          </p:nvPr>
-        </p:nvSpPr>
-        <p:spPr/>
-        <p:txBody>
-          <a:bodyPr/>
-          <a:lstStyle/>
-          <a:p>
-            <a:r>
-              <a:t>段落テスト</a:t>
-            </a:r>
-          </a:p>
-        </p:txBody>
-      </p:sp>
-      <p:sp>
-        <p:nvSpPr>
-          <p:cNvPr id="3" name="Content Placeholder 2"/>
-          <p:cNvSpPr>
-            <a:spLocks noGrp="1"/>
-          </p:cNvSpPr>
-          <p:nvPr>
-            <p:ph idx="1"/>
-          </p:nvPr>
-        </p:nvSpPr>
-        <p:spPr/>
-        <p:txBody>
-          <a:bodyPr wrap="square"/>
-          <a:lstStyle/>
-          <a:p>
-            <a:r>
-              <a:rPr sz="1800"/>
-              <a:t>複数の段落を含むスライドも正しく処理されます。</a:t>
             </a:r>
           </a:p>
         </p:txBody>
@@ -6073,6 +7433,319 @@
             <a:r>
               <a:rPr sz="1800"/>
               <a:t>第3レベル（深いネスト）</a:t>
+            </a:r>
+          </a:p>
+        </p:txBody>
+      </p:sp>
+    </p:spTree>
+  </p:cSld>
+  <p:clrMapOvr>
+    <a:masterClrMapping/>
+  </p:clrMapOvr>
+</p:sld>
+</file>
+
+<file path=ppt/slides/slide40.xml><?xml version="1.0" encoding="utf-8"?>
+<p:sld xmlns:a="http://schemas.openxmlformats.org/drawingml/2006/main" xmlns:p="http://schemas.openxmlformats.org/presentationml/2006/main" xmlns:r="http://schemas.openxmlformats.org/officeDocument/2006/relationships">
+  <p:cSld>
+    <p:spTree>
+      <p:nvGrpSpPr>
+        <p:cNvPr id="1" name=""/>
+        <p:cNvGrpSpPr/>
+        <p:nvPr/>
+      </p:nvGrpSpPr>
+      <p:grpSpPr/>
+      <p:sp>
+        <p:nvSpPr>
+          <p:cNvPr id="2" name="Title 1"/>
+          <p:cNvSpPr>
+            <a:spLocks noGrp="1"/>
+          </p:cNvSpPr>
+          <p:nvPr>
+            <p:ph type="title"/>
+          </p:nvPr>
+        </p:nvSpPr>
+        <p:spPr/>
+        <p:txBody>
+          <a:bodyPr/>
+          <a:lstStyle/>
+          <a:p>
+            <a:r>
+              <a:t>スピーカーノート付きスライド</a:t>
+            </a:r>
+          </a:p>
+        </p:txBody>
+      </p:sp>
+      <p:sp>
+        <p:nvSpPr>
+          <p:cNvPr id="3" name="Content Placeholder 2"/>
+          <p:cNvSpPr>
+            <a:spLocks noGrp="1"/>
+          </p:cNvSpPr>
+          <p:nvPr>
+            <p:ph idx="1"/>
+          </p:nvPr>
+        </p:nvSpPr>
+        <p:spPr/>
+        <p:txBody>
+          <a:bodyPr wrap="square"/>
+          <a:lstStyle/>
+          <a:p>
+            <a:r>
+              <a:rPr sz="1800"/>
+              <a:t>このスライドには発表者向けのノートが埋め込まれています。</a:t>
+            </a:r>
+          </a:p>
+        </p:txBody>
+      </p:sp>
+    </p:spTree>
+  </p:cSld>
+  <p:clrMapOvr>
+    <a:masterClrMapping/>
+  </p:clrMapOvr>
+</p:sld>
+</file>
+
+<file path=ppt/slides/slide41.xml><?xml version="1.0" encoding="utf-8"?>
+<p:sld xmlns:a="http://schemas.openxmlformats.org/drawingml/2006/main" xmlns:p="http://schemas.openxmlformats.org/presentationml/2006/main" xmlns:r="http://schemas.openxmlformats.org/officeDocument/2006/relationships">
+  <p:cSld>
+    <p:spTree>
+      <p:nvGrpSpPr>
+        <p:cNvPr id="1" name=""/>
+        <p:cNvGrpSpPr/>
+        <p:nvPr/>
+      </p:nvGrpSpPr>
+      <p:grpSpPr/>
+      <p:sp>
+        <p:nvSpPr>
+          <p:cNvPr id="2" name="Title 1"/>
+          <p:cNvSpPr>
+            <a:spLocks noGrp="1"/>
+          </p:cNvSpPr>
+          <p:nvPr>
+            <p:ph type="title"/>
+          </p:nvPr>
+        </p:nvSpPr>
+        <p:spPr/>
+        <p:txBody>
+          <a:bodyPr/>
+          <a:lstStyle/>
+          <a:p/>
+        </p:txBody>
+      </p:sp>
+      <p:sp>
+        <p:nvSpPr>
+          <p:cNvPr id="3" name="Content Placeholder 2"/>
+          <p:cNvSpPr>
+            <a:spLocks noGrp="1"/>
+          </p:cNvSpPr>
+          <p:nvPr>
+            <p:ph idx="1"/>
+          </p:nvPr>
+        </p:nvSpPr>
+        <p:spPr/>
+        <p:txBody>
+          <a:bodyPr wrap="square"/>
+          <a:lstStyle/>
+          <a:p>
+            <a:r>
+              <a:rPr sz="1800"/>
+              <a:t>水平区切り線（---）によって生成されたタイトルなしスライドです。</a:t>
+            </a:r>
+          </a:p>
+        </p:txBody>
+      </p:sp>
+    </p:spTree>
+  </p:cSld>
+  <p:clrMapOvr>
+    <a:masterClrMapping/>
+  </p:clrMapOvr>
+</p:sld>
+</file>
+
+<file path=ppt/slides/slide42.xml><?xml version="1.0" encoding="utf-8"?>
+<p:sld xmlns:a="http://schemas.openxmlformats.org/drawingml/2006/main" xmlns:p="http://schemas.openxmlformats.org/presentationml/2006/main" xmlns:r="http://schemas.openxmlformats.org/officeDocument/2006/relationships">
+  <p:cSld>
+    <p:spTree>
+      <p:nvGrpSpPr>
+        <p:cNvPr id="1" name=""/>
+        <p:cNvGrpSpPr/>
+        <p:nvPr/>
+      </p:nvGrpSpPr>
+      <p:grpSpPr/>
+      <p:sp>
+        <p:nvSpPr>
+          <p:cNvPr id="2" name="Title 1"/>
+          <p:cNvSpPr>
+            <a:spLocks noGrp="1"/>
+          </p:cNvSpPr>
+          <p:nvPr>
+            <p:ph type="title"/>
+          </p:nvPr>
+        </p:nvSpPr>
+        <p:spPr/>
+        <p:txBody>
+          <a:bodyPr/>
+          <a:lstStyle/>
+          <a:p>
+            <a:r>
+              <a:t>まとめ</a:t>
+            </a:r>
+          </a:p>
+        </p:txBody>
+      </p:sp>
+      <p:sp>
+        <p:nvSpPr>
+          <p:cNvPr id="3" name="Text Placeholder 2"/>
+          <p:cNvSpPr>
+            <a:spLocks noGrp="1"/>
+          </p:cNvSpPr>
+          <p:nvPr>
+            <p:ph type="body" idx="1"/>
+          </p:nvPr>
+        </p:nvSpPr>
+        <p:spPr/>
+        <p:txBody>
+          <a:bodyPr/>
+          <a:lstStyle/>
+          <a:p/>
+        </p:txBody>
+      </p:sp>
+    </p:spTree>
+  </p:cSld>
+  <p:clrMapOvr>
+    <a:masterClrMapping/>
+  </p:clrMapOvr>
+</p:sld>
+</file>
+
+<file path=ppt/slides/slide43.xml><?xml version="1.0" encoding="utf-8"?>
+<p:sld xmlns:a="http://schemas.openxmlformats.org/drawingml/2006/main" xmlns:p="http://schemas.openxmlformats.org/presentationml/2006/main" xmlns:r="http://schemas.openxmlformats.org/officeDocument/2006/relationships">
+  <p:cSld>
+    <p:spTree>
+      <p:nvGrpSpPr>
+        <p:cNvPr id="1" name=""/>
+        <p:cNvGrpSpPr/>
+        <p:nvPr/>
+      </p:nvGrpSpPr>
+      <p:grpSpPr/>
+      <p:sp>
+        <p:nvSpPr>
+          <p:cNvPr id="2" name="Title 1"/>
+          <p:cNvSpPr>
+            <a:spLocks noGrp="1"/>
+          </p:cNvSpPr>
+          <p:nvPr>
+            <p:ph type="title"/>
+          </p:nvPr>
+        </p:nvSpPr>
+        <p:spPr/>
+        <p:txBody>
+          <a:bodyPr/>
+          <a:lstStyle/>
+          <a:p>
+            <a:r>
+              <a:t>全機能確認完了</a:t>
+            </a:r>
+          </a:p>
+        </p:txBody>
+      </p:sp>
+      <p:sp>
+        <p:nvSpPr>
+          <p:cNvPr id="3" name="Content Placeholder 2"/>
+          <p:cNvSpPr>
+            <a:spLocks noGrp="1"/>
+          </p:cNvSpPr>
+          <p:nvPr>
+            <p:ph idx="1"/>
+          </p:nvPr>
+        </p:nvSpPr>
+        <p:spPr/>
+        <p:txBody>
+          <a:bodyPr wrap="square"/>
+          <a:lstStyle/>
+          <a:p>
+            <a:pPr/>
+            <a:r>
+              <a:rPr sz="1800"/>
+              <a:t>テキスト（段落・リスト・テーブル・コード）</a:t>
+            </a:r>
+          </a:p>
+          <a:p>
+            <a:pPr/>
+            <a:r>
+              <a:rPr sz="1800"/>
+              <a:t>数式（インライン・ブロック）</a:t>
+            </a:r>
+          </a:p>
+          <a:p>
+            <a:pPr/>
+            <a:r>
+              <a:rPr sz="1800"/>
+              <a:t>Mermaid図（全22種類）</a:t>
+            </a:r>
+          </a:p>
+          <a:p>
+            <a:pPr/>
+            <a:r>
+              <a:rPr sz="1800"/>
+              <a:t>Flowchart / Sequence / Gantt / Class / State</a:t>
+            </a:r>
+          </a:p>
+          <a:p>
+            <a:pPr/>
+            <a:r>
+              <a:rPr sz="1800"/>
+              <a:t>ER / User Journey / Pie / Quadrant / Requirement</a:t>
+            </a:r>
+          </a:p>
+          <a:p>
+            <a:pPr/>
+            <a:r>
+              <a:rPr sz="1800"/>
+              <a:t>Git Graph / Mindmap / Timeline / ZenUML / Sankey</a:t>
+            </a:r>
+          </a:p>
+          <a:p>
+            <a:pPr/>
+            <a:r>
+              <a:rPr sz="1800"/>
+              <a:t>XY Chart / Block / Packet / Kanban / Architecture / C4</a:t>
+            </a:r>
+          </a:p>
+          <a:p>
+            <a:pPr/>
+            <a:r>
+              <a:rPr sz="1800"/>
+              <a:t>Quartoネイティブ記法</a:t>
+            </a:r>
+          </a:p>
+          <a:p>
+            <a:pPr/>
+            <a:r>
+              <a:rPr sz="1800"/>
+              <a:t>アニメーション（インクリメンタル・非インクリメンタル）</a:t>
+            </a:r>
+          </a:p>
+          <a:p>
+            <a:pPr/>
+            <a:r>
+              <a:rPr sz="1800"/>
+              <a:t>2カラムレイアウト</a:t>
+            </a:r>
+          </a:p>
+          <a:p>
+            <a:pPr/>
+            <a:r>
+              <a:rPr sz="1800"/>
+              <a:t>スピーカーノート</a:t>
+            </a:r>
+          </a:p>
+          <a:p>
+            <a:pPr/>
+            <a:r>
+              <a:rPr sz="1800"/>
+              <a:t>Blank スライド（水平区切り線）</a:t>
             </a:r>
           </a:p>
         </p:txBody>

--- a/demo_full.pptx
+++ b/demo_full.pptx
@@ -4924,50 +4924,190 @@
       </p:sp>
       <p:sp>
         <p:nvSpPr>
-          <p:cNvPr id="4" name="TextBox 3"/>
-          <p:cNvSpPr txBox="1"/>
+          <p:cNvPr id="4" name="Rectangle 3"/>
+          <p:cNvSpPr/>
           <p:nvPr/>
         </p:nvSpPr>
         <p:spPr>
           <a:xfrm>
-            <a:off x="457200" y="1600200"/>
-            <a:ext cx="8229600" cy="4525963"/>
+            <a:off x="3974176" y="3613958"/>
+            <a:ext cx="1200000" cy="500000"/>
           </a:xfrm>
           <a:prstGeom prst="rect">
             <a:avLst/>
           </a:prstGeom>
-          <a:noFill/>
-        </p:spPr>
-        <p:txBody>
-          <a:bodyPr wrap="square">
-            <a:spAutoFit/>
-          </a:bodyPr>
-          <a:lstStyle/>
-          <a:p>
-            <a:r>
-              <a:rPr sz="1000">
-                <a:latin typeface="Courier New"/>
-              </a:rPr>
-              <a:t>classDiagram
-    class Animal {
-        +String name
-        +int age
-        +makeSound() void
-    }
-    class Dog {
-        +String breed
-        +fetch() void
-    }
-    class Cat {
-        +bool indoor
-        +purr() void
-    }
-    Animal &lt;|-- Dog
-    Animal &lt;|-- Cat</a:t>
-            </a:r>
-          </a:p>
-        </p:txBody>
-      </p:sp>
+        </p:spPr>
+        <p:style>
+          <a:lnRef idx="1">
+            <a:schemeClr val="accent1"/>
+          </a:lnRef>
+          <a:fillRef idx="3">
+            <a:schemeClr val="accent1"/>
+          </a:fillRef>
+          <a:effectRef idx="2">
+            <a:schemeClr val="accent1"/>
+          </a:effectRef>
+          <a:fontRef idx="minor">
+            <a:schemeClr val="lt1"/>
+          </a:fontRef>
+        </p:style>
+        <p:txBody>
+          <a:bodyPr rtlCol="0" anchor="ctr"/>
+          <a:lstStyle/>
+          <a:p>
+            <a:r>
+              <a:rPr sz="1200"/>
+              <a:t>Animal</a:t>
+            </a:r>
+          </a:p>
+        </p:txBody>
+      </p:sp>
+      <p:sp>
+        <p:nvSpPr>
+          <p:cNvPr id="5" name="Rectangle 4"/>
+          <p:cNvSpPr/>
+          <p:nvPr/>
+        </p:nvSpPr>
+        <p:spPr>
+          <a:xfrm>
+            <a:off x="7484623" y="4874737"/>
+            <a:ext cx="1200000" cy="500000"/>
+          </a:xfrm>
+          <a:prstGeom prst="rect">
+            <a:avLst/>
+          </a:prstGeom>
+        </p:spPr>
+        <p:style>
+          <a:lnRef idx="1">
+            <a:schemeClr val="accent1"/>
+          </a:lnRef>
+          <a:fillRef idx="3">
+            <a:schemeClr val="accent1"/>
+          </a:fillRef>
+          <a:effectRef idx="2">
+            <a:schemeClr val="accent1"/>
+          </a:effectRef>
+          <a:fontRef idx="minor">
+            <a:schemeClr val="lt1"/>
+          </a:fontRef>
+        </p:style>
+        <p:txBody>
+          <a:bodyPr rtlCol="0" anchor="ctr"/>
+          <a:lstStyle/>
+          <a:p>
+            <a:r>
+              <a:rPr sz="1200"/>
+              <a:t>Dog</a:t>
+            </a:r>
+          </a:p>
+        </p:txBody>
+      </p:sp>
+      <p:sp>
+        <p:nvSpPr>
+          <p:cNvPr id="6" name="Rectangle 5"/>
+          <p:cNvSpPr/>
+          <p:nvPr/>
+        </p:nvSpPr>
+        <p:spPr>
+          <a:xfrm>
+            <a:off x="457200" y="2350848"/>
+            <a:ext cx="1200000" cy="500000"/>
+          </a:xfrm>
+          <a:prstGeom prst="rect">
+            <a:avLst/>
+          </a:prstGeom>
+        </p:spPr>
+        <p:style>
+          <a:lnRef idx="1">
+            <a:schemeClr val="accent1"/>
+          </a:lnRef>
+          <a:fillRef idx="3">
+            <a:schemeClr val="accent1"/>
+          </a:fillRef>
+          <a:effectRef idx="2">
+            <a:schemeClr val="accent1"/>
+          </a:effectRef>
+          <a:fontRef idx="minor">
+            <a:schemeClr val="lt1"/>
+          </a:fontRef>
+        </p:style>
+        <p:txBody>
+          <a:bodyPr rtlCol="0" anchor="ctr"/>
+          <a:lstStyle/>
+          <a:p>
+            <a:r>
+              <a:rPr sz="1200"/>
+              <a:t>Cat</a:t>
+            </a:r>
+          </a:p>
+        </p:txBody>
+      </p:sp>
+      <p:cxnSp>
+        <p:nvCxnSpPr>
+          <p:cNvPr id="7" name="Connector 6"/>
+          <p:cNvCxnSpPr>
+            <a:stCxn id="4" idx="1"/>
+            <a:endCxn id="5" idx="3"/>
+          </p:cNvCxnSpPr>
+          <p:nvPr/>
+        </p:nvCxnSpPr>
+        <p:spPr>
+          <a:xfrm>
+            <a:off x="3974176" y="3863958"/>
+            <a:ext cx="4710447" cy="1260779"/>
+          </a:xfrm>
+          <a:prstGeom prst="line">
+            <a:avLst/>
+          </a:prstGeom>
+        </p:spPr>
+        <p:style>
+          <a:lnRef idx="2">
+            <a:schemeClr val="accent1"/>
+          </a:lnRef>
+          <a:fillRef idx="0">
+            <a:schemeClr val="accent1"/>
+          </a:fillRef>
+          <a:effectRef idx="1">
+            <a:schemeClr val="accent1"/>
+          </a:effectRef>
+          <a:fontRef idx="minor">
+            <a:schemeClr val="tx1"/>
+          </a:fontRef>
+        </p:style>
+      </p:cxnSp>
+      <p:cxnSp>
+        <p:nvCxnSpPr>
+          <p:cNvPr id="8" name="Connector 7"/>
+          <p:cNvCxnSpPr>
+            <a:stCxn id="4" idx="3"/>
+            <a:endCxn id="6" idx="1"/>
+          </p:cNvCxnSpPr>
+          <p:nvPr/>
+        </p:nvCxnSpPr>
+        <p:spPr>
+          <a:xfrm flipH="1" flipV="1">
+            <a:off x="457200" y="2600848"/>
+            <a:ext cx="4716976" cy="1263110"/>
+          </a:xfrm>
+          <a:prstGeom prst="line">
+            <a:avLst/>
+          </a:prstGeom>
+        </p:spPr>
+        <p:style>
+          <a:lnRef idx="2">
+            <a:schemeClr val="accent1"/>
+          </a:lnRef>
+          <a:fillRef idx="0">
+            <a:schemeClr val="accent1"/>
+          </a:fillRef>
+          <a:effectRef idx="1">
+            <a:schemeClr val="accent1"/>
+          </a:effectRef>
+          <a:fontRef idx="minor">
+            <a:schemeClr val="tx1"/>
+          </a:fontRef>
+        </p:style>
+      </p:cxnSp>
     </p:spTree>
   </p:cSld>
   <p:clrMapOvr>
@@ -5026,41 +5166,442 @@
       </p:sp>
       <p:sp>
         <p:nvSpPr>
-          <p:cNvPr id="4" name="TextBox 3"/>
-          <p:cNvSpPr txBox="1"/>
+          <p:cNvPr id="4" name="Rectangle 3"/>
+          <p:cNvSpPr/>
           <p:nvPr/>
         </p:nvSpPr>
         <p:spPr>
           <a:xfrm>
-            <a:off x="457200" y="1600200"/>
-            <a:ext cx="8229600" cy="4525963"/>
+            <a:off x="3907422" y="2095949"/>
+            <a:ext cx="1200000" cy="500000"/>
           </a:xfrm>
           <a:prstGeom prst="rect">
             <a:avLst/>
           </a:prstGeom>
-          <a:noFill/>
-        </p:spPr>
-        <p:txBody>
-          <a:bodyPr wrap="square">
-            <a:spAutoFit/>
-          </a:bodyPr>
-          <a:lstStyle/>
-          <a:p>
-            <a:r>
-              <a:rPr sz="1000">
-                <a:latin typeface="Courier New"/>
-              </a:rPr>
-              <a:t>stateDiagram-v2
-    [*] --&gt; 待機中
-    待機中 --&gt; 処理中 : 開始
-    処理中 --&gt; 完了 : 成功
-    処理中 --&gt; エラー : 失敗
-    エラー --&gt; 待機中 : リトライ
-    完了 --&gt; [*]</a:t>
-            </a:r>
-          </a:p>
-        </p:txBody>
-      </p:sp>
+        </p:spPr>
+        <p:style>
+          <a:lnRef idx="1">
+            <a:schemeClr val="accent1"/>
+          </a:lnRef>
+          <a:fillRef idx="3">
+            <a:schemeClr val="accent1"/>
+          </a:fillRef>
+          <a:effectRef idx="2">
+            <a:schemeClr val="accent1"/>
+          </a:effectRef>
+          <a:fontRef idx="minor">
+            <a:schemeClr val="lt1"/>
+          </a:fontRef>
+        </p:style>
+        <p:txBody>
+          <a:bodyPr rtlCol="0" anchor="ctr"/>
+          <a:lstStyle/>
+          <a:p>
+            <a:r>
+              <a:rPr sz="1200"/>
+              <a:t>root_start</a:t>
+            </a:r>
+          </a:p>
+        </p:txBody>
+      </p:sp>
+      <p:sp>
+        <p:nvSpPr>
+          <p:cNvPr id="5" name="Rectangle 4"/>
+          <p:cNvSpPr/>
+          <p:nvPr/>
+        </p:nvSpPr>
+        <p:spPr>
+          <a:xfrm>
+            <a:off x="3734954" y="3055006"/>
+            <a:ext cx="1200000" cy="500000"/>
+          </a:xfrm>
+          <a:prstGeom prst="rect">
+            <a:avLst/>
+          </a:prstGeom>
+        </p:spPr>
+        <p:style>
+          <a:lnRef idx="1">
+            <a:schemeClr val="accent1"/>
+          </a:lnRef>
+          <a:fillRef idx="3">
+            <a:schemeClr val="accent1"/>
+          </a:fillRef>
+          <a:effectRef idx="2">
+            <a:schemeClr val="accent1"/>
+          </a:effectRef>
+          <a:fontRef idx="minor">
+            <a:schemeClr val="lt1"/>
+          </a:fontRef>
+        </p:style>
+        <p:txBody>
+          <a:bodyPr rtlCol="0" anchor="ctr"/>
+          <a:lstStyle/>
+          <a:p>
+            <a:r>
+              <a:rPr sz="1200"/>
+              <a:t>待機中</a:t>
+            </a:r>
+          </a:p>
+        </p:txBody>
+      </p:sp>
+      <p:sp>
+        <p:nvSpPr>
+          <p:cNvPr id="6" name="Rectangle 5"/>
+          <p:cNvSpPr/>
+          <p:nvPr/>
+        </p:nvSpPr>
+        <p:spPr>
+          <a:xfrm>
+            <a:off x="4229427" y="3649517"/>
+            <a:ext cx="1200000" cy="500000"/>
+          </a:xfrm>
+          <a:prstGeom prst="rect">
+            <a:avLst/>
+          </a:prstGeom>
+        </p:spPr>
+        <p:style>
+          <a:lnRef idx="1">
+            <a:schemeClr val="accent1"/>
+          </a:lnRef>
+          <a:fillRef idx="3">
+            <a:schemeClr val="accent1"/>
+          </a:fillRef>
+          <a:effectRef idx="2">
+            <a:schemeClr val="accent1"/>
+          </a:effectRef>
+          <a:fontRef idx="minor">
+            <a:schemeClr val="lt1"/>
+          </a:fontRef>
+        </p:style>
+        <p:txBody>
+          <a:bodyPr rtlCol="0" anchor="ctr"/>
+          <a:lstStyle/>
+          <a:p>
+            <a:r>
+              <a:rPr sz="1200"/>
+              <a:t>処理中</a:t>
+            </a:r>
+          </a:p>
+        </p:txBody>
+      </p:sp>
+      <p:sp>
+        <p:nvSpPr>
+          <p:cNvPr id="7" name="Rectangle 6"/>
+          <p:cNvSpPr/>
+          <p:nvPr/>
+        </p:nvSpPr>
+        <p:spPr>
+          <a:xfrm>
+            <a:off x="3224463" y="4868892"/>
+            <a:ext cx="1200000" cy="500000"/>
+          </a:xfrm>
+          <a:prstGeom prst="rect">
+            <a:avLst/>
+          </a:prstGeom>
+        </p:spPr>
+        <p:style>
+          <a:lnRef idx="1">
+            <a:schemeClr val="accent1"/>
+          </a:lnRef>
+          <a:fillRef idx="3">
+            <a:schemeClr val="accent1"/>
+          </a:fillRef>
+          <a:effectRef idx="2">
+            <a:schemeClr val="accent1"/>
+          </a:effectRef>
+          <a:fontRef idx="minor">
+            <a:schemeClr val="lt1"/>
+          </a:fontRef>
+        </p:style>
+        <p:txBody>
+          <a:bodyPr rtlCol="0" anchor="ctr"/>
+          <a:lstStyle/>
+          <a:p>
+            <a:r>
+              <a:rPr sz="1200"/>
+              <a:t>完了</a:t>
+            </a:r>
+          </a:p>
+        </p:txBody>
+      </p:sp>
+      <p:sp>
+        <p:nvSpPr>
+          <p:cNvPr id="8" name="Rectangle 7"/>
+          <p:cNvSpPr/>
+          <p:nvPr/>
+        </p:nvSpPr>
+        <p:spPr>
+          <a:xfrm>
+            <a:off x="4973140" y="2383560"/>
+            <a:ext cx="1200000" cy="500000"/>
+          </a:xfrm>
+          <a:prstGeom prst="rect">
+            <a:avLst/>
+          </a:prstGeom>
+        </p:spPr>
+        <p:style>
+          <a:lnRef idx="1">
+            <a:schemeClr val="accent1"/>
+          </a:lnRef>
+          <a:fillRef idx="3">
+            <a:schemeClr val="accent1"/>
+          </a:fillRef>
+          <a:effectRef idx="2">
+            <a:schemeClr val="accent1"/>
+          </a:effectRef>
+          <a:fontRef idx="minor">
+            <a:schemeClr val="lt1"/>
+          </a:fontRef>
+        </p:style>
+        <p:txBody>
+          <a:bodyPr rtlCol="0" anchor="ctr"/>
+          <a:lstStyle/>
+          <a:p>
+            <a:r>
+              <a:rPr sz="1200"/>
+              <a:t>エラー</a:t>
+            </a:r>
+          </a:p>
+        </p:txBody>
+      </p:sp>
+      <p:sp>
+        <p:nvSpPr>
+          <p:cNvPr id="9" name="Rectangle 8"/>
+          <p:cNvSpPr/>
+          <p:nvPr/>
+        </p:nvSpPr>
+        <p:spPr>
+          <a:xfrm>
+            <a:off x="3762591" y="5626163"/>
+            <a:ext cx="1200000" cy="500000"/>
+          </a:xfrm>
+          <a:prstGeom prst="rect">
+            <a:avLst/>
+          </a:prstGeom>
+        </p:spPr>
+        <p:style>
+          <a:lnRef idx="1">
+            <a:schemeClr val="accent1"/>
+          </a:lnRef>
+          <a:fillRef idx="3">
+            <a:schemeClr val="accent1"/>
+          </a:fillRef>
+          <a:effectRef idx="2">
+            <a:schemeClr val="accent1"/>
+          </a:effectRef>
+          <a:fontRef idx="minor">
+            <a:schemeClr val="lt1"/>
+          </a:fontRef>
+        </p:style>
+        <p:txBody>
+          <a:bodyPr rtlCol="0" anchor="ctr"/>
+          <a:lstStyle/>
+          <a:p>
+            <a:r>
+              <a:rPr sz="1200"/>
+              <a:t>root_end</a:t>
+            </a:r>
+          </a:p>
+        </p:txBody>
+      </p:sp>
+      <p:cxnSp>
+        <p:nvCxnSpPr>
+          <p:cNvPr id="10" name="Connector 9"/>
+          <p:cNvCxnSpPr>
+            <a:stCxn id="4" idx="2"/>
+            <a:endCxn id="5" idx="0"/>
+          </p:cNvCxnSpPr>
+          <p:nvPr/>
+        </p:nvCxnSpPr>
+        <p:spPr>
+          <a:xfrm flipH="1">
+            <a:off x="4334954" y="2595949"/>
+            <a:ext cx="172468" cy="459057"/>
+          </a:xfrm>
+          <a:prstGeom prst="line">
+            <a:avLst/>
+          </a:prstGeom>
+        </p:spPr>
+        <p:style>
+          <a:lnRef idx="2">
+            <a:schemeClr val="accent1"/>
+          </a:lnRef>
+          <a:fillRef idx="0">
+            <a:schemeClr val="accent1"/>
+          </a:fillRef>
+          <a:effectRef idx="1">
+            <a:schemeClr val="accent1"/>
+          </a:effectRef>
+          <a:fontRef idx="minor">
+            <a:schemeClr val="tx1"/>
+          </a:fontRef>
+        </p:style>
+      </p:cxnSp>
+      <p:cxnSp>
+        <p:nvCxnSpPr>
+          <p:cNvPr id="11" name="Connector 10"/>
+          <p:cNvCxnSpPr>
+            <a:stCxn id="5" idx="2"/>
+            <a:endCxn id="6" idx="0"/>
+          </p:cNvCxnSpPr>
+          <p:nvPr/>
+        </p:nvCxnSpPr>
+        <p:spPr>
+          <a:xfrm>
+            <a:off x="4334954" y="3555006"/>
+            <a:ext cx="494473" cy="94511"/>
+          </a:xfrm>
+          <a:prstGeom prst="line">
+            <a:avLst/>
+          </a:prstGeom>
+        </p:spPr>
+        <p:style>
+          <a:lnRef idx="2">
+            <a:schemeClr val="accent1"/>
+          </a:lnRef>
+          <a:fillRef idx="0">
+            <a:schemeClr val="accent1"/>
+          </a:fillRef>
+          <a:effectRef idx="1">
+            <a:schemeClr val="accent1"/>
+          </a:effectRef>
+          <a:fontRef idx="minor">
+            <a:schemeClr val="tx1"/>
+          </a:fontRef>
+        </p:style>
+      </p:cxnSp>
+      <p:cxnSp>
+        <p:nvCxnSpPr>
+          <p:cNvPr id="12" name="Connector 11"/>
+          <p:cNvCxnSpPr>
+            <a:stCxn id="6" idx="2"/>
+            <a:endCxn id="7" idx="0"/>
+          </p:cNvCxnSpPr>
+          <p:nvPr/>
+        </p:nvCxnSpPr>
+        <p:spPr>
+          <a:xfrm flipH="1">
+            <a:off x="3824463" y="4149517"/>
+            <a:ext cx="1004964" cy="719375"/>
+          </a:xfrm>
+          <a:prstGeom prst="line">
+            <a:avLst/>
+          </a:prstGeom>
+        </p:spPr>
+        <p:style>
+          <a:lnRef idx="2">
+            <a:schemeClr val="accent1"/>
+          </a:lnRef>
+          <a:fillRef idx="0">
+            <a:schemeClr val="accent1"/>
+          </a:fillRef>
+          <a:effectRef idx="1">
+            <a:schemeClr val="accent1"/>
+          </a:effectRef>
+          <a:fontRef idx="minor">
+            <a:schemeClr val="tx1"/>
+          </a:fontRef>
+        </p:style>
+      </p:cxnSp>
+      <p:cxnSp>
+        <p:nvCxnSpPr>
+          <p:cNvPr id="13" name="Connector 12"/>
+          <p:cNvCxnSpPr>
+            <a:stCxn id="6" idx="0"/>
+            <a:endCxn id="8" idx="2"/>
+          </p:cNvCxnSpPr>
+          <p:nvPr/>
+        </p:nvCxnSpPr>
+        <p:spPr>
+          <a:xfrm flipV="1">
+            <a:off x="4829427" y="2883560"/>
+            <a:ext cx="743713" cy="765957"/>
+          </a:xfrm>
+          <a:prstGeom prst="line">
+            <a:avLst/>
+          </a:prstGeom>
+        </p:spPr>
+        <p:style>
+          <a:lnRef idx="2">
+            <a:schemeClr val="accent1"/>
+          </a:lnRef>
+          <a:fillRef idx="0">
+            <a:schemeClr val="accent1"/>
+          </a:fillRef>
+          <a:effectRef idx="1">
+            <a:schemeClr val="accent1"/>
+          </a:effectRef>
+          <a:fontRef idx="minor">
+            <a:schemeClr val="tx1"/>
+          </a:fontRef>
+        </p:style>
+      </p:cxnSp>
+      <p:cxnSp>
+        <p:nvCxnSpPr>
+          <p:cNvPr id="14" name="Connector 13"/>
+          <p:cNvCxnSpPr>
+            <a:stCxn id="8" idx="3"/>
+            <a:endCxn id="5" idx="1"/>
+          </p:cNvCxnSpPr>
+          <p:nvPr/>
+        </p:nvCxnSpPr>
+        <p:spPr>
+          <a:xfrm flipH="1">
+            <a:off x="3734954" y="2633560"/>
+            <a:ext cx="2438186" cy="671446"/>
+          </a:xfrm>
+          <a:prstGeom prst="line">
+            <a:avLst/>
+          </a:prstGeom>
+        </p:spPr>
+        <p:style>
+          <a:lnRef idx="2">
+            <a:schemeClr val="accent1"/>
+          </a:lnRef>
+          <a:fillRef idx="0">
+            <a:schemeClr val="accent1"/>
+          </a:fillRef>
+          <a:effectRef idx="1">
+            <a:schemeClr val="accent1"/>
+          </a:effectRef>
+          <a:fontRef idx="minor">
+            <a:schemeClr val="tx1"/>
+          </a:fontRef>
+        </p:style>
+      </p:cxnSp>
+      <p:cxnSp>
+        <p:nvCxnSpPr>
+          <p:cNvPr id="15" name="Connector 14"/>
+          <p:cNvCxnSpPr>
+            <a:stCxn id="7" idx="2"/>
+            <a:endCxn id="9" idx="0"/>
+          </p:cNvCxnSpPr>
+          <p:nvPr/>
+        </p:nvCxnSpPr>
+        <p:spPr>
+          <a:xfrm>
+            <a:off x="3824463" y="5368892"/>
+            <a:ext cx="538128" cy="257271"/>
+          </a:xfrm>
+          <a:prstGeom prst="line">
+            <a:avLst/>
+          </a:prstGeom>
+        </p:spPr>
+        <p:style>
+          <a:lnRef idx="2">
+            <a:schemeClr val="accent1"/>
+          </a:lnRef>
+          <a:fillRef idx="0">
+            <a:schemeClr val="accent1"/>
+          </a:fillRef>
+          <a:effectRef idx="1">
+            <a:schemeClr val="accent1"/>
+          </a:effectRef>
+          <a:fontRef idx="minor">
+            <a:schemeClr val="tx1"/>
+          </a:fontRef>
+        </p:style>
+      </p:cxnSp>
     </p:spTree>
   </p:cSld>
   <p:clrMapOvr>
@@ -5119,47 +5660,263 @@
       </p:sp>
       <p:sp>
         <p:nvSpPr>
-          <p:cNvPr id="4" name="TextBox 3"/>
-          <p:cNvSpPr txBox="1"/>
+          <p:cNvPr id="4" name="Rectangle 3"/>
+          <p:cNvSpPr/>
           <p:nvPr/>
         </p:nvSpPr>
         <p:spPr>
           <a:xfrm>
-            <a:off x="457200" y="1600200"/>
-            <a:ext cx="8229600" cy="4525963"/>
+            <a:off x="7486800" y="5152460"/>
+            <a:ext cx="1200000" cy="500000"/>
           </a:xfrm>
           <a:prstGeom prst="rect">
             <a:avLst/>
           </a:prstGeom>
-          <a:noFill/>
-        </p:spPr>
-        <p:txBody>
-          <a:bodyPr wrap="square">
-            <a:spAutoFit/>
-          </a:bodyPr>
-          <a:lstStyle/>
-          <a:p>
-            <a:r>
-              <a:rPr sz="1000">
-                <a:latin typeface="Courier New"/>
-              </a:rPr>
-              <a:t>erDiagram
-    CUSTOMER ||--o{ ORDER : places
-    ORDER ||--|{ LINE-ITEM : contains
-    PRODUCT ||--o{ LINE-ITEM : includes
-    CUSTOMER {
-        int id
-        string name
-        string email
-    }
-    ORDER {
-        int id
-        date ordered_at
-    }</a:t>
-            </a:r>
-          </a:p>
-        </p:txBody>
-      </p:sp>
+        </p:spPr>
+        <p:style>
+          <a:lnRef idx="1">
+            <a:schemeClr val="accent1"/>
+          </a:lnRef>
+          <a:fillRef idx="3">
+            <a:schemeClr val="accent1"/>
+          </a:fillRef>
+          <a:effectRef idx="2">
+            <a:schemeClr val="accent1"/>
+          </a:effectRef>
+          <a:fontRef idx="minor">
+            <a:schemeClr val="lt1"/>
+          </a:fontRef>
+        </p:style>
+        <p:txBody>
+          <a:bodyPr rtlCol="0" anchor="ctr"/>
+          <a:lstStyle/>
+          <a:p>
+            <a:r>
+              <a:rPr sz="1200"/>
+              <a:t>CUSTOMER</a:t>
+            </a:r>
+          </a:p>
+        </p:txBody>
+      </p:sp>
+      <p:sp>
+        <p:nvSpPr>
+          <p:cNvPr id="5" name="Rectangle 4"/>
+          <p:cNvSpPr/>
+          <p:nvPr/>
+        </p:nvSpPr>
+        <p:spPr>
+          <a:xfrm>
+            <a:off x="4933580" y="3310410"/>
+            <a:ext cx="1200000" cy="500000"/>
+          </a:xfrm>
+          <a:prstGeom prst="rect">
+            <a:avLst/>
+          </a:prstGeom>
+        </p:spPr>
+        <p:style>
+          <a:lnRef idx="1">
+            <a:schemeClr val="accent1"/>
+          </a:lnRef>
+          <a:fillRef idx="3">
+            <a:schemeClr val="accent1"/>
+          </a:fillRef>
+          <a:effectRef idx="2">
+            <a:schemeClr val="accent1"/>
+          </a:effectRef>
+          <a:fontRef idx="minor">
+            <a:schemeClr val="lt1"/>
+          </a:fontRef>
+        </p:style>
+        <p:txBody>
+          <a:bodyPr rtlCol="0" anchor="ctr"/>
+          <a:lstStyle/>
+          <a:p>
+            <a:r>
+              <a:rPr sz="1200"/>
+              <a:t>ORDER</a:t>
+            </a:r>
+          </a:p>
+        </p:txBody>
+      </p:sp>
+      <p:sp>
+        <p:nvSpPr>
+          <p:cNvPr id="6" name="Rectangle 5"/>
+          <p:cNvSpPr/>
+          <p:nvPr/>
+        </p:nvSpPr>
+        <p:spPr>
+          <a:xfrm>
+            <a:off x="2104438" y="1896087"/>
+            <a:ext cx="1200000" cy="500000"/>
+          </a:xfrm>
+          <a:prstGeom prst="rect">
+            <a:avLst/>
+          </a:prstGeom>
+        </p:spPr>
+        <p:style>
+          <a:lnRef idx="1">
+            <a:schemeClr val="accent1"/>
+          </a:lnRef>
+          <a:fillRef idx="3">
+            <a:schemeClr val="accent1"/>
+          </a:fillRef>
+          <a:effectRef idx="2">
+            <a:schemeClr val="accent1"/>
+          </a:effectRef>
+          <a:fontRef idx="minor">
+            <a:schemeClr val="lt1"/>
+          </a:fontRef>
+        </p:style>
+        <p:txBody>
+          <a:bodyPr rtlCol="0" anchor="ctr"/>
+          <a:lstStyle/>
+          <a:p>
+            <a:r>
+              <a:rPr sz="1200"/>
+              <a:t>LINE-ITEM</a:t>
+            </a:r>
+          </a:p>
+        </p:txBody>
+      </p:sp>
+      <p:sp>
+        <p:nvSpPr>
+          <p:cNvPr id="7" name="Rectangle 6"/>
+          <p:cNvSpPr/>
+          <p:nvPr/>
+        </p:nvSpPr>
+        <p:spPr>
+          <a:xfrm>
+            <a:off x="1363180" y="4093767"/>
+            <a:ext cx="1200000" cy="500000"/>
+          </a:xfrm>
+          <a:prstGeom prst="rect">
+            <a:avLst/>
+          </a:prstGeom>
+        </p:spPr>
+        <p:style>
+          <a:lnRef idx="1">
+            <a:schemeClr val="accent1"/>
+          </a:lnRef>
+          <a:fillRef idx="3">
+            <a:schemeClr val="accent1"/>
+          </a:fillRef>
+          <a:effectRef idx="2">
+            <a:schemeClr val="accent1"/>
+          </a:effectRef>
+          <a:fontRef idx="minor">
+            <a:schemeClr val="lt1"/>
+          </a:fontRef>
+        </p:style>
+        <p:txBody>
+          <a:bodyPr rtlCol="0" anchor="ctr"/>
+          <a:lstStyle/>
+          <a:p>
+            <a:r>
+              <a:rPr sz="1200"/>
+              <a:t>PRODUCT</a:t>
+            </a:r>
+          </a:p>
+        </p:txBody>
+      </p:sp>
+      <p:cxnSp>
+        <p:nvCxnSpPr>
+          <p:cNvPr id="8" name="Connector 7"/>
+          <p:cNvCxnSpPr>
+            <a:stCxn id="4" idx="0"/>
+            <a:endCxn id="5" idx="2"/>
+          </p:cNvCxnSpPr>
+          <p:nvPr/>
+        </p:nvCxnSpPr>
+        <p:spPr>
+          <a:xfrm flipH="1" flipV="1">
+            <a:off x="5533580" y="3810410"/>
+            <a:ext cx="2553220" cy="1342050"/>
+          </a:xfrm>
+          <a:prstGeom prst="line">
+            <a:avLst/>
+          </a:prstGeom>
+        </p:spPr>
+        <p:style>
+          <a:lnRef idx="2">
+            <a:schemeClr val="accent1"/>
+          </a:lnRef>
+          <a:fillRef idx="0">
+            <a:schemeClr val="accent1"/>
+          </a:fillRef>
+          <a:effectRef idx="1">
+            <a:schemeClr val="accent1"/>
+          </a:effectRef>
+          <a:fontRef idx="minor">
+            <a:schemeClr val="tx1"/>
+          </a:fontRef>
+        </p:style>
+      </p:cxnSp>
+      <p:cxnSp>
+        <p:nvCxnSpPr>
+          <p:cNvPr id="9" name="Connector 8"/>
+          <p:cNvCxnSpPr>
+            <a:stCxn id="5" idx="3"/>
+            <a:endCxn id="6" idx="1"/>
+          </p:cNvCxnSpPr>
+          <p:nvPr/>
+        </p:nvCxnSpPr>
+        <p:spPr>
+          <a:xfrm flipH="1" flipV="1">
+            <a:off x="2104438" y="2146087"/>
+            <a:ext cx="4029142" cy="1414323"/>
+          </a:xfrm>
+          <a:prstGeom prst="line">
+            <a:avLst/>
+          </a:prstGeom>
+        </p:spPr>
+        <p:style>
+          <a:lnRef idx="2">
+            <a:schemeClr val="accent1"/>
+          </a:lnRef>
+          <a:fillRef idx="0">
+            <a:schemeClr val="accent1"/>
+          </a:fillRef>
+          <a:effectRef idx="1">
+            <a:schemeClr val="accent1"/>
+          </a:effectRef>
+          <a:fontRef idx="minor">
+            <a:schemeClr val="tx1"/>
+          </a:fontRef>
+        </p:style>
+      </p:cxnSp>
+      <p:cxnSp>
+        <p:nvCxnSpPr>
+          <p:cNvPr id="10" name="Connector 9"/>
+          <p:cNvCxnSpPr>
+            <a:stCxn id="7" idx="0"/>
+            <a:endCxn id="6" idx="2"/>
+          </p:cNvCxnSpPr>
+          <p:nvPr/>
+        </p:nvCxnSpPr>
+        <p:spPr>
+          <a:xfrm flipV="1">
+            <a:off x="1963180" y="2396087"/>
+            <a:ext cx="741258" cy="1697680"/>
+          </a:xfrm>
+          <a:prstGeom prst="line">
+            <a:avLst/>
+          </a:prstGeom>
+        </p:spPr>
+        <p:style>
+          <a:lnRef idx="2">
+            <a:schemeClr val="accent1"/>
+          </a:lnRef>
+          <a:fillRef idx="0">
+            <a:schemeClr val="accent1"/>
+          </a:fillRef>
+          <a:effectRef idx="1">
+            <a:schemeClr val="accent1"/>
+          </a:effectRef>
+          <a:fontRef idx="minor">
+            <a:schemeClr val="tx1"/>
+          </a:fontRef>
+        </p:style>
+      </p:cxnSp>
     </p:spTree>
   </p:cSld>
   <p:clrMapOvr>
@@ -5756,49 +6513,993 @@
       </p:sp>
       <p:sp>
         <p:nvSpPr>
-          <p:cNvPr id="4" name="TextBox 3"/>
-          <p:cNvSpPr txBox="1"/>
+          <p:cNvPr id="4" name="Rectangle 3"/>
+          <p:cNvSpPr/>
           <p:nvPr/>
         </p:nvSpPr>
         <p:spPr>
           <a:xfrm>
-            <a:off x="457200" y="1600200"/>
-            <a:ext cx="8229600" cy="4525963"/>
+            <a:off x="2800400" y="3424464"/>
+            <a:ext cx="1200000" cy="500000"/>
           </a:xfrm>
           <a:prstGeom prst="rect">
             <a:avLst/>
           </a:prstGeom>
-          <a:noFill/>
-        </p:spPr>
-        <p:txBody>
-          <a:bodyPr wrap="square">
-            <a:spAutoFit/>
-          </a:bodyPr>
-          <a:lstStyle/>
-          <a:p>
-            <a:r>
-              <a:rPr sz="1000">
-                <a:latin typeface="Courier New"/>
-              </a:rPr>
-              <a:t>mindmap
-    root((qmd_to_pptx))
-        入力形式
-            QMD
-            Markdown
-        出力
-            PPTX
-        機能
-            数式
-            Mermaid図
-            テーブル
-            コード
-        利用方法
-            ライブラリ
-            MCPサーバー</a:t>
-            </a:r>
-          </a:p>
-        </p:txBody>
-      </p:sp>
+        </p:spPr>
+        <p:style>
+          <a:lnRef idx="1">
+            <a:schemeClr val="accent1"/>
+          </a:lnRef>
+          <a:fillRef idx="3">
+            <a:schemeClr val="accent1"/>
+          </a:fillRef>
+          <a:effectRef idx="2">
+            <a:schemeClr val="accent1"/>
+          </a:effectRef>
+          <a:fontRef idx="minor">
+            <a:schemeClr val="lt1"/>
+          </a:fontRef>
+        </p:style>
+        <p:txBody>
+          <a:bodyPr rtlCol="0" anchor="ctr"/>
+          <a:lstStyle/>
+          <a:p>
+            <a:r>
+              <a:rPr sz="1200"/>
+              <a:t>qmd_to_pptx</a:t>
+            </a:r>
+          </a:p>
+        </p:txBody>
+      </p:sp>
+      <p:sp>
+        <p:nvSpPr>
+          <p:cNvPr id="5" name="Rectangle 4"/>
+          <p:cNvSpPr/>
+          <p:nvPr/>
+        </p:nvSpPr>
+        <p:spPr>
+          <a:xfrm>
+            <a:off x="5143600" y="1851822"/>
+            <a:ext cx="1200000" cy="500000"/>
+          </a:xfrm>
+          <a:prstGeom prst="rect">
+            <a:avLst/>
+          </a:prstGeom>
+        </p:spPr>
+        <p:style>
+          <a:lnRef idx="1">
+            <a:schemeClr val="accent1"/>
+          </a:lnRef>
+          <a:fillRef idx="3">
+            <a:schemeClr val="accent1"/>
+          </a:fillRef>
+          <a:effectRef idx="2">
+            <a:schemeClr val="accent1"/>
+          </a:effectRef>
+          <a:fontRef idx="minor">
+            <a:schemeClr val="lt1"/>
+          </a:fontRef>
+        </p:style>
+        <p:txBody>
+          <a:bodyPr rtlCol="0" anchor="ctr"/>
+          <a:lstStyle/>
+          <a:p>
+            <a:r>
+              <a:rPr sz="1200"/>
+              <a:t>入力形式</a:t>
+            </a:r>
+          </a:p>
+        </p:txBody>
+      </p:sp>
+      <p:sp>
+        <p:nvSpPr>
+          <p:cNvPr id="6" name="Rectangle 5"/>
+          <p:cNvSpPr/>
+          <p:nvPr/>
+        </p:nvSpPr>
+        <p:spPr>
+          <a:xfrm>
+            <a:off x="7486800" y="1600200"/>
+            <a:ext cx="1200000" cy="500000"/>
+          </a:xfrm>
+          <a:prstGeom prst="rect">
+            <a:avLst/>
+          </a:prstGeom>
+        </p:spPr>
+        <p:style>
+          <a:lnRef idx="1">
+            <a:schemeClr val="accent1"/>
+          </a:lnRef>
+          <a:fillRef idx="3">
+            <a:schemeClr val="accent1"/>
+          </a:fillRef>
+          <a:effectRef idx="2">
+            <a:schemeClr val="accent1"/>
+          </a:effectRef>
+          <a:fontRef idx="minor">
+            <a:schemeClr val="lt1"/>
+          </a:fontRef>
+        </p:style>
+        <p:txBody>
+          <a:bodyPr rtlCol="0" anchor="ctr"/>
+          <a:lstStyle/>
+          <a:p>
+            <a:r>
+              <a:rPr sz="1200"/>
+              <a:t>QMD</a:t>
+            </a:r>
+          </a:p>
+        </p:txBody>
+      </p:sp>
+      <p:sp>
+        <p:nvSpPr>
+          <p:cNvPr id="7" name="Rectangle 6"/>
+          <p:cNvSpPr/>
+          <p:nvPr/>
+        </p:nvSpPr>
+        <p:spPr>
+          <a:xfrm>
+            <a:off x="7486800" y="2103445"/>
+            <a:ext cx="1200000" cy="500000"/>
+          </a:xfrm>
+          <a:prstGeom prst="rect">
+            <a:avLst/>
+          </a:prstGeom>
+        </p:spPr>
+        <p:style>
+          <a:lnRef idx="1">
+            <a:schemeClr val="accent1"/>
+          </a:lnRef>
+          <a:fillRef idx="3">
+            <a:schemeClr val="accent1"/>
+          </a:fillRef>
+          <a:effectRef idx="2">
+            <a:schemeClr val="accent1"/>
+          </a:effectRef>
+          <a:fontRef idx="minor">
+            <a:schemeClr val="lt1"/>
+          </a:fontRef>
+        </p:style>
+        <p:txBody>
+          <a:bodyPr rtlCol="0" anchor="ctr"/>
+          <a:lstStyle/>
+          <a:p>
+            <a:r>
+              <a:rPr sz="1200"/>
+              <a:t>Markdown</a:t>
+            </a:r>
+          </a:p>
+        </p:txBody>
+      </p:sp>
+      <p:sp>
+        <p:nvSpPr>
+          <p:cNvPr id="8" name="Rectangle 7"/>
+          <p:cNvSpPr/>
+          <p:nvPr/>
+        </p:nvSpPr>
+        <p:spPr>
+          <a:xfrm>
+            <a:off x="5143600" y="2606690"/>
+            <a:ext cx="1200000" cy="500000"/>
+          </a:xfrm>
+          <a:prstGeom prst="rect">
+            <a:avLst/>
+          </a:prstGeom>
+        </p:spPr>
+        <p:style>
+          <a:lnRef idx="1">
+            <a:schemeClr val="accent1"/>
+          </a:lnRef>
+          <a:fillRef idx="3">
+            <a:schemeClr val="accent1"/>
+          </a:fillRef>
+          <a:effectRef idx="2">
+            <a:schemeClr val="accent1"/>
+          </a:effectRef>
+          <a:fontRef idx="minor">
+            <a:schemeClr val="lt1"/>
+          </a:fontRef>
+        </p:style>
+        <p:txBody>
+          <a:bodyPr rtlCol="0" anchor="ctr"/>
+          <a:lstStyle/>
+          <a:p>
+            <a:r>
+              <a:rPr sz="1200"/>
+              <a:t>出力</a:t>
+            </a:r>
+          </a:p>
+        </p:txBody>
+      </p:sp>
+      <p:sp>
+        <p:nvSpPr>
+          <p:cNvPr id="9" name="Rectangle 8"/>
+          <p:cNvSpPr/>
+          <p:nvPr/>
+        </p:nvSpPr>
+        <p:spPr>
+          <a:xfrm>
+            <a:off x="7486800" y="2606690"/>
+            <a:ext cx="1200000" cy="500000"/>
+          </a:xfrm>
+          <a:prstGeom prst="rect">
+            <a:avLst/>
+          </a:prstGeom>
+        </p:spPr>
+        <p:style>
+          <a:lnRef idx="1">
+            <a:schemeClr val="accent1"/>
+          </a:lnRef>
+          <a:fillRef idx="3">
+            <a:schemeClr val="accent1"/>
+          </a:fillRef>
+          <a:effectRef idx="2">
+            <a:schemeClr val="accent1"/>
+          </a:effectRef>
+          <a:fontRef idx="minor">
+            <a:schemeClr val="lt1"/>
+          </a:fontRef>
+        </p:style>
+        <p:txBody>
+          <a:bodyPr rtlCol="0" anchor="ctr"/>
+          <a:lstStyle/>
+          <a:p>
+            <a:r>
+              <a:rPr sz="1200"/>
+              <a:t>PPTX</a:t>
+            </a:r>
+          </a:p>
+        </p:txBody>
+      </p:sp>
+      <p:sp>
+        <p:nvSpPr>
+          <p:cNvPr id="10" name="Rectangle 9"/>
+          <p:cNvSpPr/>
+          <p:nvPr/>
+        </p:nvSpPr>
+        <p:spPr>
+          <a:xfrm>
+            <a:off x="5143600" y="3864804"/>
+            <a:ext cx="1200000" cy="500000"/>
+          </a:xfrm>
+          <a:prstGeom prst="rect">
+            <a:avLst/>
+          </a:prstGeom>
+        </p:spPr>
+        <p:style>
+          <a:lnRef idx="1">
+            <a:schemeClr val="accent1"/>
+          </a:lnRef>
+          <a:fillRef idx="3">
+            <a:schemeClr val="accent1"/>
+          </a:fillRef>
+          <a:effectRef idx="2">
+            <a:schemeClr val="accent1"/>
+          </a:effectRef>
+          <a:fontRef idx="minor">
+            <a:schemeClr val="lt1"/>
+          </a:fontRef>
+        </p:style>
+        <p:txBody>
+          <a:bodyPr rtlCol="0" anchor="ctr"/>
+          <a:lstStyle/>
+          <a:p>
+            <a:r>
+              <a:rPr sz="1200"/>
+              <a:t>機能</a:t>
+            </a:r>
+          </a:p>
+        </p:txBody>
+      </p:sp>
+      <p:sp>
+        <p:nvSpPr>
+          <p:cNvPr id="11" name="Rectangle 10"/>
+          <p:cNvSpPr/>
+          <p:nvPr/>
+        </p:nvSpPr>
+        <p:spPr>
+          <a:xfrm>
+            <a:off x="7486800" y="3109936"/>
+            <a:ext cx="1200000" cy="500000"/>
+          </a:xfrm>
+          <a:prstGeom prst="rect">
+            <a:avLst/>
+          </a:prstGeom>
+        </p:spPr>
+        <p:style>
+          <a:lnRef idx="1">
+            <a:schemeClr val="accent1"/>
+          </a:lnRef>
+          <a:fillRef idx="3">
+            <a:schemeClr val="accent1"/>
+          </a:fillRef>
+          <a:effectRef idx="2">
+            <a:schemeClr val="accent1"/>
+          </a:effectRef>
+          <a:fontRef idx="minor">
+            <a:schemeClr val="lt1"/>
+          </a:fontRef>
+        </p:style>
+        <p:txBody>
+          <a:bodyPr rtlCol="0" anchor="ctr"/>
+          <a:lstStyle/>
+          <a:p>
+            <a:r>
+              <a:rPr sz="1200"/>
+              <a:t>数式</a:t>
+            </a:r>
+          </a:p>
+        </p:txBody>
+      </p:sp>
+      <p:sp>
+        <p:nvSpPr>
+          <p:cNvPr id="12" name="Rectangle 11"/>
+          <p:cNvSpPr/>
+          <p:nvPr/>
+        </p:nvSpPr>
+        <p:spPr>
+          <a:xfrm>
+            <a:off x="7486800" y="3613181"/>
+            <a:ext cx="1200000" cy="500000"/>
+          </a:xfrm>
+          <a:prstGeom prst="rect">
+            <a:avLst/>
+          </a:prstGeom>
+        </p:spPr>
+        <p:style>
+          <a:lnRef idx="1">
+            <a:schemeClr val="accent1"/>
+          </a:lnRef>
+          <a:fillRef idx="3">
+            <a:schemeClr val="accent1"/>
+          </a:fillRef>
+          <a:effectRef idx="2">
+            <a:schemeClr val="accent1"/>
+          </a:effectRef>
+          <a:fontRef idx="minor">
+            <a:schemeClr val="lt1"/>
+          </a:fontRef>
+        </p:style>
+        <p:txBody>
+          <a:bodyPr rtlCol="0" anchor="ctr"/>
+          <a:lstStyle/>
+          <a:p>
+            <a:r>
+              <a:rPr sz="1200"/>
+              <a:t>Mermaid図</a:t>
+            </a:r>
+          </a:p>
+        </p:txBody>
+      </p:sp>
+      <p:sp>
+        <p:nvSpPr>
+          <p:cNvPr id="13" name="Rectangle 12"/>
+          <p:cNvSpPr/>
+          <p:nvPr/>
+        </p:nvSpPr>
+        <p:spPr>
+          <a:xfrm>
+            <a:off x="7486800" y="4116426"/>
+            <a:ext cx="1200000" cy="500000"/>
+          </a:xfrm>
+          <a:prstGeom prst="rect">
+            <a:avLst/>
+          </a:prstGeom>
+        </p:spPr>
+        <p:style>
+          <a:lnRef idx="1">
+            <a:schemeClr val="accent1"/>
+          </a:lnRef>
+          <a:fillRef idx="3">
+            <a:schemeClr val="accent1"/>
+          </a:fillRef>
+          <a:effectRef idx="2">
+            <a:schemeClr val="accent1"/>
+          </a:effectRef>
+          <a:fontRef idx="minor">
+            <a:schemeClr val="lt1"/>
+          </a:fontRef>
+        </p:style>
+        <p:txBody>
+          <a:bodyPr rtlCol="0" anchor="ctr"/>
+          <a:lstStyle/>
+          <a:p>
+            <a:r>
+              <a:rPr sz="1200"/>
+              <a:t>テーブル</a:t>
+            </a:r>
+          </a:p>
+        </p:txBody>
+      </p:sp>
+      <p:sp>
+        <p:nvSpPr>
+          <p:cNvPr id="14" name="Rectangle 13"/>
+          <p:cNvSpPr/>
+          <p:nvPr/>
+        </p:nvSpPr>
+        <p:spPr>
+          <a:xfrm>
+            <a:off x="7486800" y="4619672"/>
+            <a:ext cx="1200000" cy="500000"/>
+          </a:xfrm>
+          <a:prstGeom prst="rect">
+            <a:avLst/>
+          </a:prstGeom>
+        </p:spPr>
+        <p:style>
+          <a:lnRef idx="1">
+            <a:schemeClr val="accent1"/>
+          </a:lnRef>
+          <a:fillRef idx="3">
+            <a:schemeClr val="accent1"/>
+          </a:fillRef>
+          <a:effectRef idx="2">
+            <a:schemeClr val="accent1"/>
+          </a:effectRef>
+          <a:fontRef idx="minor">
+            <a:schemeClr val="lt1"/>
+          </a:fontRef>
+        </p:style>
+        <p:txBody>
+          <a:bodyPr rtlCol="0" anchor="ctr"/>
+          <a:lstStyle/>
+          <a:p>
+            <a:r>
+              <a:rPr sz="1200"/>
+              <a:t>コード</a:t>
+            </a:r>
+          </a:p>
+        </p:txBody>
+      </p:sp>
+      <p:sp>
+        <p:nvSpPr>
+          <p:cNvPr id="15" name="Rectangle 14"/>
+          <p:cNvSpPr/>
+          <p:nvPr/>
+        </p:nvSpPr>
+        <p:spPr>
+          <a:xfrm>
+            <a:off x="5143600" y="5374540"/>
+            <a:ext cx="1200000" cy="500000"/>
+          </a:xfrm>
+          <a:prstGeom prst="rect">
+            <a:avLst/>
+          </a:prstGeom>
+        </p:spPr>
+        <p:style>
+          <a:lnRef idx="1">
+            <a:schemeClr val="accent1"/>
+          </a:lnRef>
+          <a:fillRef idx="3">
+            <a:schemeClr val="accent1"/>
+          </a:fillRef>
+          <a:effectRef idx="2">
+            <a:schemeClr val="accent1"/>
+          </a:effectRef>
+          <a:fontRef idx="minor">
+            <a:schemeClr val="lt1"/>
+          </a:fontRef>
+        </p:style>
+        <p:txBody>
+          <a:bodyPr rtlCol="0" anchor="ctr"/>
+          <a:lstStyle/>
+          <a:p>
+            <a:r>
+              <a:rPr sz="1200"/>
+              <a:t>利用方法</a:t>
+            </a:r>
+          </a:p>
+        </p:txBody>
+      </p:sp>
+      <p:sp>
+        <p:nvSpPr>
+          <p:cNvPr id="16" name="Rectangle 15"/>
+          <p:cNvSpPr/>
+          <p:nvPr/>
+        </p:nvSpPr>
+        <p:spPr>
+          <a:xfrm>
+            <a:off x="7486800" y="5122917"/>
+            <a:ext cx="1200000" cy="500000"/>
+          </a:xfrm>
+          <a:prstGeom prst="rect">
+            <a:avLst/>
+          </a:prstGeom>
+        </p:spPr>
+        <p:style>
+          <a:lnRef idx="1">
+            <a:schemeClr val="accent1"/>
+          </a:lnRef>
+          <a:fillRef idx="3">
+            <a:schemeClr val="accent1"/>
+          </a:fillRef>
+          <a:effectRef idx="2">
+            <a:schemeClr val="accent1"/>
+          </a:effectRef>
+          <a:fontRef idx="minor">
+            <a:schemeClr val="lt1"/>
+          </a:fontRef>
+        </p:style>
+        <p:txBody>
+          <a:bodyPr rtlCol="0" anchor="ctr"/>
+          <a:lstStyle/>
+          <a:p>
+            <a:r>
+              <a:rPr sz="1200"/>
+              <a:t>ライブラリ</a:t>
+            </a:r>
+          </a:p>
+        </p:txBody>
+      </p:sp>
+      <p:sp>
+        <p:nvSpPr>
+          <p:cNvPr id="17" name="Rectangle 16"/>
+          <p:cNvSpPr/>
+          <p:nvPr/>
+        </p:nvSpPr>
+        <p:spPr>
+          <a:xfrm>
+            <a:off x="7486800" y="5626163"/>
+            <a:ext cx="1200000" cy="500000"/>
+          </a:xfrm>
+          <a:prstGeom prst="rect">
+            <a:avLst/>
+          </a:prstGeom>
+        </p:spPr>
+        <p:style>
+          <a:lnRef idx="1">
+            <a:schemeClr val="accent1"/>
+          </a:lnRef>
+          <a:fillRef idx="3">
+            <a:schemeClr val="accent1"/>
+          </a:fillRef>
+          <a:effectRef idx="2">
+            <a:schemeClr val="accent1"/>
+          </a:effectRef>
+          <a:fontRef idx="minor">
+            <a:schemeClr val="lt1"/>
+          </a:fontRef>
+        </p:style>
+        <p:txBody>
+          <a:bodyPr rtlCol="0" anchor="ctr"/>
+          <a:lstStyle/>
+          <a:p>
+            <a:r>
+              <a:rPr sz="1200"/>
+              <a:t>MCPサーバー</a:t>
+            </a:r>
+          </a:p>
+        </p:txBody>
+      </p:sp>
+      <p:cxnSp>
+        <p:nvCxnSpPr>
+          <p:cNvPr id="18" name="Connector 17"/>
+          <p:cNvCxnSpPr>
+            <a:stCxn id="4" idx="0"/>
+            <a:endCxn id="5" idx="2"/>
+          </p:cNvCxnSpPr>
+          <p:nvPr/>
+        </p:nvCxnSpPr>
+        <p:spPr>
+          <a:xfrm flipV="1">
+            <a:off x="3400400" y="2351822"/>
+            <a:ext cx="2343200" cy="1072642"/>
+          </a:xfrm>
+          <a:prstGeom prst="line">
+            <a:avLst/>
+          </a:prstGeom>
+        </p:spPr>
+        <p:style>
+          <a:lnRef idx="2">
+            <a:schemeClr val="accent1"/>
+          </a:lnRef>
+          <a:fillRef idx="0">
+            <a:schemeClr val="accent1"/>
+          </a:fillRef>
+          <a:effectRef idx="1">
+            <a:schemeClr val="accent1"/>
+          </a:effectRef>
+          <a:fontRef idx="minor">
+            <a:schemeClr val="tx1"/>
+          </a:fontRef>
+        </p:style>
+      </p:cxnSp>
+      <p:cxnSp>
+        <p:nvCxnSpPr>
+          <p:cNvPr id="19" name="Connector 18"/>
+          <p:cNvCxnSpPr>
+            <a:stCxn id="5" idx="1"/>
+            <a:endCxn id="6" idx="3"/>
+          </p:cNvCxnSpPr>
+          <p:nvPr/>
+        </p:nvCxnSpPr>
+        <p:spPr>
+          <a:xfrm flipV="1">
+            <a:off x="5143600" y="1850200"/>
+            <a:ext cx="3543200" cy="251622"/>
+          </a:xfrm>
+          <a:prstGeom prst="line">
+            <a:avLst/>
+          </a:prstGeom>
+        </p:spPr>
+        <p:style>
+          <a:lnRef idx="2">
+            <a:schemeClr val="accent1"/>
+          </a:lnRef>
+          <a:fillRef idx="0">
+            <a:schemeClr val="accent1"/>
+          </a:fillRef>
+          <a:effectRef idx="1">
+            <a:schemeClr val="accent1"/>
+          </a:effectRef>
+          <a:fontRef idx="minor">
+            <a:schemeClr val="tx1"/>
+          </a:fontRef>
+        </p:style>
+      </p:cxnSp>
+      <p:cxnSp>
+        <p:nvCxnSpPr>
+          <p:cNvPr id="20" name="Connector 19"/>
+          <p:cNvCxnSpPr>
+            <a:stCxn id="5" idx="1"/>
+            <a:endCxn id="7" idx="3"/>
+          </p:cNvCxnSpPr>
+          <p:nvPr/>
+        </p:nvCxnSpPr>
+        <p:spPr>
+          <a:xfrm>
+            <a:off x="5143600" y="2101822"/>
+            <a:ext cx="3543200" cy="251623"/>
+          </a:xfrm>
+          <a:prstGeom prst="line">
+            <a:avLst/>
+          </a:prstGeom>
+        </p:spPr>
+        <p:style>
+          <a:lnRef idx="2">
+            <a:schemeClr val="accent1"/>
+          </a:lnRef>
+          <a:fillRef idx="0">
+            <a:schemeClr val="accent1"/>
+          </a:fillRef>
+          <a:effectRef idx="1">
+            <a:schemeClr val="accent1"/>
+          </a:effectRef>
+          <a:fontRef idx="minor">
+            <a:schemeClr val="tx1"/>
+          </a:fontRef>
+        </p:style>
+      </p:cxnSp>
+      <p:cxnSp>
+        <p:nvCxnSpPr>
+          <p:cNvPr id="21" name="Connector 20"/>
+          <p:cNvCxnSpPr>
+            <a:stCxn id="4" idx="1"/>
+            <a:endCxn id="8" idx="3"/>
+          </p:cNvCxnSpPr>
+          <p:nvPr/>
+        </p:nvCxnSpPr>
+        <p:spPr>
+          <a:xfrm flipV="1">
+            <a:off x="2800400" y="2856690"/>
+            <a:ext cx="3543200" cy="817774"/>
+          </a:xfrm>
+          <a:prstGeom prst="line">
+            <a:avLst/>
+          </a:prstGeom>
+        </p:spPr>
+        <p:style>
+          <a:lnRef idx="2">
+            <a:schemeClr val="accent1"/>
+          </a:lnRef>
+          <a:fillRef idx="0">
+            <a:schemeClr val="accent1"/>
+          </a:fillRef>
+          <a:effectRef idx="1">
+            <a:schemeClr val="accent1"/>
+          </a:effectRef>
+          <a:fontRef idx="minor">
+            <a:schemeClr val="tx1"/>
+          </a:fontRef>
+        </p:style>
+      </p:cxnSp>
+      <p:cxnSp>
+        <p:nvCxnSpPr>
+          <p:cNvPr id="22" name="Connector 21"/>
+          <p:cNvCxnSpPr>
+            <a:stCxn id="8" idx="1"/>
+            <a:endCxn id="9" idx="3"/>
+          </p:cNvCxnSpPr>
+          <p:nvPr/>
+        </p:nvCxnSpPr>
+        <p:spPr>
+          <a:xfrm>
+            <a:off x="5143600" y="2856690"/>
+            <a:ext cx="3543200" cy="0"/>
+          </a:xfrm>
+          <a:prstGeom prst="line">
+            <a:avLst/>
+          </a:prstGeom>
+        </p:spPr>
+        <p:style>
+          <a:lnRef idx="2">
+            <a:schemeClr val="accent1"/>
+          </a:lnRef>
+          <a:fillRef idx="0">
+            <a:schemeClr val="accent1"/>
+          </a:fillRef>
+          <a:effectRef idx="1">
+            <a:schemeClr val="accent1"/>
+          </a:effectRef>
+          <a:fontRef idx="minor">
+            <a:schemeClr val="tx1"/>
+          </a:fontRef>
+        </p:style>
+      </p:cxnSp>
+      <p:cxnSp>
+        <p:nvCxnSpPr>
+          <p:cNvPr id="23" name="Connector 22"/>
+          <p:cNvCxnSpPr>
+            <a:stCxn id="4" idx="1"/>
+            <a:endCxn id="10" idx="3"/>
+          </p:cNvCxnSpPr>
+          <p:nvPr/>
+        </p:nvCxnSpPr>
+        <p:spPr>
+          <a:xfrm>
+            <a:off x="2800400" y="3674464"/>
+            <a:ext cx="3543200" cy="440340"/>
+          </a:xfrm>
+          <a:prstGeom prst="line">
+            <a:avLst/>
+          </a:prstGeom>
+        </p:spPr>
+        <p:style>
+          <a:lnRef idx="2">
+            <a:schemeClr val="accent1"/>
+          </a:lnRef>
+          <a:fillRef idx="0">
+            <a:schemeClr val="accent1"/>
+          </a:fillRef>
+          <a:effectRef idx="1">
+            <a:schemeClr val="accent1"/>
+          </a:effectRef>
+          <a:fontRef idx="minor">
+            <a:schemeClr val="tx1"/>
+          </a:fontRef>
+        </p:style>
+      </p:cxnSp>
+      <p:cxnSp>
+        <p:nvCxnSpPr>
+          <p:cNvPr id="24" name="Connector 23"/>
+          <p:cNvCxnSpPr>
+            <a:stCxn id="10" idx="1"/>
+            <a:endCxn id="11" idx="3"/>
+          </p:cNvCxnSpPr>
+          <p:nvPr/>
+        </p:nvCxnSpPr>
+        <p:spPr>
+          <a:xfrm flipV="1">
+            <a:off x="5143600" y="3359936"/>
+            <a:ext cx="3543200" cy="754868"/>
+          </a:xfrm>
+          <a:prstGeom prst="line">
+            <a:avLst/>
+          </a:prstGeom>
+        </p:spPr>
+        <p:style>
+          <a:lnRef idx="2">
+            <a:schemeClr val="accent1"/>
+          </a:lnRef>
+          <a:fillRef idx="0">
+            <a:schemeClr val="accent1"/>
+          </a:fillRef>
+          <a:effectRef idx="1">
+            <a:schemeClr val="accent1"/>
+          </a:effectRef>
+          <a:fontRef idx="minor">
+            <a:schemeClr val="tx1"/>
+          </a:fontRef>
+        </p:style>
+      </p:cxnSp>
+      <p:cxnSp>
+        <p:nvCxnSpPr>
+          <p:cNvPr id="25" name="Connector 24"/>
+          <p:cNvCxnSpPr>
+            <a:stCxn id="10" idx="1"/>
+            <a:endCxn id="12" idx="3"/>
+          </p:cNvCxnSpPr>
+          <p:nvPr/>
+        </p:nvCxnSpPr>
+        <p:spPr>
+          <a:xfrm flipV="1">
+            <a:off x="5143600" y="3863181"/>
+            <a:ext cx="3543200" cy="251623"/>
+          </a:xfrm>
+          <a:prstGeom prst="line">
+            <a:avLst/>
+          </a:prstGeom>
+        </p:spPr>
+        <p:style>
+          <a:lnRef idx="2">
+            <a:schemeClr val="accent1"/>
+          </a:lnRef>
+          <a:fillRef idx="0">
+            <a:schemeClr val="accent1"/>
+          </a:fillRef>
+          <a:effectRef idx="1">
+            <a:schemeClr val="accent1"/>
+          </a:effectRef>
+          <a:fontRef idx="minor">
+            <a:schemeClr val="tx1"/>
+          </a:fontRef>
+        </p:style>
+      </p:cxnSp>
+      <p:cxnSp>
+        <p:nvCxnSpPr>
+          <p:cNvPr id="26" name="Connector 25"/>
+          <p:cNvCxnSpPr>
+            <a:stCxn id="10" idx="1"/>
+            <a:endCxn id="13" idx="3"/>
+          </p:cNvCxnSpPr>
+          <p:nvPr/>
+        </p:nvCxnSpPr>
+        <p:spPr>
+          <a:xfrm>
+            <a:off x="5143600" y="4114804"/>
+            <a:ext cx="3543200" cy="251622"/>
+          </a:xfrm>
+          <a:prstGeom prst="line">
+            <a:avLst/>
+          </a:prstGeom>
+        </p:spPr>
+        <p:style>
+          <a:lnRef idx="2">
+            <a:schemeClr val="accent1"/>
+          </a:lnRef>
+          <a:fillRef idx="0">
+            <a:schemeClr val="accent1"/>
+          </a:fillRef>
+          <a:effectRef idx="1">
+            <a:schemeClr val="accent1"/>
+          </a:effectRef>
+          <a:fontRef idx="minor">
+            <a:schemeClr val="tx1"/>
+          </a:fontRef>
+        </p:style>
+      </p:cxnSp>
+      <p:cxnSp>
+        <p:nvCxnSpPr>
+          <p:cNvPr id="27" name="Connector 26"/>
+          <p:cNvCxnSpPr>
+            <a:stCxn id="10" idx="1"/>
+            <a:endCxn id="14" idx="3"/>
+          </p:cNvCxnSpPr>
+          <p:nvPr/>
+        </p:nvCxnSpPr>
+        <p:spPr>
+          <a:xfrm>
+            <a:off x="5143600" y="4114804"/>
+            <a:ext cx="3543200" cy="754868"/>
+          </a:xfrm>
+          <a:prstGeom prst="line">
+            <a:avLst/>
+          </a:prstGeom>
+        </p:spPr>
+        <p:style>
+          <a:lnRef idx="2">
+            <a:schemeClr val="accent1"/>
+          </a:lnRef>
+          <a:fillRef idx="0">
+            <a:schemeClr val="accent1"/>
+          </a:fillRef>
+          <a:effectRef idx="1">
+            <a:schemeClr val="accent1"/>
+          </a:effectRef>
+          <a:fontRef idx="minor">
+            <a:schemeClr val="tx1"/>
+          </a:fontRef>
+        </p:style>
+      </p:cxnSp>
+      <p:cxnSp>
+        <p:nvCxnSpPr>
+          <p:cNvPr id="28" name="Connector 27"/>
+          <p:cNvCxnSpPr>
+            <a:stCxn id="4" idx="2"/>
+            <a:endCxn id="15" idx="0"/>
+          </p:cNvCxnSpPr>
+          <p:nvPr/>
+        </p:nvCxnSpPr>
+        <p:spPr>
+          <a:xfrm>
+            <a:off x="3400400" y="3924464"/>
+            <a:ext cx="2343200" cy="1450076"/>
+          </a:xfrm>
+          <a:prstGeom prst="line">
+            <a:avLst/>
+          </a:prstGeom>
+        </p:spPr>
+        <p:style>
+          <a:lnRef idx="2">
+            <a:schemeClr val="accent1"/>
+          </a:lnRef>
+          <a:fillRef idx="0">
+            <a:schemeClr val="accent1"/>
+          </a:fillRef>
+          <a:effectRef idx="1">
+            <a:schemeClr val="accent1"/>
+          </a:effectRef>
+          <a:fontRef idx="minor">
+            <a:schemeClr val="tx1"/>
+          </a:fontRef>
+        </p:style>
+      </p:cxnSp>
+      <p:cxnSp>
+        <p:nvCxnSpPr>
+          <p:cNvPr id="29" name="Connector 28"/>
+          <p:cNvCxnSpPr>
+            <a:stCxn id="15" idx="1"/>
+            <a:endCxn id="16" idx="3"/>
+          </p:cNvCxnSpPr>
+          <p:nvPr/>
+        </p:nvCxnSpPr>
+        <p:spPr>
+          <a:xfrm flipV="1">
+            <a:off x="5143600" y="5372917"/>
+            <a:ext cx="3543200" cy="251623"/>
+          </a:xfrm>
+          <a:prstGeom prst="line">
+            <a:avLst/>
+          </a:prstGeom>
+        </p:spPr>
+        <p:style>
+          <a:lnRef idx="2">
+            <a:schemeClr val="accent1"/>
+          </a:lnRef>
+          <a:fillRef idx="0">
+            <a:schemeClr val="accent1"/>
+          </a:fillRef>
+          <a:effectRef idx="1">
+            <a:schemeClr val="accent1"/>
+          </a:effectRef>
+          <a:fontRef idx="minor">
+            <a:schemeClr val="tx1"/>
+          </a:fontRef>
+        </p:style>
+      </p:cxnSp>
+      <p:cxnSp>
+        <p:nvCxnSpPr>
+          <p:cNvPr id="30" name="Connector 29"/>
+          <p:cNvCxnSpPr>
+            <a:stCxn id="15" idx="1"/>
+            <a:endCxn id="17" idx="3"/>
+          </p:cNvCxnSpPr>
+          <p:nvPr/>
+        </p:nvCxnSpPr>
+        <p:spPr>
+          <a:xfrm>
+            <a:off x="5143600" y="5624540"/>
+            <a:ext cx="3543200" cy="251623"/>
+          </a:xfrm>
+          <a:prstGeom prst="line">
+            <a:avLst/>
+          </a:prstGeom>
+        </p:spPr>
+        <p:style>
+          <a:lnRef idx="2">
+            <a:schemeClr val="accent1"/>
+          </a:lnRef>
+          <a:fillRef idx="0">
+            <a:schemeClr val="accent1"/>
+          </a:fillRef>
+          <a:effectRef idx="1">
+            <a:schemeClr val="accent1"/>
+          </a:effectRef>
+          <a:fontRef idx="minor">
+            <a:schemeClr val="tx1"/>
+          </a:fontRef>
+        </p:style>
+      </p:cxnSp>
     </p:spTree>
   </p:cSld>
   <p:clrMapOvr>

--- a/demo_full.pptx
+++ b/demo_full.pptx
@@ -4930,8 +4930,8 @@
         </p:nvSpPr>
         <p:spPr>
           <a:xfrm>
-            <a:off x="3974176" y="3613958"/>
-            <a:ext cx="1200000" cy="500000"/>
+            <a:off x="3724021" y="3203800"/>
+            <a:ext cx="1700000" cy="440000"/>
           </a:xfrm>
           <a:prstGeom prst="rect">
             <a:avLst/>
@@ -4952,11 +4952,12 @@
           </a:fontRef>
         </p:style>
         <p:txBody>
-          <a:bodyPr rtlCol="0" anchor="ctr"/>
-          <a:lstStyle/>
-          <a:p>
-            <a:r>
-              <a:rPr sz="1200"/>
+          <a:bodyPr rtlCol="0" anchor="ctr" wrap="square" lIns="50000" rIns="50000" tIns="60000" bIns="60000"/>
+          <a:lstStyle/>
+          <a:p>
+            <a:pPr algn="ctr"/>
+            <a:r>
+              <a:rPr b="1" sz="1100"/>
               <a:t>Animal</a:t>
             </a:r>
           </a:p>
@@ -4970,8 +4971,8 @@
         </p:nvSpPr>
         <p:spPr>
           <a:xfrm>
-            <a:off x="7484623" y="4874737"/>
-            <a:ext cx="1200000" cy="500000"/>
+            <a:off x="3724021" y="3643800"/>
+            <a:ext cx="1700000" cy="560000"/>
           </a:xfrm>
           <a:prstGeom prst="rect">
             <a:avLst/>
@@ -4992,12 +4993,19 @@
           </a:fontRef>
         </p:style>
         <p:txBody>
-          <a:bodyPr rtlCol="0" anchor="ctr"/>
-          <a:lstStyle/>
-          <a:p>
-            <a:r>
-              <a:rPr sz="1200"/>
-              <a:t>Dog</a:t>
+          <a:bodyPr rtlCol="0" anchor="ctr" wrap="square" lIns="80000" rIns="50000" tIns="50000" bIns="50000"/>
+          <a:lstStyle/>
+          <a:p>
+            <a:pPr algn="ctr"/>
+            <a:r>
+              <a:rPr sz="900"/>
+              <a:t>+String name</a:t>
+            </a:r>
+          </a:p>
+          <a:p>
+            <a:r>
+              <a:rPr sz="900"/>
+              <a:t>+int age</a:t>
             </a:r>
           </a:p>
         </p:txBody>
@@ -5010,8 +5018,8 @@
         </p:nvSpPr>
         <p:spPr>
           <a:xfrm>
-            <a:off x="457200" y="2350848"/>
-            <a:ext cx="1200000" cy="500000"/>
+            <a:off x="3724021" y="4203800"/>
+            <a:ext cx="1700000" cy="320000"/>
           </a:xfrm>
           <a:prstGeom prst="rect">
             <a:avLst/>
@@ -5032,29 +5040,276 @@
           </a:fontRef>
         </p:style>
         <p:txBody>
-          <a:bodyPr rtlCol="0" anchor="ctr"/>
-          <a:lstStyle/>
-          <a:p>
-            <a:r>
-              <a:rPr sz="1200"/>
+          <a:bodyPr rtlCol="0" anchor="ctr" wrap="square" lIns="80000" rIns="50000" tIns="50000" bIns="50000"/>
+          <a:lstStyle/>
+          <a:p>
+            <a:pPr algn="ctr"/>
+            <a:r>
+              <a:rPr sz="900"/>
+              <a:t>+makeSound() : void</a:t>
+            </a:r>
+          </a:p>
+        </p:txBody>
+      </p:sp>
+      <p:sp>
+        <p:nvSpPr>
+          <p:cNvPr id="7" name="Rectangle 6"/>
+          <p:cNvSpPr/>
+          <p:nvPr/>
+        </p:nvSpPr>
+        <p:spPr>
+          <a:xfrm>
+            <a:off x="6984778" y="4327786"/>
+            <a:ext cx="1700000" cy="440000"/>
+          </a:xfrm>
+          <a:prstGeom prst="rect">
+            <a:avLst/>
+          </a:prstGeom>
+        </p:spPr>
+        <p:style>
+          <a:lnRef idx="1">
+            <a:schemeClr val="accent1"/>
+          </a:lnRef>
+          <a:fillRef idx="3">
+            <a:schemeClr val="accent1"/>
+          </a:fillRef>
+          <a:effectRef idx="2">
+            <a:schemeClr val="accent1"/>
+          </a:effectRef>
+          <a:fontRef idx="minor">
+            <a:schemeClr val="lt1"/>
+          </a:fontRef>
+        </p:style>
+        <p:txBody>
+          <a:bodyPr rtlCol="0" anchor="ctr" wrap="square" lIns="50000" rIns="50000" tIns="60000" bIns="60000"/>
+          <a:lstStyle/>
+          <a:p>
+            <a:pPr algn="ctr"/>
+            <a:r>
+              <a:rPr b="1" sz="1100"/>
+              <a:t>Dog</a:t>
+            </a:r>
+          </a:p>
+        </p:txBody>
+      </p:sp>
+      <p:sp>
+        <p:nvSpPr>
+          <p:cNvPr id="8" name="Rectangle 7"/>
+          <p:cNvSpPr/>
+          <p:nvPr/>
+        </p:nvSpPr>
+        <p:spPr>
+          <a:xfrm>
+            <a:off x="6984778" y="4767786"/>
+            <a:ext cx="1700000" cy="320000"/>
+          </a:xfrm>
+          <a:prstGeom prst="rect">
+            <a:avLst/>
+          </a:prstGeom>
+        </p:spPr>
+        <p:style>
+          <a:lnRef idx="1">
+            <a:schemeClr val="accent1"/>
+          </a:lnRef>
+          <a:fillRef idx="3">
+            <a:schemeClr val="accent1"/>
+          </a:fillRef>
+          <a:effectRef idx="2">
+            <a:schemeClr val="accent1"/>
+          </a:effectRef>
+          <a:fontRef idx="minor">
+            <a:schemeClr val="lt1"/>
+          </a:fontRef>
+        </p:style>
+        <p:txBody>
+          <a:bodyPr rtlCol="0" anchor="ctr" wrap="square" lIns="80000" rIns="50000" tIns="50000" bIns="50000"/>
+          <a:lstStyle/>
+          <a:p>
+            <a:pPr algn="ctr"/>
+            <a:r>
+              <a:rPr sz="900"/>
+              <a:t>+String breed</a:t>
+            </a:r>
+          </a:p>
+        </p:txBody>
+      </p:sp>
+      <p:sp>
+        <p:nvSpPr>
+          <p:cNvPr id="9" name="Rectangle 8"/>
+          <p:cNvSpPr/>
+          <p:nvPr/>
+        </p:nvSpPr>
+        <p:spPr>
+          <a:xfrm>
+            <a:off x="6984778" y="5087786"/>
+            <a:ext cx="1700000" cy="320000"/>
+          </a:xfrm>
+          <a:prstGeom prst="rect">
+            <a:avLst/>
+          </a:prstGeom>
+        </p:spPr>
+        <p:style>
+          <a:lnRef idx="1">
+            <a:schemeClr val="accent1"/>
+          </a:lnRef>
+          <a:fillRef idx="3">
+            <a:schemeClr val="accent1"/>
+          </a:fillRef>
+          <a:effectRef idx="2">
+            <a:schemeClr val="accent1"/>
+          </a:effectRef>
+          <a:fontRef idx="minor">
+            <a:schemeClr val="lt1"/>
+          </a:fontRef>
+        </p:style>
+        <p:txBody>
+          <a:bodyPr rtlCol="0" anchor="ctr" wrap="square" lIns="80000" rIns="50000" tIns="50000" bIns="50000"/>
+          <a:lstStyle/>
+          <a:p>
+            <a:pPr algn="ctr"/>
+            <a:r>
+              <a:rPr sz="900"/>
+              <a:t>+fetch() : void</a:t>
+            </a:r>
+          </a:p>
+        </p:txBody>
+      </p:sp>
+      <p:sp>
+        <p:nvSpPr>
+          <p:cNvPr id="10" name="Rectangle 9"/>
+          <p:cNvSpPr/>
+          <p:nvPr/>
+        </p:nvSpPr>
+        <p:spPr>
+          <a:xfrm>
+            <a:off x="457200" y="2317957"/>
+            <a:ext cx="1700000" cy="440000"/>
+          </a:xfrm>
+          <a:prstGeom prst="rect">
+            <a:avLst/>
+          </a:prstGeom>
+        </p:spPr>
+        <p:style>
+          <a:lnRef idx="1">
+            <a:schemeClr val="accent1"/>
+          </a:lnRef>
+          <a:fillRef idx="3">
+            <a:schemeClr val="accent1"/>
+          </a:fillRef>
+          <a:effectRef idx="2">
+            <a:schemeClr val="accent1"/>
+          </a:effectRef>
+          <a:fontRef idx="minor">
+            <a:schemeClr val="lt1"/>
+          </a:fontRef>
+        </p:style>
+        <p:txBody>
+          <a:bodyPr rtlCol="0" anchor="ctr" wrap="square" lIns="50000" rIns="50000" tIns="60000" bIns="60000"/>
+          <a:lstStyle/>
+          <a:p>
+            <a:pPr algn="ctr"/>
+            <a:r>
+              <a:rPr b="1" sz="1100"/>
               <a:t>Cat</a:t>
+            </a:r>
+          </a:p>
+        </p:txBody>
+      </p:sp>
+      <p:sp>
+        <p:nvSpPr>
+          <p:cNvPr id="11" name="Rectangle 10"/>
+          <p:cNvSpPr/>
+          <p:nvPr/>
+        </p:nvSpPr>
+        <p:spPr>
+          <a:xfrm>
+            <a:off x="457200" y="2757957"/>
+            <a:ext cx="1700000" cy="320000"/>
+          </a:xfrm>
+          <a:prstGeom prst="rect">
+            <a:avLst/>
+          </a:prstGeom>
+        </p:spPr>
+        <p:style>
+          <a:lnRef idx="1">
+            <a:schemeClr val="accent1"/>
+          </a:lnRef>
+          <a:fillRef idx="3">
+            <a:schemeClr val="accent1"/>
+          </a:fillRef>
+          <a:effectRef idx="2">
+            <a:schemeClr val="accent1"/>
+          </a:effectRef>
+          <a:fontRef idx="minor">
+            <a:schemeClr val="lt1"/>
+          </a:fontRef>
+        </p:style>
+        <p:txBody>
+          <a:bodyPr rtlCol="0" anchor="ctr" wrap="square" lIns="80000" rIns="50000" tIns="50000" bIns="50000"/>
+          <a:lstStyle/>
+          <a:p>
+            <a:pPr algn="ctr"/>
+            <a:r>
+              <a:rPr sz="900"/>
+              <a:t>+bool indoor</a:t>
+            </a:r>
+          </a:p>
+        </p:txBody>
+      </p:sp>
+      <p:sp>
+        <p:nvSpPr>
+          <p:cNvPr id="12" name="Rectangle 11"/>
+          <p:cNvSpPr/>
+          <p:nvPr/>
+        </p:nvSpPr>
+        <p:spPr>
+          <a:xfrm>
+            <a:off x="457200" y="3077957"/>
+            <a:ext cx="1700000" cy="320000"/>
+          </a:xfrm>
+          <a:prstGeom prst="rect">
+            <a:avLst/>
+          </a:prstGeom>
+        </p:spPr>
+        <p:style>
+          <a:lnRef idx="1">
+            <a:schemeClr val="accent1"/>
+          </a:lnRef>
+          <a:fillRef idx="3">
+            <a:schemeClr val="accent1"/>
+          </a:fillRef>
+          <a:effectRef idx="2">
+            <a:schemeClr val="accent1"/>
+          </a:effectRef>
+          <a:fontRef idx="minor">
+            <a:schemeClr val="lt1"/>
+          </a:fontRef>
+        </p:style>
+        <p:txBody>
+          <a:bodyPr rtlCol="0" anchor="ctr" wrap="square" lIns="80000" rIns="50000" tIns="50000" bIns="50000"/>
+          <a:lstStyle/>
+          <a:p>
+            <a:pPr algn="ctr"/>
+            <a:r>
+              <a:rPr sz="900"/>
+              <a:t>+purr() : void</a:t>
             </a:r>
           </a:p>
         </p:txBody>
       </p:sp>
       <p:cxnSp>
         <p:nvCxnSpPr>
-          <p:cNvPr id="7" name="Connector 6"/>
+          <p:cNvPr id="13" name="Connector 12"/>
           <p:cNvCxnSpPr>
             <a:stCxn id="4" idx="1"/>
-            <a:endCxn id="5" idx="3"/>
+            <a:endCxn id="7" idx="3"/>
           </p:cNvCxnSpPr>
           <p:nvPr/>
         </p:nvCxnSpPr>
         <p:spPr>
           <a:xfrm>
-            <a:off x="3974176" y="3863958"/>
-            <a:ext cx="4710447" cy="1260779"/>
+            <a:off x="3724021" y="3423800"/>
+            <a:ext cx="4960757" cy="1123986"/>
           </a:xfrm>
           <a:prstGeom prst="line">
             <a:avLst/>
@@ -5077,17 +5332,17 @@
       </p:cxnSp>
       <p:cxnSp>
         <p:nvCxnSpPr>
-          <p:cNvPr id="8" name="Connector 7"/>
+          <p:cNvPr id="14" name="Connector 13"/>
           <p:cNvCxnSpPr>
             <a:stCxn id="4" idx="3"/>
-            <a:endCxn id="6" idx="1"/>
+            <a:endCxn id="10" idx="1"/>
           </p:cNvCxnSpPr>
           <p:nvPr/>
         </p:nvCxnSpPr>
         <p:spPr>
           <a:xfrm flipH="1" flipV="1">
-            <a:off x="457200" y="2600848"/>
-            <a:ext cx="4716976" cy="1263110"/>
+            <a:off x="457200" y="2537957"/>
+            <a:ext cx="4966821" cy="885843"/>
           </a:xfrm>
           <a:prstGeom prst="line">
             <a:avLst/>

--- a/demo_full.pptx
+++ b/demo_full.pptx
@@ -4922,387 +4922,432 @@
           <a:p/>
         </p:txBody>
       </p:sp>
-      <p:sp>
-        <p:nvSpPr>
-          <p:cNvPr id="4" name="Rectangle 3"/>
-          <p:cNvSpPr/>
+      <p:grpSp>
+        <p:nvGrpSpPr>
+          <p:cNvPr id="7" name="Group 6"/>
+          <p:cNvGrpSpPr/>
           <p:nvPr/>
-        </p:nvSpPr>
-        <p:spPr>
+        </p:nvGrpSpPr>
+        <p:grpSpPr>
           <a:xfrm>
             <a:off x="3724021" y="3203800"/>
-            <a:ext cx="1700000" cy="440000"/>
-          </a:xfrm>
-          <a:prstGeom prst="rect">
-            <a:avLst/>
-          </a:prstGeom>
-        </p:spPr>
-        <p:style>
-          <a:lnRef idx="1">
-            <a:schemeClr val="accent1"/>
-          </a:lnRef>
-          <a:fillRef idx="3">
-            <a:schemeClr val="accent1"/>
-          </a:fillRef>
-          <a:effectRef idx="2">
-            <a:schemeClr val="accent1"/>
-          </a:effectRef>
-          <a:fontRef idx="minor">
-            <a:schemeClr val="lt1"/>
-          </a:fontRef>
-        </p:style>
-        <p:txBody>
-          <a:bodyPr rtlCol="0" anchor="ctr" wrap="square" lIns="50000" rIns="50000" tIns="60000" bIns="60000"/>
-          <a:lstStyle/>
-          <a:p>
-            <a:pPr algn="ctr"/>
-            <a:r>
-              <a:rPr b="1" sz="1100"/>
-              <a:t>Animal</a:t>
-            </a:r>
-          </a:p>
-        </p:txBody>
-      </p:sp>
-      <p:sp>
-        <p:nvSpPr>
-          <p:cNvPr id="5" name="Rectangle 4"/>
-          <p:cNvSpPr/>
+            <a:ext cx="1700000" cy="1320000"/>
+            <a:chOff x="3724021" y="3203800"/>
+            <a:chExt cx="1700000" cy="1320000"/>
+          </a:xfrm>
+        </p:grpSpPr>
+        <p:sp>
+          <p:nvSpPr>
+            <p:cNvPr id="4" name="Rectangle 3"/>
+            <p:cNvSpPr/>
+            <p:nvPr/>
+          </p:nvSpPr>
+          <p:spPr>
+            <a:xfrm>
+              <a:off x="3724021" y="3203800"/>
+              <a:ext cx="1700000" cy="440000"/>
+            </a:xfrm>
+            <a:prstGeom prst="rect">
+              <a:avLst/>
+            </a:prstGeom>
+          </p:spPr>
+          <p:style>
+            <a:lnRef idx="1">
+              <a:schemeClr val="accent1"/>
+            </a:lnRef>
+            <a:fillRef idx="3">
+              <a:schemeClr val="accent1"/>
+            </a:fillRef>
+            <a:effectRef idx="2">
+              <a:schemeClr val="accent1"/>
+            </a:effectRef>
+            <a:fontRef idx="minor">
+              <a:schemeClr val="lt1"/>
+            </a:fontRef>
+          </p:style>
+          <p:txBody>
+            <a:bodyPr rtlCol="0" anchor="ctr" wrap="square" lIns="50000" rIns="50000" tIns="60000" bIns="60000"/>
+            <a:lstStyle/>
+            <a:p>
+              <a:pPr algn="ctr"/>
+              <a:r>
+                <a:rPr b="1" sz="1100"/>
+                <a:t>Animal</a:t>
+              </a:r>
+            </a:p>
+          </p:txBody>
+        </p:sp>
+        <p:sp>
+          <p:nvSpPr>
+            <p:cNvPr id="5" name="Rectangle 4"/>
+            <p:cNvSpPr/>
+            <p:nvPr/>
+          </p:nvSpPr>
+          <p:spPr>
+            <a:xfrm>
+              <a:off x="3724021" y="3643800"/>
+              <a:ext cx="1700000" cy="560000"/>
+            </a:xfrm>
+            <a:prstGeom prst="rect">
+              <a:avLst/>
+            </a:prstGeom>
+          </p:spPr>
+          <p:style>
+            <a:lnRef idx="1">
+              <a:schemeClr val="accent1"/>
+            </a:lnRef>
+            <a:fillRef idx="3">
+              <a:schemeClr val="accent1"/>
+            </a:fillRef>
+            <a:effectRef idx="2">
+              <a:schemeClr val="accent1"/>
+            </a:effectRef>
+            <a:fontRef idx="minor">
+              <a:schemeClr val="lt1"/>
+            </a:fontRef>
+          </p:style>
+          <p:txBody>
+            <a:bodyPr rtlCol="0" anchor="ctr" wrap="square" lIns="80000" rIns="50000" tIns="50000" bIns="50000"/>
+            <a:lstStyle/>
+            <a:p>
+              <a:pPr algn="ctr"/>
+              <a:r>
+                <a:rPr sz="900"/>
+                <a:t>+String name</a:t>
+              </a:r>
+            </a:p>
+            <a:p>
+              <a:r>
+                <a:rPr sz="900"/>
+                <a:t>+int age</a:t>
+              </a:r>
+            </a:p>
+          </p:txBody>
+        </p:sp>
+        <p:sp>
+          <p:nvSpPr>
+            <p:cNvPr id="6" name="Rectangle 5"/>
+            <p:cNvSpPr/>
+            <p:nvPr/>
+          </p:nvSpPr>
+          <p:spPr>
+            <a:xfrm>
+              <a:off x="3724021" y="4203800"/>
+              <a:ext cx="1700000" cy="320000"/>
+            </a:xfrm>
+            <a:prstGeom prst="rect">
+              <a:avLst/>
+            </a:prstGeom>
+          </p:spPr>
+          <p:style>
+            <a:lnRef idx="1">
+              <a:schemeClr val="accent1"/>
+            </a:lnRef>
+            <a:fillRef idx="3">
+              <a:schemeClr val="accent1"/>
+            </a:fillRef>
+            <a:effectRef idx="2">
+              <a:schemeClr val="accent1"/>
+            </a:effectRef>
+            <a:fontRef idx="minor">
+              <a:schemeClr val="lt1"/>
+            </a:fontRef>
+          </p:style>
+          <p:txBody>
+            <a:bodyPr rtlCol="0" anchor="ctr" wrap="square" lIns="80000" rIns="50000" tIns="50000" bIns="50000"/>
+            <a:lstStyle/>
+            <a:p>
+              <a:pPr algn="ctr"/>
+              <a:r>
+                <a:rPr sz="900"/>
+                <a:t>+makeSound() : void</a:t>
+              </a:r>
+            </a:p>
+          </p:txBody>
+        </p:sp>
+      </p:grpSp>
+      <p:grpSp>
+        <p:nvGrpSpPr>
+          <p:cNvPr id="11" name="Group 10"/>
+          <p:cNvGrpSpPr/>
           <p:nvPr/>
-        </p:nvSpPr>
-        <p:spPr>
-          <a:xfrm>
-            <a:off x="3724021" y="3643800"/>
-            <a:ext cx="1700000" cy="560000"/>
-          </a:xfrm>
-          <a:prstGeom prst="rect">
-            <a:avLst/>
-          </a:prstGeom>
-        </p:spPr>
-        <p:style>
-          <a:lnRef idx="1">
-            <a:schemeClr val="accent1"/>
-          </a:lnRef>
-          <a:fillRef idx="3">
-            <a:schemeClr val="accent1"/>
-          </a:fillRef>
-          <a:effectRef idx="2">
-            <a:schemeClr val="accent1"/>
-          </a:effectRef>
-          <a:fontRef idx="minor">
-            <a:schemeClr val="lt1"/>
-          </a:fontRef>
-        </p:style>
-        <p:txBody>
-          <a:bodyPr rtlCol="0" anchor="ctr" wrap="square" lIns="80000" rIns="50000" tIns="50000" bIns="50000"/>
-          <a:lstStyle/>
-          <a:p>
-            <a:pPr algn="ctr"/>
-            <a:r>
-              <a:rPr sz="900"/>
-              <a:t>+String name</a:t>
-            </a:r>
-          </a:p>
-          <a:p>
-            <a:r>
-              <a:rPr sz="900"/>
-              <a:t>+int age</a:t>
-            </a:r>
-          </a:p>
-        </p:txBody>
-      </p:sp>
-      <p:sp>
-        <p:nvSpPr>
-          <p:cNvPr id="6" name="Rectangle 5"/>
-          <p:cNvSpPr/>
-          <p:nvPr/>
-        </p:nvSpPr>
-        <p:spPr>
-          <a:xfrm>
-            <a:off x="3724021" y="4203800"/>
-            <a:ext cx="1700000" cy="320000"/>
-          </a:xfrm>
-          <a:prstGeom prst="rect">
-            <a:avLst/>
-          </a:prstGeom>
-        </p:spPr>
-        <p:style>
-          <a:lnRef idx="1">
-            <a:schemeClr val="accent1"/>
-          </a:lnRef>
-          <a:fillRef idx="3">
-            <a:schemeClr val="accent1"/>
-          </a:fillRef>
-          <a:effectRef idx="2">
-            <a:schemeClr val="accent1"/>
-          </a:effectRef>
-          <a:fontRef idx="minor">
-            <a:schemeClr val="lt1"/>
-          </a:fontRef>
-        </p:style>
-        <p:txBody>
-          <a:bodyPr rtlCol="0" anchor="ctr" wrap="square" lIns="80000" rIns="50000" tIns="50000" bIns="50000"/>
-          <a:lstStyle/>
-          <a:p>
-            <a:pPr algn="ctr"/>
-            <a:r>
-              <a:rPr sz="900"/>
-              <a:t>+makeSound() : void</a:t>
-            </a:r>
-          </a:p>
-        </p:txBody>
-      </p:sp>
-      <p:sp>
-        <p:nvSpPr>
-          <p:cNvPr id="7" name="Rectangle 6"/>
-          <p:cNvSpPr/>
-          <p:nvPr/>
-        </p:nvSpPr>
-        <p:spPr>
+        </p:nvGrpSpPr>
+        <p:grpSpPr>
           <a:xfrm>
             <a:off x="6984778" y="4327786"/>
-            <a:ext cx="1700000" cy="440000"/>
-          </a:xfrm>
-          <a:prstGeom prst="rect">
-            <a:avLst/>
-          </a:prstGeom>
-        </p:spPr>
-        <p:style>
-          <a:lnRef idx="1">
-            <a:schemeClr val="accent1"/>
-          </a:lnRef>
-          <a:fillRef idx="3">
-            <a:schemeClr val="accent1"/>
-          </a:fillRef>
-          <a:effectRef idx="2">
-            <a:schemeClr val="accent1"/>
-          </a:effectRef>
-          <a:fontRef idx="minor">
-            <a:schemeClr val="lt1"/>
-          </a:fontRef>
-        </p:style>
-        <p:txBody>
-          <a:bodyPr rtlCol="0" anchor="ctr" wrap="square" lIns="50000" rIns="50000" tIns="60000" bIns="60000"/>
-          <a:lstStyle/>
-          <a:p>
-            <a:pPr algn="ctr"/>
-            <a:r>
-              <a:rPr b="1" sz="1100"/>
-              <a:t>Dog</a:t>
-            </a:r>
-          </a:p>
-        </p:txBody>
-      </p:sp>
-      <p:sp>
-        <p:nvSpPr>
-          <p:cNvPr id="8" name="Rectangle 7"/>
-          <p:cNvSpPr/>
+            <a:ext cx="1700000" cy="1080000"/>
+            <a:chOff x="6984778" y="4327786"/>
+            <a:chExt cx="1700000" cy="1080000"/>
+          </a:xfrm>
+        </p:grpSpPr>
+        <p:sp>
+          <p:nvSpPr>
+            <p:cNvPr id="8" name="Rectangle 7"/>
+            <p:cNvSpPr/>
+            <p:nvPr/>
+          </p:nvSpPr>
+          <p:spPr>
+            <a:xfrm>
+              <a:off x="6984778" y="4327786"/>
+              <a:ext cx="1700000" cy="440000"/>
+            </a:xfrm>
+            <a:prstGeom prst="rect">
+              <a:avLst/>
+            </a:prstGeom>
+          </p:spPr>
+          <p:style>
+            <a:lnRef idx="1">
+              <a:schemeClr val="accent1"/>
+            </a:lnRef>
+            <a:fillRef idx="3">
+              <a:schemeClr val="accent1"/>
+            </a:fillRef>
+            <a:effectRef idx="2">
+              <a:schemeClr val="accent1"/>
+            </a:effectRef>
+            <a:fontRef idx="minor">
+              <a:schemeClr val="lt1"/>
+            </a:fontRef>
+          </p:style>
+          <p:txBody>
+            <a:bodyPr rtlCol="0" anchor="ctr" wrap="square" lIns="50000" rIns="50000" tIns="60000" bIns="60000"/>
+            <a:lstStyle/>
+            <a:p>
+              <a:pPr algn="ctr"/>
+              <a:r>
+                <a:rPr b="1" sz="1100"/>
+                <a:t>Dog</a:t>
+              </a:r>
+            </a:p>
+          </p:txBody>
+        </p:sp>
+        <p:sp>
+          <p:nvSpPr>
+            <p:cNvPr id="9" name="Rectangle 8"/>
+            <p:cNvSpPr/>
+            <p:nvPr/>
+          </p:nvSpPr>
+          <p:spPr>
+            <a:xfrm>
+              <a:off x="6984778" y="4767786"/>
+              <a:ext cx="1700000" cy="320000"/>
+            </a:xfrm>
+            <a:prstGeom prst="rect">
+              <a:avLst/>
+            </a:prstGeom>
+          </p:spPr>
+          <p:style>
+            <a:lnRef idx="1">
+              <a:schemeClr val="accent1"/>
+            </a:lnRef>
+            <a:fillRef idx="3">
+              <a:schemeClr val="accent1"/>
+            </a:fillRef>
+            <a:effectRef idx="2">
+              <a:schemeClr val="accent1"/>
+            </a:effectRef>
+            <a:fontRef idx="minor">
+              <a:schemeClr val="lt1"/>
+            </a:fontRef>
+          </p:style>
+          <p:txBody>
+            <a:bodyPr rtlCol="0" anchor="ctr" wrap="square" lIns="80000" rIns="50000" tIns="50000" bIns="50000"/>
+            <a:lstStyle/>
+            <a:p>
+              <a:pPr algn="ctr"/>
+              <a:r>
+                <a:rPr sz="900"/>
+                <a:t>+String breed</a:t>
+              </a:r>
+            </a:p>
+          </p:txBody>
+        </p:sp>
+        <p:sp>
+          <p:nvSpPr>
+            <p:cNvPr id="10" name="Rectangle 9"/>
+            <p:cNvSpPr/>
+            <p:nvPr/>
+          </p:nvSpPr>
+          <p:spPr>
+            <a:xfrm>
+              <a:off x="6984778" y="5087786"/>
+              <a:ext cx="1700000" cy="320000"/>
+            </a:xfrm>
+            <a:prstGeom prst="rect">
+              <a:avLst/>
+            </a:prstGeom>
+          </p:spPr>
+          <p:style>
+            <a:lnRef idx="1">
+              <a:schemeClr val="accent1"/>
+            </a:lnRef>
+            <a:fillRef idx="3">
+              <a:schemeClr val="accent1"/>
+            </a:fillRef>
+            <a:effectRef idx="2">
+              <a:schemeClr val="accent1"/>
+            </a:effectRef>
+            <a:fontRef idx="minor">
+              <a:schemeClr val="lt1"/>
+            </a:fontRef>
+          </p:style>
+          <p:txBody>
+            <a:bodyPr rtlCol="0" anchor="ctr" wrap="square" lIns="80000" rIns="50000" tIns="50000" bIns="50000"/>
+            <a:lstStyle/>
+            <a:p>
+              <a:pPr algn="ctr"/>
+              <a:r>
+                <a:rPr sz="900"/>
+                <a:t>+fetch() : void</a:t>
+              </a:r>
+            </a:p>
+          </p:txBody>
+        </p:sp>
+      </p:grpSp>
+      <p:grpSp>
+        <p:nvGrpSpPr>
+          <p:cNvPr id="15" name="Group 14"/>
+          <p:cNvGrpSpPr/>
           <p:nvPr/>
-        </p:nvSpPr>
-        <p:spPr>
-          <a:xfrm>
-            <a:off x="6984778" y="4767786"/>
-            <a:ext cx="1700000" cy="320000"/>
-          </a:xfrm>
-          <a:prstGeom prst="rect">
-            <a:avLst/>
-          </a:prstGeom>
-        </p:spPr>
-        <p:style>
-          <a:lnRef idx="1">
-            <a:schemeClr val="accent1"/>
-          </a:lnRef>
-          <a:fillRef idx="3">
-            <a:schemeClr val="accent1"/>
-          </a:fillRef>
-          <a:effectRef idx="2">
-            <a:schemeClr val="accent1"/>
-          </a:effectRef>
-          <a:fontRef idx="minor">
-            <a:schemeClr val="lt1"/>
-          </a:fontRef>
-        </p:style>
-        <p:txBody>
-          <a:bodyPr rtlCol="0" anchor="ctr" wrap="square" lIns="80000" rIns="50000" tIns="50000" bIns="50000"/>
-          <a:lstStyle/>
-          <a:p>
-            <a:pPr algn="ctr"/>
-            <a:r>
-              <a:rPr sz="900"/>
-              <a:t>+String breed</a:t>
-            </a:r>
-          </a:p>
-        </p:txBody>
-      </p:sp>
-      <p:sp>
-        <p:nvSpPr>
-          <p:cNvPr id="9" name="Rectangle 8"/>
-          <p:cNvSpPr/>
-          <p:nvPr/>
-        </p:nvSpPr>
-        <p:spPr>
-          <a:xfrm>
-            <a:off x="6984778" y="5087786"/>
-            <a:ext cx="1700000" cy="320000"/>
-          </a:xfrm>
-          <a:prstGeom prst="rect">
-            <a:avLst/>
-          </a:prstGeom>
-        </p:spPr>
-        <p:style>
-          <a:lnRef idx="1">
-            <a:schemeClr val="accent1"/>
-          </a:lnRef>
-          <a:fillRef idx="3">
-            <a:schemeClr val="accent1"/>
-          </a:fillRef>
-          <a:effectRef idx="2">
-            <a:schemeClr val="accent1"/>
-          </a:effectRef>
-          <a:fontRef idx="minor">
-            <a:schemeClr val="lt1"/>
-          </a:fontRef>
-        </p:style>
-        <p:txBody>
-          <a:bodyPr rtlCol="0" anchor="ctr" wrap="square" lIns="80000" rIns="50000" tIns="50000" bIns="50000"/>
-          <a:lstStyle/>
-          <a:p>
-            <a:pPr algn="ctr"/>
-            <a:r>
-              <a:rPr sz="900"/>
-              <a:t>+fetch() : void</a:t>
-            </a:r>
-          </a:p>
-        </p:txBody>
-      </p:sp>
-      <p:sp>
-        <p:nvSpPr>
-          <p:cNvPr id="10" name="Rectangle 9"/>
-          <p:cNvSpPr/>
-          <p:nvPr/>
-        </p:nvSpPr>
-        <p:spPr>
+        </p:nvGrpSpPr>
+        <p:grpSpPr>
           <a:xfrm>
             <a:off x="457200" y="2317957"/>
-            <a:ext cx="1700000" cy="440000"/>
-          </a:xfrm>
-          <a:prstGeom prst="rect">
-            <a:avLst/>
-          </a:prstGeom>
-        </p:spPr>
-        <p:style>
-          <a:lnRef idx="1">
-            <a:schemeClr val="accent1"/>
-          </a:lnRef>
-          <a:fillRef idx="3">
-            <a:schemeClr val="accent1"/>
-          </a:fillRef>
-          <a:effectRef idx="2">
-            <a:schemeClr val="accent1"/>
-          </a:effectRef>
-          <a:fontRef idx="minor">
-            <a:schemeClr val="lt1"/>
-          </a:fontRef>
-        </p:style>
-        <p:txBody>
-          <a:bodyPr rtlCol="0" anchor="ctr" wrap="square" lIns="50000" rIns="50000" tIns="60000" bIns="60000"/>
-          <a:lstStyle/>
-          <a:p>
-            <a:pPr algn="ctr"/>
-            <a:r>
-              <a:rPr b="1" sz="1100"/>
-              <a:t>Cat</a:t>
-            </a:r>
-          </a:p>
-        </p:txBody>
-      </p:sp>
-      <p:sp>
-        <p:nvSpPr>
-          <p:cNvPr id="11" name="Rectangle 10"/>
-          <p:cNvSpPr/>
-          <p:nvPr/>
-        </p:nvSpPr>
-        <p:spPr>
-          <a:xfrm>
-            <a:off x="457200" y="2757957"/>
-            <a:ext cx="1700000" cy="320000"/>
-          </a:xfrm>
-          <a:prstGeom prst="rect">
-            <a:avLst/>
-          </a:prstGeom>
-        </p:spPr>
-        <p:style>
-          <a:lnRef idx="1">
-            <a:schemeClr val="accent1"/>
-          </a:lnRef>
-          <a:fillRef idx="3">
-            <a:schemeClr val="accent1"/>
-          </a:fillRef>
-          <a:effectRef idx="2">
-            <a:schemeClr val="accent1"/>
-          </a:effectRef>
-          <a:fontRef idx="minor">
-            <a:schemeClr val="lt1"/>
-          </a:fontRef>
-        </p:style>
-        <p:txBody>
-          <a:bodyPr rtlCol="0" anchor="ctr" wrap="square" lIns="80000" rIns="50000" tIns="50000" bIns="50000"/>
-          <a:lstStyle/>
-          <a:p>
-            <a:pPr algn="ctr"/>
-            <a:r>
-              <a:rPr sz="900"/>
-              <a:t>+bool indoor</a:t>
-            </a:r>
-          </a:p>
-        </p:txBody>
-      </p:sp>
-      <p:sp>
-        <p:nvSpPr>
-          <p:cNvPr id="12" name="Rectangle 11"/>
-          <p:cNvSpPr/>
-          <p:nvPr/>
-        </p:nvSpPr>
-        <p:spPr>
-          <a:xfrm>
-            <a:off x="457200" y="3077957"/>
-            <a:ext cx="1700000" cy="320000"/>
-          </a:xfrm>
-          <a:prstGeom prst="rect">
-            <a:avLst/>
-          </a:prstGeom>
-        </p:spPr>
-        <p:style>
-          <a:lnRef idx="1">
-            <a:schemeClr val="accent1"/>
-          </a:lnRef>
-          <a:fillRef idx="3">
-            <a:schemeClr val="accent1"/>
-          </a:fillRef>
-          <a:effectRef idx="2">
-            <a:schemeClr val="accent1"/>
-          </a:effectRef>
-          <a:fontRef idx="minor">
-            <a:schemeClr val="lt1"/>
-          </a:fontRef>
-        </p:style>
-        <p:txBody>
-          <a:bodyPr rtlCol="0" anchor="ctr" wrap="square" lIns="80000" rIns="50000" tIns="50000" bIns="50000"/>
-          <a:lstStyle/>
-          <a:p>
-            <a:pPr algn="ctr"/>
-            <a:r>
-              <a:rPr sz="900"/>
-              <a:t>+purr() : void</a:t>
-            </a:r>
-          </a:p>
-        </p:txBody>
-      </p:sp>
+            <a:ext cx="1700000" cy="1080000"/>
+            <a:chOff x="457200" y="2317957"/>
+            <a:chExt cx="1700000" cy="1080000"/>
+          </a:xfrm>
+        </p:grpSpPr>
+        <p:sp>
+          <p:nvSpPr>
+            <p:cNvPr id="12" name="Rectangle 11"/>
+            <p:cNvSpPr/>
+            <p:nvPr/>
+          </p:nvSpPr>
+          <p:spPr>
+            <a:xfrm>
+              <a:off x="457200" y="2317957"/>
+              <a:ext cx="1700000" cy="440000"/>
+            </a:xfrm>
+            <a:prstGeom prst="rect">
+              <a:avLst/>
+            </a:prstGeom>
+          </p:spPr>
+          <p:style>
+            <a:lnRef idx="1">
+              <a:schemeClr val="accent1"/>
+            </a:lnRef>
+            <a:fillRef idx="3">
+              <a:schemeClr val="accent1"/>
+            </a:fillRef>
+            <a:effectRef idx="2">
+              <a:schemeClr val="accent1"/>
+            </a:effectRef>
+            <a:fontRef idx="minor">
+              <a:schemeClr val="lt1"/>
+            </a:fontRef>
+          </p:style>
+          <p:txBody>
+            <a:bodyPr rtlCol="0" anchor="ctr" wrap="square" lIns="50000" rIns="50000" tIns="60000" bIns="60000"/>
+            <a:lstStyle/>
+            <a:p>
+              <a:pPr algn="ctr"/>
+              <a:r>
+                <a:rPr b="1" sz="1100"/>
+                <a:t>Cat</a:t>
+              </a:r>
+            </a:p>
+          </p:txBody>
+        </p:sp>
+        <p:sp>
+          <p:nvSpPr>
+            <p:cNvPr id="13" name="Rectangle 12"/>
+            <p:cNvSpPr/>
+            <p:nvPr/>
+          </p:nvSpPr>
+          <p:spPr>
+            <a:xfrm>
+              <a:off x="457200" y="2757957"/>
+              <a:ext cx="1700000" cy="320000"/>
+            </a:xfrm>
+            <a:prstGeom prst="rect">
+              <a:avLst/>
+            </a:prstGeom>
+          </p:spPr>
+          <p:style>
+            <a:lnRef idx="1">
+              <a:schemeClr val="accent1"/>
+            </a:lnRef>
+            <a:fillRef idx="3">
+              <a:schemeClr val="accent1"/>
+            </a:fillRef>
+            <a:effectRef idx="2">
+              <a:schemeClr val="accent1"/>
+            </a:effectRef>
+            <a:fontRef idx="minor">
+              <a:schemeClr val="lt1"/>
+            </a:fontRef>
+          </p:style>
+          <p:txBody>
+            <a:bodyPr rtlCol="0" anchor="ctr" wrap="square" lIns="80000" rIns="50000" tIns="50000" bIns="50000"/>
+            <a:lstStyle/>
+            <a:p>
+              <a:pPr algn="ctr"/>
+              <a:r>
+                <a:rPr sz="900"/>
+                <a:t>+bool indoor</a:t>
+              </a:r>
+            </a:p>
+          </p:txBody>
+        </p:sp>
+        <p:sp>
+          <p:nvSpPr>
+            <p:cNvPr id="14" name="Rectangle 13"/>
+            <p:cNvSpPr/>
+            <p:nvPr/>
+          </p:nvSpPr>
+          <p:spPr>
+            <a:xfrm>
+              <a:off x="457200" y="3077957"/>
+              <a:ext cx="1700000" cy="320000"/>
+            </a:xfrm>
+            <a:prstGeom prst="rect">
+              <a:avLst/>
+            </a:prstGeom>
+          </p:spPr>
+          <p:style>
+            <a:lnRef idx="1">
+              <a:schemeClr val="accent1"/>
+            </a:lnRef>
+            <a:fillRef idx="3">
+              <a:schemeClr val="accent1"/>
+            </a:fillRef>
+            <a:effectRef idx="2">
+              <a:schemeClr val="accent1"/>
+            </a:effectRef>
+            <a:fontRef idx="minor">
+              <a:schemeClr val="lt1"/>
+            </a:fontRef>
+          </p:style>
+          <p:txBody>
+            <a:bodyPr rtlCol="0" anchor="ctr" wrap="square" lIns="80000" rIns="50000" tIns="50000" bIns="50000"/>
+            <a:lstStyle/>
+            <a:p>
+              <a:pPr algn="ctr"/>
+              <a:r>
+                <a:rPr sz="900"/>
+                <a:t>+purr() : void</a:t>
+              </a:r>
+            </a:p>
+          </p:txBody>
+        </p:sp>
+      </p:grpSp>
       <p:cxnSp>
         <p:nvCxnSpPr>
-          <p:cNvPr id="13" name="Connector 12"/>
+          <p:cNvPr id="16" name="Connector 15"/>
           <p:cNvCxnSpPr>
             <a:stCxn id="4" idx="1"/>
-            <a:endCxn id="7" idx="3"/>
+            <a:endCxn id="8" idx="3"/>
           </p:cNvCxnSpPr>
           <p:nvPr/>
         </p:nvCxnSpPr>
@@ -5314,6 +5359,9 @@
           <a:prstGeom prst="line">
             <a:avLst/>
           </a:prstGeom>
+          <a:ln>
+            <a:tailEnd type="triangle" w="lg" len="lg"/>
+          </a:ln>
         </p:spPr>
         <p:style>
           <a:lnRef idx="2">
@@ -5332,10 +5380,10 @@
       </p:cxnSp>
       <p:cxnSp>
         <p:nvCxnSpPr>
-          <p:cNvPr id="14" name="Connector 13"/>
+          <p:cNvPr id="17" name="Connector 16"/>
           <p:cNvCxnSpPr>
             <a:stCxn id="4" idx="3"/>
-            <a:endCxn id="10" idx="1"/>
+            <a:endCxn id="12" idx="1"/>
           </p:cNvCxnSpPr>
           <p:nvPr/>
         </p:nvCxnSpPr>
@@ -5347,6 +5395,9 @@
           <a:prstGeom prst="line">
             <a:avLst/>
           </a:prstGeom>
+          <a:ln>
+            <a:tailEnd type="triangle" w="lg" len="lg"/>
+          </a:ln>
         </p:spPr>
         <p:style>
           <a:lnRef idx="2">

--- a/demo_full.pptx
+++ b/demo_full.pptx
@@ -4900,7 +4900,7 @@
           <a:lstStyle/>
           <a:p>
             <a:r>
-              <a:t>4. クラス図（Class Diagram）</a:t>
+              <a:t>4. クラス図（Class Diagram）- 全接続タイプ</a:t>
             </a:r>
           </a:p>
         </p:txBody>
@@ -4930,10 +4930,10 @@
         </p:nvGrpSpPr>
         <p:grpSpPr>
           <a:xfrm>
-            <a:off x="3724021" y="3203800"/>
-            <a:ext cx="1700000" cy="1320000"/>
-            <a:chOff x="3724021" y="3203800"/>
-            <a:chExt cx="1700000" cy="1320000"/>
+            <a:off x="2646128" y="3712943"/>
+            <a:ext cx="1700000" cy="1080000"/>
+            <a:chOff x="2646128" y="3712943"/>
+            <a:chExt cx="1700000" cy="1080000"/>
           </a:xfrm>
         </p:grpSpPr>
         <p:sp>
@@ -4944,7 +4944,7 @@
           </p:nvSpPr>
           <p:spPr>
             <a:xfrm>
-              <a:off x="3724021" y="3203800"/>
+              <a:off x="2646128" y="3712943"/>
               <a:ext cx="1700000" cy="440000"/>
             </a:xfrm>
             <a:prstGeom prst="rect">
@@ -4972,7 +4972,7 @@
               <a:pPr algn="ctr"/>
               <a:r>
                 <a:rPr b="1" sz="1100"/>
-                <a:t>Animal</a:t>
+                <a:t>Vehicle</a:t>
               </a:r>
             </a:p>
           </p:txBody>
@@ -4985,8 +4985,556 @@
           </p:nvSpPr>
           <p:spPr>
             <a:xfrm>
-              <a:off x="3724021" y="3643800"/>
-              <a:ext cx="1700000" cy="560000"/>
+              <a:off x="2646128" y="4152943"/>
+              <a:ext cx="1700000" cy="320000"/>
+            </a:xfrm>
+            <a:prstGeom prst="rect">
+              <a:avLst/>
+            </a:prstGeom>
+          </p:spPr>
+          <p:style>
+            <a:lnRef idx="1">
+              <a:schemeClr val="accent1"/>
+            </a:lnRef>
+            <a:fillRef idx="3">
+              <a:schemeClr val="accent1"/>
+            </a:fillRef>
+            <a:effectRef idx="2">
+              <a:schemeClr val="accent1"/>
+            </a:effectRef>
+            <a:fontRef idx="minor">
+              <a:schemeClr val="lt1"/>
+            </a:fontRef>
+          </p:style>
+          <p:txBody>
+            <a:bodyPr rtlCol="0" anchor="ctr" wrap="square" lIns="80000" rIns="50000" tIns="50000" bIns="50000"/>
+            <a:lstStyle/>
+            <a:p>
+              <a:pPr algn="ctr"/>
+              <a:r>
+                <a:rPr sz="900"/>
+                <a:t>+String make</a:t>
+              </a:r>
+            </a:p>
+          </p:txBody>
+        </p:sp>
+        <p:sp>
+          <p:nvSpPr>
+            <p:cNvPr id="6" name="Rectangle 5"/>
+            <p:cNvSpPr/>
+            <p:nvPr/>
+          </p:nvSpPr>
+          <p:spPr>
+            <a:xfrm>
+              <a:off x="2646128" y="4472943"/>
+              <a:ext cx="1700000" cy="320000"/>
+            </a:xfrm>
+            <a:prstGeom prst="rect">
+              <a:avLst/>
+            </a:prstGeom>
+          </p:spPr>
+          <p:style>
+            <a:lnRef idx="1">
+              <a:schemeClr val="accent1"/>
+            </a:lnRef>
+            <a:fillRef idx="3">
+              <a:schemeClr val="accent1"/>
+            </a:fillRef>
+            <a:effectRef idx="2">
+              <a:schemeClr val="accent1"/>
+            </a:effectRef>
+            <a:fontRef idx="minor">
+              <a:schemeClr val="lt1"/>
+            </a:fontRef>
+          </p:style>
+          <p:txBody>
+            <a:bodyPr rtlCol="0" anchor="ctr" wrap="square" lIns="80000" rIns="50000" tIns="50000" bIns="50000"/>
+            <a:lstStyle/>
+            <a:p>
+              <a:pPr algn="ctr"/>
+              <a:r>
+                <a:rPr sz="900"/>
+                <a:t>+drive() : void</a:t>
+              </a:r>
+            </a:p>
+          </p:txBody>
+        </p:sp>
+      </p:grpSp>
+      <p:grpSp>
+        <p:nvGrpSpPr>
+          <p:cNvPr id="11" name="Group 10"/>
+          <p:cNvGrpSpPr/>
+          <p:nvPr/>
+        </p:nvGrpSpPr>
+        <p:grpSpPr>
+          <a:xfrm>
+            <a:off x="2412505" y="3517401"/>
+            <a:ext cx="1700000" cy="1080000"/>
+            <a:chOff x="2412505" y="3517401"/>
+            <a:chExt cx="1700000" cy="1080000"/>
+          </a:xfrm>
+        </p:grpSpPr>
+        <p:sp>
+          <p:nvSpPr>
+            <p:cNvPr id="8" name="Rectangle 7"/>
+            <p:cNvSpPr/>
+            <p:nvPr/>
+          </p:nvSpPr>
+          <p:spPr>
+            <a:xfrm>
+              <a:off x="2412505" y="3517401"/>
+              <a:ext cx="1700000" cy="440000"/>
+            </a:xfrm>
+            <a:prstGeom prst="rect">
+              <a:avLst/>
+            </a:prstGeom>
+          </p:spPr>
+          <p:style>
+            <a:lnRef idx="1">
+              <a:schemeClr val="accent1"/>
+            </a:lnRef>
+            <a:fillRef idx="3">
+              <a:schemeClr val="accent1"/>
+            </a:fillRef>
+            <a:effectRef idx="2">
+              <a:schemeClr val="accent1"/>
+            </a:effectRef>
+            <a:fontRef idx="minor">
+              <a:schemeClr val="lt1"/>
+            </a:fontRef>
+          </p:style>
+          <p:txBody>
+            <a:bodyPr rtlCol="0" anchor="ctr" wrap="square" lIns="50000" rIns="50000" tIns="60000" bIns="60000"/>
+            <a:lstStyle/>
+            <a:p>
+              <a:pPr algn="ctr"/>
+              <a:r>
+                <a:rPr b="1" sz="1100"/>
+                <a:t>Car</a:t>
+              </a:r>
+            </a:p>
+          </p:txBody>
+        </p:sp>
+        <p:sp>
+          <p:nvSpPr>
+            <p:cNvPr id="9" name="Rectangle 8"/>
+            <p:cNvSpPr/>
+            <p:nvPr/>
+          </p:nvSpPr>
+          <p:spPr>
+            <a:xfrm>
+              <a:off x="2412505" y="3957401"/>
+              <a:ext cx="1700000" cy="320000"/>
+            </a:xfrm>
+            <a:prstGeom prst="rect">
+              <a:avLst/>
+            </a:prstGeom>
+          </p:spPr>
+          <p:style>
+            <a:lnRef idx="1">
+              <a:schemeClr val="accent1"/>
+            </a:lnRef>
+            <a:fillRef idx="3">
+              <a:schemeClr val="accent1"/>
+            </a:fillRef>
+            <a:effectRef idx="2">
+              <a:schemeClr val="accent1"/>
+            </a:effectRef>
+            <a:fontRef idx="minor">
+              <a:schemeClr val="lt1"/>
+            </a:fontRef>
+          </p:style>
+          <p:txBody>
+            <a:bodyPr rtlCol="0" anchor="ctr" wrap="square" lIns="80000" rIns="50000" tIns="50000" bIns="50000"/>
+            <a:lstStyle/>
+            <a:p>
+              <a:pPr algn="ctr"/>
+              <a:r>
+                <a:rPr sz="900"/>
+                <a:t>+int doors</a:t>
+              </a:r>
+            </a:p>
+          </p:txBody>
+        </p:sp>
+        <p:sp>
+          <p:nvSpPr>
+            <p:cNvPr id="10" name="Rectangle 9"/>
+            <p:cNvSpPr/>
+            <p:nvPr/>
+          </p:nvSpPr>
+          <p:spPr>
+            <a:xfrm>
+              <a:off x="2412505" y="4277401"/>
+              <a:ext cx="1700000" cy="320000"/>
+            </a:xfrm>
+            <a:prstGeom prst="rect">
+              <a:avLst/>
+            </a:prstGeom>
+          </p:spPr>
+          <p:style>
+            <a:lnRef idx="1">
+              <a:schemeClr val="accent1"/>
+            </a:lnRef>
+            <a:fillRef idx="3">
+              <a:schemeClr val="accent1"/>
+            </a:fillRef>
+            <a:effectRef idx="2">
+              <a:schemeClr val="accent1"/>
+            </a:effectRef>
+            <a:fontRef idx="minor">
+              <a:schemeClr val="lt1"/>
+            </a:fontRef>
+          </p:style>
+          <p:txBody>
+            <a:bodyPr rtlCol="0" anchor="ctr" wrap="square" lIns="80000" rIns="50000" tIns="50000" bIns="50000"/>
+            <a:lstStyle/>
+            <a:p>
+              <a:pPr algn="ctr"/>
+              <a:r>
+                <a:rPr sz="900"/>
+                <a:t>+honk() : void</a:t>
+              </a:r>
+            </a:p>
+          </p:txBody>
+        </p:sp>
+      </p:grpSp>
+      <p:grpSp>
+        <p:nvGrpSpPr>
+          <p:cNvPr id="15" name="Group 14"/>
+          <p:cNvGrpSpPr/>
+          <p:nvPr/>
+        </p:nvGrpSpPr>
+        <p:grpSpPr>
+          <a:xfrm>
+            <a:off x="2456119" y="2008198"/>
+            <a:ext cx="1700000" cy="1080000"/>
+            <a:chOff x="2456119" y="2008198"/>
+            <a:chExt cx="1700000" cy="1080000"/>
+          </a:xfrm>
+        </p:grpSpPr>
+        <p:sp>
+          <p:nvSpPr>
+            <p:cNvPr id="12" name="Rectangle 11"/>
+            <p:cNvSpPr/>
+            <p:nvPr/>
+          </p:nvSpPr>
+          <p:spPr>
+            <a:xfrm>
+              <a:off x="2456119" y="2008198"/>
+              <a:ext cx="1700000" cy="440000"/>
+            </a:xfrm>
+            <a:prstGeom prst="rect">
+              <a:avLst/>
+            </a:prstGeom>
+          </p:spPr>
+          <p:style>
+            <a:lnRef idx="1">
+              <a:schemeClr val="accent1"/>
+            </a:lnRef>
+            <a:fillRef idx="3">
+              <a:schemeClr val="accent1"/>
+            </a:fillRef>
+            <a:effectRef idx="2">
+              <a:schemeClr val="accent1"/>
+            </a:effectRef>
+            <a:fontRef idx="minor">
+              <a:schemeClr val="lt1"/>
+            </a:fontRef>
+          </p:style>
+          <p:txBody>
+            <a:bodyPr rtlCol="0" anchor="ctr" wrap="square" lIns="50000" rIns="50000" tIns="60000" bIns="60000"/>
+            <a:lstStyle/>
+            <a:p>
+              <a:pPr algn="ctr"/>
+              <a:r>
+                <a:rPr b="1" sz="1100"/>
+                <a:t>Engine</a:t>
+              </a:r>
+            </a:p>
+          </p:txBody>
+        </p:sp>
+        <p:sp>
+          <p:nvSpPr>
+            <p:cNvPr id="13" name="Rectangle 12"/>
+            <p:cNvSpPr/>
+            <p:nvPr/>
+          </p:nvSpPr>
+          <p:spPr>
+            <a:xfrm>
+              <a:off x="2456119" y="2448198"/>
+              <a:ext cx="1700000" cy="320000"/>
+            </a:xfrm>
+            <a:prstGeom prst="rect">
+              <a:avLst/>
+            </a:prstGeom>
+          </p:spPr>
+          <p:style>
+            <a:lnRef idx="1">
+              <a:schemeClr val="accent1"/>
+            </a:lnRef>
+            <a:fillRef idx="3">
+              <a:schemeClr val="accent1"/>
+            </a:fillRef>
+            <a:effectRef idx="2">
+              <a:schemeClr val="accent1"/>
+            </a:effectRef>
+            <a:fontRef idx="minor">
+              <a:schemeClr val="lt1"/>
+            </a:fontRef>
+          </p:style>
+          <p:txBody>
+            <a:bodyPr rtlCol="0" anchor="ctr" wrap="square" lIns="80000" rIns="50000" tIns="50000" bIns="50000"/>
+            <a:lstStyle/>
+            <a:p>
+              <a:pPr algn="ctr"/>
+              <a:r>
+                <a:rPr sz="900"/>
+                <a:t>+int cylinders</a:t>
+              </a:r>
+            </a:p>
+          </p:txBody>
+        </p:sp>
+        <p:sp>
+          <p:nvSpPr>
+            <p:cNvPr id="14" name="Rectangle 13"/>
+            <p:cNvSpPr/>
+            <p:nvPr/>
+          </p:nvSpPr>
+          <p:spPr>
+            <a:xfrm>
+              <a:off x="2456119" y="2768198"/>
+              <a:ext cx="1700000" cy="320000"/>
+            </a:xfrm>
+            <a:prstGeom prst="rect">
+              <a:avLst/>
+            </a:prstGeom>
+          </p:spPr>
+          <p:style>
+            <a:lnRef idx="1">
+              <a:schemeClr val="accent1"/>
+            </a:lnRef>
+            <a:fillRef idx="3">
+              <a:schemeClr val="accent1"/>
+            </a:fillRef>
+            <a:effectRef idx="2">
+              <a:schemeClr val="accent1"/>
+            </a:effectRef>
+            <a:fontRef idx="minor">
+              <a:schemeClr val="lt1"/>
+            </a:fontRef>
+          </p:style>
+          <p:txBody>
+            <a:bodyPr rtlCol="0" anchor="ctr" wrap="square" lIns="80000" rIns="50000" tIns="50000" bIns="50000"/>
+            <a:lstStyle/>
+            <a:p>
+              <a:pPr algn="ctr"/>
+              <a:r>
+                <a:rPr sz="900"/>
+                <a:t>+ignite() : void</a:t>
+              </a:r>
+            </a:p>
+          </p:txBody>
+        </p:sp>
+      </p:grpSp>
+      <p:grpSp>
+        <p:nvGrpSpPr>
+          <p:cNvPr id="19" name="Group 18"/>
+          <p:cNvGrpSpPr/>
+          <p:nvPr/>
+        </p:nvGrpSpPr>
+        <p:grpSpPr>
+          <a:xfrm>
+            <a:off x="1193357" y="3805983"/>
+            <a:ext cx="1700000" cy="1080000"/>
+            <a:chOff x="1193357" y="3805983"/>
+            <a:chExt cx="1700000" cy="1080000"/>
+          </a:xfrm>
+        </p:grpSpPr>
+        <p:sp>
+          <p:nvSpPr>
+            <p:cNvPr id="16" name="Rectangle 15"/>
+            <p:cNvSpPr/>
+            <p:nvPr/>
+          </p:nvSpPr>
+          <p:spPr>
+            <a:xfrm>
+              <a:off x="1193357" y="3805983"/>
+              <a:ext cx="1700000" cy="440000"/>
+            </a:xfrm>
+            <a:prstGeom prst="rect">
+              <a:avLst/>
+            </a:prstGeom>
+          </p:spPr>
+          <p:style>
+            <a:lnRef idx="1">
+              <a:schemeClr val="accent1"/>
+            </a:lnRef>
+            <a:fillRef idx="3">
+              <a:schemeClr val="accent1"/>
+            </a:fillRef>
+            <a:effectRef idx="2">
+              <a:schemeClr val="accent1"/>
+            </a:effectRef>
+            <a:fontRef idx="minor">
+              <a:schemeClr val="lt1"/>
+            </a:fontRef>
+          </p:style>
+          <p:txBody>
+            <a:bodyPr rtlCol="0" anchor="ctr" wrap="square" lIns="50000" rIns="50000" tIns="60000" bIns="60000"/>
+            <a:lstStyle/>
+            <a:p>
+              <a:pPr algn="ctr"/>
+              <a:r>
+                <a:rPr b="1" sz="1100"/>
+                <a:t>Wheel</a:t>
+              </a:r>
+            </a:p>
+          </p:txBody>
+        </p:sp>
+        <p:sp>
+          <p:nvSpPr>
+            <p:cNvPr id="17" name="Rectangle 16"/>
+            <p:cNvSpPr/>
+            <p:nvPr/>
+          </p:nvSpPr>
+          <p:spPr>
+            <a:xfrm>
+              <a:off x="1193357" y="4245983"/>
+              <a:ext cx="1700000" cy="320000"/>
+            </a:xfrm>
+            <a:prstGeom prst="rect">
+              <a:avLst/>
+            </a:prstGeom>
+          </p:spPr>
+          <p:style>
+            <a:lnRef idx="1">
+              <a:schemeClr val="accent1"/>
+            </a:lnRef>
+            <a:fillRef idx="3">
+              <a:schemeClr val="accent1"/>
+            </a:fillRef>
+            <a:effectRef idx="2">
+              <a:schemeClr val="accent1"/>
+            </a:effectRef>
+            <a:fontRef idx="minor">
+              <a:schemeClr val="lt1"/>
+            </a:fontRef>
+          </p:style>
+          <p:txBody>
+            <a:bodyPr rtlCol="0" anchor="ctr" wrap="square" lIns="80000" rIns="50000" tIns="50000" bIns="50000"/>
+            <a:lstStyle/>
+            <a:p>
+              <a:pPr algn="ctr"/>
+              <a:r>
+                <a:rPr sz="900"/>
+                <a:t>+int size</a:t>
+              </a:r>
+            </a:p>
+          </p:txBody>
+        </p:sp>
+        <p:sp>
+          <p:nvSpPr>
+            <p:cNvPr id="18" name="Rectangle 17"/>
+            <p:cNvSpPr/>
+            <p:nvPr/>
+          </p:nvSpPr>
+          <p:spPr>
+            <a:xfrm>
+              <a:off x="1193357" y="4565983"/>
+              <a:ext cx="1700000" cy="320000"/>
+            </a:xfrm>
+            <a:prstGeom prst="rect">
+              <a:avLst/>
+            </a:prstGeom>
+          </p:spPr>
+          <p:style>
+            <a:lnRef idx="1">
+              <a:schemeClr val="accent1"/>
+            </a:lnRef>
+            <a:fillRef idx="3">
+              <a:schemeClr val="accent1"/>
+            </a:fillRef>
+            <a:effectRef idx="2">
+              <a:schemeClr val="accent1"/>
+            </a:effectRef>
+            <a:fontRef idx="minor">
+              <a:schemeClr val="lt1"/>
+            </a:fontRef>
+          </p:style>
+          <p:txBody>
+            <a:bodyPr rtlCol="0" anchor="ctr" wrap="square" lIns="80000" rIns="50000" tIns="50000" bIns="50000"/>
+            <a:lstStyle/>
+            <a:p>
+              <a:pPr algn="ctr"/>
+            </a:p>
+          </p:txBody>
+        </p:sp>
+      </p:grpSp>
+      <p:grpSp>
+        <p:nvGrpSpPr>
+          <p:cNvPr id="23" name="Group 22"/>
+          <p:cNvGrpSpPr/>
+          <p:nvPr/>
+        </p:nvGrpSpPr>
+        <p:grpSpPr>
+          <a:xfrm>
+            <a:off x="4888961" y="3071587"/>
+            <a:ext cx="1700000" cy="1080000"/>
+            <a:chOff x="4888961" y="3071587"/>
+            <a:chExt cx="1700000" cy="1080000"/>
+          </a:xfrm>
+        </p:grpSpPr>
+        <p:sp>
+          <p:nvSpPr>
+            <p:cNvPr id="20" name="Rectangle 19"/>
+            <p:cNvSpPr/>
+            <p:nvPr/>
+          </p:nvSpPr>
+          <p:spPr>
+            <a:xfrm>
+              <a:off x="4888961" y="3071587"/>
+              <a:ext cx="1700000" cy="440000"/>
+            </a:xfrm>
+            <a:prstGeom prst="rect">
+              <a:avLst/>
+            </a:prstGeom>
+          </p:spPr>
+          <p:style>
+            <a:lnRef idx="1">
+              <a:schemeClr val="accent1"/>
+            </a:lnRef>
+            <a:fillRef idx="3">
+              <a:schemeClr val="accent1"/>
+            </a:fillRef>
+            <a:effectRef idx="2">
+              <a:schemeClr val="accent1"/>
+            </a:effectRef>
+            <a:fontRef idx="minor">
+              <a:schemeClr val="lt1"/>
+            </a:fontRef>
+          </p:style>
+          <p:txBody>
+            <a:bodyPr rtlCol="0" anchor="ctr" wrap="square" lIns="50000" rIns="50000" tIns="60000" bIns="60000"/>
+            <a:lstStyle/>
+            <a:p>
+              <a:pPr algn="ctr"/>
+              <a:r>
+                <a:rPr b="1" sz="1100"/>
+                <a:t>Driver</a:t>
+              </a:r>
+            </a:p>
+          </p:txBody>
+        </p:sp>
+        <p:sp>
+          <p:nvSpPr>
+            <p:cNvPr id="21" name="Rectangle 20"/>
+            <p:cNvSpPr/>
+            <p:nvPr/>
+          </p:nvSpPr>
+          <p:spPr>
+            <a:xfrm>
+              <a:off x="4888961" y="3511587"/>
+              <a:ext cx="1700000" cy="320000"/>
             </a:xfrm>
             <a:prstGeom prst="rect">
               <a:avLst/>
@@ -5016,23 +5564,17 @@
                 <a:t>+String name</a:t>
               </a:r>
             </a:p>
-            <a:p>
-              <a:r>
-                <a:rPr sz="900"/>
-                <a:t>+int age</a:t>
-              </a:r>
-            </a:p>
           </p:txBody>
         </p:sp>
         <p:sp>
           <p:nvSpPr>
-            <p:cNvPr id="6" name="Rectangle 5"/>
+            <p:cNvPr id="22" name="Rectangle 21"/>
             <p:cNvSpPr/>
             <p:nvPr/>
           </p:nvSpPr>
           <p:spPr>
             <a:xfrm>
-              <a:off x="3724021" y="4203800"/>
+              <a:off x="4888961" y="3831587"/>
               <a:ext cx="1700000" cy="320000"/>
             </a:xfrm>
             <a:prstGeom prst="rect">
@@ -5060,7 +5602,7 @@
               <a:pPr algn="ctr"/>
               <a:r>
                 <a:rPr sz="900"/>
-                <a:t>+makeSound() : void</a:t>
+                <a:t>+operate() : void</a:t>
               </a:r>
             </a:p>
           </p:txBody>
@@ -5068,27 +5610,27 @@
       </p:grpSp>
       <p:grpSp>
         <p:nvGrpSpPr>
-          <p:cNvPr id="11" name="Group 10"/>
+          <p:cNvPr id="27" name="Group 26"/>
           <p:cNvGrpSpPr/>
           <p:nvPr/>
         </p:nvGrpSpPr>
         <p:grpSpPr>
           <a:xfrm>
-            <a:off x="6984778" y="4327786"/>
+            <a:off x="2988896" y="4958861"/>
             <a:ext cx="1700000" cy="1080000"/>
-            <a:chOff x="6984778" y="4327786"/>
+            <a:chOff x="2988896" y="4958861"/>
             <a:chExt cx="1700000" cy="1080000"/>
           </a:xfrm>
         </p:grpSpPr>
         <p:sp>
           <p:nvSpPr>
-            <p:cNvPr id="8" name="Rectangle 7"/>
+            <p:cNvPr id="24" name="Rectangle 23"/>
             <p:cNvSpPr/>
             <p:nvPr/>
           </p:nvSpPr>
           <p:spPr>
             <a:xfrm>
-              <a:off x="6984778" y="4327786"/>
+              <a:off x="2988896" y="4958861"/>
               <a:ext cx="1700000" cy="440000"/>
             </a:xfrm>
             <a:prstGeom prst="rect">
@@ -5116,20 +5658,57 @@
               <a:pPr algn="ctr"/>
               <a:r>
                 <a:rPr b="1" sz="1100"/>
-                <a:t>Dog</a:t>
+                <a:t>ILogger</a:t>
               </a:r>
             </a:p>
           </p:txBody>
         </p:sp>
         <p:sp>
           <p:nvSpPr>
-            <p:cNvPr id="9" name="Rectangle 8"/>
+            <p:cNvPr id="25" name="Rectangle 24"/>
             <p:cNvSpPr/>
             <p:nvPr/>
           </p:nvSpPr>
           <p:spPr>
             <a:xfrm>
-              <a:off x="6984778" y="4767786"/>
+              <a:off x="2988896" y="5398861"/>
+              <a:ext cx="1700000" cy="320000"/>
+            </a:xfrm>
+            <a:prstGeom prst="rect">
+              <a:avLst/>
+            </a:prstGeom>
+          </p:spPr>
+          <p:style>
+            <a:lnRef idx="1">
+              <a:schemeClr val="accent1"/>
+            </a:lnRef>
+            <a:fillRef idx="3">
+              <a:schemeClr val="accent1"/>
+            </a:fillRef>
+            <a:effectRef idx="2">
+              <a:schemeClr val="accent1"/>
+            </a:effectRef>
+            <a:fontRef idx="minor">
+              <a:schemeClr val="lt1"/>
+            </a:fontRef>
+          </p:style>
+          <p:txBody>
+            <a:bodyPr rtlCol="0" anchor="ctr" wrap="square" lIns="80000" rIns="50000" tIns="50000" bIns="50000"/>
+            <a:lstStyle/>
+            <a:p>
+              <a:pPr algn="ctr"/>
+            </a:p>
+          </p:txBody>
+        </p:sp>
+        <p:sp>
+          <p:nvSpPr>
+            <p:cNvPr id="26" name="Rectangle 25"/>
+            <p:cNvSpPr/>
+            <p:nvPr/>
+          </p:nvSpPr>
+          <p:spPr>
+            <a:xfrm>
+              <a:off x="2988896" y="5718861"/>
               <a:ext cx="1700000" cy="320000"/>
             </a:xfrm>
             <a:prstGeom prst="rect">
@@ -5157,48 +5736,7 @@
               <a:pPr algn="ctr"/>
               <a:r>
                 <a:rPr sz="900"/>
-                <a:t>+String breed</a:t>
-              </a:r>
-            </a:p>
-          </p:txBody>
-        </p:sp>
-        <p:sp>
-          <p:nvSpPr>
-            <p:cNvPr id="10" name="Rectangle 9"/>
-            <p:cNvSpPr/>
-            <p:nvPr/>
-          </p:nvSpPr>
-          <p:spPr>
-            <a:xfrm>
-              <a:off x="6984778" y="5087786"/>
-              <a:ext cx="1700000" cy="320000"/>
-            </a:xfrm>
-            <a:prstGeom prst="rect">
-              <a:avLst/>
-            </a:prstGeom>
-          </p:spPr>
-          <p:style>
-            <a:lnRef idx="1">
-              <a:schemeClr val="accent1"/>
-            </a:lnRef>
-            <a:fillRef idx="3">
-              <a:schemeClr val="accent1"/>
-            </a:fillRef>
-            <a:effectRef idx="2">
-              <a:schemeClr val="accent1"/>
-            </a:effectRef>
-            <a:fontRef idx="minor">
-              <a:schemeClr val="lt1"/>
-            </a:fontRef>
-          </p:style>
-          <p:txBody>
-            <a:bodyPr rtlCol="0" anchor="ctr" wrap="square" lIns="80000" rIns="50000" tIns="50000" bIns="50000"/>
-            <a:lstStyle/>
-            <a:p>
-              <a:pPr algn="ctr"/>
-              <a:r>
-                <a:rPr sz="900"/>
-                <a:t>+fetch() : void</a:t>
+                <a:t>+log() : void</a:t>
               </a:r>
             </a:p>
           </p:txBody>
@@ -5206,27 +5744,27 @@
       </p:grpSp>
       <p:grpSp>
         <p:nvGrpSpPr>
-          <p:cNvPr id="15" name="Group 14"/>
+          <p:cNvPr id="31" name="Group 30"/>
           <p:cNvGrpSpPr/>
           <p:nvPr/>
         </p:nvGrpSpPr>
         <p:grpSpPr>
           <a:xfrm>
-            <a:off x="457200" y="2317957"/>
+            <a:off x="6986800" y="2728920"/>
             <a:ext cx="1700000" cy="1080000"/>
-            <a:chOff x="457200" y="2317957"/>
+            <a:chOff x="6986800" y="2728920"/>
             <a:chExt cx="1700000" cy="1080000"/>
           </a:xfrm>
         </p:grpSpPr>
         <p:sp>
           <p:nvSpPr>
-            <p:cNvPr id="12" name="Rectangle 11"/>
+            <p:cNvPr id="28" name="Rectangle 27"/>
             <p:cNvSpPr/>
             <p:nvPr/>
           </p:nvSpPr>
           <p:spPr>
             <a:xfrm>
-              <a:off x="457200" y="2317957"/>
+              <a:off x="6986800" y="2728920"/>
               <a:ext cx="1700000" cy="440000"/>
             </a:xfrm>
             <a:prstGeom prst="rect">
@@ -5254,20 +5792,20 @@
               <a:pPr algn="ctr"/>
               <a:r>
                 <a:rPr b="1" sz="1100"/>
-                <a:t>Cat</a:t>
+                <a:t>Fuel</a:t>
               </a:r>
             </a:p>
           </p:txBody>
         </p:sp>
         <p:sp>
           <p:nvSpPr>
-            <p:cNvPr id="13" name="Rectangle 12"/>
+            <p:cNvPr id="29" name="Rectangle 28"/>
             <p:cNvSpPr/>
             <p:nvPr/>
           </p:nvSpPr>
           <p:spPr>
             <a:xfrm>
-              <a:off x="457200" y="2757957"/>
+              <a:off x="6986800" y="3168920"/>
               <a:ext cx="1700000" cy="320000"/>
             </a:xfrm>
             <a:prstGeom prst="rect">
@@ -5293,22 +5831,18 @@
             <a:lstStyle/>
             <a:p>
               <a:pPr algn="ctr"/>
-              <a:r>
-                <a:rPr sz="900"/>
-                <a:t>+bool indoor</a:t>
-              </a:r>
             </a:p>
           </p:txBody>
         </p:sp>
         <p:sp>
           <p:nvSpPr>
-            <p:cNvPr id="14" name="Rectangle 13"/>
+            <p:cNvPr id="30" name="Rectangle 29"/>
             <p:cNvSpPr/>
             <p:nvPr/>
           </p:nvSpPr>
           <p:spPr>
             <a:xfrm>
-              <a:off x="457200" y="3077957"/>
+              <a:off x="6986800" y="3488920"/>
               <a:ext cx="1700000" cy="320000"/>
             </a:xfrm>
             <a:prstGeom prst="rect">
@@ -5334,27 +5868,153 @@
             <a:lstStyle/>
             <a:p>
               <a:pPr algn="ctr"/>
+            </a:p>
+          </p:txBody>
+        </p:sp>
+      </p:grpSp>
+      <p:grpSp>
+        <p:nvGrpSpPr>
+          <p:cNvPr id="35" name="Group 34"/>
+          <p:cNvGrpSpPr/>
+          <p:nvPr/>
+        </p:nvGrpSpPr>
+        <p:grpSpPr>
+          <a:xfrm>
+            <a:off x="6203229" y="2781555"/>
+            <a:ext cx="1700000" cy="1080000"/>
+            <a:chOff x="6203229" y="2781555"/>
+            <a:chExt cx="1700000" cy="1080000"/>
+          </a:xfrm>
+        </p:grpSpPr>
+        <p:sp>
+          <p:nvSpPr>
+            <p:cNvPr id="32" name="Rectangle 31"/>
+            <p:cNvSpPr/>
+            <p:nvPr/>
+          </p:nvSpPr>
+          <p:spPr>
+            <a:xfrm>
+              <a:off x="6203229" y="2781555"/>
+              <a:ext cx="1700000" cy="440000"/>
+            </a:xfrm>
+            <a:prstGeom prst="rect">
+              <a:avLst/>
+            </a:prstGeom>
+          </p:spPr>
+          <p:style>
+            <a:lnRef idx="1">
+              <a:schemeClr val="accent1"/>
+            </a:lnRef>
+            <a:fillRef idx="3">
+              <a:schemeClr val="accent1"/>
+            </a:fillRef>
+            <a:effectRef idx="2">
+              <a:schemeClr val="accent1"/>
+            </a:effectRef>
+            <a:fontRef idx="minor">
+              <a:schemeClr val="lt1"/>
+            </a:fontRef>
+          </p:style>
+          <p:txBody>
+            <a:bodyPr rtlCol="0" anchor="ctr" wrap="square" lIns="50000" rIns="50000" tIns="60000" bIns="60000"/>
+            <a:lstStyle/>
+            <a:p>
+              <a:pPr algn="ctr"/>
               <a:r>
-                <a:rPr sz="900"/>
-                <a:t>+purr() : void</a:t>
+                <a:rPr b="1" sz="1100"/>
+                <a:t>GPS</a:t>
               </a:r>
+            </a:p>
+          </p:txBody>
+        </p:sp>
+        <p:sp>
+          <p:nvSpPr>
+            <p:cNvPr id="33" name="Rectangle 32"/>
+            <p:cNvSpPr/>
+            <p:nvPr/>
+          </p:nvSpPr>
+          <p:spPr>
+            <a:xfrm>
+              <a:off x="6203229" y="3221555"/>
+              <a:ext cx="1700000" cy="320000"/>
+            </a:xfrm>
+            <a:prstGeom prst="rect">
+              <a:avLst/>
+            </a:prstGeom>
+          </p:spPr>
+          <p:style>
+            <a:lnRef idx="1">
+              <a:schemeClr val="accent1"/>
+            </a:lnRef>
+            <a:fillRef idx="3">
+              <a:schemeClr val="accent1"/>
+            </a:fillRef>
+            <a:effectRef idx="2">
+              <a:schemeClr val="accent1"/>
+            </a:effectRef>
+            <a:fontRef idx="minor">
+              <a:schemeClr val="lt1"/>
+            </a:fontRef>
+          </p:style>
+          <p:txBody>
+            <a:bodyPr rtlCol="0" anchor="ctr" wrap="square" lIns="80000" rIns="50000" tIns="50000" bIns="50000"/>
+            <a:lstStyle/>
+            <a:p>
+              <a:pPr algn="ctr"/>
+            </a:p>
+          </p:txBody>
+        </p:sp>
+        <p:sp>
+          <p:nvSpPr>
+            <p:cNvPr id="34" name="Rectangle 33"/>
+            <p:cNvSpPr/>
+            <p:nvPr/>
+          </p:nvSpPr>
+          <p:spPr>
+            <a:xfrm>
+              <a:off x="6203229" y="3541555"/>
+              <a:ext cx="1700000" cy="320000"/>
+            </a:xfrm>
+            <a:prstGeom prst="rect">
+              <a:avLst/>
+            </a:prstGeom>
+          </p:spPr>
+          <p:style>
+            <a:lnRef idx="1">
+              <a:schemeClr val="accent1"/>
+            </a:lnRef>
+            <a:fillRef idx="3">
+              <a:schemeClr val="accent1"/>
+            </a:fillRef>
+            <a:effectRef idx="2">
+              <a:schemeClr val="accent1"/>
+            </a:effectRef>
+            <a:fontRef idx="minor">
+              <a:schemeClr val="lt1"/>
+            </a:fontRef>
+          </p:style>
+          <p:txBody>
+            <a:bodyPr rtlCol="0" anchor="ctr" wrap="square" lIns="80000" rIns="50000" tIns="50000" bIns="50000"/>
+            <a:lstStyle/>
+            <a:p>
+              <a:pPr algn="ctr"/>
             </a:p>
           </p:txBody>
         </p:sp>
       </p:grpSp>
       <p:cxnSp>
         <p:nvCxnSpPr>
-          <p:cNvPr id="16" name="Connector 15"/>
+          <p:cNvPr id="36" name="Connector 35"/>
           <p:cNvCxnSpPr>
-            <a:stCxn id="4" idx="1"/>
-            <a:endCxn id="8" idx="3"/>
+            <a:stCxn id="4" idx="0"/>
+            <a:endCxn id="8" idx="2"/>
           </p:cNvCxnSpPr>
           <p:nvPr/>
         </p:nvCxnSpPr>
         <p:spPr>
-          <a:xfrm>
-            <a:off x="3724021" y="3423800"/>
-            <a:ext cx="4960757" cy="1123986"/>
+          <a:xfrm flipH="1">
+            <a:off x="3262505" y="3712943"/>
+            <a:ext cx="233623" cy="244458"/>
           </a:xfrm>
           <a:prstGeom prst="line">
             <a:avLst/>
@@ -5380,23 +6040,239 @@
       </p:cxnSp>
       <p:cxnSp>
         <p:nvCxnSpPr>
-          <p:cNvPr id="17" name="Connector 16"/>
+          <p:cNvPr id="37" name="Connector 36"/>
           <p:cNvCxnSpPr>
-            <a:stCxn id="4" idx="3"/>
-            <a:endCxn id="12" idx="1"/>
+            <a:stCxn id="8" idx="0"/>
+            <a:endCxn id="12" idx="2"/>
           </p:cNvCxnSpPr>
           <p:nvPr/>
         </p:nvCxnSpPr>
         <p:spPr>
-          <a:xfrm flipH="1" flipV="1">
-            <a:off x="457200" y="2537957"/>
-            <a:ext cx="4966821" cy="885843"/>
+          <a:xfrm flipV="1">
+            <a:off x="3262505" y="2448198"/>
+            <a:ext cx="43614" cy="1069203"/>
           </a:xfrm>
           <a:prstGeom prst="line">
             <a:avLst/>
           </a:prstGeom>
           <a:ln>
-            <a:tailEnd type="triangle" w="lg" len="lg"/>
+            <a:tailEnd type="diamond" w="lg" len="lg"/>
+          </a:ln>
+        </p:spPr>
+        <p:style>
+          <a:lnRef idx="2">
+            <a:schemeClr val="accent1"/>
+          </a:lnRef>
+          <a:fillRef idx="0">
+            <a:schemeClr val="accent1"/>
+          </a:fillRef>
+          <a:effectRef idx="1">
+            <a:schemeClr val="accent1"/>
+          </a:effectRef>
+          <a:fontRef idx="minor">
+            <a:schemeClr val="tx1"/>
+          </a:fontRef>
+        </p:style>
+      </p:cxnSp>
+      <p:cxnSp>
+        <p:nvCxnSpPr>
+          <p:cNvPr id="38" name="Connector 37"/>
+          <p:cNvCxnSpPr>
+            <a:stCxn id="8" idx="3"/>
+            <a:endCxn id="16" idx="1"/>
+          </p:cNvCxnSpPr>
+          <p:nvPr/>
+        </p:nvCxnSpPr>
+        <p:spPr>
+          <a:xfrm flipH="1">
+            <a:off x="1193357" y="3737401"/>
+            <a:ext cx="2919148" cy="288582"/>
+          </a:xfrm>
+          <a:prstGeom prst="line">
+            <a:avLst/>
+          </a:prstGeom>
+          <a:ln>
+            <a:tailEnd type="diamond" w="med" len="med"/>
+          </a:ln>
+        </p:spPr>
+        <p:style>
+          <a:lnRef idx="2">
+            <a:schemeClr val="accent1"/>
+          </a:lnRef>
+          <a:fillRef idx="0">
+            <a:schemeClr val="accent1"/>
+          </a:fillRef>
+          <a:effectRef idx="1">
+            <a:schemeClr val="accent1"/>
+          </a:effectRef>
+          <a:fontRef idx="minor">
+            <a:schemeClr val="tx1"/>
+          </a:fontRef>
+        </p:style>
+      </p:cxnSp>
+      <p:cxnSp>
+        <p:nvCxnSpPr>
+          <p:cNvPr id="39" name="Connector 38"/>
+          <p:cNvCxnSpPr>
+            <a:stCxn id="20" idx="3"/>
+            <a:endCxn id="8" idx="1"/>
+          </p:cNvCxnSpPr>
+          <p:nvPr/>
+        </p:nvCxnSpPr>
+        <p:spPr>
+          <a:xfrm flipH="1">
+            <a:off x="2412505" y="3291587"/>
+            <a:ext cx="4176456" cy="445814"/>
+          </a:xfrm>
+          <a:prstGeom prst="line">
+            <a:avLst/>
+          </a:prstGeom>
+          <a:ln>
+            <a:headEnd type="arrow" w="med" len="med"/>
+          </a:ln>
+        </p:spPr>
+        <p:style>
+          <a:lnRef idx="2">
+            <a:schemeClr val="accent1"/>
+          </a:lnRef>
+          <a:fillRef idx="0">
+            <a:schemeClr val="accent1"/>
+          </a:fillRef>
+          <a:effectRef idx="1">
+            <a:schemeClr val="accent1"/>
+          </a:effectRef>
+          <a:fontRef idx="minor">
+            <a:schemeClr val="tx1"/>
+          </a:fontRef>
+        </p:style>
+      </p:cxnSp>
+      <p:cxnSp>
+        <p:nvCxnSpPr>
+          <p:cNvPr id="40" name="Connector 39"/>
+          <p:cNvCxnSpPr>
+            <a:stCxn id="20" idx="1"/>
+            <a:endCxn id="32" idx="3"/>
+          </p:cNvCxnSpPr>
+          <p:nvPr/>
+        </p:nvCxnSpPr>
+        <p:spPr>
+          <a:xfrm flipV="1">
+            <a:off x="4888961" y="3001555"/>
+            <a:ext cx="3014268" cy="290032"/>
+          </a:xfrm>
+          <a:prstGeom prst="line">
+            <a:avLst/>
+          </a:prstGeom>
+          <a:ln/>
+        </p:spPr>
+        <p:style>
+          <a:lnRef idx="2">
+            <a:schemeClr val="accent1"/>
+          </a:lnRef>
+          <a:fillRef idx="0">
+            <a:schemeClr val="accent1"/>
+          </a:fillRef>
+          <a:effectRef idx="1">
+            <a:schemeClr val="accent1"/>
+          </a:effectRef>
+          <a:fontRef idx="minor">
+            <a:schemeClr val="tx1"/>
+          </a:fontRef>
+        </p:style>
+      </p:cxnSp>
+      <p:cxnSp>
+        <p:nvCxnSpPr>
+          <p:cNvPr id="41" name="Connector 40"/>
+          <p:cNvCxnSpPr>
+            <a:stCxn id="20" idx="1"/>
+            <a:endCxn id="28" idx="3"/>
+          </p:cNvCxnSpPr>
+          <p:nvPr/>
+        </p:nvCxnSpPr>
+        <p:spPr>
+          <a:xfrm flipV="1">
+            <a:off x="4888961" y="2948920"/>
+            <a:ext cx="3797839" cy="342667"/>
+          </a:xfrm>
+          <a:prstGeom prst="line">
+            <a:avLst/>
+          </a:prstGeom>
+          <a:ln>
+            <a:prstDash val="dash"/>
+            <a:headEnd type="arrow" w="med" len="med"/>
+          </a:ln>
+        </p:spPr>
+        <p:style>
+          <a:lnRef idx="2">
+            <a:schemeClr val="accent1"/>
+          </a:lnRef>
+          <a:fillRef idx="0">
+            <a:schemeClr val="accent1"/>
+          </a:fillRef>
+          <a:effectRef idx="1">
+            <a:schemeClr val="accent1"/>
+          </a:effectRef>
+          <a:fontRef idx="minor">
+            <a:schemeClr val="tx1"/>
+          </a:fontRef>
+        </p:style>
+      </p:cxnSp>
+      <p:cxnSp>
+        <p:nvCxnSpPr>
+          <p:cNvPr id="42" name="Connector 41"/>
+          <p:cNvCxnSpPr>
+            <a:stCxn id="8" idx="2"/>
+            <a:endCxn id="24" idx="0"/>
+          </p:cNvCxnSpPr>
+          <p:nvPr/>
+        </p:nvCxnSpPr>
+        <p:spPr>
+          <a:xfrm>
+            <a:off x="3262505" y="3957401"/>
+            <a:ext cx="576391" cy="1001460"/>
+          </a:xfrm>
+          <a:prstGeom prst="line">
+            <a:avLst/>
+          </a:prstGeom>
+          <a:ln>
+            <a:prstDash val="dash"/>
+            <a:headEnd type="triangle" w="lg" len="lg"/>
+          </a:ln>
+        </p:spPr>
+        <p:style>
+          <a:lnRef idx="2">
+            <a:schemeClr val="accent1"/>
+          </a:lnRef>
+          <a:fillRef idx="0">
+            <a:schemeClr val="accent1"/>
+          </a:fillRef>
+          <a:effectRef idx="1">
+            <a:schemeClr val="accent1"/>
+          </a:effectRef>
+          <a:fontRef idx="minor">
+            <a:schemeClr val="tx1"/>
+          </a:fontRef>
+        </p:style>
+      </p:cxnSp>
+      <p:cxnSp>
+        <p:nvCxnSpPr>
+          <p:cNvPr id="43" name="Connector 42"/>
+          <p:cNvCxnSpPr>
+            <a:stCxn id="32" idx="1"/>
+            <a:endCxn id="28" idx="3"/>
+          </p:cNvCxnSpPr>
+          <p:nvPr/>
+        </p:nvCxnSpPr>
+        <p:spPr>
+          <a:xfrm flipV="1">
+            <a:off x="6203229" y="2948920"/>
+            <a:ext cx="2483571" cy="52635"/>
+          </a:xfrm>
+          <a:prstGeom prst="line">
+            <a:avLst/>
+          </a:prstGeom>
+          <a:ln>
+            <a:prstDash val="dash"/>
           </a:ln>
         </p:spPr>
         <p:style>

--- a/demo_full.pptx
+++ b/demo_full.pptx
@@ -5,7 +5,7 @@
     <p:sldMasterId id="2147483648" r:id="rId1"/>
   </p:sldMasterIdLst>
   <p:notesMasterIdLst>
-    <p:notesMasterId r:id="rId47"/>
+    <p:notesMasterId r:id="rId48"/>
   </p:notesMasterIdLst>
   <p:sldIdLst>
     <p:sldId id="256" r:id="rId7"/>
@@ -48,9 +48,10 @@
     <p:sldId id="293" r:id="rId44"/>
     <p:sldId id="294" r:id="rId45"/>
     <p:sldId id="295" r:id="rId46"/>
-    <p:sldId id="296" r:id="rId48"/>
+    <p:sldId id="296" r:id="rId47"/>
     <p:sldId id="297" r:id="rId49"/>
     <p:sldId id="298" r:id="rId50"/>
+    <p:sldId id="299" r:id="rId51"/>
   </p:sldIdLst>
   <p:sldSz cx="9144000" cy="6858000" type="screen4x3"/>
   <p:notesSz cx="6858000" cy="9144000"/>
@@ -4288,7 +4289,7 @@
           <a:lstStyle/>
           <a:p>
             <a:r>
-              <a:t>1. フローチャート（Flowchart）</a:t>
+              <a:t>1. フローチャート（Flowchart）— ノード形状デモ</a:t>
             </a:r>
           </a:p>
         </p:txBody>
@@ -4318,7 +4319,7 @@
         </p:nvSpPr>
         <p:spPr>
           <a:xfrm>
-            <a:off x="457200" y="2766604"/>
+            <a:off x="5347172" y="4787030"/>
             <a:ext cx="1200000" cy="500000"/>
           </a:xfrm>
           <a:prstGeom prst="rect">
@@ -4345,23 +4346,23 @@
           <a:p>
             <a:r>
               <a:rPr sz="1200"/>
-              <a:t>A</a:t>
-            </a:r>
-          </a:p>
-        </p:txBody>
-      </p:sp>
-      <p:sp>
-        <p:nvSpPr>
-          <p:cNvPr id="5" name="Rectangle 4"/>
+              <a:t>矩形</a:t>
+            </a:r>
+          </a:p>
+        </p:txBody>
+      </p:sp>
+      <p:sp>
+        <p:nvSpPr>
+          <p:cNvPr id="5" name="Rounded Rectangle 4"/>
           <p:cNvSpPr/>
           <p:nvPr/>
         </p:nvSpPr>
         <p:spPr>
           <a:xfrm>
-            <a:off x="3018453" y="3350777"/>
+            <a:off x="5436053" y="4342679"/>
             <a:ext cx="1200000" cy="500000"/>
           </a:xfrm>
-          <a:prstGeom prst="rect">
+          <a:prstGeom prst="roundRect">
             <a:avLst/>
           </a:prstGeom>
         </p:spPr>
@@ -4385,23 +4386,23 @@
           <a:p>
             <a:r>
               <a:rPr sz="1200"/>
-              <a:t>B</a:t>
-            </a:r>
-          </a:p>
-        </p:txBody>
-      </p:sp>
-      <p:sp>
-        <p:nvSpPr>
-          <p:cNvPr id="6" name="Rectangle 5"/>
+              <a:t>丸角</a:t>
+            </a:r>
+          </a:p>
+        </p:txBody>
+      </p:sp>
+      <p:sp>
+        <p:nvSpPr>
+          <p:cNvPr id="6" name="Rounded Rectangle 5"/>
           <p:cNvSpPr/>
           <p:nvPr/>
         </p:nvSpPr>
         <p:spPr>
           <a:xfrm>
-            <a:off x="5418151" y="2885282"/>
+            <a:off x="5968907" y="3930196"/>
             <a:ext cx="1200000" cy="500000"/>
           </a:xfrm>
-          <a:prstGeom prst="rect">
+          <a:prstGeom prst="roundRect">
             <a:avLst/>
           </a:prstGeom>
         </p:spPr>
@@ -4425,7 +4426,7 @@
           <a:p>
             <a:r>
               <a:rPr sz="1200"/>
-              <a:t>C</a:t>
+              <a:t>スタジアム</a:t>
             </a:r>
           </a:p>
         </p:txBody>
@@ -4438,7 +4439,7 @@
         </p:nvSpPr>
         <p:spPr>
           <a:xfrm>
-            <a:off x="3838337" y="4684067"/>
+            <a:off x="6082984" y="3274360"/>
             <a:ext cx="1200000" cy="500000"/>
           </a:xfrm>
           <a:prstGeom prst="rect">
@@ -4465,23 +4466,23 @@
           <a:p>
             <a:r>
               <a:rPr sz="1200"/>
-              <a:t>D</a:t>
-            </a:r>
-          </a:p>
-        </p:txBody>
-      </p:sp>
-      <p:sp>
-        <p:nvSpPr>
-          <p:cNvPr id="8" name="Rectangle 7"/>
+              <a:t>サブルーチン</a:t>
+            </a:r>
+          </a:p>
+        </p:txBody>
+      </p:sp>
+      <p:sp>
+        <p:nvSpPr>
+          <p:cNvPr id="8" name="Can 7"/>
           <p:cNvSpPr/>
           <p:nvPr/>
         </p:nvSpPr>
         <p:spPr>
           <a:xfrm>
-            <a:off x="7127858" y="4379174"/>
+            <a:off x="5964532" y="2558720"/>
             <a:ext cx="1200000" cy="500000"/>
           </a:xfrm>
-          <a:prstGeom prst="rect">
+          <a:prstGeom prst="can">
             <a:avLst/>
           </a:prstGeom>
         </p:spPr>
@@ -4505,28 +4506,391 @@
           <a:p>
             <a:r>
               <a:rPr sz="1200"/>
-              <a:t>E</a:t>
+              <a:t>シリンダー</a:t>
+            </a:r>
+          </a:p>
+        </p:txBody>
+      </p:sp>
+      <p:sp>
+        <p:nvSpPr>
+          <p:cNvPr id="9" name="Oval 8"/>
+          <p:cNvSpPr/>
+          <p:nvPr/>
+        </p:nvSpPr>
+        <p:spPr>
+          <a:xfrm>
+            <a:off x="5274744" y="2420828"/>
+            <a:ext cx="1200000" cy="500000"/>
+          </a:xfrm>
+          <a:prstGeom prst="ellipse">
+            <a:avLst/>
+          </a:prstGeom>
+        </p:spPr>
+        <p:style>
+          <a:lnRef idx="1">
+            <a:schemeClr val="accent1"/>
+          </a:lnRef>
+          <a:fillRef idx="3">
+            <a:schemeClr val="accent1"/>
+          </a:fillRef>
+          <a:effectRef idx="2">
+            <a:schemeClr val="accent1"/>
+          </a:effectRef>
+          <a:fontRef idx="minor">
+            <a:schemeClr val="lt1"/>
+          </a:fontRef>
+        </p:style>
+        <p:txBody>
+          <a:bodyPr rtlCol="0" anchor="ctr"/>
+          <a:lstStyle/>
+          <a:p>
+            <a:r>
+              <a:rPr sz="1200"/>
+              <a:t>円</a:t>
+            </a:r>
+          </a:p>
+        </p:txBody>
+      </p:sp>
+      <p:sp>
+        <p:nvSpPr>
+          <p:cNvPr id="10" name="Pentagon 9"/>
+          <p:cNvSpPr/>
+          <p:nvPr/>
+        </p:nvSpPr>
+        <p:spPr>
+          <a:xfrm>
+            <a:off x="5165743" y="2879308"/>
+            <a:ext cx="1200000" cy="500000"/>
+          </a:xfrm>
+          <a:prstGeom prst="homePlate">
+            <a:avLst/>
+          </a:prstGeom>
+        </p:spPr>
+        <p:style>
+          <a:lnRef idx="1">
+            <a:schemeClr val="accent1"/>
+          </a:lnRef>
+          <a:fillRef idx="3">
+            <a:schemeClr val="accent1"/>
+          </a:fillRef>
+          <a:effectRef idx="2">
+            <a:schemeClr val="accent1"/>
+          </a:effectRef>
+          <a:fontRef idx="minor">
+            <a:schemeClr val="lt1"/>
+          </a:fontRef>
+        </p:style>
+        <p:txBody>
+          <a:bodyPr rtlCol="0" anchor="ctr"/>
+          <a:lstStyle/>
+          <a:p>
+            <a:r>
+              <a:rPr sz="1200"/>
+              <a:t>非対称</a:t>
+            </a:r>
+          </a:p>
+        </p:txBody>
+      </p:sp>
+      <p:sp>
+        <p:nvSpPr>
+          <p:cNvPr id="11" name="Diamond 10"/>
+          <p:cNvSpPr/>
+          <p:nvPr/>
+        </p:nvSpPr>
+        <p:spPr>
+          <a:xfrm>
+            <a:off x="4508209" y="3233145"/>
+            <a:ext cx="1200000" cy="500000"/>
+          </a:xfrm>
+          <a:prstGeom prst="diamond">
+            <a:avLst/>
+          </a:prstGeom>
+        </p:spPr>
+        <p:style>
+          <a:lnRef idx="1">
+            <a:schemeClr val="accent1"/>
+          </a:lnRef>
+          <a:fillRef idx="3">
+            <a:schemeClr val="accent1"/>
+          </a:fillRef>
+          <a:effectRef idx="2">
+            <a:schemeClr val="accent1"/>
+          </a:effectRef>
+          <a:fontRef idx="minor">
+            <a:schemeClr val="lt1"/>
+          </a:fontRef>
+        </p:style>
+        <p:txBody>
+          <a:bodyPr rtlCol="0" anchor="ctr"/>
+          <a:lstStyle/>
+          <a:p>
+            <a:r>
+              <a:rPr sz="1200"/>
+              <a:t>ひし形</a:t>
+            </a:r>
+          </a:p>
+        </p:txBody>
+      </p:sp>
+      <p:sp>
+        <p:nvSpPr>
+          <p:cNvPr id="12" name="Hexagon 11"/>
+          <p:cNvSpPr/>
+          <p:nvPr/>
+        </p:nvSpPr>
+        <p:spPr>
+          <a:xfrm>
+            <a:off x="3796768" y="3515153"/>
+            <a:ext cx="1200000" cy="500000"/>
+          </a:xfrm>
+          <a:prstGeom prst="hexagon">
+            <a:avLst/>
+          </a:prstGeom>
+        </p:spPr>
+        <p:style>
+          <a:lnRef idx="1">
+            <a:schemeClr val="accent1"/>
+          </a:lnRef>
+          <a:fillRef idx="3">
+            <a:schemeClr val="accent1"/>
+          </a:fillRef>
+          <a:effectRef idx="2">
+            <a:schemeClr val="accent1"/>
+          </a:effectRef>
+          <a:fontRef idx="minor">
+            <a:schemeClr val="lt1"/>
+          </a:fontRef>
+        </p:style>
+        <p:txBody>
+          <a:bodyPr rtlCol="0" anchor="ctr"/>
+          <a:lstStyle/>
+          <a:p>
+            <a:r>
+              <a:rPr sz="1200"/>
+              <a:t>六角形</a:t>
+            </a:r>
+          </a:p>
+        </p:txBody>
+      </p:sp>
+      <p:sp>
+        <p:nvSpPr>
+          <p:cNvPr id="13" name="Parallelogram 12"/>
+          <p:cNvSpPr/>
+          <p:nvPr/>
+        </p:nvSpPr>
+        <p:spPr>
+          <a:xfrm>
+            <a:off x="2949541" y="3857418"/>
+            <a:ext cx="1200000" cy="500000"/>
+          </a:xfrm>
+          <a:prstGeom prst="parallelogram">
+            <a:avLst/>
+          </a:prstGeom>
+        </p:spPr>
+        <p:style>
+          <a:lnRef idx="1">
+            <a:schemeClr val="accent1"/>
+          </a:lnRef>
+          <a:fillRef idx="3">
+            <a:schemeClr val="accent1"/>
+          </a:fillRef>
+          <a:effectRef idx="2">
+            <a:schemeClr val="accent1"/>
+          </a:effectRef>
+          <a:fontRef idx="minor">
+            <a:schemeClr val="lt1"/>
+          </a:fontRef>
+        </p:style>
+        <p:txBody>
+          <a:bodyPr rtlCol="0" anchor="ctr"/>
+          <a:lstStyle/>
+          <a:p>
+            <a:r>
+              <a:rPr sz="1200"/>
+              <a:t>右傾斜</a:t>
+            </a:r>
+          </a:p>
+        </p:txBody>
+      </p:sp>
+      <p:sp>
+        <p:nvSpPr>
+          <p:cNvPr id="14" name="Parallelogram 13"/>
+          <p:cNvSpPr/>
+          <p:nvPr/>
+        </p:nvSpPr>
+        <p:spPr>
+          <a:xfrm flipH="1">
+            <a:off x="1981387" y="4302214"/>
+            <a:ext cx="1200000" cy="500000"/>
+          </a:xfrm>
+          <a:prstGeom prst="parallelogram">
+            <a:avLst/>
+          </a:prstGeom>
+        </p:spPr>
+        <p:style>
+          <a:lnRef idx="1">
+            <a:schemeClr val="accent1"/>
+          </a:lnRef>
+          <a:fillRef idx="3">
+            <a:schemeClr val="accent1"/>
+          </a:fillRef>
+          <a:effectRef idx="2">
+            <a:schemeClr val="accent1"/>
+          </a:effectRef>
+          <a:fontRef idx="minor">
+            <a:schemeClr val="lt1"/>
+          </a:fontRef>
+        </p:style>
+        <p:txBody>
+          <a:bodyPr rtlCol="0" anchor="ctr"/>
+          <a:lstStyle/>
+          <a:p>
+            <a:r>
+              <a:rPr sz="1200"/>
+              <a:t>左傾斜</a:t>
+            </a:r>
+          </a:p>
+        </p:txBody>
+      </p:sp>
+      <p:sp>
+        <p:nvSpPr>
+          <p:cNvPr id="15" name="Trapezoid 14"/>
+          <p:cNvSpPr/>
+          <p:nvPr/>
+        </p:nvSpPr>
+        <p:spPr>
+          <a:xfrm>
+            <a:off x="1238395" y="4198490"/>
+            <a:ext cx="1200000" cy="500000"/>
+          </a:xfrm>
+          <a:prstGeom prst="trapezoid">
+            <a:avLst/>
+          </a:prstGeom>
+        </p:spPr>
+        <p:style>
+          <a:lnRef idx="1">
+            <a:schemeClr val="accent1"/>
+          </a:lnRef>
+          <a:fillRef idx="3">
+            <a:schemeClr val="accent1"/>
+          </a:fillRef>
+          <a:effectRef idx="2">
+            <a:schemeClr val="accent1"/>
+          </a:effectRef>
+          <a:fontRef idx="minor">
+            <a:schemeClr val="lt1"/>
+          </a:fontRef>
+        </p:style>
+        <p:txBody>
+          <a:bodyPr rtlCol="0" anchor="ctr"/>
+          <a:lstStyle/>
+          <a:p>
+            <a:r>
+              <a:rPr sz="1200"/>
+              <a:t>台形</a:t>
+            </a:r>
+          </a:p>
+        </p:txBody>
+      </p:sp>
+      <p:sp>
+        <p:nvSpPr>
+          <p:cNvPr id="16" name="Trapezoid 15"/>
+          <p:cNvSpPr/>
+          <p:nvPr/>
+        </p:nvSpPr>
+        <p:spPr>
+          <a:xfrm flipV="1">
+            <a:off x="1436359" y="3794675"/>
+            <a:ext cx="1200000" cy="500000"/>
+          </a:xfrm>
+          <a:prstGeom prst="trapezoid">
+            <a:avLst/>
+          </a:prstGeom>
+        </p:spPr>
+        <p:style>
+          <a:lnRef idx="1">
+            <a:schemeClr val="accent1"/>
+          </a:lnRef>
+          <a:fillRef idx="3">
+            <a:schemeClr val="accent1"/>
+          </a:fillRef>
+          <a:effectRef idx="2">
+            <a:schemeClr val="accent1"/>
+          </a:effectRef>
+          <a:fontRef idx="minor">
+            <a:schemeClr val="lt1"/>
+          </a:fontRef>
+        </p:style>
+        <p:txBody>
+          <a:bodyPr rtlCol="0" anchor="ctr"/>
+          <a:lstStyle/>
+          <a:p>
+            <a:r>
+              <a:rPr sz="1200"/>
+              <a:t>逆台形</a:t>
+            </a:r>
+          </a:p>
+        </p:txBody>
+      </p:sp>
+      <p:sp>
+        <p:nvSpPr>
+          <p:cNvPr id="17" name="Oval 16"/>
+          <p:cNvSpPr/>
+          <p:nvPr/>
+        </p:nvSpPr>
+        <p:spPr>
+          <a:xfrm>
+            <a:off x="457200" y="3490317"/>
+            <a:ext cx="1200000" cy="500000"/>
+          </a:xfrm>
+          <a:prstGeom prst="ellipse">
+            <a:avLst/>
+          </a:prstGeom>
+        </p:spPr>
+        <p:style>
+          <a:lnRef idx="1">
+            <a:schemeClr val="accent1"/>
+          </a:lnRef>
+          <a:fillRef idx="3">
+            <a:schemeClr val="accent1"/>
+          </a:fillRef>
+          <a:effectRef idx="2">
+            <a:schemeClr val="accent1"/>
+          </a:effectRef>
+          <a:fontRef idx="minor">
+            <a:schemeClr val="lt1"/>
+          </a:fontRef>
+        </p:style>
+        <p:txBody>
+          <a:bodyPr rtlCol="0" anchor="ctr"/>
+          <a:lstStyle/>
+          <a:p>
+            <a:r>
+              <a:rPr sz="1200"/>
+              <a:t>二重円</a:t>
             </a:r>
           </a:p>
         </p:txBody>
       </p:sp>
       <p:cxnSp>
         <p:nvCxnSpPr>
-          <p:cNvPr id="9" name="Connector 8"/>
+          <p:cNvPr id="18" name="Connector 17"/>
           <p:cNvCxnSpPr>
-            <a:stCxn id="4" idx="1"/>
-            <a:endCxn id="5" idx="3"/>
+            <a:stCxn id="4" idx="0"/>
+            <a:endCxn id="5" idx="2"/>
           </p:cNvCxnSpPr>
           <p:nvPr/>
         </p:nvCxnSpPr>
         <p:spPr>
           <a:xfrm>
-            <a:off x="457200" y="3016604"/>
-            <a:ext cx="3761253" cy="584173"/>
+            <a:off x="5947172" y="4787030"/>
+            <a:ext cx="88881" cy="55649"/>
           </a:xfrm>
           <a:prstGeom prst="line">
             <a:avLst/>
           </a:prstGeom>
+          <a:ln>
+            <a:headEnd type="arrow" w="med" len="med"/>
+          </a:ln>
         </p:spPr>
         <p:style>
           <a:lnRef idx="2">
@@ -4545,21 +4909,24 @@
       </p:cxnSp>
       <p:cxnSp>
         <p:nvCxnSpPr>
-          <p:cNvPr id="10" name="Connector 9"/>
+          <p:cNvPr id="19" name="Connector 18"/>
           <p:cNvCxnSpPr>
-            <a:stCxn id="5" idx="1"/>
-            <a:endCxn id="6" idx="3"/>
+            <a:stCxn id="5" idx="0"/>
+            <a:endCxn id="6" idx="2"/>
           </p:cNvCxnSpPr>
           <p:nvPr/>
         </p:nvCxnSpPr>
         <p:spPr>
-          <a:xfrm flipV="1">
-            <a:off x="3018453" y="3135282"/>
-            <a:ext cx="3599698" cy="465495"/>
+          <a:xfrm>
+            <a:off x="6036053" y="4342679"/>
+            <a:ext cx="532854" cy="87517"/>
           </a:xfrm>
           <a:prstGeom prst="line">
             <a:avLst/>
           </a:prstGeom>
+          <a:ln>
+            <a:headEnd type="arrow" w="med" len="med"/>
+          </a:ln>
         </p:spPr>
         <p:style>
           <a:lnRef idx="2">
@@ -4578,21 +4945,24 @@
       </p:cxnSp>
       <p:cxnSp>
         <p:nvCxnSpPr>
-          <p:cNvPr id="11" name="Connector 10"/>
+          <p:cNvPr id="20" name="Connector 19"/>
           <p:cNvCxnSpPr>
-            <a:stCxn id="5" idx="2"/>
-            <a:endCxn id="7" idx="0"/>
+            <a:stCxn id="6" idx="0"/>
+            <a:endCxn id="7" idx="2"/>
           </p:cNvCxnSpPr>
           <p:nvPr/>
         </p:nvCxnSpPr>
         <p:spPr>
-          <a:xfrm>
-            <a:off x="3618453" y="3850777"/>
-            <a:ext cx="819884" cy="833290"/>
+          <a:xfrm flipV="1">
+            <a:off x="6568907" y="3774360"/>
+            <a:ext cx="114077" cy="155836"/>
           </a:xfrm>
           <a:prstGeom prst="line">
             <a:avLst/>
           </a:prstGeom>
+          <a:ln>
+            <a:headEnd type="arrow" w="med" len="med"/>
+          </a:ln>
         </p:spPr>
         <p:style>
           <a:lnRef idx="2">
@@ -4611,21 +4981,24 @@
       </p:cxnSp>
       <p:cxnSp>
         <p:nvCxnSpPr>
-          <p:cNvPr id="12" name="Connector 11"/>
+          <p:cNvPr id="21" name="Connector 20"/>
           <p:cNvCxnSpPr>
-            <a:stCxn id="6" idx="2"/>
-            <a:endCxn id="8" idx="0"/>
+            <a:stCxn id="7" idx="0"/>
+            <a:endCxn id="8" idx="2"/>
           </p:cNvCxnSpPr>
           <p:nvPr/>
         </p:nvCxnSpPr>
         <p:spPr>
-          <a:xfrm>
-            <a:off x="6018151" y="3385282"/>
-            <a:ext cx="1709707" cy="993892"/>
+          <a:xfrm flipH="1" flipV="1">
+            <a:off x="6564532" y="3058720"/>
+            <a:ext cx="118452" cy="215640"/>
           </a:xfrm>
           <a:prstGeom prst="line">
             <a:avLst/>
           </a:prstGeom>
+          <a:ln>
+            <a:headEnd type="arrow" w="med" len="med"/>
+          </a:ln>
         </p:spPr>
         <p:style>
           <a:lnRef idx="2">
@@ -4644,21 +5017,312 @@
       </p:cxnSp>
       <p:cxnSp>
         <p:nvCxnSpPr>
-          <p:cNvPr id="13" name="Connector 12"/>
+          <p:cNvPr id="22" name="Connector 21"/>
           <p:cNvCxnSpPr>
-            <a:stCxn id="7" idx="1"/>
-            <a:endCxn id="8" idx="3"/>
+            <a:stCxn id="8" idx="3"/>
+            <a:endCxn id="9" idx="1"/>
           </p:cNvCxnSpPr>
           <p:nvPr/>
         </p:nvCxnSpPr>
         <p:spPr>
-          <a:xfrm flipV="1">
-            <a:off x="3838337" y="4629174"/>
-            <a:ext cx="4489521" cy="304893"/>
+          <a:xfrm flipH="1" flipV="1">
+            <a:off x="5274744" y="2670828"/>
+            <a:ext cx="1889788" cy="137892"/>
           </a:xfrm>
           <a:prstGeom prst="line">
             <a:avLst/>
           </a:prstGeom>
+          <a:ln>
+            <a:headEnd type="arrow" w="med" len="med"/>
+          </a:ln>
+        </p:spPr>
+        <p:style>
+          <a:lnRef idx="2">
+            <a:schemeClr val="accent1"/>
+          </a:lnRef>
+          <a:fillRef idx="0">
+            <a:schemeClr val="accent1"/>
+          </a:fillRef>
+          <a:effectRef idx="1">
+            <a:schemeClr val="accent1"/>
+          </a:effectRef>
+          <a:fontRef idx="minor">
+            <a:schemeClr val="tx1"/>
+          </a:fontRef>
+        </p:style>
+      </p:cxnSp>
+      <p:cxnSp>
+        <p:nvCxnSpPr>
+          <p:cNvPr id="23" name="Connector 22"/>
+          <p:cNvCxnSpPr>
+            <a:stCxn id="9" idx="2"/>
+            <a:endCxn id="10" idx="0"/>
+          </p:cNvCxnSpPr>
+          <p:nvPr/>
+        </p:nvCxnSpPr>
+        <p:spPr>
+          <a:xfrm flipH="1" flipV="1">
+            <a:off x="5765743" y="2879308"/>
+            <a:ext cx="109001" cy="41520"/>
+          </a:xfrm>
+          <a:prstGeom prst="line">
+            <a:avLst/>
+          </a:prstGeom>
+          <a:ln>
+            <a:headEnd type="arrow" w="med" len="med"/>
+          </a:ln>
+        </p:spPr>
+        <p:style>
+          <a:lnRef idx="2">
+            <a:schemeClr val="accent1"/>
+          </a:lnRef>
+          <a:fillRef idx="0">
+            <a:schemeClr val="accent1"/>
+          </a:fillRef>
+          <a:effectRef idx="1">
+            <a:schemeClr val="accent1"/>
+          </a:effectRef>
+          <a:fontRef idx="minor">
+            <a:schemeClr val="tx1"/>
+          </a:fontRef>
+        </p:style>
+      </p:cxnSp>
+      <p:cxnSp>
+        <p:nvCxnSpPr>
+          <p:cNvPr id="24" name="Connector 23"/>
+          <p:cNvCxnSpPr>
+            <a:stCxn id="10" idx="3"/>
+            <a:endCxn id="11" idx="1"/>
+          </p:cNvCxnSpPr>
+          <p:nvPr/>
+        </p:nvCxnSpPr>
+        <p:spPr>
+          <a:xfrm flipH="1">
+            <a:off x="4508209" y="3129308"/>
+            <a:ext cx="1857534" cy="353837"/>
+          </a:xfrm>
+          <a:prstGeom prst="line">
+            <a:avLst/>
+          </a:prstGeom>
+          <a:ln>
+            <a:headEnd type="arrow" w="med" len="med"/>
+          </a:ln>
+        </p:spPr>
+        <p:style>
+          <a:lnRef idx="2">
+            <a:schemeClr val="accent1"/>
+          </a:lnRef>
+          <a:fillRef idx="0">
+            <a:schemeClr val="accent1"/>
+          </a:fillRef>
+          <a:effectRef idx="1">
+            <a:schemeClr val="accent1"/>
+          </a:effectRef>
+          <a:fontRef idx="minor">
+            <a:schemeClr val="tx1"/>
+          </a:fontRef>
+        </p:style>
+      </p:cxnSp>
+      <p:cxnSp>
+        <p:nvCxnSpPr>
+          <p:cNvPr id="25" name="Connector 24"/>
+          <p:cNvCxnSpPr>
+            <a:stCxn id="11" idx="3"/>
+            <a:endCxn id="12" idx="1"/>
+          </p:cNvCxnSpPr>
+          <p:nvPr/>
+        </p:nvCxnSpPr>
+        <p:spPr>
+          <a:xfrm flipH="1">
+            <a:off x="3796768" y="3483145"/>
+            <a:ext cx="1911441" cy="282008"/>
+          </a:xfrm>
+          <a:prstGeom prst="line">
+            <a:avLst/>
+          </a:prstGeom>
+          <a:ln>
+            <a:headEnd type="arrow" w="med" len="med"/>
+          </a:ln>
+        </p:spPr>
+        <p:style>
+          <a:lnRef idx="2">
+            <a:schemeClr val="accent1"/>
+          </a:lnRef>
+          <a:fillRef idx="0">
+            <a:schemeClr val="accent1"/>
+          </a:fillRef>
+          <a:effectRef idx="1">
+            <a:schemeClr val="accent1"/>
+          </a:effectRef>
+          <a:fontRef idx="minor">
+            <a:schemeClr val="tx1"/>
+          </a:fontRef>
+        </p:style>
+      </p:cxnSp>
+      <p:cxnSp>
+        <p:nvCxnSpPr>
+          <p:cNvPr id="26" name="Connector 25"/>
+          <p:cNvCxnSpPr>
+            <a:stCxn id="12" idx="3"/>
+            <a:endCxn id="13" idx="1"/>
+          </p:cNvCxnSpPr>
+          <p:nvPr/>
+        </p:nvCxnSpPr>
+        <p:spPr>
+          <a:xfrm flipH="1">
+            <a:off x="2949541" y="3765153"/>
+            <a:ext cx="2047227" cy="342265"/>
+          </a:xfrm>
+          <a:prstGeom prst="line">
+            <a:avLst/>
+          </a:prstGeom>
+          <a:ln>
+            <a:headEnd type="arrow" w="med" len="med"/>
+          </a:ln>
+        </p:spPr>
+        <p:style>
+          <a:lnRef idx="2">
+            <a:schemeClr val="accent1"/>
+          </a:lnRef>
+          <a:fillRef idx="0">
+            <a:schemeClr val="accent1"/>
+          </a:fillRef>
+          <a:effectRef idx="1">
+            <a:schemeClr val="accent1"/>
+          </a:effectRef>
+          <a:fontRef idx="minor">
+            <a:schemeClr val="tx1"/>
+          </a:fontRef>
+        </p:style>
+      </p:cxnSp>
+      <p:cxnSp>
+        <p:nvCxnSpPr>
+          <p:cNvPr id="27" name="Connector 26"/>
+          <p:cNvCxnSpPr>
+            <a:stCxn id="13" idx="3"/>
+            <a:endCxn id="14" idx="1"/>
+          </p:cNvCxnSpPr>
+          <p:nvPr/>
+        </p:nvCxnSpPr>
+        <p:spPr>
+          <a:xfrm flipH="1">
+            <a:off x="1981387" y="4107418"/>
+            <a:ext cx="2168154" cy="444796"/>
+          </a:xfrm>
+          <a:prstGeom prst="line">
+            <a:avLst/>
+          </a:prstGeom>
+          <a:ln>
+            <a:headEnd type="arrow" w="med" len="med"/>
+          </a:ln>
+        </p:spPr>
+        <p:style>
+          <a:lnRef idx="2">
+            <a:schemeClr val="accent1"/>
+          </a:lnRef>
+          <a:fillRef idx="0">
+            <a:schemeClr val="accent1"/>
+          </a:fillRef>
+          <a:effectRef idx="1">
+            <a:schemeClr val="accent1"/>
+          </a:effectRef>
+          <a:fontRef idx="minor">
+            <a:schemeClr val="tx1"/>
+          </a:fontRef>
+        </p:style>
+      </p:cxnSp>
+      <p:cxnSp>
+        <p:nvCxnSpPr>
+          <p:cNvPr id="28" name="Connector 27"/>
+          <p:cNvCxnSpPr>
+            <a:stCxn id="14" idx="3"/>
+            <a:endCxn id="15" idx="1"/>
+          </p:cNvCxnSpPr>
+          <p:nvPr/>
+        </p:nvCxnSpPr>
+        <p:spPr>
+          <a:xfrm flipH="1" flipV="1">
+            <a:off x="1238395" y="4448490"/>
+            <a:ext cx="1942992" cy="103724"/>
+          </a:xfrm>
+          <a:prstGeom prst="line">
+            <a:avLst/>
+          </a:prstGeom>
+          <a:ln>
+            <a:headEnd type="arrow" w="med" len="med"/>
+          </a:ln>
+        </p:spPr>
+        <p:style>
+          <a:lnRef idx="2">
+            <a:schemeClr val="accent1"/>
+          </a:lnRef>
+          <a:fillRef idx="0">
+            <a:schemeClr val="accent1"/>
+          </a:fillRef>
+          <a:effectRef idx="1">
+            <a:schemeClr val="accent1"/>
+          </a:effectRef>
+          <a:fontRef idx="minor">
+            <a:schemeClr val="tx1"/>
+          </a:fontRef>
+        </p:style>
+      </p:cxnSp>
+      <p:cxnSp>
+        <p:nvCxnSpPr>
+          <p:cNvPr id="29" name="Connector 28"/>
+          <p:cNvCxnSpPr>
+            <a:stCxn id="15" idx="0"/>
+            <a:endCxn id="16" idx="2"/>
+          </p:cNvCxnSpPr>
+          <p:nvPr/>
+        </p:nvCxnSpPr>
+        <p:spPr>
+          <a:xfrm>
+            <a:off x="1838395" y="4198490"/>
+            <a:ext cx="197964" cy="96185"/>
+          </a:xfrm>
+          <a:prstGeom prst="line">
+            <a:avLst/>
+          </a:prstGeom>
+          <a:ln>
+            <a:headEnd type="arrow" w="med" len="med"/>
+          </a:ln>
+        </p:spPr>
+        <p:style>
+          <a:lnRef idx="2">
+            <a:schemeClr val="accent1"/>
+          </a:lnRef>
+          <a:fillRef idx="0">
+            <a:schemeClr val="accent1"/>
+          </a:fillRef>
+          <a:effectRef idx="1">
+            <a:schemeClr val="accent1"/>
+          </a:effectRef>
+          <a:fontRef idx="minor">
+            <a:schemeClr val="tx1"/>
+          </a:fontRef>
+        </p:style>
+      </p:cxnSp>
+      <p:cxnSp>
+        <p:nvCxnSpPr>
+          <p:cNvPr id="30" name="Connector 29"/>
+          <p:cNvCxnSpPr>
+            <a:stCxn id="16" idx="3"/>
+            <a:endCxn id="17" idx="1"/>
+          </p:cNvCxnSpPr>
+          <p:nvPr/>
+        </p:nvCxnSpPr>
+        <p:spPr>
+          <a:xfrm flipH="1" flipV="1">
+            <a:off x="457200" y="3740317"/>
+            <a:ext cx="2179159" cy="304358"/>
+          </a:xfrm>
+          <a:prstGeom prst="line">
+            <a:avLst/>
+          </a:prstGeom>
+          <a:ln>
+            <a:headEnd type="arrow" w="med" len="med"/>
+          </a:ln>
         </p:spPr>
         <p:style>
           <a:lnRef idx="2">
@@ -4709,7 +5373,7 @@
           <a:lstStyle/>
           <a:p>
             <a:r>
-              <a:t>2. シーケンス図（Sequence Diagram）</a:t>
+              <a:t>1b. フローチャート— リンク種別・ラベルデモ</a:t>
             </a:r>
           </a:p>
         </p:txBody>
@@ -4733,14 +5397,370 @@
       </p:sp>
       <p:sp>
         <p:nvSpPr>
-          <p:cNvPr id="4" name="TextBox 3"/>
+          <p:cNvPr id="4" name="Rounded Rectangle 3"/>
+          <p:cNvSpPr/>
+          <p:nvPr/>
+        </p:nvSpPr>
+        <p:spPr>
+          <a:xfrm>
+            <a:off x="3680327" y="5626163"/>
+            <a:ext cx="1200000" cy="500000"/>
+          </a:xfrm>
+          <a:prstGeom prst="roundRect">
+            <a:avLst/>
+          </a:prstGeom>
+        </p:spPr>
+        <p:style>
+          <a:lnRef idx="1">
+            <a:schemeClr val="accent1"/>
+          </a:lnRef>
+          <a:fillRef idx="3">
+            <a:schemeClr val="accent1"/>
+          </a:fillRef>
+          <a:effectRef idx="2">
+            <a:schemeClr val="accent1"/>
+          </a:effectRef>
+          <a:fontRef idx="minor">
+            <a:schemeClr val="lt1"/>
+          </a:fontRef>
+        </p:style>
+        <p:txBody>
+          <a:bodyPr rtlCol="0" anchor="ctr"/>
+          <a:lstStyle/>
+          <a:p>
+            <a:r>
+              <a:rPr sz="1200"/>
+              <a:t>開始</a:t>
+            </a:r>
+          </a:p>
+        </p:txBody>
+      </p:sp>
+      <p:sp>
+        <p:nvSpPr>
+          <p:cNvPr id="5" name="Rectangle 4"/>
+          <p:cNvSpPr/>
+          <p:nvPr/>
+        </p:nvSpPr>
+        <p:spPr>
+          <a:xfrm>
+            <a:off x="4117675" y="5011807"/>
+            <a:ext cx="1200000" cy="500000"/>
+          </a:xfrm>
+          <a:prstGeom prst="rect">
+            <a:avLst/>
+          </a:prstGeom>
+        </p:spPr>
+        <p:style>
+          <a:lnRef idx="1">
+            <a:schemeClr val="accent1"/>
+          </a:lnRef>
+          <a:fillRef idx="3">
+            <a:schemeClr val="accent1"/>
+          </a:fillRef>
+          <a:effectRef idx="2">
+            <a:schemeClr val="accent1"/>
+          </a:effectRef>
+          <a:fontRef idx="minor">
+            <a:schemeClr val="lt1"/>
+          </a:fontRef>
+        </p:style>
+        <p:txBody>
+          <a:bodyPr rtlCol="0" anchor="ctr"/>
+          <a:lstStyle/>
+          <a:p>
+            <a:r>
+              <a:rPr sz="1200"/>
+              <a:t>処理1</a:t>
+            </a:r>
+          </a:p>
+        </p:txBody>
+      </p:sp>
+      <p:sp>
+        <p:nvSpPr>
+          <p:cNvPr id="6" name="Rectangle 5"/>
+          <p:cNvSpPr/>
+          <p:nvPr/>
+        </p:nvSpPr>
+        <p:spPr>
+          <a:xfrm>
+            <a:off x="5625223" y="4755047"/>
+            <a:ext cx="1200000" cy="500000"/>
+          </a:xfrm>
+          <a:prstGeom prst="rect">
+            <a:avLst/>
+          </a:prstGeom>
+        </p:spPr>
+        <p:style>
+          <a:lnRef idx="1">
+            <a:schemeClr val="accent1"/>
+          </a:lnRef>
+          <a:fillRef idx="3">
+            <a:schemeClr val="accent1"/>
+          </a:fillRef>
+          <a:effectRef idx="2">
+            <a:schemeClr val="accent1"/>
+          </a:effectRef>
+          <a:fontRef idx="minor">
+            <a:schemeClr val="lt1"/>
+          </a:fontRef>
+        </p:style>
+        <p:txBody>
+          <a:bodyPr rtlCol="0" anchor="ctr"/>
+          <a:lstStyle/>
+          <a:p>
+            <a:r>
+              <a:rPr sz="1200"/>
+              <a:t>処理2</a:t>
+            </a:r>
+          </a:p>
+        </p:txBody>
+      </p:sp>
+      <p:sp>
+        <p:nvSpPr>
+          <p:cNvPr id="7" name="Rectangle 6"/>
+          <p:cNvSpPr/>
+          <p:nvPr/>
+        </p:nvSpPr>
+        <p:spPr>
+          <a:xfrm>
+            <a:off x="5918060" y="3816905"/>
+            <a:ext cx="1200000" cy="500000"/>
+          </a:xfrm>
+          <a:prstGeom prst="rect">
+            <a:avLst/>
+          </a:prstGeom>
+        </p:spPr>
+        <p:style>
+          <a:lnRef idx="1">
+            <a:schemeClr val="accent1"/>
+          </a:lnRef>
+          <a:fillRef idx="3">
+            <a:schemeClr val="accent1"/>
+          </a:fillRef>
+          <a:effectRef idx="2">
+            <a:schemeClr val="accent1"/>
+          </a:effectRef>
+          <a:fontRef idx="minor">
+            <a:schemeClr val="lt1"/>
+          </a:fontRef>
+        </p:style>
+        <p:txBody>
+          <a:bodyPr rtlCol="0" anchor="ctr"/>
+          <a:lstStyle/>
+          <a:p>
+            <a:r>
+              <a:rPr sz="1200"/>
+              <a:t>処理3</a:t>
+            </a:r>
+          </a:p>
+        </p:txBody>
+      </p:sp>
+      <p:sp>
+        <p:nvSpPr>
+          <p:cNvPr id="8" name="Rectangle 7"/>
+          <p:cNvSpPr/>
+          <p:nvPr/>
+        </p:nvSpPr>
+        <p:spPr>
+          <a:xfrm>
+            <a:off x="5015561" y="2880833"/>
+            <a:ext cx="1200000" cy="500000"/>
+          </a:xfrm>
+          <a:prstGeom prst="rect">
+            <a:avLst/>
+          </a:prstGeom>
+        </p:spPr>
+        <p:style>
+          <a:lnRef idx="1">
+            <a:schemeClr val="accent1"/>
+          </a:lnRef>
+          <a:fillRef idx="3">
+            <a:schemeClr val="accent1"/>
+          </a:fillRef>
+          <a:effectRef idx="2">
+            <a:schemeClr val="accent1"/>
+          </a:effectRef>
+          <a:fontRef idx="minor">
+            <a:schemeClr val="lt1"/>
+          </a:fontRef>
+        </p:style>
+        <p:txBody>
+          <a:bodyPr rtlCol="0" anchor="ctr"/>
+          <a:lstStyle/>
+          <a:p>
+            <a:r>
+              <a:rPr sz="1200"/>
+              <a:t>丸端</a:t>
+            </a:r>
+          </a:p>
+        </p:txBody>
+      </p:sp>
+      <p:sp>
+        <p:nvSpPr>
+          <p:cNvPr id="9" name="Rectangle 8"/>
+          <p:cNvSpPr/>
+          <p:nvPr/>
+        </p:nvSpPr>
+        <p:spPr>
+          <a:xfrm>
+            <a:off x="3761027" y="2608975"/>
+            <a:ext cx="1200000" cy="500000"/>
+          </a:xfrm>
+          <a:prstGeom prst="rect">
+            <a:avLst/>
+          </a:prstGeom>
+        </p:spPr>
+        <p:style>
+          <a:lnRef idx="1">
+            <a:schemeClr val="accent1"/>
+          </a:lnRef>
+          <a:fillRef idx="3">
+            <a:schemeClr val="accent1"/>
+          </a:fillRef>
+          <a:effectRef idx="2">
+            <a:schemeClr val="accent1"/>
+          </a:effectRef>
+          <a:fontRef idx="minor">
+            <a:schemeClr val="lt1"/>
+          </a:fontRef>
+        </p:style>
+        <p:txBody>
+          <a:bodyPr rtlCol="0" anchor="ctr"/>
+          <a:lstStyle/>
+          <a:p>
+            <a:r>
+              <a:rPr sz="1200"/>
+              <a:t>×端</a:t>
+            </a:r>
+          </a:p>
+        </p:txBody>
+      </p:sp>
+      <p:sp>
+        <p:nvSpPr>
+          <p:cNvPr id="10" name="Rectangle 9"/>
+          <p:cNvSpPr/>
+          <p:nvPr/>
+        </p:nvSpPr>
+        <p:spPr>
+          <a:xfrm>
+            <a:off x="2440670" y="2037778"/>
+            <a:ext cx="1200000" cy="500000"/>
+          </a:xfrm>
+          <a:prstGeom prst="rect">
+            <a:avLst/>
+          </a:prstGeom>
+        </p:spPr>
+        <p:style>
+          <a:lnRef idx="1">
+            <a:schemeClr val="accent1"/>
+          </a:lnRef>
+          <a:fillRef idx="3">
+            <a:schemeClr val="accent1"/>
+          </a:fillRef>
+          <a:effectRef idx="2">
+            <a:schemeClr val="accent1"/>
+          </a:effectRef>
+          <a:fontRef idx="minor">
+            <a:schemeClr val="lt1"/>
+          </a:fontRef>
+        </p:style>
+        <p:txBody>
+          <a:bodyPr rtlCol="0" anchor="ctr"/>
+          <a:lstStyle/>
+          <a:p>
+            <a:r>
+              <a:rPr sz="1200"/>
+              <a:t>処理4</a:t>
+            </a:r>
+          </a:p>
+        </p:txBody>
+      </p:sp>
+      <p:sp>
+        <p:nvSpPr>
+          <p:cNvPr id="11" name="Rounded Rectangle 10"/>
+          <p:cNvSpPr/>
+          <p:nvPr/>
+        </p:nvSpPr>
+        <p:spPr>
+          <a:xfrm>
+            <a:off x="1217452" y="2167940"/>
+            <a:ext cx="1200000" cy="500000"/>
+          </a:xfrm>
+          <a:prstGeom prst="roundRect">
+            <a:avLst/>
+          </a:prstGeom>
+        </p:spPr>
+        <p:style>
+          <a:lnRef idx="1">
+            <a:schemeClr val="accent1"/>
+          </a:lnRef>
+          <a:fillRef idx="3">
+            <a:schemeClr val="accent1"/>
+          </a:fillRef>
+          <a:effectRef idx="2">
+            <a:schemeClr val="accent1"/>
+          </a:effectRef>
+          <a:fontRef idx="minor">
+            <a:schemeClr val="lt1"/>
+          </a:fontRef>
+        </p:style>
+        <p:txBody>
+          <a:bodyPr rtlCol="0" anchor="ctr"/>
+          <a:lstStyle/>
+          <a:p>
+            <a:r>
+              <a:rPr sz="1200"/>
+              <a:t>終了</a:t>
+            </a:r>
+          </a:p>
+        </p:txBody>
+      </p:sp>
+      <p:cxnSp>
+        <p:nvCxnSpPr>
+          <p:cNvPr id="12" name="Connector 11"/>
+          <p:cNvCxnSpPr>
+            <a:stCxn id="4" idx="0"/>
+            <a:endCxn id="5" idx="2"/>
+          </p:cNvCxnSpPr>
+          <p:nvPr/>
+        </p:nvCxnSpPr>
+        <p:spPr>
+          <a:xfrm flipV="1">
+            <a:off x="4280327" y="5511807"/>
+            <a:ext cx="437348" cy="114356"/>
+          </a:xfrm>
+          <a:prstGeom prst="line">
+            <a:avLst/>
+          </a:prstGeom>
+          <a:ln>
+            <a:headEnd type="arrow" w="med" len="med"/>
+          </a:ln>
+        </p:spPr>
+        <p:style>
+          <a:lnRef idx="2">
+            <a:schemeClr val="accent1"/>
+          </a:lnRef>
+          <a:fillRef idx="0">
+            <a:schemeClr val="accent1"/>
+          </a:fillRef>
+          <a:effectRef idx="1">
+            <a:schemeClr val="accent1"/>
+          </a:effectRef>
+          <a:fontRef idx="minor">
+            <a:schemeClr val="tx1"/>
+          </a:fontRef>
+        </p:style>
+      </p:cxnSp>
+      <p:sp>
+        <p:nvSpPr>
+          <p:cNvPr id="13" name="TextBox 12"/>
           <p:cNvSpPr txBox="1"/>
           <p:nvPr/>
         </p:nvSpPr>
         <p:spPr>
           <a:xfrm>
-            <a:off x="457200" y="1600200"/>
-            <a:ext cx="8229600" cy="4525963"/>
+            <a:off x="4049001" y="5408985"/>
+            <a:ext cx="900000" cy="320000"/>
           </a:xfrm>
           <a:prstGeom prst="rect">
             <a:avLst/>
@@ -4748,27 +5768,323 @@
           <a:noFill/>
         </p:spPr>
         <p:txBody>
-          <a:bodyPr wrap="square">
+          <a:bodyPr wrap="none">
             <a:spAutoFit/>
           </a:bodyPr>
           <a:lstStyle/>
           <a:p>
             <a:r>
-              <a:rPr sz="1000">
-                <a:latin typeface="Courier New"/>
-              </a:rPr>
-              <a:t>sequenceDiagram
-    participant A as クライアント
-    participant B as サーバー
-    participant C as データベース
-    A-&gt;&gt;B: リクエスト送信
-    B-&gt;&gt;C: クエリ実行
-    C--&gt;&gt;B: 結果返却
-    B--&gt;&gt;A: レスポンス返却</a:t>
-            </a:r>
-          </a:p>
-        </p:txBody>
-      </p:sp>
+              <a:rPr sz="1000"/>
+              <a:t>通常矢印</a:t>
+            </a:r>
+          </a:p>
+        </p:txBody>
+      </p:sp>
+      <p:cxnSp>
+        <p:nvCxnSpPr>
+          <p:cNvPr id="14" name="Connector 13"/>
+          <p:cNvCxnSpPr>
+            <a:stCxn id="5" idx="1"/>
+            <a:endCxn id="6" idx="3"/>
+          </p:cNvCxnSpPr>
+          <p:nvPr/>
+        </p:nvCxnSpPr>
+        <p:spPr>
+          <a:xfrm flipV="1">
+            <a:off x="4117675" y="5005047"/>
+            <a:ext cx="2707548" cy="256760"/>
+          </a:xfrm>
+          <a:prstGeom prst="line">
+            <a:avLst/>
+          </a:prstGeom>
+          <a:ln>
+            <a:prstDash val="dash"/>
+            <a:headEnd type="arrow" w="med" len="med"/>
+          </a:ln>
+        </p:spPr>
+        <p:style>
+          <a:lnRef idx="2">
+            <a:schemeClr val="accent1"/>
+          </a:lnRef>
+          <a:fillRef idx="0">
+            <a:schemeClr val="accent1"/>
+          </a:fillRef>
+          <a:effectRef idx="1">
+            <a:schemeClr val="accent1"/>
+          </a:effectRef>
+          <a:fontRef idx="minor">
+            <a:schemeClr val="tx1"/>
+          </a:fontRef>
+        </p:style>
+      </p:cxnSp>
+      <p:sp>
+        <p:nvSpPr>
+          <p:cNvPr id="15" name="TextBox 14"/>
+          <p:cNvSpPr txBox="1"/>
+          <p:nvPr/>
+        </p:nvSpPr>
+        <p:spPr>
+          <a:xfrm>
+            <a:off x="5021449" y="4973427"/>
+            <a:ext cx="900000" cy="320000"/>
+          </a:xfrm>
+          <a:prstGeom prst="rect">
+            <a:avLst/>
+          </a:prstGeom>
+          <a:noFill/>
+        </p:spPr>
+        <p:txBody>
+          <a:bodyPr wrap="none">
+            <a:spAutoFit/>
+          </a:bodyPr>
+          <a:lstStyle/>
+          <a:p>
+            <a:r>
+              <a:rPr sz="1000"/>
+              <a:t>点線矢印</a:t>
+            </a:r>
+          </a:p>
+        </p:txBody>
+      </p:sp>
+      <p:cxnSp>
+        <p:nvCxnSpPr>
+          <p:cNvPr id="16" name="Connector 15"/>
+          <p:cNvCxnSpPr>
+            <a:stCxn id="6" idx="0"/>
+            <a:endCxn id="7" idx="2"/>
+          </p:cNvCxnSpPr>
+          <p:nvPr/>
+        </p:nvCxnSpPr>
+        <p:spPr>
+          <a:xfrm flipV="1">
+            <a:off x="6225223" y="4316905"/>
+            <a:ext cx="292837" cy="438142"/>
+          </a:xfrm>
+          <a:prstGeom prst="line">
+            <a:avLst/>
+          </a:prstGeom>
+          <a:ln w="38100">
+            <a:headEnd type="arrow" w="med" len="med"/>
+          </a:ln>
+        </p:spPr>
+        <p:style>
+          <a:lnRef idx="2">
+            <a:schemeClr val="accent1"/>
+          </a:lnRef>
+          <a:fillRef idx="0">
+            <a:schemeClr val="accent1"/>
+          </a:fillRef>
+          <a:effectRef idx="1">
+            <a:schemeClr val="accent1"/>
+          </a:effectRef>
+          <a:fontRef idx="minor">
+            <a:schemeClr val="tx1"/>
+          </a:fontRef>
+        </p:style>
+      </p:cxnSp>
+      <p:sp>
+        <p:nvSpPr>
+          <p:cNvPr id="17" name="TextBox 16"/>
+          <p:cNvSpPr txBox="1"/>
+          <p:nvPr/>
+        </p:nvSpPr>
+        <p:spPr>
+          <a:xfrm>
+            <a:off x="5921641" y="4375976"/>
+            <a:ext cx="900000" cy="320000"/>
+          </a:xfrm>
+          <a:prstGeom prst="rect">
+            <a:avLst/>
+          </a:prstGeom>
+          <a:noFill/>
+        </p:spPr>
+        <p:txBody>
+          <a:bodyPr wrap="none">
+            <a:spAutoFit/>
+          </a:bodyPr>
+          <a:lstStyle/>
+          <a:p>
+            <a:r>
+              <a:rPr sz="1000"/>
+              <a:t>太線矢印</a:t>
+            </a:r>
+          </a:p>
+        </p:txBody>
+      </p:sp>
+      <p:cxnSp>
+        <p:nvCxnSpPr>
+          <p:cNvPr id="18" name="Connector 17"/>
+          <p:cNvCxnSpPr>
+            <a:stCxn id="7" idx="0"/>
+            <a:endCxn id="8" idx="2"/>
+          </p:cNvCxnSpPr>
+          <p:nvPr/>
+        </p:nvCxnSpPr>
+        <p:spPr>
+          <a:xfrm flipH="1" flipV="1">
+            <a:off x="5615561" y="3380833"/>
+            <a:ext cx="902499" cy="436072"/>
+          </a:xfrm>
+          <a:prstGeom prst="line">
+            <a:avLst/>
+          </a:prstGeom>
+          <a:ln>
+            <a:headEnd type="oval" w="med" len="med"/>
+          </a:ln>
+        </p:spPr>
+        <p:style>
+          <a:lnRef idx="2">
+            <a:schemeClr val="accent1"/>
+          </a:lnRef>
+          <a:fillRef idx="0">
+            <a:schemeClr val="accent1"/>
+          </a:fillRef>
+          <a:effectRef idx="1">
+            <a:schemeClr val="accent1"/>
+          </a:effectRef>
+          <a:fontRef idx="minor">
+            <a:schemeClr val="tx1"/>
+          </a:fontRef>
+        </p:style>
+      </p:cxnSp>
+      <p:cxnSp>
+        <p:nvCxnSpPr>
+          <p:cNvPr id="19" name="Connector 18"/>
+          <p:cNvCxnSpPr>
+            <a:stCxn id="8" idx="3"/>
+            <a:endCxn id="9" idx="1"/>
+          </p:cNvCxnSpPr>
+          <p:nvPr/>
+        </p:nvCxnSpPr>
+        <p:spPr>
+          <a:xfrm flipH="1" flipV="1">
+            <a:off x="3761027" y="2858975"/>
+            <a:ext cx="2454534" cy="271858"/>
+          </a:xfrm>
+          <a:prstGeom prst="line">
+            <a:avLst/>
+          </a:prstGeom>
+          <a:ln>
+            <a:headEnd type="arrow" w="med" len="med"/>
+          </a:ln>
+        </p:spPr>
+        <p:style>
+          <a:lnRef idx="2">
+            <a:schemeClr val="accent1"/>
+          </a:lnRef>
+          <a:fillRef idx="0">
+            <a:schemeClr val="accent1"/>
+          </a:fillRef>
+          <a:effectRef idx="1">
+            <a:schemeClr val="accent1"/>
+          </a:effectRef>
+          <a:fontRef idx="minor">
+            <a:schemeClr val="tx1"/>
+          </a:fontRef>
+        </p:style>
+      </p:cxnSp>
+      <p:cxnSp>
+        <p:nvCxnSpPr>
+          <p:cNvPr id="20" name="Connector 19"/>
+          <p:cNvCxnSpPr>
+            <a:stCxn id="9" idx="3"/>
+            <a:endCxn id="10" idx="1"/>
+          </p:cNvCxnSpPr>
+          <p:nvPr/>
+        </p:nvCxnSpPr>
+        <p:spPr>
+          <a:xfrm flipH="1" flipV="1">
+            <a:off x="2440670" y="2287778"/>
+            <a:ext cx="2520357" cy="571197"/>
+          </a:xfrm>
+          <a:prstGeom prst="line">
+            <a:avLst/>
+          </a:prstGeom>
+          <a:ln>
+            <a:headEnd type="arrow" w="med" len="med"/>
+            <a:tailEnd type="arrow" w="med" len="med"/>
+          </a:ln>
+        </p:spPr>
+        <p:style>
+          <a:lnRef idx="2">
+            <a:schemeClr val="accent1"/>
+          </a:lnRef>
+          <a:fillRef idx="0">
+            <a:schemeClr val="accent1"/>
+          </a:fillRef>
+          <a:effectRef idx="1">
+            <a:schemeClr val="accent1"/>
+          </a:effectRef>
+          <a:fontRef idx="minor">
+            <a:schemeClr val="tx1"/>
+          </a:fontRef>
+        </p:style>
+      </p:cxnSp>
+      <p:sp>
+        <p:nvSpPr>
+          <p:cNvPr id="21" name="TextBox 20"/>
+          <p:cNvSpPr txBox="1"/>
+          <p:nvPr/>
+        </p:nvSpPr>
+        <p:spPr>
+          <a:xfrm>
+            <a:off x="3250848" y="2413376"/>
+            <a:ext cx="900000" cy="320000"/>
+          </a:xfrm>
+          <a:prstGeom prst="rect">
+            <a:avLst/>
+          </a:prstGeom>
+          <a:noFill/>
+        </p:spPr>
+        <p:txBody>
+          <a:bodyPr wrap="none">
+            <a:spAutoFit/>
+          </a:bodyPr>
+          <a:lstStyle/>
+          <a:p>
+            <a:r>
+              <a:rPr sz="1000"/>
+              <a:t>両方向</a:t>
+            </a:r>
+          </a:p>
+        </p:txBody>
+      </p:sp>
+      <p:cxnSp>
+        <p:nvCxnSpPr>
+          <p:cNvPr id="22" name="Connector 21"/>
+          <p:cNvCxnSpPr>
+            <a:stCxn id="10" idx="3"/>
+            <a:endCxn id="11" idx="1"/>
+          </p:cNvCxnSpPr>
+          <p:nvPr/>
+        </p:nvCxnSpPr>
+        <p:spPr>
+          <a:xfrm flipH="1">
+            <a:off x="1217452" y="2287778"/>
+            <a:ext cx="2423218" cy="130162"/>
+          </a:xfrm>
+          <a:prstGeom prst="line">
+            <a:avLst/>
+          </a:prstGeom>
+          <a:ln>
+            <a:headEnd type="arrow" w="med" len="med"/>
+          </a:ln>
+        </p:spPr>
+        <p:style>
+          <a:lnRef idx="2">
+            <a:schemeClr val="accent1"/>
+          </a:lnRef>
+          <a:fillRef idx="0">
+            <a:schemeClr val="accent1"/>
+          </a:fillRef>
+          <a:effectRef idx="1">
+            <a:schemeClr val="accent1"/>
+          </a:effectRef>
+          <a:fontRef idx="minor">
+            <a:schemeClr val="tx1"/>
+          </a:fontRef>
+        </p:style>
+      </p:cxnSp>
     </p:spTree>
   </p:cSld>
   <p:clrMapOvr>
@@ -4803,6 +6119,100 @@
           <a:lstStyle/>
           <a:p>
             <a:r>
+              <a:t>2. シーケンス図（Sequence Diagram）</a:t>
+            </a:r>
+          </a:p>
+        </p:txBody>
+      </p:sp>
+      <p:sp>
+        <p:nvSpPr>
+          <p:cNvPr id="3" name="Content Placeholder 2"/>
+          <p:cNvSpPr>
+            <a:spLocks noGrp="1"/>
+          </p:cNvSpPr>
+          <p:nvPr>
+            <p:ph idx="1"/>
+          </p:nvPr>
+        </p:nvSpPr>
+        <p:spPr/>
+        <p:txBody>
+          <a:bodyPr/>
+          <a:lstStyle/>
+          <a:p/>
+        </p:txBody>
+      </p:sp>
+      <p:sp>
+        <p:nvSpPr>
+          <p:cNvPr id="4" name="TextBox 3"/>
+          <p:cNvSpPr txBox="1"/>
+          <p:nvPr/>
+        </p:nvSpPr>
+        <p:spPr>
+          <a:xfrm>
+            <a:off x="457200" y="1600200"/>
+            <a:ext cx="8229600" cy="4525963"/>
+          </a:xfrm>
+          <a:prstGeom prst="rect">
+            <a:avLst/>
+          </a:prstGeom>
+          <a:noFill/>
+        </p:spPr>
+        <p:txBody>
+          <a:bodyPr wrap="square">
+            <a:spAutoFit/>
+          </a:bodyPr>
+          <a:lstStyle/>
+          <a:p>
+            <a:r>
+              <a:rPr sz="1000">
+                <a:latin typeface="Courier New"/>
+              </a:rPr>
+              <a:t>sequenceDiagram
+    participant A as クライアント
+    participant B as サーバー
+    participant C as データベース
+    A-&gt;&gt;B: リクエスト送信
+    B-&gt;&gt;C: クエリ実行
+    C--&gt;&gt;B: 結果返却
+    B--&gt;&gt;A: レスポンス返却</a:t>
+            </a:r>
+          </a:p>
+        </p:txBody>
+      </p:sp>
+    </p:spTree>
+  </p:cSld>
+  <p:clrMapOvr>
+    <a:masterClrMapping/>
+  </p:clrMapOvr>
+</p:sld>
+</file>
+
+<file path=ppt/slides/slide16.xml><?xml version="1.0" encoding="utf-8"?>
+<p:sld xmlns:a="http://schemas.openxmlformats.org/drawingml/2006/main" xmlns:p="http://schemas.openxmlformats.org/presentationml/2006/main" xmlns:r="http://schemas.openxmlformats.org/officeDocument/2006/relationships">
+  <p:cSld>
+    <p:spTree>
+      <p:nvGrpSpPr>
+        <p:cNvPr id="1" name=""/>
+        <p:cNvGrpSpPr/>
+        <p:nvPr/>
+      </p:nvGrpSpPr>
+      <p:grpSpPr/>
+      <p:sp>
+        <p:nvSpPr>
+          <p:cNvPr id="2" name="Title 1"/>
+          <p:cNvSpPr>
+            <a:spLocks noGrp="1"/>
+          </p:cNvSpPr>
+          <p:nvPr>
+            <p:ph type="title"/>
+          </p:nvPr>
+        </p:nvSpPr>
+        <p:spPr/>
+        <p:txBody>
+          <a:bodyPr/>
+          <a:lstStyle/>
+          <a:p>
+            <a:r>
               <a:t>3. ガントチャート（Gantt Diagram）</a:t>
             </a:r>
           </a:p>
@@ -4874,7 +6284,7 @@
 </p:sld>
 </file>
 
-<file path=ppt/slides/slide16.xml><?xml version="1.0" encoding="utf-8"?>
+<file path=ppt/slides/slide17.xml><?xml version="1.0" encoding="utf-8"?>
 <p:sld xmlns:a="http://schemas.openxmlformats.org/drawingml/2006/main" xmlns:p="http://schemas.openxmlformats.org/presentationml/2006/main" xmlns:r="http://schemas.openxmlformats.org/officeDocument/2006/relationships">
   <p:cSld>
     <p:spTree>
@@ -6298,7 +7708,7 @@
 </p:sld>
 </file>
 
-<file path=ppt/slides/slide17.xml><?xml version="1.0" encoding="utf-8"?>
+<file path=ppt/slides/slide18.xml><?xml version="1.0" encoding="utf-8"?>
 <p:sld xmlns:a="http://schemas.openxmlformats.org/drawingml/2006/main" xmlns:p="http://schemas.openxmlformats.org/presentationml/2006/main" xmlns:r="http://schemas.openxmlformats.org/officeDocument/2006/relationships">
   <p:cSld>
     <p:spTree>
@@ -6764,321 +8174,6 @@
           <a:xfrm>
             <a:off x="3824463" y="5368892"/>
             <a:ext cx="538128" cy="257271"/>
-          </a:xfrm>
-          <a:prstGeom prst="line">
-            <a:avLst/>
-          </a:prstGeom>
-        </p:spPr>
-        <p:style>
-          <a:lnRef idx="2">
-            <a:schemeClr val="accent1"/>
-          </a:lnRef>
-          <a:fillRef idx="0">
-            <a:schemeClr val="accent1"/>
-          </a:fillRef>
-          <a:effectRef idx="1">
-            <a:schemeClr val="accent1"/>
-          </a:effectRef>
-          <a:fontRef idx="minor">
-            <a:schemeClr val="tx1"/>
-          </a:fontRef>
-        </p:style>
-      </p:cxnSp>
-    </p:spTree>
-  </p:cSld>
-  <p:clrMapOvr>
-    <a:masterClrMapping/>
-  </p:clrMapOvr>
-</p:sld>
-</file>
-
-<file path=ppt/slides/slide18.xml><?xml version="1.0" encoding="utf-8"?>
-<p:sld xmlns:a="http://schemas.openxmlformats.org/drawingml/2006/main" xmlns:p="http://schemas.openxmlformats.org/presentationml/2006/main" xmlns:r="http://schemas.openxmlformats.org/officeDocument/2006/relationships">
-  <p:cSld>
-    <p:spTree>
-      <p:nvGrpSpPr>
-        <p:cNvPr id="1" name=""/>
-        <p:cNvGrpSpPr/>
-        <p:nvPr/>
-      </p:nvGrpSpPr>
-      <p:grpSpPr/>
-      <p:sp>
-        <p:nvSpPr>
-          <p:cNvPr id="2" name="Title 1"/>
-          <p:cNvSpPr>
-            <a:spLocks noGrp="1"/>
-          </p:cNvSpPr>
-          <p:nvPr>
-            <p:ph type="title"/>
-          </p:nvPr>
-        </p:nvSpPr>
-        <p:spPr/>
-        <p:txBody>
-          <a:bodyPr/>
-          <a:lstStyle/>
-          <a:p>
-            <a:r>
-              <a:t>6. ER図（Entity Relationship Diagram）</a:t>
-            </a:r>
-          </a:p>
-        </p:txBody>
-      </p:sp>
-      <p:sp>
-        <p:nvSpPr>
-          <p:cNvPr id="3" name="Content Placeholder 2"/>
-          <p:cNvSpPr>
-            <a:spLocks noGrp="1"/>
-          </p:cNvSpPr>
-          <p:nvPr>
-            <p:ph idx="1"/>
-          </p:nvPr>
-        </p:nvSpPr>
-        <p:spPr/>
-        <p:txBody>
-          <a:bodyPr/>
-          <a:lstStyle/>
-          <a:p/>
-        </p:txBody>
-      </p:sp>
-      <p:sp>
-        <p:nvSpPr>
-          <p:cNvPr id="4" name="Rectangle 3"/>
-          <p:cNvSpPr/>
-          <p:nvPr/>
-        </p:nvSpPr>
-        <p:spPr>
-          <a:xfrm>
-            <a:off x="7486800" y="5152460"/>
-            <a:ext cx="1200000" cy="500000"/>
-          </a:xfrm>
-          <a:prstGeom prst="rect">
-            <a:avLst/>
-          </a:prstGeom>
-        </p:spPr>
-        <p:style>
-          <a:lnRef idx="1">
-            <a:schemeClr val="accent1"/>
-          </a:lnRef>
-          <a:fillRef idx="3">
-            <a:schemeClr val="accent1"/>
-          </a:fillRef>
-          <a:effectRef idx="2">
-            <a:schemeClr val="accent1"/>
-          </a:effectRef>
-          <a:fontRef idx="minor">
-            <a:schemeClr val="lt1"/>
-          </a:fontRef>
-        </p:style>
-        <p:txBody>
-          <a:bodyPr rtlCol="0" anchor="ctr"/>
-          <a:lstStyle/>
-          <a:p>
-            <a:r>
-              <a:rPr sz="1200"/>
-              <a:t>CUSTOMER</a:t>
-            </a:r>
-          </a:p>
-        </p:txBody>
-      </p:sp>
-      <p:sp>
-        <p:nvSpPr>
-          <p:cNvPr id="5" name="Rectangle 4"/>
-          <p:cNvSpPr/>
-          <p:nvPr/>
-        </p:nvSpPr>
-        <p:spPr>
-          <a:xfrm>
-            <a:off x="4933580" y="3310410"/>
-            <a:ext cx="1200000" cy="500000"/>
-          </a:xfrm>
-          <a:prstGeom prst="rect">
-            <a:avLst/>
-          </a:prstGeom>
-        </p:spPr>
-        <p:style>
-          <a:lnRef idx="1">
-            <a:schemeClr val="accent1"/>
-          </a:lnRef>
-          <a:fillRef idx="3">
-            <a:schemeClr val="accent1"/>
-          </a:fillRef>
-          <a:effectRef idx="2">
-            <a:schemeClr val="accent1"/>
-          </a:effectRef>
-          <a:fontRef idx="minor">
-            <a:schemeClr val="lt1"/>
-          </a:fontRef>
-        </p:style>
-        <p:txBody>
-          <a:bodyPr rtlCol="0" anchor="ctr"/>
-          <a:lstStyle/>
-          <a:p>
-            <a:r>
-              <a:rPr sz="1200"/>
-              <a:t>ORDER</a:t>
-            </a:r>
-          </a:p>
-        </p:txBody>
-      </p:sp>
-      <p:sp>
-        <p:nvSpPr>
-          <p:cNvPr id="6" name="Rectangle 5"/>
-          <p:cNvSpPr/>
-          <p:nvPr/>
-        </p:nvSpPr>
-        <p:spPr>
-          <a:xfrm>
-            <a:off x="2104438" y="1896087"/>
-            <a:ext cx="1200000" cy="500000"/>
-          </a:xfrm>
-          <a:prstGeom prst="rect">
-            <a:avLst/>
-          </a:prstGeom>
-        </p:spPr>
-        <p:style>
-          <a:lnRef idx="1">
-            <a:schemeClr val="accent1"/>
-          </a:lnRef>
-          <a:fillRef idx="3">
-            <a:schemeClr val="accent1"/>
-          </a:fillRef>
-          <a:effectRef idx="2">
-            <a:schemeClr val="accent1"/>
-          </a:effectRef>
-          <a:fontRef idx="minor">
-            <a:schemeClr val="lt1"/>
-          </a:fontRef>
-        </p:style>
-        <p:txBody>
-          <a:bodyPr rtlCol="0" anchor="ctr"/>
-          <a:lstStyle/>
-          <a:p>
-            <a:r>
-              <a:rPr sz="1200"/>
-              <a:t>LINE-ITEM</a:t>
-            </a:r>
-          </a:p>
-        </p:txBody>
-      </p:sp>
-      <p:sp>
-        <p:nvSpPr>
-          <p:cNvPr id="7" name="Rectangle 6"/>
-          <p:cNvSpPr/>
-          <p:nvPr/>
-        </p:nvSpPr>
-        <p:spPr>
-          <a:xfrm>
-            <a:off x="1363180" y="4093767"/>
-            <a:ext cx="1200000" cy="500000"/>
-          </a:xfrm>
-          <a:prstGeom prst="rect">
-            <a:avLst/>
-          </a:prstGeom>
-        </p:spPr>
-        <p:style>
-          <a:lnRef idx="1">
-            <a:schemeClr val="accent1"/>
-          </a:lnRef>
-          <a:fillRef idx="3">
-            <a:schemeClr val="accent1"/>
-          </a:fillRef>
-          <a:effectRef idx="2">
-            <a:schemeClr val="accent1"/>
-          </a:effectRef>
-          <a:fontRef idx="minor">
-            <a:schemeClr val="lt1"/>
-          </a:fontRef>
-        </p:style>
-        <p:txBody>
-          <a:bodyPr rtlCol="0" anchor="ctr"/>
-          <a:lstStyle/>
-          <a:p>
-            <a:r>
-              <a:rPr sz="1200"/>
-              <a:t>PRODUCT</a:t>
-            </a:r>
-          </a:p>
-        </p:txBody>
-      </p:sp>
-      <p:cxnSp>
-        <p:nvCxnSpPr>
-          <p:cNvPr id="8" name="Connector 7"/>
-          <p:cNvCxnSpPr>
-            <a:stCxn id="4" idx="0"/>
-            <a:endCxn id="5" idx="2"/>
-          </p:cNvCxnSpPr>
-          <p:nvPr/>
-        </p:nvCxnSpPr>
-        <p:spPr>
-          <a:xfrm flipH="1" flipV="1">
-            <a:off x="5533580" y="3810410"/>
-            <a:ext cx="2553220" cy="1342050"/>
-          </a:xfrm>
-          <a:prstGeom prst="line">
-            <a:avLst/>
-          </a:prstGeom>
-        </p:spPr>
-        <p:style>
-          <a:lnRef idx="2">
-            <a:schemeClr val="accent1"/>
-          </a:lnRef>
-          <a:fillRef idx="0">
-            <a:schemeClr val="accent1"/>
-          </a:fillRef>
-          <a:effectRef idx="1">
-            <a:schemeClr val="accent1"/>
-          </a:effectRef>
-          <a:fontRef idx="minor">
-            <a:schemeClr val="tx1"/>
-          </a:fontRef>
-        </p:style>
-      </p:cxnSp>
-      <p:cxnSp>
-        <p:nvCxnSpPr>
-          <p:cNvPr id="9" name="Connector 8"/>
-          <p:cNvCxnSpPr>
-            <a:stCxn id="5" idx="3"/>
-            <a:endCxn id="6" idx="1"/>
-          </p:cNvCxnSpPr>
-          <p:nvPr/>
-        </p:nvCxnSpPr>
-        <p:spPr>
-          <a:xfrm flipH="1" flipV="1">
-            <a:off x="2104438" y="2146087"/>
-            <a:ext cx="4029142" cy="1414323"/>
-          </a:xfrm>
-          <a:prstGeom prst="line">
-            <a:avLst/>
-          </a:prstGeom>
-        </p:spPr>
-        <p:style>
-          <a:lnRef idx="2">
-            <a:schemeClr val="accent1"/>
-          </a:lnRef>
-          <a:fillRef idx="0">
-            <a:schemeClr val="accent1"/>
-          </a:fillRef>
-          <a:effectRef idx="1">
-            <a:schemeClr val="accent1"/>
-          </a:effectRef>
-          <a:fontRef idx="minor">
-            <a:schemeClr val="tx1"/>
-          </a:fontRef>
-        </p:style>
-      </p:cxnSp>
-      <p:cxnSp>
-        <p:nvCxnSpPr>
-          <p:cNvPr id="10" name="Connector 9"/>
-          <p:cNvCxnSpPr>
-            <a:stCxn id="7" idx="0"/>
-            <a:endCxn id="6" idx="2"/>
-          </p:cNvCxnSpPr>
-          <p:nvPr/>
-        </p:nvCxnSpPr>
-        <p:spPr>
-          <a:xfrm flipV="1">
-            <a:off x="1963180" y="2396087"/>
-            <a:ext cx="741258" cy="1697680"/>
           </a:xfrm>
           <a:prstGeom prst="line">
             <a:avLst/>
@@ -7133,7 +8228,7 @@
           <a:lstStyle/>
           <a:p>
             <a:r>
-              <a:t>7. ユーザージャーニー図（User Journey）</a:t>
+              <a:t>6. ER図（Entity Relationship Diagram）</a:t>
             </a:r>
           </a:p>
         </p:txBody>
@@ -7157,44 +8252,263 @@
       </p:sp>
       <p:sp>
         <p:nvSpPr>
-          <p:cNvPr id="4" name="TextBox 3"/>
-          <p:cNvSpPr txBox="1"/>
+          <p:cNvPr id="4" name="Rectangle 3"/>
+          <p:cNvSpPr/>
           <p:nvPr/>
         </p:nvSpPr>
         <p:spPr>
           <a:xfrm>
-            <a:off x="457200" y="1600200"/>
-            <a:ext cx="8229600" cy="4525963"/>
+            <a:off x="7486800" y="5152460"/>
+            <a:ext cx="1200000" cy="500000"/>
           </a:xfrm>
           <a:prstGeom prst="rect">
             <a:avLst/>
           </a:prstGeom>
-          <a:noFill/>
-        </p:spPr>
-        <p:txBody>
-          <a:bodyPr wrap="square">
-            <a:spAutoFit/>
-          </a:bodyPr>
-          <a:lstStyle/>
-          <a:p>
-            <a:r>
-              <a:rPr sz="1000">
-                <a:latin typeface="Courier New"/>
-              </a:rPr>
-              <a:t>journey
-    title オンラインショッピング体験
-    section 商品探し
-        サイト訪問    : 5: ユーザー
-        検索実行      : 3: ユーザー
-        商品選択      : 4: ユーザー
-    section 購入
-        カートに追加  : 5: ユーザー
-        決済手続き    : 2: ユーザー
-        注文完了      : 5: ユーザー</a:t>
-            </a:r>
-          </a:p>
-        </p:txBody>
-      </p:sp>
+        </p:spPr>
+        <p:style>
+          <a:lnRef idx="1">
+            <a:schemeClr val="accent1"/>
+          </a:lnRef>
+          <a:fillRef idx="3">
+            <a:schemeClr val="accent1"/>
+          </a:fillRef>
+          <a:effectRef idx="2">
+            <a:schemeClr val="accent1"/>
+          </a:effectRef>
+          <a:fontRef idx="minor">
+            <a:schemeClr val="lt1"/>
+          </a:fontRef>
+        </p:style>
+        <p:txBody>
+          <a:bodyPr rtlCol="0" anchor="ctr"/>
+          <a:lstStyle/>
+          <a:p>
+            <a:r>
+              <a:rPr sz="1200"/>
+              <a:t>CUSTOMER</a:t>
+            </a:r>
+          </a:p>
+        </p:txBody>
+      </p:sp>
+      <p:sp>
+        <p:nvSpPr>
+          <p:cNvPr id="5" name="Rectangle 4"/>
+          <p:cNvSpPr/>
+          <p:nvPr/>
+        </p:nvSpPr>
+        <p:spPr>
+          <a:xfrm>
+            <a:off x="4933580" y="3310410"/>
+            <a:ext cx="1200000" cy="500000"/>
+          </a:xfrm>
+          <a:prstGeom prst="rect">
+            <a:avLst/>
+          </a:prstGeom>
+        </p:spPr>
+        <p:style>
+          <a:lnRef idx="1">
+            <a:schemeClr val="accent1"/>
+          </a:lnRef>
+          <a:fillRef idx="3">
+            <a:schemeClr val="accent1"/>
+          </a:fillRef>
+          <a:effectRef idx="2">
+            <a:schemeClr val="accent1"/>
+          </a:effectRef>
+          <a:fontRef idx="minor">
+            <a:schemeClr val="lt1"/>
+          </a:fontRef>
+        </p:style>
+        <p:txBody>
+          <a:bodyPr rtlCol="0" anchor="ctr"/>
+          <a:lstStyle/>
+          <a:p>
+            <a:r>
+              <a:rPr sz="1200"/>
+              <a:t>ORDER</a:t>
+            </a:r>
+          </a:p>
+        </p:txBody>
+      </p:sp>
+      <p:sp>
+        <p:nvSpPr>
+          <p:cNvPr id="6" name="Rectangle 5"/>
+          <p:cNvSpPr/>
+          <p:nvPr/>
+        </p:nvSpPr>
+        <p:spPr>
+          <a:xfrm>
+            <a:off x="2104438" y="1896087"/>
+            <a:ext cx="1200000" cy="500000"/>
+          </a:xfrm>
+          <a:prstGeom prst="rect">
+            <a:avLst/>
+          </a:prstGeom>
+        </p:spPr>
+        <p:style>
+          <a:lnRef idx="1">
+            <a:schemeClr val="accent1"/>
+          </a:lnRef>
+          <a:fillRef idx="3">
+            <a:schemeClr val="accent1"/>
+          </a:fillRef>
+          <a:effectRef idx="2">
+            <a:schemeClr val="accent1"/>
+          </a:effectRef>
+          <a:fontRef idx="minor">
+            <a:schemeClr val="lt1"/>
+          </a:fontRef>
+        </p:style>
+        <p:txBody>
+          <a:bodyPr rtlCol="0" anchor="ctr"/>
+          <a:lstStyle/>
+          <a:p>
+            <a:r>
+              <a:rPr sz="1200"/>
+              <a:t>LINE-ITEM</a:t>
+            </a:r>
+          </a:p>
+        </p:txBody>
+      </p:sp>
+      <p:sp>
+        <p:nvSpPr>
+          <p:cNvPr id="7" name="Rectangle 6"/>
+          <p:cNvSpPr/>
+          <p:nvPr/>
+        </p:nvSpPr>
+        <p:spPr>
+          <a:xfrm>
+            <a:off x="1363180" y="4093767"/>
+            <a:ext cx="1200000" cy="500000"/>
+          </a:xfrm>
+          <a:prstGeom prst="rect">
+            <a:avLst/>
+          </a:prstGeom>
+        </p:spPr>
+        <p:style>
+          <a:lnRef idx="1">
+            <a:schemeClr val="accent1"/>
+          </a:lnRef>
+          <a:fillRef idx="3">
+            <a:schemeClr val="accent1"/>
+          </a:fillRef>
+          <a:effectRef idx="2">
+            <a:schemeClr val="accent1"/>
+          </a:effectRef>
+          <a:fontRef idx="minor">
+            <a:schemeClr val="lt1"/>
+          </a:fontRef>
+        </p:style>
+        <p:txBody>
+          <a:bodyPr rtlCol="0" anchor="ctr"/>
+          <a:lstStyle/>
+          <a:p>
+            <a:r>
+              <a:rPr sz="1200"/>
+              <a:t>PRODUCT</a:t>
+            </a:r>
+          </a:p>
+        </p:txBody>
+      </p:sp>
+      <p:cxnSp>
+        <p:nvCxnSpPr>
+          <p:cNvPr id="8" name="Connector 7"/>
+          <p:cNvCxnSpPr>
+            <a:stCxn id="4" idx="0"/>
+            <a:endCxn id="5" idx="2"/>
+          </p:cNvCxnSpPr>
+          <p:nvPr/>
+        </p:nvCxnSpPr>
+        <p:spPr>
+          <a:xfrm flipH="1" flipV="1">
+            <a:off x="5533580" y="3810410"/>
+            <a:ext cx="2553220" cy="1342050"/>
+          </a:xfrm>
+          <a:prstGeom prst="line">
+            <a:avLst/>
+          </a:prstGeom>
+        </p:spPr>
+        <p:style>
+          <a:lnRef idx="2">
+            <a:schemeClr val="accent1"/>
+          </a:lnRef>
+          <a:fillRef idx="0">
+            <a:schemeClr val="accent1"/>
+          </a:fillRef>
+          <a:effectRef idx="1">
+            <a:schemeClr val="accent1"/>
+          </a:effectRef>
+          <a:fontRef idx="minor">
+            <a:schemeClr val="tx1"/>
+          </a:fontRef>
+        </p:style>
+      </p:cxnSp>
+      <p:cxnSp>
+        <p:nvCxnSpPr>
+          <p:cNvPr id="9" name="Connector 8"/>
+          <p:cNvCxnSpPr>
+            <a:stCxn id="5" idx="3"/>
+            <a:endCxn id="6" idx="1"/>
+          </p:cNvCxnSpPr>
+          <p:nvPr/>
+        </p:nvCxnSpPr>
+        <p:spPr>
+          <a:xfrm flipH="1" flipV="1">
+            <a:off x="2104438" y="2146087"/>
+            <a:ext cx="4029142" cy="1414323"/>
+          </a:xfrm>
+          <a:prstGeom prst="line">
+            <a:avLst/>
+          </a:prstGeom>
+        </p:spPr>
+        <p:style>
+          <a:lnRef idx="2">
+            <a:schemeClr val="accent1"/>
+          </a:lnRef>
+          <a:fillRef idx="0">
+            <a:schemeClr val="accent1"/>
+          </a:fillRef>
+          <a:effectRef idx="1">
+            <a:schemeClr val="accent1"/>
+          </a:effectRef>
+          <a:fontRef idx="minor">
+            <a:schemeClr val="tx1"/>
+          </a:fontRef>
+        </p:style>
+      </p:cxnSp>
+      <p:cxnSp>
+        <p:nvCxnSpPr>
+          <p:cNvPr id="10" name="Connector 9"/>
+          <p:cNvCxnSpPr>
+            <a:stCxn id="7" idx="0"/>
+            <a:endCxn id="6" idx="2"/>
+          </p:cNvCxnSpPr>
+          <p:nvPr/>
+        </p:nvCxnSpPr>
+        <p:spPr>
+          <a:xfrm flipV="1">
+            <a:off x="1963180" y="2396087"/>
+            <a:ext cx="741258" cy="1697680"/>
+          </a:xfrm>
+          <a:prstGeom prst="line">
+            <a:avLst/>
+          </a:prstGeom>
+        </p:spPr>
+        <p:style>
+          <a:lnRef idx="2">
+            <a:schemeClr val="accent1"/>
+          </a:lnRef>
+          <a:fillRef idx="0">
+            <a:schemeClr val="accent1"/>
+          </a:fillRef>
+          <a:effectRef idx="1">
+            <a:schemeClr val="accent1"/>
+          </a:effectRef>
+          <a:fontRef idx="minor">
+            <a:schemeClr val="tx1"/>
+          </a:fontRef>
+        </p:style>
+      </p:cxnSp>
     </p:spTree>
   </p:cSld>
   <p:clrMapOvr>
@@ -7285,7 +8599,7 @@
           <a:lstStyle/>
           <a:p>
             <a:r>
-              <a:t>8. 円グラフ（Pie Chart）</a:t>
+              <a:t>7. ユーザージャーニー図（User Journey）</a:t>
             </a:r>
           </a:p>
         </p:txBody>
@@ -7333,12 +8647,16 @@
               <a:rPr sz="1000">
                 <a:latin typeface="Courier New"/>
               </a:rPr>
-              <a:t>pie title 言語別コード比率
-    "Python" : 42
-    "TypeScript" : 28
-    "Rust" : 15
-    "Go" : 10
-    "その他" : 5</a:t>
+              <a:t>journey
+    title オンラインショッピング体験
+    section 商品探し
+        サイト訪問    : 5: ユーザー
+        検索実行      : 3: ユーザー
+        商品選択      : 4: ユーザー
+    section 購入
+        カートに追加  : 5: ユーザー
+        決済手続き    : 2: ユーザー
+        注文完了      : 5: ユーザー</a:t>
             </a:r>
           </a:p>
         </p:txBody>
@@ -7377,7 +8695,7 @@
           <a:lstStyle/>
           <a:p>
             <a:r>
-              <a:t>9. 象限チャート（Quadrant Chart）</a:t>
+              <a:t>8. 円グラフ（Pie Chart）</a:t>
             </a:r>
           </a:p>
         </p:txBody>
@@ -7425,18 +8743,12 @@
               <a:rPr sz="1000">
                 <a:latin typeface="Courier New"/>
               </a:rPr>
-              <a:t>quadrantChart
-    title 製品ポートフォリオ分析
-    x-axis 低成長 --&gt; 高成長
-    y-axis 低シェア --&gt; 高シェア
-    quadrant-1 スター
-    quadrant-2 問題児
-    quadrant-3 負け犬
-    quadrant-4 金のなる木
-    製品A: [0.7, 0.8]
-    製品B: [0.3, 0.7]
-    製品C: [0.2, 0.3]
-    製品D: [0.8, 0.3]</a:t>
+              <a:t>pie title 言語別コード比率
+    "Python" : 42
+    "TypeScript" : 28
+    "Rust" : 15
+    "Go" : 10
+    "その他" : 5</a:t>
             </a:r>
           </a:p>
         </p:txBody>
@@ -7475,7 +8787,7 @@
           <a:lstStyle/>
           <a:p>
             <a:r>
-              <a:t>10. 要件図（Requirement Diagram）</a:t>
+              <a:t>9. 象限チャート（Quadrant Chart）</a:t>
             </a:r>
           </a:p>
         </p:txBody>
@@ -7523,20 +8835,18 @@
               <a:rPr sz="1000">
                 <a:latin typeface="Courier New"/>
               </a:rPr>
-              <a:t>requirementDiagram
-    requirement test_req {
-        id: 1
-        text: システムは99.9%の可用性を持つこと
-        risk: high
-        verifymethod: test
-    }
-    functionalRequirement login_req {
-        id: 2
-        text: ユーザーはログインできること
-        risk: medium
-        verifymethod: inspection
-    }
-    test_req - traces -&gt; login_req</a:t>
+              <a:t>quadrantChart
+    title 製品ポートフォリオ分析
+    x-axis 低成長 --&gt; 高成長
+    y-axis 低シェア --&gt; 高シェア
+    quadrant-1 スター
+    quadrant-2 問題児
+    quadrant-3 負け犬
+    quadrant-4 金のなる木
+    製品A: [0.7, 0.8]
+    製品B: [0.3, 0.7]
+    製品C: [0.2, 0.3]
+    製品D: [0.8, 0.3]</a:t>
             </a:r>
           </a:p>
         </p:txBody>
@@ -7575,7 +8885,7 @@
           <a:lstStyle/>
           <a:p>
             <a:r>
-              <a:t>11. Gitグラフ（Git Graph）</a:t>
+              <a:t>10. 要件図（Requirement Diagram）</a:t>
             </a:r>
           </a:p>
         </p:txBody>
@@ -7623,16 +8933,20 @@
               <a:rPr sz="1000">
                 <a:latin typeface="Courier New"/>
               </a:rPr>
-              <a:t>gitGraph
-    commit id: "initial"
-    commit id: "feat: add login"
-    branch develop
-    checkout develop
-    commit id: "fix: typo"
-    commit id: "feat: add API"
-    checkout main
-    merge develop id: "merge develop"
-    commit id: "release: v1.0"</a:t>
+              <a:t>requirementDiagram
+    requirement test_req {
+        id: 1
+        text: システムは99.9%の可用性を持つこと
+        risk: high
+        verifymethod: test
+    }
+    functionalRequirement login_req {
+        id: 2
+        text: ユーザーはログインできること
+        risk: medium
+        verifymethod: inspection
+    }
+    test_req - traces -&gt; login_req</a:t>
             </a:r>
           </a:p>
         </p:txBody>
@@ -7671,7 +8985,7 @@
           <a:lstStyle/>
           <a:p>
             <a:r>
-              <a:t>12. マインドマップ（Mindmap）</a:t>
+              <a:t>11. Gitグラフ（Git Graph）</a:t>
             </a:r>
           </a:p>
         </p:txBody>
@@ -7695,993 +9009,44 @@
       </p:sp>
       <p:sp>
         <p:nvSpPr>
-          <p:cNvPr id="4" name="Rectangle 3"/>
-          <p:cNvSpPr/>
+          <p:cNvPr id="4" name="TextBox 3"/>
+          <p:cNvSpPr txBox="1"/>
           <p:nvPr/>
         </p:nvSpPr>
         <p:spPr>
           <a:xfrm>
-            <a:off x="2800400" y="3424464"/>
-            <a:ext cx="1200000" cy="500000"/>
+            <a:off x="457200" y="1600200"/>
+            <a:ext cx="8229600" cy="4525963"/>
           </a:xfrm>
           <a:prstGeom prst="rect">
             <a:avLst/>
           </a:prstGeom>
-        </p:spPr>
-        <p:style>
-          <a:lnRef idx="1">
-            <a:schemeClr val="accent1"/>
-          </a:lnRef>
-          <a:fillRef idx="3">
-            <a:schemeClr val="accent1"/>
-          </a:fillRef>
-          <a:effectRef idx="2">
-            <a:schemeClr val="accent1"/>
-          </a:effectRef>
-          <a:fontRef idx="minor">
-            <a:schemeClr val="lt1"/>
-          </a:fontRef>
-        </p:style>
-        <p:txBody>
-          <a:bodyPr rtlCol="0" anchor="ctr"/>
-          <a:lstStyle/>
-          <a:p>
-            <a:r>
-              <a:rPr sz="1200"/>
-              <a:t>qmd_to_pptx</a:t>
-            </a:r>
-          </a:p>
-        </p:txBody>
-      </p:sp>
-      <p:sp>
-        <p:nvSpPr>
-          <p:cNvPr id="5" name="Rectangle 4"/>
-          <p:cNvSpPr/>
-          <p:nvPr/>
-        </p:nvSpPr>
-        <p:spPr>
-          <a:xfrm>
-            <a:off x="5143600" y="1851822"/>
-            <a:ext cx="1200000" cy="500000"/>
-          </a:xfrm>
-          <a:prstGeom prst="rect">
-            <a:avLst/>
-          </a:prstGeom>
-        </p:spPr>
-        <p:style>
-          <a:lnRef idx="1">
-            <a:schemeClr val="accent1"/>
-          </a:lnRef>
-          <a:fillRef idx="3">
-            <a:schemeClr val="accent1"/>
-          </a:fillRef>
-          <a:effectRef idx="2">
-            <a:schemeClr val="accent1"/>
-          </a:effectRef>
-          <a:fontRef idx="minor">
-            <a:schemeClr val="lt1"/>
-          </a:fontRef>
-        </p:style>
-        <p:txBody>
-          <a:bodyPr rtlCol="0" anchor="ctr"/>
-          <a:lstStyle/>
-          <a:p>
-            <a:r>
-              <a:rPr sz="1200"/>
-              <a:t>入力形式</a:t>
-            </a:r>
-          </a:p>
-        </p:txBody>
-      </p:sp>
-      <p:sp>
-        <p:nvSpPr>
-          <p:cNvPr id="6" name="Rectangle 5"/>
-          <p:cNvSpPr/>
-          <p:nvPr/>
-        </p:nvSpPr>
-        <p:spPr>
-          <a:xfrm>
-            <a:off x="7486800" y="1600200"/>
-            <a:ext cx="1200000" cy="500000"/>
-          </a:xfrm>
-          <a:prstGeom prst="rect">
-            <a:avLst/>
-          </a:prstGeom>
-        </p:spPr>
-        <p:style>
-          <a:lnRef idx="1">
-            <a:schemeClr val="accent1"/>
-          </a:lnRef>
-          <a:fillRef idx="3">
-            <a:schemeClr val="accent1"/>
-          </a:fillRef>
-          <a:effectRef idx="2">
-            <a:schemeClr val="accent1"/>
-          </a:effectRef>
-          <a:fontRef idx="minor">
-            <a:schemeClr val="lt1"/>
-          </a:fontRef>
-        </p:style>
-        <p:txBody>
-          <a:bodyPr rtlCol="0" anchor="ctr"/>
-          <a:lstStyle/>
-          <a:p>
-            <a:r>
-              <a:rPr sz="1200"/>
-              <a:t>QMD</a:t>
-            </a:r>
-          </a:p>
-        </p:txBody>
-      </p:sp>
-      <p:sp>
-        <p:nvSpPr>
-          <p:cNvPr id="7" name="Rectangle 6"/>
-          <p:cNvSpPr/>
-          <p:nvPr/>
-        </p:nvSpPr>
-        <p:spPr>
-          <a:xfrm>
-            <a:off x="7486800" y="2103445"/>
-            <a:ext cx="1200000" cy="500000"/>
-          </a:xfrm>
-          <a:prstGeom prst="rect">
-            <a:avLst/>
-          </a:prstGeom>
-        </p:spPr>
-        <p:style>
-          <a:lnRef idx="1">
-            <a:schemeClr val="accent1"/>
-          </a:lnRef>
-          <a:fillRef idx="3">
-            <a:schemeClr val="accent1"/>
-          </a:fillRef>
-          <a:effectRef idx="2">
-            <a:schemeClr val="accent1"/>
-          </a:effectRef>
-          <a:fontRef idx="minor">
-            <a:schemeClr val="lt1"/>
-          </a:fontRef>
-        </p:style>
-        <p:txBody>
-          <a:bodyPr rtlCol="0" anchor="ctr"/>
-          <a:lstStyle/>
-          <a:p>
-            <a:r>
-              <a:rPr sz="1200"/>
-              <a:t>Markdown</a:t>
-            </a:r>
-          </a:p>
-        </p:txBody>
-      </p:sp>
-      <p:sp>
-        <p:nvSpPr>
-          <p:cNvPr id="8" name="Rectangle 7"/>
-          <p:cNvSpPr/>
-          <p:nvPr/>
-        </p:nvSpPr>
-        <p:spPr>
-          <a:xfrm>
-            <a:off x="5143600" y="2606690"/>
-            <a:ext cx="1200000" cy="500000"/>
-          </a:xfrm>
-          <a:prstGeom prst="rect">
-            <a:avLst/>
-          </a:prstGeom>
-        </p:spPr>
-        <p:style>
-          <a:lnRef idx="1">
-            <a:schemeClr val="accent1"/>
-          </a:lnRef>
-          <a:fillRef idx="3">
-            <a:schemeClr val="accent1"/>
-          </a:fillRef>
-          <a:effectRef idx="2">
-            <a:schemeClr val="accent1"/>
-          </a:effectRef>
-          <a:fontRef idx="minor">
-            <a:schemeClr val="lt1"/>
-          </a:fontRef>
-        </p:style>
-        <p:txBody>
-          <a:bodyPr rtlCol="0" anchor="ctr"/>
-          <a:lstStyle/>
-          <a:p>
-            <a:r>
-              <a:rPr sz="1200"/>
-              <a:t>出力</a:t>
-            </a:r>
-          </a:p>
-        </p:txBody>
-      </p:sp>
-      <p:sp>
-        <p:nvSpPr>
-          <p:cNvPr id="9" name="Rectangle 8"/>
-          <p:cNvSpPr/>
-          <p:nvPr/>
-        </p:nvSpPr>
-        <p:spPr>
-          <a:xfrm>
-            <a:off x="7486800" y="2606690"/>
-            <a:ext cx="1200000" cy="500000"/>
-          </a:xfrm>
-          <a:prstGeom prst="rect">
-            <a:avLst/>
-          </a:prstGeom>
-        </p:spPr>
-        <p:style>
-          <a:lnRef idx="1">
-            <a:schemeClr val="accent1"/>
-          </a:lnRef>
-          <a:fillRef idx="3">
-            <a:schemeClr val="accent1"/>
-          </a:fillRef>
-          <a:effectRef idx="2">
-            <a:schemeClr val="accent1"/>
-          </a:effectRef>
-          <a:fontRef idx="minor">
-            <a:schemeClr val="lt1"/>
-          </a:fontRef>
-        </p:style>
-        <p:txBody>
-          <a:bodyPr rtlCol="0" anchor="ctr"/>
-          <a:lstStyle/>
-          <a:p>
-            <a:r>
-              <a:rPr sz="1200"/>
-              <a:t>PPTX</a:t>
-            </a:r>
-          </a:p>
-        </p:txBody>
-      </p:sp>
-      <p:sp>
-        <p:nvSpPr>
-          <p:cNvPr id="10" name="Rectangle 9"/>
-          <p:cNvSpPr/>
-          <p:nvPr/>
-        </p:nvSpPr>
-        <p:spPr>
-          <a:xfrm>
-            <a:off x="5143600" y="3864804"/>
-            <a:ext cx="1200000" cy="500000"/>
-          </a:xfrm>
-          <a:prstGeom prst="rect">
-            <a:avLst/>
-          </a:prstGeom>
-        </p:spPr>
-        <p:style>
-          <a:lnRef idx="1">
-            <a:schemeClr val="accent1"/>
-          </a:lnRef>
-          <a:fillRef idx="3">
-            <a:schemeClr val="accent1"/>
-          </a:fillRef>
-          <a:effectRef idx="2">
-            <a:schemeClr val="accent1"/>
-          </a:effectRef>
-          <a:fontRef idx="minor">
-            <a:schemeClr val="lt1"/>
-          </a:fontRef>
-        </p:style>
-        <p:txBody>
-          <a:bodyPr rtlCol="0" anchor="ctr"/>
-          <a:lstStyle/>
-          <a:p>
-            <a:r>
-              <a:rPr sz="1200"/>
-              <a:t>機能</a:t>
-            </a:r>
-          </a:p>
-        </p:txBody>
-      </p:sp>
-      <p:sp>
-        <p:nvSpPr>
-          <p:cNvPr id="11" name="Rectangle 10"/>
-          <p:cNvSpPr/>
-          <p:nvPr/>
-        </p:nvSpPr>
-        <p:spPr>
-          <a:xfrm>
-            <a:off x="7486800" y="3109936"/>
-            <a:ext cx="1200000" cy="500000"/>
-          </a:xfrm>
-          <a:prstGeom prst="rect">
-            <a:avLst/>
-          </a:prstGeom>
-        </p:spPr>
-        <p:style>
-          <a:lnRef idx="1">
-            <a:schemeClr val="accent1"/>
-          </a:lnRef>
-          <a:fillRef idx="3">
-            <a:schemeClr val="accent1"/>
-          </a:fillRef>
-          <a:effectRef idx="2">
-            <a:schemeClr val="accent1"/>
-          </a:effectRef>
-          <a:fontRef idx="minor">
-            <a:schemeClr val="lt1"/>
-          </a:fontRef>
-        </p:style>
-        <p:txBody>
-          <a:bodyPr rtlCol="0" anchor="ctr"/>
-          <a:lstStyle/>
-          <a:p>
-            <a:r>
-              <a:rPr sz="1200"/>
-              <a:t>数式</a:t>
-            </a:r>
-          </a:p>
-        </p:txBody>
-      </p:sp>
-      <p:sp>
-        <p:nvSpPr>
-          <p:cNvPr id="12" name="Rectangle 11"/>
-          <p:cNvSpPr/>
-          <p:nvPr/>
-        </p:nvSpPr>
-        <p:spPr>
-          <a:xfrm>
-            <a:off x="7486800" y="3613181"/>
-            <a:ext cx="1200000" cy="500000"/>
-          </a:xfrm>
-          <a:prstGeom prst="rect">
-            <a:avLst/>
-          </a:prstGeom>
-        </p:spPr>
-        <p:style>
-          <a:lnRef idx="1">
-            <a:schemeClr val="accent1"/>
-          </a:lnRef>
-          <a:fillRef idx="3">
-            <a:schemeClr val="accent1"/>
-          </a:fillRef>
-          <a:effectRef idx="2">
-            <a:schemeClr val="accent1"/>
-          </a:effectRef>
-          <a:fontRef idx="minor">
-            <a:schemeClr val="lt1"/>
-          </a:fontRef>
-        </p:style>
-        <p:txBody>
-          <a:bodyPr rtlCol="0" anchor="ctr"/>
-          <a:lstStyle/>
-          <a:p>
-            <a:r>
-              <a:rPr sz="1200"/>
-              <a:t>Mermaid図</a:t>
-            </a:r>
-          </a:p>
-        </p:txBody>
-      </p:sp>
-      <p:sp>
-        <p:nvSpPr>
-          <p:cNvPr id="13" name="Rectangle 12"/>
-          <p:cNvSpPr/>
-          <p:nvPr/>
-        </p:nvSpPr>
-        <p:spPr>
-          <a:xfrm>
-            <a:off x="7486800" y="4116426"/>
-            <a:ext cx="1200000" cy="500000"/>
-          </a:xfrm>
-          <a:prstGeom prst="rect">
-            <a:avLst/>
-          </a:prstGeom>
-        </p:spPr>
-        <p:style>
-          <a:lnRef idx="1">
-            <a:schemeClr val="accent1"/>
-          </a:lnRef>
-          <a:fillRef idx="3">
-            <a:schemeClr val="accent1"/>
-          </a:fillRef>
-          <a:effectRef idx="2">
-            <a:schemeClr val="accent1"/>
-          </a:effectRef>
-          <a:fontRef idx="minor">
-            <a:schemeClr val="lt1"/>
-          </a:fontRef>
-        </p:style>
-        <p:txBody>
-          <a:bodyPr rtlCol="0" anchor="ctr"/>
-          <a:lstStyle/>
-          <a:p>
-            <a:r>
-              <a:rPr sz="1200"/>
-              <a:t>テーブル</a:t>
-            </a:r>
-          </a:p>
-        </p:txBody>
-      </p:sp>
-      <p:sp>
-        <p:nvSpPr>
-          <p:cNvPr id="14" name="Rectangle 13"/>
-          <p:cNvSpPr/>
-          <p:nvPr/>
-        </p:nvSpPr>
-        <p:spPr>
-          <a:xfrm>
-            <a:off x="7486800" y="4619672"/>
-            <a:ext cx="1200000" cy="500000"/>
-          </a:xfrm>
-          <a:prstGeom prst="rect">
-            <a:avLst/>
-          </a:prstGeom>
-        </p:spPr>
-        <p:style>
-          <a:lnRef idx="1">
-            <a:schemeClr val="accent1"/>
-          </a:lnRef>
-          <a:fillRef idx="3">
-            <a:schemeClr val="accent1"/>
-          </a:fillRef>
-          <a:effectRef idx="2">
-            <a:schemeClr val="accent1"/>
-          </a:effectRef>
-          <a:fontRef idx="minor">
-            <a:schemeClr val="lt1"/>
-          </a:fontRef>
-        </p:style>
-        <p:txBody>
-          <a:bodyPr rtlCol="0" anchor="ctr"/>
-          <a:lstStyle/>
-          <a:p>
-            <a:r>
-              <a:rPr sz="1200"/>
-              <a:t>コード</a:t>
-            </a:r>
-          </a:p>
-        </p:txBody>
-      </p:sp>
-      <p:sp>
-        <p:nvSpPr>
-          <p:cNvPr id="15" name="Rectangle 14"/>
-          <p:cNvSpPr/>
-          <p:nvPr/>
-        </p:nvSpPr>
-        <p:spPr>
-          <a:xfrm>
-            <a:off x="5143600" y="5374540"/>
-            <a:ext cx="1200000" cy="500000"/>
-          </a:xfrm>
-          <a:prstGeom prst="rect">
-            <a:avLst/>
-          </a:prstGeom>
-        </p:spPr>
-        <p:style>
-          <a:lnRef idx="1">
-            <a:schemeClr val="accent1"/>
-          </a:lnRef>
-          <a:fillRef idx="3">
-            <a:schemeClr val="accent1"/>
-          </a:fillRef>
-          <a:effectRef idx="2">
-            <a:schemeClr val="accent1"/>
-          </a:effectRef>
-          <a:fontRef idx="minor">
-            <a:schemeClr val="lt1"/>
-          </a:fontRef>
-        </p:style>
-        <p:txBody>
-          <a:bodyPr rtlCol="0" anchor="ctr"/>
-          <a:lstStyle/>
-          <a:p>
-            <a:r>
-              <a:rPr sz="1200"/>
-              <a:t>利用方法</a:t>
-            </a:r>
-          </a:p>
-        </p:txBody>
-      </p:sp>
-      <p:sp>
-        <p:nvSpPr>
-          <p:cNvPr id="16" name="Rectangle 15"/>
-          <p:cNvSpPr/>
-          <p:nvPr/>
-        </p:nvSpPr>
-        <p:spPr>
-          <a:xfrm>
-            <a:off x="7486800" y="5122917"/>
-            <a:ext cx="1200000" cy="500000"/>
-          </a:xfrm>
-          <a:prstGeom prst="rect">
-            <a:avLst/>
-          </a:prstGeom>
-        </p:spPr>
-        <p:style>
-          <a:lnRef idx="1">
-            <a:schemeClr val="accent1"/>
-          </a:lnRef>
-          <a:fillRef idx="3">
-            <a:schemeClr val="accent1"/>
-          </a:fillRef>
-          <a:effectRef idx="2">
-            <a:schemeClr val="accent1"/>
-          </a:effectRef>
-          <a:fontRef idx="minor">
-            <a:schemeClr val="lt1"/>
-          </a:fontRef>
-        </p:style>
-        <p:txBody>
-          <a:bodyPr rtlCol="0" anchor="ctr"/>
-          <a:lstStyle/>
-          <a:p>
-            <a:r>
-              <a:rPr sz="1200"/>
-              <a:t>ライブラリ</a:t>
-            </a:r>
-          </a:p>
-        </p:txBody>
-      </p:sp>
-      <p:sp>
-        <p:nvSpPr>
-          <p:cNvPr id="17" name="Rectangle 16"/>
-          <p:cNvSpPr/>
-          <p:nvPr/>
-        </p:nvSpPr>
-        <p:spPr>
-          <a:xfrm>
-            <a:off x="7486800" y="5626163"/>
-            <a:ext cx="1200000" cy="500000"/>
-          </a:xfrm>
-          <a:prstGeom prst="rect">
-            <a:avLst/>
-          </a:prstGeom>
-        </p:spPr>
-        <p:style>
-          <a:lnRef idx="1">
-            <a:schemeClr val="accent1"/>
-          </a:lnRef>
-          <a:fillRef idx="3">
-            <a:schemeClr val="accent1"/>
-          </a:fillRef>
-          <a:effectRef idx="2">
-            <a:schemeClr val="accent1"/>
-          </a:effectRef>
-          <a:fontRef idx="minor">
-            <a:schemeClr val="lt1"/>
-          </a:fontRef>
-        </p:style>
-        <p:txBody>
-          <a:bodyPr rtlCol="0" anchor="ctr"/>
-          <a:lstStyle/>
-          <a:p>
-            <a:r>
-              <a:rPr sz="1200"/>
-              <a:t>MCPサーバー</a:t>
-            </a:r>
-          </a:p>
-        </p:txBody>
-      </p:sp>
-      <p:cxnSp>
-        <p:nvCxnSpPr>
-          <p:cNvPr id="18" name="Connector 17"/>
-          <p:cNvCxnSpPr>
-            <a:stCxn id="4" idx="0"/>
-            <a:endCxn id="5" idx="2"/>
-          </p:cNvCxnSpPr>
-          <p:nvPr/>
-        </p:nvCxnSpPr>
-        <p:spPr>
-          <a:xfrm flipV="1">
-            <a:off x="3400400" y="2351822"/>
-            <a:ext cx="2343200" cy="1072642"/>
-          </a:xfrm>
-          <a:prstGeom prst="line">
-            <a:avLst/>
-          </a:prstGeom>
-        </p:spPr>
-        <p:style>
-          <a:lnRef idx="2">
-            <a:schemeClr val="accent1"/>
-          </a:lnRef>
-          <a:fillRef idx="0">
-            <a:schemeClr val="accent1"/>
-          </a:fillRef>
-          <a:effectRef idx="1">
-            <a:schemeClr val="accent1"/>
-          </a:effectRef>
-          <a:fontRef idx="minor">
-            <a:schemeClr val="tx1"/>
-          </a:fontRef>
-        </p:style>
-      </p:cxnSp>
-      <p:cxnSp>
-        <p:nvCxnSpPr>
-          <p:cNvPr id="19" name="Connector 18"/>
-          <p:cNvCxnSpPr>
-            <a:stCxn id="5" idx="1"/>
-            <a:endCxn id="6" idx="3"/>
-          </p:cNvCxnSpPr>
-          <p:nvPr/>
-        </p:nvCxnSpPr>
-        <p:spPr>
-          <a:xfrm flipV="1">
-            <a:off x="5143600" y="1850200"/>
-            <a:ext cx="3543200" cy="251622"/>
-          </a:xfrm>
-          <a:prstGeom prst="line">
-            <a:avLst/>
-          </a:prstGeom>
-        </p:spPr>
-        <p:style>
-          <a:lnRef idx="2">
-            <a:schemeClr val="accent1"/>
-          </a:lnRef>
-          <a:fillRef idx="0">
-            <a:schemeClr val="accent1"/>
-          </a:fillRef>
-          <a:effectRef idx="1">
-            <a:schemeClr val="accent1"/>
-          </a:effectRef>
-          <a:fontRef idx="minor">
-            <a:schemeClr val="tx1"/>
-          </a:fontRef>
-        </p:style>
-      </p:cxnSp>
-      <p:cxnSp>
-        <p:nvCxnSpPr>
-          <p:cNvPr id="20" name="Connector 19"/>
-          <p:cNvCxnSpPr>
-            <a:stCxn id="5" idx="1"/>
-            <a:endCxn id="7" idx="3"/>
-          </p:cNvCxnSpPr>
-          <p:nvPr/>
-        </p:nvCxnSpPr>
-        <p:spPr>
-          <a:xfrm>
-            <a:off x="5143600" y="2101822"/>
-            <a:ext cx="3543200" cy="251623"/>
-          </a:xfrm>
-          <a:prstGeom prst="line">
-            <a:avLst/>
-          </a:prstGeom>
-        </p:spPr>
-        <p:style>
-          <a:lnRef idx="2">
-            <a:schemeClr val="accent1"/>
-          </a:lnRef>
-          <a:fillRef idx="0">
-            <a:schemeClr val="accent1"/>
-          </a:fillRef>
-          <a:effectRef idx="1">
-            <a:schemeClr val="accent1"/>
-          </a:effectRef>
-          <a:fontRef idx="minor">
-            <a:schemeClr val="tx1"/>
-          </a:fontRef>
-        </p:style>
-      </p:cxnSp>
-      <p:cxnSp>
-        <p:nvCxnSpPr>
-          <p:cNvPr id="21" name="Connector 20"/>
-          <p:cNvCxnSpPr>
-            <a:stCxn id="4" idx="1"/>
-            <a:endCxn id="8" idx="3"/>
-          </p:cNvCxnSpPr>
-          <p:nvPr/>
-        </p:nvCxnSpPr>
-        <p:spPr>
-          <a:xfrm flipV="1">
-            <a:off x="2800400" y="2856690"/>
-            <a:ext cx="3543200" cy="817774"/>
-          </a:xfrm>
-          <a:prstGeom prst="line">
-            <a:avLst/>
-          </a:prstGeom>
-        </p:spPr>
-        <p:style>
-          <a:lnRef idx="2">
-            <a:schemeClr val="accent1"/>
-          </a:lnRef>
-          <a:fillRef idx="0">
-            <a:schemeClr val="accent1"/>
-          </a:fillRef>
-          <a:effectRef idx="1">
-            <a:schemeClr val="accent1"/>
-          </a:effectRef>
-          <a:fontRef idx="minor">
-            <a:schemeClr val="tx1"/>
-          </a:fontRef>
-        </p:style>
-      </p:cxnSp>
-      <p:cxnSp>
-        <p:nvCxnSpPr>
-          <p:cNvPr id="22" name="Connector 21"/>
-          <p:cNvCxnSpPr>
-            <a:stCxn id="8" idx="1"/>
-            <a:endCxn id="9" idx="3"/>
-          </p:cNvCxnSpPr>
-          <p:nvPr/>
-        </p:nvCxnSpPr>
-        <p:spPr>
-          <a:xfrm>
-            <a:off x="5143600" y="2856690"/>
-            <a:ext cx="3543200" cy="0"/>
-          </a:xfrm>
-          <a:prstGeom prst="line">
-            <a:avLst/>
-          </a:prstGeom>
-        </p:spPr>
-        <p:style>
-          <a:lnRef idx="2">
-            <a:schemeClr val="accent1"/>
-          </a:lnRef>
-          <a:fillRef idx="0">
-            <a:schemeClr val="accent1"/>
-          </a:fillRef>
-          <a:effectRef idx="1">
-            <a:schemeClr val="accent1"/>
-          </a:effectRef>
-          <a:fontRef idx="minor">
-            <a:schemeClr val="tx1"/>
-          </a:fontRef>
-        </p:style>
-      </p:cxnSp>
-      <p:cxnSp>
-        <p:nvCxnSpPr>
-          <p:cNvPr id="23" name="Connector 22"/>
-          <p:cNvCxnSpPr>
-            <a:stCxn id="4" idx="1"/>
-            <a:endCxn id="10" idx="3"/>
-          </p:cNvCxnSpPr>
-          <p:nvPr/>
-        </p:nvCxnSpPr>
-        <p:spPr>
-          <a:xfrm>
-            <a:off x="2800400" y="3674464"/>
-            <a:ext cx="3543200" cy="440340"/>
-          </a:xfrm>
-          <a:prstGeom prst="line">
-            <a:avLst/>
-          </a:prstGeom>
-        </p:spPr>
-        <p:style>
-          <a:lnRef idx="2">
-            <a:schemeClr val="accent1"/>
-          </a:lnRef>
-          <a:fillRef idx="0">
-            <a:schemeClr val="accent1"/>
-          </a:fillRef>
-          <a:effectRef idx="1">
-            <a:schemeClr val="accent1"/>
-          </a:effectRef>
-          <a:fontRef idx="minor">
-            <a:schemeClr val="tx1"/>
-          </a:fontRef>
-        </p:style>
-      </p:cxnSp>
-      <p:cxnSp>
-        <p:nvCxnSpPr>
-          <p:cNvPr id="24" name="Connector 23"/>
-          <p:cNvCxnSpPr>
-            <a:stCxn id="10" idx="1"/>
-            <a:endCxn id="11" idx="3"/>
-          </p:cNvCxnSpPr>
-          <p:nvPr/>
-        </p:nvCxnSpPr>
-        <p:spPr>
-          <a:xfrm flipV="1">
-            <a:off x="5143600" y="3359936"/>
-            <a:ext cx="3543200" cy="754868"/>
-          </a:xfrm>
-          <a:prstGeom prst="line">
-            <a:avLst/>
-          </a:prstGeom>
-        </p:spPr>
-        <p:style>
-          <a:lnRef idx="2">
-            <a:schemeClr val="accent1"/>
-          </a:lnRef>
-          <a:fillRef idx="0">
-            <a:schemeClr val="accent1"/>
-          </a:fillRef>
-          <a:effectRef idx="1">
-            <a:schemeClr val="accent1"/>
-          </a:effectRef>
-          <a:fontRef idx="minor">
-            <a:schemeClr val="tx1"/>
-          </a:fontRef>
-        </p:style>
-      </p:cxnSp>
-      <p:cxnSp>
-        <p:nvCxnSpPr>
-          <p:cNvPr id="25" name="Connector 24"/>
-          <p:cNvCxnSpPr>
-            <a:stCxn id="10" idx="1"/>
-            <a:endCxn id="12" idx="3"/>
-          </p:cNvCxnSpPr>
-          <p:nvPr/>
-        </p:nvCxnSpPr>
-        <p:spPr>
-          <a:xfrm flipV="1">
-            <a:off x="5143600" y="3863181"/>
-            <a:ext cx="3543200" cy="251623"/>
-          </a:xfrm>
-          <a:prstGeom prst="line">
-            <a:avLst/>
-          </a:prstGeom>
-        </p:spPr>
-        <p:style>
-          <a:lnRef idx="2">
-            <a:schemeClr val="accent1"/>
-          </a:lnRef>
-          <a:fillRef idx="0">
-            <a:schemeClr val="accent1"/>
-          </a:fillRef>
-          <a:effectRef idx="1">
-            <a:schemeClr val="accent1"/>
-          </a:effectRef>
-          <a:fontRef idx="minor">
-            <a:schemeClr val="tx1"/>
-          </a:fontRef>
-        </p:style>
-      </p:cxnSp>
-      <p:cxnSp>
-        <p:nvCxnSpPr>
-          <p:cNvPr id="26" name="Connector 25"/>
-          <p:cNvCxnSpPr>
-            <a:stCxn id="10" idx="1"/>
-            <a:endCxn id="13" idx="3"/>
-          </p:cNvCxnSpPr>
-          <p:nvPr/>
-        </p:nvCxnSpPr>
-        <p:spPr>
-          <a:xfrm>
-            <a:off x="5143600" y="4114804"/>
-            <a:ext cx="3543200" cy="251622"/>
-          </a:xfrm>
-          <a:prstGeom prst="line">
-            <a:avLst/>
-          </a:prstGeom>
-        </p:spPr>
-        <p:style>
-          <a:lnRef idx="2">
-            <a:schemeClr val="accent1"/>
-          </a:lnRef>
-          <a:fillRef idx="0">
-            <a:schemeClr val="accent1"/>
-          </a:fillRef>
-          <a:effectRef idx="1">
-            <a:schemeClr val="accent1"/>
-          </a:effectRef>
-          <a:fontRef idx="minor">
-            <a:schemeClr val="tx1"/>
-          </a:fontRef>
-        </p:style>
-      </p:cxnSp>
-      <p:cxnSp>
-        <p:nvCxnSpPr>
-          <p:cNvPr id="27" name="Connector 26"/>
-          <p:cNvCxnSpPr>
-            <a:stCxn id="10" idx="1"/>
-            <a:endCxn id="14" idx="3"/>
-          </p:cNvCxnSpPr>
-          <p:nvPr/>
-        </p:nvCxnSpPr>
-        <p:spPr>
-          <a:xfrm>
-            <a:off x="5143600" y="4114804"/>
-            <a:ext cx="3543200" cy="754868"/>
-          </a:xfrm>
-          <a:prstGeom prst="line">
-            <a:avLst/>
-          </a:prstGeom>
-        </p:spPr>
-        <p:style>
-          <a:lnRef idx="2">
-            <a:schemeClr val="accent1"/>
-          </a:lnRef>
-          <a:fillRef idx="0">
-            <a:schemeClr val="accent1"/>
-          </a:fillRef>
-          <a:effectRef idx="1">
-            <a:schemeClr val="accent1"/>
-          </a:effectRef>
-          <a:fontRef idx="minor">
-            <a:schemeClr val="tx1"/>
-          </a:fontRef>
-        </p:style>
-      </p:cxnSp>
-      <p:cxnSp>
-        <p:nvCxnSpPr>
-          <p:cNvPr id="28" name="Connector 27"/>
-          <p:cNvCxnSpPr>
-            <a:stCxn id="4" idx="2"/>
-            <a:endCxn id="15" idx="0"/>
-          </p:cNvCxnSpPr>
-          <p:nvPr/>
-        </p:nvCxnSpPr>
-        <p:spPr>
-          <a:xfrm>
-            <a:off x="3400400" y="3924464"/>
-            <a:ext cx="2343200" cy="1450076"/>
-          </a:xfrm>
-          <a:prstGeom prst="line">
-            <a:avLst/>
-          </a:prstGeom>
-        </p:spPr>
-        <p:style>
-          <a:lnRef idx="2">
-            <a:schemeClr val="accent1"/>
-          </a:lnRef>
-          <a:fillRef idx="0">
-            <a:schemeClr val="accent1"/>
-          </a:fillRef>
-          <a:effectRef idx="1">
-            <a:schemeClr val="accent1"/>
-          </a:effectRef>
-          <a:fontRef idx="minor">
-            <a:schemeClr val="tx1"/>
-          </a:fontRef>
-        </p:style>
-      </p:cxnSp>
-      <p:cxnSp>
-        <p:nvCxnSpPr>
-          <p:cNvPr id="29" name="Connector 28"/>
-          <p:cNvCxnSpPr>
-            <a:stCxn id="15" idx="1"/>
-            <a:endCxn id="16" idx="3"/>
-          </p:cNvCxnSpPr>
-          <p:nvPr/>
-        </p:nvCxnSpPr>
-        <p:spPr>
-          <a:xfrm flipV="1">
-            <a:off x="5143600" y="5372917"/>
-            <a:ext cx="3543200" cy="251623"/>
-          </a:xfrm>
-          <a:prstGeom prst="line">
-            <a:avLst/>
-          </a:prstGeom>
-        </p:spPr>
-        <p:style>
-          <a:lnRef idx="2">
-            <a:schemeClr val="accent1"/>
-          </a:lnRef>
-          <a:fillRef idx="0">
-            <a:schemeClr val="accent1"/>
-          </a:fillRef>
-          <a:effectRef idx="1">
-            <a:schemeClr val="accent1"/>
-          </a:effectRef>
-          <a:fontRef idx="minor">
-            <a:schemeClr val="tx1"/>
-          </a:fontRef>
-        </p:style>
-      </p:cxnSp>
-      <p:cxnSp>
-        <p:nvCxnSpPr>
-          <p:cNvPr id="30" name="Connector 29"/>
-          <p:cNvCxnSpPr>
-            <a:stCxn id="15" idx="1"/>
-            <a:endCxn id="17" idx="3"/>
-          </p:cNvCxnSpPr>
-          <p:nvPr/>
-        </p:nvCxnSpPr>
-        <p:spPr>
-          <a:xfrm>
-            <a:off x="5143600" y="5624540"/>
-            <a:ext cx="3543200" cy="251623"/>
-          </a:xfrm>
-          <a:prstGeom prst="line">
-            <a:avLst/>
-          </a:prstGeom>
-        </p:spPr>
-        <p:style>
-          <a:lnRef idx="2">
-            <a:schemeClr val="accent1"/>
-          </a:lnRef>
-          <a:fillRef idx="0">
-            <a:schemeClr val="accent1"/>
-          </a:fillRef>
-          <a:effectRef idx="1">
-            <a:schemeClr val="accent1"/>
-          </a:effectRef>
-          <a:fontRef idx="minor">
-            <a:schemeClr val="tx1"/>
-          </a:fontRef>
-        </p:style>
-      </p:cxnSp>
+          <a:noFill/>
+        </p:spPr>
+        <p:txBody>
+          <a:bodyPr wrap="square">
+            <a:spAutoFit/>
+          </a:bodyPr>
+          <a:lstStyle/>
+          <a:p>
+            <a:r>
+              <a:rPr sz="1000">
+                <a:latin typeface="Courier New"/>
+              </a:rPr>
+              <a:t>gitGraph
+    commit id: "initial"
+    commit id: "feat: add login"
+    branch develop
+    checkout develop
+    commit id: "fix: typo"
+    commit id: "feat: add API"
+    checkout main
+    merge develop id: "merge develop"
+    commit id: "release: v1.0"</a:t>
+            </a:r>
+          </a:p>
+        </p:txBody>
+      </p:sp>
     </p:spTree>
   </p:cSld>
   <p:clrMapOvr>
@@ -8716,7 +9081,7 @@
           <a:lstStyle/>
           <a:p>
             <a:r>
-              <a:t>13. タイムライン（Timeline）</a:t>
+              <a:t>12. マインドマップ（Mindmap）</a:t>
             </a:r>
           </a:p>
         </p:txBody>
@@ -8740,47 +9105,993 @@
       </p:sp>
       <p:sp>
         <p:nvSpPr>
-          <p:cNvPr id="4" name="TextBox 3"/>
-          <p:cNvSpPr txBox="1"/>
+          <p:cNvPr id="4" name="Rectangle 3"/>
+          <p:cNvSpPr/>
           <p:nvPr/>
         </p:nvSpPr>
         <p:spPr>
           <a:xfrm>
-            <a:off x="457200" y="1600200"/>
-            <a:ext cx="8229600" cy="4525963"/>
+            <a:off x="2800400" y="3424464"/>
+            <a:ext cx="1200000" cy="500000"/>
           </a:xfrm>
           <a:prstGeom prst="rect">
             <a:avLst/>
           </a:prstGeom>
-          <a:noFill/>
-        </p:spPr>
-        <p:txBody>
-          <a:bodyPr wrap="square">
-            <a:spAutoFit/>
-          </a:bodyPr>
-          <a:lstStyle/>
-          <a:p>
-            <a:r>
-              <a:rPr sz="1000">
-                <a:latin typeface="Courier New"/>
-              </a:rPr>
-              <a:t>timeline
-    title ソフトウェア開発史
-    1960 : アセンブリ言語
-    1970 : C言語
-         : Unix
-    1980 : C++
-         : Macintosh
-    1990 : Java
-         : World Wide Web
-    2000 : Python普及
-         : Agile開発
-    2010 : クラウドコンピューティング
-    2020 : AI・機械学習</a:t>
-            </a:r>
-          </a:p>
-        </p:txBody>
-      </p:sp>
+        </p:spPr>
+        <p:style>
+          <a:lnRef idx="1">
+            <a:schemeClr val="accent1"/>
+          </a:lnRef>
+          <a:fillRef idx="3">
+            <a:schemeClr val="accent1"/>
+          </a:fillRef>
+          <a:effectRef idx="2">
+            <a:schemeClr val="accent1"/>
+          </a:effectRef>
+          <a:fontRef idx="minor">
+            <a:schemeClr val="lt1"/>
+          </a:fontRef>
+        </p:style>
+        <p:txBody>
+          <a:bodyPr rtlCol="0" anchor="ctr"/>
+          <a:lstStyle/>
+          <a:p>
+            <a:r>
+              <a:rPr sz="1200"/>
+              <a:t>qmd_to_pptx</a:t>
+            </a:r>
+          </a:p>
+        </p:txBody>
+      </p:sp>
+      <p:sp>
+        <p:nvSpPr>
+          <p:cNvPr id="5" name="Rectangle 4"/>
+          <p:cNvSpPr/>
+          <p:nvPr/>
+        </p:nvSpPr>
+        <p:spPr>
+          <a:xfrm>
+            <a:off x="5143600" y="1851822"/>
+            <a:ext cx="1200000" cy="500000"/>
+          </a:xfrm>
+          <a:prstGeom prst="rect">
+            <a:avLst/>
+          </a:prstGeom>
+        </p:spPr>
+        <p:style>
+          <a:lnRef idx="1">
+            <a:schemeClr val="accent1"/>
+          </a:lnRef>
+          <a:fillRef idx="3">
+            <a:schemeClr val="accent1"/>
+          </a:fillRef>
+          <a:effectRef idx="2">
+            <a:schemeClr val="accent1"/>
+          </a:effectRef>
+          <a:fontRef idx="minor">
+            <a:schemeClr val="lt1"/>
+          </a:fontRef>
+        </p:style>
+        <p:txBody>
+          <a:bodyPr rtlCol="0" anchor="ctr"/>
+          <a:lstStyle/>
+          <a:p>
+            <a:r>
+              <a:rPr sz="1200"/>
+              <a:t>入力形式</a:t>
+            </a:r>
+          </a:p>
+        </p:txBody>
+      </p:sp>
+      <p:sp>
+        <p:nvSpPr>
+          <p:cNvPr id="6" name="Rectangle 5"/>
+          <p:cNvSpPr/>
+          <p:nvPr/>
+        </p:nvSpPr>
+        <p:spPr>
+          <a:xfrm>
+            <a:off x="7486800" y="1600200"/>
+            <a:ext cx="1200000" cy="500000"/>
+          </a:xfrm>
+          <a:prstGeom prst="rect">
+            <a:avLst/>
+          </a:prstGeom>
+        </p:spPr>
+        <p:style>
+          <a:lnRef idx="1">
+            <a:schemeClr val="accent1"/>
+          </a:lnRef>
+          <a:fillRef idx="3">
+            <a:schemeClr val="accent1"/>
+          </a:fillRef>
+          <a:effectRef idx="2">
+            <a:schemeClr val="accent1"/>
+          </a:effectRef>
+          <a:fontRef idx="minor">
+            <a:schemeClr val="lt1"/>
+          </a:fontRef>
+        </p:style>
+        <p:txBody>
+          <a:bodyPr rtlCol="0" anchor="ctr"/>
+          <a:lstStyle/>
+          <a:p>
+            <a:r>
+              <a:rPr sz="1200"/>
+              <a:t>QMD</a:t>
+            </a:r>
+          </a:p>
+        </p:txBody>
+      </p:sp>
+      <p:sp>
+        <p:nvSpPr>
+          <p:cNvPr id="7" name="Rectangle 6"/>
+          <p:cNvSpPr/>
+          <p:nvPr/>
+        </p:nvSpPr>
+        <p:spPr>
+          <a:xfrm>
+            <a:off x="7486800" y="2103445"/>
+            <a:ext cx="1200000" cy="500000"/>
+          </a:xfrm>
+          <a:prstGeom prst="rect">
+            <a:avLst/>
+          </a:prstGeom>
+        </p:spPr>
+        <p:style>
+          <a:lnRef idx="1">
+            <a:schemeClr val="accent1"/>
+          </a:lnRef>
+          <a:fillRef idx="3">
+            <a:schemeClr val="accent1"/>
+          </a:fillRef>
+          <a:effectRef idx="2">
+            <a:schemeClr val="accent1"/>
+          </a:effectRef>
+          <a:fontRef idx="minor">
+            <a:schemeClr val="lt1"/>
+          </a:fontRef>
+        </p:style>
+        <p:txBody>
+          <a:bodyPr rtlCol="0" anchor="ctr"/>
+          <a:lstStyle/>
+          <a:p>
+            <a:r>
+              <a:rPr sz="1200"/>
+              <a:t>Markdown</a:t>
+            </a:r>
+          </a:p>
+        </p:txBody>
+      </p:sp>
+      <p:sp>
+        <p:nvSpPr>
+          <p:cNvPr id="8" name="Rectangle 7"/>
+          <p:cNvSpPr/>
+          <p:nvPr/>
+        </p:nvSpPr>
+        <p:spPr>
+          <a:xfrm>
+            <a:off x="5143600" y="2606690"/>
+            <a:ext cx="1200000" cy="500000"/>
+          </a:xfrm>
+          <a:prstGeom prst="rect">
+            <a:avLst/>
+          </a:prstGeom>
+        </p:spPr>
+        <p:style>
+          <a:lnRef idx="1">
+            <a:schemeClr val="accent1"/>
+          </a:lnRef>
+          <a:fillRef idx="3">
+            <a:schemeClr val="accent1"/>
+          </a:fillRef>
+          <a:effectRef idx="2">
+            <a:schemeClr val="accent1"/>
+          </a:effectRef>
+          <a:fontRef idx="minor">
+            <a:schemeClr val="lt1"/>
+          </a:fontRef>
+        </p:style>
+        <p:txBody>
+          <a:bodyPr rtlCol="0" anchor="ctr"/>
+          <a:lstStyle/>
+          <a:p>
+            <a:r>
+              <a:rPr sz="1200"/>
+              <a:t>出力</a:t>
+            </a:r>
+          </a:p>
+        </p:txBody>
+      </p:sp>
+      <p:sp>
+        <p:nvSpPr>
+          <p:cNvPr id="9" name="Rectangle 8"/>
+          <p:cNvSpPr/>
+          <p:nvPr/>
+        </p:nvSpPr>
+        <p:spPr>
+          <a:xfrm>
+            <a:off x="7486800" y="2606690"/>
+            <a:ext cx="1200000" cy="500000"/>
+          </a:xfrm>
+          <a:prstGeom prst="rect">
+            <a:avLst/>
+          </a:prstGeom>
+        </p:spPr>
+        <p:style>
+          <a:lnRef idx="1">
+            <a:schemeClr val="accent1"/>
+          </a:lnRef>
+          <a:fillRef idx="3">
+            <a:schemeClr val="accent1"/>
+          </a:fillRef>
+          <a:effectRef idx="2">
+            <a:schemeClr val="accent1"/>
+          </a:effectRef>
+          <a:fontRef idx="minor">
+            <a:schemeClr val="lt1"/>
+          </a:fontRef>
+        </p:style>
+        <p:txBody>
+          <a:bodyPr rtlCol="0" anchor="ctr"/>
+          <a:lstStyle/>
+          <a:p>
+            <a:r>
+              <a:rPr sz="1200"/>
+              <a:t>PPTX</a:t>
+            </a:r>
+          </a:p>
+        </p:txBody>
+      </p:sp>
+      <p:sp>
+        <p:nvSpPr>
+          <p:cNvPr id="10" name="Rectangle 9"/>
+          <p:cNvSpPr/>
+          <p:nvPr/>
+        </p:nvSpPr>
+        <p:spPr>
+          <a:xfrm>
+            <a:off x="5143600" y="3864804"/>
+            <a:ext cx="1200000" cy="500000"/>
+          </a:xfrm>
+          <a:prstGeom prst="rect">
+            <a:avLst/>
+          </a:prstGeom>
+        </p:spPr>
+        <p:style>
+          <a:lnRef idx="1">
+            <a:schemeClr val="accent1"/>
+          </a:lnRef>
+          <a:fillRef idx="3">
+            <a:schemeClr val="accent1"/>
+          </a:fillRef>
+          <a:effectRef idx="2">
+            <a:schemeClr val="accent1"/>
+          </a:effectRef>
+          <a:fontRef idx="minor">
+            <a:schemeClr val="lt1"/>
+          </a:fontRef>
+        </p:style>
+        <p:txBody>
+          <a:bodyPr rtlCol="0" anchor="ctr"/>
+          <a:lstStyle/>
+          <a:p>
+            <a:r>
+              <a:rPr sz="1200"/>
+              <a:t>機能</a:t>
+            </a:r>
+          </a:p>
+        </p:txBody>
+      </p:sp>
+      <p:sp>
+        <p:nvSpPr>
+          <p:cNvPr id="11" name="Rectangle 10"/>
+          <p:cNvSpPr/>
+          <p:nvPr/>
+        </p:nvSpPr>
+        <p:spPr>
+          <a:xfrm>
+            <a:off x="7486800" y="3109936"/>
+            <a:ext cx="1200000" cy="500000"/>
+          </a:xfrm>
+          <a:prstGeom prst="rect">
+            <a:avLst/>
+          </a:prstGeom>
+        </p:spPr>
+        <p:style>
+          <a:lnRef idx="1">
+            <a:schemeClr val="accent1"/>
+          </a:lnRef>
+          <a:fillRef idx="3">
+            <a:schemeClr val="accent1"/>
+          </a:fillRef>
+          <a:effectRef idx="2">
+            <a:schemeClr val="accent1"/>
+          </a:effectRef>
+          <a:fontRef idx="minor">
+            <a:schemeClr val="lt1"/>
+          </a:fontRef>
+        </p:style>
+        <p:txBody>
+          <a:bodyPr rtlCol="0" anchor="ctr"/>
+          <a:lstStyle/>
+          <a:p>
+            <a:r>
+              <a:rPr sz="1200"/>
+              <a:t>数式</a:t>
+            </a:r>
+          </a:p>
+        </p:txBody>
+      </p:sp>
+      <p:sp>
+        <p:nvSpPr>
+          <p:cNvPr id="12" name="Rectangle 11"/>
+          <p:cNvSpPr/>
+          <p:nvPr/>
+        </p:nvSpPr>
+        <p:spPr>
+          <a:xfrm>
+            <a:off x="7486800" y="3613181"/>
+            <a:ext cx="1200000" cy="500000"/>
+          </a:xfrm>
+          <a:prstGeom prst="rect">
+            <a:avLst/>
+          </a:prstGeom>
+        </p:spPr>
+        <p:style>
+          <a:lnRef idx="1">
+            <a:schemeClr val="accent1"/>
+          </a:lnRef>
+          <a:fillRef idx="3">
+            <a:schemeClr val="accent1"/>
+          </a:fillRef>
+          <a:effectRef idx="2">
+            <a:schemeClr val="accent1"/>
+          </a:effectRef>
+          <a:fontRef idx="minor">
+            <a:schemeClr val="lt1"/>
+          </a:fontRef>
+        </p:style>
+        <p:txBody>
+          <a:bodyPr rtlCol="0" anchor="ctr"/>
+          <a:lstStyle/>
+          <a:p>
+            <a:r>
+              <a:rPr sz="1200"/>
+              <a:t>Mermaid図</a:t>
+            </a:r>
+          </a:p>
+        </p:txBody>
+      </p:sp>
+      <p:sp>
+        <p:nvSpPr>
+          <p:cNvPr id="13" name="Rectangle 12"/>
+          <p:cNvSpPr/>
+          <p:nvPr/>
+        </p:nvSpPr>
+        <p:spPr>
+          <a:xfrm>
+            <a:off x="7486800" y="4116426"/>
+            <a:ext cx="1200000" cy="500000"/>
+          </a:xfrm>
+          <a:prstGeom prst="rect">
+            <a:avLst/>
+          </a:prstGeom>
+        </p:spPr>
+        <p:style>
+          <a:lnRef idx="1">
+            <a:schemeClr val="accent1"/>
+          </a:lnRef>
+          <a:fillRef idx="3">
+            <a:schemeClr val="accent1"/>
+          </a:fillRef>
+          <a:effectRef idx="2">
+            <a:schemeClr val="accent1"/>
+          </a:effectRef>
+          <a:fontRef idx="minor">
+            <a:schemeClr val="lt1"/>
+          </a:fontRef>
+        </p:style>
+        <p:txBody>
+          <a:bodyPr rtlCol="0" anchor="ctr"/>
+          <a:lstStyle/>
+          <a:p>
+            <a:r>
+              <a:rPr sz="1200"/>
+              <a:t>テーブル</a:t>
+            </a:r>
+          </a:p>
+        </p:txBody>
+      </p:sp>
+      <p:sp>
+        <p:nvSpPr>
+          <p:cNvPr id="14" name="Rectangle 13"/>
+          <p:cNvSpPr/>
+          <p:nvPr/>
+        </p:nvSpPr>
+        <p:spPr>
+          <a:xfrm>
+            <a:off x="7486800" y="4619672"/>
+            <a:ext cx="1200000" cy="500000"/>
+          </a:xfrm>
+          <a:prstGeom prst="rect">
+            <a:avLst/>
+          </a:prstGeom>
+        </p:spPr>
+        <p:style>
+          <a:lnRef idx="1">
+            <a:schemeClr val="accent1"/>
+          </a:lnRef>
+          <a:fillRef idx="3">
+            <a:schemeClr val="accent1"/>
+          </a:fillRef>
+          <a:effectRef idx="2">
+            <a:schemeClr val="accent1"/>
+          </a:effectRef>
+          <a:fontRef idx="minor">
+            <a:schemeClr val="lt1"/>
+          </a:fontRef>
+        </p:style>
+        <p:txBody>
+          <a:bodyPr rtlCol="0" anchor="ctr"/>
+          <a:lstStyle/>
+          <a:p>
+            <a:r>
+              <a:rPr sz="1200"/>
+              <a:t>コード</a:t>
+            </a:r>
+          </a:p>
+        </p:txBody>
+      </p:sp>
+      <p:sp>
+        <p:nvSpPr>
+          <p:cNvPr id="15" name="Rectangle 14"/>
+          <p:cNvSpPr/>
+          <p:nvPr/>
+        </p:nvSpPr>
+        <p:spPr>
+          <a:xfrm>
+            <a:off x="5143600" y="5374540"/>
+            <a:ext cx="1200000" cy="500000"/>
+          </a:xfrm>
+          <a:prstGeom prst="rect">
+            <a:avLst/>
+          </a:prstGeom>
+        </p:spPr>
+        <p:style>
+          <a:lnRef idx="1">
+            <a:schemeClr val="accent1"/>
+          </a:lnRef>
+          <a:fillRef idx="3">
+            <a:schemeClr val="accent1"/>
+          </a:fillRef>
+          <a:effectRef idx="2">
+            <a:schemeClr val="accent1"/>
+          </a:effectRef>
+          <a:fontRef idx="minor">
+            <a:schemeClr val="lt1"/>
+          </a:fontRef>
+        </p:style>
+        <p:txBody>
+          <a:bodyPr rtlCol="0" anchor="ctr"/>
+          <a:lstStyle/>
+          <a:p>
+            <a:r>
+              <a:rPr sz="1200"/>
+              <a:t>利用方法</a:t>
+            </a:r>
+          </a:p>
+        </p:txBody>
+      </p:sp>
+      <p:sp>
+        <p:nvSpPr>
+          <p:cNvPr id="16" name="Rectangle 15"/>
+          <p:cNvSpPr/>
+          <p:nvPr/>
+        </p:nvSpPr>
+        <p:spPr>
+          <a:xfrm>
+            <a:off x="7486800" y="5122917"/>
+            <a:ext cx="1200000" cy="500000"/>
+          </a:xfrm>
+          <a:prstGeom prst="rect">
+            <a:avLst/>
+          </a:prstGeom>
+        </p:spPr>
+        <p:style>
+          <a:lnRef idx="1">
+            <a:schemeClr val="accent1"/>
+          </a:lnRef>
+          <a:fillRef idx="3">
+            <a:schemeClr val="accent1"/>
+          </a:fillRef>
+          <a:effectRef idx="2">
+            <a:schemeClr val="accent1"/>
+          </a:effectRef>
+          <a:fontRef idx="minor">
+            <a:schemeClr val="lt1"/>
+          </a:fontRef>
+        </p:style>
+        <p:txBody>
+          <a:bodyPr rtlCol="0" anchor="ctr"/>
+          <a:lstStyle/>
+          <a:p>
+            <a:r>
+              <a:rPr sz="1200"/>
+              <a:t>ライブラリ</a:t>
+            </a:r>
+          </a:p>
+        </p:txBody>
+      </p:sp>
+      <p:sp>
+        <p:nvSpPr>
+          <p:cNvPr id="17" name="Rectangle 16"/>
+          <p:cNvSpPr/>
+          <p:nvPr/>
+        </p:nvSpPr>
+        <p:spPr>
+          <a:xfrm>
+            <a:off x="7486800" y="5626163"/>
+            <a:ext cx="1200000" cy="500000"/>
+          </a:xfrm>
+          <a:prstGeom prst="rect">
+            <a:avLst/>
+          </a:prstGeom>
+        </p:spPr>
+        <p:style>
+          <a:lnRef idx="1">
+            <a:schemeClr val="accent1"/>
+          </a:lnRef>
+          <a:fillRef idx="3">
+            <a:schemeClr val="accent1"/>
+          </a:fillRef>
+          <a:effectRef idx="2">
+            <a:schemeClr val="accent1"/>
+          </a:effectRef>
+          <a:fontRef idx="minor">
+            <a:schemeClr val="lt1"/>
+          </a:fontRef>
+        </p:style>
+        <p:txBody>
+          <a:bodyPr rtlCol="0" anchor="ctr"/>
+          <a:lstStyle/>
+          <a:p>
+            <a:r>
+              <a:rPr sz="1200"/>
+              <a:t>MCPサーバー</a:t>
+            </a:r>
+          </a:p>
+        </p:txBody>
+      </p:sp>
+      <p:cxnSp>
+        <p:nvCxnSpPr>
+          <p:cNvPr id="18" name="Connector 17"/>
+          <p:cNvCxnSpPr>
+            <a:stCxn id="4" idx="0"/>
+            <a:endCxn id="5" idx="2"/>
+          </p:cNvCxnSpPr>
+          <p:nvPr/>
+        </p:nvCxnSpPr>
+        <p:spPr>
+          <a:xfrm flipV="1">
+            <a:off x="3400400" y="2351822"/>
+            <a:ext cx="2343200" cy="1072642"/>
+          </a:xfrm>
+          <a:prstGeom prst="line">
+            <a:avLst/>
+          </a:prstGeom>
+        </p:spPr>
+        <p:style>
+          <a:lnRef idx="2">
+            <a:schemeClr val="accent1"/>
+          </a:lnRef>
+          <a:fillRef idx="0">
+            <a:schemeClr val="accent1"/>
+          </a:fillRef>
+          <a:effectRef idx="1">
+            <a:schemeClr val="accent1"/>
+          </a:effectRef>
+          <a:fontRef idx="minor">
+            <a:schemeClr val="tx1"/>
+          </a:fontRef>
+        </p:style>
+      </p:cxnSp>
+      <p:cxnSp>
+        <p:nvCxnSpPr>
+          <p:cNvPr id="19" name="Connector 18"/>
+          <p:cNvCxnSpPr>
+            <a:stCxn id="5" idx="1"/>
+            <a:endCxn id="6" idx="3"/>
+          </p:cNvCxnSpPr>
+          <p:nvPr/>
+        </p:nvCxnSpPr>
+        <p:spPr>
+          <a:xfrm flipV="1">
+            <a:off x="5143600" y="1850200"/>
+            <a:ext cx="3543200" cy="251622"/>
+          </a:xfrm>
+          <a:prstGeom prst="line">
+            <a:avLst/>
+          </a:prstGeom>
+        </p:spPr>
+        <p:style>
+          <a:lnRef idx="2">
+            <a:schemeClr val="accent1"/>
+          </a:lnRef>
+          <a:fillRef idx="0">
+            <a:schemeClr val="accent1"/>
+          </a:fillRef>
+          <a:effectRef idx="1">
+            <a:schemeClr val="accent1"/>
+          </a:effectRef>
+          <a:fontRef idx="minor">
+            <a:schemeClr val="tx1"/>
+          </a:fontRef>
+        </p:style>
+      </p:cxnSp>
+      <p:cxnSp>
+        <p:nvCxnSpPr>
+          <p:cNvPr id="20" name="Connector 19"/>
+          <p:cNvCxnSpPr>
+            <a:stCxn id="5" idx="1"/>
+            <a:endCxn id="7" idx="3"/>
+          </p:cNvCxnSpPr>
+          <p:nvPr/>
+        </p:nvCxnSpPr>
+        <p:spPr>
+          <a:xfrm>
+            <a:off x="5143600" y="2101822"/>
+            <a:ext cx="3543200" cy="251623"/>
+          </a:xfrm>
+          <a:prstGeom prst="line">
+            <a:avLst/>
+          </a:prstGeom>
+        </p:spPr>
+        <p:style>
+          <a:lnRef idx="2">
+            <a:schemeClr val="accent1"/>
+          </a:lnRef>
+          <a:fillRef idx="0">
+            <a:schemeClr val="accent1"/>
+          </a:fillRef>
+          <a:effectRef idx="1">
+            <a:schemeClr val="accent1"/>
+          </a:effectRef>
+          <a:fontRef idx="minor">
+            <a:schemeClr val="tx1"/>
+          </a:fontRef>
+        </p:style>
+      </p:cxnSp>
+      <p:cxnSp>
+        <p:nvCxnSpPr>
+          <p:cNvPr id="21" name="Connector 20"/>
+          <p:cNvCxnSpPr>
+            <a:stCxn id="4" idx="1"/>
+            <a:endCxn id="8" idx="3"/>
+          </p:cNvCxnSpPr>
+          <p:nvPr/>
+        </p:nvCxnSpPr>
+        <p:spPr>
+          <a:xfrm flipV="1">
+            <a:off x="2800400" y="2856690"/>
+            <a:ext cx="3543200" cy="817774"/>
+          </a:xfrm>
+          <a:prstGeom prst="line">
+            <a:avLst/>
+          </a:prstGeom>
+        </p:spPr>
+        <p:style>
+          <a:lnRef idx="2">
+            <a:schemeClr val="accent1"/>
+          </a:lnRef>
+          <a:fillRef idx="0">
+            <a:schemeClr val="accent1"/>
+          </a:fillRef>
+          <a:effectRef idx="1">
+            <a:schemeClr val="accent1"/>
+          </a:effectRef>
+          <a:fontRef idx="minor">
+            <a:schemeClr val="tx1"/>
+          </a:fontRef>
+        </p:style>
+      </p:cxnSp>
+      <p:cxnSp>
+        <p:nvCxnSpPr>
+          <p:cNvPr id="22" name="Connector 21"/>
+          <p:cNvCxnSpPr>
+            <a:stCxn id="8" idx="1"/>
+            <a:endCxn id="9" idx="3"/>
+          </p:cNvCxnSpPr>
+          <p:nvPr/>
+        </p:nvCxnSpPr>
+        <p:spPr>
+          <a:xfrm>
+            <a:off x="5143600" y="2856690"/>
+            <a:ext cx="3543200" cy="0"/>
+          </a:xfrm>
+          <a:prstGeom prst="line">
+            <a:avLst/>
+          </a:prstGeom>
+        </p:spPr>
+        <p:style>
+          <a:lnRef idx="2">
+            <a:schemeClr val="accent1"/>
+          </a:lnRef>
+          <a:fillRef idx="0">
+            <a:schemeClr val="accent1"/>
+          </a:fillRef>
+          <a:effectRef idx="1">
+            <a:schemeClr val="accent1"/>
+          </a:effectRef>
+          <a:fontRef idx="minor">
+            <a:schemeClr val="tx1"/>
+          </a:fontRef>
+        </p:style>
+      </p:cxnSp>
+      <p:cxnSp>
+        <p:nvCxnSpPr>
+          <p:cNvPr id="23" name="Connector 22"/>
+          <p:cNvCxnSpPr>
+            <a:stCxn id="4" idx="1"/>
+            <a:endCxn id="10" idx="3"/>
+          </p:cNvCxnSpPr>
+          <p:nvPr/>
+        </p:nvCxnSpPr>
+        <p:spPr>
+          <a:xfrm>
+            <a:off x="2800400" y="3674464"/>
+            <a:ext cx="3543200" cy="440340"/>
+          </a:xfrm>
+          <a:prstGeom prst="line">
+            <a:avLst/>
+          </a:prstGeom>
+        </p:spPr>
+        <p:style>
+          <a:lnRef idx="2">
+            <a:schemeClr val="accent1"/>
+          </a:lnRef>
+          <a:fillRef idx="0">
+            <a:schemeClr val="accent1"/>
+          </a:fillRef>
+          <a:effectRef idx="1">
+            <a:schemeClr val="accent1"/>
+          </a:effectRef>
+          <a:fontRef idx="minor">
+            <a:schemeClr val="tx1"/>
+          </a:fontRef>
+        </p:style>
+      </p:cxnSp>
+      <p:cxnSp>
+        <p:nvCxnSpPr>
+          <p:cNvPr id="24" name="Connector 23"/>
+          <p:cNvCxnSpPr>
+            <a:stCxn id="10" idx="1"/>
+            <a:endCxn id="11" idx="3"/>
+          </p:cNvCxnSpPr>
+          <p:nvPr/>
+        </p:nvCxnSpPr>
+        <p:spPr>
+          <a:xfrm flipV="1">
+            <a:off x="5143600" y="3359936"/>
+            <a:ext cx="3543200" cy="754868"/>
+          </a:xfrm>
+          <a:prstGeom prst="line">
+            <a:avLst/>
+          </a:prstGeom>
+        </p:spPr>
+        <p:style>
+          <a:lnRef idx="2">
+            <a:schemeClr val="accent1"/>
+          </a:lnRef>
+          <a:fillRef idx="0">
+            <a:schemeClr val="accent1"/>
+          </a:fillRef>
+          <a:effectRef idx="1">
+            <a:schemeClr val="accent1"/>
+          </a:effectRef>
+          <a:fontRef idx="minor">
+            <a:schemeClr val="tx1"/>
+          </a:fontRef>
+        </p:style>
+      </p:cxnSp>
+      <p:cxnSp>
+        <p:nvCxnSpPr>
+          <p:cNvPr id="25" name="Connector 24"/>
+          <p:cNvCxnSpPr>
+            <a:stCxn id="10" idx="1"/>
+            <a:endCxn id="12" idx="3"/>
+          </p:cNvCxnSpPr>
+          <p:nvPr/>
+        </p:nvCxnSpPr>
+        <p:spPr>
+          <a:xfrm flipV="1">
+            <a:off x="5143600" y="3863181"/>
+            <a:ext cx="3543200" cy="251623"/>
+          </a:xfrm>
+          <a:prstGeom prst="line">
+            <a:avLst/>
+          </a:prstGeom>
+        </p:spPr>
+        <p:style>
+          <a:lnRef idx="2">
+            <a:schemeClr val="accent1"/>
+          </a:lnRef>
+          <a:fillRef idx="0">
+            <a:schemeClr val="accent1"/>
+          </a:fillRef>
+          <a:effectRef idx="1">
+            <a:schemeClr val="accent1"/>
+          </a:effectRef>
+          <a:fontRef idx="minor">
+            <a:schemeClr val="tx1"/>
+          </a:fontRef>
+        </p:style>
+      </p:cxnSp>
+      <p:cxnSp>
+        <p:nvCxnSpPr>
+          <p:cNvPr id="26" name="Connector 25"/>
+          <p:cNvCxnSpPr>
+            <a:stCxn id="10" idx="1"/>
+            <a:endCxn id="13" idx="3"/>
+          </p:cNvCxnSpPr>
+          <p:nvPr/>
+        </p:nvCxnSpPr>
+        <p:spPr>
+          <a:xfrm>
+            <a:off x="5143600" y="4114804"/>
+            <a:ext cx="3543200" cy="251622"/>
+          </a:xfrm>
+          <a:prstGeom prst="line">
+            <a:avLst/>
+          </a:prstGeom>
+        </p:spPr>
+        <p:style>
+          <a:lnRef idx="2">
+            <a:schemeClr val="accent1"/>
+          </a:lnRef>
+          <a:fillRef idx="0">
+            <a:schemeClr val="accent1"/>
+          </a:fillRef>
+          <a:effectRef idx="1">
+            <a:schemeClr val="accent1"/>
+          </a:effectRef>
+          <a:fontRef idx="minor">
+            <a:schemeClr val="tx1"/>
+          </a:fontRef>
+        </p:style>
+      </p:cxnSp>
+      <p:cxnSp>
+        <p:nvCxnSpPr>
+          <p:cNvPr id="27" name="Connector 26"/>
+          <p:cNvCxnSpPr>
+            <a:stCxn id="10" idx="1"/>
+            <a:endCxn id="14" idx="3"/>
+          </p:cNvCxnSpPr>
+          <p:nvPr/>
+        </p:nvCxnSpPr>
+        <p:spPr>
+          <a:xfrm>
+            <a:off x="5143600" y="4114804"/>
+            <a:ext cx="3543200" cy="754868"/>
+          </a:xfrm>
+          <a:prstGeom prst="line">
+            <a:avLst/>
+          </a:prstGeom>
+        </p:spPr>
+        <p:style>
+          <a:lnRef idx="2">
+            <a:schemeClr val="accent1"/>
+          </a:lnRef>
+          <a:fillRef idx="0">
+            <a:schemeClr val="accent1"/>
+          </a:fillRef>
+          <a:effectRef idx="1">
+            <a:schemeClr val="accent1"/>
+          </a:effectRef>
+          <a:fontRef idx="minor">
+            <a:schemeClr val="tx1"/>
+          </a:fontRef>
+        </p:style>
+      </p:cxnSp>
+      <p:cxnSp>
+        <p:nvCxnSpPr>
+          <p:cNvPr id="28" name="Connector 27"/>
+          <p:cNvCxnSpPr>
+            <a:stCxn id="4" idx="2"/>
+            <a:endCxn id="15" idx="0"/>
+          </p:cNvCxnSpPr>
+          <p:nvPr/>
+        </p:nvCxnSpPr>
+        <p:spPr>
+          <a:xfrm>
+            <a:off x="3400400" y="3924464"/>
+            <a:ext cx="2343200" cy="1450076"/>
+          </a:xfrm>
+          <a:prstGeom prst="line">
+            <a:avLst/>
+          </a:prstGeom>
+        </p:spPr>
+        <p:style>
+          <a:lnRef idx="2">
+            <a:schemeClr val="accent1"/>
+          </a:lnRef>
+          <a:fillRef idx="0">
+            <a:schemeClr val="accent1"/>
+          </a:fillRef>
+          <a:effectRef idx="1">
+            <a:schemeClr val="accent1"/>
+          </a:effectRef>
+          <a:fontRef idx="minor">
+            <a:schemeClr val="tx1"/>
+          </a:fontRef>
+        </p:style>
+      </p:cxnSp>
+      <p:cxnSp>
+        <p:nvCxnSpPr>
+          <p:cNvPr id="29" name="Connector 28"/>
+          <p:cNvCxnSpPr>
+            <a:stCxn id="15" idx="1"/>
+            <a:endCxn id="16" idx="3"/>
+          </p:cNvCxnSpPr>
+          <p:nvPr/>
+        </p:nvCxnSpPr>
+        <p:spPr>
+          <a:xfrm flipV="1">
+            <a:off x="5143600" y="5372917"/>
+            <a:ext cx="3543200" cy="251623"/>
+          </a:xfrm>
+          <a:prstGeom prst="line">
+            <a:avLst/>
+          </a:prstGeom>
+        </p:spPr>
+        <p:style>
+          <a:lnRef idx="2">
+            <a:schemeClr val="accent1"/>
+          </a:lnRef>
+          <a:fillRef idx="0">
+            <a:schemeClr val="accent1"/>
+          </a:fillRef>
+          <a:effectRef idx="1">
+            <a:schemeClr val="accent1"/>
+          </a:effectRef>
+          <a:fontRef idx="minor">
+            <a:schemeClr val="tx1"/>
+          </a:fontRef>
+        </p:style>
+      </p:cxnSp>
+      <p:cxnSp>
+        <p:nvCxnSpPr>
+          <p:cNvPr id="30" name="Connector 29"/>
+          <p:cNvCxnSpPr>
+            <a:stCxn id="15" idx="1"/>
+            <a:endCxn id="17" idx="3"/>
+          </p:cNvCxnSpPr>
+          <p:nvPr/>
+        </p:nvCxnSpPr>
+        <p:spPr>
+          <a:xfrm>
+            <a:off x="5143600" y="5624540"/>
+            <a:ext cx="3543200" cy="251623"/>
+          </a:xfrm>
+          <a:prstGeom prst="line">
+            <a:avLst/>
+          </a:prstGeom>
+        </p:spPr>
+        <p:style>
+          <a:lnRef idx="2">
+            <a:schemeClr val="accent1"/>
+          </a:lnRef>
+          <a:fillRef idx="0">
+            <a:schemeClr val="accent1"/>
+          </a:fillRef>
+          <a:effectRef idx="1">
+            <a:schemeClr val="accent1"/>
+          </a:effectRef>
+          <a:fontRef idx="minor">
+            <a:schemeClr val="tx1"/>
+          </a:fontRef>
+        </p:style>
+      </p:cxnSp>
     </p:spTree>
   </p:cSld>
   <p:clrMapOvr>
@@ -8815,7 +10126,7 @@
           <a:lstStyle/>
           <a:p>
             <a:r>
-              <a:t>14. ZenUML</a:t>
+              <a:t>13. タイムライン（Timeline）</a:t>
             </a:r>
           </a:p>
         </p:txBody>
@@ -8863,14 +10174,19 @@
               <a:rPr sz="1000">
                 <a:latin typeface="Courier New"/>
               </a:rPr>
-              <a:t>zenuml
-    title 注文処理
-    @Actor Client
-    @Database DB
-    Client -&gt; Server.process(order) {
-        Server -&gt; DB.save(order)
-        return orderId
-    }</a:t>
+              <a:t>timeline
+    title ソフトウェア開発史
+    1960 : アセンブリ言語
+    1970 : C言語
+         : Unix
+    1980 : C++
+         : Macintosh
+    1990 : Java
+         : World Wide Web
+    2000 : Python普及
+         : Agile開発
+    2010 : クラウドコンピューティング
+    2020 : AI・機械学習</a:t>
             </a:r>
           </a:p>
         </p:txBody>
@@ -8909,7 +10225,7 @@
           <a:lstStyle/>
           <a:p>
             <a:r>
-              <a:t>15. サンキー図（Sankey Diagram）</a:t>
+              <a:t>14. ZenUML</a:t>
             </a:r>
           </a:p>
         </p:txBody>
@@ -8957,13 +10273,14 @@
               <a:rPr sz="1000">
                 <a:latin typeface="Courier New"/>
               </a:rPr>
-              <a:t>sankey-beta
-    エネルギー源,電力,60
-    エネルギー源,熱,40
-    電力,家庭用,25
-    電力,産業用,35
-    熱,暖房,30
-    熱,給湯,10</a:t>
+              <a:t>zenuml
+    title 注文処理
+    @Actor Client
+    @Database DB
+    Client -&gt; Server.process(order) {
+        Server -&gt; DB.save(order)
+        return orderId
+    }</a:t>
             </a:r>
           </a:p>
         </p:txBody>
@@ -9002,7 +10319,7 @@
           <a:lstStyle/>
           <a:p>
             <a:r>
-              <a:t>16. XYチャート（XY Chart）</a:t>
+              <a:t>15. サンキー図（Sankey Diagram）</a:t>
             </a:r>
           </a:p>
         </p:txBody>
@@ -9050,12 +10367,13 @@
               <a:rPr sz="1000">
                 <a:latin typeface="Courier New"/>
               </a:rPr>
-              <a:t>xychart-beta
-    title "月別売上推移"
-    x-axis [1月, 2月, 3月, 4月, 5月, 6月]
-    y-axis "売上（万円）" 0 --&gt; 1000
-    bar [400, 500, 650, 720, 850, 900]
-    line [400, 500, 650, 720, 850, 900]</a:t>
+              <a:t>sankey-beta
+    エネルギー源,電力,60
+    エネルギー源,熱,40
+    電力,家庭用,25
+    電力,産業用,35
+    熱,暖房,30
+    熱,給湯,10</a:t>
             </a:r>
           </a:p>
         </p:txBody>
@@ -9094,7 +10412,7 @@
           <a:lstStyle/>
           <a:p>
             <a:r>
-              <a:t>17. ブロック図（Block Diagram）</a:t>
+              <a:t>16. XYチャート（XY Chart）</a:t>
             </a:r>
           </a:p>
         </p:txBody>
@@ -9142,19 +10460,12 @@
               <a:rPr sz="1000">
                 <a:latin typeface="Courier New"/>
               </a:rPr>
-              <a:t>block-beta
-    columns 3
-    A["フロントエンド"]:1
-    B["APIゲートウェイ"]:1
-    C["バックエンド"]:1
-    D["認証サービス"]:1
-    E["データベース"]:1
-    F["キャッシュ"]:1
-    A --&gt; B
-    B --&gt; C
-    B --&gt; D
-    C --&gt; E
-    C --&gt; F</a:t>
+              <a:t>xychart-beta
+    title "月別売上推移"
+    x-axis [1月, 2月, 3月, 4月, 5月, 6月]
+    y-axis "売上（万円）" 0 --&gt; 1000
+    bar [400, 500, 650, 720, 850, 900]
+    line [400, 500, 650, 720, 850, 900]</a:t>
             </a:r>
           </a:p>
         </p:txBody>
@@ -9254,7 +10565,7 @@
           <a:lstStyle/>
           <a:p>
             <a:r>
-              <a:t>18. パケット図（Packet Diagram）</a:t>
+              <a:t>17. ブロック図（Block Diagram）</a:t>
             </a:r>
           </a:p>
         </p:txBody>
@@ -9302,16 +10613,19 @@
               <a:rPr sz="1000">
                 <a:latin typeface="Courier New"/>
               </a:rPr>
-              <a:t>packet-beta
-    title TCP パケット構造
-    0-15: "送信元ポート"
-    16-31: "宛先ポート"
-    32-63: "シーケンス番号"
-    64-95: "確認応答番号"
-    96-99: "データオフセット"
-    100-105: "予約"
-    106-111: "フラグ"
-    112-127: "ウィンドウサイズ"</a:t>
+              <a:t>block-beta
+    columns 3
+    A["フロントエンド"]:1
+    B["APIゲートウェイ"]:1
+    C["バックエンド"]:1
+    D["認証サービス"]:1
+    E["データベース"]:1
+    F["キャッシュ"]:1
+    A --&gt; B
+    B --&gt; C
+    B --&gt; D
+    C --&gt; E
+    C --&gt; F</a:t>
             </a:r>
           </a:p>
         </p:txBody>
@@ -9350,7 +10664,7 @@
           <a:lstStyle/>
           <a:p>
             <a:r>
-              <a:t>19. カンバン（Kanban）</a:t>
+              <a:t>18. パケット図（Packet Diagram）</a:t>
             </a:r>
           </a:p>
         </p:txBody>
@@ -9398,16 +10712,16 @@
               <a:rPr sz="1000">
                 <a:latin typeface="Courier New"/>
               </a:rPr>
-              <a:t>kanban
-    todo["To Do"]
-        task1["要件定義"]
-        task2["DB設計"]
-    inprogress["In Progress"]
-        task3["API実装"]
-        task4["テスト作成"]
-    done["Done"]
-        task5["環境構築"]
-        task6["仕様策定"]</a:t>
+              <a:t>packet-beta
+    title TCP パケット構造
+    0-15: "送信元ポート"
+    16-31: "宛先ポート"
+    32-63: "シーケンス番号"
+    64-95: "確認応答番号"
+    96-99: "データオフセット"
+    100-105: "予約"
+    106-111: "フラグ"
+    112-127: "ウィンドウサイズ"</a:t>
             </a:r>
           </a:p>
         </p:txBody>
@@ -9446,7 +10760,7 @@
           <a:lstStyle/>
           <a:p>
             <a:r>
-              <a:t>20. アーキテクチャ図（Architecture Diagram）</a:t>
+              <a:t>19. カンバン（Kanban）</a:t>
             </a:r>
           </a:p>
         </p:txBody>
@@ -9494,15 +10808,16 @@
               <a:rPr sz="1000">
                 <a:latin typeface="Courier New"/>
               </a:rPr>
-              <a:t>architecture-beta
-    group cloud(cloud)[クラウド]
-    service web(internet)[Webサーバー] in cloud
-    service api(server)[APIサーバー] in cloud
-    service db(database)[データベース] in cloud
-    service cache(disk)[キャッシュ] in cloud
-    web:R --&gt; L:api
-    api:R --&gt; L:db
-    api:B --&gt; T:cache</a:t>
+              <a:t>kanban
+    todo["To Do"]
+        task1["要件定義"]
+        task2["DB設計"]
+    inprogress["In Progress"]
+        task3["API実装"]
+        task4["テスト作成"]
+    done["Done"]
+        task5["環境構築"]
+        task6["仕様策定"]</a:t>
             </a:r>
           </a:p>
         </p:txBody>
@@ -9541,7 +10856,7 @@
           <a:lstStyle/>
           <a:p>
             <a:r>
-              <a:t>21. C4図（C4 Diagram）</a:t>
+              <a:t>20. アーキテクチャ図（Architecture Diagram）</a:t>
             </a:r>
           </a:p>
         </p:txBody>
@@ -9589,15 +10904,15 @@
               <a:rPr sz="1000">
                 <a:latin typeface="Courier New"/>
               </a:rPr>
-              <a:t>C4Context
-    title システムコンテキスト図
-    Person(user, "ユーザー", "アプリケーションを利用する人")
-    System(app, "Webアプリ", "主要なシステム")
-    System_Ext(email, "メールサービス", "通知送信")
-    System_Ext(payment, "決済サービス", "支払い処理")
-    Rel(user, app, "利用する", "HTTPS")
-    Rel(app, email, "送信する", "SMTP")
-    Rel(app, payment, "呼び出す", "API")</a:t>
+              <a:t>architecture-beta
+    group cloud(cloud)[クラウド]
+    service web(internet)[Webサーバー] in cloud
+    service api(server)[APIサーバー] in cloud
+    service db(database)[データベース] in cloud
+    service cache(disk)[キャッシュ] in cloud
+    web:R --&gt; L:api
+    api:R --&gt; L:db
+    api:B --&gt; T:cache</a:t>
             </a:r>
           </a:p>
         </p:txBody>
@@ -9636,7 +10951,7 @@
           <a:lstStyle/>
           <a:p>
             <a:r>
-              <a:t>22. Quartoネイティブ記法</a:t>
+              <a:t>21. C4図（C4 Diagram）</a:t>
             </a:r>
           </a:p>
         </p:txBody>
@@ -9660,190 +10975,43 @@
       </p:sp>
       <p:sp>
         <p:nvSpPr>
-          <p:cNvPr id="4" name="Rectangle 3"/>
-          <p:cNvSpPr/>
+          <p:cNvPr id="4" name="TextBox 3"/>
+          <p:cNvSpPr txBox="1"/>
           <p:nvPr/>
         </p:nvSpPr>
         <p:spPr>
           <a:xfrm>
-            <a:off x="7271770" y="4348813"/>
-            <a:ext cx="1200000" cy="500000"/>
+            <a:off x="457200" y="1600200"/>
+            <a:ext cx="8229600" cy="4525963"/>
           </a:xfrm>
           <a:prstGeom prst="rect">
             <a:avLst/>
           </a:prstGeom>
-        </p:spPr>
-        <p:style>
-          <a:lnRef idx="1">
-            <a:schemeClr val="accent1"/>
-          </a:lnRef>
-          <a:fillRef idx="3">
-            <a:schemeClr val="accent1"/>
-          </a:fillRef>
-          <a:effectRef idx="2">
-            <a:schemeClr val="accent1"/>
-          </a:effectRef>
-          <a:fontRef idx="minor">
-            <a:schemeClr val="lt1"/>
-          </a:fontRef>
-        </p:style>
-        <p:txBody>
-          <a:bodyPr rtlCol="0" anchor="ctr"/>
-          <a:lstStyle/>
-          <a:p>
-            <a:r>
-              <a:rPr sz="1200"/>
-              <a:t>X</a:t>
-            </a:r>
-          </a:p>
-        </p:txBody>
-      </p:sp>
-      <p:sp>
-        <p:nvSpPr>
-          <p:cNvPr id="5" name="Rectangle 4"/>
-          <p:cNvSpPr/>
-          <p:nvPr/>
-        </p:nvSpPr>
-        <p:spPr>
-          <a:xfrm>
-            <a:off x="4187029" y="3581520"/>
-            <a:ext cx="1200000" cy="500000"/>
-          </a:xfrm>
-          <a:prstGeom prst="rect">
-            <a:avLst/>
-          </a:prstGeom>
-        </p:spPr>
-        <p:style>
-          <a:lnRef idx="1">
-            <a:schemeClr val="accent1"/>
-          </a:lnRef>
-          <a:fillRef idx="3">
-            <a:schemeClr val="accent1"/>
-          </a:fillRef>
-          <a:effectRef idx="2">
-            <a:schemeClr val="accent1"/>
-          </a:effectRef>
-          <a:fontRef idx="minor">
-            <a:schemeClr val="lt1"/>
-          </a:fontRef>
-        </p:style>
-        <p:txBody>
-          <a:bodyPr rtlCol="0" anchor="ctr"/>
-          <a:lstStyle/>
-          <a:p>
-            <a:r>
-              <a:rPr sz="1200"/>
-              <a:t>Y</a:t>
-            </a:r>
-          </a:p>
-        </p:txBody>
-      </p:sp>
-      <p:sp>
-        <p:nvSpPr>
-          <p:cNvPr id="6" name="Rectangle 5"/>
-          <p:cNvSpPr/>
-          <p:nvPr/>
-        </p:nvSpPr>
-        <p:spPr>
-          <a:xfrm>
-            <a:off x="457200" y="2909210"/>
-            <a:ext cx="1200000" cy="500000"/>
-          </a:xfrm>
-          <a:prstGeom prst="rect">
-            <a:avLst/>
-          </a:prstGeom>
-        </p:spPr>
-        <p:style>
-          <a:lnRef idx="1">
-            <a:schemeClr val="accent1"/>
-          </a:lnRef>
-          <a:fillRef idx="3">
-            <a:schemeClr val="accent1"/>
-          </a:fillRef>
-          <a:effectRef idx="2">
-            <a:schemeClr val="accent1"/>
-          </a:effectRef>
-          <a:fontRef idx="minor">
-            <a:schemeClr val="lt1"/>
-          </a:fontRef>
-        </p:style>
-        <p:txBody>
-          <a:bodyPr rtlCol="0" anchor="ctr"/>
-          <a:lstStyle/>
-          <a:p>
-            <a:r>
-              <a:rPr sz="1200"/>
-              <a:t>Z</a:t>
-            </a:r>
-          </a:p>
-        </p:txBody>
-      </p:sp>
-      <p:cxnSp>
-        <p:nvCxnSpPr>
-          <p:cNvPr id="7" name="Connector 6"/>
-          <p:cNvCxnSpPr>
-            <a:stCxn id="4" idx="3"/>
-            <a:endCxn id="5" idx="1"/>
-          </p:cNvCxnSpPr>
-          <p:nvPr/>
-        </p:nvCxnSpPr>
-        <p:spPr>
-          <a:xfrm flipH="1" flipV="1">
-            <a:off x="4187029" y="3831520"/>
-            <a:ext cx="4284741" cy="767293"/>
-          </a:xfrm>
-          <a:prstGeom prst="line">
-            <a:avLst/>
-          </a:prstGeom>
-        </p:spPr>
-        <p:style>
-          <a:lnRef idx="2">
-            <a:schemeClr val="accent1"/>
-          </a:lnRef>
-          <a:fillRef idx="0">
-            <a:schemeClr val="accent1"/>
-          </a:fillRef>
-          <a:effectRef idx="1">
-            <a:schemeClr val="accent1"/>
-          </a:effectRef>
-          <a:fontRef idx="minor">
-            <a:schemeClr val="tx1"/>
-          </a:fontRef>
-        </p:style>
-      </p:cxnSp>
-      <p:cxnSp>
-        <p:nvCxnSpPr>
-          <p:cNvPr id="8" name="Connector 7"/>
-          <p:cNvCxnSpPr>
-            <a:stCxn id="5" idx="3"/>
-            <a:endCxn id="6" idx="1"/>
-          </p:cNvCxnSpPr>
-          <p:nvPr/>
-        </p:nvCxnSpPr>
-        <p:spPr>
-          <a:xfrm flipH="1" flipV="1">
-            <a:off x="457200" y="3159210"/>
-            <a:ext cx="4929829" cy="672310"/>
-          </a:xfrm>
-          <a:prstGeom prst="line">
-            <a:avLst/>
-          </a:prstGeom>
-        </p:spPr>
-        <p:style>
-          <a:lnRef idx="2">
-            <a:schemeClr val="accent1"/>
-          </a:lnRef>
-          <a:fillRef idx="0">
-            <a:schemeClr val="accent1"/>
-          </a:fillRef>
-          <a:effectRef idx="1">
-            <a:schemeClr val="accent1"/>
-          </a:effectRef>
-          <a:fontRef idx="minor">
-            <a:schemeClr val="tx1"/>
-          </a:fontRef>
-        </p:style>
-      </p:cxnSp>
+          <a:noFill/>
+        </p:spPr>
+        <p:txBody>
+          <a:bodyPr wrap="square">
+            <a:spAutoFit/>
+          </a:bodyPr>
+          <a:lstStyle/>
+          <a:p>
+            <a:r>
+              <a:rPr sz="1000">
+                <a:latin typeface="Courier New"/>
+              </a:rPr>
+              <a:t>C4Context
+    title システムコンテキスト図
+    Person(user, "ユーザー", "アプリケーションを利用する人")
+    System(app, "Webアプリ", "主要なシステム")
+    System_Ext(email, "メールサービス", "通知送信")
+    System_Ext(payment, "決済サービス", "支払い処理")
+    Rel(user, app, "利用する", "HTTPS")
+    Rel(app, email, "送信する", "SMTP")
+    Rel(app, payment, "呼び出す", "API")</a:t>
+            </a:r>
+          </a:p>
+        </p:txBody>
+      </p:sp>
     </p:spTree>
   </p:cSld>
   <p:clrMapOvr>
@@ -9878,7 +11046,7 @@
           <a:lstStyle/>
           <a:p>
             <a:r>
-              <a:t>Quartoコードブロック記法</a:t>
+              <a:t>22. Quartoネイティブ記法</a:t>
             </a:r>
           </a:p>
         </p:txBody>
@@ -9895,20 +11063,203 @@
         </p:nvSpPr>
         <p:spPr/>
         <p:txBody>
-          <a:bodyPr wrap="none"/>
-          <a:lstStyle/>
-          <a:p>
-            <a:r>
-              <a:rPr sz="1400">
-                <a:latin typeface="Courier New"/>
-              </a:rPr>
-              <a:t>import math
-print(math.pi)
-</a:t>
-            </a:r>
-          </a:p>
-        </p:txBody>
-      </p:sp>
+          <a:bodyPr/>
+          <a:lstStyle/>
+          <a:p/>
+        </p:txBody>
+      </p:sp>
+      <p:sp>
+        <p:nvSpPr>
+          <p:cNvPr id="4" name="Rectangle 3"/>
+          <p:cNvSpPr/>
+          <p:nvPr/>
+        </p:nvSpPr>
+        <p:spPr>
+          <a:xfrm>
+            <a:off x="7271770" y="4348813"/>
+            <a:ext cx="1200000" cy="500000"/>
+          </a:xfrm>
+          <a:prstGeom prst="rect">
+            <a:avLst/>
+          </a:prstGeom>
+        </p:spPr>
+        <p:style>
+          <a:lnRef idx="1">
+            <a:schemeClr val="accent1"/>
+          </a:lnRef>
+          <a:fillRef idx="3">
+            <a:schemeClr val="accent1"/>
+          </a:fillRef>
+          <a:effectRef idx="2">
+            <a:schemeClr val="accent1"/>
+          </a:effectRef>
+          <a:fontRef idx="minor">
+            <a:schemeClr val="lt1"/>
+          </a:fontRef>
+        </p:style>
+        <p:txBody>
+          <a:bodyPr rtlCol="0" anchor="ctr"/>
+          <a:lstStyle/>
+          <a:p>
+            <a:r>
+              <a:rPr sz="1200"/>
+              <a:t>スタート</a:t>
+            </a:r>
+          </a:p>
+        </p:txBody>
+      </p:sp>
+      <p:sp>
+        <p:nvSpPr>
+          <p:cNvPr id="5" name="Rectangle 4"/>
+          <p:cNvSpPr/>
+          <p:nvPr/>
+        </p:nvSpPr>
+        <p:spPr>
+          <a:xfrm>
+            <a:off x="4187029" y="3581520"/>
+            <a:ext cx="1200000" cy="500000"/>
+          </a:xfrm>
+          <a:prstGeom prst="rect">
+            <a:avLst/>
+          </a:prstGeom>
+        </p:spPr>
+        <p:style>
+          <a:lnRef idx="1">
+            <a:schemeClr val="accent1"/>
+          </a:lnRef>
+          <a:fillRef idx="3">
+            <a:schemeClr val="accent1"/>
+          </a:fillRef>
+          <a:effectRef idx="2">
+            <a:schemeClr val="accent1"/>
+          </a:effectRef>
+          <a:fontRef idx="minor">
+            <a:schemeClr val="lt1"/>
+          </a:fontRef>
+        </p:style>
+        <p:txBody>
+          <a:bodyPr rtlCol="0" anchor="ctr"/>
+          <a:lstStyle/>
+          <a:p>
+            <a:r>
+              <a:rPr sz="1200"/>
+              <a:t>処理</a:t>
+            </a:r>
+          </a:p>
+        </p:txBody>
+      </p:sp>
+      <p:sp>
+        <p:nvSpPr>
+          <p:cNvPr id="6" name="Rectangle 5"/>
+          <p:cNvSpPr/>
+          <p:nvPr/>
+        </p:nvSpPr>
+        <p:spPr>
+          <a:xfrm>
+            <a:off x="457200" y="2909210"/>
+            <a:ext cx="1200000" cy="500000"/>
+          </a:xfrm>
+          <a:prstGeom prst="rect">
+            <a:avLst/>
+          </a:prstGeom>
+        </p:spPr>
+        <p:style>
+          <a:lnRef idx="1">
+            <a:schemeClr val="accent1"/>
+          </a:lnRef>
+          <a:fillRef idx="3">
+            <a:schemeClr val="accent1"/>
+          </a:fillRef>
+          <a:effectRef idx="2">
+            <a:schemeClr val="accent1"/>
+          </a:effectRef>
+          <a:fontRef idx="minor">
+            <a:schemeClr val="lt1"/>
+          </a:fontRef>
+        </p:style>
+        <p:txBody>
+          <a:bodyPr rtlCol="0" anchor="ctr"/>
+          <a:lstStyle/>
+          <a:p>
+            <a:r>
+              <a:rPr sz="1200"/>
+              <a:t>エンド</a:t>
+            </a:r>
+          </a:p>
+        </p:txBody>
+      </p:sp>
+      <p:cxnSp>
+        <p:nvCxnSpPr>
+          <p:cNvPr id="7" name="Connector 6"/>
+          <p:cNvCxnSpPr>
+            <a:stCxn id="4" idx="3"/>
+            <a:endCxn id="5" idx="1"/>
+          </p:cNvCxnSpPr>
+          <p:nvPr/>
+        </p:nvCxnSpPr>
+        <p:spPr>
+          <a:xfrm flipH="1" flipV="1">
+            <a:off x="4187029" y="3831520"/>
+            <a:ext cx="4284741" cy="767293"/>
+          </a:xfrm>
+          <a:prstGeom prst="line">
+            <a:avLst/>
+          </a:prstGeom>
+          <a:ln>
+            <a:headEnd type="arrow" w="med" len="med"/>
+          </a:ln>
+        </p:spPr>
+        <p:style>
+          <a:lnRef idx="2">
+            <a:schemeClr val="accent1"/>
+          </a:lnRef>
+          <a:fillRef idx="0">
+            <a:schemeClr val="accent1"/>
+          </a:fillRef>
+          <a:effectRef idx="1">
+            <a:schemeClr val="accent1"/>
+          </a:effectRef>
+          <a:fontRef idx="minor">
+            <a:schemeClr val="tx1"/>
+          </a:fontRef>
+        </p:style>
+      </p:cxnSp>
+      <p:cxnSp>
+        <p:nvCxnSpPr>
+          <p:cNvPr id="8" name="Connector 7"/>
+          <p:cNvCxnSpPr>
+            <a:stCxn id="5" idx="3"/>
+            <a:endCxn id="6" idx="1"/>
+          </p:cNvCxnSpPr>
+          <p:nvPr/>
+        </p:nvCxnSpPr>
+        <p:spPr>
+          <a:xfrm flipH="1" flipV="1">
+            <a:off x="457200" y="3159210"/>
+            <a:ext cx="4929829" cy="672310"/>
+          </a:xfrm>
+          <a:prstGeom prst="line">
+            <a:avLst/>
+          </a:prstGeom>
+          <a:ln>
+            <a:headEnd type="arrow" w="med" len="med"/>
+          </a:ln>
+        </p:spPr>
+        <p:style>
+          <a:lnRef idx="2">
+            <a:schemeClr val="accent1"/>
+          </a:lnRef>
+          <a:fillRef idx="0">
+            <a:schemeClr val="accent1"/>
+          </a:fillRef>
+          <a:effectRef idx="1">
+            <a:schemeClr val="accent1"/>
+          </a:effectRef>
+          <a:fontRef idx="minor">
+            <a:schemeClr val="tx1"/>
+          </a:fontRef>
+        </p:style>
+      </p:cxnSp>
     </p:spTree>
   </p:cSld>
   <p:clrMapOvr>
@@ -9943,26 +11294,35 @@
           <a:lstStyle/>
           <a:p>
             <a:r>
-              <a:t>アニメーション・レイアウト</a:t>
-            </a:r>
-          </a:p>
-        </p:txBody>
-      </p:sp>
-      <p:sp>
-        <p:nvSpPr>
-          <p:cNvPr id="3" name="Text Placeholder 2"/>
-          <p:cNvSpPr>
-            <a:spLocks noGrp="1"/>
-          </p:cNvSpPr>
-          <p:nvPr>
-            <p:ph type="body" idx="1"/>
-          </p:nvPr>
-        </p:nvSpPr>
-        <p:spPr/>
-        <p:txBody>
-          <a:bodyPr/>
-          <a:lstStyle/>
-          <a:p/>
+              <a:t>Quartoコードブロック記法</a:t>
+            </a:r>
+          </a:p>
+        </p:txBody>
+      </p:sp>
+      <p:sp>
+        <p:nvSpPr>
+          <p:cNvPr id="3" name="Content Placeholder 2"/>
+          <p:cNvSpPr>
+            <a:spLocks noGrp="1"/>
+          </p:cNvSpPr>
+          <p:nvPr>
+            <p:ph idx="1"/>
+          </p:nvPr>
+        </p:nvSpPr>
+        <p:spPr/>
+        <p:txBody>
+          <a:bodyPr wrap="none"/>
+          <a:lstStyle/>
+          <a:p>
+            <a:r>
+              <a:rPr sz="1400">
+                <a:latin typeface="Courier New"/>
+              </a:rPr>
+              <a:t>import math
+print(math.pi)
+</a:t>
+            </a:r>
+          </a:p>
         </p:txBody>
       </p:sp>
     </p:spTree>
@@ -9999,46 +11359,26 @@
           <a:lstStyle/>
           <a:p>
             <a:r>
-              <a:t>インクリメンタルリスト</a:t>
-            </a:r>
-          </a:p>
-        </p:txBody>
-      </p:sp>
-      <p:sp>
-        <p:nvSpPr>
-          <p:cNvPr id="3" name="Content Placeholder 2"/>
-          <p:cNvSpPr>
-            <a:spLocks noGrp="1"/>
-          </p:cNvSpPr>
-          <p:nvPr>
-            <p:ph idx="1"/>
-          </p:nvPr>
-        </p:nvSpPr>
-        <p:spPr/>
-        <p:txBody>
-          <a:bodyPr wrap="square"/>
-          <a:lstStyle/>
-          <a:p>
-            <a:pPr/>
-            <a:r>
-              <a:rPr sz="1800"/>
-              <a:t>まず最初に表示</a:t>
-            </a:r>
-          </a:p>
-          <a:p>
-            <a:pPr/>
-            <a:r>
-              <a:rPr sz="1800"/>
-              <a:t>次にこれが表示</a:t>
-            </a:r>
-          </a:p>
-          <a:p>
-            <a:pPr/>
-            <a:r>
-              <a:rPr sz="1800"/>
-              <a:t>最後にこれが表示</a:t>
-            </a:r>
-          </a:p>
+              <a:t>アニメーション・レイアウト</a:t>
+            </a:r>
+          </a:p>
+        </p:txBody>
+      </p:sp>
+      <p:sp>
+        <p:nvSpPr>
+          <p:cNvPr id="3" name="Text Placeholder 2"/>
+          <p:cNvSpPr>
+            <a:spLocks noGrp="1"/>
+          </p:cNvSpPr>
+          <p:nvPr>
+            <p:ph type="body" idx="1"/>
+          </p:nvPr>
+        </p:nvSpPr>
+        <p:spPr/>
+        <p:txBody>
+          <a:bodyPr/>
+          <a:lstStyle/>
+          <a:p/>
         </p:txBody>
       </p:sp>
     </p:spTree>
@@ -10075,7 +11415,7 @@
           <a:lstStyle/>
           <a:p>
             <a:r>
-              <a:t>非インクリメンタルリスト</a:t>
+              <a:t>インクリメンタルリスト</a:t>
             </a:r>
           </a:p>
         </p:txBody>
@@ -10098,21 +11438,21 @@
             <a:pPr/>
             <a:r>
               <a:rPr sz="1800"/>
-              <a:t>一括表示アイテム1</a:t>
+              <a:t>まず最初に表示</a:t>
             </a:r>
           </a:p>
           <a:p>
             <a:pPr/>
             <a:r>
               <a:rPr sz="1800"/>
-              <a:t>一括表示アイテム2</a:t>
+              <a:t>次にこれが表示</a:t>
             </a:r>
           </a:p>
           <a:p>
             <a:pPr/>
             <a:r>
               <a:rPr sz="1800"/>
-              <a:t>一括表示アイテム3</a:t>
+              <a:t>最後にこれが表示</a:t>
             </a:r>
           </a:p>
         </p:txBody>
@@ -10151,7 +11491,7 @@
           <a:lstStyle/>
           <a:p>
             <a:r>
-              <a:t>2カラムレイアウト</a:t>
+              <a:t>非インクリメンタルリスト</a:t>
             </a:r>
           </a:p>
         </p:txBody>
@@ -10163,7 +11503,7 @@
             <a:spLocks noGrp="1"/>
           </p:cNvSpPr>
           <p:nvPr>
-            <p:ph idx="1" sz="half"/>
+            <p:ph idx="1"/>
           </p:nvPr>
         </p:nvSpPr>
         <p:spPr/>
@@ -10174,58 +11514,21 @@
             <a:pPr/>
             <a:r>
               <a:rPr sz="1800"/>
-              <a:t>左の項目1</a:t>
+              <a:t>一括表示アイテム1</a:t>
             </a:r>
           </a:p>
           <a:p>
             <a:pPr/>
             <a:r>
               <a:rPr sz="1800"/>
-              <a:t>左の項目2</a:t>
+              <a:t>一括表示アイテム2</a:t>
             </a:r>
           </a:p>
           <a:p>
             <a:pPr/>
             <a:r>
               <a:rPr sz="1800"/>
-              <a:t>左の項目3</a:t>
-            </a:r>
-          </a:p>
-        </p:txBody>
-      </p:sp>
-      <p:sp>
-        <p:nvSpPr>
-          <p:cNvPr id="4" name="Content Placeholder 3"/>
-          <p:cNvSpPr>
-            <a:spLocks noGrp="1"/>
-          </p:cNvSpPr>
-          <p:nvPr>
-            <p:ph idx="2" sz="half"/>
-          </p:nvPr>
-        </p:nvSpPr>
-        <p:spPr/>
-        <p:txBody>
-          <a:bodyPr wrap="square"/>
-          <a:lstStyle/>
-          <a:p>
-            <a:pPr/>
-            <a:r>
-              <a:rPr sz="1800"/>
-              <a:t>右の項目1</a:t>
-            </a:r>
-          </a:p>
-          <a:p>
-            <a:pPr/>
-            <a:r>
-              <a:rPr sz="1800"/>
-              <a:t>右の項目2</a:t>
-            </a:r>
-          </a:p>
-          <a:p>
-            <a:pPr/>
-            <a:r>
-              <a:rPr sz="1800"/>
-              <a:t>右の項目3</a:t>
+              <a:t>一括表示アイテム3</a:t>
             </a:r>
           </a:p>
         </p:txBody>
@@ -10354,7 +11657,7 @@
           <a:lstStyle/>
           <a:p>
             <a:r>
-              <a:t>スピーカーノート付きスライド</a:t>
+              <a:t>2カラムレイアウト</a:t>
             </a:r>
           </a:p>
         </p:txBody>
@@ -10366,7 +11669,7 @@
             <a:spLocks noGrp="1"/>
           </p:cNvSpPr>
           <p:nvPr>
-            <p:ph idx="1"/>
+            <p:ph idx="1" sz="half"/>
           </p:nvPr>
         </p:nvSpPr>
         <p:spPr/>
@@ -10374,9 +11677,61 @@
           <a:bodyPr wrap="square"/>
           <a:lstStyle/>
           <a:p>
+            <a:pPr/>
             <a:r>
               <a:rPr sz="1800"/>
-              <a:t>このスライドには発表者向けのノートが埋め込まれています。</a:t>
+              <a:t>左の項目1</a:t>
+            </a:r>
+          </a:p>
+          <a:p>
+            <a:pPr/>
+            <a:r>
+              <a:rPr sz="1800"/>
+              <a:t>左の項目2</a:t>
+            </a:r>
+          </a:p>
+          <a:p>
+            <a:pPr/>
+            <a:r>
+              <a:rPr sz="1800"/>
+              <a:t>左の項目3</a:t>
+            </a:r>
+          </a:p>
+        </p:txBody>
+      </p:sp>
+      <p:sp>
+        <p:nvSpPr>
+          <p:cNvPr id="4" name="Content Placeholder 3"/>
+          <p:cNvSpPr>
+            <a:spLocks noGrp="1"/>
+          </p:cNvSpPr>
+          <p:nvPr>
+            <p:ph idx="2" sz="half"/>
+          </p:nvPr>
+        </p:nvSpPr>
+        <p:spPr/>
+        <p:txBody>
+          <a:bodyPr wrap="square"/>
+          <a:lstStyle/>
+          <a:p>
+            <a:pPr/>
+            <a:r>
+              <a:rPr sz="1800"/>
+              <a:t>右の項目1</a:t>
+            </a:r>
+          </a:p>
+          <a:p>
+            <a:pPr/>
+            <a:r>
+              <a:rPr sz="1800"/>
+              <a:t>右の項目2</a:t>
+            </a:r>
+          </a:p>
+          <a:p>
+            <a:pPr/>
+            <a:r>
+              <a:rPr sz="1800"/>
+              <a:t>右の項目3</a:t>
             </a:r>
           </a:p>
         </p:txBody>
@@ -10413,7 +11768,11 @@
         <p:txBody>
           <a:bodyPr/>
           <a:lstStyle/>
-          <a:p/>
+          <a:p>
+            <a:r>
+              <a:t>スピーカーノート付きスライド</a:t>
+            </a:r>
+          </a:p>
         </p:txBody>
       </p:sp>
       <p:sp>
@@ -10433,7 +11792,7 @@
           <a:p>
             <a:r>
               <a:rPr sz="1800"/>
-              <a:t>水平区切り線（---）によって生成されたタイトルなしスライドです。</a:t>
+              <a:t>このスライドには発表者向けのノートが埋め込まれています。</a:t>
             </a:r>
           </a:p>
         </p:txBody>
@@ -10470,28 +11829,29 @@
         <p:txBody>
           <a:bodyPr/>
           <a:lstStyle/>
-          <a:p>
-            <a:r>
-              <a:t>まとめ</a:t>
-            </a:r>
-          </a:p>
-        </p:txBody>
-      </p:sp>
-      <p:sp>
-        <p:nvSpPr>
-          <p:cNvPr id="3" name="Text Placeholder 2"/>
-          <p:cNvSpPr>
-            <a:spLocks noGrp="1"/>
-          </p:cNvSpPr>
-          <p:nvPr>
-            <p:ph type="body" idx="1"/>
-          </p:nvPr>
-        </p:nvSpPr>
-        <p:spPr/>
-        <p:txBody>
-          <a:bodyPr/>
-          <a:lstStyle/>
           <a:p/>
+        </p:txBody>
+      </p:sp>
+      <p:sp>
+        <p:nvSpPr>
+          <p:cNvPr id="3" name="Content Placeholder 2"/>
+          <p:cNvSpPr>
+            <a:spLocks noGrp="1"/>
+          </p:cNvSpPr>
+          <p:nvPr>
+            <p:ph idx="1"/>
+          </p:nvPr>
+        </p:nvSpPr>
+        <p:spPr/>
+        <p:txBody>
+          <a:bodyPr wrap="square"/>
+          <a:lstStyle/>
+          <a:p>
+            <a:r>
+              <a:rPr sz="1800"/>
+              <a:t>水平区切り線（---）によって生成されたタイトルなしスライドです。</a:t>
+            </a:r>
+          </a:p>
         </p:txBody>
       </p:sp>
     </p:spTree>
@@ -10503,6 +11863,62 @@
 </file>
 
 <file path=ppt/slides/slide43.xml><?xml version="1.0" encoding="utf-8"?>
+<p:sld xmlns:a="http://schemas.openxmlformats.org/drawingml/2006/main" xmlns:p="http://schemas.openxmlformats.org/presentationml/2006/main" xmlns:r="http://schemas.openxmlformats.org/officeDocument/2006/relationships">
+  <p:cSld>
+    <p:spTree>
+      <p:nvGrpSpPr>
+        <p:cNvPr id="1" name=""/>
+        <p:cNvGrpSpPr/>
+        <p:nvPr/>
+      </p:nvGrpSpPr>
+      <p:grpSpPr/>
+      <p:sp>
+        <p:nvSpPr>
+          <p:cNvPr id="2" name="Title 1"/>
+          <p:cNvSpPr>
+            <a:spLocks noGrp="1"/>
+          </p:cNvSpPr>
+          <p:nvPr>
+            <p:ph type="title"/>
+          </p:nvPr>
+        </p:nvSpPr>
+        <p:spPr/>
+        <p:txBody>
+          <a:bodyPr/>
+          <a:lstStyle/>
+          <a:p>
+            <a:r>
+              <a:t>まとめ</a:t>
+            </a:r>
+          </a:p>
+        </p:txBody>
+      </p:sp>
+      <p:sp>
+        <p:nvSpPr>
+          <p:cNvPr id="3" name="Text Placeholder 2"/>
+          <p:cNvSpPr>
+            <a:spLocks noGrp="1"/>
+          </p:cNvSpPr>
+          <p:nvPr>
+            <p:ph type="body" idx="1"/>
+          </p:nvPr>
+        </p:nvSpPr>
+        <p:spPr/>
+        <p:txBody>
+          <a:bodyPr/>
+          <a:lstStyle/>
+          <a:p/>
+        </p:txBody>
+      </p:sp>
+    </p:spTree>
+  </p:cSld>
+  <p:clrMapOvr>
+    <a:masterClrMapping/>
+  </p:clrMapOvr>
+</p:sld>
+</file>
+
+<file path=ppt/slides/slide44.xml><?xml version="1.0" encoding="utf-8"?>
 <p:sld xmlns:a="http://schemas.openxmlformats.org/drawingml/2006/main" xmlns:p="http://schemas.openxmlformats.org/presentationml/2006/main" xmlns:r="http://schemas.openxmlformats.org/officeDocument/2006/relationships">
   <p:cSld>
     <p:spTree>

--- a/demo_full.pptx
+++ b/demo_full.pptx
@@ -4319,7 +4319,7 @@
         </p:nvSpPr>
         <p:spPr>
           <a:xfrm>
-            <a:off x="5347172" y="4787030"/>
+            <a:off x="4482959" y="5626163"/>
             <a:ext cx="1200000" cy="500000"/>
           </a:xfrm>
           <a:prstGeom prst="rect">
@@ -4359,7 +4359,7 @@
         </p:nvSpPr>
         <p:spPr>
           <a:xfrm>
-            <a:off x="5436053" y="4342679"/>
+            <a:off x="7338887" y="3410684"/>
             <a:ext cx="1200000" cy="500000"/>
           </a:xfrm>
           <a:prstGeom prst="roundRect">
@@ -4399,7 +4399,7 @@
         </p:nvSpPr>
         <p:spPr>
           <a:xfrm>
-            <a:off x="5968907" y="3930196"/>
+            <a:off x="1565367" y="2153067"/>
             <a:ext cx="1200000" cy="500000"/>
           </a:xfrm>
           <a:prstGeom prst="roundRect">
@@ -4439,7 +4439,7 @@
         </p:nvSpPr>
         <p:spPr>
           <a:xfrm>
-            <a:off x="6082984" y="3274360"/>
+            <a:off x="1083465" y="4727491"/>
             <a:ext cx="1200000" cy="500000"/>
           </a:xfrm>
           <a:prstGeom prst="rect">
@@ -4479,7 +4479,7 @@
         </p:nvSpPr>
         <p:spPr>
           <a:xfrm>
-            <a:off x="5964532" y="2558720"/>
+            <a:off x="6742518" y="4748105"/>
             <a:ext cx="1200000" cy="500000"/>
           </a:xfrm>
           <a:prstGeom prst="can">
@@ -4519,7 +4519,7 @@
         </p:nvSpPr>
         <p:spPr>
           <a:xfrm>
-            <a:off x="5274744" y="2420828"/>
+            <a:off x="2463625" y="5449362"/>
             <a:ext cx="1200000" cy="500000"/>
           </a:xfrm>
           <a:prstGeom prst="ellipse">
@@ -4559,7 +4559,7 @@
         </p:nvSpPr>
         <p:spPr>
           <a:xfrm>
-            <a:off x="5165743" y="2879308"/>
+            <a:off x="7224696" y="2554157"/>
             <a:ext cx="1200000" cy="500000"/>
           </a:xfrm>
           <a:prstGeom prst="homePlate">
@@ -4599,7 +4599,7 @@
         </p:nvSpPr>
         <p:spPr>
           <a:xfrm>
-            <a:off x="4508209" y="3233145"/>
+            <a:off x="3105689" y="1791026"/>
             <a:ext cx="1200000" cy="500000"/>
           </a:xfrm>
           <a:prstGeom prst="diamond">
@@ -4639,7 +4639,7 @@
         </p:nvSpPr>
         <p:spPr>
           <a:xfrm>
-            <a:off x="3796768" y="3515153"/>
+            <a:off x="3507978" y="4363904"/>
             <a:ext cx="1200000" cy="500000"/>
           </a:xfrm>
           <a:prstGeom prst="hexagon">
@@ -4679,7 +4679,7 @@
         </p:nvSpPr>
         <p:spPr>
           <a:xfrm>
-            <a:off x="2949541" y="3857418"/>
+            <a:off x="4731819" y="1804525"/>
             <a:ext cx="1200000" cy="500000"/>
           </a:xfrm>
           <a:prstGeom prst="parallelogram">
@@ -4719,7 +4719,7 @@
         </p:nvSpPr>
         <p:spPr>
           <a:xfrm flipH="1">
-            <a:off x="1981387" y="4302214"/>
+            <a:off x="5922439" y="1885649"/>
             <a:ext cx="1200000" cy="500000"/>
           </a:xfrm>
           <a:prstGeom prst="parallelogram">
@@ -4759,7 +4759,7 @@
         </p:nvSpPr>
         <p:spPr>
           <a:xfrm>
-            <a:off x="1238395" y="4198490"/>
+            <a:off x="1136164" y="3071923"/>
             <a:ext cx="1200000" cy="500000"/>
           </a:xfrm>
           <a:prstGeom prst="trapezoid">
@@ -4798,11 +4798,11 @@
           <p:nvPr/>
         </p:nvSpPr>
         <p:spPr>
-          <a:xfrm flipV="1">
-            <a:off x="1436359" y="3794675"/>
+          <a:xfrm>
+            <a:off x="5512937" y="5318831"/>
             <a:ext cx="1200000" cy="500000"/>
           </a:xfrm>
-          <a:prstGeom prst="trapezoid">
+          <a:prstGeom prst="invertedTrapezoid">
             <a:avLst/>
           </a:prstGeom>
         </p:spPr>
@@ -4839,7 +4839,7 @@
         </p:nvSpPr>
         <p:spPr>
           <a:xfrm>
-            <a:off x="457200" y="3490317"/>
+            <a:off x="789451" y="3679647"/>
             <a:ext cx="1200000" cy="500000"/>
           </a:xfrm>
           <a:prstGeom prst="ellipse">
@@ -4881,9 +4881,9 @@
           <p:nvPr/>
         </p:nvCxnSpPr>
         <p:spPr>
-          <a:xfrm>
-            <a:off x="5947172" y="4787030"/>
-            <a:ext cx="88881" cy="55649"/>
+          <a:xfrm flipV="1">
+            <a:off x="5082959" y="3910684"/>
+            <a:ext cx="2855928" cy="1715479"/>
           </a:xfrm>
           <a:prstGeom prst="line">
             <a:avLst/>
@@ -4911,15 +4911,15 @@
         <p:nvCxnSpPr>
           <p:cNvPr id="19" name="Connector 18"/>
           <p:cNvCxnSpPr>
-            <a:stCxn id="5" idx="0"/>
-            <a:endCxn id="6" idx="2"/>
+            <a:stCxn id="5" idx="3"/>
+            <a:endCxn id="6" idx="1"/>
           </p:cNvCxnSpPr>
           <p:nvPr/>
         </p:nvCxnSpPr>
         <p:spPr>
-          <a:xfrm>
-            <a:off x="6036053" y="4342679"/>
-            <a:ext cx="532854" cy="87517"/>
+          <a:xfrm flipH="1" flipV="1">
+            <a:off x="1565367" y="2403067"/>
+            <a:ext cx="6973520" cy="1257617"/>
           </a:xfrm>
           <a:prstGeom prst="line">
             <a:avLst/>
@@ -4947,15 +4947,15 @@
         <p:nvCxnSpPr>
           <p:cNvPr id="20" name="Connector 19"/>
           <p:cNvCxnSpPr>
-            <a:stCxn id="6" idx="0"/>
-            <a:endCxn id="7" idx="2"/>
+            <a:stCxn id="6" idx="2"/>
+            <a:endCxn id="7" idx="0"/>
           </p:cNvCxnSpPr>
           <p:nvPr/>
         </p:nvCxnSpPr>
         <p:spPr>
-          <a:xfrm flipV="1">
-            <a:off x="6568907" y="3774360"/>
-            <a:ext cx="114077" cy="155836"/>
+          <a:xfrm flipH="1">
+            <a:off x="1683465" y="2653067"/>
+            <a:ext cx="481902" cy="2074424"/>
           </a:xfrm>
           <a:prstGeom prst="line">
             <a:avLst/>
@@ -4983,15 +4983,15 @@
         <p:nvCxnSpPr>
           <p:cNvPr id="21" name="Connector 20"/>
           <p:cNvCxnSpPr>
-            <a:stCxn id="7" idx="0"/>
-            <a:endCxn id="8" idx="2"/>
+            <a:stCxn id="7" idx="1"/>
+            <a:endCxn id="8" idx="3"/>
           </p:cNvCxnSpPr>
           <p:nvPr/>
         </p:nvCxnSpPr>
         <p:spPr>
-          <a:xfrm flipH="1" flipV="1">
-            <a:off x="6564532" y="3058720"/>
-            <a:ext cx="118452" cy="215640"/>
+          <a:xfrm>
+            <a:off x="1083465" y="4977491"/>
+            <a:ext cx="6859053" cy="20614"/>
           </a:xfrm>
           <a:prstGeom prst="line">
             <a:avLst/>
@@ -5025,9 +5025,9 @@
           <p:nvPr/>
         </p:nvCxnSpPr>
         <p:spPr>
-          <a:xfrm flipH="1" flipV="1">
-            <a:off x="5274744" y="2670828"/>
-            <a:ext cx="1889788" cy="137892"/>
+          <a:xfrm flipH="1">
+            <a:off x="2463625" y="4998105"/>
+            <a:ext cx="5478893" cy="701257"/>
           </a:xfrm>
           <a:prstGeom prst="line">
             <a:avLst/>
@@ -5055,15 +5055,15 @@
         <p:nvCxnSpPr>
           <p:cNvPr id="23" name="Connector 22"/>
           <p:cNvCxnSpPr>
-            <a:stCxn id="9" idx="2"/>
-            <a:endCxn id="10" idx="0"/>
+            <a:stCxn id="9" idx="0"/>
+            <a:endCxn id="10" idx="2"/>
           </p:cNvCxnSpPr>
           <p:nvPr/>
         </p:nvCxnSpPr>
         <p:spPr>
-          <a:xfrm flipH="1" flipV="1">
-            <a:off x="5765743" y="2879308"/>
-            <a:ext cx="109001" cy="41520"/>
+          <a:xfrm flipV="1">
+            <a:off x="3063625" y="3054157"/>
+            <a:ext cx="4761071" cy="2395205"/>
           </a:xfrm>
           <a:prstGeom prst="line">
             <a:avLst/>
@@ -5097,9 +5097,9 @@
           <p:nvPr/>
         </p:nvCxnSpPr>
         <p:spPr>
-          <a:xfrm flipH="1">
-            <a:off x="4508209" y="3129308"/>
-            <a:ext cx="1857534" cy="353837"/>
+          <a:xfrm flipH="1" flipV="1">
+            <a:off x="3105689" y="2041026"/>
+            <a:ext cx="5319007" cy="763131"/>
           </a:xfrm>
           <a:prstGeom prst="line">
             <a:avLst/>
@@ -5127,15 +5127,15 @@
         <p:nvCxnSpPr>
           <p:cNvPr id="25" name="Connector 24"/>
           <p:cNvCxnSpPr>
-            <a:stCxn id="11" idx="3"/>
-            <a:endCxn id="12" idx="1"/>
+            <a:stCxn id="11" idx="2"/>
+            <a:endCxn id="12" idx="0"/>
           </p:cNvCxnSpPr>
           <p:nvPr/>
         </p:nvCxnSpPr>
         <p:spPr>
-          <a:xfrm flipH="1">
-            <a:off x="3796768" y="3483145"/>
-            <a:ext cx="1911441" cy="282008"/>
+          <a:xfrm>
+            <a:off x="3705689" y="2291026"/>
+            <a:ext cx="402289" cy="2072878"/>
           </a:xfrm>
           <a:prstGeom prst="line">
             <a:avLst/>
@@ -5163,15 +5163,15 @@
         <p:nvCxnSpPr>
           <p:cNvPr id="26" name="Connector 25"/>
           <p:cNvCxnSpPr>
-            <a:stCxn id="12" idx="3"/>
-            <a:endCxn id="13" idx="1"/>
+            <a:stCxn id="12" idx="0"/>
+            <a:endCxn id="13" idx="2"/>
           </p:cNvCxnSpPr>
           <p:nvPr/>
         </p:nvCxnSpPr>
         <p:spPr>
-          <a:xfrm flipH="1">
-            <a:off x="2949541" y="3765153"/>
-            <a:ext cx="2047227" cy="342265"/>
+          <a:xfrm flipV="1">
+            <a:off x="4107978" y="2304525"/>
+            <a:ext cx="1223841" cy="2059379"/>
           </a:xfrm>
           <a:prstGeom prst="line">
             <a:avLst/>
@@ -5199,15 +5199,15 @@
         <p:nvCxnSpPr>
           <p:cNvPr id="27" name="Connector 26"/>
           <p:cNvCxnSpPr>
-            <a:stCxn id="13" idx="3"/>
-            <a:endCxn id="14" idx="1"/>
+            <a:stCxn id="13" idx="1"/>
+            <a:endCxn id="14" idx="3"/>
           </p:cNvCxnSpPr>
           <p:nvPr/>
         </p:nvCxnSpPr>
         <p:spPr>
-          <a:xfrm flipH="1">
-            <a:off x="1981387" y="4107418"/>
-            <a:ext cx="2168154" cy="444796"/>
+          <a:xfrm>
+            <a:off x="4731819" y="2054525"/>
+            <a:ext cx="2390620" cy="81124"/>
           </a:xfrm>
           <a:prstGeom prst="line">
             <a:avLst/>
@@ -5241,9 +5241,9 @@
           <p:nvPr/>
         </p:nvCxnSpPr>
         <p:spPr>
-          <a:xfrm flipH="1" flipV="1">
-            <a:off x="1238395" y="4448490"/>
-            <a:ext cx="1942992" cy="103724"/>
+          <a:xfrm flipH="1">
+            <a:off x="1136164" y="2135649"/>
+            <a:ext cx="5986275" cy="1186274"/>
           </a:xfrm>
           <a:prstGeom prst="line">
             <a:avLst/>
@@ -5271,15 +5271,15 @@
         <p:nvCxnSpPr>
           <p:cNvPr id="29" name="Connector 28"/>
           <p:cNvCxnSpPr>
-            <a:stCxn id="15" idx="0"/>
-            <a:endCxn id="16" idx="2"/>
+            <a:stCxn id="15" idx="1"/>
+            <a:endCxn id="16" idx="3"/>
           </p:cNvCxnSpPr>
           <p:nvPr/>
         </p:nvCxnSpPr>
         <p:spPr>
           <a:xfrm>
-            <a:off x="1838395" y="4198490"/>
-            <a:ext cx="197964" cy="96185"/>
+            <a:off x="1136164" y="3321923"/>
+            <a:ext cx="5576773" cy="2246908"/>
           </a:xfrm>
           <a:prstGeom prst="line">
             <a:avLst/>
@@ -5314,8 +5314,8 @@
         </p:nvCxnSpPr>
         <p:spPr>
           <a:xfrm flipH="1" flipV="1">
-            <a:off x="457200" y="3740317"/>
-            <a:ext cx="2179159" cy="304358"/>
+            <a:off x="789451" y="3929647"/>
+            <a:ext cx="5923486" cy="1639184"/>
           </a:xfrm>
           <a:prstGeom prst="line">
             <a:avLst/>
@@ -5403,7 +5403,7 @@
         </p:nvSpPr>
         <p:spPr>
           <a:xfrm>
-            <a:off x="3680327" y="5626163"/>
+            <a:off x="4654637" y="5626163"/>
             <a:ext cx="1200000" cy="500000"/>
           </a:xfrm>
           <a:prstGeom prst="roundRect">
@@ -5443,7 +5443,7 @@
         </p:nvSpPr>
         <p:spPr>
           <a:xfrm>
-            <a:off x="4117675" y="5011807"/>
+            <a:off x="6302595" y="3081297"/>
             <a:ext cx="1200000" cy="500000"/>
           </a:xfrm>
           <a:prstGeom prst="rect">
@@ -5483,7 +5483,7 @@
         </p:nvSpPr>
         <p:spPr>
           <a:xfrm>
-            <a:off x="5625223" y="4755047"/>
+            <a:off x="1056737" y="2381612"/>
             <a:ext cx="1200000" cy="500000"/>
           </a:xfrm>
           <a:prstGeom prst="rect">
@@ -5523,7 +5523,7 @@
         </p:nvSpPr>
         <p:spPr>
           <a:xfrm>
-            <a:off x="5918060" y="3816905"/>
+            <a:off x="865109" y="4321198"/>
             <a:ext cx="1200000" cy="500000"/>
           </a:xfrm>
           <a:prstGeom prst="rect">
@@ -5563,7 +5563,7 @@
         </p:nvSpPr>
         <p:spPr>
           <a:xfrm>
-            <a:off x="5015561" y="2880833"/>
+            <a:off x="6166908" y="5081936"/>
             <a:ext cx="1200000" cy="500000"/>
           </a:xfrm>
           <a:prstGeom prst="rect">
@@ -5603,7 +5603,7 @@
         </p:nvSpPr>
         <p:spPr>
           <a:xfrm>
-            <a:off x="3761027" y="2608975"/>
+            <a:off x="2707608" y="4641865"/>
             <a:ext cx="1200000" cy="500000"/>
           </a:xfrm>
           <a:prstGeom prst="rect">
@@ -5643,7 +5643,7 @@
         </p:nvSpPr>
         <p:spPr>
           <a:xfrm>
-            <a:off x="2440670" y="2037778"/>
+            <a:off x="6306543" y="2012188"/>
             <a:ext cx="1200000" cy="500000"/>
           </a:xfrm>
           <a:prstGeom prst="rect">
@@ -5683,7 +5683,7 @@
         </p:nvSpPr>
         <p:spPr>
           <a:xfrm>
-            <a:off x="1217452" y="2167940"/>
+            <a:off x="3715860" y="1759190"/>
             <a:ext cx="1200000" cy="500000"/>
           </a:xfrm>
           <a:prstGeom prst="roundRect">
@@ -5715,215 +5715,260 @@
           </a:p>
         </p:txBody>
       </p:sp>
+      <p:grpSp>
+        <p:nvGrpSpPr>
+          <p:cNvPr id="14" name="Group 13"/>
+          <p:cNvGrpSpPr/>
+          <p:nvPr/>
+        </p:nvGrpSpPr>
+        <p:grpSpPr>
+          <a:xfrm>
+            <a:off x="5254637" y="3581297"/>
+            <a:ext cx="1647958" cy="2044866"/>
+            <a:chOff x="5254637" y="3581297"/>
+            <a:chExt cx="1647958" cy="2044866"/>
+          </a:xfrm>
+        </p:grpSpPr>
+        <p:cxnSp>
+          <p:nvCxnSpPr>
+            <p:cNvPr id="12" name="Connector 11"/>
+            <p:cNvCxnSpPr>
+              <a:stCxn id="4" idx="0"/>
+              <a:endCxn id="5" idx="2"/>
+            </p:cNvCxnSpPr>
+            <p:nvPr/>
+          </p:nvCxnSpPr>
+          <p:spPr>
+            <a:xfrm flipV="1">
+              <a:off x="5254637" y="3581297"/>
+              <a:ext cx="1647958" cy="2044866"/>
+            </a:xfrm>
+            <a:prstGeom prst="line">
+              <a:avLst/>
+            </a:prstGeom>
+            <a:ln>
+              <a:headEnd type="arrow" w="med" len="med"/>
+            </a:ln>
+          </p:spPr>
+          <p:style>
+            <a:lnRef idx="2">
+              <a:schemeClr val="accent1"/>
+            </a:lnRef>
+            <a:fillRef idx="0">
+              <a:schemeClr val="accent1"/>
+            </a:fillRef>
+            <a:effectRef idx="1">
+              <a:schemeClr val="accent1"/>
+            </a:effectRef>
+            <a:fontRef idx="minor">
+              <a:schemeClr val="tx1"/>
+            </a:fontRef>
+          </p:style>
+        </p:cxnSp>
+        <p:sp>
+          <p:nvSpPr>
+            <p:cNvPr id="13" name="TextBox 12"/>
+            <p:cNvSpPr txBox="1"/>
+            <p:nvPr/>
+          </p:nvSpPr>
+          <p:spPr>
+            <a:xfrm>
+              <a:off x="5628616" y="4443730"/>
+              <a:ext cx="900000" cy="320000"/>
+            </a:xfrm>
+            <a:prstGeom prst="rect">
+              <a:avLst/>
+            </a:prstGeom>
+            <a:noFill/>
+          </p:spPr>
+          <p:txBody>
+            <a:bodyPr wrap="none">
+              <a:spAutoFit/>
+            </a:bodyPr>
+            <a:lstStyle/>
+            <a:p>
+              <a:r>
+                <a:rPr sz="1000"/>
+                <a:t>通常矢印</a:t>
+              </a:r>
+            </a:p>
+          </p:txBody>
+        </p:sp>
+      </p:grpSp>
+      <p:grpSp>
+        <p:nvGrpSpPr>
+          <p:cNvPr id="17" name="Group 16"/>
+          <p:cNvGrpSpPr/>
+          <p:nvPr/>
+        </p:nvGrpSpPr>
+        <p:grpSpPr>
+          <a:xfrm>
+            <a:off x="1056737" y="2631612"/>
+            <a:ext cx="6445858" cy="699685"/>
+            <a:chOff x="1056737" y="2631612"/>
+            <a:chExt cx="6445858" cy="699685"/>
+          </a:xfrm>
+        </p:grpSpPr>
+        <p:cxnSp>
+          <p:nvCxnSpPr>
+            <p:cNvPr id="15" name="Connector 14"/>
+            <p:cNvCxnSpPr>
+              <a:stCxn id="5" idx="3"/>
+              <a:endCxn id="6" idx="1"/>
+            </p:cNvCxnSpPr>
+            <p:nvPr/>
+          </p:nvCxnSpPr>
+          <p:spPr>
+            <a:xfrm flipH="1" flipV="1">
+              <a:off x="1056737" y="2631612"/>
+              <a:ext cx="6445858" cy="699685"/>
+            </a:xfrm>
+            <a:prstGeom prst="line">
+              <a:avLst/>
+            </a:prstGeom>
+            <a:ln>
+              <a:prstDash val="dash"/>
+              <a:headEnd type="arrow" w="med" len="med"/>
+            </a:ln>
+          </p:spPr>
+          <p:style>
+            <a:lnRef idx="2">
+              <a:schemeClr val="accent1"/>
+            </a:lnRef>
+            <a:fillRef idx="0">
+              <a:schemeClr val="accent1"/>
+            </a:fillRef>
+            <a:effectRef idx="1">
+              <a:schemeClr val="accent1"/>
+            </a:effectRef>
+            <a:fontRef idx="minor">
+              <a:schemeClr val="tx1"/>
+            </a:fontRef>
+          </p:style>
+        </p:cxnSp>
+        <p:sp>
+          <p:nvSpPr>
+            <p:cNvPr id="16" name="TextBox 15"/>
+            <p:cNvSpPr txBox="1"/>
+            <p:nvPr/>
+          </p:nvSpPr>
+          <p:spPr>
+            <a:xfrm>
+              <a:off x="3829666" y="2821454"/>
+              <a:ext cx="900000" cy="320000"/>
+            </a:xfrm>
+            <a:prstGeom prst="rect">
+              <a:avLst/>
+            </a:prstGeom>
+            <a:noFill/>
+          </p:spPr>
+          <p:txBody>
+            <a:bodyPr wrap="none">
+              <a:spAutoFit/>
+            </a:bodyPr>
+            <a:lstStyle/>
+            <a:p>
+              <a:r>
+                <a:rPr sz="1000"/>
+                <a:t>点線矢印</a:t>
+              </a:r>
+            </a:p>
+          </p:txBody>
+        </p:sp>
+      </p:grpSp>
+      <p:grpSp>
+        <p:nvGrpSpPr>
+          <p:cNvPr id="20" name="Group 19"/>
+          <p:cNvGrpSpPr/>
+          <p:nvPr/>
+        </p:nvGrpSpPr>
+        <p:grpSpPr>
+          <a:xfrm>
+            <a:off x="1110923" y="2881612"/>
+            <a:ext cx="900000" cy="1439586"/>
+            <a:chOff x="1110923" y="2881612"/>
+            <a:chExt cx="900000" cy="1439586"/>
+          </a:xfrm>
+        </p:grpSpPr>
+        <p:cxnSp>
+          <p:nvCxnSpPr>
+            <p:cNvPr id="18" name="Connector 17"/>
+            <p:cNvCxnSpPr>
+              <a:stCxn id="6" idx="2"/>
+              <a:endCxn id="7" idx="0"/>
+            </p:cNvCxnSpPr>
+            <p:nvPr/>
+          </p:nvCxnSpPr>
+          <p:spPr>
+            <a:xfrm flipH="1">
+              <a:off x="1465109" y="2881612"/>
+              <a:ext cx="191628" cy="1439586"/>
+            </a:xfrm>
+            <a:prstGeom prst="line">
+              <a:avLst/>
+            </a:prstGeom>
+            <a:ln w="38100">
+              <a:headEnd type="arrow" w="med" len="med"/>
+            </a:ln>
+          </p:spPr>
+          <p:style>
+            <a:lnRef idx="2">
+              <a:schemeClr val="accent1"/>
+            </a:lnRef>
+            <a:fillRef idx="0">
+              <a:schemeClr val="accent1"/>
+            </a:fillRef>
+            <a:effectRef idx="1">
+              <a:schemeClr val="accent1"/>
+            </a:effectRef>
+            <a:fontRef idx="minor">
+              <a:schemeClr val="tx1"/>
+            </a:fontRef>
+          </p:style>
+        </p:cxnSp>
+        <p:sp>
+          <p:nvSpPr>
+            <p:cNvPr id="19" name="TextBox 18"/>
+            <p:cNvSpPr txBox="1"/>
+            <p:nvPr/>
+          </p:nvSpPr>
+          <p:spPr>
+            <a:xfrm>
+              <a:off x="1110923" y="3441405"/>
+              <a:ext cx="900000" cy="320000"/>
+            </a:xfrm>
+            <a:prstGeom prst="rect">
+              <a:avLst/>
+            </a:prstGeom>
+            <a:noFill/>
+          </p:spPr>
+          <p:txBody>
+            <a:bodyPr wrap="none">
+              <a:spAutoFit/>
+            </a:bodyPr>
+            <a:lstStyle/>
+            <a:p>
+              <a:r>
+                <a:rPr sz="1000"/>
+                <a:t>太線矢印</a:t>
+              </a:r>
+            </a:p>
+          </p:txBody>
+        </p:sp>
+      </p:grpSp>
       <p:cxnSp>
         <p:nvCxnSpPr>
-          <p:cNvPr id="12" name="Connector 11"/>
+          <p:cNvPr id="21" name="Connector 20"/>
           <p:cNvCxnSpPr>
-            <a:stCxn id="4" idx="0"/>
-            <a:endCxn id="5" idx="2"/>
+            <a:stCxn id="7" idx="1"/>
+            <a:endCxn id="8" idx="3"/>
           </p:cNvCxnSpPr>
           <p:nvPr/>
         </p:nvCxnSpPr>
         <p:spPr>
-          <a:xfrm flipV="1">
-            <a:off x="4280327" y="5511807"/>
-            <a:ext cx="437348" cy="114356"/>
-          </a:xfrm>
-          <a:prstGeom prst="line">
-            <a:avLst/>
-          </a:prstGeom>
-          <a:ln>
-            <a:headEnd type="arrow" w="med" len="med"/>
-          </a:ln>
-        </p:spPr>
-        <p:style>
-          <a:lnRef idx="2">
-            <a:schemeClr val="accent1"/>
-          </a:lnRef>
-          <a:fillRef idx="0">
-            <a:schemeClr val="accent1"/>
-          </a:fillRef>
-          <a:effectRef idx="1">
-            <a:schemeClr val="accent1"/>
-          </a:effectRef>
-          <a:fontRef idx="minor">
-            <a:schemeClr val="tx1"/>
-          </a:fontRef>
-        </p:style>
-      </p:cxnSp>
-      <p:sp>
-        <p:nvSpPr>
-          <p:cNvPr id="13" name="TextBox 12"/>
-          <p:cNvSpPr txBox="1"/>
-          <p:nvPr/>
-        </p:nvSpPr>
-        <p:spPr>
           <a:xfrm>
-            <a:off x="4049001" y="5408985"/>
-            <a:ext cx="900000" cy="320000"/>
-          </a:xfrm>
-          <a:prstGeom prst="rect">
-            <a:avLst/>
-          </a:prstGeom>
-          <a:noFill/>
-        </p:spPr>
-        <p:txBody>
-          <a:bodyPr wrap="none">
-            <a:spAutoFit/>
-          </a:bodyPr>
-          <a:lstStyle/>
-          <a:p>
-            <a:r>
-              <a:rPr sz="1000"/>
-              <a:t>通常矢印</a:t>
-            </a:r>
-          </a:p>
-        </p:txBody>
-      </p:sp>
-      <p:cxnSp>
-        <p:nvCxnSpPr>
-          <p:cNvPr id="14" name="Connector 13"/>
-          <p:cNvCxnSpPr>
-            <a:stCxn id="5" idx="1"/>
-            <a:endCxn id="6" idx="3"/>
-          </p:cNvCxnSpPr>
-          <p:nvPr/>
-        </p:nvCxnSpPr>
-        <p:spPr>
-          <a:xfrm flipV="1">
-            <a:off x="4117675" y="5005047"/>
-            <a:ext cx="2707548" cy="256760"/>
-          </a:xfrm>
-          <a:prstGeom prst="line">
-            <a:avLst/>
-          </a:prstGeom>
-          <a:ln>
-            <a:prstDash val="dash"/>
-            <a:headEnd type="arrow" w="med" len="med"/>
-          </a:ln>
-        </p:spPr>
-        <p:style>
-          <a:lnRef idx="2">
-            <a:schemeClr val="accent1"/>
-          </a:lnRef>
-          <a:fillRef idx="0">
-            <a:schemeClr val="accent1"/>
-          </a:fillRef>
-          <a:effectRef idx="1">
-            <a:schemeClr val="accent1"/>
-          </a:effectRef>
-          <a:fontRef idx="minor">
-            <a:schemeClr val="tx1"/>
-          </a:fontRef>
-        </p:style>
-      </p:cxnSp>
-      <p:sp>
-        <p:nvSpPr>
-          <p:cNvPr id="15" name="TextBox 14"/>
-          <p:cNvSpPr txBox="1"/>
-          <p:nvPr/>
-        </p:nvSpPr>
-        <p:spPr>
-          <a:xfrm>
-            <a:off x="5021449" y="4973427"/>
-            <a:ext cx="900000" cy="320000"/>
-          </a:xfrm>
-          <a:prstGeom prst="rect">
-            <a:avLst/>
-          </a:prstGeom>
-          <a:noFill/>
-        </p:spPr>
-        <p:txBody>
-          <a:bodyPr wrap="none">
-            <a:spAutoFit/>
-          </a:bodyPr>
-          <a:lstStyle/>
-          <a:p>
-            <a:r>
-              <a:rPr sz="1000"/>
-              <a:t>点線矢印</a:t>
-            </a:r>
-          </a:p>
-        </p:txBody>
-      </p:sp>
-      <p:cxnSp>
-        <p:nvCxnSpPr>
-          <p:cNvPr id="16" name="Connector 15"/>
-          <p:cNvCxnSpPr>
-            <a:stCxn id="6" idx="0"/>
-            <a:endCxn id="7" idx="2"/>
-          </p:cNvCxnSpPr>
-          <p:nvPr/>
-        </p:nvCxnSpPr>
-        <p:spPr>
-          <a:xfrm flipV="1">
-            <a:off x="6225223" y="4316905"/>
-            <a:ext cx="292837" cy="438142"/>
-          </a:xfrm>
-          <a:prstGeom prst="line">
-            <a:avLst/>
-          </a:prstGeom>
-          <a:ln w="38100">
-            <a:headEnd type="arrow" w="med" len="med"/>
-          </a:ln>
-        </p:spPr>
-        <p:style>
-          <a:lnRef idx="2">
-            <a:schemeClr val="accent1"/>
-          </a:lnRef>
-          <a:fillRef idx="0">
-            <a:schemeClr val="accent1"/>
-          </a:fillRef>
-          <a:effectRef idx="1">
-            <a:schemeClr val="accent1"/>
-          </a:effectRef>
-          <a:fontRef idx="minor">
-            <a:schemeClr val="tx1"/>
-          </a:fontRef>
-        </p:style>
-      </p:cxnSp>
-      <p:sp>
-        <p:nvSpPr>
-          <p:cNvPr id="17" name="TextBox 16"/>
-          <p:cNvSpPr txBox="1"/>
-          <p:nvPr/>
-        </p:nvSpPr>
-        <p:spPr>
-          <a:xfrm>
-            <a:off x="5921641" y="4375976"/>
-            <a:ext cx="900000" cy="320000"/>
-          </a:xfrm>
-          <a:prstGeom prst="rect">
-            <a:avLst/>
-          </a:prstGeom>
-          <a:noFill/>
-        </p:spPr>
-        <p:txBody>
-          <a:bodyPr wrap="none">
-            <a:spAutoFit/>
-          </a:bodyPr>
-          <a:lstStyle/>
-          <a:p>
-            <a:r>
-              <a:rPr sz="1000"/>
-              <a:t>太線矢印</a:t>
-            </a:r>
-          </a:p>
-        </p:txBody>
-      </p:sp>
-      <p:cxnSp>
-        <p:nvCxnSpPr>
-          <p:cNvPr id="18" name="Connector 17"/>
-          <p:cNvCxnSpPr>
-            <a:stCxn id="7" idx="0"/>
-            <a:endCxn id="8" idx="2"/>
-          </p:cNvCxnSpPr>
-          <p:nvPr/>
-        </p:nvCxnSpPr>
-        <p:spPr>
-          <a:xfrm flipH="1" flipV="1">
-            <a:off x="5615561" y="3380833"/>
-            <a:ext cx="902499" cy="436072"/>
+            <a:off x="865109" y="4571198"/>
+            <a:ext cx="6501799" cy="760738"/>
           </a:xfrm>
           <a:prstGeom prst="line">
             <a:avLst/>
@@ -5949,7 +5994,7 @@
       </p:cxnSp>
       <p:cxnSp>
         <p:nvCxnSpPr>
-          <p:cNvPr id="19" name="Connector 18"/>
+          <p:cNvPr id="22" name="Connector 21"/>
           <p:cNvCxnSpPr>
             <a:stCxn id="8" idx="3"/>
             <a:endCxn id="9" idx="1"/>
@@ -5958,8 +6003,8 @@
         </p:nvCxnSpPr>
         <p:spPr>
           <a:xfrm flipH="1" flipV="1">
-            <a:off x="3761027" y="2858975"/>
-            <a:ext cx="2454534" cy="271858"/>
+            <a:off x="2707608" y="4891865"/>
+            <a:ext cx="4659300" cy="440071"/>
           </a:xfrm>
           <a:prstGeom prst="line">
             <a:avLst/>
@@ -5983,75 +6028,90 @@
           </a:fontRef>
         </p:style>
       </p:cxnSp>
+      <p:grpSp>
+        <p:nvGrpSpPr>
+          <p:cNvPr id="25" name="Group 24"/>
+          <p:cNvGrpSpPr/>
+          <p:nvPr/>
+        </p:nvGrpSpPr>
+        <p:grpSpPr>
+          <a:xfrm>
+            <a:off x="3307608" y="2512188"/>
+            <a:ext cx="3598935" cy="2129677"/>
+            <a:chOff x="3307608" y="2512188"/>
+            <a:chExt cx="3598935" cy="2129677"/>
+          </a:xfrm>
+        </p:grpSpPr>
+        <p:cxnSp>
+          <p:nvCxnSpPr>
+            <p:cNvPr id="23" name="Connector 22"/>
+            <p:cNvCxnSpPr>
+              <a:stCxn id="9" idx="0"/>
+              <a:endCxn id="10" idx="2"/>
+            </p:cNvCxnSpPr>
+            <p:nvPr/>
+          </p:nvCxnSpPr>
+          <p:spPr>
+            <a:xfrm flipV="1">
+              <a:off x="3307608" y="2512188"/>
+              <a:ext cx="3598935" cy="2129677"/>
+            </a:xfrm>
+            <a:prstGeom prst="line">
+              <a:avLst/>
+            </a:prstGeom>
+            <a:ln>
+              <a:headEnd type="arrow" w="med" len="med"/>
+              <a:tailEnd type="arrow" w="med" len="med"/>
+            </a:ln>
+          </p:spPr>
+          <p:style>
+            <a:lnRef idx="2">
+              <a:schemeClr val="accent1"/>
+            </a:lnRef>
+            <a:fillRef idx="0">
+              <a:schemeClr val="accent1"/>
+            </a:fillRef>
+            <a:effectRef idx="1">
+              <a:schemeClr val="accent1"/>
+            </a:effectRef>
+            <a:fontRef idx="minor">
+              <a:schemeClr val="tx1"/>
+            </a:fontRef>
+          </p:style>
+        </p:cxnSp>
+        <p:sp>
+          <p:nvSpPr>
+            <p:cNvPr id="24" name="TextBox 23"/>
+            <p:cNvSpPr txBox="1"/>
+            <p:nvPr/>
+          </p:nvSpPr>
+          <p:spPr>
+            <a:xfrm>
+              <a:off x="4657075" y="3417026"/>
+              <a:ext cx="900000" cy="320000"/>
+            </a:xfrm>
+            <a:prstGeom prst="rect">
+              <a:avLst/>
+            </a:prstGeom>
+            <a:noFill/>
+          </p:spPr>
+          <p:txBody>
+            <a:bodyPr wrap="none">
+              <a:spAutoFit/>
+            </a:bodyPr>
+            <a:lstStyle/>
+            <a:p>
+              <a:r>
+                <a:rPr sz="1000"/>
+                <a:t>両方向</a:t>
+              </a:r>
+            </a:p>
+          </p:txBody>
+        </p:sp>
+      </p:grpSp>
       <p:cxnSp>
         <p:nvCxnSpPr>
-          <p:cNvPr id="20" name="Connector 19"/>
-          <p:cNvCxnSpPr>
-            <a:stCxn id="9" idx="3"/>
-            <a:endCxn id="10" idx="1"/>
-          </p:cNvCxnSpPr>
-          <p:nvPr/>
-        </p:nvCxnSpPr>
-        <p:spPr>
-          <a:xfrm flipH="1" flipV="1">
-            <a:off x="2440670" y="2287778"/>
-            <a:ext cx="2520357" cy="571197"/>
-          </a:xfrm>
-          <a:prstGeom prst="line">
-            <a:avLst/>
-          </a:prstGeom>
-          <a:ln>
-            <a:headEnd type="arrow" w="med" len="med"/>
-            <a:tailEnd type="arrow" w="med" len="med"/>
-          </a:ln>
-        </p:spPr>
-        <p:style>
-          <a:lnRef idx="2">
-            <a:schemeClr val="accent1"/>
-          </a:lnRef>
-          <a:fillRef idx="0">
-            <a:schemeClr val="accent1"/>
-          </a:fillRef>
-          <a:effectRef idx="1">
-            <a:schemeClr val="accent1"/>
-          </a:effectRef>
-          <a:fontRef idx="minor">
-            <a:schemeClr val="tx1"/>
-          </a:fontRef>
-        </p:style>
-      </p:cxnSp>
-      <p:sp>
-        <p:nvSpPr>
-          <p:cNvPr id="21" name="TextBox 20"/>
-          <p:cNvSpPr txBox="1"/>
-          <p:nvPr/>
-        </p:nvSpPr>
-        <p:spPr>
-          <a:xfrm>
-            <a:off x="3250848" y="2413376"/>
-            <a:ext cx="900000" cy="320000"/>
-          </a:xfrm>
-          <a:prstGeom prst="rect">
-            <a:avLst/>
-          </a:prstGeom>
-          <a:noFill/>
-        </p:spPr>
-        <p:txBody>
-          <a:bodyPr wrap="none">
-            <a:spAutoFit/>
-          </a:bodyPr>
-          <a:lstStyle/>
-          <a:p>
-            <a:r>
-              <a:rPr sz="1000"/>
-              <a:t>両方向</a:t>
-            </a:r>
-          </a:p>
-        </p:txBody>
-      </p:sp>
-      <p:cxnSp>
-        <p:nvCxnSpPr>
-          <p:cNvPr id="22" name="Connector 21"/>
+          <p:cNvPr id="26" name="Connector 25"/>
           <p:cNvCxnSpPr>
             <a:stCxn id="10" idx="3"/>
             <a:endCxn id="11" idx="1"/>
@@ -6059,9 +6119,9 @@
           <p:nvPr/>
         </p:nvCxnSpPr>
         <p:spPr>
-          <a:xfrm flipH="1">
-            <a:off x="1217452" y="2287778"/>
-            <a:ext cx="2423218" cy="130162"/>
+          <a:xfrm flipH="1" flipV="1">
+            <a:off x="3715860" y="2009190"/>
+            <a:ext cx="3790683" cy="252998"/>
           </a:xfrm>
           <a:prstGeom prst="line">
             <a:avLst/>
@@ -6340,9 +6400,9 @@
         </p:nvGrpSpPr>
         <p:grpSpPr>
           <a:xfrm>
-            <a:off x="2646128" y="3712943"/>
+            <a:off x="457200" y="1600200"/>
             <a:ext cx="1700000" cy="1080000"/>
-            <a:chOff x="2646128" y="3712943"/>
+            <a:chOff x="457200" y="1600200"/>
             <a:chExt cx="1700000" cy="1080000"/>
           </a:xfrm>
         </p:grpSpPr>
@@ -6354,7 +6414,7 @@
           </p:nvSpPr>
           <p:spPr>
             <a:xfrm>
-              <a:off x="2646128" y="3712943"/>
+              <a:off x="457200" y="1600200"/>
               <a:ext cx="1700000" cy="440000"/>
             </a:xfrm>
             <a:prstGeom prst="rect">
@@ -6395,7 +6455,7 @@
           </p:nvSpPr>
           <p:spPr>
             <a:xfrm>
-              <a:off x="2646128" y="4152943"/>
+              <a:off x="457200" y="2040200"/>
               <a:ext cx="1700000" cy="320000"/>
             </a:xfrm>
             <a:prstGeom prst="rect">
@@ -6436,7 +6496,7 @@
           </p:nvSpPr>
           <p:spPr>
             <a:xfrm>
-              <a:off x="2646128" y="4472943"/>
+              <a:off x="457200" y="2360200"/>
               <a:ext cx="1700000" cy="320000"/>
             </a:xfrm>
             <a:prstGeom prst="rect">
@@ -6478,9 +6538,9 @@
         </p:nvGrpSpPr>
         <p:grpSpPr>
           <a:xfrm>
-            <a:off x="2412505" y="3517401"/>
+            <a:off x="3722000" y="1600200"/>
             <a:ext cx="1700000" cy="1080000"/>
-            <a:chOff x="2412505" y="3517401"/>
+            <a:chOff x="3722000" y="1600200"/>
             <a:chExt cx="1700000" cy="1080000"/>
           </a:xfrm>
         </p:grpSpPr>
@@ -6492,7 +6552,7 @@
           </p:nvSpPr>
           <p:spPr>
             <a:xfrm>
-              <a:off x="2412505" y="3517401"/>
+              <a:off x="3722000" y="1600200"/>
               <a:ext cx="1700000" cy="440000"/>
             </a:xfrm>
             <a:prstGeom prst="rect">
@@ -6533,7 +6593,7 @@
           </p:nvSpPr>
           <p:spPr>
             <a:xfrm>
-              <a:off x="2412505" y="3957401"/>
+              <a:off x="3722000" y="2040200"/>
               <a:ext cx="1700000" cy="320000"/>
             </a:xfrm>
             <a:prstGeom prst="rect">
@@ -6574,7 +6634,7 @@
           </p:nvSpPr>
           <p:spPr>
             <a:xfrm>
-              <a:off x="2412505" y="4277401"/>
+              <a:off x="3722000" y="2360200"/>
               <a:ext cx="1700000" cy="320000"/>
             </a:xfrm>
             <a:prstGeom prst="rect">
@@ -6616,9 +6676,9 @@
         </p:nvGrpSpPr>
         <p:grpSpPr>
           <a:xfrm>
-            <a:off x="2456119" y="2008198"/>
+            <a:off x="6986800" y="1600200"/>
             <a:ext cx="1700000" cy="1080000"/>
-            <a:chOff x="2456119" y="2008198"/>
+            <a:chOff x="6986800" y="1600200"/>
             <a:chExt cx="1700000" cy="1080000"/>
           </a:xfrm>
         </p:grpSpPr>
@@ -6630,7 +6690,7 @@
           </p:nvSpPr>
           <p:spPr>
             <a:xfrm>
-              <a:off x="2456119" y="2008198"/>
+              <a:off x="6986800" y="1600200"/>
               <a:ext cx="1700000" cy="440000"/>
             </a:xfrm>
             <a:prstGeom prst="rect">
@@ -6671,7 +6731,7 @@
           </p:nvSpPr>
           <p:spPr>
             <a:xfrm>
-              <a:off x="2456119" y="2448198"/>
+              <a:off x="6986800" y="2040200"/>
               <a:ext cx="1700000" cy="320000"/>
             </a:xfrm>
             <a:prstGeom prst="rect">
@@ -6712,7 +6772,7 @@
           </p:nvSpPr>
           <p:spPr>
             <a:xfrm>
-              <a:off x="2456119" y="2768198"/>
+              <a:off x="6986800" y="2360200"/>
               <a:ext cx="1700000" cy="320000"/>
             </a:xfrm>
             <a:prstGeom prst="rect">
@@ -6754,9 +6814,9 @@
         </p:nvGrpSpPr>
         <p:grpSpPr>
           <a:xfrm>
-            <a:off x="1193357" y="3805983"/>
+            <a:off x="457200" y="3323181"/>
             <a:ext cx="1700000" cy="1080000"/>
-            <a:chOff x="1193357" y="3805983"/>
+            <a:chOff x="457200" y="3323181"/>
             <a:chExt cx="1700000" cy="1080000"/>
           </a:xfrm>
         </p:grpSpPr>
@@ -6768,7 +6828,7 @@
           </p:nvSpPr>
           <p:spPr>
             <a:xfrm>
-              <a:off x="1193357" y="3805983"/>
+              <a:off x="457200" y="3323181"/>
               <a:ext cx="1700000" cy="440000"/>
             </a:xfrm>
             <a:prstGeom prst="rect">
@@ -6809,7 +6869,7 @@
           </p:nvSpPr>
           <p:spPr>
             <a:xfrm>
-              <a:off x="1193357" y="4245983"/>
+              <a:off x="457200" y="3763181"/>
               <a:ext cx="1700000" cy="320000"/>
             </a:xfrm>
             <a:prstGeom prst="rect">
@@ -6850,7 +6910,7 @@
           </p:nvSpPr>
           <p:spPr>
             <a:xfrm>
-              <a:off x="1193357" y="4565983"/>
+              <a:off x="457200" y="4083181"/>
               <a:ext cx="1700000" cy="320000"/>
             </a:xfrm>
             <a:prstGeom prst="rect">
@@ -6888,9 +6948,9 @@
         </p:nvGrpSpPr>
         <p:grpSpPr>
           <a:xfrm>
-            <a:off x="4888961" y="3071587"/>
+            <a:off x="3722000" y="3323181"/>
             <a:ext cx="1700000" cy="1080000"/>
-            <a:chOff x="4888961" y="3071587"/>
+            <a:chOff x="3722000" y="3323181"/>
             <a:chExt cx="1700000" cy="1080000"/>
           </a:xfrm>
         </p:grpSpPr>
@@ -6902,7 +6962,7 @@
           </p:nvSpPr>
           <p:spPr>
             <a:xfrm>
-              <a:off x="4888961" y="3071587"/>
+              <a:off x="3722000" y="3323181"/>
               <a:ext cx="1700000" cy="440000"/>
             </a:xfrm>
             <a:prstGeom prst="rect">
@@ -6943,7 +7003,7 @@
           </p:nvSpPr>
           <p:spPr>
             <a:xfrm>
-              <a:off x="4888961" y="3511587"/>
+              <a:off x="3722000" y="3763181"/>
               <a:ext cx="1700000" cy="320000"/>
             </a:xfrm>
             <a:prstGeom prst="rect">
@@ -6984,7 +7044,7 @@
           </p:nvSpPr>
           <p:spPr>
             <a:xfrm>
-              <a:off x="4888961" y="3831587"/>
+              <a:off x="3722000" y="4083181"/>
               <a:ext cx="1700000" cy="320000"/>
             </a:xfrm>
             <a:prstGeom prst="rect">
@@ -7026,9 +7086,9 @@
         </p:nvGrpSpPr>
         <p:grpSpPr>
           <a:xfrm>
-            <a:off x="2988896" y="4958861"/>
+            <a:off x="6986800" y="3323181"/>
             <a:ext cx="1700000" cy="1080000"/>
-            <a:chOff x="2988896" y="4958861"/>
+            <a:chOff x="6986800" y="3323181"/>
             <a:chExt cx="1700000" cy="1080000"/>
           </a:xfrm>
         </p:grpSpPr>
@@ -7040,7 +7100,7 @@
           </p:nvSpPr>
           <p:spPr>
             <a:xfrm>
-              <a:off x="2988896" y="4958861"/>
+              <a:off x="6986800" y="3323181"/>
               <a:ext cx="1700000" cy="440000"/>
             </a:xfrm>
             <a:prstGeom prst="rect">
@@ -7081,7 +7141,7 @@
           </p:nvSpPr>
           <p:spPr>
             <a:xfrm>
-              <a:off x="2988896" y="5398861"/>
+              <a:off x="6986800" y="3763181"/>
               <a:ext cx="1700000" cy="320000"/>
             </a:xfrm>
             <a:prstGeom prst="rect">
@@ -7118,7 +7178,7 @@
           </p:nvSpPr>
           <p:spPr>
             <a:xfrm>
-              <a:off x="2988896" y="5718861"/>
+              <a:off x="6986800" y="4083181"/>
               <a:ext cx="1700000" cy="320000"/>
             </a:xfrm>
             <a:prstGeom prst="rect">
@@ -7160,9 +7220,9 @@
         </p:nvGrpSpPr>
         <p:grpSpPr>
           <a:xfrm>
-            <a:off x="6986800" y="2728920"/>
+            <a:off x="457200" y="5046163"/>
             <a:ext cx="1700000" cy="1080000"/>
-            <a:chOff x="6986800" y="2728920"/>
+            <a:chOff x="457200" y="5046163"/>
             <a:chExt cx="1700000" cy="1080000"/>
           </a:xfrm>
         </p:grpSpPr>
@@ -7174,7 +7234,7 @@
           </p:nvSpPr>
           <p:spPr>
             <a:xfrm>
-              <a:off x="6986800" y="2728920"/>
+              <a:off x="457200" y="5046163"/>
               <a:ext cx="1700000" cy="440000"/>
             </a:xfrm>
             <a:prstGeom prst="rect">
@@ -7215,7 +7275,7 @@
           </p:nvSpPr>
           <p:spPr>
             <a:xfrm>
-              <a:off x="6986800" y="3168920"/>
+              <a:off x="457200" y="5486163"/>
               <a:ext cx="1700000" cy="320000"/>
             </a:xfrm>
             <a:prstGeom prst="rect">
@@ -7252,7 +7312,7 @@
           </p:nvSpPr>
           <p:spPr>
             <a:xfrm>
-              <a:off x="6986800" y="3488920"/>
+              <a:off x="457200" y="5806163"/>
               <a:ext cx="1700000" cy="320000"/>
             </a:xfrm>
             <a:prstGeom prst="rect">
@@ -7290,9 +7350,9 @@
         </p:nvGrpSpPr>
         <p:grpSpPr>
           <a:xfrm>
-            <a:off x="6203229" y="2781555"/>
+            <a:off x="3722000" y="5046163"/>
             <a:ext cx="1700000" cy="1080000"/>
-            <a:chOff x="6203229" y="2781555"/>
+            <a:chOff x="3722000" y="5046163"/>
             <a:chExt cx="1700000" cy="1080000"/>
           </a:xfrm>
         </p:grpSpPr>
@@ -7304,7 +7364,7 @@
           </p:nvSpPr>
           <p:spPr>
             <a:xfrm>
-              <a:off x="6203229" y="2781555"/>
+              <a:off x="3722000" y="5046163"/>
               <a:ext cx="1700000" cy="440000"/>
             </a:xfrm>
             <a:prstGeom prst="rect">
@@ -7345,7 +7405,7 @@
           </p:nvSpPr>
           <p:spPr>
             <a:xfrm>
-              <a:off x="6203229" y="3221555"/>
+              <a:off x="3722000" y="5486163"/>
               <a:ext cx="1700000" cy="320000"/>
             </a:xfrm>
             <a:prstGeom prst="rect">
@@ -7382,7 +7442,7 @@
           </p:nvSpPr>
           <p:spPr>
             <a:xfrm>
-              <a:off x="6203229" y="3541555"/>
+              <a:off x="3722000" y="5806163"/>
               <a:ext cx="1700000" cy="320000"/>
             </a:xfrm>
             <a:prstGeom prst="rect">
@@ -7416,15 +7476,15 @@
         <p:nvCxnSpPr>
           <p:cNvPr id="36" name="Connector 35"/>
           <p:cNvCxnSpPr>
-            <a:stCxn id="4" idx="0"/>
-            <a:endCxn id="8" idx="2"/>
+            <a:stCxn id="4" idx="1"/>
+            <a:endCxn id="8" idx="3"/>
           </p:cNvCxnSpPr>
           <p:nvPr/>
         </p:nvCxnSpPr>
         <p:spPr>
-          <a:xfrm flipH="1">
-            <a:off x="3262505" y="3712943"/>
-            <a:ext cx="233623" cy="244458"/>
+          <a:xfrm>
+            <a:off x="457200" y="1820200"/>
+            <a:ext cx="4964800" cy="0"/>
           </a:xfrm>
           <a:prstGeom prst="line">
             <a:avLst/>
@@ -7452,15 +7512,15 @@
         <p:nvCxnSpPr>
           <p:cNvPr id="37" name="Connector 36"/>
           <p:cNvCxnSpPr>
-            <a:stCxn id="8" idx="0"/>
-            <a:endCxn id="12" idx="2"/>
+            <a:stCxn id="8" idx="1"/>
+            <a:endCxn id="12" idx="3"/>
           </p:cNvCxnSpPr>
           <p:nvPr/>
         </p:nvCxnSpPr>
         <p:spPr>
-          <a:xfrm flipV="1">
-            <a:off x="3262505" y="2448198"/>
-            <a:ext cx="43614" cy="1069203"/>
+          <a:xfrm>
+            <a:off x="3722000" y="1820200"/>
+            <a:ext cx="4964800" cy="0"/>
           </a:xfrm>
           <a:prstGeom prst="line">
             <a:avLst/>
@@ -7495,8 +7555,8 @@
         </p:nvCxnSpPr>
         <p:spPr>
           <a:xfrm flipH="1">
-            <a:off x="1193357" y="3737401"/>
-            <a:ext cx="2919148" cy="288582"/>
+            <a:off x="457200" y="1820200"/>
+            <a:ext cx="4964800" cy="1722981"/>
           </a:xfrm>
           <a:prstGeom prst="line">
             <a:avLst/>
@@ -7524,15 +7584,15 @@
         <p:nvCxnSpPr>
           <p:cNvPr id="39" name="Connector 38"/>
           <p:cNvCxnSpPr>
-            <a:stCxn id="20" idx="3"/>
-            <a:endCxn id="8" idx="1"/>
+            <a:stCxn id="20" idx="0"/>
+            <a:endCxn id="8" idx="2"/>
           </p:cNvCxnSpPr>
           <p:nvPr/>
         </p:nvCxnSpPr>
         <p:spPr>
-          <a:xfrm flipH="1">
-            <a:off x="2412505" y="3291587"/>
-            <a:ext cx="4176456" cy="445814"/>
+          <a:xfrm flipV="1">
+            <a:off x="4572000" y="2040200"/>
+            <a:ext cx="0" cy="1282981"/>
           </a:xfrm>
           <a:prstGeom prst="line">
             <a:avLst/>
@@ -7560,15 +7620,15 @@
         <p:nvCxnSpPr>
           <p:cNvPr id="40" name="Connector 39"/>
           <p:cNvCxnSpPr>
-            <a:stCxn id="20" idx="1"/>
-            <a:endCxn id="32" idx="3"/>
+            <a:stCxn id="20" idx="2"/>
+            <a:endCxn id="32" idx="0"/>
           </p:cNvCxnSpPr>
           <p:nvPr/>
         </p:nvCxnSpPr>
         <p:spPr>
-          <a:xfrm flipV="1">
-            <a:off x="4888961" y="3001555"/>
-            <a:ext cx="3014268" cy="290032"/>
+          <a:xfrm>
+            <a:off x="4572000" y="3763181"/>
+            <a:ext cx="0" cy="1282982"/>
           </a:xfrm>
           <a:prstGeom prst="line">
             <a:avLst/>
@@ -7594,15 +7654,15 @@
         <p:nvCxnSpPr>
           <p:cNvPr id="41" name="Connector 40"/>
           <p:cNvCxnSpPr>
-            <a:stCxn id="20" idx="1"/>
-            <a:endCxn id="28" idx="3"/>
+            <a:stCxn id="20" idx="3"/>
+            <a:endCxn id="28" idx="1"/>
           </p:cNvCxnSpPr>
           <p:nvPr/>
         </p:nvCxnSpPr>
         <p:spPr>
-          <a:xfrm flipV="1">
-            <a:off x="4888961" y="2948920"/>
-            <a:ext cx="3797839" cy="342667"/>
+          <a:xfrm flipH="1">
+            <a:off x="457200" y="3543181"/>
+            <a:ext cx="4964800" cy="1722982"/>
           </a:xfrm>
           <a:prstGeom prst="line">
             <a:avLst/>
@@ -7631,15 +7691,15 @@
         <p:nvCxnSpPr>
           <p:cNvPr id="42" name="Connector 41"/>
           <p:cNvCxnSpPr>
-            <a:stCxn id="8" idx="2"/>
-            <a:endCxn id="24" idx="0"/>
+            <a:stCxn id="8" idx="1"/>
+            <a:endCxn id="24" idx="3"/>
           </p:cNvCxnSpPr>
           <p:nvPr/>
         </p:nvCxnSpPr>
         <p:spPr>
           <a:xfrm>
-            <a:off x="3262505" y="3957401"/>
-            <a:ext cx="576391" cy="1001460"/>
+            <a:off x="3722000" y="1820200"/>
+            <a:ext cx="4964800" cy="1722981"/>
           </a:xfrm>
           <a:prstGeom prst="line">
             <a:avLst/>
@@ -7668,15 +7728,15 @@
         <p:nvCxnSpPr>
           <p:cNvPr id="43" name="Connector 42"/>
           <p:cNvCxnSpPr>
-            <a:stCxn id="32" idx="1"/>
-            <a:endCxn id="28" idx="3"/>
+            <a:stCxn id="32" idx="3"/>
+            <a:endCxn id="28" idx="1"/>
           </p:cNvCxnSpPr>
           <p:nvPr/>
         </p:nvCxnSpPr>
         <p:spPr>
-          <a:xfrm flipV="1">
-            <a:off x="6203229" y="2948920"/>
-            <a:ext cx="2483571" cy="52635"/>
+          <a:xfrm flipH="1">
+            <a:off x="457200" y="5266163"/>
+            <a:ext cx="4964800" cy="0"/>
           </a:xfrm>
           <a:prstGeom prst="line">
             <a:avLst/>
@@ -7764,7 +7824,7 @@
         </p:nvSpPr>
         <p:spPr>
           <a:xfrm>
-            <a:off x="3907422" y="2095949"/>
+            <a:off x="5550039" y="4898532"/>
             <a:ext cx="1200000" cy="500000"/>
           </a:xfrm>
           <a:prstGeom prst="rect">
@@ -7804,7 +7864,7 @@
         </p:nvSpPr>
         <p:spPr>
           <a:xfrm>
-            <a:off x="3734954" y="3055006"/>
+            <a:off x="6151066" y="2071018"/>
             <a:ext cx="1200000" cy="500000"/>
           </a:xfrm>
           <a:prstGeom prst="rect">
@@ -7844,7 +7904,7 @@
         </p:nvSpPr>
         <p:spPr>
           <a:xfrm>
-            <a:off x="4229427" y="3649517"/>
+            <a:off x="3369305" y="2398426"/>
             <a:ext cx="1200000" cy="500000"/>
           </a:xfrm>
           <a:prstGeom prst="rect">
@@ -7884,7 +7944,7 @@
         </p:nvSpPr>
         <p:spPr>
           <a:xfrm>
-            <a:off x="3224463" y="4868892"/>
+            <a:off x="457200" y="3350921"/>
             <a:ext cx="1200000" cy="500000"/>
           </a:xfrm>
           <a:prstGeom prst="rect">
@@ -7924,7 +7984,7 @@
         </p:nvSpPr>
         <p:spPr>
           <a:xfrm>
-            <a:off x="4973140" y="2383560"/>
+            <a:off x="7128870" y="3846909"/>
             <a:ext cx="1200000" cy="500000"/>
           </a:xfrm>
           <a:prstGeom prst="rect">
@@ -7964,7 +8024,7 @@
         </p:nvSpPr>
         <p:spPr>
           <a:xfrm>
-            <a:off x="3762591" y="5626163"/>
+            <a:off x="1175518" y="5113280"/>
             <a:ext cx="1200000" cy="500000"/>
           </a:xfrm>
           <a:prstGeom prst="rect">
@@ -8000,15 +8060,15 @@
         <p:nvCxnSpPr>
           <p:cNvPr id="10" name="Connector 9"/>
           <p:cNvCxnSpPr>
-            <a:stCxn id="4" idx="2"/>
-            <a:endCxn id="5" idx="0"/>
+            <a:stCxn id="4" idx="0"/>
+            <a:endCxn id="5" idx="2"/>
           </p:cNvCxnSpPr>
           <p:nvPr/>
         </p:nvCxnSpPr>
         <p:spPr>
-          <a:xfrm flipH="1">
-            <a:off x="4334954" y="2595949"/>
-            <a:ext cx="172468" cy="459057"/>
+          <a:xfrm flipV="1">
+            <a:off x="6150039" y="2571018"/>
+            <a:ext cx="601027" cy="2327514"/>
           </a:xfrm>
           <a:prstGeom prst="line">
             <a:avLst/>
@@ -8033,15 +8093,15 @@
         <p:nvCxnSpPr>
           <p:cNvPr id="11" name="Connector 10"/>
           <p:cNvCxnSpPr>
-            <a:stCxn id="5" idx="2"/>
-            <a:endCxn id="6" idx="0"/>
+            <a:stCxn id="5" idx="3"/>
+            <a:endCxn id="6" idx="1"/>
           </p:cNvCxnSpPr>
           <p:nvPr/>
         </p:nvCxnSpPr>
         <p:spPr>
-          <a:xfrm>
-            <a:off x="4334954" y="3555006"/>
-            <a:ext cx="494473" cy="94511"/>
+          <a:xfrm flipH="1">
+            <a:off x="3369305" y="2321018"/>
+            <a:ext cx="3981761" cy="327408"/>
           </a:xfrm>
           <a:prstGeom prst="line">
             <a:avLst/>
@@ -8066,15 +8126,15 @@
         <p:nvCxnSpPr>
           <p:cNvPr id="12" name="Connector 11"/>
           <p:cNvCxnSpPr>
-            <a:stCxn id="6" idx="2"/>
-            <a:endCxn id="7" idx="0"/>
+            <a:stCxn id="6" idx="3"/>
+            <a:endCxn id="7" idx="1"/>
           </p:cNvCxnSpPr>
           <p:nvPr/>
         </p:nvCxnSpPr>
         <p:spPr>
           <a:xfrm flipH="1">
-            <a:off x="3824463" y="4149517"/>
-            <a:ext cx="1004964" cy="719375"/>
+            <a:off x="457200" y="2648426"/>
+            <a:ext cx="4112105" cy="952495"/>
           </a:xfrm>
           <a:prstGeom prst="line">
             <a:avLst/>
@@ -8099,15 +8159,15 @@
         <p:nvCxnSpPr>
           <p:cNvPr id="13" name="Connector 12"/>
           <p:cNvCxnSpPr>
-            <a:stCxn id="6" idx="0"/>
-            <a:endCxn id="8" idx="2"/>
+            <a:stCxn id="6" idx="1"/>
+            <a:endCxn id="8" idx="3"/>
           </p:cNvCxnSpPr>
           <p:nvPr/>
         </p:nvCxnSpPr>
         <p:spPr>
-          <a:xfrm flipV="1">
-            <a:off x="4829427" y="2883560"/>
-            <a:ext cx="743713" cy="765957"/>
+          <a:xfrm>
+            <a:off x="3369305" y="2648426"/>
+            <a:ext cx="4959565" cy="1448483"/>
           </a:xfrm>
           <a:prstGeom prst="line">
             <a:avLst/>
@@ -8132,15 +8192,15 @@
         <p:nvCxnSpPr>
           <p:cNvPr id="14" name="Connector 13"/>
           <p:cNvCxnSpPr>
-            <a:stCxn id="8" idx="3"/>
-            <a:endCxn id="5" idx="1"/>
+            <a:stCxn id="8" idx="0"/>
+            <a:endCxn id="5" idx="2"/>
           </p:cNvCxnSpPr>
           <p:nvPr/>
         </p:nvCxnSpPr>
         <p:spPr>
-          <a:xfrm flipH="1">
-            <a:off x="3734954" y="2633560"/>
-            <a:ext cx="2438186" cy="671446"/>
+          <a:xfrm flipH="1" flipV="1">
+            <a:off x="6751066" y="2571018"/>
+            <a:ext cx="977804" cy="1275891"/>
           </a:xfrm>
           <a:prstGeom prst="line">
             <a:avLst/>
@@ -8172,8 +8232,8 @@
         </p:nvCxnSpPr>
         <p:spPr>
           <a:xfrm>
-            <a:off x="3824463" y="5368892"/>
-            <a:ext cx="538128" cy="257271"/>
+            <a:off x="1057200" y="3850921"/>
+            <a:ext cx="718318" cy="1262359"/>
           </a:xfrm>
           <a:prstGeom prst="line">
             <a:avLst/>
@@ -8258,7 +8318,7 @@
         </p:nvSpPr>
         <p:spPr>
           <a:xfrm>
-            <a:off x="7486800" y="5152460"/>
+            <a:off x="6425688" y="5513155"/>
             <a:ext cx="1200000" cy="500000"/>
           </a:xfrm>
           <a:prstGeom prst="rect">
@@ -8298,7 +8358,7 @@
         </p:nvSpPr>
         <p:spPr>
           <a:xfrm>
-            <a:off x="4933580" y="3310410"/>
+            <a:off x="6500578" y="2848046"/>
             <a:ext cx="1200000" cy="500000"/>
           </a:xfrm>
           <a:prstGeom prst="rect">
@@ -8338,7 +8398,7 @@
         </p:nvSpPr>
         <p:spPr>
           <a:xfrm>
-            <a:off x="2104438" y="1896087"/>
+            <a:off x="2504533" y="1957962"/>
             <a:ext cx="1200000" cy="500000"/>
           </a:xfrm>
           <a:prstGeom prst="rect">
@@ -8378,7 +8438,7 @@
         </p:nvSpPr>
         <p:spPr>
           <a:xfrm>
-            <a:off x="1363180" y="4093767"/>
+            <a:off x="457200" y="4133562"/>
             <a:ext cx="1200000" cy="500000"/>
           </a:xfrm>
           <a:prstGeom prst="rect">
@@ -8420,9 +8480,9 @@
           <p:nvPr/>
         </p:nvCxnSpPr>
         <p:spPr>
-          <a:xfrm flipH="1" flipV="1">
-            <a:off x="5533580" y="3810410"/>
-            <a:ext cx="2553220" cy="1342050"/>
+          <a:xfrm flipV="1">
+            <a:off x="7025688" y="3348046"/>
+            <a:ext cx="74890" cy="2165109"/>
           </a:xfrm>
           <a:prstGeom prst="line">
             <a:avLst/>
@@ -8454,8 +8514,8 @@
         </p:nvCxnSpPr>
         <p:spPr>
           <a:xfrm flipH="1" flipV="1">
-            <a:off x="2104438" y="2146087"/>
-            <a:ext cx="4029142" cy="1414323"/>
+            <a:off x="2504533" y="2207962"/>
+            <a:ext cx="5196045" cy="890084"/>
           </a:xfrm>
           <a:prstGeom prst="line">
             <a:avLst/>
@@ -8487,8 +8547,8 @@
         </p:nvCxnSpPr>
         <p:spPr>
           <a:xfrm flipV="1">
-            <a:off x="1963180" y="2396087"/>
-            <a:ext cx="741258" cy="1697680"/>
+            <a:off x="1057200" y="2457962"/>
+            <a:ext cx="2047333" cy="1675600"/>
           </a:xfrm>
           <a:prstGeom prst="line">
             <a:avLst/>
@@ -11076,7 +11136,7 @@
         </p:nvSpPr>
         <p:spPr>
           <a:xfrm>
-            <a:off x="7271770" y="4348813"/>
+            <a:off x="5501112" y="5626163"/>
             <a:ext cx="1200000" cy="500000"/>
           </a:xfrm>
           <a:prstGeom prst="rect">
@@ -11116,7 +11176,7 @@
         </p:nvSpPr>
         <p:spPr>
           <a:xfrm>
-            <a:off x="4187029" y="3581520"/>
+            <a:off x="5686332" y="2861204"/>
             <a:ext cx="1200000" cy="500000"/>
           </a:xfrm>
           <a:prstGeom prst="rect">
@@ -11156,7 +11216,7 @@
         </p:nvSpPr>
         <p:spPr>
           <a:xfrm>
-            <a:off x="457200" y="2909210"/>
+            <a:off x="728555" y="2352176"/>
             <a:ext cx="1200000" cy="500000"/>
           </a:xfrm>
           <a:prstGeom prst="rect">
@@ -11192,15 +11252,15 @@
         <p:nvCxnSpPr>
           <p:cNvPr id="7" name="Connector 6"/>
           <p:cNvCxnSpPr>
-            <a:stCxn id="4" idx="3"/>
-            <a:endCxn id="5" idx="1"/>
+            <a:stCxn id="4" idx="0"/>
+            <a:endCxn id="5" idx="2"/>
           </p:cNvCxnSpPr>
           <p:nvPr/>
         </p:nvCxnSpPr>
         <p:spPr>
-          <a:xfrm flipH="1" flipV="1">
-            <a:off x="4187029" y="3831520"/>
-            <a:ext cx="4284741" cy="767293"/>
+          <a:xfrm flipV="1">
+            <a:off x="6101112" y="3361204"/>
+            <a:ext cx="185220" cy="2264959"/>
           </a:xfrm>
           <a:prstGeom prst="line">
             <a:avLst/>
@@ -11235,8 +11295,8 @@
         </p:nvCxnSpPr>
         <p:spPr>
           <a:xfrm flipH="1" flipV="1">
-            <a:off x="457200" y="3159210"/>
-            <a:ext cx="4929829" cy="672310"/>
+            <a:off x="728555" y="2602176"/>
+            <a:ext cx="6157777" cy="509028"/>
           </a:xfrm>
           <a:prstGeom prst="line">
             <a:avLst/>

--- a/demo_full.pptx
+++ b/demo_full.pptx
@@ -4319,7 +4319,7 @@
         </p:nvSpPr>
         <p:spPr>
           <a:xfrm>
-            <a:off x="4482959" y="5626163"/>
+            <a:off x="457200" y="3613181"/>
             <a:ext cx="1200000" cy="500000"/>
           </a:xfrm>
           <a:prstGeom prst="rect">
@@ -4359,7 +4359,7 @@
         </p:nvSpPr>
         <p:spPr>
           <a:xfrm>
-            <a:off x="7338887" y="3410684"/>
+            <a:off x="997938" y="3613181"/>
             <a:ext cx="1200000" cy="500000"/>
           </a:xfrm>
           <a:prstGeom prst="roundRect">
@@ -4399,7 +4399,7 @@
         </p:nvSpPr>
         <p:spPr>
           <a:xfrm>
-            <a:off x="1565367" y="2153067"/>
+            <a:off x="1538676" y="3613181"/>
             <a:ext cx="1200000" cy="500000"/>
           </a:xfrm>
           <a:prstGeom prst="roundRect">
@@ -4439,7 +4439,7 @@
         </p:nvSpPr>
         <p:spPr>
           <a:xfrm>
-            <a:off x="1083465" y="4727491"/>
+            <a:off x="2079415" y="3613181"/>
             <a:ext cx="1200000" cy="500000"/>
           </a:xfrm>
           <a:prstGeom prst="rect">
@@ -4479,7 +4479,7 @@
         </p:nvSpPr>
         <p:spPr>
           <a:xfrm>
-            <a:off x="6742518" y="4748105"/>
+            <a:off x="2620153" y="3613181"/>
             <a:ext cx="1200000" cy="500000"/>
           </a:xfrm>
           <a:prstGeom prst="can">
@@ -4519,7 +4519,7 @@
         </p:nvSpPr>
         <p:spPr>
           <a:xfrm>
-            <a:off x="2463625" y="5449362"/>
+            <a:off x="3160892" y="3613181"/>
             <a:ext cx="1200000" cy="500000"/>
           </a:xfrm>
           <a:prstGeom prst="ellipse">
@@ -4559,7 +4559,7 @@
         </p:nvSpPr>
         <p:spPr>
           <a:xfrm>
-            <a:off x="7224696" y="2554157"/>
+            <a:off x="3701630" y="3613181"/>
             <a:ext cx="1200000" cy="500000"/>
           </a:xfrm>
           <a:prstGeom prst="homePlate">
@@ -4599,7 +4599,7 @@
         </p:nvSpPr>
         <p:spPr>
           <a:xfrm>
-            <a:off x="3105689" y="1791026"/>
+            <a:off x="4242369" y="3613181"/>
             <a:ext cx="1200000" cy="500000"/>
           </a:xfrm>
           <a:prstGeom prst="diamond">
@@ -4639,7 +4639,7 @@
         </p:nvSpPr>
         <p:spPr>
           <a:xfrm>
-            <a:off x="3507978" y="4363904"/>
+            <a:off x="4783107" y="3613181"/>
             <a:ext cx="1200000" cy="500000"/>
           </a:xfrm>
           <a:prstGeom prst="hexagon">
@@ -4679,7 +4679,7 @@
         </p:nvSpPr>
         <p:spPr>
           <a:xfrm>
-            <a:off x="4731819" y="1804525"/>
+            <a:off x="5323846" y="3613181"/>
             <a:ext cx="1200000" cy="500000"/>
           </a:xfrm>
           <a:prstGeom prst="parallelogram">
@@ -4719,7 +4719,7 @@
         </p:nvSpPr>
         <p:spPr>
           <a:xfrm flipH="1">
-            <a:off x="5922439" y="1885649"/>
+            <a:off x="5864584" y="3613181"/>
             <a:ext cx="1200000" cy="500000"/>
           </a:xfrm>
           <a:prstGeom prst="parallelogram">
@@ -4759,7 +4759,7 @@
         </p:nvSpPr>
         <p:spPr>
           <a:xfrm>
-            <a:off x="1136164" y="3071923"/>
+            <a:off x="6405323" y="3613181"/>
             <a:ext cx="1200000" cy="500000"/>
           </a:xfrm>
           <a:prstGeom prst="trapezoid">
@@ -4799,7 +4799,7 @@
         </p:nvSpPr>
         <p:spPr>
           <a:xfrm>
-            <a:off x="5512937" y="5318831"/>
+            <a:off x="6946061" y="3613181"/>
             <a:ext cx="1200000" cy="500000"/>
           </a:xfrm>
           <a:prstGeom prst="invertedTrapezoid">
@@ -4839,7 +4839,7 @@
         </p:nvSpPr>
         <p:spPr>
           <a:xfrm>
-            <a:off x="789451" y="3679647"/>
+            <a:off x="7486800" y="3613181"/>
             <a:ext cx="1200000" cy="500000"/>
           </a:xfrm>
           <a:prstGeom prst="ellipse">
@@ -4875,15 +4875,15 @@
         <p:nvCxnSpPr>
           <p:cNvPr id="18" name="Connector 17"/>
           <p:cNvCxnSpPr>
-            <a:stCxn id="4" idx="0"/>
-            <a:endCxn id="5" idx="2"/>
+            <a:stCxn id="4" idx="1"/>
+            <a:endCxn id="5" idx="3"/>
           </p:cNvCxnSpPr>
           <p:nvPr/>
         </p:nvCxnSpPr>
         <p:spPr>
-          <a:xfrm flipV="1">
-            <a:off x="5082959" y="3910684"/>
-            <a:ext cx="2855928" cy="1715479"/>
+          <a:xfrm>
+            <a:off x="457200" y="3863181"/>
+            <a:ext cx="1740738" cy="0"/>
           </a:xfrm>
           <a:prstGeom prst="line">
             <a:avLst/>
@@ -4911,15 +4911,15 @@
         <p:nvCxnSpPr>
           <p:cNvPr id="19" name="Connector 18"/>
           <p:cNvCxnSpPr>
-            <a:stCxn id="5" idx="3"/>
-            <a:endCxn id="6" idx="1"/>
+            <a:stCxn id="5" idx="1"/>
+            <a:endCxn id="6" idx="3"/>
           </p:cNvCxnSpPr>
           <p:nvPr/>
         </p:nvCxnSpPr>
         <p:spPr>
-          <a:xfrm flipH="1" flipV="1">
-            <a:off x="1565367" y="2403067"/>
-            <a:ext cx="6973520" cy="1257617"/>
+          <a:xfrm>
+            <a:off x="997938" y="3863181"/>
+            <a:ext cx="1740738" cy="0"/>
           </a:xfrm>
           <a:prstGeom prst="line">
             <a:avLst/>
@@ -4947,15 +4947,15 @@
         <p:nvCxnSpPr>
           <p:cNvPr id="20" name="Connector 19"/>
           <p:cNvCxnSpPr>
-            <a:stCxn id="6" idx="2"/>
-            <a:endCxn id="7" idx="0"/>
+            <a:stCxn id="6" idx="1"/>
+            <a:endCxn id="7" idx="3"/>
           </p:cNvCxnSpPr>
           <p:nvPr/>
         </p:nvCxnSpPr>
         <p:spPr>
-          <a:xfrm flipH="1">
-            <a:off x="1683465" y="2653067"/>
-            <a:ext cx="481902" cy="2074424"/>
+          <a:xfrm>
+            <a:off x="1538676" y="3863181"/>
+            <a:ext cx="1740739" cy="0"/>
           </a:xfrm>
           <a:prstGeom prst="line">
             <a:avLst/>
@@ -4990,8 +4990,8 @@
         </p:nvCxnSpPr>
         <p:spPr>
           <a:xfrm>
-            <a:off x="1083465" y="4977491"/>
-            <a:ext cx="6859053" cy="20614"/>
+            <a:off x="2079415" y="3863181"/>
+            <a:ext cx="1740738" cy="0"/>
           </a:xfrm>
           <a:prstGeom prst="line">
             <a:avLst/>
@@ -5019,15 +5019,15 @@
         <p:nvCxnSpPr>
           <p:cNvPr id="22" name="Connector 21"/>
           <p:cNvCxnSpPr>
-            <a:stCxn id="8" idx="3"/>
-            <a:endCxn id="9" idx="1"/>
+            <a:stCxn id="8" idx="1"/>
+            <a:endCxn id="9" idx="3"/>
           </p:cNvCxnSpPr>
           <p:nvPr/>
         </p:nvCxnSpPr>
         <p:spPr>
-          <a:xfrm flipH="1">
-            <a:off x="2463625" y="4998105"/>
-            <a:ext cx="5478893" cy="701257"/>
+          <a:xfrm>
+            <a:off x="2620153" y="3863181"/>
+            <a:ext cx="1740739" cy="0"/>
           </a:xfrm>
           <a:prstGeom prst="line">
             <a:avLst/>
@@ -5055,15 +5055,15 @@
         <p:nvCxnSpPr>
           <p:cNvPr id="23" name="Connector 22"/>
           <p:cNvCxnSpPr>
-            <a:stCxn id="9" idx="0"/>
-            <a:endCxn id="10" idx="2"/>
+            <a:stCxn id="9" idx="1"/>
+            <a:endCxn id="10" idx="3"/>
           </p:cNvCxnSpPr>
           <p:nvPr/>
         </p:nvCxnSpPr>
         <p:spPr>
-          <a:xfrm flipV="1">
-            <a:off x="3063625" y="3054157"/>
-            <a:ext cx="4761071" cy="2395205"/>
+          <a:xfrm>
+            <a:off x="3160892" y="3863181"/>
+            <a:ext cx="1740738" cy="0"/>
           </a:xfrm>
           <a:prstGeom prst="line">
             <a:avLst/>
@@ -5091,15 +5091,15 @@
         <p:nvCxnSpPr>
           <p:cNvPr id="24" name="Connector 23"/>
           <p:cNvCxnSpPr>
-            <a:stCxn id="10" idx="3"/>
-            <a:endCxn id="11" idx="1"/>
+            <a:stCxn id="10" idx="1"/>
+            <a:endCxn id="11" idx="3"/>
           </p:cNvCxnSpPr>
           <p:nvPr/>
         </p:nvCxnSpPr>
         <p:spPr>
-          <a:xfrm flipH="1" flipV="1">
-            <a:off x="3105689" y="2041026"/>
-            <a:ext cx="5319007" cy="763131"/>
+          <a:xfrm>
+            <a:off x="3701630" y="3863181"/>
+            <a:ext cx="1740739" cy="0"/>
           </a:xfrm>
           <a:prstGeom prst="line">
             <a:avLst/>
@@ -5127,15 +5127,15 @@
         <p:nvCxnSpPr>
           <p:cNvPr id="25" name="Connector 24"/>
           <p:cNvCxnSpPr>
-            <a:stCxn id="11" idx="2"/>
-            <a:endCxn id="12" idx="0"/>
+            <a:stCxn id="11" idx="1"/>
+            <a:endCxn id="12" idx="3"/>
           </p:cNvCxnSpPr>
           <p:nvPr/>
         </p:nvCxnSpPr>
         <p:spPr>
           <a:xfrm>
-            <a:off x="3705689" y="2291026"/>
-            <a:ext cx="402289" cy="2072878"/>
+            <a:off x="4242369" y="3863181"/>
+            <a:ext cx="1740738" cy="0"/>
           </a:xfrm>
           <a:prstGeom prst="line">
             <a:avLst/>
@@ -5163,15 +5163,15 @@
         <p:nvCxnSpPr>
           <p:cNvPr id="26" name="Connector 25"/>
           <p:cNvCxnSpPr>
-            <a:stCxn id="12" idx="0"/>
-            <a:endCxn id="13" idx="2"/>
+            <a:stCxn id="12" idx="1"/>
+            <a:endCxn id="13" idx="3"/>
           </p:cNvCxnSpPr>
           <p:nvPr/>
         </p:nvCxnSpPr>
         <p:spPr>
-          <a:xfrm flipV="1">
-            <a:off x="4107978" y="2304525"/>
-            <a:ext cx="1223841" cy="2059379"/>
+          <a:xfrm>
+            <a:off x="4783107" y="3863181"/>
+            <a:ext cx="1740739" cy="0"/>
           </a:xfrm>
           <a:prstGeom prst="line">
             <a:avLst/>
@@ -5206,8 +5206,8 @@
         </p:nvCxnSpPr>
         <p:spPr>
           <a:xfrm>
-            <a:off x="4731819" y="2054525"/>
-            <a:ext cx="2390620" cy="81124"/>
+            <a:off x="5323846" y="3863181"/>
+            <a:ext cx="1740738" cy="0"/>
           </a:xfrm>
           <a:prstGeom prst="line">
             <a:avLst/>
@@ -5235,15 +5235,15 @@
         <p:nvCxnSpPr>
           <p:cNvPr id="28" name="Connector 27"/>
           <p:cNvCxnSpPr>
-            <a:stCxn id="14" idx="3"/>
-            <a:endCxn id="15" idx="1"/>
+            <a:stCxn id="14" idx="1"/>
+            <a:endCxn id="15" idx="3"/>
           </p:cNvCxnSpPr>
           <p:nvPr/>
         </p:nvCxnSpPr>
         <p:spPr>
-          <a:xfrm flipH="1">
-            <a:off x="1136164" y="2135649"/>
-            <a:ext cx="5986275" cy="1186274"/>
+          <a:xfrm>
+            <a:off x="5864584" y="3863181"/>
+            <a:ext cx="1740739" cy="0"/>
           </a:xfrm>
           <a:prstGeom prst="line">
             <a:avLst/>
@@ -5278,8 +5278,8 @@
         </p:nvCxnSpPr>
         <p:spPr>
           <a:xfrm>
-            <a:off x="1136164" y="3321923"/>
-            <a:ext cx="5576773" cy="2246908"/>
+            <a:off x="6405323" y="3863181"/>
+            <a:ext cx="1740738" cy="0"/>
           </a:xfrm>
           <a:prstGeom prst="line">
             <a:avLst/>
@@ -5307,15 +5307,15 @@
         <p:nvCxnSpPr>
           <p:cNvPr id="30" name="Connector 29"/>
           <p:cNvCxnSpPr>
-            <a:stCxn id="16" idx="3"/>
-            <a:endCxn id="17" idx="1"/>
+            <a:stCxn id="16" idx="1"/>
+            <a:endCxn id="17" idx="3"/>
           </p:cNvCxnSpPr>
           <p:nvPr/>
         </p:nvCxnSpPr>
         <p:spPr>
-          <a:xfrm flipH="1" flipV="1">
-            <a:off x="789451" y="3929647"/>
-            <a:ext cx="5923486" cy="1639184"/>
+          <a:xfrm>
+            <a:off x="6946061" y="3863181"/>
+            <a:ext cx="1740739" cy="0"/>
           </a:xfrm>
           <a:prstGeom prst="line">
             <a:avLst/>
@@ -5403,7 +5403,7 @@
         </p:nvSpPr>
         <p:spPr>
           <a:xfrm>
-            <a:off x="4654637" y="5626163"/>
+            <a:off x="3972000" y="1600200"/>
             <a:ext cx="1200000" cy="500000"/>
           </a:xfrm>
           <a:prstGeom prst="roundRect">
@@ -5443,7 +5443,7 @@
         </p:nvSpPr>
         <p:spPr>
           <a:xfrm>
-            <a:off x="6302595" y="3081297"/>
+            <a:off x="3972000" y="2175337"/>
             <a:ext cx="1200000" cy="500000"/>
           </a:xfrm>
           <a:prstGeom prst="rect">
@@ -5483,7 +5483,7 @@
         </p:nvSpPr>
         <p:spPr>
           <a:xfrm>
-            <a:off x="1056737" y="2381612"/>
+            <a:off x="3972000" y="2750475"/>
             <a:ext cx="1200000" cy="500000"/>
           </a:xfrm>
           <a:prstGeom prst="rect">
@@ -5523,7 +5523,7 @@
         </p:nvSpPr>
         <p:spPr>
           <a:xfrm>
-            <a:off x="865109" y="4321198"/>
+            <a:off x="3972000" y="3325612"/>
             <a:ext cx="1200000" cy="500000"/>
           </a:xfrm>
           <a:prstGeom prst="rect">
@@ -5563,7 +5563,7 @@
         </p:nvSpPr>
         <p:spPr>
           <a:xfrm>
-            <a:off x="6166908" y="5081936"/>
+            <a:off x="3972000" y="3900750"/>
             <a:ext cx="1200000" cy="500000"/>
           </a:xfrm>
           <a:prstGeom prst="rect">
@@ -5603,7 +5603,7 @@
         </p:nvSpPr>
         <p:spPr>
           <a:xfrm>
-            <a:off x="2707608" y="4641865"/>
+            <a:off x="3972000" y="4475887"/>
             <a:ext cx="1200000" cy="500000"/>
           </a:xfrm>
           <a:prstGeom prst="rect">
@@ -5643,7 +5643,7 @@
         </p:nvSpPr>
         <p:spPr>
           <a:xfrm>
-            <a:off x="6306543" y="2012188"/>
+            <a:off x="3972000" y="5051025"/>
             <a:ext cx="1200000" cy="500000"/>
           </a:xfrm>
           <a:prstGeom prst="rect">
@@ -5683,7 +5683,7 @@
         </p:nvSpPr>
         <p:spPr>
           <a:xfrm>
-            <a:off x="3715860" y="1759190"/>
+            <a:off x="3972000" y="5626163"/>
             <a:ext cx="1200000" cy="500000"/>
           </a:xfrm>
           <a:prstGeom prst="roundRect">
@@ -5715,260 +5715,158 @@
           </a:p>
         </p:txBody>
       </p:sp>
-      <p:grpSp>
-        <p:nvGrpSpPr>
-          <p:cNvPr id="14" name="Group 13"/>
-          <p:cNvGrpSpPr/>
-          <p:nvPr/>
-        </p:nvGrpSpPr>
-        <p:grpSpPr>
-          <a:xfrm>
-            <a:off x="5254637" y="3581297"/>
-            <a:ext cx="1647958" cy="2044866"/>
-            <a:chOff x="5254637" y="3581297"/>
-            <a:chExt cx="1647958" cy="2044866"/>
-          </a:xfrm>
-        </p:grpSpPr>
-        <p:cxnSp>
-          <p:nvCxnSpPr>
-            <p:cNvPr id="12" name="Connector 11"/>
-            <p:cNvCxnSpPr>
-              <a:stCxn id="4" idx="0"/>
-              <a:endCxn id="5" idx="2"/>
-            </p:cNvCxnSpPr>
-            <p:nvPr/>
-          </p:nvCxnSpPr>
-          <p:spPr>
-            <a:xfrm flipV="1">
-              <a:off x="5254637" y="3581297"/>
-              <a:ext cx="1647958" cy="2044866"/>
-            </a:xfrm>
-            <a:prstGeom prst="line">
-              <a:avLst/>
-            </a:prstGeom>
-            <a:ln>
-              <a:headEnd type="arrow" w="med" len="med"/>
-            </a:ln>
-          </p:spPr>
-          <p:style>
-            <a:lnRef idx="2">
-              <a:schemeClr val="accent1"/>
-            </a:lnRef>
-            <a:fillRef idx="0">
-              <a:schemeClr val="accent1"/>
-            </a:fillRef>
-            <a:effectRef idx="1">
-              <a:schemeClr val="accent1"/>
-            </a:effectRef>
-            <a:fontRef idx="minor">
-              <a:schemeClr val="tx1"/>
-            </a:fontRef>
-          </p:style>
-        </p:cxnSp>
-        <p:sp>
-          <p:nvSpPr>
-            <p:cNvPr id="13" name="TextBox 12"/>
-            <p:cNvSpPr txBox="1"/>
-            <p:nvPr/>
-          </p:nvSpPr>
-          <p:spPr>
-            <a:xfrm>
-              <a:off x="5628616" y="4443730"/>
-              <a:ext cx="900000" cy="320000"/>
-            </a:xfrm>
-            <a:prstGeom prst="rect">
-              <a:avLst/>
-            </a:prstGeom>
-            <a:noFill/>
-          </p:spPr>
-          <p:txBody>
-            <a:bodyPr wrap="none">
-              <a:spAutoFit/>
-            </a:bodyPr>
-            <a:lstStyle/>
-            <a:p>
-              <a:r>
-                <a:rPr sz="1000"/>
-                <a:t>通常矢印</a:t>
-              </a:r>
-            </a:p>
-          </p:txBody>
-        </p:sp>
-      </p:grpSp>
-      <p:grpSp>
-        <p:nvGrpSpPr>
-          <p:cNvPr id="17" name="Group 16"/>
-          <p:cNvGrpSpPr/>
-          <p:nvPr/>
-        </p:nvGrpSpPr>
-        <p:grpSpPr>
-          <a:xfrm>
-            <a:off x="1056737" y="2631612"/>
-            <a:ext cx="6445858" cy="699685"/>
-            <a:chOff x="1056737" y="2631612"/>
-            <a:chExt cx="6445858" cy="699685"/>
-          </a:xfrm>
-        </p:grpSpPr>
-        <p:cxnSp>
-          <p:nvCxnSpPr>
-            <p:cNvPr id="15" name="Connector 14"/>
-            <p:cNvCxnSpPr>
-              <a:stCxn id="5" idx="3"/>
-              <a:endCxn id="6" idx="1"/>
-            </p:cNvCxnSpPr>
-            <p:nvPr/>
-          </p:nvCxnSpPr>
-          <p:spPr>
-            <a:xfrm flipH="1" flipV="1">
-              <a:off x="1056737" y="2631612"/>
-              <a:ext cx="6445858" cy="699685"/>
-            </a:xfrm>
-            <a:prstGeom prst="line">
-              <a:avLst/>
-            </a:prstGeom>
-            <a:ln>
-              <a:prstDash val="dash"/>
-              <a:headEnd type="arrow" w="med" len="med"/>
-            </a:ln>
-          </p:spPr>
-          <p:style>
-            <a:lnRef idx="2">
-              <a:schemeClr val="accent1"/>
-            </a:lnRef>
-            <a:fillRef idx="0">
-              <a:schemeClr val="accent1"/>
-            </a:fillRef>
-            <a:effectRef idx="1">
-              <a:schemeClr val="accent1"/>
-            </a:effectRef>
-            <a:fontRef idx="minor">
-              <a:schemeClr val="tx1"/>
-            </a:fontRef>
-          </p:style>
-        </p:cxnSp>
-        <p:sp>
-          <p:nvSpPr>
-            <p:cNvPr id="16" name="TextBox 15"/>
-            <p:cNvSpPr txBox="1"/>
-            <p:nvPr/>
-          </p:nvSpPr>
-          <p:spPr>
-            <a:xfrm>
-              <a:off x="3829666" y="2821454"/>
-              <a:ext cx="900000" cy="320000"/>
-            </a:xfrm>
-            <a:prstGeom prst="rect">
-              <a:avLst/>
-            </a:prstGeom>
-            <a:noFill/>
-          </p:spPr>
-          <p:txBody>
-            <a:bodyPr wrap="none">
-              <a:spAutoFit/>
-            </a:bodyPr>
-            <a:lstStyle/>
-            <a:p>
-              <a:r>
-                <a:rPr sz="1000"/>
-                <a:t>点線矢印</a:t>
-              </a:r>
-            </a:p>
-          </p:txBody>
-        </p:sp>
-      </p:grpSp>
-      <p:grpSp>
-        <p:nvGrpSpPr>
-          <p:cNvPr id="20" name="Group 19"/>
-          <p:cNvGrpSpPr/>
-          <p:nvPr/>
-        </p:nvGrpSpPr>
-        <p:grpSpPr>
-          <a:xfrm>
-            <a:off x="1110923" y="2881612"/>
-            <a:ext cx="900000" cy="1439586"/>
-            <a:chOff x="1110923" y="2881612"/>
-            <a:chExt cx="900000" cy="1439586"/>
-          </a:xfrm>
-        </p:grpSpPr>
-        <p:cxnSp>
-          <p:nvCxnSpPr>
-            <p:cNvPr id="18" name="Connector 17"/>
-            <p:cNvCxnSpPr>
-              <a:stCxn id="6" idx="2"/>
-              <a:endCxn id="7" idx="0"/>
-            </p:cNvCxnSpPr>
-            <p:nvPr/>
-          </p:nvCxnSpPr>
-          <p:spPr>
-            <a:xfrm flipH="1">
-              <a:off x="1465109" y="2881612"/>
-              <a:ext cx="191628" cy="1439586"/>
-            </a:xfrm>
-            <a:prstGeom prst="line">
-              <a:avLst/>
-            </a:prstGeom>
-            <a:ln w="38100">
-              <a:headEnd type="arrow" w="med" len="med"/>
-            </a:ln>
-          </p:spPr>
-          <p:style>
-            <a:lnRef idx="2">
-              <a:schemeClr val="accent1"/>
-            </a:lnRef>
-            <a:fillRef idx="0">
-              <a:schemeClr val="accent1"/>
-            </a:fillRef>
-            <a:effectRef idx="1">
-              <a:schemeClr val="accent1"/>
-            </a:effectRef>
-            <a:fontRef idx="minor">
-              <a:schemeClr val="tx1"/>
-            </a:fontRef>
-          </p:style>
-        </p:cxnSp>
-        <p:sp>
-          <p:nvSpPr>
-            <p:cNvPr id="19" name="TextBox 18"/>
-            <p:cNvSpPr txBox="1"/>
-            <p:nvPr/>
-          </p:nvSpPr>
-          <p:spPr>
-            <a:xfrm>
-              <a:off x="1110923" y="3441405"/>
-              <a:ext cx="900000" cy="320000"/>
-            </a:xfrm>
-            <a:prstGeom prst="rect">
-              <a:avLst/>
-            </a:prstGeom>
-            <a:noFill/>
-          </p:spPr>
-          <p:txBody>
-            <a:bodyPr wrap="none">
-              <a:spAutoFit/>
-            </a:bodyPr>
-            <a:lstStyle/>
-            <a:p>
-              <a:r>
-                <a:rPr sz="1000"/>
-                <a:t>太線矢印</a:t>
-              </a:r>
-            </a:p>
-          </p:txBody>
-        </p:sp>
-      </p:grpSp>
       <p:cxnSp>
         <p:nvCxnSpPr>
-          <p:cNvPr id="21" name="Connector 20"/>
+          <p:cNvPr id="12" name="Connector 11"/>
           <p:cNvCxnSpPr>
-            <a:stCxn id="7" idx="1"/>
-            <a:endCxn id="8" idx="3"/>
+            <a:stCxn id="4" idx="2"/>
+            <a:endCxn id="5" idx="0"/>
           </p:cNvCxnSpPr>
           <p:nvPr/>
         </p:nvCxnSpPr>
         <p:spPr>
           <a:xfrm>
-            <a:off x="865109" y="4571198"/>
-            <a:ext cx="6501799" cy="760738"/>
+            <a:off x="4572000" y="2100200"/>
+            <a:ext cx="0" cy="75137"/>
+          </a:xfrm>
+          <a:prstGeom prst="line">
+            <a:avLst/>
+          </a:prstGeom>
+          <a:ln>
+            <a:headEnd type="arrow" w="med" len="med"/>
+          </a:ln>
+        </p:spPr>
+        <p:style>
+          <a:lnRef idx="2">
+            <a:schemeClr val="accent1"/>
+          </a:lnRef>
+          <a:fillRef idx="0">
+            <a:schemeClr val="accent1"/>
+          </a:fillRef>
+          <a:effectRef idx="1">
+            <a:schemeClr val="accent1"/>
+          </a:effectRef>
+          <a:fontRef idx="minor">
+            <a:schemeClr val="tx1"/>
+          </a:fontRef>
+        </p:style>
+        <p:txBody>
+          <a:bodyPr anchor="ctr" wrap="square"/>
+          <a:lstStyle/>
+          <a:p>
+            <a:r>
+              <a:rPr dirty="0" sz="1000"/>
+              <a:t>通常矢印</a:t>
+            </a:r>
+          </a:p>
+        </p:txBody>
+      </p:cxnSp>
+      <p:cxnSp>
+        <p:nvCxnSpPr>
+          <p:cNvPr id="13" name="Connector 12"/>
+          <p:cNvCxnSpPr>
+            <a:stCxn id="5" idx="2"/>
+            <a:endCxn id="6" idx="0"/>
+          </p:cNvCxnSpPr>
+          <p:nvPr/>
+        </p:nvCxnSpPr>
+        <p:spPr>
+          <a:xfrm>
+            <a:off x="4572000" y="2675337"/>
+            <a:ext cx="0" cy="75138"/>
+          </a:xfrm>
+          <a:prstGeom prst="line">
+            <a:avLst/>
+          </a:prstGeom>
+          <a:ln>
+            <a:prstDash val="dash"/>
+            <a:headEnd type="arrow" w="med" len="med"/>
+          </a:ln>
+        </p:spPr>
+        <p:style>
+          <a:lnRef idx="2">
+            <a:schemeClr val="accent1"/>
+          </a:lnRef>
+          <a:fillRef idx="0">
+            <a:schemeClr val="accent1"/>
+          </a:fillRef>
+          <a:effectRef idx="1">
+            <a:schemeClr val="accent1"/>
+          </a:effectRef>
+          <a:fontRef idx="minor">
+            <a:schemeClr val="tx1"/>
+          </a:fontRef>
+        </p:style>
+        <p:txBody>
+          <a:bodyPr anchor="ctr" wrap="square"/>
+          <a:lstStyle/>
+          <a:p>
+            <a:r>
+              <a:rPr dirty="0" sz="1000"/>
+              <a:t>点線矢印</a:t>
+            </a:r>
+          </a:p>
+        </p:txBody>
+      </p:cxnSp>
+      <p:cxnSp>
+        <p:nvCxnSpPr>
+          <p:cNvPr id="14" name="Connector 13"/>
+          <p:cNvCxnSpPr>
+            <a:stCxn id="6" idx="2"/>
+            <a:endCxn id="7" idx="0"/>
+          </p:cNvCxnSpPr>
+          <p:nvPr/>
+        </p:nvCxnSpPr>
+        <p:spPr>
+          <a:xfrm>
+            <a:off x="4572000" y="3250475"/>
+            <a:ext cx="0" cy="75137"/>
+          </a:xfrm>
+          <a:prstGeom prst="line">
+            <a:avLst/>
+          </a:prstGeom>
+          <a:ln w="38100">
+            <a:headEnd type="arrow" w="med" len="med"/>
+          </a:ln>
+        </p:spPr>
+        <p:style>
+          <a:lnRef idx="2">
+            <a:schemeClr val="accent1"/>
+          </a:lnRef>
+          <a:fillRef idx="0">
+            <a:schemeClr val="accent1"/>
+          </a:fillRef>
+          <a:effectRef idx="1">
+            <a:schemeClr val="accent1"/>
+          </a:effectRef>
+          <a:fontRef idx="minor">
+            <a:schemeClr val="tx1"/>
+          </a:fontRef>
+        </p:style>
+        <p:txBody>
+          <a:bodyPr anchor="ctr" wrap="square"/>
+          <a:lstStyle/>
+          <a:p>
+            <a:r>
+              <a:rPr dirty="0" sz="1000"/>
+              <a:t>太線矢印</a:t>
+            </a:r>
+          </a:p>
+        </p:txBody>
+      </p:cxnSp>
+      <p:cxnSp>
+        <p:nvCxnSpPr>
+          <p:cNvPr id="15" name="Connector 14"/>
+          <p:cNvCxnSpPr>
+            <a:stCxn id="7" idx="2"/>
+            <a:endCxn id="8" idx="0"/>
+          </p:cNvCxnSpPr>
+          <p:nvPr/>
+        </p:nvCxnSpPr>
+        <p:spPr>
+          <a:xfrm>
+            <a:off x="4572000" y="3825612"/>
+            <a:ext cx="0" cy="75138"/>
           </a:xfrm>
           <a:prstGeom prst="line">
             <a:avLst/>
@@ -5994,17 +5892,17 @@
       </p:cxnSp>
       <p:cxnSp>
         <p:nvCxnSpPr>
-          <p:cNvPr id="22" name="Connector 21"/>
+          <p:cNvPr id="16" name="Connector 15"/>
           <p:cNvCxnSpPr>
-            <a:stCxn id="8" idx="3"/>
-            <a:endCxn id="9" idx="1"/>
+            <a:stCxn id="8" idx="2"/>
+            <a:endCxn id="9" idx="0"/>
           </p:cNvCxnSpPr>
           <p:nvPr/>
         </p:nvCxnSpPr>
         <p:spPr>
-          <a:xfrm flipH="1" flipV="1">
-            <a:off x="2707608" y="4891865"/>
-            <a:ext cx="4659300" cy="440071"/>
+          <a:xfrm>
+            <a:off x="4572000" y="4400750"/>
+            <a:ext cx="0" cy="75137"/>
           </a:xfrm>
           <a:prstGeom prst="line">
             <a:avLst/>
@@ -6028,100 +5926,66 @@
           </a:fontRef>
         </p:style>
       </p:cxnSp>
-      <p:grpSp>
-        <p:nvGrpSpPr>
-          <p:cNvPr id="25" name="Group 24"/>
-          <p:cNvGrpSpPr/>
-          <p:nvPr/>
-        </p:nvGrpSpPr>
-        <p:grpSpPr>
-          <a:xfrm>
-            <a:off x="3307608" y="2512188"/>
-            <a:ext cx="3598935" cy="2129677"/>
-            <a:chOff x="3307608" y="2512188"/>
-            <a:chExt cx="3598935" cy="2129677"/>
-          </a:xfrm>
-        </p:grpSpPr>
-        <p:cxnSp>
-          <p:nvCxnSpPr>
-            <p:cNvPr id="23" name="Connector 22"/>
-            <p:cNvCxnSpPr>
-              <a:stCxn id="9" idx="0"/>
-              <a:endCxn id="10" idx="2"/>
-            </p:cNvCxnSpPr>
-            <p:nvPr/>
-          </p:nvCxnSpPr>
-          <p:spPr>
-            <a:xfrm flipV="1">
-              <a:off x="3307608" y="2512188"/>
-              <a:ext cx="3598935" cy="2129677"/>
-            </a:xfrm>
-            <a:prstGeom prst="line">
-              <a:avLst/>
-            </a:prstGeom>
-            <a:ln>
-              <a:headEnd type="arrow" w="med" len="med"/>
-              <a:tailEnd type="arrow" w="med" len="med"/>
-            </a:ln>
-          </p:spPr>
-          <p:style>
-            <a:lnRef idx="2">
-              <a:schemeClr val="accent1"/>
-            </a:lnRef>
-            <a:fillRef idx="0">
-              <a:schemeClr val="accent1"/>
-            </a:fillRef>
-            <a:effectRef idx="1">
-              <a:schemeClr val="accent1"/>
-            </a:effectRef>
-            <a:fontRef idx="minor">
-              <a:schemeClr val="tx1"/>
-            </a:fontRef>
-          </p:style>
-        </p:cxnSp>
-        <p:sp>
-          <p:nvSpPr>
-            <p:cNvPr id="24" name="TextBox 23"/>
-            <p:cNvSpPr txBox="1"/>
-            <p:nvPr/>
-          </p:nvSpPr>
-          <p:spPr>
-            <a:xfrm>
-              <a:off x="4657075" y="3417026"/>
-              <a:ext cx="900000" cy="320000"/>
-            </a:xfrm>
-            <a:prstGeom prst="rect">
-              <a:avLst/>
-            </a:prstGeom>
-            <a:noFill/>
-          </p:spPr>
-          <p:txBody>
-            <a:bodyPr wrap="none">
-              <a:spAutoFit/>
-            </a:bodyPr>
-            <a:lstStyle/>
-            <a:p>
-              <a:r>
-                <a:rPr sz="1000"/>
-                <a:t>両方向</a:t>
-              </a:r>
-            </a:p>
-          </p:txBody>
-        </p:sp>
-      </p:grpSp>
       <p:cxnSp>
         <p:nvCxnSpPr>
-          <p:cNvPr id="26" name="Connector 25"/>
+          <p:cNvPr id="17" name="Connector 16"/>
           <p:cNvCxnSpPr>
-            <a:stCxn id="10" idx="3"/>
-            <a:endCxn id="11" idx="1"/>
+            <a:stCxn id="9" idx="2"/>
+            <a:endCxn id="10" idx="0"/>
           </p:cNvCxnSpPr>
           <p:nvPr/>
         </p:nvCxnSpPr>
         <p:spPr>
-          <a:xfrm flipH="1" flipV="1">
-            <a:off x="3715860" y="2009190"/>
-            <a:ext cx="3790683" cy="252998"/>
+          <a:xfrm>
+            <a:off x="4572000" y="4975887"/>
+            <a:ext cx="0" cy="75138"/>
+          </a:xfrm>
+          <a:prstGeom prst="line">
+            <a:avLst/>
+          </a:prstGeom>
+          <a:ln>
+            <a:headEnd type="arrow" w="med" len="med"/>
+            <a:tailEnd type="arrow" w="med" len="med"/>
+          </a:ln>
+        </p:spPr>
+        <p:style>
+          <a:lnRef idx="2">
+            <a:schemeClr val="accent1"/>
+          </a:lnRef>
+          <a:fillRef idx="0">
+            <a:schemeClr val="accent1"/>
+          </a:fillRef>
+          <a:effectRef idx="1">
+            <a:schemeClr val="accent1"/>
+          </a:effectRef>
+          <a:fontRef idx="minor">
+            <a:schemeClr val="tx1"/>
+          </a:fontRef>
+        </p:style>
+        <p:txBody>
+          <a:bodyPr anchor="ctr" wrap="square"/>
+          <a:lstStyle/>
+          <a:p>
+            <a:r>
+              <a:rPr dirty="0" sz="1000"/>
+              <a:t>両方向</a:t>
+            </a:r>
+          </a:p>
+        </p:txBody>
+      </p:cxnSp>
+      <p:cxnSp>
+        <p:nvCxnSpPr>
+          <p:cNvPr id="18" name="Connector 17"/>
+          <p:cNvCxnSpPr>
+            <a:stCxn id="10" idx="2"/>
+            <a:endCxn id="11" idx="0"/>
+          </p:cNvCxnSpPr>
+          <p:nvPr/>
+        </p:nvCxnSpPr>
+        <p:spPr>
+          <a:xfrm>
+            <a:off x="4572000" y="5551025"/>
+            <a:ext cx="0" cy="75138"/>
           </a:xfrm>
           <a:prstGeom prst="line">
             <a:avLst/>
@@ -11136,7 +11000,7 @@
         </p:nvSpPr>
         <p:spPr>
           <a:xfrm>
-            <a:off x="5501112" y="5626163"/>
+            <a:off x="457200" y="3613181"/>
             <a:ext cx="1200000" cy="500000"/>
           </a:xfrm>
           <a:prstGeom prst="rect">
@@ -11176,7 +11040,7 @@
         </p:nvSpPr>
         <p:spPr>
           <a:xfrm>
-            <a:off x="5686332" y="2861204"/>
+            <a:off x="3972000" y="3613181"/>
             <a:ext cx="1200000" cy="500000"/>
           </a:xfrm>
           <a:prstGeom prst="rect">
@@ -11216,7 +11080,7 @@
         </p:nvSpPr>
         <p:spPr>
           <a:xfrm>
-            <a:off x="728555" y="2352176"/>
+            <a:off x="7486800" y="3613181"/>
             <a:ext cx="1200000" cy="500000"/>
           </a:xfrm>
           <a:prstGeom prst="rect">
@@ -11252,15 +11116,15 @@
         <p:nvCxnSpPr>
           <p:cNvPr id="7" name="Connector 6"/>
           <p:cNvCxnSpPr>
-            <a:stCxn id="4" idx="0"/>
-            <a:endCxn id="5" idx="2"/>
+            <a:stCxn id="4" idx="1"/>
+            <a:endCxn id="5" idx="3"/>
           </p:cNvCxnSpPr>
           <p:nvPr/>
         </p:nvCxnSpPr>
         <p:spPr>
-          <a:xfrm flipV="1">
-            <a:off x="6101112" y="3361204"/>
-            <a:ext cx="185220" cy="2264959"/>
+          <a:xfrm>
+            <a:off x="457200" y="3863181"/>
+            <a:ext cx="4714800" cy="0"/>
           </a:xfrm>
           <a:prstGeom prst="line">
             <a:avLst/>
@@ -11288,15 +11152,15 @@
         <p:nvCxnSpPr>
           <p:cNvPr id="8" name="Connector 7"/>
           <p:cNvCxnSpPr>
-            <a:stCxn id="5" idx="3"/>
-            <a:endCxn id="6" idx="1"/>
+            <a:stCxn id="5" idx="1"/>
+            <a:endCxn id="6" idx="3"/>
           </p:cNvCxnSpPr>
           <p:nvPr/>
         </p:nvCxnSpPr>
         <p:spPr>
-          <a:xfrm flipH="1" flipV="1">
-            <a:off x="728555" y="2602176"/>
-            <a:ext cx="6157777" cy="509028"/>
+          <a:xfrm>
+            <a:off x="3972000" y="3863181"/>
+            <a:ext cx="4714800" cy="0"/>
           </a:xfrm>
           <a:prstGeom prst="line">
             <a:avLst/>

--- a/demo_full.pptx
+++ b/demo_full.pptx
@@ -3659,46 +3659,7 @@
               <a:t>二次方程式の解の公式：</a:t>
             </a:r>
           </a:p>
-        </p:txBody>
-      </p:sp>
-      <p:sp>
-        <p:nvSpPr>
-          <p:cNvPr id="4" name="Text Placeholder 3"/>
-          <p:cNvSpPr>
-            <a:spLocks noGrp="1"/>
-          </p:cNvSpPr>
-          <p:nvPr>
-            <p:ph type="body" idx="2" sz="half"/>
-          </p:nvPr>
-        </p:nvSpPr>
-        <p:spPr/>
-        <p:txBody>
-          <a:bodyPr/>
-          <a:lstStyle/>
           <a:p/>
-        </p:txBody>
-      </p:sp>
-      <p:sp>
-        <p:nvSpPr>
-          <p:cNvPr id="5" name="TextBox 4"/>
-          <p:cNvSpPr txBox="1"/>
-          <p:nvPr/>
-        </p:nvSpPr>
-        <p:spPr>
-          <a:xfrm>
-            <a:off x="3575050" y="273050"/>
-            <a:ext cx="5111750" cy="5853113"/>
-          </a:xfrm>
-          <a:prstGeom prst="rect">
-            <a:avLst/>
-          </a:prstGeom>
-          <a:noFill/>
-        </p:spPr>
-        <p:txBody>
-          <a:bodyPr wrap="none">
-            <a:spAutoFit/>
-          </a:bodyPr>
-          <a:lstStyle/>
           <a:p>
             <a14:m xmlns:a14="http://schemas.microsoft.com/office/drawing/2010/main" xmlns:m="http://schemas.openxmlformats.org/officeDocument/2006/math">
               <m:oMath>
@@ -3821,6 +3782,23 @@
           </a:p>
         </p:txBody>
       </p:sp>
+      <p:sp>
+        <p:nvSpPr>
+          <p:cNvPr id="4" name="Text Placeholder 3"/>
+          <p:cNvSpPr>
+            <a:spLocks noGrp="1"/>
+          </p:cNvSpPr>
+          <p:nvPr>
+            <p:ph type="body" idx="2" sz="half"/>
+          </p:nvPr>
+        </p:nvSpPr>
+        <p:spPr/>
+        <p:txBody>
+          <a:bodyPr/>
+          <a:lstStyle/>
+          <a:p/>
+        </p:txBody>
+      </p:sp>
     </p:spTree>
   </p:cSld>
   <p:clrMapOvr>
@@ -3880,131 +3858,7 @@
               <a:t>正規分布の確率密度関数：</a:t>
             </a:r>
           </a:p>
-        </p:txBody>
-      </p:sp>
-      <p:sp>
-        <p:nvSpPr>
-          <p:cNvPr id="4" name="Text Placeholder 3"/>
-          <p:cNvSpPr>
-            <a:spLocks noGrp="1"/>
-          </p:cNvSpPr>
-          <p:nvPr>
-            <p:ph type="body" idx="2" sz="half"/>
-          </p:nvPr>
-        </p:nvSpPr>
-        <p:spPr/>
-        <p:txBody>
-          <a:bodyPr/>
-          <a:lstStyle/>
           <a:p/>
-        </p:txBody>
-      </p:sp>
-      <p:sp>
-        <p:nvSpPr>
-          <p:cNvPr id="5" name="TextBox 4"/>
-          <p:cNvSpPr txBox="1"/>
-          <p:nvPr/>
-        </p:nvSpPr>
-        <p:spPr>
-          <a:xfrm>
-            <a:off x="3575050" y="273050"/>
-            <a:ext cx="5111750" cy="5853113"/>
-          </a:xfrm>
-          <a:prstGeom prst="rect">
-            <a:avLst/>
-          </a:prstGeom>
-          <a:noFill/>
-        </p:spPr>
-        <p:txBody>
-          <a:bodyPr wrap="none">
-            <a:spAutoFit/>
-          </a:bodyPr>
-          <a:lstStyle/>
-          <a:p>
-            <a14:m xmlns:a14="http://schemas.microsoft.com/office/drawing/2010/main" xmlns:m="http://schemas.openxmlformats.org/officeDocument/2006/math">
-              <m:oMath>
-                <m:box>
-                  <m:e>
-                    <m:sSup>
-                      <m:e>
-                        <m:r>
-                          <m:rPr>
-                            <m:sty m:val="i"/>
-                          </m:rPr>
-                          <m:t>e</m:t>
-                        </m:r>
-                      </m:e>
-                      <m:sup>
-                        <m:box>
-                          <m:e>
-                            <m:r>
-                              <m:rPr>
-                                <m:sty m:val="i"/>
-                              </m:rPr>
-                              <m:t>i</m:t>
-                            </m:r>
-                            <m:r>
-                              <m:rPr>
-                                <m:sty m:val="i"/>
-                              </m:rPr>
-                              <m:t>π</m:t>
-                            </m:r>
-                          </m:e>
-                        </m:box>
-                      </m:sup>
-                    </m:sSup>
-                    <m:r>
-                      <m:rPr>
-                        <m:sty m:val="p"/>
-                      </m:rPr>
-                      <m:t>+</m:t>
-                    </m:r>
-                    <m:r>
-                      <m:rPr>
-                        <m:sty m:val="p"/>
-                      </m:rPr>
-                      <m:t>1</m:t>
-                    </m:r>
-                    <m:r>
-                      <m:rPr>
-                        <m:sty m:val="p"/>
-                      </m:rPr>
-                      <m:t>=</m:t>
-                    </m:r>
-                    <m:r>
-                      <m:rPr>
-                        <m:sty m:val="p"/>
-                      </m:rPr>
-                      <m:t>0</m:t>
-                    </m:r>
-                  </m:e>
-                </m:box>
-              </m:oMath>
-            </a14:m>
-          </a:p>
-        </p:txBody>
-      </p:sp>
-      <p:sp>
-        <p:nvSpPr>
-          <p:cNvPr id="6" name="TextBox 5"/>
-          <p:cNvSpPr txBox="1"/>
-          <p:nvPr/>
-        </p:nvSpPr>
-        <p:spPr>
-          <a:xfrm>
-            <a:off x="3575050" y="273050"/>
-            <a:ext cx="5111750" cy="5853113"/>
-          </a:xfrm>
-          <a:prstGeom prst="rect">
-            <a:avLst/>
-          </a:prstGeom>
-          <a:noFill/>
-        </p:spPr>
-        <p:txBody>
-          <a:bodyPr wrap="none">
-            <a:spAutoFit/>
-          </a:bodyPr>
-          <a:lstStyle/>
           <a:p>
             <a14:m xmlns:a14="http://schemas.microsoft.com/office/drawing/2010/main" xmlns:m="http://schemas.openxmlformats.org/officeDocument/2006/math">
               <m:oMath>
@@ -4199,6 +4053,23 @@
           </a:p>
         </p:txBody>
       </p:sp>
+      <p:sp>
+        <p:nvSpPr>
+          <p:cNvPr id="4" name="Text Placeholder 3"/>
+          <p:cNvSpPr>
+            <a:spLocks noGrp="1"/>
+          </p:cNvSpPr>
+          <p:nvPr>
+            <p:ph type="body" idx="2" sz="half"/>
+          </p:nvPr>
+        </p:nvSpPr>
+        <p:spPr/>
+        <p:txBody>
+          <a:bodyPr/>
+          <a:lstStyle/>
+          <a:p/>
+        </p:txBody>
+      </p:sp>
     </p:spTree>
   </p:cSld>
   <p:clrMapOvr>
@@ -11238,6 +11109,9 @@
           <a:bodyPr wrap="none"/>
           <a:lstStyle/>
           <a:p>
+            <a:pPr>
+              <a:buNone/>
+            </a:pPr>
             <a:r>
               <a:rPr sz="1400">
                 <a:latin typeface="Courier New"/>
@@ -12347,6 +12221,9 @@
           <a:bodyPr wrap="none"/>
           <a:lstStyle/>
           <a:p>
+            <a:pPr>
+              <a:buNone/>
+            </a:pPr>
             <a:r>
               <a:rPr sz="1400">
                 <a:latin typeface="Courier New"/>

--- a/demo_full.pptx
+++ b/demo_full.pptx
@@ -11113,12 +11113,32 @@
               <a:buNone/>
             </a:pPr>
             <a:r>
-              <a:rPr sz="1400">
+              <a:rPr lang="" dirty="0" sz="1400">
                 <a:latin typeface="Courier New"/>
               </a:rPr>
-              <a:t>import math
-print(math.pi)
-</a:t>
+              <a:t>import math</a:t>
+            </a:r>
+            <a:br>
+              <a:rPr lang="" dirty="0">
+                <a:latin typeface="Courier New"/>
+              </a:rPr>
+            </a:br>
+            <a:r>
+              <a:rPr lang="" dirty="0" sz="1400">
+                <a:latin typeface="Courier New"/>
+              </a:rPr>
+              <a:t>print(math.pi)</a:t>
+            </a:r>
+            <a:br>
+              <a:rPr lang="" dirty="0">
+                <a:latin typeface="Courier New"/>
+              </a:rPr>
+            </a:br>
+            <a:r>
+              <a:rPr lang="" dirty="0" sz="1400">
+                <a:latin typeface="Courier New"/>
+              </a:rPr>
+              <a:t/>
             </a:r>
           </a:p>
         </p:txBody>
@@ -11399,21 +11419,21 @@
             </a:r>
           </a:p>
           <a:p>
-            <a:pPr/>
+            <a:pPr lvl="1"/>
             <a:r>
               <a:rPr sz="1800"/>
               <a:t>第2レベル（ネスト）</a:t>
             </a:r>
           </a:p>
           <a:p>
-            <a:pPr/>
+            <a:pPr lvl="1"/>
             <a:r>
               <a:rPr sz="1800"/>
               <a:t>第2レベル（ネスト）2</a:t>
             </a:r>
           </a:p>
           <a:p>
-            <a:pPr lvl="1"/>
+            <a:pPr lvl="2"/>
             <a:r>
               <a:rPr sz="1800"/>
               <a:t>第3レベル（深いネスト）</a:t>
@@ -11783,35 +11803,35 @@
             </a:r>
           </a:p>
           <a:p>
-            <a:pPr/>
+            <a:pPr lvl="1"/>
             <a:r>
               <a:rPr sz="1800"/>
               <a:t>Flowchart / Sequence / Gantt / Class / State</a:t>
             </a:r>
           </a:p>
           <a:p>
-            <a:pPr/>
+            <a:pPr lvl="1"/>
             <a:r>
               <a:rPr sz="1800"/>
               <a:t>ER / User Journey / Pie / Quadrant / Requirement</a:t>
             </a:r>
           </a:p>
           <a:p>
-            <a:pPr/>
+            <a:pPr lvl="1"/>
             <a:r>
               <a:rPr sz="1800"/>
               <a:t>Git Graph / Mindmap / Timeline / ZenUML / Sankey</a:t>
             </a:r>
           </a:p>
           <a:p>
-            <a:pPr/>
+            <a:pPr lvl="1"/>
             <a:r>
               <a:rPr sz="1800"/>
               <a:t>XY Chart / Block / Packet / Kanban / Architecture / C4</a:t>
             </a:r>
           </a:p>
           <a:p>
-            <a:pPr/>
+            <a:pPr lvl="1"/>
             <a:r>
               <a:rPr sz="1800"/>
               <a:t>Quartoネイティブ記法</a:t>
@@ -12225,14 +12245,54 @@
               <a:buNone/>
             </a:pPr>
             <a:r>
-              <a:rPr sz="1400">
+              <a:rPr lang="" dirty="0" sz="1400">
                 <a:latin typeface="Courier New"/>
               </a:rPr>
-              <a:t>def fibonacci(n: int) -&gt; int:
-    if n &lt;= 1:
-        return n
-    return fibonacci(n - 1) + fibonacci(n - 2)
-</a:t>
+              <a:t>def fibonacci(n: int) -&gt; int:</a:t>
+            </a:r>
+            <a:br>
+              <a:rPr lang="" dirty="0">
+                <a:latin typeface="Courier New"/>
+              </a:rPr>
+            </a:br>
+            <a:r>
+              <a:rPr lang="" dirty="0" sz="1400">
+                <a:latin typeface="Courier New"/>
+              </a:rPr>
+              <a:t xml:space="preserve">    if n &lt;= 1:</a:t>
+            </a:r>
+            <a:br>
+              <a:rPr lang="" dirty="0">
+                <a:latin typeface="Courier New"/>
+              </a:rPr>
+            </a:br>
+            <a:r>
+              <a:rPr lang="" dirty="0" sz="1400">
+                <a:latin typeface="Courier New"/>
+              </a:rPr>
+              <a:t xml:space="preserve">        return n</a:t>
+            </a:r>
+            <a:br>
+              <a:rPr lang="" dirty="0">
+                <a:latin typeface="Courier New"/>
+              </a:rPr>
+            </a:br>
+            <a:r>
+              <a:rPr lang="" dirty="0" sz="1400">
+                <a:latin typeface="Courier New"/>
+              </a:rPr>
+              <a:t xml:space="preserve">    return fibonacci(n - 1) + fibonacci(n - 2)</a:t>
+            </a:r>
+            <a:br>
+              <a:rPr lang="" dirty="0">
+                <a:latin typeface="Courier New"/>
+              </a:rPr>
+            </a:br>
+            <a:r>
+              <a:rPr lang="" dirty="0" sz="1400">
+                <a:latin typeface="Courier New"/>
+              </a:rPr>
+              <a:t/>
             </a:r>
           </a:p>
         </p:txBody>

--- a/demo_full.pptx
+++ b/demo_full.pptx
@@ -5,7 +5,7 @@
     <p:sldMasterId id="2147483648" r:id="rId1"/>
   </p:sldMasterIdLst>
   <p:notesMasterIdLst>
-    <p:notesMasterId r:id="rId48"/>
+    <p:notesMasterId r:id="rId49"/>
   </p:notesMasterIdLst>
   <p:sldIdLst>
     <p:sldId id="256" r:id="rId7"/>
@@ -49,9 +49,10 @@
     <p:sldId id="294" r:id="rId45"/>
     <p:sldId id="295" r:id="rId46"/>
     <p:sldId id="296" r:id="rId47"/>
-    <p:sldId id="297" r:id="rId49"/>
+    <p:sldId id="297" r:id="rId48"/>
     <p:sldId id="298" r:id="rId50"/>
     <p:sldId id="299" r:id="rId51"/>
+    <p:sldId id="300" r:id="rId52"/>
   </p:sldIdLst>
   <p:sldSz cx="9144000" cy="6858000" type="screen4x3"/>
   <p:notesSz cx="6858000" cy="9144000"/>
@@ -4190,7 +4191,7 @@
         </p:nvSpPr>
         <p:spPr>
           <a:xfrm>
-            <a:off x="457200" y="3613181"/>
+            <a:off x="457200" y="2271193"/>
             <a:ext cx="1200000" cy="500000"/>
           </a:xfrm>
           <a:prstGeom prst="rect">
@@ -4230,7 +4231,7 @@
         </p:nvSpPr>
         <p:spPr>
           <a:xfrm>
-            <a:off x="997938" y="3613181"/>
+            <a:off x="1863120" y="2271193"/>
             <a:ext cx="1200000" cy="500000"/>
           </a:xfrm>
           <a:prstGeom prst="roundRect">
@@ -4270,7 +4271,7 @@
         </p:nvSpPr>
         <p:spPr>
           <a:xfrm>
-            <a:off x="1538676" y="3613181"/>
+            <a:off x="3269040" y="2271193"/>
             <a:ext cx="1200000" cy="500000"/>
           </a:xfrm>
           <a:prstGeom prst="roundRect">
@@ -4310,7 +4311,7 @@
         </p:nvSpPr>
         <p:spPr>
           <a:xfrm>
-            <a:off x="2079415" y="3613181"/>
+            <a:off x="4674960" y="2271193"/>
             <a:ext cx="1200000" cy="500000"/>
           </a:xfrm>
           <a:prstGeom prst="rect">
@@ -4350,7 +4351,7 @@
         </p:nvSpPr>
         <p:spPr>
           <a:xfrm>
-            <a:off x="2620153" y="3613181"/>
+            <a:off x="6080880" y="2271193"/>
             <a:ext cx="1200000" cy="500000"/>
           </a:xfrm>
           <a:prstGeom prst="can">
@@ -4390,7 +4391,7 @@
         </p:nvSpPr>
         <p:spPr>
           <a:xfrm>
-            <a:off x="3160892" y="3613181"/>
+            <a:off x="7486800" y="2271193"/>
             <a:ext cx="1200000" cy="500000"/>
           </a:xfrm>
           <a:prstGeom prst="ellipse">
@@ -4430,7 +4431,7 @@
         </p:nvSpPr>
         <p:spPr>
           <a:xfrm>
-            <a:off x="3701630" y="3613181"/>
+            <a:off x="457200" y="3613181"/>
             <a:ext cx="1200000" cy="500000"/>
           </a:xfrm>
           <a:prstGeom prst="homePlate">
@@ -4470,7 +4471,7 @@
         </p:nvSpPr>
         <p:spPr>
           <a:xfrm>
-            <a:off x="4242369" y="3613181"/>
+            <a:off x="1863120" y="3613181"/>
             <a:ext cx="1200000" cy="500000"/>
           </a:xfrm>
           <a:prstGeom prst="diamond">
@@ -4510,7 +4511,7 @@
         </p:nvSpPr>
         <p:spPr>
           <a:xfrm>
-            <a:off x="4783107" y="3613181"/>
+            <a:off x="3269040" y="3613181"/>
             <a:ext cx="1200000" cy="500000"/>
           </a:xfrm>
           <a:prstGeom prst="hexagon">
@@ -4550,7 +4551,7 @@
         </p:nvSpPr>
         <p:spPr>
           <a:xfrm>
-            <a:off x="5323846" y="3613181"/>
+            <a:off x="4674960" y="3613181"/>
             <a:ext cx="1200000" cy="500000"/>
           </a:xfrm>
           <a:prstGeom prst="parallelogram">
@@ -4590,7 +4591,7 @@
         </p:nvSpPr>
         <p:spPr>
           <a:xfrm flipH="1">
-            <a:off x="5864584" y="3613181"/>
+            <a:off x="6080880" y="3613181"/>
             <a:ext cx="1200000" cy="500000"/>
           </a:xfrm>
           <a:prstGeom prst="parallelogram">
@@ -4630,7 +4631,7 @@
         </p:nvSpPr>
         <p:spPr>
           <a:xfrm>
-            <a:off x="6405323" y="3613181"/>
+            <a:off x="7486800" y="3613181"/>
             <a:ext cx="1200000" cy="500000"/>
           </a:xfrm>
           <a:prstGeom prst="trapezoid">
@@ -4669,11 +4670,11 @@
           <p:nvPr/>
         </p:nvSpPr>
         <p:spPr>
-          <a:xfrm>
-            <a:off x="6946061" y="3613181"/>
+          <a:xfrm flipV="1">
+            <a:off x="457200" y="4955169"/>
             <a:ext cx="1200000" cy="500000"/>
           </a:xfrm>
-          <a:prstGeom prst="invertedTrapezoid">
+          <a:prstGeom prst="trapezoid">
             <a:avLst/>
           </a:prstGeom>
         </p:spPr>
@@ -4710,7 +4711,7 @@
         </p:nvSpPr>
         <p:spPr>
           <a:xfrm>
-            <a:off x="7486800" y="3613181"/>
+            <a:off x="7486800" y="4955169"/>
             <a:ext cx="1200000" cy="500000"/>
           </a:xfrm>
           <a:prstGeom prst="ellipse">
@@ -4753,8 +4754,8 @@
         </p:nvCxnSpPr>
         <p:spPr>
           <a:xfrm>
-            <a:off x="457200" y="3863181"/>
-            <a:ext cx="1740738" cy="0"/>
+            <a:off x="457200" y="2521193"/>
+            <a:ext cx="2605920" cy="0"/>
           </a:xfrm>
           <a:prstGeom prst="line">
             <a:avLst/>
@@ -4789,8 +4790,8 @@
         </p:nvCxnSpPr>
         <p:spPr>
           <a:xfrm>
-            <a:off x="997938" y="3863181"/>
-            <a:ext cx="1740738" cy="0"/>
+            <a:off x="1863120" y="2521193"/>
+            <a:ext cx="2605920" cy="0"/>
           </a:xfrm>
           <a:prstGeom prst="line">
             <a:avLst/>
@@ -4825,8 +4826,8 @@
         </p:nvCxnSpPr>
         <p:spPr>
           <a:xfrm>
-            <a:off x="1538676" y="3863181"/>
-            <a:ext cx="1740739" cy="0"/>
+            <a:off x="3269040" y="2521193"/>
+            <a:ext cx="2605920" cy="0"/>
           </a:xfrm>
           <a:prstGeom prst="line">
             <a:avLst/>
@@ -4861,8 +4862,8 @@
         </p:nvCxnSpPr>
         <p:spPr>
           <a:xfrm>
-            <a:off x="2079415" y="3863181"/>
-            <a:ext cx="1740738" cy="0"/>
+            <a:off x="4674960" y="2521193"/>
+            <a:ext cx="2605920" cy="0"/>
           </a:xfrm>
           <a:prstGeom prst="line">
             <a:avLst/>
@@ -4897,8 +4898,8 @@
         </p:nvCxnSpPr>
         <p:spPr>
           <a:xfrm>
-            <a:off x="2620153" y="3863181"/>
-            <a:ext cx="1740739" cy="0"/>
+            <a:off x="6080880" y="2521193"/>
+            <a:ext cx="2605920" cy="0"/>
           </a:xfrm>
           <a:prstGeom prst="line">
             <a:avLst/>
@@ -4926,15 +4927,15 @@
         <p:nvCxnSpPr>
           <p:cNvPr id="23" name="Connector 22"/>
           <p:cNvCxnSpPr>
-            <a:stCxn id="9" idx="1"/>
-            <a:endCxn id="10" idx="3"/>
+            <a:stCxn id="9" idx="3"/>
+            <a:endCxn id="10" idx="1"/>
           </p:cNvCxnSpPr>
           <p:nvPr/>
         </p:nvCxnSpPr>
         <p:spPr>
-          <a:xfrm>
-            <a:off x="3160892" y="3863181"/>
-            <a:ext cx="1740738" cy="0"/>
+          <a:xfrm flipH="1">
+            <a:off x="457200" y="2521193"/>
+            <a:ext cx="8229600" cy="1341988"/>
           </a:xfrm>
           <a:prstGeom prst="line">
             <a:avLst/>
@@ -4969,8 +4970,8 @@
         </p:nvCxnSpPr>
         <p:spPr>
           <a:xfrm>
-            <a:off x="3701630" y="3863181"/>
-            <a:ext cx="1740739" cy="0"/>
+            <a:off x="457200" y="3863181"/>
+            <a:ext cx="2605920" cy="0"/>
           </a:xfrm>
           <a:prstGeom prst="line">
             <a:avLst/>
@@ -5005,8 +5006,8 @@
         </p:nvCxnSpPr>
         <p:spPr>
           <a:xfrm>
-            <a:off x="4242369" y="3863181"/>
-            <a:ext cx="1740738" cy="0"/>
+            <a:off x="1863120" y="3863181"/>
+            <a:ext cx="2605920" cy="0"/>
           </a:xfrm>
           <a:prstGeom prst="line">
             <a:avLst/>
@@ -5041,8 +5042,8 @@
         </p:nvCxnSpPr>
         <p:spPr>
           <a:xfrm>
-            <a:off x="4783107" y="3863181"/>
-            <a:ext cx="1740739" cy="0"/>
+            <a:off x="3269040" y="3863181"/>
+            <a:ext cx="2605920" cy="0"/>
           </a:xfrm>
           <a:prstGeom prst="line">
             <a:avLst/>
@@ -5077,8 +5078,8 @@
         </p:nvCxnSpPr>
         <p:spPr>
           <a:xfrm>
-            <a:off x="5323846" y="3863181"/>
-            <a:ext cx="1740738" cy="0"/>
+            <a:off x="4674960" y="3863181"/>
+            <a:ext cx="2605920" cy="0"/>
           </a:xfrm>
           <a:prstGeom prst="line">
             <a:avLst/>
@@ -5113,8 +5114,8 @@
         </p:nvCxnSpPr>
         <p:spPr>
           <a:xfrm>
-            <a:off x="5864584" y="3863181"/>
-            <a:ext cx="1740739" cy="0"/>
+            <a:off x="6080880" y="3863181"/>
+            <a:ext cx="2605920" cy="0"/>
           </a:xfrm>
           <a:prstGeom prst="line">
             <a:avLst/>
@@ -5142,15 +5143,15 @@
         <p:nvCxnSpPr>
           <p:cNvPr id="29" name="Connector 28"/>
           <p:cNvCxnSpPr>
-            <a:stCxn id="15" idx="1"/>
-            <a:endCxn id="16" idx="3"/>
+            <a:stCxn id="15" idx="3"/>
+            <a:endCxn id="16" idx="1"/>
           </p:cNvCxnSpPr>
           <p:nvPr/>
         </p:nvCxnSpPr>
         <p:spPr>
-          <a:xfrm>
-            <a:off x="6405323" y="3863181"/>
-            <a:ext cx="1740738" cy="0"/>
+          <a:xfrm flipH="1">
+            <a:off x="457200" y="3863181"/>
+            <a:ext cx="8229600" cy="1341988"/>
           </a:xfrm>
           <a:prstGeom prst="line">
             <a:avLst/>
@@ -5185,8 +5186,8 @@
         </p:nvCxnSpPr>
         <p:spPr>
           <a:xfrm>
-            <a:off x="6946061" y="3863181"/>
-            <a:ext cx="1740739" cy="0"/>
+            <a:off x="457200" y="5205169"/>
+            <a:ext cx="8229600" cy="0"/>
           </a:xfrm>
           <a:prstGeom prst="line">
             <a:avLst/>
@@ -5244,7 +5245,7 @@
           <a:lstStyle/>
           <a:p>
             <a:r>
-              <a:t>1b. フローチャート— リンク種別・ラベルデモ</a:t>
+              <a:t>1b. フローチャート— 枝分かれ構造デモ</a:t>
             </a:r>
           </a:p>
         </p:txBody>
@@ -5308,16 +5309,16 @@
       </p:sp>
       <p:sp>
         <p:nvSpPr>
-          <p:cNvPr id="5" name="Rectangle 4"/>
+          <p:cNvPr id="5" name="Diamond 4"/>
           <p:cNvSpPr/>
           <p:nvPr/>
         </p:nvSpPr>
         <p:spPr>
           <a:xfrm>
-            <a:off x="3972000" y="2175337"/>
+            <a:off x="3972000" y="2405392"/>
             <a:ext cx="1200000" cy="500000"/>
           </a:xfrm>
-          <a:prstGeom prst="rect">
+          <a:prstGeom prst="diamond">
             <a:avLst/>
           </a:prstGeom>
         </p:spPr>
@@ -5341,7 +5342,7 @@
           <a:p>
             <a:r>
               <a:rPr sz="1200"/>
-              <a:t>処理1</a:t>
+              <a:t>条件判定</a:t>
             </a:r>
           </a:p>
         </p:txBody>
@@ -5354,7 +5355,7 @@
         </p:nvSpPr>
         <p:spPr>
           <a:xfrm>
-            <a:off x="3972000" y="2750475"/>
+            <a:off x="457200" y="3210585"/>
             <a:ext cx="1200000" cy="500000"/>
           </a:xfrm>
           <a:prstGeom prst="rect">
@@ -5381,7 +5382,7 @@
           <a:p>
             <a:r>
               <a:rPr sz="1200"/>
-              <a:t>処理2</a:t>
+              <a:t>処理A</a:t>
             </a:r>
           </a:p>
         </p:txBody>
@@ -5394,7 +5395,7 @@
         </p:nvSpPr>
         <p:spPr>
           <a:xfrm>
-            <a:off x="3972000" y="3325612"/>
+            <a:off x="7486800" y="3210585"/>
             <a:ext cx="1200000" cy="500000"/>
           </a:xfrm>
           <a:prstGeom prst="rect">
@@ -5421,23 +5422,23 @@
           <a:p>
             <a:r>
               <a:rPr sz="1200"/>
-              <a:t>処理3</a:t>
-            </a:r>
-          </a:p>
-        </p:txBody>
-      </p:sp>
-      <p:sp>
-        <p:nvSpPr>
-          <p:cNvPr id="8" name="Rectangle 7"/>
+              <a:t>処理B</a:t>
+            </a:r>
+          </a:p>
+        </p:txBody>
+      </p:sp>
+      <p:sp>
+        <p:nvSpPr>
+          <p:cNvPr id="8" name="Diamond 7"/>
           <p:cNvSpPr/>
           <p:nvPr/>
         </p:nvSpPr>
         <p:spPr>
           <a:xfrm>
-            <a:off x="3972000" y="3900750"/>
+            <a:off x="457200" y="4015777"/>
             <a:ext cx="1200000" cy="500000"/>
           </a:xfrm>
-          <a:prstGeom prst="rect">
+          <a:prstGeom prst="diamond">
             <a:avLst/>
           </a:prstGeom>
         </p:spPr>
@@ -5461,7 +5462,7 @@
           <a:p>
             <a:r>
               <a:rPr sz="1200"/>
-              <a:t>丸端</a:t>
+              <a:t>さらに分岐</a:t>
             </a:r>
           </a:p>
         </p:txBody>
@@ -5474,7 +5475,7 @@
         </p:nvSpPr>
         <p:spPr>
           <a:xfrm>
-            <a:off x="3972000" y="4475887"/>
+            <a:off x="7486800" y="4015777"/>
             <a:ext cx="1200000" cy="500000"/>
           </a:xfrm>
           <a:prstGeom prst="rect">
@@ -5501,7 +5502,7 @@
           <a:p>
             <a:r>
               <a:rPr sz="1200"/>
-              <a:t>×端</a:t>
+              <a:t>処理C</a:t>
             </a:r>
           </a:p>
         </p:txBody>
@@ -5514,7 +5515,7 @@
         </p:nvSpPr>
         <p:spPr>
           <a:xfrm>
-            <a:off x="3972000" y="5051025"/>
+            <a:off x="457200" y="4820970"/>
             <a:ext cx="1200000" cy="500000"/>
           </a:xfrm>
           <a:prstGeom prst="rect">
@@ -5541,23 +5542,23 @@
           <a:p>
             <a:r>
               <a:rPr sz="1200"/>
-              <a:t>処理4</a:t>
-            </a:r>
-          </a:p>
-        </p:txBody>
-      </p:sp>
-      <p:sp>
-        <p:nvSpPr>
-          <p:cNvPr id="11" name="Rounded Rectangle 10"/>
+              <a:t>結果1</a:t>
+            </a:r>
+          </a:p>
+        </p:txBody>
+      </p:sp>
+      <p:sp>
+        <p:nvSpPr>
+          <p:cNvPr id="11" name="Rectangle 10"/>
           <p:cNvSpPr/>
           <p:nvPr/>
         </p:nvSpPr>
         <p:spPr>
           <a:xfrm>
-            <a:off x="3972000" y="5626163"/>
+            <a:off x="2800400" y="4820970"/>
             <a:ext cx="1200000" cy="500000"/>
           </a:xfrm>
-          <a:prstGeom prst="roundRect">
+          <a:prstGeom prst="rect">
             <a:avLst/>
           </a:prstGeom>
         </p:spPr>
@@ -5581,6 +5582,126 @@
           <a:p>
             <a:r>
               <a:rPr sz="1200"/>
+              <a:t>結果2</a:t>
+            </a:r>
+          </a:p>
+        </p:txBody>
+      </p:sp>
+      <p:sp>
+        <p:nvSpPr>
+          <p:cNvPr id="12" name="Rectangle 11"/>
+          <p:cNvSpPr/>
+          <p:nvPr/>
+        </p:nvSpPr>
+        <p:spPr>
+          <a:xfrm>
+            <a:off x="5143600" y="4820970"/>
+            <a:ext cx="1200000" cy="500000"/>
+          </a:xfrm>
+          <a:prstGeom prst="rect">
+            <a:avLst/>
+          </a:prstGeom>
+        </p:spPr>
+        <p:style>
+          <a:lnRef idx="1">
+            <a:schemeClr val="accent1"/>
+          </a:lnRef>
+          <a:fillRef idx="3">
+            <a:schemeClr val="accent1"/>
+          </a:fillRef>
+          <a:effectRef idx="2">
+            <a:schemeClr val="accent1"/>
+          </a:effectRef>
+          <a:fontRef idx="minor">
+            <a:schemeClr val="lt1"/>
+          </a:fontRef>
+        </p:style>
+        <p:txBody>
+          <a:bodyPr rtlCol="0" anchor="ctr"/>
+          <a:lstStyle/>
+          <a:p>
+            <a:r>
+              <a:rPr sz="1200"/>
+              <a:t>結果3</a:t>
+            </a:r>
+          </a:p>
+        </p:txBody>
+      </p:sp>
+      <p:sp>
+        <p:nvSpPr>
+          <p:cNvPr id="13" name="Rectangle 12"/>
+          <p:cNvSpPr/>
+          <p:nvPr/>
+        </p:nvSpPr>
+        <p:spPr>
+          <a:xfrm>
+            <a:off x="7486800" y="4820970"/>
+            <a:ext cx="1200000" cy="500000"/>
+          </a:xfrm>
+          <a:prstGeom prst="rect">
+            <a:avLst/>
+          </a:prstGeom>
+        </p:spPr>
+        <p:style>
+          <a:lnRef idx="1">
+            <a:schemeClr val="accent1"/>
+          </a:lnRef>
+          <a:fillRef idx="3">
+            <a:schemeClr val="accent1"/>
+          </a:fillRef>
+          <a:effectRef idx="2">
+            <a:schemeClr val="accent1"/>
+          </a:effectRef>
+          <a:fontRef idx="minor">
+            <a:schemeClr val="lt1"/>
+          </a:fontRef>
+        </p:style>
+        <p:txBody>
+          <a:bodyPr rtlCol="0" anchor="ctr"/>
+          <a:lstStyle/>
+          <a:p>
+            <a:r>
+              <a:rPr sz="1200"/>
+              <a:t>処理D</a:t>
+            </a:r>
+          </a:p>
+        </p:txBody>
+      </p:sp>
+      <p:sp>
+        <p:nvSpPr>
+          <p:cNvPr id="14" name="Rounded Rectangle 13"/>
+          <p:cNvSpPr/>
+          <p:nvPr/>
+        </p:nvSpPr>
+        <p:spPr>
+          <a:xfrm>
+            <a:off x="3972000" y="5626163"/>
+            <a:ext cx="1200000" cy="500000"/>
+          </a:xfrm>
+          <a:prstGeom prst="roundRect">
+            <a:avLst/>
+          </a:prstGeom>
+        </p:spPr>
+        <p:style>
+          <a:lnRef idx="1">
+            <a:schemeClr val="accent1"/>
+          </a:lnRef>
+          <a:fillRef idx="3">
+            <a:schemeClr val="accent1"/>
+          </a:fillRef>
+          <a:effectRef idx="2">
+            <a:schemeClr val="accent1"/>
+          </a:effectRef>
+          <a:fontRef idx="minor">
+            <a:schemeClr val="lt1"/>
+          </a:fontRef>
+        </p:style>
+        <p:txBody>
+          <a:bodyPr rtlCol="0" anchor="ctr"/>
+          <a:lstStyle/>
+          <a:p>
+            <a:r>
+              <a:rPr sz="1200"/>
               <a:t>終了</a:t>
             </a:r>
           </a:p>
@@ -5588,7 +5709,7 @@
       </p:sp>
       <p:cxnSp>
         <p:nvCxnSpPr>
-          <p:cNvPr id="12" name="Connector 11"/>
+          <p:cNvPr id="15" name="Connector 14"/>
           <p:cNvCxnSpPr>
             <a:stCxn id="4" idx="2"/>
             <a:endCxn id="5" idx="0"/>
@@ -5598,152 +5719,13 @@
         <p:spPr>
           <a:xfrm>
             <a:off x="4572000" y="2100200"/>
-            <a:ext cx="0" cy="75137"/>
+            <a:ext cx="0" cy="305192"/>
           </a:xfrm>
           <a:prstGeom prst="line">
             <a:avLst/>
           </a:prstGeom>
           <a:ln>
             <a:headEnd type="arrow" w="med" len="med"/>
-          </a:ln>
-        </p:spPr>
-        <p:style>
-          <a:lnRef idx="2">
-            <a:schemeClr val="accent1"/>
-          </a:lnRef>
-          <a:fillRef idx="0">
-            <a:schemeClr val="accent1"/>
-          </a:fillRef>
-          <a:effectRef idx="1">
-            <a:schemeClr val="accent1"/>
-          </a:effectRef>
-          <a:fontRef idx="minor">
-            <a:schemeClr val="tx1"/>
-          </a:fontRef>
-        </p:style>
-        <p:txBody>
-          <a:bodyPr anchor="ctr" wrap="square"/>
-          <a:lstStyle/>
-          <a:p>
-            <a:r>
-              <a:rPr dirty="0" sz="1000"/>
-              <a:t>通常矢印</a:t>
-            </a:r>
-          </a:p>
-        </p:txBody>
-      </p:cxnSp>
-      <p:cxnSp>
-        <p:nvCxnSpPr>
-          <p:cNvPr id="13" name="Connector 12"/>
-          <p:cNvCxnSpPr>
-            <a:stCxn id="5" idx="2"/>
-            <a:endCxn id="6" idx="0"/>
-          </p:cNvCxnSpPr>
-          <p:nvPr/>
-        </p:nvCxnSpPr>
-        <p:spPr>
-          <a:xfrm>
-            <a:off x="4572000" y="2675337"/>
-            <a:ext cx="0" cy="75138"/>
-          </a:xfrm>
-          <a:prstGeom prst="line">
-            <a:avLst/>
-          </a:prstGeom>
-          <a:ln>
-            <a:prstDash val="dash"/>
-            <a:headEnd type="arrow" w="med" len="med"/>
-          </a:ln>
-        </p:spPr>
-        <p:style>
-          <a:lnRef idx="2">
-            <a:schemeClr val="accent1"/>
-          </a:lnRef>
-          <a:fillRef idx="0">
-            <a:schemeClr val="accent1"/>
-          </a:fillRef>
-          <a:effectRef idx="1">
-            <a:schemeClr val="accent1"/>
-          </a:effectRef>
-          <a:fontRef idx="minor">
-            <a:schemeClr val="tx1"/>
-          </a:fontRef>
-        </p:style>
-        <p:txBody>
-          <a:bodyPr anchor="ctr" wrap="square"/>
-          <a:lstStyle/>
-          <a:p>
-            <a:r>
-              <a:rPr dirty="0" sz="1000"/>
-              <a:t>点線矢印</a:t>
-            </a:r>
-          </a:p>
-        </p:txBody>
-      </p:cxnSp>
-      <p:cxnSp>
-        <p:nvCxnSpPr>
-          <p:cNvPr id="14" name="Connector 13"/>
-          <p:cNvCxnSpPr>
-            <a:stCxn id="6" idx="2"/>
-            <a:endCxn id="7" idx="0"/>
-          </p:cNvCxnSpPr>
-          <p:nvPr/>
-        </p:nvCxnSpPr>
-        <p:spPr>
-          <a:xfrm>
-            <a:off x="4572000" y="3250475"/>
-            <a:ext cx="0" cy="75137"/>
-          </a:xfrm>
-          <a:prstGeom prst="line">
-            <a:avLst/>
-          </a:prstGeom>
-          <a:ln w="38100">
-            <a:headEnd type="arrow" w="med" len="med"/>
-          </a:ln>
-        </p:spPr>
-        <p:style>
-          <a:lnRef idx="2">
-            <a:schemeClr val="accent1"/>
-          </a:lnRef>
-          <a:fillRef idx="0">
-            <a:schemeClr val="accent1"/>
-          </a:fillRef>
-          <a:effectRef idx="1">
-            <a:schemeClr val="accent1"/>
-          </a:effectRef>
-          <a:fontRef idx="minor">
-            <a:schemeClr val="tx1"/>
-          </a:fontRef>
-        </p:style>
-        <p:txBody>
-          <a:bodyPr anchor="ctr" wrap="square"/>
-          <a:lstStyle/>
-          <a:p>
-            <a:r>
-              <a:rPr dirty="0" sz="1000"/>
-              <a:t>太線矢印</a:t>
-            </a:r>
-          </a:p>
-        </p:txBody>
-      </p:cxnSp>
-      <p:cxnSp>
-        <p:nvCxnSpPr>
-          <p:cNvPr id="15" name="Connector 14"/>
-          <p:cNvCxnSpPr>
-            <a:stCxn id="7" idx="2"/>
-            <a:endCxn id="8" idx="0"/>
-          </p:cNvCxnSpPr>
-          <p:nvPr/>
-        </p:nvCxnSpPr>
-        <p:spPr>
-          <a:xfrm>
-            <a:off x="4572000" y="3825612"/>
-            <a:ext cx="0" cy="75138"/>
-          </a:xfrm>
-          <a:prstGeom prst="line">
-            <a:avLst/>
-          </a:prstGeom>
-          <a:ln>
-            <a:headEnd type="oval" w="med" len="med"/>
           </a:ln>
         </p:spPr>
         <p:style>
@@ -5765,15 +5747,107 @@
         <p:nvCxnSpPr>
           <p:cNvPr id="16" name="Connector 15"/>
           <p:cNvCxnSpPr>
-            <a:stCxn id="8" idx="2"/>
-            <a:endCxn id="9" idx="0"/>
+            <a:stCxn id="5" idx="3"/>
+            <a:endCxn id="6" idx="1"/>
           </p:cNvCxnSpPr>
           <p:nvPr/>
         </p:nvCxnSpPr>
         <p:spPr>
-          <a:xfrm>
-            <a:off x="4572000" y="4400750"/>
-            <a:ext cx="0" cy="75137"/>
+          <a:xfrm flipH="1">
+            <a:off x="457200" y="2655392"/>
+            <a:ext cx="4714800" cy="805193"/>
+          </a:xfrm>
+          <a:prstGeom prst="line">
+            <a:avLst/>
+          </a:prstGeom>
+          <a:ln>
+            <a:headEnd type="arrow" w="med" len="med"/>
+          </a:ln>
+        </p:spPr>
+        <p:style>
+          <a:lnRef idx="2">
+            <a:schemeClr val="accent1"/>
+          </a:lnRef>
+          <a:fillRef idx="0">
+            <a:schemeClr val="accent1"/>
+          </a:fillRef>
+          <a:effectRef idx="1">
+            <a:schemeClr val="accent1"/>
+          </a:effectRef>
+          <a:fontRef idx="minor">
+            <a:schemeClr val="tx1"/>
+          </a:fontRef>
+        </p:style>
+        <p:txBody>
+          <a:bodyPr anchor="ctr" wrap="square"/>
+          <a:lstStyle/>
+          <a:p>
+            <a:r>
+              <a:rPr dirty="0" sz="1000"/>
+              <a:t>はい</a:t>
+            </a:r>
+          </a:p>
+        </p:txBody>
+      </p:cxnSp>
+      <p:cxnSp>
+        <p:nvCxnSpPr>
+          <p:cNvPr id="17" name="Connector 16"/>
+          <p:cNvCxnSpPr>
+            <a:stCxn id="5" idx="1"/>
+            <a:endCxn id="7" idx="3"/>
+          </p:cNvCxnSpPr>
+          <p:nvPr/>
+        </p:nvCxnSpPr>
+        <p:spPr>
+          <a:xfrm>
+            <a:off x="3972000" y="2655392"/>
+            <a:ext cx="4714800" cy="805193"/>
+          </a:xfrm>
+          <a:prstGeom prst="line">
+            <a:avLst/>
+          </a:prstGeom>
+          <a:ln>
+            <a:headEnd type="arrow" w="med" len="med"/>
+          </a:ln>
+        </p:spPr>
+        <p:style>
+          <a:lnRef idx="2">
+            <a:schemeClr val="accent1"/>
+          </a:lnRef>
+          <a:fillRef idx="0">
+            <a:schemeClr val="accent1"/>
+          </a:fillRef>
+          <a:effectRef idx="1">
+            <a:schemeClr val="accent1"/>
+          </a:effectRef>
+          <a:fontRef idx="minor">
+            <a:schemeClr val="tx1"/>
+          </a:fontRef>
+        </p:style>
+        <p:txBody>
+          <a:bodyPr anchor="ctr" wrap="square"/>
+          <a:lstStyle/>
+          <a:p>
+            <a:r>
+              <a:rPr dirty="0" sz="1000"/>
+              <a:t>いいえ</a:t>
+            </a:r>
+          </a:p>
+        </p:txBody>
+      </p:cxnSp>
+      <p:cxnSp>
+        <p:nvCxnSpPr>
+          <p:cNvPr id="18" name="Connector 17"/>
+          <p:cNvCxnSpPr>
+            <a:stCxn id="6" idx="2"/>
+            <a:endCxn id="8" idx="0"/>
+          </p:cNvCxnSpPr>
+          <p:nvPr/>
+        </p:nvCxnSpPr>
+        <p:spPr>
+          <a:xfrm>
+            <a:off x="1057200" y="3710585"/>
+            <a:ext cx="0" cy="305192"/>
           </a:xfrm>
           <a:prstGeom prst="line">
             <a:avLst/>
@@ -5799,24 +5873,23 @@
       </p:cxnSp>
       <p:cxnSp>
         <p:nvCxnSpPr>
-          <p:cNvPr id="17" name="Connector 16"/>
+          <p:cNvPr id="19" name="Connector 18"/>
           <p:cNvCxnSpPr>
-            <a:stCxn id="9" idx="2"/>
-            <a:endCxn id="10" idx="0"/>
+            <a:stCxn id="7" idx="2"/>
+            <a:endCxn id="9" idx="0"/>
           </p:cNvCxnSpPr>
           <p:nvPr/>
         </p:nvCxnSpPr>
         <p:spPr>
           <a:xfrm>
-            <a:off x="4572000" y="4975887"/>
-            <a:ext cx="0" cy="75138"/>
+            <a:off x="8086800" y="3710585"/>
+            <a:ext cx="0" cy="305192"/>
           </a:xfrm>
           <a:prstGeom prst="line">
             <a:avLst/>
           </a:prstGeom>
           <a:ln>
             <a:headEnd type="arrow" w="med" len="med"/>
-            <a:tailEnd type="arrow" w="med" len="med"/>
           </a:ln>
         </p:spPr>
         <p:style>
@@ -5833,30 +5906,302 @@
             <a:schemeClr val="tx1"/>
           </a:fontRef>
         </p:style>
-        <p:txBody>
-          <a:bodyPr anchor="ctr" wrap="square"/>
-          <a:lstStyle/>
-          <a:p>
-            <a:r>
-              <a:rPr dirty="0" sz="1000"/>
-              <a:t>両方向</a:t>
-            </a:r>
-          </a:p>
-        </p:txBody>
       </p:cxnSp>
       <p:cxnSp>
         <p:nvCxnSpPr>
-          <p:cNvPr id="18" name="Connector 17"/>
+          <p:cNvPr id="20" name="Connector 19"/>
           <p:cNvCxnSpPr>
-            <a:stCxn id="10" idx="2"/>
-            <a:endCxn id="11" idx="0"/>
+            <a:stCxn id="8" idx="2"/>
+            <a:endCxn id="10" idx="0"/>
           </p:cNvCxnSpPr>
           <p:nvPr/>
         </p:nvCxnSpPr>
         <p:spPr>
           <a:xfrm>
-            <a:off x="4572000" y="5551025"/>
-            <a:ext cx="0" cy="75138"/>
+            <a:off x="1057200" y="4515777"/>
+            <a:ext cx="0" cy="305193"/>
+          </a:xfrm>
+          <a:prstGeom prst="line">
+            <a:avLst/>
+          </a:prstGeom>
+          <a:ln>
+            <a:headEnd type="arrow" w="med" len="med"/>
+          </a:ln>
+        </p:spPr>
+        <p:style>
+          <a:lnRef idx="2">
+            <a:schemeClr val="accent1"/>
+          </a:lnRef>
+          <a:fillRef idx="0">
+            <a:schemeClr val="accent1"/>
+          </a:fillRef>
+          <a:effectRef idx="1">
+            <a:schemeClr val="accent1"/>
+          </a:effectRef>
+          <a:fontRef idx="minor">
+            <a:schemeClr val="tx1"/>
+          </a:fontRef>
+        </p:style>
+        <p:txBody>
+          <a:bodyPr anchor="ctr" wrap="square"/>
+          <a:lstStyle/>
+          <a:p>
+            <a:r>
+              <a:rPr dirty="0" sz="1000"/>
+              <a:t>ケース1</a:t>
+            </a:r>
+          </a:p>
+        </p:txBody>
+      </p:cxnSp>
+      <p:cxnSp>
+        <p:nvCxnSpPr>
+          <p:cNvPr id="21" name="Connector 20"/>
+          <p:cNvCxnSpPr>
+            <a:stCxn id="8" idx="1"/>
+            <a:endCxn id="11" idx="3"/>
+          </p:cNvCxnSpPr>
+          <p:nvPr/>
+        </p:nvCxnSpPr>
+        <p:spPr>
+          <a:xfrm>
+            <a:off x="457200" y="4265777"/>
+            <a:ext cx="3543200" cy="805193"/>
+          </a:xfrm>
+          <a:prstGeom prst="line">
+            <a:avLst/>
+          </a:prstGeom>
+          <a:ln>
+            <a:headEnd type="arrow" w="med" len="med"/>
+          </a:ln>
+        </p:spPr>
+        <p:style>
+          <a:lnRef idx="2">
+            <a:schemeClr val="accent1"/>
+          </a:lnRef>
+          <a:fillRef idx="0">
+            <a:schemeClr val="accent1"/>
+          </a:fillRef>
+          <a:effectRef idx="1">
+            <a:schemeClr val="accent1"/>
+          </a:effectRef>
+          <a:fontRef idx="minor">
+            <a:schemeClr val="tx1"/>
+          </a:fontRef>
+        </p:style>
+        <p:txBody>
+          <a:bodyPr anchor="ctr" wrap="square"/>
+          <a:lstStyle/>
+          <a:p>
+            <a:r>
+              <a:rPr dirty="0" sz="1000"/>
+              <a:t>ケース2</a:t>
+            </a:r>
+          </a:p>
+        </p:txBody>
+      </p:cxnSp>
+      <p:cxnSp>
+        <p:nvCxnSpPr>
+          <p:cNvPr id="22" name="Connector 21"/>
+          <p:cNvCxnSpPr>
+            <a:stCxn id="8" idx="1"/>
+            <a:endCxn id="12" idx="3"/>
+          </p:cNvCxnSpPr>
+          <p:nvPr/>
+        </p:nvCxnSpPr>
+        <p:spPr>
+          <a:xfrm>
+            <a:off x="457200" y="4265777"/>
+            <a:ext cx="5886400" cy="805193"/>
+          </a:xfrm>
+          <a:prstGeom prst="line">
+            <a:avLst/>
+          </a:prstGeom>
+          <a:ln>
+            <a:headEnd type="arrow" w="med" len="med"/>
+          </a:ln>
+        </p:spPr>
+        <p:style>
+          <a:lnRef idx="2">
+            <a:schemeClr val="accent1"/>
+          </a:lnRef>
+          <a:fillRef idx="0">
+            <a:schemeClr val="accent1"/>
+          </a:fillRef>
+          <a:effectRef idx="1">
+            <a:schemeClr val="accent1"/>
+          </a:effectRef>
+          <a:fontRef idx="minor">
+            <a:schemeClr val="tx1"/>
+          </a:fontRef>
+        </p:style>
+        <p:txBody>
+          <a:bodyPr anchor="ctr" wrap="square"/>
+          <a:lstStyle/>
+          <a:p>
+            <a:r>
+              <a:rPr dirty="0" sz="1000"/>
+              <a:t>ケース3</a:t>
+            </a:r>
+          </a:p>
+        </p:txBody>
+      </p:cxnSp>
+      <p:cxnSp>
+        <p:nvCxnSpPr>
+          <p:cNvPr id="23" name="Connector 22"/>
+          <p:cNvCxnSpPr>
+            <a:stCxn id="9" idx="2"/>
+            <a:endCxn id="13" idx="0"/>
+          </p:cNvCxnSpPr>
+          <p:nvPr/>
+        </p:nvCxnSpPr>
+        <p:spPr>
+          <a:xfrm>
+            <a:off x="8086800" y="4515777"/>
+            <a:ext cx="0" cy="305193"/>
+          </a:xfrm>
+          <a:prstGeom prst="line">
+            <a:avLst/>
+          </a:prstGeom>
+          <a:ln>
+            <a:headEnd type="arrow" w="med" len="med"/>
+          </a:ln>
+        </p:spPr>
+        <p:style>
+          <a:lnRef idx="2">
+            <a:schemeClr val="accent1"/>
+          </a:lnRef>
+          <a:fillRef idx="0">
+            <a:schemeClr val="accent1"/>
+          </a:fillRef>
+          <a:effectRef idx="1">
+            <a:schemeClr val="accent1"/>
+          </a:effectRef>
+          <a:fontRef idx="minor">
+            <a:schemeClr val="tx1"/>
+          </a:fontRef>
+        </p:style>
+      </p:cxnSp>
+      <p:cxnSp>
+        <p:nvCxnSpPr>
+          <p:cNvPr id="24" name="Connector 23"/>
+          <p:cNvCxnSpPr>
+            <a:stCxn id="10" idx="1"/>
+            <a:endCxn id="14" idx="3"/>
+          </p:cNvCxnSpPr>
+          <p:nvPr/>
+        </p:nvCxnSpPr>
+        <p:spPr>
+          <a:xfrm>
+            <a:off x="457200" y="5070970"/>
+            <a:ext cx="4714800" cy="805193"/>
+          </a:xfrm>
+          <a:prstGeom prst="line">
+            <a:avLst/>
+          </a:prstGeom>
+          <a:ln>
+            <a:headEnd type="arrow" w="med" len="med"/>
+          </a:ln>
+        </p:spPr>
+        <p:style>
+          <a:lnRef idx="2">
+            <a:schemeClr val="accent1"/>
+          </a:lnRef>
+          <a:fillRef idx="0">
+            <a:schemeClr val="accent1"/>
+          </a:fillRef>
+          <a:effectRef idx="1">
+            <a:schemeClr val="accent1"/>
+          </a:effectRef>
+          <a:fontRef idx="minor">
+            <a:schemeClr val="tx1"/>
+          </a:fontRef>
+        </p:style>
+      </p:cxnSp>
+      <p:cxnSp>
+        <p:nvCxnSpPr>
+          <p:cNvPr id="25" name="Connector 24"/>
+          <p:cNvCxnSpPr>
+            <a:stCxn id="11" idx="2"/>
+            <a:endCxn id="14" idx="0"/>
+          </p:cNvCxnSpPr>
+          <p:nvPr/>
+        </p:nvCxnSpPr>
+        <p:spPr>
+          <a:xfrm>
+            <a:off x="3400400" y="5320970"/>
+            <a:ext cx="1171600" cy="305193"/>
+          </a:xfrm>
+          <a:prstGeom prst="line">
+            <a:avLst/>
+          </a:prstGeom>
+          <a:ln>
+            <a:headEnd type="arrow" w="med" len="med"/>
+          </a:ln>
+        </p:spPr>
+        <p:style>
+          <a:lnRef idx="2">
+            <a:schemeClr val="accent1"/>
+          </a:lnRef>
+          <a:fillRef idx="0">
+            <a:schemeClr val="accent1"/>
+          </a:fillRef>
+          <a:effectRef idx="1">
+            <a:schemeClr val="accent1"/>
+          </a:effectRef>
+          <a:fontRef idx="minor">
+            <a:schemeClr val="tx1"/>
+          </a:fontRef>
+        </p:style>
+      </p:cxnSp>
+      <p:cxnSp>
+        <p:nvCxnSpPr>
+          <p:cNvPr id="26" name="Connector 25"/>
+          <p:cNvCxnSpPr>
+            <a:stCxn id="12" idx="2"/>
+            <a:endCxn id="14" idx="0"/>
+          </p:cNvCxnSpPr>
+          <p:nvPr/>
+        </p:nvCxnSpPr>
+        <p:spPr>
+          <a:xfrm flipH="1">
+            <a:off x="4572000" y="5320970"/>
+            <a:ext cx="1171600" cy="305193"/>
+          </a:xfrm>
+          <a:prstGeom prst="line">
+            <a:avLst/>
+          </a:prstGeom>
+          <a:ln>
+            <a:headEnd type="arrow" w="med" len="med"/>
+          </a:ln>
+        </p:spPr>
+        <p:style>
+          <a:lnRef idx="2">
+            <a:schemeClr val="accent1"/>
+          </a:lnRef>
+          <a:fillRef idx="0">
+            <a:schemeClr val="accent1"/>
+          </a:fillRef>
+          <a:effectRef idx="1">
+            <a:schemeClr val="accent1"/>
+          </a:effectRef>
+          <a:fontRef idx="minor">
+            <a:schemeClr val="tx1"/>
+          </a:fontRef>
+        </p:style>
+      </p:cxnSp>
+      <p:cxnSp>
+        <p:nvCxnSpPr>
+          <p:cNvPr id="27" name="Connector 26"/>
+          <p:cNvCxnSpPr>
+            <a:stCxn id="13" idx="3"/>
+            <a:endCxn id="14" idx="1"/>
+          </p:cNvCxnSpPr>
+          <p:nvPr/>
+        </p:nvCxnSpPr>
+        <p:spPr>
+          <a:xfrm flipH="1">
+            <a:off x="3972000" y="5070970"/>
+            <a:ext cx="4714800" cy="805193"/>
           </a:xfrm>
           <a:prstGeom prst="line">
             <a:avLst/>
@@ -5914,7 +6259,7 @@
           <a:lstStyle/>
           <a:p>
             <a:r>
-              <a:t>2. シーケンス図（Sequence Diagram）</a:t>
+              <a:t>1c. フローチャート— リンク種別・ラベルデモ</a:t>
             </a:r>
           </a:p>
         </p:txBody>
@@ -5938,42 +6283,770 @@
       </p:sp>
       <p:sp>
         <p:nvSpPr>
-          <p:cNvPr id="4" name="TextBox 3"/>
-          <p:cNvSpPr txBox="1"/>
-          <p:nvPr/>
-        </p:nvSpPr>
-        <p:spPr>
-          <a:xfrm>
-            <a:off x="457200" y="1600200"/>
-            <a:ext cx="8229600" cy="4525963"/>
+          <p:cNvPr id="4" name="Rounded Rectangle 3"/>
+          <p:cNvSpPr/>
+          <p:nvPr/>
+        </p:nvSpPr>
+        <p:spPr>
+          <a:xfrm>
+            <a:off x="2214600" y="1600200"/>
+            <a:ext cx="1200000" cy="500000"/>
+          </a:xfrm>
+          <a:prstGeom prst="roundRect">
+            <a:avLst/>
+          </a:prstGeom>
+        </p:spPr>
+        <p:style>
+          <a:lnRef idx="1">
+            <a:schemeClr val="accent1"/>
+          </a:lnRef>
+          <a:fillRef idx="3">
+            <a:schemeClr val="accent1"/>
+          </a:fillRef>
+          <a:effectRef idx="2">
+            <a:schemeClr val="accent1"/>
+          </a:effectRef>
+          <a:fontRef idx="minor">
+            <a:schemeClr val="lt1"/>
+          </a:fontRef>
+        </p:style>
+        <p:txBody>
+          <a:bodyPr rtlCol="0" anchor="ctr"/>
+          <a:lstStyle/>
+          <a:p>
+            <a:r>
+              <a:rPr sz="1200"/>
+              <a:t>開始</a:t>
+            </a:r>
+          </a:p>
+        </p:txBody>
+      </p:sp>
+      <p:sp>
+        <p:nvSpPr>
+          <p:cNvPr id="5" name="Rectangle 4"/>
+          <p:cNvSpPr/>
+          <p:nvPr/>
+        </p:nvSpPr>
+        <p:spPr>
+          <a:xfrm>
+            <a:off x="2214600" y="2103445"/>
+            <a:ext cx="1200000" cy="500000"/>
           </a:xfrm>
           <a:prstGeom prst="rect">
             <a:avLst/>
           </a:prstGeom>
-          <a:noFill/>
-        </p:spPr>
-        <p:txBody>
-          <a:bodyPr wrap="square">
-            <a:spAutoFit/>
-          </a:bodyPr>
-          <a:lstStyle/>
-          <a:p>
-            <a:r>
-              <a:rPr sz="1000">
-                <a:latin typeface="Courier New"/>
-              </a:rPr>
-              <a:t>sequenceDiagram
-    participant A as クライアント
-    participant B as サーバー
-    participant C as データベース
-    A-&gt;&gt;B: リクエスト送信
-    B-&gt;&gt;C: クエリ実行
-    C--&gt;&gt;B: 結果返却
-    B--&gt;&gt;A: レスポンス返却</a:t>
-            </a:r>
-          </a:p>
-        </p:txBody>
-      </p:sp>
+        </p:spPr>
+        <p:style>
+          <a:lnRef idx="1">
+            <a:schemeClr val="accent1"/>
+          </a:lnRef>
+          <a:fillRef idx="3">
+            <a:schemeClr val="accent1"/>
+          </a:fillRef>
+          <a:effectRef idx="2">
+            <a:schemeClr val="accent1"/>
+          </a:effectRef>
+          <a:fontRef idx="minor">
+            <a:schemeClr val="lt1"/>
+          </a:fontRef>
+        </p:style>
+        <p:txBody>
+          <a:bodyPr rtlCol="0" anchor="ctr"/>
+          <a:lstStyle/>
+          <a:p>
+            <a:r>
+              <a:rPr sz="1200"/>
+              <a:t>処理1</a:t>
+            </a:r>
+          </a:p>
+        </p:txBody>
+      </p:sp>
+      <p:sp>
+        <p:nvSpPr>
+          <p:cNvPr id="6" name="Rectangle 5"/>
+          <p:cNvSpPr/>
+          <p:nvPr/>
+        </p:nvSpPr>
+        <p:spPr>
+          <a:xfrm>
+            <a:off x="2214600" y="2606690"/>
+            <a:ext cx="1200000" cy="500000"/>
+          </a:xfrm>
+          <a:prstGeom prst="rect">
+            <a:avLst/>
+          </a:prstGeom>
+        </p:spPr>
+        <p:style>
+          <a:lnRef idx="1">
+            <a:schemeClr val="accent1"/>
+          </a:lnRef>
+          <a:fillRef idx="3">
+            <a:schemeClr val="accent1"/>
+          </a:fillRef>
+          <a:effectRef idx="2">
+            <a:schemeClr val="accent1"/>
+          </a:effectRef>
+          <a:fontRef idx="minor">
+            <a:schemeClr val="lt1"/>
+          </a:fontRef>
+        </p:style>
+        <p:txBody>
+          <a:bodyPr rtlCol="0" anchor="ctr"/>
+          <a:lstStyle/>
+          <a:p>
+            <a:r>
+              <a:rPr sz="1200"/>
+              <a:t>処理2</a:t>
+            </a:r>
+          </a:p>
+        </p:txBody>
+      </p:sp>
+      <p:sp>
+        <p:nvSpPr>
+          <p:cNvPr id="7" name="Rectangle 6"/>
+          <p:cNvSpPr/>
+          <p:nvPr/>
+        </p:nvSpPr>
+        <p:spPr>
+          <a:xfrm>
+            <a:off x="2214600" y="3109936"/>
+            <a:ext cx="1200000" cy="500000"/>
+          </a:xfrm>
+          <a:prstGeom prst="rect">
+            <a:avLst/>
+          </a:prstGeom>
+        </p:spPr>
+        <p:style>
+          <a:lnRef idx="1">
+            <a:schemeClr val="accent1"/>
+          </a:lnRef>
+          <a:fillRef idx="3">
+            <a:schemeClr val="accent1"/>
+          </a:fillRef>
+          <a:effectRef idx="2">
+            <a:schemeClr val="accent1"/>
+          </a:effectRef>
+          <a:fontRef idx="minor">
+            <a:schemeClr val="lt1"/>
+          </a:fontRef>
+        </p:style>
+        <p:txBody>
+          <a:bodyPr rtlCol="0" anchor="ctr"/>
+          <a:lstStyle/>
+          <a:p>
+            <a:r>
+              <a:rPr sz="1200"/>
+              <a:t>処理3</a:t>
+            </a:r>
+          </a:p>
+        </p:txBody>
+      </p:sp>
+      <p:sp>
+        <p:nvSpPr>
+          <p:cNvPr id="8" name="Rectangle 7"/>
+          <p:cNvSpPr/>
+          <p:nvPr/>
+        </p:nvSpPr>
+        <p:spPr>
+          <a:xfrm>
+            <a:off x="2214600" y="3613181"/>
+            <a:ext cx="1200000" cy="500000"/>
+          </a:xfrm>
+          <a:prstGeom prst="rect">
+            <a:avLst/>
+          </a:prstGeom>
+        </p:spPr>
+        <p:style>
+          <a:lnRef idx="1">
+            <a:schemeClr val="accent1"/>
+          </a:lnRef>
+          <a:fillRef idx="3">
+            <a:schemeClr val="accent1"/>
+          </a:fillRef>
+          <a:effectRef idx="2">
+            <a:schemeClr val="accent1"/>
+          </a:effectRef>
+          <a:fontRef idx="minor">
+            <a:schemeClr val="lt1"/>
+          </a:fontRef>
+        </p:style>
+        <p:txBody>
+          <a:bodyPr rtlCol="0" anchor="ctr"/>
+          <a:lstStyle/>
+          <a:p>
+            <a:r>
+              <a:rPr sz="1200"/>
+              <a:t>丸端</a:t>
+            </a:r>
+          </a:p>
+        </p:txBody>
+      </p:sp>
+      <p:sp>
+        <p:nvSpPr>
+          <p:cNvPr id="9" name="Rectangle 8"/>
+          <p:cNvSpPr/>
+          <p:nvPr/>
+        </p:nvSpPr>
+        <p:spPr>
+          <a:xfrm>
+            <a:off x="2214600" y="4116426"/>
+            <a:ext cx="1200000" cy="500000"/>
+          </a:xfrm>
+          <a:prstGeom prst="rect">
+            <a:avLst/>
+          </a:prstGeom>
+        </p:spPr>
+        <p:style>
+          <a:lnRef idx="1">
+            <a:schemeClr val="accent1"/>
+          </a:lnRef>
+          <a:fillRef idx="3">
+            <a:schemeClr val="accent1"/>
+          </a:fillRef>
+          <a:effectRef idx="2">
+            <a:schemeClr val="accent1"/>
+          </a:effectRef>
+          <a:fontRef idx="minor">
+            <a:schemeClr val="lt1"/>
+          </a:fontRef>
+        </p:style>
+        <p:txBody>
+          <a:bodyPr rtlCol="0" anchor="ctr"/>
+          <a:lstStyle/>
+          <a:p>
+            <a:r>
+              <a:rPr sz="1200"/>
+              <a:t>×端</a:t>
+            </a:r>
+          </a:p>
+        </p:txBody>
+      </p:sp>
+      <p:sp>
+        <p:nvSpPr>
+          <p:cNvPr id="10" name="Rectangle 9"/>
+          <p:cNvSpPr/>
+          <p:nvPr/>
+        </p:nvSpPr>
+        <p:spPr>
+          <a:xfrm>
+            <a:off x="2214600" y="4619672"/>
+            <a:ext cx="1200000" cy="500000"/>
+          </a:xfrm>
+          <a:prstGeom prst="rect">
+            <a:avLst/>
+          </a:prstGeom>
+        </p:spPr>
+        <p:style>
+          <a:lnRef idx="1">
+            <a:schemeClr val="accent1"/>
+          </a:lnRef>
+          <a:fillRef idx="3">
+            <a:schemeClr val="accent1"/>
+          </a:fillRef>
+          <a:effectRef idx="2">
+            <a:schemeClr val="accent1"/>
+          </a:effectRef>
+          <a:fontRef idx="minor">
+            <a:schemeClr val="lt1"/>
+          </a:fontRef>
+        </p:style>
+        <p:txBody>
+          <a:bodyPr rtlCol="0" anchor="ctr"/>
+          <a:lstStyle/>
+          <a:p>
+            <a:r>
+              <a:rPr sz="1200"/>
+              <a:t>処理4</a:t>
+            </a:r>
+          </a:p>
+        </p:txBody>
+      </p:sp>
+      <p:sp>
+        <p:nvSpPr>
+          <p:cNvPr id="11" name="Rectangle 10"/>
+          <p:cNvSpPr/>
+          <p:nvPr/>
+        </p:nvSpPr>
+        <p:spPr>
+          <a:xfrm>
+            <a:off x="2214600" y="5122917"/>
+            <a:ext cx="1200000" cy="500000"/>
+          </a:xfrm>
+          <a:prstGeom prst="rect">
+            <a:avLst/>
+          </a:prstGeom>
+        </p:spPr>
+        <p:style>
+          <a:lnRef idx="1">
+            <a:schemeClr val="accent1"/>
+          </a:lnRef>
+          <a:fillRef idx="3">
+            <a:schemeClr val="accent1"/>
+          </a:fillRef>
+          <a:effectRef idx="2">
+            <a:schemeClr val="accent1"/>
+          </a:effectRef>
+          <a:fontRef idx="minor">
+            <a:schemeClr val="lt1"/>
+          </a:fontRef>
+        </p:style>
+        <p:txBody>
+          <a:bodyPr rtlCol="0" anchor="ctr"/>
+          <a:lstStyle/>
+          <a:p>
+            <a:r>
+              <a:rPr sz="1200"/>
+              <a:t>処理5</a:t>
+            </a:r>
+          </a:p>
+        </p:txBody>
+      </p:sp>
+      <p:sp>
+        <p:nvSpPr>
+          <p:cNvPr id="12" name="Rectangle 11"/>
+          <p:cNvSpPr/>
+          <p:nvPr/>
+        </p:nvSpPr>
+        <p:spPr>
+          <a:xfrm>
+            <a:off x="2214600" y="5626163"/>
+            <a:ext cx="1200000" cy="500000"/>
+          </a:xfrm>
+          <a:prstGeom prst="rect">
+            <a:avLst/>
+          </a:prstGeom>
+        </p:spPr>
+        <p:style>
+          <a:lnRef idx="1">
+            <a:schemeClr val="accent1"/>
+          </a:lnRef>
+          <a:fillRef idx="3">
+            <a:schemeClr val="accent1"/>
+          </a:fillRef>
+          <a:effectRef idx="2">
+            <a:schemeClr val="accent1"/>
+          </a:effectRef>
+          <a:fontRef idx="minor">
+            <a:schemeClr val="lt1"/>
+          </a:fontRef>
+        </p:style>
+        <p:txBody>
+          <a:bodyPr rtlCol="0" anchor="ctr"/>
+          <a:lstStyle/>
+          <a:p>
+            <a:r>
+              <a:rPr sz="1200"/>
+              <a:t>処理5</a:t>
+            </a:r>
+          </a:p>
+        </p:txBody>
+      </p:sp>
+      <p:sp>
+        <p:nvSpPr>
+          <p:cNvPr id="13" name="Rounded Rectangle 12"/>
+          <p:cNvSpPr/>
+          <p:nvPr/>
+        </p:nvSpPr>
+        <p:spPr>
+          <a:xfrm>
+            <a:off x="5729400" y="3613181"/>
+            <a:ext cx="1200000" cy="500000"/>
+          </a:xfrm>
+          <a:prstGeom prst="roundRect">
+            <a:avLst/>
+          </a:prstGeom>
+        </p:spPr>
+        <p:style>
+          <a:lnRef idx="1">
+            <a:schemeClr val="accent1"/>
+          </a:lnRef>
+          <a:fillRef idx="3">
+            <a:schemeClr val="accent1"/>
+          </a:fillRef>
+          <a:effectRef idx="2">
+            <a:schemeClr val="accent1"/>
+          </a:effectRef>
+          <a:fontRef idx="minor">
+            <a:schemeClr val="lt1"/>
+          </a:fontRef>
+        </p:style>
+        <p:txBody>
+          <a:bodyPr rtlCol="0" anchor="ctr"/>
+          <a:lstStyle/>
+          <a:p>
+            <a:r>
+              <a:rPr sz="1200"/>
+              <a:t>終了</a:t>
+            </a:r>
+          </a:p>
+        </p:txBody>
+      </p:sp>
+      <p:cxnSp>
+        <p:nvCxnSpPr>
+          <p:cNvPr id="14" name="Connector 13"/>
+          <p:cNvCxnSpPr>
+            <a:stCxn id="4" idx="2"/>
+            <a:endCxn id="5" idx="0"/>
+          </p:cNvCxnSpPr>
+          <p:nvPr/>
+        </p:nvCxnSpPr>
+        <p:spPr>
+          <a:xfrm>
+            <a:off x="2814600" y="2100200"/>
+            <a:ext cx="0" cy="3245"/>
+          </a:xfrm>
+          <a:prstGeom prst="line">
+            <a:avLst/>
+          </a:prstGeom>
+          <a:ln>
+            <a:headEnd type="arrow" w="med" len="med"/>
+          </a:ln>
+        </p:spPr>
+        <p:style>
+          <a:lnRef idx="2">
+            <a:schemeClr val="accent1"/>
+          </a:lnRef>
+          <a:fillRef idx="0">
+            <a:schemeClr val="accent1"/>
+          </a:fillRef>
+          <a:effectRef idx="1">
+            <a:schemeClr val="accent1"/>
+          </a:effectRef>
+          <a:fontRef idx="minor">
+            <a:schemeClr val="tx1"/>
+          </a:fontRef>
+        </p:style>
+        <p:txBody>
+          <a:bodyPr anchor="ctr" wrap="square"/>
+          <a:lstStyle/>
+          <a:p>
+            <a:r>
+              <a:rPr dirty="0" sz="1000"/>
+              <a:t>通常矢印</a:t>
+            </a:r>
+          </a:p>
+        </p:txBody>
+      </p:cxnSp>
+      <p:cxnSp>
+        <p:nvCxnSpPr>
+          <p:cNvPr id="15" name="Connector 14"/>
+          <p:cNvCxnSpPr>
+            <a:stCxn id="5" idx="2"/>
+            <a:endCxn id="6" idx="0"/>
+          </p:cNvCxnSpPr>
+          <p:nvPr/>
+        </p:nvCxnSpPr>
+        <p:spPr>
+          <a:xfrm>
+            <a:off x="2814600" y="2603445"/>
+            <a:ext cx="0" cy="3245"/>
+          </a:xfrm>
+          <a:prstGeom prst="line">
+            <a:avLst/>
+          </a:prstGeom>
+          <a:ln>
+            <a:prstDash val="dash"/>
+            <a:headEnd type="arrow" w="med" len="med"/>
+          </a:ln>
+        </p:spPr>
+        <p:style>
+          <a:lnRef idx="2">
+            <a:schemeClr val="accent1"/>
+          </a:lnRef>
+          <a:fillRef idx="0">
+            <a:schemeClr val="accent1"/>
+          </a:fillRef>
+          <a:effectRef idx="1">
+            <a:schemeClr val="accent1"/>
+          </a:effectRef>
+          <a:fontRef idx="minor">
+            <a:schemeClr val="tx1"/>
+          </a:fontRef>
+        </p:style>
+        <p:txBody>
+          <a:bodyPr anchor="ctr" wrap="square"/>
+          <a:lstStyle/>
+          <a:p>
+            <a:r>
+              <a:rPr dirty="0" sz="1000"/>
+              <a:t>点線矢印</a:t>
+            </a:r>
+          </a:p>
+        </p:txBody>
+      </p:cxnSp>
+      <p:cxnSp>
+        <p:nvCxnSpPr>
+          <p:cNvPr id="16" name="Connector 15"/>
+          <p:cNvCxnSpPr>
+            <a:stCxn id="6" idx="2"/>
+            <a:endCxn id="7" idx="0"/>
+          </p:cNvCxnSpPr>
+          <p:nvPr/>
+        </p:nvCxnSpPr>
+        <p:spPr>
+          <a:xfrm>
+            <a:off x="2814600" y="3106690"/>
+            <a:ext cx="0" cy="3246"/>
+          </a:xfrm>
+          <a:prstGeom prst="line">
+            <a:avLst/>
+          </a:prstGeom>
+          <a:ln w="38100">
+            <a:headEnd type="arrow" w="med" len="med"/>
+          </a:ln>
+        </p:spPr>
+        <p:style>
+          <a:lnRef idx="2">
+            <a:schemeClr val="accent1"/>
+          </a:lnRef>
+          <a:fillRef idx="0">
+            <a:schemeClr val="accent1"/>
+          </a:fillRef>
+          <a:effectRef idx="1">
+            <a:schemeClr val="accent1"/>
+          </a:effectRef>
+          <a:fontRef idx="minor">
+            <a:schemeClr val="tx1"/>
+          </a:fontRef>
+        </p:style>
+        <p:txBody>
+          <a:bodyPr anchor="ctr" wrap="square"/>
+          <a:lstStyle/>
+          <a:p>
+            <a:r>
+              <a:rPr dirty="0" sz="1000"/>
+              <a:t>太線矢印</a:t>
+            </a:r>
+          </a:p>
+        </p:txBody>
+      </p:cxnSp>
+      <p:cxnSp>
+        <p:nvCxnSpPr>
+          <p:cNvPr id="17" name="Connector 16"/>
+          <p:cNvCxnSpPr>
+            <a:stCxn id="7" idx="2"/>
+            <a:endCxn id="8" idx="0"/>
+          </p:cNvCxnSpPr>
+          <p:nvPr/>
+        </p:nvCxnSpPr>
+        <p:spPr>
+          <a:xfrm>
+            <a:off x="2814600" y="3609936"/>
+            <a:ext cx="0" cy="3245"/>
+          </a:xfrm>
+          <a:prstGeom prst="line">
+            <a:avLst/>
+          </a:prstGeom>
+          <a:ln>
+            <a:headEnd type="oval" w="med" len="med"/>
+          </a:ln>
+        </p:spPr>
+        <p:style>
+          <a:lnRef idx="2">
+            <a:schemeClr val="accent1"/>
+          </a:lnRef>
+          <a:fillRef idx="0">
+            <a:schemeClr val="accent1"/>
+          </a:fillRef>
+          <a:effectRef idx="1">
+            <a:schemeClr val="accent1"/>
+          </a:effectRef>
+          <a:fontRef idx="minor">
+            <a:schemeClr val="tx1"/>
+          </a:fontRef>
+        </p:style>
+      </p:cxnSp>
+      <p:cxnSp>
+        <p:nvCxnSpPr>
+          <p:cNvPr id="18" name="Connector 17"/>
+          <p:cNvCxnSpPr>
+            <a:stCxn id="8" idx="2"/>
+            <a:endCxn id="9" idx="0"/>
+          </p:cNvCxnSpPr>
+          <p:nvPr/>
+        </p:nvCxnSpPr>
+        <p:spPr>
+          <a:xfrm>
+            <a:off x="2814600" y="4113181"/>
+            <a:ext cx="0" cy="3245"/>
+          </a:xfrm>
+          <a:prstGeom prst="line">
+            <a:avLst/>
+          </a:prstGeom>
+          <a:ln>
+            <a:headEnd type="arrow" w="med" len="med"/>
+          </a:ln>
+        </p:spPr>
+        <p:style>
+          <a:lnRef idx="2">
+            <a:schemeClr val="accent1"/>
+          </a:lnRef>
+          <a:fillRef idx="0">
+            <a:schemeClr val="accent1"/>
+          </a:fillRef>
+          <a:effectRef idx="1">
+            <a:schemeClr val="accent1"/>
+          </a:effectRef>
+          <a:fontRef idx="minor">
+            <a:schemeClr val="tx1"/>
+          </a:fontRef>
+        </p:style>
+      </p:cxnSp>
+      <p:cxnSp>
+        <p:nvCxnSpPr>
+          <p:cNvPr id="19" name="Connector 18"/>
+          <p:cNvCxnSpPr>
+            <a:stCxn id="9" idx="2"/>
+            <a:endCxn id="10" idx="0"/>
+          </p:cNvCxnSpPr>
+          <p:nvPr/>
+        </p:nvCxnSpPr>
+        <p:spPr>
+          <a:xfrm>
+            <a:off x="2814600" y="4616426"/>
+            <a:ext cx="0" cy="3246"/>
+          </a:xfrm>
+          <a:prstGeom prst="line">
+            <a:avLst/>
+          </a:prstGeom>
+          <a:ln>
+            <a:headEnd type="arrow" w="med" len="med"/>
+            <a:tailEnd type="arrow" w="med" len="med"/>
+          </a:ln>
+        </p:spPr>
+        <p:style>
+          <a:lnRef idx="2">
+            <a:schemeClr val="accent1"/>
+          </a:lnRef>
+          <a:fillRef idx="0">
+            <a:schemeClr val="accent1"/>
+          </a:fillRef>
+          <a:effectRef idx="1">
+            <a:schemeClr val="accent1"/>
+          </a:effectRef>
+          <a:fontRef idx="minor">
+            <a:schemeClr val="tx1"/>
+          </a:fontRef>
+        </p:style>
+        <p:txBody>
+          <a:bodyPr anchor="ctr" wrap="square"/>
+          <a:lstStyle/>
+          <a:p>
+            <a:r>
+              <a:rPr dirty="0" sz="1000"/>
+              <a:t>両方向</a:t>
+            </a:r>
+          </a:p>
+        </p:txBody>
+      </p:cxnSp>
+      <p:cxnSp>
+        <p:nvCxnSpPr>
+          <p:cNvPr id="20" name="Connector 19"/>
+          <p:cNvCxnSpPr>
+            <a:stCxn id="10" idx="2"/>
+            <a:endCxn id="11" idx="0"/>
+          </p:cNvCxnSpPr>
+          <p:nvPr/>
+        </p:nvCxnSpPr>
+        <p:spPr>
+          <a:xfrm>
+            <a:off x="2814600" y="5119672"/>
+            <a:ext cx="0" cy="3245"/>
+          </a:xfrm>
+          <a:prstGeom prst="line">
+            <a:avLst/>
+          </a:prstGeom>
+          <a:ln>
+            <a:headEnd type="arrow" w="med" len="med"/>
+          </a:ln>
+        </p:spPr>
+        <p:style>
+          <a:lnRef idx="2">
+            <a:schemeClr val="accent1"/>
+          </a:lnRef>
+          <a:fillRef idx="0">
+            <a:schemeClr val="accent1"/>
+          </a:fillRef>
+          <a:effectRef idx="1">
+            <a:schemeClr val="accent1"/>
+          </a:effectRef>
+          <a:fontRef idx="minor">
+            <a:schemeClr val="tx1"/>
+          </a:fontRef>
+        </p:style>
+      </p:cxnSp>
+      <p:cxnSp>
+        <p:nvCxnSpPr>
+          <p:cNvPr id="21" name="Connector 20"/>
+          <p:cNvCxnSpPr>
+            <a:stCxn id="11" idx="2"/>
+            <a:endCxn id="12" idx="0"/>
+          </p:cNvCxnSpPr>
+          <p:nvPr/>
+        </p:nvCxnSpPr>
+        <p:spPr>
+          <a:xfrm>
+            <a:off x="2814600" y="5622917"/>
+            <a:ext cx="0" cy="3246"/>
+          </a:xfrm>
+          <a:prstGeom prst="line">
+            <a:avLst/>
+          </a:prstGeom>
+          <a:ln>
+            <a:headEnd type="arrow" w="med" len="med"/>
+          </a:ln>
+        </p:spPr>
+        <p:style>
+          <a:lnRef idx="2">
+            <a:schemeClr val="accent1"/>
+          </a:lnRef>
+          <a:fillRef idx="0">
+            <a:schemeClr val="accent1"/>
+          </a:fillRef>
+          <a:effectRef idx="1">
+            <a:schemeClr val="accent1"/>
+          </a:effectRef>
+          <a:fontRef idx="minor">
+            <a:schemeClr val="tx1"/>
+          </a:fontRef>
+        </p:style>
+      </p:cxnSp>
+      <p:cxnSp>
+        <p:nvCxnSpPr>
+          <p:cNvPr id="22" name="Connector 21"/>
+          <p:cNvCxnSpPr>
+            <a:stCxn id="12" idx="1"/>
+            <a:endCxn id="13" idx="3"/>
+          </p:cNvCxnSpPr>
+          <p:nvPr/>
+        </p:nvCxnSpPr>
+        <p:spPr>
+          <a:xfrm flipV="1">
+            <a:off x="2214600" y="3863181"/>
+            <a:ext cx="4714800" cy="2012982"/>
+          </a:xfrm>
+          <a:prstGeom prst="line">
+            <a:avLst/>
+          </a:prstGeom>
+          <a:ln>
+            <a:headEnd type="arrow" w="med" len="med"/>
+          </a:ln>
+        </p:spPr>
+        <p:style>
+          <a:lnRef idx="2">
+            <a:schemeClr val="accent1"/>
+          </a:lnRef>
+          <a:fillRef idx="0">
+            <a:schemeClr val="accent1"/>
+          </a:fillRef>
+          <a:effectRef idx="1">
+            <a:schemeClr val="accent1"/>
+          </a:effectRef>
+          <a:fontRef idx="minor">
+            <a:schemeClr val="tx1"/>
+          </a:fontRef>
+        </p:style>
+      </p:cxnSp>
     </p:spTree>
   </p:cSld>
   <p:clrMapOvr>
@@ -6008,6 +7081,100 @@
           <a:lstStyle/>
           <a:p>
             <a:r>
+              <a:t>2. シーケンス図（Sequence Diagram）</a:t>
+            </a:r>
+          </a:p>
+        </p:txBody>
+      </p:sp>
+      <p:sp>
+        <p:nvSpPr>
+          <p:cNvPr id="3" name="Content Placeholder 2"/>
+          <p:cNvSpPr>
+            <a:spLocks noGrp="1"/>
+          </p:cNvSpPr>
+          <p:nvPr>
+            <p:ph idx="1"/>
+          </p:nvPr>
+        </p:nvSpPr>
+        <p:spPr/>
+        <p:txBody>
+          <a:bodyPr/>
+          <a:lstStyle/>
+          <a:p/>
+        </p:txBody>
+      </p:sp>
+      <p:sp>
+        <p:nvSpPr>
+          <p:cNvPr id="4" name="TextBox 3"/>
+          <p:cNvSpPr txBox="1"/>
+          <p:nvPr/>
+        </p:nvSpPr>
+        <p:spPr>
+          <a:xfrm>
+            <a:off x="457200" y="1600200"/>
+            <a:ext cx="8229600" cy="4525963"/>
+          </a:xfrm>
+          <a:prstGeom prst="rect">
+            <a:avLst/>
+          </a:prstGeom>
+          <a:noFill/>
+        </p:spPr>
+        <p:txBody>
+          <a:bodyPr wrap="square">
+            <a:spAutoFit/>
+          </a:bodyPr>
+          <a:lstStyle/>
+          <a:p>
+            <a:r>
+              <a:rPr sz="1000">
+                <a:latin typeface="Courier New"/>
+              </a:rPr>
+              <a:t>sequenceDiagram
+    participant A as クライアント
+    participant B as サーバー
+    participant C as データベース
+    A-&gt;&gt;B: リクエスト送信
+    B-&gt;&gt;C: クエリ実行
+    C--&gt;&gt;B: 結果返却
+    B--&gt;&gt;A: レスポンス返却</a:t>
+            </a:r>
+          </a:p>
+        </p:txBody>
+      </p:sp>
+    </p:spTree>
+  </p:cSld>
+  <p:clrMapOvr>
+    <a:masterClrMapping/>
+  </p:clrMapOvr>
+</p:sld>
+</file>
+
+<file path=ppt/slides/slide17.xml><?xml version="1.0" encoding="utf-8"?>
+<p:sld xmlns:a="http://schemas.openxmlformats.org/drawingml/2006/main" xmlns:p="http://schemas.openxmlformats.org/presentationml/2006/main" xmlns:r="http://schemas.openxmlformats.org/officeDocument/2006/relationships">
+  <p:cSld>
+    <p:spTree>
+      <p:nvGrpSpPr>
+        <p:cNvPr id="1" name=""/>
+        <p:cNvGrpSpPr/>
+        <p:nvPr/>
+      </p:nvGrpSpPr>
+      <p:grpSpPr/>
+      <p:sp>
+        <p:nvSpPr>
+          <p:cNvPr id="2" name="Title 1"/>
+          <p:cNvSpPr>
+            <a:spLocks noGrp="1"/>
+          </p:cNvSpPr>
+          <p:nvPr>
+            <p:ph type="title"/>
+          </p:nvPr>
+        </p:nvSpPr>
+        <p:spPr/>
+        <p:txBody>
+          <a:bodyPr/>
+          <a:lstStyle/>
+          <a:p>
+            <a:r>
               <a:t>3. ガントチャート（Gantt Diagram）</a:t>
             </a:r>
           </a:p>
@@ -6079,7 +7246,7 @@
 </p:sld>
 </file>
 
-<file path=ppt/slides/slide17.xml><?xml version="1.0" encoding="utf-8"?>
+<file path=ppt/slides/slide18.xml><?xml version="1.0" encoding="utf-8"?>
 <p:sld xmlns:a="http://schemas.openxmlformats.org/drawingml/2006/main" xmlns:p="http://schemas.openxmlformats.org/presentationml/2006/main" xmlns:r="http://schemas.openxmlformats.org/officeDocument/2006/relationships">
   <p:cSld>
     <p:spTree>
@@ -7503,7 +8670,7 @@
 </p:sld>
 </file>
 
-<file path=ppt/slides/slide18.xml><?xml version="1.0" encoding="utf-8"?>
+<file path=ppt/slides/slide19.xml><?xml version="1.0" encoding="utf-8"?>
 <p:sld xmlns:a="http://schemas.openxmlformats.org/drawingml/2006/main" xmlns:p="http://schemas.openxmlformats.org/presentationml/2006/main" xmlns:r="http://schemas.openxmlformats.org/officeDocument/2006/relationships">
   <p:cSld>
     <p:spTree>
@@ -7969,321 +9136,6 @@
           <a:xfrm>
             <a:off x="1057200" y="3850921"/>
             <a:ext cx="718318" cy="1262359"/>
-          </a:xfrm>
-          <a:prstGeom prst="line">
-            <a:avLst/>
-          </a:prstGeom>
-        </p:spPr>
-        <p:style>
-          <a:lnRef idx="2">
-            <a:schemeClr val="accent1"/>
-          </a:lnRef>
-          <a:fillRef idx="0">
-            <a:schemeClr val="accent1"/>
-          </a:fillRef>
-          <a:effectRef idx="1">
-            <a:schemeClr val="accent1"/>
-          </a:effectRef>
-          <a:fontRef idx="minor">
-            <a:schemeClr val="tx1"/>
-          </a:fontRef>
-        </p:style>
-      </p:cxnSp>
-    </p:spTree>
-  </p:cSld>
-  <p:clrMapOvr>
-    <a:masterClrMapping/>
-  </p:clrMapOvr>
-</p:sld>
-</file>
-
-<file path=ppt/slides/slide19.xml><?xml version="1.0" encoding="utf-8"?>
-<p:sld xmlns:a="http://schemas.openxmlformats.org/drawingml/2006/main" xmlns:p="http://schemas.openxmlformats.org/presentationml/2006/main" xmlns:r="http://schemas.openxmlformats.org/officeDocument/2006/relationships">
-  <p:cSld>
-    <p:spTree>
-      <p:nvGrpSpPr>
-        <p:cNvPr id="1" name=""/>
-        <p:cNvGrpSpPr/>
-        <p:nvPr/>
-      </p:nvGrpSpPr>
-      <p:grpSpPr/>
-      <p:sp>
-        <p:nvSpPr>
-          <p:cNvPr id="2" name="Title 1"/>
-          <p:cNvSpPr>
-            <a:spLocks noGrp="1"/>
-          </p:cNvSpPr>
-          <p:nvPr>
-            <p:ph type="title"/>
-          </p:nvPr>
-        </p:nvSpPr>
-        <p:spPr/>
-        <p:txBody>
-          <a:bodyPr/>
-          <a:lstStyle/>
-          <a:p>
-            <a:r>
-              <a:t>6. ER図（Entity Relationship Diagram）</a:t>
-            </a:r>
-          </a:p>
-        </p:txBody>
-      </p:sp>
-      <p:sp>
-        <p:nvSpPr>
-          <p:cNvPr id="3" name="Content Placeholder 2"/>
-          <p:cNvSpPr>
-            <a:spLocks noGrp="1"/>
-          </p:cNvSpPr>
-          <p:nvPr>
-            <p:ph idx="1"/>
-          </p:nvPr>
-        </p:nvSpPr>
-        <p:spPr/>
-        <p:txBody>
-          <a:bodyPr/>
-          <a:lstStyle/>
-          <a:p/>
-        </p:txBody>
-      </p:sp>
-      <p:sp>
-        <p:nvSpPr>
-          <p:cNvPr id="4" name="Rectangle 3"/>
-          <p:cNvSpPr/>
-          <p:nvPr/>
-        </p:nvSpPr>
-        <p:spPr>
-          <a:xfrm>
-            <a:off x="6425688" y="5513155"/>
-            <a:ext cx="1200000" cy="500000"/>
-          </a:xfrm>
-          <a:prstGeom prst="rect">
-            <a:avLst/>
-          </a:prstGeom>
-        </p:spPr>
-        <p:style>
-          <a:lnRef idx="1">
-            <a:schemeClr val="accent1"/>
-          </a:lnRef>
-          <a:fillRef idx="3">
-            <a:schemeClr val="accent1"/>
-          </a:fillRef>
-          <a:effectRef idx="2">
-            <a:schemeClr val="accent1"/>
-          </a:effectRef>
-          <a:fontRef idx="minor">
-            <a:schemeClr val="lt1"/>
-          </a:fontRef>
-        </p:style>
-        <p:txBody>
-          <a:bodyPr rtlCol="0" anchor="ctr"/>
-          <a:lstStyle/>
-          <a:p>
-            <a:r>
-              <a:rPr sz="1200"/>
-              <a:t>CUSTOMER</a:t>
-            </a:r>
-          </a:p>
-        </p:txBody>
-      </p:sp>
-      <p:sp>
-        <p:nvSpPr>
-          <p:cNvPr id="5" name="Rectangle 4"/>
-          <p:cNvSpPr/>
-          <p:nvPr/>
-        </p:nvSpPr>
-        <p:spPr>
-          <a:xfrm>
-            <a:off x="6500578" y="2848046"/>
-            <a:ext cx="1200000" cy="500000"/>
-          </a:xfrm>
-          <a:prstGeom prst="rect">
-            <a:avLst/>
-          </a:prstGeom>
-        </p:spPr>
-        <p:style>
-          <a:lnRef idx="1">
-            <a:schemeClr val="accent1"/>
-          </a:lnRef>
-          <a:fillRef idx="3">
-            <a:schemeClr val="accent1"/>
-          </a:fillRef>
-          <a:effectRef idx="2">
-            <a:schemeClr val="accent1"/>
-          </a:effectRef>
-          <a:fontRef idx="minor">
-            <a:schemeClr val="lt1"/>
-          </a:fontRef>
-        </p:style>
-        <p:txBody>
-          <a:bodyPr rtlCol="0" anchor="ctr"/>
-          <a:lstStyle/>
-          <a:p>
-            <a:r>
-              <a:rPr sz="1200"/>
-              <a:t>ORDER</a:t>
-            </a:r>
-          </a:p>
-        </p:txBody>
-      </p:sp>
-      <p:sp>
-        <p:nvSpPr>
-          <p:cNvPr id="6" name="Rectangle 5"/>
-          <p:cNvSpPr/>
-          <p:nvPr/>
-        </p:nvSpPr>
-        <p:spPr>
-          <a:xfrm>
-            <a:off x="2504533" y="1957962"/>
-            <a:ext cx="1200000" cy="500000"/>
-          </a:xfrm>
-          <a:prstGeom prst="rect">
-            <a:avLst/>
-          </a:prstGeom>
-        </p:spPr>
-        <p:style>
-          <a:lnRef idx="1">
-            <a:schemeClr val="accent1"/>
-          </a:lnRef>
-          <a:fillRef idx="3">
-            <a:schemeClr val="accent1"/>
-          </a:fillRef>
-          <a:effectRef idx="2">
-            <a:schemeClr val="accent1"/>
-          </a:effectRef>
-          <a:fontRef idx="minor">
-            <a:schemeClr val="lt1"/>
-          </a:fontRef>
-        </p:style>
-        <p:txBody>
-          <a:bodyPr rtlCol="0" anchor="ctr"/>
-          <a:lstStyle/>
-          <a:p>
-            <a:r>
-              <a:rPr sz="1200"/>
-              <a:t>LINE-ITEM</a:t>
-            </a:r>
-          </a:p>
-        </p:txBody>
-      </p:sp>
-      <p:sp>
-        <p:nvSpPr>
-          <p:cNvPr id="7" name="Rectangle 6"/>
-          <p:cNvSpPr/>
-          <p:nvPr/>
-        </p:nvSpPr>
-        <p:spPr>
-          <a:xfrm>
-            <a:off x="457200" y="4133562"/>
-            <a:ext cx="1200000" cy="500000"/>
-          </a:xfrm>
-          <a:prstGeom prst="rect">
-            <a:avLst/>
-          </a:prstGeom>
-        </p:spPr>
-        <p:style>
-          <a:lnRef idx="1">
-            <a:schemeClr val="accent1"/>
-          </a:lnRef>
-          <a:fillRef idx="3">
-            <a:schemeClr val="accent1"/>
-          </a:fillRef>
-          <a:effectRef idx="2">
-            <a:schemeClr val="accent1"/>
-          </a:effectRef>
-          <a:fontRef idx="minor">
-            <a:schemeClr val="lt1"/>
-          </a:fontRef>
-        </p:style>
-        <p:txBody>
-          <a:bodyPr rtlCol="0" anchor="ctr"/>
-          <a:lstStyle/>
-          <a:p>
-            <a:r>
-              <a:rPr sz="1200"/>
-              <a:t>PRODUCT</a:t>
-            </a:r>
-          </a:p>
-        </p:txBody>
-      </p:sp>
-      <p:cxnSp>
-        <p:nvCxnSpPr>
-          <p:cNvPr id="8" name="Connector 7"/>
-          <p:cNvCxnSpPr>
-            <a:stCxn id="4" idx="0"/>
-            <a:endCxn id="5" idx="2"/>
-          </p:cNvCxnSpPr>
-          <p:nvPr/>
-        </p:nvCxnSpPr>
-        <p:spPr>
-          <a:xfrm flipV="1">
-            <a:off x="7025688" y="3348046"/>
-            <a:ext cx="74890" cy="2165109"/>
-          </a:xfrm>
-          <a:prstGeom prst="line">
-            <a:avLst/>
-          </a:prstGeom>
-        </p:spPr>
-        <p:style>
-          <a:lnRef idx="2">
-            <a:schemeClr val="accent1"/>
-          </a:lnRef>
-          <a:fillRef idx="0">
-            <a:schemeClr val="accent1"/>
-          </a:fillRef>
-          <a:effectRef idx="1">
-            <a:schemeClr val="accent1"/>
-          </a:effectRef>
-          <a:fontRef idx="minor">
-            <a:schemeClr val="tx1"/>
-          </a:fontRef>
-        </p:style>
-      </p:cxnSp>
-      <p:cxnSp>
-        <p:nvCxnSpPr>
-          <p:cNvPr id="9" name="Connector 8"/>
-          <p:cNvCxnSpPr>
-            <a:stCxn id="5" idx="3"/>
-            <a:endCxn id="6" idx="1"/>
-          </p:cNvCxnSpPr>
-          <p:nvPr/>
-        </p:nvCxnSpPr>
-        <p:spPr>
-          <a:xfrm flipH="1" flipV="1">
-            <a:off x="2504533" y="2207962"/>
-            <a:ext cx="5196045" cy="890084"/>
-          </a:xfrm>
-          <a:prstGeom prst="line">
-            <a:avLst/>
-          </a:prstGeom>
-        </p:spPr>
-        <p:style>
-          <a:lnRef idx="2">
-            <a:schemeClr val="accent1"/>
-          </a:lnRef>
-          <a:fillRef idx="0">
-            <a:schemeClr val="accent1"/>
-          </a:fillRef>
-          <a:effectRef idx="1">
-            <a:schemeClr val="accent1"/>
-          </a:effectRef>
-          <a:fontRef idx="minor">
-            <a:schemeClr val="tx1"/>
-          </a:fontRef>
-        </p:style>
-      </p:cxnSp>
-      <p:cxnSp>
-        <p:nvCxnSpPr>
-          <p:cNvPr id="10" name="Connector 9"/>
-          <p:cNvCxnSpPr>
-            <a:stCxn id="7" idx="0"/>
-            <a:endCxn id="6" idx="2"/>
-          </p:cNvCxnSpPr>
-          <p:nvPr/>
-        </p:nvCxnSpPr>
-        <p:spPr>
-          <a:xfrm flipV="1">
-            <a:off x="1057200" y="2457962"/>
-            <a:ext cx="2047333" cy="1675600"/>
           </a:xfrm>
           <a:prstGeom prst="line">
             <a:avLst/>
@@ -8394,7 +9246,7 @@
           <a:lstStyle/>
           <a:p>
             <a:r>
-              <a:t>7. ユーザージャーニー図（User Journey）</a:t>
+              <a:t>6. ER図（Entity Relationship Diagram）</a:t>
             </a:r>
           </a:p>
         </p:txBody>
@@ -8418,44 +9270,263 @@
       </p:sp>
       <p:sp>
         <p:nvSpPr>
-          <p:cNvPr id="4" name="TextBox 3"/>
-          <p:cNvSpPr txBox="1"/>
-          <p:nvPr/>
-        </p:nvSpPr>
-        <p:spPr>
-          <a:xfrm>
-            <a:off x="457200" y="1600200"/>
-            <a:ext cx="8229600" cy="4525963"/>
+          <p:cNvPr id="4" name="Rectangle 3"/>
+          <p:cNvSpPr/>
+          <p:nvPr/>
+        </p:nvSpPr>
+        <p:spPr>
+          <a:xfrm>
+            <a:off x="6425688" y="5513155"/>
+            <a:ext cx="1200000" cy="500000"/>
           </a:xfrm>
           <a:prstGeom prst="rect">
             <a:avLst/>
           </a:prstGeom>
-          <a:noFill/>
-        </p:spPr>
-        <p:txBody>
-          <a:bodyPr wrap="square">
-            <a:spAutoFit/>
-          </a:bodyPr>
-          <a:lstStyle/>
-          <a:p>
-            <a:r>
-              <a:rPr sz="1000">
-                <a:latin typeface="Courier New"/>
-              </a:rPr>
-              <a:t>journey
-    title オンラインショッピング体験
-    section 商品探し
-        サイト訪問    : 5: ユーザー
-        検索実行      : 3: ユーザー
-        商品選択      : 4: ユーザー
-    section 購入
-        カートに追加  : 5: ユーザー
-        決済手続き    : 2: ユーザー
-        注文完了      : 5: ユーザー</a:t>
-            </a:r>
-          </a:p>
-        </p:txBody>
-      </p:sp>
+        </p:spPr>
+        <p:style>
+          <a:lnRef idx="1">
+            <a:schemeClr val="accent1"/>
+          </a:lnRef>
+          <a:fillRef idx="3">
+            <a:schemeClr val="accent1"/>
+          </a:fillRef>
+          <a:effectRef idx="2">
+            <a:schemeClr val="accent1"/>
+          </a:effectRef>
+          <a:fontRef idx="minor">
+            <a:schemeClr val="lt1"/>
+          </a:fontRef>
+        </p:style>
+        <p:txBody>
+          <a:bodyPr rtlCol="0" anchor="ctr"/>
+          <a:lstStyle/>
+          <a:p>
+            <a:r>
+              <a:rPr sz="1200"/>
+              <a:t>CUSTOMER</a:t>
+            </a:r>
+          </a:p>
+        </p:txBody>
+      </p:sp>
+      <p:sp>
+        <p:nvSpPr>
+          <p:cNvPr id="5" name="Rectangle 4"/>
+          <p:cNvSpPr/>
+          <p:nvPr/>
+        </p:nvSpPr>
+        <p:spPr>
+          <a:xfrm>
+            <a:off x="6500578" y="2848046"/>
+            <a:ext cx="1200000" cy="500000"/>
+          </a:xfrm>
+          <a:prstGeom prst="rect">
+            <a:avLst/>
+          </a:prstGeom>
+        </p:spPr>
+        <p:style>
+          <a:lnRef idx="1">
+            <a:schemeClr val="accent1"/>
+          </a:lnRef>
+          <a:fillRef idx="3">
+            <a:schemeClr val="accent1"/>
+          </a:fillRef>
+          <a:effectRef idx="2">
+            <a:schemeClr val="accent1"/>
+          </a:effectRef>
+          <a:fontRef idx="minor">
+            <a:schemeClr val="lt1"/>
+          </a:fontRef>
+        </p:style>
+        <p:txBody>
+          <a:bodyPr rtlCol="0" anchor="ctr"/>
+          <a:lstStyle/>
+          <a:p>
+            <a:r>
+              <a:rPr sz="1200"/>
+              <a:t>ORDER</a:t>
+            </a:r>
+          </a:p>
+        </p:txBody>
+      </p:sp>
+      <p:sp>
+        <p:nvSpPr>
+          <p:cNvPr id="6" name="Rectangle 5"/>
+          <p:cNvSpPr/>
+          <p:nvPr/>
+        </p:nvSpPr>
+        <p:spPr>
+          <a:xfrm>
+            <a:off x="2504533" y="1957962"/>
+            <a:ext cx="1200000" cy="500000"/>
+          </a:xfrm>
+          <a:prstGeom prst="rect">
+            <a:avLst/>
+          </a:prstGeom>
+        </p:spPr>
+        <p:style>
+          <a:lnRef idx="1">
+            <a:schemeClr val="accent1"/>
+          </a:lnRef>
+          <a:fillRef idx="3">
+            <a:schemeClr val="accent1"/>
+          </a:fillRef>
+          <a:effectRef idx="2">
+            <a:schemeClr val="accent1"/>
+          </a:effectRef>
+          <a:fontRef idx="minor">
+            <a:schemeClr val="lt1"/>
+          </a:fontRef>
+        </p:style>
+        <p:txBody>
+          <a:bodyPr rtlCol="0" anchor="ctr"/>
+          <a:lstStyle/>
+          <a:p>
+            <a:r>
+              <a:rPr sz="1200"/>
+              <a:t>LINE-ITEM</a:t>
+            </a:r>
+          </a:p>
+        </p:txBody>
+      </p:sp>
+      <p:sp>
+        <p:nvSpPr>
+          <p:cNvPr id="7" name="Rectangle 6"/>
+          <p:cNvSpPr/>
+          <p:nvPr/>
+        </p:nvSpPr>
+        <p:spPr>
+          <a:xfrm>
+            <a:off x="457200" y="4133562"/>
+            <a:ext cx="1200000" cy="500000"/>
+          </a:xfrm>
+          <a:prstGeom prst="rect">
+            <a:avLst/>
+          </a:prstGeom>
+        </p:spPr>
+        <p:style>
+          <a:lnRef idx="1">
+            <a:schemeClr val="accent1"/>
+          </a:lnRef>
+          <a:fillRef idx="3">
+            <a:schemeClr val="accent1"/>
+          </a:fillRef>
+          <a:effectRef idx="2">
+            <a:schemeClr val="accent1"/>
+          </a:effectRef>
+          <a:fontRef idx="minor">
+            <a:schemeClr val="lt1"/>
+          </a:fontRef>
+        </p:style>
+        <p:txBody>
+          <a:bodyPr rtlCol="0" anchor="ctr"/>
+          <a:lstStyle/>
+          <a:p>
+            <a:r>
+              <a:rPr sz="1200"/>
+              <a:t>PRODUCT</a:t>
+            </a:r>
+          </a:p>
+        </p:txBody>
+      </p:sp>
+      <p:cxnSp>
+        <p:nvCxnSpPr>
+          <p:cNvPr id="8" name="Connector 7"/>
+          <p:cNvCxnSpPr>
+            <a:stCxn id="4" idx="0"/>
+            <a:endCxn id="5" idx="2"/>
+          </p:cNvCxnSpPr>
+          <p:nvPr/>
+        </p:nvCxnSpPr>
+        <p:spPr>
+          <a:xfrm flipV="1">
+            <a:off x="7025688" y="3348046"/>
+            <a:ext cx="74890" cy="2165109"/>
+          </a:xfrm>
+          <a:prstGeom prst="line">
+            <a:avLst/>
+          </a:prstGeom>
+        </p:spPr>
+        <p:style>
+          <a:lnRef idx="2">
+            <a:schemeClr val="accent1"/>
+          </a:lnRef>
+          <a:fillRef idx="0">
+            <a:schemeClr val="accent1"/>
+          </a:fillRef>
+          <a:effectRef idx="1">
+            <a:schemeClr val="accent1"/>
+          </a:effectRef>
+          <a:fontRef idx="minor">
+            <a:schemeClr val="tx1"/>
+          </a:fontRef>
+        </p:style>
+      </p:cxnSp>
+      <p:cxnSp>
+        <p:nvCxnSpPr>
+          <p:cNvPr id="9" name="Connector 8"/>
+          <p:cNvCxnSpPr>
+            <a:stCxn id="5" idx="3"/>
+            <a:endCxn id="6" idx="1"/>
+          </p:cNvCxnSpPr>
+          <p:nvPr/>
+        </p:nvCxnSpPr>
+        <p:spPr>
+          <a:xfrm flipH="1" flipV="1">
+            <a:off x="2504533" y="2207962"/>
+            <a:ext cx="5196045" cy="890084"/>
+          </a:xfrm>
+          <a:prstGeom prst="line">
+            <a:avLst/>
+          </a:prstGeom>
+        </p:spPr>
+        <p:style>
+          <a:lnRef idx="2">
+            <a:schemeClr val="accent1"/>
+          </a:lnRef>
+          <a:fillRef idx="0">
+            <a:schemeClr val="accent1"/>
+          </a:fillRef>
+          <a:effectRef idx="1">
+            <a:schemeClr val="accent1"/>
+          </a:effectRef>
+          <a:fontRef idx="minor">
+            <a:schemeClr val="tx1"/>
+          </a:fontRef>
+        </p:style>
+      </p:cxnSp>
+      <p:cxnSp>
+        <p:nvCxnSpPr>
+          <p:cNvPr id="10" name="Connector 9"/>
+          <p:cNvCxnSpPr>
+            <a:stCxn id="7" idx="0"/>
+            <a:endCxn id="6" idx="2"/>
+          </p:cNvCxnSpPr>
+          <p:nvPr/>
+        </p:nvCxnSpPr>
+        <p:spPr>
+          <a:xfrm flipV="1">
+            <a:off x="1057200" y="2457962"/>
+            <a:ext cx="2047333" cy="1675600"/>
+          </a:xfrm>
+          <a:prstGeom prst="line">
+            <a:avLst/>
+          </a:prstGeom>
+        </p:spPr>
+        <p:style>
+          <a:lnRef idx="2">
+            <a:schemeClr val="accent1"/>
+          </a:lnRef>
+          <a:fillRef idx="0">
+            <a:schemeClr val="accent1"/>
+          </a:fillRef>
+          <a:effectRef idx="1">
+            <a:schemeClr val="accent1"/>
+          </a:effectRef>
+          <a:fontRef idx="minor">
+            <a:schemeClr val="tx1"/>
+          </a:fontRef>
+        </p:style>
+      </p:cxnSp>
     </p:spTree>
   </p:cSld>
   <p:clrMapOvr>
@@ -8490,7 +9561,7 @@
           <a:lstStyle/>
           <a:p>
             <a:r>
-              <a:t>8. 円グラフ（Pie Chart）</a:t>
+              <a:t>7. ユーザージャーニー図（User Journey）</a:t>
             </a:r>
           </a:p>
         </p:txBody>
@@ -8538,12 +9609,16 @@
               <a:rPr sz="1000">
                 <a:latin typeface="Courier New"/>
               </a:rPr>
-              <a:t>pie title 言語別コード比率
-    "Python" : 42
-    "TypeScript" : 28
-    "Rust" : 15
-    "Go" : 10
-    "その他" : 5</a:t>
+              <a:t>journey
+    title オンラインショッピング体験
+    section 商品探し
+        サイト訪問    : 5: ユーザー
+        検索実行      : 3: ユーザー
+        商品選択      : 4: ユーザー
+    section 購入
+        カートに追加  : 5: ユーザー
+        決済手続き    : 2: ユーザー
+        注文完了      : 5: ユーザー</a:t>
             </a:r>
           </a:p>
         </p:txBody>
@@ -8582,7 +9657,7 @@
           <a:lstStyle/>
           <a:p>
             <a:r>
-              <a:t>9. 象限チャート（Quadrant Chart）</a:t>
+              <a:t>8. 円グラフ（Pie Chart）</a:t>
             </a:r>
           </a:p>
         </p:txBody>
@@ -8630,18 +9705,12 @@
               <a:rPr sz="1000">
                 <a:latin typeface="Courier New"/>
               </a:rPr>
-              <a:t>quadrantChart
-    title 製品ポートフォリオ分析
-    x-axis 低成長 --&gt; 高成長
-    y-axis 低シェア --&gt; 高シェア
-    quadrant-1 スター
-    quadrant-2 問題児
-    quadrant-3 負け犬
-    quadrant-4 金のなる木
-    製品A: [0.7, 0.8]
-    製品B: [0.3, 0.7]
-    製品C: [0.2, 0.3]
-    製品D: [0.8, 0.3]</a:t>
+              <a:t>pie title 言語別コード比率
+    "Python" : 42
+    "TypeScript" : 28
+    "Rust" : 15
+    "Go" : 10
+    "その他" : 5</a:t>
             </a:r>
           </a:p>
         </p:txBody>
@@ -8680,7 +9749,7 @@
           <a:lstStyle/>
           <a:p>
             <a:r>
-              <a:t>10. 要件図（Requirement Diagram）</a:t>
+              <a:t>9. 象限チャート（Quadrant Chart）</a:t>
             </a:r>
           </a:p>
         </p:txBody>
@@ -8728,20 +9797,18 @@
               <a:rPr sz="1000">
                 <a:latin typeface="Courier New"/>
               </a:rPr>
-              <a:t>requirementDiagram
-    requirement test_req {
-        id: 1
-        text: システムは99.9%の可用性を持つこと
-        risk: high
-        verifymethod: test
-    }
-    functionalRequirement login_req {
-        id: 2
-        text: ユーザーはログインできること
-        risk: medium
-        verifymethod: inspection
-    }
-    test_req - traces -&gt; login_req</a:t>
+              <a:t>quadrantChart
+    title 製品ポートフォリオ分析
+    x-axis 低成長 --&gt; 高成長
+    y-axis 低シェア --&gt; 高シェア
+    quadrant-1 スター
+    quadrant-2 問題児
+    quadrant-3 負け犬
+    quadrant-4 金のなる木
+    製品A: [0.7, 0.8]
+    製品B: [0.3, 0.7]
+    製品C: [0.2, 0.3]
+    製品D: [0.8, 0.3]</a:t>
             </a:r>
           </a:p>
         </p:txBody>
@@ -8780,7 +9847,7 @@
           <a:lstStyle/>
           <a:p>
             <a:r>
-              <a:t>11. Gitグラフ（Git Graph）</a:t>
+              <a:t>10. 要件図（Requirement Diagram）</a:t>
             </a:r>
           </a:p>
         </p:txBody>
@@ -8828,16 +9895,20 @@
               <a:rPr sz="1000">
                 <a:latin typeface="Courier New"/>
               </a:rPr>
-              <a:t>gitGraph
-    commit id: "initial"
-    commit id: "feat: add login"
-    branch develop
-    checkout develop
-    commit id: "fix: typo"
-    commit id: "feat: add API"
-    checkout main
-    merge develop id: "merge develop"
-    commit id: "release: v1.0"</a:t>
+              <a:t>requirementDiagram
+    requirement test_req {
+        id: 1
+        text: システムは99.9%の可用性を持つこと
+        risk: high
+        verifymethod: test
+    }
+    functionalRequirement login_req {
+        id: 2
+        text: ユーザーはログインできること
+        risk: medium
+        verifymethod: inspection
+    }
+    test_req - traces -&gt; login_req</a:t>
             </a:r>
           </a:p>
         </p:txBody>
@@ -8876,7 +9947,7 @@
           <a:lstStyle/>
           <a:p>
             <a:r>
-              <a:t>12. マインドマップ（Mindmap）</a:t>
+              <a:t>11. Gitグラフ（Git Graph）</a:t>
             </a:r>
           </a:p>
         </p:txBody>
@@ -8900,993 +9971,44 @@
       </p:sp>
       <p:sp>
         <p:nvSpPr>
-          <p:cNvPr id="4" name="Rectangle 3"/>
-          <p:cNvSpPr/>
-          <p:nvPr/>
-        </p:nvSpPr>
-        <p:spPr>
-          <a:xfrm>
-            <a:off x="2800400" y="3424464"/>
-            <a:ext cx="1200000" cy="500000"/>
+          <p:cNvPr id="4" name="TextBox 3"/>
+          <p:cNvSpPr txBox="1"/>
+          <p:nvPr/>
+        </p:nvSpPr>
+        <p:spPr>
+          <a:xfrm>
+            <a:off x="457200" y="1600200"/>
+            <a:ext cx="8229600" cy="4525963"/>
           </a:xfrm>
           <a:prstGeom prst="rect">
             <a:avLst/>
           </a:prstGeom>
-        </p:spPr>
-        <p:style>
-          <a:lnRef idx="1">
-            <a:schemeClr val="accent1"/>
-          </a:lnRef>
-          <a:fillRef idx="3">
-            <a:schemeClr val="accent1"/>
-          </a:fillRef>
-          <a:effectRef idx="2">
-            <a:schemeClr val="accent1"/>
-          </a:effectRef>
-          <a:fontRef idx="minor">
-            <a:schemeClr val="lt1"/>
-          </a:fontRef>
-        </p:style>
-        <p:txBody>
-          <a:bodyPr rtlCol="0" anchor="ctr"/>
-          <a:lstStyle/>
-          <a:p>
-            <a:r>
-              <a:rPr sz="1200"/>
-              <a:t>qmd_to_pptx</a:t>
-            </a:r>
-          </a:p>
-        </p:txBody>
-      </p:sp>
-      <p:sp>
-        <p:nvSpPr>
-          <p:cNvPr id="5" name="Rectangle 4"/>
-          <p:cNvSpPr/>
-          <p:nvPr/>
-        </p:nvSpPr>
-        <p:spPr>
-          <a:xfrm>
-            <a:off x="5143600" y="1851822"/>
-            <a:ext cx="1200000" cy="500000"/>
-          </a:xfrm>
-          <a:prstGeom prst="rect">
-            <a:avLst/>
-          </a:prstGeom>
-        </p:spPr>
-        <p:style>
-          <a:lnRef idx="1">
-            <a:schemeClr val="accent1"/>
-          </a:lnRef>
-          <a:fillRef idx="3">
-            <a:schemeClr val="accent1"/>
-          </a:fillRef>
-          <a:effectRef idx="2">
-            <a:schemeClr val="accent1"/>
-          </a:effectRef>
-          <a:fontRef idx="minor">
-            <a:schemeClr val="lt1"/>
-          </a:fontRef>
-        </p:style>
-        <p:txBody>
-          <a:bodyPr rtlCol="0" anchor="ctr"/>
-          <a:lstStyle/>
-          <a:p>
-            <a:r>
-              <a:rPr sz="1200"/>
-              <a:t>入力形式</a:t>
-            </a:r>
-          </a:p>
-        </p:txBody>
-      </p:sp>
-      <p:sp>
-        <p:nvSpPr>
-          <p:cNvPr id="6" name="Rectangle 5"/>
-          <p:cNvSpPr/>
-          <p:nvPr/>
-        </p:nvSpPr>
-        <p:spPr>
-          <a:xfrm>
-            <a:off x="7486800" y="1600200"/>
-            <a:ext cx="1200000" cy="500000"/>
-          </a:xfrm>
-          <a:prstGeom prst="rect">
-            <a:avLst/>
-          </a:prstGeom>
-        </p:spPr>
-        <p:style>
-          <a:lnRef idx="1">
-            <a:schemeClr val="accent1"/>
-          </a:lnRef>
-          <a:fillRef idx="3">
-            <a:schemeClr val="accent1"/>
-          </a:fillRef>
-          <a:effectRef idx="2">
-            <a:schemeClr val="accent1"/>
-          </a:effectRef>
-          <a:fontRef idx="minor">
-            <a:schemeClr val="lt1"/>
-          </a:fontRef>
-        </p:style>
-        <p:txBody>
-          <a:bodyPr rtlCol="0" anchor="ctr"/>
-          <a:lstStyle/>
-          <a:p>
-            <a:r>
-              <a:rPr sz="1200"/>
-              <a:t>QMD</a:t>
-            </a:r>
-          </a:p>
-        </p:txBody>
-      </p:sp>
-      <p:sp>
-        <p:nvSpPr>
-          <p:cNvPr id="7" name="Rectangle 6"/>
-          <p:cNvSpPr/>
-          <p:nvPr/>
-        </p:nvSpPr>
-        <p:spPr>
-          <a:xfrm>
-            <a:off x="7486800" y="2103445"/>
-            <a:ext cx="1200000" cy="500000"/>
-          </a:xfrm>
-          <a:prstGeom prst="rect">
-            <a:avLst/>
-          </a:prstGeom>
-        </p:spPr>
-        <p:style>
-          <a:lnRef idx="1">
-            <a:schemeClr val="accent1"/>
-          </a:lnRef>
-          <a:fillRef idx="3">
-            <a:schemeClr val="accent1"/>
-          </a:fillRef>
-          <a:effectRef idx="2">
-            <a:schemeClr val="accent1"/>
-          </a:effectRef>
-          <a:fontRef idx="minor">
-            <a:schemeClr val="lt1"/>
-          </a:fontRef>
-        </p:style>
-        <p:txBody>
-          <a:bodyPr rtlCol="0" anchor="ctr"/>
-          <a:lstStyle/>
-          <a:p>
-            <a:r>
-              <a:rPr sz="1200"/>
-              <a:t>Markdown</a:t>
-            </a:r>
-          </a:p>
-        </p:txBody>
-      </p:sp>
-      <p:sp>
-        <p:nvSpPr>
-          <p:cNvPr id="8" name="Rectangle 7"/>
-          <p:cNvSpPr/>
-          <p:nvPr/>
-        </p:nvSpPr>
-        <p:spPr>
-          <a:xfrm>
-            <a:off x="5143600" y="2606690"/>
-            <a:ext cx="1200000" cy="500000"/>
-          </a:xfrm>
-          <a:prstGeom prst="rect">
-            <a:avLst/>
-          </a:prstGeom>
-        </p:spPr>
-        <p:style>
-          <a:lnRef idx="1">
-            <a:schemeClr val="accent1"/>
-          </a:lnRef>
-          <a:fillRef idx="3">
-            <a:schemeClr val="accent1"/>
-          </a:fillRef>
-          <a:effectRef idx="2">
-            <a:schemeClr val="accent1"/>
-          </a:effectRef>
-          <a:fontRef idx="minor">
-            <a:schemeClr val="lt1"/>
-          </a:fontRef>
-        </p:style>
-        <p:txBody>
-          <a:bodyPr rtlCol="0" anchor="ctr"/>
-          <a:lstStyle/>
-          <a:p>
-            <a:r>
-              <a:rPr sz="1200"/>
-              <a:t>出力</a:t>
-            </a:r>
-          </a:p>
-        </p:txBody>
-      </p:sp>
-      <p:sp>
-        <p:nvSpPr>
-          <p:cNvPr id="9" name="Rectangle 8"/>
-          <p:cNvSpPr/>
-          <p:nvPr/>
-        </p:nvSpPr>
-        <p:spPr>
-          <a:xfrm>
-            <a:off x="7486800" y="2606690"/>
-            <a:ext cx="1200000" cy="500000"/>
-          </a:xfrm>
-          <a:prstGeom prst="rect">
-            <a:avLst/>
-          </a:prstGeom>
-        </p:spPr>
-        <p:style>
-          <a:lnRef idx="1">
-            <a:schemeClr val="accent1"/>
-          </a:lnRef>
-          <a:fillRef idx="3">
-            <a:schemeClr val="accent1"/>
-          </a:fillRef>
-          <a:effectRef idx="2">
-            <a:schemeClr val="accent1"/>
-          </a:effectRef>
-          <a:fontRef idx="minor">
-            <a:schemeClr val="lt1"/>
-          </a:fontRef>
-        </p:style>
-        <p:txBody>
-          <a:bodyPr rtlCol="0" anchor="ctr"/>
-          <a:lstStyle/>
-          <a:p>
-            <a:r>
-              <a:rPr sz="1200"/>
-              <a:t>PPTX</a:t>
-            </a:r>
-          </a:p>
-        </p:txBody>
-      </p:sp>
-      <p:sp>
-        <p:nvSpPr>
-          <p:cNvPr id="10" name="Rectangle 9"/>
-          <p:cNvSpPr/>
-          <p:nvPr/>
-        </p:nvSpPr>
-        <p:spPr>
-          <a:xfrm>
-            <a:off x="5143600" y="3864804"/>
-            <a:ext cx="1200000" cy="500000"/>
-          </a:xfrm>
-          <a:prstGeom prst="rect">
-            <a:avLst/>
-          </a:prstGeom>
-        </p:spPr>
-        <p:style>
-          <a:lnRef idx="1">
-            <a:schemeClr val="accent1"/>
-          </a:lnRef>
-          <a:fillRef idx="3">
-            <a:schemeClr val="accent1"/>
-          </a:fillRef>
-          <a:effectRef idx="2">
-            <a:schemeClr val="accent1"/>
-          </a:effectRef>
-          <a:fontRef idx="minor">
-            <a:schemeClr val="lt1"/>
-          </a:fontRef>
-        </p:style>
-        <p:txBody>
-          <a:bodyPr rtlCol="0" anchor="ctr"/>
-          <a:lstStyle/>
-          <a:p>
-            <a:r>
-              <a:rPr sz="1200"/>
-              <a:t>機能</a:t>
-            </a:r>
-          </a:p>
-        </p:txBody>
-      </p:sp>
-      <p:sp>
-        <p:nvSpPr>
-          <p:cNvPr id="11" name="Rectangle 10"/>
-          <p:cNvSpPr/>
-          <p:nvPr/>
-        </p:nvSpPr>
-        <p:spPr>
-          <a:xfrm>
-            <a:off x="7486800" y="3109936"/>
-            <a:ext cx="1200000" cy="500000"/>
-          </a:xfrm>
-          <a:prstGeom prst="rect">
-            <a:avLst/>
-          </a:prstGeom>
-        </p:spPr>
-        <p:style>
-          <a:lnRef idx="1">
-            <a:schemeClr val="accent1"/>
-          </a:lnRef>
-          <a:fillRef idx="3">
-            <a:schemeClr val="accent1"/>
-          </a:fillRef>
-          <a:effectRef idx="2">
-            <a:schemeClr val="accent1"/>
-          </a:effectRef>
-          <a:fontRef idx="minor">
-            <a:schemeClr val="lt1"/>
-          </a:fontRef>
-        </p:style>
-        <p:txBody>
-          <a:bodyPr rtlCol="0" anchor="ctr"/>
-          <a:lstStyle/>
-          <a:p>
-            <a:r>
-              <a:rPr sz="1200"/>
-              <a:t>数式</a:t>
-            </a:r>
-          </a:p>
-        </p:txBody>
-      </p:sp>
-      <p:sp>
-        <p:nvSpPr>
-          <p:cNvPr id="12" name="Rectangle 11"/>
-          <p:cNvSpPr/>
-          <p:nvPr/>
-        </p:nvSpPr>
-        <p:spPr>
-          <a:xfrm>
-            <a:off x="7486800" y="3613181"/>
-            <a:ext cx="1200000" cy="500000"/>
-          </a:xfrm>
-          <a:prstGeom prst="rect">
-            <a:avLst/>
-          </a:prstGeom>
-        </p:spPr>
-        <p:style>
-          <a:lnRef idx="1">
-            <a:schemeClr val="accent1"/>
-          </a:lnRef>
-          <a:fillRef idx="3">
-            <a:schemeClr val="accent1"/>
-          </a:fillRef>
-          <a:effectRef idx="2">
-            <a:schemeClr val="accent1"/>
-          </a:effectRef>
-          <a:fontRef idx="minor">
-            <a:schemeClr val="lt1"/>
-          </a:fontRef>
-        </p:style>
-        <p:txBody>
-          <a:bodyPr rtlCol="0" anchor="ctr"/>
-          <a:lstStyle/>
-          <a:p>
-            <a:r>
-              <a:rPr sz="1200"/>
-              <a:t>Mermaid図</a:t>
-            </a:r>
-          </a:p>
-        </p:txBody>
-      </p:sp>
-      <p:sp>
-        <p:nvSpPr>
-          <p:cNvPr id="13" name="Rectangle 12"/>
-          <p:cNvSpPr/>
-          <p:nvPr/>
-        </p:nvSpPr>
-        <p:spPr>
-          <a:xfrm>
-            <a:off x="7486800" y="4116426"/>
-            <a:ext cx="1200000" cy="500000"/>
-          </a:xfrm>
-          <a:prstGeom prst="rect">
-            <a:avLst/>
-          </a:prstGeom>
-        </p:spPr>
-        <p:style>
-          <a:lnRef idx="1">
-            <a:schemeClr val="accent1"/>
-          </a:lnRef>
-          <a:fillRef idx="3">
-            <a:schemeClr val="accent1"/>
-          </a:fillRef>
-          <a:effectRef idx="2">
-            <a:schemeClr val="accent1"/>
-          </a:effectRef>
-          <a:fontRef idx="minor">
-            <a:schemeClr val="lt1"/>
-          </a:fontRef>
-        </p:style>
-        <p:txBody>
-          <a:bodyPr rtlCol="0" anchor="ctr"/>
-          <a:lstStyle/>
-          <a:p>
-            <a:r>
-              <a:rPr sz="1200"/>
-              <a:t>テーブル</a:t>
-            </a:r>
-          </a:p>
-        </p:txBody>
-      </p:sp>
-      <p:sp>
-        <p:nvSpPr>
-          <p:cNvPr id="14" name="Rectangle 13"/>
-          <p:cNvSpPr/>
-          <p:nvPr/>
-        </p:nvSpPr>
-        <p:spPr>
-          <a:xfrm>
-            <a:off x="7486800" y="4619672"/>
-            <a:ext cx="1200000" cy="500000"/>
-          </a:xfrm>
-          <a:prstGeom prst="rect">
-            <a:avLst/>
-          </a:prstGeom>
-        </p:spPr>
-        <p:style>
-          <a:lnRef idx="1">
-            <a:schemeClr val="accent1"/>
-          </a:lnRef>
-          <a:fillRef idx="3">
-            <a:schemeClr val="accent1"/>
-          </a:fillRef>
-          <a:effectRef idx="2">
-            <a:schemeClr val="accent1"/>
-          </a:effectRef>
-          <a:fontRef idx="minor">
-            <a:schemeClr val="lt1"/>
-          </a:fontRef>
-        </p:style>
-        <p:txBody>
-          <a:bodyPr rtlCol="0" anchor="ctr"/>
-          <a:lstStyle/>
-          <a:p>
-            <a:r>
-              <a:rPr sz="1200"/>
-              <a:t>コード</a:t>
-            </a:r>
-          </a:p>
-        </p:txBody>
-      </p:sp>
-      <p:sp>
-        <p:nvSpPr>
-          <p:cNvPr id="15" name="Rectangle 14"/>
-          <p:cNvSpPr/>
-          <p:nvPr/>
-        </p:nvSpPr>
-        <p:spPr>
-          <a:xfrm>
-            <a:off x="5143600" y="5374540"/>
-            <a:ext cx="1200000" cy="500000"/>
-          </a:xfrm>
-          <a:prstGeom prst="rect">
-            <a:avLst/>
-          </a:prstGeom>
-        </p:spPr>
-        <p:style>
-          <a:lnRef idx="1">
-            <a:schemeClr val="accent1"/>
-          </a:lnRef>
-          <a:fillRef idx="3">
-            <a:schemeClr val="accent1"/>
-          </a:fillRef>
-          <a:effectRef idx="2">
-            <a:schemeClr val="accent1"/>
-          </a:effectRef>
-          <a:fontRef idx="minor">
-            <a:schemeClr val="lt1"/>
-          </a:fontRef>
-        </p:style>
-        <p:txBody>
-          <a:bodyPr rtlCol="0" anchor="ctr"/>
-          <a:lstStyle/>
-          <a:p>
-            <a:r>
-              <a:rPr sz="1200"/>
-              <a:t>利用方法</a:t>
-            </a:r>
-          </a:p>
-        </p:txBody>
-      </p:sp>
-      <p:sp>
-        <p:nvSpPr>
-          <p:cNvPr id="16" name="Rectangle 15"/>
-          <p:cNvSpPr/>
-          <p:nvPr/>
-        </p:nvSpPr>
-        <p:spPr>
-          <a:xfrm>
-            <a:off x="7486800" y="5122917"/>
-            <a:ext cx="1200000" cy="500000"/>
-          </a:xfrm>
-          <a:prstGeom prst="rect">
-            <a:avLst/>
-          </a:prstGeom>
-        </p:spPr>
-        <p:style>
-          <a:lnRef idx="1">
-            <a:schemeClr val="accent1"/>
-          </a:lnRef>
-          <a:fillRef idx="3">
-            <a:schemeClr val="accent1"/>
-          </a:fillRef>
-          <a:effectRef idx="2">
-            <a:schemeClr val="accent1"/>
-          </a:effectRef>
-          <a:fontRef idx="minor">
-            <a:schemeClr val="lt1"/>
-          </a:fontRef>
-        </p:style>
-        <p:txBody>
-          <a:bodyPr rtlCol="0" anchor="ctr"/>
-          <a:lstStyle/>
-          <a:p>
-            <a:r>
-              <a:rPr sz="1200"/>
-              <a:t>ライブラリ</a:t>
-            </a:r>
-          </a:p>
-        </p:txBody>
-      </p:sp>
-      <p:sp>
-        <p:nvSpPr>
-          <p:cNvPr id="17" name="Rectangle 16"/>
-          <p:cNvSpPr/>
-          <p:nvPr/>
-        </p:nvSpPr>
-        <p:spPr>
-          <a:xfrm>
-            <a:off x="7486800" y="5626163"/>
-            <a:ext cx="1200000" cy="500000"/>
-          </a:xfrm>
-          <a:prstGeom prst="rect">
-            <a:avLst/>
-          </a:prstGeom>
-        </p:spPr>
-        <p:style>
-          <a:lnRef idx="1">
-            <a:schemeClr val="accent1"/>
-          </a:lnRef>
-          <a:fillRef idx="3">
-            <a:schemeClr val="accent1"/>
-          </a:fillRef>
-          <a:effectRef idx="2">
-            <a:schemeClr val="accent1"/>
-          </a:effectRef>
-          <a:fontRef idx="minor">
-            <a:schemeClr val="lt1"/>
-          </a:fontRef>
-        </p:style>
-        <p:txBody>
-          <a:bodyPr rtlCol="0" anchor="ctr"/>
-          <a:lstStyle/>
-          <a:p>
-            <a:r>
-              <a:rPr sz="1200"/>
-              <a:t>MCPサーバー</a:t>
-            </a:r>
-          </a:p>
-        </p:txBody>
-      </p:sp>
-      <p:cxnSp>
-        <p:nvCxnSpPr>
-          <p:cNvPr id="18" name="Connector 17"/>
-          <p:cNvCxnSpPr>
-            <a:stCxn id="4" idx="0"/>
-            <a:endCxn id="5" idx="2"/>
-          </p:cNvCxnSpPr>
-          <p:nvPr/>
-        </p:nvCxnSpPr>
-        <p:spPr>
-          <a:xfrm flipV="1">
-            <a:off x="3400400" y="2351822"/>
-            <a:ext cx="2343200" cy="1072642"/>
-          </a:xfrm>
-          <a:prstGeom prst="line">
-            <a:avLst/>
-          </a:prstGeom>
-        </p:spPr>
-        <p:style>
-          <a:lnRef idx="2">
-            <a:schemeClr val="accent1"/>
-          </a:lnRef>
-          <a:fillRef idx="0">
-            <a:schemeClr val="accent1"/>
-          </a:fillRef>
-          <a:effectRef idx="1">
-            <a:schemeClr val="accent1"/>
-          </a:effectRef>
-          <a:fontRef idx="minor">
-            <a:schemeClr val="tx1"/>
-          </a:fontRef>
-        </p:style>
-      </p:cxnSp>
-      <p:cxnSp>
-        <p:nvCxnSpPr>
-          <p:cNvPr id="19" name="Connector 18"/>
-          <p:cNvCxnSpPr>
-            <a:stCxn id="5" idx="1"/>
-            <a:endCxn id="6" idx="3"/>
-          </p:cNvCxnSpPr>
-          <p:nvPr/>
-        </p:nvCxnSpPr>
-        <p:spPr>
-          <a:xfrm flipV="1">
-            <a:off x="5143600" y="1850200"/>
-            <a:ext cx="3543200" cy="251622"/>
-          </a:xfrm>
-          <a:prstGeom prst="line">
-            <a:avLst/>
-          </a:prstGeom>
-        </p:spPr>
-        <p:style>
-          <a:lnRef idx="2">
-            <a:schemeClr val="accent1"/>
-          </a:lnRef>
-          <a:fillRef idx="0">
-            <a:schemeClr val="accent1"/>
-          </a:fillRef>
-          <a:effectRef idx="1">
-            <a:schemeClr val="accent1"/>
-          </a:effectRef>
-          <a:fontRef idx="minor">
-            <a:schemeClr val="tx1"/>
-          </a:fontRef>
-        </p:style>
-      </p:cxnSp>
-      <p:cxnSp>
-        <p:nvCxnSpPr>
-          <p:cNvPr id="20" name="Connector 19"/>
-          <p:cNvCxnSpPr>
-            <a:stCxn id="5" idx="1"/>
-            <a:endCxn id="7" idx="3"/>
-          </p:cNvCxnSpPr>
-          <p:nvPr/>
-        </p:nvCxnSpPr>
-        <p:spPr>
-          <a:xfrm>
-            <a:off x="5143600" y="2101822"/>
-            <a:ext cx="3543200" cy="251623"/>
-          </a:xfrm>
-          <a:prstGeom prst="line">
-            <a:avLst/>
-          </a:prstGeom>
-        </p:spPr>
-        <p:style>
-          <a:lnRef idx="2">
-            <a:schemeClr val="accent1"/>
-          </a:lnRef>
-          <a:fillRef idx="0">
-            <a:schemeClr val="accent1"/>
-          </a:fillRef>
-          <a:effectRef idx="1">
-            <a:schemeClr val="accent1"/>
-          </a:effectRef>
-          <a:fontRef idx="minor">
-            <a:schemeClr val="tx1"/>
-          </a:fontRef>
-        </p:style>
-      </p:cxnSp>
-      <p:cxnSp>
-        <p:nvCxnSpPr>
-          <p:cNvPr id="21" name="Connector 20"/>
-          <p:cNvCxnSpPr>
-            <a:stCxn id="4" idx="1"/>
-            <a:endCxn id="8" idx="3"/>
-          </p:cNvCxnSpPr>
-          <p:nvPr/>
-        </p:nvCxnSpPr>
-        <p:spPr>
-          <a:xfrm flipV="1">
-            <a:off x="2800400" y="2856690"/>
-            <a:ext cx="3543200" cy="817774"/>
-          </a:xfrm>
-          <a:prstGeom prst="line">
-            <a:avLst/>
-          </a:prstGeom>
-        </p:spPr>
-        <p:style>
-          <a:lnRef idx="2">
-            <a:schemeClr val="accent1"/>
-          </a:lnRef>
-          <a:fillRef idx="0">
-            <a:schemeClr val="accent1"/>
-          </a:fillRef>
-          <a:effectRef idx="1">
-            <a:schemeClr val="accent1"/>
-          </a:effectRef>
-          <a:fontRef idx="minor">
-            <a:schemeClr val="tx1"/>
-          </a:fontRef>
-        </p:style>
-      </p:cxnSp>
-      <p:cxnSp>
-        <p:nvCxnSpPr>
-          <p:cNvPr id="22" name="Connector 21"/>
-          <p:cNvCxnSpPr>
-            <a:stCxn id="8" idx="1"/>
-            <a:endCxn id="9" idx="3"/>
-          </p:cNvCxnSpPr>
-          <p:nvPr/>
-        </p:nvCxnSpPr>
-        <p:spPr>
-          <a:xfrm>
-            <a:off x="5143600" y="2856690"/>
-            <a:ext cx="3543200" cy="0"/>
-          </a:xfrm>
-          <a:prstGeom prst="line">
-            <a:avLst/>
-          </a:prstGeom>
-        </p:spPr>
-        <p:style>
-          <a:lnRef idx="2">
-            <a:schemeClr val="accent1"/>
-          </a:lnRef>
-          <a:fillRef idx="0">
-            <a:schemeClr val="accent1"/>
-          </a:fillRef>
-          <a:effectRef idx="1">
-            <a:schemeClr val="accent1"/>
-          </a:effectRef>
-          <a:fontRef idx="minor">
-            <a:schemeClr val="tx1"/>
-          </a:fontRef>
-        </p:style>
-      </p:cxnSp>
-      <p:cxnSp>
-        <p:nvCxnSpPr>
-          <p:cNvPr id="23" name="Connector 22"/>
-          <p:cNvCxnSpPr>
-            <a:stCxn id="4" idx="1"/>
-            <a:endCxn id="10" idx="3"/>
-          </p:cNvCxnSpPr>
-          <p:nvPr/>
-        </p:nvCxnSpPr>
-        <p:spPr>
-          <a:xfrm>
-            <a:off x="2800400" y="3674464"/>
-            <a:ext cx="3543200" cy="440340"/>
-          </a:xfrm>
-          <a:prstGeom prst="line">
-            <a:avLst/>
-          </a:prstGeom>
-        </p:spPr>
-        <p:style>
-          <a:lnRef idx="2">
-            <a:schemeClr val="accent1"/>
-          </a:lnRef>
-          <a:fillRef idx="0">
-            <a:schemeClr val="accent1"/>
-          </a:fillRef>
-          <a:effectRef idx="1">
-            <a:schemeClr val="accent1"/>
-          </a:effectRef>
-          <a:fontRef idx="minor">
-            <a:schemeClr val="tx1"/>
-          </a:fontRef>
-        </p:style>
-      </p:cxnSp>
-      <p:cxnSp>
-        <p:nvCxnSpPr>
-          <p:cNvPr id="24" name="Connector 23"/>
-          <p:cNvCxnSpPr>
-            <a:stCxn id="10" idx="1"/>
-            <a:endCxn id="11" idx="3"/>
-          </p:cNvCxnSpPr>
-          <p:nvPr/>
-        </p:nvCxnSpPr>
-        <p:spPr>
-          <a:xfrm flipV="1">
-            <a:off x="5143600" y="3359936"/>
-            <a:ext cx="3543200" cy="754868"/>
-          </a:xfrm>
-          <a:prstGeom prst="line">
-            <a:avLst/>
-          </a:prstGeom>
-        </p:spPr>
-        <p:style>
-          <a:lnRef idx="2">
-            <a:schemeClr val="accent1"/>
-          </a:lnRef>
-          <a:fillRef idx="0">
-            <a:schemeClr val="accent1"/>
-          </a:fillRef>
-          <a:effectRef idx="1">
-            <a:schemeClr val="accent1"/>
-          </a:effectRef>
-          <a:fontRef idx="minor">
-            <a:schemeClr val="tx1"/>
-          </a:fontRef>
-        </p:style>
-      </p:cxnSp>
-      <p:cxnSp>
-        <p:nvCxnSpPr>
-          <p:cNvPr id="25" name="Connector 24"/>
-          <p:cNvCxnSpPr>
-            <a:stCxn id="10" idx="1"/>
-            <a:endCxn id="12" idx="3"/>
-          </p:cNvCxnSpPr>
-          <p:nvPr/>
-        </p:nvCxnSpPr>
-        <p:spPr>
-          <a:xfrm flipV="1">
-            <a:off x="5143600" y="3863181"/>
-            <a:ext cx="3543200" cy="251623"/>
-          </a:xfrm>
-          <a:prstGeom prst="line">
-            <a:avLst/>
-          </a:prstGeom>
-        </p:spPr>
-        <p:style>
-          <a:lnRef idx="2">
-            <a:schemeClr val="accent1"/>
-          </a:lnRef>
-          <a:fillRef idx="0">
-            <a:schemeClr val="accent1"/>
-          </a:fillRef>
-          <a:effectRef idx="1">
-            <a:schemeClr val="accent1"/>
-          </a:effectRef>
-          <a:fontRef idx="minor">
-            <a:schemeClr val="tx1"/>
-          </a:fontRef>
-        </p:style>
-      </p:cxnSp>
-      <p:cxnSp>
-        <p:nvCxnSpPr>
-          <p:cNvPr id="26" name="Connector 25"/>
-          <p:cNvCxnSpPr>
-            <a:stCxn id="10" idx="1"/>
-            <a:endCxn id="13" idx="3"/>
-          </p:cNvCxnSpPr>
-          <p:nvPr/>
-        </p:nvCxnSpPr>
-        <p:spPr>
-          <a:xfrm>
-            <a:off x="5143600" y="4114804"/>
-            <a:ext cx="3543200" cy="251622"/>
-          </a:xfrm>
-          <a:prstGeom prst="line">
-            <a:avLst/>
-          </a:prstGeom>
-        </p:spPr>
-        <p:style>
-          <a:lnRef idx="2">
-            <a:schemeClr val="accent1"/>
-          </a:lnRef>
-          <a:fillRef idx="0">
-            <a:schemeClr val="accent1"/>
-          </a:fillRef>
-          <a:effectRef idx="1">
-            <a:schemeClr val="accent1"/>
-          </a:effectRef>
-          <a:fontRef idx="minor">
-            <a:schemeClr val="tx1"/>
-          </a:fontRef>
-        </p:style>
-      </p:cxnSp>
-      <p:cxnSp>
-        <p:nvCxnSpPr>
-          <p:cNvPr id="27" name="Connector 26"/>
-          <p:cNvCxnSpPr>
-            <a:stCxn id="10" idx="1"/>
-            <a:endCxn id="14" idx="3"/>
-          </p:cNvCxnSpPr>
-          <p:nvPr/>
-        </p:nvCxnSpPr>
-        <p:spPr>
-          <a:xfrm>
-            <a:off x="5143600" y="4114804"/>
-            <a:ext cx="3543200" cy="754868"/>
-          </a:xfrm>
-          <a:prstGeom prst="line">
-            <a:avLst/>
-          </a:prstGeom>
-        </p:spPr>
-        <p:style>
-          <a:lnRef idx="2">
-            <a:schemeClr val="accent1"/>
-          </a:lnRef>
-          <a:fillRef idx="0">
-            <a:schemeClr val="accent1"/>
-          </a:fillRef>
-          <a:effectRef idx="1">
-            <a:schemeClr val="accent1"/>
-          </a:effectRef>
-          <a:fontRef idx="minor">
-            <a:schemeClr val="tx1"/>
-          </a:fontRef>
-        </p:style>
-      </p:cxnSp>
-      <p:cxnSp>
-        <p:nvCxnSpPr>
-          <p:cNvPr id="28" name="Connector 27"/>
-          <p:cNvCxnSpPr>
-            <a:stCxn id="4" idx="2"/>
-            <a:endCxn id="15" idx="0"/>
-          </p:cNvCxnSpPr>
-          <p:nvPr/>
-        </p:nvCxnSpPr>
-        <p:spPr>
-          <a:xfrm>
-            <a:off x="3400400" y="3924464"/>
-            <a:ext cx="2343200" cy="1450076"/>
-          </a:xfrm>
-          <a:prstGeom prst="line">
-            <a:avLst/>
-          </a:prstGeom>
-        </p:spPr>
-        <p:style>
-          <a:lnRef idx="2">
-            <a:schemeClr val="accent1"/>
-          </a:lnRef>
-          <a:fillRef idx="0">
-            <a:schemeClr val="accent1"/>
-          </a:fillRef>
-          <a:effectRef idx="1">
-            <a:schemeClr val="accent1"/>
-          </a:effectRef>
-          <a:fontRef idx="minor">
-            <a:schemeClr val="tx1"/>
-          </a:fontRef>
-        </p:style>
-      </p:cxnSp>
-      <p:cxnSp>
-        <p:nvCxnSpPr>
-          <p:cNvPr id="29" name="Connector 28"/>
-          <p:cNvCxnSpPr>
-            <a:stCxn id="15" idx="1"/>
-            <a:endCxn id="16" idx="3"/>
-          </p:cNvCxnSpPr>
-          <p:nvPr/>
-        </p:nvCxnSpPr>
-        <p:spPr>
-          <a:xfrm flipV="1">
-            <a:off x="5143600" y="5372917"/>
-            <a:ext cx="3543200" cy="251623"/>
-          </a:xfrm>
-          <a:prstGeom prst="line">
-            <a:avLst/>
-          </a:prstGeom>
-        </p:spPr>
-        <p:style>
-          <a:lnRef idx="2">
-            <a:schemeClr val="accent1"/>
-          </a:lnRef>
-          <a:fillRef idx="0">
-            <a:schemeClr val="accent1"/>
-          </a:fillRef>
-          <a:effectRef idx="1">
-            <a:schemeClr val="accent1"/>
-          </a:effectRef>
-          <a:fontRef idx="minor">
-            <a:schemeClr val="tx1"/>
-          </a:fontRef>
-        </p:style>
-      </p:cxnSp>
-      <p:cxnSp>
-        <p:nvCxnSpPr>
-          <p:cNvPr id="30" name="Connector 29"/>
-          <p:cNvCxnSpPr>
-            <a:stCxn id="15" idx="1"/>
-            <a:endCxn id="17" idx="3"/>
-          </p:cNvCxnSpPr>
-          <p:nvPr/>
-        </p:nvCxnSpPr>
-        <p:spPr>
-          <a:xfrm>
-            <a:off x="5143600" y="5624540"/>
-            <a:ext cx="3543200" cy="251623"/>
-          </a:xfrm>
-          <a:prstGeom prst="line">
-            <a:avLst/>
-          </a:prstGeom>
-        </p:spPr>
-        <p:style>
-          <a:lnRef idx="2">
-            <a:schemeClr val="accent1"/>
-          </a:lnRef>
-          <a:fillRef idx="0">
-            <a:schemeClr val="accent1"/>
-          </a:fillRef>
-          <a:effectRef idx="1">
-            <a:schemeClr val="accent1"/>
-          </a:effectRef>
-          <a:fontRef idx="minor">
-            <a:schemeClr val="tx1"/>
-          </a:fontRef>
-        </p:style>
-      </p:cxnSp>
+          <a:noFill/>
+        </p:spPr>
+        <p:txBody>
+          <a:bodyPr wrap="square">
+            <a:spAutoFit/>
+          </a:bodyPr>
+          <a:lstStyle/>
+          <a:p>
+            <a:r>
+              <a:rPr sz="1000">
+                <a:latin typeface="Courier New"/>
+              </a:rPr>
+              <a:t>gitGraph
+    commit id: "initial"
+    commit id: "feat: add login"
+    branch develop
+    checkout develop
+    commit id: "fix: typo"
+    commit id: "feat: add API"
+    checkout main
+    merge develop id: "merge develop"
+    commit id: "release: v1.0"</a:t>
+            </a:r>
+          </a:p>
+        </p:txBody>
+      </p:sp>
     </p:spTree>
   </p:cSld>
   <p:clrMapOvr>
@@ -9921,7 +10043,7 @@
           <a:lstStyle/>
           <a:p>
             <a:r>
-              <a:t>13. タイムライン（Timeline）</a:t>
+              <a:t>12. マインドマップ（Mindmap）</a:t>
             </a:r>
           </a:p>
         </p:txBody>
@@ -9945,47 +10067,993 @@
       </p:sp>
       <p:sp>
         <p:nvSpPr>
-          <p:cNvPr id="4" name="TextBox 3"/>
-          <p:cNvSpPr txBox="1"/>
-          <p:nvPr/>
-        </p:nvSpPr>
-        <p:spPr>
-          <a:xfrm>
-            <a:off x="457200" y="1600200"/>
-            <a:ext cx="8229600" cy="4525963"/>
+          <p:cNvPr id="4" name="Rectangle 3"/>
+          <p:cNvSpPr/>
+          <p:nvPr/>
+        </p:nvSpPr>
+        <p:spPr>
+          <a:xfrm>
+            <a:off x="2800400" y="3424464"/>
+            <a:ext cx="1200000" cy="500000"/>
           </a:xfrm>
           <a:prstGeom prst="rect">
             <a:avLst/>
           </a:prstGeom>
-          <a:noFill/>
-        </p:spPr>
-        <p:txBody>
-          <a:bodyPr wrap="square">
-            <a:spAutoFit/>
-          </a:bodyPr>
-          <a:lstStyle/>
-          <a:p>
-            <a:r>
-              <a:rPr sz="1000">
-                <a:latin typeface="Courier New"/>
-              </a:rPr>
-              <a:t>timeline
-    title ソフトウェア開発史
-    1960 : アセンブリ言語
-    1970 : C言語
-         : Unix
-    1980 : C++
-         : Macintosh
-    1990 : Java
-         : World Wide Web
-    2000 : Python普及
-         : Agile開発
-    2010 : クラウドコンピューティング
-    2020 : AI・機械学習</a:t>
-            </a:r>
-          </a:p>
-        </p:txBody>
-      </p:sp>
+        </p:spPr>
+        <p:style>
+          <a:lnRef idx="1">
+            <a:schemeClr val="accent1"/>
+          </a:lnRef>
+          <a:fillRef idx="3">
+            <a:schemeClr val="accent1"/>
+          </a:fillRef>
+          <a:effectRef idx="2">
+            <a:schemeClr val="accent1"/>
+          </a:effectRef>
+          <a:fontRef idx="minor">
+            <a:schemeClr val="lt1"/>
+          </a:fontRef>
+        </p:style>
+        <p:txBody>
+          <a:bodyPr rtlCol="0" anchor="ctr"/>
+          <a:lstStyle/>
+          <a:p>
+            <a:r>
+              <a:rPr sz="1200"/>
+              <a:t>qmd_to_pptx</a:t>
+            </a:r>
+          </a:p>
+        </p:txBody>
+      </p:sp>
+      <p:sp>
+        <p:nvSpPr>
+          <p:cNvPr id="5" name="Rectangle 4"/>
+          <p:cNvSpPr/>
+          <p:nvPr/>
+        </p:nvSpPr>
+        <p:spPr>
+          <a:xfrm>
+            <a:off x="5143600" y="1851822"/>
+            <a:ext cx="1200000" cy="500000"/>
+          </a:xfrm>
+          <a:prstGeom prst="rect">
+            <a:avLst/>
+          </a:prstGeom>
+        </p:spPr>
+        <p:style>
+          <a:lnRef idx="1">
+            <a:schemeClr val="accent1"/>
+          </a:lnRef>
+          <a:fillRef idx="3">
+            <a:schemeClr val="accent1"/>
+          </a:fillRef>
+          <a:effectRef idx="2">
+            <a:schemeClr val="accent1"/>
+          </a:effectRef>
+          <a:fontRef idx="minor">
+            <a:schemeClr val="lt1"/>
+          </a:fontRef>
+        </p:style>
+        <p:txBody>
+          <a:bodyPr rtlCol="0" anchor="ctr"/>
+          <a:lstStyle/>
+          <a:p>
+            <a:r>
+              <a:rPr sz="1200"/>
+              <a:t>入力形式</a:t>
+            </a:r>
+          </a:p>
+        </p:txBody>
+      </p:sp>
+      <p:sp>
+        <p:nvSpPr>
+          <p:cNvPr id="6" name="Rectangle 5"/>
+          <p:cNvSpPr/>
+          <p:nvPr/>
+        </p:nvSpPr>
+        <p:spPr>
+          <a:xfrm>
+            <a:off x="7486800" y="1600200"/>
+            <a:ext cx="1200000" cy="500000"/>
+          </a:xfrm>
+          <a:prstGeom prst="rect">
+            <a:avLst/>
+          </a:prstGeom>
+        </p:spPr>
+        <p:style>
+          <a:lnRef idx="1">
+            <a:schemeClr val="accent1"/>
+          </a:lnRef>
+          <a:fillRef idx="3">
+            <a:schemeClr val="accent1"/>
+          </a:fillRef>
+          <a:effectRef idx="2">
+            <a:schemeClr val="accent1"/>
+          </a:effectRef>
+          <a:fontRef idx="minor">
+            <a:schemeClr val="lt1"/>
+          </a:fontRef>
+        </p:style>
+        <p:txBody>
+          <a:bodyPr rtlCol="0" anchor="ctr"/>
+          <a:lstStyle/>
+          <a:p>
+            <a:r>
+              <a:rPr sz="1200"/>
+              <a:t>QMD</a:t>
+            </a:r>
+          </a:p>
+        </p:txBody>
+      </p:sp>
+      <p:sp>
+        <p:nvSpPr>
+          <p:cNvPr id="7" name="Rectangle 6"/>
+          <p:cNvSpPr/>
+          <p:nvPr/>
+        </p:nvSpPr>
+        <p:spPr>
+          <a:xfrm>
+            <a:off x="7486800" y="2103445"/>
+            <a:ext cx="1200000" cy="500000"/>
+          </a:xfrm>
+          <a:prstGeom prst="rect">
+            <a:avLst/>
+          </a:prstGeom>
+        </p:spPr>
+        <p:style>
+          <a:lnRef idx="1">
+            <a:schemeClr val="accent1"/>
+          </a:lnRef>
+          <a:fillRef idx="3">
+            <a:schemeClr val="accent1"/>
+          </a:fillRef>
+          <a:effectRef idx="2">
+            <a:schemeClr val="accent1"/>
+          </a:effectRef>
+          <a:fontRef idx="minor">
+            <a:schemeClr val="lt1"/>
+          </a:fontRef>
+        </p:style>
+        <p:txBody>
+          <a:bodyPr rtlCol="0" anchor="ctr"/>
+          <a:lstStyle/>
+          <a:p>
+            <a:r>
+              <a:rPr sz="1200"/>
+              <a:t>Markdown</a:t>
+            </a:r>
+          </a:p>
+        </p:txBody>
+      </p:sp>
+      <p:sp>
+        <p:nvSpPr>
+          <p:cNvPr id="8" name="Rectangle 7"/>
+          <p:cNvSpPr/>
+          <p:nvPr/>
+        </p:nvSpPr>
+        <p:spPr>
+          <a:xfrm>
+            <a:off x="5143600" y="2606690"/>
+            <a:ext cx="1200000" cy="500000"/>
+          </a:xfrm>
+          <a:prstGeom prst="rect">
+            <a:avLst/>
+          </a:prstGeom>
+        </p:spPr>
+        <p:style>
+          <a:lnRef idx="1">
+            <a:schemeClr val="accent1"/>
+          </a:lnRef>
+          <a:fillRef idx="3">
+            <a:schemeClr val="accent1"/>
+          </a:fillRef>
+          <a:effectRef idx="2">
+            <a:schemeClr val="accent1"/>
+          </a:effectRef>
+          <a:fontRef idx="minor">
+            <a:schemeClr val="lt1"/>
+          </a:fontRef>
+        </p:style>
+        <p:txBody>
+          <a:bodyPr rtlCol="0" anchor="ctr"/>
+          <a:lstStyle/>
+          <a:p>
+            <a:r>
+              <a:rPr sz="1200"/>
+              <a:t>出力</a:t>
+            </a:r>
+          </a:p>
+        </p:txBody>
+      </p:sp>
+      <p:sp>
+        <p:nvSpPr>
+          <p:cNvPr id="9" name="Rectangle 8"/>
+          <p:cNvSpPr/>
+          <p:nvPr/>
+        </p:nvSpPr>
+        <p:spPr>
+          <a:xfrm>
+            <a:off x="7486800" y="2606690"/>
+            <a:ext cx="1200000" cy="500000"/>
+          </a:xfrm>
+          <a:prstGeom prst="rect">
+            <a:avLst/>
+          </a:prstGeom>
+        </p:spPr>
+        <p:style>
+          <a:lnRef idx="1">
+            <a:schemeClr val="accent1"/>
+          </a:lnRef>
+          <a:fillRef idx="3">
+            <a:schemeClr val="accent1"/>
+          </a:fillRef>
+          <a:effectRef idx="2">
+            <a:schemeClr val="accent1"/>
+          </a:effectRef>
+          <a:fontRef idx="minor">
+            <a:schemeClr val="lt1"/>
+          </a:fontRef>
+        </p:style>
+        <p:txBody>
+          <a:bodyPr rtlCol="0" anchor="ctr"/>
+          <a:lstStyle/>
+          <a:p>
+            <a:r>
+              <a:rPr sz="1200"/>
+              <a:t>PPTX</a:t>
+            </a:r>
+          </a:p>
+        </p:txBody>
+      </p:sp>
+      <p:sp>
+        <p:nvSpPr>
+          <p:cNvPr id="10" name="Rectangle 9"/>
+          <p:cNvSpPr/>
+          <p:nvPr/>
+        </p:nvSpPr>
+        <p:spPr>
+          <a:xfrm>
+            <a:off x="5143600" y="3864804"/>
+            <a:ext cx="1200000" cy="500000"/>
+          </a:xfrm>
+          <a:prstGeom prst="rect">
+            <a:avLst/>
+          </a:prstGeom>
+        </p:spPr>
+        <p:style>
+          <a:lnRef idx="1">
+            <a:schemeClr val="accent1"/>
+          </a:lnRef>
+          <a:fillRef idx="3">
+            <a:schemeClr val="accent1"/>
+          </a:fillRef>
+          <a:effectRef idx="2">
+            <a:schemeClr val="accent1"/>
+          </a:effectRef>
+          <a:fontRef idx="minor">
+            <a:schemeClr val="lt1"/>
+          </a:fontRef>
+        </p:style>
+        <p:txBody>
+          <a:bodyPr rtlCol="0" anchor="ctr"/>
+          <a:lstStyle/>
+          <a:p>
+            <a:r>
+              <a:rPr sz="1200"/>
+              <a:t>機能</a:t>
+            </a:r>
+          </a:p>
+        </p:txBody>
+      </p:sp>
+      <p:sp>
+        <p:nvSpPr>
+          <p:cNvPr id="11" name="Rectangle 10"/>
+          <p:cNvSpPr/>
+          <p:nvPr/>
+        </p:nvSpPr>
+        <p:spPr>
+          <a:xfrm>
+            <a:off x="7486800" y="3109936"/>
+            <a:ext cx="1200000" cy="500000"/>
+          </a:xfrm>
+          <a:prstGeom prst="rect">
+            <a:avLst/>
+          </a:prstGeom>
+        </p:spPr>
+        <p:style>
+          <a:lnRef idx="1">
+            <a:schemeClr val="accent1"/>
+          </a:lnRef>
+          <a:fillRef idx="3">
+            <a:schemeClr val="accent1"/>
+          </a:fillRef>
+          <a:effectRef idx="2">
+            <a:schemeClr val="accent1"/>
+          </a:effectRef>
+          <a:fontRef idx="minor">
+            <a:schemeClr val="lt1"/>
+          </a:fontRef>
+        </p:style>
+        <p:txBody>
+          <a:bodyPr rtlCol="0" anchor="ctr"/>
+          <a:lstStyle/>
+          <a:p>
+            <a:r>
+              <a:rPr sz="1200"/>
+              <a:t>数式</a:t>
+            </a:r>
+          </a:p>
+        </p:txBody>
+      </p:sp>
+      <p:sp>
+        <p:nvSpPr>
+          <p:cNvPr id="12" name="Rectangle 11"/>
+          <p:cNvSpPr/>
+          <p:nvPr/>
+        </p:nvSpPr>
+        <p:spPr>
+          <a:xfrm>
+            <a:off x="7486800" y="3613181"/>
+            <a:ext cx="1200000" cy="500000"/>
+          </a:xfrm>
+          <a:prstGeom prst="rect">
+            <a:avLst/>
+          </a:prstGeom>
+        </p:spPr>
+        <p:style>
+          <a:lnRef idx="1">
+            <a:schemeClr val="accent1"/>
+          </a:lnRef>
+          <a:fillRef idx="3">
+            <a:schemeClr val="accent1"/>
+          </a:fillRef>
+          <a:effectRef idx="2">
+            <a:schemeClr val="accent1"/>
+          </a:effectRef>
+          <a:fontRef idx="minor">
+            <a:schemeClr val="lt1"/>
+          </a:fontRef>
+        </p:style>
+        <p:txBody>
+          <a:bodyPr rtlCol="0" anchor="ctr"/>
+          <a:lstStyle/>
+          <a:p>
+            <a:r>
+              <a:rPr sz="1200"/>
+              <a:t>Mermaid図</a:t>
+            </a:r>
+          </a:p>
+        </p:txBody>
+      </p:sp>
+      <p:sp>
+        <p:nvSpPr>
+          <p:cNvPr id="13" name="Rectangle 12"/>
+          <p:cNvSpPr/>
+          <p:nvPr/>
+        </p:nvSpPr>
+        <p:spPr>
+          <a:xfrm>
+            <a:off x="7486800" y="4116426"/>
+            <a:ext cx="1200000" cy="500000"/>
+          </a:xfrm>
+          <a:prstGeom prst="rect">
+            <a:avLst/>
+          </a:prstGeom>
+        </p:spPr>
+        <p:style>
+          <a:lnRef idx="1">
+            <a:schemeClr val="accent1"/>
+          </a:lnRef>
+          <a:fillRef idx="3">
+            <a:schemeClr val="accent1"/>
+          </a:fillRef>
+          <a:effectRef idx="2">
+            <a:schemeClr val="accent1"/>
+          </a:effectRef>
+          <a:fontRef idx="minor">
+            <a:schemeClr val="lt1"/>
+          </a:fontRef>
+        </p:style>
+        <p:txBody>
+          <a:bodyPr rtlCol="0" anchor="ctr"/>
+          <a:lstStyle/>
+          <a:p>
+            <a:r>
+              <a:rPr sz="1200"/>
+              <a:t>テーブル</a:t>
+            </a:r>
+          </a:p>
+        </p:txBody>
+      </p:sp>
+      <p:sp>
+        <p:nvSpPr>
+          <p:cNvPr id="14" name="Rectangle 13"/>
+          <p:cNvSpPr/>
+          <p:nvPr/>
+        </p:nvSpPr>
+        <p:spPr>
+          <a:xfrm>
+            <a:off x="7486800" y="4619672"/>
+            <a:ext cx="1200000" cy="500000"/>
+          </a:xfrm>
+          <a:prstGeom prst="rect">
+            <a:avLst/>
+          </a:prstGeom>
+        </p:spPr>
+        <p:style>
+          <a:lnRef idx="1">
+            <a:schemeClr val="accent1"/>
+          </a:lnRef>
+          <a:fillRef idx="3">
+            <a:schemeClr val="accent1"/>
+          </a:fillRef>
+          <a:effectRef idx="2">
+            <a:schemeClr val="accent1"/>
+          </a:effectRef>
+          <a:fontRef idx="minor">
+            <a:schemeClr val="lt1"/>
+          </a:fontRef>
+        </p:style>
+        <p:txBody>
+          <a:bodyPr rtlCol="0" anchor="ctr"/>
+          <a:lstStyle/>
+          <a:p>
+            <a:r>
+              <a:rPr sz="1200"/>
+              <a:t>コード</a:t>
+            </a:r>
+          </a:p>
+        </p:txBody>
+      </p:sp>
+      <p:sp>
+        <p:nvSpPr>
+          <p:cNvPr id="15" name="Rectangle 14"/>
+          <p:cNvSpPr/>
+          <p:nvPr/>
+        </p:nvSpPr>
+        <p:spPr>
+          <a:xfrm>
+            <a:off x="5143600" y="5374540"/>
+            <a:ext cx="1200000" cy="500000"/>
+          </a:xfrm>
+          <a:prstGeom prst="rect">
+            <a:avLst/>
+          </a:prstGeom>
+        </p:spPr>
+        <p:style>
+          <a:lnRef idx="1">
+            <a:schemeClr val="accent1"/>
+          </a:lnRef>
+          <a:fillRef idx="3">
+            <a:schemeClr val="accent1"/>
+          </a:fillRef>
+          <a:effectRef idx="2">
+            <a:schemeClr val="accent1"/>
+          </a:effectRef>
+          <a:fontRef idx="minor">
+            <a:schemeClr val="lt1"/>
+          </a:fontRef>
+        </p:style>
+        <p:txBody>
+          <a:bodyPr rtlCol="0" anchor="ctr"/>
+          <a:lstStyle/>
+          <a:p>
+            <a:r>
+              <a:rPr sz="1200"/>
+              <a:t>利用方法</a:t>
+            </a:r>
+          </a:p>
+        </p:txBody>
+      </p:sp>
+      <p:sp>
+        <p:nvSpPr>
+          <p:cNvPr id="16" name="Rectangle 15"/>
+          <p:cNvSpPr/>
+          <p:nvPr/>
+        </p:nvSpPr>
+        <p:spPr>
+          <a:xfrm>
+            <a:off x="7486800" y="5122917"/>
+            <a:ext cx="1200000" cy="500000"/>
+          </a:xfrm>
+          <a:prstGeom prst="rect">
+            <a:avLst/>
+          </a:prstGeom>
+        </p:spPr>
+        <p:style>
+          <a:lnRef idx="1">
+            <a:schemeClr val="accent1"/>
+          </a:lnRef>
+          <a:fillRef idx="3">
+            <a:schemeClr val="accent1"/>
+          </a:fillRef>
+          <a:effectRef idx="2">
+            <a:schemeClr val="accent1"/>
+          </a:effectRef>
+          <a:fontRef idx="minor">
+            <a:schemeClr val="lt1"/>
+          </a:fontRef>
+        </p:style>
+        <p:txBody>
+          <a:bodyPr rtlCol="0" anchor="ctr"/>
+          <a:lstStyle/>
+          <a:p>
+            <a:r>
+              <a:rPr sz="1200"/>
+              <a:t>ライブラリ</a:t>
+            </a:r>
+          </a:p>
+        </p:txBody>
+      </p:sp>
+      <p:sp>
+        <p:nvSpPr>
+          <p:cNvPr id="17" name="Rectangle 16"/>
+          <p:cNvSpPr/>
+          <p:nvPr/>
+        </p:nvSpPr>
+        <p:spPr>
+          <a:xfrm>
+            <a:off x="7486800" y="5626163"/>
+            <a:ext cx="1200000" cy="500000"/>
+          </a:xfrm>
+          <a:prstGeom prst="rect">
+            <a:avLst/>
+          </a:prstGeom>
+        </p:spPr>
+        <p:style>
+          <a:lnRef idx="1">
+            <a:schemeClr val="accent1"/>
+          </a:lnRef>
+          <a:fillRef idx="3">
+            <a:schemeClr val="accent1"/>
+          </a:fillRef>
+          <a:effectRef idx="2">
+            <a:schemeClr val="accent1"/>
+          </a:effectRef>
+          <a:fontRef idx="minor">
+            <a:schemeClr val="lt1"/>
+          </a:fontRef>
+        </p:style>
+        <p:txBody>
+          <a:bodyPr rtlCol="0" anchor="ctr"/>
+          <a:lstStyle/>
+          <a:p>
+            <a:r>
+              <a:rPr sz="1200"/>
+              <a:t>MCPサーバー</a:t>
+            </a:r>
+          </a:p>
+        </p:txBody>
+      </p:sp>
+      <p:cxnSp>
+        <p:nvCxnSpPr>
+          <p:cNvPr id="18" name="Connector 17"/>
+          <p:cNvCxnSpPr>
+            <a:stCxn id="4" idx="0"/>
+            <a:endCxn id="5" idx="2"/>
+          </p:cNvCxnSpPr>
+          <p:nvPr/>
+        </p:nvCxnSpPr>
+        <p:spPr>
+          <a:xfrm flipV="1">
+            <a:off x="3400400" y="2351822"/>
+            <a:ext cx="2343200" cy="1072642"/>
+          </a:xfrm>
+          <a:prstGeom prst="line">
+            <a:avLst/>
+          </a:prstGeom>
+        </p:spPr>
+        <p:style>
+          <a:lnRef idx="2">
+            <a:schemeClr val="accent1"/>
+          </a:lnRef>
+          <a:fillRef idx="0">
+            <a:schemeClr val="accent1"/>
+          </a:fillRef>
+          <a:effectRef idx="1">
+            <a:schemeClr val="accent1"/>
+          </a:effectRef>
+          <a:fontRef idx="minor">
+            <a:schemeClr val="tx1"/>
+          </a:fontRef>
+        </p:style>
+      </p:cxnSp>
+      <p:cxnSp>
+        <p:nvCxnSpPr>
+          <p:cNvPr id="19" name="Connector 18"/>
+          <p:cNvCxnSpPr>
+            <a:stCxn id="5" idx="1"/>
+            <a:endCxn id="6" idx="3"/>
+          </p:cNvCxnSpPr>
+          <p:nvPr/>
+        </p:nvCxnSpPr>
+        <p:spPr>
+          <a:xfrm flipV="1">
+            <a:off x="5143600" y="1850200"/>
+            <a:ext cx="3543200" cy="251622"/>
+          </a:xfrm>
+          <a:prstGeom prst="line">
+            <a:avLst/>
+          </a:prstGeom>
+        </p:spPr>
+        <p:style>
+          <a:lnRef idx="2">
+            <a:schemeClr val="accent1"/>
+          </a:lnRef>
+          <a:fillRef idx="0">
+            <a:schemeClr val="accent1"/>
+          </a:fillRef>
+          <a:effectRef idx="1">
+            <a:schemeClr val="accent1"/>
+          </a:effectRef>
+          <a:fontRef idx="minor">
+            <a:schemeClr val="tx1"/>
+          </a:fontRef>
+        </p:style>
+      </p:cxnSp>
+      <p:cxnSp>
+        <p:nvCxnSpPr>
+          <p:cNvPr id="20" name="Connector 19"/>
+          <p:cNvCxnSpPr>
+            <a:stCxn id="5" idx="1"/>
+            <a:endCxn id="7" idx="3"/>
+          </p:cNvCxnSpPr>
+          <p:nvPr/>
+        </p:nvCxnSpPr>
+        <p:spPr>
+          <a:xfrm>
+            <a:off x="5143600" y="2101822"/>
+            <a:ext cx="3543200" cy="251623"/>
+          </a:xfrm>
+          <a:prstGeom prst="line">
+            <a:avLst/>
+          </a:prstGeom>
+        </p:spPr>
+        <p:style>
+          <a:lnRef idx="2">
+            <a:schemeClr val="accent1"/>
+          </a:lnRef>
+          <a:fillRef idx="0">
+            <a:schemeClr val="accent1"/>
+          </a:fillRef>
+          <a:effectRef idx="1">
+            <a:schemeClr val="accent1"/>
+          </a:effectRef>
+          <a:fontRef idx="minor">
+            <a:schemeClr val="tx1"/>
+          </a:fontRef>
+        </p:style>
+      </p:cxnSp>
+      <p:cxnSp>
+        <p:nvCxnSpPr>
+          <p:cNvPr id="21" name="Connector 20"/>
+          <p:cNvCxnSpPr>
+            <a:stCxn id="4" idx="1"/>
+            <a:endCxn id="8" idx="3"/>
+          </p:cNvCxnSpPr>
+          <p:nvPr/>
+        </p:nvCxnSpPr>
+        <p:spPr>
+          <a:xfrm flipV="1">
+            <a:off x="2800400" y="2856690"/>
+            <a:ext cx="3543200" cy="817774"/>
+          </a:xfrm>
+          <a:prstGeom prst="line">
+            <a:avLst/>
+          </a:prstGeom>
+        </p:spPr>
+        <p:style>
+          <a:lnRef idx="2">
+            <a:schemeClr val="accent1"/>
+          </a:lnRef>
+          <a:fillRef idx="0">
+            <a:schemeClr val="accent1"/>
+          </a:fillRef>
+          <a:effectRef idx="1">
+            <a:schemeClr val="accent1"/>
+          </a:effectRef>
+          <a:fontRef idx="minor">
+            <a:schemeClr val="tx1"/>
+          </a:fontRef>
+        </p:style>
+      </p:cxnSp>
+      <p:cxnSp>
+        <p:nvCxnSpPr>
+          <p:cNvPr id="22" name="Connector 21"/>
+          <p:cNvCxnSpPr>
+            <a:stCxn id="8" idx="1"/>
+            <a:endCxn id="9" idx="3"/>
+          </p:cNvCxnSpPr>
+          <p:nvPr/>
+        </p:nvCxnSpPr>
+        <p:spPr>
+          <a:xfrm>
+            <a:off x="5143600" y="2856690"/>
+            <a:ext cx="3543200" cy="0"/>
+          </a:xfrm>
+          <a:prstGeom prst="line">
+            <a:avLst/>
+          </a:prstGeom>
+        </p:spPr>
+        <p:style>
+          <a:lnRef idx="2">
+            <a:schemeClr val="accent1"/>
+          </a:lnRef>
+          <a:fillRef idx="0">
+            <a:schemeClr val="accent1"/>
+          </a:fillRef>
+          <a:effectRef idx="1">
+            <a:schemeClr val="accent1"/>
+          </a:effectRef>
+          <a:fontRef idx="minor">
+            <a:schemeClr val="tx1"/>
+          </a:fontRef>
+        </p:style>
+      </p:cxnSp>
+      <p:cxnSp>
+        <p:nvCxnSpPr>
+          <p:cNvPr id="23" name="Connector 22"/>
+          <p:cNvCxnSpPr>
+            <a:stCxn id="4" idx="1"/>
+            <a:endCxn id="10" idx="3"/>
+          </p:cNvCxnSpPr>
+          <p:nvPr/>
+        </p:nvCxnSpPr>
+        <p:spPr>
+          <a:xfrm>
+            <a:off x="2800400" y="3674464"/>
+            <a:ext cx="3543200" cy="440340"/>
+          </a:xfrm>
+          <a:prstGeom prst="line">
+            <a:avLst/>
+          </a:prstGeom>
+        </p:spPr>
+        <p:style>
+          <a:lnRef idx="2">
+            <a:schemeClr val="accent1"/>
+          </a:lnRef>
+          <a:fillRef idx="0">
+            <a:schemeClr val="accent1"/>
+          </a:fillRef>
+          <a:effectRef idx="1">
+            <a:schemeClr val="accent1"/>
+          </a:effectRef>
+          <a:fontRef idx="minor">
+            <a:schemeClr val="tx1"/>
+          </a:fontRef>
+        </p:style>
+      </p:cxnSp>
+      <p:cxnSp>
+        <p:nvCxnSpPr>
+          <p:cNvPr id="24" name="Connector 23"/>
+          <p:cNvCxnSpPr>
+            <a:stCxn id="10" idx="1"/>
+            <a:endCxn id="11" idx="3"/>
+          </p:cNvCxnSpPr>
+          <p:nvPr/>
+        </p:nvCxnSpPr>
+        <p:spPr>
+          <a:xfrm flipV="1">
+            <a:off x="5143600" y="3359936"/>
+            <a:ext cx="3543200" cy="754868"/>
+          </a:xfrm>
+          <a:prstGeom prst="line">
+            <a:avLst/>
+          </a:prstGeom>
+        </p:spPr>
+        <p:style>
+          <a:lnRef idx="2">
+            <a:schemeClr val="accent1"/>
+          </a:lnRef>
+          <a:fillRef idx="0">
+            <a:schemeClr val="accent1"/>
+          </a:fillRef>
+          <a:effectRef idx="1">
+            <a:schemeClr val="accent1"/>
+          </a:effectRef>
+          <a:fontRef idx="minor">
+            <a:schemeClr val="tx1"/>
+          </a:fontRef>
+        </p:style>
+      </p:cxnSp>
+      <p:cxnSp>
+        <p:nvCxnSpPr>
+          <p:cNvPr id="25" name="Connector 24"/>
+          <p:cNvCxnSpPr>
+            <a:stCxn id="10" idx="1"/>
+            <a:endCxn id="12" idx="3"/>
+          </p:cNvCxnSpPr>
+          <p:nvPr/>
+        </p:nvCxnSpPr>
+        <p:spPr>
+          <a:xfrm flipV="1">
+            <a:off x="5143600" y="3863181"/>
+            <a:ext cx="3543200" cy="251623"/>
+          </a:xfrm>
+          <a:prstGeom prst="line">
+            <a:avLst/>
+          </a:prstGeom>
+        </p:spPr>
+        <p:style>
+          <a:lnRef idx="2">
+            <a:schemeClr val="accent1"/>
+          </a:lnRef>
+          <a:fillRef idx="0">
+            <a:schemeClr val="accent1"/>
+          </a:fillRef>
+          <a:effectRef idx="1">
+            <a:schemeClr val="accent1"/>
+          </a:effectRef>
+          <a:fontRef idx="minor">
+            <a:schemeClr val="tx1"/>
+          </a:fontRef>
+        </p:style>
+      </p:cxnSp>
+      <p:cxnSp>
+        <p:nvCxnSpPr>
+          <p:cNvPr id="26" name="Connector 25"/>
+          <p:cNvCxnSpPr>
+            <a:stCxn id="10" idx="1"/>
+            <a:endCxn id="13" idx="3"/>
+          </p:cNvCxnSpPr>
+          <p:nvPr/>
+        </p:nvCxnSpPr>
+        <p:spPr>
+          <a:xfrm>
+            <a:off x="5143600" y="4114804"/>
+            <a:ext cx="3543200" cy="251622"/>
+          </a:xfrm>
+          <a:prstGeom prst="line">
+            <a:avLst/>
+          </a:prstGeom>
+        </p:spPr>
+        <p:style>
+          <a:lnRef idx="2">
+            <a:schemeClr val="accent1"/>
+          </a:lnRef>
+          <a:fillRef idx="0">
+            <a:schemeClr val="accent1"/>
+          </a:fillRef>
+          <a:effectRef idx="1">
+            <a:schemeClr val="accent1"/>
+          </a:effectRef>
+          <a:fontRef idx="minor">
+            <a:schemeClr val="tx1"/>
+          </a:fontRef>
+        </p:style>
+      </p:cxnSp>
+      <p:cxnSp>
+        <p:nvCxnSpPr>
+          <p:cNvPr id="27" name="Connector 26"/>
+          <p:cNvCxnSpPr>
+            <a:stCxn id="10" idx="1"/>
+            <a:endCxn id="14" idx="3"/>
+          </p:cNvCxnSpPr>
+          <p:nvPr/>
+        </p:nvCxnSpPr>
+        <p:spPr>
+          <a:xfrm>
+            <a:off x="5143600" y="4114804"/>
+            <a:ext cx="3543200" cy="754868"/>
+          </a:xfrm>
+          <a:prstGeom prst="line">
+            <a:avLst/>
+          </a:prstGeom>
+        </p:spPr>
+        <p:style>
+          <a:lnRef idx="2">
+            <a:schemeClr val="accent1"/>
+          </a:lnRef>
+          <a:fillRef idx="0">
+            <a:schemeClr val="accent1"/>
+          </a:fillRef>
+          <a:effectRef idx="1">
+            <a:schemeClr val="accent1"/>
+          </a:effectRef>
+          <a:fontRef idx="minor">
+            <a:schemeClr val="tx1"/>
+          </a:fontRef>
+        </p:style>
+      </p:cxnSp>
+      <p:cxnSp>
+        <p:nvCxnSpPr>
+          <p:cNvPr id="28" name="Connector 27"/>
+          <p:cNvCxnSpPr>
+            <a:stCxn id="4" idx="2"/>
+            <a:endCxn id="15" idx="0"/>
+          </p:cNvCxnSpPr>
+          <p:nvPr/>
+        </p:nvCxnSpPr>
+        <p:spPr>
+          <a:xfrm>
+            <a:off x="3400400" y="3924464"/>
+            <a:ext cx="2343200" cy="1450076"/>
+          </a:xfrm>
+          <a:prstGeom prst="line">
+            <a:avLst/>
+          </a:prstGeom>
+        </p:spPr>
+        <p:style>
+          <a:lnRef idx="2">
+            <a:schemeClr val="accent1"/>
+          </a:lnRef>
+          <a:fillRef idx="0">
+            <a:schemeClr val="accent1"/>
+          </a:fillRef>
+          <a:effectRef idx="1">
+            <a:schemeClr val="accent1"/>
+          </a:effectRef>
+          <a:fontRef idx="minor">
+            <a:schemeClr val="tx1"/>
+          </a:fontRef>
+        </p:style>
+      </p:cxnSp>
+      <p:cxnSp>
+        <p:nvCxnSpPr>
+          <p:cNvPr id="29" name="Connector 28"/>
+          <p:cNvCxnSpPr>
+            <a:stCxn id="15" idx="1"/>
+            <a:endCxn id="16" idx="3"/>
+          </p:cNvCxnSpPr>
+          <p:nvPr/>
+        </p:nvCxnSpPr>
+        <p:spPr>
+          <a:xfrm flipV="1">
+            <a:off x="5143600" y="5372917"/>
+            <a:ext cx="3543200" cy="251623"/>
+          </a:xfrm>
+          <a:prstGeom prst="line">
+            <a:avLst/>
+          </a:prstGeom>
+        </p:spPr>
+        <p:style>
+          <a:lnRef idx="2">
+            <a:schemeClr val="accent1"/>
+          </a:lnRef>
+          <a:fillRef idx="0">
+            <a:schemeClr val="accent1"/>
+          </a:fillRef>
+          <a:effectRef idx="1">
+            <a:schemeClr val="accent1"/>
+          </a:effectRef>
+          <a:fontRef idx="minor">
+            <a:schemeClr val="tx1"/>
+          </a:fontRef>
+        </p:style>
+      </p:cxnSp>
+      <p:cxnSp>
+        <p:nvCxnSpPr>
+          <p:cNvPr id="30" name="Connector 29"/>
+          <p:cNvCxnSpPr>
+            <a:stCxn id="15" idx="1"/>
+            <a:endCxn id="17" idx="3"/>
+          </p:cNvCxnSpPr>
+          <p:nvPr/>
+        </p:nvCxnSpPr>
+        <p:spPr>
+          <a:xfrm>
+            <a:off x="5143600" y="5624540"/>
+            <a:ext cx="3543200" cy="251623"/>
+          </a:xfrm>
+          <a:prstGeom prst="line">
+            <a:avLst/>
+          </a:prstGeom>
+        </p:spPr>
+        <p:style>
+          <a:lnRef idx="2">
+            <a:schemeClr val="accent1"/>
+          </a:lnRef>
+          <a:fillRef idx="0">
+            <a:schemeClr val="accent1"/>
+          </a:fillRef>
+          <a:effectRef idx="1">
+            <a:schemeClr val="accent1"/>
+          </a:effectRef>
+          <a:fontRef idx="minor">
+            <a:schemeClr val="tx1"/>
+          </a:fontRef>
+        </p:style>
+      </p:cxnSp>
     </p:spTree>
   </p:cSld>
   <p:clrMapOvr>
@@ -10020,7 +11088,7 @@
           <a:lstStyle/>
           <a:p>
             <a:r>
-              <a:t>14. ZenUML</a:t>
+              <a:t>13. タイムライン（Timeline）</a:t>
             </a:r>
           </a:p>
         </p:txBody>
@@ -10068,14 +11136,19 @@
               <a:rPr sz="1000">
                 <a:latin typeface="Courier New"/>
               </a:rPr>
-              <a:t>zenuml
-    title 注文処理
-    @Actor Client
-    @Database DB
-    Client -&gt; Server.process(order) {
-        Server -&gt; DB.save(order)
-        return orderId
-    }</a:t>
+              <a:t>timeline
+    title ソフトウェア開発史
+    1960 : アセンブリ言語
+    1970 : C言語
+         : Unix
+    1980 : C++
+         : Macintosh
+    1990 : Java
+         : World Wide Web
+    2000 : Python普及
+         : Agile開発
+    2010 : クラウドコンピューティング
+    2020 : AI・機械学習</a:t>
             </a:r>
           </a:p>
         </p:txBody>
@@ -10114,7 +11187,7 @@
           <a:lstStyle/>
           <a:p>
             <a:r>
-              <a:t>15. サンキー図（Sankey Diagram）</a:t>
+              <a:t>14. ZenUML</a:t>
             </a:r>
           </a:p>
         </p:txBody>
@@ -10162,13 +11235,14 @@
               <a:rPr sz="1000">
                 <a:latin typeface="Courier New"/>
               </a:rPr>
-              <a:t>sankey-beta
-    エネルギー源,電力,60
-    エネルギー源,熱,40
-    電力,家庭用,25
-    電力,産業用,35
-    熱,暖房,30
-    熱,給湯,10</a:t>
+              <a:t>zenuml
+    title 注文処理
+    @Actor Client
+    @Database DB
+    Client -&gt; Server.process(order) {
+        Server -&gt; DB.save(order)
+        return orderId
+    }</a:t>
             </a:r>
           </a:p>
         </p:txBody>
@@ -10207,7 +11281,7 @@
           <a:lstStyle/>
           <a:p>
             <a:r>
-              <a:t>16. XYチャート（XY Chart）</a:t>
+              <a:t>15. サンキー図（Sankey Diagram）</a:t>
             </a:r>
           </a:p>
         </p:txBody>
@@ -10255,12 +11329,13 @@
               <a:rPr sz="1000">
                 <a:latin typeface="Courier New"/>
               </a:rPr>
-              <a:t>xychart-beta
-    title "月別売上推移"
-    x-axis [1月, 2月, 3月, 4月, 5月, 6月]
-    y-axis "売上（万円）" 0 --&gt; 1000
-    bar [400, 500, 650, 720, 850, 900]
-    line [400, 500, 650, 720, 850, 900]</a:t>
+              <a:t>sankey-beta
+    エネルギー源,電力,60
+    エネルギー源,熱,40
+    電力,家庭用,25
+    電力,産業用,35
+    熱,暖房,30
+    熱,給湯,10</a:t>
             </a:r>
           </a:p>
         </p:txBody>
@@ -10360,7 +11435,7 @@
           <a:lstStyle/>
           <a:p>
             <a:r>
-              <a:t>17. ブロック図（Block Diagram）</a:t>
+              <a:t>16. XYチャート（XY Chart）</a:t>
             </a:r>
           </a:p>
         </p:txBody>
@@ -10408,19 +11483,12 @@
               <a:rPr sz="1000">
                 <a:latin typeface="Courier New"/>
               </a:rPr>
-              <a:t>block-beta
-    columns 3
-    A["フロントエンド"]:1
-    B["APIゲートウェイ"]:1
-    C["バックエンド"]:1
-    D["認証サービス"]:1
-    E["データベース"]:1
-    F["キャッシュ"]:1
-    A --&gt; B
-    B --&gt; C
-    B --&gt; D
-    C --&gt; E
-    C --&gt; F</a:t>
+              <a:t>xychart-beta
+    title "月別売上推移"
+    x-axis [1月, 2月, 3月, 4月, 5月, 6月]
+    y-axis "売上（万円）" 0 --&gt; 1000
+    bar [400, 500, 650, 720, 850, 900]
+    line [400, 500, 650, 720, 850, 900]</a:t>
             </a:r>
           </a:p>
         </p:txBody>
@@ -10459,7 +11527,7 @@
           <a:lstStyle/>
           <a:p>
             <a:r>
-              <a:t>18. パケット図（Packet Diagram）</a:t>
+              <a:t>17. ブロック図（Block Diagram）</a:t>
             </a:r>
           </a:p>
         </p:txBody>
@@ -10507,16 +11575,19 @@
               <a:rPr sz="1000">
                 <a:latin typeface="Courier New"/>
               </a:rPr>
-              <a:t>packet-beta
-    title TCP パケット構造
-    0-15: "送信元ポート"
-    16-31: "宛先ポート"
-    32-63: "シーケンス番号"
-    64-95: "確認応答番号"
-    96-99: "データオフセット"
-    100-105: "予約"
-    106-111: "フラグ"
-    112-127: "ウィンドウサイズ"</a:t>
+              <a:t>block-beta
+    columns 3
+    A["フロントエンド"]:1
+    B["APIゲートウェイ"]:1
+    C["バックエンド"]:1
+    D["認証サービス"]:1
+    E["データベース"]:1
+    F["キャッシュ"]:1
+    A --&gt; B
+    B --&gt; C
+    B --&gt; D
+    C --&gt; E
+    C --&gt; F</a:t>
             </a:r>
           </a:p>
         </p:txBody>
@@ -10555,7 +11626,7 @@
           <a:lstStyle/>
           <a:p>
             <a:r>
-              <a:t>19. カンバン（Kanban）</a:t>
+              <a:t>18. パケット図（Packet Diagram）</a:t>
             </a:r>
           </a:p>
         </p:txBody>
@@ -10603,16 +11674,16 @@
               <a:rPr sz="1000">
                 <a:latin typeface="Courier New"/>
               </a:rPr>
-              <a:t>kanban
-    todo["To Do"]
-        task1["要件定義"]
-        task2["DB設計"]
-    inprogress["In Progress"]
-        task3["API実装"]
-        task4["テスト作成"]
-    done["Done"]
-        task5["環境構築"]
-        task6["仕様策定"]</a:t>
+              <a:t>packet-beta
+    title TCP パケット構造
+    0-15: "送信元ポート"
+    16-31: "宛先ポート"
+    32-63: "シーケンス番号"
+    64-95: "確認応答番号"
+    96-99: "データオフセット"
+    100-105: "予約"
+    106-111: "フラグ"
+    112-127: "ウィンドウサイズ"</a:t>
             </a:r>
           </a:p>
         </p:txBody>
@@ -10651,7 +11722,7 @@
           <a:lstStyle/>
           <a:p>
             <a:r>
-              <a:t>20. アーキテクチャ図（Architecture Diagram）</a:t>
+              <a:t>19. カンバン（Kanban）</a:t>
             </a:r>
           </a:p>
         </p:txBody>
@@ -10699,15 +11770,16 @@
               <a:rPr sz="1000">
                 <a:latin typeface="Courier New"/>
               </a:rPr>
-              <a:t>architecture-beta
-    group cloud(cloud)[クラウド]
-    service web(internet)[Webサーバー] in cloud
-    service api(server)[APIサーバー] in cloud
-    service db(database)[データベース] in cloud
-    service cache(disk)[キャッシュ] in cloud
-    web:R --&gt; L:api
-    api:R --&gt; L:db
-    api:B --&gt; T:cache</a:t>
+              <a:t>kanban
+    todo["To Do"]
+        task1["要件定義"]
+        task2["DB設計"]
+    inprogress["In Progress"]
+        task3["API実装"]
+        task4["テスト作成"]
+    done["Done"]
+        task5["環境構築"]
+        task6["仕様策定"]</a:t>
             </a:r>
           </a:p>
         </p:txBody>
@@ -10746,7 +11818,7 @@
           <a:lstStyle/>
           <a:p>
             <a:r>
-              <a:t>21. C4図（C4 Diagram）</a:t>
+              <a:t>20. アーキテクチャ図（Architecture Diagram）</a:t>
             </a:r>
           </a:p>
         </p:txBody>
@@ -10794,15 +11866,15 @@
               <a:rPr sz="1000">
                 <a:latin typeface="Courier New"/>
               </a:rPr>
-              <a:t>C4Context
-    title システムコンテキスト図
-    Person(user, "ユーザー", "アプリケーションを利用する人")
-    System(app, "Webアプリ", "主要なシステム")
-    System_Ext(email, "メールサービス", "通知送信")
-    System_Ext(payment, "決済サービス", "支払い処理")
-    Rel(user, app, "利用する", "HTTPS")
-    Rel(app, email, "送信する", "SMTP")
-    Rel(app, payment, "呼び出す", "API")</a:t>
+              <a:t>architecture-beta
+    group cloud(cloud)[クラウド]
+    service web(internet)[Webサーバー] in cloud
+    service api(server)[APIサーバー] in cloud
+    service db(database)[データベース] in cloud
+    service cache(disk)[キャッシュ] in cloud
+    web:R --&gt; L:api
+    api:R --&gt; L:db
+    api:B --&gt; T:cache</a:t>
             </a:r>
           </a:p>
         </p:txBody>
@@ -10841,7 +11913,7 @@
           <a:lstStyle/>
           <a:p>
             <a:r>
-              <a:t>22. Quartoネイティブ記法</a:t>
+              <a:t>21. C4図（C4 Diagram）</a:t>
             </a:r>
           </a:p>
         </p:txBody>
@@ -10865,196 +11937,43 @@
       </p:sp>
       <p:sp>
         <p:nvSpPr>
-          <p:cNvPr id="4" name="Rectangle 3"/>
-          <p:cNvSpPr/>
-          <p:nvPr/>
-        </p:nvSpPr>
-        <p:spPr>
-          <a:xfrm>
-            <a:off x="457200" y="3613181"/>
-            <a:ext cx="1200000" cy="500000"/>
+          <p:cNvPr id="4" name="TextBox 3"/>
+          <p:cNvSpPr txBox="1"/>
+          <p:nvPr/>
+        </p:nvSpPr>
+        <p:spPr>
+          <a:xfrm>
+            <a:off x="457200" y="1600200"/>
+            <a:ext cx="8229600" cy="4525963"/>
           </a:xfrm>
           <a:prstGeom prst="rect">
             <a:avLst/>
           </a:prstGeom>
-        </p:spPr>
-        <p:style>
-          <a:lnRef idx="1">
-            <a:schemeClr val="accent1"/>
-          </a:lnRef>
-          <a:fillRef idx="3">
-            <a:schemeClr val="accent1"/>
-          </a:fillRef>
-          <a:effectRef idx="2">
-            <a:schemeClr val="accent1"/>
-          </a:effectRef>
-          <a:fontRef idx="minor">
-            <a:schemeClr val="lt1"/>
-          </a:fontRef>
-        </p:style>
-        <p:txBody>
-          <a:bodyPr rtlCol="0" anchor="ctr"/>
-          <a:lstStyle/>
-          <a:p>
-            <a:r>
-              <a:rPr sz="1200"/>
-              <a:t>スタート</a:t>
-            </a:r>
-          </a:p>
-        </p:txBody>
-      </p:sp>
-      <p:sp>
-        <p:nvSpPr>
-          <p:cNvPr id="5" name="Rectangle 4"/>
-          <p:cNvSpPr/>
-          <p:nvPr/>
-        </p:nvSpPr>
-        <p:spPr>
-          <a:xfrm>
-            <a:off x="3972000" y="3613181"/>
-            <a:ext cx="1200000" cy="500000"/>
-          </a:xfrm>
-          <a:prstGeom prst="rect">
-            <a:avLst/>
-          </a:prstGeom>
-        </p:spPr>
-        <p:style>
-          <a:lnRef idx="1">
-            <a:schemeClr val="accent1"/>
-          </a:lnRef>
-          <a:fillRef idx="3">
-            <a:schemeClr val="accent1"/>
-          </a:fillRef>
-          <a:effectRef idx="2">
-            <a:schemeClr val="accent1"/>
-          </a:effectRef>
-          <a:fontRef idx="minor">
-            <a:schemeClr val="lt1"/>
-          </a:fontRef>
-        </p:style>
-        <p:txBody>
-          <a:bodyPr rtlCol="0" anchor="ctr"/>
-          <a:lstStyle/>
-          <a:p>
-            <a:r>
-              <a:rPr sz="1200"/>
-              <a:t>処理</a:t>
-            </a:r>
-          </a:p>
-        </p:txBody>
-      </p:sp>
-      <p:sp>
-        <p:nvSpPr>
-          <p:cNvPr id="6" name="Rectangle 5"/>
-          <p:cNvSpPr/>
-          <p:nvPr/>
-        </p:nvSpPr>
-        <p:spPr>
-          <a:xfrm>
-            <a:off x="7486800" y="3613181"/>
-            <a:ext cx="1200000" cy="500000"/>
-          </a:xfrm>
-          <a:prstGeom prst="rect">
-            <a:avLst/>
-          </a:prstGeom>
-        </p:spPr>
-        <p:style>
-          <a:lnRef idx="1">
-            <a:schemeClr val="accent1"/>
-          </a:lnRef>
-          <a:fillRef idx="3">
-            <a:schemeClr val="accent1"/>
-          </a:fillRef>
-          <a:effectRef idx="2">
-            <a:schemeClr val="accent1"/>
-          </a:effectRef>
-          <a:fontRef idx="minor">
-            <a:schemeClr val="lt1"/>
-          </a:fontRef>
-        </p:style>
-        <p:txBody>
-          <a:bodyPr rtlCol="0" anchor="ctr"/>
-          <a:lstStyle/>
-          <a:p>
-            <a:r>
-              <a:rPr sz="1200"/>
-              <a:t>エンド</a:t>
-            </a:r>
-          </a:p>
-        </p:txBody>
-      </p:sp>
-      <p:cxnSp>
-        <p:nvCxnSpPr>
-          <p:cNvPr id="7" name="Connector 6"/>
-          <p:cNvCxnSpPr>
-            <a:stCxn id="4" idx="1"/>
-            <a:endCxn id="5" idx="3"/>
-          </p:cNvCxnSpPr>
-          <p:nvPr/>
-        </p:nvCxnSpPr>
-        <p:spPr>
-          <a:xfrm>
-            <a:off x="457200" y="3863181"/>
-            <a:ext cx="4714800" cy="0"/>
-          </a:xfrm>
-          <a:prstGeom prst="line">
-            <a:avLst/>
-          </a:prstGeom>
-          <a:ln>
-            <a:headEnd type="arrow" w="med" len="med"/>
-          </a:ln>
-        </p:spPr>
-        <p:style>
-          <a:lnRef idx="2">
-            <a:schemeClr val="accent1"/>
-          </a:lnRef>
-          <a:fillRef idx="0">
-            <a:schemeClr val="accent1"/>
-          </a:fillRef>
-          <a:effectRef idx="1">
-            <a:schemeClr val="accent1"/>
-          </a:effectRef>
-          <a:fontRef idx="minor">
-            <a:schemeClr val="tx1"/>
-          </a:fontRef>
-        </p:style>
-      </p:cxnSp>
-      <p:cxnSp>
-        <p:nvCxnSpPr>
-          <p:cNvPr id="8" name="Connector 7"/>
-          <p:cNvCxnSpPr>
-            <a:stCxn id="5" idx="1"/>
-            <a:endCxn id="6" idx="3"/>
-          </p:cNvCxnSpPr>
-          <p:nvPr/>
-        </p:nvCxnSpPr>
-        <p:spPr>
-          <a:xfrm>
-            <a:off x="3972000" y="3863181"/>
-            <a:ext cx="4714800" cy="0"/>
-          </a:xfrm>
-          <a:prstGeom prst="line">
-            <a:avLst/>
-          </a:prstGeom>
-          <a:ln>
-            <a:headEnd type="arrow" w="med" len="med"/>
-          </a:ln>
-        </p:spPr>
-        <p:style>
-          <a:lnRef idx="2">
-            <a:schemeClr val="accent1"/>
-          </a:lnRef>
-          <a:fillRef idx="0">
-            <a:schemeClr val="accent1"/>
-          </a:fillRef>
-          <a:effectRef idx="1">
-            <a:schemeClr val="accent1"/>
-          </a:effectRef>
-          <a:fontRef idx="minor">
-            <a:schemeClr val="tx1"/>
-          </a:fontRef>
-        </p:style>
-      </p:cxnSp>
+          <a:noFill/>
+        </p:spPr>
+        <p:txBody>
+          <a:bodyPr wrap="square">
+            <a:spAutoFit/>
+          </a:bodyPr>
+          <a:lstStyle/>
+          <a:p>
+            <a:r>
+              <a:rPr sz="1000">
+                <a:latin typeface="Courier New"/>
+              </a:rPr>
+              <a:t>C4Context
+    title システムコンテキスト図
+    Person(user, "ユーザー", "アプリケーションを利用する人")
+    System(app, "Webアプリ", "主要なシステム")
+    System_Ext(email, "メールサービス", "通知送信")
+    System_Ext(payment, "決済サービス", "支払い処理")
+    Rel(user, app, "利用する", "HTTPS")
+    Rel(app, email, "送信する", "SMTP")
+    Rel(app, payment, "呼び出す", "API")</a:t>
+            </a:r>
+          </a:p>
+        </p:txBody>
+      </p:sp>
     </p:spTree>
   </p:cSld>
   <p:clrMapOvr>
@@ -11089,7 +12008,7 @@
           <a:lstStyle/>
           <a:p>
             <a:r>
-              <a:t>Quartoコードブロック記法</a:t>
+              <a:t>22. Quartoネイティブ記法</a:t>
             </a:r>
           </a:p>
         </p:txBody>
@@ -11106,43 +12025,203 @@
         </p:nvSpPr>
         <p:spPr/>
         <p:txBody>
-          <a:bodyPr wrap="none"/>
-          <a:lstStyle/>
-          <a:p>
-            <a:pPr>
-              <a:buNone/>
-            </a:pPr>
-            <a:r>
-              <a:rPr lang="" dirty="0" sz="1400">
-                <a:latin typeface="Courier New"/>
-              </a:rPr>
-              <a:t>import math</a:t>
-            </a:r>
-            <a:br>
-              <a:rPr lang="" dirty="0">
-                <a:latin typeface="Courier New"/>
-              </a:rPr>
-            </a:br>
-            <a:r>
-              <a:rPr lang="" dirty="0" sz="1400">
-                <a:latin typeface="Courier New"/>
-              </a:rPr>
-              <a:t>print(math.pi)</a:t>
-            </a:r>
-            <a:br>
-              <a:rPr lang="" dirty="0">
-                <a:latin typeface="Courier New"/>
-              </a:rPr>
-            </a:br>
-            <a:r>
-              <a:rPr lang="" dirty="0" sz="1400">
-                <a:latin typeface="Courier New"/>
-              </a:rPr>
-              <a:t/>
-            </a:r>
-          </a:p>
-        </p:txBody>
-      </p:sp>
+          <a:bodyPr/>
+          <a:lstStyle/>
+          <a:p/>
+        </p:txBody>
+      </p:sp>
+      <p:sp>
+        <p:nvSpPr>
+          <p:cNvPr id="4" name="Rectangle 3"/>
+          <p:cNvSpPr/>
+          <p:nvPr/>
+        </p:nvSpPr>
+        <p:spPr>
+          <a:xfrm>
+            <a:off x="457200" y="3613181"/>
+            <a:ext cx="1200000" cy="500000"/>
+          </a:xfrm>
+          <a:prstGeom prst="rect">
+            <a:avLst/>
+          </a:prstGeom>
+        </p:spPr>
+        <p:style>
+          <a:lnRef idx="1">
+            <a:schemeClr val="accent1"/>
+          </a:lnRef>
+          <a:fillRef idx="3">
+            <a:schemeClr val="accent1"/>
+          </a:fillRef>
+          <a:effectRef idx="2">
+            <a:schemeClr val="accent1"/>
+          </a:effectRef>
+          <a:fontRef idx="minor">
+            <a:schemeClr val="lt1"/>
+          </a:fontRef>
+        </p:style>
+        <p:txBody>
+          <a:bodyPr rtlCol="0" anchor="ctr"/>
+          <a:lstStyle/>
+          <a:p>
+            <a:r>
+              <a:rPr sz="1200"/>
+              <a:t>スタート</a:t>
+            </a:r>
+          </a:p>
+        </p:txBody>
+      </p:sp>
+      <p:sp>
+        <p:nvSpPr>
+          <p:cNvPr id="5" name="Rectangle 4"/>
+          <p:cNvSpPr/>
+          <p:nvPr/>
+        </p:nvSpPr>
+        <p:spPr>
+          <a:xfrm>
+            <a:off x="3972000" y="3613181"/>
+            <a:ext cx="1200000" cy="500000"/>
+          </a:xfrm>
+          <a:prstGeom prst="rect">
+            <a:avLst/>
+          </a:prstGeom>
+        </p:spPr>
+        <p:style>
+          <a:lnRef idx="1">
+            <a:schemeClr val="accent1"/>
+          </a:lnRef>
+          <a:fillRef idx="3">
+            <a:schemeClr val="accent1"/>
+          </a:fillRef>
+          <a:effectRef idx="2">
+            <a:schemeClr val="accent1"/>
+          </a:effectRef>
+          <a:fontRef idx="minor">
+            <a:schemeClr val="lt1"/>
+          </a:fontRef>
+        </p:style>
+        <p:txBody>
+          <a:bodyPr rtlCol="0" anchor="ctr"/>
+          <a:lstStyle/>
+          <a:p>
+            <a:r>
+              <a:rPr sz="1200"/>
+              <a:t>処理</a:t>
+            </a:r>
+          </a:p>
+        </p:txBody>
+      </p:sp>
+      <p:sp>
+        <p:nvSpPr>
+          <p:cNvPr id="6" name="Rectangle 5"/>
+          <p:cNvSpPr/>
+          <p:nvPr/>
+        </p:nvSpPr>
+        <p:spPr>
+          <a:xfrm>
+            <a:off x="7486800" y="3613181"/>
+            <a:ext cx="1200000" cy="500000"/>
+          </a:xfrm>
+          <a:prstGeom prst="rect">
+            <a:avLst/>
+          </a:prstGeom>
+        </p:spPr>
+        <p:style>
+          <a:lnRef idx="1">
+            <a:schemeClr val="accent1"/>
+          </a:lnRef>
+          <a:fillRef idx="3">
+            <a:schemeClr val="accent1"/>
+          </a:fillRef>
+          <a:effectRef idx="2">
+            <a:schemeClr val="accent1"/>
+          </a:effectRef>
+          <a:fontRef idx="minor">
+            <a:schemeClr val="lt1"/>
+          </a:fontRef>
+        </p:style>
+        <p:txBody>
+          <a:bodyPr rtlCol="0" anchor="ctr"/>
+          <a:lstStyle/>
+          <a:p>
+            <a:r>
+              <a:rPr sz="1200"/>
+              <a:t>エンド</a:t>
+            </a:r>
+          </a:p>
+        </p:txBody>
+      </p:sp>
+      <p:cxnSp>
+        <p:nvCxnSpPr>
+          <p:cNvPr id="7" name="Connector 6"/>
+          <p:cNvCxnSpPr>
+            <a:stCxn id="4" idx="1"/>
+            <a:endCxn id="5" idx="3"/>
+          </p:cNvCxnSpPr>
+          <p:nvPr/>
+        </p:nvCxnSpPr>
+        <p:spPr>
+          <a:xfrm>
+            <a:off x="457200" y="3863181"/>
+            <a:ext cx="4714800" cy="0"/>
+          </a:xfrm>
+          <a:prstGeom prst="line">
+            <a:avLst/>
+          </a:prstGeom>
+          <a:ln>
+            <a:headEnd type="arrow" w="med" len="med"/>
+          </a:ln>
+        </p:spPr>
+        <p:style>
+          <a:lnRef idx="2">
+            <a:schemeClr val="accent1"/>
+          </a:lnRef>
+          <a:fillRef idx="0">
+            <a:schemeClr val="accent1"/>
+          </a:fillRef>
+          <a:effectRef idx="1">
+            <a:schemeClr val="accent1"/>
+          </a:effectRef>
+          <a:fontRef idx="minor">
+            <a:schemeClr val="tx1"/>
+          </a:fontRef>
+        </p:style>
+      </p:cxnSp>
+      <p:cxnSp>
+        <p:nvCxnSpPr>
+          <p:cNvPr id="8" name="Connector 7"/>
+          <p:cNvCxnSpPr>
+            <a:stCxn id="5" idx="1"/>
+            <a:endCxn id="6" idx="3"/>
+          </p:cNvCxnSpPr>
+          <p:nvPr/>
+        </p:nvCxnSpPr>
+        <p:spPr>
+          <a:xfrm>
+            <a:off x="3972000" y="3863181"/>
+            <a:ext cx="4714800" cy="0"/>
+          </a:xfrm>
+          <a:prstGeom prst="line">
+            <a:avLst/>
+          </a:prstGeom>
+          <a:ln>
+            <a:headEnd type="arrow" w="med" len="med"/>
+          </a:ln>
+        </p:spPr>
+        <p:style>
+          <a:lnRef idx="2">
+            <a:schemeClr val="accent1"/>
+          </a:lnRef>
+          <a:fillRef idx="0">
+            <a:schemeClr val="accent1"/>
+          </a:fillRef>
+          <a:effectRef idx="1">
+            <a:schemeClr val="accent1"/>
+          </a:effectRef>
+          <a:fontRef idx="minor">
+            <a:schemeClr val="tx1"/>
+          </a:fontRef>
+        </p:style>
+      </p:cxnSp>
     </p:spTree>
   </p:cSld>
   <p:clrMapOvr>
@@ -11177,26 +12256,58 @@
           <a:lstStyle/>
           <a:p>
             <a:r>
-              <a:t>アニメーション・レイアウト</a:t>
-            </a:r>
-          </a:p>
-        </p:txBody>
-      </p:sp>
-      <p:sp>
-        <p:nvSpPr>
-          <p:cNvPr id="3" name="Text Placeholder 2"/>
-          <p:cNvSpPr>
-            <a:spLocks noGrp="1"/>
-          </p:cNvSpPr>
-          <p:nvPr>
-            <p:ph type="body" idx="1"/>
+              <a:t>Quartoコードブロック記法</a:t>
+            </a:r>
+          </a:p>
+        </p:txBody>
+      </p:sp>
+      <p:sp>
+        <p:nvSpPr>
+          <p:cNvPr id="3" name="Content Placeholder 2"/>
+          <p:cNvSpPr>
+            <a:spLocks noGrp="1"/>
+          </p:cNvSpPr>
+          <p:nvPr>
+            <p:ph idx="1"/>
           </p:nvPr>
         </p:nvSpPr>
         <p:spPr/>
         <p:txBody>
-          <a:bodyPr/>
-          <a:lstStyle/>
-          <a:p/>
+          <a:bodyPr wrap="none"/>
+          <a:lstStyle/>
+          <a:p>
+            <a:pPr>
+              <a:buNone/>
+            </a:pPr>
+            <a:r>
+              <a:rPr lang="" dirty="0" sz="1400">
+                <a:latin typeface="Courier New"/>
+              </a:rPr>
+              <a:t>import math</a:t>
+            </a:r>
+            <a:br>
+              <a:rPr lang="" dirty="0">
+                <a:latin typeface="Courier New"/>
+              </a:rPr>
+            </a:br>
+            <a:r>
+              <a:rPr lang="" dirty="0" sz="1400">
+                <a:latin typeface="Courier New"/>
+              </a:rPr>
+              <a:t>print(math.pi)</a:t>
+            </a:r>
+            <a:br>
+              <a:rPr lang="" dirty="0">
+                <a:latin typeface="Courier New"/>
+              </a:rPr>
+            </a:br>
+            <a:r>
+              <a:rPr lang="" dirty="0" sz="1400">
+                <a:latin typeface="Courier New"/>
+              </a:rPr>
+              <a:t/>
+            </a:r>
+          </a:p>
         </p:txBody>
       </p:sp>
     </p:spTree>
@@ -11233,46 +12344,26 @@
           <a:lstStyle/>
           <a:p>
             <a:r>
-              <a:t>インクリメンタルリスト</a:t>
-            </a:r>
-          </a:p>
-        </p:txBody>
-      </p:sp>
-      <p:sp>
-        <p:nvSpPr>
-          <p:cNvPr id="3" name="Content Placeholder 2"/>
-          <p:cNvSpPr>
-            <a:spLocks noGrp="1"/>
-          </p:cNvSpPr>
-          <p:nvPr>
-            <p:ph idx="1"/>
+              <a:t>アニメーション・レイアウト</a:t>
+            </a:r>
+          </a:p>
+        </p:txBody>
+      </p:sp>
+      <p:sp>
+        <p:nvSpPr>
+          <p:cNvPr id="3" name="Text Placeholder 2"/>
+          <p:cNvSpPr>
+            <a:spLocks noGrp="1"/>
+          </p:cNvSpPr>
+          <p:nvPr>
+            <p:ph type="body" idx="1"/>
           </p:nvPr>
         </p:nvSpPr>
         <p:spPr/>
         <p:txBody>
-          <a:bodyPr wrap="square"/>
-          <a:lstStyle/>
-          <a:p>
-            <a:pPr/>
-            <a:r>
-              <a:rPr sz="1800"/>
-              <a:t>まず最初に表示</a:t>
-            </a:r>
-          </a:p>
-          <a:p>
-            <a:pPr/>
-            <a:r>
-              <a:rPr sz="1800"/>
-              <a:t>次にこれが表示</a:t>
-            </a:r>
-          </a:p>
-          <a:p>
-            <a:pPr/>
-            <a:r>
-              <a:rPr sz="1800"/>
-              <a:t>最後にこれが表示</a:t>
-            </a:r>
-          </a:p>
+          <a:bodyPr/>
+          <a:lstStyle/>
+          <a:p/>
         </p:txBody>
       </p:sp>
     </p:spTree>
@@ -11309,7 +12400,7 @@
           <a:lstStyle/>
           <a:p>
             <a:r>
-              <a:t>非インクリメンタルリスト</a:t>
+              <a:t>インクリメンタルリスト</a:t>
             </a:r>
           </a:p>
         </p:txBody>
@@ -11332,21 +12423,21 @@
             <a:pPr/>
             <a:r>
               <a:rPr sz="1800"/>
-              <a:t>一括表示アイテム1</a:t>
+              <a:t>まず最初に表示</a:t>
             </a:r>
           </a:p>
           <a:p>
             <a:pPr/>
             <a:r>
               <a:rPr sz="1800"/>
-              <a:t>一括表示アイテム2</a:t>
+              <a:t>次にこれが表示</a:t>
             </a:r>
           </a:p>
           <a:p>
             <a:pPr/>
             <a:r>
               <a:rPr sz="1800"/>
-              <a:t>一括表示アイテム3</a:t>
+              <a:t>最後にこれが表示</a:t>
             </a:r>
           </a:p>
         </p:txBody>
@@ -11475,7 +12566,7 @@
           <a:lstStyle/>
           <a:p>
             <a:r>
-              <a:t>2カラムレイアウト</a:t>
+              <a:t>非インクリメンタルリスト</a:t>
             </a:r>
           </a:p>
         </p:txBody>
@@ -11487,7 +12578,7 @@
             <a:spLocks noGrp="1"/>
           </p:cNvSpPr>
           <p:nvPr>
-            <p:ph idx="1" sz="half"/>
+            <p:ph idx="1"/>
           </p:nvPr>
         </p:nvSpPr>
         <p:spPr/>
@@ -11498,58 +12589,21 @@
             <a:pPr/>
             <a:r>
               <a:rPr sz="1800"/>
-              <a:t>左の項目1</a:t>
+              <a:t>一括表示アイテム1</a:t>
             </a:r>
           </a:p>
           <a:p>
             <a:pPr/>
             <a:r>
               <a:rPr sz="1800"/>
-              <a:t>左の項目2</a:t>
+              <a:t>一括表示アイテム2</a:t>
             </a:r>
           </a:p>
           <a:p>
             <a:pPr/>
             <a:r>
               <a:rPr sz="1800"/>
-              <a:t>左の項目3</a:t>
-            </a:r>
-          </a:p>
-        </p:txBody>
-      </p:sp>
-      <p:sp>
-        <p:nvSpPr>
-          <p:cNvPr id="4" name="Content Placeholder 3"/>
-          <p:cNvSpPr>
-            <a:spLocks noGrp="1"/>
-          </p:cNvSpPr>
-          <p:nvPr>
-            <p:ph idx="2" sz="half"/>
-          </p:nvPr>
-        </p:nvSpPr>
-        <p:spPr/>
-        <p:txBody>
-          <a:bodyPr wrap="square"/>
-          <a:lstStyle/>
-          <a:p>
-            <a:pPr/>
-            <a:r>
-              <a:rPr sz="1800"/>
-              <a:t>右の項目1</a:t>
-            </a:r>
-          </a:p>
-          <a:p>
-            <a:pPr/>
-            <a:r>
-              <a:rPr sz="1800"/>
-              <a:t>右の項目2</a:t>
-            </a:r>
-          </a:p>
-          <a:p>
-            <a:pPr/>
-            <a:r>
-              <a:rPr sz="1800"/>
-              <a:t>右の項目3</a:t>
+              <a:t>一括表示アイテム3</a:t>
             </a:r>
           </a:p>
         </p:txBody>
@@ -11588,7 +12642,7 @@
           <a:lstStyle/>
           <a:p>
             <a:r>
-              <a:t>スピーカーノート付きスライド</a:t>
+              <a:t>2カラムレイアウト</a:t>
             </a:r>
           </a:p>
         </p:txBody>
@@ -11600,7 +12654,7 @@
             <a:spLocks noGrp="1"/>
           </p:cNvSpPr>
           <p:nvPr>
-            <p:ph idx="1"/>
+            <p:ph idx="1" sz="half"/>
           </p:nvPr>
         </p:nvSpPr>
         <p:spPr/>
@@ -11608,9 +12662,61 @@
           <a:bodyPr wrap="square"/>
           <a:lstStyle/>
           <a:p>
+            <a:pPr/>
             <a:r>
               <a:rPr sz="1800"/>
-              <a:t>このスライドには発表者向けのノートが埋め込まれています。</a:t>
+              <a:t>左の項目1</a:t>
+            </a:r>
+          </a:p>
+          <a:p>
+            <a:pPr/>
+            <a:r>
+              <a:rPr sz="1800"/>
+              <a:t>左の項目2</a:t>
+            </a:r>
+          </a:p>
+          <a:p>
+            <a:pPr/>
+            <a:r>
+              <a:rPr sz="1800"/>
+              <a:t>左の項目3</a:t>
+            </a:r>
+          </a:p>
+        </p:txBody>
+      </p:sp>
+      <p:sp>
+        <p:nvSpPr>
+          <p:cNvPr id="4" name="Content Placeholder 3"/>
+          <p:cNvSpPr>
+            <a:spLocks noGrp="1"/>
+          </p:cNvSpPr>
+          <p:nvPr>
+            <p:ph idx="2" sz="half"/>
+          </p:nvPr>
+        </p:nvSpPr>
+        <p:spPr/>
+        <p:txBody>
+          <a:bodyPr wrap="square"/>
+          <a:lstStyle/>
+          <a:p>
+            <a:pPr/>
+            <a:r>
+              <a:rPr sz="1800"/>
+              <a:t>右の項目1</a:t>
+            </a:r>
+          </a:p>
+          <a:p>
+            <a:pPr/>
+            <a:r>
+              <a:rPr sz="1800"/>
+              <a:t>右の項目2</a:t>
+            </a:r>
+          </a:p>
+          <a:p>
+            <a:pPr/>
+            <a:r>
+              <a:rPr sz="1800"/>
+              <a:t>右の項目3</a:t>
             </a:r>
           </a:p>
         </p:txBody>
@@ -11647,7 +12753,11 @@
         <p:txBody>
           <a:bodyPr/>
           <a:lstStyle/>
-          <a:p/>
+          <a:p>
+            <a:r>
+              <a:t>スピーカーノート付きスライド</a:t>
+            </a:r>
+          </a:p>
         </p:txBody>
       </p:sp>
       <p:sp>
@@ -11667,7 +12777,7 @@
           <a:p>
             <a:r>
               <a:rPr sz="1800"/>
-              <a:t>水平区切り線（---）によって生成されたタイトルなしスライドです。</a:t>
+              <a:t>このスライドには発表者向けのノートが埋め込まれています。</a:t>
             </a:r>
           </a:p>
         </p:txBody>
@@ -11704,28 +12814,29 @@
         <p:txBody>
           <a:bodyPr/>
           <a:lstStyle/>
-          <a:p>
-            <a:r>
-              <a:t>まとめ</a:t>
-            </a:r>
-          </a:p>
-        </p:txBody>
-      </p:sp>
-      <p:sp>
-        <p:nvSpPr>
-          <p:cNvPr id="3" name="Text Placeholder 2"/>
-          <p:cNvSpPr>
-            <a:spLocks noGrp="1"/>
-          </p:cNvSpPr>
-          <p:nvPr>
-            <p:ph type="body" idx="1"/>
+          <a:p/>
+        </p:txBody>
+      </p:sp>
+      <p:sp>
+        <p:nvSpPr>
+          <p:cNvPr id="3" name="Content Placeholder 2"/>
+          <p:cNvSpPr>
+            <a:spLocks noGrp="1"/>
+          </p:cNvSpPr>
+          <p:nvPr>
+            <p:ph idx="1"/>
           </p:nvPr>
         </p:nvSpPr>
         <p:spPr/>
         <p:txBody>
-          <a:bodyPr/>
-          <a:lstStyle/>
-          <a:p/>
+          <a:bodyPr wrap="square"/>
+          <a:lstStyle/>
+          <a:p>
+            <a:r>
+              <a:rPr sz="1800"/>
+              <a:t>水平区切り線（---）によって生成されたタイトルなしスライドです。</a:t>
+            </a:r>
+          </a:p>
         </p:txBody>
       </p:sp>
     </p:spTree>
@@ -11737,6 +12848,62 @@
 </file>
 
 <file path=ppt/slides/slide44.xml><?xml version="1.0" encoding="utf-8"?>
+<p:sld xmlns:a="http://schemas.openxmlformats.org/drawingml/2006/main" xmlns:p="http://schemas.openxmlformats.org/presentationml/2006/main" xmlns:r="http://schemas.openxmlformats.org/officeDocument/2006/relationships">
+  <p:cSld>
+    <p:spTree>
+      <p:nvGrpSpPr>
+        <p:cNvPr id="1" name=""/>
+        <p:cNvGrpSpPr/>
+        <p:nvPr/>
+      </p:nvGrpSpPr>
+      <p:grpSpPr/>
+      <p:sp>
+        <p:nvSpPr>
+          <p:cNvPr id="2" name="Title 1"/>
+          <p:cNvSpPr>
+            <a:spLocks noGrp="1"/>
+          </p:cNvSpPr>
+          <p:nvPr>
+            <p:ph type="title"/>
+          </p:nvPr>
+        </p:nvSpPr>
+        <p:spPr/>
+        <p:txBody>
+          <a:bodyPr/>
+          <a:lstStyle/>
+          <a:p>
+            <a:r>
+              <a:t>まとめ</a:t>
+            </a:r>
+          </a:p>
+        </p:txBody>
+      </p:sp>
+      <p:sp>
+        <p:nvSpPr>
+          <p:cNvPr id="3" name="Text Placeholder 2"/>
+          <p:cNvSpPr>
+            <a:spLocks noGrp="1"/>
+          </p:cNvSpPr>
+          <p:nvPr>
+            <p:ph type="body" idx="1"/>
+          </p:nvPr>
+        </p:nvSpPr>
+        <p:spPr/>
+        <p:txBody>
+          <a:bodyPr/>
+          <a:lstStyle/>
+          <a:p/>
+        </p:txBody>
+      </p:sp>
+    </p:spTree>
+  </p:cSld>
+  <p:clrMapOvr>
+    <a:masterClrMapping/>
+  </p:clrMapOvr>
+</p:sld>
+</file>
+
+<file path=ppt/slides/slide45.xml><?xml version="1.0" encoding="utf-8"?>
 <p:sld xmlns:a="http://schemas.openxmlformats.org/drawingml/2006/main" xmlns:p="http://schemas.openxmlformats.org/presentationml/2006/main" xmlns:r="http://schemas.openxmlformats.org/officeDocument/2006/relationships">
   <p:cSld>
     <p:spTree>

--- a/demo_full.pptx
+++ b/demo_full.pptx
@@ -4191,7 +4191,7 @@
         </p:nvSpPr>
         <p:spPr>
           <a:xfrm>
-            <a:off x="457200" y="2271193"/>
+            <a:off x="457200" y="2187860"/>
             <a:ext cx="1200000" cy="500000"/>
           </a:xfrm>
           <a:prstGeom prst="rect">
@@ -4231,7 +4231,7 @@
         </p:nvSpPr>
         <p:spPr>
           <a:xfrm>
-            <a:off x="1863120" y="2271193"/>
+            <a:off x="1863120" y="2187860"/>
             <a:ext cx="1200000" cy="500000"/>
           </a:xfrm>
           <a:prstGeom prst="roundRect">
@@ -4271,7 +4271,7 @@
         </p:nvSpPr>
         <p:spPr>
           <a:xfrm>
-            <a:off x="3269040" y="2271193"/>
+            <a:off x="3269040" y="2187860"/>
             <a:ext cx="1200000" cy="500000"/>
           </a:xfrm>
           <a:prstGeom prst="roundRect">
@@ -4311,7 +4311,7 @@
         </p:nvSpPr>
         <p:spPr>
           <a:xfrm>
-            <a:off x="4674960" y="2271193"/>
+            <a:off x="4674960" y="2187860"/>
             <a:ext cx="1200000" cy="500000"/>
           </a:xfrm>
           <a:prstGeom prst="rect">
@@ -4351,7 +4351,7 @@
         </p:nvSpPr>
         <p:spPr>
           <a:xfrm>
-            <a:off x="6080880" y="2271193"/>
+            <a:off x="6080880" y="2187860"/>
             <a:ext cx="1200000" cy="500000"/>
           </a:xfrm>
           <a:prstGeom prst="can">
@@ -4391,7 +4391,7 @@
         </p:nvSpPr>
         <p:spPr>
           <a:xfrm>
-            <a:off x="7486800" y="2271193"/>
+            <a:off x="7486800" y="2187860"/>
             <a:ext cx="1200000" cy="500000"/>
           </a:xfrm>
           <a:prstGeom prst="ellipse">
@@ -4671,7 +4671,7 @@
         </p:nvSpPr>
         <p:spPr>
           <a:xfrm flipV="1">
-            <a:off x="457200" y="4955169"/>
+            <a:off x="457200" y="5038502"/>
             <a:ext cx="1200000" cy="500000"/>
           </a:xfrm>
           <a:prstGeom prst="trapezoid">
@@ -4711,7 +4711,7 @@
         </p:nvSpPr>
         <p:spPr>
           <a:xfrm>
-            <a:off x="7486800" y="4955169"/>
+            <a:off x="7486800" y="5038502"/>
             <a:ext cx="1200000" cy="500000"/>
           </a:xfrm>
           <a:prstGeom prst="ellipse">
@@ -4754,7 +4754,7 @@
         </p:nvCxnSpPr>
         <p:spPr>
           <a:xfrm>
-            <a:off x="457200" y="2521193"/>
+            <a:off x="457200" y="2437860"/>
             <a:ext cx="2605920" cy="0"/>
           </a:xfrm>
           <a:prstGeom prst="line">
@@ -4790,7 +4790,7 @@
         </p:nvCxnSpPr>
         <p:spPr>
           <a:xfrm>
-            <a:off x="1863120" y="2521193"/>
+            <a:off x="1863120" y="2437860"/>
             <a:ext cx="2605920" cy="0"/>
           </a:xfrm>
           <a:prstGeom prst="line">
@@ -4826,7 +4826,7 @@
         </p:nvCxnSpPr>
         <p:spPr>
           <a:xfrm>
-            <a:off x="3269040" y="2521193"/>
+            <a:off x="3269040" y="2437860"/>
             <a:ext cx="2605920" cy="0"/>
           </a:xfrm>
           <a:prstGeom prst="line">
@@ -4862,7 +4862,7 @@
         </p:nvCxnSpPr>
         <p:spPr>
           <a:xfrm>
-            <a:off x="4674960" y="2521193"/>
+            <a:off x="4674960" y="2437860"/>
             <a:ext cx="2605920" cy="0"/>
           </a:xfrm>
           <a:prstGeom prst="line">
@@ -4898,7 +4898,7 @@
         </p:nvCxnSpPr>
         <p:spPr>
           <a:xfrm>
-            <a:off x="6080880" y="2521193"/>
+            <a:off x="6080880" y="2437860"/>
             <a:ext cx="2605920" cy="0"/>
           </a:xfrm>
           <a:prstGeom prst="line">
@@ -4934,8 +4934,8 @@
         </p:nvCxnSpPr>
         <p:spPr>
           <a:xfrm flipH="1">
-            <a:off x="457200" y="2521193"/>
-            <a:ext cx="8229600" cy="1341988"/>
+            <a:off x="457200" y="2437860"/>
+            <a:ext cx="8229600" cy="1425321"/>
           </a:xfrm>
           <a:prstGeom prst="line">
             <a:avLst/>
@@ -5151,7 +5151,7 @@
         <p:spPr>
           <a:xfrm flipH="1">
             <a:off x="457200" y="3863181"/>
-            <a:ext cx="8229600" cy="1341988"/>
+            <a:ext cx="8229600" cy="1425321"/>
           </a:xfrm>
           <a:prstGeom prst="line">
             <a:avLst/>
@@ -5186,7 +5186,7 @@
         </p:nvCxnSpPr>
         <p:spPr>
           <a:xfrm>
-            <a:off x="457200" y="5205169"/>
+            <a:off x="457200" y="5288502"/>
             <a:ext cx="8229600" cy="0"/>
           </a:xfrm>
           <a:prstGeom prst="line">
@@ -5309,16 +5309,16 @@
       </p:sp>
       <p:sp>
         <p:nvSpPr>
-          <p:cNvPr id="5" name="Diamond 4"/>
+          <p:cNvPr id="6" name="Rectangle 5"/>
           <p:cNvSpPr/>
           <p:nvPr/>
         </p:nvSpPr>
         <p:spPr>
           <a:xfrm>
-            <a:off x="3972000" y="2405392"/>
+            <a:off x="457200" y="3210585"/>
             <a:ext cx="1200000" cy="500000"/>
           </a:xfrm>
-          <a:prstGeom prst="diamond">
+          <a:prstGeom prst="rect">
             <a:avLst/>
           </a:prstGeom>
         </p:spPr>
@@ -5342,20 +5342,20 @@
           <a:p>
             <a:r>
               <a:rPr sz="1200"/>
-              <a:t>条件判定</a:t>
-            </a:r>
-          </a:p>
-        </p:txBody>
-      </p:sp>
-      <p:sp>
-        <p:nvSpPr>
-          <p:cNvPr id="6" name="Rectangle 5"/>
+              <a:t>処理A</a:t>
+            </a:r>
+          </a:p>
+        </p:txBody>
+      </p:sp>
+      <p:sp>
+        <p:nvSpPr>
+          <p:cNvPr id="7" name="Rectangle 6"/>
           <p:cNvSpPr/>
           <p:nvPr/>
         </p:nvSpPr>
         <p:spPr>
           <a:xfrm>
-            <a:off x="457200" y="3210585"/>
+            <a:off x="7486800" y="3210585"/>
             <a:ext cx="1200000" cy="500000"/>
           </a:xfrm>
           <a:prstGeom prst="rect">
@@ -5382,87 +5382,7 @@
           <a:p>
             <a:r>
               <a:rPr sz="1200"/>
-              <a:t>処理A</a:t>
-            </a:r>
-          </a:p>
-        </p:txBody>
-      </p:sp>
-      <p:sp>
-        <p:nvSpPr>
-          <p:cNvPr id="7" name="Rectangle 6"/>
-          <p:cNvSpPr/>
-          <p:nvPr/>
-        </p:nvSpPr>
-        <p:spPr>
-          <a:xfrm>
-            <a:off x="7486800" y="3210585"/>
-            <a:ext cx="1200000" cy="500000"/>
-          </a:xfrm>
-          <a:prstGeom prst="rect">
-            <a:avLst/>
-          </a:prstGeom>
-        </p:spPr>
-        <p:style>
-          <a:lnRef idx="1">
-            <a:schemeClr val="accent1"/>
-          </a:lnRef>
-          <a:fillRef idx="3">
-            <a:schemeClr val="accent1"/>
-          </a:fillRef>
-          <a:effectRef idx="2">
-            <a:schemeClr val="accent1"/>
-          </a:effectRef>
-          <a:fontRef idx="minor">
-            <a:schemeClr val="lt1"/>
-          </a:fontRef>
-        </p:style>
-        <p:txBody>
-          <a:bodyPr rtlCol="0" anchor="ctr"/>
-          <a:lstStyle/>
-          <a:p>
-            <a:r>
-              <a:rPr sz="1200"/>
               <a:t>処理B</a:t>
-            </a:r>
-          </a:p>
-        </p:txBody>
-      </p:sp>
-      <p:sp>
-        <p:nvSpPr>
-          <p:cNvPr id="8" name="Diamond 7"/>
-          <p:cNvSpPr/>
-          <p:nvPr/>
-        </p:nvSpPr>
-        <p:spPr>
-          <a:xfrm>
-            <a:off x="457200" y="4015777"/>
-            <a:ext cx="1200000" cy="500000"/>
-          </a:xfrm>
-          <a:prstGeom prst="diamond">
-            <a:avLst/>
-          </a:prstGeom>
-        </p:spPr>
-        <p:style>
-          <a:lnRef idx="1">
-            <a:schemeClr val="accent1"/>
-          </a:lnRef>
-          <a:fillRef idx="3">
-            <a:schemeClr val="accent1"/>
-          </a:fillRef>
-          <a:effectRef idx="2">
-            <a:schemeClr val="accent1"/>
-          </a:effectRef>
-          <a:fontRef idx="minor">
-            <a:schemeClr val="lt1"/>
-          </a:fontRef>
-        </p:style>
-        <p:txBody>
-          <a:bodyPr rtlCol="0" anchor="ctr"/>
-          <a:lstStyle/>
-          <a:p>
-            <a:r>
-              <a:rPr sz="1200"/>
-              <a:t>さらに分岐</a:t>
             </a:r>
           </a:p>
         </p:txBody>
@@ -5778,112 +5698,20 @@
             <a:schemeClr val="tx1"/>
           </a:fontRef>
         </p:style>
-        <p:txBody>
-          <a:bodyPr anchor="ctr" wrap="square"/>
-          <a:lstStyle/>
-          <a:p>
-            <a:r>
-              <a:rPr dirty="0" sz="1000"/>
-              <a:t>はい</a:t>
-            </a:r>
-          </a:p>
-        </p:txBody>
-      </p:cxnSp>
-      <p:cxnSp>
-        <p:nvCxnSpPr>
-          <p:cNvPr id="17" name="Connector 16"/>
-          <p:cNvCxnSpPr>
-            <a:stCxn id="5" idx="1"/>
-            <a:endCxn id="7" idx="3"/>
-          </p:cNvCxnSpPr>
-          <p:nvPr/>
-        </p:nvCxnSpPr>
-        <p:spPr>
-          <a:xfrm>
-            <a:off x="3972000" y="2655392"/>
-            <a:ext cx="4714800" cy="805193"/>
-          </a:xfrm>
-          <a:prstGeom prst="line">
-            <a:avLst/>
-          </a:prstGeom>
-          <a:ln>
-            <a:headEnd type="arrow" w="med" len="med"/>
-          </a:ln>
-        </p:spPr>
-        <p:style>
-          <a:lnRef idx="2">
-            <a:schemeClr val="accent1"/>
-          </a:lnRef>
-          <a:fillRef idx="0">
-            <a:schemeClr val="accent1"/>
-          </a:fillRef>
-          <a:effectRef idx="1">
-            <a:schemeClr val="accent1"/>
-          </a:effectRef>
-          <a:fontRef idx="minor">
-            <a:schemeClr val="tx1"/>
-          </a:fontRef>
-        </p:style>
-        <p:txBody>
-          <a:bodyPr anchor="ctr" wrap="square"/>
-          <a:lstStyle/>
-          <a:p>
-            <a:r>
-              <a:rPr dirty="0" sz="1000"/>
-              <a:t>いいえ</a:t>
-            </a:r>
-          </a:p>
-        </p:txBody>
       </p:cxnSp>
       <p:cxnSp>
         <p:nvCxnSpPr>
           <p:cNvPr id="18" name="Connector 17"/>
           <p:cNvCxnSpPr>
-            <a:stCxn id="6" idx="2"/>
-            <a:endCxn id="8" idx="0"/>
+            <a:stCxn id="5" idx="1"/>
+            <a:endCxn id="7" idx="3"/>
           </p:cNvCxnSpPr>
           <p:nvPr/>
         </p:nvCxnSpPr>
         <p:spPr>
           <a:xfrm>
-            <a:off x="1057200" y="3710585"/>
-            <a:ext cx="0" cy="305192"/>
-          </a:xfrm>
-          <a:prstGeom prst="line">
-            <a:avLst/>
-          </a:prstGeom>
-          <a:ln>
-            <a:headEnd type="arrow" w="med" len="med"/>
-          </a:ln>
-        </p:spPr>
-        <p:style>
-          <a:lnRef idx="2">
-            <a:schemeClr val="accent1"/>
-          </a:lnRef>
-          <a:fillRef idx="0">
-            <a:schemeClr val="accent1"/>
-          </a:fillRef>
-          <a:effectRef idx="1">
-            <a:schemeClr val="accent1"/>
-          </a:effectRef>
-          <a:fontRef idx="minor">
-            <a:schemeClr val="tx1"/>
-          </a:fontRef>
-        </p:style>
-      </p:cxnSp>
-      <p:cxnSp>
-        <p:nvCxnSpPr>
-          <p:cNvPr id="19" name="Connector 18"/>
-          <p:cNvCxnSpPr>
-            <a:stCxn id="7" idx="2"/>
-            <a:endCxn id="9" idx="0"/>
-          </p:cNvCxnSpPr>
-          <p:nvPr/>
-        </p:nvCxnSpPr>
-        <p:spPr>
-          <a:xfrm>
-            <a:off x="8086800" y="3710585"/>
-            <a:ext cx="0" cy="305192"/>
+            <a:off x="3972000" y="2655392"/>
+            <a:ext cx="4714800" cy="805193"/>
           </a:xfrm>
           <a:prstGeom prst="line">
             <a:avLst/>
@@ -5911,15 +5739,15 @@
         <p:nvCxnSpPr>
           <p:cNvPr id="20" name="Connector 19"/>
           <p:cNvCxnSpPr>
-            <a:stCxn id="8" idx="2"/>
-            <a:endCxn id="10" idx="0"/>
+            <a:stCxn id="6" idx="2"/>
+            <a:endCxn id="8" idx="0"/>
           </p:cNvCxnSpPr>
           <p:nvPr/>
         </p:nvCxnSpPr>
         <p:spPr>
           <a:xfrm>
-            <a:off x="1057200" y="4515777"/>
-            <a:ext cx="0" cy="305193"/>
+            <a:off x="1057200" y="3710585"/>
+            <a:ext cx="0" cy="305192"/>
           </a:xfrm>
           <a:prstGeom prst="line">
             <a:avLst/>
@@ -5942,30 +5770,20 @@
             <a:schemeClr val="tx1"/>
           </a:fontRef>
         </p:style>
-        <p:txBody>
-          <a:bodyPr anchor="ctr" wrap="square"/>
-          <a:lstStyle/>
-          <a:p>
-            <a:r>
-              <a:rPr dirty="0" sz="1000"/>
-              <a:t>ケース1</a:t>
-            </a:r>
-          </a:p>
-        </p:txBody>
       </p:cxnSp>
       <p:cxnSp>
         <p:nvCxnSpPr>
           <p:cNvPr id="21" name="Connector 20"/>
           <p:cNvCxnSpPr>
-            <a:stCxn id="8" idx="1"/>
-            <a:endCxn id="11" idx="3"/>
+            <a:stCxn id="7" idx="2"/>
+            <a:endCxn id="9" idx="0"/>
           </p:cNvCxnSpPr>
           <p:nvPr/>
         </p:nvCxnSpPr>
         <p:spPr>
           <a:xfrm>
-            <a:off x="457200" y="4265777"/>
-            <a:ext cx="3543200" cy="805193"/>
+            <a:off x="8086800" y="3710585"/>
+            <a:ext cx="0" cy="305192"/>
           </a:xfrm>
           <a:prstGeom prst="line">
             <a:avLst/>
@@ -5988,75 +5806,19 @@
             <a:schemeClr val="tx1"/>
           </a:fontRef>
         </p:style>
-        <p:txBody>
-          <a:bodyPr anchor="ctr" wrap="square"/>
-          <a:lstStyle/>
-          <a:p>
-            <a:r>
-              <a:rPr dirty="0" sz="1000"/>
-              <a:t>ケース2</a:t>
-            </a:r>
-          </a:p>
-        </p:txBody>
       </p:cxnSp>
       <p:cxnSp>
         <p:nvCxnSpPr>
           <p:cNvPr id="22" name="Connector 21"/>
           <p:cNvCxnSpPr>
-            <a:stCxn id="8" idx="1"/>
-            <a:endCxn id="12" idx="3"/>
+            <a:stCxn id="8" idx="2"/>
+            <a:endCxn id="10" idx="0"/>
           </p:cNvCxnSpPr>
           <p:nvPr/>
         </p:nvCxnSpPr>
         <p:spPr>
           <a:xfrm>
-            <a:off x="457200" y="4265777"/>
-            <a:ext cx="5886400" cy="805193"/>
-          </a:xfrm>
-          <a:prstGeom prst="line">
-            <a:avLst/>
-          </a:prstGeom>
-          <a:ln>
-            <a:headEnd type="arrow" w="med" len="med"/>
-          </a:ln>
-        </p:spPr>
-        <p:style>
-          <a:lnRef idx="2">
-            <a:schemeClr val="accent1"/>
-          </a:lnRef>
-          <a:fillRef idx="0">
-            <a:schemeClr val="accent1"/>
-          </a:fillRef>
-          <a:effectRef idx="1">
-            <a:schemeClr val="accent1"/>
-          </a:effectRef>
-          <a:fontRef idx="minor">
-            <a:schemeClr val="tx1"/>
-          </a:fontRef>
-        </p:style>
-        <p:txBody>
-          <a:bodyPr anchor="ctr" wrap="square"/>
-          <a:lstStyle/>
-          <a:p>
-            <a:r>
-              <a:rPr dirty="0" sz="1000"/>
-              <a:t>ケース3</a:t>
-            </a:r>
-          </a:p>
-        </p:txBody>
-      </p:cxnSp>
-      <p:cxnSp>
-        <p:nvCxnSpPr>
-          <p:cNvPr id="23" name="Connector 22"/>
-          <p:cNvCxnSpPr>
-            <a:stCxn id="9" idx="2"/>
-            <a:endCxn id="13" idx="0"/>
-          </p:cNvCxnSpPr>
-          <p:nvPr/>
-        </p:nvCxnSpPr>
-        <p:spPr>
-          <a:xfrm>
-            <a:off x="8086800" y="4515777"/>
+            <a:off x="1057200" y="4515777"/>
             <a:ext cx="0" cy="305193"/>
           </a:xfrm>
           <a:prstGeom prst="line">
@@ -6085,51 +5847,15 @@
         <p:nvCxnSpPr>
           <p:cNvPr id="24" name="Connector 23"/>
           <p:cNvCxnSpPr>
-            <a:stCxn id="10" idx="1"/>
-            <a:endCxn id="14" idx="3"/>
+            <a:stCxn id="8" idx="1"/>
+            <a:endCxn id="11" idx="3"/>
           </p:cNvCxnSpPr>
           <p:nvPr/>
         </p:nvCxnSpPr>
         <p:spPr>
           <a:xfrm>
-            <a:off x="457200" y="5070970"/>
-            <a:ext cx="4714800" cy="805193"/>
-          </a:xfrm>
-          <a:prstGeom prst="line">
-            <a:avLst/>
-          </a:prstGeom>
-          <a:ln>
-            <a:headEnd type="arrow" w="med" len="med"/>
-          </a:ln>
-        </p:spPr>
-        <p:style>
-          <a:lnRef idx="2">
-            <a:schemeClr val="accent1"/>
-          </a:lnRef>
-          <a:fillRef idx="0">
-            <a:schemeClr val="accent1"/>
-          </a:fillRef>
-          <a:effectRef idx="1">
-            <a:schemeClr val="accent1"/>
-          </a:effectRef>
-          <a:fontRef idx="minor">
-            <a:schemeClr val="tx1"/>
-          </a:fontRef>
-        </p:style>
-      </p:cxnSp>
-      <p:cxnSp>
-        <p:nvCxnSpPr>
-          <p:cNvPr id="25" name="Connector 24"/>
-          <p:cNvCxnSpPr>
-            <a:stCxn id="11" idx="2"/>
-            <a:endCxn id="14" idx="0"/>
-          </p:cNvCxnSpPr>
-          <p:nvPr/>
-        </p:nvCxnSpPr>
-        <p:spPr>
-          <a:xfrm>
-            <a:off x="3400400" y="5320970"/>
-            <a:ext cx="1171600" cy="305193"/>
+            <a:off x="457200" y="4265777"/>
+            <a:ext cx="3543200" cy="805193"/>
           </a:xfrm>
           <a:prstGeom prst="line">
             <a:avLst/>
@@ -6157,15 +5883,15 @@
         <p:nvCxnSpPr>
           <p:cNvPr id="26" name="Connector 25"/>
           <p:cNvCxnSpPr>
-            <a:stCxn id="12" idx="2"/>
-            <a:endCxn id="14" idx="0"/>
+            <a:stCxn id="8" idx="1"/>
+            <a:endCxn id="12" idx="3"/>
           </p:cNvCxnSpPr>
           <p:nvPr/>
         </p:nvCxnSpPr>
         <p:spPr>
-          <a:xfrm flipH="1">
-            <a:off x="4572000" y="5320970"/>
-            <a:ext cx="1171600" cy="305193"/>
+          <a:xfrm>
+            <a:off x="457200" y="4265777"/>
+            <a:ext cx="5886400" cy="805193"/>
           </a:xfrm>
           <a:prstGeom prst="line">
             <a:avLst/>
@@ -6191,17 +5917,17 @@
       </p:cxnSp>
       <p:cxnSp>
         <p:nvCxnSpPr>
-          <p:cNvPr id="27" name="Connector 26"/>
+          <p:cNvPr id="28" name="Connector 27"/>
           <p:cNvCxnSpPr>
-            <a:stCxn id="13" idx="3"/>
-            <a:endCxn id="14" idx="1"/>
+            <a:stCxn id="9" idx="2"/>
+            <a:endCxn id="13" idx="0"/>
           </p:cNvCxnSpPr>
           <p:nvPr/>
         </p:nvCxnSpPr>
         <p:spPr>
-          <a:xfrm flipH="1">
-            <a:off x="3972000" y="5070970"/>
-            <a:ext cx="4714800" cy="805193"/>
+          <a:xfrm>
+            <a:off x="8086800" y="4515777"/>
+            <a:ext cx="0" cy="305193"/>
           </a:xfrm>
           <a:prstGeom prst="line">
             <a:avLst/>
@@ -6225,6 +5951,415 @@
           </a:fontRef>
         </p:style>
       </p:cxnSp>
+      <p:cxnSp>
+        <p:nvCxnSpPr>
+          <p:cNvPr id="29" name="Connector 28"/>
+          <p:cNvCxnSpPr>
+            <a:stCxn id="10" idx="1"/>
+            <a:endCxn id="14" idx="3"/>
+          </p:cNvCxnSpPr>
+          <p:nvPr/>
+        </p:nvCxnSpPr>
+        <p:spPr>
+          <a:xfrm>
+            <a:off x="457200" y="5070970"/>
+            <a:ext cx="4714800" cy="805193"/>
+          </a:xfrm>
+          <a:prstGeom prst="line">
+            <a:avLst/>
+          </a:prstGeom>
+          <a:ln>
+            <a:headEnd type="arrow" w="med" len="med"/>
+          </a:ln>
+        </p:spPr>
+        <p:style>
+          <a:lnRef idx="2">
+            <a:schemeClr val="accent1"/>
+          </a:lnRef>
+          <a:fillRef idx="0">
+            <a:schemeClr val="accent1"/>
+          </a:fillRef>
+          <a:effectRef idx="1">
+            <a:schemeClr val="accent1"/>
+          </a:effectRef>
+          <a:fontRef idx="minor">
+            <a:schemeClr val="tx1"/>
+          </a:fontRef>
+        </p:style>
+      </p:cxnSp>
+      <p:cxnSp>
+        <p:nvCxnSpPr>
+          <p:cNvPr id="30" name="Connector 29"/>
+          <p:cNvCxnSpPr>
+            <a:stCxn id="11" idx="2"/>
+            <a:endCxn id="14" idx="0"/>
+          </p:cNvCxnSpPr>
+          <p:nvPr/>
+        </p:nvCxnSpPr>
+        <p:spPr>
+          <a:xfrm>
+            <a:off x="3400400" y="5320970"/>
+            <a:ext cx="1171600" cy="305193"/>
+          </a:xfrm>
+          <a:prstGeom prst="line">
+            <a:avLst/>
+          </a:prstGeom>
+          <a:ln>
+            <a:headEnd type="arrow" w="med" len="med"/>
+          </a:ln>
+        </p:spPr>
+        <p:style>
+          <a:lnRef idx="2">
+            <a:schemeClr val="accent1"/>
+          </a:lnRef>
+          <a:fillRef idx="0">
+            <a:schemeClr val="accent1"/>
+          </a:fillRef>
+          <a:effectRef idx="1">
+            <a:schemeClr val="accent1"/>
+          </a:effectRef>
+          <a:fontRef idx="minor">
+            <a:schemeClr val="tx1"/>
+          </a:fontRef>
+        </p:style>
+      </p:cxnSp>
+      <p:cxnSp>
+        <p:nvCxnSpPr>
+          <p:cNvPr id="31" name="Connector 30"/>
+          <p:cNvCxnSpPr>
+            <a:stCxn id="12" idx="2"/>
+            <a:endCxn id="14" idx="0"/>
+          </p:cNvCxnSpPr>
+          <p:nvPr/>
+        </p:nvCxnSpPr>
+        <p:spPr>
+          <a:xfrm flipH="1">
+            <a:off x="4572000" y="5320970"/>
+            <a:ext cx="1171600" cy="305193"/>
+          </a:xfrm>
+          <a:prstGeom prst="line">
+            <a:avLst/>
+          </a:prstGeom>
+          <a:ln>
+            <a:headEnd type="arrow" w="med" len="med"/>
+          </a:ln>
+        </p:spPr>
+        <p:style>
+          <a:lnRef idx="2">
+            <a:schemeClr val="accent1"/>
+          </a:lnRef>
+          <a:fillRef idx="0">
+            <a:schemeClr val="accent1"/>
+          </a:fillRef>
+          <a:effectRef idx="1">
+            <a:schemeClr val="accent1"/>
+          </a:effectRef>
+          <a:fontRef idx="minor">
+            <a:schemeClr val="tx1"/>
+          </a:fontRef>
+        </p:style>
+      </p:cxnSp>
+      <p:cxnSp>
+        <p:nvCxnSpPr>
+          <p:cNvPr id="32" name="Connector 31"/>
+          <p:cNvCxnSpPr>
+            <a:stCxn id="13" idx="3"/>
+            <a:endCxn id="14" idx="1"/>
+          </p:cNvCxnSpPr>
+          <p:nvPr/>
+        </p:nvCxnSpPr>
+        <p:spPr>
+          <a:xfrm flipH="1">
+            <a:off x="3972000" y="5070970"/>
+            <a:ext cx="4714800" cy="805193"/>
+          </a:xfrm>
+          <a:prstGeom prst="line">
+            <a:avLst/>
+          </a:prstGeom>
+          <a:ln>
+            <a:headEnd type="arrow" w="med" len="med"/>
+          </a:ln>
+        </p:spPr>
+        <p:style>
+          <a:lnRef idx="2">
+            <a:schemeClr val="accent1"/>
+          </a:lnRef>
+          <a:fillRef idx="0">
+            <a:schemeClr val="accent1"/>
+          </a:fillRef>
+          <a:effectRef idx="1">
+            <a:schemeClr val="accent1"/>
+          </a:effectRef>
+          <a:fontRef idx="minor">
+            <a:schemeClr val="tx1"/>
+          </a:fontRef>
+        </p:style>
+      </p:cxnSp>
+      <p:grpSp>
+        <p:grpSpPr>
+          <a:xfrm>
+            <a:off x="3270181" y="2405392"/>
+            <a:ext cx="2603638" cy="535777"/>
+            <a:chOff x="3270181" y="2405392"/>
+            <a:chExt cx="2603638" cy="535777"/>
+          </a:xfrm>
+        </p:grpSpPr>
+        <p:sp>
+          <p:nvSpPr>
+            <p:cNvPr id="5" name="Diamond 4"/>
+            <p:cNvSpPr/>
+            <p:nvPr/>
+          </p:nvSpPr>
+          <p:spPr>
+            <a:xfrm>
+              <a:off x="3972000" y="2405392"/>
+              <a:ext cx="1200000" cy="500000"/>
+            </a:xfrm>
+            <a:prstGeom prst="diamond">
+              <a:avLst/>
+            </a:prstGeom>
+          </p:spPr>
+          <p:style>
+            <a:lnRef idx="1">
+              <a:schemeClr val="accent1"/>
+            </a:lnRef>
+            <a:fillRef idx="3">
+              <a:schemeClr val="accent1"/>
+            </a:fillRef>
+            <a:effectRef idx="2">
+              <a:schemeClr val="accent1"/>
+            </a:effectRef>
+            <a:fontRef idx="minor">
+              <a:schemeClr val="lt1"/>
+            </a:fontRef>
+          </p:style>
+          <p:txBody>
+            <a:bodyPr rtlCol="0" anchor="ctr"/>
+            <a:lstStyle/>
+            <a:p>
+              <a:r>
+                <a:rPr sz="1200"/>
+                <a:t>条件判定</a:t>
+              </a:r>
+            </a:p>
+          </p:txBody>
+        </p:sp>
+        <p:sp>
+          <p:nvSpPr>
+            <p:cNvPr id="17" name="TextBox 16"/>
+            <p:cNvSpPr txBox="1"/>
+            <p:nvPr/>
+          </p:nvSpPr>
+          <p:spPr>
+            <a:xfrm>
+              <a:off x="3270181" y="2691169"/>
+              <a:ext cx="1200000" cy="250000"/>
+            </a:xfrm>
+            <a:prstGeom prst="rect">
+              <a:avLst/>
+            </a:prstGeom>
+            <a:noFill/>
+            <a:ln>
+              <a:noFill/>
+            </a:ln>
+          </p:spPr>
+          <p:txBody>
+            <a:bodyPr wrap="none">
+              <a:spAutoFit/>
+            </a:bodyPr>
+            <a:lstStyle/>
+            <a:p>
+              <a:pPr/>
+              <a:r>
+                <a:rPr sz="1000" b="0"/>
+                <a:t>はい</a:t>
+              </a:r>
+            </a:p>
+          </p:txBody>
+        </p:sp>
+        <p:sp>
+          <p:nvSpPr>
+            <p:cNvPr id="19" name="TextBox 18"/>
+            <p:cNvSpPr txBox="1"/>
+            <p:nvPr/>
+          </p:nvSpPr>
+          <p:spPr>
+            <a:xfrm>
+              <a:off x="4673819" y="2691169"/>
+              <a:ext cx="1200000" cy="250000"/>
+            </a:xfrm>
+            <a:prstGeom prst="rect">
+              <a:avLst/>
+            </a:prstGeom>
+            <a:noFill/>
+            <a:ln>
+              <a:noFill/>
+            </a:ln>
+          </p:spPr>
+          <p:txBody>
+            <a:bodyPr wrap="none">
+              <a:spAutoFit/>
+            </a:bodyPr>
+            <a:lstStyle/>
+            <a:p>
+              <a:pPr/>
+              <a:r>
+                <a:rPr sz="1000" b="0"/>
+                <a:t>いいえ</a:t>
+              </a:r>
+            </a:p>
+          </p:txBody>
+        </p:sp>
+      </p:grpSp>
+      <p:grpSp>
+        <p:grpSpPr>
+          <a:xfrm>
+            <a:off x="457200" y="4015777"/>
+            <a:ext cx="1909602" cy="1095000"/>
+            <a:chOff x="457200" y="4015777"/>
+            <a:chExt cx="1909602" cy="1095000"/>
+          </a:xfrm>
+        </p:grpSpPr>
+        <p:sp>
+          <p:nvSpPr>
+            <p:cNvPr id="8" name="Diamond 7"/>
+            <p:cNvSpPr/>
+            <p:nvPr/>
+          </p:nvSpPr>
+          <p:spPr>
+            <a:xfrm>
+              <a:off x="457200" y="4015777"/>
+              <a:ext cx="1200000" cy="500000"/>
+            </a:xfrm>
+            <a:prstGeom prst="diamond">
+              <a:avLst/>
+            </a:prstGeom>
+          </p:spPr>
+          <p:style>
+            <a:lnRef idx="1">
+              <a:schemeClr val="accent1"/>
+            </a:lnRef>
+            <a:fillRef idx="3">
+              <a:schemeClr val="accent1"/>
+            </a:fillRef>
+            <a:effectRef idx="2">
+              <a:schemeClr val="accent1"/>
+            </a:effectRef>
+            <a:fontRef idx="minor">
+              <a:schemeClr val="lt1"/>
+            </a:fontRef>
+          </p:style>
+          <p:txBody>
+            <a:bodyPr rtlCol="0" anchor="ctr"/>
+            <a:lstStyle/>
+            <a:p>
+              <a:r>
+                <a:rPr sz="1200"/>
+                <a:t>さらに分岐</a:t>
+              </a:r>
+            </a:p>
+          </p:txBody>
+        </p:sp>
+        <p:sp>
+          <p:nvSpPr>
+            <p:cNvPr id="23" name="TextBox 22"/>
+            <p:cNvSpPr txBox="1"/>
+            <p:nvPr/>
+          </p:nvSpPr>
+          <p:spPr>
+            <a:xfrm>
+              <a:off x="457200" y="4860777"/>
+              <a:ext cx="1200000" cy="250000"/>
+            </a:xfrm>
+            <a:prstGeom prst="rect">
+              <a:avLst/>
+            </a:prstGeom>
+            <a:noFill/>
+            <a:ln>
+              <a:noFill/>
+            </a:ln>
+          </p:spPr>
+          <p:txBody>
+            <a:bodyPr wrap="none">
+              <a:spAutoFit/>
+            </a:bodyPr>
+            <a:lstStyle/>
+            <a:p>
+              <a:pPr/>
+              <a:r>
+                <a:rPr sz="1000" b="0"/>
+                <a:t>ケース1</a:t>
+              </a:r>
+            </a:p>
+          </p:txBody>
+        </p:sp>
+        <p:sp>
+          <p:nvSpPr>
+            <p:cNvPr id="25" name="TextBox 24"/>
+            <p:cNvSpPr txBox="1"/>
+            <p:nvPr/>
+          </p:nvSpPr>
+          <p:spPr>
+            <a:xfrm>
+              <a:off x="1138119" y="4374761"/>
+              <a:ext cx="1200000" cy="250000"/>
+            </a:xfrm>
+            <a:prstGeom prst="rect">
+              <a:avLst/>
+            </a:prstGeom>
+            <a:noFill/>
+            <a:ln>
+              <a:noFill/>
+            </a:ln>
+          </p:spPr>
+          <p:txBody>
+            <a:bodyPr wrap="none">
+              <a:spAutoFit/>
+            </a:bodyPr>
+            <a:lstStyle/>
+            <a:p>
+              <a:pPr/>
+              <a:r>
+                <a:rPr sz="1000" b="0"/>
+                <a:t>ケース2</a:t>
+              </a:r>
+            </a:p>
+          </p:txBody>
+        </p:sp>
+        <p:sp>
+          <p:nvSpPr>
+            <p:cNvPr id="27" name="TextBox 26"/>
+            <p:cNvSpPr txBox="1"/>
+            <p:nvPr/>
+          </p:nvSpPr>
+          <p:spPr>
+            <a:xfrm>
+              <a:off x="1166802" y="4262697"/>
+              <a:ext cx="1200000" cy="250000"/>
+            </a:xfrm>
+            <a:prstGeom prst="rect">
+              <a:avLst/>
+            </a:prstGeom>
+            <a:noFill/>
+            <a:ln>
+              <a:noFill/>
+            </a:ln>
+          </p:spPr>
+          <p:txBody>
+            <a:bodyPr wrap="none">
+              <a:spAutoFit/>
+            </a:bodyPr>
+            <a:lstStyle/>
+            <a:p>
+              <a:pPr/>
+              <a:r>
+                <a:rPr sz="1000" b="0"/>
+                <a:t>ケース3</a:t>
+              </a:r>
+            </a:p>
+          </p:txBody>
+        </p:sp>
+      </p:grpSp>
     </p:spTree>
   </p:cSld>
   <p:clrMapOvr>
@@ -6283,16 +6418,16 @@
       </p:sp>
       <p:sp>
         <p:nvSpPr>
-          <p:cNvPr id="4" name="Rounded Rectangle 3"/>
+          <p:cNvPr id="7" name="Rectangle 6"/>
           <p:cNvSpPr/>
           <p:nvPr/>
         </p:nvSpPr>
         <p:spPr>
           <a:xfrm>
-            <a:off x="2214600" y="1600200"/>
+            <a:off x="2064600" y="4015777"/>
             <a:ext cx="1200000" cy="500000"/>
           </a:xfrm>
-          <a:prstGeom prst="roundRect">
+          <a:prstGeom prst="rect">
             <a:avLst/>
           </a:prstGeom>
         </p:spPr>
@@ -6316,20 +6451,20 @@
           <a:p>
             <a:r>
               <a:rPr sz="1200"/>
-              <a:t>開始</a:t>
-            </a:r>
-          </a:p>
-        </p:txBody>
-      </p:sp>
-      <p:sp>
-        <p:nvSpPr>
-          <p:cNvPr id="5" name="Rectangle 4"/>
+              <a:t>処理3</a:t>
+            </a:r>
+          </a:p>
+        </p:txBody>
+      </p:sp>
+      <p:sp>
+        <p:nvSpPr>
+          <p:cNvPr id="8" name="Rectangle 7"/>
           <p:cNvSpPr/>
           <p:nvPr/>
         </p:nvSpPr>
         <p:spPr>
           <a:xfrm>
-            <a:off x="2214600" y="2103445"/>
+            <a:off x="2064600" y="4820970"/>
             <a:ext cx="1200000" cy="500000"/>
           </a:xfrm>
           <a:prstGeom prst="rect">
@@ -6356,20 +6491,20 @@
           <a:p>
             <a:r>
               <a:rPr sz="1200"/>
-              <a:t>処理1</a:t>
-            </a:r>
-          </a:p>
-        </p:txBody>
-      </p:sp>
-      <p:sp>
-        <p:nvSpPr>
-          <p:cNvPr id="6" name="Rectangle 5"/>
+              <a:t>丸端</a:t>
+            </a:r>
+          </a:p>
+        </p:txBody>
+      </p:sp>
+      <p:sp>
+        <p:nvSpPr>
+          <p:cNvPr id="10" name="Rectangle 9"/>
           <p:cNvSpPr/>
           <p:nvPr/>
         </p:nvSpPr>
         <p:spPr>
           <a:xfrm>
-            <a:off x="2214600" y="2606690"/>
+            <a:off x="5879400" y="1600200"/>
             <a:ext cx="1200000" cy="500000"/>
           </a:xfrm>
           <a:prstGeom prst="rect">
@@ -6396,20 +6531,20 @@
           <a:p>
             <a:r>
               <a:rPr sz="1200"/>
-              <a:t>処理2</a:t>
-            </a:r>
-          </a:p>
-        </p:txBody>
-      </p:sp>
-      <p:sp>
-        <p:nvSpPr>
-          <p:cNvPr id="7" name="Rectangle 6"/>
+              <a:t>処理4</a:t>
+            </a:r>
+          </a:p>
+        </p:txBody>
+      </p:sp>
+      <p:sp>
+        <p:nvSpPr>
+          <p:cNvPr id="11" name="Rectangle 10"/>
           <p:cNvSpPr/>
           <p:nvPr/>
         </p:nvSpPr>
         <p:spPr>
           <a:xfrm>
-            <a:off x="2214600" y="3109936"/>
+            <a:off x="5879400" y="2942187"/>
             <a:ext cx="1200000" cy="500000"/>
           </a:xfrm>
           <a:prstGeom prst="rect">
@@ -6436,20 +6571,20 @@
           <a:p>
             <a:r>
               <a:rPr sz="1200"/>
-              <a:t>処理3</a:t>
-            </a:r>
-          </a:p>
-        </p:txBody>
-      </p:sp>
-      <p:sp>
-        <p:nvSpPr>
-          <p:cNvPr id="8" name="Rectangle 7"/>
+              <a:t>処理5</a:t>
+            </a:r>
+          </a:p>
+        </p:txBody>
+      </p:sp>
+      <p:sp>
+        <p:nvSpPr>
+          <p:cNvPr id="12" name="Rectangle 11"/>
           <p:cNvSpPr/>
           <p:nvPr/>
         </p:nvSpPr>
         <p:spPr>
           <a:xfrm>
-            <a:off x="2214600" y="3613181"/>
+            <a:off x="5879400" y="4284175"/>
             <a:ext cx="1200000" cy="500000"/>
           </a:xfrm>
           <a:prstGeom prst="rect">
@@ -6476,166 +6611,6 @@
           <a:p>
             <a:r>
               <a:rPr sz="1200"/>
-              <a:t>丸端</a:t>
-            </a:r>
-          </a:p>
-        </p:txBody>
-      </p:sp>
-      <p:sp>
-        <p:nvSpPr>
-          <p:cNvPr id="9" name="Rectangle 8"/>
-          <p:cNvSpPr/>
-          <p:nvPr/>
-        </p:nvSpPr>
-        <p:spPr>
-          <a:xfrm>
-            <a:off x="2214600" y="4116426"/>
-            <a:ext cx="1200000" cy="500000"/>
-          </a:xfrm>
-          <a:prstGeom prst="rect">
-            <a:avLst/>
-          </a:prstGeom>
-        </p:spPr>
-        <p:style>
-          <a:lnRef idx="1">
-            <a:schemeClr val="accent1"/>
-          </a:lnRef>
-          <a:fillRef idx="3">
-            <a:schemeClr val="accent1"/>
-          </a:fillRef>
-          <a:effectRef idx="2">
-            <a:schemeClr val="accent1"/>
-          </a:effectRef>
-          <a:fontRef idx="minor">
-            <a:schemeClr val="lt1"/>
-          </a:fontRef>
-        </p:style>
-        <p:txBody>
-          <a:bodyPr rtlCol="0" anchor="ctr"/>
-          <a:lstStyle/>
-          <a:p>
-            <a:r>
-              <a:rPr sz="1200"/>
-              <a:t>×端</a:t>
-            </a:r>
-          </a:p>
-        </p:txBody>
-      </p:sp>
-      <p:sp>
-        <p:nvSpPr>
-          <p:cNvPr id="10" name="Rectangle 9"/>
-          <p:cNvSpPr/>
-          <p:nvPr/>
-        </p:nvSpPr>
-        <p:spPr>
-          <a:xfrm>
-            <a:off x="2214600" y="4619672"/>
-            <a:ext cx="1200000" cy="500000"/>
-          </a:xfrm>
-          <a:prstGeom prst="rect">
-            <a:avLst/>
-          </a:prstGeom>
-        </p:spPr>
-        <p:style>
-          <a:lnRef idx="1">
-            <a:schemeClr val="accent1"/>
-          </a:lnRef>
-          <a:fillRef idx="3">
-            <a:schemeClr val="accent1"/>
-          </a:fillRef>
-          <a:effectRef idx="2">
-            <a:schemeClr val="accent1"/>
-          </a:effectRef>
-          <a:fontRef idx="minor">
-            <a:schemeClr val="lt1"/>
-          </a:fontRef>
-        </p:style>
-        <p:txBody>
-          <a:bodyPr rtlCol="0" anchor="ctr"/>
-          <a:lstStyle/>
-          <a:p>
-            <a:r>
-              <a:rPr sz="1200"/>
-              <a:t>処理4</a:t>
-            </a:r>
-          </a:p>
-        </p:txBody>
-      </p:sp>
-      <p:sp>
-        <p:nvSpPr>
-          <p:cNvPr id="11" name="Rectangle 10"/>
-          <p:cNvSpPr/>
-          <p:nvPr/>
-        </p:nvSpPr>
-        <p:spPr>
-          <a:xfrm>
-            <a:off x="2214600" y="5122917"/>
-            <a:ext cx="1200000" cy="500000"/>
-          </a:xfrm>
-          <a:prstGeom prst="rect">
-            <a:avLst/>
-          </a:prstGeom>
-        </p:spPr>
-        <p:style>
-          <a:lnRef idx="1">
-            <a:schemeClr val="accent1"/>
-          </a:lnRef>
-          <a:fillRef idx="3">
-            <a:schemeClr val="accent1"/>
-          </a:fillRef>
-          <a:effectRef idx="2">
-            <a:schemeClr val="accent1"/>
-          </a:effectRef>
-          <a:fontRef idx="minor">
-            <a:schemeClr val="lt1"/>
-          </a:fontRef>
-        </p:style>
-        <p:txBody>
-          <a:bodyPr rtlCol="0" anchor="ctr"/>
-          <a:lstStyle/>
-          <a:p>
-            <a:r>
-              <a:rPr sz="1200"/>
-              <a:t>処理5</a:t>
-            </a:r>
-          </a:p>
-        </p:txBody>
-      </p:sp>
-      <p:sp>
-        <p:nvSpPr>
-          <p:cNvPr id="12" name="Rectangle 11"/>
-          <p:cNvSpPr/>
-          <p:nvPr/>
-        </p:nvSpPr>
-        <p:spPr>
-          <a:xfrm>
-            <a:off x="2214600" y="5626163"/>
-            <a:ext cx="1200000" cy="500000"/>
-          </a:xfrm>
-          <a:prstGeom prst="rect">
-            <a:avLst/>
-          </a:prstGeom>
-        </p:spPr>
-        <p:style>
-          <a:lnRef idx="1">
-            <a:schemeClr val="accent1"/>
-          </a:lnRef>
-          <a:fillRef idx="3">
-            <a:schemeClr val="accent1"/>
-          </a:fillRef>
-          <a:effectRef idx="2">
-            <a:schemeClr val="accent1"/>
-          </a:effectRef>
-          <a:fontRef idx="minor">
-            <a:schemeClr val="lt1"/>
-          </a:fontRef>
-        </p:style>
-        <p:txBody>
-          <a:bodyPr rtlCol="0" anchor="ctr"/>
-          <a:lstStyle/>
-          <a:p>
-            <a:r>
-              <a:rPr sz="1200"/>
               <a:t>処理5</a:t>
             </a:r>
           </a:p>
@@ -6649,7 +6624,7 @@
         </p:nvSpPr>
         <p:spPr>
           <a:xfrm>
-            <a:off x="5729400" y="3613181"/>
+            <a:off x="5879400" y="5626163"/>
             <a:ext cx="1200000" cy="500000"/>
           </a:xfrm>
           <a:prstGeom prst="roundRect">
@@ -6692,8 +6667,8 @@
         </p:nvCxnSpPr>
         <p:spPr>
           <a:xfrm>
-            <a:off x="2814600" y="2100200"/>
-            <a:ext cx="0" cy="3245"/>
+            <a:off x="2664600" y="2100200"/>
+            <a:ext cx="0" cy="305192"/>
           </a:xfrm>
           <a:prstGeom prst="line">
             <a:avLst/>
@@ -6716,129 +6691,27 @@
             <a:schemeClr val="tx1"/>
           </a:fontRef>
         </p:style>
-        <p:txBody>
-          <a:bodyPr anchor="ctr" wrap="square"/>
-          <a:lstStyle/>
-          <a:p>
-            <a:r>
-              <a:rPr dirty="0" sz="1000"/>
-              <a:t>通常矢印</a:t>
-            </a:r>
-          </a:p>
-        </p:txBody>
-      </p:cxnSp>
-      <p:cxnSp>
-        <p:nvCxnSpPr>
-          <p:cNvPr id="15" name="Connector 14"/>
-          <p:cNvCxnSpPr>
-            <a:stCxn id="5" idx="2"/>
-            <a:endCxn id="6" idx="0"/>
-          </p:cNvCxnSpPr>
-          <p:nvPr/>
-        </p:nvCxnSpPr>
-        <p:spPr>
-          <a:xfrm>
-            <a:off x="2814600" y="2603445"/>
-            <a:ext cx="0" cy="3245"/>
-          </a:xfrm>
-          <a:prstGeom prst="line">
-            <a:avLst/>
-          </a:prstGeom>
-          <a:ln>
-            <a:prstDash val="dash"/>
-            <a:headEnd type="arrow" w="med" len="med"/>
-          </a:ln>
-        </p:spPr>
-        <p:style>
-          <a:lnRef idx="2">
-            <a:schemeClr val="accent1"/>
-          </a:lnRef>
-          <a:fillRef idx="0">
-            <a:schemeClr val="accent1"/>
-          </a:fillRef>
-          <a:effectRef idx="1">
-            <a:schemeClr val="accent1"/>
-          </a:effectRef>
-          <a:fontRef idx="minor">
-            <a:schemeClr val="tx1"/>
-          </a:fontRef>
-        </p:style>
-        <p:txBody>
-          <a:bodyPr anchor="ctr" wrap="square"/>
-          <a:lstStyle/>
-          <a:p>
-            <a:r>
-              <a:rPr dirty="0" sz="1000"/>
-              <a:t>点線矢印</a:t>
-            </a:r>
-          </a:p>
-        </p:txBody>
       </p:cxnSp>
       <p:cxnSp>
         <p:nvCxnSpPr>
           <p:cNvPr id="16" name="Connector 15"/>
           <p:cNvCxnSpPr>
-            <a:stCxn id="6" idx="2"/>
-            <a:endCxn id="7" idx="0"/>
+            <a:stCxn id="5" idx="2"/>
+            <a:endCxn id="6" idx="0"/>
           </p:cNvCxnSpPr>
           <p:nvPr/>
         </p:nvCxnSpPr>
         <p:spPr>
           <a:xfrm>
-            <a:off x="2814600" y="3106690"/>
-            <a:ext cx="0" cy="3246"/>
+            <a:off x="2664600" y="2905392"/>
+            <a:ext cx="0" cy="305193"/>
           </a:xfrm>
           <a:prstGeom prst="line">
             <a:avLst/>
           </a:prstGeom>
-          <a:ln w="38100">
+          <a:ln>
+            <a:prstDash val="dash"/>
             <a:headEnd type="arrow" w="med" len="med"/>
-          </a:ln>
-        </p:spPr>
-        <p:style>
-          <a:lnRef idx="2">
-            <a:schemeClr val="accent1"/>
-          </a:lnRef>
-          <a:fillRef idx="0">
-            <a:schemeClr val="accent1"/>
-          </a:fillRef>
-          <a:effectRef idx="1">
-            <a:schemeClr val="accent1"/>
-          </a:effectRef>
-          <a:fontRef idx="minor">
-            <a:schemeClr val="tx1"/>
-          </a:fontRef>
-        </p:style>
-        <p:txBody>
-          <a:bodyPr anchor="ctr" wrap="square"/>
-          <a:lstStyle/>
-          <a:p>
-            <a:r>
-              <a:rPr dirty="0" sz="1000"/>
-              <a:t>太線矢印</a:t>
-            </a:r>
-          </a:p>
-        </p:txBody>
-      </p:cxnSp>
-      <p:cxnSp>
-        <p:nvCxnSpPr>
-          <p:cNvPr id="17" name="Connector 16"/>
-          <p:cNvCxnSpPr>
-            <a:stCxn id="7" idx="2"/>
-            <a:endCxn id="8" idx="0"/>
-          </p:cNvCxnSpPr>
-          <p:nvPr/>
-        </p:nvCxnSpPr>
-        <p:spPr>
-          <a:xfrm>
-            <a:off x="2814600" y="3609936"/>
-            <a:ext cx="0" cy="3245"/>
-          </a:xfrm>
-          <a:prstGeom prst="line">
-            <a:avLst/>
-          </a:prstGeom>
-          <a:ln>
-            <a:headEnd type="oval" w="med" len="med"/>
           </a:ln>
         </p:spPr>
         <p:style>
@@ -6860,20 +6733,20 @@
         <p:nvCxnSpPr>
           <p:cNvPr id="18" name="Connector 17"/>
           <p:cNvCxnSpPr>
-            <a:stCxn id="8" idx="2"/>
-            <a:endCxn id="9" idx="0"/>
+            <a:stCxn id="6" idx="2"/>
+            <a:endCxn id="7" idx="0"/>
           </p:cNvCxnSpPr>
           <p:nvPr/>
         </p:nvCxnSpPr>
         <p:spPr>
           <a:xfrm>
-            <a:off x="2814600" y="4113181"/>
-            <a:ext cx="0" cy="3245"/>
+            <a:off x="2664600" y="3710585"/>
+            <a:ext cx="0" cy="305192"/>
           </a:xfrm>
           <a:prstGeom prst="line">
             <a:avLst/>
           </a:prstGeom>
-          <a:ln>
+          <a:ln w="38100">
             <a:headEnd type="arrow" w="med" len="med"/>
           </a:ln>
         </p:spPr>
@@ -6894,70 +6767,23 @@
       </p:cxnSp>
       <p:cxnSp>
         <p:nvCxnSpPr>
-          <p:cNvPr id="19" name="Connector 18"/>
-          <p:cNvCxnSpPr>
-            <a:stCxn id="9" idx="2"/>
-            <a:endCxn id="10" idx="0"/>
-          </p:cNvCxnSpPr>
-          <p:nvPr/>
-        </p:nvCxnSpPr>
-        <p:spPr>
-          <a:xfrm>
-            <a:off x="2814600" y="4616426"/>
-            <a:ext cx="0" cy="3246"/>
-          </a:xfrm>
-          <a:prstGeom prst="line">
-            <a:avLst/>
-          </a:prstGeom>
-          <a:ln>
-            <a:headEnd type="arrow" w="med" len="med"/>
-            <a:tailEnd type="arrow" w="med" len="med"/>
-          </a:ln>
-        </p:spPr>
-        <p:style>
-          <a:lnRef idx="2">
-            <a:schemeClr val="accent1"/>
-          </a:lnRef>
-          <a:fillRef idx="0">
-            <a:schemeClr val="accent1"/>
-          </a:fillRef>
-          <a:effectRef idx="1">
-            <a:schemeClr val="accent1"/>
-          </a:effectRef>
-          <a:fontRef idx="minor">
-            <a:schemeClr val="tx1"/>
-          </a:fontRef>
-        </p:style>
-        <p:txBody>
-          <a:bodyPr anchor="ctr" wrap="square"/>
-          <a:lstStyle/>
-          <a:p>
-            <a:r>
-              <a:rPr dirty="0" sz="1000"/>
-              <a:t>両方向</a:t>
-            </a:r>
-          </a:p>
-        </p:txBody>
-      </p:cxnSp>
-      <p:cxnSp>
-        <p:nvCxnSpPr>
           <p:cNvPr id="20" name="Connector 19"/>
           <p:cNvCxnSpPr>
-            <a:stCxn id="10" idx="2"/>
-            <a:endCxn id="11" idx="0"/>
+            <a:stCxn id="7" idx="2"/>
+            <a:endCxn id="8" idx="0"/>
           </p:cNvCxnSpPr>
           <p:nvPr/>
         </p:nvCxnSpPr>
         <p:spPr>
           <a:xfrm>
-            <a:off x="2814600" y="5119672"/>
-            <a:ext cx="0" cy="3245"/>
+            <a:off x="2664600" y="4515777"/>
+            <a:ext cx="0" cy="305193"/>
           </a:xfrm>
           <a:prstGeom prst="line">
             <a:avLst/>
           </a:prstGeom>
           <a:ln>
-            <a:headEnd type="arrow" w="med" len="med"/>
+            <a:headEnd type="oval" w="med" len="med"/>
           </a:ln>
         </p:spPr>
         <p:style>
@@ -6979,15 +6805,15 @@
         <p:nvCxnSpPr>
           <p:cNvPr id="21" name="Connector 20"/>
           <p:cNvCxnSpPr>
-            <a:stCxn id="11" idx="2"/>
-            <a:endCxn id="12" idx="0"/>
+            <a:stCxn id="8" idx="2"/>
+            <a:endCxn id="9" idx="0"/>
           </p:cNvCxnSpPr>
           <p:nvPr/>
         </p:nvCxnSpPr>
         <p:spPr>
           <a:xfrm>
-            <a:off x="2814600" y="5622917"/>
-            <a:ext cx="0" cy="3246"/>
+            <a:off x="2664600" y="5320970"/>
+            <a:ext cx="0" cy="305193"/>
           </a:xfrm>
           <a:prstGeom prst="line">
             <a:avLst/>
@@ -7015,21 +6841,22 @@
         <p:nvCxnSpPr>
           <p:cNvPr id="22" name="Connector 21"/>
           <p:cNvCxnSpPr>
-            <a:stCxn id="12" idx="1"/>
-            <a:endCxn id="13" idx="3"/>
+            <a:stCxn id="9" idx="0"/>
+            <a:endCxn id="10" idx="2"/>
           </p:cNvCxnSpPr>
           <p:nvPr/>
         </p:nvCxnSpPr>
         <p:spPr>
           <a:xfrm flipV="1">
-            <a:off x="2214600" y="3863181"/>
-            <a:ext cx="4714800" cy="2012982"/>
+            <a:off x="2664600" y="2100200"/>
+            <a:ext cx="3814800" cy="3525963"/>
           </a:xfrm>
           <a:prstGeom prst="line">
             <a:avLst/>
           </a:prstGeom>
           <a:ln>
             <a:headEnd type="arrow" w="med" len="med"/>
+            <a:tailEnd type="arrow" w="med" len="med"/>
           </a:ln>
         </p:spPr>
         <p:style>
@@ -7047,6 +6874,446 @@
           </a:fontRef>
         </p:style>
       </p:cxnSp>
+      <p:cxnSp>
+        <p:nvCxnSpPr>
+          <p:cNvPr id="24" name="Connector 23"/>
+          <p:cNvCxnSpPr>
+            <a:stCxn id="10" idx="2"/>
+            <a:endCxn id="11" idx="0"/>
+          </p:cNvCxnSpPr>
+          <p:nvPr/>
+        </p:nvCxnSpPr>
+        <p:spPr>
+          <a:xfrm>
+            <a:off x="6479400" y="2100200"/>
+            <a:ext cx="0" cy="841987"/>
+          </a:xfrm>
+          <a:prstGeom prst="line">
+            <a:avLst/>
+          </a:prstGeom>
+          <a:ln>
+            <a:headEnd type="arrow" w="med" len="med"/>
+          </a:ln>
+        </p:spPr>
+        <p:style>
+          <a:lnRef idx="2">
+            <a:schemeClr val="accent1"/>
+          </a:lnRef>
+          <a:fillRef idx="0">
+            <a:schemeClr val="accent1"/>
+          </a:fillRef>
+          <a:effectRef idx="1">
+            <a:schemeClr val="accent1"/>
+          </a:effectRef>
+          <a:fontRef idx="minor">
+            <a:schemeClr val="tx1"/>
+          </a:fontRef>
+        </p:style>
+      </p:cxnSp>
+      <p:cxnSp>
+        <p:nvCxnSpPr>
+          <p:cNvPr id="25" name="Connector 24"/>
+          <p:cNvCxnSpPr>
+            <a:stCxn id="11" idx="2"/>
+            <a:endCxn id="12" idx="0"/>
+          </p:cNvCxnSpPr>
+          <p:nvPr/>
+        </p:nvCxnSpPr>
+        <p:spPr>
+          <a:xfrm>
+            <a:off x="6479400" y="3442187"/>
+            <a:ext cx="0" cy="841988"/>
+          </a:xfrm>
+          <a:prstGeom prst="line">
+            <a:avLst/>
+          </a:prstGeom>
+          <a:ln>
+            <a:headEnd type="arrow" w="med" len="med"/>
+          </a:ln>
+        </p:spPr>
+        <p:style>
+          <a:lnRef idx="2">
+            <a:schemeClr val="accent1"/>
+          </a:lnRef>
+          <a:fillRef idx="0">
+            <a:schemeClr val="accent1"/>
+          </a:fillRef>
+          <a:effectRef idx="1">
+            <a:schemeClr val="accent1"/>
+          </a:effectRef>
+          <a:fontRef idx="minor">
+            <a:schemeClr val="tx1"/>
+          </a:fontRef>
+        </p:style>
+      </p:cxnSp>
+      <p:cxnSp>
+        <p:nvCxnSpPr>
+          <p:cNvPr id="26" name="Connector 25"/>
+          <p:cNvCxnSpPr>
+            <a:stCxn id="12" idx="2"/>
+            <a:endCxn id="13" idx="0"/>
+          </p:cNvCxnSpPr>
+          <p:nvPr/>
+        </p:nvCxnSpPr>
+        <p:spPr>
+          <a:xfrm>
+            <a:off x="6479400" y="4784175"/>
+            <a:ext cx="0" cy="841988"/>
+          </a:xfrm>
+          <a:prstGeom prst="line">
+            <a:avLst/>
+          </a:prstGeom>
+          <a:ln>
+            <a:headEnd type="arrow" w="med" len="med"/>
+          </a:ln>
+        </p:spPr>
+        <p:style>
+          <a:lnRef idx="2">
+            <a:schemeClr val="accent1"/>
+          </a:lnRef>
+          <a:fillRef idx="0">
+            <a:schemeClr val="accent1"/>
+          </a:fillRef>
+          <a:effectRef idx="1">
+            <a:schemeClr val="accent1"/>
+          </a:effectRef>
+          <a:fontRef idx="minor">
+            <a:schemeClr val="tx1"/>
+          </a:fontRef>
+        </p:style>
+      </p:cxnSp>
+      <p:grpSp>
+        <p:grpSpPr>
+          <a:xfrm>
+            <a:off x="2064600" y="1600200"/>
+            <a:ext cx="1200000" cy="1095000"/>
+            <a:chOff x="2064600" y="1600200"/>
+            <a:chExt cx="1200000" cy="1095000"/>
+          </a:xfrm>
+        </p:grpSpPr>
+        <p:sp>
+          <p:nvSpPr>
+            <p:cNvPr id="4" name="Rounded Rectangle 3"/>
+            <p:cNvSpPr/>
+            <p:nvPr/>
+          </p:nvSpPr>
+          <p:spPr>
+            <a:xfrm>
+              <a:off x="2064600" y="1600200"/>
+              <a:ext cx="1200000" cy="500000"/>
+            </a:xfrm>
+            <a:prstGeom prst="roundRect">
+              <a:avLst/>
+            </a:prstGeom>
+          </p:spPr>
+          <p:style>
+            <a:lnRef idx="1">
+              <a:schemeClr val="accent1"/>
+            </a:lnRef>
+            <a:fillRef idx="3">
+              <a:schemeClr val="accent1"/>
+            </a:fillRef>
+            <a:effectRef idx="2">
+              <a:schemeClr val="accent1"/>
+            </a:effectRef>
+            <a:fontRef idx="minor">
+              <a:schemeClr val="lt1"/>
+            </a:fontRef>
+          </p:style>
+          <p:txBody>
+            <a:bodyPr rtlCol="0" anchor="ctr"/>
+            <a:lstStyle/>
+            <a:p>
+              <a:r>
+                <a:rPr sz="1200"/>
+                <a:t>開始</a:t>
+              </a:r>
+            </a:p>
+          </p:txBody>
+        </p:sp>
+        <p:sp>
+          <p:nvSpPr>
+            <p:cNvPr id="15" name="TextBox 14"/>
+            <p:cNvSpPr txBox="1"/>
+            <p:nvPr/>
+          </p:nvSpPr>
+          <p:spPr>
+            <a:xfrm>
+              <a:off x="2064600" y="2445200"/>
+              <a:ext cx="1200000" cy="250000"/>
+            </a:xfrm>
+            <a:prstGeom prst="rect">
+              <a:avLst/>
+            </a:prstGeom>
+            <a:noFill/>
+            <a:ln>
+              <a:noFill/>
+            </a:ln>
+          </p:spPr>
+          <p:txBody>
+            <a:bodyPr wrap="none">
+              <a:spAutoFit/>
+            </a:bodyPr>
+            <a:lstStyle/>
+            <a:p>
+              <a:pPr/>
+              <a:r>
+                <a:rPr sz="1000" b="0"/>
+                <a:t>通常矢印</a:t>
+              </a:r>
+            </a:p>
+          </p:txBody>
+        </p:sp>
+      </p:grpSp>
+      <p:grpSp>
+        <p:grpSpPr>
+          <a:xfrm>
+            <a:off x="2064600" y="2405392"/>
+            <a:ext cx="1200000" cy="1095000"/>
+            <a:chOff x="2064600" y="2405392"/>
+            <a:chExt cx="1200000" cy="1095000"/>
+          </a:xfrm>
+        </p:grpSpPr>
+        <p:sp>
+          <p:nvSpPr>
+            <p:cNvPr id="5" name="Rectangle 4"/>
+            <p:cNvSpPr/>
+            <p:nvPr/>
+          </p:nvSpPr>
+          <p:spPr>
+            <a:xfrm>
+              <a:off x="2064600" y="2405392"/>
+              <a:ext cx="1200000" cy="500000"/>
+            </a:xfrm>
+            <a:prstGeom prst="rect">
+              <a:avLst/>
+            </a:prstGeom>
+          </p:spPr>
+          <p:style>
+            <a:lnRef idx="1">
+              <a:schemeClr val="accent1"/>
+            </a:lnRef>
+            <a:fillRef idx="3">
+              <a:schemeClr val="accent1"/>
+            </a:fillRef>
+            <a:effectRef idx="2">
+              <a:schemeClr val="accent1"/>
+            </a:effectRef>
+            <a:fontRef idx="minor">
+              <a:schemeClr val="lt1"/>
+            </a:fontRef>
+          </p:style>
+          <p:txBody>
+            <a:bodyPr rtlCol="0" anchor="ctr"/>
+            <a:lstStyle/>
+            <a:p>
+              <a:r>
+                <a:rPr sz="1200"/>
+                <a:t>処理1</a:t>
+              </a:r>
+            </a:p>
+          </p:txBody>
+        </p:sp>
+        <p:sp>
+          <p:nvSpPr>
+            <p:cNvPr id="17" name="TextBox 16"/>
+            <p:cNvSpPr txBox="1"/>
+            <p:nvPr/>
+          </p:nvSpPr>
+          <p:spPr>
+            <a:xfrm>
+              <a:off x="2064600" y="3250392"/>
+              <a:ext cx="1200000" cy="250000"/>
+            </a:xfrm>
+            <a:prstGeom prst="rect">
+              <a:avLst/>
+            </a:prstGeom>
+            <a:noFill/>
+            <a:ln>
+              <a:noFill/>
+            </a:ln>
+          </p:spPr>
+          <p:txBody>
+            <a:bodyPr wrap="none">
+              <a:spAutoFit/>
+            </a:bodyPr>
+            <a:lstStyle/>
+            <a:p>
+              <a:pPr/>
+              <a:r>
+                <a:rPr sz="1000" b="0"/>
+                <a:t>点線矢印</a:t>
+              </a:r>
+            </a:p>
+          </p:txBody>
+        </p:sp>
+      </p:grpSp>
+      <p:grpSp>
+        <p:grpSpPr>
+          <a:xfrm>
+            <a:off x="2064600" y="3210585"/>
+            <a:ext cx="1200000" cy="1095000"/>
+            <a:chOff x="2064600" y="3210585"/>
+            <a:chExt cx="1200000" cy="1095000"/>
+          </a:xfrm>
+        </p:grpSpPr>
+        <p:sp>
+          <p:nvSpPr>
+            <p:cNvPr id="6" name="Rectangle 5"/>
+            <p:cNvSpPr/>
+            <p:nvPr/>
+          </p:nvSpPr>
+          <p:spPr>
+            <a:xfrm>
+              <a:off x="2064600" y="3210585"/>
+              <a:ext cx="1200000" cy="500000"/>
+            </a:xfrm>
+            <a:prstGeom prst="rect">
+              <a:avLst/>
+            </a:prstGeom>
+          </p:spPr>
+          <p:style>
+            <a:lnRef idx="1">
+              <a:schemeClr val="accent1"/>
+            </a:lnRef>
+            <a:fillRef idx="3">
+              <a:schemeClr val="accent1"/>
+            </a:fillRef>
+            <a:effectRef idx="2">
+              <a:schemeClr val="accent1"/>
+            </a:effectRef>
+            <a:fontRef idx="minor">
+              <a:schemeClr val="lt1"/>
+            </a:fontRef>
+          </p:style>
+          <p:txBody>
+            <a:bodyPr rtlCol="0" anchor="ctr"/>
+            <a:lstStyle/>
+            <a:p>
+              <a:r>
+                <a:rPr sz="1200"/>
+                <a:t>処理2</a:t>
+              </a:r>
+            </a:p>
+          </p:txBody>
+        </p:sp>
+        <p:sp>
+          <p:nvSpPr>
+            <p:cNvPr id="19" name="TextBox 18"/>
+            <p:cNvSpPr txBox="1"/>
+            <p:nvPr/>
+          </p:nvSpPr>
+          <p:spPr>
+            <a:xfrm>
+              <a:off x="2064600" y="4055585"/>
+              <a:ext cx="1200000" cy="250000"/>
+            </a:xfrm>
+            <a:prstGeom prst="rect">
+              <a:avLst/>
+            </a:prstGeom>
+            <a:noFill/>
+            <a:ln>
+              <a:noFill/>
+            </a:ln>
+          </p:spPr>
+          <p:txBody>
+            <a:bodyPr wrap="none">
+              <a:spAutoFit/>
+            </a:bodyPr>
+            <a:lstStyle/>
+            <a:p>
+              <a:pPr/>
+              <a:r>
+                <a:rPr sz="1000" b="0"/>
+                <a:t>太線矢印</a:t>
+              </a:r>
+            </a:p>
+          </p:txBody>
+        </p:sp>
+      </p:grpSp>
+      <p:grpSp>
+        <p:grpSpPr>
+          <a:xfrm>
+            <a:off x="2064600" y="5228525"/>
+            <a:ext cx="1695226" cy="897638"/>
+            <a:chOff x="2064600" y="5228525"/>
+            <a:chExt cx="1695226" cy="897638"/>
+          </a:xfrm>
+        </p:grpSpPr>
+        <p:sp>
+          <p:nvSpPr>
+            <p:cNvPr id="9" name="Rectangle 8"/>
+            <p:cNvSpPr/>
+            <p:nvPr/>
+          </p:nvSpPr>
+          <p:spPr>
+            <a:xfrm>
+              <a:off x="2064600" y="5626163"/>
+              <a:ext cx="1200000" cy="500000"/>
+            </a:xfrm>
+            <a:prstGeom prst="rect">
+              <a:avLst/>
+            </a:prstGeom>
+          </p:spPr>
+          <p:style>
+            <a:lnRef idx="1">
+              <a:schemeClr val="accent1"/>
+            </a:lnRef>
+            <a:fillRef idx="3">
+              <a:schemeClr val="accent1"/>
+            </a:fillRef>
+            <a:effectRef idx="2">
+              <a:schemeClr val="accent1"/>
+            </a:effectRef>
+            <a:fontRef idx="minor">
+              <a:schemeClr val="lt1"/>
+            </a:fontRef>
+          </p:style>
+          <p:txBody>
+            <a:bodyPr rtlCol="0" anchor="ctr"/>
+            <a:lstStyle/>
+            <a:p>
+              <a:r>
+                <a:rPr sz="1200"/>
+                <a:t>×端</a:t>
+              </a:r>
+            </a:p>
+          </p:txBody>
+        </p:sp>
+        <p:sp>
+          <p:nvSpPr>
+            <p:cNvPr id="23" name="TextBox 22"/>
+            <p:cNvSpPr txBox="1"/>
+            <p:nvPr/>
+          </p:nvSpPr>
+          <p:spPr>
+            <a:xfrm>
+              <a:off x="2559826" y="5228525"/>
+              <a:ext cx="1200000" cy="250000"/>
+            </a:xfrm>
+            <a:prstGeom prst="rect">
+              <a:avLst/>
+            </a:prstGeom>
+            <a:noFill/>
+            <a:ln>
+              <a:noFill/>
+            </a:ln>
+          </p:spPr>
+          <p:txBody>
+            <a:bodyPr wrap="none">
+              <a:spAutoFit/>
+            </a:bodyPr>
+            <a:lstStyle/>
+            <a:p>
+              <a:pPr/>
+              <a:r>
+                <a:rPr sz="1000" b="0"/>
+                <a:t>両方向</a:t>
+              </a:r>
+            </a:p>
+          </p:txBody>
+        </p:sp>
+      </p:grpSp>
     </p:spTree>
   </p:cSld>
   <p:clrMapOvr>

--- a/demo_full.pptx
+++ b/demo_full.pptx
@@ -5,7 +5,7 @@
     <p:sldMasterId id="2147483648" r:id="rId1"/>
   </p:sldMasterIdLst>
   <p:notesMasterIdLst>
-    <p:notesMasterId r:id="rId49"/>
+    <p:notesMasterId r:id="rId50"/>
   </p:notesMasterIdLst>
   <p:sldIdLst>
     <p:sldId id="256" r:id="rId7"/>
@@ -50,9 +50,10 @@
     <p:sldId id="295" r:id="rId46"/>
     <p:sldId id="296" r:id="rId47"/>
     <p:sldId id="297" r:id="rId48"/>
-    <p:sldId id="298" r:id="rId50"/>
+    <p:sldId id="298" r:id="rId49"/>
     <p:sldId id="299" r:id="rId51"/>
     <p:sldId id="300" r:id="rId52"/>
+    <p:sldId id="301" r:id="rId53"/>
   </p:sldIdLst>
   <p:sldSz cx="9144000" cy="6858000" type="screen4x3"/>
   <p:notesSz cx="6858000" cy="9144000"/>
@@ -7348,7 +7349,7 @@
           <a:lstStyle/>
           <a:p>
             <a:r>
-              <a:t>2. シーケンス図（Sequence Diagram）</a:t>
+              <a:t>2a. シーケンス図 - 基本（autonumber・activate・Note）</a:t>
             </a:r>
           </a:p>
         </p:txBody>
@@ -7372,14 +7373,398 @@
       </p:sp>
       <p:sp>
         <p:nvSpPr>
-          <p:cNvPr id="4" name="TextBox 3"/>
+          <p:cNvPr id="4" name="Rounded Rectangle 3"/>
+          <p:cNvSpPr/>
+          <p:nvPr/>
+        </p:nvSpPr>
+        <p:spPr>
+          <a:xfrm>
+            <a:off x="885900" y="1600200"/>
+            <a:ext cx="1200000" cy="500000"/>
+          </a:xfrm>
+          <a:prstGeom prst="roundRect">
+            <a:avLst/>
+          </a:prstGeom>
+        </p:spPr>
+        <p:style>
+          <a:lnRef idx="1">
+            <a:schemeClr val="accent1"/>
+          </a:lnRef>
+          <a:fillRef idx="3">
+            <a:schemeClr val="accent1"/>
+          </a:fillRef>
+          <a:effectRef idx="2">
+            <a:schemeClr val="accent1"/>
+          </a:effectRef>
+          <a:fontRef idx="minor">
+            <a:schemeClr val="lt1"/>
+          </a:fontRef>
+        </p:style>
+        <p:txBody>
+          <a:bodyPr rtlCol="0" anchor="ctr" wrap="square"/>
+          <a:lstStyle/>
+          <a:p>
+            <a:r>
+              <a:rPr sz="1100" b="1"/>
+              <a:t>ユーザー</a:t>
+            </a:r>
+          </a:p>
+        </p:txBody>
+      </p:sp>
+      <p:sp>
+        <p:nvSpPr>
+          <p:cNvPr id="5" name="Rectangle 4"/>
+          <p:cNvSpPr/>
+          <p:nvPr/>
+        </p:nvSpPr>
+        <p:spPr>
+          <a:xfrm>
+            <a:off x="2943300" y="1600200"/>
+            <a:ext cx="1200000" cy="500000"/>
+          </a:xfrm>
+          <a:prstGeom prst="rect">
+            <a:avLst/>
+          </a:prstGeom>
+        </p:spPr>
+        <p:style>
+          <a:lnRef idx="1">
+            <a:schemeClr val="accent1"/>
+          </a:lnRef>
+          <a:fillRef idx="3">
+            <a:schemeClr val="accent1"/>
+          </a:fillRef>
+          <a:effectRef idx="2">
+            <a:schemeClr val="accent1"/>
+          </a:effectRef>
+          <a:fontRef idx="minor">
+            <a:schemeClr val="lt1"/>
+          </a:fontRef>
+        </p:style>
+        <p:txBody>
+          <a:bodyPr rtlCol="0" anchor="ctr" wrap="square"/>
+          <a:lstStyle/>
+          <a:p>
+            <a:r>
+              <a:rPr sz="1100" b="1"/>
+              <a:t>クライアント</a:t>
+            </a:r>
+          </a:p>
+        </p:txBody>
+      </p:sp>
+      <p:sp>
+        <p:nvSpPr>
+          <p:cNvPr id="6" name="Rectangle 5"/>
+          <p:cNvSpPr/>
+          <p:nvPr/>
+        </p:nvSpPr>
+        <p:spPr>
+          <a:xfrm>
+            <a:off x="5000700" y="1600200"/>
+            <a:ext cx="1200000" cy="500000"/>
+          </a:xfrm>
+          <a:prstGeom prst="rect">
+            <a:avLst/>
+          </a:prstGeom>
+        </p:spPr>
+        <p:style>
+          <a:lnRef idx="1">
+            <a:schemeClr val="accent1"/>
+          </a:lnRef>
+          <a:fillRef idx="3">
+            <a:schemeClr val="accent1"/>
+          </a:fillRef>
+          <a:effectRef idx="2">
+            <a:schemeClr val="accent1"/>
+          </a:effectRef>
+          <a:fontRef idx="minor">
+            <a:schemeClr val="lt1"/>
+          </a:fontRef>
+        </p:style>
+        <p:txBody>
+          <a:bodyPr rtlCol="0" anchor="ctr" wrap="square"/>
+          <a:lstStyle/>
+          <a:p>
+            <a:r>
+              <a:rPr sz="1100" b="1"/>
+              <a:t>サーバー</a:t>
+            </a:r>
+          </a:p>
+        </p:txBody>
+      </p:sp>
+      <p:sp>
+        <p:nvSpPr>
+          <p:cNvPr id="7" name="Rectangle 6"/>
+          <p:cNvSpPr/>
+          <p:nvPr/>
+        </p:nvSpPr>
+        <p:spPr>
+          <a:xfrm>
+            <a:off x="7058100" y="1600200"/>
+            <a:ext cx="1200000" cy="500000"/>
+          </a:xfrm>
+          <a:prstGeom prst="rect">
+            <a:avLst/>
+          </a:prstGeom>
+        </p:spPr>
+        <p:style>
+          <a:lnRef idx="1">
+            <a:schemeClr val="accent1"/>
+          </a:lnRef>
+          <a:fillRef idx="3">
+            <a:schemeClr val="accent1"/>
+          </a:fillRef>
+          <a:effectRef idx="2">
+            <a:schemeClr val="accent1"/>
+          </a:effectRef>
+          <a:fontRef idx="minor">
+            <a:schemeClr val="lt1"/>
+          </a:fontRef>
+        </p:style>
+        <p:txBody>
+          <a:bodyPr rtlCol="0" anchor="ctr" wrap="square"/>
+          <a:lstStyle/>
+          <a:p>
+            <a:r>
+              <a:rPr sz="1100" b="1"/>
+              <a:t>データベース</a:t>
+            </a:r>
+          </a:p>
+        </p:txBody>
+      </p:sp>
+      <p:cxnSp>
+        <p:nvCxnSpPr>
+          <p:cNvPr id="8" name="Connector 7"/>
+          <p:cNvCxnSpPr/>
+          <p:nvPr/>
+        </p:nvCxnSpPr>
+        <p:spPr>
+          <a:xfrm>
+            <a:off x="1485900" y="2180200"/>
+            <a:ext cx="0" cy="3808432"/>
+          </a:xfrm>
+          <a:prstGeom prst="line">
+            <a:avLst/>
+          </a:prstGeom>
+          <a:ln w="12700">
+            <a:prstDash val="dash"/>
+          </a:ln>
+        </p:spPr>
+        <p:style>
+          <a:lnRef idx="2">
+            <a:schemeClr val="accent1"/>
+          </a:lnRef>
+          <a:fillRef idx="0">
+            <a:schemeClr val="accent1"/>
+          </a:fillRef>
+          <a:effectRef idx="1">
+            <a:schemeClr val="accent1"/>
+          </a:effectRef>
+          <a:fontRef idx="minor">
+            <a:schemeClr val="tx1"/>
+          </a:fontRef>
+        </p:style>
+      </p:cxnSp>
+      <p:cxnSp>
+        <p:nvCxnSpPr>
+          <p:cNvPr id="9" name="Connector 8"/>
+          <p:cNvCxnSpPr/>
+          <p:nvPr/>
+        </p:nvCxnSpPr>
+        <p:spPr>
+          <a:xfrm>
+            <a:off x="3543300" y="2180200"/>
+            <a:ext cx="0" cy="3808432"/>
+          </a:xfrm>
+          <a:prstGeom prst="line">
+            <a:avLst/>
+          </a:prstGeom>
+          <a:ln w="12700">
+            <a:prstDash val="dash"/>
+          </a:ln>
+        </p:spPr>
+        <p:style>
+          <a:lnRef idx="2">
+            <a:schemeClr val="accent1"/>
+          </a:lnRef>
+          <a:fillRef idx="0">
+            <a:schemeClr val="accent1"/>
+          </a:fillRef>
+          <a:effectRef idx="1">
+            <a:schemeClr val="accent1"/>
+          </a:effectRef>
+          <a:fontRef idx="minor">
+            <a:schemeClr val="tx1"/>
+          </a:fontRef>
+        </p:style>
+      </p:cxnSp>
+      <p:cxnSp>
+        <p:nvCxnSpPr>
+          <p:cNvPr id="10" name="Connector 9"/>
+          <p:cNvCxnSpPr/>
+          <p:nvPr/>
+        </p:nvCxnSpPr>
+        <p:spPr>
+          <a:xfrm>
+            <a:off x="5600700" y="2180200"/>
+            <a:ext cx="0" cy="3808432"/>
+          </a:xfrm>
+          <a:prstGeom prst="line">
+            <a:avLst/>
+          </a:prstGeom>
+          <a:ln w="12700">
+            <a:prstDash val="dash"/>
+          </a:ln>
+        </p:spPr>
+        <p:style>
+          <a:lnRef idx="2">
+            <a:schemeClr val="accent1"/>
+          </a:lnRef>
+          <a:fillRef idx="0">
+            <a:schemeClr val="accent1"/>
+          </a:fillRef>
+          <a:effectRef idx="1">
+            <a:schemeClr val="accent1"/>
+          </a:effectRef>
+          <a:fontRef idx="minor">
+            <a:schemeClr val="tx1"/>
+          </a:fontRef>
+        </p:style>
+      </p:cxnSp>
+      <p:cxnSp>
+        <p:nvCxnSpPr>
+          <p:cNvPr id="11" name="Connector 10"/>
+          <p:cNvCxnSpPr/>
+          <p:nvPr/>
+        </p:nvCxnSpPr>
+        <p:spPr>
+          <a:xfrm>
+            <a:off x="7658100" y="2180200"/>
+            <a:ext cx="0" cy="3808432"/>
+          </a:xfrm>
+          <a:prstGeom prst="line">
+            <a:avLst/>
+          </a:prstGeom>
+          <a:ln w="12700">
+            <a:prstDash val="dash"/>
+          </a:ln>
+        </p:spPr>
+        <p:style>
+          <a:lnRef idx="2">
+            <a:schemeClr val="accent1"/>
+          </a:lnRef>
+          <a:fillRef idx="0">
+            <a:schemeClr val="accent1"/>
+          </a:fillRef>
+          <a:effectRef idx="1">
+            <a:schemeClr val="accent1"/>
+          </a:effectRef>
+          <a:fontRef idx="minor">
+            <a:schemeClr val="tx1"/>
+          </a:fontRef>
+        </p:style>
+      </p:cxnSp>
+      <p:sp>
+        <p:nvSpPr>
+          <p:cNvPr id="12" name="Rectangle 11"/>
+          <p:cNvSpPr/>
+          <p:nvPr/>
+        </p:nvSpPr>
+        <p:spPr>
+          <a:xfrm>
+            <a:off x="517200" y="4122142"/>
+            <a:ext cx="8109600" cy="1595320"/>
+          </a:xfrm>
+          <a:prstGeom prst="rect">
+            <a:avLst/>
+          </a:prstGeom>
+          <a:noFill/>
+          <a:ln w="19050">
+            <a:solidFill>
+              <a:srgbClr val="6464B4"/>
+            </a:solidFill>
+            <a:prstDash val="dash"/>
+          </a:ln>
+        </p:spPr>
+        <p:style>
+          <a:lnRef idx="1">
+            <a:schemeClr val="accent1"/>
+          </a:lnRef>
+          <a:fillRef idx="3">
+            <a:schemeClr val="accent1"/>
+          </a:fillRef>
+          <a:effectRef idx="2">
+            <a:schemeClr val="accent1"/>
+          </a:effectRef>
+          <a:fontRef idx="minor">
+            <a:schemeClr val="lt1"/>
+          </a:fontRef>
+        </p:style>
+        <p:txBody>
+          <a:bodyPr rtlCol="0" anchor="ctr"/>
+          <a:lstStyle/>
+          <a:p>
+            <a:pPr algn="ctr"/>
+          </a:p>
+        </p:txBody>
+      </p:sp>
+      <p:sp>
+        <p:nvSpPr>
+          <p:cNvPr id="13" name="Rectangle 12"/>
+          <p:cNvSpPr/>
+          <p:nvPr/>
+        </p:nvSpPr>
+        <p:spPr>
+          <a:xfrm>
+            <a:off x="517200" y="4122142"/>
+            <a:ext cx="500000" cy="240000"/>
+          </a:xfrm>
+          <a:prstGeom prst="rect">
+            <a:avLst/>
+          </a:prstGeom>
+          <a:solidFill>
+            <a:srgbClr val="C8C8F0"/>
+          </a:solidFill>
+          <a:ln>
+            <a:solidFill>
+              <a:srgbClr val="6464B4"/>
+            </a:solidFill>
+          </a:ln>
+        </p:spPr>
+        <p:style>
+          <a:lnRef idx="1">
+            <a:schemeClr val="accent1"/>
+          </a:lnRef>
+          <a:fillRef idx="3">
+            <a:schemeClr val="accent1"/>
+          </a:fillRef>
+          <a:effectRef idx="2">
+            <a:schemeClr val="accent1"/>
+          </a:effectRef>
+          <a:fontRef idx="minor">
+            <a:schemeClr val="lt1"/>
+          </a:fontRef>
+        </p:style>
+        <p:txBody>
+          <a:bodyPr rtlCol="0" anchor="ctr"/>
+          <a:lstStyle/>
+          <a:p>
+            <a:r>
+              <a:rPr sz="900" b="1"/>
+              <a:t>alt</a:t>
+            </a:r>
+          </a:p>
+        </p:txBody>
+      </p:sp>
+      <p:sp>
+        <p:nvSpPr>
+          <p:cNvPr id="14" name="TextBox 13"/>
           <p:cNvSpPr txBox="1"/>
           <p:nvPr/>
         </p:nvSpPr>
         <p:spPr>
           <a:xfrm>
-            <a:off x="457200" y="1600200"/>
-            <a:ext cx="8229600" cy="4525963"/>
+            <a:off x="1057200" y="4122142"/>
+            <a:ext cx="7569600" cy="240000"/>
           </a:xfrm>
           <a:prstGeom prst="rect">
             <a:avLst/>
@@ -7387,23 +7772,733 @@
           <a:noFill/>
         </p:spPr>
         <p:txBody>
-          <a:bodyPr wrap="square">
+          <a:bodyPr wrap="none">
             <a:spAutoFit/>
           </a:bodyPr>
           <a:lstStyle/>
           <a:p>
             <a:r>
-              <a:rPr sz="1000">
-                <a:latin typeface="Courier New"/>
+              <a:rPr sz="900" i="1">
+                <a:solidFill>
+                  <a:srgbClr val="3C3C8C"/>
+                </a:solidFill>
               </a:rPr>
-              <a:t>sequenceDiagram
-    participant A as クライアント
-    participant B as サーバー
-    participant C as データベース
-    A-&gt;&gt;B: リクエスト送信
-    B-&gt;&gt;C: クエリ実行
-    C--&gt;&gt;B: 結果返却
-    B--&gt;&gt;A: レスポンス返却</a:t>
+              <a:t>[認証成功]</a:t>
+            </a:r>
+          </a:p>
+        </p:txBody>
+      </p:sp>
+      <p:cxnSp>
+        <p:nvCxnSpPr>
+          <p:cNvPr id="15" name="Connector 14"/>
+          <p:cNvCxnSpPr/>
+          <p:nvPr/>
+        </p:nvCxnSpPr>
+        <p:spPr>
+          <a:xfrm>
+            <a:off x="517200" y="5059802"/>
+            <a:ext cx="8109600" cy="0"/>
+          </a:xfrm>
+          <a:prstGeom prst="line">
+            <a:avLst/>
+          </a:prstGeom>
+          <a:ln w="12700">
+            <a:solidFill>
+              <a:srgbClr val="6464B4"/>
+            </a:solidFill>
+            <a:prstDash val="dash"/>
+          </a:ln>
+        </p:spPr>
+        <p:style>
+          <a:lnRef idx="2">
+            <a:schemeClr val="accent1"/>
+          </a:lnRef>
+          <a:fillRef idx="0">
+            <a:schemeClr val="accent1"/>
+          </a:fillRef>
+          <a:effectRef idx="1">
+            <a:schemeClr val="accent1"/>
+          </a:effectRef>
+          <a:fontRef idx="minor">
+            <a:schemeClr val="tx1"/>
+          </a:fontRef>
+        </p:style>
+      </p:cxnSp>
+      <p:sp>
+        <p:nvSpPr>
+          <p:cNvPr id="16" name="TextBox 15"/>
+          <p:cNvSpPr txBox="1"/>
+          <p:nvPr/>
+        </p:nvSpPr>
+        <p:spPr>
+          <a:xfrm>
+            <a:off x="1057200" y="5059802"/>
+            <a:ext cx="7569600" cy="200000"/>
+          </a:xfrm>
+          <a:prstGeom prst="rect">
+            <a:avLst/>
+          </a:prstGeom>
+          <a:noFill/>
+        </p:spPr>
+        <p:txBody>
+          <a:bodyPr wrap="none">
+            <a:spAutoFit/>
+          </a:bodyPr>
+          <a:lstStyle/>
+          <a:p>
+            <a:r>
+              <a:rPr sz="800" i="1">
+                <a:solidFill>
+                  <a:srgbClr val="3C3C8C"/>
+                </a:solidFill>
+              </a:rPr>
+              <a:t>[認証失敗]</a:t>
+            </a:r>
+          </a:p>
+        </p:txBody>
+      </p:sp>
+      <p:sp>
+        <p:nvSpPr>
+          <p:cNvPr id="17" name="Rectangle 16"/>
+          <p:cNvSpPr/>
+          <p:nvPr/>
+        </p:nvSpPr>
+        <p:spPr>
+          <a:xfrm>
+            <a:off x="7588100" y="3464482"/>
+            <a:ext cx="140000" cy="411037"/>
+          </a:xfrm>
+          <a:prstGeom prst="rect">
+            <a:avLst/>
+          </a:prstGeom>
+          <a:solidFill>
+            <a:srgbClr val="C8DCFF"/>
+          </a:solidFill>
+          <a:ln w="9525">
+            <a:solidFill>
+              <a:srgbClr val="6482C8"/>
+            </a:solidFill>
+          </a:ln>
+        </p:spPr>
+        <p:style>
+          <a:lnRef idx="1">
+            <a:schemeClr val="accent1"/>
+          </a:lnRef>
+          <a:fillRef idx="3">
+            <a:schemeClr val="accent1"/>
+          </a:fillRef>
+          <a:effectRef idx="2">
+            <a:schemeClr val="accent1"/>
+          </a:effectRef>
+          <a:fontRef idx="minor">
+            <a:schemeClr val="lt1"/>
+          </a:fontRef>
+        </p:style>
+        <p:txBody>
+          <a:bodyPr rtlCol="0" anchor="ctr"/>
+          <a:lstStyle/>
+          <a:p>
+            <a:pPr algn="ctr"/>
+          </a:p>
+        </p:txBody>
+      </p:sp>
+      <p:sp>
+        <p:nvSpPr>
+          <p:cNvPr id="18" name="Rectangle 17"/>
+          <p:cNvSpPr/>
+          <p:nvPr/>
+        </p:nvSpPr>
+        <p:spPr>
+          <a:xfrm>
+            <a:off x="5530700" y="2673445"/>
+            <a:ext cx="140000" cy="1810904"/>
+          </a:xfrm>
+          <a:prstGeom prst="rect">
+            <a:avLst/>
+          </a:prstGeom>
+          <a:solidFill>
+            <a:srgbClr val="C8DCFF"/>
+          </a:solidFill>
+          <a:ln w="9525">
+            <a:solidFill>
+              <a:srgbClr val="6482C8"/>
+            </a:solidFill>
+          </a:ln>
+        </p:spPr>
+        <p:style>
+          <a:lnRef idx="1">
+            <a:schemeClr val="accent1"/>
+          </a:lnRef>
+          <a:fillRef idx="3">
+            <a:schemeClr val="accent1"/>
+          </a:fillRef>
+          <a:effectRef idx="2">
+            <a:schemeClr val="accent1"/>
+          </a:effectRef>
+          <a:fontRef idx="minor">
+            <a:schemeClr val="lt1"/>
+          </a:fontRef>
+        </p:style>
+        <p:txBody>
+          <a:bodyPr rtlCol="0" anchor="ctr"/>
+          <a:lstStyle/>
+          <a:p>
+            <a:pPr algn="ctr"/>
+          </a:p>
+        </p:txBody>
+      </p:sp>
+      <p:cxnSp>
+        <p:nvCxnSpPr>
+          <p:cNvPr id="19" name="Connector 18"/>
+          <p:cNvCxnSpPr/>
+          <p:nvPr/>
+        </p:nvCxnSpPr>
+        <p:spPr>
+          <a:xfrm>
+            <a:off x="1485900" y="2344615"/>
+            <a:ext cx="2057400" cy="0"/>
+          </a:xfrm>
+          <a:prstGeom prst="line">
+            <a:avLst/>
+          </a:prstGeom>
+          <a:ln>
+            <a:headEnd type="stealth" w="med" len="med"/>
+          </a:ln>
+        </p:spPr>
+        <p:style>
+          <a:lnRef idx="2">
+            <a:schemeClr val="accent1"/>
+          </a:lnRef>
+          <a:fillRef idx="0">
+            <a:schemeClr val="accent1"/>
+          </a:fillRef>
+          <a:effectRef idx="1">
+            <a:schemeClr val="accent1"/>
+          </a:effectRef>
+          <a:fontRef idx="minor">
+            <a:schemeClr val="tx1"/>
+          </a:fontRef>
+        </p:style>
+      </p:cxnSp>
+      <p:sp>
+        <p:nvSpPr>
+          <p:cNvPr id="20" name="TextBox 19"/>
+          <p:cNvSpPr txBox="1"/>
+          <p:nvPr/>
+        </p:nvSpPr>
+        <p:spPr>
+          <a:xfrm>
+            <a:off x="1485900" y="2124615"/>
+            <a:ext cx="2057400" cy="200000"/>
+          </a:xfrm>
+          <a:prstGeom prst="rect">
+            <a:avLst/>
+          </a:prstGeom>
+          <a:noFill/>
+        </p:spPr>
+        <p:txBody>
+          <a:bodyPr wrap="none">
+            <a:spAutoFit/>
+          </a:bodyPr>
+          <a:lstStyle/>
+          <a:p>
+            <a:pPr algn="ctr"/>
+            <a:r>
+              <a:rPr sz="900"/>
+              <a:t>1. ログインボタン押下</a:t>
+            </a:r>
+          </a:p>
+        </p:txBody>
+      </p:sp>
+      <p:cxnSp>
+        <p:nvCxnSpPr>
+          <p:cNvPr id="21" name="Connector 20"/>
+          <p:cNvCxnSpPr/>
+          <p:nvPr/>
+        </p:nvCxnSpPr>
+        <p:spPr>
+          <a:xfrm>
+            <a:off x="3543300" y="2673445"/>
+            <a:ext cx="2057400" cy="0"/>
+          </a:xfrm>
+          <a:prstGeom prst="line">
+            <a:avLst/>
+          </a:prstGeom>
+          <a:ln>
+            <a:headEnd type="stealth" w="med" len="med"/>
+          </a:ln>
+        </p:spPr>
+        <p:style>
+          <a:lnRef idx="2">
+            <a:schemeClr val="accent1"/>
+          </a:lnRef>
+          <a:fillRef idx="0">
+            <a:schemeClr val="accent1"/>
+          </a:fillRef>
+          <a:effectRef idx="1">
+            <a:schemeClr val="accent1"/>
+          </a:effectRef>
+          <a:fontRef idx="minor">
+            <a:schemeClr val="tx1"/>
+          </a:fontRef>
+        </p:style>
+      </p:cxnSp>
+      <p:sp>
+        <p:nvSpPr>
+          <p:cNvPr id="22" name="TextBox 21"/>
+          <p:cNvSpPr txBox="1"/>
+          <p:nvPr/>
+        </p:nvSpPr>
+        <p:spPr>
+          <a:xfrm>
+            <a:off x="3543300" y="2453445"/>
+            <a:ext cx="2057400" cy="200000"/>
+          </a:xfrm>
+          <a:prstGeom prst="rect">
+            <a:avLst/>
+          </a:prstGeom>
+          <a:noFill/>
+        </p:spPr>
+        <p:txBody>
+          <a:bodyPr wrap="none">
+            <a:spAutoFit/>
+          </a:bodyPr>
+          <a:lstStyle/>
+          <a:p>
+            <a:pPr algn="ctr"/>
+            <a:r>
+              <a:rPr sz="900"/>
+              <a:t>2. 認証リクエスト</a:t>
+            </a:r>
+          </a:p>
+        </p:txBody>
+      </p:sp>
+      <p:cxnSp>
+        <p:nvCxnSpPr>
+          <p:cNvPr id="23" name="Connector 22"/>
+          <p:cNvCxnSpPr/>
+          <p:nvPr/>
+        </p:nvCxnSpPr>
+        <p:spPr>
+          <a:xfrm>
+            <a:off x="5600700" y="3464482"/>
+            <a:ext cx="2057400" cy="0"/>
+          </a:xfrm>
+          <a:prstGeom prst="line">
+            <a:avLst/>
+          </a:prstGeom>
+          <a:ln>
+            <a:headEnd type="stealth" w="med" len="med"/>
+          </a:ln>
+        </p:spPr>
+        <p:style>
+          <a:lnRef idx="2">
+            <a:schemeClr val="accent1"/>
+          </a:lnRef>
+          <a:fillRef idx="0">
+            <a:schemeClr val="accent1"/>
+          </a:fillRef>
+          <a:effectRef idx="1">
+            <a:schemeClr val="accent1"/>
+          </a:effectRef>
+          <a:fontRef idx="minor">
+            <a:schemeClr val="tx1"/>
+          </a:fontRef>
+        </p:style>
+      </p:cxnSp>
+      <p:sp>
+        <p:nvSpPr>
+          <p:cNvPr id="24" name="TextBox 23"/>
+          <p:cNvSpPr txBox="1"/>
+          <p:nvPr/>
+        </p:nvSpPr>
+        <p:spPr>
+          <a:xfrm>
+            <a:off x="5600700" y="3244482"/>
+            <a:ext cx="2057400" cy="200000"/>
+          </a:xfrm>
+          <a:prstGeom prst="rect">
+            <a:avLst/>
+          </a:prstGeom>
+          <a:noFill/>
+        </p:spPr>
+        <p:txBody>
+          <a:bodyPr wrap="none">
+            <a:spAutoFit/>
+          </a:bodyPr>
+          <a:lstStyle/>
+          <a:p>
+            <a:pPr algn="ctr"/>
+            <a:r>
+              <a:rPr sz="900"/>
+              <a:t>3. ユーザー照会</a:t>
+            </a:r>
+          </a:p>
+        </p:txBody>
+      </p:sp>
+      <p:cxnSp>
+        <p:nvCxnSpPr>
+          <p:cNvPr id="25" name="Connector 24"/>
+          <p:cNvCxnSpPr/>
+          <p:nvPr/>
+        </p:nvCxnSpPr>
+        <p:spPr>
+          <a:xfrm flipH="1">
+            <a:off x="5600700" y="3793312"/>
+            <a:ext cx="2057400" cy="0"/>
+          </a:xfrm>
+          <a:prstGeom prst="line">
+            <a:avLst/>
+          </a:prstGeom>
+          <a:ln>
+            <a:prstDash val="dash"/>
+            <a:headEnd type="stealth" w="med" len="med"/>
+          </a:ln>
+        </p:spPr>
+        <p:style>
+          <a:lnRef idx="2">
+            <a:schemeClr val="accent1"/>
+          </a:lnRef>
+          <a:fillRef idx="0">
+            <a:schemeClr val="accent1"/>
+          </a:fillRef>
+          <a:effectRef idx="1">
+            <a:schemeClr val="accent1"/>
+          </a:effectRef>
+          <a:fontRef idx="minor">
+            <a:schemeClr val="tx1"/>
+          </a:fontRef>
+        </p:style>
+      </p:cxnSp>
+      <p:sp>
+        <p:nvSpPr>
+          <p:cNvPr id="26" name="TextBox 25"/>
+          <p:cNvSpPr txBox="1"/>
+          <p:nvPr/>
+        </p:nvSpPr>
+        <p:spPr>
+          <a:xfrm>
+            <a:off x="5600700" y="3573312"/>
+            <a:ext cx="2057400" cy="200000"/>
+          </a:xfrm>
+          <a:prstGeom prst="rect">
+            <a:avLst/>
+          </a:prstGeom>
+          <a:noFill/>
+        </p:spPr>
+        <p:txBody>
+          <a:bodyPr wrap="none">
+            <a:spAutoFit/>
+          </a:bodyPr>
+          <a:lstStyle/>
+          <a:p>
+            <a:pPr algn="ctr"/>
+            <a:r>
+              <a:rPr sz="900"/>
+              <a:t>4. ユーザー情報返却</a:t>
+            </a:r>
+          </a:p>
+        </p:txBody>
+      </p:sp>
+      <p:cxnSp>
+        <p:nvCxnSpPr>
+          <p:cNvPr id="27" name="Connector 26"/>
+          <p:cNvCxnSpPr/>
+          <p:nvPr/>
+        </p:nvCxnSpPr>
+        <p:spPr>
+          <a:xfrm flipH="1">
+            <a:off x="3543300" y="4402142"/>
+            <a:ext cx="2057400" cy="0"/>
+          </a:xfrm>
+          <a:prstGeom prst="line">
+            <a:avLst/>
+          </a:prstGeom>
+          <a:ln>
+            <a:prstDash val="dash"/>
+            <a:headEnd type="stealth" w="med" len="med"/>
+          </a:ln>
+        </p:spPr>
+        <p:style>
+          <a:lnRef idx="2">
+            <a:schemeClr val="accent1"/>
+          </a:lnRef>
+          <a:fillRef idx="0">
+            <a:schemeClr val="accent1"/>
+          </a:fillRef>
+          <a:effectRef idx="1">
+            <a:schemeClr val="accent1"/>
+          </a:effectRef>
+          <a:fontRef idx="minor">
+            <a:schemeClr val="tx1"/>
+          </a:fontRef>
+        </p:style>
+      </p:cxnSp>
+      <p:sp>
+        <p:nvSpPr>
+          <p:cNvPr id="28" name="TextBox 27"/>
+          <p:cNvSpPr txBox="1"/>
+          <p:nvPr/>
+        </p:nvSpPr>
+        <p:spPr>
+          <a:xfrm>
+            <a:off x="3543300" y="4182142"/>
+            <a:ext cx="2057400" cy="200000"/>
+          </a:xfrm>
+          <a:prstGeom prst="rect">
+            <a:avLst/>
+          </a:prstGeom>
+          <a:noFill/>
+        </p:spPr>
+        <p:txBody>
+          <a:bodyPr wrap="none">
+            <a:spAutoFit/>
+          </a:bodyPr>
+          <a:lstStyle/>
+          <a:p>
+            <a:pPr algn="ctr"/>
+            <a:r>
+              <a:rPr sz="900"/>
+              <a:t>5. 認証トークン発行</a:t>
+            </a:r>
+          </a:p>
+        </p:txBody>
+      </p:sp>
+      <p:cxnSp>
+        <p:nvCxnSpPr>
+          <p:cNvPr id="29" name="Connector 28"/>
+          <p:cNvCxnSpPr/>
+          <p:nvPr/>
+        </p:nvCxnSpPr>
+        <p:spPr>
+          <a:xfrm flipH="1">
+            <a:off x="1485900" y="4730972"/>
+            <a:ext cx="2057400" cy="0"/>
+          </a:xfrm>
+          <a:prstGeom prst="line">
+            <a:avLst/>
+          </a:prstGeom>
+          <a:ln>
+            <a:prstDash val="dash"/>
+            <a:headEnd type="stealth" w="med" len="med"/>
+          </a:ln>
+        </p:spPr>
+        <p:style>
+          <a:lnRef idx="2">
+            <a:schemeClr val="accent1"/>
+          </a:lnRef>
+          <a:fillRef idx="0">
+            <a:schemeClr val="accent1"/>
+          </a:fillRef>
+          <a:effectRef idx="1">
+            <a:schemeClr val="accent1"/>
+          </a:effectRef>
+          <a:fontRef idx="minor">
+            <a:schemeClr val="tx1"/>
+          </a:fontRef>
+        </p:style>
+      </p:cxnSp>
+      <p:sp>
+        <p:nvSpPr>
+          <p:cNvPr id="30" name="TextBox 29"/>
+          <p:cNvSpPr txBox="1"/>
+          <p:nvPr/>
+        </p:nvSpPr>
+        <p:spPr>
+          <a:xfrm>
+            <a:off x="1485900" y="4510972"/>
+            <a:ext cx="2057400" cy="200000"/>
+          </a:xfrm>
+          <a:prstGeom prst="rect">
+            <a:avLst/>
+          </a:prstGeom>
+          <a:noFill/>
+        </p:spPr>
+        <p:txBody>
+          <a:bodyPr wrap="none">
+            <a:spAutoFit/>
+          </a:bodyPr>
+          <a:lstStyle/>
+          <a:p>
+            <a:pPr algn="ctr"/>
+            <a:r>
+              <a:rPr sz="900"/>
+              <a:t>6. ログイン完了</a:t>
+            </a:r>
+          </a:p>
+        </p:txBody>
+      </p:sp>
+      <p:cxnSp>
+        <p:nvCxnSpPr>
+          <p:cNvPr id="31" name="Connector 30"/>
+          <p:cNvCxnSpPr/>
+          <p:nvPr/>
+        </p:nvCxnSpPr>
+        <p:spPr>
+          <a:xfrm flipH="1">
+            <a:off x="3543300" y="5059802"/>
+            <a:ext cx="2057400" cy="0"/>
+          </a:xfrm>
+          <a:prstGeom prst="line">
+            <a:avLst/>
+          </a:prstGeom>
+          <a:ln>
+            <a:headEnd type="stealth" w="med" len="med"/>
+          </a:ln>
+        </p:spPr>
+        <p:style>
+          <a:lnRef idx="2">
+            <a:schemeClr val="accent1"/>
+          </a:lnRef>
+          <a:fillRef idx="0">
+            <a:schemeClr val="accent1"/>
+          </a:fillRef>
+          <a:effectRef idx="1">
+            <a:schemeClr val="accent1"/>
+          </a:effectRef>
+          <a:fontRef idx="minor">
+            <a:schemeClr val="tx1"/>
+          </a:fontRef>
+        </p:style>
+      </p:cxnSp>
+      <p:sp>
+        <p:nvSpPr>
+          <p:cNvPr id="32" name="TextBox 31"/>
+          <p:cNvSpPr txBox="1"/>
+          <p:nvPr/>
+        </p:nvSpPr>
+        <p:spPr>
+          <a:xfrm>
+            <a:off x="3543300" y="4839802"/>
+            <a:ext cx="2057400" cy="200000"/>
+          </a:xfrm>
+          <a:prstGeom prst="rect">
+            <a:avLst/>
+          </a:prstGeom>
+          <a:noFill/>
+        </p:spPr>
+        <p:txBody>
+          <a:bodyPr wrap="none">
+            <a:spAutoFit/>
+          </a:bodyPr>
+          <a:lstStyle/>
+          <a:p>
+            <a:pPr algn="ctr"/>
+            <a:r>
+              <a:rPr sz="900"/>
+              <a:t>7. 認証エラー ✕</a:t>
+            </a:r>
+          </a:p>
+        </p:txBody>
+      </p:sp>
+      <p:cxnSp>
+        <p:nvCxnSpPr>
+          <p:cNvPr id="33" name="Connector 32"/>
+          <p:cNvCxnSpPr/>
+          <p:nvPr/>
+        </p:nvCxnSpPr>
+        <p:spPr>
+          <a:xfrm flipH="1">
+            <a:off x="1485900" y="5388632"/>
+            <a:ext cx="2057400" cy="0"/>
+          </a:xfrm>
+          <a:prstGeom prst="line">
+            <a:avLst/>
+          </a:prstGeom>
+          <a:ln>
+            <a:prstDash val="dash"/>
+            <a:headEnd type="stealth" w="med" len="med"/>
+          </a:ln>
+        </p:spPr>
+        <p:style>
+          <a:lnRef idx="2">
+            <a:schemeClr val="accent1"/>
+          </a:lnRef>
+          <a:fillRef idx="0">
+            <a:schemeClr val="accent1"/>
+          </a:fillRef>
+          <a:effectRef idx="1">
+            <a:schemeClr val="accent1"/>
+          </a:effectRef>
+          <a:fontRef idx="minor">
+            <a:schemeClr val="tx1"/>
+          </a:fontRef>
+        </p:style>
+      </p:cxnSp>
+      <p:sp>
+        <p:nvSpPr>
+          <p:cNvPr id="34" name="TextBox 33"/>
+          <p:cNvSpPr txBox="1"/>
+          <p:nvPr/>
+        </p:nvSpPr>
+        <p:spPr>
+          <a:xfrm>
+            <a:off x="1485900" y="5168632"/>
+            <a:ext cx="2057400" cy="200000"/>
+          </a:xfrm>
+          <a:prstGeom prst="rect">
+            <a:avLst/>
+          </a:prstGeom>
+          <a:noFill/>
+        </p:spPr>
+        <p:txBody>
+          <a:bodyPr wrap="none">
+            <a:spAutoFit/>
+          </a:bodyPr>
+          <a:lstStyle/>
+          <a:p>
+            <a:pPr algn="ctr"/>
+            <a:r>
+              <a:rPr sz="900"/>
+              <a:t>8. エラーメッセージ表示</a:t>
+            </a:r>
+          </a:p>
+        </p:txBody>
+      </p:sp>
+      <p:sp>
+        <p:nvSpPr>
+          <p:cNvPr id="35" name="Rectangle 34"/>
+          <p:cNvSpPr/>
+          <p:nvPr/>
+        </p:nvSpPr>
+        <p:spPr>
+          <a:xfrm>
+            <a:off x="5680700" y="3002275"/>
+            <a:ext cx="1300000" cy="380000"/>
+          </a:xfrm>
+          <a:prstGeom prst="rect">
+            <a:avLst/>
+          </a:prstGeom>
+          <a:solidFill>
+            <a:srgbClr val="FFFDAD"/>
+          </a:solidFill>
+          <a:ln>
+            <a:solidFill>
+              <a:srgbClr val="C8BE64"/>
+            </a:solidFill>
+          </a:ln>
+        </p:spPr>
+        <p:style>
+          <a:lnRef idx="1">
+            <a:schemeClr val="accent1"/>
+          </a:lnRef>
+          <a:fillRef idx="3">
+            <a:schemeClr val="accent1"/>
+          </a:fillRef>
+          <a:effectRef idx="2">
+            <a:schemeClr val="accent1"/>
+          </a:effectRef>
+          <a:fontRef idx="minor">
+            <a:schemeClr val="lt1"/>
+          </a:fontRef>
+        </p:style>
+        <p:txBody>
+          <a:bodyPr rtlCol="0" anchor="ctr" wrap="square"/>
+          <a:lstStyle/>
+          <a:p>
+            <a:r>
+              <a:rPr sz="900"/>
+              <a:t>セッション確認中</a:t>
             </a:r>
           </a:p>
         </p:txBody>
@@ -7428,6 +8523,1071 @@
       <p:grpSpPr/>
       <p:sp>
         <p:nvSpPr>
+          <p:cNvPr id="4" name="Rectangle 3"/>
+          <p:cNvSpPr/>
+          <p:nvPr/>
+        </p:nvSpPr>
+        <p:spPr>
+          <a:xfrm>
+            <a:off x="457200" y="2359561"/>
+            <a:ext cx="8229600" cy="1356169"/>
+          </a:xfrm>
+          <a:prstGeom prst="rect">
+            <a:avLst/>
+          </a:prstGeom>
+          <a:solidFill>
+            <a:srgbClr val="C8F0FF">
+              <a:alpha val="50000"/>
+            </a:srgbClr>
+          </a:solidFill>
+          <a:ln>
+            <a:noFill/>
+          </a:ln>
+        </p:spPr>
+        <p:style>
+          <a:lnRef idx="1">
+            <a:schemeClr val="accent1"/>
+          </a:lnRef>
+          <a:fillRef idx="3">
+            <a:schemeClr val="accent1"/>
+          </a:fillRef>
+          <a:effectRef idx="2">
+            <a:schemeClr val="accent1"/>
+          </a:effectRef>
+          <a:fontRef idx="minor">
+            <a:schemeClr val="lt1"/>
+          </a:fontRef>
+        </p:style>
+        <p:txBody>
+          <a:bodyPr rtlCol="0" anchor="ctr"/>
+          <a:lstStyle/>
+          <a:p>
+            <a:pPr algn="ctr"/>
+          </a:p>
+        </p:txBody>
+      </p:sp>
+      <p:sp>
+        <p:nvSpPr>
+          <p:cNvPr id="2" name="Title 1"/>
+          <p:cNvSpPr>
+            <a:spLocks noGrp="1"/>
+          </p:cNvSpPr>
+          <p:nvPr>
+            <p:ph type="title"/>
+          </p:nvPr>
+        </p:nvSpPr>
+        <p:spPr/>
+        <p:txBody>
+          <a:bodyPr/>
+          <a:lstStyle/>
+          <a:p>
+            <a:r>
+              <a:t>2b. シーケンス図 - フレーム（loop・par・rect背景）</a:t>
+            </a:r>
+          </a:p>
+        </p:txBody>
+      </p:sp>
+      <p:sp>
+        <p:nvSpPr>
+          <p:cNvPr id="3" name="Content Placeholder 2"/>
+          <p:cNvSpPr>
+            <a:spLocks noGrp="1"/>
+          </p:cNvSpPr>
+          <p:nvPr>
+            <p:ph idx="1"/>
+          </p:nvPr>
+        </p:nvSpPr>
+        <p:spPr/>
+        <p:txBody>
+          <a:bodyPr/>
+          <a:lstStyle/>
+          <a:p/>
+        </p:txBody>
+      </p:sp>
+      <p:sp>
+        <p:nvSpPr>
+          <p:cNvPr id="5" name="Rectangle 4"/>
+          <p:cNvSpPr/>
+          <p:nvPr/>
+        </p:nvSpPr>
+        <p:spPr>
+          <a:xfrm>
+            <a:off x="1228800" y="1600200"/>
+            <a:ext cx="1200000" cy="500000"/>
+          </a:xfrm>
+          <a:prstGeom prst="rect">
+            <a:avLst/>
+          </a:prstGeom>
+        </p:spPr>
+        <p:style>
+          <a:lnRef idx="1">
+            <a:schemeClr val="accent1"/>
+          </a:lnRef>
+          <a:fillRef idx="3">
+            <a:schemeClr val="accent1"/>
+          </a:fillRef>
+          <a:effectRef idx="2">
+            <a:schemeClr val="accent1"/>
+          </a:effectRef>
+          <a:fontRef idx="minor">
+            <a:schemeClr val="lt1"/>
+          </a:fontRef>
+        </p:style>
+        <p:txBody>
+          <a:bodyPr rtlCol="0" anchor="ctr" wrap="square"/>
+          <a:lstStyle/>
+          <a:p>
+            <a:r>
+              <a:rPr sz="1100" b="1"/>
+              <a:t>クライアント</a:t>
+            </a:r>
+          </a:p>
+        </p:txBody>
+      </p:sp>
+      <p:sp>
+        <p:nvSpPr>
+          <p:cNvPr id="6" name="Rectangle 5"/>
+          <p:cNvSpPr/>
+          <p:nvPr/>
+        </p:nvSpPr>
+        <p:spPr>
+          <a:xfrm>
+            <a:off x="3972000" y="1600200"/>
+            <a:ext cx="1200000" cy="500000"/>
+          </a:xfrm>
+          <a:prstGeom prst="rect">
+            <a:avLst/>
+          </a:prstGeom>
+        </p:spPr>
+        <p:style>
+          <a:lnRef idx="1">
+            <a:schemeClr val="accent1"/>
+          </a:lnRef>
+          <a:fillRef idx="3">
+            <a:schemeClr val="accent1"/>
+          </a:fillRef>
+          <a:effectRef idx="2">
+            <a:schemeClr val="accent1"/>
+          </a:effectRef>
+          <a:fontRef idx="minor">
+            <a:schemeClr val="lt1"/>
+          </a:fontRef>
+        </p:style>
+        <p:txBody>
+          <a:bodyPr rtlCol="0" anchor="ctr" wrap="square"/>
+          <a:lstStyle/>
+          <a:p>
+            <a:r>
+              <a:rPr sz="1100" b="1"/>
+              <a:t>サーバー</a:t>
+            </a:r>
+          </a:p>
+        </p:txBody>
+      </p:sp>
+      <p:sp>
+        <p:nvSpPr>
+          <p:cNvPr id="7" name="Rectangle 6"/>
+          <p:cNvSpPr/>
+          <p:nvPr/>
+        </p:nvSpPr>
+        <p:spPr>
+          <a:xfrm>
+            <a:off x="6715200" y="1600200"/>
+            <a:ext cx="1200000" cy="500000"/>
+          </a:xfrm>
+          <a:prstGeom prst="rect">
+            <a:avLst/>
+          </a:prstGeom>
+        </p:spPr>
+        <p:style>
+          <a:lnRef idx="1">
+            <a:schemeClr val="accent1"/>
+          </a:lnRef>
+          <a:fillRef idx="3">
+            <a:schemeClr val="accent1"/>
+          </a:fillRef>
+          <a:effectRef idx="2">
+            <a:schemeClr val="accent1"/>
+          </a:effectRef>
+          <a:fontRef idx="minor">
+            <a:schemeClr val="lt1"/>
+          </a:fontRef>
+        </p:style>
+        <p:txBody>
+          <a:bodyPr rtlCol="0" anchor="ctr" wrap="square"/>
+          <a:lstStyle/>
+          <a:p>
+            <a:r>
+              <a:rPr sz="1100" b="1"/>
+              <a:t>データベース</a:t>
+            </a:r>
+          </a:p>
+        </p:txBody>
+      </p:sp>
+      <p:cxnSp>
+        <p:nvCxnSpPr>
+          <p:cNvPr id="8" name="Connector 7"/>
+          <p:cNvCxnSpPr/>
+          <p:nvPr/>
+        </p:nvCxnSpPr>
+        <p:spPr>
+          <a:xfrm>
+            <a:off x="1828800" y="2180200"/>
+            <a:ext cx="0" cy="3602656"/>
+          </a:xfrm>
+          <a:prstGeom prst="line">
+            <a:avLst/>
+          </a:prstGeom>
+          <a:ln w="12700">
+            <a:prstDash val="dash"/>
+          </a:ln>
+        </p:spPr>
+        <p:style>
+          <a:lnRef idx="2">
+            <a:schemeClr val="accent1"/>
+          </a:lnRef>
+          <a:fillRef idx="0">
+            <a:schemeClr val="accent1"/>
+          </a:fillRef>
+          <a:effectRef idx="1">
+            <a:schemeClr val="accent1"/>
+          </a:effectRef>
+          <a:fontRef idx="minor">
+            <a:schemeClr val="tx1"/>
+          </a:fontRef>
+        </p:style>
+      </p:cxnSp>
+      <p:cxnSp>
+        <p:nvCxnSpPr>
+          <p:cNvPr id="9" name="Connector 8"/>
+          <p:cNvCxnSpPr/>
+          <p:nvPr/>
+        </p:nvCxnSpPr>
+        <p:spPr>
+          <a:xfrm>
+            <a:off x="4572000" y="2180200"/>
+            <a:ext cx="0" cy="3602656"/>
+          </a:xfrm>
+          <a:prstGeom prst="line">
+            <a:avLst/>
+          </a:prstGeom>
+          <a:ln w="12700">
+            <a:prstDash val="dash"/>
+          </a:ln>
+        </p:spPr>
+        <p:style>
+          <a:lnRef idx="2">
+            <a:schemeClr val="accent1"/>
+          </a:lnRef>
+          <a:fillRef idx="0">
+            <a:schemeClr val="accent1"/>
+          </a:fillRef>
+          <a:effectRef idx="1">
+            <a:schemeClr val="accent1"/>
+          </a:effectRef>
+          <a:fontRef idx="minor">
+            <a:schemeClr val="tx1"/>
+          </a:fontRef>
+        </p:style>
+      </p:cxnSp>
+      <p:cxnSp>
+        <p:nvCxnSpPr>
+          <p:cNvPr id="10" name="Connector 9"/>
+          <p:cNvCxnSpPr/>
+          <p:nvPr/>
+        </p:nvCxnSpPr>
+        <p:spPr>
+          <a:xfrm>
+            <a:off x="7315200" y="2180200"/>
+            <a:ext cx="0" cy="3602656"/>
+          </a:xfrm>
+          <a:prstGeom prst="line">
+            <a:avLst/>
+          </a:prstGeom>
+          <a:ln w="12700">
+            <a:prstDash val="dash"/>
+          </a:ln>
+        </p:spPr>
+        <p:style>
+          <a:lnRef idx="2">
+            <a:schemeClr val="accent1"/>
+          </a:lnRef>
+          <a:fillRef idx="0">
+            <a:schemeClr val="accent1"/>
+          </a:fillRef>
+          <a:effectRef idx="1">
+            <a:schemeClr val="accent1"/>
+          </a:effectRef>
+          <a:fontRef idx="minor">
+            <a:schemeClr val="tx1"/>
+          </a:fontRef>
+        </p:style>
+      </p:cxnSp>
+      <p:sp>
+        <p:nvSpPr>
+          <p:cNvPr id="11" name="Rectangle 10"/>
+          <p:cNvSpPr/>
+          <p:nvPr/>
+        </p:nvSpPr>
+        <p:spPr>
+          <a:xfrm>
+            <a:off x="517200" y="2718284"/>
+            <a:ext cx="8109600" cy="997446"/>
+          </a:xfrm>
+          <a:prstGeom prst="rect">
+            <a:avLst/>
+          </a:prstGeom>
+          <a:noFill/>
+          <a:ln w="19050">
+            <a:solidFill>
+              <a:srgbClr val="6464B4"/>
+            </a:solidFill>
+            <a:prstDash val="dash"/>
+          </a:ln>
+        </p:spPr>
+        <p:style>
+          <a:lnRef idx="1">
+            <a:schemeClr val="accent1"/>
+          </a:lnRef>
+          <a:fillRef idx="3">
+            <a:schemeClr val="accent1"/>
+          </a:fillRef>
+          <a:effectRef idx="2">
+            <a:schemeClr val="accent1"/>
+          </a:effectRef>
+          <a:fontRef idx="minor">
+            <a:schemeClr val="lt1"/>
+          </a:fontRef>
+        </p:style>
+        <p:txBody>
+          <a:bodyPr rtlCol="0" anchor="ctr"/>
+          <a:lstStyle/>
+          <a:p>
+            <a:pPr algn="ctr"/>
+          </a:p>
+        </p:txBody>
+      </p:sp>
+      <p:sp>
+        <p:nvSpPr>
+          <p:cNvPr id="12" name="Rectangle 11"/>
+          <p:cNvSpPr/>
+          <p:nvPr/>
+        </p:nvSpPr>
+        <p:spPr>
+          <a:xfrm>
+            <a:off x="517200" y="2718284"/>
+            <a:ext cx="500000" cy="240000"/>
+          </a:xfrm>
+          <a:prstGeom prst="rect">
+            <a:avLst/>
+          </a:prstGeom>
+          <a:solidFill>
+            <a:srgbClr val="C8C8F0"/>
+          </a:solidFill>
+          <a:ln>
+            <a:solidFill>
+              <a:srgbClr val="6464B4"/>
+            </a:solidFill>
+          </a:ln>
+        </p:spPr>
+        <p:style>
+          <a:lnRef idx="1">
+            <a:schemeClr val="accent1"/>
+          </a:lnRef>
+          <a:fillRef idx="3">
+            <a:schemeClr val="accent1"/>
+          </a:fillRef>
+          <a:effectRef idx="2">
+            <a:schemeClr val="accent1"/>
+          </a:effectRef>
+          <a:fontRef idx="minor">
+            <a:schemeClr val="lt1"/>
+          </a:fontRef>
+        </p:style>
+        <p:txBody>
+          <a:bodyPr rtlCol="0" anchor="ctr"/>
+          <a:lstStyle/>
+          <a:p>
+            <a:r>
+              <a:rPr sz="900" b="1"/>
+              <a:t>loop</a:t>
+            </a:r>
+          </a:p>
+        </p:txBody>
+      </p:sp>
+      <p:sp>
+        <p:nvSpPr>
+          <p:cNvPr id="13" name="TextBox 12"/>
+          <p:cNvSpPr txBox="1"/>
+          <p:nvPr/>
+        </p:nvSpPr>
+        <p:spPr>
+          <a:xfrm>
+            <a:off x="1057200" y="2718284"/>
+            <a:ext cx="7569600" cy="240000"/>
+          </a:xfrm>
+          <a:prstGeom prst="rect">
+            <a:avLst/>
+          </a:prstGeom>
+          <a:noFill/>
+        </p:spPr>
+        <p:txBody>
+          <a:bodyPr wrap="none">
+            <a:spAutoFit/>
+          </a:bodyPr>
+          <a:lstStyle/>
+          <a:p>
+            <a:r>
+              <a:rPr sz="900" i="1">
+                <a:solidFill>
+                  <a:srgbClr val="3C3C8C"/>
+                </a:solidFill>
+              </a:rPr>
+              <a:t>[リトライ（最大3回）]</a:t>
+            </a:r>
+          </a:p>
+        </p:txBody>
+      </p:sp>
+      <p:sp>
+        <p:nvSpPr>
+          <p:cNvPr id="14" name="Rectangle 13"/>
+          <p:cNvSpPr/>
+          <p:nvPr/>
+        </p:nvSpPr>
+        <p:spPr>
+          <a:xfrm>
+            <a:off x="517200" y="3715730"/>
+            <a:ext cx="8109600" cy="997446"/>
+          </a:xfrm>
+          <a:prstGeom prst="rect">
+            <a:avLst/>
+          </a:prstGeom>
+          <a:noFill/>
+          <a:ln w="19050">
+            <a:solidFill>
+              <a:srgbClr val="6464B4"/>
+            </a:solidFill>
+            <a:prstDash val="dash"/>
+          </a:ln>
+        </p:spPr>
+        <p:style>
+          <a:lnRef idx="1">
+            <a:schemeClr val="accent1"/>
+          </a:lnRef>
+          <a:fillRef idx="3">
+            <a:schemeClr val="accent1"/>
+          </a:fillRef>
+          <a:effectRef idx="2">
+            <a:schemeClr val="accent1"/>
+          </a:effectRef>
+          <a:fontRef idx="minor">
+            <a:schemeClr val="lt1"/>
+          </a:fontRef>
+        </p:style>
+        <p:txBody>
+          <a:bodyPr rtlCol="0" anchor="ctr"/>
+          <a:lstStyle/>
+          <a:p>
+            <a:pPr algn="ctr"/>
+          </a:p>
+        </p:txBody>
+      </p:sp>
+      <p:sp>
+        <p:nvSpPr>
+          <p:cNvPr id="15" name="Rectangle 14"/>
+          <p:cNvSpPr/>
+          <p:nvPr/>
+        </p:nvSpPr>
+        <p:spPr>
+          <a:xfrm>
+            <a:off x="517200" y="3715730"/>
+            <a:ext cx="500000" cy="240000"/>
+          </a:xfrm>
+          <a:prstGeom prst="rect">
+            <a:avLst/>
+          </a:prstGeom>
+          <a:solidFill>
+            <a:srgbClr val="C8C8F0"/>
+          </a:solidFill>
+          <a:ln>
+            <a:solidFill>
+              <a:srgbClr val="6464B4"/>
+            </a:solidFill>
+          </a:ln>
+        </p:spPr>
+        <p:style>
+          <a:lnRef idx="1">
+            <a:schemeClr val="accent1"/>
+          </a:lnRef>
+          <a:fillRef idx="3">
+            <a:schemeClr val="accent1"/>
+          </a:fillRef>
+          <a:effectRef idx="2">
+            <a:schemeClr val="accent1"/>
+          </a:effectRef>
+          <a:fontRef idx="minor">
+            <a:schemeClr val="lt1"/>
+          </a:fontRef>
+        </p:style>
+        <p:txBody>
+          <a:bodyPr rtlCol="0" anchor="ctr"/>
+          <a:lstStyle/>
+          <a:p>
+            <a:r>
+              <a:rPr sz="900" b="1"/>
+              <a:t>par</a:t>
+            </a:r>
+          </a:p>
+        </p:txBody>
+      </p:sp>
+      <p:sp>
+        <p:nvSpPr>
+          <p:cNvPr id="16" name="TextBox 15"/>
+          <p:cNvSpPr txBox="1"/>
+          <p:nvPr/>
+        </p:nvSpPr>
+        <p:spPr>
+          <a:xfrm>
+            <a:off x="1057200" y="3715730"/>
+            <a:ext cx="7569600" cy="240000"/>
+          </a:xfrm>
+          <a:prstGeom prst="rect">
+            <a:avLst/>
+          </a:prstGeom>
+          <a:noFill/>
+        </p:spPr>
+        <p:txBody>
+          <a:bodyPr wrap="none">
+            <a:spAutoFit/>
+          </a:bodyPr>
+          <a:lstStyle/>
+          <a:p>
+            <a:r>
+              <a:rPr sz="900" i="1">
+                <a:solidFill>
+                  <a:srgbClr val="3C3C8C"/>
+                </a:solidFill>
+              </a:rPr>
+              <a:t>[非同期通知]</a:t>
+            </a:r>
+          </a:p>
+        </p:txBody>
+      </p:sp>
+      <p:cxnSp>
+        <p:nvCxnSpPr>
+          <p:cNvPr id="17" name="Connector 16"/>
+          <p:cNvCxnSpPr/>
+          <p:nvPr/>
+        </p:nvCxnSpPr>
+        <p:spPr>
+          <a:xfrm>
+            <a:off x="517200" y="4354453"/>
+            <a:ext cx="8109600" cy="0"/>
+          </a:xfrm>
+          <a:prstGeom prst="line">
+            <a:avLst/>
+          </a:prstGeom>
+          <a:ln w="12700">
+            <a:solidFill>
+              <a:srgbClr val="6464B4"/>
+            </a:solidFill>
+            <a:prstDash val="dash"/>
+          </a:ln>
+        </p:spPr>
+        <p:style>
+          <a:lnRef idx="2">
+            <a:schemeClr val="accent1"/>
+          </a:lnRef>
+          <a:fillRef idx="0">
+            <a:schemeClr val="accent1"/>
+          </a:fillRef>
+          <a:effectRef idx="1">
+            <a:schemeClr val="accent1"/>
+          </a:effectRef>
+          <a:fontRef idx="minor">
+            <a:schemeClr val="tx1"/>
+          </a:fontRef>
+        </p:style>
+      </p:cxnSp>
+      <p:sp>
+        <p:nvSpPr>
+          <p:cNvPr id="18" name="TextBox 17"/>
+          <p:cNvSpPr txBox="1"/>
+          <p:nvPr/>
+        </p:nvSpPr>
+        <p:spPr>
+          <a:xfrm>
+            <a:off x="1057200" y="4354453"/>
+            <a:ext cx="7569600" cy="200000"/>
+          </a:xfrm>
+          <a:prstGeom prst="rect">
+            <a:avLst/>
+          </a:prstGeom>
+          <a:noFill/>
+        </p:spPr>
+        <p:txBody>
+          <a:bodyPr wrap="none">
+            <a:spAutoFit/>
+          </a:bodyPr>
+          <a:lstStyle/>
+          <a:p>
+            <a:r>
+              <a:rPr sz="800" i="1">
+                <a:solidFill>
+                  <a:srgbClr val="3C3C8C"/>
+                </a:solidFill>
+              </a:rPr>
+              <a:t>[非同期ログ]</a:t>
+            </a:r>
+          </a:p>
+        </p:txBody>
+      </p:sp>
+      <p:cxnSp>
+        <p:nvCxnSpPr>
+          <p:cNvPr id="19" name="Connector 18"/>
+          <p:cNvCxnSpPr/>
+          <p:nvPr/>
+        </p:nvCxnSpPr>
+        <p:spPr>
+          <a:xfrm>
+            <a:off x="1828800" y="2359561"/>
+            <a:ext cx="2743200" cy="0"/>
+          </a:xfrm>
+          <a:prstGeom prst="line">
+            <a:avLst/>
+          </a:prstGeom>
+          <a:ln>
+            <a:headEnd type="stealth" w="med" len="med"/>
+          </a:ln>
+        </p:spPr>
+        <p:style>
+          <a:lnRef idx="2">
+            <a:schemeClr val="accent1"/>
+          </a:lnRef>
+          <a:fillRef idx="0">
+            <a:schemeClr val="accent1"/>
+          </a:fillRef>
+          <a:effectRef idx="1">
+            <a:schemeClr val="accent1"/>
+          </a:effectRef>
+          <a:fontRef idx="minor">
+            <a:schemeClr val="tx1"/>
+          </a:fontRef>
+        </p:style>
+      </p:cxnSp>
+      <p:sp>
+        <p:nvSpPr>
+          <p:cNvPr id="20" name="TextBox 19"/>
+          <p:cNvSpPr txBox="1"/>
+          <p:nvPr/>
+        </p:nvSpPr>
+        <p:spPr>
+          <a:xfrm>
+            <a:off x="1828800" y="2139561"/>
+            <a:ext cx="2743200" cy="200000"/>
+          </a:xfrm>
+          <a:prstGeom prst="rect">
+            <a:avLst/>
+          </a:prstGeom>
+          <a:noFill/>
+        </p:spPr>
+        <p:txBody>
+          <a:bodyPr wrap="none">
+            <a:spAutoFit/>
+          </a:bodyPr>
+          <a:lstStyle/>
+          <a:p>
+            <a:pPr algn="ctr"/>
+            <a:r>
+              <a:rPr sz="900"/>
+              <a:t>リクエスト送信</a:t>
+            </a:r>
+          </a:p>
+        </p:txBody>
+      </p:sp>
+      <p:cxnSp>
+        <p:nvCxnSpPr>
+          <p:cNvPr id="21" name="Connector 20"/>
+          <p:cNvCxnSpPr/>
+          <p:nvPr/>
+        </p:nvCxnSpPr>
+        <p:spPr>
+          <a:xfrm>
+            <a:off x="4572000" y="2998284"/>
+            <a:ext cx="2743200" cy="0"/>
+          </a:xfrm>
+          <a:prstGeom prst="line">
+            <a:avLst/>
+          </a:prstGeom>
+          <a:ln>
+            <a:headEnd type="stealth" w="med" len="med"/>
+          </a:ln>
+        </p:spPr>
+        <p:style>
+          <a:lnRef idx="2">
+            <a:schemeClr val="accent1"/>
+          </a:lnRef>
+          <a:fillRef idx="0">
+            <a:schemeClr val="accent1"/>
+          </a:fillRef>
+          <a:effectRef idx="1">
+            <a:schemeClr val="accent1"/>
+          </a:effectRef>
+          <a:fontRef idx="minor">
+            <a:schemeClr val="tx1"/>
+          </a:fontRef>
+        </p:style>
+      </p:cxnSp>
+      <p:sp>
+        <p:nvSpPr>
+          <p:cNvPr id="22" name="TextBox 21"/>
+          <p:cNvSpPr txBox="1"/>
+          <p:nvPr/>
+        </p:nvSpPr>
+        <p:spPr>
+          <a:xfrm>
+            <a:off x="4572000" y="2778284"/>
+            <a:ext cx="2743200" cy="200000"/>
+          </a:xfrm>
+          <a:prstGeom prst="rect">
+            <a:avLst/>
+          </a:prstGeom>
+          <a:noFill/>
+        </p:spPr>
+        <p:txBody>
+          <a:bodyPr wrap="none">
+            <a:spAutoFit/>
+          </a:bodyPr>
+          <a:lstStyle/>
+          <a:p>
+            <a:pPr algn="ctr"/>
+            <a:r>
+              <a:rPr sz="900"/>
+              <a:t>クエリ実行</a:t>
+            </a:r>
+          </a:p>
+        </p:txBody>
+      </p:sp>
+      <p:cxnSp>
+        <p:nvCxnSpPr>
+          <p:cNvPr id="23" name="Connector 22"/>
+          <p:cNvCxnSpPr/>
+          <p:nvPr/>
+        </p:nvCxnSpPr>
+        <p:spPr>
+          <a:xfrm flipH="1">
+            <a:off x="4572000" y="3357007"/>
+            <a:ext cx="2743200" cy="0"/>
+          </a:xfrm>
+          <a:prstGeom prst="line">
+            <a:avLst/>
+          </a:prstGeom>
+          <a:ln>
+            <a:prstDash val="dash"/>
+            <a:headEnd type="stealth" w="med" len="med"/>
+          </a:ln>
+        </p:spPr>
+        <p:style>
+          <a:lnRef idx="2">
+            <a:schemeClr val="accent1"/>
+          </a:lnRef>
+          <a:fillRef idx="0">
+            <a:schemeClr val="accent1"/>
+          </a:fillRef>
+          <a:effectRef idx="1">
+            <a:schemeClr val="accent1"/>
+          </a:effectRef>
+          <a:fontRef idx="minor">
+            <a:schemeClr val="tx1"/>
+          </a:fontRef>
+        </p:style>
+      </p:cxnSp>
+      <p:sp>
+        <p:nvSpPr>
+          <p:cNvPr id="24" name="TextBox 23"/>
+          <p:cNvSpPr txBox="1"/>
+          <p:nvPr/>
+        </p:nvSpPr>
+        <p:spPr>
+          <a:xfrm>
+            <a:off x="4572000" y="3137007"/>
+            <a:ext cx="2743200" cy="200000"/>
+          </a:xfrm>
+          <a:prstGeom prst="rect">
+            <a:avLst/>
+          </a:prstGeom>
+          <a:noFill/>
+        </p:spPr>
+        <p:txBody>
+          <a:bodyPr wrap="none">
+            <a:spAutoFit/>
+          </a:bodyPr>
+          <a:lstStyle/>
+          <a:p>
+            <a:pPr algn="ctr"/>
+            <a:r>
+              <a:rPr sz="900"/>
+              <a:t>結果返却</a:t>
+            </a:r>
+          </a:p>
+        </p:txBody>
+      </p:sp>
+      <p:cxnSp>
+        <p:nvCxnSpPr>
+          <p:cNvPr id="25" name="Connector 24"/>
+          <p:cNvCxnSpPr/>
+          <p:nvPr/>
+        </p:nvCxnSpPr>
+        <p:spPr>
+          <a:xfrm flipH="1">
+            <a:off x="1828800" y="3995730"/>
+            <a:ext cx="2743200" cy="0"/>
+          </a:xfrm>
+          <a:prstGeom prst="line">
+            <a:avLst/>
+          </a:prstGeom>
+          <a:ln>
+            <a:headEnd type="stealth" w="med" len="med"/>
+          </a:ln>
+        </p:spPr>
+        <p:style>
+          <a:lnRef idx="2">
+            <a:schemeClr val="accent1"/>
+          </a:lnRef>
+          <a:fillRef idx="0">
+            <a:schemeClr val="accent1"/>
+          </a:fillRef>
+          <a:effectRef idx="1">
+            <a:schemeClr val="accent1"/>
+          </a:effectRef>
+          <a:fontRef idx="minor">
+            <a:schemeClr val="tx1"/>
+          </a:fontRef>
+        </p:style>
+      </p:cxnSp>
+      <p:sp>
+        <p:nvSpPr>
+          <p:cNvPr id="26" name="TextBox 25"/>
+          <p:cNvSpPr txBox="1"/>
+          <p:nvPr/>
+        </p:nvSpPr>
+        <p:spPr>
+          <a:xfrm>
+            <a:off x="1828800" y="3775730"/>
+            <a:ext cx="2743200" cy="200000"/>
+          </a:xfrm>
+          <a:prstGeom prst="rect">
+            <a:avLst/>
+          </a:prstGeom>
+          <a:noFill/>
+        </p:spPr>
+        <p:txBody>
+          <a:bodyPr wrap="none">
+            <a:spAutoFit/>
+          </a:bodyPr>
+          <a:lstStyle/>
+          <a:p>
+            <a:pPr algn="ctr"/>
+            <a:r>
+              <a:rPr sz="900"/>
+              <a:t>完了通知</a:t>
+            </a:r>
+          </a:p>
+        </p:txBody>
+      </p:sp>
+      <p:cxnSp>
+        <p:nvCxnSpPr>
+          <p:cNvPr id="27" name="Connector 26"/>
+          <p:cNvCxnSpPr/>
+          <p:nvPr/>
+        </p:nvCxnSpPr>
+        <p:spPr>
+          <a:xfrm>
+            <a:off x="4572000" y="4354453"/>
+            <a:ext cx="2743200" cy="0"/>
+          </a:xfrm>
+          <a:prstGeom prst="line">
+            <a:avLst/>
+          </a:prstGeom>
+          <a:ln>
+            <a:headEnd type="stealth" w="med" len="med"/>
+          </a:ln>
+        </p:spPr>
+        <p:style>
+          <a:lnRef idx="2">
+            <a:schemeClr val="accent1"/>
+          </a:lnRef>
+          <a:fillRef idx="0">
+            <a:schemeClr val="accent1"/>
+          </a:fillRef>
+          <a:effectRef idx="1">
+            <a:schemeClr val="accent1"/>
+          </a:effectRef>
+          <a:fontRef idx="minor">
+            <a:schemeClr val="tx1"/>
+          </a:fontRef>
+        </p:style>
+      </p:cxnSp>
+      <p:sp>
+        <p:nvSpPr>
+          <p:cNvPr id="28" name="TextBox 27"/>
+          <p:cNvSpPr txBox="1"/>
+          <p:nvPr/>
+        </p:nvSpPr>
+        <p:spPr>
+          <a:xfrm>
+            <a:off x="4572000" y="4134453"/>
+            <a:ext cx="2743200" cy="200000"/>
+          </a:xfrm>
+          <a:prstGeom prst="rect">
+            <a:avLst/>
+          </a:prstGeom>
+          <a:noFill/>
+        </p:spPr>
+        <p:txBody>
+          <a:bodyPr wrap="none">
+            <a:spAutoFit/>
+          </a:bodyPr>
+          <a:lstStyle/>
+          <a:p>
+            <a:pPr algn="ctr"/>
+            <a:r>
+              <a:rPr sz="900"/>
+              <a:t>ログ書き込み</a:t>
+            </a:r>
+          </a:p>
+        </p:txBody>
+      </p:sp>
+      <p:cxnSp>
+        <p:nvCxnSpPr>
+          <p:cNvPr id="29" name="Connector 28"/>
+          <p:cNvCxnSpPr/>
+          <p:nvPr/>
+        </p:nvCxnSpPr>
+        <p:spPr>
+          <a:xfrm>
+            <a:off x="1828800" y="5182856"/>
+            <a:ext cx="0" cy="300000"/>
+          </a:xfrm>
+          <a:prstGeom prst="bentConnector3">
+            <a:avLst/>
+          </a:prstGeom>
+          <a:ln>
+            <a:headEnd type="stealth" w="med" len="med"/>
+          </a:ln>
+        </p:spPr>
+        <p:style>
+          <a:lnRef idx="2">
+            <a:schemeClr val="accent1"/>
+          </a:lnRef>
+          <a:fillRef idx="0">
+            <a:schemeClr val="accent1"/>
+          </a:fillRef>
+          <a:effectRef idx="1">
+            <a:schemeClr val="accent1"/>
+          </a:effectRef>
+          <a:fontRef idx="minor">
+            <a:schemeClr val="tx1"/>
+          </a:fontRef>
+        </p:style>
+      </p:cxnSp>
+      <p:sp>
+        <p:nvSpPr>
+          <p:cNvPr id="30" name="TextBox 29"/>
+          <p:cNvSpPr txBox="1"/>
+          <p:nvPr/>
+        </p:nvSpPr>
+        <p:spPr>
+          <a:xfrm>
+            <a:off x="1888800" y="4982856"/>
+            <a:ext cx="740000" cy="200000"/>
+          </a:xfrm>
+          <a:prstGeom prst="rect">
+            <a:avLst/>
+          </a:prstGeom>
+          <a:noFill/>
+        </p:spPr>
+        <p:txBody>
+          <a:bodyPr wrap="none">
+            <a:spAutoFit/>
+          </a:bodyPr>
+          <a:lstStyle/>
+          <a:p>
+            <a:r>
+              <a:rPr sz="900"/>
+              <a:t>内部状態更新</a:t>
+            </a:r>
+          </a:p>
+        </p:txBody>
+      </p:sp>
+      <p:sp>
+        <p:nvSpPr>
+          <p:cNvPr id="31" name="Rectangle 30"/>
+          <p:cNvSpPr/>
+          <p:nvPr/>
+        </p:nvSpPr>
+        <p:spPr>
+          <a:xfrm>
+            <a:off x="1228800" y="4713176"/>
+            <a:ext cx="3943200" cy="380000"/>
+          </a:xfrm>
+          <a:prstGeom prst="rect">
+            <a:avLst/>
+          </a:prstGeom>
+          <a:solidFill>
+            <a:srgbClr val="FFFDAD"/>
+          </a:solidFill>
+          <a:ln>
+            <a:solidFill>
+              <a:srgbClr val="C8BE64"/>
+            </a:solidFill>
+          </a:ln>
+        </p:spPr>
+        <p:style>
+          <a:lnRef idx="1">
+            <a:schemeClr val="accent1"/>
+          </a:lnRef>
+          <a:fillRef idx="3">
+            <a:schemeClr val="accent1"/>
+          </a:fillRef>
+          <a:effectRef idx="2">
+            <a:schemeClr val="accent1"/>
+          </a:effectRef>
+          <a:fontRef idx="minor">
+            <a:schemeClr val="lt1"/>
+          </a:fontRef>
+        </p:style>
+        <p:txBody>
+          <a:bodyPr rtlCol="0" anchor="ctr" wrap="square"/>
+          <a:lstStyle/>
+          <a:p>
+            <a:r>
+              <a:rPr sz="900"/>
+              <a:t>処理完了</a:t>
+            </a:r>
+          </a:p>
+        </p:txBody>
+      </p:sp>
+    </p:spTree>
+  </p:cSld>
+  <p:clrMapOvr>
+    <a:masterClrMapping/>
+  </p:clrMapOvr>
+</p:sld>
+</file>
+
+<file path=ppt/slides/slide18.xml><?xml version="1.0" encoding="utf-8"?>
+<p:sld xmlns:a="http://schemas.openxmlformats.org/drawingml/2006/main" xmlns:p="http://schemas.openxmlformats.org/presentationml/2006/main" xmlns:r="http://schemas.openxmlformats.org/officeDocument/2006/relationships">
+  <p:cSld>
+    <p:spTree>
+      <p:nvGrpSpPr>
+        <p:cNvPr id="1" name=""/>
+        <p:cNvGrpSpPr/>
+        <p:nvPr/>
+      </p:nvGrpSpPr>
+      <p:grpSpPr/>
+      <p:sp>
+        <p:nvSpPr>
           <p:cNvPr id="2" name="Title 1"/>
           <p:cNvSpPr>
             <a:spLocks noGrp="1"/>
@@ -7513,7 +9673,7 @@
 </p:sld>
 </file>
 
-<file path=ppt/slides/slide18.xml><?xml version="1.0" encoding="utf-8"?>
+<file path=ppt/slides/slide19.xml><?xml version="1.0" encoding="utf-8"?>
 <p:sld xmlns:a="http://schemas.openxmlformats.org/drawingml/2006/main" xmlns:p="http://schemas.openxmlformats.org/presentationml/2006/main" xmlns:r="http://schemas.openxmlformats.org/officeDocument/2006/relationships">
   <p:cSld>
     <p:spTree>
@@ -8937,500 +11097,6 @@
 </p:sld>
 </file>
 
-<file path=ppt/slides/slide19.xml><?xml version="1.0" encoding="utf-8"?>
-<p:sld xmlns:a="http://schemas.openxmlformats.org/drawingml/2006/main" xmlns:p="http://schemas.openxmlformats.org/presentationml/2006/main" xmlns:r="http://schemas.openxmlformats.org/officeDocument/2006/relationships">
-  <p:cSld>
-    <p:spTree>
-      <p:nvGrpSpPr>
-        <p:cNvPr id="1" name=""/>
-        <p:cNvGrpSpPr/>
-        <p:nvPr/>
-      </p:nvGrpSpPr>
-      <p:grpSpPr/>
-      <p:sp>
-        <p:nvSpPr>
-          <p:cNvPr id="2" name="Title 1"/>
-          <p:cNvSpPr>
-            <a:spLocks noGrp="1"/>
-          </p:cNvSpPr>
-          <p:nvPr>
-            <p:ph type="title"/>
-          </p:nvPr>
-        </p:nvSpPr>
-        <p:spPr/>
-        <p:txBody>
-          <a:bodyPr/>
-          <a:lstStyle/>
-          <a:p>
-            <a:r>
-              <a:t>5. 状態図（State Diagram）</a:t>
-            </a:r>
-          </a:p>
-        </p:txBody>
-      </p:sp>
-      <p:sp>
-        <p:nvSpPr>
-          <p:cNvPr id="3" name="Content Placeholder 2"/>
-          <p:cNvSpPr>
-            <a:spLocks noGrp="1"/>
-          </p:cNvSpPr>
-          <p:nvPr>
-            <p:ph idx="1"/>
-          </p:nvPr>
-        </p:nvSpPr>
-        <p:spPr/>
-        <p:txBody>
-          <a:bodyPr/>
-          <a:lstStyle/>
-          <a:p/>
-        </p:txBody>
-      </p:sp>
-      <p:sp>
-        <p:nvSpPr>
-          <p:cNvPr id="4" name="Rectangle 3"/>
-          <p:cNvSpPr/>
-          <p:nvPr/>
-        </p:nvSpPr>
-        <p:spPr>
-          <a:xfrm>
-            <a:off x="5550039" y="4898532"/>
-            <a:ext cx="1200000" cy="500000"/>
-          </a:xfrm>
-          <a:prstGeom prst="rect">
-            <a:avLst/>
-          </a:prstGeom>
-        </p:spPr>
-        <p:style>
-          <a:lnRef idx="1">
-            <a:schemeClr val="accent1"/>
-          </a:lnRef>
-          <a:fillRef idx="3">
-            <a:schemeClr val="accent1"/>
-          </a:fillRef>
-          <a:effectRef idx="2">
-            <a:schemeClr val="accent1"/>
-          </a:effectRef>
-          <a:fontRef idx="minor">
-            <a:schemeClr val="lt1"/>
-          </a:fontRef>
-        </p:style>
-        <p:txBody>
-          <a:bodyPr rtlCol="0" anchor="ctr"/>
-          <a:lstStyle/>
-          <a:p>
-            <a:r>
-              <a:rPr sz="1200"/>
-              <a:t>root_start</a:t>
-            </a:r>
-          </a:p>
-        </p:txBody>
-      </p:sp>
-      <p:sp>
-        <p:nvSpPr>
-          <p:cNvPr id="5" name="Rectangle 4"/>
-          <p:cNvSpPr/>
-          <p:nvPr/>
-        </p:nvSpPr>
-        <p:spPr>
-          <a:xfrm>
-            <a:off x="6151066" y="2071018"/>
-            <a:ext cx="1200000" cy="500000"/>
-          </a:xfrm>
-          <a:prstGeom prst="rect">
-            <a:avLst/>
-          </a:prstGeom>
-        </p:spPr>
-        <p:style>
-          <a:lnRef idx="1">
-            <a:schemeClr val="accent1"/>
-          </a:lnRef>
-          <a:fillRef idx="3">
-            <a:schemeClr val="accent1"/>
-          </a:fillRef>
-          <a:effectRef idx="2">
-            <a:schemeClr val="accent1"/>
-          </a:effectRef>
-          <a:fontRef idx="minor">
-            <a:schemeClr val="lt1"/>
-          </a:fontRef>
-        </p:style>
-        <p:txBody>
-          <a:bodyPr rtlCol="0" anchor="ctr"/>
-          <a:lstStyle/>
-          <a:p>
-            <a:r>
-              <a:rPr sz="1200"/>
-              <a:t>待機中</a:t>
-            </a:r>
-          </a:p>
-        </p:txBody>
-      </p:sp>
-      <p:sp>
-        <p:nvSpPr>
-          <p:cNvPr id="6" name="Rectangle 5"/>
-          <p:cNvSpPr/>
-          <p:nvPr/>
-        </p:nvSpPr>
-        <p:spPr>
-          <a:xfrm>
-            <a:off x="3369305" y="2398426"/>
-            <a:ext cx="1200000" cy="500000"/>
-          </a:xfrm>
-          <a:prstGeom prst="rect">
-            <a:avLst/>
-          </a:prstGeom>
-        </p:spPr>
-        <p:style>
-          <a:lnRef idx="1">
-            <a:schemeClr val="accent1"/>
-          </a:lnRef>
-          <a:fillRef idx="3">
-            <a:schemeClr val="accent1"/>
-          </a:fillRef>
-          <a:effectRef idx="2">
-            <a:schemeClr val="accent1"/>
-          </a:effectRef>
-          <a:fontRef idx="minor">
-            <a:schemeClr val="lt1"/>
-          </a:fontRef>
-        </p:style>
-        <p:txBody>
-          <a:bodyPr rtlCol="0" anchor="ctr"/>
-          <a:lstStyle/>
-          <a:p>
-            <a:r>
-              <a:rPr sz="1200"/>
-              <a:t>処理中</a:t>
-            </a:r>
-          </a:p>
-        </p:txBody>
-      </p:sp>
-      <p:sp>
-        <p:nvSpPr>
-          <p:cNvPr id="7" name="Rectangle 6"/>
-          <p:cNvSpPr/>
-          <p:nvPr/>
-        </p:nvSpPr>
-        <p:spPr>
-          <a:xfrm>
-            <a:off x="457200" y="3350921"/>
-            <a:ext cx="1200000" cy="500000"/>
-          </a:xfrm>
-          <a:prstGeom prst="rect">
-            <a:avLst/>
-          </a:prstGeom>
-        </p:spPr>
-        <p:style>
-          <a:lnRef idx="1">
-            <a:schemeClr val="accent1"/>
-          </a:lnRef>
-          <a:fillRef idx="3">
-            <a:schemeClr val="accent1"/>
-          </a:fillRef>
-          <a:effectRef idx="2">
-            <a:schemeClr val="accent1"/>
-          </a:effectRef>
-          <a:fontRef idx="minor">
-            <a:schemeClr val="lt1"/>
-          </a:fontRef>
-        </p:style>
-        <p:txBody>
-          <a:bodyPr rtlCol="0" anchor="ctr"/>
-          <a:lstStyle/>
-          <a:p>
-            <a:r>
-              <a:rPr sz="1200"/>
-              <a:t>完了</a:t>
-            </a:r>
-          </a:p>
-        </p:txBody>
-      </p:sp>
-      <p:sp>
-        <p:nvSpPr>
-          <p:cNvPr id="8" name="Rectangle 7"/>
-          <p:cNvSpPr/>
-          <p:nvPr/>
-        </p:nvSpPr>
-        <p:spPr>
-          <a:xfrm>
-            <a:off x="7128870" y="3846909"/>
-            <a:ext cx="1200000" cy="500000"/>
-          </a:xfrm>
-          <a:prstGeom prst="rect">
-            <a:avLst/>
-          </a:prstGeom>
-        </p:spPr>
-        <p:style>
-          <a:lnRef idx="1">
-            <a:schemeClr val="accent1"/>
-          </a:lnRef>
-          <a:fillRef idx="3">
-            <a:schemeClr val="accent1"/>
-          </a:fillRef>
-          <a:effectRef idx="2">
-            <a:schemeClr val="accent1"/>
-          </a:effectRef>
-          <a:fontRef idx="minor">
-            <a:schemeClr val="lt1"/>
-          </a:fontRef>
-        </p:style>
-        <p:txBody>
-          <a:bodyPr rtlCol="0" anchor="ctr"/>
-          <a:lstStyle/>
-          <a:p>
-            <a:r>
-              <a:rPr sz="1200"/>
-              <a:t>エラー</a:t>
-            </a:r>
-          </a:p>
-        </p:txBody>
-      </p:sp>
-      <p:sp>
-        <p:nvSpPr>
-          <p:cNvPr id="9" name="Rectangle 8"/>
-          <p:cNvSpPr/>
-          <p:nvPr/>
-        </p:nvSpPr>
-        <p:spPr>
-          <a:xfrm>
-            <a:off x="1175518" y="5113280"/>
-            <a:ext cx="1200000" cy="500000"/>
-          </a:xfrm>
-          <a:prstGeom prst="rect">
-            <a:avLst/>
-          </a:prstGeom>
-        </p:spPr>
-        <p:style>
-          <a:lnRef idx="1">
-            <a:schemeClr val="accent1"/>
-          </a:lnRef>
-          <a:fillRef idx="3">
-            <a:schemeClr val="accent1"/>
-          </a:fillRef>
-          <a:effectRef idx="2">
-            <a:schemeClr val="accent1"/>
-          </a:effectRef>
-          <a:fontRef idx="minor">
-            <a:schemeClr val="lt1"/>
-          </a:fontRef>
-        </p:style>
-        <p:txBody>
-          <a:bodyPr rtlCol="0" anchor="ctr"/>
-          <a:lstStyle/>
-          <a:p>
-            <a:r>
-              <a:rPr sz="1200"/>
-              <a:t>root_end</a:t>
-            </a:r>
-          </a:p>
-        </p:txBody>
-      </p:sp>
-      <p:cxnSp>
-        <p:nvCxnSpPr>
-          <p:cNvPr id="10" name="Connector 9"/>
-          <p:cNvCxnSpPr>
-            <a:stCxn id="4" idx="0"/>
-            <a:endCxn id="5" idx="2"/>
-          </p:cNvCxnSpPr>
-          <p:nvPr/>
-        </p:nvCxnSpPr>
-        <p:spPr>
-          <a:xfrm flipV="1">
-            <a:off x="6150039" y="2571018"/>
-            <a:ext cx="601027" cy="2327514"/>
-          </a:xfrm>
-          <a:prstGeom prst="line">
-            <a:avLst/>
-          </a:prstGeom>
-        </p:spPr>
-        <p:style>
-          <a:lnRef idx="2">
-            <a:schemeClr val="accent1"/>
-          </a:lnRef>
-          <a:fillRef idx="0">
-            <a:schemeClr val="accent1"/>
-          </a:fillRef>
-          <a:effectRef idx="1">
-            <a:schemeClr val="accent1"/>
-          </a:effectRef>
-          <a:fontRef idx="minor">
-            <a:schemeClr val="tx1"/>
-          </a:fontRef>
-        </p:style>
-      </p:cxnSp>
-      <p:cxnSp>
-        <p:nvCxnSpPr>
-          <p:cNvPr id="11" name="Connector 10"/>
-          <p:cNvCxnSpPr>
-            <a:stCxn id="5" idx="3"/>
-            <a:endCxn id="6" idx="1"/>
-          </p:cNvCxnSpPr>
-          <p:nvPr/>
-        </p:nvCxnSpPr>
-        <p:spPr>
-          <a:xfrm flipH="1">
-            <a:off x="3369305" y="2321018"/>
-            <a:ext cx="3981761" cy="327408"/>
-          </a:xfrm>
-          <a:prstGeom prst="line">
-            <a:avLst/>
-          </a:prstGeom>
-        </p:spPr>
-        <p:style>
-          <a:lnRef idx="2">
-            <a:schemeClr val="accent1"/>
-          </a:lnRef>
-          <a:fillRef idx="0">
-            <a:schemeClr val="accent1"/>
-          </a:fillRef>
-          <a:effectRef idx="1">
-            <a:schemeClr val="accent1"/>
-          </a:effectRef>
-          <a:fontRef idx="minor">
-            <a:schemeClr val="tx1"/>
-          </a:fontRef>
-        </p:style>
-      </p:cxnSp>
-      <p:cxnSp>
-        <p:nvCxnSpPr>
-          <p:cNvPr id="12" name="Connector 11"/>
-          <p:cNvCxnSpPr>
-            <a:stCxn id="6" idx="3"/>
-            <a:endCxn id="7" idx="1"/>
-          </p:cNvCxnSpPr>
-          <p:nvPr/>
-        </p:nvCxnSpPr>
-        <p:spPr>
-          <a:xfrm flipH="1">
-            <a:off x="457200" y="2648426"/>
-            <a:ext cx="4112105" cy="952495"/>
-          </a:xfrm>
-          <a:prstGeom prst="line">
-            <a:avLst/>
-          </a:prstGeom>
-        </p:spPr>
-        <p:style>
-          <a:lnRef idx="2">
-            <a:schemeClr val="accent1"/>
-          </a:lnRef>
-          <a:fillRef idx="0">
-            <a:schemeClr val="accent1"/>
-          </a:fillRef>
-          <a:effectRef idx="1">
-            <a:schemeClr val="accent1"/>
-          </a:effectRef>
-          <a:fontRef idx="minor">
-            <a:schemeClr val="tx1"/>
-          </a:fontRef>
-        </p:style>
-      </p:cxnSp>
-      <p:cxnSp>
-        <p:nvCxnSpPr>
-          <p:cNvPr id="13" name="Connector 12"/>
-          <p:cNvCxnSpPr>
-            <a:stCxn id="6" idx="1"/>
-            <a:endCxn id="8" idx="3"/>
-          </p:cNvCxnSpPr>
-          <p:nvPr/>
-        </p:nvCxnSpPr>
-        <p:spPr>
-          <a:xfrm>
-            <a:off x="3369305" y="2648426"/>
-            <a:ext cx="4959565" cy="1448483"/>
-          </a:xfrm>
-          <a:prstGeom prst="line">
-            <a:avLst/>
-          </a:prstGeom>
-        </p:spPr>
-        <p:style>
-          <a:lnRef idx="2">
-            <a:schemeClr val="accent1"/>
-          </a:lnRef>
-          <a:fillRef idx="0">
-            <a:schemeClr val="accent1"/>
-          </a:fillRef>
-          <a:effectRef idx="1">
-            <a:schemeClr val="accent1"/>
-          </a:effectRef>
-          <a:fontRef idx="minor">
-            <a:schemeClr val="tx1"/>
-          </a:fontRef>
-        </p:style>
-      </p:cxnSp>
-      <p:cxnSp>
-        <p:nvCxnSpPr>
-          <p:cNvPr id="14" name="Connector 13"/>
-          <p:cNvCxnSpPr>
-            <a:stCxn id="8" idx="0"/>
-            <a:endCxn id="5" idx="2"/>
-          </p:cNvCxnSpPr>
-          <p:nvPr/>
-        </p:nvCxnSpPr>
-        <p:spPr>
-          <a:xfrm flipH="1" flipV="1">
-            <a:off x="6751066" y="2571018"/>
-            <a:ext cx="977804" cy="1275891"/>
-          </a:xfrm>
-          <a:prstGeom prst="line">
-            <a:avLst/>
-          </a:prstGeom>
-        </p:spPr>
-        <p:style>
-          <a:lnRef idx="2">
-            <a:schemeClr val="accent1"/>
-          </a:lnRef>
-          <a:fillRef idx="0">
-            <a:schemeClr val="accent1"/>
-          </a:fillRef>
-          <a:effectRef idx="1">
-            <a:schemeClr val="accent1"/>
-          </a:effectRef>
-          <a:fontRef idx="minor">
-            <a:schemeClr val="tx1"/>
-          </a:fontRef>
-        </p:style>
-      </p:cxnSp>
-      <p:cxnSp>
-        <p:nvCxnSpPr>
-          <p:cNvPr id="15" name="Connector 14"/>
-          <p:cNvCxnSpPr>
-            <a:stCxn id="7" idx="2"/>
-            <a:endCxn id="9" idx="0"/>
-          </p:cNvCxnSpPr>
-          <p:nvPr/>
-        </p:nvCxnSpPr>
-        <p:spPr>
-          <a:xfrm>
-            <a:off x="1057200" y="3850921"/>
-            <a:ext cx="718318" cy="1262359"/>
-          </a:xfrm>
-          <a:prstGeom prst="line">
-            <a:avLst/>
-          </a:prstGeom>
-        </p:spPr>
-        <p:style>
-          <a:lnRef idx="2">
-            <a:schemeClr val="accent1"/>
-          </a:lnRef>
-          <a:fillRef idx="0">
-            <a:schemeClr val="accent1"/>
-          </a:fillRef>
-          <a:effectRef idx="1">
-            <a:schemeClr val="accent1"/>
-          </a:effectRef>
-          <a:fontRef idx="minor">
-            <a:schemeClr val="tx1"/>
-          </a:fontRef>
-        </p:style>
-      </p:cxnSp>
-    </p:spTree>
-  </p:cSld>
-  <p:clrMapOvr>
-    <a:masterClrMapping/>
-  </p:clrMapOvr>
-</p:sld>
-</file>
-
 <file path=ppt/slides/slide2.xml><?xml version="1.0" encoding="utf-8"?>
 <p:sld xmlns:a="http://schemas.openxmlformats.org/drawingml/2006/main" xmlns:p="http://schemas.openxmlformats.org/presentationml/2006/main" xmlns:r="http://schemas.openxmlformats.org/officeDocument/2006/relationships">
   <p:cSld>
@@ -9513,7 +11179,7 @@
           <a:lstStyle/>
           <a:p>
             <a:r>
-              <a:t>6. ER図（Entity Relationship Diagram）</a:t>
+              <a:t>5. 状態図（State Diagram）</a:t>
             </a:r>
           </a:p>
         </p:txBody>
@@ -9543,7 +11209,7 @@
         </p:nvSpPr>
         <p:spPr>
           <a:xfrm>
-            <a:off x="6425688" y="5513155"/>
+            <a:off x="5550039" y="4898532"/>
             <a:ext cx="1200000" cy="500000"/>
           </a:xfrm>
           <a:prstGeom prst="rect">
@@ -9570,7 +11236,7 @@
           <a:p>
             <a:r>
               <a:rPr sz="1200"/>
-              <a:t>CUSTOMER</a:t>
+              <a:t>root_start</a:t>
             </a:r>
           </a:p>
         </p:txBody>
@@ -9583,7 +11249,7 @@
         </p:nvSpPr>
         <p:spPr>
           <a:xfrm>
-            <a:off x="6500578" y="2848046"/>
+            <a:off x="6151066" y="2071018"/>
             <a:ext cx="1200000" cy="500000"/>
           </a:xfrm>
           <a:prstGeom prst="rect">
@@ -9610,7 +11276,7 @@
           <a:p>
             <a:r>
               <a:rPr sz="1200"/>
-              <a:t>ORDER</a:t>
+              <a:t>待機中</a:t>
             </a:r>
           </a:p>
         </p:txBody>
@@ -9623,7 +11289,7 @@
         </p:nvSpPr>
         <p:spPr>
           <a:xfrm>
-            <a:off x="2504533" y="1957962"/>
+            <a:off x="3369305" y="2398426"/>
             <a:ext cx="1200000" cy="500000"/>
           </a:xfrm>
           <a:prstGeom prst="rect">
@@ -9650,7 +11316,7 @@
           <a:p>
             <a:r>
               <a:rPr sz="1200"/>
-              <a:t>LINE-ITEM</a:t>
+              <a:t>処理中</a:t>
             </a:r>
           </a:p>
         </p:txBody>
@@ -9663,7 +11329,7 @@
         </p:nvSpPr>
         <p:spPr>
           <a:xfrm>
-            <a:off x="457200" y="4133562"/>
+            <a:off x="457200" y="3350921"/>
             <a:ext cx="1200000" cy="500000"/>
           </a:xfrm>
           <a:prstGeom prst="rect">
@@ -9690,14 +11356,94 @@
           <a:p>
             <a:r>
               <a:rPr sz="1200"/>
-              <a:t>PRODUCT</a:t>
+              <a:t>完了</a:t>
+            </a:r>
+          </a:p>
+        </p:txBody>
+      </p:sp>
+      <p:sp>
+        <p:nvSpPr>
+          <p:cNvPr id="8" name="Rectangle 7"/>
+          <p:cNvSpPr/>
+          <p:nvPr/>
+        </p:nvSpPr>
+        <p:spPr>
+          <a:xfrm>
+            <a:off x="7128870" y="3846909"/>
+            <a:ext cx="1200000" cy="500000"/>
+          </a:xfrm>
+          <a:prstGeom prst="rect">
+            <a:avLst/>
+          </a:prstGeom>
+        </p:spPr>
+        <p:style>
+          <a:lnRef idx="1">
+            <a:schemeClr val="accent1"/>
+          </a:lnRef>
+          <a:fillRef idx="3">
+            <a:schemeClr val="accent1"/>
+          </a:fillRef>
+          <a:effectRef idx="2">
+            <a:schemeClr val="accent1"/>
+          </a:effectRef>
+          <a:fontRef idx="minor">
+            <a:schemeClr val="lt1"/>
+          </a:fontRef>
+        </p:style>
+        <p:txBody>
+          <a:bodyPr rtlCol="0" anchor="ctr"/>
+          <a:lstStyle/>
+          <a:p>
+            <a:r>
+              <a:rPr sz="1200"/>
+              <a:t>エラー</a:t>
+            </a:r>
+          </a:p>
+        </p:txBody>
+      </p:sp>
+      <p:sp>
+        <p:nvSpPr>
+          <p:cNvPr id="9" name="Rectangle 8"/>
+          <p:cNvSpPr/>
+          <p:nvPr/>
+        </p:nvSpPr>
+        <p:spPr>
+          <a:xfrm>
+            <a:off x="1175518" y="5113280"/>
+            <a:ext cx="1200000" cy="500000"/>
+          </a:xfrm>
+          <a:prstGeom prst="rect">
+            <a:avLst/>
+          </a:prstGeom>
+        </p:spPr>
+        <p:style>
+          <a:lnRef idx="1">
+            <a:schemeClr val="accent1"/>
+          </a:lnRef>
+          <a:fillRef idx="3">
+            <a:schemeClr val="accent1"/>
+          </a:fillRef>
+          <a:effectRef idx="2">
+            <a:schemeClr val="accent1"/>
+          </a:effectRef>
+          <a:fontRef idx="minor">
+            <a:schemeClr val="lt1"/>
+          </a:fontRef>
+        </p:style>
+        <p:txBody>
+          <a:bodyPr rtlCol="0" anchor="ctr"/>
+          <a:lstStyle/>
+          <a:p>
+            <a:r>
+              <a:rPr sz="1200"/>
+              <a:t>root_end</a:t>
             </a:r>
           </a:p>
         </p:txBody>
       </p:sp>
       <p:cxnSp>
         <p:nvCxnSpPr>
-          <p:cNvPr id="8" name="Connector 7"/>
+          <p:cNvPr id="10" name="Connector 9"/>
           <p:cNvCxnSpPr>
             <a:stCxn id="4" idx="0"/>
             <a:endCxn id="5" idx="2"/>
@@ -9706,8 +11452,8 @@
         </p:nvCxnSpPr>
         <p:spPr>
           <a:xfrm flipV="1">
-            <a:off x="7025688" y="3348046"/>
-            <a:ext cx="74890" cy="2165109"/>
+            <a:off x="6150039" y="2571018"/>
+            <a:ext cx="601027" cy="2327514"/>
           </a:xfrm>
           <a:prstGeom prst="line">
             <a:avLst/>
@@ -9730,7 +11476,7 @@
       </p:cxnSp>
       <p:cxnSp>
         <p:nvCxnSpPr>
-          <p:cNvPr id="9" name="Connector 8"/>
+          <p:cNvPr id="11" name="Connector 10"/>
           <p:cNvCxnSpPr>
             <a:stCxn id="5" idx="3"/>
             <a:endCxn id="6" idx="1"/>
@@ -9738,9 +11484,9 @@
           <p:nvPr/>
         </p:nvCxnSpPr>
         <p:spPr>
-          <a:xfrm flipH="1" flipV="1">
-            <a:off x="2504533" y="2207962"/>
-            <a:ext cx="5196045" cy="890084"/>
+          <a:xfrm flipH="1">
+            <a:off x="3369305" y="2321018"/>
+            <a:ext cx="3981761" cy="327408"/>
           </a:xfrm>
           <a:prstGeom prst="line">
             <a:avLst/>
@@ -9763,17 +11509,116 @@
       </p:cxnSp>
       <p:cxnSp>
         <p:nvCxnSpPr>
-          <p:cNvPr id="10" name="Connector 9"/>
+          <p:cNvPr id="12" name="Connector 11"/>
           <p:cNvCxnSpPr>
-            <a:stCxn id="7" idx="0"/>
-            <a:endCxn id="6" idx="2"/>
+            <a:stCxn id="6" idx="3"/>
+            <a:endCxn id="7" idx="1"/>
           </p:cNvCxnSpPr>
           <p:nvPr/>
         </p:nvCxnSpPr>
         <p:spPr>
-          <a:xfrm flipV="1">
-            <a:off x="1057200" y="2457962"/>
-            <a:ext cx="2047333" cy="1675600"/>
+          <a:xfrm flipH="1">
+            <a:off x="457200" y="2648426"/>
+            <a:ext cx="4112105" cy="952495"/>
+          </a:xfrm>
+          <a:prstGeom prst="line">
+            <a:avLst/>
+          </a:prstGeom>
+        </p:spPr>
+        <p:style>
+          <a:lnRef idx="2">
+            <a:schemeClr val="accent1"/>
+          </a:lnRef>
+          <a:fillRef idx="0">
+            <a:schemeClr val="accent1"/>
+          </a:fillRef>
+          <a:effectRef idx="1">
+            <a:schemeClr val="accent1"/>
+          </a:effectRef>
+          <a:fontRef idx="minor">
+            <a:schemeClr val="tx1"/>
+          </a:fontRef>
+        </p:style>
+      </p:cxnSp>
+      <p:cxnSp>
+        <p:nvCxnSpPr>
+          <p:cNvPr id="13" name="Connector 12"/>
+          <p:cNvCxnSpPr>
+            <a:stCxn id="6" idx="1"/>
+            <a:endCxn id="8" idx="3"/>
+          </p:cNvCxnSpPr>
+          <p:nvPr/>
+        </p:nvCxnSpPr>
+        <p:spPr>
+          <a:xfrm>
+            <a:off x="3369305" y="2648426"/>
+            <a:ext cx="4959565" cy="1448483"/>
+          </a:xfrm>
+          <a:prstGeom prst="line">
+            <a:avLst/>
+          </a:prstGeom>
+        </p:spPr>
+        <p:style>
+          <a:lnRef idx="2">
+            <a:schemeClr val="accent1"/>
+          </a:lnRef>
+          <a:fillRef idx="0">
+            <a:schemeClr val="accent1"/>
+          </a:fillRef>
+          <a:effectRef idx="1">
+            <a:schemeClr val="accent1"/>
+          </a:effectRef>
+          <a:fontRef idx="minor">
+            <a:schemeClr val="tx1"/>
+          </a:fontRef>
+        </p:style>
+      </p:cxnSp>
+      <p:cxnSp>
+        <p:nvCxnSpPr>
+          <p:cNvPr id="14" name="Connector 13"/>
+          <p:cNvCxnSpPr>
+            <a:stCxn id="8" idx="0"/>
+            <a:endCxn id="5" idx="2"/>
+          </p:cNvCxnSpPr>
+          <p:nvPr/>
+        </p:nvCxnSpPr>
+        <p:spPr>
+          <a:xfrm flipH="1" flipV="1">
+            <a:off x="6751066" y="2571018"/>
+            <a:ext cx="977804" cy="1275891"/>
+          </a:xfrm>
+          <a:prstGeom prst="line">
+            <a:avLst/>
+          </a:prstGeom>
+        </p:spPr>
+        <p:style>
+          <a:lnRef idx="2">
+            <a:schemeClr val="accent1"/>
+          </a:lnRef>
+          <a:fillRef idx="0">
+            <a:schemeClr val="accent1"/>
+          </a:fillRef>
+          <a:effectRef idx="1">
+            <a:schemeClr val="accent1"/>
+          </a:effectRef>
+          <a:fontRef idx="minor">
+            <a:schemeClr val="tx1"/>
+          </a:fontRef>
+        </p:style>
+      </p:cxnSp>
+      <p:cxnSp>
+        <p:nvCxnSpPr>
+          <p:cNvPr id="15" name="Connector 14"/>
+          <p:cNvCxnSpPr>
+            <a:stCxn id="7" idx="2"/>
+            <a:endCxn id="9" idx="0"/>
+          </p:cNvCxnSpPr>
+          <p:nvPr/>
+        </p:nvCxnSpPr>
+        <p:spPr>
+          <a:xfrm>
+            <a:off x="1057200" y="3850921"/>
+            <a:ext cx="718318" cy="1262359"/>
           </a:xfrm>
           <a:prstGeom prst="line">
             <a:avLst/>
@@ -9828,7 +11673,7 @@
           <a:lstStyle/>
           <a:p>
             <a:r>
-              <a:t>7. ユーザージャーニー図（User Journey）</a:t>
+              <a:t>6. ER図（Entity Relationship Diagram）</a:t>
             </a:r>
           </a:p>
         </p:txBody>
@@ -9852,44 +11697,263 @@
       </p:sp>
       <p:sp>
         <p:nvSpPr>
-          <p:cNvPr id="4" name="TextBox 3"/>
-          <p:cNvSpPr txBox="1"/>
-          <p:nvPr/>
-        </p:nvSpPr>
-        <p:spPr>
-          <a:xfrm>
-            <a:off x="457200" y="1600200"/>
-            <a:ext cx="8229600" cy="4525963"/>
+          <p:cNvPr id="4" name="Rectangle 3"/>
+          <p:cNvSpPr/>
+          <p:nvPr/>
+        </p:nvSpPr>
+        <p:spPr>
+          <a:xfrm>
+            <a:off x="6425688" y="5513155"/>
+            <a:ext cx="1200000" cy="500000"/>
           </a:xfrm>
           <a:prstGeom prst="rect">
             <a:avLst/>
           </a:prstGeom>
-          <a:noFill/>
-        </p:spPr>
-        <p:txBody>
-          <a:bodyPr wrap="square">
-            <a:spAutoFit/>
-          </a:bodyPr>
-          <a:lstStyle/>
-          <a:p>
-            <a:r>
-              <a:rPr sz="1000">
-                <a:latin typeface="Courier New"/>
-              </a:rPr>
-              <a:t>journey
-    title オンラインショッピング体験
-    section 商品探し
-        サイト訪問    : 5: ユーザー
-        検索実行      : 3: ユーザー
-        商品選択      : 4: ユーザー
-    section 購入
-        カートに追加  : 5: ユーザー
-        決済手続き    : 2: ユーザー
-        注文完了      : 5: ユーザー</a:t>
-            </a:r>
-          </a:p>
-        </p:txBody>
-      </p:sp>
+        </p:spPr>
+        <p:style>
+          <a:lnRef idx="1">
+            <a:schemeClr val="accent1"/>
+          </a:lnRef>
+          <a:fillRef idx="3">
+            <a:schemeClr val="accent1"/>
+          </a:fillRef>
+          <a:effectRef idx="2">
+            <a:schemeClr val="accent1"/>
+          </a:effectRef>
+          <a:fontRef idx="minor">
+            <a:schemeClr val="lt1"/>
+          </a:fontRef>
+        </p:style>
+        <p:txBody>
+          <a:bodyPr rtlCol="0" anchor="ctr"/>
+          <a:lstStyle/>
+          <a:p>
+            <a:r>
+              <a:rPr sz="1200"/>
+              <a:t>CUSTOMER</a:t>
+            </a:r>
+          </a:p>
+        </p:txBody>
+      </p:sp>
+      <p:sp>
+        <p:nvSpPr>
+          <p:cNvPr id="5" name="Rectangle 4"/>
+          <p:cNvSpPr/>
+          <p:nvPr/>
+        </p:nvSpPr>
+        <p:spPr>
+          <a:xfrm>
+            <a:off x="6500578" y="2848046"/>
+            <a:ext cx="1200000" cy="500000"/>
+          </a:xfrm>
+          <a:prstGeom prst="rect">
+            <a:avLst/>
+          </a:prstGeom>
+        </p:spPr>
+        <p:style>
+          <a:lnRef idx="1">
+            <a:schemeClr val="accent1"/>
+          </a:lnRef>
+          <a:fillRef idx="3">
+            <a:schemeClr val="accent1"/>
+          </a:fillRef>
+          <a:effectRef idx="2">
+            <a:schemeClr val="accent1"/>
+          </a:effectRef>
+          <a:fontRef idx="minor">
+            <a:schemeClr val="lt1"/>
+          </a:fontRef>
+        </p:style>
+        <p:txBody>
+          <a:bodyPr rtlCol="0" anchor="ctr"/>
+          <a:lstStyle/>
+          <a:p>
+            <a:r>
+              <a:rPr sz="1200"/>
+              <a:t>ORDER</a:t>
+            </a:r>
+          </a:p>
+        </p:txBody>
+      </p:sp>
+      <p:sp>
+        <p:nvSpPr>
+          <p:cNvPr id="6" name="Rectangle 5"/>
+          <p:cNvSpPr/>
+          <p:nvPr/>
+        </p:nvSpPr>
+        <p:spPr>
+          <a:xfrm>
+            <a:off x="2504533" y="1957962"/>
+            <a:ext cx="1200000" cy="500000"/>
+          </a:xfrm>
+          <a:prstGeom prst="rect">
+            <a:avLst/>
+          </a:prstGeom>
+        </p:spPr>
+        <p:style>
+          <a:lnRef idx="1">
+            <a:schemeClr val="accent1"/>
+          </a:lnRef>
+          <a:fillRef idx="3">
+            <a:schemeClr val="accent1"/>
+          </a:fillRef>
+          <a:effectRef idx="2">
+            <a:schemeClr val="accent1"/>
+          </a:effectRef>
+          <a:fontRef idx="minor">
+            <a:schemeClr val="lt1"/>
+          </a:fontRef>
+        </p:style>
+        <p:txBody>
+          <a:bodyPr rtlCol="0" anchor="ctr"/>
+          <a:lstStyle/>
+          <a:p>
+            <a:r>
+              <a:rPr sz="1200"/>
+              <a:t>LINE-ITEM</a:t>
+            </a:r>
+          </a:p>
+        </p:txBody>
+      </p:sp>
+      <p:sp>
+        <p:nvSpPr>
+          <p:cNvPr id="7" name="Rectangle 6"/>
+          <p:cNvSpPr/>
+          <p:nvPr/>
+        </p:nvSpPr>
+        <p:spPr>
+          <a:xfrm>
+            <a:off x="457200" y="4133562"/>
+            <a:ext cx="1200000" cy="500000"/>
+          </a:xfrm>
+          <a:prstGeom prst="rect">
+            <a:avLst/>
+          </a:prstGeom>
+        </p:spPr>
+        <p:style>
+          <a:lnRef idx="1">
+            <a:schemeClr val="accent1"/>
+          </a:lnRef>
+          <a:fillRef idx="3">
+            <a:schemeClr val="accent1"/>
+          </a:fillRef>
+          <a:effectRef idx="2">
+            <a:schemeClr val="accent1"/>
+          </a:effectRef>
+          <a:fontRef idx="minor">
+            <a:schemeClr val="lt1"/>
+          </a:fontRef>
+        </p:style>
+        <p:txBody>
+          <a:bodyPr rtlCol="0" anchor="ctr"/>
+          <a:lstStyle/>
+          <a:p>
+            <a:r>
+              <a:rPr sz="1200"/>
+              <a:t>PRODUCT</a:t>
+            </a:r>
+          </a:p>
+        </p:txBody>
+      </p:sp>
+      <p:cxnSp>
+        <p:nvCxnSpPr>
+          <p:cNvPr id="8" name="Connector 7"/>
+          <p:cNvCxnSpPr>
+            <a:stCxn id="4" idx="0"/>
+            <a:endCxn id="5" idx="2"/>
+          </p:cNvCxnSpPr>
+          <p:nvPr/>
+        </p:nvCxnSpPr>
+        <p:spPr>
+          <a:xfrm flipV="1">
+            <a:off x="7025688" y="3348046"/>
+            <a:ext cx="74890" cy="2165109"/>
+          </a:xfrm>
+          <a:prstGeom prst="line">
+            <a:avLst/>
+          </a:prstGeom>
+        </p:spPr>
+        <p:style>
+          <a:lnRef idx="2">
+            <a:schemeClr val="accent1"/>
+          </a:lnRef>
+          <a:fillRef idx="0">
+            <a:schemeClr val="accent1"/>
+          </a:fillRef>
+          <a:effectRef idx="1">
+            <a:schemeClr val="accent1"/>
+          </a:effectRef>
+          <a:fontRef idx="minor">
+            <a:schemeClr val="tx1"/>
+          </a:fontRef>
+        </p:style>
+      </p:cxnSp>
+      <p:cxnSp>
+        <p:nvCxnSpPr>
+          <p:cNvPr id="9" name="Connector 8"/>
+          <p:cNvCxnSpPr>
+            <a:stCxn id="5" idx="3"/>
+            <a:endCxn id="6" idx="1"/>
+          </p:cNvCxnSpPr>
+          <p:nvPr/>
+        </p:nvCxnSpPr>
+        <p:spPr>
+          <a:xfrm flipH="1" flipV="1">
+            <a:off x="2504533" y="2207962"/>
+            <a:ext cx="5196045" cy="890084"/>
+          </a:xfrm>
+          <a:prstGeom prst="line">
+            <a:avLst/>
+          </a:prstGeom>
+        </p:spPr>
+        <p:style>
+          <a:lnRef idx="2">
+            <a:schemeClr val="accent1"/>
+          </a:lnRef>
+          <a:fillRef idx="0">
+            <a:schemeClr val="accent1"/>
+          </a:fillRef>
+          <a:effectRef idx="1">
+            <a:schemeClr val="accent1"/>
+          </a:effectRef>
+          <a:fontRef idx="minor">
+            <a:schemeClr val="tx1"/>
+          </a:fontRef>
+        </p:style>
+      </p:cxnSp>
+      <p:cxnSp>
+        <p:nvCxnSpPr>
+          <p:cNvPr id="10" name="Connector 9"/>
+          <p:cNvCxnSpPr>
+            <a:stCxn id="7" idx="0"/>
+            <a:endCxn id="6" idx="2"/>
+          </p:cNvCxnSpPr>
+          <p:nvPr/>
+        </p:nvCxnSpPr>
+        <p:spPr>
+          <a:xfrm flipV="1">
+            <a:off x="1057200" y="2457962"/>
+            <a:ext cx="2047333" cy="1675600"/>
+          </a:xfrm>
+          <a:prstGeom prst="line">
+            <a:avLst/>
+          </a:prstGeom>
+        </p:spPr>
+        <p:style>
+          <a:lnRef idx="2">
+            <a:schemeClr val="accent1"/>
+          </a:lnRef>
+          <a:fillRef idx="0">
+            <a:schemeClr val="accent1"/>
+          </a:fillRef>
+          <a:effectRef idx="1">
+            <a:schemeClr val="accent1"/>
+          </a:effectRef>
+          <a:fontRef idx="minor">
+            <a:schemeClr val="tx1"/>
+          </a:fontRef>
+        </p:style>
+      </p:cxnSp>
     </p:spTree>
   </p:cSld>
   <p:clrMapOvr>
@@ -9924,7 +11988,7 @@
           <a:lstStyle/>
           <a:p>
             <a:r>
-              <a:t>8. 円グラフ（Pie Chart）</a:t>
+              <a:t>7. ユーザージャーニー図（User Journey）</a:t>
             </a:r>
           </a:p>
         </p:txBody>
@@ -9972,12 +12036,16 @@
               <a:rPr sz="1000">
                 <a:latin typeface="Courier New"/>
               </a:rPr>
-              <a:t>pie title 言語別コード比率
-    "Python" : 42
-    "TypeScript" : 28
-    "Rust" : 15
-    "Go" : 10
-    "その他" : 5</a:t>
+              <a:t>journey
+    title オンラインショッピング体験
+    section 商品探し
+        サイト訪問    : 5: ユーザー
+        検索実行      : 3: ユーザー
+        商品選択      : 4: ユーザー
+    section 購入
+        カートに追加  : 5: ユーザー
+        決済手続き    : 2: ユーザー
+        注文完了      : 5: ユーザー</a:t>
             </a:r>
           </a:p>
         </p:txBody>
@@ -10016,7 +12084,7 @@
           <a:lstStyle/>
           <a:p>
             <a:r>
-              <a:t>9. 象限チャート（Quadrant Chart）</a:t>
+              <a:t>8. 円グラフ（Pie Chart）</a:t>
             </a:r>
           </a:p>
         </p:txBody>
@@ -10064,18 +12132,12 @@
               <a:rPr sz="1000">
                 <a:latin typeface="Courier New"/>
               </a:rPr>
-              <a:t>quadrantChart
-    title 製品ポートフォリオ分析
-    x-axis 低成長 --&gt; 高成長
-    y-axis 低シェア --&gt; 高シェア
-    quadrant-1 スター
-    quadrant-2 問題児
-    quadrant-3 負け犬
-    quadrant-4 金のなる木
-    製品A: [0.7, 0.8]
-    製品B: [0.3, 0.7]
-    製品C: [0.2, 0.3]
-    製品D: [0.8, 0.3]</a:t>
+              <a:t>pie title 言語別コード比率
+    "Python" : 42
+    "TypeScript" : 28
+    "Rust" : 15
+    "Go" : 10
+    "その他" : 5</a:t>
             </a:r>
           </a:p>
         </p:txBody>
@@ -10114,7 +12176,7 @@
           <a:lstStyle/>
           <a:p>
             <a:r>
-              <a:t>10. 要件図（Requirement Diagram）</a:t>
+              <a:t>9. 象限チャート（Quadrant Chart）</a:t>
             </a:r>
           </a:p>
         </p:txBody>
@@ -10162,20 +12224,18 @@
               <a:rPr sz="1000">
                 <a:latin typeface="Courier New"/>
               </a:rPr>
-              <a:t>requirementDiagram
-    requirement test_req {
-        id: 1
-        text: システムは99.9%の可用性を持つこと
-        risk: high
-        verifymethod: test
-    }
-    functionalRequirement login_req {
-        id: 2
-        text: ユーザーはログインできること
-        risk: medium
-        verifymethod: inspection
-    }
-    test_req - traces -&gt; login_req</a:t>
+              <a:t>quadrantChart
+    title 製品ポートフォリオ分析
+    x-axis 低成長 --&gt; 高成長
+    y-axis 低シェア --&gt; 高シェア
+    quadrant-1 スター
+    quadrant-2 問題児
+    quadrant-3 負け犬
+    quadrant-4 金のなる木
+    製品A: [0.7, 0.8]
+    製品B: [0.3, 0.7]
+    製品C: [0.2, 0.3]
+    製品D: [0.8, 0.3]</a:t>
             </a:r>
           </a:p>
         </p:txBody>
@@ -10214,7 +12274,7 @@
           <a:lstStyle/>
           <a:p>
             <a:r>
-              <a:t>11. Gitグラフ（Git Graph）</a:t>
+              <a:t>10. 要件図（Requirement Diagram）</a:t>
             </a:r>
           </a:p>
         </p:txBody>
@@ -10262,16 +12322,20 @@
               <a:rPr sz="1000">
                 <a:latin typeface="Courier New"/>
               </a:rPr>
-              <a:t>gitGraph
-    commit id: "initial"
-    commit id: "feat: add login"
-    branch develop
-    checkout develop
-    commit id: "fix: typo"
-    commit id: "feat: add API"
-    checkout main
-    merge develop id: "merge develop"
-    commit id: "release: v1.0"</a:t>
+              <a:t>requirementDiagram
+    requirement test_req {
+        id: 1
+        text: システムは99.9%の可用性を持つこと
+        risk: high
+        verifymethod: test
+    }
+    functionalRequirement login_req {
+        id: 2
+        text: ユーザーはログインできること
+        risk: medium
+        verifymethod: inspection
+    }
+    test_req - traces -&gt; login_req</a:t>
             </a:r>
           </a:p>
         </p:txBody>
@@ -10310,7 +12374,7 @@
           <a:lstStyle/>
           <a:p>
             <a:r>
-              <a:t>12. マインドマップ（Mindmap）</a:t>
+              <a:t>11. Gitグラフ（Git Graph）</a:t>
             </a:r>
           </a:p>
         </p:txBody>
@@ -10334,993 +12398,44 @@
       </p:sp>
       <p:sp>
         <p:nvSpPr>
-          <p:cNvPr id="4" name="Rectangle 3"/>
-          <p:cNvSpPr/>
-          <p:nvPr/>
-        </p:nvSpPr>
-        <p:spPr>
-          <a:xfrm>
-            <a:off x="2800400" y="3424464"/>
-            <a:ext cx="1200000" cy="500000"/>
+          <p:cNvPr id="4" name="TextBox 3"/>
+          <p:cNvSpPr txBox="1"/>
+          <p:nvPr/>
+        </p:nvSpPr>
+        <p:spPr>
+          <a:xfrm>
+            <a:off x="457200" y="1600200"/>
+            <a:ext cx="8229600" cy="4525963"/>
           </a:xfrm>
           <a:prstGeom prst="rect">
             <a:avLst/>
           </a:prstGeom>
-        </p:spPr>
-        <p:style>
-          <a:lnRef idx="1">
-            <a:schemeClr val="accent1"/>
-          </a:lnRef>
-          <a:fillRef idx="3">
-            <a:schemeClr val="accent1"/>
-          </a:fillRef>
-          <a:effectRef idx="2">
-            <a:schemeClr val="accent1"/>
-          </a:effectRef>
-          <a:fontRef idx="minor">
-            <a:schemeClr val="lt1"/>
-          </a:fontRef>
-        </p:style>
-        <p:txBody>
-          <a:bodyPr rtlCol="0" anchor="ctr"/>
-          <a:lstStyle/>
-          <a:p>
-            <a:r>
-              <a:rPr sz="1200"/>
-              <a:t>qmd_to_pptx</a:t>
-            </a:r>
-          </a:p>
-        </p:txBody>
-      </p:sp>
-      <p:sp>
-        <p:nvSpPr>
-          <p:cNvPr id="5" name="Rectangle 4"/>
-          <p:cNvSpPr/>
-          <p:nvPr/>
-        </p:nvSpPr>
-        <p:spPr>
-          <a:xfrm>
-            <a:off x="5143600" y="1851822"/>
-            <a:ext cx="1200000" cy="500000"/>
-          </a:xfrm>
-          <a:prstGeom prst="rect">
-            <a:avLst/>
-          </a:prstGeom>
-        </p:spPr>
-        <p:style>
-          <a:lnRef idx="1">
-            <a:schemeClr val="accent1"/>
-          </a:lnRef>
-          <a:fillRef idx="3">
-            <a:schemeClr val="accent1"/>
-          </a:fillRef>
-          <a:effectRef idx="2">
-            <a:schemeClr val="accent1"/>
-          </a:effectRef>
-          <a:fontRef idx="minor">
-            <a:schemeClr val="lt1"/>
-          </a:fontRef>
-        </p:style>
-        <p:txBody>
-          <a:bodyPr rtlCol="0" anchor="ctr"/>
-          <a:lstStyle/>
-          <a:p>
-            <a:r>
-              <a:rPr sz="1200"/>
-              <a:t>入力形式</a:t>
-            </a:r>
-          </a:p>
-        </p:txBody>
-      </p:sp>
-      <p:sp>
-        <p:nvSpPr>
-          <p:cNvPr id="6" name="Rectangle 5"/>
-          <p:cNvSpPr/>
-          <p:nvPr/>
-        </p:nvSpPr>
-        <p:spPr>
-          <a:xfrm>
-            <a:off x="7486800" y="1600200"/>
-            <a:ext cx="1200000" cy="500000"/>
-          </a:xfrm>
-          <a:prstGeom prst="rect">
-            <a:avLst/>
-          </a:prstGeom>
-        </p:spPr>
-        <p:style>
-          <a:lnRef idx="1">
-            <a:schemeClr val="accent1"/>
-          </a:lnRef>
-          <a:fillRef idx="3">
-            <a:schemeClr val="accent1"/>
-          </a:fillRef>
-          <a:effectRef idx="2">
-            <a:schemeClr val="accent1"/>
-          </a:effectRef>
-          <a:fontRef idx="minor">
-            <a:schemeClr val="lt1"/>
-          </a:fontRef>
-        </p:style>
-        <p:txBody>
-          <a:bodyPr rtlCol="0" anchor="ctr"/>
-          <a:lstStyle/>
-          <a:p>
-            <a:r>
-              <a:rPr sz="1200"/>
-              <a:t>QMD</a:t>
-            </a:r>
-          </a:p>
-        </p:txBody>
-      </p:sp>
-      <p:sp>
-        <p:nvSpPr>
-          <p:cNvPr id="7" name="Rectangle 6"/>
-          <p:cNvSpPr/>
-          <p:nvPr/>
-        </p:nvSpPr>
-        <p:spPr>
-          <a:xfrm>
-            <a:off x="7486800" y="2103445"/>
-            <a:ext cx="1200000" cy="500000"/>
-          </a:xfrm>
-          <a:prstGeom prst="rect">
-            <a:avLst/>
-          </a:prstGeom>
-        </p:spPr>
-        <p:style>
-          <a:lnRef idx="1">
-            <a:schemeClr val="accent1"/>
-          </a:lnRef>
-          <a:fillRef idx="3">
-            <a:schemeClr val="accent1"/>
-          </a:fillRef>
-          <a:effectRef idx="2">
-            <a:schemeClr val="accent1"/>
-          </a:effectRef>
-          <a:fontRef idx="minor">
-            <a:schemeClr val="lt1"/>
-          </a:fontRef>
-        </p:style>
-        <p:txBody>
-          <a:bodyPr rtlCol="0" anchor="ctr"/>
-          <a:lstStyle/>
-          <a:p>
-            <a:r>
-              <a:rPr sz="1200"/>
-              <a:t>Markdown</a:t>
-            </a:r>
-          </a:p>
-        </p:txBody>
-      </p:sp>
-      <p:sp>
-        <p:nvSpPr>
-          <p:cNvPr id="8" name="Rectangle 7"/>
-          <p:cNvSpPr/>
-          <p:nvPr/>
-        </p:nvSpPr>
-        <p:spPr>
-          <a:xfrm>
-            <a:off x="5143600" y="2606690"/>
-            <a:ext cx="1200000" cy="500000"/>
-          </a:xfrm>
-          <a:prstGeom prst="rect">
-            <a:avLst/>
-          </a:prstGeom>
-        </p:spPr>
-        <p:style>
-          <a:lnRef idx="1">
-            <a:schemeClr val="accent1"/>
-          </a:lnRef>
-          <a:fillRef idx="3">
-            <a:schemeClr val="accent1"/>
-          </a:fillRef>
-          <a:effectRef idx="2">
-            <a:schemeClr val="accent1"/>
-          </a:effectRef>
-          <a:fontRef idx="minor">
-            <a:schemeClr val="lt1"/>
-          </a:fontRef>
-        </p:style>
-        <p:txBody>
-          <a:bodyPr rtlCol="0" anchor="ctr"/>
-          <a:lstStyle/>
-          <a:p>
-            <a:r>
-              <a:rPr sz="1200"/>
-              <a:t>出力</a:t>
-            </a:r>
-          </a:p>
-        </p:txBody>
-      </p:sp>
-      <p:sp>
-        <p:nvSpPr>
-          <p:cNvPr id="9" name="Rectangle 8"/>
-          <p:cNvSpPr/>
-          <p:nvPr/>
-        </p:nvSpPr>
-        <p:spPr>
-          <a:xfrm>
-            <a:off x="7486800" y="2606690"/>
-            <a:ext cx="1200000" cy="500000"/>
-          </a:xfrm>
-          <a:prstGeom prst="rect">
-            <a:avLst/>
-          </a:prstGeom>
-        </p:spPr>
-        <p:style>
-          <a:lnRef idx="1">
-            <a:schemeClr val="accent1"/>
-          </a:lnRef>
-          <a:fillRef idx="3">
-            <a:schemeClr val="accent1"/>
-          </a:fillRef>
-          <a:effectRef idx="2">
-            <a:schemeClr val="accent1"/>
-          </a:effectRef>
-          <a:fontRef idx="minor">
-            <a:schemeClr val="lt1"/>
-          </a:fontRef>
-        </p:style>
-        <p:txBody>
-          <a:bodyPr rtlCol="0" anchor="ctr"/>
-          <a:lstStyle/>
-          <a:p>
-            <a:r>
-              <a:rPr sz="1200"/>
-              <a:t>PPTX</a:t>
-            </a:r>
-          </a:p>
-        </p:txBody>
-      </p:sp>
-      <p:sp>
-        <p:nvSpPr>
-          <p:cNvPr id="10" name="Rectangle 9"/>
-          <p:cNvSpPr/>
-          <p:nvPr/>
-        </p:nvSpPr>
-        <p:spPr>
-          <a:xfrm>
-            <a:off x="5143600" y="3864804"/>
-            <a:ext cx="1200000" cy="500000"/>
-          </a:xfrm>
-          <a:prstGeom prst="rect">
-            <a:avLst/>
-          </a:prstGeom>
-        </p:spPr>
-        <p:style>
-          <a:lnRef idx="1">
-            <a:schemeClr val="accent1"/>
-          </a:lnRef>
-          <a:fillRef idx="3">
-            <a:schemeClr val="accent1"/>
-          </a:fillRef>
-          <a:effectRef idx="2">
-            <a:schemeClr val="accent1"/>
-          </a:effectRef>
-          <a:fontRef idx="minor">
-            <a:schemeClr val="lt1"/>
-          </a:fontRef>
-        </p:style>
-        <p:txBody>
-          <a:bodyPr rtlCol="0" anchor="ctr"/>
-          <a:lstStyle/>
-          <a:p>
-            <a:r>
-              <a:rPr sz="1200"/>
-              <a:t>機能</a:t>
-            </a:r>
-          </a:p>
-        </p:txBody>
-      </p:sp>
-      <p:sp>
-        <p:nvSpPr>
-          <p:cNvPr id="11" name="Rectangle 10"/>
-          <p:cNvSpPr/>
-          <p:nvPr/>
-        </p:nvSpPr>
-        <p:spPr>
-          <a:xfrm>
-            <a:off x="7486800" y="3109936"/>
-            <a:ext cx="1200000" cy="500000"/>
-          </a:xfrm>
-          <a:prstGeom prst="rect">
-            <a:avLst/>
-          </a:prstGeom>
-        </p:spPr>
-        <p:style>
-          <a:lnRef idx="1">
-            <a:schemeClr val="accent1"/>
-          </a:lnRef>
-          <a:fillRef idx="3">
-            <a:schemeClr val="accent1"/>
-          </a:fillRef>
-          <a:effectRef idx="2">
-            <a:schemeClr val="accent1"/>
-          </a:effectRef>
-          <a:fontRef idx="minor">
-            <a:schemeClr val="lt1"/>
-          </a:fontRef>
-        </p:style>
-        <p:txBody>
-          <a:bodyPr rtlCol="0" anchor="ctr"/>
-          <a:lstStyle/>
-          <a:p>
-            <a:r>
-              <a:rPr sz="1200"/>
-              <a:t>数式</a:t>
-            </a:r>
-          </a:p>
-        </p:txBody>
-      </p:sp>
-      <p:sp>
-        <p:nvSpPr>
-          <p:cNvPr id="12" name="Rectangle 11"/>
-          <p:cNvSpPr/>
-          <p:nvPr/>
-        </p:nvSpPr>
-        <p:spPr>
-          <a:xfrm>
-            <a:off x="7486800" y="3613181"/>
-            <a:ext cx="1200000" cy="500000"/>
-          </a:xfrm>
-          <a:prstGeom prst="rect">
-            <a:avLst/>
-          </a:prstGeom>
-        </p:spPr>
-        <p:style>
-          <a:lnRef idx="1">
-            <a:schemeClr val="accent1"/>
-          </a:lnRef>
-          <a:fillRef idx="3">
-            <a:schemeClr val="accent1"/>
-          </a:fillRef>
-          <a:effectRef idx="2">
-            <a:schemeClr val="accent1"/>
-          </a:effectRef>
-          <a:fontRef idx="minor">
-            <a:schemeClr val="lt1"/>
-          </a:fontRef>
-        </p:style>
-        <p:txBody>
-          <a:bodyPr rtlCol="0" anchor="ctr"/>
-          <a:lstStyle/>
-          <a:p>
-            <a:r>
-              <a:rPr sz="1200"/>
-              <a:t>Mermaid図</a:t>
-            </a:r>
-          </a:p>
-        </p:txBody>
-      </p:sp>
-      <p:sp>
-        <p:nvSpPr>
-          <p:cNvPr id="13" name="Rectangle 12"/>
-          <p:cNvSpPr/>
-          <p:nvPr/>
-        </p:nvSpPr>
-        <p:spPr>
-          <a:xfrm>
-            <a:off x="7486800" y="4116426"/>
-            <a:ext cx="1200000" cy="500000"/>
-          </a:xfrm>
-          <a:prstGeom prst="rect">
-            <a:avLst/>
-          </a:prstGeom>
-        </p:spPr>
-        <p:style>
-          <a:lnRef idx="1">
-            <a:schemeClr val="accent1"/>
-          </a:lnRef>
-          <a:fillRef idx="3">
-            <a:schemeClr val="accent1"/>
-          </a:fillRef>
-          <a:effectRef idx="2">
-            <a:schemeClr val="accent1"/>
-          </a:effectRef>
-          <a:fontRef idx="minor">
-            <a:schemeClr val="lt1"/>
-          </a:fontRef>
-        </p:style>
-        <p:txBody>
-          <a:bodyPr rtlCol="0" anchor="ctr"/>
-          <a:lstStyle/>
-          <a:p>
-            <a:r>
-              <a:rPr sz="1200"/>
-              <a:t>テーブル</a:t>
-            </a:r>
-          </a:p>
-        </p:txBody>
-      </p:sp>
-      <p:sp>
-        <p:nvSpPr>
-          <p:cNvPr id="14" name="Rectangle 13"/>
-          <p:cNvSpPr/>
-          <p:nvPr/>
-        </p:nvSpPr>
-        <p:spPr>
-          <a:xfrm>
-            <a:off x="7486800" y="4619672"/>
-            <a:ext cx="1200000" cy="500000"/>
-          </a:xfrm>
-          <a:prstGeom prst="rect">
-            <a:avLst/>
-          </a:prstGeom>
-        </p:spPr>
-        <p:style>
-          <a:lnRef idx="1">
-            <a:schemeClr val="accent1"/>
-          </a:lnRef>
-          <a:fillRef idx="3">
-            <a:schemeClr val="accent1"/>
-          </a:fillRef>
-          <a:effectRef idx="2">
-            <a:schemeClr val="accent1"/>
-          </a:effectRef>
-          <a:fontRef idx="minor">
-            <a:schemeClr val="lt1"/>
-          </a:fontRef>
-        </p:style>
-        <p:txBody>
-          <a:bodyPr rtlCol="0" anchor="ctr"/>
-          <a:lstStyle/>
-          <a:p>
-            <a:r>
-              <a:rPr sz="1200"/>
-              <a:t>コード</a:t>
-            </a:r>
-          </a:p>
-        </p:txBody>
-      </p:sp>
-      <p:sp>
-        <p:nvSpPr>
-          <p:cNvPr id="15" name="Rectangle 14"/>
-          <p:cNvSpPr/>
-          <p:nvPr/>
-        </p:nvSpPr>
-        <p:spPr>
-          <a:xfrm>
-            <a:off x="5143600" y="5374540"/>
-            <a:ext cx="1200000" cy="500000"/>
-          </a:xfrm>
-          <a:prstGeom prst="rect">
-            <a:avLst/>
-          </a:prstGeom>
-        </p:spPr>
-        <p:style>
-          <a:lnRef idx="1">
-            <a:schemeClr val="accent1"/>
-          </a:lnRef>
-          <a:fillRef idx="3">
-            <a:schemeClr val="accent1"/>
-          </a:fillRef>
-          <a:effectRef idx="2">
-            <a:schemeClr val="accent1"/>
-          </a:effectRef>
-          <a:fontRef idx="minor">
-            <a:schemeClr val="lt1"/>
-          </a:fontRef>
-        </p:style>
-        <p:txBody>
-          <a:bodyPr rtlCol="0" anchor="ctr"/>
-          <a:lstStyle/>
-          <a:p>
-            <a:r>
-              <a:rPr sz="1200"/>
-              <a:t>利用方法</a:t>
-            </a:r>
-          </a:p>
-        </p:txBody>
-      </p:sp>
-      <p:sp>
-        <p:nvSpPr>
-          <p:cNvPr id="16" name="Rectangle 15"/>
-          <p:cNvSpPr/>
-          <p:nvPr/>
-        </p:nvSpPr>
-        <p:spPr>
-          <a:xfrm>
-            <a:off x="7486800" y="5122917"/>
-            <a:ext cx="1200000" cy="500000"/>
-          </a:xfrm>
-          <a:prstGeom prst="rect">
-            <a:avLst/>
-          </a:prstGeom>
-        </p:spPr>
-        <p:style>
-          <a:lnRef idx="1">
-            <a:schemeClr val="accent1"/>
-          </a:lnRef>
-          <a:fillRef idx="3">
-            <a:schemeClr val="accent1"/>
-          </a:fillRef>
-          <a:effectRef idx="2">
-            <a:schemeClr val="accent1"/>
-          </a:effectRef>
-          <a:fontRef idx="minor">
-            <a:schemeClr val="lt1"/>
-          </a:fontRef>
-        </p:style>
-        <p:txBody>
-          <a:bodyPr rtlCol="0" anchor="ctr"/>
-          <a:lstStyle/>
-          <a:p>
-            <a:r>
-              <a:rPr sz="1200"/>
-              <a:t>ライブラリ</a:t>
-            </a:r>
-          </a:p>
-        </p:txBody>
-      </p:sp>
-      <p:sp>
-        <p:nvSpPr>
-          <p:cNvPr id="17" name="Rectangle 16"/>
-          <p:cNvSpPr/>
-          <p:nvPr/>
-        </p:nvSpPr>
-        <p:spPr>
-          <a:xfrm>
-            <a:off x="7486800" y="5626163"/>
-            <a:ext cx="1200000" cy="500000"/>
-          </a:xfrm>
-          <a:prstGeom prst="rect">
-            <a:avLst/>
-          </a:prstGeom>
-        </p:spPr>
-        <p:style>
-          <a:lnRef idx="1">
-            <a:schemeClr val="accent1"/>
-          </a:lnRef>
-          <a:fillRef idx="3">
-            <a:schemeClr val="accent1"/>
-          </a:fillRef>
-          <a:effectRef idx="2">
-            <a:schemeClr val="accent1"/>
-          </a:effectRef>
-          <a:fontRef idx="minor">
-            <a:schemeClr val="lt1"/>
-          </a:fontRef>
-        </p:style>
-        <p:txBody>
-          <a:bodyPr rtlCol="0" anchor="ctr"/>
-          <a:lstStyle/>
-          <a:p>
-            <a:r>
-              <a:rPr sz="1200"/>
-              <a:t>MCPサーバー</a:t>
-            </a:r>
-          </a:p>
-        </p:txBody>
-      </p:sp>
-      <p:cxnSp>
-        <p:nvCxnSpPr>
-          <p:cNvPr id="18" name="Connector 17"/>
-          <p:cNvCxnSpPr>
-            <a:stCxn id="4" idx="0"/>
-            <a:endCxn id="5" idx="2"/>
-          </p:cNvCxnSpPr>
-          <p:nvPr/>
-        </p:nvCxnSpPr>
-        <p:spPr>
-          <a:xfrm flipV="1">
-            <a:off x="3400400" y="2351822"/>
-            <a:ext cx="2343200" cy="1072642"/>
-          </a:xfrm>
-          <a:prstGeom prst="line">
-            <a:avLst/>
-          </a:prstGeom>
-        </p:spPr>
-        <p:style>
-          <a:lnRef idx="2">
-            <a:schemeClr val="accent1"/>
-          </a:lnRef>
-          <a:fillRef idx="0">
-            <a:schemeClr val="accent1"/>
-          </a:fillRef>
-          <a:effectRef idx="1">
-            <a:schemeClr val="accent1"/>
-          </a:effectRef>
-          <a:fontRef idx="minor">
-            <a:schemeClr val="tx1"/>
-          </a:fontRef>
-        </p:style>
-      </p:cxnSp>
-      <p:cxnSp>
-        <p:nvCxnSpPr>
-          <p:cNvPr id="19" name="Connector 18"/>
-          <p:cNvCxnSpPr>
-            <a:stCxn id="5" idx="1"/>
-            <a:endCxn id="6" idx="3"/>
-          </p:cNvCxnSpPr>
-          <p:nvPr/>
-        </p:nvCxnSpPr>
-        <p:spPr>
-          <a:xfrm flipV="1">
-            <a:off x="5143600" y="1850200"/>
-            <a:ext cx="3543200" cy="251622"/>
-          </a:xfrm>
-          <a:prstGeom prst="line">
-            <a:avLst/>
-          </a:prstGeom>
-        </p:spPr>
-        <p:style>
-          <a:lnRef idx="2">
-            <a:schemeClr val="accent1"/>
-          </a:lnRef>
-          <a:fillRef idx="0">
-            <a:schemeClr val="accent1"/>
-          </a:fillRef>
-          <a:effectRef idx="1">
-            <a:schemeClr val="accent1"/>
-          </a:effectRef>
-          <a:fontRef idx="minor">
-            <a:schemeClr val="tx1"/>
-          </a:fontRef>
-        </p:style>
-      </p:cxnSp>
-      <p:cxnSp>
-        <p:nvCxnSpPr>
-          <p:cNvPr id="20" name="Connector 19"/>
-          <p:cNvCxnSpPr>
-            <a:stCxn id="5" idx="1"/>
-            <a:endCxn id="7" idx="3"/>
-          </p:cNvCxnSpPr>
-          <p:nvPr/>
-        </p:nvCxnSpPr>
-        <p:spPr>
-          <a:xfrm>
-            <a:off x="5143600" y="2101822"/>
-            <a:ext cx="3543200" cy="251623"/>
-          </a:xfrm>
-          <a:prstGeom prst="line">
-            <a:avLst/>
-          </a:prstGeom>
-        </p:spPr>
-        <p:style>
-          <a:lnRef idx="2">
-            <a:schemeClr val="accent1"/>
-          </a:lnRef>
-          <a:fillRef idx="0">
-            <a:schemeClr val="accent1"/>
-          </a:fillRef>
-          <a:effectRef idx="1">
-            <a:schemeClr val="accent1"/>
-          </a:effectRef>
-          <a:fontRef idx="minor">
-            <a:schemeClr val="tx1"/>
-          </a:fontRef>
-        </p:style>
-      </p:cxnSp>
-      <p:cxnSp>
-        <p:nvCxnSpPr>
-          <p:cNvPr id="21" name="Connector 20"/>
-          <p:cNvCxnSpPr>
-            <a:stCxn id="4" idx="1"/>
-            <a:endCxn id="8" idx="3"/>
-          </p:cNvCxnSpPr>
-          <p:nvPr/>
-        </p:nvCxnSpPr>
-        <p:spPr>
-          <a:xfrm flipV="1">
-            <a:off x="2800400" y="2856690"/>
-            <a:ext cx="3543200" cy="817774"/>
-          </a:xfrm>
-          <a:prstGeom prst="line">
-            <a:avLst/>
-          </a:prstGeom>
-        </p:spPr>
-        <p:style>
-          <a:lnRef idx="2">
-            <a:schemeClr val="accent1"/>
-          </a:lnRef>
-          <a:fillRef idx="0">
-            <a:schemeClr val="accent1"/>
-          </a:fillRef>
-          <a:effectRef idx="1">
-            <a:schemeClr val="accent1"/>
-          </a:effectRef>
-          <a:fontRef idx="minor">
-            <a:schemeClr val="tx1"/>
-          </a:fontRef>
-        </p:style>
-      </p:cxnSp>
-      <p:cxnSp>
-        <p:nvCxnSpPr>
-          <p:cNvPr id="22" name="Connector 21"/>
-          <p:cNvCxnSpPr>
-            <a:stCxn id="8" idx="1"/>
-            <a:endCxn id="9" idx="3"/>
-          </p:cNvCxnSpPr>
-          <p:nvPr/>
-        </p:nvCxnSpPr>
-        <p:spPr>
-          <a:xfrm>
-            <a:off x="5143600" y="2856690"/>
-            <a:ext cx="3543200" cy="0"/>
-          </a:xfrm>
-          <a:prstGeom prst="line">
-            <a:avLst/>
-          </a:prstGeom>
-        </p:spPr>
-        <p:style>
-          <a:lnRef idx="2">
-            <a:schemeClr val="accent1"/>
-          </a:lnRef>
-          <a:fillRef idx="0">
-            <a:schemeClr val="accent1"/>
-          </a:fillRef>
-          <a:effectRef idx="1">
-            <a:schemeClr val="accent1"/>
-          </a:effectRef>
-          <a:fontRef idx="minor">
-            <a:schemeClr val="tx1"/>
-          </a:fontRef>
-        </p:style>
-      </p:cxnSp>
-      <p:cxnSp>
-        <p:nvCxnSpPr>
-          <p:cNvPr id="23" name="Connector 22"/>
-          <p:cNvCxnSpPr>
-            <a:stCxn id="4" idx="1"/>
-            <a:endCxn id="10" idx="3"/>
-          </p:cNvCxnSpPr>
-          <p:nvPr/>
-        </p:nvCxnSpPr>
-        <p:spPr>
-          <a:xfrm>
-            <a:off x="2800400" y="3674464"/>
-            <a:ext cx="3543200" cy="440340"/>
-          </a:xfrm>
-          <a:prstGeom prst="line">
-            <a:avLst/>
-          </a:prstGeom>
-        </p:spPr>
-        <p:style>
-          <a:lnRef idx="2">
-            <a:schemeClr val="accent1"/>
-          </a:lnRef>
-          <a:fillRef idx="0">
-            <a:schemeClr val="accent1"/>
-          </a:fillRef>
-          <a:effectRef idx="1">
-            <a:schemeClr val="accent1"/>
-          </a:effectRef>
-          <a:fontRef idx="minor">
-            <a:schemeClr val="tx1"/>
-          </a:fontRef>
-        </p:style>
-      </p:cxnSp>
-      <p:cxnSp>
-        <p:nvCxnSpPr>
-          <p:cNvPr id="24" name="Connector 23"/>
-          <p:cNvCxnSpPr>
-            <a:stCxn id="10" idx="1"/>
-            <a:endCxn id="11" idx="3"/>
-          </p:cNvCxnSpPr>
-          <p:nvPr/>
-        </p:nvCxnSpPr>
-        <p:spPr>
-          <a:xfrm flipV="1">
-            <a:off x="5143600" y="3359936"/>
-            <a:ext cx="3543200" cy="754868"/>
-          </a:xfrm>
-          <a:prstGeom prst="line">
-            <a:avLst/>
-          </a:prstGeom>
-        </p:spPr>
-        <p:style>
-          <a:lnRef idx="2">
-            <a:schemeClr val="accent1"/>
-          </a:lnRef>
-          <a:fillRef idx="0">
-            <a:schemeClr val="accent1"/>
-          </a:fillRef>
-          <a:effectRef idx="1">
-            <a:schemeClr val="accent1"/>
-          </a:effectRef>
-          <a:fontRef idx="minor">
-            <a:schemeClr val="tx1"/>
-          </a:fontRef>
-        </p:style>
-      </p:cxnSp>
-      <p:cxnSp>
-        <p:nvCxnSpPr>
-          <p:cNvPr id="25" name="Connector 24"/>
-          <p:cNvCxnSpPr>
-            <a:stCxn id="10" idx="1"/>
-            <a:endCxn id="12" idx="3"/>
-          </p:cNvCxnSpPr>
-          <p:nvPr/>
-        </p:nvCxnSpPr>
-        <p:spPr>
-          <a:xfrm flipV="1">
-            <a:off x="5143600" y="3863181"/>
-            <a:ext cx="3543200" cy="251623"/>
-          </a:xfrm>
-          <a:prstGeom prst="line">
-            <a:avLst/>
-          </a:prstGeom>
-        </p:spPr>
-        <p:style>
-          <a:lnRef idx="2">
-            <a:schemeClr val="accent1"/>
-          </a:lnRef>
-          <a:fillRef idx="0">
-            <a:schemeClr val="accent1"/>
-          </a:fillRef>
-          <a:effectRef idx="1">
-            <a:schemeClr val="accent1"/>
-          </a:effectRef>
-          <a:fontRef idx="minor">
-            <a:schemeClr val="tx1"/>
-          </a:fontRef>
-        </p:style>
-      </p:cxnSp>
-      <p:cxnSp>
-        <p:nvCxnSpPr>
-          <p:cNvPr id="26" name="Connector 25"/>
-          <p:cNvCxnSpPr>
-            <a:stCxn id="10" idx="1"/>
-            <a:endCxn id="13" idx="3"/>
-          </p:cNvCxnSpPr>
-          <p:nvPr/>
-        </p:nvCxnSpPr>
-        <p:spPr>
-          <a:xfrm>
-            <a:off x="5143600" y="4114804"/>
-            <a:ext cx="3543200" cy="251622"/>
-          </a:xfrm>
-          <a:prstGeom prst="line">
-            <a:avLst/>
-          </a:prstGeom>
-        </p:spPr>
-        <p:style>
-          <a:lnRef idx="2">
-            <a:schemeClr val="accent1"/>
-          </a:lnRef>
-          <a:fillRef idx="0">
-            <a:schemeClr val="accent1"/>
-          </a:fillRef>
-          <a:effectRef idx="1">
-            <a:schemeClr val="accent1"/>
-          </a:effectRef>
-          <a:fontRef idx="minor">
-            <a:schemeClr val="tx1"/>
-          </a:fontRef>
-        </p:style>
-      </p:cxnSp>
-      <p:cxnSp>
-        <p:nvCxnSpPr>
-          <p:cNvPr id="27" name="Connector 26"/>
-          <p:cNvCxnSpPr>
-            <a:stCxn id="10" idx="1"/>
-            <a:endCxn id="14" idx="3"/>
-          </p:cNvCxnSpPr>
-          <p:nvPr/>
-        </p:nvCxnSpPr>
-        <p:spPr>
-          <a:xfrm>
-            <a:off x="5143600" y="4114804"/>
-            <a:ext cx="3543200" cy="754868"/>
-          </a:xfrm>
-          <a:prstGeom prst="line">
-            <a:avLst/>
-          </a:prstGeom>
-        </p:spPr>
-        <p:style>
-          <a:lnRef idx="2">
-            <a:schemeClr val="accent1"/>
-          </a:lnRef>
-          <a:fillRef idx="0">
-            <a:schemeClr val="accent1"/>
-          </a:fillRef>
-          <a:effectRef idx="1">
-            <a:schemeClr val="accent1"/>
-          </a:effectRef>
-          <a:fontRef idx="minor">
-            <a:schemeClr val="tx1"/>
-          </a:fontRef>
-        </p:style>
-      </p:cxnSp>
-      <p:cxnSp>
-        <p:nvCxnSpPr>
-          <p:cNvPr id="28" name="Connector 27"/>
-          <p:cNvCxnSpPr>
-            <a:stCxn id="4" idx="2"/>
-            <a:endCxn id="15" idx="0"/>
-          </p:cNvCxnSpPr>
-          <p:nvPr/>
-        </p:nvCxnSpPr>
-        <p:spPr>
-          <a:xfrm>
-            <a:off x="3400400" y="3924464"/>
-            <a:ext cx="2343200" cy="1450076"/>
-          </a:xfrm>
-          <a:prstGeom prst="line">
-            <a:avLst/>
-          </a:prstGeom>
-        </p:spPr>
-        <p:style>
-          <a:lnRef idx="2">
-            <a:schemeClr val="accent1"/>
-          </a:lnRef>
-          <a:fillRef idx="0">
-            <a:schemeClr val="accent1"/>
-          </a:fillRef>
-          <a:effectRef idx="1">
-            <a:schemeClr val="accent1"/>
-          </a:effectRef>
-          <a:fontRef idx="minor">
-            <a:schemeClr val="tx1"/>
-          </a:fontRef>
-        </p:style>
-      </p:cxnSp>
-      <p:cxnSp>
-        <p:nvCxnSpPr>
-          <p:cNvPr id="29" name="Connector 28"/>
-          <p:cNvCxnSpPr>
-            <a:stCxn id="15" idx="1"/>
-            <a:endCxn id="16" idx="3"/>
-          </p:cNvCxnSpPr>
-          <p:nvPr/>
-        </p:nvCxnSpPr>
-        <p:spPr>
-          <a:xfrm flipV="1">
-            <a:off x="5143600" y="5372917"/>
-            <a:ext cx="3543200" cy="251623"/>
-          </a:xfrm>
-          <a:prstGeom prst="line">
-            <a:avLst/>
-          </a:prstGeom>
-        </p:spPr>
-        <p:style>
-          <a:lnRef idx="2">
-            <a:schemeClr val="accent1"/>
-          </a:lnRef>
-          <a:fillRef idx="0">
-            <a:schemeClr val="accent1"/>
-          </a:fillRef>
-          <a:effectRef idx="1">
-            <a:schemeClr val="accent1"/>
-          </a:effectRef>
-          <a:fontRef idx="minor">
-            <a:schemeClr val="tx1"/>
-          </a:fontRef>
-        </p:style>
-      </p:cxnSp>
-      <p:cxnSp>
-        <p:nvCxnSpPr>
-          <p:cNvPr id="30" name="Connector 29"/>
-          <p:cNvCxnSpPr>
-            <a:stCxn id="15" idx="1"/>
-            <a:endCxn id="17" idx="3"/>
-          </p:cNvCxnSpPr>
-          <p:nvPr/>
-        </p:nvCxnSpPr>
-        <p:spPr>
-          <a:xfrm>
-            <a:off x="5143600" y="5624540"/>
-            <a:ext cx="3543200" cy="251623"/>
-          </a:xfrm>
-          <a:prstGeom prst="line">
-            <a:avLst/>
-          </a:prstGeom>
-        </p:spPr>
-        <p:style>
-          <a:lnRef idx="2">
-            <a:schemeClr val="accent1"/>
-          </a:lnRef>
-          <a:fillRef idx="0">
-            <a:schemeClr val="accent1"/>
-          </a:fillRef>
-          <a:effectRef idx="1">
-            <a:schemeClr val="accent1"/>
-          </a:effectRef>
-          <a:fontRef idx="minor">
-            <a:schemeClr val="tx1"/>
-          </a:fontRef>
-        </p:style>
-      </p:cxnSp>
+          <a:noFill/>
+        </p:spPr>
+        <p:txBody>
+          <a:bodyPr wrap="square">
+            <a:spAutoFit/>
+          </a:bodyPr>
+          <a:lstStyle/>
+          <a:p>
+            <a:r>
+              <a:rPr sz="1000">
+                <a:latin typeface="Courier New"/>
+              </a:rPr>
+              <a:t>gitGraph
+    commit id: "initial"
+    commit id: "feat: add login"
+    branch develop
+    checkout develop
+    commit id: "fix: typo"
+    commit id: "feat: add API"
+    checkout main
+    merge develop id: "merge develop"
+    commit id: "release: v1.0"</a:t>
+            </a:r>
+          </a:p>
+        </p:txBody>
+      </p:sp>
     </p:spTree>
   </p:cSld>
   <p:clrMapOvr>
@@ -11355,7 +12470,7 @@
           <a:lstStyle/>
           <a:p>
             <a:r>
-              <a:t>13. タイムライン（Timeline）</a:t>
+              <a:t>12. マインドマップ（Mindmap）</a:t>
             </a:r>
           </a:p>
         </p:txBody>
@@ -11379,47 +12494,993 @@
       </p:sp>
       <p:sp>
         <p:nvSpPr>
-          <p:cNvPr id="4" name="TextBox 3"/>
-          <p:cNvSpPr txBox="1"/>
-          <p:nvPr/>
-        </p:nvSpPr>
-        <p:spPr>
-          <a:xfrm>
-            <a:off x="457200" y="1600200"/>
-            <a:ext cx="8229600" cy="4525963"/>
+          <p:cNvPr id="4" name="Rectangle 3"/>
+          <p:cNvSpPr/>
+          <p:nvPr/>
+        </p:nvSpPr>
+        <p:spPr>
+          <a:xfrm>
+            <a:off x="2800400" y="3424464"/>
+            <a:ext cx="1200000" cy="500000"/>
           </a:xfrm>
           <a:prstGeom prst="rect">
             <a:avLst/>
           </a:prstGeom>
-          <a:noFill/>
-        </p:spPr>
-        <p:txBody>
-          <a:bodyPr wrap="square">
-            <a:spAutoFit/>
-          </a:bodyPr>
-          <a:lstStyle/>
-          <a:p>
-            <a:r>
-              <a:rPr sz="1000">
-                <a:latin typeface="Courier New"/>
-              </a:rPr>
-              <a:t>timeline
-    title ソフトウェア開発史
-    1960 : アセンブリ言語
-    1970 : C言語
-         : Unix
-    1980 : C++
-         : Macintosh
-    1990 : Java
-         : World Wide Web
-    2000 : Python普及
-         : Agile開発
-    2010 : クラウドコンピューティング
-    2020 : AI・機械学習</a:t>
-            </a:r>
-          </a:p>
-        </p:txBody>
-      </p:sp>
+        </p:spPr>
+        <p:style>
+          <a:lnRef idx="1">
+            <a:schemeClr val="accent1"/>
+          </a:lnRef>
+          <a:fillRef idx="3">
+            <a:schemeClr val="accent1"/>
+          </a:fillRef>
+          <a:effectRef idx="2">
+            <a:schemeClr val="accent1"/>
+          </a:effectRef>
+          <a:fontRef idx="minor">
+            <a:schemeClr val="lt1"/>
+          </a:fontRef>
+        </p:style>
+        <p:txBody>
+          <a:bodyPr rtlCol="0" anchor="ctr"/>
+          <a:lstStyle/>
+          <a:p>
+            <a:r>
+              <a:rPr sz="1200"/>
+              <a:t>qmd_to_pptx</a:t>
+            </a:r>
+          </a:p>
+        </p:txBody>
+      </p:sp>
+      <p:sp>
+        <p:nvSpPr>
+          <p:cNvPr id="5" name="Rectangle 4"/>
+          <p:cNvSpPr/>
+          <p:nvPr/>
+        </p:nvSpPr>
+        <p:spPr>
+          <a:xfrm>
+            <a:off x="5143600" y="1851822"/>
+            <a:ext cx="1200000" cy="500000"/>
+          </a:xfrm>
+          <a:prstGeom prst="rect">
+            <a:avLst/>
+          </a:prstGeom>
+        </p:spPr>
+        <p:style>
+          <a:lnRef idx="1">
+            <a:schemeClr val="accent1"/>
+          </a:lnRef>
+          <a:fillRef idx="3">
+            <a:schemeClr val="accent1"/>
+          </a:fillRef>
+          <a:effectRef idx="2">
+            <a:schemeClr val="accent1"/>
+          </a:effectRef>
+          <a:fontRef idx="minor">
+            <a:schemeClr val="lt1"/>
+          </a:fontRef>
+        </p:style>
+        <p:txBody>
+          <a:bodyPr rtlCol="0" anchor="ctr"/>
+          <a:lstStyle/>
+          <a:p>
+            <a:r>
+              <a:rPr sz="1200"/>
+              <a:t>入力形式</a:t>
+            </a:r>
+          </a:p>
+        </p:txBody>
+      </p:sp>
+      <p:sp>
+        <p:nvSpPr>
+          <p:cNvPr id="6" name="Rectangle 5"/>
+          <p:cNvSpPr/>
+          <p:nvPr/>
+        </p:nvSpPr>
+        <p:spPr>
+          <a:xfrm>
+            <a:off x="7486800" y="1600200"/>
+            <a:ext cx="1200000" cy="500000"/>
+          </a:xfrm>
+          <a:prstGeom prst="rect">
+            <a:avLst/>
+          </a:prstGeom>
+        </p:spPr>
+        <p:style>
+          <a:lnRef idx="1">
+            <a:schemeClr val="accent1"/>
+          </a:lnRef>
+          <a:fillRef idx="3">
+            <a:schemeClr val="accent1"/>
+          </a:fillRef>
+          <a:effectRef idx="2">
+            <a:schemeClr val="accent1"/>
+          </a:effectRef>
+          <a:fontRef idx="minor">
+            <a:schemeClr val="lt1"/>
+          </a:fontRef>
+        </p:style>
+        <p:txBody>
+          <a:bodyPr rtlCol="0" anchor="ctr"/>
+          <a:lstStyle/>
+          <a:p>
+            <a:r>
+              <a:rPr sz="1200"/>
+              <a:t>QMD</a:t>
+            </a:r>
+          </a:p>
+        </p:txBody>
+      </p:sp>
+      <p:sp>
+        <p:nvSpPr>
+          <p:cNvPr id="7" name="Rectangle 6"/>
+          <p:cNvSpPr/>
+          <p:nvPr/>
+        </p:nvSpPr>
+        <p:spPr>
+          <a:xfrm>
+            <a:off x="7486800" y="2103445"/>
+            <a:ext cx="1200000" cy="500000"/>
+          </a:xfrm>
+          <a:prstGeom prst="rect">
+            <a:avLst/>
+          </a:prstGeom>
+        </p:spPr>
+        <p:style>
+          <a:lnRef idx="1">
+            <a:schemeClr val="accent1"/>
+          </a:lnRef>
+          <a:fillRef idx="3">
+            <a:schemeClr val="accent1"/>
+          </a:fillRef>
+          <a:effectRef idx="2">
+            <a:schemeClr val="accent1"/>
+          </a:effectRef>
+          <a:fontRef idx="minor">
+            <a:schemeClr val="lt1"/>
+          </a:fontRef>
+        </p:style>
+        <p:txBody>
+          <a:bodyPr rtlCol="0" anchor="ctr"/>
+          <a:lstStyle/>
+          <a:p>
+            <a:r>
+              <a:rPr sz="1200"/>
+              <a:t>Markdown</a:t>
+            </a:r>
+          </a:p>
+        </p:txBody>
+      </p:sp>
+      <p:sp>
+        <p:nvSpPr>
+          <p:cNvPr id="8" name="Rectangle 7"/>
+          <p:cNvSpPr/>
+          <p:nvPr/>
+        </p:nvSpPr>
+        <p:spPr>
+          <a:xfrm>
+            <a:off x="5143600" y="2606690"/>
+            <a:ext cx="1200000" cy="500000"/>
+          </a:xfrm>
+          <a:prstGeom prst="rect">
+            <a:avLst/>
+          </a:prstGeom>
+        </p:spPr>
+        <p:style>
+          <a:lnRef idx="1">
+            <a:schemeClr val="accent1"/>
+          </a:lnRef>
+          <a:fillRef idx="3">
+            <a:schemeClr val="accent1"/>
+          </a:fillRef>
+          <a:effectRef idx="2">
+            <a:schemeClr val="accent1"/>
+          </a:effectRef>
+          <a:fontRef idx="minor">
+            <a:schemeClr val="lt1"/>
+          </a:fontRef>
+        </p:style>
+        <p:txBody>
+          <a:bodyPr rtlCol="0" anchor="ctr"/>
+          <a:lstStyle/>
+          <a:p>
+            <a:r>
+              <a:rPr sz="1200"/>
+              <a:t>出力</a:t>
+            </a:r>
+          </a:p>
+        </p:txBody>
+      </p:sp>
+      <p:sp>
+        <p:nvSpPr>
+          <p:cNvPr id="9" name="Rectangle 8"/>
+          <p:cNvSpPr/>
+          <p:nvPr/>
+        </p:nvSpPr>
+        <p:spPr>
+          <a:xfrm>
+            <a:off x="7486800" y="2606690"/>
+            <a:ext cx="1200000" cy="500000"/>
+          </a:xfrm>
+          <a:prstGeom prst="rect">
+            <a:avLst/>
+          </a:prstGeom>
+        </p:spPr>
+        <p:style>
+          <a:lnRef idx="1">
+            <a:schemeClr val="accent1"/>
+          </a:lnRef>
+          <a:fillRef idx="3">
+            <a:schemeClr val="accent1"/>
+          </a:fillRef>
+          <a:effectRef idx="2">
+            <a:schemeClr val="accent1"/>
+          </a:effectRef>
+          <a:fontRef idx="minor">
+            <a:schemeClr val="lt1"/>
+          </a:fontRef>
+        </p:style>
+        <p:txBody>
+          <a:bodyPr rtlCol="0" anchor="ctr"/>
+          <a:lstStyle/>
+          <a:p>
+            <a:r>
+              <a:rPr sz="1200"/>
+              <a:t>PPTX</a:t>
+            </a:r>
+          </a:p>
+        </p:txBody>
+      </p:sp>
+      <p:sp>
+        <p:nvSpPr>
+          <p:cNvPr id="10" name="Rectangle 9"/>
+          <p:cNvSpPr/>
+          <p:nvPr/>
+        </p:nvSpPr>
+        <p:spPr>
+          <a:xfrm>
+            <a:off x="5143600" y="3864804"/>
+            <a:ext cx="1200000" cy="500000"/>
+          </a:xfrm>
+          <a:prstGeom prst="rect">
+            <a:avLst/>
+          </a:prstGeom>
+        </p:spPr>
+        <p:style>
+          <a:lnRef idx="1">
+            <a:schemeClr val="accent1"/>
+          </a:lnRef>
+          <a:fillRef idx="3">
+            <a:schemeClr val="accent1"/>
+          </a:fillRef>
+          <a:effectRef idx="2">
+            <a:schemeClr val="accent1"/>
+          </a:effectRef>
+          <a:fontRef idx="minor">
+            <a:schemeClr val="lt1"/>
+          </a:fontRef>
+        </p:style>
+        <p:txBody>
+          <a:bodyPr rtlCol="0" anchor="ctr"/>
+          <a:lstStyle/>
+          <a:p>
+            <a:r>
+              <a:rPr sz="1200"/>
+              <a:t>機能</a:t>
+            </a:r>
+          </a:p>
+        </p:txBody>
+      </p:sp>
+      <p:sp>
+        <p:nvSpPr>
+          <p:cNvPr id="11" name="Rectangle 10"/>
+          <p:cNvSpPr/>
+          <p:nvPr/>
+        </p:nvSpPr>
+        <p:spPr>
+          <a:xfrm>
+            <a:off x="7486800" y="3109936"/>
+            <a:ext cx="1200000" cy="500000"/>
+          </a:xfrm>
+          <a:prstGeom prst="rect">
+            <a:avLst/>
+          </a:prstGeom>
+        </p:spPr>
+        <p:style>
+          <a:lnRef idx="1">
+            <a:schemeClr val="accent1"/>
+          </a:lnRef>
+          <a:fillRef idx="3">
+            <a:schemeClr val="accent1"/>
+          </a:fillRef>
+          <a:effectRef idx="2">
+            <a:schemeClr val="accent1"/>
+          </a:effectRef>
+          <a:fontRef idx="minor">
+            <a:schemeClr val="lt1"/>
+          </a:fontRef>
+        </p:style>
+        <p:txBody>
+          <a:bodyPr rtlCol="0" anchor="ctr"/>
+          <a:lstStyle/>
+          <a:p>
+            <a:r>
+              <a:rPr sz="1200"/>
+              <a:t>数式</a:t>
+            </a:r>
+          </a:p>
+        </p:txBody>
+      </p:sp>
+      <p:sp>
+        <p:nvSpPr>
+          <p:cNvPr id="12" name="Rectangle 11"/>
+          <p:cNvSpPr/>
+          <p:nvPr/>
+        </p:nvSpPr>
+        <p:spPr>
+          <a:xfrm>
+            <a:off x="7486800" y="3613181"/>
+            <a:ext cx="1200000" cy="500000"/>
+          </a:xfrm>
+          <a:prstGeom prst="rect">
+            <a:avLst/>
+          </a:prstGeom>
+        </p:spPr>
+        <p:style>
+          <a:lnRef idx="1">
+            <a:schemeClr val="accent1"/>
+          </a:lnRef>
+          <a:fillRef idx="3">
+            <a:schemeClr val="accent1"/>
+          </a:fillRef>
+          <a:effectRef idx="2">
+            <a:schemeClr val="accent1"/>
+          </a:effectRef>
+          <a:fontRef idx="minor">
+            <a:schemeClr val="lt1"/>
+          </a:fontRef>
+        </p:style>
+        <p:txBody>
+          <a:bodyPr rtlCol="0" anchor="ctr"/>
+          <a:lstStyle/>
+          <a:p>
+            <a:r>
+              <a:rPr sz="1200"/>
+              <a:t>Mermaid図</a:t>
+            </a:r>
+          </a:p>
+        </p:txBody>
+      </p:sp>
+      <p:sp>
+        <p:nvSpPr>
+          <p:cNvPr id="13" name="Rectangle 12"/>
+          <p:cNvSpPr/>
+          <p:nvPr/>
+        </p:nvSpPr>
+        <p:spPr>
+          <a:xfrm>
+            <a:off x="7486800" y="4116426"/>
+            <a:ext cx="1200000" cy="500000"/>
+          </a:xfrm>
+          <a:prstGeom prst="rect">
+            <a:avLst/>
+          </a:prstGeom>
+        </p:spPr>
+        <p:style>
+          <a:lnRef idx="1">
+            <a:schemeClr val="accent1"/>
+          </a:lnRef>
+          <a:fillRef idx="3">
+            <a:schemeClr val="accent1"/>
+          </a:fillRef>
+          <a:effectRef idx="2">
+            <a:schemeClr val="accent1"/>
+          </a:effectRef>
+          <a:fontRef idx="minor">
+            <a:schemeClr val="lt1"/>
+          </a:fontRef>
+        </p:style>
+        <p:txBody>
+          <a:bodyPr rtlCol="0" anchor="ctr"/>
+          <a:lstStyle/>
+          <a:p>
+            <a:r>
+              <a:rPr sz="1200"/>
+              <a:t>テーブル</a:t>
+            </a:r>
+          </a:p>
+        </p:txBody>
+      </p:sp>
+      <p:sp>
+        <p:nvSpPr>
+          <p:cNvPr id="14" name="Rectangle 13"/>
+          <p:cNvSpPr/>
+          <p:nvPr/>
+        </p:nvSpPr>
+        <p:spPr>
+          <a:xfrm>
+            <a:off x="7486800" y="4619672"/>
+            <a:ext cx="1200000" cy="500000"/>
+          </a:xfrm>
+          <a:prstGeom prst="rect">
+            <a:avLst/>
+          </a:prstGeom>
+        </p:spPr>
+        <p:style>
+          <a:lnRef idx="1">
+            <a:schemeClr val="accent1"/>
+          </a:lnRef>
+          <a:fillRef idx="3">
+            <a:schemeClr val="accent1"/>
+          </a:fillRef>
+          <a:effectRef idx="2">
+            <a:schemeClr val="accent1"/>
+          </a:effectRef>
+          <a:fontRef idx="minor">
+            <a:schemeClr val="lt1"/>
+          </a:fontRef>
+        </p:style>
+        <p:txBody>
+          <a:bodyPr rtlCol="0" anchor="ctr"/>
+          <a:lstStyle/>
+          <a:p>
+            <a:r>
+              <a:rPr sz="1200"/>
+              <a:t>コード</a:t>
+            </a:r>
+          </a:p>
+        </p:txBody>
+      </p:sp>
+      <p:sp>
+        <p:nvSpPr>
+          <p:cNvPr id="15" name="Rectangle 14"/>
+          <p:cNvSpPr/>
+          <p:nvPr/>
+        </p:nvSpPr>
+        <p:spPr>
+          <a:xfrm>
+            <a:off x="5143600" y="5374540"/>
+            <a:ext cx="1200000" cy="500000"/>
+          </a:xfrm>
+          <a:prstGeom prst="rect">
+            <a:avLst/>
+          </a:prstGeom>
+        </p:spPr>
+        <p:style>
+          <a:lnRef idx="1">
+            <a:schemeClr val="accent1"/>
+          </a:lnRef>
+          <a:fillRef idx="3">
+            <a:schemeClr val="accent1"/>
+          </a:fillRef>
+          <a:effectRef idx="2">
+            <a:schemeClr val="accent1"/>
+          </a:effectRef>
+          <a:fontRef idx="minor">
+            <a:schemeClr val="lt1"/>
+          </a:fontRef>
+        </p:style>
+        <p:txBody>
+          <a:bodyPr rtlCol="0" anchor="ctr"/>
+          <a:lstStyle/>
+          <a:p>
+            <a:r>
+              <a:rPr sz="1200"/>
+              <a:t>利用方法</a:t>
+            </a:r>
+          </a:p>
+        </p:txBody>
+      </p:sp>
+      <p:sp>
+        <p:nvSpPr>
+          <p:cNvPr id="16" name="Rectangle 15"/>
+          <p:cNvSpPr/>
+          <p:nvPr/>
+        </p:nvSpPr>
+        <p:spPr>
+          <a:xfrm>
+            <a:off x="7486800" y="5122917"/>
+            <a:ext cx="1200000" cy="500000"/>
+          </a:xfrm>
+          <a:prstGeom prst="rect">
+            <a:avLst/>
+          </a:prstGeom>
+        </p:spPr>
+        <p:style>
+          <a:lnRef idx="1">
+            <a:schemeClr val="accent1"/>
+          </a:lnRef>
+          <a:fillRef idx="3">
+            <a:schemeClr val="accent1"/>
+          </a:fillRef>
+          <a:effectRef idx="2">
+            <a:schemeClr val="accent1"/>
+          </a:effectRef>
+          <a:fontRef idx="minor">
+            <a:schemeClr val="lt1"/>
+          </a:fontRef>
+        </p:style>
+        <p:txBody>
+          <a:bodyPr rtlCol="0" anchor="ctr"/>
+          <a:lstStyle/>
+          <a:p>
+            <a:r>
+              <a:rPr sz="1200"/>
+              <a:t>ライブラリ</a:t>
+            </a:r>
+          </a:p>
+        </p:txBody>
+      </p:sp>
+      <p:sp>
+        <p:nvSpPr>
+          <p:cNvPr id="17" name="Rectangle 16"/>
+          <p:cNvSpPr/>
+          <p:nvPr/>
+        </p:nvSpPr>
+        <p:spPr>
+          <a:xfrm>
+            <a:off x="7486800" y="5626163"/>
+            <a:ext cx="1200000" cy="500000"/>
+          </a:xfrm>
+          <a:prstGeom prst="rect">
+            <a:avLst/>
+          </a:prstGeom>
+        </p:spPr>
+        <p:style>
+          <a:lnRef idx="1">
+            <a:schemeClr val="accent1"/>
+          </a:lnRef>
+          <a:fillRef idx="3">
+            <a:schemeClr val="accent1"/>
+          </a:fillRef>
+          <a:effectRef idx="2">
+            <a:schemeClr val="accent1"/>
+          </a:effectRef>
+          <a:fontRef idx="minor">
+            <a:schemeClr val="lt1"/>
+          </a:fontRef>
+        </p:style>
+        <p:txBody>
+          <a:bodyPr rtlCol="0" anchor="ctr"/>
+          <a:lstStyle/>
+          <a:p>
+            <a:r>
+              <a:rPr sz="1200"/>
+              <a:t>MCPサーバー</a:t>
+            </a:r>
+          </a:p>
+        </p:txBody>
+      </p:sp>
+      <p:cxnSp>
+        <p:nvCxnSpPr>
+          <p:cNvPr id="18" name="Connector 17"/>
+          <p:cNvCxnSpPr>
+            <a:stCxn id="4" idx="0"/>
+            <a:endCxn id="5" idx="2"/>
+          </p:cNvCxnSpPr>
+          <p:nvPr/>
+        </p:nvCxnSpPr>
+        <p:spPr>
+          <a:xfrm flipV="1">
+            <a:off x="3400400" y="2351822"/>
+            <a:ext cx="2343200" cy="1072642"/>
+          </a:xfrm>
+          <a:prstGeom prst="line">
+            <a:avLst/>
+          </a:prstGeom>
+        </p:spPr>
+        <p:style>
+          <a:lnRef idx="2">
+            <a:schemeClr val="accent1"/>
+          </a:lnRef>
+          <a:fillRef idx="0">
+            <a:schemeClr val="accent1"/>
+          </a:fillRef>
+          <a:effectRef idx="1">
+            <a:schemeClr val="accent1"/>
+          </a:effectRef>
+          <a:fontRef idx="minor">
+            <a:schemeClr val="tx1"/>
+          </a:fontRef>
+        </p:style>
+      </p:cxnSp>
+      <p:cxnSp>
+        <p:nvCxnSpPr>
+          <p:cNvPr id="19" name="Connector 18"/>
+          <p:cNvCxnSpPr>
+            <a:stCxn id="5" idx="1"/>
+            <a:endCxn id="6" idx="3"/>
+          </p:cNvCxnSpPr>
+          <p:nvPr/>
+        </p:nvCxnSpPr>
+        <p:spPr>
+          <a:xfrm flipV="1">
+            <a:off x="5143600" y="1850200"/>
+            <a:ext cx="3543200" cy="251622"/>
+          </a:xfrm>
+          <a:prstGeom prst="line">
+            <a:avLst/>
+          </a:prstGeom>
+        </p:spPr>
+        <p:style>
+          <a:lnRef idx="2">
+            <a:schemeClr val="accent1"/>
+          </a:lnRef>
+          <a:fillRef idx="0">
+            <a:schemeClr val="accent1"/>
+          </a:fillRef>
+          <a:effectRef idx="1">
+            <a:schemeClr val="accent1"/>
+          </a:effectRef>
+          <a:fontRef idx="minor">
+            <a:schemeClr val="tx1"/>
+          </a:fontRef>
+        </p:style>
+      </p:cxnSp>
+      <p:cxnSp>
+        <p:nvCxnSpPr>
+          <p:cNvPr id="20" name="Connector 19"/>
+          <p:cNvCxnSpPr>
+            <a:stCxn id="5" idx="1"/>
+            <a:endCxn id="7" idx="3"/>
+          </p:cNvCxnSpPr>
+          <p:nvPr/>
+        </p:nvCxnSpPr>
+        <p:spPr>
+          <a:xfrm>
+            <a:off x="5143600" y="2101822"/>
+            <a:ext cx="3543200" cy="251623"/>
+          </a:xfrm>
+          <a:prstGeom prst="line">
+            <a:avLst/>
+          </a:prstGeom>
+        </p:spPr>
+        <p:style>
+          <a:lnRef idx="2">
+            <a:schemeClr val="accent1"/>
+          </a:lnRef>
+          <a:fillRef idx="0">
+            <a:schemeClr val="accent1"/>
+          </a:fillRef>
+          <a:effectRef idx="1">
+            <a:schemeClr val="accent1"/>
+          </a:effectRef>
+          <a:fontRef idx="minor">
+            <a:schemeClr val="tx1"/>
+          </a:fontRef>
+        </p:style>
+      </p:cxnSp>
+      <p:cxnSp>
+        <p:nvCxnSpPr>
+          <p:cNvPr id="21" name="Connector 20"/>
+          <p:cNvCxnSpPr>
+            <a:stCxn id="4" idx="1"/>
+            <a:endCxn id="8" idx="3"/>
+          </p:cNvCxnSpPr>
+          <p:nvPr/>
+        </p:nvCxnSpPr>
+        <p:spPr>
+          <a:xfrm flipV="1">
+            <a:off x="2800400" y="2856690"/>
+            <a:ext cx="3543200" cy="817774"/>
+          </a:xfrm>
+          <a:prstGeom prst="line">
+            <a:avLst/>
+          </a:prstGeom>
+        </p:spPr>
+        <p:style>
+          <a:lnRef idx="2">
+            <a:schemeClr val="accent1"/>
+          </a:lnRef>
+          <a:fillRef idx="0">
+            <a:schemeClr val="accent1"/>
+          </a:fillRef>
+          <a:effectRef idx="1">
+            <a:schemeClr val="accent1"/>
+          </a:effectRef>
+          <a:fontRef idx="minor">
+            <a:schemeClr val="tx1"/>
+          </a:fontRef>
+        </p:style>
+      </p:cxnSp>
+      <p:cxnSp>
+        <p:nvCxnSpPr>
+          <p:cNvPr id="22" name="Connector 21"/>
+          <p:cNvCxnSpPr>
+            <a:stCxn id="8" idx="1"/>
+            <a:endCxn id="9" idx="3"/>
+          </p:cNvCxnSpPr>
+          <p:nvPr/>
+        </p:nvCxnSpPr>
+        <p:spPr>
+          <a:xfrm>
+            <a:off x="5143600" y="2856690"/>
+            <a:ext cx="3543200" cy="0"/>
+          </a:xfrm>
+          <a:prstGeom prst="line">
+            <a:avLst/>
+          </a:prstGeom>
+        </p:spPr>
+        <p:style>
+          <a:lnRef idx="2">
+            <a:schemeClr val="accent1"/>
+          </a:lnRef>
+          <a:fillRef idx="0">
+            <a:schemeClr val="accent1"/>
+          </a:fillRef>
+          <a:effectRef idx="1">
+            <a:schemeClr val="accent1"/>
+          </a:effectRef>
+          <a:fontRef idx="minor">
+            <a:schemeClr val="tx1"/>
+          </a:fontRef>
+        </p:style>
+      </p:cxnSp>
+      <p:cxnSp>
+        <p:nvCxnSpPr>
+          <p:cNvPr id="23" name="Connector 22"/>
+          <p:cNvCxnSpPr>
+            <a:stCxn id="4" idx="1"/>
+            <a:endCxn id="10" idx="3"/>
+          </p:cNvCxnSpPr>
+          <p:nvPr/>
+        </p:nvCxnSpPr>
+        <p:spPr>
+          <a:xfrm>
+            <a:off x="2800400" y="3674464"/>
+            <a:ext cx="3543200" cy="440340"/>
+          </a:xfrm>
+          <a:prstGeom prst="line">
+            <a:avLst/>
+          </a:prstGeom>
+        </p:spPr>
+        <p:style>
+          <a:lnRef idx="2">
+            <a:schemeClr val="accent1"/>
+          </a:lnRef>
+          <a:fillRef idx="0">
+            <a:schemeClr val="accent1"/>
+          </a:fillRef>
+          <a:effectRef idx="1">
+            <a:schemeClr val="accent1"/>
+          </a:effectRef>
+          <a:fontRef idx="minor">
+            <a:schemeClr val="tx1"/>
+          </a:fontRef>
+        </p:style>
+      </p:cxnSp>
+      <p:cxnSp>
+        <p:nvCxnSpPr>
+          <p:cNvPr id="24" name="Connector 23"/>
+          <p:cNvCxnSpPr>
+            <a:stCxn id="10" idx="1"/>
+            <a:endCxn id="11" idx="3"/>
+          </p:cNvCxnSpPr>
+          <p:nvPr/>
+        </p:nvCxnSpPr>
+        <p:spPr>
+          <a:xfrm flipV="1">
+            <a:off x="5143600" y="3359936"/>
+            <a:ext cx="3543200" cy="754868"/>
+          </a:xfrm>
+          <a:prstGeom prst="line">
+            <a:avLst/>
+          </a:prstGeom>
+        </p:spPr>
+        <p:style>
+          <a:lnRef idx="2">
+            <a:schemeClr val="accent1"/>
+          </a:lnRef>
+          <a:fillRef idx="0">
+            <a:schemeClr val="accent1"/>
+          </a:fillRef>
+          <a:effectRef idx="1">
+            <a:schemeClr val="accent1"/>
+          </a:effectRef>
+          <a:fontRef idx="minor">
+            <a:schemeClr val="tx1"/>
+          </a:fontRef>
+        </p:style>
+      </p:cxnSp>
+      <p:cxnSp>
+        <p:nvCxnSpPr>
+          <p:cNvPr id="25" name="Connector 24"/>
+          <p:cNvCxnSpPr>
+            <a:stCxn id="10" idx="1"/>
+            <a:endCxn id="12" idx="3"/>
+          </p:cNvCxnSpPr>
+          <p:nvPr/>
+        </p:nvCxnSpPr>
+        <p:spPr>
+          <a:xfrm flipV="1">
+            <a:off x="5143600" y="3863181"/>
+            <a:ext cx="3543200" cy="251623"/>
+          </a:xfrm>
+          <a:prstGeom prst="line">
+            <a:avLst/>
+          </a:prstGeom>
+        </p:spPr>
+        <p:style>
+          <a:lnRef idx="2">
+            <a:schemeClr val="accent1"/>
+          </a:lnRef>
+          <a:fillRef idx="0">
+            <a:schemeClr val="accent1"/>
+          </a:fillRef>
+          <a:effectRef idx="1">
+            <a:schemeClr val="accent1"/>
+          </a:effectRef>
+          <a:fontRef idx="minor">
+            <a:schemeClr val="tx1"/>
+          </a:fontRef>
+        </p:style>
+      </p:cxnSp>
+      <p:cxnSp>
+        <p:nvCxnSpPr>
+          <p:cNvPr id="26" name="Connector 25"/>
+          <p:cNvCxnSpPr>
+            <a:stCxn id="10" idx="1"/>
+            <a:endCxn id="13" idx="3"/>
+          </p:cNvCxnSpPr>
+          <p:nvPr/>
+        </p:nvCxnSpPr>
+        <p:spPr>
+          <a:xfrm>
+            <a:off x="5143600" y="4114804"/>
+            <a:ext cx="3543200" cy="251622"/>
+          </a:xfrm>
+          <a:prstGeom prst="line">
+            <a:avLst/>
+          </a:prstGeom>
+        </p:spPr>
+        <p:style>
+          <a:lnRef idx="2">
+            <a:schemeClr val="accent1"/>
+          </a:lnRef>
+          <a:fillRef idx="0">
+            <a:schemeClr val="accent1"/>
+          </a:fillRef>
+          <a:effectRef idx="1">
+            <a:schemeClr val="accent1"/>
+          </a:effectRef>
+          <a:fontRef idx="minor">
+            <a:schemeClr val="tx1"/>
+          </a:fontRef>
+        </p:style>
+      </p:cxnSp>
+      <p:cxnSp>
+        <p:nvCxnSpPr>
+          <p:cNvPr id="27" name="Connector 26"/>
+          <p:cNvCxnSpPr>
+            <a:stCxn id="10" idx="1"/>
+            <a:endCxn id="14" idx="3"/>
+          </p:cNvCxnSpPr>
+          <p:nvPr/>
+        </p:nvCxnSpPr>
+        <p:spPr>
+          <a:xfrm>
+            <a:off x="5143600" y="4114804"/>
+            <a:ext cx="3543200" cy="754868"/>
+          </a:xfrm>
+          <a:prstGeom prst="line">
+            <a:avLst/>
+          </a:prstGeom>
+        </p:spPr>
+        <p:style>
+          <a:lnRef idx="2">
+            <a:schemeClr val="accent1"/>
+          </a:lnRef>
+          <a:fillRef idx="0">
+            <a:schemeClr val="accent1"/>
+          </a:fillRef>
+          <a:effectRef idx="1">
+            <a:schemeClr val="accent1"/>
+          </a:effectRef>
+          <a:fontRef idx="minor">
+            <a:schemeClr val="tx1"/>
+          </a:fontRef>
+        </p:style>
+      </p:cxnSp>
+      <p:cxnSp>
+        <p:nvCxnSpPr>
+          <p:cNvPr id="28" name="Connector 27"/>
+          <p:cNvCxnSpPr>
+            <a:stCxn id="4" idx="2"/>
+            <a:endCxn id="15" idx="0"/>
+          </p:cNvCxnSpPr>
+          <p:nvPr/>
+        </p:nvCxnSpPr>
+        <p:spPr>
+          <a:xfrm>
+            <a:off x="3400400" y="3924464"/>
+            <a:ext cx="2343200" cy="1450076"/>
+          </a:xfrm>
+          <a:prstGeom prst="line">
+            <a:avLst/>
+          </a:prstGeom>
+        </p:spPr>
+        <p:style>
+          <a:lnRef idx="2">
+            <a:schemeClr val="accent1"/>
+          </a:lnRef>
+          <a:fillRef idx="0">
+            <a:schemeClr val="accent1"/>
+          </a:fillRef>
+          <a:effectRef idx="1">
+            <a:schemeClr val="accent1"/>
+          </a:effectRef>
+          <a:fontRef idx="minor">
+            <a:schemeClr val="tx1"/>
+          </a:fontRef>
+        </p:style>
+      </p:cxnSp>
+      <p:cxnSp>
+        <p:nvCxnSpPr>
+          <p:cNvPr id="29" name="Connector 28"/>
+          <p:cNvCxnSpPr>
+            <a:stCxn id="15" idx="1"/>
+            <a:endCxn id="16" idx="3"/>
+          </p:cNvCxnSpPr>
+          <p:nvPr/>
+        </p:nvCxnSpPr>
+        <p:spPr>
+          <a:xfrm flipV="1">
+            <a:off x="5143600" y="5372917"/>
+            <a:ext cx="3543200" cy="251623"/>
+          </a:xfrm>
+          <a:prstGeom prst="line">
+            <a:avLst/>
+          </a:prstGeom>
+        </p:spPr>
+        <p:style>
+          <a:lnRef idx="2">
+            <a:schemeClr val="accent1"/>
+          </a:lnRef>
+          <a:fillRef idx="0">
+            <a:schemeClr val="accent1"/>
+          </a:fillRef>
+          <a:effectRef idx="1">
+            <a:schemeClr val="accent1"/>
+          </a:effectRef>
+          <a:fontRef idx="minor">
+            <a:schemeClr val="tx1"/>
+          </a:fontRef>
+        </p:style>
+      </p:cxnSp>
+      <p:cxnSp>
+        <p:nvCxnSpPr>
+          <p:cNvPr id="30" name="Connector 29"/>
+          <p:cNvCxnSpPr>
+            <a:stCxn id="15" idx="1"/>
+            <a:endCxn id="17" idx="3"/>
+          </p:cNvCxnSpPr>
+          <p:nvPr/>
+        </p:nvCxnSpPr>
+        <p:spPr>
+          <a:xfrm>
+            <a:off x="5143600" y="5624540"/>
+            <a:ext cx="3543200" cy="251623"/>
+          </a:xfrm>
+          <a:prstGeom prst="line">
+            <a:avLst/>
+          </a:prstGeom>
+        </p:spPr>
+        <p:style>
+          <a:lnRef idx="2">
+            <a:schemeClr val="accent1"/>
+          </a:lnRef>
+          <a:fillRef idx="0">
+            <a:schemeClr val="accent1"/>
+          </a:fillRef>
+          <a:effectRef idx="1">
+            <a:schemeClr val="accent1"/>
+          </a:effectRef>
+          <a:fontRef idx="minor">
+            <a:schemeClr val="tx1"/>
+          </a:fontRef>
+        </p:style>
+      </p:cxnSp>
     </p:spTree>
   </p:cSld>
   <p:clrMapOvr>
@@ -11454,7 +13515,7 @@
           <a:lstStyle/>
           <a:p>
             <a:r>
-              <a:t>14. ZenUML</a:t>
+              <a:t>13. タイムライン（Timeline）</a:t>
             </a:r>
           </a:p>
         </p:txBody>
@@ -11502,14 +13563,19 @@
               <a:rPr sz="1000">
                 <a:latin typeface="Courier New"/>
               </a:rPr>
-              <a:t>zenuml
-    title 注文処理
-    @Actor Client
-    @Database DB
-    Client -&gt; Server.process(order) {
-        Server -&gt; DB.save(order)
-        return orderId
-    }</a:t>
+              <a:t>timeline
+    title ソフトウェア開発史
+    1960 : アセンブリ言語
+    1970 : C言語
+         : Unix
+    1980 : C++
+         : Macintosh
+    1990 : Java
+         : World Wide Web
+    2000 : Python普及
+         : Agile開発
+    2010 : クラウドコンピューティング
+    2020 : AI・機械学習</a:t>
             </a:r>
           </a:p>
         </p:txBody>
@@ -11548,7 +13614,7 @@
           <a:lstStyle/>
           <a:p>
             <a:r>
-              <a:t>15. サンキー図（Sankey Diagram）</a:t>
+              <a:t>14. ZenUML</a:t>
             </a:r>
           </a:p>
         </p:txBody>
@@ -11596,13 +13662,14 @@
               <a:rPr sz="1000">
                 <a:latin typeface="Courier New"/>
               </a:rPr>
-              <a:t>sankey-beta
-    エネルギー源,電力,60
-    エネルギー源,熱,40
-    電力,家庭用,25
-    電力,産業用,35
-    熱,暖房,30
-    熱,給湯,10</a:t>
+              <a:t>zenuml
+    title 注文処理
+    @Actor Client
+    @Database DB
+    Client -&gt; Server.process(order) {
+        Server -&gt; DB.save(order)
+        return orderId
+    }</a:t>
             </a:r>
           </a:p>
         </p:txBody>
@@ -11702,7 +13769,7 @@
           <a:lstStyle/>
           <a:p>
             <a:r>
-              <a:t>16. XYチャート（XY Chart）</a:t>
+              <a:t>15. サンキー図（Sankey Diagram）</a:t>
             </a:r>
           </a:p>
         </p:txBody>
@@ -11750,12 +13817,13 @@
               <a:rPr sz="1000">
                 <a:latin typeface="Courier New"/>
               </a:rPr>
-              <a:t>xychart-beta
-    title "月別売上推移"
-    x-axis [1月, 2月, 3月, 4月, 5月, 6月]
-    y-axis "売上（万円）" 0 --&gt; 1000
-    bar [400, 500, 650, 720, 850, 900]
-    line [400, 500, 650, 720, 850, 900]</a:t>
+              <a:t>sankey-beta
+    エネルギー源,電力,60
+    エネルギー源,熱,40
+    電力,家庭用,25
+    電力,産業用,35
+    熱,暖房,30
+    熱,給湯,10</a:t>
             </a:r>
           </a:p>
         </p:txBody>
@@ -11794,7 +13862,7 @@
           <a:lstStyle/>
           <a:p>
             <a:r>
-              <a:t>17. ブロック図（Block Diagram）</a:t>
+              <a:t>16. XYチャート（XY Chart）</a:t>
             </a:r>
           </a:p>
         </p:txBody>
@@ -11842,19 +13910,12 @@
               <a:rPr sz="1000">
                 <a:latin typeface="Courier New"/>
               </a:rPr>
-              <a:t>block-beta
-    columns 3
-    A["フロントエンド"]:1
-    B["APIゲートウェイ"]:1
-    C["バックエンド"]:1
-    D["認証サービス"]:1
-    E["データベース"]:1
-    F["キャッシュ"]:1
-    A --&gt; B
-    B --&gt; C
-    B --&gt; D
-    C --&gt; E
-    C --&gt; F</a:t>
+              <a:t>xychart-beta
+    title "月別売上推移"
+    x-axis [1月, 2月, 3月, 4月, 5月, 6月]
+    y-axis "売上（万円）" 0 --&gt; 1000
+    bar [400, 500, 650, 720, 850, 900]
+    line [400, 500, 650, 720, 850, 900]</a:t>
             </a:r>
           </a:p>
         </p:txBody>
@@ -11893,7 +13954,7 @@
           <a:lstStyle/>
           <a:p>
             <a:r>
-              <a:t>18. パケット図（Packet Diagram）</a:t>
+              <a:t>17. ブロック図（Block Diagram）</a:t>
             </a:r>
           </a:p>
         </p:txBody>
@@ -11941,16 +14002,19 @@
               <a:rPr sz="1000">
                 <a:latin typeface="Courier New"/>
               </a:rPr>
-              <a:t>packet-beta
-    title TCP パケット構造
-    0-15: "送信元ポート"
-    16-31: "宛先ポート"
-    32-63: "シーケンス番号"
-    64-95: "確認応答番号"
-    96-99: "データオフセット"
-    100-105: "予約"
-    106-111: "フラグ"
-    112-127: "ウィンドウサイズ"</a:t>
+              <a:t>block-beta
+    columns 3
+    A["フロントエンド"]:1
+    B["APIゲートウェイ"]:1
+    C["バックエンド"]:1
+    D["認証サービス"]:1
+    E["データベース"]:1
+    F["キャッシュ"]:1
+    A --&gt; B
+    B --&gt; C
+    B --&gt; D
+    C --&gt; E
+    C --&gt; F</a:t>
             </a:r>
           </a:p>
         </p:txBody>
@@ -11989,7 +14053,7 @@
           <a:lstStyle/>
           <a:p>
             <a:r>
-              <a:t>19. カンバン（Kanban）</a:t>
+              <a:t>18. パケット図（Packet Diagram）</a:t>
             </a:r>
           </a:p>
         </p:txBody>
@@ -12037,16 +14101,16 @@
               <a:rPr sz="1000">
                 <a:latin typeface="Courier New"/>
               </a:rPr>
-              <a:t>kanban
-    todo["To Do"]
-        task1["要件定義"]
-        task2["DB設計"]
-    inprogress["In Progress"]
-        task3["API実装"]
-        task4["テスト作成"]
-    done["Done"]
-        task5["環境構築"]
-        task6["仕様策定"]</a:t>
+              <a:t>packet-beta
+    title TCP パケット構造
+    0-15: "送信元ポート"
+    16-31: "宛先ポート"
+    32-63: "シーケンス番号"
+    64-95: "確認応答番号"
+    96-99: "データオフセット"
+    100-105: "予約"
+    106-111: "フラグ"
+    112-127: "ウィンドウサイズ"</a:t>
             </a:r>
           </a:p>
         </p:txBody>
@@ -12085,7 +14149,7 @@
           <a:lstStyle/>
           <a:p>
             <a:r>
-              <a:t>20. アーキテクチャ図（Architecture Diagram）</a:t>
+              <a:t>19. カンバン（Kanban）</a:t>
             </a:r>
           </a:p>
         </p:txBody>
@@ -12133,15 +14197,16 @@
               <a:rPr sz="1000">
                 <a:latin typeface="Courier New"/>
               </a:rPr>
-              <a:t>architecture-beta
-    group cloud(cloud)[クラウド]
-    service web(internet)[Webサーバー] in cloud
-    service api(server)[APIサーバー] in cloud
-    service db(database)[データベース] in cloud
-    service cache(disk)[キャッシュ] in cloud
-    web:R --&gt; L:api
-    api:R --&gt; L:db
-    api:B --&gt; T:cache</a:t>
+              <a:t>kanban
+    todo["To Do"]
+        task1["要件定義"]
+        task2["DB設計"]
+    inprogress["In Progress"]
+        task3["API実装"]
+        task4["テスト作成"]
+    done["Done"]
+        task5["環境構築"]
+        task6["仕様策定"]</a:t>
             </a:r>
           </a:p>
         </p:txBody>
@@ -12180,7 +14245,7 @@
           <a:lstStyle/>
           <a:p>
             <a:r>
-              <a:t>21. C4図（C4 Diagram）</a:t>
+              <a:t>20. アーキテクチャ図（Architecture Diagram）</a:t>
             </a:r>
           </a:p>
         </p:txBody>
@@ -12228,15 +14293,15 @@
               <a:rPr sz="1000">
                 <a:latin typeface="Courier New"/>
               </a:rPr>
-              <a:t>C4Context
-    title システムコンテキスト図
-    Person(user, "ユーザー", "アプリケーションを利用する人")
-    System(app, "Webアプリ", "主要なシステム")
-    System_Ext(email, "メールサービス", "通知送信")
-    System_Ext(payment, "決済サービス", "支払い処理")
-    Rel(user, app, "利用する", "HTTPS")
-    Rel(app, email, "送信する", "SMTP")
-    Rel(app, payment, "呼び出す", "API")</a:t>
+              <a:t>architecture-beta
+    group cloud(cloud)[クラウド]
+    service web(internet)[Webサーバー] in cloud
+    service api(server)[APIサーバー] in cloud
+    service db(database)[データベース] in cloud
+    service cache(disk)[キャッシュ] in cloud
+    web:R --&gt; L:api
+    api:R --&gt; L:db
+    api:B --&gt; T:cache</a:t>
             </a:r>
           </a:p>
         </p:txBody>
@@ -12275,7 +14340,7 @@
           <a:lstStyle/>
           <a:p>
             <a:r>
-              <a:t>22. Quartoネイティブ記法</a:t>
+              <a:t>21. C4図（C4 Diagram）</a:t>
             </a:r>
           </a:p>
         </p:txBody>
@@ -12299,196 +14364,43 @@
       </p:sp>
       <p:sp>
         <p:nvSpPr>
-          <p:cNvPr id="4" name="Rectangle 3"/>
-          <p:cNvSpPr/>
-          <p:nvPr/>
-        </p:nvSpPr>
-        <p:spPr>
-          <a:xfrm>
-            <a:off x="457200" y="3613181"/>
-            <a:ext cx="1200000" cy="500000"/>
+          <p:cNvPr id="4" name="TextBox 3"/>
+          <p:cNvSpPr txBox="1"/>
+          <p:nvPr/>
+        </p:nvSpPr>
+        <p:spPr>
+          <a:xfrm>
+            <a:off x="457200" y="1600200"/>
+            <a:ext cx="8229600" cy="4525963"/>
           </a:xfrm>
           <a:prstGeom prst="rect">
             <a:avLst/>
           </a:prstGeom>
-        </p:spPr>
-        <p:style>
-          <a:lnRef idx="1">
-            <a:schemeClr val="accent1"/>
-          </a:lnRef>
-          <a:fillRef idx="3">
-            <a:schemeClr val="accent1"/>
-          </a:fillRef>
-          <a:effectRef idx="2">
-            <a:schemeClr val="accent1"/>
-          </a:effectRef>
-          <a:fontRef idx="minor">
-            <a:schemeClr val="lt1"/>
-          </a:fontRef>
-        </p:style>
-        <p:txBody>
-          <a:bodyPr rtlCol="0" anchor="ctr"/>
-          <a:lstStyle/>
-          <a:p>
-            <a:r>
-              <a:rPr sz="1200"/>
-              <a:t>スタート</a:t>
-            </a:r>
-          </a:p>
-        </p:txBody>
-      </p:sp>
-      <p:sp>
-        <p:nvSpPr>
-          <p:cNvPr id="5" name="Rectangle 4"/>
-          <p:cNvSpPr/>
-          <p:nvPr/>
-        </p:nvSpPr>
-        <p:spPr>
-          <a:xfrm>
-            <a:off x="3972000" y="3613181"/>
-            <a:ext cx="1200000" cy="500000"/>
-          </a:xfrm>
-          <a:prstGeom prst="rect">
-            <a:avLst/>
-          </a:prstGeom>
-        </p:spPr>
-        <p:style>
-          <a:lnRef idx="1">
-            <a:schemeClr val="accent1"/>
-          </a:lnRef>
-          <a:fillRef idx="3">
-            <a:schemeClr val="accent1"/>
-          </a:fillRef>
-          <a:effectRef idx="2">
-            <a:schemeClr val="accent1"/>
-          </a:effectRef>
-          <a:fontRef idx="minor">
-            <a:schemeClr val="lt1"/>
-          </a:fontRef>
-        </p:style>
-        <p:txBody>
-          <a:bodyPr rtlCol="0" anchor="ctr"/>
-          <a:lstStyle/>
-          <a:p>
-            <a:r>
-              <a:rPr sz="1200"/>
-              <a:t>処理</a:t>
-            </a:r>
-          </a:p>
-        </p:txBody>
-      </p:sp>
-      <p:sp>
-        <p:nvSpPr>
-          <p:cNvPr id="6" name="Rectangle 5"/>
-          <p:cNvSpPr/>
-          <p:nvPr/>
-        </p:nvSpPr>
-        <p:spPr>
-          <a:xfrm>
-            <a:off x="7486800" y="3613181"/>
-            <a:ext cx="1200000" cy="500000"/>
-          </a:xfrm>
-          <a:prstGeom prst="rect">
-            <a:avLst/>
-          </a:prstGeom>
-        </p:spPr>
-        <p:style>
-          <a:lnRef idx="1">
-            <a:schemeClr val="accent1"/>
-          </a:lnRef>
-          <a:fillRef idx="3">
-            <a:schemeClr val="accent1"/>
-          </a:fillRef>
-          <a:effectRef idx="2">
-            <a:schemeClr val="accent1"/>
-          </a:effectRef>
-          <a:fontRef idx="minor">
-            <a:schemeClr val="lt1"/>
-          </a:fontRef>
-        </p:style>
-        <p:txBody>
-          <a:bodyPr rtlCol="0" anchor="ctr"/>
-          <a:lstStyle/>
-          <a:p>
-            <a:r>
-              <a:rPr sz="1200"/>
-              <a:t>エンド</a:t>
-            </a:r>
-          </a:p>
-        </p:txBody>
-      </p:sp>
-      <p:cxnSp>
-        <p:nvCxnSpPr>
-          <p:cNvPr id="7" name="Connector 6"/>
-          <p:cNvCxnSpPr>
-            <a:stCxn id="4" idx="1"/>
-            <a:endCxn id="5" idx="3"/>
-          </p:cNvCxnSpPr>
-          <p:nvPr/>
-        </p:nvCxnSpPr>
-        <p:spPr>
-          <a:xfrm>
-            <a:off x="457200" y="3863181"/>
-            <a:ext cx="4714800" cy="0"/>
-          </a:xfrm>
-          <a:prstGeom prst="line">
-            <a:avLst/>
-          </a:prstGeom>
-          <a:ln>
-            <a:headEnd type="arrow" w="med" len="med"/>
-          </a:ln>
-        </p:spPr>
-        <p:style>
-          <a:lnRef idx="2">
-            <a:schemeClr val="accent1"/>
-          </a:lnRef>
-          <a:fillRef idx="0">
-            <a:schemeClr val="accent1"/>
-          </a:fillRef>
-          <a:effectRef idx="1">
-            <a:schemeClr val="accent1"/>
-          </a:effectRef>
-          <a:fontRef idx="minor">
-            <a:schemeClr val="tx1"/>
-          </a:fontRef>
-        </p:style>
-      </p:cxnSp>
-      <p:cxnSp>
-        <p:nvCxnSpPr>
-          <p:cNvPr id="8" name="Connector 7"/>
-          <p:cNvCxnSpPr>
-            <a:stCxn id="5" idx="1"/>
-            <a:endCxn id="6" idx="3"/>
-          </p:cNvCxnSpPr>
-          <p:nvPr/>
-        </p:nvCxnSpPr>
-        <p:spPr>
-          <a:xfrm>
-            <a:off x="3972000" y="3863181"/>
-            <a:ext cx="4714800" cy="0"/>
-          </a:xfrm>
-          <a:prstGeom prst="line">
-            <a:avLst/>
-          </a:prstGeom>
-          <a:ln>
-            <a:headEnd type="arrow" w="med" len="med"/>
-          </a:ln>
-        </p:spPr>
-        <p:style>
-          <a:lnRef idx="2">
-            <a:schemeClr val="accent1"/>
-          </a:lnRef>
-          <a:fillRef idx="0">
-            <a:schemeClr val="accent1"/>
-          </a:fillRef>
-          <a:effectRef idx="1">
-            <a:schemeClr val="accent1"/>
-          </a:effectRef>
-          <a:fontRef idx="minor">
-            <a:schemeClr val="tx1"/>
-          </a:fontRef>
-        </p:style>
-      </p:cxnSp>
+          <a:noFill/>
+        </p:spPr>
+        <p:txBody>
+          <a:bodyPr wrap="square">
+            <a:spAutoFit/>
+          </a:bodyPr>
+          <a:lstStyle/>
+          <a:p>
+            <a:r>
+              <a:rPr sz="1000">
+                <a:latin typeface="Courier New"/>
+              </a:rPr>
+              <a:t>C4Context
+    title システムコンテキスト図
+    Person(user, "ユーザー", "アプリケーションを利用する人")
+    System(app, "Webアプリ", "主要なシステム")
+    System_Ext(email, "メールサービス", "通知送信")
+    System_Ext(payment, "決済サービス", "支払い処理")
+    Rel(user, app, "利用する", "HTTPS")
+    Rel(app, email, "送信する", "SMTP")
+    Rel(app, payment, "呼び出す", "API")</a:t>
+            </a:r>
+          </a:p>
+        </p:txBody>
+      </p:sp>
     </p:spTree>
   </p:cSld>
   <p:clrMapOvr>
@@ -12523,7 +14435,7 @@
           <a:lstStyle/>
           <a:p>
             <a:r>
-              <a:t>Quartoコードブロック記法</a:t>
+              <a:t>22. Quartoネイティブ記法</a:t>
             </a:r>
           </a:p>
         </p:txBody>
@@ -12540,43 +14452,203 @@
         </p:nvSpPr>
         <p:spPr/>
         <p:txBody>
-          <a:bodyPr wrap="none"/>
-          <a:lstStyle/>
-          <a:p>
-            <a:pPr>
-              <a:buNone/>
-            </a:pPr>
-            <a:r>
-              <a:rPr lang="" dirty="0" sz="1400">
-                <a:latin typeface="Courier New"/>
-              </a:rPr>
-              <a:t>import math</a:t>
-            </a:r>
-            <a:br>
-              <a:rPr lang="" dirty="0">
-                <a:latin typeface="Courier New"/>
-              </a:rPr>
-            </a:br>
-            <a:r>
-              <a:rPr lang="" dirty="0" sz="1400">
-                <a:latin typeface="Courier New"/>
-              </a:rPr>
-              <a:t>print(math.pi)</a:t>
-            </a:r>
-            <a:br>
-              <a:rPr lang="" dirty="0">
-                <a:latin typeface="Courier New"/>
-              </a:rPr>
-            </a:br>
-            <a:r>
-              <a:rPr lang="" dirty="0" sz="1400">
-                <a:latin typeface="Courier New"/>
-              </a:rPr>
-              <a:t/>
-            </a:r>
-          </a:p>
-        </p:txBody>
-      </p:sp>
+          <a:bodyPr/>
+          <a:lstStyle/>
+          <a:p/>
+        </p:txBody>
+      </p:sp>
+      <p:sp>
+        <p:nvSpPr>
+          <p:cNvPr id="4" name="Rectangle 3"/>
+          <p:cNvSpPr/>
+          <p:nvPr/>
+        </p:nvSpPr>
+        <p:spPr>
+          <a:xfrm>
+            <a:off x="457200" y="3613181"/>
+            <a:ext cx="1200000" cy="500000"/>
+          </a:xfrm>
+          <a:prstGeom prst="rect">
+            <a:avLst/>
+          </a:prstGeom>
+        </p:spPr>
+        <p:style>
+          <a:lnRef idx="1">
+            <a:schemeClr val="accent1"/>
+          </a:lnRef>
+          <a:fillRef idx="3">
+            <a:schemeClr val="accent1"/>
+          </a:fillRef>
+          <a:effectRef idx="2">
+            <a:schemeClr val="accent1"/>
+          </a:effectRef>
+          <a:fontRef idx="minor">
+            <a:schemeClr val="lt1"/>
+          </a:fontRef>
+        </p:style>
+        <p:txBody>
+          <a:bodyPr rtlCol="0" anchor="ctr"/>
+          <a:lstStyle/>
+          <a:p>
+            <a:r>
+              <a:rPr sz="1200"/>
+              <a:t>スタート</a:t>
+            </a:r>
+          </a:p>
+        </p:txBody>
+      </p:sp>
+      <p:sp>
+        <p:nvSpPr>
+          <p:cNvPr id="5" name="Rectangle 4"/>
+          <p:cNvSpPr/>
+          <p:nvPr/>
+        </p:nvSpPr>
+        <p:spPr>
+          <a:xfrm>
+            <a:off x="3972000" y="3613181"/>
+            <a:ext cx="1200000" cy="500000"/>
+          </a:xfrm>
+          <a:prstGeom prst="rect">
+            <a:avLst/>
+          </a:prstGeom>
+        </p:spPr>
+        <p:style>
+          <a:lnRef idx="1">
+            <a:schemeClr val="accent1"/>
+          </a:lnRef>
+          <a:fillRef idx="3">
+            <a:schemeClr val="accent1"/>
+          </a:fillRef>
+          <a:effectRef idx="2">
+            <a:schemeClr val="accent1"/>
+          </a:effectRef>
+          <a:fontRef idx="minor">
+            <a:schemeClr val="lt1"/>
+          </a:fontRef>
+        </p:style>
+        <p:txBody>
+          <a:bodyPr rtlCol="0" anchor="ctr"/>
+          <a:lstStyle/>
+          <a:p>
+            <a:r>
+              <a:rPr sz="1200"/>
+              <a:t>処理</a:t>
+            </a:r>
+          </a:p>
+        </p:txBody>
+      </p:sp>
+      <p:sp>
+        <p:nvSpPr>
+          <p:cNvPr id="6" name="Rectangle 5"/>
+          <p:cNvSpPr/>
+          <p:nvPr/>
+        </p:nvSpPr>
+        <p:spPr>
+          <a:xfrm>
+            <a:off x="7486800" y="3613181"/>
+            <a:ext cx="1200000" cy="500000"/>
+          </a:xfrm>
+          <a:prstGeom prst="rect">
+            <a:avLst/>
+          </a:prstGeom>
+        </p:spPr>
+        <p:style>
+          <a:lnRef idx="1">
+            <a:schemeClr val="accent1"/>
+          </a:lnRef>
+          <a:fillRef idx="3">
+            <a:schemeClr val="accent1"/>
+          </a:fillRef>
+          <a:effectRef idx="2">
+            <a:schemeClr val="accent1"/>
+          </a:effectRef>
+          <a:fontRef idx="minor">
+            <a:schemeClr val="lt1"/>
+          </a:fontRef>
+        </p:style>
+        <p:txBody>
+          <a:bodyPr rtlCol="0" anchor="ctr"/>
+          <a:lstStyle/>
+          <a:p>
+            <a:r>
+              <a:rPr sz="1200"/>
+              <a:t>エンド</a:t>
+            </a:r>
+          </a:p>
+        </p:txBody>
+      </p:sp>
+      <p:cxnSp>
+        <p:nvCxnSpPr>
+          <p:cNvPr id="7" name="Connector 6"/>
+          <p:cNvCxnSpPr>
+            <a:stCxn id="4" idx="1"/>
+            <a:endCxn id="5" idx="3"/>
+          </p:cNvCxnSpPr>
+          <p:nvPr/>
+        </p:nvCxnSpPr>
+        <p:spPr>
+          <a:xfrm>
+            <a:off x="457200" y="3863181"/>
+            <a:ext cx="4714800" cy="0"/>
+          </a:xfrm>
+          <a:prstGeom prst="line">
+            <a:avLst/>
+          </a:prstGeom>
+          <a:ln>
+            <a:headEnd type="arrow" w="med" len="med"/>
+          </a:ln>
+        </p:spPr>
+        <p:style>
+          <a:lnRef idx="2">
+            <a:schemeClr val="accent1"/>
+          </a:lnRef>
+          <a:fillRef idx="0">
+            <a:schemeClr val="accent1"/>
+          </a:fillRef>
+          <a:effectRef idx="1">
+            <a:schemeClr val="accent1"/>
+          </a:effectRef>
+          <a:fontRef idx="minor">
+            <a:schemeClr val="tx1"/>
+          </a:fontRef>
+        </p:style>
+      </p:cxnSp>
+      <p:cxnSp>
+        <p:nvCxnSpPr>
+          <p:cNvPr id="8" name="Connector 7"/>
+          <p:cNvCxnSpPr>
+            <a:stCxn id="5" idx="1"/>
+            <a:endCxn id="6" idx="3"/>
+          </p:cNvCxnSpPr>
+          <p:nvPr/>
+        </p:nvCxnSpPr>
+        <p:spPr>
+          <a:xfrm>
+            <a:off x="3972000" y="3863181"/>
+            <a:ext cx="4714800" cy="0"/>
+          </a:xfrm>
+          <a:prstGeom prst="line">
+            <a:avLst/>
+          </a:prstGeom>
+          <a:ln>
+            <a:headEnd type="arrow" w="med" len="med"/>
+          </a:ln>
+        </p:spPr>
+        <p:style>
+          <a:lnRef idx="2">
+            <a:schemeClr val="accent1"/>
+          </a:lnRef>
+          <a:fillRef idx="0">
+            <a:schemeClr val="accent1"/>
+          </a:fillRef>
+          <a:effectRef idx="1">
+            <a:schemeClr val="accent1"/>
+          </a:effectRef>
+          <a:fontRef idx="minor">
+            <a:schemeClr val="tx1"/>
+          </a:fontRef>
+        </p:style>
+      </p:cxnSp>
     </p:spTree>
   </p:cSld>
   <p:clrMapOvr>
@@ -12611,26 +14683,58 @@
           <a:lstStyle/>
           <a:p>
             <a:r>
-              <a:t>アニメーション・レイアウト</a:t>
-            </a:r>
-          </a:p>
-        </p:txBody>
-      </p:sp>
-      <p:sp>
-        <p:nvSpPr>
-          <p:cNvPr id="3" name="Text Placeholder 2"/>
+              <a:t>Quartoコードブロック記法</a:t>
+            </a:r>
+          </a:p>
+        </p:txBody>
+      </p:sp>
+      <p:sp>
+        <p:nvSpPr>
+          <p:cNvPr id="3" name="Content Placeholder 2"/>
           <p:cNvSpPr>
             <a:spLocks noGrp="1"/>
           </p:cNvSpPr>
           <p:nvPr>
-            <p:ph type="body" idx="1"/>
+            <p:ph idx="1"/>
           </p:nvPr>
         </p:nvSpPr>
         <p:spPr/>
         <p:txBody>
-          <a:bodyPr/>
-          <a:lstStyle/>
-          <a:p/>
+          <a:bodyPr wrap="none"/>
+          <a:lstStyle/>
+          <a:p>
+            <a:pPr>
+              <a:buNone/>
+            </a:pPr>
+            <a:r>
+              <a:rPr lang="" dirty="0" sz="1400">
+                <a:latin typeface="Courier New"/>
+              </a:rPr>
+              <a:t>import math</a:t>
+            </a:r>
+            <a:br>
+              <a:rPr lang="" dirty="0">
+                <a:latin typeface="Courier New"/>
+              </a:rPr>
+            </a:br>
+            <a:r>
+              <a:rPr lang="" dirty="0" sz="1400">
+                <a:latin typeface="Courier New"/>
+              </a:rPr>
+              <a:t>print(math.pi)</a:t>
+            </a:r>
+            <a:br>
+              <a:rPr lang="" dirty="0">
+                <a:latin typeface="Courier New"/>
+              </a:rPr>
+            </a:br>
+            <a:r>
+              <a:rPr lang="" dirty="0" sz="1400">
+                <a:latin typeface="Courier New"/>
+              </a:rPr>
+              <a:t/>
+            </a:r>
+          </a:p>
         </p:txBody>
       </p:sp>
     </p:spTree>
@@ -12667,46 +14771,26 @@
           <a:lstStyle/>
           <a:p>
             <a:r>
-              <a:t>インクリメンタルリスト</a:t>
-            </a:r>
-          </a:p>
-        </p:txBody>
-      </p:sp>
-      <p:sp>
-        <p:nvSpPr>
-          <p:cNvPr id="3" name="Content Placeholder 2"/>
+              <a:t>アニメーション・レイアウト</a:t>
+            </a:r>
+          </a:p>
+        </p:txBody>
+      </p:sp>
+      <p:sp>
+        <p:nvSpPr>
+          <p:cNvPr id="3" name="Text Placeholder 2"/>
           <p:cNvSpPr>
             <a:spLocks noGrp="1"/>
           </p:cNvSpPr>
           <p:nvPr>
-            <p:ph idx="1"/>
+            <p:ph type="body" idx="1"/>
           </p:nvPr>
         </p:nvSpPr>
         <p:spPr/>
         <p:txBody>
-          <a:bodyPr wrap="square"/>
-          <a:lstStyle/>
-          <a:p>
-            <a:pPr/>
-            <a:r>
-              <a:rPr sz="1800"/>
-              <a:t>まず最初に表示</a:t>
-            </a:r>
-          </a:p>
-          <a:p>
-            <a:pPr/>
-            <a:r>
-              <a:rPr sz="1800"/>
-              <a:t>次にこれが表示</a:t>
-            </a:r>
-          </a:p>
-          <a:p>
-            <a:pPr/>
-            <a:r>
-              <a:rPr sz="1800"/>
-              <a:t>最後にこれが表示</a:t>
-            </a:r>
-          </a:p>
+          <a:bodyPr/>
+          <a:lstStyle/>
+          <a:p/>
         </p:txBody>
       </p:sp>
     </p:spTree>
@@ -12833,7 +14917,7 @@
           <a:lstStyle/>
           <a:p>
             <a:r>
-              <a:t>非インクリメンタルリスト</a:t>
+              <a:t>インクリメンタルリスト</a:t>
             </a:r>
           </a:p>
         </p:txBody>
@@ -12856,21 +14940,21 @@
             <a:pPr/>
             <a:r>
               <a:rPr sz="1800"/>
-              <a:t>一括表示アイテム1</a:t>
+              <a:t>まず最初に表示</a:t>
             </a:r>
           </a:p>
           <a:p>
             <a:pPr/>
             <a:r>
               <a:rPr sz="1800"/>
-              <a:t>一括表示アイテム2</a:t>
+              <a:t>次にこれが表示</a:t>
             </a:r>
           </a:p>
           <a:p>
             <a:pPr/>
             <a:r>
               <a:rPr sz="1800"/>
-              <a:t>一括表示アイテム3</a:t>
+              <a:t>最後にこれが表示</a:t>
             </a:r>
           </a:p>
         </p:txBody>
@@ -12909,7 +14993,7 @@
           <a:lstStyle/>
           <a:p>
             <a:r>
-              <a:t>2カラムレイアウト</a:t>
+              <a:t>非インクリメンタルリスト</a:t>
             </a:r>
           </a:p>
         </p:txBody>
@@ -12921,7 +15005,7 @@
             <a:spLocks noGrp="1"/>
           </p:cNvSpPr>
           <p:nvPr>
-            <p:ph idx="1" sz="half"/>
+            <p:ph idx="1"/>
           </p:nvPr>
         </p:nvSpPr>
         <p:spPr/>
@@ -12932,58 +15016,21 @@
             <a:pPr/>
             <a:r>
               <a:rPr sz="1800"/>
-              <a:t>左の項目1</a:t>
+              <a:t>一括表示アイテム1</a:t>
             </a:r>
           </a:p>
           <a:p>
             <a:pPr/>
             <a:r>
               <a:rPr sz="1800"/>
-              <a:t>左の項目2</a:t>
+              <a:t>一括表示アイテム2</a:t>
             </a:r>
           </a:p>
           <a:p>
             <a:pPr/>
             <a:r>
               <a:rPr sz="1800"/>
-              <a:t>左の項目3</a:t>
-            </a:r>
-          </a:p>
-        </p:txBody>
-      </p:sp>
-      <p:sp>
-        <p:nvSpPr>
-          <p:cNvPr id="4" name="Content Placeholder 3"/>
-          <p:cNvSpPr>
-            <a:spLocks noGrp="1"/>
-          </p:cNvSpPr>
-          <p:nvPr>
-            <p:ph idx="2" sz="half"/>
-          </p:nvPr>
-        </p:nvSpPr>
-        <p:spPr/>
-        <p:txBody>
-          <a:bodyPr wrap="square"/>
-          <a:lstStyle/>
-          <a:p>
-            <a:pPr/>
-            <a:r>
-              <a:rPr sz="1800"/>
-              <a:t>右の項目1</a:t>
-            </a:r>
-          </a:p>
-          <a:p>
-            <a:pPr/>
-            <a:r>
-              <a:rPr sz="1800"/>
-              <a:t>右の項目2</a:t>
-            </a:r>
-          </a:p>
-          <a:p>
-            <a:pPr/>
-            <a:r>
-              <a:rPr sz="1800"/>
-              <a:t>右の項目3</a:t>
+              <a:t>一括表示アイテム3</a:t>
             </a:r>
           </a:p>
         </p:txBody>
@@ -13022,7 +15069,7 @@
           <a:lstStyle/>
           <a:p>
             <a:r>
-              <a:t>スピーカーノート付きスライド</a:t>
+              <a:t>2カラムレイアウト</a:t>
             </a:r>
           </a:p>
         </p:txBody>
@@ -13034,7 +15081,7 @@
             <a:spLocks noGrp="1"/>
           </p:cNvSpPr>
           <p:nvPr>
-            <p:ph idx="1"/>
+            <p:ph idx="1" sz="half"/>
           </p:nvPr>
         </p:nvSpPr>
         <p:spPr/>
@@ -13042,9 +15089,61 @@
           <a:bodyPr wrap="square"/>
           <a:lstStyle/>
           <a:p>
+            <a:pPr/>
             <a:r>
               <a:rPr sz="1800"/>
-              <a:t>このスライドには発表者向けのノートが埋め込まれています。</a:t>
+              <a:t>左の項目1</a:t>
+            </a:r>
+          </a:p>
+          <a:p>
+            <a:pPr/>
+            <a:r>
+              <a:rPr sz="1800"/>
+              <a:t>左の項目2</a:t>
+            </a:r>
+          </a:p>
+          <a:p>
+            <a:pPr/>
+            <a:r>
+              <a:rPr sz="1800"/>
+              <a:t>左の項目3</a:t>
+            </a:r>
+          </a:p>
+        </p:txBody>
+      </p:sp>
+      <p:sp>
+        <p:nvSpPr>
+          <p:cNvPr id="4" name="Content Placeholder 3"/>
+          <p:cNvSpPr>
+            <a:spLocks noGrp="1"/>
+          </p:cNvSpPr>
+          <p:nvPr>
+            <p:ph idx="2" sz="half"/>
+          </p:nvPr>
+        </p:nvSpPr>
+        <p:spPr/>
+        <p:txBody>
+          <a:bodyPr wrap="square"/>
+          <a:lstStyle/>
+          <a:p>
+            <a:pPr/>
+            <a:r>
+              <a:rPr sz="1800"/>
+              <a:t>右の項目1</a:t>
+            </a:r>
+          </a:p>
+          <a:p>
+            <a:pPr/>
+            <a:r>
+              <a:rPr sz="1800"/>
+              <a:t>右の項目2</a:t>
+            </a:r>
+          </a:p>
+          <a:p>
+            <a:pPr/>
+            <a:r>
+              <a:rPr sz="1800"/>
+              <a:t>右の項目3</a:t>
             </a:r>
           </a:p>
         </p:txBody>
@@ -13081,7 +15180,11 @@
         <p:txBody>
           <a:bodyPr/>
           <a:lstStyle/>
-          <a:p/>
+          <a:p>
+            <a:r>
+              <a:t>スピーカーノート付きスライド</a:t>
+            </a:r>
+          </a:p>
         </p:txBody>
       </p:sp>
       <p:sp>
@@ -13101,7 +15204,7 @@
           <a:p>
             <a:r>
               <a:rPr sz="1800"/>
-              <a:t>水平区切り線（---）によって生成されたタイトルなしスライドです。</a:t>
+              <a:t>このスライドには発表者向けのノートが埋め込まれています。</a:t>
             </a:r>
           </a:p>
         </p:txBody>
@@ -13138,28 +15241,29 @@
         <p:txBody>
           <a:bodyPr/>
           <a:lstStyle/>
-          <a:p>
-            <a:r>
-              <a:t>まとめ</a:t>
-            </a:r>
-          </a:p>
-        </p:txBody>
-      </p:sp>
-      <p:sp>
-        <p:nvSpPr>
-          <p:cNvPr id="3" name="Text Placeholder 2"/>
+          <a:p/>
+        </p:txBody>
+      </p:sp>
+      <p:sp>
+        <p:nvSpPr>
+          <p:cNvPr id="3" name="Content Placeholder 2"/>
           <p:cNvSpPr>
             <a:spLocks noGrp="1"/>
           </p:cNvSpPr>
           <p:nvPr>
-            <p:ph type="body" idx="1"/>
+            <p:ph idx="1"/>
           </p:nvPr>
         </p:nvSpPr>
         <p:spPr/>
         <p:txBody>
-          <a:bodyPr/>
-          <a:lstStyle/>
-          <a:p/>
+          <a:bodyPr wrap="square"/>
+          <a:lstStyle/>
+          <a:p>
+            <a:r>
+              <a:rPr sz="1800"/>
+              <a:t>水平区切り線（---）によって生成されたタイトルなしスライドです。</a:t>
+            </a:r>
+          </a:p>
         </p:txBody>
       </p:sp>
     </p:spTree>
@@ -13171,6 +15275,62 @@
 </file>
 
 <file path=ppt/slides/slide45.xml><?xml version="1.0" encoding="utf-8"?>
+<p:sld xmlns:a="http://schemas.openxmlformats.org/drawingml/2006/main" xmlns:p="http://schemas.openxmlformats.org/presentationml/2006/main" xmlns:r="http://schemas.openxmlformats.org/officeDocument/2006/relationships">
+  <p:cSld>
+    <p:spTree>
+      <p:nvGrpSpPr>
+        <p:cNvPr id="1" name=""/>
+        <p:cNvGrpSpPr/>
+        <p:nvPr/>
+      </p:nvGrpSpPr>
+      <p:grpSpPr/>
+      <p:sp>
+        <p:nvSpPr>
+          <p:cNvPr id="2" name="Title 1"/>
+          <p:cNvSpPr>
+            <a:spLocks noGrp="1"/>
+          </p:cNvSpPr>
+          <p:nvPr>
+            <p:ph type="title"/>
+          </p:nvPr>
+        </p:nvSpPr>
+        <p:spPr/>
+        <p:txBody>
+          <a:bodyPr/>
+          <a:lstStyle/>
+          <a:p>
+            <a:r>
+              <a:t>まとめ</a:t>
+            </a:r>
+          </a:p>
+        </p:txBody>
+      </p:sp>
+      <p:sp>
+        <p:nvSpPr>
+          <p:cNvPr id="3" name="Text Placeholder 2"/>
+          <p:cNvSpPr>
+            <a:spLocks noGrp="1"/>
+          </p:cNvSpPr>
+          <p:nvPr>
+            <p:ph type="body" idx="1"/>
+          </p:nvPr>
+        </p:nvSpPr>
+        <p:spPr/>
+        <p:txBody>
+          <a:bodyPr/>
+          <a:lstStyle/>
+          <a:p/>
+        </p:txBody>
+      </p:sp>
+    </p:spTree>
+  </p:cSld>
+  <p:clrMapOvr>
+    <a:masterClrMapping/>
+  </p:clrMapOvr>
+</p:sld>
+</file>
+
+<file path=ppt/slides/slide46.xml><?xml version="1.0" encoding="utf-8"?>
 <p:sld xmlns:a="http://schemas.openxmlformats.org/drawingml/2006/main" xmlns:p="http://schemas.openxmlformats.org/presentationml/2006/main" xmlns:r="http://schemas.openxmlformats.org/officeDocument/2006/relationships">
   <p:cSld>
     <p:spTree>

--- a/demo_full.pptx
+++ b/demo_full.pptx
@@ -4758,7 +4758,7 @@
             <a:off x="457200" y="2437860"/>
             <a:ext cx="2605920" cy="0"/>
           </a:xfrm>
-          <a:prstGeom prst="line">
+          <a:prstGeom prst="curvedConnector3">
             <a:avLst/>
           </a:prstGeom>
           <a:ln>
@@ -4794,7 +4794,7 @@
             <a:off x="1863120" y="2437860"/>
             <a:ext cx="2605920" cy="0"/>
           </a:xfrm>
-          <a:prstGeom prst="line">
+          <a:prstGeom prst="curvedConnector3">
             <a:avLst/>
           </a:prstGeom>
           <a:ln>
@@ -4830,7 +4830,7 @@
             <a:off x="3269040" y="2437860"/>
             <a:ext cx="2605920" cy="0"/>
           </a:xfrm>
-          <a:prstGeom prst="line">
+          <a:prstGeom prst="curvedConnector3">
             <a:avLst/>
           </a:prstGeom>
           <a:ln>
@@ -4866,7 +4866,7 @@
             <a:off x="4674960" y="2437860"/>
             <a:ext cx="2605920" cy="0"/>
           </a:xfrm>
-          <a:prstGeom prst="line">
+          <a:prstGeom prst="curvedConnector3">
             <a:avLst/>
           </a:prstGeom>
           <a:ln>
@@ -4902,7 +4902,7 @@
             <a:off x="6080880" y="2437860"/>
             <a:ext cx="2605920" cy="0"/>
           </a:xfrm>
-          <a:prstGeom prst="line">
+          <a:prstGeom prst="curvedConnector3">
             <a:avLst/>
           </a:prstGeom>
           <a:ln>
@@ -4938,7 +4938,7 @@
             <a:off x="457200" y="2437860"/>
             <a:ext cx="8229600" cy="1425321"/>
           </a:xfrm>
-          <a:prstGeom prst="line">
+          <a:prstGeom prst="curvedConnector3">
             <a:avLst/>
           </a:prstGeom>
           <a:ln>
@@ -4974,7 +4974,7 @@
             <a:off x="457200" y="3863181"/>
             <a:ext cx="2605920" cy="0"/>
           </a:xfrm>
-          <a:prstGeom prst="line">
+          <a:prstGeom prst="curvedConnector3">
             <a:avLst/>
           </a:prstGeom>
           <a:ln>
@@ -5010,7 +5010,7 @@
             <a:off x="1863120" y="3863181"/>
             <a:ext cx="2605920" cy="0"/>
           </a:xfrm>
-          <a:prstGeom prst="line">
+          <a:prstGeom prst="curvedConnector3">
             <a:avLst/>
           </a:prstGeom>
           <a:ln>
@@ -5046,7 +5046,7 @@
             <a:off x="3269040" y="3863181"/>
             <a:ext cx="2605920" cy="0"/>
           </a:xfrm>
-          <a:prstGeom prst="line">
+          <a:prstGeom prst="curvedConnector3">
             <a:avLst/>
           </a:prstGeom>
           <a:ln>
@@ -5082,7 +5082,7 @@
             <a:off x="4674960" y="3863181"/>
             <a:ext cx="2605920" cy="0"/>
           </a:xfrm>
-          <a:prstGeom prst="line">
+          <a:prstGeom prst="curvedConnector3">
             <a:avLst/>
           </a:prstGeom>
           <a:ln>
@@ -5118,7 +5118,7 @@
             <a:off x="6080880" y="3863181"/>
             <a:ext cx="2605920" cy="0"/>
           </a:xfrm>
-          <a:prstGeom prst="line">
+          <a:prstGeom prst="curvedConnector3">
             <a:avLst/>
           </a:prstGeom>
           <a:ln>
@@ -5154,7 +5154,7 @@
             <a:off x="457200" y="3863181"/>
             <a:ext cx="8229600" cy="1425321"/>
           </a:xfrm>
-          <a:prstGeom prst="line">
+          <a:prstGeom prst="curvedConnector3">
             <a:avLst/>
           </a:prstGeom>
           <a:ln>
@@ -5190,7 +5190,7 @@
             <a:off x="457200" y="5288502"/>
             <a:ext cx="8229600" cy="0"/>
           </a:xfrm>
-          <a:prstGeom prst="line">
+          <a:prstGeom prst="curvedConnector3">
             <a:avLst/>
           </a:prstGeom>
           <a:ln>
@@ -5642,7 +5642,7 @@
             <a:off x="4572000" y="2100200"/>
             <a:ext cx="0" cy="305192"/>
           </a:xfrm>
-          <a:prstGeom prst="line">
+          <a:prstGeom prst="curvedConnector3">
             <a:avLst/>
           </a:prstGeom>
           <a:ln>
@@ -5678,7 +5678,7 @@
             <a:off x="457200" y="2655392"/>
             <a:ext cx="4714800" cy="805193"/>
           </a:xfrm>
-          <a:prstGeom prst="line">
+          <a:prstGeom prst="curvedConnector3">
             <a:avLst/>
           </a:prstGeom>
           <a:ln>
@@ -5714,7 +5714,7 @@
             <a:off x="3972000" y="2655392"/>
             <a:ext cx="4714800" cy="805193"/>
           </a:xfrm>
-          <a:prstGeom prst="line">
+          <a:prstGeom prst="curvedConnector3">
             <a:avLst/>
           </a:prstGeom>
           <a:ln>
@@ -5750,7 +5750,7 @@
             <a:off x="1057200" y="3710585"/>
             <a:ext cx="0" cy="305192"/>
           </a:xfrm>
-          <a:prstGeom prst="line">
+          <a:prstGeom prst="curvedConnector3">
             <a:avLst/>
           </a:prstGeom>
           <a:ln>
@@ -5786,7 +5786,7 @@
             <a:off x="8086800" y="3710585"/>
             <a:ext cx="0" cy="305192"/>
           </a:xfrm>
-          <a:prstGeom prst="line">
+          <a:prstGeom prst="curvedConnector3">
             <a:avLst/>
           </a:prstGeom>
           <a:ln>
@@ -5822,7 +5822,7 @@
             <a:off x="1057200" y="4515777"/>
             <a:ext cx="0" cy="305193"/>
           </a:xfrm>
-          <a:prstGeom prst="line">
+          <a:prstGeom prst="curvedConnector3">
             <a:avLst/>
           </a:prstGeom>
           <a:ln>
@@ -5858,7 +5858,7 @@
             <a:off x="457200" y="4265777"/>
             <a:ext cx="3543200" cy="805193"/>
           </a:xfrm>
-          <a:prstGeom prst="line">
+          <a:prstGeom prst="curvedConnector3">
             <a:avLst/>
           </a:prstGeom>
           <a:ln>
@@ -5894,7 +5894,7 @@
             <a:off x="457200" y="4265777"/>
             <a:ext cx="5886400" cy="805193"/>
           </a:xfrm>
-          <a:prstGeom prst="line">
+          <a:prstGeom prst="curvedConnector3">
             <a:avLst/>
           </a:prstGeom>
           <a:ln>
@@ -5930,7 +5930,7 @@
             <a:off x="8086800" y="4515777"/>
             <a:ext cx="0" cy="305193"/>
           </a:xfrm>
-          <a:prstGeom prst="line">
+          <a:prstGeom prst="curvedConnector3">
             <a:avLst/>
           </a:prstGeom>
           <a:ln>
@@ -5966,7 +5966,7 @@
             <a:off x="457200" y="5070970"/>
             <a:ext cx="4714800" cy="805193"/>
           </a:xfrm>
-          <a:prstGeom prst="line">
+          <a:prstGeom prst="curvedConnector3">
             <a:avLst/>
           </a:prstGeom>
           <a:ln>
@@ -6002,7 +6002,7 @@
             <a:off x="3400400" y="5320970"/>
             <a:ext cx="1171600" cy="305193"/>
           </a:xfrm>
-          <a:prstGeom prst="line">
+          <a:prstGeom prst="curvedConnector3">
             <a:avLst/>
           </a:prstGeom>
           <a:ln>
@@ -6038,7 +6038,7 @@
             <a:off x="4572000" y="5320970"/>
             <a:ext cx="1171600" cy="305193"/>
           </a:xfrm>
-          <a:prstGeom prst="line">
+          <a:prstGeom prst="curvedConnector3">
             <a:avLst/>
           </a:prstGeom>
           <a:ln>
@@ -6074,7 +6074,7 @@
             <a:off x="3972000" y="5070970"/>
             <a:ext cx="4714800" cy="805193"/>
           </a:xfrm>
-          <a:prstGeom prst="line">
+          <a:prstGeom prst="curvedConnector3">
             <a:avLst/>
           </a:prstGeom>
           <a:ln>
@@ -6671,7 +6671,7 @@
             <a:off x="2664600" y="2100200"/>
             <a:ext cx="0" cy="305192"/>
           </a:xfrm>
-          <a:prstGeom prst="line">
+          <a:prstGeom prst="curvedConnector3">
             <a:avLst/>
           </a:prstGeom>
           <a:ln>
@@ -6707,7 +6707,7 @@
             <a:off x="2664600" y="2905392"/>
             <a:ext cx="0" cy="305193"/>
           </a:xfrm>
-          <a:prstGeom prst="line">
+          <a:prstGeom prst="curvedConnector3">
             <a:avLst/>
           </a:prstGeom>
           <a:ln>
@@ -6744,7 +6744,7 @@
             <a:off x="2664600" y="3710585"/>
             <a:ext cx="0" cy="305192"/>
           </a:xfrm>
-          <a:prstGeom prst="line">
+          <a:prstGeom prst="curvedConnector3">
             <a:avLst/>
           </a:prstGeom>
           <a:ln w="38100">
@@ -6780,7 +6780,7 @@
             <a:off x="2664600" y="4515777"/>
             <a:ext cx="0" cy="305193"/>
           </a:xfrm>
-          <a:prstGeom prst="line">
+          <a:prstGeom prst="curvedConnector3">
             <a:avLst/>
           </a:prstGeom>
           <a:ln>
@@ -6816,7 +6816,7 @@
             <a:off x="2664600" y="5320970"/>
             <a:ext cx="0" cy="305193"/>
           </a:xfrm>
-          <a:prstGeom prst="line">
+          <a:prstGeom prst="curvedConnector3">
             <a:avLst/>
           </a:prstGeom>
           <a:ln>
@@ -6852,7 +6852,7 @@
             <a:off x="2664600" y="2100200"/>
             <a:ext cx="3814800" cy="3525963"/>
           </a:xfrm>
-          <a:prstGeom prst="line">
+          <a:prstGeom prst="curvedConnector3">
             <a:avLst/>
           </a:prstGeom>
           <a:ln>
@@ -6889,7 +6889,7 @@
             <a:off x="6479400" y="2100200"/>
             <a:ext cx="0" cy="841987"/>
           </a:xfrm>
-          <a:prstGeom prst="line">
+          <a:prstGeom prst="curvedConnector3">
             <a:avLst/>
           </a:prstGeom>
           <a:ln>
@@ -6925,7 +6925,7 @@
             <a:off x="6479400" y="3442187"/>
             <a:ext cx="0" cy="841988"/>
           </a:xfrm>
-          <a:prstGeom prst="line">
+          <a:prstGeom prst="curvedConnector3">
             <a:avLst/>
           </a:prstGeom>
           <a:ln>
@@ -6961,7 +6961,7 @@
             <a:off x="6479400" y="4784175"/>
             <a:ext cx="0" cy="841988"/>
           </a:xfrm>
-          <a:prstGeom prst="line">
+          <a:prstGeom prst="curvedConnector3">
             <a:avLst/>
           </a:prstGeom>
           <a:ln>
@@ -10815,7 +10815,7 @@
             <a:off x="457200" y="1820200"/>
             <a:ext cx="4964800" cy="0"/>
           </a:xfrm>
-          <a:prstGeom prst="line">
+          <a:prstGeom prst="curvedConnector3">
             <a:avLst/>
           </a:prstGeom>
           <a:ln>
@@ -10851,7 +10851,7 @@
             <a:off x="3722000" y="1820200"/>
             <a:ext cx="4964800" cy="0"/>
           </a:xfrm>
-          <a:prstGeom prst="line">
+          <a:prstGeom prst="curvedConnector3">
             <a:avLst/>
           </a:prstGeom>
           <a:ln>
@@ -10887,7 +10887,7 @@
             <a:off x="457200" y="1820200"/>
             <a:ext cx="4964800" cy="1722981"/>
           </a:xfrm>
-          <a:prstGeom prst="line">
+          <a:prstGeom prst="curvedConnector3">
             <a:avLst/>
           </a:prstGeom>
           <a:ln>
@@ -10923,7 +10923,7 @@
             <a:off x="4572000" y="2040200"/>
             <a:ext cx="0" cy="1282981"/>
           </a:xfrm>
-          <a:prstGeom prst="line">
+          <a:prstGeom prst="curvedConnector3">
             <a:avLst/>
           </a:prstGeom>
           <a:ln>
@@ -10959,7 +10959,7 @@
             <a:off x="4572000" y="3763181"/>
             <a:ext cx="0" cy="1282982"/>
           </a:xfrm>
-          <a:prstGeom prst="line">
+          <a:prstGeom prst="curvedConnector3">
             <a:avLst/>
           </a:prstGeom>
           <a:ln/>
@@ -10993,7 +10993,7 @@
             <a:off x="457200" y="3543181"/>
             <a:ext cx="4964800" cy="1722982"/>
           </a:xfrm>
-          <a:prstGeom prst="line">
+          <a:prstGeom prst="curvedConnector3">
             <a:avLst/>
           </a:prstGeom>
           <a:ln>
@@ -11030,7 +11030,7 @@
             <a:off x="3722000" y="1820200"/>
             <a:ext cx="4964800" cy="1722981"/>
           </a:xfrm>
-          <a:prstGeom prst="line">
+          <a:prstGeom prst="curvedConnector3">
             <a:avLst/>
           </a:prstGeom>
           <a:ln>
@@ -11067,7 +11067,7 @@
             <a:off x="457200" y="5266163"/>
             <a:ext cx="4964800" cy="0"/>
           </a:xfrm>
-          <a:prstGeom prst="line">
+          <a:prstGeom prst="curvedConnector3">
             <a:avLst/>
           </a:prstGeom>
           <a:ln>
@@ -11455,7 +11455,7 @@
             <a:off x="6150039" y="2571018"/>
             <a:ext cx="601027" cy="2327514"/>
           </a:xfrm>
-          <a:prstGeom prst="line">
+          <a:prstGeom prst="curvedConnector3">
             <a:avLst/>
           </a:prstGeom>
         </p:spPr>
@@ -11488,7 +11488,7 @@
             <a:off x="3369305" y="2321018"/>
             <a:ext cx="3981761" cy="327408"/>
           </a:xfrm>
-          <a:prstGeom prst="line">
+          <a:prstGeom prst="curvedConnector3">
             <a:avLst/>
           </a:prstGeom>
         </p:spPr>
@@ -11521,7 +11521,7 @@
             <a:off x="457200" y="2648426"/>
             <a:ext cx="4112105" cy="952495"/>
           </a:xfrm>
-          <a:prstGeom prst="line">
+          <a:prstGeom prst="curvedConnector3">
             <a:avLst/>
           </a:prstGeom>
         </p:spPr>
@@ -11554,7 +11554,7 @@
             <a:off x="3369305" y="2648426"/>
             <a:ext cx="4959565" cy="1448483"/>
           </a:xfrm>
-          <a:prstGeom prst="line">
+          <a:prstGeom prst="curvedConnector3">
             <a:avLst/>
           </a:prstGeom>
         </p:spPr>
@@ -11587,7 +11587,7 @@
             <a:off x="6751066" y="2571018"/>
             <a:ext cx="977804" cy="1275891"/>
           </a:xfrm>
-          <a:prstGeom prst="line">
+          <a:prstGeom prst="curvedConnector3">
             <a:avLst/>
           </a:prstGeom>
         </p:spPr>
@@ -11620,7 +11620,7 @@
             <a:off x="1057200" y="3850921"/>
             <a:ext cx="718318" cy="1262359"/>
           </a:xfrm>
-          <a:prstGeom prst="line">
+          <a:prstGeom prst="curvedConnector3">
             <a:avLst/>
           </a:prstGeom>
         </p:spPr>
@@ -11869,7 +11869,7 @@
             <a:off x="7025688" y="3348046"/>
             <a:ext cx="74890" cy="2165109"/>
           </a:xfrm>
-          <a:prstGeom prst="line">
+          <a:prstGeom prst="curvedConnector3">
             <a:avLst/>
           </a:prstGeom>
         </p:spPr>
@@ -11902,7 +11902,7 @@
             <a:off x="2504533" y="2207962"/>
             <a:ext cx="5196045" cy="890084"/>
           </a:xfrm>
-          <a:prstGeom prst="line">
+          <a:prstGeom prst="curvedConnector3">
             <a:avLst/>
           </a:prstGeom>
         </p:spPr>
@@ -11935,7 +11935,7 @@
             <a:off x="1057200" y="2457962"/>
             <a:ext cx="2047333" cy="1675600"/>
           </a:xfrm>
-          <a:prstGeom prst="line">
+          <a:prstGeom prst="curvedConnector3">
             <a:avLst/>
           </a:prstGeom>
         </p:spPr>
@@ -13066,7 +13066,7 @@
             <a:off x="3400400" y="2351822"/>
             <a:ext cx="2343200" cy="1072642"/>
           </a:xfrm>
-          <a:prstGeom prst="line">
+          <a:prstGeom prst="curvedConnector3">
             <a:avLst/>
           </a:prstGeom>
         </p:spPr>
@@ -13099,7 +13099,7 @@
             <a:off x="5143600" y="1850200"/>
             <a:ext cx="3543200" cy="251622"/>
           </a:xfrm>
-          <a:prstGeom prst="line">
+          <a:prstGeom prst="curvedConnector3">
             <a:avLst/>
           </a:prstGeom>
         </p:spPr>
@@ -13132,7 +13132,7 @@
             <a:off x="5143600" y="2101822"/>
             <a:ext cx="3543200" cy="251623"/>
           </a:xfrm>
-          <a:prstGeom prst="line">
+          <a:prstGeom prst="curvedConnector3">
             <a:avLst/>
           </a:prstGeom>
         </p:spPr>
@@ -13165,7 +13165,7 @@
             <a:off x="2800400" y="2856690"/>
             <a:ext cx="3543200" cy="817774"/>
           </a:xfrm>
-          <a:prstGeom prst="line">
+          <a:prstGeom prst="curvedConnector3">
             <a:avLst/>
           </a:prstGeom>
         </p:spPr>
@@ -13198,7 +13198,7 @@
             <a:off x="5143600" y="2856690"/>
             <a:ext cx="3543200" cy="0"/>
           </a:xfrm>
-          <a:prstGeom prst="line">
+          <a:prstGeom prst="curvedConnector3">
             <a:avLst/>
           </a:prstGeom>
         </p:spPr>
@@ -13231,7 +13231,7 @@
             <a:off x="2800400" y="3674464"/>
             <a:ext cx="3543200" cy="440340"/>
           </a:xfrm>
-          <a:prstGeom prst="line">
+          <a:prstGeom prst="curvedConnector3">
             <a:avLst/>
           </a:prstGeom>
         </p:spPr>
@@ -13264,7 +13264,7 @@
             <a:off x="5143600" y="3359936"/>
             <a:ext cx="3543200" cy="754868"/>
           </a:xfrm>
-          <a:prstGeom prst="line">
+          <a:prstGeom prst="curvedConnector3">
             <a:avLst/>
           </a:prstGeom>
         </p:spPr>
@@ -13297,7 +13297,7 @@
             <a:off x="5143600" y="3863181"/>
             <a:ext cx="3543200" cy="251623"/>
           </a:xfrm>
-          <a:prstGeom prst="line">
+          <a:prstGeom prst="curvedConnector3">
             <a:avLst/>
           </a:prstGeom>
         </p:spPr>
@@ -13330,7 +13330,7 @@
             <a:off x="5143600" y="4114804"/>
             <a:ext cx="3543200" cy="251622"/>
           </a:xfrm>
-          <a:prstGeom prst="line">
+          <a:prstGeom prst="curvedConnector3">
             <a:avLst/>
           </a:prstGeom>
         </p:spPr>
@@ -13363,7 +13363,7 @@
             <a:off x="5143600" y="4114804"/>
             <a:ext cx="3543200" cy="754868"/>
           </a:xfrm>
-          <a:prstGeom prst="line">
+          <a:prstGeom prst="curvedConnector3">
             <a:avLst/>
           </a:prstGeom>
         </p:spPr>
@@ -13396,7 +13396,7 @@
             <a:off x="3400400" y="3924464"/>
             <a:ext cx="2343200" cy="1450076"/>
           </a:xfrm>
-          <a:prstGeom prst="line">
+          <a:prstGeom prst="curvedConnector3">
             <a:avLst/>
           </a:prstGeom>
         </p:spPr>
@@ -13429,7 +13429,7 @@
             <a:off x="5143600" y="5372917"/>
             <a:ext cx="3543200" cy="251623"/>
           </a:xfrm>
-          <a:prstGeom prst="line">
+          <a:prstGeom prst="curvedConnector3">
             <a:avLst/>
           </a:prstGeom>
         </p:spPr>
@@ -13462,7 +13462,7 @@
             <a:off x="5143600" y="5624540"/>
             <a:ext cx="3543200" cy="251623"/>
           </a:xfrm>
-          <a:prstGeom prst="line">
+          <a:prstGeom prst="curvedConnector3">
             <a:avLst/>
           </a:prstGeom>
         </p:spPr>
@@ -14591,7 +14591,7 @@
             <a:off x="457200" y="3863181"/>
             <a:ext cx="4714800" cy="0"/>
           </a:xfrm>
-          <a:prstGeom prst="line">
+          <a:prstGeom prst="curvedConnector3">
             <a:avLst/>
           </a:prstGeom>
           <a:ln>
@@ -14627,7 +14627,7 @@
             <a:off x="3972000" y="3863181"/>
             <a:ext cx="4714800" cy="0"/>
           </a:xfrm>
-          <a:prstGeom prst="line">
+          <a:prstGeom prst="curvedConnector3">
             <a:avLst/>
           </a:prstGeom>
           <a:ln>

--- a/demo_full.pptx
+++ b/demo_full.pptx
@@ -6099,10 +6099,10 @@
       <p:grpSp>
         <p:grpSpPr>
           <a:xfrm>
-            <a:off x="3270181" y="2405392"/>
-            <a:ext cx="2603638" cy="535777"/>
-            <a:chOff x="3270181" y="2405392"/>
-            <a:chExt cx="2603638" cy="535777"/>
+            <a:off x="3372000" y="2405392"/>
+            <a:ext cx="2400000" cy="512451"/>
+            <a:chOff x="3372000" y="2405392"/>
+            <a:chExt cx="2400000" cy="512451"/>
           </a:xfrm>
         </p:grpSpPr>
         <p:sp>
@@ -6153,7 +6153,7 @@
           </p:nvSpPr>
           <p:spPr>
             <a:xfrm>
-              <a:off x="3270181" y="2691169"/>
+              <a:off x="3372000" y="2667843"/>
               <a:ext cx="1200000" cy="250000"/>
             </a:xfrm>
             <a:prstGeom prst="rect">
@@ -6186,7 +6186,7 @@
           </p:nvSpPr>
           <p:spPr>
             <a:xfrm>
-              <a:off x="4673819" y="2691169"/>
+              <a:off x="4572000" y="2667843"/>
               <a:ext cx="1200000" cy="250000"/>
             </a:xfrm>
             <a:prstGeom prst="rect">
@@ -6216,9 +6216,9 @@
         <p:grpSpPr>
           <a:xfrm>
             <a:off x="457200" y="4015777"/>
-            <a:ext cx="1909602" cy="1095000"/>
+            <a:ext cx="1800000" cy="625000"/>
             <a:chOff x="457200" y="4015777"/>
-            <a:chExt cx="1909602" cy="1095000"/>
+            <a:chExt cx="1800000" cy="625000"/>
           </a:xfrm>
         </p:grpSpPr>
         <p:sp>
@@ -6269,7 +6269,7 @@
           </p:nvSpPr>
           <p:spPr>
             <a:xfrm>
-              <a:off x="457200" y="4860777"/>
+              <a:off x="457200" y="4390777"/>
               <a:ext cx="1200000" cy="250000"/>
             </a:xfrm>
             <a:prstGeom prst="rect">
@@ -6302,7 +6302,7 @@
           </p:nvSpPr>
           <p:spPr>
             <a:xfrm>
-              <a:off x="1138119" y="4374761"/>
+              <a:off x="1057200" y="4346954"/>
               <a:ext cx="1200000" cy="250000"/>
             </a:xfrm>
             <a:prstGeom prst="rect">
@@ -6335,7 +6335,7 @@
           </p:nvSpPr>
           <p:spPr>
             <a:xfrm>
-              <a:off x="1166802" y="4262697"/>
+              <a:off x="1057200" y="4243865"/>
               <a:ext cx="1200000" cy="250000"/>
             </a:xfrm>
             <a:prstGeom prst="rect">
@@ -6987,9 +6987,9 @@
         <p:grpSpPr>
           <a:xfrm>
             <a:off x="2064600" y="1600200"/>
-            <a:ext cx="1200000" cy="1095000"/>
+            <a:ext cx="1200000" cy="625000"/>
             <a:chOff x="2064600" y="1600200"/>
-            <a:chExt cx="1200000" cy="1095000"/>
+            <a:chExt cx="1200000" cy="625000"/>
           </a:xfrm>
         </p:grpSpPr>
         <p:sp>
@@ -7040,7 +7040,7 @@
           </p:nvSpPr>
           <p:spPr>
             <a:xfrm>
-              <a:off x="2064600" y="2445200"/>
+              <a:off x="2064600" y="1975200"/>
               <a:ext cx="1200000" cy="250000"/>
             </a:xfrm>
             <a:prstGeom prst="rect">
@@ -7070,9 +7070,9 @@
         <p:grpSpPr>
           <a:xfrm>
             <a:off x="2064600" y="2405392"/>
-            <a:ext cx="1200000" cy="1095000"/>
+            <a:ext cx="1200000" cy="625000"/>
             <a:chOff x="2064600" y="2405392"/>
-            <a:chExt cx="1200000" cy="1095000"/>
+            <a:chExt cx="1200000" cy="625000"/>
           </a:xfrm>
         </p:grpSpPr>
         <p:sp>
@@ -7123,7 +7123,7 @@
           </p:nvSpPr>
           <p:spPr>
             <a:xfrm>
-              <a:off x="2064600" y="3250392"/>
+              <a:off x="2064600" y="2780392"/>
               <a:ext cx="1200000" cy="250000"/>
             </a:xfrm>
             <a:prstGeom prst="rect">
@@ -7153,9 +7153,9 @@
         <p:grpSpPr>
           <a:xfrm>
             <a:off x="2064600" y="3210585"/>
-            <a:ext cx="1200000" cy="1095000"/>
+            <a:ext cx="1200000" cy="625000"/>
             <a:chOff x="2064600" y="3210585"/>
-            <a:chExt cx="1200000" cy="1095000"/>
+            <a:chExt cx="1200000" cy="625000"/>
           </a:xfrm>
         </p:grpSpPr>
         <p:sp>
@@ -7206,7 +7206,7 @@
           </p:nvSpPr>
           <p:spPr>
             <a:xfrm>
-              <a:off x="2064600" y="4055585"/>
+              <a:off x="2064600" y="3585585"/>
               <a:ext cx="1200000" cy="250000"/>
             </a:xfrm>
             <a:prstGeom prst="rect">
@@ -7235,10 +7235,10 @@
       <p:grpSp>
         <p:grpSpPr>
           <a:xfrm>
-            <a:off x="2064600" y="5228525"/>
-            <a:ext cx="1695226" cy="897638"/>
-            <a:chOff x="2064600" y="5228525"/>
-            <a:chExt cx="1695226" cy="897638"/>
+            <a:off x="2064600" y="5501164"/>
+            <a:ext cx="1436887" cy="624999"/>
+            <a:chOff x="2064600" y="5501164"/>
+            <a:chExt cx="1436887" cy="624999"/>
           </a:xfrm>
         </p:grpSpPr>
         <p:sp>
@@ -7289,7 +7289,7 @@
           </p:nvSpPr>
           <p:spPr>
             <a:xfrm>
-              <a:off x="2559826" y="5228525"/>
+              <a:off x="2301487" y="5501164"/>
               <a:ext cx="1200000" cy="250000"/>
             </a:xfrm>
             <a:prstGeom prst="rect">

--- a/demo_full.pptx
+++ b/demo_full.pptx
@@ -9602,7 +9602,7 @@
           <a:lstStyle/>
           <a:p>
             <a:r>
-              <a:t>3. ガントチャート（Gantt Diagram）</a:t>
+              <a:t>3. ガントチャート（Gantt Diagram）— 全タグ・after参照デモ</a:t>
             </a:r>
           </a:p>
         </p:txBody>
@@ -9624,45 +9624,1612 @@
           <a:p/>
         </p:txBody>
       </p:sp>
-      <p:sp>
-        <p:nvSpPr>
-          <p:cNvPr id="4" name="TextBox 3"/>
-          <p:cNvSpPr txBox="1"/>
-          <p:nvPr/>
-        </p:nvSpPr>
-        <p:spPr>
-          <a:xfrm>
-            <a:off x="457200" y="1600200"/>
-            <a:ext cx="8229600" cy="4525963"/>
-          </a:xfrm>
-          <a:prstGeom prst="rect">
-            <a:avLst/>
-          </a:prstGeom>
-          <a:noFill/>
-        </p:spPr>
-        <p:txBody>
-          <a:bodyPr wrap="square">
-            <a:spAutoFit/>
-          </a:bodyPr>
-          <a:lstStyle/>
-          <a:p>
-            <a:r>
-              <a:rPr sz="1000">
-                <a:latin typeface="Courier New"/>
-              </a:rPr>
-              <a:t>gantt
-    title プロジェクト計画
-    dateFormat YYYY-MM-DD
-    section 設計
-        要件定義  :done, des1, 2024-01-01, 2024-01-07
-        基本設計  :done, des2, 2024-01-08, 7d
-    section 実装
-        コーディング :active, dev1, 2024-01-15, 14d
-        テスト       :        dev2, after dev1, 7d
-    section リリース
-        デプロイ :milestone, 2024-02-05, 1d</a:t>
-            </a:r>
-          </a:p>
+      <p:graphicFrame>
+        <p:nvGraphicFramePr>
+          <p:cNvPr id="4" name="Table 3"/>
+          <p:cNvGraphicFramePr>
+            <a:graphicFrameLocks noGrp="1"/>
+          </p:cNvGraphicFramePr>
+          <p:nvPr/>
+        </p:nvGraphicFramePr>
+        <p:xfrm>
+          <a:off x="457200" y="1600200"/>
+          <a:ext cx="8229600" cy="4525956"/>
+        </p:xfrm>
+        <a:graphic>
+          <a:graphicData uri="http://schemas.openxmlformats.org/drawingml/2006/table">
+            <a:tbl>
+              <a:tblPr firstRow="1" bandRow="1">
+                <a:tableStyleId>{5C22544A-7EE6-4342-B048-85BDC9FD1C3A}</a:tableStyleId>
+              </a:tblPr>
+              <a:tblGrid>
+                <a:gridCol w="1810512"/>
+                <a:gridCol w="713232"/>
+                <a:gridCol w="713232"/>
+                <a:gridCol w="713232"/>
+                <a:gridCol w="713232"/>
+                <a:gridCol w="713232"/>
+                <a:gridCol w="713232"/>
+                <a:gridCol w="713232"/>
+                <a:gridCol w="713232"/>
+                <a:gridCol w="713232"/>
+              </a:tblGrid>
+              <a:tr h="377163">
+                <a:tc>
+                  <a:txBody>
+                    <a:bodyPr wrap="none"/>
+                    <a:lstStyle/>
+                    <a:p>
+                      <a:pPr algn="ctr"/>
+                      <a:r>
+                        <a:rPr sz="900" b="1">
+                          <a:solidFill>
+                            <a:srgbClr val="FFFFFF"/>
+                          </a:solidFill>
+                        </a:rPr>
+                        <a:t>タスク</a:t>
+                      </a:r>
+                    </a:p>
+                  </a:txBody>
+                  <a:tcPr>
+                    <a:solidFill>
+                      <a:srgbClr val="282850"/>
+                    </a:solidFill>
+                  </a:tcPr>
+                </a:tc>
+                <a:tc>
+                  <a:txBody>
+                    <a:bodyPr wrap="none"/>
+                    <a:lstStyle/>
+                    <a:p>
+                      <a:pPr algn="ctr"/>
+                      <a:r>
+                        <a:rPr sz="700" b="1">
+                          <a:solidFill>
+                            <a:srgbClr val="FFFFFF"/>
+                          </a:solidFill>
+                        </a:rPr>
+                        <a:t>01/01</a:t>
+                      </a:r>
+                    </a:p>
+                  </a:txBody>
+                  <a:tcPr>
+                    <a:solidFill>
+                      <a:srgbClr val="282850"/>
+                    </a:solidFill>
+                  </a:tcPr>
+                </a:tc>
+                <a:tc>
+                  <a:txBody>
+                    <a:bodyPr wrap="none"/>
+                    <a:lstStyle/>
+                    <a:p>
+                      <a:pPr algn="ctr"/>
+                      <a:r>
+                        <a:rPr sz="700" b="1">
+                          <a:solidFill>
+                            <a:srgbClr val="FFFFFF"/>
+                          </a:solidFill>
+                        </a:rPr>
+                        <a:t>01/08</a:t>
+                      </a:r>
+                    </a:p>
+                  </a:txBody>
+                  <a:tcPr>
+                    <a:solidFill>
+                      <a:srgbClr val="282850"/>
+                    </a:solidFill>
+                  </a:tcPr>
+                </a:tc>
+                <a:tc>
+                  <a:txBody>
+                    <a:bodyPr wrap="none"/>
+                    <a:lstStyle/>
+                    <a:p>
+                      <a:pPr algn="ctr"/>
+                      <a:r>
+                        <a:rPr sz="700" b="1">
+                          <a:solidFill>
+                            <a:srgbClr val="FFFFFF"/>
+                          </a:solidFill>
+                        </a:rPr>
+                        <a:t>01/15</a:t>
+                      </a:r>
+                    </a:p>
+                  </a:txBody>
+                  <a:tcPr>
+                    <a:solidFill>
+                      <a:srgbClr val="282850"/>
+                    </a:solidFill>
+                  </a:tcPr>
+                </a:tc>
+                <a:tc>
+                  <a:txBody>
+                    <a:bodyPr wrap="none"/>
+                    <a:lstStyle/>
+                    <a:p>
+                      <a:pPr algn="ctr"/>
+                      <a:r>
+                        <a:rPr sz="700" b="1">
+                          <a:solidFill>
+                            <a:srgbClr val="FFFFFF"/>
+                          </a:solidFill>
+                        </a:rPr>
+                        <a:t>01/22</a:t>
+                      </a:r>
+                    </a:p>
+                  </a:txBody>
+                  <a:tcPr>
+                    <a:solidFill>
+                      <a:srgbClr val="282850"/>
+                    </a:solidFill>
+                  </a:tcPr>
+                </a:tc>
+                <a:tc>
+                  <a:txBody>
+                    <a:bodyPr wrap="none"/>
+                    <a:lstStyle/>
+                    <a:p>
+                      <a:pPr algn="ctr"/>
+                      <a:r>
+                        <a:rPr sz="700" b="1">
+                          <a:solidFill>
+                            <a:srgbClr val="FFFFFF"/>
+                          </a:solidFill>
+                        </a:rPr>
+                        <a:t>01/29</a:t>
+                      </a:r>
+                    </a:p>
+                  </a:txBody>
+                  <a:tcPr>
+                    <a:solidFill>
+                      <a:srgbClr val="282850"/>
+                    </a:solidFill>
+                  </a:tcPr>
+                </a:tc>
+                <a:tc>
+                  <a:txBody>
+                    <a:bodyPr wrap="none"/>
+                    <a:lstStyle/>
+                    <a:p>
+                      <a:pPr algn="ctr"/>
+                      <a:r>
+                        <a:rPr sz="700" b="1">
+                          <a:solidFill>
+                            <a:srgbClr val="FFFFFF"/>
+                          </a:solidFill>
+                        </a:rPr>
+                        <a:t>02/05</a:t>
+                      </a:r>
+                    </a:p>
+                  </a:txBody>
+                  <a:tcPr>
+                    <a:solidFill>
+                      <a:srgbClr val="282850"/>
+                    </a:solidFill>
+                  </a:tcPr>
+                </a:tc>
+                <a:tc>
+                  <a:txBody>
+                    <a:bodyPr wrap="none"/>
+                    <a:lstStyle/>
+                    <a:p>
+                      <a:pPr algn="ctr"/>
+                      <a:r>
+                        <a:rPr sz="700" b="1">
+                          <a:solidFill>
+                            <a:srgbClr val="FFFFFF"/>
+                          </a:solidFill>
+                        </a:rPr>
+                        <a:t>02/12</a:t>
+                      </a:r>
+                    </a:p>
+                  </a:txBody>
+                  <a:tcPr>
+                    <a:solidFill>
+                      <a:srgbClr val="282850"/>
+                    </a:solidFill>
+                  </a:tcPr>
+                </a:tc>
+                <a:tc>
+                  <a:txBody>
+                    <a:bodyPr wrap="none"/>
+                    <a:lstStyle/>
+                    <a:p>
+                      <a:pPr algn="ctr"/>
+                      <a:r>
+                        <a:rPr sz="700" b="1">
+                          <a:solidFill>
+                            <a:srgbClr val="FFFFFF"/>
+                          </a:solidFill>
+                        </a:rPr>
+                        <a:t>02/19</a:t>
+                      </a:r>
+                    </a:p>
+                  </a:txBody>
+                  <a:tcPr>
+                    <a:solidFill>
+                      <a:srgbClr val="282850"/>
+                    </a:solidFill>
+                  </a:tcPr>
+                </a:tc>
+                <a:tc>
+                  <a:txBody>
+                    <a:bodyPr wrap="none"/>
+                    <a:lstStyle/>
+                    <a:p>
+                      <a:pPr algn="ctr"/>
+                      <a:r>
+                        <a:rPr sz="700" b="1">
+                          <a:solidFill>
+                            <a:srgbClr val="FFFFFF"/>
+                          </a:solidFill>
+                        </a:rPr>
+                        <a:t>02/26</a:t>
+                      </a:r>
+                    </a:p>
+                  </a:txBody>
+                  <a:tcPr>
+                    <a:solidFill>
+                      <a:srgbClr val="282850"/>
+                    </a:solidFill>
+                  </a:tcPr>
+                </a:tc>
+              </a:tr>
+              <a:tr h="377163">
+                <a:tc gridSpan="10">
+                  <a:txBody>
+                    <a:bodyPr wrap="none"/>
+                    <a:lstStyle/>
+                    <a:p>
+                      <a:pPr algn="l"/>
+                      <a:r>
+                        <a:rPr sz="1000" b="1">
+                          <a:solidFill>
+                            <a:srgbClr val="FFFFFF"/>
+                          </a:solidFill>
+                        </a:rPr>
+                        <a:t>  設計フェーズ</a:t>
+                      </a:r>
+                    </a:p>
+                  </a:txBody>
+                  <a:tcPr>
+                    <a:solidFill>
+                      <a:srgbClr val="3C3C6E"/>
+                    </a:solidFill>
+                  </a:tcPr>
+                </a:tc>
+                <a:tc hMerge="1">
+                  <a:txBody>
+                    <a:bodyPr/>
+                    <a:lstStyle/>
+                    <a:p/>
+                  </a:txBody>
+                  <a:tcPr/>
+                </a:tc>
+                <a:tc hMerge="1">
+                  <a:txBody>
+                    <a:bodyPr/>
+                    <a:lstStyle/>
+                    <a:p/>
+                  </a:txBody>
+                  <a:tcPr/>
+                </a:tc>
+                <a:tc hMerge="1">
+                  <a:txBody>
+                    <a:bodyPr/>
+                    <a:lstStyle/>
+                    <a:p/>
+                  </a:txBody>
+                  <a:tcPr/>
+                </a:tc>
+                <a:tc hMerge="1">
+                  <a:txBody>
+                    <a:bodyPr/>
+                    <a:lstStyle/>
+                    <a:p/>
+                  </a:txBody>
+                  <a:tcPr/>
+                </a:tc>
+                <a:tc hMerge="1">
+                  <a:txBody>
+                    <a:bodyPr/>
+                    <a:lstStyle/>
+                    <a:p/>
+                  </a:txBody>
+                  <a:tcPr/>
+                </a:tc>
+                <a:tc hMerge="1">
+                  <a:txBody>
+                    <a:bodyPr/>
+                    <a:lstStyle/>
+                    <a:p/>
+                  </a:txBody>
+                  <a:tcPr/>
+                </a:tc>
+                <a:tc hMerge="1">
+                  <a:txBody>
+                    <a:bodyPr/>
+                    <a:lstStyle/>
+                    <a:p/>
+                  </a:txBody>
+                  <a:tcPr/>
+                </a:tc>
+                <a:tc hMerge="1">
+                  <a:txBody>
+                    <a:bodyPr/>
+                    <a:lstStyle/>
+                    <a:p/>
+                  </a:txBody>
+                  <a:tcPr/>
+                </a:tc>
+                <a:tc hMerge="1">
+                  <a:txBody>
+                    <a:bodyPr/>
+                    <a:lstStyle/>
+                    <a:p/>
+                  </a:txBody>
+                  <a:tcPr/>
+                </a:tc>
+              </a:tr>
+              <a:tr h="377163">
+                <a:tc>
+                  <a:txBody>
+                    <a:bodyPr wrap="none"/>
+                    <a:lstStyle/>
+                    <a:p>
+                      <a:pPr algn="l"/>
+                      <a:r>
+                        <a:rPr sz="900" b="0"/>
+                        <a:t> 要件定義</a:t>
+                      </a:r>
+                    </a:p>
+                  </a:txBody>
+                  <a:tcPr>
+                    <a:solidFill>
+                      <a:srgbClr val="F5F5FA"/>
+                    </a:solidFill>
+                  </a:tcPr>
+                </a:tc>
+                <a:tc>
+                  <a:txBody>
+                    <a:bodyPr/>
+                    <a:lstStyle/>
+                    <a:p/>
+                  </a:txBody>
+                  <a:tcPr/>
+                </a:tc>
+                <a:tc>
+                  <a:txBody>
+                    <a:bodyPr/>
+                    <a:lstStyle/>
+                    <a:p/>
+                  </a:txBody>
+                  <a:tcPr/>
+                </a:tc>
+                <a:tc>
+                  <a:txBody>
+                    <a:bodyPr/>
+                    <a:lstStyle/>
+                    <a:p/>
+                  </a:txBody>
+                  <a:tcPr/>
+                </a:tc>
+                <a:tc>
+                  <a:txBody>
+                    <a:bodyPr/>
+                    <a:lstStyle/>
+                    <a:p/>
+                  </a:txBody>
+                  <a:tcPr/>
+                </a:tc>
+                <a:tc>
+                  <a:txBody>
+                    <a:bodyPr/>
+                    <a:lstStyle/>
+                    <a:p/>
+                  </a:txBody>
+                  <a:tcPr/>
+                </a:tc>
+                <a:tc>
+                  <a:txBody>
+                    <a:bodyPr/>
+                    <a:lstStyle/>
+                    <a:p/>
+                  </a:txBody>
+                  <a:tcPr/>
+                </a:tc>
+                <a:tc>
+                  <a:txBody>
+                    <a:bodyPr/>
+                    <a:lstStyle/>
+                    <a:p/>
+                  </a:txBody>
+                  <a:tcPr/>
+                </a:tc>
+                <a:tc>
+                  <a:txBody>
+                    <a:bodyPr/>
+                    <a:lstStyle/>
+                    <a:p/>
+                  </a:txBody>
+                  <a:tcPr/>
+                </a:tc>
+                <a:tc>
+                  <a:txBody>
+                    <a:bodyPr/>
+                    <a:lstStyle/>
+                    <a:p/>
+                  </a:txBody>
+                  <a:tcPr/>
+                </a:tc>
+              </a:tr>
+              <a:tr h="377163">
+                <a:tc>
+                  <a:txBody>
+                    <a:bodyPr wrap="none"/>
+                    <a:lstStyle/>
+                    <a:p>
+                      <a:pPr algn="l"/>
+                      <a:r>
+                        <a:rPr sz="900" b="0"/>
+                        <a:t> 基本設計</a:t>
+                      </a:r>
+                    </a:p>
+                  </a:txBody>
+                  <a:tcPr>
+                    <a:solidFill>
+                      <a:srgbClr val="F5F5FA"/>
+                    </a:solidFill>
+                  </a:tcPr>
+                </a:tc>
+                <a:tc>
+                  <a:txBody>
+                    <a:bodyPr/>
+                    <a:lstStyle/>
+                    <a:p/>
+                  </a:txBody>
+                  <a:tcPr/>
+                </a:tc>
+                <a:tc>
+                  <a:txBody>
+                    <a:bodyPr/>
+                    <a:lstStyle/>
+                    <a:p/>
+                  </a:txBody>
+                  <a:tcPr/>
+                </a:tc>
+                <a:tc>
+                  <a:txBody>
+                    <a:bodyPr/>
+                    <a:lstStyle/>
+                    <a:p/>
+                  </a:txBody>
+                  <a:tcPr/>
+                </a:tc>
+                <a:tc>
+                  <a:txBody>
+                    <a:bodyPr/>
+                    <a:lstStyle/>
+                    <a:p/>
+                  </a:txBody>
+                  <a:tcPr/>
+                </a:tc>
+                <a:tc>
+                  <a:txBody>
+                    <a:bodyPr/>
+                    <a:lstStyle/>
+                    <a:p/>
+                  </a:txBody>
+                  <a:tcPr/>
+                </a:tc>
+                <a:tc>
+                  <a:txBody>
+                    <a:bodyPr/>
+                    <a:lstStyle/>
+                    <a:p/>
+                  </a:txBody>
+                  <a:tcPr/>
+                </a:tc>
+                <a:tc>
+                  <a:txBody>
+                    <a:bodyPr/>
+                    <a:lstStyle/>
+                    <a:p/>
+                  </a:txBody>
+                  <a:tcPr/>
+                </a:tc>
+                <a:tc>
+                  <a:txBody>
+                    <a:bodyPr/>
+                    <a:lstStyle/>
+                    <a:p/>
+                  </a:txBody>
+                  <a:tcPr/>
+                </a:tc>
+                <a:tc>
+                  <a:txBody>
+                    <a:bodyPr/>
+                    <a:lstStyle/>
+                    <a:p/>
+                  </a:txBody>
+                  <a:tcPr/>
+                </a:tc>
+              </a:tr>
+              <a:tr h="377163">
+                <a:tc>
+                  <a:txBody>
+                    <a:bodyPr wrap="none"/>
+                    <a:lstStyle/>
+                    <a:p>
+                      <a:pPr algn="l"/>
+                      <a:r>
+                        <a:rPr sz="900" b="0"/>
+                        <a:t> 詳細設計</a:t>
+                      </a:r>
+                    </a:p>
+                  </a:txBody>
+                  <a:tcPr>
+                    <a:solidFill>
+                      <a:srgbClr val="F5F5FA"/>
+                    </a:solidFill>
+                  </a:tcPr>
+                </a:tc>
+                <a:tc>
+                  <a:txBody>
+                    <a:bodyPr/>
+                    <a:lstStyle/>
+                    <a:p/>
+                  </a:txBody>
+                  <a:tcPr/>
+                </a:tc>
+                <a:tc>
+                  <a:txBody>
+                    <a:bodyPr/>
+                    <a:lstStyle/>
+                    <a:p/>
+                  </a:txBody>
+                  <a:tcPr/>
+                </a:tc>
+                <a:tc>
+                  <a:txBody>
+                    <a:bodyPr/>
+                    <a:lstStyle/>
+                    <a:p/>
+                  </a:txBody>
+                  <a:tcPr/>
+                </a:tc>
+                <a:tc>
+                  <a:txBody>
+                    <a:bodyPr/>
+                    <a:lstStyle/>
+                    <a:p/>
+                  </a:txBody>
+                  <a:tcPr/>
+                </a:tc>
+                <a:tc>
+                  <a:txBody>
+                    <a:bodyPr/>
+                    <a:lstStyle/>
+                    <a:p/>
+                  </a:txBody>
+                  <a:tcPr/>
+                </a:tc>
+                <a:tc>
+                  <a:txBody>
+                    <a:bodyPr/>
+                    <a:lstStyle/>
+                    <a:p/>
+                  </a:txBody>
+                  <a:tcPr/>
+                </a:tc>
+                <a:tc>
+                  <a:txBody>
+                    <a:bodyPr/>
+                    <a:lstStyle/>
+                    <a:p/>
+                  </a:txBody>
+                  <a:tcPr/>
+                </a:tc>
+                <a:tc>
+                  <a:txBody>
+                    <a:bodyPr/>
+                    <a:lstStyle/>
+                    <a:p/>
+                  </a:txBody>
+                  <a:tcPr/>
+                </a:tc>
+                <a:tc>
+                  <a:txBody>
+                    <a:bodyPr/>
+                    <a:lstStyle/>
+                    <a:p/>
+                  </a:txBody>
+                  <a:tcPr/>
+                </a:tc>
+              </a:tr>
+              <a:tr h="377163">
+                <a:tc gridSpan="10">
+                  <a:txBody>
+                    <a:bodyPr wrap="none"/>
+                    <a:lstStyle/>
+                    <a:p>
+                      <a:pPr algn="l"/>
+                      <a:r>
+                        <a:rPr sz="1000" b="1">
+                          <a:solidFill>
+                            <a:srgbClr val="FFFFFF"/>
+                          </a:solidFill>
+                        </a:rPr>
+                        <a:t>  実装フェーズ</a:t>
+                      </a:r>
+                    </a:p>
+                  </a:txBody>
+                  <a:tcPr>
+                    <a:solidFill>
+                      <a:srgbClr val="3C3C6E"/>
+                    </a:solidFill>
+                  </a:tcPr>
+                </a:tc>
+                <a:tc hMerge="1">
+                  <a:txBody>
+                    <a:bodyPr/>
+                    <a:lstStyle/>
+                    <a:p/>
+                  </a:txBody>
+                  <a:tcPr/>
+                </a:tc>
+                <a:tc hMerge="1">
+                  <a:txBody>
+                    <a:bodyPr/>
+                    <a:lstStyle/>
+                    <a:p/>
+                  </a:txBody>
+                  <a:tcPr/>
+                </a:tc>
+                <a:tc hMerge="1">
+                  <a:txBody>
+                    <a:bodyPr/>
+                    <a:lstStyle/>
+                    <a:p/>
+                  </a:txBody>
+                  <a:tcPr/>
+                </a:tc>
+                <a:tc hMerge="1">
+                  <a:txBody>
+                    <a:bodyPr/>
+                    <a:lstStyle/>
+                    <a:p/>
+                  </a:txBody>
+                  <a:tcPr/>
+                </a:tc>
+                <a:tc hMerge="1">
+                  <a:txBody>
+                    <a:bodyPr/>
+                    <a:lstStyle/>
+                    <a:p/>
+                  </a:txBody>
+                  <a:tcPr/>
+                </a:tc>
+                <a:tc hMerge="1">
+                  <a:txBody>
+                    <a:bodyPr/>
+                    <a:lstStyle/>
+                    <a:p/>
+                  </a:txBody>
+                  <a:tcPr/>
+                </a:tc>
+                <a:tc hMerge="1">
+                  <a:txBody>
+                    <a:bodyPr/>
+                    <a:lstStyle/>
+                    <a:p/>
+                  </a:txBody>
+                  <a:tcPr/>
+                </a:tc>
+                <a:tc hMerge="1">
+                  <a:txBody>
+                    <a:bodyPr/>
+                    <a:lstStyle/>
+                    <a:p/>
+                  </a:txBody>
+                  <a:tcPr/>
+                </a:tc>
+                <a:tc hMerge="1">
+                  <a:txBody>
+                    <a:bodyPr/>
+                    <a:lstStyle/>
+                    <a:p/>
+                  </a:txBody>
+                  <a:tcPr/>
+                </a:tc>
+              </a:tr>
+              <a:tr h="377163">
+                <a:tc>
+                  <a:txBody>
+                    <a:bodyPr wrap="none"/>
+                    <a:lstStyle/>
+                    <a:p>
+                      <a:pPr algn="l"/>
+                      <a:r>
+                        <a:rPr sz="900" b="0"/>
+                        <a:t> コーディング</a:t>
+                      </a:r>
+                    </a:p>
+                  </a:txBody>
+                  <a:tcPr>
+                    <a:solidFill>
+                      <a:srgbClr val="F5F5FA"/>
+                    </a:solidFill>
+                  </a:tcPr>
+                </a:tc>
+                <a:tc>
+                  <a:txBody>
+                    <a:bodyPr/>
+                    <a:lstStyle/>
+                    <a:p/>
+                  </a:txBody>
+                  <a:tcPr/>
+                </a:tc>
+                <a:tc>
+                  <a:txBody>
+                    <a:bodyPr/>
+                    <a:lstStyle/>
+                    <a:p/>
+                  </a:txBody>
+                  <a:tcPr/>
+                </a:tc>
+                <a:tc>
+                  <a:txBody>
+                    <a:bodyPr/>
+                    <a:lstStyle/>
+                    <a:p/>
+                  </a:txBody>
+                  <a:tcPr/>
+                </a:tc>
+                <a:tc>
+                  <a:txBody>
+                    <a:bodyPr/>
+                    <a:lstStyle/>
+                    <a:p/>
+                  </a:txBody>
+                  <a:tcPr/>
+                </a:tc>
+                <a:tc>
+                  <a:txBody>
+                    <a:bodyPr/>
+                    <a:lstStyle/>
+                    <a:p/>
+                  </a:txBody>
+                  <a:tcPr/>
+                </a:tc>
+                <a:tc>
+                  <a:txBody>
+                    <a:bodyPr/>
+                    <a:lstStyle/>
+                    <a:p/>
+                  </a:txBody>
+                  <a:tcPr/>
+                </a:tc>
+                <a:tc>
+                  <a:txBody>
+                    <a:bodyPr/>
+                    <a:lstStyle/>
+                    <a:p/>
+                  </a:txBody>
+                  <a:tcPr/>
+                </a:tc>
+                <a:tc>
+                  <a:txBody>
+                    <a:bodyPr/>
+                    <a:lstStyle/>
+                    <a:p/>
+                  </a:txBody>
+                  <a:tcPr/>
+                </a:tc>
+                <a:tc>
+                  <a:txBody>
+                    <a:bodyPr/>
+                    <a:lstStyle/>
+                    <a:p/>
+                  </a:txBody>
+                  <a:tcPr/>
+                </a:tc>
+              </a:tr>
+              <a:tr h="377163">
+                <a:tc>
+                  <a:txBody>
+                    <a:bodyPr wrap="none"/>
+                    <a:lstStyle/>
+                    <a:p>
+                      <a:pPr algn="l"/>
+                      <a:r>
+                        <a:rPr sz="900" b="0"/>
+                        <a:t> コードレビュー</a:t>
+                      </a:r>
+                    </a:p>
+                  </a:txBody>
+                  <a:tcPr>
+                    <a:solidFill>
+                      <a:srgbClr val="F5F5FA"/>
+                    </a:solidFill>
+                  </a:tcPr>
+                </a:tc>
+                <a:tc>
+                  <a:txBody>
+                    <a:bodyPr/>
+                    <a:lstStyle/>
+                    <a:p/>
+                  </a:txBody>
+                  <a:tcPr/>
+                </a:tc>
+                <a:tc>
+                  <a:txBody>
+                    <a:bodyPr/>
+                    <a:lstStyle/>
+                    <a:p/>
+                  </a:txBody>
+                  <a:tcPr/>
+                </a:tc>
+                <a:tc>
+                  <a:txBody>
+                    <a:bodyPr/>
+                    <a:lstStyle/>
+                    <a:p/>
+                  </a:txBody>
+                  <a:tcPr/>
+                </a:tc>
+                <a:tc>
+                  <a:txBody>
+                    <a:bodyPr/>
+                    <a:lstStyle/>
+                    <a:p/>
+                  </a:txBody>
+                  <a:tcPr/>
+                </a:tc>
+                <a:tc>
+                  <a:txBody>
+                    <a:bodyPr/>
+                    <a:lstStyle/>
+                    <a:p/>
+                  </a:txBody>
+                  <a:tcPr/>
+                </a:tc>
+                <a:tc>
+                  <a:txBody>
+                    <a:bodyPr/>
+                    <a:lstStyle/>
+                    <a:p/>
+                  </a:txBody>
+                  <a:tcPr/>
+                </a:tc>
+                <a:tc>
+                  <a:txBody>
+                    <a:bodyPr/>
+                    <a:lstStyle/>
+                    <a:p/>
+                  </a:txBody>
+                  <a:tcPr/>
+                </a:tc>
+                <a:tc>
+                  <a:txBody>
+                    <a:bodyPr/>
+                    <a:lstStyle/>
+                    <a:p/>
+                  </a:txBody>
+                  <a:tcPr/>
+                </a:tc>
+                <a:tc>
+                  <a:txBody>
+                    <a:bodyPr/>
+                    <a:lstStyle/>
+                    <a:p/>
+                  </a:txBody>
+                  <a:tcPr/>
+                </a:tc>
+              </a:tr>
+              <a:tr h="377163">
+                <a:tc>
+                  <a:txBody>
+                    <a:bodyPr wrap="none"/>
+                    <a:lstStyle/>
+                    <a:p>
+                      <a:pPr algn="l"/>
+                      <a:r>
+                        <a:rPr sz="900" b="0"/>
+                        <a:t> テスト</a:t>
+                      </a:r>
+                    </a:p>
+                  </a:txBody>
+                  <a:tcPr>
+                    <a:solidFill>
+                      <a:srgbClr val="F5F5FA"/>
+                    </a:solidFill>
+                  </a:tcPr>
+                </a:tc>
+                <a:tc>
+                  <a:txBody>
+                    <a:bodyPr/>
+                    <a:lstStyle/>
+                    <a:p/>
+                  </a:txBody>
+                  <a:tcPr/>
+                </a:tc>
+                <a:tc>
+                  <a:txBody>
+                    <a:bodyPr/>
+                    <a:lstStyle/>
+                    <a:p/>
+                  </a:txBody>
+                  <a:tcPr/>
+                </a:tc>
+                <a:tc>
+                  <a:txBody>
+                    <a:bodyPr/>
+                    <a:lstStyle/>
+                    <a:p/>
+                  </a:txBody>
+                  <a:tcPr/>
+                </a:tc>
+                <a:tc>
+                  <a:txBody>
+                    <a:bodyPr/>
+                    <a:lstStyle/>
+                    <a:p/>
+                  </a:txBody>
+                  <a:tcPr/>
+                </a:tc>
+                <a:tc>
+                  <a:txBody>
+                    <a:bodyPr/>
+                    <a:lstStyle/>
+                    <a:p/>
+                  </a:txBody>
+                  <a:tcPr/>
+                </a:tc>
+                <a:tc>
+                  <a:txBody>
+                    <a:bodyPr/>
+                    <a:lstStyle/>
+                    <a:p/>
+                  </a:txBody>
+                  <a:tcPr/>
+                </a:tc>
+                <a:tc>
+                  <a:txBody>
+                    <a:bodyPr/>
+                    <a:lstStyle/>
+                    <a:p/>
+                  </a:txBody>
+                  <a:tcPr/>
+                </a:tc>
+                <a:tc>
+                  <a:txBody>
+                    <a:bodyPr/>
+                    <a:lstStyle/>
+                    <a:p/>
+                  </a:txBody>
+                  <a:tcPr/>
+                </a:tc>
+                <a:tc>
+                  <a:txBody>
+                    <a:bodyPr/>
+                    <a:lstStyle/>
+                    <a:p/>
+                  </a:txBody>
+                  <a:tcPr/>
+                </a:tc>
+              </a:tr>
+              <a:tr h="377163">
+                <a:tc gridSpan="10">
+                  <a:txBody>
+                    <a:bodyPr wrap="none"/>
+                    <a:lstStyle/>
+                    <a:p>
+                      <a:pPr algn="l"/>
+                      <a:r>
+                        <a:rPr sz="1000" b="1">
+                          <a:solidFill>
+                            <a:srgbClr val="FFFFFF"/>
+                          </a:solidFill>
+                        </a:rPr>
+                        <a:t>  リリース</a:t>
+                      </a:r>
+                    </a:p>
+                  </a:txBody>
+                  <a:tcPr>
+                    <a:solidFill>
+                      <a:srgbClr val="3C3C6E"/>
+                    </a:solidFill>
+                  </a:tcPr>
+                </a:tc>
+                <a:tc hMerge="1">
+                  <a:txBody>
+                    <a:bodyPr/>
+                    <a:lstStyle/>
+                    <a:p/>
+                  </a:txBody>
+                  <a:tcPr/>
+                </a:tc>
+                <a:tc hMerge="1">
+                  <a:txBody>
+                    <a:bodyPr/>
+                    <a:lstStyle/>
+                    <a:p/>
+                  </a:txBody>
+                  <a:tcPr/>
+                </a:tc>
+                <a:tc hMerge="1">
+                  <a:txBody>
+                    <a:bodyPr/>
+                    <a:lstStyle/>
+                    <a:p/>
+                  </a:txBody>
+                  <a:tcPr/>
+                </a:tc>
+                <a:tc hMerge="1">
+                  <a:txBody>
+                    <a:bodyPr/>
+                    <a:lstStyle/>
+                    <a:p/>
+                  </a:txBody>
+                  <a:tcPr/>
+                </a:tc>
+                <a:tc hMerge="1">
+                  <a:txBody>
+                    <a:bodyPr/>
+                    <a:lstStyle/>
+                    <a:p/>
+                  </a:txBody>
+                  <a:tcPr/>
+                </a:tc>
+                <a:tc hMerge="1">
+                  <a:txBody>
+                    <a:bodyPr/>
+                    <a:lstStyle/>
+                    <a:p/>
+                  </a:txBody>
+                  <a:tcPr/>
+                </a:tc>
+                <a:tc hMerge="1">
+                  <a:txBody>
+                    <a:bodyPr/>
+                    <a:lstStyle/>
+                    <a:p/>
+                  </a:txBody>
+                  <a:tcPr/>
+                </a:tc>
+                <a:tc hMerge="1">
+                  <a:txBody>
+                    <a:bodyPr/>
+                    <a:lstStyle/>
+                    <a:p/>
+                  </a:txBody>
+                  <a:tcPr/>
+                </a:tc>
+                <a:tc hMerge="1">
+                  <a:txBody>
+                    <a:bodyPr/>
+                    <a:lstStyle/>
+                    <a:p/>
+                  </a:txBody>
+                  <a:tcPr/>
+                </a:tc>
+              </a:tr>
+              <a:tr h="377163">
+                <a:tc>
+                  <a:txBody>
+                    <a:bodyPr wrap="none"/>
+                    <a:lstStyle/>
+                    <a:p>
+                      <a:pPr algn="l"/>
+                      <a:r>
+                        <a:rPr sz="900" b="0"/>
+                        <a:t> ステージング確認</a:t>
+                      </a:r>
+                    </a:p>
+                  </a:txBody>
+                  <a:tcPr>
+                    <a:solidFill>
+                      <a:srgbClr val="F5F5FA"/>
+                    </a:solidFill>
+                  </a:tcPr>
+                </a:tc>
+                <a:tc>
+                  <a:txBody>
+                    <a:bodyPr/>
+                    <a:lstStyle/>
+                    <a:p/>
+                  </a:txBody>
+                  <a:tcPr/>
+                </a:tc>
+                <a:tc>
+                  <a:txBody>
+                    <a:bodyPr/>
+                    <a:lstStyle/>
+                    <a:p/>
+                  </a:txBody>
+                  <a:tcPr/>
+                </a:tc>
+                <a:tc>
+                  <a:txBody>
+                    <a:bodyPr/>
+                    <a:lstStyle/>
+                    <a:p/>
+                  </a:txBody>
+                  <a:tcPr/>
+                </a:tc>
+                <a:tc>
+                  <a:txBody>
+                    <a:bodyPr/>
+                    <a:lstStyle/>
+                    <a:p/>
+                  </a:txBody>
+                  <a:tcPr/>
+                </a:tc>
+                <a:tc>
+                  <a:txBody>
+                    <a:bodyPr/>
+                    <a:lstStyle/>
+                    <a:p/>
+                  </a:txBody>
+                  <a:tcPr/>
+                </a:tc>
+                <a:tc>
+                  <a:txBody>
+                    <a:bodyPr/>
+                    <a:lstStyle/>
+                    <a:p/>
+                  </a:txBody>
+                  <a:tcPr/>
+                </a:tc>
+                <a:tc>
+                  <a:txBody>
+                    <a:bodyPr/>
+                    <a:lstStyle/>
+                    <a:p/>
+                  </a:txBody>
+                  <a:tcPr/>
+                </a:tc>
+                <a:tc>
+                  <a:txBody>
+                    <a:bodyPr/>
+                    <a:lstStyle/>
+                    <a:p/>
+                  </a:txBody>
+                  <a:tcPr/>
+                </a:tc>
+                <a:tc>
+                  <a:txBody>
+                    <a:bodyPr/>
+                    <a:lstStyle/>
+                    <a:p/>
+                  </a:txBody>
+                  <a:tcPr/>
+                </a:tc>
+              </a:tr>
+              <a:tr h="377163">
+                <a:tc>
+                  <a:txBody>
+                    <a:bodyPr wrap="none"/>
+                    <a:lstStyle/>
+                    <a:p>
+                      <a:pPr algn="l"/>
+                      <a:r>
+                        <a:rPr sz="900" b="0"/>
+                        <a:t> 本番デプロイ</a:t>
+                      </a:r>
+                    </a:p>
+                  </a:txBody>
+                  <a:tcPr>
+                    <a:solidFill>
+                      <a:srgbClr val="F5F5FA"/>
+                    </a:solidFill>
+                  </a:tcPr>
+                </a:tc>
+                <a:tc>
+                  <a:txBody>
+                    <a:bodyPr/>
+                    <a:lstStyle/>
+                    <a:p/>
+                  </a:txBody>
+                  <a:tcPr/>
+                </a:tc>
+                <a:tc>
+                  <a:txBody>
+                    <a:bodyPr/>
+                    <a:lstStyle/>
+                    <a:p/>
+                  </a:txBody>
+                  <a:tcPr/>
+                </a:tc>
+                <a:tc>
+                  <a:txBody>
+                    <a:bodyPr/>
+                    <a:lstStyle/>
+                    <a:p/>
+                  </a:txBody>
+                  <a:tcPr/>
+                </a:tc>
+                <a:tc>
+                  <a:txBody>
+                    <a:bodyPr/>
+                    <a:lstStyle/>
+                    <a:p/>
+                  </a:txBody>
+                  <a:tcPr/>
+                </a:tc>
+                <a:tc>
+                  <a:txBody>
+                    <a:bodyPr/>
+                    <a:lstStyle/>
+                    <a:p/>
+                  </a:txBody>
+                  <a:tcPr/>
+                </a:tc>
+                <a:tc>
+                  <a:txBody>
+                    <a:bodyPr/>
+                    <a:lstStyle/>
+                    <a:p/>
+                  </a:txBody>
+                  <a:tcPr/>
+                </a:tc>
+                <a:tc>
+                  <a:txBody>
+                    <a:bodyPr/>
+                    <a:lstStyle/>
+                    <a:p/>
+                  </a:txBody>
+                  <a:tcPr/>
+                </a:tc>
+                <a:tc>
+                  <a:txBody>
+                    <a:bodyPr/>
+                    <a:lstStyle/>
+                    <a:p/>
+                  </a:txBody>
+                  <a:tcPr/>
+                </a:tc>
+                <a:tc>
+                  <a:txBody>
+                    <a:bodyPr/>
+                    <a:lstStyle/>
+                    <a:p/>
+                  </a:txBody>
+                  <a:tcPr/>
+                </a:tc>
+              </a:tr>
+            </a:tbl>
+          </a:graphicData>
+        </a:graphic>
+      </p:graphicFrame>
+      <p:sp>
+        <p:nvSpPr>
+          <p:cNvPr id="5" name="Right Arrow 4"/>
+          <p:cNvSpPr/>
+          <p:nvPr/>
+        </p:nvSpPr>
+        <p:spPr>
+          <a:xfrm>
+            <a:off x="2396093" y="2411100"/>
+            <a:ext cx="641909" cy="264014"/>
+          </a:xfrm>
+          <a:prstGeom prst="rightArrow">
+            <a:avLst/>
+          </a:prstGeom>
+          <a:solidFill>
+            <a:srgbClr val="AAAAAA"/>
+          </a:solidFill>
+          <a:ln>
+            <a:noFill/>
+          </a:ln>
+        </p:spPr>
+        <p:style>
+          <a:lnRef idx="1">
+            <a:schemeClr val="accent1"/>
+          </a:lnRef>
+          <a:fillRef idx="3">
+            <a:schemeClr val="accent1"/>
+          </a:fillRef>
+          <a:effectRef idx="2">
+            <a:schemeClr val="accent1"/>
+          </a:effectRef>
+          <a:fontRef idx="minor">
+            <a:schemeClr val="lt1"/>
+          </a:fontRef>
+        </p:style>
+        <p:txBody>
+          <a:bodyPr rtlCol="0" anchor="ctr"/>
+          <a:lstStyle/>
+          <a:p/>
+        </p:txBody>
+      </p:sp>
+      <p:sp>
+        <p:nvSpPr>
+          <p:cNvPr id="6" name="Right Arrow 5"/>
+          <p:cNvSpPr/>
+          <p:nvPr/>
+        </p:nvSpPr>
+        <p:spPr>
+          <a:xfrm>
+            <a:off x="3038002" y="2788263"/>
+            <a:ext cx="898672" cy="264014"/>
+          </a:xfrm>
+          <a:prstGeom prst="rightArrow">
+            <a:avLst/>
+          </a:prstGeom>
+          <a:solidFill>
+            <a:srgbClr val="AAAAAA"/>
+          </a:solidFill>
+          <a:ln>
+            <a:noFill/>
+          </a:ln>
+        </p:spPr>
+        <p:style>
+          <a:lnRef idx="1">
+            <a:schemeClr val="accent1"/>
+          </a:lnRef>
+          <a:fillRef idx="3">
+            <a:schemeClr val="accent1"/>
+          </a:fillRef>
+          <a:effectRef idx="2">
+            <a:schemeClr val="accent1"/>
+          </a:effectRef>
+          <a:fontRef idx="minor">
+            <a:schemeClr val="lt1"/>
+          </a:fontRef>
+        </p:style>
+        <p:txBody>
+          <a:bodyPr rtlCol="0" anchor="ctr"/>
+          <a:lstStyle/>
+          <a:p/>
+        </p:txBody>
+      </p:sp>
+      <p:sp>
+        <p:nvSpPr>
+          <p:cNvPr id="7" name="Right Arrow 6"/>
+          <p:cNvSpPr/>
+          <p:nvPr/>
+        </p:nvSpPr>
+        <p:spPr>
+          <a:xfrm>
+            <a:off x="3936674" y="3165426"/>
+            <a:ext cx="641909" cy="264014"/>
+          </a:xfrm>
+          <a:prstGeom prst="rightArrow">
+            <a:avLst/>
+          </a:prstGeom>
+          <a:solidFill>
+            <a:srgbClr val="AAAAAA"/>
+          </a:solidFill>
+          <a:ln>
+            <a:noFill/>
+          </a:ln>
+        </p:spPr>
+        <p:style>
+          <a:lnRef idx="1">
+            <a:schemeClr val="accent1"/>
+          </a:lnRef>
+          <a:fillRef idx="3">
+            <a:schemeClr val="accent1"/>
+          </a:fillRef>
+          <a:effectRef idx="2">
+            <a:schemeClr val="accent1"/>
+          </a:effectRef>
+          <a:fontRef idx="minor">
+            <a:schemeClr val="lt1"/>
+          </a:fontRef>
+        </p:style>
+        <p:txBody>
+          <a:bodyPr rtlCol="0" anchor="ctr"/>
+          <a:lstStyle/>
+          <a:p/>
+        </p:txBody>
+      </p:sp>
+      <p:sp>
+        <p:nvSpPr>
+          <p:cNvPr id="8" name="Right Arrow 7"/>
+          <p:cNvSpPr/>
+          <p:nvPr/>
+        </p:nvSpPr>
+        <p:spPr>
+          <a:xfrm>
+            <a:off x="4578583" y="3919752"/>
+            <a:ext cx="1797345" cy="264014"/>
+          </a:xfrm>
+          <a:prstGeom prst="rightArrow">
+            <a:avLst/>
+          </a:prstGeom>
+          <a:solidFill>
+            <a:srgbClr val="4682B4"/>
+          </a:solidFill>
+          <a:ln>
+            <a:noFill/>
+          </a:ln>
+        </p:spPr>
+        <p:style>
+          <a:lnRef idx="1">
+            <a:schemeClr val="accent1"/>
+          </a:lnRef>
+          <a:fillRef idx="3">
+            <a:schemeClr val="accent1"/>
+          </a:fillRef>
+          <a:effectRef idx="2">
+            <a:schemeClr val="accent1"/>
+          </a:effectRef>
+          <a:fontRef idx="minor">
+            <a:schemeClr val="lt1"/>
+          </a:fontRef>
+        </p:style>
+        <p:txBody>
+          <a:bodyPr rtlCol="0" anchor="ctr"/>
+          <a:lstStyle/>
+          <a:p/>
+        </p:txBody>
+      </p:sp>
+      <p:sp>
+        <p:nvSpPr>
+          <p:cNvPr id="9" name="Right Arrow 8"/>
+          <p:cNvSpPr/>
+          <p:nvPr/>
+        </p:nvSpPr>
+        <p:spPr>
+          <a:xfrm>
+            <a:off x="6375928" y="4296915"/>
+            <a:ext cx="385145" cy="264014"/>
+          </a:xfrm>
+          <a:prstGeom prst="rightArrow">
+            <a:avLst/>
+          </a:prstGeom>
+          <a:solidFill>
+            <a:srgbClr val="DC4646"/>
+          </a:solidFill>
+          <a:ln>
+            <a:noFill/>
+          </a:ln>
+        </p:spPr>
+        <p:style>
+          <a:lnRef idx="1">
+            <a:schemeClr val="accent1"/>
+          </a:lnRef>
+          <a:fillRef idx="3">
+            <a:schemeClr val="accent1"/>
+          </a:fillRef>
+          <a:effectRef idx="2">
+            <a:schemeClr val="accent1"/>
+          </a:effectRef>
+          <a:fontRef idx="minor">
+            <a:schemeClr val="lt1"/>
+          </a:fontRef>
+        </p:style>
+        <p:txBody>
+          <a:bodyPr rtlCol="0" anchor="ctr"/>
+          <a:lstStyle/>
+          <a:p/>
+        </p:txBody>
+      </p:sp>
+      <p:sp>
+        <p:nvSpPr>
+          <p:cNvPr id="10" name="Right Arrow 9"/>
+          <p:cNvSpPr/>
+          <p:nvPr/>
+        </p:nvSpPr>
+        <p:spPr>
+          <a:xfrm>
+            <a:off x="6375928" y="4674078"/>
+            <a:ext cx="898672" cy="264014"/>
+          </a:xfrm>
+          <a:prstGeom prst="rightArrow">
+            <a:avLst/>
+          </a:prstGeom>
+          <a:solidFill>
+            <a:srgbClr val="64B4E6"/>
+          </a:solidFill>
+          <a:ln>
+            <a:noFill/>
+          </a:ln>
+        </p:spPr>
+        <p:style>
+          <a:lnRef idx="1">
+            <a:schemeClr val="accent1"/>
+          </a:lnRef>
+          <a:fillRef idx="3">
+            <a:schemeClr val="accent1"/>
+          </a:fillRef>
+          <a:effectRef idx="2">
+            <a:schemeClr val="accent1"/>
+          </a:effectRef>
+          <a:fontRef idx="minor">
+            <a:schemeClr val="lt1"/>
+          </a:fontRef>
+        </p:style>
+        <p:txBody>
+          <a:bodyPr rtlCol="0" anchor="ctr"/>
+          <a:lstStyle/>
+          <a:p/>
+        </p:txBody>
+      </p:sp>
+      <p:sp>
+        <p:nvSpPr>
+          <p:cNvPr id="11" name="Right Arrow 10"/>
+          <p:cNvSpPr/>
+          <p:nvPr/>
+        </p:nvSpPr>
+        <p:spPr>
+          <a:xfrm>
+            <a:off x="6761073" y="5428404"/>
+            <a:ext cx="256764" cy="264014"/>
+          </a:xfrm>
+          <a:prstGeom prst="rightArrow">
+            <a:avLst/>
+          </a:prstGeom>
+          <a:solidFill>
+            <a:srgbClr val="DC4646"/>
+          </a:solidFill>
+          <a:ln>
+            <a:noFill/>
+          </a:ln>
+        </p:spPr>
+        <p:style>
+          <a:lnRef idx="1">
+            <a:schemeClr val="accent1"/>
+          </a:lnRef>
+          <a:fillRef idx="3">
+            <a:schemeClr val="accent1"/>
+          </a:fillRef>
+          <a:effectRef idx="2">
+            <a:schemeClr val="accent1"/>
+          </a:effectRef>
+          <a:fontRef idx="minor">
+            <a:schemeClr val="lt1"/>
+          </a:fontRef>
+        </p:style>
+        <p:txBody>
+          <a:bodyPr rtlCol="0" anchor="ctr"/>
+          <a:lstStyle/>
+          <a:p/>
+        </p:txBody>
+      </p:sp>
+      <p:sp>
+        <p:nvSpPr>
+          <p:cNvPr id="12" name="Diamond 11"/>
+          <p:cNvSpPr/>
+          <p:nvPr/>
+        </p:nvSpPr>
+        <p:spPr>
+          <a:xfrm>
+            <a:off x="8416982" y="5796138"/>
+            <a:ext cx="282872" cy="282872"/>
+          </a:xfrm>
+          <a:prstGeom prst="diamond">
+            <a:avLst/>
+          </a:prstGeom>
+          <a:solidFill>
+            <a:srgbClr val="DCAA00"/>
+          </a:solidFill>
+          <a:ln>
+            <a:noFill/>
+          </a:ln>
+        </p:spPr>
+        <p:style>
+          <a:lnRef idx="1">
+            <a:schemeClr val="accent1"/>
+          </a:lnRef>
+          <a:fillRef idx="3">
+            <a:schemeClr val="accent1"/>
+          </a:fillRef>
+          <a:effectRef idx="2">
+            <a:schemeClr val="accent1"/>
+          </a:effectRef>
+          <a:fontRef idx="minor">
+            <a:schemeClr val="lt1"/>
+          </a:fontRef>
+        </p:style>
+        <p:txBody>
+          <a:bodyPr rtlCol="0" anchor="ctr"/>
+          <a:lstStyle/>
+          <a:p/>
         </p:txBody>
       </p:sp>
     </p:spTree>

--- a/demo_full.pptx
+++ b/demo_full.pptx
@@ -5,7 +5,7 @@
     <p:sldMasterId id="2147483648" r:id="rId1"/>
   </p:sldMasterIdLst>
   <p:notesMasterIdLst>
-    <p:notesMasterId r:id="rId50"/>
+    <p:notesMasterId r:id="rId52"/>
   </p:notesMasterIdLst>
   <p:sldIdLst>
     <p:sldId id="256" r:id="rId7"/>
@@ -51,9 +51,11 @@
     <p:sldId id="296" r:id="rId47"/>
     <p:sldId id="297" r:id="rId48"/>
     <p:sldId id="298" r:id="rId49"/>
-    <p:sldId id="299" r:id="rId51"/>
-    <p:sldId id="300" r:id="rId52"/>
+    <p:sldId id="299" r:id="rId50"/>
+    <p:sldId id="300" r:id="rId51"/>
     <p:sldId id="301" r:id="rId53"/>
+    <p:sldId id="302" r:id="rId54"/>
+    <p:sldId id="303" r:id="rId55"/>
   </p:sldIdLst>
   <p:sldSz cx="9144000" cy="6858000" type="screen4x3"/>
   <p:notesSz cx="6858000" cy="9144000"/>
@@ -12746,7 +12748,7 @@
           <a:lstStyle/>
           <a:p>
             <a:r>
-              <a:t>5. 状態図（State Diagram）</a:t>
+              <a:t>5a. 状態図（State Diagram） - 通常状態・開始/終了・遷移ラベルのデモ</a:t>
             </a:r>
           </a:p>
         </p:txBody>
@@ -12770,18 +12772,67 @@
       </p:sp>
       <p:sp>
         <p:nvSpPr>
-          <p:cNvPr id="4" name="Rectangle 3"/>
+          <p:cNvPr id="4" name="Oval 3"/>
           <p:cNvSpPr/>
           <p:nvPr/>
         </p:nvSpPr>
         <p:spPr>
           <a:xfrm>
-            <a:off x="5550039" y="4898532"/>
+            <a:off x="6162959" y="4270079"/>
+            <a:ext cx="380000" cy="380000"/>
+          </a:xfrm>
+          <a:prstGeom prst="ellipse">
+            <a:avLst/>
+          </a:prstGeom>
+          <a:solidFill>
+            <a:srgbClr val="000000"/>
+          </a:solidFill>
+          <a:ln>
+            <a:noFill/>
+          </a:ln>
+        </p:spPr>
+        <p:style>
+          <a:lnRef idx="1">
+            <a:schemeClr val="accent1"/>
+          </a:lnRef>
+          <a:fillRef idx="3">
+            <a:schemeClr val="accent1"/>
+          </a:fillRef>
+          <a:effectRef idx="2">
+            <a:schemeClr val="accent1"/>
+          </a:effectRef>
+          <a:fontRef idx="minor">
+            <a:schemeClr val="lt1"/>
+          </a:fontRef>
+        </p:style>
+        <p:txBody>
+          <a:bodyPr rtlCol="0" anchor="ctr"/>
+          <a:lstStyle/>
+          <a:p/>
+        </p:txBody>
+      </p:sp>
+      <p:sp>
+        <p:nvSpPr>
+          <p:cNvPr id="5" name="Rounded Rectangle 4"/>
+          <p:cNvSpPr/>
+          <p:nvPr/>
+        </p:nvSpPr>
+        <p:spPr>
+          <a:xfrm>
+            <a:off x="5679518" y="1922085"/>
             <a:ext cx="1200000" cy="500000"/>
           </a:xfrm>
-          <a:prstGeom prst="rect">
-            <a:avLst/>
-          </a:prstGeom>
+          <a:prstGeom prst="roundRect">
+            <a:avLst/>
+          </a:prstGeom>
+          <a:solidFill>
+            <a:srgbClr val="FFFFFF"/>
+          </a:solidFill>
+          <a:ln>
+            <a:solidFill>
+              <a:srgbClr val="323250"/>
+            </a:solidFill>
+          </a:ln>
         </p:spPr>
         <p:style>
           <a:lnRef idx="1">
@@ -12798,30 +12849,241 @@
           </a:fontRef>
         </p:style>
         <p:txBody>
+          <a:bodyPr rtlCol="0" anchor="ctr" wrap="none"/>
+          <a:lstStyle/>
+          <a:p>
+            <a:pPr algn="ctr"/>
+            <a:r>
+              <a:rPr sz="1100">
+                <a:solidFill>
+                  <a:srgbClr val="000000"/>
+                </a:solidFill>
+              </a:rPr>
+              <a:t>待機中</a:t>
+            </a:r>
+          </a:p>
+        </p:txBody>
+      </p:sp>
+      <p:sp>
+        <p:nvSpPr>
+          <p:cNvPr id="6" name="Rounded Rectangle 5"/>
+          <p:cNvSpPr/>
+          <p:nvPr/>
+        </p:nvSpPr>
+        <p:spPr>
+          <a:xfrm>
+            <a:off x="3501144" y="3179892"/>
+            <a:ext cx="1200000" cy="500000"/>
+          </a:xfrm>
+          <a:prstGeom prst="roundRect">
+            <a:avLst/>
+          </a:prstGeom>
+          <a:solidFill>
+            <a:srgbClr val="FFFFFF"/>
+          </a:solidFill>
+          <a:ln>
+            <a:solidFill>
+              <a:srgbClr val="323250"/>
+            </a:solidFill>
+          </a:ln>
+        </p:spPr>
+        <p:style>
+          <a:lnRef idx="1">
+            <a:schemeClr val="accent1"/>
+          </a:lnRef>
+          <a:fillRef idx="3">
+            <a:schemeClr val="accent1"/>
+          </a:fillRef>
+          <a:effectRef idx="2">
+            <a:schemeClr val="accent1"/>
+          </a:effectRef>
+          <a:fontRef idx="minor">
+            <a:schemeClr val="lt1"/>
+          </a:fontRef>
+        </p:style>
+        <p:txBody>
+          <a:bodyPr rtlCol="0" anchor="ctr" wrap="none"/>
+          <a:lstStyle/>
+          <a:p>
+            <a:pPr algn="ctr"/>
+            <a:r>
+              <a:rPr sz="1100">
+                <a:solidFill>
+                  <a:srgbClr val="000000"/>
+                </a:solidFill>
+              </a:rPr>
+              <a:t>処理中</a:t>
+            </a:r>
+          </a:p>
+        </p:txBody>
+      </p:sp>
+      <p:sp>
+        <p:nvSpPr>
+          <p:cNvPr id="7" name="Rounded Rectangle 6"/>
+          <p:cNvSpPr/>
+          <p:nvPr/>
+        </p:nvSpPr>
+        <p:spPr>
+          <a:xfrm>
+            <a:off x="457200" y="3638292"/>
+            <a:ext cx="1200000" cy="500000"/>
+          </a:xfrm>
+          <a:prstGeom prst="roundRect">
+            <a:avLst/>
+          </a:prstGeom>
+          <a:solidFill>
+            <a:srgbClr val="FFFFFF"/>
+          </a:solidFill>
+          <a:ln>
+            <a:solidFill>
+              <a:srgbClr val="323250"/>
+            </a:solidFill>
+          </a:ln>
+        </p:spPr>
+        <p:style>
+          <a:lnRef idx="1">
+            <a:schemeClr val="accent1"/>
+          </a:lnRef>
+          <a:fillRef idx="3">
+            <a:schemeClr val="accent1"/>
+          </a:fillRef>
+          <a:effectRef idx="2">
+            <a:schemeClr val="accent1"/>
+          </a:effectRef>
+          <a:fontRef idx="minor">
+            <a:schemeClr val="lt1"/>
+          </a:fontRef>
+        </p:style>
+        <p:txBody>
+          <a:bodyPr rtlCol="0" anchor="ctr" wrap="none"/>
+          <a:lstStyle/>
+          <a:p>
+            <a:pPr algn="ctr"/>
+            <a:r>
+              <a:rPr sz="1100">
+                <a:solidFill>
+                  <a:srgbClr val="000000"/>
+                </a:solidFill>
+              </a:rPr>
+              <a:t>完了</a:t>
+            </a:r>
+          </a:p>
+        </p:txBody>
+      </p:sp>
+      <p:sp>
+        <p:nvSpPr>
+          <p:cNvPr id="8" name="Rounded Rectangle 7"/>
+          <p:cNvSpPr/>
+          <p:nvPr/>
+        </p:nvSpPr>
+        <p:spPr>
+          <a:xfrm>
+            <a:off x="7152447" y="3496469"/>
+            <a:ext cx="1200000" cy="500000"/>
+          </a:xfrm>
+          <a:prstGeom prst="roundRect">
+            <a:avLst/>
+          </a:prstGeom>
+          <a:solidFill>
+            <a:srgbClr val="FFFFFF"/>
+          </a:solidFill>
+          <a:ln>
+            <a:solidFill>
+              <a:srgbClr val="323250"/>
+            </a:solidFill>
+          </a:ln>
+        </p:spPr>
+        <p:style>
+          <a:lnRef idx="1">
+            <a:schemeClr val="accent1"/>
+          </a:lnRef>
+          <a:fillRef idx="3">
+            <a:schemeClr val="accent1"/>
+          </a:fillRef>
+          <a:effectRef idx="2">
+            <a:schemeClr val="accent1"/>
+          </a:effectRef>
+          <a:fontRef idx="minor">
+            <a:schemeClr val="lt1"/>
+          </a:fontRef>
+        </p:style>
+        <p:txBody>
+          <a:bodyPr rtlCol="0" anchor="ctr" wrap="none"/>
+          <a:lstStyle/>
+          <a:p>
+            <a:pPr algn="ctr"/>
+            <a:r>
+              <a:rPr sz="1100">
+                <a:solidFill>
+                  <a:srgbClr val="000000"/>
+                </a:solidFill>
+              </a:rPr>
+              <a:t>エラー</a:t>
+            </a:r>
+          </a:p>
+        </p:txBody>
+      </p:sp>
+      <p:sp>
+        <p:nvSpPr>
+          <p:cNvPr id="9" name="Oval 8"/>
+          <p:cNvSpPr/>
+          <p:nvPr/>
+        </p:nvSpPr>
+        <p:spPr>
+          <a:xfrm>
+            <a:off x="1663730" y="5257268"/>
+            <a:ext cx="450000" cy="450000"/>
+          </a:xfrm>
+          <a:prstGeom prst="ellipse">
+            <a:avLst/>
+          </a:prstGeom>
+          <a:solidFill>
+            <a:srgbClr val="000000"/>
+          </a:solidFill>
+          <a:ln>
+            <a:noFill/>
+          </a:ln>
+        </p:spPr>
+        <p:style>
+          <a:lnRef idx="1">
+            <a:schemeClr val="accent1"/>
+          </a:lnRef>
+          <a:fillRef idx="3">
+            <a:schemeClr val="accent1"/>
+          </a:fillRef>
+          <a:effectRef idx="2">
+            <a:schemeClr val="accent1"/>
+          </a:effectRef>
+          <a:fontRef idx="minor">
+            <a:schemeClr val="lt1"/>
+          </a:fontRef>
+        </p:style>
+        <p:txBody>
           <a:bodyPr rtlCol="0" anchor="ctr"/>
           <a:lstStyle/>
-          <a:p>
-            <a:r>
-              <a:rPr sz="1200"/>
-              <a:t>root_start</a:t>
-            </a:r>
-          </a:p>
-        </p:txBody>
-      </p:sp>
-      <p:sp>
-        <p:nvSpPr>
-          <p:cNvPr id="5" name="Rectangle 4"/>
+          <a:p/>
+        </p:txBody>
+      </p:sp>
+      <p:sp>
+        <p:nvSpPr>
+          <p:cNvPr id="10" name="Oval 9"/>
           <p:cNvSpPr/>
           <p:nvPr/>
         </p:nvSpPr>
         <p:spPr>
           <a:xfrm>
-            <a:off x="6151066" y="2071018"/>
-            <a:ext cx="1200000" cy="500000"/>
-          </a:xfrm>
-          <a:prstGeom prst="rect">
-            <a:avLst/>
-          </a:prstGeom>
+            <a:off x="1763730" y="5357268"/>
+            <a:ext cx="250000" cy="250000"/>
+          </a:xfrm>
+          <a:prstGeom prst="ellipse">
+            <a:avLst/>
+          </a:prstGeom>
+          <a:solidFill>
+            <a:srgbClr val="FFFFFF"/>
+          </a:solidFill>
+          <a:ln>
+            <a:noFill/>
+          </a:ln>
         </p:spPr>
         <p:style>
           <a:lnRef idx="1">
@@ -12840,177 +13102,12 @@
         <p:txBody>
           <a:bodyPr rtlCol="0" anchor="ctr"/>
           <a:lstStyle/>
-          <a:p>
-            <a:r>
-              <a:rPr sz="1200"/>
-              <a:t>待機中</a:t>
-            </a:r>
-          </a:p>
-        </p:txBody>
-      </p:sp>
-      <p:sp>
-        <p:nvSpPr>
-          <p:cNvPr id="6" name="Rectangle 5"/>
-          <p:cNvSpPr/>
-          <p:nvPr/>
-        </p:nvSpPr>
-        <p:spPr>
-          <a:xfrm>
-            <a:off x="3369305" y="2398426"/>
-            <a:ext cx="1200000" cy="500000"/>
-          </a:xfrm>
-          <a:prstGeom prst="rect">
-            <a:avLst/>
-          </a:prstGeom>
-        </p:spPr>
-        <p:style>
-          <a:lnRef idx="1">
-            <a:schemeClr val="accent1"/>
-          </a:lnRef>
-          <a:fillRef idx="3">
-            <a:schemeClr val="accent1"/>
-          </a:fillRef>
-          <a:effectRef idx="2">
-            <a:schemeClr val="accent1"/>
-          </a:effectRef>
-          <a:fontRef idx="minor">
-            <a:schemeClr val="lt1"/>
-          </a:fontRef>
-        </p:style>
-        <p:txBody>
-          <a:bodyPr rtlCol="0" anchor="ctr"/>
-          <a:lstStyle/>
-          <a:p>
-            <a:r>
-              <a:rPr sz="1200"/>
-              <a:t>処理中</a:t>
-            </a:r>
-          </a:p>
-        </p:txBody>
-      </p:sp>
-      <p:sp>
-        <p:nvSpPr>
-          <p:cNvPr id="7" name="Rectangle 6"/>
-          <p:cNvSpPr/>
-          <p:nvPr/>
-        </p:nvSpPr>
-        <p:spPr>
-          <a:xfrm>
-            <a:off x="457200" y="3350921"/>
-            <a:ext cx="1200000" cy="500000"/>
-          </a:xfrm>
-          <a:prstGeom prst="rect">
-            <a:avLst/>
-          </a:prstGeom>
-        </p:spPr>
-        <p:style>
-          <a:lnRef idx="1">
-            <a:schemeClr val="accent1"/>
-          </a:lnRef>
-          <a:fillRef idx="3">
-            <a:schemeClr val="accent1"/>
-          </a:fillRef>
-          <a:effectRef idx="2">
-            <a:schemeClr val="accent1"/>
-          </a:effectRef>
-          <a:fontRef idx="minor">
-            <a:schemeClr val="lt1"/>
-          </a:fontRef>
-        </p:style>
-        <p:txBody>
-          <a:bodyPr rtlCol="0" anchor="ctr"/>
-          <a:lstStyle/>
-          <a:p>
-            <a:r>
-              <a:rPr sz="1200"/>
-              <a:t>完了</a:t>
-            </a:r>
-          </a:p>
-        </p:txBody>
-      </p:sp>
-      <p:sp>
-        <p:nvSpPr>
-          <p:cNvPr id="8" name="Rectangle 7"/>
-          <p:cNvSpPr/>
-          <p:nvPr/>
-        </p:nvSpPr>
-        <p:spPr>
-          <a:xfrm>
-            <a:off x="7128870" y="3846909"/>
-            <a:ext cx="1200000" cy="500000"/>
-          </a:xfrm>
-          <a:prstGeom prst="rect">
-            <a:avLst/>
-          </a:prstGeom>
-        </p:spPr>
-        <p:style>
-          <a:lnRef idx="1">
-            <a:schemeClr val="accent1"/>
-          </a:lnRef>
-          <a:fillRef idx="3">
-            <a:schemeClr val="accent1"/>
-          </a:fillRef>
-          <a:effectRef idx="2">
-            <a:schemeClr val="accent1"/>
-          </a:effectRef>
-          <a:fontRef idx="minor">
-            <a:schemeClr val="lt1"/>
-          </a:fontRef>
-        </p:style>
-        <p:txBody>
-          <a:bodyPr rtlCol="0" anchor="ctr"/>
-          <a:lstStyle/>
-          <a:p>
-            <a:r>
-              <a:rPr sz="1200"/>
-              <a:t>エラー</a:t>
-            </a:r>
-          </a:p>
-        </p:txBody>
-      </p:sp>
-      <p:sp>
-        <p:nvSpPr>
-          <p:cNvPr id="9" name="Rectangle 8"/>
-          <p:cNvSpPr/>
-          <p:nvPr/>
-        </p:nvSpPr>
-        <p:spPr>
-          <a:xfrm>
-            <a:off x="1175518" y="5113280"/>
-            <a:ext cx="1200000" cy="500000"/>
-          </a:xfrm>
-          <a:prstGeom prst="rect">
-            <a:avLst/>
-          </a:prstGeom>
-        </p:spPr>
-        <p:style>
-          <a:lnRef idx="1">
-            <a:schemeClr val="accent1"/>
-          </a:lnRef>
-          <a:fillRef idx="3">
-            <a:schemeClr val="accent1"/>
-          </a:fillRef>
-          <a:effectRef idx="2">
-            <a:schemeClr val="accent1"/>
-          </a:effectRef>
-          <a:fontRef idx="minor">
-            <a:schemeClr val="lt1"/>
-          </a:fontRef>
-        </p:style>
-        <p:txBody>
-          <a:bodyPr rtlCol="0" anchor="ctr"/>
-          <a:lstStyle/>
-          <a:p>
-            <a:r>
-              <a:rPr sz="1200"/>
-              <a:t>root_end</a:t>
-            </a:r>
-          </a:p>
+          <a:p/>
         </p:txBody>
       </p:sp>
       <p:cxnSp>
         <p:nvCxnSpPr>
-          <p:cNvPr id="10" name="Connector 9"/>
+          <p:cNvPr id="11" name="Connector 10"/>
           <p:cNvCxnSpPr>
             <a:stCxn id="4" idx="0"/>
             <a:endCxn id="5" idx="2"/>
@@ -13018,46 +13115,16 @@
           <p:nvPr/>
         </p:nvCxnSpPr>
         <p:spPr>
-          <a:xfrm flipV="1">
-            <a:off x="6150039" y="2571018"/>
-            <a:ext cx="601027" cy="2327514"/>
+          <a:xfrm flipH="1" flipV="1">
+            <a:off x="6279518" y="2422085"/>
+            <a:ext cx="73441" cy="1847994"/>
           </a:xfrm>
           <a:prstGeom prst="curvedConnector3">
             <a:avLst/>
           </a:prstGeom>
-        </p:spPr>
-        <p:style>
-          <a:lnRef idx="2">
-            <a:schemeClr val="accent1"/>
-          </a:lnRef>
-          <a:fillRef idx="0">
-            <a:schemeClr val="accent1"/>
-          </a:fillRef>
-          <a:effectRef idx="1">
-            <a:schemeClr val="accent1"/>
-          </a:effectRef>
-          <a:fontRef idx="minor">
-            <a:schemeClr val="tx1"/>
-          </a:fontRef>
-        </p:style>
-      </p:cxnSp>
-      <p:cxnSp>
-        <p:nvCxnSpPr>
-          <p:cNvPr id="11" name="Connector 10"/>
-          <p:cNvCxnSpPr>
-            <a:stCxn id="5" idx="3"/>
-            <a:endCxn id="6" idx="1"/>
-          </p:cNvCxnSpPr>
-          <p:nvPr/>
-        </p:nvCxnSpPr>
-        <p:spPr>
-          <a:xfrm flipH="1">
-            <a:off x="3369305" y="2321018"/>
-            <a:ext cx="3981761" cy="327408"/>
-          </a:xfrm>
-          <a:prstGeom prst="curvedConnector3">
-            <a:avLst/>
-          </a:prstGeom>
+          <a:ln>
+            <a:headEnd type="arrow" w="med" len="med"/>
+          </a:ln>
         </p:spPr>
         <p:style>
           <a:lnRef idx="2">
@@ -13078,6 +13145,76 @@
         <p:nvCxnSpPr>
           <p:cNvPr id="12" name="Connector 11"/>
           <p:cNvCxnSpPr>
+            <a:stCxn id="5" idx="3"/>
+            <a:endCxn id="6" idx="1"/>
+          </p:cNvCxnSpPr>
+          <p:nvPr/>
+        </p:nvCxnSpPr>
+        <p:spPr>
+          <a:xfrm flipH="1">
+            <a:off x="3501144" y="2172085"/>
+            <a:ext cx="3378374" cy="1257807"/>
+          </a:xfrm>
+          <a:prstGeom prst="curvedConnector3">
+            <a:avLst/>
+          </a:prstGeom>
+          <a:ln>
+            <a:headEnd type="arrow" w="med" len="med"/>
+          </a:ln>
+        </p:spPr>
+        <p:style>
+          <a:lnRef idx="2">
+            <a:schemeClr val="accent1"/>
+          </a:lnRef>
+          <a:fillRef idx="0">
+            <a:schemeClr val="accent1"/>
+          </a:fillRef>
+          <a:effectRef idx="1">
+            <a:schemeClr val="accent1"/>
+          </a:effectRef>
+          <a:fontRef idx="minor">
+            <a:schemeClr val="tx1"/>
+          </a:fontRef>
+        </p:style>
+      </p:cxnSp>
+      <p:sp>
+        <p:nvSpPr>
+          <p:cNvPr id="13" name="TextBox 12"/>
+          <p:cNvSpPr txBox="1"/>
+          <p:nvPr/>
+        </p:nvSpPr>
+        <p:spPr>
+          <a:xfrm>
+            <a:off x="4690331" y="2650988"/>
+            <a:ext cx="1000000" cy="300000"/>
+          </a:xfrm>
+          <a:prstGeom prst="rect">
+            <a:avLst/>
+          </a:prstGeom>
+          <a:noFill/>
+        </p:spPr>
+        <p:txBody>
+          <a:bodyPr wrap="none">
+            <a:spAutoFit/>
+          </a:bodyPr>
+          <a:lstStyle/>
+          <a:p>
+            <a:pPr algn="ctr"/>
+            <a:r>
+              <a:rPr sz="900" i="1">
+                <a:solidFill>
+                  <a:srgbClr val="323232"/>
+                </a:solidFill>
+              </a:rPr>
+              <a:t>開始</a:t>
+            </a:r>
+          </a:p>
+        </p:txBody>
+      </p:sp>
+      <p:cxnSp>
+        <p:nvCxnSpPr>
+          <p:cNvPr id="14" name="Connector 13"/>
+          <p:cNvCxnSpPr>
             <a:stCxn id="6" idx="3"/>
             <a:endCxn id="7" idx="1"/>
           </p:cNvCxnSpPr>
@@ -13085,12 +13222,15 @@
         </p:nvCxnSpPr>
         <p:spPr>
           <a:xfrm flipH="1">
-            <a:off x="457200" y="2648426"/>
-            <a:ext cx="4112105" cy="952495"/>
+            <a:off x="457200" y="3429892"/>
+            <a:ext cx="4243944" cy="458400"/>
           </a:xfrm>
           <a:prstGeom prst="curvedConnector3">
             <a:avLst/>
           </a:prstGeom>
+          <a:ln>
+            <a:headEnd type="arrow" w="med" len="med"/>
+          </a:ln>
         </p:spPr>
         <p:style>
           <a:lnRef idx="2">
@@ -13107,9 +13247,43 @@
           </a:fontRef>
         </p:style>
       </p:cxnSp>
+      <p:sp>
+        <p:nvSpPr>
+          <p:cNvPr id="15" name="TextBox 14"/>
+          <p:cNvSpPr txBox="1"/>
+          <p:nvPr/>
+        </p:nvSpPr>
+        <p:spPr>
+          <a:xfrm>
+            <a:off x="2079172" y="3509092"/>
+            <a:ext cx="1000000" cy="300000"/>
+          </a:xfrm>
+          <a:prstGeom prst="rect">
+            <a:avLst/>
+          </a:prstGeom>
+          <a:noFill/>
+        </p:spPr>
+        <p:txBody>
+          <a:bodyPr wrap="none">
+            <a:spAutoFit/>
+          </a:bodyPr>
+          <a:lstStyle/>
+          <a:p>
+            <a:pPr algn="ctr"/>
+            <a:r>
+              <a:rPr sz="900" i="1">
+                <a:solidFill>
+                  <a:srgbClr val="323232"/>
+                </a:solidFill>
+              </a:rPr>
+              <a:t>成功</a:t>
+            </a:r>
+          </a:p>
+        </p:txBody>
+      </p:sp>
       <p:cxnSp>
         <p:nvCxnSpPr>
-          <p:cNvPr id="13" name="Connector 12"/>
+          <p:cNvPr id="16" name="Connector 15"/>
           <p:cNvCxnSpPr>
             <a:stCxn id="6" idx="1"/>
             <a:endCxn id="8" idx="3"/>
@@ -13118,12 +13292,15 @@
         </p:nvCxnSpPr>
         <p:spPr>
           <a:xfrm>
-            <a:off x="3369305" y="2648426"/>
-            <a:ext cx="4959565" cy="1448483"/>
+            <a:off x="3501144" y="3429892"/>
+            <a:ext cx="4851303" cy="316577"/>
           </a:xfrm>
           <a:prstGeom prst="curvedConnector3">
             <a:avLst/>
           </a:prstGeom>
+          <a:ln>
+            <a:headEnd type="arrow" w="med" len="med"/>
+          </a:ln>
         </p:spPr>
         <p:style>
           <a:lnRef idx="2">
@@ -13140,9 +13317,43 @@
           </a:fontRef>
         </p:style>
       </p:cxnSp>
+      <p:sp>
+        <p:nvSpPr>
+          <p:cNvPr id="17" name="TextBox 16"/>
+          <p:cNvSpPr txBox="1"/>
+          <p:nvPr/>
+        </p:nvSpPr>
+        <p:spPr>
+          <a:xfrm>
+            <a:off x="5426795" y="3438180"/>
+            <a:ext cx="1000000" cy="300000"/>
+          </a:xfrm>
+          <a:prstGeom prst="rect">
+            <a:avLst/>
+          </a:prstGeom>
+          <a:noFill/>
+        </p:spPr>
+        <p:txBody>
+          <a:bodyPr wrap="none">
+            <a:spAutoFit/>
+          </a:bodyPr>
+          <a:lstStyle/>
+          <a:p>
+            <a:pPr algn="ctr"/>
+            <a:r>
+              <a:rPr sz="900" i="1">
+                <a:solidFill>
+                  <a:srgbClr val="323232"/>
+                </a:solidFill>
+              </a:rPr>
+              <a:t>失敗</a:t>
+            </a:r>
+          </a:p>
+        </p:txBody>
+      </p:sp>
       <p:cxnSp>
         <p:nvCxnSpPr>
-          <p:cNvPr id="14" name="Connector 13"/>
+          <p:cNvPr id="18" name="Connector 17"/>
           <p:cNvCxnSpPr>
             <a:stCxn id="8" idx="0"/>
             <a:endCxn id="5" idx="2"/>
@@ -13151,12 +13362,15 @@
         </p:nvCxnSpPr>
         <p:spPr>
           <a:xfrm flipH="1" flipV="1">
-            <a:off x="6751066" y="2571018"/>
-            <a:ext cx="977804" cy="1275891"/>
+            <a:off x="6279518" y="2422085"/>
+            <a:ext cx="1472929" cy="1074384"/>
           </a:xfrm>
           <a:prstGeom prst="curvedConnector3">
             <a:avLst/>
           </a:prstGeom>
+          <a:ln>
+            <a:headEnd type="arrow" w="med" len="med"/>
+          </a:ln>
         </p:spPr>
         <p:style>
           <a:lnRef idx="2">
@@ -13173,9 +13387,43 @@
           </a:fontRef>
         </p:style>
       </p:cxnSp>
+      <p:sp>
+        <p:nvSpPr>
+          <p:cNvPr id="19" name="TextBox 18"/>
+          <p:cNvSpPr txBox="1"/>
+          <p:nvPr/>
+        </p:nvSpPr>
+        <p:spPr>
+          <a:xfrm>
+            <a:off x="6515982" y="2809277"/>
+            <a:ext cx="1000000" cy="300000"/>
+          </a:xfrm>
+          <a:prstGeom prst="rect">
+            <a:avLst/>
+          </a:prstGeom>
+          <a:noFill/>
+        </p:spPr>
+        <p:txBody>
+          <a:bodyPr wrap="none">
+            <a:spAutoFit/>
+          </a:bodyPr>
+          <a:lstStyle/>
+          <a:p>
+            <a:pPr algn="ctr"/>
+            <a:r>
+              <a:rPr sz="900" i="1">
+                <a:solidFill>
+                  <a:srgbClr val="323232"/>
+                </a:solidFill>
+              </a:rPr>
+              <a:t>リトライ</a:t>
+            </a:r>
+          </a:p>
+        </p:txBody>
+      </p:sp>
       <p:cxnSp>
         <p:nvCxnSpPr>
-          <p:cNvPr id="15" name="Connector 14"/>
+          <p:cNvPr id="20" name="Connector 19"/>
           <p:cNvCxnSpPr>
             <a:stCxn id="7" idx="2"/>
             <a:endCxn id="9" idx="0"/>
@@ -13184,12 +13432,15 @@
         </p:nvCxnSpPr>
         <p:spPr>
           <a:xfrm>
-            <a:off x="1057200" y="3850921"/>
-            <a:ext cx="718318" cy="1262359"/>
+            <a:off x="1057200" y="4138292"/>
+            <a:ext cx="831530" cy="1118976"/>
           </a:xfrm>
           <a:prstGeom prst="curvedConnector3">
             <a:avLst/>
           </a:prstGeom>
+          <a:ln>
+            <a:headEnd type="arrow" w="med" len="med"/>
+          </a:ln>
         </p:spPr>
         <p:style>
           <a:lnRef idx="2">
@@ -13240,7 +13491,7 @@
           <a:lstStyle/>
           <a:p>
             <a:r>
-              <a:t>6. ER図（Entity Relationship Diagram）</a:t>
+              <a:t>5b. 状態図 - 並行（並列）・ノート・LR方向</a:t>
             </a:r>
           </a:p>
         </p:txBody>
@@ -13264,18 +13515,608 @@
       </p:sp>
       <p:sp>
         <p:nvSpPr>
-          <p:cNvPr id="4" name="Rectangle 3"/>
+          <p:cNvPr id="4" name="Rounded Rectangle 3"/>
           <p:cNvSpPr/>
           <p:nvPr/>
         </p:nvSpPr>
         <p:spPr>
           <a:xfrm>
-            <a:off x="6425688" y="5513155"/>
+            <a:off x="2272000" y="2188180"/>
+            <a:ext cx="4600000" cy="2420000"/>
+          </a:xfrm>
+          <a:prstGeom prst="roundRect">
+            <a:avLst/>
+          </a:prstGeom>
+          <a:solidFill>
+            <a:srgbClr val="E6F0FF"/>
+          </a:solidFill>
+          <a:ln>
+            <a:solidFill>
+              <a:srgbClr val="4664aa"/>
+            </a:solidFill>
+            <a:prstDash val="dash"/>
+          </a:ln>
+        </p:spPr>
+        <p:style>
+          <a:lnRef idx="1">
+            <a:schemeClr val="accent1"/>
+          </a:lnRef>
+          <a:fillRef idx="3">
+            <a:schemeClr val="accent1"/>
+          </a:fillRef>
+          <a:effectRef idx="2">
+            <a:schemeClr val="accent1"/>
+          </a:effectRef>
+          <a:fontRef idx="minor">
+            <a:schemeClr val="lt1"/>
+          </a:fontRef>
+        </p:style>
+        <p:txBody>
+          <a:bodyPr rtlCol="0" anchor="ctr"/>
+          <a:lstStyle/>
+          <a:p/>
+        </p:txBody>
+      </p:sp>
+      <p:sp>
+        <p:nvSpPr>
+          <p:cNvPr id="5" name="Rounded Rectangle 4"/>
+          <p:cNvSpPr/>
+          <p:nvPr/>
+        </p:nvSpPr>
+        <p:spPr>
+          <a:xfrm>
+            <a:off x="2872000" y="2653181"/>
+            <a:ext cx="3400000" cy="2420000"/>
+          </a:xfrm>
+          <a:prstGeom prst="roundRect">
+            <a:avLst/>
+          </a:prstGeom>
+          <a:solidFill>
+            <a:srgbClr val="EEF4FF"/>
+          </a:solidFill>
+          <a:ln>
+            <a:solidFill>
+              <a:srgbClr val="4664AA"/>
+            </a:solidFill>
+          </a:ln>
+        </p:spPr>
+        <p:style>
+          <a:lnRef idx="1">
+            <a:schemeClr val="accent1"/>
+          </a:lnRef>
+          <a:fillRef idx="3">
+            <a:schemeClr val="accent1"/>
+          </a:fillRef>
+          <a:effectRef idx="2">
+            <a:schemeClr val="accent1"/>
+          </a:effectRef>
+          <a:fontRef idx="minor">
+            <a:schemeClr val="lt1"/>
+          </a:fontRef>
+        </p:style>
+        <p:txBody>
+          <a:bodyPr rtlCol="0" anchor="ctr"/>
+          <a:lstStyle/>
+          <a:p/>
+        </p:txBody>
+      </p:sp>
+      <p:sp>
+        <p:nvSpPr>
+          <p:cNvPr id="6" name="TextBox 5"/>
+          <p:cNvSpPr txBox="1"/>
+          <p:nvPr/>
+        </p:nvSpPr>
+        <p:spPr>
+          <a:xfrm>
+            <a:off x="2872000" y="2653181"/>
+            <a:ext cx="3400000" cy="420000"/>
+          </a:xfrm>
+          <a:prstGeom prst="rect">
+            <a:avLst/>
+          </a:prstGeom>
+          <a:noFill/>
+        </p:spPr>
+        <p:txBody>
+          <a:bodyPr wrap="none">
+            <a:spAutoFit/>
+          </a:bodyPr>
+          <a:lstStyle/>
+          <a:p>
+            <a:pPr algn="ctr"/>
+            <a:r>
+              <a:rPr sz="1100" b="1">
+                <a:solidFill>
+                  <a:srgbClr val="4664AA"/>
+                </a:solidFill>
+              </a:rPr>
+              <a:t>Active</a:t>
+            </a:r>
+          </a:p>
+        </p:txBody>
+      </p:sp>
+      <p:sp>
+        <p:nvSpPr>
+          <p:cNvPr id="7" name="Rounded Rectangle 6"/>
+          <p:cNvSpPr/>
+          <p:nvPr/>
+        </p:nvSpPr>
+        <p:spPr>
+          <a:xfrm>
+            <a:off x="2272000" y="3538181"/>
+            <a:ext cx="4600000" cy="2420000"/>
+          </a:xfrm>
+          <a:prstGeom prst="roundRect">
+            <a:avLst/>
+          </a:prstGeom>
+          <a:solidFill>
+            <a:srgbClr val="E6F0FF"/>
+          </a:solidFill>
+          <a:ln>
+            <a:solidFill>
+              <a:srgbClr val="4664aa"/>
+            </a:solidFill>
+            <a:prstDash val="dash"/>
+          </a:ln>
+        </p:spPr>
+        <p:style>
+          <a:lnRef idx="1">
+            <a:schemeClr val="accent1"/>
+          </a:lnRef>
+          <a:fillRef idx="3">
+            <a:schemeClr val="accent1"/>
+          </a:fillRef>
+          <a:effectRef idx="2">
+            <a:schemeClr val="accent1"/>
+          </a:effectRef>
+          <a:fontRef idx="minor">
+            <a:schemeClr val="lt1"/>
+          </a:fontRef>
+        </p:style>
+        <p:txBody>
+          <a:bodyPr rtlCol="0" anchor="ctr"/>
+          <a:lstStyle/>
+          <a:p/>
+        </p:txBody>
+      </p:sp>
+      <p:sp>
+        <p:nvSpPr>
+          <p:cNvPr id="8" name="Oval 7"/>
+          <p:cNvSpPr/>
+          <p:nvPr/>
+        </p:nvSpPr>
+        <p:spPr>
+          <a:xfrm>
+            <a:off x="1218679" y="3673181"/>
+            <a:ext cx="380000" cy="380000"/>
+          </a:xfrm>
+          <a:prstGeom prst="ellipse">
+            <a:avLst/>
+          </a:prstGeom>
+          <a:solidFill>
+            <a:srgbClr val="000000"/>
+          </a:solidFill>
+          <a:ln>
+            <a:noFill/>
+          </a:ln>
+        </p:spPr>
+        <p:style>
+          <a:lnRef idx="1">
+            <a:schemeClr val="accent1"/>
+          </a:lnRef>
+          <a:fillRef idx="3">
+            <a:schemeClr val="accent1"/>
+          </a:fillRef>
+          <a:effectRef idx="2">
+            <a:schemeClr val="accent1"/>
+          </a:effectRef>
+          <a:fontRef idx="minor">
+            <a:schemeClr val="lt1"/>
+          </a:fontRef>
+        </p:style>
+        <p:txBody>
+          <a:bodyPr rtlCol="0" anchor="ctr"/>
+          <a:lstStyle/>
+          <a:p/>
+        </p:txBody>
+      </p:sp>
+      <p:sp>
+        <p:nvSpPr>
+          <p:cNvPr id="9" name="Oval 8"/>
+          <p:cNvSpPr/>
+          <p:nvPr/>
+        </p:nvSpPr>
+        <p:spPr>
+          <a:xfrm>
+            <a:off x="7510320" y="3638181"/>
+            <a:ext cx="450000" cy="450000"/>
+          </a:xfrm>
+          <a:prstGeom prst="ellipse">
+            <a:avLst/>
+          </a:prstGeom>
+          <a:solidFill>
+            <a:srgbClr val="000000"/>
+          </a:solidFill>
+          <a:ln>
+            <a:noFill/>
+          </a:ln>
+        </p:spPr>
+        <p:style>
+          <a:lnRef idx="1">
+            <a:schemeClr val="accent1"/>
+          </a:lnRef>
+          <a:fillRef idx="3">
+            <a:schemeClr val="accent1"/>
+          </a:fillRef>
+          <a:effectRef idx="2">
+            <a:schemeClr val="accent1"/>
+          </a:effectRef>
+          <a:fontRef idx="minor">
+            <a:schemeClr val="lt1"/>
+          </a:fontRef>
+        </p:style>
+        <p:txBody>
+          <a:bodyPr rtlCol="0" anchor="ctr"/>
+          <a:lstStyle/>
+          <a:p/>
+        </p:txBody>
+      </p:sp>
+      <p:sp>
+        <p:nvSpPr>
+          <p:cNvPr id="10" name="Oval 9"/>
+          <p:cNvSpPr/>
+          <p:nvPr/>
+        </p:nvSpPr>
+        <p:spPr>
+          <a:xfrm>
+            <a:off x="7610320" y="3738181"/>
+            <a:ext cx="250000" cy="250000"/>
+          </a:xfrm>
+          <a:prstGeom prst="ellipse">
+            <a:avLst/>
+          </a:prstGeom>
+          <a:solidFill>
+            <a:srgbClr val="FFFFFF"/>
+          </a:solidFill>
+          <a:ln>
+            <a:noFill/>
+          </a:ln>
+        </p:spPr>
+        <p:style>
+          <a:lnRef idx="1">
+            <a:schemeClr val="accent1"/>
+          </a:lnRef>
+          <a:fillRef idx="3">
+            <a:schemeClr val="accent1"/>
+          </a:fillRef>
+          <a:effectRef idx="2">
+            <a:schemeClr val="accent1"/>
+          </a:effectRef>
+          <a:fontRef idx="minor">
+            <a:schemeClr val="lt1"/>
+          </a:fontRef>
+        </p:style>
+        <p:txBody>
+          <a:bodyPr rtlCol="0" anchor="ctr"/>
+          <a:lstStyle/>
+          <a:p/>
+        </p:txBody>
+      </p:sp>
+      <p:sp>
+        <p:nvSpPr>
+          <p:cNvPr id="11" name="Oval 10"/>
+          <p:cNvSpPr/>
+          <p:nvPr/>
+        </p:nvSpPr>
+        <p:spPr>
+          <a:xfrm>
+            <a:off x="4821071" y="4168180"/>
+            <a:ext cx="380000" cy="380000"/>
+          </a:xfrm>
+          <a:prstGeom prst="ellipse">
+            <a:avLst/>
+          </a:prstGeom>
+          <a:solidFill>
+            <a:srgbClr val="000000"/>
+          </a:solidFill>
+          <a:ln>
+            <a:noFill/>
+          </a:ln>
+        </p:spPr>
+        <p:style>
+          <a:lnRef idx="1">
+            <a:schemeClr val="accent1"/>
+          </a:lnRef>
+          <a:fillRef idx="3">
+            <a:schemeClr val="accent1"/>
+          </a:fillRef>
+          <a:effectRef idx="2">
+            <a:schemeClr val="accent1"/>
+          </a:effectRef>
+          <a:fontRef idx="minor">
+            <a:schemeClr val="lt1"/>
+          </a:fontRef>
+        </p:style>
+        <p:txBody>
+          <a:bodyPr rtlCol="0" anchor="ctr"/>
+          <a:lstStyle/>
+          <a:p/>
+        </p:txBody>
+      </p:sp>
+      <p:sp>
+        <p:nvSpPr>
+          <p:cNvPr id="12" name="Rounded Rectangle 11"/>
+          <p:cNvSpPr/>
+          <p:nvPr/>
+        </p:nvSpPr>
+        <p:spPr>
+          <a:xfrm>
+            <a:off x="4549899" y="3157706"/>
             <a:ext cx="1200000" cy="500000"/>
           </a:xfrm>
+          <a:prstGeom prst="roundRect">
+            <a:avLst/>
+          </a:prstGeom>
+          <a:solidFill>
+            <a:srgbClr val="FFFFFF"/>
+          </a:solidFill>
+          <a:ln>
+            <a:solidFill>
+              <a:srgbClr val="323250"/>
+            </a:solidFill>
+          </a:ln>
+        </p:spPr>
+        <p:style>
+          <a:lnRef idx="1">
+            <a:schemeClr val="accent1"/>
+          </a:lnRef>
+          <a:fillRef idx="3">
+            <a:schemeClr val="accent1"/>
+          </a:fillRef>
+          <a:effectRef idx="2">
+            <a:schemeClr val="accent1"/>
+          </a:effectRef>
+          <a:fontRef idx="minor">
+            <a:schemeClr val="lt1"/>
+          </a:fontRef>
+        </p:style>
+        <p:txBody>
+          <a:bodyPr rtlCol="0" anchor="ctr" wrap="none"/>
+          <a:lstStyle/>
+          <a:p>
+            <a:pPr algn="ctr"/>
+            <a:r>
+              <a:rPr sz="1100">
+                <a:solidFill>
+                  <a:srgbClr val="000000"/>
+                </a:solidFill>
+              </a:rPr>
+              <a:t>NumLockOff</a:t>
+            </a:r>
+          </a:p>
+        </p:txBody>
+      </p:sp>
+      <p:sp>
+        <p:nvSpPr>
+          <p:cNvPr id="13" name="Rounded Rectangle 12"/>
+          <p:cNvSpPr/>
+          <p:nvPr/>
+        </p:nvSpPr>
+        <p:spPr>
+          <a:xfrm>
+            <a:off x="2955029" y="2808653"/>
+            <a:ext cx="1200000" cy="500000"/>
+          </a:xfrm>
+          <a:prstGeom prst="roundRect">
+            <a:avLst/>
+          </a:prstGeom>
+          <a:solidFill>
+            <a:srgbClr val="FFFFFF"/>
+          </a:solidFill>
+          <a:ln>
+            <a:solidFill>
+              <a:srgbClr val="323250"/>
+            </a:solidFill>
+          </a:ln>
+        </p:spPr>
+        <p:style>
+          <a:lnRef idx="1">
+            <a:schemeClr val="accent1"/>
+          </a:lnRef>
+          <a:fillRef idx="3">
+            <a:schemeClr val="accent1"/>
+          </a:fillRef>
+          <a:effectRef idx="2">
+            <a:schemeClr val="accent1"/>
+          </a:effectRef>
+          <a:fontRef idx="minor">
+            <a:schemeClr val="lt1"/>
+          </a:fontRef>
+        </p:style>
+        <p:txBody>
+          <a:bodyPr rtlCol="0" anchor="ctr" wrap="none"/>
+          <a:lstStyle/>
+          <a:p>
+            <a:pPr algn="ctr"/>
+            <a:r>
+              <a:rPr sz="1100">
+                <a:solidFill>
+                  <a:srgbClr val="000000"/>
+                </a:solidFill>
+              </a:rPr>
+              <a:t>NumLockOn</a:t>
+            </a:r>
+          </a:p>
+        </p:txBody>
+      </p:sp>
+      <p:sp>
+        <p:nvSpPr>
+          <p:cNvPr id="14" name="Oval 13"/>
+          <p:cNvSpPr/>
+          <p:nvPr/>
+        </p:nvSpPr>
+        <p:spPr>
+          <a:xfrm>
+            <a:off x="4821071" y="5518181"/>
+            <a:ext cx="380000" cy="380000"/>
+          </a:xfrm>
+          <a:prstGeom prst="ellipse">
+            <a:avLst/>
+          </a:prstGeom>
+          <a:solidFill>
+            <a:srgbClr val="000000"/>
+          </a:solidFill>
+          <a:ln>
+            <a:noFill/>
+          </a:ln>
+        </p:spPr>
+        <p:style>
+          <a:lnRef idx="1">
+            <a:schemeClr val="accent1"/>
+          </a:lnRef>
+          <a:fillRef idx="3">
+            <a:schemeClr val="accent1"/>
+          </a:fillRef>
+          <a:effectRef idx="2">
+            <a:schemeClr val="accent1"/>
+          </a:effectRef>
+          <a:fontRef idx="minor">
+            <a:schemeClr val="lt1"/>
+          </a:fontRef>
+        </p:style>
+        <p:txBody>
+          <a:bodyPr rtlCol="0" anchor="ctr"/>
+          <a:lstStyle/>
+          <a:p/>
+        </p:txBody>
+      </p:sp>
+      <p:sp>
+        <p:nvSpPr>
+          <p:cNvPr id="15" name="Rounded Rectangle 14"/>
+          <p:cNvSpPr/>
+          <p:nvPr/>
+        </p:nvSpPr>
+        <p:spPr>
+          <a:xfrm>
+            <a:off x="4549899" y="4507707"/>
+            <a:ext cx="1200000" cy="500000"/>
+          </a:xfrm>
+          <a:prstGeom prst="roundRect">
+            <a:avLst/>
+          </a:prstGeom>
+          <a:solidFill>
+            <a:srgbClr val="FFFFFF"/>
+          </a:solidFill>
+          <a:ln>
+            <a:solidFill>
+              <a:srgbClr val="323250"/>
+            </a:solidFill>
+          </a:ln>
+        </p:spPr>
+        <p:style>
+          <a:lnRef idx="1">
+            <a:schemeClr val="accent1"/>
+          </a:lnRef>
+          <a:fillRef idx="3">
+            <a:schemeClr val="accent1"/>
+          </a:fillRef>
+          <a:effectRef idx="2">
+            <a:schemeClr val="accent1"/>
+          </a:effectRef>
+          <a:fontRef idx="minor">
+            <a:schemeClr val="lt1"/>
+          </a:fontRef>
+        </p:style>
+        <p:txBody>
+          <a:bodyPr rtlCol="0" anchor="ctr" wrap="none"/>
+          <a:lstStyle/>
+          <a:p>
+            <a:pPr algn="ctr"/>
+            <a:r>
+              <a:rPr sz="1100">
+                <a:solidFill>
+                  <a:srgbClr val="000000"/>
+                </a:solidFill>
+              </a:rPr>
+              <a:t>CapsLockOff</a:t>
+            </a:r>
+          </a:p>
+        </p:txBody>
+      </p:sp>
+      <p:sp>
+        <p:nvSpPr>
+          <p:cNvPr id="16" name="Rounded Rectangle 15"/>
+          <p:cNvSpPr/>
+          <p:nvPr/>
+        </p:nvSpPr>
+        <p:spPr>
+          <a:xfrm>
+            <a:off x="2955029" y="4158654"/>
+            <a:ext cx="1200000" cy="500000"/>
+          </a:xfrm>
+          <a:prstGeom prst="roundRect">
+            <a:avLst/>
+          </a:prstGeom>
+          <a:solidFill>
+            <a:srgbClr val="FFFFFF"/>
+          </a:solidFill>
+          <a:ln>
+            <a:solidFill>
+              <a:srgbClr val="323250"/>
+            </a:solidFill>
+          </a:ln>
+        </p:spPr>
+        <p:style>
+          <a:lnRef idx="1">
+            <a:schemeClr val="accent1"/>
+          </a:lnRef>
+          <a:fillRef idx="3">
+            <a:schemeClr val="accent1"/>
+          </a:fillRef>
+          <a:effectRef idx="2">
+            <a:schemeClr val="accent1"/>
+          </a:effectRef>
+          <a:fontRef idx="minor">
+            <a:schemeClr val="lt1"/>
+          </a:fontRef>
+        </p:style>
+        <p:txBody>
+          <a:bodyPr rtlCol="0" anchor="ctr" wrap="none"/>
+          <a:lstStyle/>
+          <a:p>
+            <a:pPr algn="ctr"/>
+            <a:r>
+              <a:rPr sz="1100">
+                <a:solidFill>
+                  <a:srgbClr val="000000"/>
+                </a:solidFill>
+              </a:rPr>
+              <a:t>CapsLockOn</a:t>
+            </a:r>
+          </a:p>
+        </p:txBody>
+      </p:sp>
+      <p:sp>
+        <p:nvSpPr>
+          <p:cNvPr id="17" name="Rectangle 16"/>
+          <p:cNvSpPr/>
+          <p:nvPr/>
+        </p:nvSpPr>
+        <p:spPr>
+          <a:xfrm>
+            <a:off x="5422000" y="3613181"/>
+            <a:ext cx="1200000" cy="500000"/>
+          </a:xfrm>
           <a:prstGeom prst="rect">
             <a:avLst/>
           </a:prstGeom>
+          <a:solidFill>
+            <a:srgbClr val="FFFDC8"/>
+          </a:solidFill>
+          <a:ln>
+            <a:solidFill>
+              <a:srgbClr val="A08C3C"/>
+            </a:solidFill>
+          </a:ln>
         </p:spPr>
         <p:style>
           <a:lnRef idx="1">
@@ -13292,153 +14133,40 @@
           </a:fontRef>
         </p:style>
         <p:txBody>
-          <a:bodyPr rtlCol="0" anchor="ctr"/>
-          <a:lstStyle/>
-          <a:p>
-            <a:r>
-              <a:rPr sz="1200"/>
-              <a:t>CUSTOMER</a:t>
-            </a:r>
-          </a:p>
-        </p:txBody>
-      </p:sp>
-      <p:sp>
-        <p:nvSpPr>
-          <p:cNvPr id="5" name="Rectangle 4"/>
-          <p:cNvSpPr/>
-          <p:nvPr/>
-        </p:nvSpPr>
-        <p:spPr>
-          <a:xfrm>
-            <a:off x="6500578" y="2848046"/>
-            <a:ext cx="1200000" cy="500000"/>
-          </a:xfrm>
-          <a:prstGeom prst="rect">
-            <a:avLst/>
-          </a:prstGeom>
-        </p:spPr>
-        <p:style>
-          <a:lnRef idx="1">
-            <a:schemeClr val="accent1"/>
-          </a:lnRef>
-          <a:fillRef idx="3">
-            <a:schemeClr val="accent1"/>
-          </a:fillRef>
-          <a:effectRef idx="2">
-            <a:schemeClr val="accent1"/>
-          </a:effectRef>
-          <a:fontRef idx="minor">
-            <a:schemeClr val="lt1"/>
-          </a:fontRef>
-        </p:style>
-        <p:txBody>
-          <a:bodyPr rtlCol="0" anchor="ctr"/>
-          <a:lstStyle/>
-          <a:p>
-            <a:r>
-              <a:rPr sz="1200"/>
-              <a:t>ORDER</a:t>
-            </a:r>
-          </a:p>
-        </p:txBody>
-      </p:sp>
-      <p:sp>
-        <p:nvSpPr>
-          <p:cNvPr id="6" name="Rectangle 5"/>
-          <p:cNvSpPr/>
-          <p:nvPr/>
-        </p:nvSpPr>
-        <p:spPr>
-          <a:xfrm>
-            <a:off x="2504533" y="1957962"/>
-            <a:ext cx="1200000" cy="500000"/>
-          </a:xfrm>
-          <a:prstGeom prst="rect">
-            <a:avLst/>
-          </a:prstGeom>
-        </p:spPr>
-        <p:style>
-          <a:lnRef idx="1">
-            <a:schemeClr val="accent1"/>
-          </a:lnRef>
-          <a:fillRef idx="3">
-            <a:schemeClr val="accent1"/>
-          </a:fillRef>
-          <a:effectRef idx="2">
-            <a:schemeClr val="accent1"/>
-          </a:effectRef>
-          <a:fontRef idx="minor">
-            <a:schemeClr val="lt1"/>
-          </a:fontRef>
-        </p:style>
-        <p:txBody>
-          <a:bodyPr rtlCol="0" anchor="ctr"/>
-          <a:lstStyle/>
-          <a:p>
-            <a:r>
-              <a:rPr sz="1200"/>
-              <a:t>LINE-ITEM</a:t>
-            </a:r>
-          </a:p>
-        </p:txBody>
-      </p:sp>
-      <p:sp>
-        <p:nvSpPr>
-          <p:cNvPr id="7" name="Rectangle 6"/>
-          <p:cNvSpPr/>
-          <p:nvPr/>
-        </p:nvSpPr>
-        <p:spPr>
-          <a:xfrm>
-            <a:off x="457200" y="4133562"/>
-            <a:ext cx="1200000" cy="500000"/>
-          </a:xfrm>
-          <a:prstGeom prst="rect">
-            <a:avLst/>
-          </a:prstGeom>
-        </p:spPr>
-        <p:style>
-          <a:lnRef idx="1">
-            <a:schemeClr val="accent1"/>
-          </a:lnRef>
-          <a:fillRef idx="3">
-            <a:schemeClr val="accent1"/>
-          </a:fillRef>
-          <a:effectRef idx="2">
-            <a:schemeClr val="accent1"/>
-          </a:effectRef>
-          <a:fontRef idx="minor">
-            <a:schemeClr val="lt1"/>
-          </a:fontRef>
-        </p:style>
-        <p:txBody>
-          <a:bodyPr rtlCol="0" anchor="ctr"/>
-          <a:lstStyle/>
-          <a:p>
-            <a:r>
-              <a:rPr sz="1200"/>
-              <a:t>PRODUCT</a:t>
+          <a:bodyPr rtlCol="0" anchor="ctr" wrap="square"/>
+          <a:lstStyle/>
+          <a:p>
+            <a:r>
+              <a:rPr sz="900">
+                <a:solidFill>
+                  <a:srgbClr val="000000"/>
+                </a:solidFill>
+              </a:rPr>
+              <a:t>キーボードの並行状態</a:t>
             </a:r>
           </a:p>
         </p:txBody>
       </p:sp>
       <p:cxnSp>
         <p:nvCxnSpPr>
-          <p:cNvPr id="8" name="Connector 7"/>
+          <p:cNvPr id="18" name="Connector 17"/>
           <p:cNvCxnSpPr>
-            <a:stCxn id="4" idx="0"/>
-            <a:endCxn id="5" idx="2"/>
+            <a:stCxn id="8" idx="1"/>
+            <a:endCxn id="5" idx="3"/>
           </p:cNvCxnSpPr>
           <p:nvPr/>
         </p:nvCxnSpPr>
         <p:spPr>
-          <a:xfrm flipV="1">
-            <a:off x="7025688" y="3348046"/>
-            <a:ext cx="74890" cy="2165109"/>
+          <a:xfrm>
+            <a:off x="1218679" y="3863181"/>
+            <a:ext cx="5053321" cy="0"/>
           </a:xfrm>
           <a:prstGeom prst="curvedConnector3">
             <a:avLst/>
           </a:prstGeom>
+          <a:ln>
+            <a:headEnd type="arrow" w="med" len="med"/>
+          </a:ln>
         </p:spPr>
         <p:style>
           <a:lnRef idx="2">
@@ -13457,21 +14185,24 @@
       </p:cxnSp>
       <p:cxnSp>
         <p:nvCxnSpPr>
-          <p:cNvPr id="9" name="Connector 8"/>
+          <p:cNvPr id="19" name="Connector 18"/>
           <p:cNvCxnSpPr>
-            <a:stCxn id="5" idx="3"/>
-            <a:endCxn id="6" idx="1"/>
+            <a:stCxn id="11" idx="0"/>
+            <a:endCxn id="12" idx="2"/>
           </p:cNvCxnSpPr>
           <p:nvPr/>
         </p:nvCxnSpPr>
         <p:spPr>
-          <a:xfrm flipH="1" flipV="1">
-            <a:off x="2504533" y="2207962"/>
-            <a:ext cx="5196045" cy="890084"/>
+          <a:xfrm flipV="1">
+            <a:off x="5011071" y="3657706"/>
+            <a:ext cx="138828" cy="510474"/>
           </a:xfrm>
           <a:prstGeom prst="curvedConnector3">
             <a:avLst/>
           </a:prstGeom>
+          <a:ln>
+            <a:headEnd type="arrow" w="med" len="med"/>
+          </a:ln>
         </p:spPr>
         <p:style>
           <a:lnRef idx="2">
@@ -13490,21 +14221,340 @@
       </p:cxnSp>
       <p:cxnSp>
         <p:nvCxnSpPr>
-          <p:cNvPr id="10" name="Connector 9"/>
+          <p:cNvPr id="20" name="Connector 19"/>
           <p:cNvCxnSpPr>
-            <a:stCxn id="7" idx="0"/>
-            <a:endCxn id="6" idx="2"/>
+            <a:stCxn id="12" idx="3"/>
+            <a:endCxn id="13" idx="1"/>
           </p:cNvCxnSpPr>
           <p:nvPr/>
         </p:nvCxnSpPr>
         <p:spPr>
+          <a:xfrm flipH="1" flipV="1">
+            <a:off x="2955029" y="3058653"/>
+            <a:ext cx="2794870" cy="349053"/>
+          </a:xfrm>
+          <a:prstGeom prst="curvedConnector3">
+            <a:avLst/>
+          </a:prstGeom>
+          <a:ln>
+            <a:headEnd type="arrow" w="med" len="med"/>
+          </a:ln>
+        </p:spPr>
+        <p:style>
+          <a:lnRef idx="2">
+            <a:schemeClr val="accent1"/>
+          </a:lnRef>
+          <a:fillRef idx="0">
+            <a:schemeClr val="accent1"/>
+          </a:fillRef>
+          <a:effectRef idx="1">
+            <a:schemeClr val="accent1"/>
+          </a:effectRef>
+          <a:fontRef idx="minor">
+            <a:schemeClr val="tx1"/>
+          </a:fontRef>
+        </p:style>
+      </p:cxnSp>
+      <p:sp>
+        <p:nvSpPr>
+          <p:cNvPr id="21" name="TextBox 20"/>
+          <p:cNvSpPr txBox="1"/>
+          <p:nvPr/>
+        </p:nvSpPr>
+        <p:spPr>
+          <a:xfrm>
+            <a:off x="3852464" y="3083179"/>
+            <a:ext cx="1000000" cy="300000"/>
+          </a:xfrm>
+          <a:prstGeom prst="rect">
+            <a:avLst/>
+          </a:prstGeom>
+          <a:noFill/>
+        </p:spPr>
+        <p:txBody>
+          <a:bodyPr wrap="none">
+            <a:spAutoFit/>
+          </a:bodyPr>
+          <a:lstStyle/>
+          <a:p>
+            <a:pPr algn="ctr"/>
+            <a:r>
+              <a:rPr sz="900" i="1">
+                <a:solidFill>
+                  <a:srgbClr val="323232"/>
+                </a:solidFill>
+              </a:rPr>
+              <a:t>NumLock押す</a:t>
+            </a:r>
+          </a:p>
+        </p:txBody>
+      </p:sp>
+      <p:cxnSp>
+        <p:nvCxnSpPr>
+          <p:cNvPr id="22" name="Connector 21"/>
+          <p:cNvCxnSpPr>
+            <a:stCxn id="13" idx="1"/>
+            <a:endCxn id="12" idx="3"/>
+          </p:cNvCxnSpPr>
+          <p:nvPr/>
+        </p:nvCxnSpPr>
+        <p:spPr>
+          <a:xfrm>
+            <a:off x="2955029" y="3058653"/>
+            <a:ext cx="2794870" cy="349053"/>
+          </a:xfrm>
+          <a:prstGeom prst="curvedConnector3">
+            <a:avLst/>
+          </a:prstGeom>
+          <a:ln>
+            <a:headEnd type="arrow" w="med" len="med"/>
+          </a:ln>
+        </p:spPr>
+        <p:style>
+          <a:lnRef idx="2">
+            <a:schemeClr val="accent1"/>
+          </a:lnRef>
+          <a:fillRef idx="0">
+            <a:schemeClr val="accent1"/>
+          </a:fillRef>
+          <a:effectRef idx="1">
+            <a:schemeClr val="accent1"/>
+          </a:effectRef>
+          <a:fontRef idx="minor">
+            <a:schemeClr val="tx1"/>
+          </a:fontRef>
+        </p:style>
+      </p:cxnSp>
+      <p:sp>
+        <p:nvSpPr>
+          <p:cNvPr id="23" name="TextBox 22"/>
+          <p:cNvSpPr txBox="1"/>
+          <p:nvPr/>
+        </p:nvSpPr>
+        <p:spPr>
+          <a:xfrm>
+            <a:off x="3852464" y="3083179"/>
+            <a:ext cx="1000000" cy="300000"/>
+          </a:xfrm>
+          <a:prstGeom prst="rect">
+            <a:avLst/>
+          </a:prstGeom>
+          <a:noFill/>
+        </p:spPr>
+        <p:txBody>
+          <a:bodyPr wrap="none">
+            <a:spAutoFit/>
+          </a:bodyPr>
+          <a:lstStyle/>
+          <a:p>
+            <a:pPr algn="ctr"/>
+            <a:r>
+              <a:rPr sz="900" i="1">
+                <a:solidFill>
+                  <a:srgbClr val="323232"/>
+                </a:solidFill>
+              </a:rPr>
+              <a:t>NumLock押す</a:t>
+            </a:r>
+          </a:p>
+        </p:txBody>
+      </p:sp>
+      <p:cxnSp>
+        <p:nvCxnSpPr>
+          <p:cNvPr id="24" name="Connector 23"/>
+          <p:cNvCxnSpPr>
+            <a:stCxn id="14" idx="0"/>
+            <a:endCxn id="15" idx="2"/>
+          </p:cNvCxnSpPr>
+          <p:nvPr/>
+        </p:nvCxnSpPr>
+        <p:spPr>
           <a:xfrm flipV="1">
-            <a:off x="1057200" y="2457962"/>
-            <a:ext cx="2047333" cy="1675600"/>
+            <a:off x="5011071" y="5007707"/>
+            <a:ext cx="138828" cy="510474"/>
           </a:xfrm>
           <a:prstGeom prst="curvedConnector3">
             <a:avLst/>
           </a:prstGeom>
+          <a:ln>
+            <a:headEnd type="arrow" w="med" len="med"/>
+          </a:ln>
+        </p:spPr>
+        <p:style>
+          <a:lnRef idx="2">
+            <a:schemeClr val="accent1"/>
+          </a:lnRef>
+          <a:fillRef idx="0">
+            <a:schemeClr val="accent1"/>
+          </a:fillRef>
+          <a:effectRef idx="1">
+            <a:schemeClr val="accent1"/>
+          </a:effectRef>
+          <a:fontRef idx="minor">
+            <a:schemeClr val="tx1"/>
+          </a:fontRef>
+        </p:style>
+      </p:cxnSp>
+      <p:cxnSp>
+        <p:nvCxnSpPr>
+          <p:cNvPr id="25" name="Connector 24"/>
+          <p:cNvCxnSpPr>
+            <a:stCxn id="15" idx="3"/>
+            <a:endCxn id="16" idx="1"/>
+          </p:cNvCxnSpPr>
+          <p:nvPr/>
+        </p:nvCxnSpPr>
+        <p:spPr>
+          <a:xfrm flipH="1" flipV="1">
+            <a:off x="2955029" y="4408654"/>
+            <a:ext cx="2794870" cy="349053"/>
+          </a:xfrm>
+          <a:prstGeom prst="curvedConnector3">
+            <a:avLst/>
+          </a:prstGeom>
+          <a:ln>
+            <a:headEnd type="arrow" w="med" len="med"/>
+          </a:ln>
+        </p:spPr>
+        <p:style>
+          <a:lnRef idx="2">
+            <a:schemeClr val="accent1"/>
+          </a:lnRef>
+          <a:fillRef idx="0">
+            <a:schemeClr val="accent1"/>
+          </a:fillRef>
+          <a:effectRef idx="1">
+            <a:schemeClr val="accent1"/>
+          </a:effectRef>
+          <a:fontRef idx="minor">
+            <a:schemeClr val="tx1"/>
+          </a:fontRef>
+        </p:style>
+      </p:cxnSp>
+      <p:sp>
+        <p:nvSpPr>
+          <p:cNvPr id="26" name="TextBox 25"/>
+          <p:cNvSpPr txBox="1"/>
+          <p:nvPr/>
+        </p:nvSpPr>
+        <p:spPr>
+          <a:xfrm>
+            <a:off x="3852464" y="4433180"/>
+            <a:ext cx="1000000" cy="300000"/>
+          </a:xfrm>
+          <a:prstGeom prst="rect">
+            <a:avLst/>
+          </a:prstGeom>
+          <a:noFill/>
+        </p:spPr>
+        <p:txBody>
+          <a:bodyPr wrap="none">
+            <a:spAutoFit/>
+          </a:bodyPr>
+          <a:lstStyle/>
+          <a:p>
+            <a:pPr algn="ctr"/>
+            <a:r>
+              <a:rPr sz="900" i="1">
+                <a:solidFill>
+                  <a:srgbClr val="323232"/>
+                </a:solidFill>
+              </a:rPr>
+              <a:t>CapsLock押す</a:t>
+            </a:r>
+          </a:p>
+        </p:txBody>
+      </p:sp>
+      <p:cxnSp>
+        <p:nvCxnSpPr>
+          <p:cNvPr id="27" name="Connector 26"/>
+          <p:cNvCxnSpPr>
+            <a:stCxn id="16" idx="1"/>
+            <a:endCxn id="15" idx="3"/>
+          </p:cNvCxnSpPr>
+          <p:nvPr/>
+        </p:nvCxnSpPr>
+        <p:spPr>
+          <a:xfrm>
+            <a:off x="2955029" y="4408654"/>
+            <a:ext cx="2794870" cy="349053"/>
+          </a:xfrm>
+          <a:prstGeom prst="curvedConnector3">
+            <a:avLst/>
+          </a:prstGeom>
+          <a:ln>
+            <a:headEnd type="arrow" w="med" len="med"/>
+          </a:ln>
+        </p:spPr>
+        <p:style>
+          <a:lnRef idx="2">
+            <a:schemeClr val="accent1"/>
+          </a:lnRef>
+          <a:fillRef idx="0">
+            <a:schemeClr val="accent1"/>
+          </a:fillRef>
+          <a:effectRef idx="1">
+            <a:schemeClr val="accent1"/>
+          </a:effectRef>
+          <a:fontRef idx="minor">
+            <a:schemeClr val="tx1"/>
+          </a:fontRef>
+        </p:style>
+      </p:cxnSp>
+      <p:sp>
+        <p:nvSpPr>
+          <p:cNvPr id="28" name="TextBox 27"/>
+          <p:cNvSpPr txBox="1"/>
+          <p:nvPr/>
+        </p:nvSpPr>
+        <p:spPr>
+          <a:xfrm>
+            <a:off x="3852464" y="4433180"/>
+            <a:ext cx="1000000" cy="300000"/>
+          </a:xfrm>
+          <a:prstGeom prst="rect">
+            <a:avLst/>
+          </a:prstGeom>
+          <a:noFill/>
+        </p:spPr>
+        <p:txBody>
+          <a:bodyPr wrap="none">
+            <a:spAutoFit/>
+          </a:bodyPr>
+          <a:lstStyle/>
+          <a:p>
+            <a:pPr algn="ctr"/>
+            <a:r>
+              <a:rPr sz="900" i="1">
+                <a:solidFill>
+                  <a:srgbClr val="323232"/>
+                </a:solidFill>
+              </a:rPr>
+              <a:t>CapsLock押す</a:t>
+            </a:r>
+          </a:p>
+        </p:txBody>
+      </p:sp>
+      <p:cxnSp>
+        <p:nvCxnSpPr>
+          <p:cNvPr id="29" name="Connector 28"/>
+          <p:cNvCxnSpPr>
+            <a:stCxn id="5" idx="1"/>
+            <a:endCxn id="9" idx="3"/>
+          </p:cNvCxnSpPr>
+          <p:nvPr/>
+        </p:nvCxnSpPr>
+        <p:spPr>
+          <a:xfrm>
+            <a:off x="2872000" y="3863181"/>
+            <a:ext cx="5088320" cy="0"/>
+          </a:xfrm>
+          <a:prstGeom prst="curvedConnector3">
+            <a:avLst/>
+          </a:prstGeom>
+          <a:ln>
+            <a:headEnd type="arrow" w="med" len="med"/>
+          </a:ln>
         </p:spPr>
         <p:style>
           <a:lnRef idx="2">
@@ -13555,7 +14605,7 @@
           <a:lstStyle/>
           <a:p>
             <a:r>
-              <a:t>7. ユーザージャーニー図（User Journey）</a:t>
+              <a:t>5c. 状態図 - 分岐（choice）・複合状態</a:t>
             </a:r>
           </a:p>
         </p:txBody>
@@ -13579,14 +14629,57 @@
       </p:sp>
       <p:sp>
         <p:nvSpPr>
-          <p:cNvPr id="4" name="TextBox 3"/>
+          <p:cNvPr id="4" name="Rounded Rectangle 3"/>
+          <p:cNvSpPr/>
+          <p:nvPr/>
+        </p:nvSpPr>
+        <p:spPr>
+          <a:xfrm>
+            <a:off x="2872000" y="3559023"/>
+            <a:ext cx="3400000" cy="2420000"/>
+          </a:xfrm>
+          <a:prstGeom prst="roundRect">
+            <a:avLst/>
+          </a:prstGeom>
+          <a:solidFill>
+            <a:srgbClr val="EEF4FF"/>
+          </a:solidFill>
+          <a:ln>
+            <a:solidFill>
+              <a:srgbClr val="4664AA"/>
+            </a:solidFill>
+          </a:ln>
+        </p:spPr>
+        <p:style>
+          <a:lnRef idx="1">
+            <a:schemeClr val="accent1"/>
+          </a:lnRef>
+          <a:fillRef idx="3">
+            <a:schemeClr val="accent1"/>
+          </a:fillRef>
+          <a:effectRef idx="2">
+            <a:schemeClr val="accent1"/>
+          </a:effectRef>
+          <a:fontRef idx="minor">
+            <a:schemeClr val="lt1"/>
+          </a:fontRef>
+        </p:style>
+        <p:txBody>
+          <a:bodyPr rtlCol="0" anchor="ctr"/>
+          <a:lstStyle/>
+          <a:p/>
+        </p:txBody>
+      </p:sp>
+      <p:sp>
+        <p:nvSpPr>
+          <p:cNvPr id="5" name="TextBox 4"/>
           <p:cNvSpPr txBox="1"/>
           <p:nvPr/>
         </p:nvSpPr>
         <p:spPr>
           <a:xfrm>
-            <a:off x="457200" y="1600200"/>
-            <a:ext cx="8229600" cy="4525963"/>
+            <a:off x="2872000" y="3559023"/>
+            <a:ext cx="3400000" cy="420000"/>
           </a:xfrm>
           <a:prstGeom prst="rect">
             <a:avLst/>
@@ -13594,29 +14687,835 @@
           <a:noFill/>
         </p:spPr>
         <p:txBody>
-          <a:bodyPr wrap="square">
+          <a:bodyPr wrap="none">
             <a:spAutoFit/>
           </a:bodyPr>
           <a:lstStyle/>
           <a:p>
-            <a:r>
-              <a:rPr sz="1000">
-                <a:latin typeface="Courier New"/>
+            <a:pPr algn="ctr"/>
+            <a:r>
+              <a:rPr sz="1100" b="1">
+                <a:solidFill>
+                  <a:srgbClr val="4664AA"/>
+                </a:solidFill>
               </a:rPr>
-              <a:t>journey
-    title オンラインショッピング体験
-    section 商品探し
-        サイト訪問    : 5: ユーザー
-        検索実行      : 3: ユーザー
-        商品選択      : 4: ユーザー
-    section 購入
-        カートに追加  : 5: ユーザー
-        決済手続き    : 2: ユーザー
-        注文完了      : 5: ユーザー</a:t>
-            </a:r>
-          </a:p>
-        </p:txBody>
-      </p:sp>
+              <a:t>VehicleState</a:t>
+            </a:r>
+          </a:p>
+        </p:txBody>
+      </p:sp>
+      <p:sp>
+        <p:nvSpPr>
+          <p:cNvPr id="6" name="Oval 5"/>
+          <p:cNvSpPr/>
+          <p:nvPr/>
+        </p:nvSpPr>
+        <p:spPr>
+          <a:xfrm>
+            <a:off x="4382000" y="1861498"/>
+            <a:ext cx="380000" cy="380000"/>
+          </a:xfrm>
+          <a:prstGeom prst="ellipse">
+            <a:avLst/>
+          </a:prstGeom>
+          <a:solidFill>
+            <a:srgbClr val="000000"/>
+          </a:solidFill>
+          <a:ln>
+            <a:noFill/>
+          </a:ln>
+        </p:spPr>
+        <p:style>
+          <a:lnRef idx="1">
+            <a:schemeClr val="accent1"/>
+          </a:lnRef>
+          <a:fillRef idx="3">
+            <a:schemeClr val="accent1"/>
+          </a:fillRef>
+          <a:effectRef idx="2">
+            <a:schemeClr val="accent1"/>
+          </a:effectRef>
+          <a:fontRef idx="minor">
+            <a:schemeClr val="lt1"/>
+          </a:fontRef>
+        </p:style>
+        <p:txBody>
+          <a:bodyPr rtlCol="0" anchor="ctr"/>
+          <a:lstStyle/>
+          <a:p/>
+        </p:txBody>
+      </p:sp>
+      <p:sp>
+        <p:nvSpPr>
+          <p:cNvPr id="7" name="Rounded Rectangle 6"/>
+          <p:cNvSpPr/>
+          <p:nvPr/>
+        </p:nvSpPr>
+        <p:spPr>
+          <a:xfrm>
+            <a:off x="3972000" y="2707339"/>
+            <a:ext cx="1200000" cy="500000"/>
+          </a:xfrm>
+          <a:prstGeom prst="roundRect">
+            <a:avLst/>
+          </a:prstGeom>
+          <a:solidFill>
+            <a:srgbClr val="FFFFFF"/>
+          </a:solidFill>
+          <a:ln>
+            <a:solidFill>
+              <a:srgbClr val="323250"/>
+            </a:solidFill>
+          </a:ln>
+        </p:spPr>
+        <p:style>
+          <a:lnRef idx="1">
+            <a:schemeClr val="accent1"/>
+          </a:lnRef>
+          <a:fillRef idx="3">
+            <a:schemeClr val="accent1"/>
+          </a:fillRef>
+          <a:effectRef idx="2">
+            <a:schemeClr val="accent1"/>
+          </a:effectRef>
+          <a:fontRef idx="minor">
+            <a:schemeClr val="lt1"/>
+          </a:fontRef>
+        </p:style>
+        <p:txBody>
+          <a:bodyPr rtlCol="0" anchor="ctr" wrap="none"/>
+          <a:lstStyle/>
+          <a:p>
+            <a:pPr algn="ctr"/>
+            <a:r>
+              <a:rPr sz="1100">
+                <a:solidFill>
+                  <a:srgbClr val="000000"/>
+                </a:solidFill>
+              </a:rPr>
+              <a:t>Check</a:t>
+            </a:r>
+          </a:p>
+        </p:txBody>
+      </p:sp>
+      <p:sp>
+        <p:nvSpPr>
+          <p:cNvPr id="8" name="Rounded Rectangle 7"/>
+          <p:cNvSpPr/>
+          <p:nvPr/>
+        </p:nvSpPr>
+        <p:spPr>
+          <a:xfrm>
+            <a:off x="808679" y="3613181"/>
+            <a:ext cx="1200000" cy="500000"/>
+          </a:xfrm>
+          <a:prstGeom prst="roundRect">
+            <a:avLst/>
+          </a:prstGeom>
+          <a:solidFill>
+            <a:srgbClr val="FFFFFF"/>
+          </a:solidFill>
+          <a:ln>
+            <a:solidFill>
+              <a:srgbClr val="323250"/>
+            </a:solidFill>
+          </a:ln>
+        </p:spPr>
+        <p:style>
+          <a:lnRef idx="1">
+            <a:schemeClr val="accent1"/>
+          </a:lnRef>
+          <a:fillRef idx="3">
+            <a:schemeClr val="accent1"/>
+          </a:fillRef>
+          <a:effectRef idx="2">
+            <a:schemeClr val="accent1"/>
+          </a:effectRef>
+          <a:fontRef idx="minor">
+            <a:schemeClr val="lt1"/>
+          </a:fontRef>
+        </p:style>
+        <p:txBody>
+          <a:bodyPr rtlCol="0" anchor="ctr" wrap="none"/>
+          <a:lstStyle/>
+          <a:p>
+            <a:pPr algn="ctr"/>
+            <a:r>
+              <a:rPr sz="1100">
+                <a:solidFill>
+                  <a:srgbClr val="000000"/>
+                </a:solidFill>
+              </a:rPr>
+              <a:t>Fast</a:t>
+            </a:r>
+          </a:p>
+        </p:txBody>
+      </p:sp>
+      <p:sp>
+        <p:nvSpPr>
+          <p:cNvPr id="9" name="Rounded Rectangle 8"/>
+          <p:cNvSpPr/>
+          <p:nvPr/>
+        </p:nvSpPr>
+        <p:spPr>
+          <a:xfrm>
+            <a:off x="7135320" y="3613181"/>
+            <a:ext cx="1200000" cy="500000"/>
+          </a:xfrm>
+          <a:prstGeom prst="roundRect">
+            <a:avLst/>
+          </a:prstGeom>
+          <a:solidFill>
+            <a:srgbClr val="FFFFFF"/>
+          </a:solidFill>
+          <a:ln>
+            <a:solidFill>
+              <a:srgbClr val="323250"/>
+            </a:solidFill>
+          </a:ln>
+        </p:spPr>
+        <p:style>
+          <a:lnRef idx="1">
+            <a:schemeClr val="accent1"/>
+          </a:lnRef>
+          <a:fillRef idx="3">
+            <a:schemeClr val="accent1"/>
+          </a:fillRef>
+          <a:effectRef idx="2">
+            <a:schemeClr val="accent1"/>
+          </a:effectRef>
+          <a:fontRef idx="minor">
+            <a:schemeClr val="lt1"/>
+          </a:fontRef>
+        </p:style>
+        <p:txBody>
+          <a:bodyPr rtlCol="0" anchor="ctr" wrap="none"/>
+          <a:lstStyle/>
+          <a:p>
+            <a:pPr algn="ctr"/>
+            <a:r>
+              <a:rPr sz="1100">
+                <a:solidFill>
+                  <a:srgbClr val="000000"/>
+                </a:solidFill>
+              </a:rPr>
+              <a:t>Slow</a:t>
+            </a:r>
+          </a:p>
+        </p:txBody>
+      </p:sp>
+      <p:sp>
+        <p:nvSpPr>
+          <p:cNvPr id="10" name="Oval 9"/>
+          <p:cNvSpPr/>
+          <p:nvPr/>
+        </p:nvSpPr>
+        <p:spPr>
+          <a:xfrm>
+            <a:off x="4347000" y="5449864"/>
+            <a:ext cx="450000" cy="450000"/>
+          </a:xfrm>
+          <a:prstGeom prst="ellipse">
+            <a:avLst/>
+          </a:prstGeom>
+          <a:solidFill>
+            <a:srgbClr val="000000"/>
+          </a:solidFill>
+          <a:ln>
+            <a:noFill/>
+          </a:ln>
+        </p:spPr>
+        <p:style>
+          <a:lnRef idx="1">
+            <a:schemeClr val="accent1"/>
+          </a:lnRef>
+          <a:fillRef idx="3">
+            <a:schemeClr val="accent1"/>
+          </a:fillRef>
+          <a:effectRef idx="2">
+            <a:schemeClr val="accent1"/>
+          </a:effectRef>
+          <a:fontRef idx="minor">
+            <a:schemeClr val="lt1"/>
+          </a:fontRef>
+        </p:style>
+        <p:txBody>
+          <a:bodyPr rtlCol="0" anchor="ctr"/>
+          <a:lstStyle/>
+          <a:p/>
+        </p:txBody>
+      </p:sp>
+      <p:sp>
+        <p:nvSpPr>
+          <p:cNvPr id="11" name="Oval 10"/>
+          <p:cNvSpPr/>
+          <p:nvPr/>
+        </p:nvSpPr>
+        <p:spPr>
+          <a:xfrm>
+            <a:off x="4447000" y="5549864"/>
+            <a:ext cx="250000" cy="250000"/>
+          </a:xfrm>
+          <a:prstGeom prst="ellipse">
+            <a:avLst/>
+          </a:prstGeom>
+          <a:solidFill>
+            <a:srgbClr val="FFFFFF"/>
+          </a:solidFill>
+          <a:ln>
+            <a:noFill/>
+          </a:ln>
+        </p:spPr>
+        <p:style>
+          <a:lnRef idx="1">
+            <a:schemeClr val="accent1"/>
+          </a:lnRef>
+          <a:fillRef idx="3">
+            <a:schemeClr val="accent1"/>
+          </a:fillRef>
+          <a:effectRef idx="2">
+            <a:schemeClr val="accent1"/>
+          </a:effectRef>
+          <a:fontRef idx="minor">
+            <a:schemeClr val="lt1"/>
+          </a:fontRef>
+        </p:style>
+        <p:txBody>
+          <a:bodyPr rtlCol="0" anchor="ctr"/>
+          <a:lstStyle/>
+          <a:p/>
+        </p:txBody>
+      </p:sp>
+      <p:sp>
+        <p:nvSpPr>
+          <p:cNvPr id="12" name="Rounded Rectangle 11"/>
+          <p:cNvSpPr/>
+          <p:nvPr/>
+        </p:nvSpPr>
+        <p:spPr>
+          <a:xfrm>
+            <a:off x="2772000" y="5467697"/>
+            <a:ext cx="1200000" cy="500000"/>
+          </a:xfrm>
+          <a:prstGeom prst="roundRect">
+            <a:avLst/>
+          </a:prstGeom>
+          <a:solidFill>
+            <a:srgbClr val="FFFFFF"/>
+          </a:solidFill>
+          <a:ln>
+            <a:solidFill>
+              <a:srgbClr val="323250"/>
+            </a:solidFill>
+          </a:ln>
+        </p:spPr>
+        <p:style>
+          <a:lnRef idx="1">
+            <a:schemeClr val="accent1"/>
+          </a:lnRef>
+          <a:fillRef idx="3">
+            <a:schemeClr val="accent1"/>
+          </a:fillRef>
+          <a:effectRef idx="2">
+            <a:schemeClr val="accent1"/>
+          </a:effectRef>
+          <a:fontRef idx="minor">
+            <a:schemeClr val="lt1"/>
+          </a:fontRef>
+        </p:style>
+        <p:txBody>
+          <a:bodyPr rtlCol="0" anchor="ctr" wrap="none"/>
+          <a:lstStyle/>
+          <a:p>
+            <a:pPr algn="ctr"/>
+            <a:r>
+              <a:rPr sz="1100">
+                <a:solidFill>
+                  <a:srgbClr val="000000"/>
+                </a:solidFill>
+              </a:rPr>
+              <a:t>Idle</a:t>
+            </a:r>
+          </a:p>
+        </p:txBody>
+      </p:sp>
+      <p:sp>
+        <p:nvSpPr>
+          <p:cNvPr id="13" name="Rounded Rectangle 12"/>
+          <p:cNvSpPr/>
+          <p:nvPr/>
+        </p:nvSpPr>
+        <p:spPr>
+          <a:xfrm>
+            <a:off x="5172000" y="3990348"/>
+            <a:ext cx="1200000" cy="500000"/>
+          </a:xfrm>
+          <a:prstGeom prst="roundRect">
+            <a:avLst/>
+          </a:prstGeom>
+          <a:solidFill>
+            <a:srgbClr val="FFFFFF"/>
+          </a:solidFill>
+          <a:ln>
+            <a:solidFill>
+              <a:srgbClr val="323250"/>
+            </a:solidFill>
+          </a:ln>
+        </p:spPr>
+        <p:style>
+          <a:lnRef idx="1">
+            <a:schemeClr val="accent1"/>
+          </a:lnRef>
+          <a:fillRef idx="3">
+            <a:schemeClr val="accent1"/>
+          </a:fillRef>
+          <a:effectRef idx="2">
+            <a:schemeClr val="accent1"/>
+          </a:effectRef>
+          <a:fontRef idx="minor">
+            <a:schemeClr val="lt1"/>
+          </a:fontRef>
+        </p:style>
+        <p:txBody>
+          <a:bodyPr rtlCol="0" anchor="ctr" wrap="none"/>
+          <a:lstStyle/>
+          <a:p>
+            <a:pPr algn="ctr"/>
+            <a:r>
+              <a:rPr sz="1100">
+                <a:solidFill>
+                  <a:srgbClr val="000000"/>
+                </a:solidFill>
+              </a:rPr>
+              <a:t>Moving</a:t>
+            </a:r>
+          </a:p>
+        </p:txBody>
+      </p:sp>
+      <p:cxnSp>
+        <p:nvCxnSpPr>
+          <p:cNvPr id="14" name="Connector 13"/>
+          <p:cNvCxnSpPr>
+            <a:stCxn id="6" idx="2"/>
+            <a:endCxn id="7" idx="0"/>
+          </p:cNvCxnSpPr>
+          <p:nvPr/>
+        </p:nvCxnSpPr>
+        <p:spPr>
+          <a:xfrm>
+            <a:off x="4572000" y="2241498"/>
+            <a:ext cx="0" cy="465841"/>
+          </a:xfrm>
+          <a:prstGeom prst="curvedConnector3">
+            <a:avLst/>
+          </a:prstGeom>
+          <a:ln>
+            <a:headEnd type="arrow" w="med" len="med"/>
+          </a:ln>
+        </p:spPr>
+        <p:style>
+          <a:lnRef idx="2">
+            <a:schemeClr val="accent1"/>
+          </a:lnRef>
+          <a:fillRef idx="0">
+            <a:schemeClr val="accent1"/>
+          </a:fillRef>
+          <a:effectRef idx="1">
+            <a:schemeClr val="accent1"/>
+          </a:effectRef>
+          <a:fontRef idx="minor">
+            <a:schemeClr val="tx1"/>
+          </a:fontRef>
+        </p:style>
+      </p:cxnSp>
+      <p:cxnSp>
+        <p:nvCxnSpPr>
+          <p:cNvPr id="15" name="Connector 14"/>
+          <p:cNvCxnSpPr>
+            <a:stCxn id="7" idx="3"/>
+            <a:endCxn id="8" idx="1"/>
+          </p:cNvCxnSpPr>
+          <p:nvPr/>
+        </p:nvCxnSpPr>
+        <p:spPr>
+          <a:xfrm flipH="1">
+            <a:off x="808679" y="2957339"/>
+            <a:ext cx="4363321" cy="905842"/>
+          </a:xfrm>
+          <a:prstGeom prst="curvedConnector3">
+            <a:avLst/>
+          </a:prstGeom>
+          <a:ln>
+            <a:headEnd type="arrow" w="med" len="med"/>
+          </a:ln>
+        </p:spPr>
+        <p:style>
+          <a:lnRef idx="2">
+            <a:schemeClr val="accent1"/>
+          </a:lnRef>
+          <a:fillRef idx="0">
+            <a:schemeClr val="accent1"/>
+          </a:fillRef>
+          <a:effectRef idx="1">
+            <a:schemeClr val="accent1"/>
+          </a:effectRef>
+          <a:fontRef idx="minor">
+            <a:schemeClr val="tx1"/>
+          </a:fontRef>
+        </p:style>
+      </p:cxnSp>
+      <p:sp>
+        <p:nvSpPr>
+          <p:cNvPr id="16" name="TextBox 15"/>
+          <p:cNvSpPr txBox="1"/>
+          <p:nvPr/>
+        </p:nvSpPr>
+        <p:spPr>
+          <a:xfrm>
+            <a:off x="2490339" y="3260260"/>
+            <a:ext cx="1000000" cy="300000"/>
+          </a:xfrm>
+          <a:prstGeom prst="rect">
+            <a:avLst/>
+          </a:prstGeom>
+          <a:noFill/>
+        </p:spPr>
+        <p:txBody>
+          <a:bodyPr wrap="none">
+            <a:spAutoFit/>
+          </a:bodyPr>
+          <a:lstStyle/>
+          <a:p>
+            <a:pPr algn="ctr"/>
+            <a:r>
+              <a:rPr sz="900" i="1">
+                <a:solidFill>
+                  <a:srgbClr val="323232"/>
+                </a:solidFill>
+              </a:rPr>
+              <a:t>speed &gt; 80</a:t>
+            </a:r>
+          </a:p>
+        </p:txBody>
+      </p:sp>
+      <p:cxnSp>
+        <p:nvCxnSpPr>
+          <p:cNvPr id="17" name="Connector 16"/>
+          <p:cNvCxnSpPr>
+            <a:stCxn id="7" idx="1"/>
+            <a:endCxn id="9" idx="3"/>
+          </p:cNvCxnSpPr>
+          <p:nvPr/>
+        </p:nvCxnSpPr>
+        <p:spPr>
+          <a:xfrm>
+            <a:off x="3972000" y="2957339"/>
+            <a:ext cx="4363320" cy="905842"/>
+          </a:xfrm>
+          <a:prstGeom prst="curvedConnector3">
+            <a:avLst/>
+          </a:prstGeom>
+          <a:ln>
+            <a:headEnd type="arrow" w="med" len="med"/>
+          </a:ln>
+        </p:spPr>
+        <p:style>
+          <a:lnRef idx="2">
+            <a:schemeClr val="accent1"/>
+          </a:lnRef>
+          <a:fillRef idx="0">
+            <a:schemeClr val="accent1"/>
+          </a:fillRef>
+          <a:effectRef idx="1">
+            <a:schemeClr val="accent1"/>
+          </a:effectRef>
+          <a:fontRef idx="minor">
+            <a:schemeClr val="tx1"/>
+          </a:fontRef>
+        </p:style>
+      </p:cxnSp>
+      <p:sp>
+        <p:nvSpPr>
+          <p:cNvPr id="18" name="TextBox 17"/>
+          <p:cNvSpPr txBox="1"/>
+          <p:nvPr/>
+        </p:nvSpPr>
+        <p:spPr>
+          <a:xfrm>
+            <a:off x="5653660" y="3260260"/>
+            <a:ext cx="1000000" cy="300000"/>
+          </a:xfrm>
+          <a:prstGeom prst="rect">
+            <a:avLst/>
+          </a:prstGeom>
+          <a:noFill/>
+        </p:spPr>
+        <p:txBody>
+          <a:bodyPr wrap="none">
+            <a:spAutoFit/>
+          </a:bodyPr>
+          <a:lstStyle/>
+          <a:p>
+            <a:pPr algn="ctr"/>
+            <a:r>
+              <a:rPr sz="900" i="1">
+                <a:solidFill>
+                  <a:srgbClr val="323232"/>
+                </a:solidFill>
+              </a:rPr>
+              <a:t>speed &lt;=80</a:t>
+            </a:r>
+          </a:p>
+        </p:txBody>
+      </p:sp>
+      <p:cxnSp>
+        <p:nvCxnSpPr>
+          <p:cNvPr id="19" name="Connector 18"/>
+          <p:cNvCxnSpPr>
+            <a:stCxn id="12" idx="1"/>
+            <a:endCxn id="13" idx="3"/>
+          </p:cNvCxnSpPr>
+          <p:nvPr/>
+        </p:nvCxnSpPr>
+        <p:spPr>
+          <a:xfrm flipV="1">
+            <a:off x="2772000" y="4240348"/>
+            <a:ext cx="3600000" cy="1477349"/>
+          </a:xfrm>
+          <a:prstGeom prst="curvedConnector3">
+            <a:avLst/>
+          </a:prstGeom>
+          <a:ln>
+            <a:headEnd type="arrow" w="med" len="med"/>
+          </a:ln>
+        </p:spPr>
+        <p:style>
+          <a:lnRef idx="2">
+            <a:schemeClr val="accent1"/>
+          </a:lnRef>
+          <a:fillRef idx="0">
+            <a:schemeClr val="accent1"/>
+          </a:fillRef>
+          <a:effectRef idx="1">
+            <a:schemeClr val="accent1"/>
+          </a:effectRef>
+          <a:fontRef idx="minor">
+            <a:schemeClr val="tx1"/>
+          </a:fontRef>
+        </p:style>
+      </p:cxnSp>
+      <p:sp>
+        <p:nvSpPr>
+          <p:cNvPr id="20" name="TextBox 19"/>
+          <p:cNvSpPr txBox="1"/>
+          <p:nvPr/>
+        </p:nvSpPr>
+        <p:spPr>
+          <a:xfrm>
+            <a:off x="4072000" y="4829022"/>
+            <a:ext cx="1000000" cy="300000"/>
+          </a:xfrm>
+          <a:prstGeom prst="rect">
+            <a:avLst/>
+          </a:prstGeom>
+          <a:noFill/>
+        </p:spPr>
+        <p:txBody>
+          <a:bodyPr wrap="none">
+            <a:spAutoFit/>
+          </a:bodyPr>
+          <a:lstStyle/>
+          <a:p>
+            <a:pPr algn="ctr"/>
+            <a:r>
+              <a:rPr sz="900" i="1">
+                <a:solidFill>
+                  <a:srgbClr val="323232"/>
+                </a:solidFill>
+              </a:rPr>
+              <a:t>start</a:t>
+            </a:r>
+          </a:p>
+        </p:txBody>
+      </p:sp>
+      <p:cxnSp>
+        <p:nvCxnSpPr>
+          <p:cNvPr id="21" name="Connector 20"/>
+          <p:cNvCxnSpPr>
+            <a:stCxn id="13" idx="3"/>
+            <a:endCxn id="12" idx="1"/>
+          </p:cNvCxnSpPr>
+          <p:nvPr/>
+        </p:nvCxnSpPr>
+        <p:spPr>
+          <a:xfrm flipH="1">
+            <a:off x="2772000" y="4240348"/>
+            <a:ext cx="3600000" cy="1477349"/>
+          </a:xfrm>
+          <a:prstGeom prst="curvedConnector3">
+            <a:avLst/>
+          </a:prstGeom>
+          <a:ln>
+            <a:headEnd type="arrow" w="med" len="med"/>
+          </a:ln>
+        </p:spPr>
+        <p:style>
+          <a:lnRef idx="2">
+            <a:schemeClr val="accent1"/>
+          </a:lnRef>
+          <a:fillRef idx="0">
+            <a:schemeClr val="accent1"/>
+          </a:fillRef>
+          <a:effectRef idx="1">
+            <a:schemeClr val="accent1"/>
+          </a:effectRef>
+          <a:fontRef idx="minor">
+            <a:schemeClr val="tx1"/>
+          </a:fontRef>
+        </p:style>
+      </p:cxnSp>
+      <p:sp>
+        <p:nvSpPr>
+          <p:cNvPr id="22" name="TextBox 21"/>
+          <p:cNvSpPr txBox="1"/>
+          <p:nvPr/>
+        </p:nvSpPr>
+        <p:spPr>
+          <a:xfrm>
+            <a:off x="4072000" y="4829022"/>
+            <a:ext cx="1000000" cy="300000"/>
+          </a:xfrm>
+          <a:prstGeom prst="rect">
+            <a:avLst/>
+          </a:prstGeom>
+          <a:noFill/>
+        </p:spPr>
+        <p:txBody>
+          <a:bodyPr wrap="none">
+            <a:spAutoFit/>
+          </a:bodyPr>
+          <a:lstStyle/>
+          <a:p>
+            <a:pPr algn="ctr"/>
+            <a:r>
+              <a:rPr sz="900" i="1">
+                <a:solidFill>
+                  <a:srgbClr val="323232"/>
+                </a:solidFill>
+              </a:rPr>
+              <a:t>stop</a:t>
+            </a:r>
+          </a:p>
+        </p:txBody>
+      </p:sp>
+      <p:cxnSp>
+        <p:nvCxnSpPr>
+          <p:cNvPr id="23" name="Connector 22"/>
+          <p:cNvCxnSpPr>
+            <a:stCxn id="8" idx="1"/>
+            <a:endCxn id="4" idx="3"/>
+          </p:cNvCxnSpPr>
+          <p:nvPr/>
+        </p:nvCxnSpPr>
+        <p:spPr>
+          <a:xfrm>
+            <a:off x="808679" y="3863181"/>
+            <a:ext cx="5463321" cy="905842"/>
+          </a:xfrm>
+          <a:prstGeom prst="curvedConnector3">
+            <a:avLst/>
+          </a:prstGeom>
+          <a:ln>
+            <a:headEnd type="arrow" w="med" len="med"/>
+          </a:ln>
+        </p:spPr>
+        <p:style>
+          <a:lnRef idx="2">
+            <a:schemeClr val="accent1"/>
+          </a:lnRef>
+          <a:fillRef idx="0">
+            <a:schemeClr val="accent1"/>
+          </a:fillRef>
+          <a:effectRef idx="1">
+            <a:schemeClr val="accent1"/>
+          </a:effectRef>
+          <a:fontRef idx="minor">
+            <a:schemeClr val="tx1"/>
+          </a:fontRef>
+        </p:style>
+      </p:cxnSp>
+      <p:cxnSp>
+        <p:nvCxnSpPr>
+          <p:cNvPr id="24" name="Connector 23"/>
+          <p:cNvCxnSpPr>
+            <a:stCxn id="9" idx="3"/>
+            <a:endCxn id="4" idx="1"/>
+          </p:cNvCxnSpPr>
+          <p:nvPr/>
+        </p:nvCxnSpPr>
+        <p:spPr>
+          <a:xfrm flipH="1">
+            <a:off x="2872000" y="3863181"/>
+            <a:ext cx="5463320" cy="905842"/>
+          </a:xfrm>
+          <a:prstGeom prst="curvedConnector3">
+            <a:avLst/>
+          </a:prstGeom>
+          <a:ln>
+            <a:headEnd type="arrow" w="med" len="med"/>
+          </a:ln>
+        </p:spPr>
+        <p:style>
+          <a:lnRef idx="2">
+            <a:schemeClr val="accent1"/>
+          </a:lnRef>
+          <a:fillRef idx="0">
+            <a:schemeClr val="accent1"/>
+          </a:fillRef>
+          <a:effectRef idx="1">
+            <a:schemeClr val="accent1"/>
+          </a:effectRef>
+          <a:fontRef idx="minor">
+            <a:schemeClr val="tx1"/>
+          </a:fontRef>
+        </p:style>
+      </p:cxnSp>
+      <p:cxnSp>
+        <p:nvCxnSpPr>
+          <p:cNvPr id="25" name="Connector 24"/>
+          <p:cNvCxnSpPr>
+            <a:stCxn id="4" idx="2"/>
+            <a:endCxn id="10" idx="0"/>
+          </p:cNvCxnSpPr>
+          <p:nvPr/>
+        </p:nvCxnSpPr>
+        <p:spPr>
+          <a:xfrm flipV="1">
+            <a:off x="4572000" y="5449864"/>
+            <a:ext cx="0" cy="529159"/>
+          </a:xfrm>
+          <a:prstGeom prst="curvedConnector3">
+            <a:avLst/>
+          </a:prstGeom>
+          <a:ln>
+            <a:headEnd type="arrow" w="med" len="med"/>
+          </a:ln>
+        </p:spPr>
+        <p:style>
+          <a:lnRef idx="2">
+            <a:schemeClr val="accent1"/>
+          </a:lnRef>
+          <a:fillRef idx="0">
+            <a:schemeClr val="accent1"/>
+          </a:fillRef>
+          <a:effectRef idx="1">
+            <a:schemeClr val="accent1"/>
+          </a:effectRef>
+          <a:fontRef idx="minor">
+            <a:schemeClr val="tx1"/>
+          </a:fontRef>
+        </p:style>
+      </p:cxnSp>
     </p:spTree>
   </p:cSld>
   <p:clrMapOvr>
@@ -13651,7 +15550,7 @@
           <a:lstStyle/>
           <a:p>
             <a:r>
-              <a:t>8. 円グラフ（Pie Chart）</a:t>
+              <a:t>6. ER図（Entity Relationship Diagram）</a:t>
             </a:r>
           </a:p>
         </p:txBody>
@@ -13675,40 +15574,263 @@
       </p:sp>
       <p:sp>
         <p:nvSpPr>
-          <p:cNvPr id="4" name="TextBox 3"/>
-          <p:cNvSpPr txBox="1"/>
-          <p:nvPr/>
-        </p:nvSpPr>
-        <p:spPr>
-          <a:xfrm>
-            <a:off x="457200" y="1600200"/>
-            <a:ext cx="8229600" cy="4525963"/>
+          <p:cNvPr id="4" name="Rectangle 3"/>
+          <p:cNvSpPr/>
+          <p:nvPr/>
+        </p:nvSpPr>
+        <p:spPr>
+          <a:xfrm>
+            <a:off x="6425688" y="5513155"/>
+            <a:ext cx="1200000" cy="500000"/>
           </a:xfrm>
           <a:prstGeom prst="rect">
             <a:avLst/>
           </a:prstGeom>
-          <a:noFill/>
-        </p:spPr>
-        <p:txBody>
-          <a:bodyPr wrap="square">
-            <a:spAutoFit/>
-          </a:bodyPr>
-          <a:lstStyle/>
-          <a:p>
-            <a:r>
-              <a:rPr sz="1000">
-                <a:latin typeface="Courier New"/>
-              </a:rPr>
-              <a:t>pie title 言語別コード比率
-    "Python" : 42
-    "TypeScript" : 28
-    "Rust" : 15
-    "Go" : 10
-    "その他" : 5</a:t>
-            </a:r>
-          </a:p>
-        </p:txBody>
-      </p:sp>
+        </p:spPr>
+        <p:style>
+          <a:lnRef idx="1">
+            <a:schemeClr val="accent1"/>
+          </a:lnRef>
+          <a:fillRef idx="3">
+            <a:schemeClr val="accent1"/>
+          </a:fillRef>
+          <a:effectRef idx="2">
+            <a:schemeClr val="accent1"/>
+          </a:effectRef>
+          <a:fontRef idx="minor">
+            <a:schemeClr val="lt1"/>
+          </a:fontRef>
+        </p:style>
+        <p:txBody>
+          <a:bodyPr rtlCol="0" anchor="ctr"/>
+          <a:lstStyle/>
+          <a:p>
+            <a:r>
+              <a:rPr sz="1200"/>
+              <a:t>CUSTOMER</a:t>
+            </a:r>
+          </a:p>
+        </p:txBody>
+      </p:sp>
+      <p:sp>
+        <p:nvSpPr>
+          <p:cNvPr id="5" name="Rectangle 4"/>
+          <p:cNvSpPr/>
+          <p:nvPr/>
+        </p:nvSpPr>
+        <p:spPr>
+          <a:xfrm>
+            <a:off x="6500578" y="2848046"/>
+            <a:ext cx="1200000" cy="500000"/>
+          </a:xfrm>
+          <a:prstGeom prst="rect">
+            <a:avLst/>
+          </a:prstGeom>
+        </p:spPr>
+        <p:style>
+          <a:lnRef idx="1">
+            <a:schemeClr val="accent1"/>
+          </a:lnRef>
+          <a:fillRef idx="3">
+            <a:schemeClr val="accent1"/>
+          </a:fillRef>
+          <a:effectRef idx="2">
+            <a:schemeClr val="accent1"/>
+          </a:effectRef>
+          <a:fontRef idx="minor">
+            <a:schemeClr val="lt1"/>
+          </a:fontRef>
+        </p:style>
+        <p:txBody>
+          <a:bodyPr rtlCol="0" anchor="ctr"/>
+          <a:lstStyle/>
+          <a:p>
+            <a:r>
+              <a:rPr sz="1200"/>
+              <a:t>ORDER</a:t>
+            </a:r>
+          </a:p>
+        </p:txBody>
+      </p:sp>
+      <p:sp>
+        <p:nvSpPr>
+          <p:cNvPr id="6" name="Rectangle 5"/>
+          <p:cNvSpPr/>
+          <p:nvPr/>
+        </p:nvSpPr>
+        <p:spPr>
+          <a:xfrm>
+            <a:off x="2504533" y="1957962"/>
+            <a:ext cx="1200000" cy="500000"/>
+          </a:xfrm>
+          <a:prstGeom prst="rect">
+            <a:avLst/>
+          </a:prstGeom>
+        </p:spPr>
+        <p:style>
+          <a:lnRef idx="1">
+            <a:schemeClr val="accent1"/>
+          </a:lnRef>
+          <a:fillRef idx="3">
+            <a:schemeClr val="accent1"/>
+          </a:fillRef>
+          <a:effectRef idx="2">
+            <a:schemeClr val="accent1"/>
+          </a:effectRef>
+          <a:fontRef idx="minor">
+            <a:schemeClr val="lt1"/>
+          </a:fontRef>
+        </p:style>
+        <p:txBody>
+          <a:bodyPr rtlCol="0" anchor="ctr"/>
+          <a:lstStyle/>
+          <a:p>
+            <a:r>
+              <a:rPr sz="1200"/>
+              <a:t>LINE-ITEM</a:t>
+            </a:r>
+          </a:p>
+        </p:txBody>
+      </p:sp>
+      <p:sp>
+        <p:nvSpPr>
+          <p:cNvPr id="7" name="Rectangle 6"/>
+          <p:cNvSpPr/>
+          <p:nvPr/>
+        </p:nvSpPr>
+        <p:spPr>
+          <a:xfrm>
+            <a:off x="457200" y="4133562"/>
+            <a:ext cx="1200000" cy="500000"/>
+          </a:xfrm>
+          <a:prstGeom prst="rect">
+            <a:avLst/>
+          </a:prstGeom>
+        </p:spPr>
+        <p:style>
+          <a:lnRef idx="1">
+            <a:schemeClr val="accent1"/>
+          </a:lnRef>
+          <a:fillRef idx="3">
+            <a:schemeClr val="accent1"/>
+          </a:fillRef>
+          <a:effectRef idx="2">
+            <a:schemeClr val="accent1"/>
+          </a:effectRef>
+          <a:fontRef idx="minor">
+            <a:schemeClr val="lt1"/>
+          </a:fontRef>
+        </p:style>
+        <p:txBody>
+          <a:bodyPr rtlCol="0" anchor="ctr"/>
+          <a:lstStyle/>
+          <a:p>
+            <a:r>
+              <a:rPr sz="1200"/>
+              <a:t>PRODUCT</a:t>
+            </a:r>
+          </a:p>
+        </p:txBody>
+      </p:sp>
+      <p:cxnSp>
+        <p:nvCxnSpPr>
+          <p:cNvPr id="8" name="Connector 7"/>
+          <p:cNvCxnSpPr>
+            <a:stCxn id="4" idx="0"/>
+            <a:endCxn id="5" idx="2"/>
+          </p:cNvCxnSpPr>
+          <p:nvPr/>
+        </p:nvCxnSpPr>
+        <p:spPr>
+          <a:xfrm flipV="1">
+            <a:off x="7025688" y="3348046"/>
+            <a:ext cx="74890" cy="2165109"/>
+          </a:xfrm>
+          <a:prstGeom prst="curvedConnector3">
+            <a:avLst/>
+          </a:prstGeom>
+        </p:spPr>
+        <p:style>
+          <a:lnRef idx="2">
+            <a:schemeClr val="accent1"/>
+          </a:lnRef>
+          <a:fillRef idx="0">
+            <a:schemeClr val="accent1"/>
+          </a:fillRef>
+          <a:effectRef idx="1">
+            <a:schemeClr val="accent1"/>
+          </a:effectRef>
+          <a:fontRef idx="minor">
+            <a:schemeClr val="tx1"/>
+          </a:fontRef>
+        </p:style>
+      </p:cxnSp>
+      <p:cxnSp>
+        <p:nvCxnSpPr>
+          <p:cNvPr id="9" name="Connector 8"/>
+          <p:cNvCxnSpPr>
+            <a:stCxn id="5" idx="3"/>
+            <a:endCxn id="6" idx="1"/>
+          </p:cNvCxnSpPr>
+          <p:nvPr/>
+        </p:nvCxnSpPr>
+        <p:spPr>
+          <a:xfrm flipH="1" flipV="1">
+            <a:off x="2504533" y="2207962"/>
+            <a:ext cx="5196045" cy="890084"/>
+          </a:xfrm>
+          <a:prstGeom prst="curvedConnector3">
+            <a:avLst/>
+          </a:prstGeom>
+        </p:spPr>
+        <p:style>
+          <a:lnRef idx="2">
+            <a:schemeClr val="accent1"/>
+          </a:lnRef>
+          <a:fillRef idx="0">
+            <a:schemeClr val="accent1"/>
+          </a:fillRef>
+          <a:effectRef idx="1">
+            <a:schemeClr val="accent1"/>
+          </a:effectRef>
+          <a:fontRef idx="minor">
+            <a:schemeClr val="tx1"/>
+          </a:fontRef>
+        </p:style>
+      </p:cxnSp>
+      <p:cxnSp>
+        <p:nvCxnSpPr>
+          <p:cNvPr id="10" name="Connector 9"/>
+          <p:cNvCxnSpPr>
+            <a:stCxn id="7" idx="0"/>
+            <a:endCxn id="6" idx="2"/>
+          </p:cNvCxnSpPr>
+          <p:nvPr/>
+        </p:nvCxnSpPr>
+        <p:spPr>
+          <a:xfrm flipV="1">
+            <a:off x="1057200" y="2457962"/>
+            <a:ext cx="2047333" cy="1675600"/>
+          </a:xfrm>
+          <a:prstGeom prst="curvedConnector3">
+            <a:avLst/>
+          </a:prstGeom>
+        </p:spPr>
+        <p:style>
+          <a:lnRef idx="2">
+            <a:schemeClr val="accent1"/>
+          </a:lnRef>
+          <a:fillRef idx="0">
+            <a:schemeClr val="accent1"/>
+          </a:fillRef>
+          <a:effectRef idx="1">
+            <a:schemeClr val="accent1"/>
+          </a:effectRef>
+          <a:fontRef idx="minor">
+            <a:schemeClr val="tx1"/>
+          </a:fontRef>
+        </p:style>
+      </p:cxnSp>
     </p:spTree>
   </p:cSld>
   <p:clrMapOvr>
@@ -13743,7 +15865,7 @@
           <a:lstStyle/>
           <a:p>
             <a:r>
-              <a:t>9. 象限チャート（Quadrant Chart）</a:t>
+              <a:t>7. ユーザージャーニー図（User Journey）</a:t>
             </a:r>
           </a:p>
         </p:txBody>
@@ -13791,18 +15913,16 @@
               <a:rPr sz="1000">
                 <a:latin typeface="Courier New"/>
               </a:rPr>
-              <a:t>quadrantChart
-    title 製品ポートフォリオ分析
-    x-axis 低成長 --&gt; 高成長
-    y-axis 低シェア --&gt; 高シェア
-    quadrant-1 スター
-    quadrant-2 問題児
-    quadrant-3 負け犬
-    quadrant-4 金のなる木
-    製品A: [0.7, 0.8]
-    製品B: [0.3, 0.7]
-    製品C: [0.2, 0.3]
-    製品D: [0.8, 0.3]</a:t>
+              <a:t>journey
+    title オンラインショッピング体験
+    section 商品探し
+        サイト訪問    : 5: ユーザー
+        検索実行      : 3: ユーザー
+        商品選択      : 4: ユーザー
+    section 購入
+        カートに追加  : 5: ユーザー
+        決済手続き    : 2: ユーザー
+        注文完了      : 5: ユーザー</a:t>
             </a:r>
           </a:p>
         </p:txBody>
@@ -13841,7 +15961,7 @@
           <a:lstStyle/>
           <a:p>
             <a:r>
-              <a:t>10. 要件図（Requirement Diagram）</a:t>
+              <a:t>8. 円グラフ（Pie Chart）</a:t>
             </a:r>
           </a:p>
         </p:txBody>
@@ -13889,20 +16009,12 @@
               <a:rPr sz="1000">
                 <a:latin typeface="Courier New"/>
               </a:rPr>
-              <a:t>requirementDiagram
-    requirement test_req {
-        id: 1
-        text: システムは99.9%の可用性を持つこと
-        risk: high
-        verifymethod: test
-    }
-    functionalRequirement login_req {
-        id: 2
-        text: ユーザーはログインできること
-        risk: medium
-        verifymethod: inspection
-    }
-    test_req - traces -&gt; login_req</a:t>
+              <a:t>pie title 言語別コード比率
+    "Python" : 42
+    "TypeScript" : 28
+    "Rust" : 15
+    "Go" : 10
+    "その他" : 5</a:t>
             </a:r>
           </a:p>
         </p:txBody>
@@ -13941,7 +16053,7 @@
           <a:lstStyle/>
           <a:p>
             <a:r>
-              <a:t>11. Gitグラフ（Git Graph）</a:t>
+              <a:t>9. 象限チャート（Quadrant Chart）</a:t>
             </a:r>
           </a:p>
         </p:txBody>
@@ -13989,16 +16101,18 @@
               <a:rPr sz="1000">
                 <a:latin typeface="Courier New"/>
               </a:rPr>
-              <a:t>gitGraph
-    commit id: "initial"
-    commit id: "feat: add login"
-    branch develop
-    checkout develop
-    commit id: "fix: typo"
-    commit id: "feat: add API"
-    checkout main
-    merge develop id: "merge develop"
-    commit id: "release: v1.0"</a:t>
+              <a:t>quadrantChart
+    title 製品ポートフォリオ分析
+    x-axis 低成長 --&gt; 高成長
+    y-axis 低シェア --&gt; 高シェア
+    quadrant-1 スター
+    quadrant-2 問題児
+    quadrant-3 負け犬
+    quadrant-4 金のなる木
+    製品A: [0.7, 0.8]
+    製品B: [0.3, 0.7]
+    製品C: [0.2, 0.3]
+    製品D: [0.8, 0.3]</a:t>
             </a:r>
           </a:p>
         </p:txBody>
@@ -14037,7 +16151,7 @@
           <a:lstStyle/>
           <a:p>
             <a:r>
-              <a:t>12. マインドマップ（Mindmap）</a:t>
+              <a:t>10. 要件図（Requirement Diagram）</a:t>
             </a:r>
           </a:p>
         </p:txBody>
@@ -14061,993 +16175,48 @@
       </p:sp>
       <p:sp>
         <p:nvSpPr>
-          <p:cNvPr id="4" name="Rectangle 3"/>
-          <p:cNvSpPr/>
-          <p:nvPr/>
-        </p:nvSpPr>
-        <p:spPr>
-          <a:xfrm>
-            <a:off x="2800400" y="3424464"/>
-            <a:ext cx="1200000" cy="500000"/>
+          <p:cNvPr id="4" name="TextBox 3"/>
+          <p:cNvSpPr txBox="1"/>
+          <p:nvPr/>
+        </p:nvSpPr>
+        <p:spPr>
+          <a:xfrm>
+            <a:off x="457200" y="1600200"/>
+            <a:ext cx="8229600" cy="4525963"/>
           </a:xfrm>
           <a:prstGeom prst="rect">
             <a:avLst/>
           </a:prstGeom>
-        </p:spPr>
-        <p:style>
-          <a:lnRef idx="1">
-            <a:schemeClr val="accent1"/>
-          </a:lnRef>
-          <a:fillRef idx="3">
-            <a:schemeClr val="accent1"/>
-          </a:fillRef>
-          <a:effectRef idx="2">
-            <a:schemeClr val="accent1"/>
-          </a:effectRef>
-          <a:fontRef idx="minor">
-            <a:schemeClr val="lt1"/>
-          </a:fontRef>
-        </p:style>
-        <p:txBody>
-          <a:bodyPr rtlCol="0" anchor="ctr"/>
-          <a:lstStyle/>
-          <a:p>
-            <a:r>
-              <a:rPr sz="1200"/>
-              <a:t>qmd_to_pptx</a:t>
-            </a:r>
-          </a:p>
-        </p:txBody>
-      </p:sp>
-      <p:sp>
-        <p:nvSpPr>
-          <p:cNvPr id="5" name="Rectangle 4"/>
-          <p:cNvSpPr/>
-          <p:nvPr/>
-        </p:nvSpPr>
-        <p:spPr>
-          <a:xfrm>
-            <a:off x="5143600" y="1851822"/>
-            <a:ext cx="1200000" cy="500000"/>
-          </a:xfrm>
-          <a:prstGeom prst="rect">
-            <a:avLst/>
-          </a:prstGeom>
-        </p:spPr>
-        <p:style>
-          <a:lnRef idx="1">
-            <a:schemeClr val="accent1"/>
-          </a:lnRef>
-          <a:fillRef idx="3">
-            <a:schemeClr val="accent1"/>
-          </a:fillRef>
-          <a:effectRef idx="2">
-            <a:schemeClr val="accent1"/>
-          </a:effectRef>
-          <a:fontRef idx="minor">
-            <a:schemeClr val="lt1"/>
-          </a:fontRef>
-        </p:style>
-        <p:txBody>
-          <a:bodyPr rtlCol="0" anchor="ctr"/>
-          <a:lstStyle/>
-          <a:p>
-            <a:r>
-              <a:rPr sz="1200"/>
-              <a:t>入力形式</a:t>
-            </a:r>
-          </a:p>
-        </p:txBody>
-      </p:sp>
-      <p:sp>
-        <p:nvSpPr>
-          <p:cNvPr id="6" name="Rectangle 5"/>
-          <p:cNvSpPr/>
-          <p:nvPr/>
-        </p:nvSpPr>
-        <p:spPr>
-          <a:xfrm>
-            <a:off x="7486800" y="1600200"/>
-            <a:ext cx="1200000" cy="500000"/>
-          </a:xfrm>
-          <a:prstGeom prst="rect">
-            <a:avLst/>
-          </a:prstGeom>
-        </p:spPr>
-        <p:style>
-          <a:lnRef idx="1">
-            <a:schemeClr val="accent1"/>
-          </a:lnRef>
-          <a:fillRef idx="3">
-            <a:schemeClr val="accent1"/>
-          </a:fillRef>
-          <a:effectRef idx="2">
-            <a:schemeClr val="accent1"/>
-          </a:effectRef>
-          <a:fontRef idx="minor">
-            <a:schemeClr val="lt1"/>
-          </a:fontRef>
-        </p:style>
-        <p:txBody>
-          <a:bodyPr rtlCol="0" anchor="ctr"/>
-          <a:lstStyle/>
-          <a:p>
-            <a:r>
-              <a:rPr sz="1200"/>
-              <a:t>QMD</a:t>
-            </a:r>
-          </a:p>
-        </p:txBody>
-      </p:sp>
-      <p:sp>
-        <p:nvSpPr>
-          <p:cNvPr id="7" name="Rectangle 6"/>
-          <p:cNvSpPr/>
-          <p:nvPr/>
-        </p:nvSpPr>
-        <p:spPr>
-          <a:xfrm>
-            <a:off x="7486800" y="2103445"/>
-            <a:ext cx="1200000" cy="500000"/>
-          </a:xfrm>
-          <a:prstGeom prst="rect">
-            <a:avLst/>
-          </a:prstGeom>
-        </p:spPr>
-        <p:style>
-          <a:lnRef idx="1">
-            <a:schemeClr val="accent1"/>
-          </a:lnRef>
-          <a:fillRef idx="3">
-            <a:schemeClr val="accent1"/>
-          </a:fillRef>
-          <a:effectRef idx="2">
-            <a:schemeClr val="accent1"/>
-          </a:effectRef>
-          <a:fontRef idx="minor">
-            <a:schemeClr val="lt1"/>
-          </a:fontRef>
-        </p:style>
-        <p:txBody>
-          <a:bodyPr rtlCol="0" anchor="ctr"/>
-          <a:lstStyle/>
-          <a:p>
-            <a:r>
-              <a:rPr sz="1200"/>
-              <a:t>Markdown</a:t>
-            </a:r>
-          </a:p>
-        </p:txBody>
-      </p:sp>
-      <p:sp>
-        <p:nvSpPr>
-          <p:cNvPr id="8" name="Rectangle 7"/>
-          <p:cNvSpPr/>
-          <p:nvPr/>
-        </p:nvSpPr>
-        <p:spPr>
-          <a:xfrm>
-            <a:off x="5143600" y="2606690"/>
-            <a:ext cx="1200000" cy="500000"/>
-          </a:xfrm>
-          <a:prstGeom prst="rect">
-            <a:avLst/>
-          </a:prstGeom>
-        </p:spPr>
-        <p:style>
-          <a:lnRef idx="1">
-            <a:schemeClr val="accent1"/>
-          </a:lnRef>
-          <a:fillRef idx="3">
-            <a:schemeClr val="accent1"/>
-          </a:fillRef>
-          <a:effectRef idx="2">
-            <a:schemeClr val="accent1"/>
-          </a:effectRef>
-          <a:fontRef idx="minor">
-            <a:schemeClr val="lt1"/>
-          </a:fontRef>
-        </p:style>
-        <p:txBody>
-          <a:bodyPr rtlCol="0" anchor="ctr"/>
-          <a:lstStyle/>
-          <a:p>
-            <a:r>
-              <a:rPr sz="1200"/>
-              <a:t>出力</a:t>
-            </a:r>
-          </a:p>
-        </p:txBody>
-      </p:sp>
-      <p:sp>
-        <p:nvSpPr>
-          <p:cNvPr id="9" name="Rectangle 8"/>
-          <p:cNvSpPr/>
-          <p:nvPr/>
-        </p:nvSpPr>
-        <p:spPr>
-          <a:xfrm>
-            <a:off x="7486800" y="2606690"/>
-            <a:ext cx="1200000" cy="500000"/>
-          </a:xfrm>
-          <a:prstGeom prst="rect">
-            <a:avLst/>
-          </a:prstGeom>
-        </p:spPr>
-        <p:style>
-          <a:lnRef idx="1">
-            <a:schemeClr val="accent1"/>
-          </a:lnRef>
-          <a:fillRef idx="3">
-            <a:schemeClr val="accent1"/>
-          </a:fillRef>
-          <a:effectRef idx="2">
-            <a:schemeClr val="accent1"/>
-          </a:effectRef>
-          <a:fontRef idx="minor">
-            <a:schemeClr val="lt1"/>
-          </a:fontRef>
-        </p:style>
-        <p:txBody>
-          <a:bodyPr rtlCol="0" anchor="ctr"/>
-          <a:lstStyle/>
-          <a:p>
-            <a:r>
-              <a:rPr sz="1200"/>
-              <a:t>PPTX</a:t>
-            </a:r>
-          </a:p>
-        </p:txBody>
-      </p:sp>
-      <p:sp>
-        <p:nvSpPr>
-          <p:cNvPr id="10" name="Rectangle 9"/>
-          <p:cNvSpPr/>
-          <p:nvPr/>
-        </p:nvSpPr>
-        <p:spPr>
-          <a:xfrm>
-            <a:off x="5143600" y="3864804"/>
-            <a:ext cx="1200000" cy="500000"/>
-          </a:xfrm>
-          <a:prstGeom prst="rect">
-            <a:avLst/>
-          </a:prstGeom>
-        </p:spPr>
-        <p:style>
-          <a:lnRef idx="1">
-            <a:schemeClr val="accent1"/>
-          </a:lnRef>
-          <a:fillRef idx="3">
-            <a:schemeClr val="accent1"/>
-          </a:fillRef>
-          <a:effectRef idx="2">
-            <a:schemeClr val="accent1"/>
-          </a:effectRef>
-          <a:fontRef idx="minor">
-            <a:schemeClr val="lt1"/>
-          </a:fontRef>
-        </p:style>
-        <p:txBody>
-          <a:bodyPr rtlCol="0" anchor="ctr"/>
-          <a:lstStyle/>
-          <a:p>
-            <a:r>
-              <a:rPr sz="1200"/>
-              <a:t>機能</a:t>
-            </a:r>
-          </a:p>
-        </p:txBody>
-      </p:sp>
-      <p:sp>
-        <p:nvSpPr>
-          <p:cNvPr id="11" name="Rectangle 10"/>
-          <p:cNvSpPr/>
-          <p:nvPr/>
-        </p:nvSpPr>
-        <p:spPr>
-          <a:xfrm>
-            <a:off x="7486800" y="3109936"/>
-            <a:ext cx="1200000" cy="500000"/>
-          </a:xfrm>
-          <a:prstGeom prst="rect">
-            <a:avLst/>
-          </a:prstGeom>
-        </p:spPr>
-        <p:style>
-          <a:lnRef idx="1">
-            <a:schemeClr val="accent1"/>
-          </a:lnRef>
-          <a:fillRef idx="3">
-            <a:schemeClr val="accent1"/>
-          </a:fillRef>
-          <a:effectRef idx="2">
-            <a:schemeClr val="accent1"/>
-          </a:effectRef>
-          <a:fontRef idx="minor">
-            <a:schemeClr val="lt1"/>
-          </a:fontRef>
-        </p:style>
-        <p:txBody>
-          <a:bodyPr rtlCol="0" anchor="ctr"/>
-          <a:lstStyle/>
-          <a:p>
-            <a:r>
-              <a:rPr sz="1200"/>
-              <a:t>数式</a:t>
-            </a:r>
-          </a:p>
-        </p:txBody>
-      </p:sp>
-      <p:sp>
-        <p:nvSpPr>
-          <p:cNvPr id="12" name="Rectangle 11"/>
-          <p:cNvSpPr/>
-          <p:nvPr/>
-        </p:nvSpPr>
-        <p:spPr>
-          <a:xfrm>
-            <a:off x="7486800" y="3613181"/>
-            <a:ext cx="1200000" cy="500000"/>
-          </a:xfrm>
-          <a:prstGeom prst="rect">
-            <a:avLst/>
-          </a:prstGeom>
-        </p:spPr>
-        <p:style>
-          <a:lnRef idx="1">
-            <a:schemeClr val="accent1"/>
-          </a:lnRef>
-          <a:fillRef idx="3">
-            <a:schemeClr val="accent1"/>
-          </a:fillRef>
-          <a:effectRef idx="2">
-            <a:schemeClr val="accent1"/>
-          </a:effectRef>
-          <a:fontRef idx="minor">
-            <a:schemeClr val="lt1"/>
-          </a:fontRef>
-        </p:style>
-        <p:txBody>
-          <a:bodyPr rtlCol="0" anchor="ctr"/>
-          <a:lstStyle/>
-          <a:p>
-            <a:r>
-              <a:rPr sz="1200"/>
-              <a:t>Mermaid図</a:t>
-            </a:r>
-          </a:p>
-        </p:txBody>
-      </p:sp>
-      <p:sp>
-        <p:nvSpPr>
-          <p:cNvPr id="13" name="Rectangle 12"/>
-          <p:cNvSpPr/>
-          <p:nvPr/>
-        </p:nvSpPr>
-        <p:spPr>
-          <a:xfrm>
-            <a:off x="7486800" y="4116426"/>
-            <a:ext cx="1200000" cy="500000"/>
-          </a:xfrm>
-          <a:prstGeom prst="rect">
-            <a:avLst/>
-          </a:prstGeom>
-        </p:spPr>
-        <p:style>
-          <a:lnRef idx="1">
-            <a:schemeClr val="accent1"/>
-          </a:lnRef>
-          <a:fillRef idx="3">
-            <a:schemeClr val="accent1"/>
-          </a:fillRef>
-          <a:effectRef idx="2">
-            <a:schemeClr val="accent1"/>
-          </a:effectRef>
-          <a:fontRef idx="minor">
-            <a:schemeClr val="lt1"/>
-          </a:fontRef>
-        </p:style>
-        <p:txBody>
-          <a:bodyPr rtlCol="0" anchor="ctr"/>
-          <a:lstStyle/>
-          <a:p>
-            <a:r>
-              <a:rPr sz="1200"/>
-              <a:t>テーブル</a:t>
-            </a:r>
-          </a:p>
-        </p:txBody>
-      </p:sp>
-      <p:sp>
-        <p:nvSpPr>
-          <p:cNvPr id="14" name="Rectangle 13"/>
-          <p:cNvSpPr/>
-          <p:nvPr/>
-        </p:nvSpPr>
-        <p:spPr>
-          <a:xfrm>
-            <a:off x="7486800" y="4619672"/>
-            <a:ext cx="1200000" cy="500000"/>
-          </a:xfrm>
-          <a:prstGeom prst="rect">
-            <a:avLst/>
-          </a:prstGeom>
-        </p:spPr>
-        <p:style>
-          <a:lnRef idx="1">
-            <a:schemeClr val="accent1"/>
-          </a:lnRef>
-          <a:fillRef idx="3">
-            <a:schemeClr val="accent1"/>
-          </a:fillRef>
-          <a:effectRef idx="2">
-            <a:schemeClr val="accent1"/>
-          </a:effectRef>
-          <a:fontRef idx="minor">
-            <a:schemeClr val="lt1"/>
-          </a:fontRef>
-        </p:style>
-        <p:txBody>
-          <a:bodyPr rtlCol="0" anchor="ctr"/>
-          <a:lstStyle/>
-          <a:p>
-            <a:r>
-              <a:rPr sz="1200"/>
-              <a:t>コード</a:t>
-            </a:r>
-          </a:p>
-        </p:txBody>
-      </p:sp>
-      <p:sp>
-        <p:nvSpPr>
-          <p:cNvPr id="15" name="Rectangle 14"/>
-          <p:cNvSpPr/>
-          <p:nvPr/>
-        </p:nvSpPr>
-        <p:spPr>
-          <a:xfrm>
-            <a:off x="5143600" y="5374540"/>
-            <a:ext cx="1200000" cy="500000"/>
-          </a:xfrm>
-          <a:prstGeom prst="rect">
-            <a:avLst/>
-          </a:prstGeom>
-        </p:spPr>
-        <p:style>
-          <a:lnRef idx="1">
-            <a:schemeClr val="accent1"/>
-          </a:lnRef>
-          <a:fillRef idx="3">
-            <a:schemeClr val="accent1"/>
-          </a:fillRef>
-          <a:effectRef idx="2">
-            <a:schemeClr val="accent1"/>
-          </a:effectRef>
-          <a:fontRef idx="minor">
-            <a:schemeClr val="lt1"/>
-          </a:fontRef>
-        </p:style>
-        <p:txBody>
-          <a:bodyPr rtlCol="0" anchor="ctr"/>
-          <a:lstStyle/>
-          <a:p>
-            <a:r>
-              <a:rPr sz="1200"/>
-              <a:t>利用方法</a:t>
-            </a:r>
-          </a:p>
-        </p:txBody>
-      </p:sp>
-      <p:sp>
-        <p:nvSpPr>
-          <p:cNvPr id="16" name="Rectangle 15"/>
-          <p:cNvSpPr/>
-          <p:nvPr/>
-        </p:nvSpPr>
-        <p:spPr>
-          <a:xfrm>
-            <a:off x="7486800" y="5122917"/>
-            <a:ext cx="1200000" cy="500000"/>
-          </a:xfrm>
-          <a:prstGeom prst="rect">
-            <a:avLst/>
-          </a:prstGeom>
-        </p:spPr>
-        <p:style>
-          <a:lnRef idx="1">
-            <a:schemeClr val="accent1"/>
-          </a:lnRef>
-          <a:fillRef idx="3">
-            <a:schemeClr val="accent1"/>
-          </a:fillRef>
-          <a:effectRef idx="2">
-            <a:schemeClr val="accent1"/>
-          </a:effectRef>
-          <a:fontRef idx="minor">
-            <a:schemeClr val="lt1"/>
-          </a:fontRef>
-        </p:style>
-        <p:txBody>
-          <a:bodyPr rtlCol="0" anchor="ctr"/>
-          <a:lstStyle/>
-          <a:p>
-            <a:r>
-              <a:rPr sz="1200"/>
-              <a:t>ライブラリ</a:t>
-            </a:r>
-          </a:p>
-        </p:txBody>
-      </p:sp>
-      <p:sp>
-        <p:nvSpPr>
-          <p:cNvPr id="17" name="Rectangle 16"/>
-          <p:cNvSpPr/>
-          <p:nvPr/>
-        </p:nvSpPr>
-        <p:spPr>
-          <a:xfrm>
-            <a:off x="7486800" y="5626163"/>
-            <a:ext cx="1200000" cy="500000"/>
-          </a:xfrm>
-          <a:prstGeom prst="rect">
-            <a:avLst/>
-          </a:prstGeom>
-        </p:spPr>
-        <p:style>
-          <a:lnRef idx="1">
-            <a:schemeClr val="accent1"/>
-          </a:lnRef>
-          <a:fillRef idx="3">
-            <a:schemeClr val="accent1"/>
-          </a:fillRef>
-          <a:effectRef idx="2">
-            <a:schemeClr val="accent1"/>
-          </a:effectRef>
-          <a:fontRef idx="minor">
-            <a:schemeClr val="lt1"/>
-          </a:fontRef>
-        </p:style>
-        <p:txBody>
-          <a:bodyPr rtlCol="0" anchor="ctr"/>
-          <a:lstStyle/>
-          <a:p>
-            <a:r>
-              <a:rPr sz="1200"/>
-              <a:t>MCPサーバー</a:t>
-            </a:r>
-          </a:p>
-        </p:txBody>
-      </p:sp>
-      <p:cxnSp>
-        <p:nvCxnSpPr>
-          <p:cNvPr id="18" name="Connector 17"/>
-          <p:cNvCxnSpPr>
-            <a:stCxn id="4" idx="0"/>
-            <a:endCxn id="5" idx="2"/>
-          </p:cNvCxnSpPr>
-          <p:nvPr/>
-        </p:nvCxnSpPr>
-        <p:spPr>
-          <a:xfrm flipV="1">
-            <a:off x="3400400" y="2351822"/>
-            <a:ext cx="2343200" cy="1072642"/>
-          </a:xfrm>
-          <a:prstGeom prst="curvedConnector3">
-            <a:avLst/>
-          </a:prstGeom>
-        </p:spPr>
-        <p:style>
-          <a:lnRef idx="2">
-            <a:schemeClr val="accent1"/>
-          </a:lnRef>
-          <a:fillRef idx="0">
-            <a:schemeClr val="accent1"/>
-          </a:fillRef>
-          <a:effectRef idx="1">
-            <a:schemeClr val="accent1"/>
-          </a:effectRef>
-          <a:fontRef idx="minor">
-            <a:schemeClr val="tx1"/>
-          </a:fontRef>
-        </p:style>
-      </p:cxnSp>
-      <p:cxnSp>
-        <p:nvCxnSpPr>
-          <p:cNvPr id="19" name="Connector 18"/>
-          <p:cNvCxnSpPr>
-            <a:stCxn id="5" idx="1"/>
-            <a:endCxn id="6" idx="3"/>
-          </p:cNvCxnSpPr>
-          <p:nvPr/>
-        </p:nvCxnSpPr>
-        <p:spPr>
-          <a:xfrm flipV="1">
-            <a:off x="5143600" y="1850200"/>
-            <a:ext cx="3543200" cy="251622"/>
-          </a:xfrm>
-          <a:prstGeom prst="curvedConnector3">
-            <a:avLst/>
-          </a:prstGeom>
-        </p:spPr>
-        <p:style>
-          <a:lnRef idx="2">
-            <a:schemeClr val="accent1"/>
-          </a:lnRef>
-          <a:fillRef idx="0">
-            <a:schemeClr val="accent1"/>
-          </a:fillRef>
-          <a:effectRef idx="1">
-            <a:schemeClr val="accent1"/>
-          </a:effectRef>
-          <a:fontRef idx="minor">
-            <a:schemeClr val="tx1"/>
-          </a:fontRef>
-        </p:style>
-      </p:cxnSp>
-      <p:cxnSp>
-        <p:nvCxnSpPr>
-          <p:cNvPr id="20" name="Connector 19"/>
-          <p:cNvCxnSpPr>
-            <a:stCxn id="5" idx="1"/>
-            <a:endCxn id="7" idx="3"/>
-          </p:cNvCxnSpPr>
-          <p:nvPr/>
-        </p:nvCxnSpPr>
-        <p:spPr>
-          <a:xfrm>
-            <a:off x="5143600" y="2101822"/>
-            <a:ext cx="3543200" cy="251623"/>
-          </a:xfrm>
-          <a:prstGeom prst="curvedConnector3">
-            <a:avLst/>
-          </a:prstGeom>
-        </p:spPr>
-        <p:style>
-          <a:lnRef idx="2">
-            <a:schemeClr val="accent1"/>
-          </a:lnRef>
-          <a:fillRef idx="0">
-            <a:schemeClr val="accent1"/>
-          </a:fillRef>
-          <a:effectRef idx="1">
-            <a:schemeClr val="accent1"/>
-          </a:effectRef>
-          <a:fontRef idx="minor">
-            <a:schemeClr val="tx1"/>
-          </a:fontRef>
-        </p:style>
-      </p:cxnSp>
-      <p:cxnSp>
-        <p:nvCxnSpPr>
-          <p:cNvPr id="21" name="Connector 20"/>
-          <p:cNvCxnSpPr>
-            <a:stCxn id="4" idx="1"/>
-            <a:endCxn id="8" idx="3"/>
-          </p:cNvCxnSpPr>
-          <p:nvPr/>
-        </p:nvCxnSpPr>
-        <p:spPr>
-          <a:xfrm flipV="1">
-            <a:off x="2800400" y="2856690"/>
-            <a:ext cx="3543200" cy="817774"/>
-          </a:xfrm>
-          <a:prstGeom prst="curvedConnector3">
-            <a:avLst/>
-          </a:prstGeom>
-        </p:spPr>
-        <p:style>
-          <a:lnRef idx="2">
-            <a:schemeClr val="accent1"/>
-          </a:lnRef>
-          <a:fillRef idx="0">
-            <a:schemeClr val="accent1"/>
-          </a:fillRef>
-          <a:effectRef idx="1">
-            <a:schemeClr val="accent1"/>
-          </a:effectRef>
-          <a:fontRef idx="minor">
-            <a:schemeClr val="tx1"/>
-          </a:fontRef>
-        </p:style>
-      </p:cxnSp>
-      <p:cxnSp>
-        <p:nvCxnSpPr>
-          <p:cNvPr id="22" name="Connector 21"/>
-          <p:cNvCxnSpPr>
-            <a:stCxn id="8" idx="1"/>
-            <a:endCxn id="9" idx="3"/>
-          </p:cNvCxnSpPr>
-          <p:nvPr/>
-        </p:nvCxnSpPr>
-        <p:spPr>
-          <a:xfrm>
-            <a:off x="5143600" y="2856690"/>
-            <a:ext cx="3543200" cy="0"/>
-          </a:xfrm>
-          <a:prstGeom prst="curvedConnector3">
-            <a:avLst/>
-          </a:prstGeom>
-        </p:spPr>
-        <p:style>
-          <a:lnRef idx="2">
-            <a:schemeClr val="accent1"/>
-          </a:lnRef>
-          <a:fillRef idx="0">
-            <a:schemeClr val="accent1"/>
-          </a:fillRef>
-          <a:effectRef idx="1">
-            <a:schemeClr val="accent1"/>
-          </a:effectRef>
-          <a:fontRef idx="minor">
-            <a:schemeClr val="tx1"/>
-          </a:fontRef>
-        </p:style>
-      </p:cxnSp>
-      <p:cxnSp>
-        <p:nvCxnSpPr>
-          <p:cNvPr id="23" name="Connector 22"/>
-          <p:cNvCxnSpPr>
-            <a:stCxn id="4" idx="1"/>
-            <a:endCxn id="10" idx="3"/>
-          </p:cNvCxnSpPr>
-          <p:nvPr/>
-        </p:nvCxnSpPr>
-        <p:spPr>
-          <a:xfrm>
-            <a:off x="2800400" y="3674464"/>
-            <a:ext cx="3543200" cy="440340"/>
-          </a:xfrm>
-          <a:prstGeom prst="curvedConnector3">
-            <a:avLst/>
-          </a:prstGeom>
-        </p:spPr>
-        <p:style>
-          <a:lnRef idx="2">
-            <a:schemeClr val="accent1"/>
-          </a:lnRef>
-          <a:fillRef idx="0">
-            <a:schemeClr val="accent1"/>
-          </a:fillRef>
-          <a:effectRef idx="1">
-            <a:schemeClr val="accent1"/>
-          </a:effectRef>
-          <a:fontRef idx="minor">
-            <a:schemeClr val="tx1"/>
-          </a:fontRef>
-        </p:style>
-      </p:cxnSp>
-      <p:cxnSp>
-        <p:nvCxnSpPr>
-          <p:cNvPr id="24" name="Connector 23"/>
-          <p:cNvCxnSpPr>
-            <a:stCxn id="10" idx="1"/>
-            <a:endCxn id="11" idx="3"/>
-          </p:cNvCxnSpPr>
-          <p:nvPr/>
-        </p:nvCxnSpPr>
-        <p:spPr>
-          <a:xfrm flipV="1">
-            <a:off x="5143600" y="3359936"/>
-            <a:ext cx="3543200" cy="754868"/>
-          </a:xfrm>
-          <a:prstGeom prst="curvedConnector3">
-            <a:avLst/>
-          </a:prstGeom>
-        </p:spPr>
-        <p:style>
-          <a:lnRef idx="2">
-            <a:schemeClr val="accent1"/>
-          </a:lnRef>
-          <a:fillRef idx="0">
-            <a:schemeClr val="accent1"/>
-          </a:fillRef>
-          <a:effectRef idx="1">
-            <a:schemeClr val="accent1"/>
-          </a:effectRef>
-          <a:fontRef idx="minor">
-            <a:schemeClr val="tx1"/>
-          </a:fontRef>
-        </p:style>
-      </p:cxnSp>
-      <p:cxnSp>
-        <p:nvCxnSpPr>
-          <p:cNvPr id="25" name="Connector 24"/>
-          <p:cNvCxnSpPr>
-            <a:stCxn id="10" idx="1"/>
-            <a:endCxn id="12" idx="3"/>
-          </p:cNvCxnSpPr>
-          <p:nvPr/>
-        </p:nvCxnSpPr>
-        <p:spPr>
-          <a:xfrm flipV="1">
-            <a:off x="5143600" y="3863181"/>
-            <a:ext cx="3543200" cy="251623"/>
-          </a:xfrm>
-          <a:prstGeom prst="curvedConnector3">
-            <a:avLst/>
-          </a:prstGeom>
-        </p:spPr>
-        <p:style>
-          <a:lnRef idx="2">
-            <a:schemeClr val="accent1"/>
-          </a:lnRef>
-          <a:fillRef idx="0">
-            <a:schemeClr val="accent1"/>
-          </a:fillRef>
-          <a:effectRef idx="1">
-            <a:schemeClr val="accent1"/>
-          </a:effectRef>
-          <a:fontRef idx="minor">
-            <a:schemeClr val="tx1"/>
-          </a:fontRef>
-        </p:style>
-      </p:cxnSp>
-      <p:cxnSp>
-        <p:nvCxnSpPr>
-          <p:cNvPr id="26" name="Connector 25"/>
-          <p:cNvCxnSpPr>
-            <a:stCxn id="10" idx="1"/>
-            <a:endCxn id="13" idx="3"/>
-          </p:cNvCxnSpPr>
-          <p:nvPr/>
-        </p:nvCxnSpPr>
-        <p:spPr>
-          <a:xfrm>
-            <a:off x="5143600" y="4114804"/>
-            <a:ext cx="3543200" cy="251622"/>
-          </a:xfrm>
-          <a:prstGeom prst="curvedConnector3">
-            <a:avLst/>
-          </a:prstGeom>
-        </p:spPr>
-        <p:style>
-          <a:lnRef idx="2">
-            <a:schemeClr val="accent1"/>
-          </a:lnRef>
-          <a:fillRef idx="0">
-            <a:schemeClr val="accent1"/>
-          </a:fillRef>
-          <a:effectRef idx="1">
-            <a:schemeClr val="accent1"/>
-          </a:effectRef>
-          <a:fontRef idx="minor">
-            <a:schemeClr val="tx1"/>
-          </a:fontRef>
-        </p:style>
-      </p:cxnSp>
-      <p:cxnSp>
-        <p:nvCxnSpPr>
-          <p:cNvPr id="27" name="Connector 26"/>
-          <p:cNvCxnSpPr>
-            <a:stCxn id="10" idx="1"/>
-            <a:endCxn id="14" idx="3"/>
-          </p:cNvCxnSpPr>
-          <p:nvPr/>
-        </p:nvCxnSpPr>
-        <p:spPr>
-          <a:xfrm>
-            <a:off x="5143600" y="4114804"/>
-            <a:ext cx="3543200" cy="754868"/>
-          </a:xfrm>
-          <a:prstGeom prst="curvedConnector3">
-            <a:avLst/>
-          </a:prstGeom>
-        </p:spPr>
-        <p:style>
-          <a:lnRef idx="2">
-            <a:schemeClr val="accent1"/>
-          </a:lnRef>
-          <a:fillRef idx="0">
-            <a:schemeClr val="accent1"/>
-          </a:fillRef>
-          <a:effectRef idx="1">
-            <a:schemeClr val="accent1"/>
-          </a:effectRef>
-          <a:fontRef idx="minor">
-            <a:schemeClr val="tx1"/>
-          </a:fontRef>
-        </p:style>
-      </p:cxnSp>
-      <p:cxnSp>
-        <p:nvCxnSpPr>
-          <p:cNvPr id="28" name="Connector 27"/>
-          <p:cNvCxnSpPr>
-            <a:stCxn id="4" idx="2"/>
-            <a:endCxn id="15" idx="0"/>
-          </p:cNvCxnSpPr>
-          <p:nvPr/>
-        </p:nvCxnSpPr>
-        <p:spPr>
-          <a:xfrm>
-            <a:off x="3400400" y="3924464"/>
-            <a:ext cx="2343200" cy="1450076"/>
-          </a:xfrm>
-          <a:prstGeom prst="curvedConnector3">
-            <a:avLst/>
-          </a:prstGeom>
-        </p:spPr>
-        <p:style>
-          <a:lnRef idx="2">
-            <a:schemeClr val="accent1"/>
-          </a:lnRef>
-          <a:fillRef idx="0">
-            <a:schemeClr val="accent1"/>
-          </a:fillRef>
-          <a:effectRef idx="1">
-            <a:schemeClr val="accent1"/>
-          </a:effectRef>
-          <a:fontRef idx="minor">
-            <a:schemeClr val="tx1"/>
-          </a:fontRef>
-        </p:style>
-      </p:cxnSp>
-      <p:cxnSp>
-        <p:nvCxnSpPr>
-          <p:cNvPr id="29" name="Connector 28"/>
-          <p:cNvCxnSpPr>
-            <a:stCxn id="15" idx="1"/>
-            <a:endCxn id="16" idx="3"/>
-          </p:cNvCxnSpPr>
-          <p:nvPr/>
-        </p:nvCxnSpPr>
-        <p:spPr>
-          <a:xfrm flipV="1">
-            <a:off x="5143600" y="5372917"/>
-            <a:ext cx="3543200" cy="251623"/>
-          </a:xfrm>
-          <a:prstGeom prst="curvedConnector3">
-            <a:avLst/>
-          </a:prstGeom>
-        </p:spPr>
-        <p:style>
-          <a:lnRef idx="2">
-            <a:schemeClr val="accent1"/>
-          </a:lnRef>
-          <a:fillRef idx="0">
-            <a:schemeClr val="accent1"/>
-          </a:fillRef>
-          <a:effectRef idx="1">
-            <a:schemeClr val="accent1"/>
-          </a:effectRef>
-          <a:fontRef idx="minor">
-            <a:schemeClr val="tx1"/>
-          </a:fontRef>
-        </p:style>
-      </p:cxnSp>
-      <p:cxnSp>
-        <p:nvCxnSpPr>
-          <p:cNvPr id="30" name="Connector 29"/>
-          <p:cNvCxnSpPr>
-            <a:stCxn id="15" idx="1"/>
-            <a:endCxn id="17" idx="3"/>
-          </p:cNvCxnSpPr>
-          <p:nvPr/>
-        </p:nvCxnSpPr>
-        <p:spPr>
-          <a:xfrm>
-            <a:off x="5143600" y="5624540"/>
-            <a:ext cx="3543200" cy="251623"/>
-          </a:xfrm>
-          <a:prstGeom prst="curvedConnector3">
-            <a:avLst/>
-          </a:prstGeom>
-        </p:spPr>
-        <p:style>
-          <a:lnRef idx="2">
-            <a:schemeClr val="accent1"/>
-          </a:lnRef>
-          <a:fillRef idx="0">
-            <a:schemeClr val="accent1"/>
-          </a:fillRef>
-          <a:effectRef idx="1">
-            <a:schemeClr val="accent1"/>
-          </a:effectRef>
-          <a:fontRef idx="minor">
-            <a:schemeClr val="tx1"/>
-          </a:fontRef>
-        </p:style>
-      </p:cxnSp>
+          <a:noFill/>
+        </p:spPr>
+        <p:txBody>
+          <a:bodyPr wrap="square">
+            <a:spAutoFit/>
+          </a:bodyPr>
+          <a:lstStyle/>
+          <a:p>
+            <a:r>
+              <a:rPr sz="1000">
+                <a:latin typeface="Courier New"/>
+              </a:rPr>
+              <a:t>requirementDiagram
+    requirement test_req {
+        id: 1
+        text: システムは99.9%の可用性を持つこと
+        risk: high
+        verifymethod: test
+    }
+    functionalRequirement login_req {
+        id: 2
+        text: ユーザーはログインできること
+        risk: medium
+        verifymethod: inspection
+    }
+    test_req - traces -&gt; login_req</a:t>
+            </a:r>
+          </a:p>
+        </p:txBody>
+      </p:sp>
     </p:spTree>
   </p:cSld>
   <p:clrMapOvr>
@@ -15082,7 +16251,7 @@
           <a:lstStyle/>
           <a:p>
             <a:r>
-              <a:t>13. タイムライン（Timeline）</a:t>
+              <a:t>11. Gitグラフ（Git Graph）</a:t>
             </a:r>
           </a:p>
         </p:txBody>
@@ -15130,19 +16299,16 @@
               <a:rPr sz="1000">
                 <a:latin typeface="Courier New"/>
               </a:rPr>
-              <a:t>timeline
-    title ソフトウェア開発史
-    1960 : アセンブリ言語
-    1970 : C言語
-         : Unix
-    1980 : C++
-         : Macintosh
-    1990 : Java
-         : World Wide Web
-    2000 : Python普及
-         : Agile開発
-    2010 : クラウドコンピューティング
-    2020 : AI・機械学習</a:t>
+              <a:t>gitGraph
+    commit id: "initial"
+    commit id: "feat: add login"
+    branch develop
+    checkout develop
+    commit id: "fix: typo"
+    commit id: "feat: add API"
+    checkout main
+    merge develop id: "merge develop"
+    commit id: "release: v1.0"</a:t>
             </a:r>
           </a:p>
         </p:txBody>
@@ -15181,7 +16347,7 @@
           <a:lstStyle/>
           <a:p>
             <a:r>
-              <a:t>14. ZenUML</a:t>
+              <a:t>12. マインドマップ（Mindmap）</a:t>
             </a:r>
           </a:p>
         </p:txBody>
@@ -15205,42 +16371,993 @@
       </p:sp>
       <p:sp>
         <p:nvSpPr>
-          <p:cNvPr id="4" name="TextBox 3"/>
-          <p:cNvSpPr txBox="1"/>
-          <p:nvPr/>
-        </p:nvSpPr>
-        <p:spPr>
-          <a:xfrm>
-            <a:off x="457200" y="1600200"/>
-            <a:ext cx="8229600" cy="4525963"/>
+          <p:cNvPr id="4" name="Rectangle 3"/>
+          <p:cNvSpPr/>
+          <p:nvPr/>
+        </p:nvSpPr>
+        <p:spPr>
+          <a:xfrm>
+            <a:off x="2800400" y="3424464"/>
+            <a:ext cx="1200000" cy="500000"/>
           </a:xfrm>
           <a:prstGeom prst="rect">
             <a:avLst/>
           </a:prstGeom>
-          <a:noFill/>
-        </p:spPr>
-        <p:txBody>
-          <a:bodyPr wrap="square">
-            <a:spAutoFit/>
-          </a:bodyPr>
-          <a:lstStyle/>
-          <a:p>
-            <a:r>
-              <a:rPr sz="1000">
-                <a:latin typeface="Courier New"/>
-              </a:rPr>
-              <a:t>zenuml
-    title 注文処理
-    @Actor Client
-    @Database DB
-    Client -&gt; Server.process(order) {
-        Server -&gt; DB.save(order)
-        return orderId
-    }</a:t>
-            </a:r>
-          </a:p>
-        </p:txBody>
-      </p:sp>
+        </p:spPr>
+        <p:style>
+          <a:lnRef idx="1">
+            <a:schemeClr val="accent1"/>
+          </a:lnRef>
+          <a:fillRef idx="3">
+            <a:schemeClr val="accent1"/>
+          </a:fillRef>
+          <a:effectRef idx="2">
+            <a:schemeClr val="accent1"/>
+          </a:effectRef>
+          <a:fontRef idx="minor">
+            <a:schemeClr val="lt1"/>
+          </a:fontRef>
+        </p:style>
+        <p:txBody>
+          <a:bodyPr rtlCol="0" anchor="ctr"/>
+          <a:lstStyle/>
+          <a:p>
+            <a:r>
+              <a:rPr sz="1200"/>
+              <a:t>qmd_to_pptx</a:t>
+            </a:r>
+          </a:p>
+        </p:txBody>
+      </p:sp>
+      <p:sp>
+        <p:nvSpPr>
+          <p:cNvPr id="5" name="Rectangle 4"/>
+          <p:cNvSpPr/>
+          <p:nvPr/>
+        </p:nvSpPr>
+        <p:spPr>
+          <a:xfrm>
+            <a:off x="5143600" y="1851822"/>
+            <a:ext cx="1200000" cy="500000"/>
+          </a:xfrm>
+          <a:prstGeom prst="rect">
+            <a:avLst/>
+          </a:prstGeom>
+        </p:spPr>
+        <p:style>
+          <a:lnRef idx="1">
+            <a:schemeClr val="accent1"/>
+          </a:lnRef>
+          <a:fillRef idx="3">
+            <a:schemeClr val="accent1"/>
+          </a:fillRef>
+          <a:effectRef idx="2">
+            <a:schemeClr val="accent1"/>
+          </a:effectRef>
+          <a:fontRef idx="minor">
+            <a:schemeClr val="lt1"/>
+          </a:fontRef>
+        </p:style>
+        <p:txBody>
+          <a:bodyPr rtlCol="0" anchor="ctr"/>
+          <a:lstStyle/>
+          <a:p>
+            <a:r>
+              <a:rPr sz="1200"/>
+              <a:t>入力形式</a:t>
+            </a:r>
+          </a:p>
+        </p:txBody>
+      </p:sp>
+      <p:sp>
+        <p:nvSpPr>
+          <p:cNvPr id="6" name="Rectangle 5"/>
+          <p:cNvSpPr/>
+          <p:nvPr/>
+        </p:nvSpPr>
+        <p:spPr>
+          <a:xfrm>
+            <a:off x="7486800" y="1600200"/>
+            <a:ext cx="1200000" cy="500000"/>
+          </a:xfrm>
+          <a:prstGeom prst="rect">
+            <a:avLst/>
+          </a:prstGeom>
+        </p:spPr>
+        <p:style>
+          <a:lnRef idx="1">
+            <a:schemeClr val="accent1"/>
+          </a:lnRef>
+          <a:fillRef idx="3">
+            <a:schemeClr val="accent1"/>
+          </a:fillRef>
+          <a:effectRef idx="2">
+            <a:schemeClr val="accent1"/>
+          </a:effectRef>
+          <a:fontRef idx="minor">
+            <a:schemeClr val="lt1"/>
+          </a:fontRef>
+        </p:style>
+        <p:txBody>
+          <a:bodyPr rtlCol="0" anchor="ctr"/>
+          <a:lstStyle/>
+          <a:p>
+            <a:r>
+              <a:rPr sz="1200"/>
+              <a:t>QMD</a:t>
+            </a:r>
+          </a:p>
+        </p:txBody>
+      </p:sp>
+      <p:sp>
+        <p:nvSpPr>
+          <p:cNvPr id="7" name="Rectangle 6"/>
+          <p:cNvSpPr/>
+          <p:nvPr/>
+        </p:nvSpPr>
+        <p:spPr>
+          <a:xfrm>
+            <a:off x="7486800" y="2103445"/>
+            <a:ext cx="1200000" cy="500000"/>
+          </a:xfrm>
+          <a:prstGeom prst="rect">
+            <a:avLst/>
+          </a:prstGeom>
+        </p:spPr>
+        <p:style>
+          <a:lnRef idx="1">
+            <a:schemeClr val="accent1"/>
+          </a:lnRef>
+          <a:fillRef idx="3">
+            <a:schemeClr val="accent1"/>
+          </a:fillRef>
+          <a:effectRef idx="2">
+            <a:schemeClr val="accent1"/>
+          </a:effectRef>
+          <a:fontRef idx="minor">
+            <a:schemeClr val="lt1"/>
+          </a:fontRef>
+        </p:style>
+        <p:txBody>
+          <a:bodyPr rtlCol="0" anchor="ctr"/>
+          <a:lstStyle/>
+          <a:p>
+            <a:r>
+              <a:rPr sz="1200"/>
+              <a:t>Markdown</a:t>
+            </a:r>
+          </a:p>
+        </p:txBody>
+      </p:sp>
+      <p:sp>
+        <p:nvSpPr>
+          <p:cNvPr id="8" name="Rectangle 7"/>
+          <p:cNvSpPr/>
+          <p:nvPr/>
+        </p:nvSpPr>
+        <p:spPr>
+          <a:xfrm>
+            <a:off x="5143600" y="2606690"/>
+            <a:ext cx="1200000" cy="500000"/>
+          </a:xfrm>
+          <a:prstGeom prst="rect">
+            <a:avLst/>
+          </a:prstGeom>
+        </p:spPr>
+        <p:style>
+          <a:lnRef idx="1">
+            <a:schemeClr val="accent1"/>
+          </a:lnRef>
+          <a:fillRef idx="3">
+            <a:schemeClr val="accent1"/>
+          </a:fillRef>
+          <a:effectRef idx="2">
+            <a:schemeClr val="accent1"/>
+          </a:effectRef>
+          <a:fontRef idx="minor">
+            <a:schemeClr val="lt1"/>
+          </a:fontRef>
+        </p:style>
+        <p:txBody>
+          <a:bodyPr rtlCol="0" anchor="ctr"/>
+          <a:lstStyle/>
+          <a:p>
+            <a:r>
+              <a:rPr sz="1200"/>
+              <a:t>出力</a:t>
+            </a:r>
+          </a:p>
+        </p:txBody>
+      </p:sp>
+      <p:sp>
+        <p:nvSpPr>
+          <p:cNvPr id="9" name="Rectangle 8"/>
+          <p:cNvSpPr/>
+          <p:nvPr/>
+        </p:nvSpPr>
+        <p:spPr>
+          <a:xfrm>
+            <a:off x="7486800" y="2606690"/>
+            <a:ext cx="1200000" cy="500000"/>
+          </a:xfrm>
+          <a:prstGeom prst="rect">
+            <a:avLst/>
+          </a:prstGeom>
+        </p:spPr>
+        <p:style>
+          <a:lnRef idx="1">
+            <a:schemeClr val="accent1"/>
+          </a:lnRef>
+          <a:fillRef idx="3">
+            <a:schemeClr val="accent1"/>
+          </a:fillRef>
+          <a:effectRef idx="2">
+            <a:schemeClr val="accent1"/>
+          </a:effectRef>
+          <a:fontRef idx="minor">
+            <a:schemeClr val="lt1"/>
+          </a:fontRef>
+        </p:style>
+        <p:txBody>
+          <a:bodyPr rtlCol="0" anchor="ctr"/>
+          <a:lstStyle/>
+          <a:p>
+            <a:r>
+              <a:rPr sz="1200"/>
+              <a:t>PPTX</a:t>
+            </a:r>
+          </a:p>
+        </p:txBody>
+      </p:sp>
+      <p:sp>
+        <p:nvSpPr>
+          <p:cNvPr id="10" name="Rectangle 9"/>
+          <p:cNvSpPr/>
+          <p:nvPr/>
+        </p:nvSpPr>
+        <p:spPr>
+          <a:xfrm>
+            <a:off x="5143600" y="3864804"/>
+            <a:ext cx="1200000" cy="500000"/>
+          </a:xfrm>
+          <a:prstGeom prst="rect">
+            <a:avLst/>
+          </a:prstGeom>
+        </p:spPr>
+        <p:style>
+          <a:lnRef idx="1">
+            <a:schemeClr val="accent1"/>
+          </a:lnRef>
+          <a:fillRef idx="3">
+            <a:schemeClr val="accent1"/>
+          </a:fillRef>
+          <a:effectRef idx="2">
+            <a:schemeClr val="accent1"/>
+          </a:effectRef>
+          <a:fontRef idx="minor">
+            <a:schemeClr val="lt1"/>
+          </a:fontRef>
+        </p:style>
+        <p:txBody>
+          <a:bodyPr rtlCol="0" anchor="ctr"/>
+          <a:lstStyle/>
+          <a:p>
+            <a:r>
+              <a:rPr sz="1200"/>
+              <a:t>機能</a:t>
+            </a:r>
+          </a:p>
+        </p:txBody>
+      </p:sp>
+      <p:sp>
+        <p:nvSpPr>
+          <p:cNvPr id="11" name="Rectangle 10"/>
+          <p:cNvSpPr/>
+          <p:nvPr/>
+        </p:nvSpPr>
+        <p:spPr>
+          <a:xfrm>
+            <a:off x="7486800" y="3109936"/>
+            <a:ext cx="1200000" cy="500000"/>
+          </a:xfrm>
+          <a:prstGeom prst="rect">
+            <a:avLst/>
+          </a:prstGeom>
+        </p:spPr>
+        <p:style>
+          <a:lnRef idx="1">
+            <a:schemeClr val="accent1"/>
+          </a:lnRef>
+          <a:fillRef idx="3">
+            <a:schemeClr val="accent1"/>
+          </a:fillRef>
+          <a:effectRef idx="2">
+            <a:schemeClr val="accent1"/>
+          </a:effectRef>
+          <a:fontRef idx="minor">
+            <a:schemeClr val="lt1"/>
+          </a:fontRef>
+        </p:style>
+        <p:txBody>
+          <a:bodyPr rtlCol="0" anchor="ctr"/>
+          <a:lstStyle/>
+          <a:p>
+            <a:r>
+              <a:rPr sz="1200"/>
+              <a:t>数式</a:t>
+            </a:r>
+          </a:p>
+        </p:txBody>
+      </p:sp>
+      <p:sp>
+        <p:nvSpPr>
+          <p:cNvPr id="12" name="Rectangle 11"/>
+          <p:cNvSpPr/>
+          <p:nvPr/>
+        </p:nvSpPr>
+        <p:spPr>
+          <a:xfrm>
+            <a:off x="7486800" y="3613181"/>
+            <a:ext cx="1200000" cy="500000"/>
+          </a:xfrm>
+          <a:prstGeom prst="rect">
+            <a:avLst/>
+          </a:prstGeom>
+        </p:spPr>
+        <p:style>
+          <a:lnRef idx="1">
+            <a:schemeClr val="accent1"/>
+          </a:lnRef>
+          <a:fillRef idx="3">
+            <a:schemeClr val="accent1"/>
+          </a:fillRef>
+          <a:effectRef idx="2">
+            <a:schemeClr val="accent1"/>
+          </a:effectRef>
+          <a:fontRef idx="minor">
+            <a:schemeClr val="lt1"/>
+          </a:fontRef>
+        </p:style>
+        <p:txBody>
+          <a:bodyPr rtlCol="0" anchor="ctr"/>
+          <a:lstStyle/>
+          <a:p>
+            <a:r>
+              <a:rPr sz="1200"/>
+              <a:t>Mermaid図</a:t>
+            </a:r>
+          </a:p>
+        </p:txBody>
+      </p:sp>
+      <p:sp>
+        <p:nvSpPr>
+          <p:cNvPr id="13" name="Rectangle 12"/>
+          <p:cNvSpPr/>
+          <p:nvPr/>
+        </p:nvSpPr>
+        <p:spPr>
+          <a:xfrm>
+            <a:off x="7486800" y="4116426"/>
+            <a:ext cx="1200000" cy="500000"/>
+          </a:xfrm>
+          <a:prstGeom prst="rect">
+            <a:avLst/>
+          </a:prstGeom>
+        </p:spPr>
+        <p:style>
+          <a:lnRef idx="1">
+            <a:schemeClr val="accent1"/>
+          </a:lnRef>
+          <a:fillRef idx="3">
+            <a:schemeClr val="accent1"/>
+          </a:fillRef>
+          <a:effectRef idx="2">
+            <a:schemeClr val="accent1"/>
+          </a:effectRef>
+          <a:fontRef idx="minor">
+            <a:schemeClr val="lt1"/>
+          </a:fontRef>
+        </p:style>
+        <p:txBody>
+          <a:bodyPr rtlCol="0" anchor="ctr"/>
+          <a:lstStyle/>
+          <a:p>
+            <a:r>
+              <a:rPr sz="1200"/>
+              <a:t>テーブル</a:t>
+            </a:r>
+          </a:p>
+        </p:txBody>
+      </p:sp>
+      <p:sp>
+        <p:nvSpPr>
+          <p:cNvPr id="14" name="Rectangle 13"/>
+          <p:cNvSpPr/>
+          <p:nvPr/>
+        </p:nvSpPr>
+        <p:spPr>
+          <a:xfrm>
+            <a:off x="7486800" y="4619672"/>
+            <a:ext cx="1200000" cy="500000"/>
+          </a:xfrm>
+          <a:prstGeom prst="rect">
+            <a:avLst/>
+          </a:prstGeom>
+        </p:spPr>
+        <p:style>
+          <a:lnRef idx="1">
+            <a:schemeClr val="accent1"/>
+          </a:lnRef>
+          <a:fillRef idx="3">
+            <a:schemeClr val="accent1"/>
+          </a:fillRef>
+          <a:effectRef idx="2">
+            <a:schemeClr val="accent1"/>
+          </a:effectRef>
+          <a:fontRef idx="minor">
+            <a:schemeClr val="lt1"/>
+          </a:fontRef>
+        </p:style>
+        <p:txBody>
+          <a:bodyPr rtlCol="0" anchor="ctr"/>
+          <a:lstStyle/>
+          <a:p>
+            <a:r>
+              <a:rPr sz="1200"/>
+              <a:t>コード</a:t>
+            </a:r>
+          </a:p>
+        </p:txBody>
+      </p:sp>
+      <p:sp>
+        <p:nvSpPr>
+          <p:cNvPr id="15" name="Rectangle 14"/>
+          <p:cNvSpPr/>
+          <p:nvPr/>
+        </p:nvSpPr>
+        <p:spPr>
+          <a:xfrm>
+            <a:off x="5143600" y="5374540"/>
+            <a:ext cx="1200000" cy="500000"/>
+          </a:xfrm>
+          <a:prstGeom prst="rect">
+            <a:avLst/>
+          </a:prstGeom>
+        </p:spPr>
+        <p:style>
+          <a:lnRef idx="1">
+            <a:schemeClr val="accent1"/>
+          </a:lnRef>
+          <a:fillRef idx="3">
+            <a:schemeClr val="accent1"/>
+          </a:fillRef>
+          <a:effectRef idx="2">
+            <a:schemeClr val="accent1"/>
+          </a:effectRef>
+          <a:fontRef idx="minor">
+            <a:schemeClr val="lt1"/>
+          </a:fontRef>
+        </p:style>
+        <p:txBody>
+          <a:bodyPr rtlCol="0" anchor="ctr"/>
+          <a:lstStyle/>
+          <a:p>
+            <a:r>
+              <a:rPr sz="1200"/>
+              <a:t>利用方法</a:t>
+            </a:r>
+          </a:p>
+        </p:txBody>
+      </p:sp>
+      <p:sp>
+        <p:nvSpPr>
+          <p:cNvPr id="16" name="Rectangle 15"/>
+          <p:cNvSpPr/>
+          <p:nvPr/>
+        </p:nvSpPr>
+        <p:spPr>
+          <a:xfrm>
+            <a:off x="7486800" y="5122917"/>
+            <a:ext cx="1200000" cy="500000"/>
+          </a:xfrm>
+          <a:prstGeom prst="rect">
+            <a:avLst/>
+          </a:prstGeom>
+        </p:spPr>
+        <p:style>
+          <a:lnRef idx="1">
+            <a:schemeClr val="accent1"/>
+          </a:lnRef>
+          <a:fillRef idx="3">
+            <a:schemeClr val="accent1"/>
+          </a:fillRef>
+          <a:effectRef idx="2">
+            <a:schemeClr val="accent1"/>
+          </a:effectRef>
+          <a:fontRef idx="minor">
+            <a:schemeClr val="lt1"/>
+          </a:fontRef>
+        </p:style>
+        <p:txBody>
+          <a:bodyPr rtlCol="0" anchor="ctr"/>
+          <a:lstStyle/>
+          <a:p>
+            <a:r>
+              <a:rPr sz="1200"/>
+              <a:t>ライブラリ</a:t>
+            </a:r>
+          </a:p>
+        </p:txBody>
+      </p:sp>
+      <p:sp>
+        <p:nvSpPr>
+          <p:cNvPr id="17" name="Rectangle 16"/>
+          <p:cNvSpPr/>
+          <p:nvPr/>
+        </p:nvSpPr>
+        <p:spPr>
+          <a:xfrm>
+            <a:off x="7486800" y="5626163"/>
+            <a:ext cx="1200000" cy="500000"/>
+          </a:xfrm>
+          <a:prstGeom prst="rect">
+            <a:avLst/>
+          </a:prstGeom>
+        </p:spPr>
+        <p:style>
+          <a:lnRef idx="1">
+            <a:schemeClr val="accent1"/>
+          </a:lnRef>
+          <a:fillRef idx="3">
+            <a:schemeClr val="accent1"/>
+          </a:fillRef>
+          <a:effectRef idx="2">
+            <a:schemeClr val="accent1"/>
+          </a:effectRef>
+          <a:fontRef idx="minor">
+            <a:schemeClr val="lt1"/>
+          </a:fontRef>
+        </p:style>
+        <p:txBody>
+          <a:bodyPr rtlCol="0" anchor="ctr"/>
+          <a:lstStyle/>
+          <a:p>
+            <a:r>
+              <a:rPr sz="1200"/>
+              <a:t>MCPサーバー</a:t>
+            </a:r>
+          </a:p>
+        </p:txBody>
+      </p:sp>
+      <p:cxnSp>
+        <p:nvCxnSpPr>
+          <p:cNvPr id="18" name="Connector 17"/>
+          <p:cNvCxnSpPr>
+            <a:stCxn id="4" idx="0"/>
+            <a:endCxn id="5" idx="2"/>
+          </p:cNvCxnSpPr>
+          <p:nvPr/>
+        </p:nvCxnSpPr>
+        <p:spPr>
+          <a:xfrm flipV="1">
+            <a:off x="3400400" y="2351822"/>
+            <a:ext cx="2343200" cy="1072642"/>
+          </a:xfrm>
+          <a:prstGeom prst="curvedConnector3">
+            <a:avLst/>
+          </a:prstGeom>
+        </p:spPr>
+        <p:style>
+          <a:lnRef idx="2">
+            <a:schemeClr val="accent1"/>
+          </a:lnRef>
+          <a:fillRef idx="0">
+            <a:schemeClr val="accent1"/>
+          </a:fillRef>
+          <a:effectRef idx="1">
+            <a:schemeClr val="accent1"/>
+          </a:effectRef>
+          <a:fontRef idx="minor">
+            <a:schemeClr val="tx1"/>
+          </a:fontRef>
+        </p:style>
+      </p:cxnSp>
+      <p:cxnSp>
+        <p:nvCxnSpPr>
+          <p:cNvPr id="19" name="Connector 18"/>
+          <p:cNvCxnSpPr>
+            <a:stCxn id="5" idx="1"/>
+            <a:endCxn id="6" idx="3"/>
+          </p:cNvCxnSpPr>
+          <p:nvPr/>
+        </p:nvCxnSpPr>
+        <p:spPr>
+          <a:xfrm flipV="1">
+            <a:off x="5143600" y="1850200"/>
+            <a:ext cx="3543200" cy="251622"/>
+          </a:xfrm>
+          <a:prstGeom prst="curvedConnector3">
+            <a:avLst/>
+          </a:prstGeom>
+        </p:spPr>
+        <p:style>
+          <a:lnRef idx="2">
+            <a:schemeClr val="accent1"/>
+          </a:lnRef>
+          <a:fillRef idx="0">
+            <a:schemeClr val="accent1"/>
+          </a:fillRef>
+          <a:effectRef idx="1">
+            <a:schemeClr val="accent1"/>
+          </a:effectRef>
+          <a:fontRef idx="minor">
+            <a:schemeClr val="tx1"/>
+          </a:fontRef>
+        </p:style>
+      </p:cxnSp>
+      <p:cxnSp>
+        <p:nvCxnSpPr>
+          <p:cNvPr id="20" name="Connector 19"/>
+          <p:cNvCxnSpPr>
+            <a:stCxn id="5" idx="1"/>
+            <a:endCxn id="7" idx="3"/>
+          </p:cNvCxnSpPr>
+          <p:nvPr/>
+        </p:nvCxnSpPr>
+        <p:spPr>
+          <a:xfrm>
+            <a:off x="5143600" y="2101822"/>
+            <a:ext cx="3543200" cy="251623"/>
+          </a:xfrm>
+          <a:prstGeom prst="curvedConnector3">
+            <a:avLst/>
+          </a:prstGeom>
+        </p:spPr>
+        <p:style>
+          <a:lnRef idx="2">
+            <a:schemeClr val="accent1"/>
+          </a:lnRef>
+          <a:fillRef idx="0">
+            <a:schemeClr val="accent1"/>
+          </a:fillRef>
+          <a:effectRef idx="1">
+            <a:schemeClr val="accent1"/>
+          </a:effectRef>
+          <a:fontRef idx="minor">
+            <a:schemeClr val="tx1"/>
+          </a:fontRef>
+        </p:style>
+      </p:cxnSp>
+      <p:cxnSp>
+        <p:nvCxnSpPr>
+          <p:cNvPr id="21" name="Connector 20"/>
+          <p:cNvCxnSpPr>
+            <a:stCxn id="4" idx="1"/>
+            <a:endCxn id="8" idx="3"/>
+          </p:cNvCxnSpPr>
+          <p:nvPr/>
+        </p:nvCxnSpPr>
+        <p:spPr>
+          <a:xfrm flipV="1">
+            <a:off x="2800400" y="2856690"/>
+            <a:ext cx="3543200" cy="817774"/>
+          </a:xfrm>
+          <a:prstGeom prst="curvedConnector3">
+            <a:avLst/>
+          </a:prstGeom>
+        </p:spPr>
+        <p:style>
+          <a:lnRef idx="2">
+            <a:schemeClr val="accent1"/>
+          </a:lnRef>
+          <a:fillRef idx="0">
+            <a:schemeClr val="accent1"/>
+          </a:fillRef>
+          <a:effectRef idx="1">
+            <a:schemeClr val="accent1"/>
+          </a:effectRef>
+          <a:fontRef idx="minor">
+            <a:schemeClr val="tx1"/>
+          </a:fontRef>
+        </p:style>
+      </p:cxnSp>
+      <p:cxnSp>
+        <p:nvCxnSpPr>
+          <p:cNvPr id="22" name="Connector 21"/>
+          <p:cNvCxnSpPr>
+            <a:stCxn id="8" idx="1"/>
+            <a:endCxn id="9" idx="3"/>
+          </p:cNvCxnSpPr>
+          <p:nvPr/>
+        </p:nvCxnSpPr>
+        <p:spPr>
+          <a:xfrm>
+            <a:off x="5143600" y="2856690"/>
+            <a:ext cx="3543200" cy="0"/>
+          </a:xfrm>
+          <a:prstGeom prst="curvedConnector3">
+            <a:avLst/>
+          </a:prstGeom>
+        </p:spPr>
+        <p:style>
+          <a:lnRef idx="2">
+            <a:schemeClr val="accent1"/>
+          </a:lnRef>
+          <a:fillRef idx="0">
+            <a:schemeClr val="accent1"/>
+          </a:fillRef>
+          <a:effectRef idx="1">
+            <a:schemeClr val="accent1"/>
+          </a:effectRef>
+          <a:fontRef idx="minor">
+            <a:schemeClr val="tx1"/>
+          </a:fontRef>
+        </p:style>
+      </p:cxnSp>
+      <p:cxnSp>
+        <p:nvCxnSpPr>
+          <p:cNvPr id="23" name="Connector 22"/>
+          <p:cNvCxnSpPr>
+            <a:stCxn id="4" idx="1"/>
+            <a:endCxn id="10" idx="3"/>
+          </p:cNvCxnSpPr>
+          <p:nvPr/>
+        </p:nvCxnSpPr>
+        <p:spPr>
+          <a:xfrm>
+            <a:off x="2800400" y="3674464"/>
+            <a:ext cx="3543200" cy="440340"/>
+          </a:xfrm>
+          <a:prstGeom prst="curvedConnector3">
+            <a:avLst/>
+          </a:prstGeom>
+        </p:spPr>
+        <p:style>
+          <a:lnRef idx="2">
+            <a:schemeClr val="accent1"/>
+          </a:lnRef>
+          <a:fillRef idx="0">
+            <a:schemeClr val="accent1"/>
+          </a:fillRef>
+          <a:effectRef idx="1">
+            <a:schemeClr val="accent1"/>
+          </a:effectRef>
+          <a:fontRef idx="minor">
+            <a:schemeClr val="tx1"/>
+          </a:fontRef>
+        </p:style>
+      </p:cxnSp>
+      <p:cxnSp>
+        <p:nvCxnSpPr>
+          <p:cNvPr id="24" name="Connector 23"/>
+          <p:cNvCxnSpPr>
+            <a:stCxn id="10" idx="1"/>
+            <a:endCxn id="11" idx="3"/>
+          </p:cNvCxnSpPr>
+          <p:nvPr/>
+        </p:nvCxnSpPr>
+        <p:spPr>
+          <a:xfrm flipV="1">
+            <a:off x="5143600" y="3359936"/>
+            <a:ext cx="3543200" cy="754868"/>
+          </a:xfrm>
+          <a:prstGeom prst="curvedConnector3">
+            <a:avLst/>
+          </a:prstGeom>
+        </p:spPr>
+        <p:style>
+          <a:lnRef idx="2">
+            <a:schemeClr val="accent1"/>
+          </a:lnRef>
+          <a:fillRef idx="0">
+            <a:schemeClr val="accent1"/>
+          </a:fillRef>
+          <a:effectRef idx="1">
+            <a:schemeClr val="accent1"/>
+          </a:effectRef>
+          <a:fontRef idx="minor">
+            <a:schemeClr val="tx1"/>
+          </a:fontRef>
+        </p:style>
+      </p:cxnSp>
+      <p:cxnSp>
+        <p:nvCxnSpPr>
+          <p:cNvPr id="25" name="Connector 24"/>
+          <p:cNvCxnSpPr>
+            <a:stCxn id="10" idx="1"/>
+            <a:endCxn id="12" idx="3"/>
+          </p:cNvCxnSpPr>
+          <p:nvPr/>
+        </p:nvCxnSpPr>
+        <p:spPr>
+          <a:xfrm flipV="1">
+            <a:off x="5143600" y="3863181"/>
+            <a:ext cx="3543200" cy="251623"/>
+          </a:xfrm>
+          <a:prstGeom prst="curvedConnector3">
+            <a:avLst/>
+          </a:prstGeom>
+        </p:spPr>
+        <p:style>
+          <a:lnRef idx="2">
+            <a:schemeClr val="accent1"/>
+          </a:lnRef>
+          <a:fillRef idx="0">
+            <a:schemeClr val="accent1"/>
+          </a:fillRef>
+          <a:effectRef idx="1">
+            <a:schemeClr val="accent1"/>
+          </a:effectRef>
+          <a:fontRef idx="minor">
+            <a:schemeClr val="tx1"/>
+          </a:fontRef>
+        </p:style>
+      </p:cxnSp>
+      <p:cxnSp>
+        <p:nvCxnSpPr>
+          <p:cNvPr id="26" name="Connector 25"/>
+          <p:cNvCxnSpPr>
+            <a:stCxn id="10" idx="1"/>
+            <a:endCxn id="13" idx="3"/>
+          </p:cNvCxnSpPr>
+          <p:nvPr/>
+        </p:nvCxnSpPr>
+        <p:spPr>
+          <a:xfrm>
+            <a:off x="5143600" y="4114804"/>
+            <a:ext cx="3543200" cy="251622"/>
+          </a:xfrm>
+          <a:prstGeom prst="curvedConnector3">
+            <a:avLst/>
+          </a:prstGeom>
+        </p:spPr>
+        <p:style>
+          <a:lnRef idx="2">
+            <a:schemeClr val="accent1"/>
+          </a:lnRef>
+          <a:fillRef idx="0">
+            <a:schemeClr val="accent1"/>
+          </a:fillRef>
+          <a:effectRef idx="1">
+            <a:schemeClr val="accent1"/>
+          </a:effectRef>
+          <a:fontRef idx="minor">
+            <a:schemeClr val="tx1"/>
+          </a:fontRef>
+        </p:style>
+      </p:cxnSp>
+      <p:cxnSp>
+        <p:nvCxnSpPr>
+          <p:cNvPr id="27" name="Connector 26"/>
+          <p:cNvCxnSpPr>
+            <a:stCxn id="10" idx="1"/>
+            <a:endCxn id="14" idx="3"/>
+          </p:cNvCxnSpPr>
+          <p:nvPr/>
+        </p:nvCxnSpPr>
+        <p:spPr>
+          <a:xfrm>
+            <a:off x="5143600" y="4114804"/>
+            <a:ext cx="3543200" cy="754868"/>
+          </a:xfrm>
+          <a:prstGeom prst="curvedConnector3">
+            <a:avLst/>
+          </a:prstGeom>
+        </p:spPr>
+        <p:style>
+          <a:lnRef idx="2">
+            <a:schemeClr val="accent1"/>
+          </a:lnRef>
+          <a:fillRef idx="0">
+            <a:schemeClr val="accent1"/>
+          </a:fillRef>
+          <a:effectRef idx="1">
+            <a:schemeClr val="accent1"/>
+          </a:effectRef>
+          <a:fontRef idx="minor">
+            <a:schemeClr val="tx1"/>
+          </a:fontRef>
+        </p:style>
+      </p:cxnSp>
+      <p:cxnSp>
+        <p:nvCxnSpPr>
+          <p:cNvPr id="28" name="Connector 27"/>
+          <p:cNvCxnSpPr>
+            <a:stCxn id="4" idx="2"/>
+            <a:endCxn id="15" idx="0"/>
+          </p:cNvCxnSpPr>
+          <p:nvPr/>
+        </p:nvCxnSpPr>
+        <p:spPr>
+          <a:xfrm>
+            <a:off x="3400400" y="3924464"/>
+            <a:ext cx="2343200" cy="1450076"/>
+          </a:xfrm>
+          <a:prstGeom prst="curvedConnector3">
+            <a:avLst/>
+          </a:prstGeom>
+        </p:spPr>
+        <p:style>
+          <a:lnRef idx="2">
+            <a:schemeClr val="accent1"/>
+          </a:lnRef>
+          <a:fillRef idx="0">
+            <a:schemeClr val="accent1"/>
+          </a:fillRef>
+          <a:effectRef idx="1">
+            <a:schemeClr val="accent1"/>
+          </a:effectRef>
+          <a:fontRef idx="minor">
+            <a:schemeClr val="tx1"/>
+          </a:fontRef>
+        </p:style>
+      </p:cxnSp>
+      <p:cxnSp>
+        <p:nvCxnSpPr>
+          <p:cNvPr id="29" name="Connector 28"/>
+          <p:cNvCxnSpPr>
+            <a:stCxn id="15" idx="1"/>
+            <a:endCxn id="16" idx="3"/>
+          </p:cNvCxnSpPr>
+          <p:nvPr/>
+        </p:nvCxnSpPr>
+        <p:spPr>
+          <a:xfrm flipV="1">
+            <a:off x="5143600" y="5372917"/>
+            <a:ext cx="3543200" cy="251623"/>
+          </a:xfrm>
+          <a:prstGeom prst="curvedConnector3">
+            <a:avLst/>
+          </a:prstGeom>
+        </p:spPr>
+        <p:style>
+          <a:lnRef idx="2">
+            <a:schemeClr val="accent1"/>
+          </a:lnRef>
+          <a:fillRef idx="0">
+            <a:schemeClr val="accent1"/>
+          </a:fillRef>
+          <a:effectRef idx="1">
+            <a:schemeClr val="accent1"/>
+          </a:effectRef>
+          <a:fontRef idx="minor">
+            <a:schemeClr val="tx1"/>
+          </a:fontRef>
+        </p:style>
+      </p:cxnSp>
+      <p:cxnSp>
+        <p:nvCxnSpPr>
+          <p:cNvPr id="30" name="Connector 29"/>
+          <p:cNvCxnSpPr>
+            <a:stCxn id="15" idx="1"/>
+            <a:endCxn id="17" idx="3"/>
+          </p:cNvCxnSpPr>
+          <p:nvPr/>
+        </p:nvCxnSpPr>
+        <p:spPr>
+          <a:xfrm>
+            <a:off x="5143600" y="5624540"/>
+            <a:ext cx="3543200" cy="251623"/>
+          </a:xfrm>
+          <a:prstGeom prst="curvedConnector3">
+            <a:avLst/>
+          </a:prstGeom>
+        </p:spPr>
+        <p:style>
+          <a:lnRef idx="2">
+            <a:schemeClr val="accent1"/>
+          </a:lnRef>
+          <a:fillRef idx="0">
+            <a:schemeClr val="accent1"/>
+          </a:fillRef>
+          <a:effectRef idx="1">
+            <a:schemeClr val="accent1"/>
+          </a:effectRef>
+          <a:fontRef idx="minor">
+            <a:schemeClr val="tx1"/>
+          </a:fontRef>
+        </p:style>
+      </p:cxnSp>
     </p:spTree>
   </p:cSld>
   <p:clrMapOvr>
@@ -15336,7 +17453,7 @@
           <a:lstStyle/>
           <a:p>
             <a:r>
-              <a:t>15. サンキー図（Sankey Diagram）</a:t>
+              <a:t>13. タイムライン（Timeline）</a:t>
             </a:r>
           </a:p>
         </p:txBody>
@@ -15384,13 +17501,19 @@
               <a:rPr sz="1000">
                 <a:latin typeface="Courier New"/>
               </a:rPr>
-              <a:t>sankey-beta
-    エネルギー源,電力,60
-    エネルギー源,熱,40
-    電力,家庭用,25
-    電力,産業用,35
-    熱,暖房,30
-    熱,給湯,10</a:t>
+              <a:t>timeline
+    title ソフトウェア開発史
+    1960 : アセンブリ言語
+    1970 : C言語
+         : Unix
+    1980 : C++
+         : Macintosh
+    1990 : Java
+         : World Wide Web
+    2000 : Python普及
+         : Agile開発
+    2010 : クラウドコンピューティング
+    2020 : AI・機械学習</a:t>
             </a:r>
           </a:p>
         </p:txBody>
@@ -15429,7 +17552,7 @@
           <a:lstStyle/>
           <a:p>
             <a:r>
-              <a:t>16. XYチャート（XY Chart）</a:t>
+              <a:t>14. ZenUML</a:t>
             </a:r>
           </a:p>
         </p:txBody>
@@ -15477,12 +17600,14 @@
               <a:rPr sz="1000">
                 <a:latin typeface="Courier New"/>
               </a:rPr>
-              <a:t>xychart-beta
-    title "月別売上推移"
-    x-axis [1月, 2月, 3月, 4月, 5月, 6月]
-    y-axis "売上（万円）" 0 --&gt; 1000
-    bar [400, 500, 650, 720, 850, 900]
-    line [400, 500, 650, 720, 850, 900]</a:t>
+              <a:t>zenuml
+    title 注文処理
+    @Actor Client
+    @Database DB
+    Client -&gt; Server.process(order) {
+        Server -&gt; DB.save(order)
+        return orderId
+    }</a:t>
             </a:r>
           </a:p>
         </p:txBody>
@@ -15521,7 +17646,7 @@
           <a:lstStyle/>
           <a:p>
             <a:r>
-              <a:t>17. ブロック図（Block Diagram）</a:t>
+              <a:t>15. サンキー図（Sankey Diagram）</a:t>
             </a:r>
           </a:p>
         </p:txBody>
@@ -15569,19 +17694,13 @@
               <a:rPr sz="1000">
                 <a:latin typeface="Courier New"/>
               </a:rPr>
-              <a:t>block-beta
-    columns 3
-    A["フロントエンド"]:1
-    B["APIゲートウェイ"]:1
-    C["バックエンド"]:1
-    D["認証サービス"]:1
-    E["データベース"]:1
-    F["キャッシュ"]:1
-    A --&gt; B
-    B --&gt; C
-    B --&gt; D
-    C --&gt; E
-    C --&gt; F</a:t>
+              <a:t>sankey-beta
+    エネルギー源,電力,60
+    エネルギー源,熱,40
+    電力,家庭用,25
+    電力,産業用,35
+    熱,暖房,30
+    熱,給湯,10</a:t>
             </a:r>
           </a:p>
         </p:txBody>
@@ -15620,7 +17739,7 @@
           <a:lstStyle/>
           <a:p>
             <a:r>
-              <a:t>18. パケット図（Packet Diagram）</a:t>
+              <a:t>16. XYチャート（XY Chart）</a:t>
             </a:r>
           </a:p>
         </p:txBody>
@@ -15668,16 +17787,12 @@
               <a:rPr sz="1000">
                 <a:latin typeface="Courier New"/>
               </a:rPr>
-              <a:t>packet-beta
-    title TCP パケット構造
-    0-15: "送信元ポート"
-    16-31: "宛先ポート"
-    32-63: "シーケンス番号"
-    64-95: "確認応答番号"
-    96-99: "データオフセット"
-    100-105: "予約"
-    106-111: "フラグ"
-    112-127: "ウィンドウサイズ"</a:t>
+              <a:t>xychart-beta
+    title "月別売上推移"
+    x-axis [1月, 2月, 3月, 4月, 5月, 6月]
+    y-axis "売上（万円）" 0 --&gt; 1000
+    bar [400, 500, 650, 720, 850, 900]
+    line [400, 500, 650, 720, 850, 900]</a:t>
             </a:r>
           </a:p>
         </p:txBody>
@@ -15716,7 +17831,7 @@
           <a:lstStyle/>
           <a:p>
             <a:r>
-              <a:t>19. カンバン（Kanban）</a:t>
+              <a:t>17. ブロック図（Block Diagram）</a:t>
             </a:r>
           </a:p>
         </p:txBody>
@@ -15764,16 +17879,19 @@
               <a:rPr sz="1000">
                 <a:latin typeface="Courier New"/>
               </a:rPr>
-              <a:t>kanban
-    todo["To Do"]
-        task1["要件定義"]
-        task2["DB設計"]
-    inprogress["In Progress"]
-        task3["API実装"]
-        task4["テスト作成"]
-    done["Done"]
-        task5["環境構築"]
-        task6["仕様策定"]</a:t>
+              <a:t>block-beta
+    columns 3
+    A["フロントエンド"]:1
+    B["APIゲートウェイ"]:1
+    C["バックエンド"]:1
+    D["認証サービス"]:1
+    E["データベース"]:1
+    F["キャッシュ"]:1
+    A --&gt; B
+    B --&gt; C
+    B --&gt; D
+    C --&gt; E
+    C --&gt; F</a:t>
             </a:r>
           </a:p>
         </p:txBody>
@@ -15812,7 +17930,7 @@
           <a:lstStyle/>
           <a:p>
             <a:r>
-              <a:t>20. アーキテクチャ図（Architecture Diagram）</a:t>
+              <a:t>18. パケット図（Packet Diagram）</a:t>
             </a:r>
           </a:p>
         </p:txBody>
@@ -15860,15 +17978,16 @@
               <a:rPr sz="1000">
                 <a:latin typeface="Courier New"/>
               </a:rPr>
-              <a:t>architecture-beta
-    group cloud(cloud)[クラウド]
-    service web(internet)[Webサーバー] in cloud
-    service api(server)[APIサーバー] in cloud
-    service db(database)[データベース] in cloud
-    service cache(disk)[キャッシュ] in cloud
-    web:R --&gt; L:api
-    api:R --&gt; L:db
-    api:B --&gt; T:cache</a:t>
+              <a:t>packet-beta
+    title TCP パケット構造
+    0-15: "送信元ポート"
+    16-31: "宛先ポート"
+    32-63: "シーケンス番号"
+    64-95: "確認応答番号"
+    96-99: "データオフセット"
+    100-105: "予約"
+    106-111: "フラグ"
+    112-127: "ウィンドウサイズ"</a:t>
             </a:r>
           </a:p>
         </p:txBody>
@@ -15907,7 +18026,7 @@
           <a:lstStyle/>
           <a:p>
             <a:r>
-              <a:t>21. C4図（C4 Diagram）</a:t>
+              <a:t>19. カンバン（Kanban）</a:t>
             </a:r>
           </a:p>
         </p:txBody>
@@ -15955,15 +18074,16 @@
               <a:rPr sz="1000">
                 <a:latin typeface="Courier New"/>
               </a:rPr>
-              <a:t>C4Context
-    title システムコンテキスト図
-    Person(user, "ユーザー", "アプリケーションを利用する人")
-    System(app, "Webアプリ", "主要なシステム")
-    System_Ext(email, "メールサービス", "通知送信")
-    System_Ext(payment, "決済サービス", "支払い処理")
-    Rel(user, app, "利用する", "HTTPS")
-    Rel(app, email, "送信する", "SMTP")
-    Rel(app, payment, "呼び出す", "API")</a:t>
+              <a:t>kanban
+    todo["To Do"]
+        task1["要件定義"]
+        task2["DB設計"]
+    inprogress["In Progress"]
+        task3["API実装"]
+        task4["テスト作成"]
+    done["Done"]
+        task5["環境構築"]
+        task6["仕様策定"]</a:t>
             </a:r>
           </a:p>
         </p:txBody>
@@ -16002,7 +18122,7 @@
           <a:lstStyle/>
           <a:p>
             <a:r>
-              <a:t>22. Quartoネイティブ記法</a:t>
+              <a:t>20. アーキテクチャ図（Architecture Diagram）</a:t>
             </a:r>
           </a:p>
         </p:txBody>
@@ -16026,196 +18146,43 @@
       </p:sp>
       <p:sp>
         <p:nvSpPr>
-          <p:cNvPr id="4" name="Rectangle 3"/>
-          <p:cNvSpPr/>
-          <p:nvPr/>
-        </p:nvSpPr>
-        <p:spPr>
-          <a:xfrm>
-            <a:off x="457200" y="3613181"/>
-            <a:ext cx="1200000" cy="500000"/>
+          <p:cNvPr id="4" name="TextBox 3"/>
+          <p:cNvSpPr txBox="1"/>
+          <p:nvPr/>
+        </p:nvSpPr>
+        <p:spPr>
+          <a:xfrm>
+            <a:off x="457200" y="1600200"/>
+            <a:ext cx="8229600" cy="4525963"/>
           </a:xfrm>
           <a:prstGeom prst="rect">
             <a:avLst/>
           </a:prstGeom>
-        </p:spPr>
-        <p:style>
-          <a:lnRef idx="1">
-            <a:schemeClr val="accent1"/>
-          </a:lnRef>
-          <a:fillRef idx="3">
-            <a:schemeClr val="accent1"/>
-          </a:fillRef>
-          <a:effectRef idx="2">
-            <a:schemeClr val="accent1"/>
-          </a:effectRef>
-          <a:fontRef idx="minor">
-            <a:schemeClr val="lt1"/>
-          </a:fontRef>
-        </p:style>
-        <p:txBody>
-          <a:bodyPr rtlCol="0" anchor="ctr"/>
-          <a:lstStyle/>
-          <a:p>
-            <a:r>
-              <a:rPr sz="1200"/>
-              <a:t>スタート</a:t>
-            </a:r>
-          </a:p>
-        </p:txBody>
-      </p:sp>
-      <p:sp>
-        <p:nvSpPr>
-          <p:cNvPr id="5" name="Rectangle 4"/>
-          <p:cNvSpPr/>
-          <p:nvPr/>
-        </p:nvSpPr>
-        <p:spPr>
-          <a:xfrm>
-            <a:off x="3972000" y="3613181"/>
-            <a:ext cx="1200000" cy="500000"/>
-          </a:xfrm>
-          <a:prstGeom prst="rect">
-            <a:avLst/>
-          </a:prstGeom>
-        </p:spPr>
-        <p:style>
-          <a:lnRef idx="1">
-            <a:schemeClr val="accent1"/>
-          </a:lnRef>
-          <a:fillRef idx="3">
-            <a:schemeClr val="accent1"/>
-          </a:fillRef>
-          <a:effectRef idx="2">
-            <a:schemeClr val="accent1"/>
-          </a:effectRef>
-          <a:fontRef idx="minor">
-            <a:schemeClr val="lt1"/>
-          </a:fontRef>
-        </p:style>
-        <p:txBody>
-          <a:bodyPr rtlCol="0" anchor="ctr"/>
-          <a:lstStyle/>
-          <a:p>
-            <a:r>
-              <a:rPr sz="1200"/>
-              <a:t>処理</a:t>
-            </a:r>
-          </a:p>
-        </p:txBody>
-      </p:sp>
-      <p:sp>
-        <p:nvSpPr>
-          <p:cNvPr id="6" name="Rectangle 5"/>
-          <p:cNvSpPr/>
-          <p:nvPr/>
-        </p:nvSpPr>
-        <p:spPr>
-          <a:xfrm>
-            <a:off x="7486800" y="3613181"/>
-            <a:ext cx="1200000" cy="500000"/>
-          </a:xfrm>
-          <a:prstGeom prst="rect">
-            <a:avLst/>
-          </a:prstGeom>
-        </p:spPr>
-        <p:style>
-          <a:lnRef idx="1">
-            <a:schemeClr val="accent1"/>
-          </a:lnRef>
-          <a:fillRef idx="3">
-            <a:schemeClr val="accent1"/>
-          </a:fillRef>
-          <a:effectRef idx="2">
-            <a:schemeClr val="accent1"/>
-          </a:effectRef>
-          <a:fontRef idx="minor">
-            <a:schemeClr val="lt1"/>
-          </a:fontRef>
-        </p:style>
-        <p:txBody>
-          <a:bodyPr rtlCol="0" anchor="ctr"/>
-          <a:lstStyle/>
-          <a:p>
-            <a:r>
-              <a:rPr sz="1200"/>
-              <a:t>エンド</a:t>
-            </a:r>
-          </a:p>
-        </p:txBody>
-      </p:sp>
-      <p:cxnSp>
-        <p:nvCxnSpPr>
-          <p:cNvPr id="7" name="Connector 6"/>
-          <p:cNvCxnSpPr>
-            <a:stCxn id="4" idx="1"/>
-            <a:endCxn id="5" idx="3"/>
-          </p:cNvCxnSpPr>
-          <p:nvPr/>
-        </p:nvCxnSpPr>
-        <p:spPr>
-          <a:xfrm>
-            <a:off x="457200" y="3863181"/>
-            <a:ext cx="4714800" cy="0"/>
-          </a:xfrm>
-          <a:prstGeom prst="curvedConnector3">
-            <a:avLst/>
-          </a:prstGeom>
-          <a:ln>
-            <a:headEnd type="arrow" w="med" len="med"/>
-          </a:ln>
-        </p:spPr>
-        <p:style>
-          <a:lnRef idx="2">
-            <a:schemeClr val="accent1"/>
-          </a:lnRef>
-          <a:fillRef idx="0">
-            <a:schemeClr val="accent1"/>
-          </a:fillRef>
-          <a:effectRef idx="1">
-            <a:schemeClr val="accent1"/>
-          </a:effectRef>
-          <a:fontRef idx="minor">
-            <a:schemeClr val="tx1"/>
-          </a:fontRef>
-        </p:style>
-      </p:cxnSp>
-      <p:cxnSp>
-        <p:nvCxnSpPr>
-          <p:cNvPr id="8" name="Connector 7"/>
-          <p:cNvCxnSpPr>
-            <a:stCxn id="5" idx="1"/>
-            <a:endCxn id="6" idx="3"/>
-          </p:cNvCxnSpPr>
-          <p:nvPr/>
-        </p:nvCxnSpPr>
-        <p:spPr>
-          <a:xfrm>
-            <a:off x="3972000" y="3863181"/>
-            <a:ext cx="4714800" cy="0"/>
-          </a:xfrm>
-          <a:prstGeom prst="curvedConnector3">
-            <a:avLst/>
-          </a:prstGeom>
-          <a:ln>
-            <a:headEnd type="arrow" w="med" len="med"/>
-          </a:ln>
-        </p:spPr>
-        <p:style>
-          <a:lnRef idx="2">
-            <a:schemeClr val="accent1"/>
-          </a:lnRef>
-          <a:fillRef idx="0">
-            <a:schemeClr val="accent1"/>
-          </a:fillRef>
-          <a:effectRef idx="1">
-            <a:schemeClr val="accent1"/>
-          </a:effectRef>
-          <a:fontRef idx="minor">
-            <a:schemeClr val="tx1"/>
-          </a:fontRef>
-        </p:style>
-      </p:cxnSp>
+          <a:noFill/>
+        </p:spPr>
+        <p:txBody>
+          <a:bodyPr wrap="square">
+            <a:spAutoFit/>
+          </a:bodyPr>
+          <a:lstStyle/>
+          <a:p>
+            <a:r>
+              <a:rPr sz="1000">
+                <a:latin typeface="Courier New"/>
+              </a:rPr>
+              <a:t>architecture-beta
+    group cloud(cloud)[クラウド]
+    service web(internet)[Webサーバー] in cloud
+    service api(server)[APIサーバー] in cloud
+    service db(database)[データベース] in cloud
+    service cache(disk)[キャッシュ] in cloud
+    web:R --&gt; L:api
+    api:R --&gt; L:db
+    api:B --&gt; T:cache</a:t>
+            </a:r>
+          </a:p>
+        </p:txBody>
+      </p:sp>
     </p:spTree>
   </p:cSld>
   <p:clrMapOvr>
@@ -16250,7 +18217,7 @@
           <a:lstStyle/>
           <a:p>
             <a:r>
-              <a:t>Quartoコードブロック記法</a:t>
+              <a:t>21. C4図（C4 Diagram）</a:t>
             </a:r>
           </a:p>
         </p:txBody>
@@ -16267,39 +18234,46 @@
         </p:nvSpPr>
         <p:spPr/>
         <p:txBody>
-          <a:bodyPr wrap="none"/>
-          <a:lstStyle/>
-          <a:p>
-            <a:pPr>
-              <a:buNone/>
-            </a:pPr>
-            <a:r>
-              <a:rPr lang="" dirty="0" sz="1400">
+          <a:bodyPr/>
+          <a:lstStyle/>
+          <a:p/>
+        </p:txBody>
+      </p:sp>
+      <p:sp>
+        <p:nvSpPr>
+          <p:cNvPr id="4" name="TextBox 3"/>
+          <p:cNvSpPr txBox="1"/>
+          <p:nvPr/>
+        </p:nvSpPr>
+        <p:spPr>
+          <a:xfrm>
+            <a:off x="457200" y="1600200"/>
+            <a:ext cx="8229600" cy="4525963"/>
+          </a:xfrm>
+          <a:prstGeom prst="rect">
+            <a:avLst/>
+          </a:prstGeom>
+          <a:noFill/>
+        </p:spPr>
+        <p:txBody>
+          <a:bodyPr wrap="square">
+            <a:spAutoFit/>
+          </a:bodyPr>
+          <a:lstStyle/>
+          <a:p>
+            <a:r>
+              <a:rPr sz="1000">
                 <a:latin typeface="Courier New"/>
               </a:rPr>
-              <a:t>import math</a:t>
-            </a:r>
-            <a:br>
-              <a:rPr lang="" dirty="0">
-                <a:latin typeface="Courier New"/>
-              </a:rPr>
-            </a:br>
-            <a:r>
-              <a:rPr lang="" dirty="0" sz="1400">
-                <a:latin typeface="Courier New"/>
-              </a:rPr>
-              <a:t>print(math.pi)</a:t>
-            </a:r>
-            <a:br>
-              <a:rPr lang="" dirty="0">
-                <a:latin typeface="Courier New"/>
-              </a:rPr>
-            </a:br>
-            <a:r>
-              <a:rPr lang="" dirty="0" sz="1400">
-                <a:latin typeface="Courier New"/>
-              </a:rPr>
-              <a:t/>
+              <a:t>C4Context
+    title システムコンテキスト図
+    Person(user, "ユーザー", "アプリケーションを利用する人")
+    System(app, "Webアプリ", "主要なシステム")
+    System_Ext(email, "メールサービス", "通知送信")
+    System_Ext(payment, "決済サービス", "支払い処理")
+    Rel(user, app, "利用する", "HTTPS")
+    Rel(app, email, "送信する", "SMTP")
+    Rel(app, payment, "呼び出す", "API")</a:t>
             </a:r>
           </a:p>
         </p:txBody>
@@ -16338,19 +18312,19 @@
           <a:lstStyle/>
           <a:p>
             <a:r>
-              <a:t>アニメーション・レイアウト</a:t>
-            </a:r>
-          </a:p>
-        </p:txBody>
-      </p:sp>
-      <p:sp>
-        <p:nvSpPr>
-          <p:cNvPr id="3" name="Text Placeholder 2"/>
+              <a:t>22. Quartoネイティブ記法</a:t>
+            </a:r>
+          </a:p>
+        </p:txBody>
+      </p:sp>
+      <p:sp>
+        <p:nvSpPr>
+          <p:cNvPr id="3" name="Content Placeholder 2"/>
           <p:cNvSpPr>
             <a:spLocks noGrp="1"/>
           </p:cNvSpPr>
           <p:nvPr>
-            <p:ph type="body" idx="1"/>
+            <p:ph idx="1"/>
           </p:nvPr>
         </p:nvSpPr>
         <p:spPr/>
@@ -16360,6 +18334,198 @@
           <a:p/>
         </p:txBody>
       </p:sp>
+      <p:sp>
+        <p:nvSpPr>
+          <p:cNvPr id="4" name="Rectangle 3"/>
+          <p:cNvSpPr/>
+          <p:nvPr/>
+        </p:nvSpPr>
+        <p:spPr>
+          <a:xfrm>
+            <a:off x="457200" y="3613181"/>
+            <a:ext cx="1200000" cy="500000"/>
+          </a:xfrm>
+          <a:prstGeom prst="rect">
+            <a:avLst/>
+          </a:prstGeom>
+        </p:spPr>
+        <p:style>
+          <a:lnRef idx="1">
+            <a:schemeClr val="accent1"/>
+          </a:lnRef>
+          <a:fillRef idx="3">
+            <a:schemeClr val="accent1"/>
+          </a:fillRef>
+          <a:effectRef idx="2">
+            <a:schemeClr val="accent1"/>
+          </a:effectRef>
+          <a:fontRef idx="minor">
+            <a:schemeClr val="lt1"/>
+          </a:fontRef>
+        </p:style>
+        <p:txBody>
+          <a:bodyPr rtlCol="0" anchor="ctr"/>
+          <a:lstStyle/>
+          <a:p>
+            <a:r>
+              <a:rPr sz="1200"/>
+              <a:t>スタート</a:t>
+            </a:r>
+          </a:p>
+        </p:txBody>
+      </p:sp>
+      <p:sp>
+        <p:nvSpPr>
+          <p:cNvPr id="5" name="Rectangle 4"/>
+          <p:cNvSpPr/>
+          <p:nvPr/>
+        </p:nvSpPr>
+        <p:spPr>
+          <a:xfrm>
+            <a:off x="3972000" y="3613181"/>
+            <a:ext cx="1200000" cy="500000"/>
+          </a:xfrm>
+          <a:prstGeom prst="rect">
+            <a:avLst/>
+          </a:prstGeom>
+        </p:spPr>
+        <p:style>
+          <a:lnRef idx="1">
+            <a:schemeClr val="accent1"/>
+          </a:lnRef>
+          <a:fillRef idx="3">
+            <a:schemeClr val="accent1"/>
+          </a:fillRef>
+          <a:effectRef idx="2">
+            <a:schemeClr val="accent1"/>
+          </a:effectRef>
+          <a:fontRef idx="minor">
+            <a:schemeClr val="lt1"/>
+          </a:fontRef>
+        </p:style>
+        <p:txBody>
+          <a:bodyPr rtlCol="0" anchor="ctr"/>
+          <a:lstStyle/>
+          <a:p>
+            <a:r>
+              <a:rPr sz="1200"/>
+              <a:t>処理</a:t>
+            </a:r>
+          </a:p>
+        </p:txBody>
+      </p:sp>
+      <p:sp>
+        <p:nvSpPr>
+          <p:cNvPr id="6" name="Rectangle 5"/>
+          <p:cNvSpPr/>
+          <p:nvPr/>
+        </p:nvSpPr>
+        <p:spPr>
+          <a:xfrm>
+            <a:off x="7486800" y="3613181"/>
+            <a:ext cx="1200000" cy="500000"/>
+          </a:xfrm>
+          <a:prstGeom prst="rect">
+            <a:avLst/>
+          </a:prstGeom>
+        </p:spPr>
+        <p:style>
+          <a:lnRef idx="1">
+            <a:schemeClr val="accent1"/>
+          </a:lnRef>
+          <a:fillRef idx="3">
+            <a:schemeClr val="accent1"/>
+          </a:fillRef>
+          <a:effectRef idx="2">
+            <a:schemeClr val="accent1"/>
+          </a:effectRef>
+          <a:fontRef idx="minor">
+            <a:schemeClr val="lt1"/>
+          </a:fontRef>
+        </p:style>
+        <p:txBody>
+          <a:bodyPr rtlCol="0" anchor="ctr"/>
+          <a:lstStyle/>
+          <a:p>
+            <a:r>
+              <a:rPr sz="1200"/>
+              <a:t>エンド</a:t>
+            </a:r>
+          </a:p>
+        </p:txBody>
+      </p:sp>
+      <p:cxnSp>
+        <p:nvCxnSpPr>
+          <p:cNvPr id="7" name="Connector 6"/>
+          <p:cNvCxnSpPr>
+            <a:stCxn id="4" idx="1"/>
+            <a:endCxn id="5" idx="3"/>
+          </p:cNvCxnSpPr>
+          <p:nvPr/>
+        </p:nvCxnSpPr>
+        <p:spPr>
+          <a:xfrm>
+            <a:off x="457200" y="3863181"/>
+            <a:ext cx="4714800" cy="0"/>
+          </a:xfrm>
+          <a:prstGeom prst="curvedConnector3">
+            <a:avLst/>
+          </a:prstGeom>
+          <a:ln>
+            <a:headEnd type="arrow" w="med" len="med"/>
+          </a:ln>
+        </p:spPr>
+        <p:style>
+          <a:lnRef idx="2">
+            <a:schemeClr val="accent1"/>
+          </a:lnRef>
+          <a:fillRef idx="0">
+            <a:schemeClr val="accent1"/>
+          </a:fillRef>
+          <a:effectRef idx="1">
+            <a:schemeClr val="accent1"/>
+          </a:effectRef>
+          <a:fontRef idx="minor">
+            <a:schemeClr val="tx1"/>
+          </a:fontRef>
+        </p:style>
+      </p:cxnSp>
+      <p:cxnSp>
+        <p:nvCxnSpPr>
+          <p:cNvPr id="8" name="Connector 7"/>
+          <p:cNvCxnSpPr>
+            <a:stCxn id="5" idx="1"/>
+            <a:endCxn id="6" idx="3"/>
+          </p:cNvCxnSpPr>
+          <p:nvPr/>
+        </p:nvCxnSpPr>
+        <p:spPr>
+          <a:xfrm>
+            <a:off x="3972000" y="3863181"/>
+            <a:ext cx="4714800" cy="0"/>
+          </a:xfrm>
+          <a:prstGeom prst="curvedConnector3">
+            <a:avLst/>
+          </a:prstGeom>
+          <a:ln>
+            <a:headEnd type="arrow" w="med" len="med"/>
+          </a:ln>
+        </p:spPr>
+        <p:style>
+          <a:lnRef idx="2">
+            <a:schemeClr val="accent1"/>
+          </a:lnRef>
+          <a:fillRef idx="0">
+            <a:schemeClr val="accent1"/>
+          </a:fillRef>
+          <a:effectRef idx="1">
+            <a:schemeClr val="accent1"/>
+          </a:effectRef>
+          <a:fontRef idx="minor">
+            <a:schemeClr val="tx1"/>
+          </a:fontRef>
+        </p:style>
+      </p:cxnSp>
     </p:spTree>
   </p:cSld>
   <p:clrMapOvr>
@@ -16484,7 +18650,7 @@
           <a:lstStyle/>
           <a:p>
             <a:r>
-              <a:t>インクリメンタルリスト</a:t>
+              <a:t>Quartoコードブロック記法</a:t>
             </a:r>
           </a:p>
         </p:txBody>
@@ -16501,27 +18667,39 @@
         </p:nvSpPr>
         <p:spPr/>
         <p:txBody>
-          <a:bodyPr wrap="square"/>
-          <a:lstStyle/>
-          <a:p>
-            <a:pPr/>
-            <a:r>
-              <a:rPr sz="1800"/>
-              <a:t>まず最初に表示</a:t>
-            </a:r>
-          </a:p>
-          <a:p>
-            <a:pPr/>
-            <a:r>
-              <a:rPr sz="1800"/>
-              <a:t>次にこれが表示</a:t>
-            </a:r>
-          </a:p>
-          <a:p>
-            <a:pPr/>
-            <a:r>
-              <a:rPr sz="1800"/>
-              <a:t>最後にこれが表示</a:t>
+          <a:bodyPr wrap="none"/>
+          <a:lstStyle/>
+          <a:p>
+            <a:pPr>
+              <a:buNone/>
+            </a:pPr>
+            <a:r>
+              <a:rPr lang="" dirty="0" sz="1400">
+                <a:latin typeface="Courier New"/>
+              </a:rPr>
+              <a:t>import math</a:t>
+            </a:r>
+            <a:br>
+              <a:rPr lang="" dirty="0">
+                <a:latin typeface="Courier New"/>
+              </a:rPr>
+            </a:br>
+            <a:r>
+              <a:rPr lang="" dirty="0" sz="1400">
+                <a:latin typeface="Courier New"/>
+              </a:rPr>
+              <a:t>print(math.pi)</a:t>
+            </a:r>
+            <a:br>
+              <a:rPr lang="" dirty="0">
+                <a:latin typeface="Courier New"/>
+              </a:rPr>
+            </a:br>
+            <a:r>
+              <a:rPr lang="" dirty="0" sz="1400">
+                <a:latin typeface="Courier New"/>
+              </a:rPr>
+              <a:t/>
             </a:r>
           </a:p>
         </p:txBody>
@@ -16560,46 +18738,26 @@
           <a:lstStyle/>
           <a:p>
             <a:r>
-              <a:t>非インクリメンタルリスト</a:t>
-            </a:r>
-          </a:p>
-        </p:txBody>
-      </p:sp>
-      <p:sp>
-        <p:nvSpPr>
-          <p:cNvPr id="3" name="Content Placeholder 2"/>
+              <a:t>アニメーション・レイアウト</a:t>
+            </a:r>
+          </a:p>
+        </p:txBody>
+      </p:sp>
+      <p:sp>
+        <p:nvSpPr>
+          <p:cNvPr id="3" name="Text Placeholder 2"/>
           <p:cNvSpPr>
             <a:spLocks noGrp="1"/>
           </p:cNvSpPr>
           <p:nvPr>
-            <p:ph idx="1"/>
+            <p:ph type="body" idx="1"/>
           </p:nvPr>
         </p:nvSpPr>
         <p:spPr/>
         <p:txBody>
-          <a:bodyPr wrap="square"/>
-          <a:lstStyle/>
-          <a:p>
-            <a:pPr/>
-            <a:r>
-              <a:rPr sz="1800"/>
-              <a:t>一括表示アイテム1</a:t>
-            </a:r>
-          </a:p>
-          <a:p>
-            <a:pPr/>
-            <a:r>
-              <a:rPr sz="1800"/>
-              <a:t>一括表示アイテム2</a:t>
-            </a:r>
-          </a:p>
-          <a:p>
-            <a:pPr/>
-            <a:r>
-              <a:rPr sz="1800"/>
-              <a:t>一括表示アイテム3</a:t>
-            </a:r>
-          </a:p>
+          <a:bodyPr/>
+          <a:lstStyle/>
+          <a:p/>
         </p:txBody>
       </p:sp>
     </p:spTree>
@@ -16636,7 +18794,7 @@
           <a:lstStyle/>
           <a:p>
             <a:r>
-              <a:t>2カラムレイアウト</a:t>
+              <a:t>インクリメンタルリスト</a:t>
             </a:r>
           </a:p>
         </p:txBody>
@@ -16648,7 +18806,7 @@
             <a:spLocks noGrp="1"/>
           </p:cNvSpPr>
           <p:nvPr>
-            <p:ph idx="1" sz="half"/>
+            <p:ph idx="1"/>
           </p:nvPr>
         </p:nvSpPr>
         <p:spPr/>
@@ -16659,58 +18817,21 @@
             <a:pPr/>
             <a:r>
               <a:rPr sz="1800"/>
-              <a:t>左の項目1</a:t>
+              <a:t>まず最初に表示</a:t>
             </a:r>
           </a:p>
           <a:p>
             <a:pPr/>
             <a:r>
               <a:rPr sz="1800"/>
-              <a:t>左の項目2</a:t>
+              <a:t>次にこれが表示</a:t>
             </a:r>
           </a:p>
           <a:p>
             <a:pPr/>
             <a:r>
               <a:rPr sz="1800"/>
-              <a:t>左の項目3</a:t>
-            </a:r>
-          </a:p>
-        </p:txBody>
-      </p:sp>
-      <p:sp>
-        <p:nvSpPr>
-          <p:cNvPr id="4" name="Content Placeholder 3"/>
-          <p:cNvSpPr>
-            <a:spLocks noGrp="1"/>
-          </p:cNvSpPr>
-          <p:nvPr>
-            <p:ph idx="2" sz="half"/>
-          </p:nvPr>
-        </p:nvSpPr>
-        <p:spPr/>
-        <p:txBody>
-          <a:bodyPr wrap="square"/>
-          <a:lstStyle/>
-          <a:p>
-            <a:pPr/>
-            <a:r>
-              <a:rPr sz="1800"/>
-              <a:t>右の項目1</a:t>
-            </a:r>
-          </a:p>
-          <a:p>
-            <a:pPr/>
-            <a:r>
-              <a:rPr sz="1800"/>
-              <a:t>右の項目2</a:t>
-            </a:r>
-          </a:p>
-          <a:p>
-            <a:pPr/>
-            <a:r>
-              <a:rPr sz="1800"/>
-              <a:t>右の項目3</a:t>
+              <a:t>最後にこれが表示</a:t>
             </a:r>
           </a:p>
         </p:txBody>
@@ -16749,7 +18870,7 @@
           <a:lstStyle/>
           <a:p>
             <a:r>
-              <a:t>スピーカーノート付きスライド</a:t>
+              <a:t>非インクリメンタルリスト</a:t>
             </a:r>
           </a:p>
         </p:txBody>
@@ -16769,9 +18890,24 @@
           <a:bodyPr wrap="square"/>
           <a:lstStyle/>
           <a:p>
+            <a:pPr/>
             <a:r>
               <a:rPr sz="1800"/>
-              <a:t>このスライドには発表者向けのノートが埋め込まれています。</a:t>
+              <a:t>一括表示アイテム1</a:t>
+            </a:r>
+          </a:p>
+          <a:p>
+            <a:pPr/>
+            <a:r>
+              <a:rPr sz="1800"/>
+              <a:t>一括表示アイテム2</a:t>
+            </a:r>
+          </a:p>
+          <a:p>
+            <a:pPr/>
+            <a:r>
+              <a:rPr sz="1800"/>
+              <a:t>一括表示アイテム3</a:t>
             </a:r>
           </a:p>
         </p:txBody>
@@ -16808,7 +18944,11 @@
         <p:txBody>
           <a:bodyPr/>
           <a:lstStyle/>
-          <a:p/>
+          <a:p>
+            <a:r>
+              <a:t>2カラムレイアウト</a:t>
+            </a:r>
+          </a:p>
         </p:txBody>
       </p:sp>
       <p:sp>
@@ -16818,7 +18958,7 @@
             <a:spLocks noGrp="1"/>
           </p:cNvSpPr>
           <p:nvPr>
-            <p:ph idx="1"/>
+            <p:ph idx="1" sz="half"/>
           </p:nvPr>
         </p:nvSpPr>
         <p:spPr/>
@@ -16826,9 +18966,61 @@
           <a:bodyPr wrap="square"/>
           <a:lstStyle/>
           <a:p>
+            <a:pPr/>
             <a:r>
               <a:rPr sz="1800"/>
-              <a:t>水平区切り線（---）によって生成されたタイトルなしスライドです。</a:t>
+              <a:t>左の項目1</a:t>
+            </a:r>
+          </a:p>
+          <a:p>
+            <a:pPr/>
+            <a:r>
+              <a:rPr sz="1800"/>
+              <a:t>左の項目2</a:t>
+            </a:r>
+          </a:p>
+          <a:p>
+            <a:pPr/>
+            <a:r>
+              <a:rPr sz="1800"/>
+              <a:t>左の項目3</a:t>
+            </a:r>
+          </a:p>
+        </p:txBody>
+      </p:sp>
+      <p:sp>
+        <p:nvSpPr>
+          <p:cNvPr id="4" name="Content Placeholder 3"/>
+          <p:cNvSpPr>
+            <a:spLocks noGrp="1"/>
+          </p:cNvSpPr>
+          <p:nvPr>
+            <p:ph idx="2" sz="half"/>
+          </p:nvPr>
+        </p:nvSpPr>
+        <p:spPr/>
+        <p:txBody>
+          <a:bodyPr wrap="square"/>
+          <a:lstStyle/>
+          <a:p>
+            <a:pPr/>
+            <a:r>
+              <a:rPr sz="1800"/>
+              <a:t>右の項目1</a:t>
+            </a:r>
+          </a:p>
+          <a:p>
+            <a:pPr/>
+            <a:r>
+              <a:rPr sz="1800"/>
+              <a:t>右の項目2</a:t>
+            </a:r>
+          </a:p>
+          <a:p>
+            <a:pPr/>
+            <a:r>
+              <a:rPr sz="1800"/>
+              <a:t>右の項目3</a:t>
             </a:r>
           </a:p>
         </p:txBody>
@@ -16867,26 +19059,31 @@
           <a:lstStyle/>
           <a:p>
             <a:r>
-              <a:t>まとめ</a:t>
-            </a:r>
-          </a:p>
-        </p:txBody>
-      </p:sp>
-      <p:sp>
-        <p:nvSpPr>
-          <p:cNvPr id="3" name="Text Placeholder 2"/>
+              <a:t>スピーカーノート付きスライド</a:t>
+            </a:r>
+          </a:p>
+        </p:txBody>
+      </p:sp>
+      <p:sp>
+        <p:nvSpPr>
+          <p:cNvPr id="3" name="Content Placeholder 2"/>
           <p:cNvSpPr>
             <a:spLocks noGrp="1"/>
           </p:cNvSpPr>
           <p:nvPr>
-            <p:ph type="body" idx="1"/>
+            <p:ph idx="1"/>
           </p:nvPr>
         </p:nvSpPr>
         <p:spPr/>
         <p:txBody>
-          <a:bodyPr/>
-          <a:lstStyle/>
-          <a:p/>
+          <a:bodyPr wrap="square"/>
+          <a:lstStyle/>
+          <a:p>
+            <a:r>
+              <a:rPr sz="1800"/>
+              <a:t>このスライドには発表者向けのノートが埋め込まれています。</a:t>
+            </a:r>
+          </a:p>
         </p:txBody>
       </p:sp>
     </p:spTree>
@@ -16898,6 +19095,119 @@
 </file>
 
 <file path=ppt/slides/slide46.xml><?xml version="1.0" encoding="utf-8"?>
+<p:sld xmlns:a="http://schemas.openxmlformats.org/drawingml/2006/main" xmlns:p="http://schemas.openxmlformats.org/presentationml/2006/main" xmlns:r="http://schemas.openxmlformats.org/officeDocument/2006/relationships">
+  <p:cSld>
+    <p:spTree>
+      <p:nvGrpSpPr>
+        <p:cNvPr id="1" name=""/>
+        <p:cNvGrpSpPr/>
+        <p:nvPr/>
+      </p:nvGrpSpPr>
+      <p:grpSpPr/>
+      <p:sp>
+        <p:nvSpPr>
+          <p:cNvPr id="2" name="Title 1"/>
+          <p:cNvSpPr>
+            <a:spLocks noGrp="1"/>
+          </p:cNvSpPr>
+          <p:nvPr>
+            <p:ph type="title"/>
+          </p:nvPr>
+        </p:nvSpPr>
+        <p:spPr/>
+        <p:txBody>
+          <a:bodyPr/>
+          <a:lstStyle/>
+          <a:p/>
+        </p:txBody>
+      </p:sp>
+      <p:sp>
+        <p:nvSpPr>
+          <p:cNvPr id="3" name="Content Placeholder 2"/>
+          <p:cNvSpPr>
+            <a:spLocks noGrp="1"/>
+          </p:cNvSpPr>
+          <p:nvPr>
+            <p:ph idx="1"/>
+          </p:nvPr>
+        </p:nvSpPr>
+        <p:spPr/>
+        <p:txBody>
+          <a:bodyPr wrap="square"/>
+          <a:lstStyle/>
+          <a:p>
+            <a:r>
+              <a:rPr sz="1800"/>
+              <a:t>水平区切り線（---）によって生成されたタイトルなしスライドです。</a:t>
+            </a:r>
+          </a:p>
+        </p:txBody>
+      </p:sp>
+    </p:spTree>
+  </p:cSld>
+  <p:clrMapOvr>
+    <a:masterClrMapping/>
+  </p:clrMapOvr>
+</p:sld>
+</file>
+
+<file path=ppt/slides/slide47.xml><?xml version="1.0" encoding="utf-8"?>
+<p:sld xmlns:a="http://schemas.openxmlformats.org/drawingml/2006/main" xmlns:p="http://schemas.openxmlformats.org/presentationml/2006/main" xmlns:r="http://schemas.openxmlformats.org/officeDocument/2006/relationships">
+  <p:cSld>
+    <p:spTree>
+      <p:nvGrpSpPr>
+        <p:cNvPr id="1" name=""/>
+        <p:cNvGrpSpPr/>
+        <p:nvPr/>
+      </p:nvGrpSpPr>
+      <p:grpSpPr/>
+      <p:sp>
+        <p:nvSpPr>
+          <p:cNvPr id="2" name="Title 1"/>
+          <p:cNvSpPr>
+            <a:spLocks noGrp="1"/>
+          </p:cNvSpPr>
+          <p:nvPr>
+            <p:ph type="title"/>
+          </p:nvPr>
+        </p:nvSpPr>
+        <p:spPr/>
+        <p:txBody>
+          <a:bodyPr/>
+          <a:lstStyle/>
+          <a:p>
+            <a:r>
+              <a:t>まとめ</a:t>
+            </a:r>
+          </a:p>
+        </p:txBody>
+      </p:sp>
+      <p:sp>
+        <p:nvSpPr>
+          <p:cNvPr id="3" name="Text Placeholder 2"/>
+          <p:cNvSpPr>
+            <a:spLocks noGrp="1"/>
+          </p:cNvSpPr>
+          <p:nvPr>
+            <p:ph type="body" idx="1"/>
+          </p:nvPr>
+        </p:nvSpPr>
+        <p:spPr/>
+        <p:txBody>
+          <a:bodyPr/>
+          <a:lstStyle/>
+          <a:p/>
+        </p:txBody>
+      </p:sp>
+    </p:spTree>
+  </p:cSld>
+  <p:clrMapOvr>
+    <a:masterClrMapping/>
+  </p:clrMapOvr>
+</p:sld>
+</file>
+
+<file path=ppt/slides/slide48.xml><?xml version="1.0" encoding="utf-8"?>
 <p:sld xmlns:a="http://schemas.openxmlformats.org/drawingml/2006/main" xmlns:p="http://schemas.openxmlformats.org/presentationml/2006/main" xmlns:r="http://schemas.openxmlformats.org/officeDocument/2006/relationships">
   <p:cSld>
     <p:spTree>

--- a/demo_full.pptx
+++ b/demo_full.pptx
@@ -12778,7 +12778,7 @@
         </p:nvSpPr>
         <p:spPr>
           <a:xfrm>
-            <a:off x="6162959" y="4270079"/>
+            <a:off x="4382000" y="1861498"/>
             <a:ext cx="380000" cy="380000"/>
           </a:xfrm>
           <a:prstGeom prst="ellipse">
@@ -12819,7 +12819,7 @@
         </p:nvSpPr>
         <p:spPr>
           <a:xfrm>
-            <a:off x="5679518" y="1922085"/>
+            <a:off x="3972000" y="2707339"/>
             <a:ext cx="1200000" cy="500000"/>
           </a:xfrm>
           <a:prstGeom prst="roundRect">
@@ -12872,7 +12872,7 @@
         </p:nvSpPr>
         <p:spPr>
           <a:xfrm>
-            <a:off x="3501144" y="3179892"/>
+            <a:off x="3972000" y="3613181"/>
             <a:ext cx="1200000" cy="500000"/>
           </a:xfrm>
           <a:prstGeom prst="roundRect">
@@ -12925,7 +12925,7 @@
         </p:nvSpPr>
         <p:spPr>
           <a:xfrm>
-            <a:off x="457200" y="3638292"/>
+            <a:off x="7135320" y="4519023"/>
             <a:ext cx="1200000" cy="500000"/>
           </a:xfrm>
           <a:prstGeom prst="roundRect">
@@ -12978,7 +12978,7 @@
         </p:nvSpPr>
         <p:spPr>
           <a:xfrm>
-            <a:off x="7152447" y="3496469"/>
+            <a:off x="808679" y="4519023"/>
             <a:ext cx="1200000" cy="500000"/>
           </a:xfrm>
           <a:prstGeom prst="roundRect">
@@ -13031,7 +13031,7 @@
         </p:nvSpPr>
         <p:spPr>
           <a:xfrm>
-            <a:off x="1663730" y="5257268"/>
+            <a:off x="4347000" y="5449864"/>
             <a:ext cx="450000" cy="450000"/>
           </a:xfrm>
           <a:prstGeom prst="ellipse">
@@ -13072,7 +13072,7 @@
         </p:nvSpPr>
         <p:spPr>
           <a:xfrm>
-            <a:off x="1763730" y="5357268"/>
+            <a:off x="4447000" y="5549864"/>
             <a:ext cx="250000" cy="250000"/>
           </a:xfrm>
           <a:prstGeom prst="ellipse">
@@ -13109,15 +13109,15 @@
         <p:nvCxnSpPr>
           <p:cNvPr id="11" name="Connector 10"/>
           <p:cNvCxnSpPr>
-            <a:stCxn id="4" idx="0"/>
-            <a:endCxn id="5" idx="2"/>
+            <a:stCxn id="4" idx="2"/>
+            <a:endCxn id="5" idx="0"/>
           </p:cNvCxnSpPr>
           <p:nvPr/>
         </p:nvCxnSpPr>
         <p:spPr>
-          <a:xfrm flipH="1" flipV="1">
-            <a:off x="6279518" y="2422085"/>
-            <a:ext cx="73441" cy="1847994"/>
+          <a:xfrm>
+            <a:off x="4572000" y="2241498"/>
+            <a:ext cx="0" cy="465841"/>
           </a:xfrm>
           <a:prstGeom prst="curvedConnector3">
             <a:avLst/>
@@ -13145,15 +13145,15 @@
         <p:nvCxnSpPr>
           <p:cNvPr id="12" name="Connector 11"/>
           <p:cNvCxnSpPr>
-            <a:stCxn id="5" idx="3"/>
-            <a:endCxn id="6" idx="1"/>
+            <a:stCxn id="5" idx="2"/>
+            <a:endCxn id="6" idx="0"/>
           </p:cNvCxnSpPr>
           <p:nvPr/>
         </p:nvCxnSpPr>
         <p:spPr>
-          <a:xfrm flipH="1">
-            <a:off x="3501144" y="2172085"/>
-            <a:ext cx="3378374" cy="1257807"/>
+          <a:xfrm>
+            <a:off x="4572000" y="3207339"/>
+            <a:ext cx="0" cy="405842"/>
           </a:xfrm>
           <a:prstGeom prst="curvedConnector3">
             <a:avLst/>
@@ -13185,7 +13185,7 @@
         </p:nvSpPr>
         <p:spPr>
           <a:xfrm>
-            <a:off x="4690331" y="2650988"/>
+            <a:off x="4072000" y="3260260"/>
             <a:ext cx="1000000" cy="300000"/>
           </a:xfrm>
           <a:prstGeom prst="rect">
@@ -13215,15 +13215,15 @@
         <p:nvCxnSpPr>
           <p:cNvPr id="14" name="Connector 13"/>
           <p:cNvCxnSpPr>
-            <a:stCxn id="6" idx="3"/>
-            <a:endCxn id="7" idx="1"/>
+            <a:stCxn id="6" idx="1"/>
+            <a:endCxn id="7" idx="3"/>
           </p:cNvCxnSpPr>
           <p:nvPr/>
         </p:nvCxnSpPr>
         <p:spPr>
-          <a:xfrm flipH="1">
-            <a:off x="457200" y="3429892"/>
-            <a:ext cx="4243944" cy="458400"/>
+          <a:xfrm>
+            <a:off x="3972000" y="3863181"/>
+            <a:ext cx="4363320" cy="905842"/>
           </a:xfrm>
           <a:prstGeom prst="curvedConnector3">
             <a:avLst/>
@@ -13255,7 +13255,7 @@
         </p:nvSpPr>
         <p:spPr>
           <a:xfrm>
-            <a:off x="2079172" y="3509092"/>
+            <a:off x="5653660" y="4166102"/>
             <a:ext cx="1000000" cy="300000"/>
           </a:xfrm>
           <a:prstGeom prst="rect">
@@ -13285,15 +13285,15 @@
         <p:nvCxnSpPr>
           <p:cNvPr id="16" name="Connector 15"/>
           <p:cNvCxnSpPr>
-            <a:stCxn id="6" idx="1"/>
-            <a:endCxn id="8" idx="3"/>
+            <a:stCxn id="6" idx="3"/>
+            <a:endCxn id="8" idx="1"/>
           </p:cNvCxnSpPr>
           <p:nvPr/>
         </p:nvCxnSpPr>
         <p:spPr>
-          <a:xfrm>
-            <a:off x="3501144" y="3429892"/>
-            <a:ext cx="4851303" cy="316577"/>
+          <a:xfrm flipH="1">
+            <a:off x="808679" y="3863181"/>
+            <a:ext cx="4363321" cy="905842"/>
           </a:xfrm>
           <a:prstGeom prst="curvedConnector3">
             <a:avLst/>
@@ -13325,7 +13325,7 @@
         </p:nvSpPr>
         <p:spPr>
           <a:xfrm>
-            <a:off x="5426795" y="3438180"/>
+            <a:off x="2490339" y="4166102"/>
             <a:ext cx="1000000" cy="300000"/>
           </a:xfrm>
           <a:prstGeom prst="rect">
@@ -13355,15 +13355,15 @@
         <p:nvCxnSpPr>
           <p:cNvPr id="18" name="Connector 17"/>
           <p:cNvCxnSpPr>
-            <a:stCxn id="8" idx="0"/>
-            <a:endCxn id="5" idx="2"/>
+            <a:stCxn id="8" idx="1"/>
+            <a:endCxn id="5" idx="3"/>
           </p:cNvCxnSpPr>
           <p:nvPr/>
         </p:nvCxnSpPr>
         <p:spPr>
-          <a:xfrm flipH="1" flipV="1">
-            <a:off x="6279518" y="2422085"/>
-            <a:ext cx="1472929" cy="1074384"/>
+          <a:xfrm flipV="1">
+            <a:off x="808679" y="2957339"/>
+            <a:ext cx="4363321" cy="1811684"/>
           </a:xfrm>
           <a:prstGeom prst="curvedConnector3">
             <a:avLst/>
@@ -13395,7 +13395,7 @@
         </p:nvSpPr>
         <p:spPr>
           <a:xfrm>
-            <a:off x="6515982" y="2809277"/>
+            <a:off x="2490339" y="3713181"/>
             <a:ext cx="1000000" cy="300000"/>
           </a:xfrm>
           <a:prstGeom prst="rect">
@@ -13425,15 +13425,15 @@
         <p:nvCxnSpPr>
           <p:cNvPr id="20" name="Connector 19"/>
           <p:cNvCxnSpPr>
-            <a:stCxn id="7" idx="2"/>
-            <a:endCxn id="9" idx="0"/>
+            <a:stCxn id="7" idx="3"/>
+            <a:endCxn id="9" idx="1"/>
           </p:cNvCxnSpPr>
           <p:nvPr/>
         </p:nvCxnSpPr>
         <p:spPr>
-          <a:xfrm>
-            <a:off x="1057200" y="4138292"/>
-            <a:ext cx="831530" cy="1118976"/>
+          <a:xfrm flipH="1">
+            <a:off x="4347000" y="4769023"/>
+            <a:ext cx="3988320" cy="905841"/>
           </a:xfrm>
           <a:prstGeom prst="curvedConnector3">
             <a:avLst/>
@@ -13521,7 +13521,7 @@
         </p:nvSpPr>
         <p:spPr>
           <a:xfrm>
-            <a:off x="2272000" y="2188180"/>
+            <a:off x="2272000" y="3538181"/>
             <a:ext cx="4600000" cy="2420000"/>
           </a:xfrm>
           <a:prstGeom prst="roundRect">
@@ -13565,84 +13565,7 @@
         </p:nvSpPr>
         <p:spPr>
           <a:xfrm>
-            <a:off x="2872000" y="2653181"/>
-            <a:ext cx="3400000" cy="2420000"/>
-          </a:xfrm>
-          <a:prstGeom prst="roundRect">
-            <a:avLst/>
-          </a:prstGeom>
-          <a:solidFill>
-            <a:srgbClr val="EEF4FF"/>
-          </a:solidFill>
-          <a:ln>
-            <a:solidFill>
-              <a:srgbClr val="4664AA"/>
-            </a:solidFill>
-          </a:ln>
-        </p:spPr>
-        <p:style>
-          <a:lnRef idx="1">
-            <a:schemeClr val="accent1"/>
-          </a:lnRef>
-          <a:fillRef idx="3">
-            <a:schemeClr val="accent1"/>
-          </a:fillRef>
-          <a:effectRef idx="2">
-            <a:schemeClr val="accent1"/>
-          </a:effectRef>
-          <a:fontRef idx="minor">
-            <a:schemeClr val="lt1"/>
-          </a:fontRef>
-        </p:style>
-        <p:txBody>
-          <a:bodyPr rtlCol="0" anchor="ctr"/>
-          <a:lstStyle/>
-          <a:p/>
-        </p:txBody>
-      </p:sp>
-      <p:sp>
-        <p:nvSpPr>
-          <p:cNvPr id="6" name="TextBox 5"/>
-          <p:cNvSpPr txBox="1"/>
-          <p:nvPr/>
-        </p:nvSpPr>
-        <p:spPr>
-          <a:xfrm>
-            <a:off x="2872000" y="2653181"/>
-            <a:ext cx="3400000" cy="420000"/>
-          </a:xfrm>
-          <a:prstGeom prst="rect">
-            <a:avLst/>
-          </a:prstGeom>
-          <a:noFill/>
-        </p:spPr>
-        <p:txBody>
-          <a:bodyPr wrap="none">
-            <a:spAutoFit/>
-          </a:bodyPr>
-          <a:lstStyle/>
-          <a:p>
-            <a:pPr algn="ctr"/>
-            <a:r>
-              <a:rPr sz="1100" b="1">
-                <a:solidFill>
-                  <a:srgbClr val="4664AA"/>
-                </a:solidFill>
-              </a:rPr>
-              <a:t>Active</a:t>
-            </a:r>
-          </a:p>
-        </p:txBody>
-      </p:sp>
-      <p:sp>
-        <p:nvSpPr>
-          <p:cNvPr id="7" name="Rounded Rectangle 6"/>
-          <p:cNvSpPr/>
-          <p:nvPr/>
-        </p:nvSpPr>
-        <p:spPr>
-          <a:xfrm>
-            <a:off x="2272000" y="3538181"/>
+            <a:off x="2272000" y="2188180"/>
             <a:ext cx="4600000" cy="2420000"/>
           </a:xfrm>
           <a:prstGeom prst="roundRect">
@@ -13680,6 +13603,83 @@
       </p:sp>
       <p:sp>
         <p:nvSpPr>
+          <p:cNvPr id="6" name="Rounded Rectangle 5"/>
+          <p:cNvSpPr/>
+          <p:nvPr/>
+        </p:nvSpPr>
+        <p:spPr>
+          <a:xfrm>
+            <a:off x="2872000" y="2653181"/>
+            <a:ext cx="3400000" cy="2420000"/>
+          </a:xfrm>
+          <a:prstGeom prst="roundRect">
+            <a:avLst/>
+          </a:prstGeom>
+          <a:solidFill>
+            <a:srgbClr val="EEF4FF"/>
+          </a:solidFill>
+          <a:ln>
+            <a:solidFill>
+              <a:srgbClr val="4664AA"/>
+            </a:solidFill>
+          </a:ln>
+        </p:spPr>
+        <p:style>
+          <a:lnRef idx="1">
+            <a:schemeClr val="accent1"/>
+          </a:lnRef>
+          <a:fillRef idx="3">
+            <a:schemeClr val="accent1"/>
+          </a:fillRef>
+          <a:effectRef idx="2">
+            <a:schemeClr val="accent1"/>
+          </a:effectRef>
+          <a:fontRef idx="minor">
+            <a:schemeClr val="lt1"/>
+          </a:fontRef>
+        </p:style>
+        <p:txBody>
+          <a:bodyPr rtlCol="0" anchor="ctr"/>
+          <a:lstStyle/>
+          <a:p/>
+        </p:txBody>
+      </p:sp>
+      <p:sp>
+        <p:nvSpPr>
+          <p:cNvPr id="7" name="TextBox 6"/>
+          <p:cNvSpPr txBox="1"/>
+          <p:nvPr/>
+        </p:nvSpPr>
+        <p:spPr>
+          <a:xfrm>
+            <a:off x="2872000" y="2653181"/>
+            <a:ext cx="3400000" cy="420000"/>
+          </a:xfrm>
+          <a:prstGeom prst="rect">
+            <a:avLst/>
+          </a:prstGeom>
+          <a:noFill/>
+        </p:spPr>
+        <p:txBody>
+          <a:bodyPr wrap="none">
+            <a:spAutoFit/>
+          </a:bodyPr>
+          <a:lstStyle/>
+          <a:p>
+            <a:pPr algn="ctr"/>
+            <a:r>
+              <a:rPr sz="1100" b="1">
+                <a:solidFill>
+                  <a:srgbClr val="4664AA"/>
+                </a:solidFill>
+              </a:rPr>
+              <a:t>Active</a:t>
+            </a:r>
+          </a:p>
+        </p:txBody>
+      </p:sp>
+      <p:sp>
+        <p:nvSpPr>
           <p:cNvPr id="8" name="Oval 7"/>
           <p:cNvSpPr/>
           <p:nvPr/>
@@ -13809,7 +13809,7 @@
         </p:nvSpPr>
         <p:spPr>
           <a:xfrm>
-            <a:off x="4821071" y="4168180"/>
+            <a:off x="2761999" y="3418180"/>
             <a:ext cx="380000" cy="380000"/>
           </a:xfrm>
           <a:prstGeom prst="ellipse">
@@ -13850,7 +13850,7 @@
         </p:nvSpPr>
         <p:spPr>
           <a:xfrm>
-            <a:off x="4549899" y="3157706"/>
+            <a:off x="3972000" y="3358180"/>
             <a:ext cx="1200000" cy="500000"/>
           </a:xfrm>
           <a:prstGeom prst="roundRect">
@@ -13903,7 +13903,7 @@
         </p:nvSpPr>
         <p:spPr>
           <a:xfrm>
-            <a:off x="2955029" y="2808653"/>
+            <a:off x="5592000" y="3358180"/>
             <a:ext cx="1200000" cy="500000"/>
           </a:xfrm>
           <a:prstGeom prst="roundRect">
@@ -13956,7 +13956,7 @@
         </p:nvSpPr>
         <p:spPr>
           <a:xfrm>
-            <a:off x="4821071" y="5518181"/>
+            <a:off x="2761999" y="4768181"/>
             <a:ext cx="380000" cy="380000"/>
           </a:xfrm>
           <a:prstGeom prst="ellipse">
@@ -13997,7 +13997,7 @@
         </p:nvSpPr>
         <p:spPr>
           <a:xfrm>
-            <a:off x="4549899" y="4507707"/>
+            <a:off x="3972000" y="4708181"/>
             <a:ext cx="1200000" cy="500000"/>
           </a:xfrm>
           <a:prstGeom prst="roundRect">
@@ -14050,7 +14050,7 @@
         </p:nvSpPr>
         <p:spPr>
           <a:xfrm>
-            <a:off x="2955029" y="4158654"/>
+            <a:off x="5592000" y="4708181"/>
             <a:ext cx="1200000" cy="500000"/>
           </a:xfrm>
           <a:prstGeom prst="roundRect">
@@ -14152,7 +14152,7 @@
           <p:cNvPr id="18" name="Connector 17"/>
           <p:cNvCxnSpPr>
             <a:stCxn id="8" idx="1"/>
-            <a:endCxn id="5" idx="3"/>
+            <a:endCxn id="6" idx="3"/>
           </p:cNvCxnSpPr>
           <p:nvPr/>
         </p:nvCxnSpPr>
@@ -14187,15 +14187,15 @@
         <p:nvCxnSpPr>
           <p:cNvPr id="19" name="Connector 18"/>
           <p:cNvCxnSpPr>
-            <a:stCxn id="11" idx="0"/>
-            <a:endCxn id="12" idx="2"/>
+            <a:stCxn id="11" idx="1"/>
+            <a:endCxn id="12" idx="3"/>
           </p:cNvCxnSpPr>
           <p:nvPr/>
         </p:nvCxnSpPr>
         <p:spPr>
-          <a:xfrm flipV="1">
-            <a:off x="5011071" y="3657706"/>
-            <a:ext cx="138828" cy="510474"/>
+          <a:xfrm>
+            <a:off x="2761999" y="3608180"/>
+            <a:ext cx="2410001" cy="0"/>
           </a:xfrm>
           <a:prstGeom prst="curvedConnector3">
             <a:avLst/>
@@ -14223,15 +14223,15 @@
         <p:nvCxnSpPr>
           <p:cNvPr id="20" name="Connector 19"/>
           <p:cNvCxnSpPr>
-            <a:stCxn id="12" idx="3"/>
-            <a:endCxn id="13" idx="1"/>
+            <a:stCxn id="12" idx="1"/>
+            <a:endCxn id="13" idx="3"/>
           </p:cNvCxnSpPr>
           <p:nvPr/>
         </p:nvCxnSpPr>
         <p:spPr>
-          <a:xfrm flipH="1" flipV="1">
-            <a:off x="2955029" y="3058653"/>
-            <a:ext cx="2794870" cy="349053"/>
+          <a:xfrm>
+            <a:off x="3972000" y="3608180"/>
+            <a:ext cx="2820000" cy="0"/>
           </a:xfrm>
           <a:prstGeom prst="curvedConnector3">
             <a:avLst/>
@@ -14263,7 +14263,7 @@
         </p:nvSpPr>
         <p:spPr>
           <a:xfrm>
-            <a:off x="3852464" y="3083179"/>
+            <a:off x="4882000" y="3458180"/>
             <a:ext cx="1000000" cy="300000"/>
           </a:xfrm>
           <a:prstGeom prst="rect">
@@ -14293,15 +14293,15 @@
         <p:nvCxnSpPr>
           <p:cNvPr id="22" name="Connector 21"/>
           <p:cNvCxnSpPr>
-            <a:stCxn id="13" idx="1"/>
-            <a:endCxn id="12" idx="3"/>
+            <a:stCxn id="13" idx="3"/>
+            <a:endCxn id="12" idx="1"/>
           </p:cNvCxnSpPr>
           <p:nvPr/>
         </p:nvCxnSpPr>
         <p:spPr>
-          <a:xfrm>
-            <a:off x="2955029" y="3058653"/>
-            <a:ext cx="2794870" cy="349053"/>
+          <a:xfrm flipH="1">
+            <a:off x="3972000" y="3608180"/>
+            <a:ext cx="2820000" cy="0"/>
           </a:xfrm>
           <a:prstGeom prst="curvedConnector3">
             <a:avLst/>
@@ -14333,7 +14333,7 @@
         </p:nvSpPr>
         <p:spPr>
           <a:xfrm>
-            <a:off x="3852464" y="3083179"/>
+            <a:off x="4882000" y="3458180"/>
             <a:ext cx="1000000" cy="300000"/>
           </a:xfrm>
           <a:prstGeom prst="rect">
@@ -14363,15 +14363,15 @@
         <p:nvCxnSpPr>
           <p:cNvPr id="24" name="Connector 23"/>
           <p:cNvCxnSpPr>
-            <a:stCxn id="14" idx="0"/>
-            <a:endCxn id="15" idx="2"/>
+            <a:stCxn id="14" idx="1"/>
+            <a:endCxn id="15" idx="3"/>
           </p:cNvCxnSpPr>
           <p:nvPr/>
         </p:nvCxnSpPr>
         <p:spPr>
-          <a:xfrm flipV="1">
-            <a:off x="5011071" y="5007707"/>
-            <a:ext cx="138828" cy="510474"/>
+          <a:xfrm>
+            <a:off x="2761999" y="4958181"/>
+            <a:ext cx="2410001" cy="0"/>
           </a:xfrm>
           <a:prstGeom prst="curvedConnector3">
             <a:avLst/>
@@ -14399,15 +14399,15 @@
         <p:nvCxnSpPr>
           <p:cNvPr id="25" name="Connector 24"/>
           <p:cNvCxnSpPr>
-            <a:stCxn id="15" idx="3"/>
-            <a:endCxn id="16" idx="1"/>
+            <a:stCxn id="15" idx="1"/>
+            <a:endCxn id="16" idx="3"/>
           </p:cNvCxnSpPr>
           <p:nvPr/>
         </p:nvCxnSpPr>
         <p:spPr>
-          <a:xfrm flipH="1" flipV="1">
-            <a:off x="2955029" y="4408654"/>
-            <a:ext cx="2794870" cy="349053"/>
+          <a:xfrm>
+            <a:off x="3972000" y="4958181"/>
+            <a:ext cx="2820000" cy="0"/>
           </a:xfrm>
           <a:prstGeom prst="curvedConnector3">
             <a:avLst/>
@@ -14439,7 +14439,7 @@
         </p:nvSpPr>
         <p:spPr>
           <a:xfrm>
-            <a:off x="3852464" y="4433180"/>
+            <a:off x="4882000" y="4808181"/>
             <a:ext cx="1000000" cy="300000"/>
           </a:xfrm>
           <a:prstGeom prst="rect">
@@ -14469,15 +14469,15 @@
         <p:nvCxnSpPr>
           <p:cNvPr id="27" name="Connector 26"/>
           <p:cNvCxnSpPr>
-            <a:stCxn id="16" idx="1"/>
-            <a:endCxn id="15" idx="3"/>
+            <a:stCxn id="16" idx="3"/>
+            <a:endCxn id="15" idx="1"/>
           </p:cNvCxnSpPr>
           <p:nvPr/>
         </p:nvCxnSpPr>
         <p:spPr>
-          <a:xfrm>
-            <a:off x="2955029" y="4408654"/>
-            <a:ext cx="2794870" cy="349053"/>
+          <a:xfrm flipH="1">
+            <a:off x="3972000" y="4958181"/>
+            <a:ext cx="2820000" cy="0"/>
           </a:xfrm>
           <a:prstGeom prst="curvedConnector3">
             <a:avLst/>
@@ -14509,7 +14509,7 @@
         </p:nvSpPr>
         <p:spPr>
           <a:xfrm>
-            <a:off x="3852464" y="4433180"/>
+            <a:off x="4882000" y="4808181"/>
             <a:ext cx="1000000" cy="300000"/>
           </a:xfrm>
           <a:prstGeom prst="rect">
@@ -14539,7 +14539,7 @@
         <p:nvCxnSpPr>
           <p:cNvPr id="29" name="Connector 28"/>
           <p:cNvCxnSpPr>
-            <a:stCxn id="5" idx="1"/>
+            <a:stCxn id="6" idx="1"/>
             <a:endCxn id="9" idx="3"/>
           </p:cNvCxnSpPr>
           <p:nvPr/>
@@ -14994,7 +14994,7 @@
         </p:nvSpPr>
         <p:spPr>
           <a:xfrm>
-            <a:off x="2772000" y="5467697"/>
+            <a:off x="3972000" y="4054022"/>
             <a:ext cx="1200000" cy="500000"/>
           </a:xfrm>
           <a:prstGeom prst="roundRect">
@@ -15047,7 +15047,7 @@
         </p:nvSpPr>
         <p:spPr>
           <a:xfrm>
-            <a:off x="5172000" y="3990348"/>
+            <a:off x="3972000" y="5404023"/>
             <a:ext cx="1200000" cy="500000"/>
           </a:xfrm>
           <a:prstGeom prst="roundRect">
@@ -15272,15 +15272,15 @@
         <p:nvCxnSpPr>
           <p:cNvPr id="19" name="Connector 18"/>
           <p:cNvCxnSpPr>
-            <a:stCxn id="12" idx="1"/>
-            <a:endCxn id="13" idx="3"/>
+            <a:stCxn id="12" idx="2"/>
+            <a:endCxn id="13" idx="0"/>
           </p:cNvCxnSpPr>
           <p:nvPr/>
         </p:nvCxnSpPr>
         <p:spPr>
-          <a:xfrm flipV="1">
-            <a:off x="2772000" y="4240348"/>
-            <a:ext cx="3600000" cy="1477349"/>
+          <a:xfrm>
+            <a:off x="4572000" y="4554022"/>
+            <a:ext cx="0" cy="850001"/>
           </a:xfrm>
           <a:prstGeom prst="curvedConnector3">
             <a:avLst/>
@@ -15342,15 +15342,15 @@
         <p:nvCxnSpPr>
           <p:cNvPr id="21" name="Connector 20"/>
           <p:cNvCxnSpPr>
-            <a:stCxn id="13" idx="3"/>
-            <a:endCxn id="12" idx="1"/>
+            <a:stCxn id="13" idx="0"/>
+            <a:endCxn id="12" idx="2"/>
           </p:cNvCxnSpPr>
           <p:nvPr/>
         </p:nvCxnSpPr>
         <p:spPr>
-          <a:xfrm flipH="1">
-            <a:off x="2772000" y="4240348"/>
-            <a:ext cx="3600000" cy="1477349"/>
+          <a:xfrm flipV="1">
+            <a:off x="4572000" y="4554022"/>
+            <a:ext cx="0" cy="850001"/>
           </a:xfrm>
           <a:prstGeom prst="curvedConnector3">
             <a:avLst/>

--- a/demo_full.pptx
+++ b/demo_full.pptx
@@ -12813,13 +12813,13 @@
       </p:sp>
       <p:sp>
         <p:nvSpPr>
-          <p:cNvPr id="5" name="Rounded Rectangle 4"/>
+          <p:cNvPr id="7" name="Rounded Rectangle 6"/>
           <p:cNvSpPr/>
           <p:nvPr/>
         </p:nvSpPr>
         <p:spPr>
           <a:xfrm>
-            <a:off x="3972000" y="2707339"/>
+            <a:off x="7135320" y="4519023"/>
             <a:ext cx="1200000" cy="500000"/>
           </a:xfrm>
           <a:prstGeom prst="roundRect">
@@ -12859,166 +12859,7 @@
                   <a:srgbClr val="000000"/>
                 </a:solidFill>
               </a:rPr>
-              <a:t>待機中</a:t>
-            </a:r>
-          </a:p>
-        </p:txBody>
-      </p:sp>
-      <p:sp>
-        <p:nvSpPr>
-          <p:cNvPr id="6" name="Rounded Rectangle 5"/>
-          <p:cNvSpPr/>
-          <p:nvPr/>
-        </p:nvSpPr>
-        <p:spPr>
-          <a:xfrm>
-            <a:off x="3972000" y="3613181"/>
-            <a:ext cx="1200000" cy="500000"/>
-          </a:xfrm>
-          <a:prstGeom prst="roundRect">
-            <a:avLst/>
-          </a:prstGeom>
-          <a:solidFill>
-            <a:srgbClr val="FFFFFF"/>
-          </a:solidFill>
-          <a:ln>
-            <a:solidFill>
-              <a:srgbClr val="323250"/>
-            </a:solidFill>
-          </a:ln>
-        </p:spPr>
-        <p:style>
-          <a:lnRef idx="1">
-            <a:schemeClr val="accent1"/>
-          </a:lnRef>
-          <a:fillRef idx="3">
-            <a:schemeClr val="accent1"/>
-          </a:fillRef>
-          <a:effectRef idx="2">
-            <a:schemeClr val="accent1"/>
-          </a:effectRef>
-          <a:fontRef idx="minor">
-            <a:schemeClr val="lt1"/>
-          </a:fontRef>
-        </p:style>
-        <p:txBody>
-          <a:bodyPr rtlCol="0" anchor="ctr" wrap="none"/>
-          <a:lstStyle/>
-          <a:p>
-            <a:pPr algn="ctr"/>
-            <a:r>
-              <a:rPr sz="1100">
-                <a:solidFill>
-                  <a:srgbClr val="000000"/>
-                </a:solidFill>
-              </a:rPr>
-              <a:t>処理中</a:t>
-            </a:r>
-          </a:p>
-        </p:txBody>
-      </p:sp>
-      <p:sp>
-        <p:nvSpPr>
-          <p:cNvPr id="7" name="Rounded Rectangle 6"/>
-          <p:cNvSpPr/>
-          <p:nvPr/>
-        </p:nvSpPr>
-        <p:spPr>
-          <a:xfrm>
-            <a:off x="7135320" y="4519023"/>
-            <a:ext cx="1200000" cy="500000"/>
-          </a:xfrm>
-          <a:prstGeom prst="roundRect">
-            <a:avLst/>
-          </a:prstGeom>
-          <a:solidFill>
-            <a:srgbClr val="FFFFFF"/>
-          </a:solidFill>
-          <a:ln>
-            <a:solidFill>
-              <a:srgbClr val="323250"/>
-            </a:solidFill>
-          </a:ln>
-        </p:spPr>
-        <p:style>
-          <a:lnRef idx="1">
-            <a:schemeClr val="accent1"/>
-          </a:lnRef>
-          <a:fillRef idx="3">
-            <a:schemeClr val="accent1"/>
-          </a:fillRef>
-          <a:effectRef idx="2">
-            <a:schemeClr val="accent1"/>
-          </a:effectRef>
-          <a:fontRef idx="minor">
-            <a:schemeClr val="lt1"/>
-          </a:fontRef>
-        </p:style>
-        <p:txBody>
-          <a:bodyPr rtlCol="0" anchor="ctr" wrap="none"/>
-          <a:lstStyle/>
-          <a:p>
-            <a:pPr algn="ctr"/>
-            <a:r>
-              <a:rPr sz="1100">
-                <a:solidFill>
-                  <a:srgbClr val="000000"/>
-                </a:solidFill>
-              </a:rPr>
               <a:t>完了</a:t>
-            </a:r>
-          </a:p>
-        </p:txBody>
-      </p:sp>
-      <p:sp>
-        <p:nvSpPr>
-          <p:cNvPr id="8" name="Rounded Rectangle 7"/>
-          <p:cNvSpPr/>
-          <p:nvPr/>
-        </p:nvSpPr>
-        <p:spPr>
-          <a:xfrm>
-            <a:off x="808679" y="4519023"/>
-            <a:ext cx="1200000" cy="500000"/>
-          </a:xfrm>
-          <a:prstGeom prst="roundRect">
-            <a:avLst/>
-          </a:prstGeom>
-          <a:solidFill>
-            <a:srgbClr val="FFFFFF"/>
-          </a:solidFill>
-          <a:ln>
-            <a:solidFill>
-              <a:srgbClr val="323250"/>
-            </a:solidFill>
-          </a:ln>
-        </p:spPr>
-        <p:style>
-          <a:lnRef idx="1">
-            <a:schemeClr val="accent1"/>
-          </a:lnRef>
-          <a:fillRef idx="3">
-            <a:schemeClr val="accent1"/>
-          </a:fillRef>
-          <a:effectRef idx="2">
-            <a:schemeClr val="accent1"/>
-          </a:effectRef>
-          <a:fontRef idx="minor">
-            <a:schemeClr val="lt1"/>
-          </a:fontRef>
-        </p:style>
-        <p:txBody>
-          <a:bodyPr rtlCol="0" anchor="ctr" wrap="none"/>
-          <a:lstStyle/>
-          <a:p>
-            <a:pPr algn="ctr"/>
-            <a:r>
-              <a:rPr sz="1100">
-                <a:solidFill>
-                  <a:srgbClr val="000000"/>
-                </a:solidFill>
-              </a:rPr>
-              <a:t>エラー</a:t>
             </a:r>
           </a:p>
         </p:txBody>
@@ -13177,40 +13018,6 @@
           </a:fontRef>
         </p:style>
       </p:cxnSp>
-      <p:sp>
-        <p:nvSpPr>
-          <p:cNvPr id="13" name="TextBox 12"/>
-          <p:cNvSpPr txBox="1"/>
-          <p:nvPr/>
-        </p:nvSpPr>
-        <p:spPr>
-          <a:xfrm>
-            <a:off x="4072000" y="3260260"/>
-            <a:ext cx="1000000" cy="300000"/>
-          </a:xfrm>
-          <a:prstGeom prst="rect">
-            <a:avLst/>
-          </a:prstGeom>
-          <a:noFill/>
-        </p:spPr>
-        <p:txBody>
-          <a:bodyPr wrap="none">
-            <a:spAutoFit/>
-          </a:bodyPr>
-          <a:lstStyle/>
-          <a:p>
-            <a:pPr algn="ctr"/>
-            <a:r>
-              <a:rPr sz="900" i="1">
-                <a:solidFill>
-                  <a:srgbClr val="323232"/>
-                </a:solidFill>
-              </a:rPr>
-              <a:t>開始</a:t>
-            </a:r>
-          </a:p>
-        </p:txBody>
-      </p:sp>
       <p:cxnSp>
         <p:nvCxnSpPr>
           <p:cNvPr id="14" name="Connector 13"/>
@@ -13247,40 +13054,6 @@
           </a:fontRef>
         </p:style>
       </p:cxnSp>
-      <p:sp>
-        <p:nvSpPr>
-          <p:cNvPr id="15" name="TextBox 14"/>
-          <p:cNvSpPr txBox="1"/>
-          <p:nvPr/>
-        </p:nvSpPr>
-        <p:spPr>
-          <a:xfrm>
-            <a:off x="5653660" y="4166102"/>
-            <a:ext cx="1000000" cy="300000"/>
-          </a:xfrm>
-          <a:prstGeom prst="rect">
-            <a:avLst/>
-          </a:prstGeom>
-          <a:noFill/>
-        </p:spPr>
-        <p:txBody>
-          <a:bodyPr wrap="none">
-            <a:spAutoFit/>
-          </a:bodyPr>
-          <a:lstStyle/>
-          <a:p>
-            <a:pPr algn="ctr"/>
-            <a:r>
-              <a:rPr sz="900" i="1">
-                <a:solidFill>
-                  <a:srgbClr val="323232"/>
-                </a:solidFill>
-              </a:rPr>
-              <a:t>成功</a:t>
-            </a:r>
-          </a:p>
-        </p:txBody>
-      </p:sp>
       <p:cxnSp>
         <p:nvCxnSpPr>
           <p:cNvPr id="16" name="Connector 15"/>
@@ -13317,40 +13090,6 @@
           </a:fontRef>
         </p:style>
       </p:cxnSp>
-      <p:sp>
-        <p:nvSpPr>
-          <p:cNvPr id="17" name="TextBox 16"/>
-          <p:cNvSpPr txBox="1"/>
-          <p:nvPr/>
-        </p:nvSpPr>
-        <p:spPr>
-          <a:xfrm>
-            <a:off x="2490339" y="4166102"/>
-            <a:ext cx="1000000" cy="300000"/>
-          </a:xfrm>
-          <a:prstGeom prst="rect">
-            <a:avLst/>
-          </a:prstGeom>
-          <a:noFill/>
-        </p:spPr>
-        <p:txBody>
-          <a:bodyPr wrap="none">
-            <a:spAutoFit/>
-          </a:bodyPr>
-          <a:lstStyle/>
-          <a:p>
-            <a:pPr algn="ctr"/>
-            <a:r>
-              <a:rPr sz="900" i="1">
-                <a:solidFill>
-                  <a:srgbClr val="323232"/>
-                </a:solidFill>
-              </a:rPr>
-              <a:t>失敗</a:t>
-            </a:r>
-          </a:p>
-        </p:txBody>
-      </p:sp>
       <p:cxnSp>
         <p:nvCxnSpPr>
           <p:cNvPr id="18" name="Connector 17"/>
@@ -13387,40 +13126,6 @@
           </a:fontRef>
         </p:style>
       </p:cxnSp>
-      <p:sp>
-        <p:nvSpPr>
-          <p:cNvPr id="19" name="TextBox 18"/>
-          <p:cNvSpPr txBox="1"/>
-          <p:nvPr/>
-        </p:nvSpPr>
-        <p:spPr>
-          <a:xfrm>
-            <a:off x="2490339" y="3713181"/>
-            <a:ext cx="1000000" cy="300000"/>
-          </a:xfrm>
-          <a:prstGeom prst="rect">
-            <a:avLst/>
-          </a:prstGeom>
-          <a:noFill/>
-        </p:spPr>
-        <p:txBody>
-          <a:bodyPr wrap="none">
-            <a:spAutoFit/>
-          </a:bodyPr>
-          <a:lstStyle/>
-          <a:p>
-            <a:pPr algn="ctr"/>
-            <a:r>
-              <a:rPr sz="900" i="1">
-                <a:solidFill>
-                  <a:srgbClr val="323232"/>
-                </a:solidFill>
-              </a:rPr>
-              <a:t>リトライ</a:t>
-            </a:r>
-          </a:p>
-        </p:txBody>
-      </p:sp>
       <p:cxnSp>
         <p:nvCxnSpPr>
           <p:cNvPr id="20" name="Connector 19"/>
@@ -13457,6 +13162,327 @@
           </a:fontRef>
         </p:style>
       </p:cxnSp>
+      <p:grpSp>
+        <p:grpSpPr>
+          <a:xfrm>
+            <a:off x="3972000" y="2707339"/>
+            <a:ext cx="1200000" cy="625000"/>
+            <a:chOff x="3972000" y="2707339"/>
+            <a:chExt cx="1200000" cy="625000"/>
+          </a:xfrm>
+        </p:grpSpPr>
+        <p:sp>
+          <p:nvSpPr>
+            <p:cNvPr id="5" name="Rounded Rectangle 4"/>
+            <p:cNvSpPr/>
+            <p:nvPr/>
+          </p:nvSpPr>
+          <p:spPr>
+            <a:xfrm>
+              <a:off x="3972000" y="2707339"/>
+              <a:ext cx="1200000" cy="500000"/>
+            </a:xfrm>
+            <a:prstGeom prst="roundRect">
+              <a:avLst/>
+            </a:prstGeom>
+            <a:solidFill>
+              <a:srgbClr val="FFFFFF"/>
+            </a:solidFill>
+            <a:ln>
+              <a:solidFill>
+                <a:srgbClr val="323250"/>
+              </a:solidFill>
+            </a:ln>
+          </p:spPr>
+          <p:style>
+            <a:lnRef idx="1">
+              <a:schemeClr val="accent1"/>
+            </a:lnRef>
+            <a:fillRef idx="3">
+              <a:schemeClr val="accent1"/>
+            </a:fillRef>
+            <a:effectRef idx="2">
+              <a:schemeClr val="accent1"/>
+            </a:effectRef>
+            <a:fontRef idx="minor">
+              <a:schemeClr val="lt1"/>
+            </a:fontRef>
+          </p:style>
+          <p:txBody>
+            <a:bodyPr rtlCol="0" anchor="ctr" wrap="none"/>
+            <a:lstStyle/>
+            <a:p>
+              <a:pPr algn="ctr"/>
+              <a:r>
+                <a:rPr sz="1100">
+                  <a:solidFill>
+                    <a:srgbClr val="000000"/>
+                  </a:solidFill>
+                </a:rPr>
+                <a:t>待機中</a:t>
+              </a:r>
+            </a:p>
+          </p:txBody>
+        </p:sp>
+        <p:sp>
+          <p:nvSpPr>
+            <p:cNvPr id="13" name="TextBox 12"/>
+            <p:cNvSpPr txBox="1"/>
+            <p:nvPr/>
+          </p:nvSpPr>
+          <p:spPr>
+            <a:xfrm>
+              <a:off x="3972000" y="3082339"/>
+              <a:ext cx="1200000" cy="250000"/>
+            </a:xfrm>
+            <a:prstGeom prst="rect">
+              <a:avLst/>
+            </a:prstGeom>
+            <a:noFill/>
+            <a:ln>
+              <a:noFill/>
+            </a:ln>
+          </p:spPr>
+          <p:txBody>
+            <a:bodyPr wrap="none">
+              <a:spAutoFit/>
+            </a:bodyPr>
+            <a:lstStyle/>
+            <a:p>
+              <a:pPr/>
+              <a:r>
+                <a:rPr sz="1000" b="0"/>
+                <a:t>開始</a:t>
+              </a:r>
+            </a:p>
+          </p:txBody>
+        </p:sp>
+      </p:grpSp>
+      <p:grpSp>
+        <p:grpSpPr>
+          <a:xfrm>
+            <a:off x="3372000" y="3613181"/>
+            <a:ext cx="2400000" cy="546814"/>
+            <a:chOff x="3372000" y="3613181"/>
+            <a:chExt cx="2400000" cy="546814"/>
+          </a:xfrm>
+        </p:grpSpPr>
+        <p:sp>
+          <p:nvSpPr>
+            <p:cNvPr id="6" name="Rounded Rectangle 5"/>
+            <p:cNvSpPr/>
+            <p:nvPr/>
+          </p:nvSpPr>
+          <p:spPr>
+            <a:xfrm>
+              <a:off x="3972000" y="3613181"/>
+              <a:ext cx="1200000" cy="500000"/>
+            </a:xfrm>
+            <a:prstGeom prst="roundRect">
+              <a:avLst/>
+            </a:prstGeom>
+            <a:solidFill>
+              <a:srgbClr val="FFFFFF"/>
+            </a:solidFill>
+            <a:ln>
+              <a:solidFill>
+                <a:srgbClr val="323250"/>
+              </a:solidFill>
+            </a:ln>
+          </p:spPr>
+          <p:style>
+            <a:lnRef idx="1">
+              <a:schemeClr val="accent1"/>
+            </a:lnRef>
+            <a:fillRef idx="3">
+              <a:schemeClr val="accent1"/>
+            </a:fillRef>
+            <a:effectRef idx="2">
+              <a:schemeClr val="accent1"/>
+            </a:effectRef>
+            <a:fontRef idx="minor">
+              <a:schemeClr val="lt1"/>
+            </a:fontRef>
+          </p:style>
+          <p:txBody>
+            <a:bodyPr rtlCol="0" anchor="ctr" wrap="none"/>
+            <a:lstStyle/>
+            <a:p>
+              <a:pPr algn="ctr"/>
+              <a:r>
+                <a:rPr sz="1100">
+                  <a:solidFill>
+                    <a:srgbClr val="000000"/>
+                  </a:solidFill>
+                </a:rPr>
+                <a:t>処理中</a:t>
+              </a:r>
+            </a:p>
+          </p:txBody>
+        </p:sp>
+        <p:sp>
+          <p:nvSpPr>
+            <p:cNvPr id="15" name="TextBox 14"/>
+            <p:cNvSpPr txBox="1"/>
+            <p:nvPr/>
+          </p:nvSpPr>
+          <p:spPr>
+            <a:xfrm>
+              <a:off x="4572000" y="3909995"/>
+              <a:ext cx="1200000" cy="250000"/>
+            </a:xfrm>
+            <a:prstGeom prst="rect">
+              <a:avLst/>
+            </a:prstGeom>
+            <a:noFill/>
+            <a:ln>
+              <a:noFill/>
+            </a:ln>
+          </p:spPr>
+          <p:txBody>
+            <a:bodyPr wrap="none">
+              <a:spAutoFit/>
+            </a:bodyPr>
+            <a:lstStyle/>
+            <a:p>
+              <a:pPr/>
+              <a:r>
+                <a:rPr sz="1000" b="0"/>
+                <a:t>成功</a:t>
+              </a:r>
+            </a:p>
+          </p:txBody>
+        </p:sp>
+        <p:sp>
+          <p:nvSpPr>
+            <p:cNvPr id="17" name="TextBox 16"/>
+            <p:cNvSpPr txBox="1"/>
+            <p:nvPr/>
+          </p:nvSpPr>
+          <p:spPr>
+            <a:xfrm>
+              <a:off x="3372000" y="3909995"/>
+              <a:ext cx="1200000" cy="250000"/>
+            </a:xfrm>
+            <a:prstGeom prst="rect">
+              <a:avLst/>
+            </a:prstGeom>
+            <a:noFill/>
+            <a:ln>
+              <a:noFill/>
+            </a:ln>
+          </p:spPr>
+          <p:txBody>
+            <a:bodyPr wrap="none">
+              <a:spAutoFit/>
+            </a:bodyPr>
+            <a:lstStyle/>
+            <a:p>
+              <a:pPr/>
+              <a:r>
+                <a:rPr sz="1000" b="0"/>
+                <a:t>失敗</a:t>
+              </a:r>
+            </a:p>
+          </p:txBody>
+        </p:sp>
+      </p:grpSp>
+      <p:grpSp>
+        <p:grpSpPr>
+          <a:xfrm>
+            <a:off x="808679" y="4394023"/>
+            <a:ext cx="1636516" cy="625000"/>
+            <a:chOff x="808679" y="4394023"/>
+            <a:chExt cx="1636516" cy="625000"/>
+          </a:xfrm>
+        </p:grpSpPr>
+        <p:sp>
+          <p:nvSpPr>
+            <p:cNvPr id="8" name="Rounded Rectangle 7"/>
+            <p:cNvSpPr/>
+            <p:nvPr/>
+          </p:nvSpPr>
+          <p:spPr>
+            <a:xfrm>
+              <a:off x="808679" y="4519023"/>
+              <a:ext cx="1200000" cy="500000"/>
+            </a:xfrm>
+            <a:prstGeom prst="roundRect">
+              <a:avLst/>
+            </a:prstGeom>
+            <a:solidFill>
+              <a:srgbClr val="FFFFFF"/>
+            </a:solidFill>
+            <a:ln>
+              <a:solidFill>
+                <a:srgbClr val="323250"/>
+              </a:solidFill>
+            </a:ln>
+          </p:spPr>
+          <p:style>
+            <a:lnRef idx="1">
+              <a:schemeClr val="accent1"/>
+            </a:lnRef>
+            <a:fillRef idx="3">
+              <a:schemeClr val="accent1"/>
+            </a:fillRef>
+            <a:effectRef idx="2">
+              <a:schemeClr val="accent1"/>
+            </a:effectRef>
+            <a:fontRef idx="minor">
+              <a:schemeClr val="lt1"/>
+            </a:fontRef>
+          </p:style>
+          <p:txBody>
+            <a:bodyPr rtlCol="0" anchor="ctr" wrap="none"/>
+            <a:lstStyle/>
+            <a:p>
+              <a:pPr algn="ctr"/>
+              <a:r>
+                <a:rPr sz="1100">
+                  <a:solidFill>
+                    <a:srgbClr val="000000"/>
+                  </a:solidFill>
+                </a:rPr>
+                <a:t>エラー</a:t>
+              </a:r>
+            </a:p>
+          </p:txBody>
+        </p:sp>
+        <p:sp>
+          <p:nvSpPr>
+            <p:cNvPr id="19" name="TextBox 18"/>
+            <p:cNvSpPr txBox="1"/>
+            <p:nvPr/>
+          </p:nvSpPr>
+          <p:spPr>
+            <a:xfrm>
+              <a:off x="1245195" y="4394023"/>
+              <a:ext cx="1200000" cy="250000"/>
+            </a:xfrm>
+            <a:prstGeom prst="rect">
+              <a:avLst/>
+            </a:prstGeom>
+            <a:noFill/>
+            <a:ln>
+              <a:noFill/>
+            </a:ln>
+          </p:spPr>
+          <p:txBody>
+            <a:bodyPr wrap="none">
+              <a:spAutoFit/>
+            </a:bodyPr>
+            <a:lstStyle/>
+            <a:p>
+              <a:pPr/>
+              <a:r>
+                <a:rPr sz="1000" b="0"/>
+                <a:t>リトライ</a:t>
+              </a:r>
+            </a:p>
+          </p:txBody>
+        </p:sp>
+      </p:grpSp>
     </p:spTree>
   </p:cSld>
   <p:clrMapOvr>
@@ -13521,7 +13547,7 @@
         </p:nvSpPr>
         <p:spPr>
           <a:xfrm>
-            <a:off x="2272000" y="3538181"/>
+            <a:off x="2272000" y="2188180"/>
             <a:ext cx="4600000" cy="2420000"/>
           </a:xfrm>
           <a:prstGeom prst="roundRect">
@@ -13565,7 +13591,7 @@
         </p:nvSpPr>
         <p:spPr>
           <a:xfrm>
-            <a:off x="2272000" y="2188180"/>
+            <a:off x="2272000" y="3538181"/>
             <a:ext cx="4600000" cy="2420000"/>
           </a:xfrm>
           <a:prstGeom prst="roundRect">
@@ -13844,112 +13870,6 @@
       </p:sp>
       <p:sp>
         <p:nvSpPr>
-          <p:cNvPr id="12" name="Rounded Rectangle 11"/>
-          <p:cNvSpPr/>
-          <p:nvPr/>
-        </p:nvSpPr>
-        <p:spPr>
-          <a:xfrm>
-            <a:off x="3972000" y="3358180"/>
-            <a:ext cx="1200000" cy="500000"/>
-          </a:xfrm>
-          <a:prstGeom prst="roundRect">
-            <a:avLst/>
-          </a:prstGeom>
-          <a:solidFill>
-            <a:srgbClr val="FFFFFF"/>
-          </a:solidFill>
-          <a:ln>
-            <a:solidFill>
-              <a:srgbClr val="323250"/>
-            </a:solidFill>
-          </a:ln>
-        </p:spPr>
-        <p:style>
-          <a:lnRef idx="1">
-            <a:schemeClr val="accent1"/>
-          </a:lnRef>
-          <a:fillRef idx="3">
-            <a:schemeClr val="accent1"/>
-          </a:fillRef>
-          <a:effectRef idx="2">
-            <a:schemeClr val="accent1"/>
-          </a:effectRef>
-          <a:fontRef idx="minor">
-            <a:schemeClr val="lt1"/>
-          </a:fontRef>
-        </p:style>
-        <p:txBody>
-          <a:bodyPr rtlCol="0" anchor="ctr" wrap="none"/>
-          <a:lstStyle/>
-          <a:p>
-            <a:pPr algn="ctr"/>
-            <a:r>
-              <a:rPr sz="1100">
-                <a:solidFill>
-                  <a:srgbClr val="000000"/>
-                </a:solidFill>
-              </a:rPr>
-              <a:t>NumLockOff</a:t>
-            </a:r>
-          </a:p>
-        </p:txBody>
-      </p:sp>
-      <p:sp>
-        <p:nvSpPr>
-          <p:cNvPr id="13" name="Rounded Rectangle 12"/>
-          <p:cNvSpPr/>
-          <p:nvPr/>
-        </p:nvSpPr>
-        <p:spPr>
-          <a:xfrm>
-            <a:off x="5592000" y="3358180"/>
-            <a:ext cx="1200000" cy="500000"/>
-          </a:xfrm>
-          <a:prstGeom prst="roundRect">
-            <a:avLst/>
-          </a:prstGeom>
-          <a:solidFill>
-            <a:srgbClr val="FFFFFF"/>
-          </a:solidFill>
-          <a:ln>
-            <a:solidFill>
-              <a:srgbClr val="323250"/>
-            </a:solidFill>
-          </a:ln>
-        </p:spPr>
-        <p:style>
-          <a:lnRef idx="1">
-            <a:schemeClr val="accent1"/>
-          </a:lnRef>
-          <a:fillRef idx="3">
-            <a:schemeClr val="accent1"/>
-          </a:fillRef>
-          <a:effectRef idx="2">
-            <a:schemeClr val="accent1"/>
-          </a:effectRef>
-          <a:fontRef idx="minor">
-            <a:schemeClr val="lt1"/>
-          </a:fontRef>
-        </p:style>
-        <p:txBody>
-          <a:bodyPr rtlCol="0" anchor="ctr" wrap="none"/>
-          <a:lstStyle/>
-          <a:p>
-            <a:pPr algn="ctr"/>
-            <a:r>
-              <a:rPr sz="1100">
-                <a:solidFill>
-                  <a:srgbClr val="000000"/>
-                </a:solidFill>
-              </a:rPr>
-              <a:t>NumLockOn</a:t>
-            </a:r>
-          </a:p>
-        </p:txBody>
-      </p:sp>
-      <p:sp>
-        <p:nvSpPr>
           <p:cNvPr id="14" name="Oval 13"/>
           <p:cNvSpPr/>
           <p:nvPr/>
@@ -13987,112 +13907,6 @@
           <a:bodyPr rtlCol="0" anchor="ctr"/>
           <a:lstStyle/>
           <a:p/>
-        </p:txBody>
-      </p:sp>
-      <p:sp>
-        <p:nvSpPr>
-          <p:cNvPr id="15" name="Rounded Rectangle 14"/>
-          <p:cNvSpPr/>
-          <p:nvPr/>
-        </p:nvSpPr>
-        <p:spPr>
-          <a:xfrm>
-            <a:off x="3972000" y="4708181"/>
-            <a:ext cx="1200000" cy="500000"/>
-          </a:xfrm>
-          <a:prstGeom prst="roundRect">
-            <a:avLst/>
-          </a:prstGeom>
-          <a:solidFill>
-            <a:srgbClr val="FFFFFF"/>
-          </a:solidFill>
-          <a:ln>
-            <a:solidFill>
-              <a:srgbClr val="323250"/>
-            </a:solidFill>
-          </a:ln>
-        </p:spPr>
-        <p:style>
-          <a:lnRef idx="1">
-            <a:schemeClr val="accent1"/>
-          </a:lnRef>
-          <a:fillRef idx="3">
-            <a:schemeClr val="accent1"/>
-          </a:fillRef>
-          <a:effectRef idx="2">
-            <a:schemeClr val="accent1"/>
-          </a:effectRef>
-          <a:fontRef idx="minor">
-            <a:schemeClr val="lt1"/>
-          </a:fontRef>
-        </p:style>
-        <p:txBody>
-          <a:bodyPr rtlCol="0" anchor="ctr" wrap="none"/>
-          <a:lstStyle/>
-          <a:p>
-            <a:pPr algn="ctr"/>
-            <a:r>
-              <a:rPr sz="1100">
-                <a:solidFill>
-                  <a:srgbClr val="000000"/>
-                </a:solidFill>
-              </a:rPr>
-              <a:t>CapsLockOff</a:t>
-            </a:r>
-          </a:p>
-        </p:txBody>
-      </p:sp>
-      <p:sp>
-        <p:nvSpPr>
-          <p:cNvPr id="16" name="Rounded Rectangle 15"/>
-          <p:cNvSpPr/>
-          <p:nvPr/>
-        </p:nvSpPr>
-        <p:spPr>
-          <a:xfrm>
-            <a:off x="5592000" y="4708181"/>
-            <a:ext cx="1200000" cy="500000"/>
-          </a:xfrm>
-          <a:prstGeom prst="roundRect">
-            <a:avLst/>
-          </a:prstGeom>
-          <a:solidFill>
-            <a:srgbClr val="FFFFFF"/>
-          </a:solidFill>
-          <a:ln>
-            <a:solidFill>
-              <a:srgbClr val="323250"/>
-            </a:solidFill>
-          </a:ln>
-        </p:spPr>
-        <p:style>
-          <a:lnRef idx="1">
-            <a:schemeClr val="accent1"/>
-          </a:lnRef>
-          <a:fillRef idx="3">
-            <a:schemeClr val="accent1"/>
-          </a:fillRef>
-          <a:effectRef idx="2">
-            <a:schemeClr val="accent1"/>
-          </a:effectRef>
-          <a:fontRef idx="minor">
-            <a:schemeClr val="lt1"/>
-          </a:fontRef>
-        </p:style>
-        <p:txBody>
-          <a:bodyPr rtlCol="0" anchor="ctr" wrap="none"/>
-          <a:lstStyle/>
-          <a:p>
-            <a:pPr algn="ctr"/>
-            <a:r>
-              <a:rPr sz="1100">
-                <a:solidFill>
-                  <a:srgbClr val="000000"/>
-                </a:solidFill>
-              </a:rPr>
-              <a:t>CapsLockOn</a:t>
-            </a:r>
-          </a:p>
         </p:txBody>
       </p:sp>
       <p:sp>
@@ -14255,40 +14069,6 @@
           </a:fontRef>
         </p:style>
       </p:cxnSp>
-      <p:sp>
-        <p:nvSpPr>
-          <p:cNvPr id="21" name="TextBox 20"/>
-          <p:cNvSpPr txBox="1"/>
-          <p:nvPr/>
-        </p:nvSpPr>
-        <p:spPr>
-          <a:xfrm>
-            <a:off x="4882000" y="3458180"/>
-            <a:ext cx="1000000" cy="300000"/>
-          </a:xfrm>
-          <a:prstGeom prst="rect">
-            <a:avLst/>
-          </a:prstGeom>
-          <a:noFill/>
-        </p:spPr>
-        <p:txBody>
-          <a:bodyPr wrap="none">
-            <a:spAutoFit/>
-          </a:bodyPr>
-          <a:lstStyle/>
-          <a:p>
-            <a:pPr algn="ctr"/>
-            <a:r>
-              <a:rPr sz="900" i="1">
-                <a:solidFill>
-                  <a:srgbClr val="323232"/>
-                </a:solidFill>
-              </a:rPr>
-              <a:t>NumLock押す</a:t>
-            </a:r>
-          </a:p>
-        </p:txBody>
-      </p:sp>
       <p:cxnSp>
         <p:nvCxnSpPr>
           <p:cNvPr id="22" name="Connector 21"/>
@@ -14325,40 +14105,6 @@
           </a:fontRef>
         </p:style>
       </p:cxnSp>
-      <p:sp>
-        <p:nvSpPr>
-          <p:cNvPr id="23" name="TextBox 22"/>
-          <p:cNvSpPr txBox="1"/>
-          <p:nvPr/>
-        </p:nvSpPr>
-        <p:spPr>
-          <a:xfrm>
-            <a:off x="4882000" y="3458180"/>
-            <a:ext cx="1000000" cy="300000"/>
-          </a:xfrm>
-          <a:prstGeom prst="rect">
-            <a:avLst/>
-          </a:prstGeom>
-          <a:noFill/>
-        </p:spPr>
-        <p:txBody>
-          <a:bodyPr wrap="none">
-            <a:spAutoFit/>
-          </a:bodyPr>
-          <a:lstStyle/>
-          <a:p>
-            <a:pPr algn="ctr"/>
-            <a:r>
-              <a:rPr sz="900" i="1">
-                <a:solidFill>
-                  <a:srgbClr val="323232"/>
-                </a:solidFill>
-              </a:rPr>
-              <a:t>NumLock押す</a:t>
-            </a:r>
-          </a:p>
-        </p:txBody>
-      </p:sp>
       <p:cxnSp>
         <p:nvCxnSpPr>
           <p:cNvPr id="24" name="Connector 23"/>
@@ -14431,40 +14177,6 @@
           </a:fontRef>
         </p:style>
       </p:cxnSp>
-      <p:sp>
-        <p:nvSpPr>
-          <p:cNvPr id="26" name="TextBox 25"/>
-          <p:cNvSpPr txBox="1"/>
-          <p:nvPr/>
-        </p:nvSpPr>
-        <p:spPr>
-          <a:xfrm>
-            <a:off x="4882000" y="4808181"/>
-            <a:ext cx="1000000" cy="300000"/>
-          </a:xfrm>
-          <a:prstGeom prst="rect">
-            <a:avLst/>
-          </a:prstGeom>
-          <a:noFill/>
-        </p:spPr>
-        <p:txBody>
-          <a:bodyPr wrap="none">
-            <a:spAutoFit/>
-          </a:bodyPr>
-          <a:lstStyle/>
-          <a:p>
-            <a:pPr algn="ctr"/>
-            <a:r>
-              <a:rPr sz="900" i="1">
-                <a:solidFill>
-                  <a:srgbClr val="323232"/>
-                </a:solidFill>
-              </a:rPr>
-              <a:t>CapsLock押す</a:t>
-            </a:r>
-          </a:p>
-        </p:txBody>
-      </p:sp>
       <p:cxnSp>
         <p:nvCxnSpPr>
           <p:cNvPr id="27" name="Connector 26"/>
@@ -14501,40 +14213,6 @@
           </a:fontRef>
         </p:style>
       </p:cxnSp>
-      <p:sp>
-        <p:nvSpPr>
-          <p:cNvPr id="28" name="TextBox 27"/>
-          <p:cNvSpPr txBox="1"/>
-          <p:nvPr/>
-        </p:nvSpPr>
-        <p:spPr>
-          <a:xfrm>
-            <a:off x="4882000" y="4808181"/>
-            <a:ext cx="1000000" cy="300000"/>
-          </a:xfrm>
-          <a:prstGeom prst="rect">
-            <a:avLst/>
-          </a:prstGeom>
-          <a:noFill/>
-        </p:spPr>
-        <p:txBody>
-          <a:bodyPr wrap="none">
-            <a:spAutoFit/>
-          </a:bodyPr>
-          <a:lstStyle/>
-          <a:p>
-            <a:pPr algn="ctr"/>
-            <a:r>
-              <a:rPr sz="900" i="1">
-                <a:solidFill>
-                  <a:srgbClr val="323232"/>
-                </a:solidFill>
-              </a:rPr>
-              <a:t>CapsLock押す</a:t>
-            </a:r>
-          </a:p>
-        </p:txBody>
-      </p:sp>
       <p:cxnSp>
         <p:nvCxnSpPr>
           <p:cNvPr id="29" name="Connector 28"/>
@@ -14571,6 +14249,390 @@
           </a:fontRef>
         </p:style>
       </p:cxnSp>
+      <p:grpSp>
+        <p:grpSpPr>
+          <a:xfrm>
+            <a:off x="3972000" y="3358180"/>
+            <a:ext cx="1800000" cy="500000"/>
+            <a:chOff x="3972000" y="3358180"/>
+            <a:chExt cx="1800000" cy="500000"/>
+          </a:xfrm>
+        </p:grpSpPr>
+        <p:sp>
+          <p:nvSpPr>
+            <p:cNvPr id="12" name="Rounded Rectangle 11"/>
+            <p:cNvSpPr/>
+            <p:nvPr/>
+          </p:nvSpPr>
+          <p:spPr>
+            <a:xfrm>
+              <a:off x="3972000" y="3358180"/>
+              <a:ext cx="1200000" cy="500000"/>
+            </a:xfrm>
+            <a:prstGeom prst="roundRect">
+              <a:avLst/>
+            </a:prstGeom>
+            <a:solidFill>
+              <a:srgbClr val="FFFFFF"/>
+            </a:solidFill>
+            <a:ln>
+              <a:solidFill>
+                <a:srgbClr val="323250"/>
+              </a:solidFill>
+            </a:ln>
+          </p:spPr>
+          <p:style>
+            <a:lnRef idx="1">
+              <a:schemeClr val="accent1"/>
+            </a:lnRef>
+            <a:fillRef idx="3">
+              <a:schemeClr val="accent1"/>
+            </a:fillRef>
+            <a:effectRef idx="2">
+              <a:schemeClr val="accent1"/>
+            </a:effectRef>
+            <a:fontRef idx="minor">
+              <a:schemeClr val="lt1"/>
+            </a:fontRef>
+          </p:style>
+          <p:txBody>
+            <a:bodyPr rtlCol="0" anchor="ctr" wrap="none"/>
+            <a:lstStyle/>
+            <a:p>
+              <a:pPr algn="ctr"/>
+              <a:r>
+                <a:rPr sz="1100">
+                  <a:solidFill>
+                    <a:srgbClr val="000000"/>
+                  </a:solidFill>
+                </a:rPr>
+                <a:t>NumLockOff</a:t>
+              </a:r>
+            </a:p>
+          </p:txBody>
+        </p:sp>
+        <p:sp>
+          <p:nvSpPr>
+            <p:cNvPr id="21" name="TextBox 20"/>
+            <p:cNvSpPr txBox="1"/>
+            <p:nvPr/>
+          </p:nvSpPr>
+          <p:spPr>
+            <a:xfrm>
+              <a:off x="4572000" y="3483180"/>
+              <a:ext cx="1200000" cy="250000"/>
+            </a:xfrm>
+            <a:prstGeom prst="rect">
+              <a:avLst/>
+            </a:prstGeom>
+            <a:noFill/>
+            <a:ln>
+              <a:noFill/>
+            </a:ln>
+          </p:spPr>
+          <p:txBody>
+            <a:bodyPr wrap="none">
+              <a:spAutoFit/>
+            </a:bodyPr>
+            <a:lstStyle/>
+            <a:p>
+              <a:pPr/>
+              <a:r>
+                <a:rPr sz="1000" b="0"/>
+                <a:t>NumLock押す</a:t>
+              </a:r>
+            </a:p>
+          </p:txBody>
+        </p:sp>
+      </p:grpSp>
+      <p:grpSp>
+        <p:grpSpPr>
+          <a:xfrm>
+            <a:off x="4992000" y="3358180"/>
+            <a:ext cx="1800000" cy="500000"/>
+            <a:chOff x="4992000" y="3358180"/>
+            <a:chExt cx="1800000" cy="500000"/>
+          </a:xfrm>
+        </p:grpSpPr>
+        <p:sp>
+          <p:nvSpPr>
+            <p:cNvPr id="13" name="Rounded Rectangle 12"/>
+            <p:cNvSpPr/>
+            <p:nvPr/>
+          </p:nvSpPr>
+          <p:spPr>
+            <a:xfrm>
+              <a:off x="5592000" y="3358180"/>
+              <a:ext cx="1200000" cy="500000"/>
+            </a:xfrm>
+            <a:prstGeom prst="roundRect">
+              <a:avLst/>
+            </a:prstGeom>
+            <a:solidFill>
+              <a:srgbClr val="FFFFFF"/>
+            </a:solidFill>
+            <a:ln>
+              <a:solidFill>
+                <a:srgbClr val="323250"/>
+              </a:solidFill>
+            </a:ln>
+          </p:spPr>
+          <p:style>
+            <a:lnRef idx="1">
+              <a:schemeClr val="accent1"/>
+            </a:lnRef>
+            <a:fillRef idx="3">
+              <a:schemeClr val="accent1"/>
+            </a:fillRef>
+            <a:effectRef idx="2">
+              <a:schemeClr val="accent1"/>
+            </a:effectRef>
+            <a:fontRef idx="minor">
+              <a:schemeClr val="lt1"/>
+            </a:fontRef>
+          </p:style>
+          <p:txBody>
+            <a:bodyPr rtlCol="0" anchor="ctr" wrap="none"/>
+            <a:lstStyle/>
+            <a:p>
+              <a:pPr algn="ctr"/>
+              <a:r>
+                <a:rPr sz="1100">
+                  <a:solidFill>
+                    <a:srgbClr val="000000"/>
+                  </a:solidFill>
+                </a:rPr>
+                <a:t>NumLockOn</a:t>
+              </a:r>
+            </a:p>
+          </p:txBody>
+        </p:sp>
+        <p:sp>
+          <p:nvSpPr>
+            <p:cNvPr id="23" name="TextBox 22"/>
+            <p:cNvSpPr txBox="1"/>
+            <p:nvPr/>
+          </p:nvSpPr>
+          <p:spPr>
+            <a:xfrm>
+              <a:off x="4992000" y="3483180"/>
+              <a:ext cx="1200000" cy="250000"/>
+            </a:xfrm>
+            <a:prstGeom prst="rect">
+              <a:avLst/>
+            </a:prstGeom>
+            <a:noFill/>
+            <a:ln>
+              <a:noFill/>
+            </a:ln>
+          </p:spPr>
+          <p:txBody>
+            <a:bodyPr wrap="none">
+              <a:spAutoFit/>
+            </a:bodyPr>
+            <a:lstStyle/>
+            <a:p>
+              <a:pPr/>
+              <a:r>
+                <a:rPr sz="1000" b="0"/>
+                <a:t>NumLock押す</a:t>
+              </a:r>
+            </a:p>
+          </p:txBody>
+        </p:sp>
+      </p:grpSp>
+      <p:grpSp>
+        <p:grpSpPr>
+          <a:xfrm>
+            <a:off x="3972000" y="4708181"/>
+            <a:ext cx="1800000" cy="500000"/>
+            <a:chOff x="3972000" y="4708181"/>
+            <a:chExt cx="1800000" cy="500000"/>
+          </a:xfrm>
+        </p:grpSpPr>
+        <p:sp>
+          <p:nvSpPr>
+            <p:cNvPr id="15" name="Rounded Rectangle 14"/>
+            <p:cNvSpPr/>
+            <p:nvPr/>
+          </p:nvSpPr>
+          <p:spPr>
+            <a:xfrm>
+              <a:off x="3972000" y="4708181"/>
+              <a:ext cx="1200000" cy="500000"/>
+            </a:xfrm>
+            <a:prstGeom prst="roundRect">
+              <a:avLst/>
+            </a:prstGeom>
+            <a:solidFill>
+              <a:srgbClr val="FFFFFF"/>
+            </a:solidFill>
+            <a:ln>
+              <a:solidFill>
+                <a:srgbClr val="323250"/>
+              </a:solidFill>
+            </a:ln>
+          </p:spPr>
+          <p:style>
+            <a:lnRef idx="1">
+              <a:schemeClr val="accent1"/>
+            </a:lnRef>
+            <a:fillRef idx="3">
+              <a:schemeClr val="accent1"/>
+            </a:fillRef>
+            <a:effectRef idx="2">
+              <a:schemeClr val="accent1"/>
+            </a:effectRef>
+            <a:fontRef idx="minor">
+              <a:schemeClr val="lt1"/>
+            </a:fontRef>
+          </p:style>
+          <p:txBody>
+            <a:bodyPr rtlCol="0" anchor="ctr" wrap="none"/>
+            <a:lstStyle/>
+            <a:p>
+              <a:pPr algn="ctr"/>
+              <a:r>
+                <a:rPr sz="1100">
+                  <a:solidFill>
+                    <a:srgbClr val="000000"/>
+                  </a:solidFill>
+                </a:rPr>
+                <a:t>CapsLockOff</a:t>
+              </a:r>
+            </a:p>
+          </p:txBody>
+        </p:sp>
+        <p:sp>
+          <p:nvSpPr>
+            <p:cNvPr id="26" name="TextBox 25"/>
+            <p:cNvSpPr txBox="1"/>
+            <p:nvPr/>
+          </p:nvSpPr>
+          <p:spPr>
+            <a:xfrm>
+              <a:off x="4572000" y="4833181"/>
+              <a:ext cx="1200000" cy="250000"/>
+            </a:xfrm>
+            <a:prstGeom prst="rect">
+              <a:avLst/>
+            </a:prstGeom>
+            <a:noFill/>
+            <a:ln>
+              <a:noFill/>
+            </a:ln>
+          </p:spPr>
+          <p:txBody>
+            <a:bodyPr wrap="none">
+              <a:spAutoFit/>
+            </a:bodyPr>
+            <a:lstStyle/>
+            <a:p>
+              <a:pPr/>
+              <a:r>
+                <a:rPr sz="1000" b="0"/>
+                <a:t>CapsLock押す</a:t>
+              </a:r>
+            </a:p>
+          </p:txBody>
+        </p:sp>
+      </p:grpSp>
+      <p:grpSp>
+        <p:grpSpPr>
+          <a:xfrm>
+            <a:off x="4992000" y="4708181"/>
+            <a:ext cx="1800000" cy="500000"/>
+            <a:chOff x="4992000" y="4708181"/>
+            <a:chExt cx="1800000" cy="500000"/>
+          </a:xfrm>
+        </p:grpSpPr>
+        <p:sp>
+          <p:nvSpPr>
+            <p:cNvPr id="16" name="Rounded Rectangle 15"/>
+            <p:cNvSpPr/>
+            <p:nvPr/>
+          </p:nvSpPr>
+          <p:spPr>
+            <a:xfrm>
+              <a:off x="5592000" y="4708181"/>
+              <a:ext cx="1200000" cy="500000"/>
+            </a:xfrm>
+            <a:prstGeom prst="roundRect">
+              <a:avLst/>
+            </a:prstGeom>
+            <a:solidFill>
+              <a:srgbClr val="FFFFFF"/>
+            </a:solidFill>
+            <a:ln>
+              <a:solidFill>
+                <a:srgbClr val="323250"/>
+              </a:solidFill>
+            </a:ln>
+          </p:spPr>
+          <p:style>
+            <a:lnRef idx="1">
+              <a:schemeClr val="accent1"/>
+            </a:lnRef>
+            <a:fillRef idx="3">
+              <a:schemeClr val="accent1"/>
+            </a:fillRef>
+            <a:effectRef idx="2">
+              <a:schemeClr val="accent1"/>
+            </a:effectRef>
+            <a:fontRef idx="minor">
+              <a:schemeClr val="lt1"/>
+            </a:fontRef>
+          </p:style>
+          <p:txBody>
+            <a:bodyPr rtlCol="0" anchor="ctr" wrap="none"/>
+            <a:lstStyle/>
+            <a:p>
+              <a:pPr algn="ctr"/>
+              <a:r>
+                <a:rPr sz="1100">
+                  <a:solidFill>
+                    <a:srgbClr val="000000"/>
+                  </a:solidFill>
+                </a:rPr>
+                <a:t>CapsLockOn</a:t>
+              </a:r>
+            </a:p>
+          </p:txBody>
+        </p:sp>
+        <p:sp>
+          <p:nvSpPr>
+            <p:cNvPr id="28" name="TextBox 27"/>
+            <p:cNvSpPr txBox="1"/>
+            <p:nvPr/>
+          </p:nvSpPr>
+          <p:spPr>
+            <a:xfrm>
+              <a:off x="4992000" y="4833181"/>
+              <a:ext cx="1200000" cy="250000"/>
+            </a:xfrm>
+            <a:prstGeom prst="rect">
+              <a:avLst/>
+            </a:prstGeom>
+            <a:noFill/>
+            <a:ln>
+              <a:noFill/>
+            </a:ln>
+          </p:spPr>
+          <p:txBody>
+            <a:bodyPr wrap="none">
+              <a:spAutoFit/>
+            </a:bodyPr>
+            <a:lstStyle/>
+            <a:p>
+              <a:pPr/>
+              <a:r>
+                <a:rPr sz="1000" b="0"/>
+                <a:t>CapsLock押す</a:t>
+              </a:r>
+            </a:p>
+          </p:txBody>
+        </p:sp>
+      </p:grpSp>
     </p:spTree>
   </p:cSld>
   <p:clrMapOvr>
@@ -14747,13 +14809,13 @@
       </p:sp>
       <p:sp>
         <p:nvSpPr>
-          <p:cNvPr id="7" name="Rounded Rectangle 6"/>
+          <p:cNvPr id="8" name="Rounded Rectangle 7"/>
           <p:cNvSpPr/>
           <p:nvPr/>
         </p:nvSpPr>
         <p:spPr>
           <a:xfrm>
-            <a:off x="3972000" y="2707339"/>
+            <a:off x="808679" y="3613181"/>
             <a:ext cx="1200000" cy="500000"/>
           </a:xfrm>
           <a:prstGeom prst="roundRect">
@@ -14793,20 +14855,20 @@
                   <a:srgbClr val="000000"/>
                 </a:solidFill>
               </a:rPr>
-              <a:t>Check</a:t>
-            </a:r>
-          </a:p>
-        </p:txBody>
-      </p:sp>
-      <p:sp>
-        <p:nvSpPr>
-          <p:cNvPr id="8" name="Rounded Rectangle 7"/>
+              <a:t>Fast</a:t>
+            </a:r>
+          </a:p>
+        </p:txBody>
+      </p:sp>
+      <p:sp>
+        <p:nvSpPr>
+          <p:cNvPr id="9" name="Rounded Rectangle 8"/>
           <p:cNvSpPr/>
           <p:nvPr/>
         </p:nvSpPr>
         <p:spPr>
           <a:xfrm>
-            <a:off x="808679" y="3613181"/>
+            <a:off x="7135320" y="3613181"/>
             <a:ext cx="1200000" cy="500000"/>
           </a:xfrm>
           <a:prstGeom prst="roundRect">
@@ -14846,59 +14908,6 @@
                   <a:srgbClr val="000000"/>
                 </a:solidFill>
               </a:rPr>
-              <a:t>Fast</a:t>
-            </a:r>
-          </a:p>
-        </p:txBody>
-      </p:sp>
-      <p:sp>
-        <p:nvSpPr>
-          <p:cNvPr id="9" name="Rounded Rectangle 8"/>
-          <p:cNvSpPr/>
-          <p:nvPr/>
-        </p:nvSpPr>
-        <p:spPr>
-          <a:xfrm>
-            <a:off x="7135320" y="3613181"/>
-            <a:ext cx="1200000" cy="500000"/>
-          </a:xfrm>
-          <a:prstGeom prst="roundRect">
-            <a:avLst/>
-          </a:prstGeom>
-          <a:solidFill>
-            <a:srgbClr val="FFFFFF"/>
-          </a:solidFill>
-          <a:ln>
-            <a:solidFill>
-              <a:srgbClr val="323250"/>
-            </a:solidFill>
-          </a:ln>
-        </p:spPr>
-        <p:style>
-          <a:lnRef idx="1">
-            <a:schemeClr val="accent1"/>
-          </a:lnRef>
-          <a:fillRef idx="3">
-            <a:schemeClr val="accent1"/>
-          </a:fillRef>
-          <a:effectRef idx="2">
-            <a:schemeClr val="accent1"/>
-          </a:effectRef>
-          <a:fontRef idx="minor">
-            <a:schemeClr val="lt1"/>
-          </a:fontRef>
-        </p:style>
-        <p:txBody>
-          <a:bodyPr rtlCol="0" anchor="ctr" wrap="none"/>
-          <a:lstStyle/>
-          <a:p>
-            <a:pPr algn="ctr"/>
-            <a:r>
-              <a:rPr sz="1100">
-                <a:solidFill>
-                  <a:srgbClr val="000000"/>
-                </a:solidFill>
-              </a:rPr>
               <a:t>Slow</a:t>
             </a:r>
           </a:p>
@@ -14984,112 +14993,6 @@
           <a:bodyPr rtlCol="0" anchor="ctr"/>
           <a:lstStyle/>
           <a:p/>
-        </p:txBody>
-      </p:sp>
-      <p:sp>
-        <p:nvSpPr>
-          <p:cNvPr id="12" name="Rounded Rectangle 11"/>
-          <p:cNvSpPr/>
-          <p:nvPr/>
-        </p:nvSpPr>
-        <p:spPr>
-          <a:xfrm>
-            <a:off x="3972000" y="4054022"/>
-            <a:ext cx="1200000" cy="500000"/>
-          </a:xfrm>
-          <a:prstGeom prst="roundRect">
-            <a:avLst/>
-          </a:prstGeom>
-          <a:solidFill>
-            <a:srgbClr val="FFFFFF"/>
-          </a:solidFill>
-          <a:ln>
-            <a:solidFill>
-              <a:srgbClr val="323250"/>
-            </a:solidFill>
-          </a:ln>
-        </p:spPr>
-        <p:style>
-          <a:lnRef idx="1">
-            <a:schemeClr val="accent1"/>
-          </a:lnRef>
-          <a:fillRef idx="3">
-            <a:schemeClr val="accent1"/>
-          </a:fillRef>
-          <a:effectRef idx="2">
-            <a:schemeClr val="accent1"/>
-          </a:effectRef>
-          <a:fontRef idx="minor">
-            <a:schemeClr val="lt1"/>
-          </a:fontRef>
-        </p:style>
-        <p:txBody>
-          <a:bodyPr rtlCol="0" anchor="ctr" wrap="none"/>
-          <a:lstStyle/>
-          <a:p>
-            <a:pPr algn="ctr"/>
-            <a:r>
-              <a:rPr sz="1100">
-                <a:solidFill>
-                  <a:srgbClr val="000000"/>
-                </a:solidFill>
-              </a:rPr>
-              <a:t>Idle</a:t>
-            </a:r>
-          </a:p>
-        </p:txBody>
-      </p:sp>
-      <p:sp>
-        <p:nvSpPr>
-          <p:cNvPr id="13" name="Rounded Rectangle 12"/>
-          <p:cNvSpPr/>
-          <p:nvPr/>
-        </p:nvSpPr>
-        <p:spPr>
-          <a:xfrm>
-            <a:off x="3972000" y="5404023"/>
-            <a:ext cx="1200000" cy="500000"/>
-          </a:xfrm>
-          <a:prstGeom prst="roundRect">
-            <a:avLst/>
-          </a:prstGeom>
-          <a:solidFill>
-            <a:srgbClr val="FFFFFF"/>
-          </a:solidFill>
-          <a:ln>
-            <a:solidFill>
-              <a:srgbClr val="323250"/>
-            </a:solidFill>
-          </a:ln>
-        </p:spPr>
-        <p:style>
-          <a:lnRef idx="1">
-            <a:schemeClr val="accent1"/>
-          </a:lnRef>
-          <a:fillRef idx="3">
-            <a:schemeClr val="accent1"/>
-          </a:fillRef>
-          <a:effectRef idx="2">
-            <a:schemeClr val="accent1"/>
-          </a:effectRef>
-          <a:fontRef idx="minor">
-            <a:schemeClr val="lt1"/>
-          </a:fontRef>
-        </p:style>
-        <p:txBody>
-          <a:bodyPr rtlCol="0" anchor="ctr" wrap="none"/>
-          <a:lstStyle/>
-          <a:p>
-            <a:pPr algn="ctr"/>
-            <a:r>
-              <a:rPr sz="1100">
-                <a:solidFill>
-                  <a:srgbClr val="000000"/>
-                </a:solidFill>
-              </a:rPr>
-              <a:t>Moving</a:t>
-            </a:r>
-          </a:p>
         </p:txBody>
       </p:sp>
       <p:cxnSp>
@@ -15164,40 +15067,6 @@
           </a:fontRef>
         </p:style>
       </p:cxnSp>
-      <p:sp>
-        <p:nvSpPr>
-          <p:cNvPr id="16" name="TextBox 15"/>
-          <p:cNvSpPr txBox="1"/>
-          <p:nvPr/>
-        </p:nvSpPr>
-        <p:spPr>
-          <a:xfrm>
-            <a:off x="2490339" y="3260260"/>
-            <a:ext cx="1000000" cy="300000"/>
-          </a:xfrm>
-          <a:prstGeom prst="rect">
-            <a:avLst/>
-          </a:prstGeom>
-          <a:noFill/>
-        </p:spPr>
-        <p:txBody>
-          <a:bodyPr wrap="none">
-            <a:spAutoFit/>
-          </a:bodyPr>
-          <a:lstStyle/>
-          <a:p>
-            <a:pPr algn="ctr"/>
-            <a:r>
-              <a:rPr sz="900" i="1">
-                <a:solidFill>
-                  <a:srgbClr val="323232"/>
-                </a:solidFill>
-              </a:rPr>
-              <a:t>speed &gt; 80</a:t>
-            </a:r>
-          </a:p>
-        </p:txBody>
-      </p:sp>
       <p:cxnSp>
         <p:nvCxnSpPr>
           <p:cNvPr id="17" name="Connector 16"/>
@@ -15234,40 +15103,6 @@
           </a:fontRef>
         </p:style>
       </p:cxnSp>
-      <p:sp>
-        <p:nvSpPr>
-          <p:cNvPr id="18" name="TextBox 17"/>
-          <p:cNvSpPr txBox="1"/>
-          <p:nvPr/>
-        </p:nvSpPr>
-        <p:spPr>
-          <a:xfrm>
-            <a:off x="5653660" y="3260260"/>
-            <a:ext cx="1000000" cy="300000"/>
-          </a:xfrm>
-          <a:prstGeom prst="rect">
-            <a:avLst/>
-          </a:prstGeom>
-          <a:noFill/>
-        </p:spPr>
-        <p:txBody>
-          <a:bodyPr wrap="none">
-            <a:spAutoFit/>
-          </a:bodyPr>
-          <a:lstStyle/>
-          <a:p>
-            <a:pPr algn="ctr"/>
-            <a:r>
-              <a:rPr sz="900" i="1">
-                <a:solidFill>
-                  <a:srgbClr val="323232"/>
-                </a:solidFill>
-              </a:rPr>
-              <a:t>speed &lt;=80</a:t>
-            </a:r>
-          </a:p>
-        </p:txBody>
-      </p:sp>
       <p:cxnSp>
         <p:nvCxnSpPr>
           <p:cNvPr id="19" name="Connector 18"/>
@@ -15304,40 +15139,6 @@
           </a:fontRef>
         </p:style>
       </p:cxnSp>
-      <p:sp>
-        <p:nvSpPr>
-          <p:cNvPr id="20" name="TextBox 19"/>
-          <p:cNvSpPr txBox="1"/>
-          <p:nvPr/>
-        </p:nvSpPr>
-        <p:spPr>
-          <a:xfrm>
-            <a:off x="4072000" y="4829022"/>
-            <a:ext cx="1000000" cy="300000"/>
-          </a:xfrm>
-          <a:prstGeom prst="rect">
-            <a:avLst/>
-          </a:prstGeom>
-          <a:noFill/>
-        </p:spPr>
-        <p:txBody>
-          <a:bodyPr wrap="none">
-            <a:spAutoFit/>
-          </a:bodyPr>
-          <a:lstStyle/>
-          <a:p>
-            <a:pPr algn="ctr"/>
-            <a:r>
-              <a:rPr sz="900" i="1">
-                <a:solidFill>
-                  <a:srgbClr val="323232"/>
-                </a:solidFill>
-              </a:rPr>
-              <a:t>start</a:t>
-            </a:r>
-          </a:p>
-        </p:txBody>
-      </p:sp>
       <p:cxnSp>
         <p:nvCxnSpPr>
           <p:cNvPr id="21" name="Connector 20"/>
@@ -15374,40 +15175,6 @@
           </a:fontRef>
         </p:style>
       </p:cxnSp>
-      <p:sp>
-        <p:nvSpPr>
-          <p:cNvPr id="22" name="TextBox 21"/>
-          <p:cNvSpPr txBox="1"/>
-          <p:nvPr/>
-        </p:nvSpPr>
-        <p:spPr>
-          <a:xfrm>
-            <a:off x="4072000" y="4829022"/>
-            <a:ext cx="1000000" cy="300000"/>
-          </a:xfrm>
-          <a:prstGeom prst="rect">
-            <a:avLst/>
-          </a:prstGeom>
-          <a:noFill/>
-        </p:spPr>
-        <p:txBody>
-          <a:bodyPr wrap="none">
-            <a:spAutoFit/>
-          </a:bodyPr>
-          <a:lstStyle/>
-          <a:p>
-            <a:pPr algn="ctr"/>
-            <a:r>
-              <a:rPr sz="900" i="1">
-                <a:solidFill>
-                  <a:srgbClr val="323232"/>
-                </a:solidFill>
-              </a:rPr>
-              <a:t>stop</a:t>
-            </a:r>
-          </a:p>
-        </p:txBody>
-      </p:sp>
       <p:cxnSp>
         <p:nvCxnSpPr>
           <p:cNvPr id="23" name="Connector 22"/>
@@ -15516,6 +15283,327 @@
           </a:fontRef>
         </p:style>
       </p:cxnSp>
+      <p:grpSp>
+        <p:grpSpPr>
+          <a:xfrm>
+            <a:off x="3372000" y="2707339"/>
+            <a:ext cx="2400000" cy="546814"/>
+            <a:chOff x="3372000" y="2707339"/>
+            <a:chExt cx="2400000" cy="546814"/>
+          </a:xfrm>
+        </p:grpSpPr>
+        <p:sp>
+          <p:nvSpPr>
+            <p:cNvPr id="7" name="Rounded Rectangle 6"/>
+            <p:cNvSpPr/>
+            <p:nvPr/>
+          </p:nvSpPr>
+          <p:spPr>
+            <a:xfrm>
+              <a:off x="3972000" y="2707339"/>
+              <a:ext cx="1200000" cy="500000"/>
+            </a:xfrm>
+            <a:prstGeom prst="roundRect">
+              <a:avLst/>
+            </a:prstGeom>
+            <a:solidFill>
+              <a:srgbClr val="FFFFFF"/>
+            </a:solidFill>
+            <a:ln>
+              <a:solidFill>
+                <a:srgbClr val="323250"/>
+              </a:solidFill>
+            </a:ln>
+          </p:spPr>
+          <p:style>
+            <a:lnRef idx="1">
+              <a:schemeClr val="accent1"/>
+            </a:lnRef>
+            <a:fillRef idx="3">
+              <a:schemeClr val="accent1"/>
+            </a:fillRef>
+            <a:effectRef idx="2">
+              <a:schemeClr val="accent1"/>
+            </a:effectRef>
+            <a:fontRef idx="minor">
+              <a:schemeClr val="lt1"/>
+            </a:fontRef>
+          </p:style>
+          <p:txBody>
+            <a:bodyPr rtlCol="0" anchor="ctr" wrap="none"/>
+            <a:lstStyle/>
+            <a:p>
+              <a:pPr algn="ctr"/>
+              <a:r>
+                <a:rPr sz="1100">
+                  <a:solidFill>
+                    <a:srgbClr val="000000"/>
+                  </a:solidFill>
+                </a:rPr>
+                <a:t>Check</a:t>
+              </a:r>
+            </a:p>
+          </p:txBody>
+        </p:sp>
+        <p:sp>
+          <p:nvSpPr>
+            <p:cNvPr id="16" name="TextBox 15"/>
+            <p:cNvSpPr txBox="1"/>
+            <p:nvPr/>
+          </p:nvSpPr>
+          <p:spPr>
+            <a:xfrm>
+              <a:off x="3372000" y="3004153"/>
+              <a:ext cx="1200000" cy="250000"/>
+            </a:xfrm>
+            <a:prstGeom prst="rect">
+              <a:avLst/>
+            </a:prstGeom>
+            <a:noFill/>
+            <a:ln>
+              <a:noFill/>
+            </a:ln>
+          </p:spPr>
+          <p:txBody>
+            <a:bodyPr wrap="none">
+              <a:spAutoFit/>
+            </a:bodyPr>
+            <a:lstStyle/>
+            <a:p>
+              <a:pPr/>
+              <a:r>
+                <a:rPr sz="1000" b="0"/>
+                <a:t>speed &gt; 80</a:t>
+              </a:r>
+            </a:p>
+          </p:txBody>
+        </p:sp>
+        <p:sp>
+          <p:nvSpPr>
+            <p:cNvPr id="18" name="TextBox 17"/>
+            <p:cNvSpPr txBox="1"/>
+            <p:nvPr/>
+          </p:nvSpPr>
+          <p:spPr>
+            <a:xfrm>
+              <a:off x="4572000" y="3004153"/>
+              <a:ext cx="1200000" cy="250000"/>
+            </a:xfrm>
+            <a:prstGeom prst="rect">
+              <a:avLst/>
+            </a:prstGeom>
+            <a:noFill/>
+            <a:ln>
+              <a:noFill/>
+            </a:ln>
+          </p:spPr>
+          <p:txBody>
+            <a:bodyPr wrap="none">
+              <a:spAutoFit/>
+            </a:bodyPr>
+            <a:lstStyle/>
+            <a:p>
+              <a:pPr/>
+              <a:r>
+                <a:rPr sz="1000" b="0"/>
+                <a:t>speed &lt;=80</a:t>
+              </a:r>
+            </a:p>
+          </p:txBody>
+        </p:sp>
+      </p:grpSp>
+      <p:grpSp>
+        <p:grpSpPr>
+          <a:xfrm>
+            <a:off x="3972000" y="4054022"/>
+            <a:ext cx="1200000" cy="625000"/>
+            <a:chOff x="3972000" y="4054022"/>
+            <a:chExt cx="1200000" cy="625000"/>
+          </a:xfrm>
+        </p:grpSpPr>
+        <p:sp>
+          <p:nvSpPr>
+            <p:cNvPr id="12" name="Rounded Rectangle 11"/>
+            <p:cNvSpPr/>
+            <p:nvPr/>
+          </p:nvSpPr>
+          <p:spPr>
+            <a:xfrm>
+              <a:off x="3972000" y="4054022"/>
+              <a:ext cx="1200000" cy="500000"/>
+            </a:xfrm>
+            <a:prstGeom prst="roundRect">
+              <a:avLst/>
+            </a:prstGeom>
+            <a:solidFill>
+              <a:srgbClr val="FFFFFF"/>
+            </a:solidFill>
+            <a:ln>
+              <a:solidFill>
+                <a:srgbClr val="323250"/>
+              </a:solidFill>
+            </a:ln>
+          </p:spPr>
+          <p:style>
+            <a:lnRef idx="1">
+              <a:schemeClr val="accent1"/>
+            </a:lnRef>
+            <a:fillRef idx="3">
+              <a:schemeClr val="accent1"/>
+            </a:fillRef>
+            <a:effectRef idx="2">
+              <a:schemeClr val="accent1"/>
+            </a:effectRef>
+            <a:fontRef idx="minor">
+              <a:schemeClr val="lt1"/>
+            </a:fontRef>
+          </p:style>
+          <p:txBody>
+            <a:bodyPr rtlCol="0" anchor="ctr" wrap="none"/>
+            <a:lstStyle/>
+            <a:p>
+              <a:pPr algn="ctr"/>
+              <a:r>
+                <a:rPr sz="1100">
+                  <a:solidFill>
+                    <a:srgbClr val="000000"/>
+                  </a:solidFill>
+                </a:rPr>
+                <a:t>Idle</a:t>
+              </a:r>
+            </a:p>
+          </p:txBody>
+        </p:sp>
+        <p:sp>
+          <p:nvSpPr>
+            <p:cNvPr id="20" name="TextBox 19"/>
+            <p:cNvSpPr txBox="1"/>
+            <p:nvPr/>
+          </p:nvSpPr>
+          <p:spPr>
+            <a:xfrm>
+              <a:off x="3972000" y="4429022"/>
+              <a:ext cx="1200000" cy="250000"/>
+            </a:xfrm>
+            <a:prstGeom prst="rect">
+              <a:avLst/>
+            </a:prstGeom>
+            <a:noFill/>
+            <a:ln>
+              <a:noFill/>
+            </a:ln>
+          </p:spPr>
+          <p:txBody>
+            <a:bodyPr wrap="none">
+              <a:spAutoFit/>
+            </a:bodyPr>
+            <a:lstStyle/>
+            <a:p>
+              <a:pPr/>
+              <a:r>
+                <a:rPr sz="1000" b="0"/>
+                <a:t>start</a:t>
+              </a:r>
+            </a:p>
+          </p:txBody>
+        </p:sp>
+      </p:grpSp>
+      <p:grpSp>
+        <p:grpSpPr>
+          <a:xfrm>
+            <a:off x="3972000" y="5279023"/>
+            <a:ext cx="1200000" cy="625000"/>
+            <a:chOff x="3972000" y="5279023"/>
+            <a:chExt cx="1200000" cy="625000"/>
+          </a:xfrm>
+        </p:grpSpPr>
+        <p:sp>
+          <p:nvSpPr>
+            <p:cNvPr id="13" name="Rounded Rectangle 12"/>
+            <p:cNvSpPr/>
+            <p:nvPr/>
+          </p:nvSpPr>
+          <p:spPr>
+            <a:xfrm>
+              <a:off x="3972000" y="5404023"/>
+              <a:ext cx="1200000" cy="500000"/>
+            </a:xfrm>
+            <a:prstGeom prst="roundRect">
+              <a:avLst/>
+            </a:prstGeom>
+            <a:solidFill>
+              <a:srgbClr val="FFFFFF"/>
+            </a:solidFill>
+            <a:ln>
+              <a:solidFill>
+                <a:srgbClr val="323250"/>
+              </a:solidFill>
+            </a:ln>
+          </p:spPr>
+          <p:style>
+            <a:lnRef idx="1">
+              <a:schemeClr val="accent1"/>
+            </a:lnRef>
+            <a:fillRef idx="3">
+              <a:schemeClr val="accent1"/>
+            </a:fillRef>
+            <a:effectRef idx="2">
+              <a:schemeClr val="accent1"/>
+            </a:effectRef>
+            <a:fontRef idx="minor">
+              <a:schemeClr val="lt1"/>
+            </a:fontRef>
+          </p:style>
+          <p:txBody>
+            <a:bodyPr rtlCol="0" anchor="ctr" wrap="none"/>
+            <a:lstStyle/>
+            <a:p>
+              <a:pPr algn="ctr"/>
+              <a:r>
+                <a:rPr sz="1100">
+                  <a:solidFill>
+                    <a:srgbClr val="000000"/>
+                  </a:solidFill>
+                </a:rPr>
+                <a:t>Moving</a:t>
+              </a:r>
+            </a:p>
+          </p:txBody>
+        </p:sp>
+        <p:sp>
+          <p:nvSpPr>
+            <p:cNvPr id="22" name="TextBox 21"/>
+            <p:cNvSpPr txBox="1"/>
+            <p:nvPr/>
+          </p:nvSpPr>
+          <p:spPr>
+            <a:xfrm>
+              <a:off x="3972000" y="5279023"/>
+              <a:ext cx="1200000" cy="250000"/>
+            </a:xfrm>
+            <a:prstGeom prst="rect">
+              <a:avLst/>
+            </a:prstGeom>
+            <a:noFill/>
+            <a:ln>
+              <a:noFill/>
+            </a:ln>
+          </p:spPr>
+          <p:txBody>
+            <a:bodyPr wrap="none">
+              <a:spAutoFit/>
+            </a:bodyPr>
+            <a:lstStyle/>
+            <a:p>
+              <a:pPr/>
+              <a:r>
+                <a:rPr sz="1000" b="0"/>
+                <a:t>stop</a:t>
+              </a:r>
+            </a:p>
+          </p:txBody>
+        </p:sp>
+      </p:grpSp>
     </p:spTree>
   </p:cSld>
   <p:clrMapOvr>

--- a/demo_full.pptx
+++ b/demo_full.pptx
@@ -13547,7 +13547,7 @@
         </p:nvSpPr>
         <p:spPr>
           <a:xfrm>
-            <a:off x="2272000" y="2188180"/>
+            <a:off x="2272000" y="3538181"/>
             <a:ext cx="4600000" cy="2420000"/>
           </a:xfrm>
           <a:prstGeom prst="roundRect">
@@ -13591,7 +13591,84 @@
         </p:nvSpPr>
         <p:spPr>
           <a:xfrm>
-            <a:off x="2272000" y="3538181"/>
+            <a:off x="2872000" y="2653181"/>
+            <a:ext cx="3400000" cy="2420000"/>
+          </a:xfrm>
+          <a:prstGeom prst="roundRect">
+            <a:avLst/>
+          </a:prstGeom>
+          <a:solidFill>
+            <a:srgbClr val="EEF4FF"/>
+          </a:solidFill>
+          <a:ln>
+            <a:solidFill>
+              <a:srgbClr val="4664AA"/>
+            </a:solidFill>
+          </a:ln>
+        </p:spPr>
+        <p:style>
+          <a:lnRef idx="1">
+            <a:schemeClr val="accent1"/>
+          </a:lnRef>
+          <a:fillRef idx="3">
+            <a:schemeClr val="accent1"/>
+          </a:fillRef>
+          <a:effectRef idx="2">
+            <a:schemeClr val="accent1"/>
+          </a:effectRef>
+          <a:fontRef idx="minor">
+            <a:schemeClr val="lt1"/>
+          </a:fontRef>
+        </p:style>
+        <p:txBody>
+          <a:bodyPr rtlCol="0" anchor="ctr"/>
+          <a:lstStyle/>
+          <a:p/>
+        </p:txBody>
+      </p:sp>
+      <p:sp>
+        <p:nvSpPr>
+          <p:cNvPr id="6" name="TextBox 5"/>
+          <p:cNvSpPr txBox="1"/>
+          <p:nvPr/>
+        </p:nvSpPr>
+        <p:spPr>
+          <a:xfrm>
+            <a:off x="2872000" y="2653181"/>
+            <a:ext cx="3400000" cy="420000"/>
+          </a:xfrm>
+          <a:prstGeom prst="rect">
+            <a:avLst/>
+          </a:prstGeom>
+          <a:noFill/>
+        </p:spPr>
+        <p:txBody>
+          <a:bodyPr wrap="none">
+            <a:spAutoFit/>
+          </a:bodyPr>
+          <a:lstStyle/>
+          <a:p>
+            <a:pPr algn="ctr"/>
+            <a:r>
+              <a:rPr sz="1100" b="1">
+                <a:solidFill>
+                  <a:srgbClr val="4664AA"/>
+                </a:solidFill>
+              </a:rPr>
+              <a:t>Active</a:t>
+            </a:r>
+          </a:p>
+        </p:txBody>
+      </p:sp>
+      <p:sp>
+        <p:nvSpPr>
+          <p:cNvPr id="7" name="Rounded Rectangle 6"/>
+          <p:cNvSpPr/>
+          <p:nvPr/>
+        </p:nvSpPr>
+        <p:spPr>
+          <a:xfrm>
+            <a:off x="2272000" y="2188180"/>
             <a:ext cx="4600000" cy="2420000"/>
           </a:xfrm>
           <a:prstGeom prst="roundRect">
@@ -13629,83 +13706,6 @@
       </p:sp>
       <p:sp>
         <p:nvSpPr>
-          <p:cNvPr id="6" name="Rounded Rectangle 5"/>
-          <p:cNvSpPr/>
-          <p:nvPr/>
-        </p:nvSpPr>
-        <p:spPr>
-          <a:xfrm>
-            <a:off x="2872000" y="2653181"/>
-            <a:ext cx="3400000" cy="2420000"/>
-          </a:xfrm>
-          <a:prstGeom prst="roundRect">
-            <a:avLst/>
-          </a:prstGeom>
-          <a:solidFill>
-            <a:srgbClr val="EEF4FF"/>
-          </a:solidFill>
-          <a:ln>
-            <a:solidFill>
-              <a:srgbClr val="4664AA"/>
-            </a:solidFill>
-          </a:ln>
-        </p:spPr>
-        <p:style>
-          <a:lnRef idx="1">
-            <a:schemeClr val="accent1"/>
-          </a:lnRef>
-          <a:fillRef idx="3">
-            <a:schemeClr val="accent1"/>
-          </a:fillRef>
-          <a:effectRef idx="2">
-            <a:schemeClr val="accent1"/>
-          </a:effectRef>
-          <a:fontRef idx="minor">
-            <a:schemeClr val="lt1"/>
-          </a:fontRef>
-        </p:style>
-        <p:txBody>
-          <a:bodyPr rtlCol="0" anchor="ctr"/>
-          <a:lstStyle/>
-          <a:p/>
-        </p:txBody>
-      </p:sp>
-      <p:sp>
-        <p:nvSpPr>
-          <p:cNvPr id="7" name="TextBox 6"/>
-          <p:cNvSpPr txBox="1"/>
-          <p:nvPr/>
-        </p:nvSpPr>
-        <p:spPr>
-          <a:xfrm>
-            <a:off x="2872000" y="2653181"/>
-            <a:ext cx="3400000" cy="420000"/>
-          </a:xfrm>
-          <a:prstGeom prst="rect">
-            <a:avLst/>
-          </a:prstGeom>
-          <a:noFill/>
-        </p:spPr>
-        <p:txBody>
-          <a:bodyPr wrap="none">
-            <a:spAutoFit/>
-          </a:bodyPr>
-          <a:lstStyle/>
-          <a:p>
-            <a:pPr algn="ctr"/>
-            <a:r>
-              <a:rPr sz="1100" b="1">
-                <a:solidFill>
-                  <a:srgbClr val="4664AA"/>
-                </a:solidFill>
-              </a:rPr>
-              <a:t>Active</a:t>
-            </a:r>
-          </a:p>
-        </p:txBody>
-      </p:sp>
-      <p:sp>
-        <p:nvSpPr>
           <p:cNvPr id="8" name="Oval 7"/>
           <p:cNvSpPr/>
           <p:nvPr/>
@@ -13966,7 +13966,7 @@
           <p:cNvPr id="18" name="Connector 17"/>
           <p:cNvCxnSpPr>
             <a:stCxn id="8" idx="1"/>
-            <a:endCxn id="6" idx="3"/>
+            <a:endCxn id="5" idx="3"/>
           </p:cNvCxnSpPr>
           <p:nvPr/>
         </p:nvCxnSpPr>
@@ -14217,7 +14217,7 @@
         <p:nvCxnSpPr>
           <p:cNvPr id="29" name="Connector 28"/>
           <p:cNvCxnSpPr>
-            <a:stCxn id="6" idx="1"/>
+            <a:stCxn id="5" idx="1"/>
             <a:endCxn id="9" idx="3"/>
           </p:cNvCxnSpPr>
           <p:nvPr/>
@@ -16465,12 +16465,20 @@
         </p:nvSpPr>
         <p:spPr>
           <a:xfrm>
-            <a:off x="2800400" y="3424464"/>
-            <a:ext cx="1200000" cy="500000"/>
-          </a:xfrm>
-          <a:prstGeom prst="rect">
-            <a:avLst/>
-          </a:prstGeom>
+            <a:off x="3922000" y="3603181"/>
+            <a:ext cx="1300000" cy="520000"/>
+          </a:xfrm>
+          <a:prstGeom prst="ellipse">
+            <a:avLst/>
+          </a:prstGeom>
+          <a:solidFill>
+            <a:srgbClr val="4646B4"/>
+          </a:solidFill>
+          <a:ln>
+            <a:solidFill>
+              <a:srgbClr val="1E1E8C"/>
+            </a:solidFill>
+          </a:ln>
         </p:spPr>
         <p:style>
           <a:lnRef idx="1">
@@ -16487,12 +16495,16 @@
           </a:fontRef>
         </p:style>
         <p:txBody>
-          <a:bodyPr rtlCol="0" anchor="ctr"/>
-          <a:lstStyle/>
-          <a:p>
-            <a:r>
-              <a:rPr sz="1200"/>
-              <a:t>qmd_to_pptx</a:t>
+          <a:bodyPr rtlCol="0" anchor="ctr" wrap="square"/>
+          <a:lstStyle/>
+          <a:p>
+            <a:r>
+              <a:rPr sz="1100">
+                <a:solidFill>
+                  <a:srgbClr val="1E1E1E"/>
+                </a:solidFill>
+              </a:rPr>
+              <a:t>プログラミング言語</a:t>
             </a:r>
           </a:p>
         </p:txBody>
@@ -16505,12 +16517,20 @@
         </p:nvSpPr>
         <p:spPr>
           <a:xfrm>
-            <a:off x="5143600" y="1851822"/>
-            <a:ext cx="1200000" cy="500000"/>
-          </a:xfrm>
-          <a:prstGeom prst="rect">
-            <a:avLst/>
-          </a:prstGeom>
+            <a:off x="4531971" y="3895743"/>
+            <a:ext cx="1000000" cy="400000"/>
+          </a:xfrm>
+          <a:prstGeom prst="roundRect">
+            <a:avLst/>
+          </a:prstGeom>
+          <a:solidFill>
+            <a:srgbClr val="E74C3C"/>
+          </a:solidFill>
+          <a:ln>
+            <a:solidFill>
+              <a:srgbClr val="BF2414"/>
+            </a:solidFill>
+          </a:ln>
         </p:spPr>
         <p:style>
           <a:lnRef idx="1">
@@ -16527,12 +16547,16 @@
           </a:fontRef>
         </p:style>
         <p:txBody>
-          <a:bodyPr rtlCol="0" anchor="ctr"/>
-          <a:lstStyle/>
-          <a:p>
-            <a:r>
-              <a:rPr sz="1200"/>
-              <a:t>入力形式</a:t>
+          <a:bodyPr rtlCol="0" anchor="ctr" wrap="square"/>
+          <a:lstStyle/>
+          <a:p>
+            <a:r>
+              <a:rPr sz="1000">
+                <a:solidFill>
+                  <a:srgbClr val="1E1E1E"/>
+                </a:solidFill>
+              </a:rPr>
+              <a:t>スクリプト系</a:t>
             </a:r>
           </a:p>
         </p:txBody>
@@ -16545,12 +16569,20 @@
         </p:nvSpPr>
         <p:spPr>
           <a:xfrm>
-            <a:off x="7486800" y="1600200"/>
-            <a:ext cx="1200000" cy="500000"/>
-          </a:xfrm>
-          <a:prstGeom prst="rect">
-            <a:avLst/>
-          </a:prstGeom>
+            <a:off x="5265318" y="3831040"/>
+            <a:ext cx="1000000" cy="400000"/>
+          </a:xfrm>
+          <a:prstGeom prst="ellipse">
+            <a:avLst/>
+          </a:prstGeom>
+          <a:solidFill>
+            <a:srgbClr val="F0938A"/>
+          </a:solidFill>
+          <a:ln>
+            <a:solidFill>
+              <a:srgbClr val="C86B62"/>
+            </a:solidFill>
+          </a:ln>
         </p:spPr>
         <p:style>
           <a:lnRef idx="1">
@@ -16567,12 +16599,16 @@
           </a:fontRef>
         </p:style>
         <p:txBody>
-          <a:bodyPr rtlCol="0" anchor="ctr"/>
-          <a:lstStyle/>
-          <a:p>
-            <a:r>
-              <a:rPr sz="1200"/>
-              <a:t>QMD</a:t>
+          <a:bodyPr rtlCol="0" anchor="ctr" wrap="square"/>
+          <a:lstStyle/>
+          <a:p>
+            <a:r>
+              <a:rPr sz="1000">
+                <a:solidFill>
+                  <a:srgbClr val="1E1E1E"/>
+                </a:solidFill>
+              </a:rPr>
+              <a:t>Python</a:t>
             </a:r>
           </a:p>
         </p:txBody>
@@ -16585,12 +16621,20 @@
         </p:nvSpPr>
         <p:spPr>
           <a:xfrm>
-            <a:off x="7486800" y="2103445"/>
-            <a:ext cx="1200000" cy="500000"/>
-          </a:xfrm>
-          <a:prstGeom prst="rect">
-            <a:avLst/>
-          </a:prstGeom>
+            <a:off x="4991943" y="4128304"/>
+            <a:ext cx="1000000" cy="400000"/>
+          </a:xfrm>
+          <a:prstGeom prst="ellipse">
+            <a:avLst/>
+          </a:prstGeom>
+          <a:solidFill>
+            <a:srgbClr val="F0938A"/>
+          </a:solidFill>
+          <a:ln>
+            <a:solidFill>
+              <a:srgbClr val="C86B62"/>
+            </a:solidFill>
+          </a:ln>
         </p:spPr>
         <p:style>
           <a:lnRef idx="1">
@@ -16607,12 +16651,16 @@
           </a:fontRef>
         </p:style>
         <p:txBody>
-          <a:bodyPr rtlCol="0" anchor="ctr"/>
-          <a:lstStyle/>
-          <a:p>
-            <a:r>
-              <a:rPr sz="1200"/>
-              <a:t>Markdown</a:t>
+          <a:bodyPr rtlCol="0" anchor="ctr" wrap="square"/>
+          <a:lstStyle/>
+          <a:p>
+            <a:r>
+              <a:rPr sz="1000">
+                <a:solidFill>
+                  <a:srgbClr val="1E1E1E"/>
+                </a:solidFill>
+              </a:rPr>
+              <a:t>Ruby</a:t>
             </a:r>
           </a:p>
         </p:txBody>
@@ -16625,12 +16673,20 @@
         </p:nvSpPr>
         <p:spPr>
           <a:xfrm>
-            <a:off x="5143600" y="2606690"/>
-            <a:ext cx="1200000" cy="500000"/>
-          </a:xfrm>
-          <a:prstGeom prst="rect">
-            <a:avLst/>
-          </a:prstGeom>
+            <a:off x="4507820" y="4319014"/>
+            <a:ext cx="1000000" cy="400000"/>
+          </a:xfrm>
+          <a:prstGeom prst="ellipse">
+            <a:avLst/>
+          </a:prstGeom>
+          <a:solidFill>
+            <a:srgbClr val="F0938A"/>
+          </a:solidFill>
+          <a:ln>
+            <a:solidFill>
+              <a:srgbClr val="C86B62"/>
+            </a:solidFill>
+          </a:ln>
         </p:spPr>
         <p:style>
           <a:lnRef idx="1">
@@ -16647,12 +16703,16 @@
           </a:fontRef>
         </p:style>
         <p:txBody>
-          <a:bodyPr rtlCol="0" anchor="ctr"/>
-          <a:lstStyle/>
-          <a:p>
-            <a:r>
-              <a:rPr sz="1200"/>
-              <a:t>出力</a:t>
+          <a:bodyPr rtlCol="0" anchor="ctr" wrap="square"/>
+          <a:lstStyle/>
+          <a:p>
+            <a:r>
+              <a:rPr sz="1000">
+                <a:solidFill>
+                  <a:srgbClr val="1E1E1E"/>
+                </a:solidFill>
+              </a:rPr>
+              <a:t>JavaScript</a:t>
             </a:r>
           </a:p>
         </p:txBody>
@@ -16665,12 +16725,20 @@
         </p:nvSpPr>
         <p:spPr>
           <a:xfrm>
-            <a:off x="7486800" y="2606690"/>
-            <a:ext cx="1200000" cy="500000"/>
+            <a:off x="3722915" y="3951807"/>
+            <a:ext cx="1000000" cy="400000"/>
           </a:xfrm>
           <a:prstGeom prst="rect">
             <a:avLst/>
           </a:prstGeom>
+          <a:solidFill>
+            <a:srgbClr val="E67E22"/>
+          </a:solidFill>
+          <a:ln>
+            <a:solidFill>
+              <a:srgbClr val="BE5600"/>
+            </a:solidFill>
+          </a:ln>
         </p:spPr>
         <p:style>
           <a:lnRef idx="1">
@@ -16687,12 +16755,16 @@
           </a:fontRef>
         </p:style>
         <p:txBody>
-          <a:bodyPr rtlCol="0" anchor="ctr"/>
-          <a:lstStyle/>
-          <a:p>
-            <a:r>
-              <a:rPr sz="1200"/>
-              <a:t>PPTX</a:t>
+          <a:bodyPr rtlCol="0" anchor="ctr" wrap="square"/>
+          <a:lstStyle/>
+          <a:p>
+            <a:r>
+              <a:rPr sz="1000">
+                <a:solidFill>
+                  <a:srgbClr val="1E1E1E"/>
+                </a:solidFill>
+              </a:rPr>
+              <a:t>静的型付け</a:t>
             </a:r>
           </a:p>
         </p:txBody>
@@ -16705,12 +16777,20 @@
         </p:nvSpPr>
         <p:spPr>
           <a:xfrm>
-            <a:off x="5143600" y="3864804"/>
-            <a:ext cx="1200000" cy="500000"/>
-          </a:xfrm>
-          <a:prstGeom prst="rect">
-            <a:avLst/>
-          </a:prstGeom>
+            <a:off x="3923856" y="4359481"/>
+            <a:ext cx="1000000" cy="400000"/>
+          </a:xfrm>
+          <a:prstGeom prst="hexagon">
+            <a:avLst/>
+          </a:prstGeom>
+          <a:solidFill>
+            <a:srgbClr val="F0B17A"/>
+          </a:solidFill>
+          <a:ln>
+            <a:solidFill>
+              <a:srgbClr val="C88952"/>
+            </a:solidFill>
+          </a:ln>
         </p:spPr>
         <p:style>
           <a:lnRef idx="1">
@@ -16727,12 +16807,16 @@
           </a:fontRef>
         </p:style>
         <p:txBody>
-          <a:bodyPr rtlCol="0" anchor="ctr"/>
-          <a:lstStyle/>
-          <a:p>
-            <a:r>
-              <a:rPr sz="1200"/>
-              <a:t>機能</a:t>
+          <a:bodyPr rtlCol="0" anchor="ctr" wrap="square"/>
+          <a:lstStyle/>
+          <a:p>
+            <a:r>
+              <a:rPr sz="1000">
+                <a:solidFill>
+                  <a:srgbClr val="1E1E1E"/>
+                </a:solidFill>
+              </a:rPr>
+              <a:t>Rust</a:t>
             </a:r>
           </a:p>
         </p:txBody>
@@ -16745,12 +16829,20 @@
         </p:nvSpPr>
         <p:spPr>
           <a:xfrm>
-            <a:off x="7486800" y="3109936"/>
-            <a:ext cx="1200000" cy="500000"/>
-          </a:xfrm>
-          <a:prstGeom prst="rect">
-            <a:avLst/>
-          </a:prstGeom>
+            <a:off x="3373830" y="4240433"/>
+            <a:ext cx="1000000" cy="400000"/>
+          </a:xfrm>
+          <a:prstGeom prst="hexagon">
+            <a:avLst/>
+          </a:prstGeom>
+          <a:solidFill>
+            <a:srgbClr val="F0B17A"/>
+          </a:solidFill>
+          <a:ln>
+            <a:solidFill>
+              <a:srgbClr val="C88952"/>
+            </a:solidFill>
+          </a:ln>
         </p:spPr>
         <p:style>
           <a:lnRef idx="1">
@@ -16767,12 +16859,16 @@
           </a:fontRef>
         </p:style>
         <p:txBody>
-          <a:bodyPr rtlCol="0" anchor="ctr"/>
-          <a:lstStyle/>
-          <a:p>
-            <a:r>
-              <a:rPr sz="1200"/>
-              <a:t>数式</a:t>
+          <a:bodyPr rtlCol="0" anchor="ctr" wrap="square"/>
+          <a:lstStyle/>
+          <a:p>
+            <a:r>
+              <a:rPr sz="1000">
+                <a:solidFill>
+                  <a:srgbClr val="1E1E1E"/>
+                </a:solidFill>
+              </a:rPr>
+              <a:t>Go</a:t>
             </a:r>
           </a:p>
         </p:txBody>
@@ -16785,12 +16881,20 @@
         </p:nvSpPr>
         <p:spPr>
           <a:xfrm>
-            <a:off x="7486800" y="3613181"/>
-            <a:ext cx="1200000" cy="500000"/>
-          </a:xfrm>
-          <a:prstGeom prst="rect">
-            <a:avLst/>
-          </a:prstGeom>
+            <a:off x="2983746" y="3989144"/>
+            <a:ext cx="1000000" cy="400000"/>
+          </a:xfrm>
+          <a:prstGeom prst="roundRect">
+            <a:avLst/>
+          </a:prstGeom>
+          <a:solidFill>
+            <a:srgbClr val="F0B17A"/>
+          </a:solidFill>
+          <a:ln>
+            <a:solidFill>
+              <a:srgbClr val="C88952"/>
+            </a:solidFill>
+          </a:ln>
         </p:spPr>
         <p:style>
           <a:lnRef idx="1">
@@ -16807,12 +16911,16 @@
           </a:fontRef>
         </p:style>
         <p:txBody>
-          <a:bodyPr rtlCol="0" anchor="ctr"/>
-          <a:lstStyle/>
-          <a:p>
-            <a:r>
-              <a:rPr sz="1200"/>
-              <a:t>Mermaid図</a:t>
+          <a:bodyPr rtlCol="0" anchor="ctr" wrap="square"/>
+          <a:lstStyle/>
+          <a:p>
+            <a:r>
+              <a:rPr sz="1000">
+                <a:solidFill>
+                  <a:srgbClr val="1E1E1E"/>
+                </a:solidFill>
+              </a:rPr>
+              <a:t>Java</a:t>
             </a:r>
           </a:p>
         </p:txBody>
@@ -16825,12 +16933,20 @@
         </p:nvSpPr>
         <p:spPr>
           <a:xfrm>
-            <a:off x="7486800" y="4116426"/>
-            <a:ext cx="1200000" cy="500000"/>
-          </a:xfrm>
-          <a:prstGeom prst="rect">
-            <a:avLst/>
-          </a:prstGeom>
+            <a:off x="3475340" y="3579251"/>
+            <a:ext cx="1000000" cy="400000"/>
+          </a:xfrm>
+          <a:prstGeom prst="roundRect">
+            <a:avLst/>
+          </a:prstGeom>
+          <a:solidFill>
+            <a:srgbClr val="F1C40F"/>
+          </a:solidFill>
+          <a:ln>
+            <a:solidFill>
+              <a:srgbClr val="C99C00"/>
+            </a:solidFill>
+          </a:ln>
         </p:spPr>
         <p:style>
           <a:lnRef idx="1">
@@ -16847,12 +16963,16 @@
           </a:fontRef>
         </p:style>
         <p:txBody>
-          <a:bodyPr rtlCol="0" anchor="ctr"/>
-          <a:lstStyle/>
-          <a:p>
-            <a:r>
-              <a:rPr sz="1200"/>
-              <a:t>テーブル</a:t>
+          <a:bodyPr rtlCol="0" anchor="ctr" wrap="square"/>
+          <a:lstStyle/>
+          <a:p>
+            <a:r>
+              <a:rPr sz="1000">
+                <a:solidFill>
+                  <a:srgbClr val="1E1E1E"/>
+                </a:solidFill>
+              </a:rPr>
+              <a:t>関数型</a:t>
             </a:r>
           </a:p>
         </p:txBody>
@@ -16865,12 +16985,20 @@
         </p:nvSpPr>
         <p:spPr>
           <a:xfrm>
-            <a:off x="7486800" y="4619672"/>
-            <a:ext cx="1200000" cy="500000"/>
-          </a:xfrm>
-          <a:prstGeom prst="rect">
-            <a:avLst/>
-          </a:prstGeom>
+            <a:off x="2842967" y="3663181"/>
+            <a:ext cx="1000000" cy="400000"/>
+          </a:xfrm>
+          <a:prstGeom prst="irregularSeal1">
+            <a:avLst/>
+          </a:prstGeom>
+          <a:solidFill>
+            <a:srgbClr val="F6DB6F"/>
+          </a:solidFill>
+          <a:ln>
+            <a:solidFill>
+              <a:srgbClr val="CEB347"/>
+            </a:solidFill>
+          </a:ln>
         </p:spPr>
         <p:style>
           <a:lnRef idx="1">
@@ -16887,12 +17015,16 @@
           </a:fontRef>
         </p:style>
         <p:txBody>
-          <a:bodyPr rtlCol="0" anchor="ctr"/>
-          <a:lstStyle/>
-          <a:p>
-            <a:r>
-              <a:rPr sz="1200"/>
-              <a:t>コード</a:t>
+          <a:bodyPr rtlCol="0" anchor="ctr" wrap="square"/>
+          <a:lstStyle/>
+          <a:p>
+            <a:r>
+              <a:rPr sz="1000">
+                <a:solidFill>
+                  <a:srgbClr val="1E1E1E"/>
+                </a:solidFill>
+              </a:rPr>
+              <a:t>Haskell</a:t>
             </a:r>
           </a:p>
         </p:txBody>
@@ -16905,12 +17037,20 @@
         </p:nvSpPr>
         <p:spPr>
           <a:xfrm>
-            <a:off x="5143600" y="5374540"/>
-            <a:ext cx="1200000" cy="500000"/>
-          </a:xfrm>
-          <a:prstGeom prst="rect">
-            <a:avLst/>
-          </a:prstGeom>
+            <a:off x="2983746" y="3337218"/>
+            <a:ext cx="1000000" cy="400000"/>
+          </a:xfrm>
+          <a:prstGeom prst="irregularSeal1">
+            <a:avLst/>
+          </a:prstGeom>
+          <a:solidFill>
+            <a:srgbClr val="F6DB6F"/>
+          </a:solidFill>
+          <a:ln>
+            <a:solidFill>
+              <a:srgbClr val="CEB347"/>
+            </a:solidFill>
+          </a:ln>
         </p:spPr>
         <p:style>
           <a:lnRef idx="1">
@@ -16927,12 +17067,16 @@
           </a:fontRef>
         </p:style>
         <p:txBody>
-          <a:bodyPr rtlCol="0" anchor="ctr"/>
-          <a:lstStyle/>
-          <a:p>
-            <a:r>
-              <a:rPr sz="1200"/>
-              <a:t>利用方法</a:t>
+          <a:bodyPr rtlCol="0" anchor="ctr" wrap="square"/>
+          <a:lstStyle/>
+          <a:p>
+            <a:r>
+              <a:rPr sz="1000">
+                <a:solidFill>
+                  <a:srgbClr val="1E1E1E"/>
+                </a:solidFill>
+              </a:rPr>
+              <a:t>Erlang</a:t>
             </a:r>
           </a:p>
         </p:txBody>
@@ -16945,12 +17089,20 @@
         </p:nvSpPr>
         <p:spPr>
           <a:xfrm>
-            <a:off x="7486800" y="5122917"/>
-            <a:ext cx="1200000" cy="500000"/>
-          </a:xfrm>
-          <a:prstGeom prst="rect">
-            <a:avLst/>
-          </a:prstGeom>
+            <a:off x="3997928" y="3315031"/>
+            <a:ext cx="1000000" cy="400000"/>
+          </a:xfrm>
+          <a:prstGeom prst="roundRect">
+            <a:avLst/>
+          </a:prstGeom>
+          <a:solidFill>
+            <a:srgbClr val="27AE60"/>
+          </a:solidFill>
+          <a:ln>
+            <a:solidFill>
+              <a:srgbClr val="008638"/>
+            </a:solidFill>
+          </a:ln>
         </p:spPr>
         <p:style>
           <a:lnRef idx="1">
@@ -16967,12 +17119,16 @@
           </a:fontRef>
         </p:style>
         <p:txBody>
-          <a:bodyPr rtlCol="0" anchor="ctr"/>
-          <a:lstStyle/>
-          <a:p>
-            <a:r>
-              <a:rPr sz="1200"/>
-              <a:t>ライブラリ</a:t>
+          <a:bodyPr rtlCol="0" anchor="ctr" wrap="square"/>
+          <a:lstStyle/>
+          <a:p>
+            <a:r>
+              <a:rPr sz="1000">
+                <a:solidFill>
+                  <a:srgbClr val="1E1E1E"/>
+                </a:solidFill>
+              </a:rPr>
+              <a:t>Web</a:t>
             </a:r>
           </a:p>
         </p:txBody>
@@ -16985,12 +17141,20 @@
         </p:nvSpPr>
         <p:spPr>
           <a:xfrm>
-            <a:off x="7486800" y="5626163"/>
-            <a:ext cx="1200000" cy="500000"/>
+            <a:off x="3373830" y="3085929"/>
+            <a:ext cx="1000000" cy="400000"/>
           </a:xfrm>
           <a:prstGeom prst="rect">
             <a:avLst/>
           </a:prstGeom>
+          <a:solidFill>
+            <a:srgbClr val="7DCE9F"/>
+          </a:solidFill>
+          <a:ln>
+            <a:solidFill>
+              <a:srgbClr val="55A677"/>
+            </a:solidFill>
+          </a:ln>
         </p:spPr>
         <p:style>
           <a:lnRef idx="1">
@@ -17007,198 +17171,302 @@
           </a:fontRef>
         </p:style>
         <p:txBody>
-          <a:bodyPr rtlCol="0" anchor="ctr"/>
-          <a:lstStyle/>
-          <a:p>
-            <a:r>
-              <a:rPr sz="1200"/>
-              <a:t>MCPサーバー</a:t>
-            </a:r>
-          </a:p>
-        </p:txBody>
-      </p:sp>
-      <p:cxnSp>
-        <p:nvCxnSpPr>
-          <p:cNvPr id="18" name="Connector 17"/>
-          <p:cNvCxnSpPr>
-            <a:stCxn id="4" idx="0"/>
-            <a:endCxn id="5" idx="2"/>
-          </p:cNvCxnSpPr>
-          <p:nvPr/>
-        </p:nvCxnSpPr>
-        <p:spPr>
-          <a:xfrm flipV="1">
-            <a:off x="3400400" y="2351822"/>
-            <a:ext cx="2343200" cy="1072642"/>
-          </a:xfrm>
-          <a:prstGeom prst="curvedConnector3">
-            <a:avLst/>
-          </a:prstGeom>
+          <a:bodyPr rtlCol="0" anchor="ctr" wrap="square"/>
+          <a:lstStyle/>
+          <a:p>
+            <a:r>
+              <a:rPr sz="1000">
+                <a:solidFill>
+                  <a:srgbClr val="1E1E1E"/>
+                </a:solidFill>
+              </a:rPr>
+              <a:t>HTML</a:t>
+            </a:r>
+          </a:p>
+        </p:txBody>
+      </p:sp>
+      <p:sp>
+        <p:nvSpPr>
+          <p:cNvPr id="18" name="Rectangle 17"/>
+          <p:cNvSpPr/>
+          <p:nvPr/>
+        </p:nvSpPr>
+        <p:spPr>
+          <a:xfrm>
+            <a:off x="3923856" y="2966881"/>
+            <a:ext cx="1000000" cy="400000"/>
+          </a:xfrm>
+          <a:prstGeom prst="rect">
+            <a:avLst/>
+          </a:prstGeom>
+          <a:solidFill>
+            <a:srgbClr val="7DCE9F"/>
+          </a:solidFill>
+          <a:ln>
+            <a:solidFill>
+              <a:srgbClr val="55A677"/>
+            </a:solidFill>
+          </a:ln>
         </p:spPr>
         <p:style>
-          <a:lnRef idx="2">
+          <a:lnRef idx="1">
             <a:schemeClr val="accent1"/>
           </a:lnRef>
-          <a:fillRef idx="0">
+          <a:fillRef idx="3">
             <a:schemeClr val="accent1"/>
           </a:fillRef>
-          <a:effectRef idx="1">
+          <a:effectRef idx="2">
             <a:schemeClr val="accent1"/>
           </a:effectRef>
           <a:fontRef idx="minor">
-            <a:schemeClr val="tx1"/>
+            <a:schemeClr val="lt1"/>
           </a:fontRef>
         </p:style>
-      </p:cxnSp>
-      <p:cxnSp>
-        <p:nvCxnSpPr>
-          <p:cNvPr id="19" name="Connector 18"/>
-          <p:cNvCxnSpPr>
-            <a:stCxn id="5" idx="1"/>
-            <a:endCxn id="6" idx="3"/>
-          </p:cNvCxnSpPr>
-          <p:nvPr/>
-        </p:nvCxnSpPr>
-        <p:spPr>
-          <a:xfrm flipV="1">
-            <a:off x="5143600" y="1850200"/>
-            <a:ext cx="3543200" cy="251622"/>
-          </a:xfrm>
-          <a:prstGeom prst="curvedConnector3">
-            <a:avLst/>
-          </a:prstGeom>
+        <p:txBody>
+          <a:bodyPr rtlCol="0" anchor="ctr" wrap="square"/>
+          <a:lstStyle/>
+          <a:p>
+            <a:r>
+              <a:rPr sz="1000">
+                <a:solidFill>
+                  <a:srgbClr val="1E1E1E"/>
+                </a:solidFill>
+              </a:rPr>
+              <a:t>CSS</a:t>
+            </a:r>
+          </a:p>
+        </p:txBody>
+      </p:sp>
+      <p:sp>
+        <p:nvSpPr>
+          <p:cNvPr id="19" name="Rectangle 18"/>
+          <p:cNvSpPr/>
+          <p:nvPr/>
+        </p:nvSpPr>
+        <p:spPr>
+          <a:xfrm>
+            <a:off x="4507820" y="3007348"/>
+            <a:ext cx="1000000" cy="400000"/>
+          </a:xfrm>
+          <a:prstGeom prst="roundRect">
+            <a:avLst/>
+          </a:prstGeom>
+          <a:solidFill>
+            <a:srgbClr val="7DCE9F"/>
+          </a:solidFill>
+          <a:ln>
+            <a:solidFill>
+              <a:srgbClr val="55A677"/>
+            </a:solidFill>
+          </a:ln>
         </p:spPr>
         <p:style>
-          <a:lnRef idx="2">
+          <a:lnRef idx="1">
             <a:schemeClr val="accent1"/>
           </a:lnRef>
-          <a:fillRef idx="0">
+          <a:fillRef idx="3">
             <a:schemeClr val="accent1"/>
           </a:fillRef>
-          <a:effectRef idx="1">
+          <a:effectRef idx="2">
             <a:schemeClr val="accent1"/>
           </a:effectRef>
           <a:fontRef idx="minor">
-            <a:schemeClr val="tx1"/>
+            <a:schemeClr val="lt1"/>
           </a:fontRef>
         </p:style>
-      </p:cxnSp>
-      <p:cxnSp>
-        <p:nvCxnSpPr>
-          <p:cNvPr id="20" name="Connector 19"/>
-          <p:cNvCxnSpPr>
-            <a:stCxn id="5" idx="1"/>
-            <a:endCxn id="7" idx="3"/>
-          </p:cNvCxnSpPr>
-          <p:nvPr/>
-        </p:nvCxnSpPr>
-        <p:spPr>
-          <a:xfrm>
-            <a:off x="5143600" y="2101822"/>
-            <a:ext cx="3543200" cy="251623"/>
-          </a:xfrm>
-          <a:prstGeom prst="curvedConnector3">
-            <a:avLst/>
-          </a:prstGeom>
+        <p:txBody>
+          <a:bodyPr rtlCol="0" anchor="ctr" wrap="square"/>
+          <a:lstStyle/>
+          <a:p>
+            <a:r>
+              <a:rPr sz="1000">
+                <a:solidFill>
+                  <a:srgbClr val="1E1E1E"/>
+                </a:solidFill>
+              </a:rPr>
+              <a:t>TypeScript</a:t>
+            </a:r>
+          </a:p>
+        </p:txBody>
+      </p:sp>
+      <p:sp>
+        <p:nvSpPr>
+          <p:cNvPr id="20" name="Rectangle 19"/>
+          <p:cNvSpPr/>
+          <p:nvPr/>
+        </p:nvSpPr>
+        <p:spPr>
+          <a:xfrm>
+            <a:off x="4616126" y="3500199"/>
+            <a:ext cx="1000000" cy="400000"/>
+          </a:xfrm>
+          <a:prstGeom prst="cloud">
+            <a:avLst/>
+          </a:prstGeom>
+          <a:solidFill>
+            <a:srgbClr val="1ABC9C"/>
+          </a:solidFill>
+          <a:ln>
+            <a:solidFill>
+              <a:srgbClr val="009474"/>
+            </a:solidFill>
+          </a:ln>
         </p:spPr>
         <p:style>
-          <a:lnRef idx="2">
+          <a:lnRef idx="1">
             <a:schemeClr val="accent1"/>
           </a:lnRef>
-          <a:fillRef idx="0">
+          <a:fillRef idx="3">
             <a:schemeClr val="accent1"/>
           </a:fillRef>
-          <a:effectRef idx="1">
+          <a:effectRef idx="2">
             <a:schemeClr val="accent1"/>
           </a:effectRef>
           <a:fontRef idx="minor">
-            <a:schemeClr val="tx1"/>
+            <a:schemeClr val="lt1"/>
           </a:fontRef>
         </p:style>
-      </p:cxnSp>
-      <p:cxnSp>
-        <p:nvCxnSpPr>
-          <p:cNvPr id="21" name="Connector 20"/>
-          <p:cNvCxnSpPr>
-            <a:stCxn id="4" idx="1"/>
-            <a:endCxn id="8" idx="3"/>
-          </p:cNvCxnSpPr>
-          <p:nvPr/>
-        </p:nvCxnSpPr>
-        <p:spPr>
-          <a:xfrm flipV="1">
-            <a:off x="2800400" y="2856690"/>
-            <a:ext cx="3543200" cy="817774"/>
-          </a:xfrm>
-          <a:prstGeom prst="curvedConnector3">
-            <a:avLst/>
-          </a:prstGeom>
+        <p:txBody>
+          <a:bodyPr rtlCol="0" anchor="ctr" wrap="square"/>
+          <a:lstStyle/>
+          <a:p>
+            <a:r>
+              <a:rPr sz="1000">
+                <a:solidFill>
+                  <a:srgbClr val="1E1E1E"/>
+                </a:solidFill>
+              </a:rPr>
+              <a:t>クエリ言語</a:t>
+            </a:r>
+          </a:p>
+        </p:txBody>
+      </p:sp>
+      <p:sp>
+        <p:nvSpPr>
+          <p:cNvPr id="21" name="Rectangle 20"/>
+          <p:cNvSpPr/>
+          <p:nvPr/>
+        </p:nvSpPr>
+        <p:spPr>
+          <a:xfrm>
+            <a:off x="4991943" y="3198058"/>
+            <a:ext cx="1000000" cy="400000"/>
+          </a:xfrm>
+          <a:prstGeom prst="rect">
+            <a:avLst/>
+          </a:prstGeom>
+          <a:solidFill>
+            <a:srgbClr val="75D6C3"/>
+          </a:solidFill>
+          <a:ln>
+            <a:solidFill>
+              <a:srgbClr val="4DAE9B"/>
+            </a:solidFill>
+          </a:ln>
         </p:spPr>
         <p:style>
-          <a:lnRef idx="2">
+          <a:lnRef idx="1">
             <a:schemeClr val="accent1"/>
           </a:lnRef>
-          <a:fillRef idx="0">
+          <a:fillRef idx="3">
             <a:schemeClr val="accent1"/>
           </a:fillRef>
-          <a:effectRef idx="1">
+          <a:effectRef idx="2">
             <a:schemeClr val="accent1"/>
           </a:effectRef>
           <a:fontRef idx="minor">
-            <a:schemeClr val="tx1"/>
+            <a:schemeClr val="lt1"/>
           </a:fontRef>
         </p:style>
-      </p:cxnSp>
-      <p:cxnSp>
-        <p:nvCxnSpPr>
-          <p:cNvPr id="22" name="Connector 21"/>
-          <p:cNvCxnSpPr>
-            <a:stCxn id="8" idx="1"/>
-            <a:endCxn id="9" idx="3"/>
-          </p:cNvCxnSpPr>
-          <p:nvPr/>
-        </p:nvCxnSpPr>
-        <p:spPr>
-          <a:xfrm>
-            <a:off x="5143600" y="2856690"/>
-            <a:ext cx="3543200" cy="0"/>
-          </a:xfrm>
-          <a:prstGeom prst="curvedConnector3">
-            <a:avLst/>
-          </a:prstGeom>
+        <p:txBody>
+          <a:bodyPr rtlCol="0" anchor="ctr" wrap="square"/>
+          <a:lstStyle/>
+          <a:p>
+            <a:r>
+              <a:rPr sz="1000">
+                <a:solidFill>
+                  <a:srgbClr val="1E1E1E"/>
+                </a:solidFill>
+              </a:rPr>
+              <a:t>SQL</a:t>
+            </a:r>
+          </a:p>
+        </p:txBody>
+      </p:sp>
+      <p:sp>
+        <p:nvSpPr>
+          <p:cNvPr id="22" name="Rectangle 21"/>
+          <p:cNvSpPr/>
+          <p:nvPr/>
+        </p:nvSpPr>
+        <p:spPr>
+          <a:xfrm>
+            <a:off x="5265318" y="3495322"/>
+            <a:ext cx="1000000" cy="400000"/>
+          </a:xfrm>
+          <a:prstGeom prst="rect">
+            <a:avLst/>
+          </a:prstGeom>
+          <a:solidFill>
+            <a:srgbClr val="75D6C3"/>
+          </a:solidFill>
+          <a:ln>
+            <a:solidFill>
+              <a:srgbClr val="4DAE9B"/>
+            </a:solidFill>
+          </a:ln>
         </p:spPr>
         <p:style>
-          <a:lnRef idx="2">
+          <a:lnRef idx="1">
             <a:schemeClr val="accent1"/>
           </a:lnRef>
-          <a:fillRef idx="0">
+          <a:fillRef idx="3">
             <a:schemeClr val="accent1"/>
           </a:fillRef>
-          <a:effectRef idx="1">
+          <a:effectRef idx="2">
             <a:schemeClr val="accent1"/>
           </a:effectRef>
           <a:fontRef idx="minor">
-            <a:schemeClr val="tx1"/>
+            <a:schemeClr val="lt1"/>
           </a:fontRef>
         </p:style>
-      </p:cxnSp>
+        <p:txBody>
+          <a:bodyPr rtlCol="0" anchor="ctr" wrap="square"/>
+          <a:lstStyle/>
+          <a:p>
+            <a:r>
+              <a:rPr sz="1000">
+                <a:solidFill>
+                  <a:srgbClr val="1E1E1E"/>
+                </a:solidFill>
+              </a:rPr>
+              <a:t>GraphQL</a:t>
+            </a:r>
+          </a:p>
+        </p:txBody>
+      </p:sp>
       <p:cxnSp>
         <p:nvCxnSpPr>
           <p:cNvPr id="23" name="Connector 22"/>
           <p:cNvCxnSpPr>
             <a:stCxn id="4" idx="1"/>
-            <a:endCxn id="10" idx="3"/>
+            <a:endCxn id="5" idx="3"/>
           </p:cNvCxnSpPr>
           <p:nvPr/>
         </p:nvCxnSpPr>
         <p:spPr>
           <a:xfrm>
-            <a:off x="2800400" y="3674464"/>
-            <a:ext cx="3543200" cy="440340"/>
+            <a:off x="3922000" y="3863181"/>
+            <a:ext cx="1609971" cy="232562"/>
           </a:xfrm>
           <a:prstGeom prst="curvedConnector3">
             <a:avLst/>
           </a:prstGeom>
+          <a:ln w="25400">
+            <a:solidFill>
+              <a:srgbClr val="E74C3C"/>
+            </a:solidFill>
+          </a:ln>
         </p:spPr>
         <p:style>
           <a:lnRef idx="2">
@@ -17219,19 +17487,24 @@
         <p:nvCxnSpPr>
           <p:cNvPr id="24" name="Connector 23"/>
           <p:cNvCxnSpPr>
-            <a:stCxn id="10" idx="1"/>
-            <a:endCxn id="11" idx="3"/>
+            <a:stCxn id="5" idx="1"/>
+            <a:endCxn id="6" idx="3"/>
           </p:cNvCxnSpPr>
           <p:nvPr/>
         </p:nvCxnSpPr>
         <p:spPr>
           <a:xfrm flipV="1">
-            <a:off x="5143600" y="3359936"/>
-            <a:ext cx="3543200" cy="754868"/>
+            <a:off x="4531971" y="4031040"/>
+            <a:ext cx="1733347" cy="64703"/>
           </a:xfrm>
           <a:prstGeom prst="curvedConnector3">
             <a:avLst/>
           </a:prstGeom>
+          <a:ln w="25400">
+            <a:solidFill>
+              <a:srgbClr val="F0938A"/>
+            </a:solidFill>
+          </a:ln>
         </p:spPr>
         <p:style>
           <a:lnRef idx="2">
@@ -17252,19 +17525,24 @@
         <p:nvCxnSpPr>
           <p:cNvPr id="25" name="Connector 24"/>
           <p:cNvCxnSpPr>
-            <a:stCxn id="10" idx="1"/>
-            <a:endCxn id="12" idx="3"/>
+            <a:stCxn id="5" idx="1"/>
+            <a:endCxn id="7" idx="3"/>
           </p:cNvCxnSpPr>
           <p:nvPr/>
         </p:nvCxnSpPr>
         <p:spPr>
-          <a:xfrm flipV="1">
-            <a:off x="5143600" y="3863181"/>
-            <a:ext cx="3543200" cy="251623"/>
+          <a:xfrm>
+            <a:off x="4531971" y="4095743"/>
+            <a:ext cx="1459972" cy="232561"/>
           </a:xfrm>
           <a:prstGeom prst="curvedConnector3">
             <a:avLst/>
           </a:prstGeom>
+          <a:ln w="25400">
+            <a:solidFill>
+              <a:srgbClr val="F0938A"/>
+            </a:solidFill>
+          </a:ln>
         </p:spPr>
         <p:style>
           <a:lnRef idx="2">
@@ -17285,19 +17563,24 @@
         <p:nvCxnSpPr>
           <p:cNvPr id="26" name="Connector 25"/>
           <p:cNvCxnSpPr>
-            <a:stCxn id="10" idx="1"/>
-            <a:endCxn id="13" idx="3"/>
+            <a:stCxn id="5" idx="2"/>
+            <a:endCxn id="8" idx="0"/>
           </p:cNvCxnSpPr>
           <p:nvPr/>
         </p:nvCxnSpPr>
         <p:spPr>
-          <a:xfrm>
-            <a:off x="5143600" y="4114804"/>
-            <a:ext cx="3543200" cy="251622"/>
+          <a:xfrm flipH="1">
+            <a:off x="5007820" y="4295743"/>
+            <a:ext cx="24151" cy="23271"/>
           </a:xfrm>
           <a:prstGeom prst="curvedConnector3">
             <a:avLst/>
           </a:prstGeom>
+          <a:ln w="25400">
+            <a:solidFill>
+              <a:srgbClr val="F0938A"/>
+            </a:solidFill>
+          </a:ln>
         </p:spPr>
         <p:style>
           <a:lnRef idx="2">
@@ -17318,19 +17601,24 @@
         <p:nvCxnSpPr>
           <p:cNvPr id="27" name="Connector 26"/>
           <p:cNvCxnSpPr>
-            <a:stCxn id="10" idx="1"/>
-            <a:endCxn id="14" idx="3"/>
+            <a:stCxn id="4" idx="2"/>
+            <a:endCxn id="9" idx="0"/>
           </p:cNvCxnSpPr>
           <p:nvPr/>
         </p:nvCxnSpPr>
         <p:spPr>
-          <a:xfrm>
-            <a:off x="5143600" y="4114804"/>
-            <a:ext cx="3543200" cy="754868"/>
+          <a:xfrm flipH="1" flipV="1">
+            <a:off x="4222915" y="3951807"/>
+            <a:ext cx="349085" cy="171374"/>
           </a:xfrm>
           <a:prstGeom prst="curvedConnector3">
             <a:avLst/>
           </a:prstGeom>
+          <a:ln w="25400">
+            <a:solidFill>
+              <a:srgbClr val="E67E22"/>
+            </a:solidFill>
+          </a:ln>
         </p:spPr>
         <p:style>
           <a:lnRef idx="2">
@@ -17351,19 +17639,24 @@
         <p:nvCxnSpPr>
           <p:cNvPr id="28" name="Connector 27"/>
           <p:cNvCxnSpPr>
-            <a:stCxn id="4" idx="2"/>
-            <a:endCxn id="15" idx="0"/>
+            <a:stCxn id="9" idx="2"/>
+            <a:endCxn id="10" idx="0"/>
           </p:cNvCxnSpPr>
           <p:nvPr/>
         </p:nvCxnSpPr>
         <p:spPr>
           <a:xfrm>
-            <a:off x="3400400" y="3924464"/>
-            <a:ext cx="2343200" cy="1450076"/>
+            <a:off x="4222915" y="4351807"/>
+            <a:ext cx="200941" cy="7674"/>
           </a:xfrm>
           <a:prstGeom prst="curvedConnector3">
             <a:avLst/>
           </a:prstGeom>
+          <a:ln w="25400">
+            <a:solidFill>
+              <a:srgbClr val="F0B17A"/>
+            </a:solidFill>
+          </a:ln>
         </p:spPr>
         <p:style>
           <a:lnRef idx="2">
@@ -17384,19 +17677,24 @@
         <p:nvCxnSpPr>
           <p:cNvPr id="29" name="Connector 28"/>
           <p:cNvCxnSpPr>
-            <a:stCxn id="15" idx="1"/>
-            <a:endCxn id="16" idx="3"/>
+            <a:stCxn id="9" idx="2"/>
+            <a:endCxn id="11" idx="0"/>
           </p:cNvCxnSpPr>
           <p:nvPr/>
         </p:nvCxnSpPr>
         <p:spPr>
-          <a:xfrm flipV="1">
-            <a:off x="5143600" y="5372917"/>
-            <a:ext cx="3543200" cy="251623"/>
+          <a:xfrm flipH="1" flipV="1">
+            <a:off x="3873830" y="4240433"/>
+            <a:ext cx="349085" cy="111374"/>
           </a:xfrm>
           <a:prstGeom prst="curvedConnector3">
             <a:avLst/>
           </a:prstGeom>
+          <a:ln w="25400">
+            <a:solidFill>
+              <a:srgbClr val="F0B17A"/>
+            </a:solidFill>
+          </a:ln>
         </p:spPr>
         <p:style>
           <a:lnRef idx="2">
@@ -17417,19 +17715,404 @@
         <p:nvCxnSpPr>
           <p:cNvPr id="30" name="Connector 29"/>
           <p:cNvCxnSpPr>
-            <a:stCxn id="15" idx="1"/>
-            <a:endCxn id="17" idx="3"/>
+            <a:stCxn id="9" idx="3"/>
+            <a:endCxn id="12" idx="1"/>
           </p:cNvCxnSpPr>
           <p:nvPr/>
         </p:nvCxnSpPr>
         <p:spPr>
-          <a:xfrm>
-            <a:off x="5143600" y="5624540"/>
-            <a:ext cx="3543200" cy="251623"/>
+          <a:xfrm flipH="1">
+            <a:off x="2983746" y="4151807"/>
+            <a:ext cx="1739169" cy="37337"/>
           </a:xfrm>
           <a:prstGeom prst="curvedConnector3">
             <a:avLst/>
           </a:prstGeom>
+          <a:ln w="25400">
+            <a:solidFill>
+              <a:srgbClr val="F0B17A"/>
+            </a:solidFill>
+          </a:ln>
+        </p:spPr>
+        <p:style>
+          <a:lnRef idx="2">
+            <a:schemeClr val="accent1"/>
+          </a:lnRef>
+          <a:fillRef idx="0">
+            <a:schemeClr val="accent1"/>
+          </a:fillRef>
+          <a:effectRef idx="1">
+            <a:schemeClr val="accent1"/>
+          </a:effectRef>
+          <a:fontRef idx="minor">
+            <a:schemeClr val="tx1"/>
+          </a:fontRef>
+        </p:style>
+      </p:cxnSp>
+      <p:cxnSp>
+        <p:nvCxnSpPr>
+          <p:cNvPr id="31" name="Connector 30"/>
+          <p:cNvCxnSpPr>
+            <a:stCxn id="4" idx="3"/>
+            <a:endCxn id="13" idx="1"/>
+          </p:cNvCxnSpPr>
+          <p:nvPr/>
+        </p:nvCxnSpPr>
+        <p:spPr>
+          <a:xfrm flipH="1" flipV="1">
+            <a:off x="3475340" y="3779251"/>
+            <a:ext cx="1746660" cy="83930"/>
+          </a:xfrm>
+          <a:prstGeom prst="curvedConnector3">
+            <a:avLst/>
+          </a:prstGeom>
+          <a:ln w="25400">
+            <a:solidFill>
+              <a:srgbClr val="F1C40F"/>
+            </a:solidFill>
+          </a:ln>
+        </p:spPr>
+        <p:style>
+          <a:lnRef idx="2">
+            <a:schemeClr val="accent1"/>
+          </a:lnRef>
+          <a:fillRef idx="0">
+            <a:schemeClr val="accent1"/>
+          </a:fillRef>
+          <a:effectRef idx="1">
+            <a:schemeClr val="accent1"/>
+          </a:effectRef>
+          <a:fontRef idx="minor">
+            <a:schemeClr val="tx1"/>
+          </a:fontRef>
+        </p:style>
+      </p:cxnSp>
+      <p:cxnSp>
+        <p:nvCxnSpPr>
+          <p:cNvPr id="32" name="Connector 31"/>
+          <p:cNvCxnSpPr>
+            <a:stCxn id="13" idx="3"/>
+            <a:endCxn id="14" idx="1"/>
+          </p:cNvCxnSpPr>
+          <p:nvPr/>
+        </p:nvCxnSpPr>
+        <p:spPr>
+          <a:xfrm flipH="1">
+            <a:off x="2842967" y="3779251"/>
+            <a:ext cx="1632373" cy="83930"/>
+          </a:xfrm>
+          <a:prstGeom prst="curvedConnector3">
+            <a:avLst/>
+          </a:prstGeom>
+          <a:ln w="25400">
+            <a:solidFill>
+              <a:srgbClr val="F6DB6F"/>
+            </a:solidFill>
+          </a:ln>
+        </p:spPr>
+        <p:style>
+          <a:lnRef idx="2">
+            <a:schemeClr val="accent1"/>
+          </a:lnRef>
+          <a:fillRef idx="0">
+            <a:schemeClr val="accent1"/>
+          </a:fillRef>
+          <a:effectRef idx="1">
+            <a:schemeClr val="accent1"/>
+          </a:effectRef>
+          <a:fontRef idx="minor">
+            <a:schemeClr val="tx1"/>
+          </a:fontRef>
+        </p:style>
+      </p:cxnSp>
+      <p:cxnSp>
+        <p:nvCxnSpPr>
+          <p:cNvPr id="33" name="Connector 32"/>
+          <p:cNvCxnSpPr>
+            <a:stCxn id="13" idx="3"/>
+            <a:endCxn id="15" idx="1"/>
+          </p:cNvCxnSpPr>
+          <p:nvPr/>
+        </p:nvCxnSpPr>
+        <p:spPr>
+          <a:xfrm flipH="1" flipV="1">
+            <a:off x="2983746" y="3537218"/>
+            <a:ext cx="1491594" cy="242033"/>
+          </a:xfrm>
+          <a:prstGeom prst="curvedConnector3">
+            <a:avLst/>
+          </a:prstGeom>
+          <a:ln w="25400">
+            <a:solidFill>
+              <a:srgbClr val="F6DB6F"/>
+            </a:solidFill>
+          </a:ln>
+        </p:spPr>
+        <p:style>
+          <a:lnRef idx="2">
+            <a:schemeClr val="accent1"/>
+          </a:lnRef>
+          <a:fillRef idx="0">
+            <a:schemeClr val="accent1"/>
+          </a:fillRef>
+          <a:effectRef idx="1">
+            <a:schemeClr val="accent1"/>
+          </a:effectRef>
+          <a:fontRef idx="minor">
+            <a:schemeClr val="tx1"/>
+          </a:fontRef>
+        </p:style>
+      </p:cxnSp>
+      <p:cxnSp>
+        <p:nvCxnSpPr>
+          <p:cNvPr id="34" name="Connector 33"/>
+          <p:cNvCxnSpPr>
+            <a:stCxn id="4" idx="0"/>
+            <a:endCxn id="16" idx="2"/>
+          </p:cNvCxnSpPr>
+          <p:nvPr/>
+        </p:nvCxnSpPr>
+        <p:spPr>
+          <a:xfrm flipH="1">
+            <a:off x="4497928" y="3603181"/>
+            <a:ext cx="74072" cy="111850"/>
+          </a:xfrm>
+          <a:prstGeom prst="curvedConnector3">
+            <a:avLst/>
+          </a:prstGeom>
+          <a:ln w="25400">
+            <a:solidFill>
+              <a:srgbClr val="27AE60"/>
+            </a:solidFill>
+          </a:ln>
+        </p:spPr>
+        <p:style>
+          <a:lnRef idx="2">
+            <a:schemeClr val="accent1"/>
+          </a:lnRef>
+          <a:fillRef idx="0">
+            <a:schemeClr val="accent1"/>
+          </a:fillRef>
+          <a:effectRef idx="1">
+            <a:schemeClr val="accent1"/>
+          </a:effectRef>
+          <a:fontRef idx="minor">
+            <a:schemeClr val="tx1"/>
+          </a:fontRef>
+        </p:style>
+      </p:cxnSp>
+      <p:cxnSp>
+        <p:nvCxnSpPr>
+          <p:cNvPr id="35" name="Connector 34"/>
+          <p:cNvCxnSpPr>
+            <a:stCxn id="16" idx="3"/>
+            <a:endCxn id="17" idx="1"/>
+          </p:cNvCxnSpPr>
+          <p:nvPr/>
+        </p:nvCxnSpPr>
+        <p:spPr>
+          <a:xfrm flipH="1" flipV="1">
+            <a:off x="3373830" y="3285929"/>
+            <a:ext cx="1624098" cy="229102"/>
+          </a:xfrm>
+          <a:prstGeom prst="curvedConnector3">
+            <a:avLst/>
+          </a:prstGeom>
+          <a:ln w="25400">
+            <a:solidFill>
+              <a:srgbClr val="7DCE9F"/>
+            </a:solidFill>
+          </a:ln>
+        </p:spPr>
+        <p:style>
+          <a:lnRef idx="2">
+            <a:schemeClr val="accent1"/>
+          </a:lnRef>
+          <a:fillRef idx="0">
+            <a:schemeClr val="accent1"/>
+          </a:fillRef>
+          <a:effectRef idx="1">
+            <a:schemeClr val="accent1"/>
+          </a:effectRef>
+          <a:fontRef idx="minor">
+            <a:schemeClr val="tx1"/>
+          </a:fontRef>
+        </p:style>
+      </p:cxnSp>
+      <p:cxnSp>
+        <p:nvCxnSpPr>
+          <p:cNvPr id="36" name="Connector 35"/>
+          <p:cNvCxnSpPr>
+            <a:stCxn id="16" idx="0"/>
+            <a:endCxn id="18" idx="2"/>
+          </p:cNvCxnSpPr>
+          <p:nvPr/>
+        </p:nvCxnSpPr>
+        <p:spPr>
+          <a:xfrm flipH="1">
+            <a:off x="4423856" y="3315031"/>
+            <a:ext cx="74072" cy="51850"/>
+          </a:xfrm>
+          <a:prstGeom prst="curvedConnector3">
+            <a:avLst/>
+          </a:prstGeom>
+          <a:ln w="25400">
+            <a:solidFill>
+              <a:srgbClr val="7DCE9F"/>
+            </a:solidFill>
+          </a:ln>
+        </p:spPr>
+        <p:style>
+          <a:lnRef idx="2">
+            <a:schemeClr val="accent1"/>
+          </a:lnRef>
+          <a:fillRef idx="0">
+            <a:schemeClr val="accent1"/>
+          </a:fillRef>
+          <a:effectRef idx="1">
+            <a:schemeClr val="accent1"/>
+          </a:effectRef>
+          <a:fontRef idx="minor">
+            <a:schemeClr val="tx1"/>
+          </a:fontRef>
+        </p:style>
+      </p:cxnSp>
+      <p:cxnSp>
+        <p:nvCxnSpPr>
+          <p:cNvPr id="37" name="Connector 36"/>
+          <p:cNvCxnSpPr>
+            <a:stCxn id="16" idx="0"/>
+            <a:endCxn id="19" idx="2"/>
+          </p:cNvCxnSpPr>
+          <p:nvPr/>
+        </p:nvCxnSpPr>
+        <p:spPr>
+          <a:xfrm>
+            <a:off x="4497928" y="3315031"/>
+            <a:ext cx="509892" cy="92317"/>
+          </a:xfrm>
+          <a:prstGeom prst="curvedConnector3">
+            <a:avLst/>
+          </a:prstGeom>
+          <a:ln w="25400">
+            <a:solidFill>
+              <a:srgbClr val="7DCE9F"/>
+            </a:solidFill>
+          </a:ln>
+        </p:spPr>
+        <p:style>
+          <a:lnRef idx="2">
+            <a:schemeClr val="accent1"/>
+          </a:lnRef>
+          <a:fillRef idx="0">
+            <a:schemeClr val="accent1"/>
+          </a:fillRef>
+          <a:effectRef idx="1">
+            <a:schemeClr val="accent1"/>
+          </a:effectRef>
+          <a:fontRef idx="minor">
+            <a:schemeClr val="tx1"/>
+          </a:fontRef>
+        </p:style>
+      </p:cxnSp>
+      <p:cxnSp>
+        <p:nvCxnSpPr>
+          <p:cNvPr id="38" name="Connector 37"/>
+          <p:cNvCxnSpPr>
+            <a:stCxn id="4" idx="1"/>
+            <a:endCxn id="20" idx="3"/>
+          </p:cNvCxnSpPr>
+          <p:nvPr/>
+        </p:nvCxnSpPr>
+        <p:spPr>
+          <a:xfrm flipV="1">
+            <a:off x="3922000" y="3700199"/>
+            <a:ext cx="1694126" cy="162982"/>
+          </a:xfrm>
+          <a:prstGeom prst="curvedConnector3">
+            <a:avLst/>
+          </a:prstGeom>
+          <a:ln w="25400">
+            <a:solidFill>
+              <a:srgbClr val="1ABC9C"/>
+            </a:solidFill>
+          </a:ln>
+        </p:spPr>
+        <p:style>
+          <a:lnRef idx="2">
+            <a:schemeClr val="accent1"/>
+          </a:lnRef>
+          <a:fillRef idx="0">
+            <a:schemeClr val="accent1"/>
+          </a:fillRef>
+          <a:effectRef idx="1">
+            <a:schemeClr val="accent1"/>
+          </a:effectRef>
+          <a:fontRef idx="minor">
+            <a:schemeClr val="tx1"/>
+          </a:fontRef>
+        </p:style>
+      </p:cxnSp>
+      <p:cxnSp>
+        <p:nvCxnSpPr>
+          <p:cNvPr id="39" name="Connector 38"/>
+          <p:cNvCxnSpPr>
+            <a:stCxn id="20" idx="0"/>
+            <a:endCxn id="21" idx="2"/>
+          </p:cNvCxnSpPr>
+          <p:nvPr/>
+        </p:nvCxnSpPr>
+        <p:spPr>
+          <a:xfrm>
+            <a:off x="5116126" y="3500199"/>
+            <a:ext cx="375817" cy="97859"/>
+          </a:xfrm>
+          <a:prstGeom prst="curvedConnector3">
+            <a:avLst/>
+          </a:prstGeom>
+          <a:ln w="25400">
+            <a:solidFill>
+              <a:srgbClr val="75D6C3"/>
+            </a:solidFill>
+          </a:ln>
+        </p:spPr>
+        <p:style>
+          <a:lnRef idx="2">
+            <a:schemeClr val="accent1"/>
+          </a:lnRef>
+          <a:fillRef idx="0">
+            <a:schemeClr val="accent1"/>
+          </a:fillRef>
+          <a:effectRef idx="1">
+            <a:schemeClr val="accent1"/>
+          </a:effectRef>
+          <a:fontRef idx="minor">
+            <a:schemeClr val="tx1"/>
+          </a:fontRef>
+        </p:style>
+      </p:cxnSp>
+      <p:cxnSp>
+        <p:nvCxnSpPr>
+          <p:cNvPr id="40" name="Connector 39"/>
+          <p:cNvCxnSpPr>
+            <a:stCxn id="20" idx="1"/>
+            <a:endCxn id="22" idx="3"/>
+          </p:cNvCxnSpPr>
+          <p:nvPr/>
+        </p:nvCxnSpPr>
+        <p:spPr>
+          <a:xfrm flipV="1">
+            <a:off x="4616126" y="3695322"/>
+            <a:ext cx="1649192" cy="4877"/>
+          </a:xfrm>
+          <a:prstGeom prst="curvedConnector3">
+            <a:avLst/>
+          </a:prstGeom>
+          <a:ln w="25400">
+            <a:solidFill>
+              <a:srgbClr val="75D6C3"/>
+            </a:solidFill>
+          </a:ln>
         </p:spPr>
         <p:style>
           <a:lnRef idx="2">

--- a/demo_full.pptx
+++ b/demo_full.pptx
@@ -13547,7 +13547,7 @@
         </p:nvSpPr>
         <p:spPr>
           <a:xfrm>
-            <a:off x="2272000" y="3538181"/>
+            <a:off x="2272000" y="2188180"/>
             <a:ext cx="4600000" cy="2420000"/>
           </a:xfrm>
           <a:prstGeom prst="roundRect">
@@ -13668,7 +13668,7 @@
         </p:nvSpPr>
         <p:spPr>
           <a:xfrm>
-            <a:off x="2272000" y="2188180"/>
+            <a:off x="2272000" y="3538181"/>
             <a:ext cx="4600000" cy="2420000"/>
           </a:xfrm>
           <a:prstGeom prst="roundRect">
@@ -16465,8 +16465,8 @@
         </p:nvSpPr>
         <p:spPr>
           <a:xfrm>
-            <a:off x="3922000" y="3603181"/>
-            <a:ext cx="1300000" cy="520000"/>
+            <a:off x="4122000" y="3678181"/>
+            <a:ext cx="900000" cy="370000"/>
           </a:xfrm>
           <a:prstGeom prst="ellipse">
             <a:avLst/>
@@ -16517,8 +16517,8 @@
         </p:nvSpPr>
         <p:spPr>
           <a:xfrm>
-            <a:off x="4531971" y="3895743"/>
-            <a:ext cx="1000000" cy="400000"/>
+            <a:off x="4740869" y="3974894"/>
+            <a:ext cx="680000" cy="280000"/>
           </a:xfrm>
           <a:prstGeom prst="roundRect">
             <a:avLst/>
@@ -16569,8 +16569,8 @@
         </p:nvSpPr>
         <p:spPr>
           <a:xfrm>
-            <a:off x="5265318" y="3831040"/>
-            <a:ext cx="1000000" cy="400000"/>
+            <a:off x="5552175" y="3904863"/>
+            <a:ext cx="680000" cy="280000"/>
           </a:xfrm>
           <a:prstGeom prst="ellipse">
             <a:avLst/>
@@ -16621,8 +16621,8 @@
         </p:nvSpPr>
         <p:spPr>
           <a:xfrm>
-            <a:off x="4991943" y="4128304"/>
-            <a:ext cx="1000000" cy="400000"/>
+            <a:off x="5249739" y="4226608"/>
+            <a:ext cx="680000" cy="280000"/>
           </a:xfrm>
           <a:prstGeom prst="ellipse">
             <a:avLst/>
@@ -16673,8 +16673,8 @@
         </p:nvSpPr>
         <p:spPr>
           <a:xfrm>
-            <a:off x="4507820" y="4319014"/>
-            <a:ext cx="1000000" cy="400000"/>
+            <a:off x="4714151" y="4433023"/>
+            <a:ext cx="680000" cy="280000"/>
           </a:xfrm>
           <a:prstGeom prst="ellipse">
             <a:avLst/>
@@ -16725,8 +16725,8 @@
         </p:nvSpPr>
         <p:spPr>
           <a:xfrm>
-            <a:off x="3722915" y="3951807"/>
-            <a:ext cx="1000000" cy="400000"/>
+            <a:off x="3845806" y="4035575"/>
+            <a:ext cx="680000" cy="280000"/>
           </a:xfrm>
           <a:prstGeom prst="rect">
             <a:avLst/>
@@ -16777,8 +16777,8 @@
         </p:nvSpPr>
         <p:spPr>
           <a:xfrm>
-            <a:off x="3923856" y="4359481"/>
-            <a:ext cx="1000000" cy="400000"/>
+            <a:off x="4068108" y="4476822"/>
+            <a:ext cx="680000" cy="280000"/>
           </a:xfrm>
           <a:prstGeom prst="hexagon">
             <a:avLst/>
@@ -16829,8 +16829,8 @@
         </p:nvSpPr>
         <p:spPr>
           <a:xfrm>
-            <a:off x="3373830" y="4240433"/>
-            <a:ext cx="1000000" cy="400000"/>
+            <a:off x="3459611" y="4347971"/>
+            <a:ext cx="680000" cy="280000"/>
           </a:xfrm>
           <a:prstGeom prst="hexagon">
             <a:avLst/>
@@ -16881,8 +16881,8 @@
         </p:nvSpPr>
         <p:spPr>
           <a:xfrm>
-            <a:off x="2983746" y="3989144"/>
-            <a:ext cx="1000000" cy="400000"/>
+            <a:off x="3028058" y="4075988"/>
+            <a:ext cx="680000" cy="280000"/>
           </a:xfrm>
           <a:prstGeom prst="roundRect">
             <a:avLst/>
@@ -16933,8 +16933,8 @@
         </p:nvSpPr>
         <p:spPr>
           <a:xfrm>
-            <a:off x="3475340" y="3579251"/>
-            <a:ext cx="1000000" cy="400000"/>
+            <a:off x="3571913" y="3632340"/>
+            <a:ext cx="680000" cy="280000"/>
           </a:xfrm>
           <a:prstGeom prst="roundRect">
             <a:avLst/>
@@ -16985,8 +16985,8 @@
         </p:nvSpPr>
         <p:spPr>
           <a:xfrm>
-            <a:off x="2842967" y="3663181"/>
-            <a:ext cx="1000000" cy="400000"/>
+            <a:off x="2872314" y="3723181"/>
+            <a:ext cx="680000" cy="280000"/>
           </a:xfrm>
           <a:prstGeom prst="irregularSeal1">
             <a:avLst/>
@@ -17037,8 +17037,8 @@
         </p:nvSpPr>
         <p:spPr>
           <a:xfrm>
-            <a:off x="2983746" y="3337218"/>
-            <a:ext cx="1000000" cy="400000"/>
+            <a:off x="3028058" y="3370374"/>
+            <a:ext cx="680000" cy="280000"/>
           </a:xfrm>
           <a:prstGeom prst="irregularSeal1">
             <a:avLst/>
@@ -17089,8 +17089,8 @@
         </p:nvSpPr>
         <p:spPr>
           <a:xfrm>
-            <a:off x="3997928" y="3315031"/>
-            <a:ext cx="1000000" cy="400000"/>
+            <a:off x="4150054" y="3346361"/>
+            <a:ext cx="680000" cy="280000"/>
           </a:xfrm>
           <a:prstGeom prst="roundRect">
             <a:avLst/>
@@ -17141,8 +17141,8 @@
         </p:nvSpPr>
         <p:spPr>
           <a:xfrm>
-            <a:off x="3373830" y="3085929"/>
-            <a:ext cx="1000000" cy="400000"/>
+            <a:off x="3459611" y="3098391"/>
+            <a:ext cx="680000" cy="280000"/>
           </a:xfrm>
           <a:prstGeom prst="rect">
             <a:avLst/>
@@ -17193,8 +17193,8 @@
         </p:nvSpPr>
         <p:spPr>
           <a:xfrm>
-            <a:off x="3923856" y="2966881"/>
-            <a:ext cx="1000000" cy="400000"/>
+            <a:off x="4068108" y="2969540"/>
+            <a:ext cx="680000" cy="280000"/>
           </a:xfrm>
           <a:prstGeom prst="rect">
             <a:avLst/>
@@ -17245,8 +17245,8 @@
         </p:nvSpPr>
         <p:spPr>
           <a:xfrm>
-            <a:off x="4507820" y="3007348"/>
-            <a:ext cx="1000000" cy="400000"/>
+            <a:off x="4714151" y="3013339"/>
+            <a:ext cx="680000" cy="280000"/>
           </a:xfrm>
           <a:prstGeom prst="roundRect">
             <a:avLst/>
@@ -17297,8 +17297,8 @@
         </p:nvSpPr>
         <p:spPr>
           <a:xfrm>
-            <a:off x="4616126" y="3500199"/>
-            <a:ext cx="1000000" cy="400000"/>
+            <a:off x="4833971" y="3546778"/>
+            <a:ext cx="680000" cy="280000"/>
           </a:xfrm>
           <a:prstGeom prst="cloud">
             <a:avLst/>
@@ -17349,8 +17349,8 @@
         </p:nvSpPr>
         <p:spPr>
           <a:xfrm>
-            <a:off x="4991943" y="3198058"/>
-            <a:ext cx="1000000" cy="400000"/>
+            <a:off x="5249739" y="3219754"/>
+            <a:ext cx="680000" cy="280000"/>
           </a:xfrm>
           <a:prstGeom prst="rect">
             <a:avLst/>
@@ -17401,8 +17401,8 @@
         </p:nvSpPr>
         <p:spPr>
           <a:xfrm>
-            <a:off x="5265318" y="3495322"/>
-            <a:ext cx="1000000" cy="400000"/>
+            <a:off x="5552175" y="3541499"/>
+            <a:ext cx="680000" cy="280000"/>
           </a:xfrm>
           <a:prstGeom prst="rect">
             <a:avLst/>
@@ -17456,8 +17456,8 @@
         </p:nvCxnSpPr>
         <p:spPr>
           <a:xfrm>
-            <a:off x="3922000" y="3863181"/>
-            <a:ext cx="1609971" cy="232562"/>
+            <a:off x="4122000" y="3863181"/>
+            <a:ext cx="1298869" cy="251713"/>
           </a:xfrm>
           <a:prstGeom prst="curvedConnector3">
             <a:avLst/>
@@ -17494,8 +17494,8 @@
         </p:nvCxnSpPr>
         <p:spPr>
           <a:xfrm flipV="1">
-            <a:off x="4531971" y="4031040"/>
-            <a:ext cx="1733347" cy="64703"/>
+            <a:off x="4740869" y="4044863"/>
+            <a:ext cx="1491306" cy="70031"/>
           </a:xfrm>
           <a:prstGeom prst="curvedConnector3">
             <a:avLst/>
@@ -17532,8 +17532,8 @@
         </p:nvCxnSpPr>
         <p:spPr>
           <a:xfrm>
-            <a:off x="4531971" y="4095743"/>
-            <a:ext cx="1459972" cy="232561"/>
+            <a:off x="4740869" y="4114894"/>
+            <a:ext cx="1188870" cy="251714"/>
           </a:xfrm>
           <a:prstGeom prst="curvedConnector3">
             <a:avLst/>
@@ -17570,8 +17570,8 @@
         </p:nvCxnSpPr>
         <p:spPr>
           <a:xfrm flipH="1">
-            <a:off x="5007820" y="4295743"/>
-            <a:ext cx="24151" cy="23271"/>
+            <a:off x="5054151" y="4254894"/>
+            <a:ext cx="26718" cy="178129"/>
           </a:xfrm>
           <a:prstGeom prst="curvedConnector3">
             <a:avLst/>
@@ -17601,15 +17601,15 @@
         <p:nvCxnSpPr>
           <p:cNvPr id="27" name="Connector 26"/>
           <p:cNvCxnSpPr>
-            <a:stCxn id="4" idx="2"/>
-            <a:endCxn id="9" idx="0"/>
+            <a:stCxn id="4" idx="3"/>
+            <a:endCxn id="9" idx="1"/>
           </p:cNvCxnSpPr>
           <p:nvPr/>
         </p:nvCxnSpPr>
         <p:spPr>
-          <a:xfrm flipH="1" flipV="1">
-            <a:off x="4222915" y="3951807"/>
-            <a:ext cx="349085" cy="171374"/>
+          <a:xfrm flipH="1">
+            <a:off x="3845806" y="3863181"/>
+            <a:ext cx="1176194" cy="312394"/>
           </a:xfrm>
           <a:prstGeom prst="curvedConnector3">
             <a:avLst/>
@@ -17646,8 +17646,8 @@
         </p:nvCxnSpPr>
         <p:spPr>
           <a:xfrm>
-            <a:off x="4222915" y="4351807"/>
-            <a:ext cx="200941" cy="7674"/>
+            <a:off x="4185806" y="4315575"/>
+            <a:ext cx="222302" cy="161247"/>
           </a:xfrm>
           <a:prstGeom prst="curvedConnector3">
             <a:avLst/>
@@ -17677,15 +17677,15 @@
         <p:nvCxnSpPr>
           <p:cNvPr id="29" name="Connector 28"/>
           <p:cNvCxnSpPr>
-            <a:stCxn id="9" idx="2"/>
-            <a:endCxn id="11" idx="0"/>
+            <a:stCxn id="9" idx="3"/>
+            <a:endCxn id="11" idx="1"/>
           </p:cNvCxnSpPr>
           <p:nvPr/>
         </p:nvCxnSpPr>
         <p:spPr>
-          <a:xfrm flipH="1" flipV="1">
-            <a:off x="3873830" y="4240433"/>
-            <a:ext cx="349085" cy="111374"/>
+          <a:xfrm flipH="1">
+            <a:off x="3459611" y="4175575"/>
+            <a:ext cx="1066195" cy="312396"/>
           </a:xfrm>
           <a:prstGeom prst="curvedConnector3">
             <a:avLst/>
@@ -17722,8 +17722,8 @@
         </p:nvCxnSpPr>
         <p:spPr>
           <a:xfrm flipH="1">
-            <a:off x="2983746" y="4151807"/>
-            <a:ext cx="1739169" cy="37337"/>
+            <a:off x="3028058" y="4175575"/>
+            <a:ext cx="1497748" cy="40413"/>
           </a:xfrm>
           <a:prstGeom prst="curvedConnector3">
             <a:avLst/>
@@ -17760,8 +17760,8 @@
         </p:nvCxnSpPr>
         <p:spPr>
           <a:xfrm flipH="1" flipV="1">
-            <a:off x="3475340" y="3779251"/>
-            <a:ext cx="1746660" cy="83930"/>
+            <a:off x="3571913" y="3772340"/>
+            <a:ext cx="1450087" cy="90841"/>
           </a:xfrm>
           <a:prstGeom prst="curvedConnector3">
             <a:avLst/>
@@ -17798,8 +17798,8 @@
         </p:nvCxnSpPr>
         <p:spPr>
           <a:xfrm flipH="1">
-            <a:off x="2842967" y="3779251"/>
-            <a:ext cx="1632373" cy="83930"/>
+            <a:off x="2872314" y="3772340"/>
+            <a:ext cx="1379599" cy="90841"/>
           </a:xfrm>
           <a:prstGeom prst="curvedConnector3">
             <a:avLst/>
@@ -17836,8 +17836,8 @@
         </p:nvCxnSpPr>
         <p:spPr>
           <a:xfrm flipH="1" flipV="1">
-            <a:off x="2983746" y="3537218"/>
-            <a:ext cx="1491594" cy="242033"/>
+            <a:off x="3028058" y="3510374"/>
+            <a:ext cx="1223855" cy="261966"/>
           </a:xfrm>
           <a:prstGeom prst="curvedConnector3">
             <a:avLst/>
@@ -17873,9 +17873,9 @@
           <p:nvPr/>
         </p:nvCxnSpPr>
         <p:spPr>
-          <a:xfrm flipH="1">
-            <a:off x="4497928" y="3603181"/>
-            <a:ext cx="74072" cy="111850"/>
+          <a:xfrm flipH="1" flipV="1">
+            <a:off x="4490054" y="3626361"/>
+            <a:ext cx="81946" cy="51820"/>
           </a:xfrm>
           <a:prstGeom prst="curvedConnector3">
             <a:avLst/>
@@ -17912,8 +17912,8 @@
         </p:nvCxnSpPr>
         <p:spPr>
           <a:xfrm flipH="1" flipV="1">
-            <a:off x="3373830" y="3285929"/>
-            <a:ext cx="1624098" cy="229102"/>
+            <a:off x="3459611" y="3238391"/>
+            <a:ext cx="1370443" cy="247970"/>
           </a:xfrm>
           <a:prstGeom prst="curvedConnector3">
             <a:avLst/>
@@ -17949,9 +17949,9 @@
           <p:nvPr/>
         </p:nvCxnSpPr>
         <p:spPr>
-          <a:xfrm flipH="1">
-            <a:off x="4423856" y="3315031"/>
-            <a:ext cx="74072" cy="51850"/>
+          <a:xfrm flipH="1" flipV="1">
+            <a:off x="4408108" y="3249540"/>
+            <a:ext cx="81946" cy="96821"/>
           </a:xfrm>
           <a:prstGeom prst="curvedConnector3">
             <a:avLst/>
@@ -17981,15 +17981,15 @@
         <p:nvCxnSpPr>
           <p:cNvPr id="37" name="Connector 36"/>
           <p:cNvCxnSpPr>
-            <a:stCxn id="16" idx="0"/>
-            <a:endCxn id="19" idx="2"/>
+            <a:stCxn id="16" idx="1"/>
+            <a:endCxn id="19" idx="3"/>
           </p:cNvCxnSpPr>
           <p:nvPr/>
         </p:nvCxnSpPr>
         <p:spPr>
-          <a:xfrm>
-            <a:off x="4497928" y="3315031"/>
-            <a:ext cx="509892" cy="92317"/>
+          <a:xfrm flipV="1">
+            <a:off x="4150054" y="3153339"/>
+            <a:ext cx="1244097" cy="333022"/>
           </a:xfrm>
           <a:prstGeom prst="curvedConnector3">
             <a:avLst/>
@@ -18026,8 +18026,8 @@
         </p:nvCxnSpPr>
         <p:spPr>
           <a:xfrm flipV="1">
-            <a:off x="3922000" y="3700199"/>
-            <a:ext cx="1694126" cy="162982"/>
+            <a:off x="4122000" y="3686778"/>
+            <a:ext cx="1391971" cy="176403"/>
           </a:xfrm>
           <a:prstGeom prst="curvedConnector3">
             <a:avLst/>
@@ -18057,15 +18057,15 @@
         <p:nvCxnSpPr>
           <p:cNvPr id="39" name="Connector 38"/>
           <p:cNvCxnSpPr>
-            <a:stCxn id="20" idx="0"/>
-            <a:endCxn id="21" idx="2"/>
+            <a:stCxn id="20" idx="1"/>
+            <a:endCxn id="21" idx="3"/>
           </p:cNvCxnSpPr>
           <p:nvPr/>
         </p:nvCxnSpPr>
         <p:spPr>
-          <a:xfrm>
-            <a:off x="5116126" y="3500199"/>
-            <a:ext cx="375817" cy="97859"/>
+          <a:xfrm flipV="1">
+            <a:off x="4833971" y="3359754"/>
+            <a:ext cx="1095768" cy="327024"/>
           </a:xfrm>
           <a:prstGeom prst="curvedConnector3">
             <a:avLst/>
@@ -18102,8 +18102,8 @@
         </p:nvCxnSpPr>
         <p:spPr>
           <a:xfrm flipV="1">
-            <a:off x="4616126" y="3695322"/>
-            <a:ext cx="1649192" cy="4877"/>
+            <a:off x="4833971" y="3681499"/>
+            <a:ext cx="1398204" cy="5279"/>
           </a:xfrm>
           <a:prstGeom prst="curvedConnector3">
             <a:avLst/>

--- a/demo_full.pptx
+++ b/demo_full.pptx
@@ -16465,8 +16465,8 @@
         </p:nvSpPr>
         <p:spPr>
           <a:xfrm>
-            <a:off x="4122000" y="3678181"/>
-            <a:ext cx="900000" cy="370000"/>
+            <a:off x="3972000" y="3623181"/>
+            <a:ext cx="1200000" cy="480000"/>
           </a:xfrm>
           <a:prstGeom prst="ellipse">
             <a:avLst/>
@@ -16499,9 +16499,9 @@
           <a:lstStyle/>
           <a:p>
             <a:r>
-              <a:rPr sz="1100">
+              <a:rPr sz="1400">
                 <a:solidFill>
-                  <a:srgbClr val="1E1E1E"/>
+                  <a:srgbClr val="FFFFFF"/>
                 </a:solidFill>
               </a:rPr>
               <a:t>プログラミング言語</a:t>
@@ -16517,8 +16517,8 @@
         </p:nvSpPr>
         <p:spPr>
           <a:xfrm>
-            <a:off x="4740869" y="3974894"/>
-            <a:ext cx="680000" cy="280000"/>
+            <a:off x="5394174" y="4307465"/>
+            <a:ext cx="900000" cy="370000"/>
           </a:xfrm>
           <a:prstGeom prst="roundRect">
             <a:avLst/>
@@ -16551,7 +16551,7 @@
           <a:lstStyle/>
           <a:p>
             <a:r>
-              <a:rPr sz="1000">
+              <a:rPr sz="1100">
                 <a:solidFill>
                   <a:srgbClr val="1E1E1E"/>
                 </a:solidFill>
@@ -16569,7 +16569,7 @@
         </p:nvSpPr>
         <p:spPr>
           <a:xfrm>
-            <a:off x="5552175" y="3904863"/>
+            <a:off x="7532440" y="4177388"/>
             <a:ext cx="680000" cy="280000"/>
           </a:xfrm>
           <a:prstGeom prst="ellipse">
@@ -16621,7 +16621,7 @@
         </p:nvSpPr>
         <p:spPr>
           <a:xfrm>
-            <a:off x="5249739" y="4226608"/>
+            <a:off x="6776349" y="4981749"/>
             <a:ext cx="680000" cy="280000"/>
           </a:xfrm>
           <a:prstGeom prst="ellipse">
@@ -16673,7 +16673,7 @@
         </p:nvSpPr>
         <p:spPr>
           <a:xfrm>
-            <a:off x="4714151" y="4433023"/>
+            <a:off x="5437378" y="5497787"/>
             <a:ext cx="680000" cy="280000"/>
           </a:xfrm>
           <a:prstGeom prst="ellipse">
@@ -16725,8 +16725,8 @@
         </p:nvSpPr>
         <p:spPr>
           <a:xfrm>
-            <a:off x="3845806" y="4035575"/>
-            <a:ext cx="680000" cy="280000"/>
+            <a:off x="3156513" y="4459168"/>
+            <a:ext cx="900000" cy="370000"/>
           </a:xfrm>
           <a:prstGeom prst="rect">
             <a:avLst/>
@@ -16759,7 +16759,7 @@
           <a:lstStyle/>
           <a:p>
             <a:r>
-              <a:rPr sz="1000">
+              <a:rPr sz="1100">
                 <a:solidFill>
                   <a:srgbClr val="1E1E1E"/>
                 </a:solidFill>
@@ -16777,7 +16777,7 @@
         </p:nvSpPr>
         <p:spPr>
           <a:xfrm>
-            <a:off x="4068108" y="4476822"/>
+            <a:off x="3822270" y="5607284"/>
             <a:ext cx="680000" cy="280000"/>
           </a:xfrm>
           <a:prstGeom prst="hexagon">
@@ -16829,7 +16829,7 @@
         </p:nvSpPr>
         <p:spPr>
           <a:xfrm>
-            <a:off x="3459611" y="4347971"/>
+            <a:off x="2301026" y="5285156"/>
             <a:ext cx="680000" cy="280000"/>
           </a:xfrm>
           <a:prstGeom prst="hexagon">
@@ -16881,7 +16881,7 @@
         </p:nvSpPr>
         <p:spPr>
           <a:xfrm>
-            <a:off x="3028058" y="4075988"/>
+            <a:off x="1222144" y="4605198"/>
             <a:ext cx="680000" cy="280000"/>
           </a:xfrm>
           <a:prstGeom prst="roundRect">
@@ -16933,8 +16933,8 @@
         </p:nvSpPr>
         <p:spPr>
           <a:xfrm>
-            <a:off x="3571913" y="3632340"/>
-            <a:ext cx="680000" cy="280000"/>
+            <a:off x="2471780" y="3451078"/>
+            <a:ext cx="900000" cy="370000"/>
           </a:xfrm>
           <a:prstGeom prst="roundRect">
             <a:avLst/>
@@ -16967,7 +16967,7 @@
           <a:lstStyle/>
           <a:p>
             <a:r>
-              <a:rPr sz="1000">
+              <a:rPr sz="1100">
                 <a:solidFill>
                   <a:srgbClr val="1E1E1E"/>
                 </a:solidFill>
@@ -16985,7 +16985,7 @@
         </p:nvSpPr>
         <p:spPr>
           <a:xfrm>
-            <a:off x="2872314" y="3723181"/>
+            <a:off x="832784" y="3723181"/>
             <a:ext cx="680000" cy="280000"/>
           </a:xfrm>
           <a:prstGeom prst="irregularSeal1">
@@ -17037,7 +17037,7 @@
         </p:nvSpPr>
         <p:spPr>
           <a:xfrm>
-            <a:off x="3028058" y="3370374"/>
+            <a:off x="1222144" y="2841164"/>
             <a:ext cx="680000" cy="280000"/>
           </a:xfrm>
           <a:prstGeom prst="irregularSeal1">
@@ -17089,8 +17089,8 @@
         </p:nvSpPr>
         <p:spPr>
           <a:xfrm>
-            <a:off x="4150054" y="3346361"/>
-            <a:ext cx="680000" cy="280000"/>
+            <a:off x="3917135" y="2736130"/>
+            <a:ext cx="900000" cy="370000"/>
           </a:xfrm>
           <a:prstGeom prst="roundRect">
             <a:avLst/>
@@ -17123,7 +17123,7 @@
           <a:lstStyle/>
           <a:p>
             <a:r>
-              <a:rPr sz="1000">
+              <a:rPr sz="1100">
                 <a:solidFill>
                   <a:srgbClr val="1E1E1E"/>
                 </a:solidFill>
@@ -17141,7 +17141,7 @@
         </p:nvSpPr>
         <p:spPr>
           <a:xfrm>
-            <a:off x="3459611" y="3098391"/>
+            <a:off x="2301026" y="2161206"/>
             <a:ext cx="680000" cy="280000"/>
           </a:xfrm>
           <a:prstGeom prst="rect">
@@ -17193,7 +17193,7 @@
         </p:nvSpPr>
         <p:spPr>
           <a:xfrm>
-            <a:off x="4068108" y="2969540"/>
+            <a:off x="3822270" y="1839078"/>
             <a:ext cx="680000" cy="280000"/>
           </a:xfrm>
           <a:prstGeom prst="rect">
@@ -17245,7 +17245,7 @@
         </p:nvSpPr>
         <p:spPr>
           <a:xfrm>
-            <a:off x="4714151" y="3013339"/>
+            <a:off x="5437378" y="1948575"/>
             <a:ext cx="680000" cy="280000"/>
           </a:xfrm>
           <a:prstGeom prst="roundRect">
@@ -17297,8 +17297,8 @@
         </p:nvSpPr>
         <p:spPr>
           <a:xfrm>
-            <a:off x="4833971" y="3546778"/>
-            <a:ext cx="680000" cy="280000"/>
+            <a:off x="5626928" y="3237173"/>
+            <a:ext cx="900000" cy="370000"/>
           </a:xfrm>
           <a:prstGeom prst="cloud">
             <a:avLst/>
@@ -17331,7 +17331,7 @@
           <a:lstStyle/>
           <a:p>
             <a:r>
-              <a:rPr sz="1000">
+              <a:rPr sz="1100">
                 <a:solidFill>
                   <a:srgbClr val="1E1E1E"/>
                 </a:solidFill>
@@ -17349,7 +17349,7 @@
         </p:nvSpPr>
         <p:spPr>
           <a:xfrm>
-            <a:off x="5249739" y="3219754"/>
+            <a:off x="6776349" y="2464613"/>
             <a:ext cx="680000" cy="280000"/>
           </a:xfrm>
           <a:prstGeom prst="rect">
@@ -17401,7 +17401,7 @@
         </p:nvSpPr>
         <p:spPr>
           <a:xfrm>
-            <a:off x="5552175" y="3541499"/>
+            <a:off x="7532440" y="3268974"/>
             <a:ext cx="680000" cy="280000"/>
           </a:xfrm>
           <a:prstGeom prst="rect">
@@ -17456,8 +17456,8 @@
         </p:nvCxnSpPr>
         <p:spPr>
           <a:xfrm>
-            <a:off x="4122000" y="3863181"/>
-            <a:ext cx="1298869" cy="251713"/>
+            <a:off x="3972000" y="3863181"/>
+            <a:ext cx="2322174" cy="629284"/>
           </a:xfrm>
           <a:prstGeom prst="curvedConnector3">
             <a:avLst/>
@@ -17494,8 +17494,8 @@
         </p:nvCxnSpPr>
         <p:spPr>
           <a:xfrm flipV="1">
-            <a:off x="4740869" y="4044863"/>
-            <a:ext cx="1491306" cy="70031"/>
+            <a:off x="5394174" y="4317388"/>
+            <a:ext cx="2818266" cy="175077"/>
           </a:xfrm>
           <a:prstGeom prst="curvedConnector3">
             <a:avLst/>
@@ -17532,8 +17532,8 @@
         </p:nvCxnSpPr>
         <p:spPr>
           <a:xfrm>
-            <a:off x="4740869" y="4114894"/>
-            <a:ext cx="1188870" cy="251714"/>
+            <a:off x="5394174" y="4492465"/>
+            <a:ext cx="2062175" cy="629284"/>
           </a:xfrm>
           <a:prstGeom prst="curvedConnector3">
             <a:avLst/>
@@ -17570,8 +17570,8 @@
         </p:nvCxnSpPr>
         <p:spPr>
           <a:xfrm flipH="1">
-            <a:off x="5054151" y="4254894"/>
-            <a:ext cx="26718" cy="178129"/>
+            <a:off x="5777378" y="4677465"/>
+            <a:ext cx="66796" cy="820322"/>
           </a:xfrm>
           <a:prstGeom prst="curvedConnector3">
             <a:avLst/>
@@ -17608,8 +17608,8 @@
         </p:nvCxnSpPr>
         <p:spPr>
           <a:xfrm flipH="1">
-            <a:off x="3845806" y="3863181"/>
-            <a:ext cx="1176194" cy="312394"/>
+            <a:off x="3156513" y="3863181"/>
+            <a:ext cx="2015487" cy="780987"/>
           </a:xfrm>
           <a:prstGeom prst="curvedConnector3">
             <a:avLst/>
@@ -17646,8 +17646,8 @@
         </p:nvCxnSpPr>
         <p:spPr>
           <a:xfrm>
-            <a:off x="4185806" y="4315575"/>
-            <a:ext cx="222302" cy="161247"/>
+            <a:off x="3606513" y="4829168"/>
+            <a:ext cx="555757" cy="778116"/>
           </a:xfrm>
           <a:prstGeom prst="curvedConnector3">
             <a:avLst/>
@@ -17684,8 +17684,8 @@
         </p:nvCxnSpPr>
         <p:spPr>
           <a:xfrm flipH="1">
-            <a:off x="3459611" y="4175575"/>
-            <a:ext cx="1066195" cy="312396"/>
+            <a:off x="2301026" y="4644168"/>
+            <a:ext cx="1755487" cy="780988"/>
           </a:xfrm>
           <a:prstGeom prst="curvedConnector3">
             <a:avLst/>
@@ -17722,8 +17722,8 @@
         </p:nvCxnSpPr>
         <p:spPr>
           <a:xfrm flipH="1">
-            <a:off x="3028058" y="4175575"/>
-            <a:ext cx="1497748" cy="40413"/>
+            <a:off x="1222144" y="4644168"/>
+            <a:ext cx="2834369" cy="101030"/>
           </a:xfrm>
           <a:prstGeom prst="curvedConnector3">
             <a:avLst/>
@@ -17760,8 +17760,8 @@
         </p:nvCxnSpPr>
         <p:spPr>
           <a:xfrm flipH="1" flipV="1">
-            <a:off x="3571913" y="3772340"/>
-            <a:ext cx="1450087" cy="90841"/>
+            <a:off x="2471780" y="3636078"/>
+            <a:ext cx="2700220" cy="227103"/>
           </a:xfrm>
           <a:prstGeom prst="curvedConnector3">
             <a:avLst/>
@@ -17798,8 +17798,8 @@
         </p:nvCxnSpPr>
         <p:spPr>
           <a:xfrm flipH="1">
-            <a:off x="2872314" y="3772340"/>
-            <a:ext cx="1379599" cy="90841"/>
+            <a:off x="832784" y="3636078"/>
+            <a:ext cx="2538996" cy="227103"/>
           </a:xfrm>
           <a:prstGeom prst="curvedConnector3">
             <a:avLst/>
@@ -17836,8 +17836,8 @@
         </p:nvCxnSpPr>
         <p:spPr>
           <a:xfrm flipH="1" flipV="1">
-            <a:off x="3028058" y="3510374"/>
-            <a:ext cx="1223855" cy="261966"/>
+            <a:off x="1222144" y="2981164"/>
+            <a:ext cx="2149636" cy="654914"/>
           </a:xfrm>
           <a:prstGeom prst="curvedConnector3">
             <a:avLst/>
@@ -17874,8 +17874,8 @@
         </p:nvCxnSpPr>
         <p:spPr>
           <a:xfrm flipH="1" flipV="1">
-            <a:off x="4490054" y="3626361"/>
-            <a:ext cx="81946" cy="51820"/>
+            <a:off x="4367135" y="3106130"/>
+            <a:ext cx="204865" cy="517051"/>
           </a:xfrm>
           <a:prstGeom prst="curvedConnector3">
             <a:avLst/>
@@ -17912,8 +17912,8 @@
         </p:nvCxnSpPr>
         <p:spPr>
           <a:xfrm flipH="1" flipV="1">
-            <a:off x="3459611" y="3238391"/>
-            <a:ext cx="1370443" cy="247970"/>
+            <a:off x="2301026" y="2301206"/>
+            <a:ext cx="2516109" cy="619924"/>
           </a:xfrm>
           <a:prstGeom prst="curvedConnector3">
             <a:avLst/>
@@ -17950,8 +17950,8 @@
         </p:nvCxnSpPr>
         <p:spPr>
           <a:xfrm flipH="1" flipV="1">
-            <a:off x="4408108" y="3249540"/>
-            <a:ext cx="81946" cy="96821"/>
+            <a:off x="4162270" y="2119078"/>
+            <a:ext cx="204865" cy="617052"/>
           </a:xfrm>
           <a:prstGeom prst="curvedConnector3">
             <a:avLst/>
@@ -17988,8 +17988,8 @@
         </p:nvCxnSpPr>
         <p:spPr>
           <a:xfrm flipV="1">
-            <a:off x="4150054" y="3153339"/>
-            <a:ext cx="1244097" cy="333022"/>
+            <a:off x="3917135" y="2088575"/>
+            <a:ext cx="2200243" cy="832555"/>
           </a:xfrm>
           <a:prstGeom prst="curvedConnector3">
             <a:avLst/>
@@ -18026,8 +18026,8 @@
         </p:nvCxnSpPr>
         <p:spPr>
           <a:xfrm flipV="1">
-            <a:off x="4122000" y="3686778"/>
-            <a:ext cx="1391971" cy="176403"/>
+            <a:off x="3972000" y="3422173"/>
+            <a:ext cx="2554928" cy="441008"/>
           </a:xfrm>
           <a:prstGeom prst="curvedConnector3">
             <a:avLst/>
@@ -18064,8 +18064,8 @@
         </p:nvCxnSpPr>
         <p:spPr>
           <a:xfrm flipV="1">
-            <a:off x="4833971" y="3359754"/>
-            <a:ext cx="1095768" cy="327024"/>
+            <a:off x="5626928" y="2604613"/>
+            <a:ext cx="1829421" cy="817560"/>
           </a:xfrm>
           <a:prstGeom prst="curvedConnector3">
             <a:avLst/>
@@ -18102,8 +18102,8 @@
         </p:nvCxnSpPr>
         <p:spPr>
           <a:xfrm flipV="1">
-            <a:off x="4833971" y="3681499"/>
-            <a:ext cx="1398204" cy="5279"/>
+            <a:off x="5626928" y="3408974"/>
+            <a:ext cx="2585512" cy="13199"/>
           </a:xfrm>
           <a:prstGeom prst="curvedConnector3">
             <a:avLst/>

--- a/demo_full.pptx
+++ b/demo_full.pptx
@@ -13547,7 +13547,7 @@
         </p:nvSpPr>
         <p:spPr>
           <a:xfrm>
-            <a:off x="2272000" y="2188180"/>
+            <a:off x="2272000" y="3538181"/>
             <a:ext cx="4600000" cy="2420000"/>
           </a:xfrm>
           <a:prstGeom prst="roundRect">
@@ -13668,7 +13668,7 @@
         </p:nvSpPr>
         <p:spPr>
           <a:xfrm>
-            <a:off x="2272000" y="3538181"/>
+            <a:off x="2272000" y="2188180"/>
             <a:ext cx="4600000" cy="2420000"/>
           </a:xfrm>
           <a:prstGeom prst="roundRect">
@@ -16465,8 +16465,8 @@
         </p:nvSpPr>
         <p:spPr>
           <a:xfrm>
-            <a:off x="3972000" y="3623181"/>
-            <a:ext cx="1200000" cy="480000"/>
+            <a:off x="3822000" y="3573181"/>
+            <a:ext cx="1500000" cy="580000"/>
           </a:xfrm>
           <a:prstGeom prst="ellipse">
             <a:avLst/>
@@ -16499,7 +16499,7 @@
           <a:lstStyle/>
           <a:p>
             <a:r>
-              <a:rPr sz="1400">
+              <a:rPr sz="1600">
                 <a:solidFill>
                   <a:srgbClr val="FFFFFF"/>
                 </a:solidFill>
@@ -16517,8 +16517,8 @@
         </p:nvSpPr>
         <p:spPr>
           <a:xfrm>
-            <a:off x="5394174" y="4307465"/>
-            <a:ext cx="900000" cy="370000"/>
+            <a:off x="5270072" y="4264839"/>
+            <a:ext cx="1100000" cy="440000"/>
           </a:xfrm>
           <a:prstGeom prst="roundRect">
             <a:avLst/>
@@ -16551,7 +16551,7 @@
           <a:lstStyle/>
           <a:p>
             <a:r>
-              <a:rPr sz="1100">
+              <a:rPr sz="1300">
                 <a:solidFill>
                   <a:srgbClr val="1E1E1E"/>
                 </a:solidFill>
@@ -16569,8 +16569,8 @@
         </p:nvSpPr>
         <p:spPr>
           <a:xfrm>
-            <a:off x="7532440" y="4177388"/>
-            <a:ext cx="680000" cy="280000"/>
+            <a:off x="7399912" y="4146883"/>
+            <a:ext cx="820000" cy="330000"/>
           </a:xfrm>
           <a:prstGeom prst="ellipse">
             <a:avLst/>
@@ -16603,7 +16603,7 @@
           <a:lstStyle/>
           <a:p>
             <a:r>
-              <a:rPr sz="1000">
+              <a:rPr sz="1100">
                 <a:solidFill>
                   <a:srgbClr val="1E1E1E"/>
                 </a:solidFill>
@@ -16621,8 +16621,8 @@
         </p:nvSpPr>
         <p:spPr>
           <a:xfrm>
-            <a:off x="6776349" y="4981749"/>
-            <a:ext cx="680000" cy="280000"/>
+            <a:off x="6658145" y="4941497"/>
+            <a:ext cx="820000" cy="330000"/>
           </a:xfrm>
           <a:prstGeom prst="ellipse">
             <a:avLst/>
@@ -16655,7 +16655,7 @@
           <a:lstStyle/>
           <a:p>
             <a:r>
-              <a:rPr sz="1000">
+              <a:rPr sz="1100">
                 <a:solidFill>
                   <a:srgbClr val="1E1E1E"/>
                 </a:solidFill>
@@ -16673,8 +16673,8 @@
         </p:nvSpPr>
         <p:spPr>
           <a:xfrm>
-            <a:off x="5437378" y="5497787"/>
-            <a:ext cx="680000" cy="280000"/>
+            <a:off x="5344542" y="5451282"/>
+            <a:ext cx="820000" cy="330000"/>
           </a:xfrm>
           <a:prstGeom prst="ellipse">
             <a:avLst/>
@@ -16707,7 +16707,7 @@
           <a:lstStyle/>
           <a:p>
             <a:r>
-              <a:rPr sz="1000">
+              <a:rPr sz="1100">
                 <a:solidFill>
                   <a:srgbClr val="1E1E1E"/>
                 </a:solidFill>
@@ -16725,8 +16725,8 @@
         </p:nvSpPr>
         <p:spPr>
           <a:xfrm>
-            <a:off x="3156513" y="4459168"/>
-            <a:ext cx="900000" cy="370000"/>
+            <a:off x="3074805" y="4414704"/>
+            <a:ext cx="1100000" cy="440000"/>
           </a:xfrm>
           <a:prstGeom prst="rect">
             <a:avLst/>
@@ -16759,7 +16759,7 @@
           <a:lstStyle/>
           <a:p>
             <a:r>
-              <a:rPr sz="1100">
+              <a:rPr sz="1300">
                 <a:solidFill>
                   <a:srgbClr val="1E1E1E"/>
                 </a:solidFill>
@@ -16777,8 +16777,8 @@
         </p:nvSpPr>
         <p:spPr>
           <a:xfrm>
-            <a:off x="3822270" y="5607284"/>
-            <a:ext cx="680000" cy="280000"/>
+            <a:off x="3760033" y="5559452"/>
+            <a:ext cx="820000" cy="330000"/>
           </a:xfrm>
           <a:prstGeom prst="hexagon">
             <a:avLst/>
@@ -16811,7 +16811,7 @@
           <a:lstStyle/>
           <a:p>
             <a:r>
-              <a:rPr sz="1000">
+              <a:rPr sz="1100">
                 <a:solidFill>
                   <a:srgbClr val="1E1E1E"/>
                 </a:solidFill>
@@ -16829,8 +16829,8 @@
         </p:nvSpPr>
         <p:spPr>
           <a:xfrm>
-            <a:off x="2301026" y="5285156"/>
-            <a:ext cx="680000" cy="280000"/>
+            <a:off x="2267609" y="5241228"/>
+            <a:ext cx="820000" cy="330000"/>
           </a:xfrm>
           <a:prstGeom prst="hexagon">
             <a:avLst/>
@@ -16863,7 +16863,7 @@
           <a:lstStyle/>
           <a:p>
             <a:r>
-              <a:rPr sz="1000">
+              <a:rPr sz="1100">
                 <a:solidFill>
                   <a:srgbClr val="1E1E1E"/>
                 </a:solidFill>
@@ -16881,8 +16881,8 @@
         </p:nvSpPr>
         <p:spPr>
           <a:xfrm>
-            <a:off x="1222144" y="4605198"/>
-            <a:ext cx="680000" cy="280000"/>
+            <a:off x="1209168" y="4569509"/>
+            <a:ext cx="820000" cy="330000"/>
           </a:xfrm>
           <a:prstGeom prst="roundRect">
             <a:avLst/>
@@ -16915,7 +16915,7 @@
           <a:lstStyle/>
           <a:p>
             <a:r>
-              <a:rPr sz="1000">
+              <a:rPr sz="1100">
                 <a:solidFill>
                   <a:srgbClr val="1E1E1E"/>
                 </a:solidFill>
@@ -16933,8 +16933,8 @@
         </p:nvSpPr>
         <p:spPr>
           <a:xfrm>
-            <a:off x="2471780" y="3451078"/>
-            <a:ext cx="900000" cy="370000"/>
+            <a:off x="2403044" y="3418830"/>
+            <a:ext cx="1100000" cy="440000"/>
           </a:xfrm>
           <a:prstGeom prst="roundRect">
             <a:avLst/>
@@ -16967,7 +16967,7 @@
           <a:lstStyle/>
           <a:p>
             <a:r>
-              <a:rPr sz="1100">
+              <a:rPr sz="1300">
                 <a:solidFill>
                   <a:srgbClr val="1E1E1E"/>
                 </a:solidFill>
@@ -16985,8 +16985,8 @@
         </p:nvSpPr>
         <p:spPr>
           <a:xfrm>
-            <a:off x="832784" y="3723181"/>
-            <a:ext cx="680000" cy="280000"/>
+            <a:off x="827184" y="3698181"/>
+            <a:ext cx="820000" cy="330000"/>
           </a:xfrm>
           <a:prstGeom prst="irregularSeal1">
             <a:avLst/>
@@ -17019,7 +17019,7 @@
           <a:lstStyle/>
           <a:p>
             <a:r>
-              <a:rPr sz="1000">
+              <a:rPr sz="1100">
                 <a:solidFill>
                   <a:srgbClr val="1E1E1E"/>
                 </a:solidFill>
@@ -17037,8 +17037,8 @@
         </p:nvSpPr>
         <p:spPr>
           <a:xfrm>
-            <a:off x="1222144" y="2841164"/>
-            <a:ext cx="680000" cy="280000"/>
+            <a:off x="1209168" y="2826853"/>
+            <a:ext cx="820000" cy="330000"/>
           </a:xfrm>
           <a:prstGeom prst="irregularSeal1">
             <a:avLst/>
@@ -17071,7 +17071,7 @@
           <a:lstStyle/>
           <a:p>
             <a:r>
-              <a:rPr sz="1000">
+              <a:rPr sz="1100">
                 <a:solidFill>
                   <a:srgbClr val="1E1E1E"/>
                 </a:solidFill>
@@ -17089,8 +17089,8 @@
         </p:nvSpPr>
         <p:spPr>
           <a:xfrm>
-            <a:off x="3917135" y="2736130"/>
-            <a:ext cx="900000" cy="370000"/>
+            <a:off x="3821017" y="2712546"/>
+            <a:ext cx="1100000" cy="440000"/>
           </a:xfrm>
           <a:prstGeom prst="roundRect">
             <a:avLst/>
@@ -17123,7 +17123,7 @@
           <a:lstStyle/>
           <a:p>
             <a:r>
-              <a:rPr sz="1100">
+              <a:rPr sz="1300">
                 <a:solidFill>
                   <a:srgbClr val="1E1E1E"/>
                 </a:solidFill>
@@ -17141,8 +17141,8 @@
         </p:nvSpPr>
         <p:spPr>
           <a:xfrm>
-            <a:off x="2301026" y="2161206"/>
-            <a:ext cx="680000" cy="280000"/>
+            <a:off x="2267609" y="2155134"/>
+            <a:ext cx="820000" cy="330000"/>
           </a:xfrm>
           <a:prstGeom prst="rect">
             <a:avLst/>
@@ -17175,7 +17175,7 @@
           <a:lstStyle/>
           <a:p>
             <a:r>
-              <a:rPr sz="1000">
+              <a:rPr sz="1100">
                 <a:solidFill>
                   <a:srgbClr val="1E1E1E"/>
                 </a:solidFill>
@@ -17193,8 +17193,8 @@
         </p:nvSpPr>
         <p:spPr>
           <a:xfrm>
-            <a:off x="3822270" y="1839078"/>
-            <a:ext cx="680000" cy="280000"/>
+            <a:off x="3760033" y="1836910"/>
+            <a:ext cx="820000" cy="330000"/>
           </a:xfrm>
           <a:prstGeom prst="rect">
             <a:avLst/>
@@ -17227,7 +17227,7 @@
           <a:lstStyle/>
           <a:p>
             <a:r>
-              <a:rPr sz="1000">
+              <a:rPr sz="1100">
                 <a:solidFill>
                   <a:srgbClr val="1E1E1E"/>
                 </a:solidFill>
@@ -17245,8 +17245,8 @@
         </p:nvSpPr>
         <p:spPr>
           <a:xfrm>
-            <a:off x="5437378" y="1948575"/>
-            <a:ext cx="680000" cy="280000"/>
+            <a:off x="5344542" y="1945080"/>
+            <a:ext cx="820000" cy="330000"/>
           </a:xfrm>
           <a:prstGeom prst="roundRect">
             <a:avLst/>
@@ -17279,7 +17279,7 @@
           <a:lstStyle/>
           <a:p>
             <a:r>
-              <a:rPr sz="1000">
+              <a:rPr sz="1100">
                 <a:solidFill>
                   <a:srgbClr val="1E1E1E"/>
                 </a:solidFill>
@@ -17297,8 +17297,8 @@
         </p:nvSpPr>
         <p:spPr>
           <a:xfrm>
-            <a:off x="5626928" y="3237173"/>
-            <a:ext cx="900000" cy="370000"/>
+            <a:off x="5498416" y="3207517"/>
+            <a:ext cx="1100000" cy="440000"/>
           </a:xfrm>
           <a:prstGeom prst="cloud">
             <a:avLst/>
@@ -17331,7 +17331,7 @@
           <a:lstStyle/>
           <a:p>
             <a:r>
-              <a:rPr sz="1100">
+              <a:rPr sz="1300">
                 <a:solidFill>
                   <a:srgbClr val="1E1E1E"/>
                 </a:solidFill>
@@ -17349,8 +17349,8 @@
         </p:nvSpPr>
         <p:spPr>
           <a:xfrm>
-            <a:off x="6776349" y="2464613"/>
-            <a:ext cx="680000" cy="280000"/>
+            <a:off x="6658145" y="2454865"/>
+            <a:ext cx="820000" cy="330000"/>
           </a:xfrm>
           <a:prstGeom prst="rect">
             <a:avLst/>
@@ -17383,7 +17383,7 @@
           <a:lstStyle/>
           <a:p>
             <a:r>
-              <a:rPr sz="1000">
+              <a:rPr sz="1100">
                 <a:solidFill>
                   <a:srgbClr val="1E1E1E"/>
                 </a:solidFill>
@@ -17401,8 +17401,8 @@
         </p:nvSpPr>
         <p:spPr>
           <a:xfrm>
-            <a:off x="7532440" y="3268974"/>
-            <a:ext cx="680000" cy="280000"/>
+            <a:off x="7399912" y="3249479"/>
+            <a:ext cx="820000" cy="330000"/>
           </a:xfrm>
           <a:prstGeom prst="rect">
             <a:avLst/>
@@ -17435,7 +17435,7 @@
           <a:lstStyle/>
           <a:p>
             <a:r>
-              <a:rPr sz="1000">
+              <a:rPr sz="1100">
                 <a:solidFill>
                   <a:srgbClr val="1E1E1E"/>
                 </a:solidFill>
@@ -17456,8 +17456,8 @@
         </p:nvCxnSpPr>
         <p:spPr>
           <a:xfrm>
-            <a:off x="3972000" y="3863181"/>
-            <a:ext cx="2322174" cy="629284"/>
+            <a:off x="3822000" y="3863181"/>
+            <a:ext cx="2548072" cy="621658"/>
           </a:xfrm>
           <a:prstGeom prst="curvedConnector3">
             <a:avLst/>
@@ -17494,8 +17494,8 @@
         </p:nvCxnSpPr>
         <p:spPr>
           <a:xfrm flipV="1">
-            <a:off x="5394174" y="4317388"/>
-            <a:ext cx="2818266" cy="175077"/>
+            <a:off x="5270072" y="4311883"/>
+            <a:ext cx="2949840" cy="172956"/>
           </a:xfrm>
           <a:prstGeom prst="curvedConnector3">
             <a:avLst/>
@@ -17532,8 +17532,8 @@
         </p:nvCxnSpPr>
         <p:spPr>
           <a:xfrm>
-            <a:off x="5394174" y="4492465"/>
-            <a:ext cx="2062175" cy="629284"/>
+            <a:off x="5270072" y="4484839"/>
+            <a:ext cx="2208073" cy="621658"/>
           </a:xfrm>
           <a:prstGeom prst="curvedConnector3">
             <a:avLst/>
@@ -17570,8 +17570,8 @@
         </p:nvCxnSpPr>
         <p:spPr>
           <a:xfrm flipH="1">
-            <a:off x="5777378" y="4677465"/>
-            <a:ext cx="66796" cy="820322"/>
+            <a:off x="5754542" y="4704839"/>
+            <a:ext cx="65530" cy="746443"/>
           </a:xfrm>
           <a:prstGeom prst="curvedConnector3">
             <a:avLst/>
@@ -17608,8 +17608,8 @@
         </p:nvCxnSpPr>
         <p:spPr>
           <a:xfrm flipH="1">
-            <a:off x="3156513" y="3863181"/>
-            <a:ext cx="2015487" cy="780987"/>
+            <a:off x="3074805" y="3863181"/>
+            <a:ext cx="2247195" cy="771523"/>
           </a:xfrm>
           <a:prstGeom prst="curvedConnector3">
             <a:avLst/>
@@ -17646,8 +17646,8 @@
         </p:nvCxnSpPr>
         <p:spPr>
           <a:xfrm>
-            <a:off x="3606513" y="4829168"/>
-            <a:ext cx="555757" cy="778116"/>
+            <a:off x="3624805" y="4854704"/>
+            <a:ext cx="545228" cy="704748"/>
           </a:xfrm>
           <a:prstGeom prst="curvedConnector3">
             <a:avLst/>
@@ -17684,8 +17684,8 @@
         </p:nvCxnSpPr>
         <p:spPr>
           <a:xfrm flipH="1">
-            <a:off x="2301026" y="4644168"/>
-            <a:ext cx="1755487" cy="780988"/>
+            <a:off x="2267609" y="4634704"/>
+            <a:ext cx="1907196" cy="771524"/>
           </a:xfrm>
           <a:prstGeom prst="curvedConnector3">
             <a:avLst/>
@@ -17722,8 +17722,8 @@
         </p:nvCxnSpPr>
         <p:spPr>
           <a:xfrm flipH="1">
-            <a:off x="1222144" y="4644168"/>
-            <a:ext cx="2834369" cy="101030"/>
+            <a:off x="1209168" y="4634704"/>
+            <a:ext cx="2965637" cy="99805"/>
           </a:xfrm>
           <a:prstGeom prst="curvedConnector3">
             <a:avLst/>
@@ -17760,8 +17760,8 @@
         </p:nvCxnSpPr>
         <p:spPr>
           <a:xfrm flipH="1" flipV="1">
-            <a:off x="2471780" y="3636078"/>
-            <a:ext cx="2700220" cy="227103"/>
+            <a:off x="2403044" y="3638830"/>
+            <a:ext cx="2918956" cy="224351"/>
           </a:xfrm>
           <a:prstGeom prst="curvedConnector3">
             <a:avLst/>
@@ -17798,8 +17798,8 @@
         </p:nvCxnSpPr>
         <p:spPr>
           <a:xfrm flipH="1">
-            <a:off x="832784" y="3636078"/>
-            <a:ext cx="2538996" cy="227103"/>
+            <a:off x="827184" y="3638830"/>
+            <a:ext cx="2675860" cy="224351"/>
           </a:xfrm>
           <a:prstGeom prst="curvedConnector3">
             <a:avLst/>
@@ -17836,8 +17836,8 @@
         </p:nvCxnSpPr>
         <p:spPr>
           <a:xfrm flipH="1" flipV="1">
-            <a:off x="1222144" y="2981164"/>
-            <a:ext cx="2149636" cy="654914"/>
+            <a:off x="1209168" y="2991853"/>
+            <a:ext cx="2293876" cy="646977"/>
           </a:xfrm>
           <a:prstGeom prst="curvedConnector3">
             <a:avLst/>
@@ -17874,8 +17874,8 @@
         </p:nvCxnSpPr>
         <p:spPr>
           <a:xfrm flipH="1" flipV="1">
-            <a:off x="4367135" y="3106130"/>
-            <a:ext cx="204865" cy="517051"/>
+            <a:off x="4371017" y="3152546"/>
+            <a:ext cx="200983" cy="420635"/>
           </a:xfrm>
           <a:prstGeom prst="curvedConnector3">
             <a:avLst/>
@@ -17912,8 +17912,8 @@
         </p:nvCxnSpPr>
         <p:spPr>
           <a:xfrm flipH="1" flipV="1">
-            <a:off x="2301026" y="2301206"/>
-            <a:ext cx="2516109" cy="619924"/>
+            <a:off x="2267609" y="2320134"/>
+            <a:ext cx="2653408" cy="612412"/>
           </a:xfrm>
           <a:prstGeom prst="curvedConnector3">
             <a:avLst/>
@@ -17950,8 +17950,8 @@
         </p:nvCxnSpPr>
         <p:spPr>
           <a:xfrm flipH="1" flipV="1">
-            <a:off x="4162270" y="2119078"/>
-            <a:ext cx="204865" cy="617052"/>
+            <a:off x="4170033" y="2166910"/>
+            <a:ext cx="200984" cy="545636"/>
           </a:xfrm>
           <a:prstGeom prst="curvedConnector3">
             <a:avLst/>
@@ -17988,8 +17988,8 @@
         </p:nvCxnSpPr>
         <p:spPr>
           <a:xfrm flipV="1">
-            <a:off x="3917135" y="2088575"/>
-            <a:ext cx="2200243" cy="832555"/>
+            <a:off x="3821017" y="2110080"/>
+            <a:ext cx="2343525" cy="822466"/>
           </a:xfrm>
           <a:prstGeom prst="curvedConnector3">
             <a:avLst/>
@@ -18026,8 +18026,8 @@
         </p:nvCxnSpPr>
         <p:spPr>
           <a:xfrm flipV="1">
-            <a:off x="3972000" y="3422173"/>
-            <a:ext cx="2554928" cy="441008"/>
+            <a:off x="3822000" y="3427517"/>
+            <a:ext cx="2776416" cy="435664"/>
           </a:xfrm>
           <a:prstGeom prst="curvedConnector3">
             <a:avLst/>
@@ -18064,8 +18064,8 @@
         </p:nvCxnSpPr>
         <p:spPr>
           <a:xfrm flipV="1">
-            <a:off x="5626928" y="2604613"/>
-            <a:ext cx="1829421" cy="817560"/>
+            <a:off x="5498416" y="2619865"/>
+            <a:ext cx="1979729" cy="807652"/>
           </a:xfrm>
           <a:prstGeom prst="curvedConnector3">
             <a:avLst/>
@@ -18102,8 +18102,8 @@
         </p:nvCxnSpPr>
         <p:spPr>
           <a:xfrm flipV="1">
-            <a:off x="5626928" y="3408974"/>
-            <a:ext cx="2585512" cy="13199"/>
+            <a:off x="5498416" y="3414479"/>
+            <a:ext cx="2721496" cy="13038"/>
           </a:xfrm>
           <a:prstGeom prst="curvedConnector3">
             <a:avLst/>

--- a/demo_full.pptx
+++ b/demo_full.pptx
@@ -13547,7 +13547,7 @@
         </p:nvSpPr>
         <p:spPr>
           <a:xfrm>
-            <a:off x="2272000" y="3538181"/>
+            <a:off x="2272000" y="2188180"/>
             <a:ext cx="4600000" cy="2420000"/>
           </a:xfrm>
           <a:prstGeom prst="roundRect">
@@ -13668,7 +13668,7 @@
         </p:nvSpPr>
         <p:spPr>
           <a:xfrm>
-            <a:off x="2272000" y="2188180"/>
+            <a:off x="2272000" y="3538181"/>
             <a:ext cx="4600000" cy="2420000"/>
           </a:xfrm>
           <a:prstGeom prst="roundRect">
@@ -15660,183 +15660,1499 @@
           <a:p/>
         </p:txBody>
       </p:sp>
-      <p:sp>
-        <p:nvSpPr>
-          <p:cNvPr id="4" name="Rectangle 3"/>
-          <p:cNvSpPr/>
-          <p:nvPr/>
-        </p:nvSpPr>
-        <p:spPr>
-          <a:xfrm>
-            <a:off x="6425688" y="5513155"/>
-            <a:ext cx="1200000" cy="500000"/>
-          </a:xfrm>
-          <a:prstGeom prst="rect">
-            <a:avLst/>
-          </a:prstGeom>
-        </p:spPr>
-        <p:style>
-          <a:lnRef idx="1">
-            <a:schemeClr val="accent1"/>
-          </a:lnRef>
-          <a:fillRef idx="3">
-            <a:schemeClr val="accent1"/>
-          </a:fillRef>
-          <a:effectRef idx="2">
-            <a:schemeClr val="accent1"/>
-          </a:effectRef>
-          <a:fontRef idx="minor">
-            <a:schemeClr val="lt1"/>
-          </a:fontRef>
-        </p:style>
-        <p:txBody>
-          <a:bodyPr rtlCol="0" anchor="ctr"/>
-          <a:lstStyle/>
-          <a:p>
-            <a:r>
-              <a:rPr sz="1200"/>
-              <a:t>CUSTOMER</a:t>
-            </a:r>
-          </a:p>
-        </p:txBody>
-      </p:sp>
-      <p:sp>
-        <p:nvSpPr>
-          <p:cNvPr id="5" name="Rectangle 4"/>
-          <p:cNvSpPr/>
-          <p:nvPr/>
-        </p:nvSpPr>
-        <p:spPr>
-          <a:xfrm>
-            <a:off x="6500578" y="2848046"/>
-            <a:ext cx="1200000" cy="500000"/>
-          </a:xfrm>
-          <a:prstGeom prst="rect">
-            <a:avLst/>
-          </a:prstGeom>
-        </p:spPr>
-        <p:style>
-          <a:lnRef idx="1">
-            <a:schemeClr val="accent1"/>
-          </a:lnRef>
-          <a:fillRef idx="3">
-            <a:schemeClr val="accent1"/>
-          </a:fillRef>
-          <a:effectRef idx="2">
-            <a:schemeClr val="accent1"/>
-          </a:effectRef>
-          <a:fontRef idx="minor">
-            <a:schemeClr val="lt1"/>
-          </a:fontRef>
-        </p:style>
-        <p:txBody>
-          <a:bodyPr rtlCol="0" anchor="ctr"/>
-          <a:lstStyle/>
-          <a:p>
-            <a:r>
-              <a:rPr sz="1200"/>
-              <a:t>ORDER</a:t>
-            </a:r>
-          </a:p>
-        </p:txBody>
-      </p:sp>
-      <p:sp>
-        <p:nvSpPr>
-          <p:cNvPr id="6" name="Rectangle 5"/>
-          <p:cNvSpPr/>
-          <p:nvPr/>
-        </p:nvSpPr>
-        <p:spPr>
-          <a:xfrm>
-            <a:off x="2504533" y="1957962"/>
-            <a:ext cx="1200000" cy="500000"/>
-          </a:xfrm>
-          <a:prstGeom prst="rect">
-            <a:avLst/>
-          </a:prstGeom>
-        </p:spPr>
-        <p:style>
-          <a:lnRef idx="1">
-            <a:schemeClr val="accent1"/>
-          </a:lnRef>
-          <a:fillRef idx="3">
-            <a:schemeClr val="accent1"/>
-          </a:fillRef>
-          <a:effectRef idx="2">
-            <a:schemeClr val="accent1"/>
-          </a:effectRef>
-          <a:fontRef idx="minor">
-            <a:schemeClr val="lt1"/>
-          </a:fontRef>
-        </p:style>
-        <p:txBody>
-          <a:bodyPr rtlCol="0" anchor="ctr"/>
-          <a:lstStyle/>
-          <a:p>
-            <a:r>
-              <a:rPr sz="1200"/>
-              <a:t>LINE-ITEM</a:t>
-            </a:r>
-          </a:p>
-        </p:txBody>
-      </p:sp>
-      <p:sp>
-        <p:nvSpPr>
-          <p:cNvPr id="7" name="Rectangle 6"/>
-          <p:cNvSpPr/>
-          <p:nvPr/>
-        </p:nvSpPr>
-        <p:spPr>
-          <a:xfrm>
-            <a:off x="457200" y="4133562"/>
-            <a:ext cx="1200000" cy="500000"/>
-          </a:xfrm>
-          <a:prstGeom prst="rect">
-            <a:avLst/>
-          </a:prstGeom>
-        </p:spPr>
-        <p:style>
-          <a:lnRef idx="1">
-            <a:schemeClr val="accent1"/>
-          </a:lnRef>
-          <a:fillRef idx="3">
-            <a:schemeClr val="accent1"/>
-          </a:fillRef>
-          <a:effectRef idx="2">
-            <a:schemeClr val="accent1"/>
-          </a:effectRef>
-          <a:fontRef idx="minor">
-            <a:schemeClr val="lt1"/>
-          </a:fontRef>
-        </p:style>
-        <p:txBody>
-          <a:bodyPr rtlCol="0" anchor="ctr"/>
-          <a:lstStyle/>
-          <a:p>
-            <a:r>
-              <a:rPr sz="1200"/>
-              <a:t>PRODUCT</a:t>
-            </a:r>
-          </a:p>
-        </p:txBody>
-      </p:sp>
+      <p:grpSp>
+        <p:grpSpPr>
+          <a:xfrm>
+            <a:off x="6019516" y="4036394"/>
+            <a:ext cx="2400000" cy="1889769"/>
+            <a:chOff x="6019516" y="4036394"/>
+            <a:chExt cx="2400000" cy="1889769"/>
+          </a:xfrm>
+        </p:grpSpPr>
+        <p:sp>
+          <p:nvSpPr>
+            <p:cNvPr id="4" name="Rectangle 3"/>
+            <p:cNvSpPr/>
+            <p:nvPr/>
+          </p:nvSpPr>
+          <p:spPr>
+            <a:xfrm>
+              <a:off x="6019516" y="4606163"/>
+              <a:ext cx="2400000" cy="1320000"/>
+            </a:xfrm>
+            <a:prstGeom prst="rect">
+              <a:avLst/>
+            </a:prstGeom>
+            <a:noFill/>
+            <a:ln>
+              <a:solidFill>
+                <a:srgbClr val="1F497D"/>
+              </a:solidFill>
+            </a:ln>
+          </p:spPr>
+          <p:style>
+            <a:lnRef idx="1">
+              <a:schemeClr val="accent1"/>
+            </a:lnRef>
+            <a:fillRef idx="3">
+              <a:schemeClr val="accent1"/>
+            </a:fillRef>
+            <a:effectRef idx="2">
+              <a:schemeClr val="accent1"/>
+            </a:effectRef>
+            <a:fontRef idx="minor">
+              <a:schemeClr val="lt1"/>
+            </a:fontRef>
+          </p:style>
+          <p:txBody>
+            <a:bodyPr rtlCol="0" anchor="ctr"/>
+            <a:lstStyle/>
+            <a:p/>
+          </p:txBody>
+        </p:sp>
+        <p:sp>
+          <p:nvSpPr>
+            <p:cNvPr id="5" name="Rectangle 4"/>
+            <p:cNvSpPr/>
+            <p:nvPr/>
+          </p:nvSpPr>
+          <p:spPr>
+            <a:xfrm>
+              <a:off x="6019516" y="4606163"/>
+              <a:ext cx="2400000" cy="420000"/>
+            </a:xfrm>
+            <a:prstGeom prst="rect">
+              <a:avLst/>
+            </a:prstGeom>
+            <a:solidFill>
+              <a:srgbClr val="1F497D"/>
+            </a:solidFill>
+            <a:ln>
+              <a:noFill/>
+            </a:ln>
+          </p:spPr>
+          <p:style>
+            <a:lnRef idx="1">
+              <a:schemeClr val="accent1"/>
+            </a:lnRef>
+            <a:fillRef idx="3">
+              <a:schemeClr val="accent1"/>
+            </a:fillRef>
+            <a:effectRef idx="2">
+              <a:schemeClr val="accent1"/>
+            </a:effectRef>
+            <a:fontRef idx="minor">
+              <a:schemeClr val="lt1"/>
+            </a:fontRef>
+          </p:style>
+          <p:txBody>
+            <a:bodyPr rtlCol="0" anchor="ctr" wrap="none"/>
+            <a:lstStyle/>
+            <a:p>
+              <a:pPr algn="ctr"/>
+              <a:r>
+                <a:rPr sz="1100" b="1">
+                  <a:solidFill>
+                    <a:srgbClr val="FFFFFF"/>
+                  </a:solidFill>
+                </a:rPr>
+                <a:t>CUSTOMER</a:t>
+              </a:r>
+            </a:p>
+          </p:txBody>
+        </p:sp>
+        <p:sp>
+          <p:nvSpPr>
+            <p:cNvPr id="6" name="Rectangle 5"/>
+            <p:cNvSpPr/>
+            <p:nvPr/>
+          </p:nvSpPr>
+          <p:spPr>
+            <a:xfrm>
+              <a:off x="6019516" y="5026163"/>
+              <a:ext cx="2400000" cy="300000"/>
+            </a:xfrm>
+            <a:prstGeom prst="rect">
+              <a:avLst/>
+            </a:prstGeom>
+            <a:solidFill>
+              <a:srgbClr val="FFFFFF"/>
+            </a:solidFill>
+            <a:ln>
+              <a:noFill/>
+            </a:ln>
+          </p:spPr>
+          <p:style>
+            <a:lnRef idx="1">
+              <a:schemeClr val="accent1"/>
+            </a:lnRef>
+            <a:fillRef idx="3">
+              <a:schemeClr val="accent1"/>
+            </a:fillRef>
+            <a:effectRef idx="2">
+              <a:schemeClr val="accent1"/>
+            </a:effectRef>
+            <a:fontRef idx="minor">
+              <a:schemeClr val="lt1"/>
+            </a:fontRef>
+          </p:style>
+          <p:txBody>
+            <a:bodyPr rtlCol="0" anchor="ctr" wrap="none" lIns="80000" tIns="30000" rIns="80000" bIns="30000"/>
+            <a:lstStyle/>
+            <a:p>
+              <a:pPr algn="ctr"/>
+              <a:r>
+                <a:rPr sz="900">
+                  <a:solidFill>
+                    <a:srgbClr val="646464"/>
+                  </a:solidFill>
+                </a:rPr>
+                <a:t>int       </a:t>
+              </a:r>
+              <a:r>
+                <a:rPr sz="900" b="1"/>
+                <a:t>  id                </a:t>
+              </a:r>
+              <a:r>
+                <a:rPr sz="800" b="1">
+                  <a:solidFill>
+                    <a:srgbClr val="C40000"/>
+                  </a:solidFill>
+                </a:rPr>
+                <a:t>  PK</a:t>
+              </a:r>
+            </a:p>
+          </p:txBody>
+        </p:sp>
+        <p:sp>
+          <p:nvSpPr>
+            <p:cNvPr id="7" name="Rectangle 6"/>
+            <p:cNvSpPr/>
+            <p:nvPr/>
+          </p:nvSpPr>
+          <p:spPr>
+            <a:xfrm>
+              <a:off x="6019516" y="5326163"/>
+              <a:ext cx="2400000" cy="300000"/>
+            </a:xfrm>
+            <a:prstGeom prst="rect">
+              <a:avLst/>
+            </a:prstGeom>
+            <a:solidFill>
+              <a:srgbClr val="EBF1FC"/>
+            </a:solidFill>
+            <a:ln>
+              <a:noFill/>
+            </a:ln>
+          </p:spPr>
+          <p:style>
+            <a:lnRef idx="1">
+              <a:schemeClr val="accent1"/>
+            </a:lnRef>
+            <a:fillRef idx="3">
+              <a:schemeClr val="accent1"/>
+            </a:fillRef>
+            <a:effectRef idx="2">
+              <a:schemeClr val="accent1"/>
+            </a:effectRef>
+            <a:fontRef idx="minor">
+              <a:schemeClr val="lt1"/>
+            </a:fontRef>
+          </p:style>
+          <p:txBody>
+            <a:bodyPr rtlCol="0" anchor="ctr" wrap="none" lIns="80000" tIns="30000" rIns="80000" bIns="30000"/>
+            <a:lstStyle/>
+            <a:p>
+              <a:pPr algn="ctr"/>
+              <a:r>
+                <a:rPr sz="900">
+                  <a:solidFill>
+                    <a:srgbClr val="646464"/>
+                  </a:solidFill>
+                </a:rPr>
+                <a:t>string    </a:t>
+              </a:r>
+              <a:r>
+                <a:rPr sz="900" b="0"/>
+                <a:t>  name              </a:t>
+              </a:r>
+            </a:p>
+          </p:txBody>
+        </p:sp>
+        <p:sp>
+          <p:nvSpPr>
+            <p:cNvPr id="8" name="Rectangle 7"/>
+            <p:cNvSpPr/>
+            <p:nvPr/>
+          </p:nvSpPr>
+          <p:spPr>
+            <a:xfrm>
+              <a:off x="6019516" y="5626163"/>
+              <a:ext cx="2400000" cy="300000"/>
+            </a:xfrm>
+            <a:prstGeom prst="rect">
+              <a:avLst/>
+            </a:prstGeom>
+            <a:solidFill>
+              <a:srgbClr val="FFFFFF"/>
+            </a:solidFill>
+            <a:ln>
+              <a:noFill/>
+            </a:ln>
+          </p:spPr>
+          <p:style>
+            <a:lnRef idx="1">
+              <a:schemeClr val="accent1"/>
+            </a:lnRef>
+            <a:fillRef idx="3">
+              <a:schemeClr val="accent1"/>
+            </a:fillRef>
+            <a:effectRef idx="2">
+              <a:schemeClr val="accent1"/>
+            </a:effectRef>
+            <a:fontRef idx="minor">
+              <a:schemeClr val="lt1"/>
+            </a:fontRef>
+          </p:style>
+          <p:txBody>
+            <a:bodyPr rtlCol="0" anchor="ctr" wrap="none" lIns="80000" tIns="30000" rIns="80000" bIns="30000"/>
+            <a:lstStyle/>
+            <a:p>
+              <a:pPr algn="ctr"/>
+              <a:r>
+                <a:rPr sz="900">
+                  <a:solidFill>
+                    <a:srgbClr val="646464"/>
+                  </a:solidFill>
+                </a:rPr>
+                <a:t>string    </a:t>
+              </a:r>
+              <a:r>
+                <a:rPr sz="900" b="1"/>
+                <a:t>  email             </a:t>
+              </a:r>
+              <a:r>
+                <a:rPr sz="800" b="1">
+                  <a:solidFill>
+                    <a:srgbClr val="008000"/>
+                  </a:solidFill>
+                </a:rPr>
+                <a:t>  UK</a:t>
+              </a:r>
+              <a:r>
+                <a:rPr sz="800" i="1">
+                  <a:solidFill>
+                    <a:srgbClr val="828282"/>
+                  </a:solidFill>
+                </a:rPr>
+                <a:t>  "Email address"</a:t>
+              </a:r>
+            </a:p>
+          </p:txBody>
+        </p:sp>
+        <p:sp>
+          <p:nvSpPr>
+            <p:cNvPr id="24" name="TextBox 23"/>
+            <p:cNvSpPr txBox="1"/>
+            <p:nvPr/>
+          </p:nvSpPr>
+          <p:spPr>
+            <a:xfrm>
+              <a:off x="7071062" y="4326250"/>
+              <a:ext cx="350000" cy="220000"/>
+            </a:xfrm>
+            <a:prstGeom prst="rect">
+              <a:avLst/>
+            </a:prstGeom>
+            <a:noFill/>
+            <a:ln>
+              <a:noFill/>
+            </a:ln>
+          </p:spPr>
+          <p:txBody>
+            <a:bodyPr wrap="none">
+              <a:spAutoFit/>
+            </a:bodyPr>
+            <a:lstStyle/>
+            <a:p>
+              <a:pPr algn="ctr"/>
+              <a:r>
+                <a:rPr sz="900" b="1">
+                  <a:solidFill>
+                    <a:srgbClr val="323232"/>
+                  </a:solidFill>
+                </a:rPr>
+                <a:t>1</a:t>
+              </a:r>
+            </a:p>
+          </p:txBody>
+        </p:sp>
+        <p:sp>
+          <p:nvSpPr>
+            <p:cNvPr id="26" name="TextBox 25"/>
+            <p:cNvSpPr txBox="1"/>
+            <p:nvPr/>
+          </p:nvSpPr>
+          <p:spPr>
+            <a:xfrm>
+              <a:off x="6655013" y="4036394"/>
+              <a:ext cx="1200000" cy="240000"/>
+            </a:xfrm>
+            <a:prstGeom prst="rect">
+              <a:avLst/>
+            </a:prstGeom>
+            <a:solidFill>
+              <a:srgbClr val="F5F5FF"/>
+            </a:solidFill>
+            <a:ln>
+              <a:noFill/>
+            </a:ln>
+          </p:spPr>
+          <p:txBody>
+            <a:bodyPr wrap="none">
+              <a:spAutoFit/>
+            </a:bodyPr>
+            <a:lstStyle/>
+            <a:p>
+              <a:pPr algn="ctr"/>
+              <a:r>
+                <a:rPr sz="900" i="1">
+                  <a:solidFill>
+                    <a:srgbClr val="505050"/>
+                  </a:solidFill>
+                </a:rPr>
+                <a:t>places</a:t>
+              </a:r>
+            </a:p>
+          </p:txBody>
+        </p:sp>
+      </p:grpSp>
+      <p:grpSp>
+        <p:grpSpPr>
+          <a:xfrm>
+            <a:off x="5045176" y="2502705"/>
+            <a:ext cx="3441624" cy="1599913"/>
+            <a:chOff x="5045176" y="2502705"/>
+            <a:chExt cx="3441624" cy="1599913"/>
+          </a:xfrm>
+        </p:grpSpPr>
+        <p:sp>
+          <p:nvSpPr>
+            <p:cNvPr id="9" name="Rectangle 8"/>
+            <p:cNvSpPr/>
+            <p:nvPr/>
+          </p:nvSpPr>
+          <p:spPr>
+            <a:xfrm>
+              <a:off x="6086800" y="2502705"/>
+              <a:ext cx="2400000" cy="1320000"/>
+            </a:xfrm>
+            <a:prstGeom prst="rect">
+              <a:avLst/>
+            </a:prstGeom>
+            <a:noFill/>
+            <a:ln>
+              <a:solidFill>
+                <a:srgbClr val="1F497D"/>
+              </a:solidFill>
+            </a:ln>
+          </p:spPr>
+          <p:style>
+            <a:lnRef idx="1">
+              <a:schemeClr val="accent1"/>
+            </a:lnRef>
+            <a:fillRef idx="3">
+              <a:schemeClr val="accent1"/>
+            </a:fillRef>
+            <a:effectRef idx="2">
+              <a:schemeClr val="accent1"/>
+            </a:effectRef>
+            <a:fontRef idx="minor">
+              <a:schemeClr val="lt1"/>
+            </a:fontRef>
+          </p:style>
+          <p:txBody>
+            <a:bodyPr rtlCol="0" anchor="ctr"/>
+            <a:lstStyle/>
+            <a:p/>
+          </p:txBody>
+        </p:sp>
+        <p:sp>
+          <p:nvSpPr>
+            <p:cNvPr id="10" name="Rectangle 9"/>
+            <p:cNvSpPr/>
+            <p:nvPr/>
+          </p:nvSpPr>
+          <p:spPr>
+            <a:xfrm>
+              <a:off x="6086800" y="2502705"/>
+              <a:ext cx="2400000" cy="420000"/>
+            </a:xfrm>
+            <a:prstGeom prst="rect">
+              <a:avLst/>
+            </a:prstGeom>
+            <a:solidFill>
+              <a:srgbClr val="1F497D"/>
+            </a:solidFill>
+            <a:ln>
+              <a:noFill/>
+            </a:ln>
+          </p:spPr>
+          <p:style>
+            <a:lnRef idx="1">
+              <a:schemeClr val="accent1"/>
+            </a:lnRef>
+            <a:fillRef idx="3">
+              <a:schemeClr val="accent1"/>
+            </a:fillRef>
+            <a:effectRef idx="2">
+              <a:schemeClr val="accent1"/>
+            </a:effectRef>
+            <a:fontRef idx="minor">
+              <a:schemeClr val="lt1"/>
+            </a:fontRef>
+          </p:style>
+          <p:txBody>
+            <a:bodyPr rtlCol="0" anchor="ctr" wrap="none"/>
+            <a:lstStyle/>
+            <a:p>
+              <a:pPr algn="ctr"/>
+              <a:r>
+                <a:rPr sz="1100" b="1">
+                  <a:solidFill>
+                    <a:srgbClr val="FFFFFF"/>
+                  </a:solidFill>
+                </a:rPr>
+                <a:t>ORDER</a:t>
+              </a:r>
+            </a:p>
+          </p:txBody>
+        </p:sp>
+        <p:sp>
+          <p:nvSpPr>
+            <p:cNvPr id="11" name="Rectangle 10"/>
+            <p:cNvSpPr/>
+            <p:nvPr/>
+          </p:nvSpPr>
+          <p:spPr>
+            <a:xfrm>
+              <a:off x="6086800" y="2922705"/>
+              <a:ext cx="2400000" cy="300000"/>
+            </a:xfrm>
+            <a:prstGeom prst="rect">
+              <a:avLst/>
+            </a:prstGeom>
+            <a:solidFill>
+              <a:srgbClr val="FFFFFF"/>
+            </a:solidFill>
+            <a:ln>
+              <a:noFill/>
+            </a:ln>
+          </p:spPr>
+          <p:style>
+            <a:lnRef idx="1">
+              <a:schemeClr val="accent1"/>
+            </a:lnRef>
+            <a:fillRef idx="3">
+              <a:schemeClr val="accent1"/>
+            </a:fillRef>
+            <a:effectRef idx="2">
+              <a:schemeClr val="accent1"/>
+            </a:effectRef>
+            <a:fontRef idx="minor">
+              <a:schemeClr val="lt1"/>
+            </a:fontRef>
+          </p:style>
+          <p:txBody>
+            <a:bodyPr rtlCol="0" anchor="ctr" wrap="none" lIns="80000" tIns="30000" rIns="80000" bIns="30000"/>
+            <a:lstStyle/>
+            <a:p>
+              <a:pPr algn="ctr"/>
+              <a:r>
+                <a:rPr sz="900">
+                  <a:solidFill>
+                    <a:srgbClr val="646464"/>
+                  </a:solidFill>
+                </a:rPr>
+                <a:t>int       </a:t>
+              </a:r>
+              <a:r>
+                <a:rPr sz="900" b="1"/>
+                <a:t>  id                </a:t>
+              </a:r>
+              <a:r>
+                <a:rPr sz="800" b="1">
+                  <a:solidFill>
+                    <a:srgbClr val="C40000"/>
+                  </a:solidFill>
+                </a:rPr>
+                <a:t>  PK</a:t>
+              </a:r>
+            </a:p>
+          </p:txBody>
+        </p:sp>
+        <p:sp>
+          <p:nvSpPr>
+            <p:cNvPr id="12" name="Rectangle 11"/>
+            <p:cNvSpPr/>
+            <p:nvPr/>
+          </p:nvSpPr>
+          <p:spPr>
+            <a:xfrm>
+              <a:off x="6086800" y="3222705"/>
+              <a:ext cx="2400000" cy="300000"/>
+            </a:xfrm>
+            <a:prstGeom prst="rect">
+              <a:avLst/>
+            </a:prstGeom>
+            <a:solidFill>
+              <a:srgbClr val="EBF1FC"/>
+            </a:solidFill>
+            <a:ln>
+              <a:noFill/>
+            </a:ln>
+          </p:spPr>
+          <p:style>
+            <a:lnRef idx="1">
+              <a:schemeClr val="accent1"/>
+            </a:lnRef>
+            <a:fillRef idx="3">
+              <a:schemeClr val="accent1"/>
+            </a:fillRef>
+            <a:effectRef idx="2">
+              <a:schemeClr val="accent1"/>
+            </a:effectRef>
+            <a:fontRef idx="minor">
+              <a:schemeClr val="lt1"/>
+            </a:fontRef>
+          </p:style>
+          <p:txBody>
+            <a:bodyPr rtlCol="0" anchor="ctr" wrap="none" lIns="80000" tIns="30000" rIns="80000" bIns="30000"/>
+            <a:lstStyle/>
+            <a:p>
+              <a:pPr algn="ctr"/>
+              <a:r>
+                <a:rPr sz="900">
+                  <a:solidFill>
+                    <a:srgbClr val="646464"/>
+                  </a:solidFill>
+                </a:rPr>
+                <a:t>int       </a:t>
+              </a:r>
+              <a:r>
+                <a:rPr sz="900" b="1"/>
+                <a:t>  customer_id       </a:t>
+              </a:r>
+              <a:r>
+                <a:rPr sz="800" b="1">
+                  <a:solidFill>
+                    <a:srgbClr val="0046B4"/>
+                  </a:solidFill>
+                </a:rPr>
+                <a:t>  FK</a:t>
+              </a:r>
+            </a:p>
+          </p:txBody>
+        </p:sp>
+        <p:sp>
+          <p:nvSpPr>
+            <p:cNvPr id="13" name="Rectangle 12"/>
+            <p:cNvSpPr/>
+            <p:nvPr/>
+          </p:nvSpPr>
+          <p:spPr>
+            <a:xfrm>
+              <a:off x="6086800" y="3522705"/>
+              <a:ext cx="2400000" cy="300000"/>
+            </a:xfrm>
+            <a:prstGeom prst="rect">
+              <a:avLst/>
+            </a:prstGeom>
+            <a:solidFill>
+              <a:srgbClr val="FFFFFF"/>
+            </a:solidFill>
+            <a:ln>
+              <a:noFill/>
+            </a:ln>
+          </p:spPr>
+          <p:style>
+            <a:lnRef idx="1">
+              <a:schemeClr val="accent1"/>
+            </a:lnRef>
+            <a:fillRef idx="3">
+              <a:schemeClr val="accent1"/>
+            </a:fillRef>
+            <a:effectRef idx="2">
+              <a:schemeClr val="accent1"/>
+            </a:effectRef>
+            <a:fontRef idx="minor">
+              <a:schemeClr val="lt1"/>
+            </a:fontRef>
+          </p:style>
+          <p:txBody>
+            <a:bodyPr rtlCol="0" anchor="ctr" wrap="none" lIns="80000" tIns="30000" rIns="80000" bIns="30000"/>
+            <a:lstStyle/>
+            <a:p>
+              <a:pPr algn="ctr"/>
+              <a:r>
+                <a:rPr sz="900">
+                  <a:solidFill>
+                    <a:srgbClr val="646464"/>
+                  </a:solidFill>
+                </a:rPr>
+                <a:t>date      </a:t>
+              </a:r>
+              <a:r>
+                <a:rPr sz="900" b="0"/>
+                <a:t>  ordered_at        </a:t>
+              </a:r>
+            </a:p>
+          </p:txBody>
+        </p:sp>
+        <p:sp>
+          <p:nvSpPr>
+            <p:cNvPr id="25" name="TextBox 24"/>
+            <p:cNvSpPr txBox="1"/>
+            <p:nvPr/>
+          </p:nvSpPr>
+          <p:spPr>
+            <a:xfrm>
+              <a:off x="7085253" y="3882618"/>
+              <a:ext cx="350000" cy="220000"/>
+            </a:xfrm>
+            <a:prstGeom prst="rect">
+              <a:avLst/>
+            </a:prstGeom>
+            <a:noFill/>
+            <a:ln>
+              <a:noFill/>
+            </a:ln>
+          </p:spPr>
+          <p:txBody>
+            <a:bodyPr wrap="none">
+              <a:spAutoFit/>
+            </a:bodyPr>
+            <a:lstStyle/>
+            <a:p>
+              <a:pPr algn="ctr"/>
+              <a:r>
+                <a:rPr sz="900" b="1">
+                  <a:solidFill>
+                    <a:srgbClr val="323232"/>
+                  </a:solidFill>
+                </a:rPr>
+                <a:t>0..*</a:t>
+              </a:r>
+            </a:p>
+          </p:txBody>
+        </p:sp>
+        <p:sp>
+          <p:nvSpPr>
+            <p:cNvPr id="27" name="TextBox 26"/>
+            <p:cNvSpPr txBox="1"/>
+            <p:nvPr/>
+          </p:nvSpPr>
+          <p:spPr>
+            <a:xfrm>
+              <a:off x="5744964" y="2785252"/>
+              <a:ext cx="350000" cy="220000"/>
+            </a:xfrm>
+            <a:prstGeom prst="rect">
+              <a:avLst/>
+            </a:prstGeom>
+            <a:noFill/>
+            <a:ln>
+              <a:noFill/>
+            </a:ln>
+          </p:spPr>
+          <p:txBody>
+            <a:bodyPr wrap="none">
+              <a:spAutoFit/>
+            </a:bodyPr>
+            <a:lstStyle/>
+            <a:p>
+              <a:pPr algn="ctr"/>
+              <a:r>
+                <a:rPr sz="900" b="1">
+                  <a:solidFill>
+                    <a:srgbClr val="323232"/>
+                  </a:solidFill>
+                </a:rPr>
+                <a:t>1</a:t>
+              </a:r>
+            </a:p>
+          </p:txBody>
+        </p:sp>
+        <p:sp>
+          <p:nvSpPr>
+            <p:cNvPr id="29" name="TextBox 28"/>
+            <p:cNvSpPr txBox="1"/>
+            <p:nvPr/>
+          </p:nvSpPr>
+          <p:spPr>
+            <a:xfrm>
+              <a:off x="5045176" y="2721483"/>
+              <a:ext cx="1200000" cy="240000"/>
+            </a:xfrm>
+            <a:prstGeom prst="rect">
+              <a:avLst/>
+            </a:prstGeom>
+            <a:solidFill>
+              <a:srgbClr val="F5F5FF"/>
+            </a:solidFill>
+            <a:ln>
+              <a:noFill/>
+            </a:ln>
+          </p:spPr>
+          <p:txBody>
+            <a:bodyPr wrap="none">
+              <a:spAutoFit/>
+            </a:bodyPr>
+            <a:lstStyle/>
+            <a:p>
+              <a:pPr algn="ctr"/>
+              <a:r>
+                <a:rPr sz="900" i="1">
+                  <a:solidFill>
+                    <a:srgbClr val="505050"/>
+                  </a:solidFill>
+                </a:rPr>
+                <a:t>contains</a:t>
+              </a:r>
+            </a:p>
+          </p:txBody>
+        </p:sp>
+      </p:grpSp>
+      <p:grpSp>
+        <p:grpSpPr>
+          <a:xfrm>
+            <a:off x="2496601" y="1800200"/>
+            <a:ext cx="2741836" cy="1546006"/>
+            <a:chOff x="2496601" y="1800200"/>
+            <a:chExt cx="2741836" cy="1546006"/>
+          </a:xfrm>
+        </p:grpSpPr>
+        <p:sp>
+          <p:nvSpPr>
+            <p:cNvPr id="14" name="Rectangle 13"/>
+            <p:cNvSpPr/>
+            <p:nvPr/>
+          </p:nvSpPr>
+          <p:spPr>
+            <a:xfrm>
+              <a:off x="2496601" y="1800200"/>
+              <a:ext cx="2400000" cy="1320000"/>
+            </a:xfrm>
+            <a:prstGeom prst="rect">
+              <a:avLst/>
+            </a:prstGeom>
+            <a:noFill/>
+            <a:ln>
+              <a:solidFill>
+                <a:srgbClr val="1F497D"/>
+              </a:solidFill>
+            </a:ln>
+          </p:spPr>
+          <p:style>
+            <a:lnRef idx="1">
+              <a:schemeClr val="accent1"/>
+            </a:lnRef>
+            <a:fillRef idx="3">
+              <a:schemeClr val="accent1"/>
+            </a:fillRef>
+            <a:effectRef idx="2">
+              <a:schemeClr val="accent1"/>
+            </a:effectRef>
+            <a:fontRef idx="minor">
+              <a:schemeClr val="lt1"/>
+            </a:fontRef>
+          </p:style>
+          <p:txBody>
+            <a:bodyPr rtlCol="0" anchor="ctr"/>
+            <a:lstStyle/>
+            <a:p/>
+          </p:txBody>
+        </p:sp>
+        <p:sp>
+          <p:nvSpPr>
+            <p:cNvPr id="15" name="Rectangle 14"/>
+            <p:cNvSpPr/>
+            <p:nvPr/>
+          </p:nvSpPr>
+          <p:spPr>
+            <a:xfrm>
+              <a:off x="2496601" y="1800200"/>
+              <a:ext cx="2400000" cy="420000"/>
+            </a:xfrm>
+            <a:prstGeom prst="rect">
+              <a:avLst/>
+            </a:prstGeom>
+            <a:solidFill>
+              <a:srgbClr val="1F497D"/>
+            </a:solidFill>
+            <a:ln>
+              <a:noFill/>
+            </a:ln>
+          </p:spPr>
+          <p:style>
+            <a:lnRef idx="1">
+              <a:schemeClr val="accent1"/>
+            </a:lnRef>
+            <a:fillRef idx="3">
+              <a:schemeClr val="accent1"/>
+            </a:fillRef>
+            <a:effectRef idx="2">
+              <a:schemeClr val="accent1"/>
+            </a:effectRef>
+            <a:fontRef idx="minor">
+              <a:schemeClr val="lt1"/>
+            </a:fontRef>
+          </p:style>
+          <p:txBody>
+            <a:bodyPr rtlCol="0" anchor="ctr" wrap="none"/>
+            <a:lstStyle/>
+            <a:p>
+              <a:pPr algn="ctr"/>
+              <a:r>
+                <a:rPr sz="1100" b="1">
+                  <a:solidFill>
+                    <a:srgbClr val="FFFFFF"/>
+                  </a:solidFill>
+                </a:rPr>
+                <a:t>LINE-ITEM</a:t>
+              </a:r>
+            </a:p>
+          </p:txBody>
+        </p:sp>
+        <p:sp>
+          <p:nvSpPr>
+            <p:cNvPr id="16" name="Rectangle 15"/>
+            <p:cNvSpPr/>
+            <p:nvPr/>
+          </p:nvSpPr>
+          <p:spPr>
+            <a:xfrm>
+              <a:off x="2496601" y="2220200"/>
+              <a:ext cx="2400000" cy="300000"/>
+            </a:xfrm>
+            <a:prstGeom prst="rect">
+              <a:avLst/>
+            </a:prstGeom>
+            <a:solidFill>
+              <a:srgbClr val="FFFFFF"/>
+            </a:solidFill>
+            <a:ln>
+              <a:noFill/>
+            </a:ln>
+          </p:spPr>
+          <p:style>
+            <a:lnRef idx="1">
+              <a:schemeClr val="accent1"/>
+            </a:lnRef>
+            <a:fillRef idx="3">
+              <a:schemeClr val="accent1"/>
+            </a:fillRef>
+            <a:effectRef idx="2">
+              <a:schemeClr val="accent1"/>
+            </a:effectRef>
+            <a:fontRef idx="minor">
+              <a:schemeClr val="lt1"/>
+            </a:fontRef>
+          </p:style>
+          <p:txBody>
+            <a:bodyPr rtlCol="0" anchor="ctr" wrap="none" lIns="80000" tIns="30000" rIns="80000" bIns="30000"/>
+            <a:lstStyle/>
+            <a:p>
+              <a:pPr algn="ctr"/>
+              <a:r>
+                <a:rPr sz="900">
+                  <a:solidFill>
+                    <a:srgbClr val="646464"/>
+                  </a:solidFill>
+                </a:rPr>
+                <a:t>string    </a:t>
+              </a:r>
+              <a:r>
+                <a:rPr sz="900" b="1"/>
+                <a:t>  productCode       </a:t>
+              </a:r>
+              <a:r>
+                <a:rPr sz="800" b="1">
+                  <a:solidFill>
+                    <a:srgbClr val="C40000"/>
+                  </a:solidFill>
+                </a:rPr>
+                <a:t>  PK,FK</a:t>
+              </a:r>
+            </a:p>
+          </p:txBody>
+        </p:sp>
+        <p:sp>
+          <p:nvSpPr>
+            <p:cNvPr id="17" name="Rectangle 16"/>
+            <p:cNvSpPr/>
+            <p:nvPr/>
+          </p:nvSpPr>
+          <p:spPr>
+            <a:xfrm>
+              <a:off x="2496601" y="2520200"/>
+              <a:ext cx="2400000" cy="300000"/>
+            </a:xfrm>
+            <a:prstGeom prst="rect">
+              <a:avLst/>
+            </a:prstGeom>
+            <a:solidFill>
+              <a:srgbClr val="EBF1FC"/>
+            </a:solidFill>
+            <a:ln>
+              <a:noFill/>
+            </a:ln>
+          </p:spPr>
+          <p:style>
+            <a:lnRef idx="1">
+              <a:schemeClr val="accent1"/>
+            </a:lnRef>
+            <a:fillRef idx="3">
+              <a:schemeClr val="accent1"/>
+            </a:fillRef>
+            <a:effectRef idx="2">
+              <a:schemeClr val="accent1"/>
+            </a:effectRef>
+            <a:fontRef idx="minor">
+              <a:schemeClr val="lt1"/>
+            </a:fontRef>
+          </p:style>
+          <p:txBody>
+            <a:bodyPr rtlCol="0" anchor="ctr" wrap="none" lIns="80000" tIns="30000" rIns="80000" bIns="30000"/>
+            <a:lstStyle/>
+            <a:p>
+              <a:pPr algn="ctr"/>
+              <a:r>
+                <a:rPr sz="900">
+                  <a:solidFill>
+                    <a:srgbClr val="646464"/>
+                  </a:solidFill>
+                </a:rPr>
+                <a:t>int       </a:t>
+              </a:r>
+              <a:r>
+                <a:rPr sz="900" b="0"/>
+                <a:t>  quantity          </a:t>
+              </a:r>
+            </a:p>
+          </p:txBody>
+        </p:sp>
+        <p:sp>
+          <p:nvSpPr>
+            <p:cNvPr id="18" name="Rectangle 17"/>
+            <p:cNvSpPr/>
+            <p:nvPr/>
+          </p:nvSpPr>
+          <p:spPr>
+            <a:xfrm>
+              <a:off x="2496601" y="2820200"/>
+              <a:ext cx="2400000" cy="300000"/>
+            </a:xfrm>
+            <a:prstGeom prst="rect">
+              <a:avLst/>
+            </a:prstGeom>
+            <a:solidFill>
+              <a:srgbClr val="FFFFFF"/>
+            </a:solidFill>
+            <a:ln>
+              <a:noFill/>
+            </a:ln>
+          </p:spPr>
+          <p:style>
+            <a:lnRef idx="1">
+              <a:schemeClr val="accent1"/>
+            </a:lnRef>
+            <a:fillRef idx="3">
+              <a:schemeClr val="accent1"/>
+            </a:fillRef>
+            <a:effectRef idx="2">
+              <a:schemeClr val="accent1"/>
+            </a:effectRef>
+            <a:fontRef idx="minor">
+              <a:schemeClr val="lt1"/>
+            </a:fontRef>
+          </p:style>
+          <p:txBody>
+            <a:bodyPr rtlCol="0" anchor="ctr" wrap="none" lIns="80000" tIns="30000" rIns="80000" bIns="30000"/>
+            <a:lstStyle/>
+            <a:p>
+              <a:pPr algn="ctr"/>
+              <a:r>
+                <a:rPr sz="900">
+                  <a:solidFill>
+                    <a:srgbClr val="646464"/>
+                  </a:solidFill>
+                </a:rPr>
+                <a:t>float     </a:t>
+              </a:r>
+              <a:r>
+                <a:rPr sz="900" b="0"/>
+                <a:t>  pricePerUnit      </a:t>
+              </a:r>
+            </a:p>
+          </p:txBody>
+        </p:sp>
+        <p:sp>
+          <p:nvSpPr>
+            <p:cNvPr id="28" name="TextBox 27"/>
+            <p:cNvSpPr txBox="1"/>
+            <p:nvPr/>
+          </p:nvSpPr>
+          <p:spPr>
+            <a:xfrm>
+              <a:off x="4888437" y="2617652"/>
+              <a:ext cx="350000" cy="220000"/>
+            </a:xfrm>
+            <a:prstGeom prst="rect">
+              <a:avLst/>
+            </a:prstGeom>
+            <a:noFill/>
+            <a:ln>
+              <a:noFill/>
+            </a:ln>
+          </p:spPr>
+          <p:txBody>
+            <a:bodyPr wrap="none">
+              <a:spAutoFit/>
+            </a:bodyPr>
+            <a:lstStyle/>
+            <a:p>
+              <a:pPr algn="ctr"/>
+              <a:r>
+                <a:rPr sz="900" b="1">
+                  <a:solidFill>
+                    <a:srgbClr val="323232"/>
+                  </a:solidFill>
+                </a:rPr>
+                <a:t>1..*</a:t>
+              </a:r>
+            </a:p>
+          </p:txBody>
+        </p:sp>
+        <p:sp>
+          <p:nvSpPr>
+            <p:cNvPr id="31" name="TextBox 30"/>
+            <p:cNvSpPr txBox="1"/>
+            <p:nvPr/>
+          </p:nvSpPr>
+          <p:spPr>
+            <a:xfrm>
+              <a:off x="2690327" y="3126206"/>
+              <a:ext cx="350000" cy="220000"/>
+            </a:xfrm>
+            <a:prstGeom prst="rect">
+              <a:avLst/>
+            </a:prstGeom>
+            <a:noFill/>
+            <a:ln>
+              <a:noFill/>
+            </a:ln>
+          </p:spPr>
+          <p:txBody>
+            <a:bodyPr wrap="none">
+              <a:spAutoFit/>
+            </a:bodyPr>
+            <a:lstStyle/>
+            <a:p>
+              <a:pPr algn="ctr"/>
+              <a:r>
+                <a:rPr sz="900" b="1">
+                  <a:solidFill>
+                    <a:srgbClr val="323232"/>
+                  </a:solidFill>
+                </a:rPr>
+                <a:t>0..*</a:t>
+              </a:r>
+            </a:p>
+          </p:txBody>
+        </p:sp>
+      </p:grpSp>
+      <p:grpSp>
+        <p:grpSpPr>
+          <a:xfrm>
+            <a:off x="657200" y="3090233"/>
+            <a:ext cx="2835950" cy="1747075"/>
+            <a:chOff x="657200" y="3090233"/>
+            <a:chExt cx="2835950" cy="1747075"/>
+          </a:xfrm>
+        </p:grpSpPr>
+        <p:sp>
+          <p:nvSpPr>
+            <p:cNvPr id="19" name="Rectangle 18"/>
+            <p:cNvSpPr/>
+            <p:nvPr/>
+          </p:nvSpPr>
+          <p:spPr>
+            <a:xfrm>
+              <a:off x="657200" y="3517308"/>
+              <a:ext cx="2400000" cy="1320000"/>
+            </a:xfrm>
+            <a:prstGeom prst="rect">
+              <a:avLst/>
+            </a:prstGeom>
+            <a:noFill/>
+            <a:ln>
+              <a:solidFill>
+                <a:srgbClr val="1F497D"/>
+              </a:solidFill>
+            </a:ln>
+          </p:spPr>
+          <p:style>
+            <a:lnRef idx="1">
+              <a:schemeClr val="accent1"/>
+            </a:lnRef>
+            <a:fillRef idx="3">
+              <a:schemeClr val="accent1"/>
+            </a:fillRef>
+            <a:effectRef idx="2">
+              <a:schemeClr val="accent1"/>
+            </a:effectRef>
+            <a:fontRef idx="minor">
+              <a:schemeClr val="lt1"/>
+            </a:fontRef>
+          </p:style>
+          <p:txBody>
+            <a:bodyPr rtlCol="0" anchor="ctr"/>
+            <a:lstStyle/>
+            <a:p/>
+          </p:txBody>
+        </p:sp>
+        <p:sp>
+          <p:nvSpPr>
+            <p:cNvPr id="20" name="Rectangle 19"/>
+            <p:cNvSpPr/>
+            <p:nvPr/>
+          </p:nvSpPr>
+          <p:spPr>
+            <a:xfrm>
+              <a:off x="657200" y="3517308"/>
+              <a:ext cx="2400000" cy="420000"/>
+            </a:xfrm>
+            <a:prstGeom prst="rect">
+              <a:avLst/>
+            </a:prstGeom>
+            <a:solidFill>
+              <a:srgbClr val="1F497D"/>
+            </a:solidFill>
+            <a:ln>
+              <a:noFill/>
+            </a:ln>
+          </p:spPr>
+          <p:style>
+            <a:lnRef idx="1">
+              <a:schemeClr val="accent1"/>
+            </a:lnRef>
+            <a:fillRef idx="3">
+              <a:schemeClr val="accent1"/>
+            </a:fillRef>
+            <a:effectRef idx="2">
+              <a:schemeClr val="accent1"/>
+            </a:effectRef>
+            <a:fontRef idx="minor">
+              <a:schemeClr val="lt1"/>
+            </a:fontRef>
+          </p:style>
+          <p:txBody>
+            <a:bodyPr rtlCol="0" anchor="ctr" wrap="none"/>
+            <a:lstStyle/>
+            <a:p>
+              <a:pPr algn="ctr"/>
+              <a:r>
+                <a:rPr sz="1100" b="1">
+                  <a:solidFill>
+                    <a:srgbClr val="FFFFFF"/>
+                  </a:solidFill>
+                </a:rPr>
+                <a:t>PRODUCT</a:t>
+              </a:r>
+            </a:p>
+          </p:txBody>
+        </p:sp>
+        <p:sp>
+          <p:nvSpPr>
+            <p:cNvPr id="21" name="Rectangle 20"/>
+            <p:cNvSpPr/>
+            <p:nvPr/>
+          </p:nvSpPr>
+          <p:spPr>
+            <a:xfrm>
+              <a:off x="657200" y="3937308"/>
+              <a:ext cx="2400000" cy="300000"/>
+            </a:xfrm>
+            <a:prstGeom prst="rect">
+              <a:avLst/>
+            </a:prstGeom>
+            <a:solidFill>
+              <a:srgbClr val="FFFFFF"/>
+            </a:solidFill>
+            <a:ln>
+              <a:noFill/>
+            </a:ln>
+          </p:spPr>
+          <p:style>
+            <a:lnRef idx="1">
+              <a:schemeClr val="accent1"/>
+            </a:lnRef>
+            <a:fillRef idx="3">
+              <a:schemeClr val="accent1"/>
+            </a:fillRef>
+            <a:effectRef idx="2">
+              <a:schemeClr val="accent1"/>
+            </a:effectRef>
+            <a:fontRef idx="minor">
+              <a:schemeClr val="lt1"/>
+            </a:fontRef>
+          </p:style>
+          <p:txBody>
+            <a:bodyPr rtlCol="0" anchor="ctr" wrap="none" lIns="80000" tIns="30000" rIns="80000" bIns="30000"/>
+            <a:lstStyle/>
+            <a:p>
+              <a:pPr algn="ctr"/>
+              <a:r>
+                <a:rPr sz="900">
+                  <a:solidFill>
+                    <a:srgbClr val="646464"/>
+                  </a:solidFill>
+                </a:rPr>
+                <a:t>string    </a:t>
+              </a:r>
+              <a:r>
+                <a:rPr sz="900" b="1"/>
+                <a:t>  code              </a:t>
+              </a:r>
+              <a:r>
+                <a:rPr sz="800" b="1">
+                  <a:solidFill>
+                    <a:srgbClr val="C40000"/>
+                  </a:solidFill>
+                </a:rPr>
+                <a:t>  PK</a:t>
+              </a:r>
+            </a:p>
+          </p:txBody>
+        </p:sp>
+        <p:sp>
+          <p:nvSpPr>
+            <p:cNvPr id="22" name="Rectangle 21"/>
+            <p:cNvSpPr/>
+            <p:nvPr/>
+          </p:nvSpPr>
+          <p:spPr>
+            <a:xfrm>
+              <a:off x="657200" y="4237308"/>
+              <a:ext cx="2400000" cy="300000"/>
+            </a:xfrm>
+            <a:prstGeom prst="rect">
+              <a:avLst/>
+            </a:prstGeom>
+            <a:solidFill>
+              <a:srgbClr val="EBF1FC"/>
+            </a:solidFill>
+            <a:ln>
+              <a:noFill/>
+            </a:ln>
+          </p:spPr>
+          <p:style>
+            <a:lnRef idx="1">
+              <a:schemeClr val="accent1"/>
+            </a:lnRef>
+            <a:fillRef idx="3">
+              <a:schemeClr val="accent1"/>
+            </a:fillRef>
+            <a:effectRef idx="2">
+              <a:schemeClr val="accent1"/>
+            </a:effectRef>
+            <a:fontRef idx="minor">
+              <a:schemeClr val="lt1"/>
+            </a:fontRef>
+          </p:style>
+          <p:txBody>
+            <a:bodyPr rtlCol="0" anchor="ctr" wrap="none" lIns="80000" tIns="30000" rIns="80000" bIns="30000"/>
+            <a:lstStyle/>
+            <a:p>
+              <a:pPr algn="ctr"/>
+              <a:r>
+                <a:rPr sz="900">
+                  <a:solidFill>
+                    <a:srgbClr val="646464"/>
+                  </a:solidFill>
+                </a:rPr>
+                <a:t>string    </a:t>
+              </a:r>
+              <a:r>
+                <a:rPr sz="900" b="0"/>
+                <a:t>  name              </a:t>
+              </a:r>
+            </a:p>
+          </p:txBody>
+        </p:sp>
+        <p:sp>
+          <p:nvSpPr>
+            <p:cNvPr id="23" name="Rectangle 22"/>
+            <p:cNvSpPr/>
+            <p:nvPr/>
+          </p:nvSpPr>
+          <p:spPr>
+            <a:xfrm>
+              <a:off x="657200" y="4537308"/>
+              <a:ext cx="2400000" cy="300000"/>
+            </a:xfrm>
+            <a:prstGeom prst="rect">
+              <a:avLst/>
+            </a:prstGeom>
+            <a:solidFill>
+              <a:srgbClr val="FFFFFF"/>
+            </a:solidFill>
+            <a:ln>
+              <a:noFill/>
+            </a:ln>
+          </p:spPr>
+          <p:style>
+            <a:lnRef idx="1">
+              <a:schemeClr val="accent1"/>
+            </a:lnRef>
+            <a:fillRef idx="3">
+              <a:schemeClr val="accent1"/>
+            </a:fillRef>
+            <a:effectRef idx="2">
+              <a:schemeClr val="accent1"/>
+            </a:effectRef>
+            <a:fontRef idx="minor">
+              <a:schemeClr val="lt1"/>
+            </a:fontRef>
+          </p:style>
+          <p:txBody>
+            <a:bodyPr rtlCol="0" anchor="ctr" wrap="none" lIns="80000" tIns="30000" rIns="80000" bIns="30000"/>
+            <a:lstStyle/>
+            <a:p>
+              <a:pPr algn="ctr"/>
+              <a:r>
+                <a:rPr sz="900">
+                  <a:solidFill>
+                    <a:srgbClr val="646464"/>
+                  </a:solidFill>
+                </a:rPr>
+                <a:t>float     </a:t>
+              </a:r>
+              <a:r>
+                <a:rPr sz="900" b="0"/>
+                <a:t>  price             </a:t>
+              </a:r>
+              <a:r>
+                <a:rPr sz="800" i="1">
+                  <a:solidFill>
+                    <a:srgbClr val="828282"/>
+                  </a:solidFill>
+                </a:rPr>
+                <a:t>  "Unit price"</a:t>
+              </a:r>
+            </a:p>
+          </p:txBody>
+        </p:sp>
+        <p:sp>
+          <p:nvSpPr>
+            <p:cNvPr id="30" name="TextBox 29"/>
+            <p:cNvSpPr txBox="1"/>
+            <p:nvPr/>
+          </p:nvSpPr>
+          <p:spPr>
+            <a:xfrm>
+              <a:off x="2513473" y="3291302"/>
+              <a:ext cx="350000" cy="220000"/>
+            </a:xfrm>
+            <a:prstGeom prst="rect">
+              <a:avLst/>
+            </a:prstGeom>
+            <a:noFill/>
+            <a:ln>
+              <a:noFill/>
+            </a:ln>
+          </p:spPr>
+          <p:txBody>
+            <a:bodyPr wrap="none">
+              <a:spAutoFit/>
+            </a:bodyPr>
+            <a:lstStyle/>
+            <a:p>
+              <a:pPr algn="ctr"/>
+              <a:r>
+                <a:rPr sz="900" b="1">
+                  <a:solidFill>
+                    <a:srgbClr val="323232"/>
+                  </a:solidFill>
+                </a:rPr>
+                <a:t>0..*</a:t>
+              </a:r>
+            </a:p>
+          </p:txBody>
+        </p:sp>
+        <p:sp>
+          <p:nvSpPr>
+            <p:cNvPr id="32" name="TextBox 31"/>
+            <p:cNvSpPr txBox="1"/>
+            <p:nvPr/>
+          </p:nvSpPr>
+          <p:spPr>
+            <a:xfrm>
+              <a:off x="2293150" y="3090233"/>
+              <a:ext cx="1200000" cy="240000"/>
+            </a:xfrm>
+            <a:prstGeom prst="rect">
+              <a:avLst/>
+            </a:prstGeom>
+            <a:solidFill>
+              <a:srgbClr val="F5F5FF"/>
+            </a:solidFill>
+            <a:ln>
+              <a:noFill/>
+            </a:ln>
+          </p:spPr>
+          <p:txBody>
+            <a:bodyPr wrap="none">
+              <a:spAutoFit/>
+            </a:bodyPr>
+            <a:lstStyle/>
+            <a:p>
+              <a:pPr algn="ctr"/>
+              <a:r>
+                <a:rPr sz="900" i="1">
+                  <a:solidFill>
+                    <a:srgbClr val="505050"/>
+                  </a:solidFill>
+                </a:rPr>
+                <a:t>includes</a:t>
+              </a:r>
+            </a:p>
+          </p:txBody>
+        </p:sp>
+      </p:grpSp>
       <p:cxnSp>
         <p:nvCxnSpPr>
-          <p:cNvPr id="8" name="Connector 7"/>
+          <p:cNvPr id="33" name="Connector 32"/>
           <p:cNvCxnSpPr>
             <a:stCxn id="4" idx="0"/>
-            <a:endCxn id="5" idx="2"/>
+            <a:endCxn id="9" idx="2"/>
           </p:cNvCxnSpPr>
           <p:nvPr/>
         </p:nvCxnSpPr>
         <p:spPr>
           <a:xfrm flipV="1">
-            <a:off x="7025688" y="3348046"/>
-            <a:ext cx="74890" cy="2165109"/>
-          </a:xfrm>
-          <a:prstGeom prst="curvedConnector3">
-            <a:avLst/>
-          </a:prstGeom>
+            <a:off x="7219516" y="3822705"/>
+            <a:ext cx="67284" cy="783458"/>
+          </a:xfrm>
+          <a:prstGeom prst="line">
+            <a:avLst/>
+          </a:prstGeom>
+          <a:ln>
+            <a:solidFill>
+              <a:srgbClr val="323232"/>
+            </a:solidFill>
+          </a:ln>
         </p:spPr>
         <p:style>
           <a:lnRef idx="2">
@@ -15855,21 +17171,26 @@
       </p:cxnSp>
       <p:cxnSp>
         <p:nvCxnSpPr>
-          <p:cNvPr id="9" name="Connector 8"/>
+          <p:cNvPr id="34" name="Connector 33"/>
           <p:cNvCxnSpPr>
-            <a:stCxn id="5" idx="3"/>
-            <a:endCxn id="6" idx="1"/>
+            <a:stCxn id="9" idx="3"/>
+            <a:endCxn id="14" idx="1"/>
           </p:cNvCxnSpPr>
           <p:nvPr/>
         </p:nvCxnSpPr>
         <p:spPr>
           <a:xfrm flipH="1" flipV="1">
-            <a:off x="2504533" y="2207962"/>
-            <a:ext cx="5196045" cy="890084"/>
-          </a:xfrm>
-          <a:prstGeom prst="curvedConnector3">
-            <a:avLst/>
-          </a:prstGeom>
+            <a:off x="2496601" y="2460200"/>
+            <a:ext cx="5990199" cy="702505"/>
+          </a:xfrm>
+          <a:prstGeom prst="line">
+            <a:avLst/>
+          </a:prstGeom>
+          <a:ln>
+            <a:solidFill>
+              <a:srgbClr val="323232"/>
+            </a:solidFill>
+          </a:ln>
         </p:spPr>
         <p:style>
           <a:lnRef idx="2">
@@ -15888,21 +17209,27 @@
       </p:cxnSp>
       <p:cxnSp>
         <p:nvCxnSpPr>
-          <p:cNvPr id="10" name="Connector 9"/>
+          <p:cNvPr id="35" name="Connector 34"/>
           <p:cNvCxnSpPr>
-            <a:stCxn id="7" idx="0"/>
-            <a:endCxn id="6" idx="2"/>
+            <a:stCxn id="19" idx="1"/>
+            <a:endCxn id="14" idx="3"/>
           </p:cNvCxnSpPr>
           <p:nvPr/>
         </p:nvCxnSpPr>
         <p:spPr>
           <a:xfrm flipV="1">
-            <a:off x="1057200" y="2457962"/>
-            <a:ext cx="2047333" cy="1675600"/>
-          </a:xfrm>
-          <a:prstGeom prst="curvedConnector3">
-            <a:avLst/>
-          </a:prstGeom>
+            <a:off x="657200" y="2460200"/>
+            <a:ext cx="4239401" cy="1717108"/>
+          </a:xfrm>
+          <a:prstGeom prst="line">
+            <a:avLst/>
+          </a:prstGeom>
+          <a:ln>
+            <a:solidFill>
+              <a:srgbClr val="323232"/>
+            </a:solidFill>
+            <a:prstDash val="dash"/>
+          </a:ln>
         </p:spPr>
         <p:style>
           <a:lnRef idx="2">

--- a/demo_full.pptx
+++ b/demo_full.pptx
@@ -155,6 +155,238 @@
     </a:lvl9pPr>
   </p:defaultTextStyle>
 </p:presentation>
+</file>
+
+<file path=ppt/charts/chart1.xml><?xml version="1.0" encoding="utf-8"?>
+<c:chartSpace xmlns:c="http://schemas.openxmlformats.org/drawingml/2006/chart" xmlns:a="http://schemas.openxmlformats.org/drawingml/2006/main" xmlns:r="http://schemas.openxmlformats.org/officeDocument/2006/relationships">
+  <c:chart>
+    <c:title>
+      <c:tx>
+        <c:rich>
+          <a:bodyPr/>
+          <a:lstStyle/>
+          <a:p>
+            <a:r>
+              <a:rPr sz="1800" b="1"/>
+              <a:t>言語別コード比率</a:t>
+            </a:r>
+          </a:p>
+        </c:rich>
+      </c:tx>
+      <c:layout/>
+      <c:overlay val="0"/>
+    </c:title>
+    <c:autoTitleDeleted val="0"/>
+    <c:plotArea>
+      <c:pieChart>
+        <c:varyColors/>
+        <c:ser>
+          <c:idx val="0"/>
+          <c:order val="0"/>
+          <c:tx>
+            <c:strRef>
+              <c:f>Sheet1!$B$1</c:f>
+              <c:strCache>
+                <c:ptCount val="1"/>
+                <c:pt idx="0">
+                  <c:v/>
+                </c:pt>
+              </c:strCache>
+            </c:strRef>
+          </c:tx>
+          <c:cat>
+            <c:strRef>
+              <c:f>Sheet1!$A$2:$A$6</c:f>
+              <c:strCache>
+                <c:ptCount val="5"/>
+                <c:pt idx="0">
+                  <c:v>Python</c:v>
+                </c:pt>
+                <c:pt idx="1">
+                  <c:v>TypeScript</c:v>
+                </c:pt>
+                <c:pt idx="2">
+                  <c:v>Rust</c:v>
+                </c:pt>
+                <c:pt idx="3">
+                  <c:v>Go</c:v>
+                </c:pt>
+                <c:pt idx="4">
+                  <c:v>その他</c:v>
+                </c:pt>
+              </c:strCache>
+            </c:strRef>
+          </c:cat>
+          <c:val>
+            <c:numRef>
+              <c:f>Sheet1!$B$2:$B$6</c:f>
+              <c:numCache>
+                <c:formatCode>General</c:formatCode>
+                <c:ptCount val="5"/>
+                <c:pt idx="0">
+                  <c:v>42.0</c:v>
+                </c:pt>
+                <c:pt idx="1">
+                  <c:v>28.0</c:v>
+                </c:pt>
+                <c:pt idx="2">
+                  <c:v>15.0</c:v>
+                </c:pt>
+                <c:pt idx="3">
+                  <c:v>10.0</c:v>
+                </c:pt>
+                <c:pt idx="4">
+                  <c:v>5.0</c:v>
+                </c:pt>
+              </c:numCache>
+            </c:numRef>
+          </c:val>
+        </c:ser>
+        <c:dLbls>
+          <c:showLegendKey val="0"/>
+          <c:showVal val="0"/>
+          <c:showCatName val="1"/>
+          <c:showSerName val="0"/>
+          <c:showPercent val="1"/>
+          <c:showBubbleSize val="0"/>
+          <c:showLeaderLines val="1"/>
+          <c:dLblPos val="bestFit"/>
+        </c:dLbls>
+      </c:pieChart>
+    </c:plotArea>
+    <c:legend>
+      <c:legendPos val="b"/>
+      <c:overlay val="0"/>
+    </c:legend>
+    <c:dispBlanksAs val="gap"/>
+  </c:chart>
+  <c:txPr>
+    <a:bodyPr/>
+    <a:lstStyle/>
+    <a:p>
+      <a:pPr>
+        <a:defRPr sz="1800"/>
+      </a:pPr>
+      <a:endParaRPr lang="en-US"/>
+    </a:p>
+  </c:txPr>
+  <c:externalData r:id="rId1">
+    <c:autoUpdate val="0"/>
+  </c:externalData>
+</c:chartSpace>
+</file>
+
+<file path=ppt/charts/chart2.xml><?xml version="1.0" encoding="utf-8"?>
+<c:chartSpace xmlns:c="http://schemas.openxmlformats.org/drawingml/2006/chart" xmlns:a="http://schemas.openxmlformats.org/drawingml/2006/main" xmlns:r="http://schemas.openxmlformats.org/officeDocument/2006/relationships">
+  <c:chart>
+    <c:title>
+      <c:tx>
+        <c:rich>
+          <a:bodyPr/>
+          <a:lstStyle/>
+          <a:p>
+            <a:r>
+              <a:rPr sz="1800" b="1"/>
+              <a:t>売上内訳（百万円）</a:t>
+            </a:r>
+          </a:p>
+        </c:rich>
+      </c:tx>
+      <c:layout/>
+      <c:overlay val="0"/>
+    </c:title>
+    <c:autoTitleDeleted val="0"/>
+    <c:plotArea>
+      <c:pieChart>
+        <c:varyColors/>
+        <c:ser>
+          <c:idx val="0"/>
+          <c:order val="0"/>
+          <c:tx>
+            <c:strRef>
+              <c:f>Sheet1!$B$1</c:f>
+              <c:strCache>
+                <c:ptCount val="1"/>
+                <c:pt idx="0">
+                  <c:v/>
+                </c:pt>
+              </c:strCache>
+            </c:strRef>
+          </c:tx>
+          <c:cat>
+            <c:strRef>
+              <c:f>Sheet1!$A$2:$A$5</c:f>
+              <c:strCache>
+                <c:ptCount val="4"/>
+                <c:pt idx="0">
+                  <c:v>製品A</c:v>
+                </c:pt>
+                <c:pt idx="1">
+                  <c:v>製品B</c:v>
+                </c:pt>
+                <c:pt idx="2">
+                  <c:v>製品C</c:v>
+                </c:pt>
+                <c:pt idx="3">
+                  <c:v>サービス</c:v>
+                </c:pt>
+              </c:strCache>
+            </c:strRef>
+          </c:cat>
+          <c:val>
+            <c:numRef>
+              <c:f>Sheet1!$B$2:$B$5</c:f>
+              <c:numCache>
+                <c:formatCode>General</c:formatCode>
+                <c:ptCount val="4"/>
+                <c:pt idx="0">
+                  <c:v>120.5</c:v>
+                </c:pt>
+                <c:pt idx="1">
+                  <c:v>87.3</c:v>
+                </c:pt>
+                <c:pt idx="2">
+                  <c:v>54.0</c:v>
+                </c:pt>
+                <c:pt idx="3">
+                  <c:v>38.2</c:v>
+                </c:pt>
+              </c:numCache>
+            </c:numRef>
+          </c:val>
+        </c:ser>
+        <c:dLbls>
+          <c:showLegendKey val="0"/>
+          <c:showVal val="1"/>
+          <c:showCatName val="1"/>
+          <c:showSerName val="0"/>
+          <c:showPercent val="1"/>
+          <c:showBubbleSize val="0"/>
+          <c:showLeaderLines val="1"/>
+          <c:dLblPos val="bestFit"/>
+        </c:dLbls>
+      </c:pieChart>
+    </c:plotArea>
+    <c:legend>
+      <c:legendPos val="b"/>
+      <c:overlay val="0"/>
+    </c:legend>
+    <c:dispBlanksAs val="gap"/>
+  </c:chart>
+  <c:txPr>
+    <a:bodyPr/>
+    <a:lstStyle/>
+    <a:p>
+      <a:pPr>
+        <a:defRPr sz="1800"/>
+      </a:pPr>
+      <a:endParaRPr lang="en-US"/>
+    </a:p>
+  </c:txPr>
+  <c:externalData r:id="rId1">
+    <c:autoUpdate val="0"/>
+  </c:externalData>
+</c:chartSpace>
 </file>
 
 <file path=ppt/notesMasters/notesMaster1.xml><?xml version="1.0" encoding="utf-8"?>
@@ -13547,7 +13779,7 @@
         </p:nvSpPr>
         <p:spPr>
           <a:xfrm>
-            <a:off x="2272000" y="2188180"/>
+            <a:off x="2272000" y="3538181"/>
             <a:ext cx="4600000" cy="2420000"/>
           </a:xfrm>
           <a:prstGeom prst="roundRect">
@@ -13668,7 +13900,7 @@
         </p:nvSpPr>
         <p:spPr>
           <a:xfrm>
-            <a:off x="2272000" y="3538181"/>
+            <a:off x="2272000" y="2188180"/>
             <a:ext cx="4600000" cy="2420000"/>
           </a:xfrm>
           <a:prstGeom prst="roundRect">
@@ -17393,47 +17625,69 @@
         </p:nvSpPr>
         <p:spPr/>
         <p:txBody>
+          <a:bodyPr wrap="square"/>
+          <a:lstStyle/>
+          <a:p>
+            <a:r>
+              <a:rPr sz="1800"/>
+              <a:t>パーセント + 実数値表示（showData あり）:</a:t>
+            </a:r>
+          </a:p>
+        </p:txBody>
+      </p:sp>
+      <p:sp>
+        <p:nvSpPr>
+          <p:cNvPr id="4" name="Text Placeholder 3"/>
+          <p:cNvSpPr>
+            <a:spLocks noGrp="1"/>
+          </p:cNvSpPr>
+          <p:nvPr>
+            <p:ph type="body" idx="2" sz="half"/>
+          </p:nvPr>
+        </p:nvSpPr>
+        <p:spPr/>
+        <p:txBody>
           <a:bodyPr/>
           <a:lstStyle/>
           <a:p/>
         </p:txBody>
       </p:sp>
-      <p:sp>
-        <p:nvSpPr>
-          <p:cNvPr id="4" name="TextBox 3"/>
-          <p:cNvSpPr txBox="1"/>
-          <p:nvPr/>
-        </p:nvSpPr>
-        <p:spPr>
-          <a:xfrm>
-            <a:off x="457200" y="1600200"/>
-            <a:ext cx="8229600" cy="4525963"/>
-          </a:xfrm>
-          <a:prstGeom prst="rect">
-            <a:avLst/>
-          </a:prstGeom>
-          <a:noFill/>
-        </p:spPr>
-        <p:txBody>
-          <a:bodyPr wrap="square">
-            <a:spAutoFit/>
-          </a:bodyPr>
-          <a:lstStyle/>
-          <a:p>
-            <a:r>
-              <a:rPr sz="1000">
-                <a:latin typeface="Courier New"/>
-              </a:rPr>
-              <a:t>pie title 言語別コード比率
-    "Python" : 42
-    "TypeScript" : 28
-    "Rust" : 15
-    "Go" : 10
-    "その他" : 5</a:t>
-            </a:r>
-          </a:p>
-        </p:txBody>
-      </p:sp>
+      <p:graphicFrame>
+        <p:nvGraphicFramePr>
+          <p:cNvPr id="5" name="Chart 4"/>
+          <p:cNvGraphicFramePr>
+            <a:graphicFrameLocks noGrp="1"/>
+          </p:cNvGraphicFramePr>
+          <p:nvPr/>
+        </p:nvGraphicFramePr>
+        <p:xfrm>
+          <a:off x="3575050" y="273050"/>
+          <a:ext cx="5111750" cy="5853113"/>
+        </p:xfrm>
+        <a:graphic>
+          <a:graphicData uri="http://schemas.openxmlformats.org/drawingml/2006/chart">
+            <c:chart xmlns:c="http://schemas.openxmlformats.org/drawingml/2006/chart" r:id="rId2"/>
+          </a:graphicData>
+        </a:graphic>
+      </p:graphicFrame>
+      <p:graphicFrame>
+        <p:nvGraphicFramePr>
+          <p:cNvPr id="6" name="Chart 5"/>
+          <p:cNvGraphicFramePr>
+            <a:graphicFrameLocks noGrp="1"/>
+          </p:cNvGraphicFramePr>
+          <p:nvPr/>
+        </p:nvGraphicFramePr>
+        <p:xfrm>
+          <a:off x="3575050" y="273050"/>
+          <a:ext cx="5111750" cy="5853113"/>
+        </p:xfrm>
+        <a:graphic>
+          <a:graphicData uri="http://schemas.openxmlformats.org/drawingml/2006/chart">
+            <c:chart xmlns:c="http://schemas.openxmlformats.org/drawingml/2006/chart" r:id="rId3"/>
+          </a:graphicData>
+        </a:graphic>
+      </p:graphicFrame>
     </p:spTree>
   </p:cSld>
   <p:clrMapOvr>

--- a/demo_full.pptx
+++ b/demo_full.pptx
@@ -5,7 +5,7 @@
     <p:sldMasterId id="2147483648" r:id="rId1"/>
   </p:sldMasterIdLst>
   <p:notesMasterIdLst>
-    <p:notesMasterId r:id="rId52"/>
+    <p:notesMasterId r:id="rId53"/>
   </p:notesMasterIdLst>
   <p:sldIdLst>
     <p:sldId id="256" r:id="rId7"/>
@@ -53,9 +53,10 @@
     <p:sldId id="298" r:id="rId49"/>
     <p:sldId id="299" r:id="rId50"/>
     <p:sldId id="300" r:id="rId51"/>
-    <p:sldId id="301" r:id="rId53"/>
+    <p:sldId id="301" r:id="rId52"/>
     <p:sldId id="302" r:id="rId54"/>
     <p:sldId id="303" r:id="rId55"/>
+    <p:sldId id="304" r:id="rId56"/>
   </p:sldIdLst>
   <p:sldSz cx="9144000" cy="6858000" type="screen4x3"/>
   <p:notesSz cx="6858000" cy="9144000"/>
@@ -13779,7 +13780,7 @@
         </p:nvSpPr>
         <p:spPr>
           <a:xfrm>
-            <a:off x="2272000" y="3538181"/>
+            <a:off x="2272000" y="2188180"/>
             <a:ext cx="4600000" cy="2420000"/>
           </a:xfrm>
           <a:prstGeom prst="roundRect">
@@ -13823,84 +13824,7 @@
         </p:nvSpPr>
         <p:spPr>
           <a:xfrm>
-            <a:off x="2872000" y="2653181"/>
-            <a:ext cx="3400000" cy="2420000"/>
-          </a:xfrm>
-          <a:prstGeom prst="roundRect">
-            <a:avLst/>
-          </a:prstGeom>
-          <a:solidFill>
-            <a:srgbClr val="EEF4FF"/>
-          </a:solidFill>
-          <a:ln>
-            <a:solidFill>
-              <a:srgbClr val="4664AA"/>
-            </a:solidFill>
-          </a:ln>
-        </p:spPr>
-        <p:style>
-          <a:lnRef idx="1">
-            <a:schemeClr val="accent1"/>
-          </a:lnRef>
-          <a:fillRef idx="3">
-            <a:schemeClr val="accent1"/>
-          </a:fillRef>
-          <a:effectRef idx="2">
-            <a:schemeClr val="accent1"/>
-          </a:effectRef>
-          <a:fontRef idx="minor">
-            <a:schemeClr val="lt1"/>
-          </a:fontRef>
-        </p:style>
-        <p:txBody>
-          <a:bodyPr rtlCol="0" anchor="ctr"/>
-          <a:lstStyle/>
-          <a:p/>
-        </p:txBody>
-      </p:sp>
-      <p:sp>
-        <p:nvSpPr>
-          <p:cNvPr id="6" name="TextBox 5"/>
-          <p:cNvSpPr txBox="1"/>
-          <p:nvPr/>
-        </p:nvSpPr>
-        <p:spPr>
-          <a:xfrm>
-            <a:off x="2872000" y="2653181"/>
-            <a:ext cx="3400000" cy="420000"/>
-          </a:xfrm>
-          <a:prstGeom prst="rect">
-            <a:avLst/>
-          </a:prstGeom>
-          <a:noFill/>
-        </p:spPr>
-        <p:txBody>
-          <a:bodyPr wrap="none">
-            <a:spAutoFit/>
-          </a:bodyPr>
-          <a:lstStyle/>
-          <a:p>
-            <a:pPr algn="ctr"/>
-            <a:r>
-              <a:rPr sz="1100" b="1">
-                <a:solidFill>
-                  <a:srgbClr val="4664AA"/>
-                </a:solidFill>
-              </a:rPr>
-              <a:t>Active</a:t>
-            </a:r>
-          </a:p>
-        </p:txBody>
-      </p:sp>
-      <p:sp>
-        <p:nvSpPr>
-          <p:cNvPr id="7" name="Rounded Rectangle 6"/>
-          <p:cNvSpPr/>
-          <p:nvPr/>
-        </p:nvSpPr>
-        <p:spPr>
-          <a:xfrm>
-            <a:off x="2272000" y="2188180"/>
+            <a:off x="2272000" y="3538181"/>
             <a:ext cx="4600000" cy="2420000"/>
           </a:xfrm>
           <a:prstGeom prst="roundRect">
@@ -13938,6 +13862,83 @@
       </p:sp>
       <p:sp>
         <p:nvSpPr>
+          <p:cNvPr id="6" name="Rounded Rectangle 5"/>
+          <p:cNvSpPr/>
+          <p:nvPr/>
+        </p:nvSpPr>
+        <p:spPr>
+          <a:xfrm>
+            <a:off x="2872000" y="2653181"/>
+            <a:ext cx="3400000" cy="2420000"/>
+          </a:xfrm>
+          <a:prstGeom prst="roundRect">
+            <a:avLst/>
+          </a:prstGeom>
+          <a:solidFill>
+            <a:srgbClr val="EEF4FF"/>
+          </a:solidFill>
+          <a:ln>
+            <a:solidFill>
+              <a:srgbClr val="4664AA"/>
+            </a:solidFill>
+          </a:ln>
+        </p:spPr>
+        <p:style>
+          <a:lnRef idx="1">
+            <a:schemeClr val="accent1"/>
+          </a:lnRef>
+          <a:fillRef idx="3">
+            <a:schemeClr val="accent1"/>
+          </a:fillRef>
+          <a:effectRef idx="2">
+            <a:schemeClr val="accent1"/>
+          </a:effectRef>
+          <a:fontRef idx="minor">
+            <a:schemeClr val="lt1"/>
+          </a:fontRef>
+        </p:style>
+        <p:txBody>
+          <a:bodyPr rtlCol="0" anchor="ctr"/>
+          <a:lstStyle/>
+          <a:p/>
+        </p:txBody>
+      </p:sp>
+      <p:sp>
+        <p:nvSpPr>
+          <p:cNvPr id="7" name="TextBox 6"/>
+          <p:cNvSpPr txBox="1"/>
+          <p:nvPr/>
+        </p:nvSpPr>
+        <p:spPr>
+          <a:xfrm>
+            <a:off x="2872000" y="2653181"/>
+            <a:ext cx="3400000" cy="420000"/>
+          </a:xfrm>
+          <a:prstGeom prst="rect">
+            <a:avLst/>
+          </a:prstGeom>
+          <a:noFill/>
+        </p:spPr>
+        <p:txBody>
+          <a:bodyPr wrap="none">
+            <a:spAutoFit/>
+          </a:bodyPr>
+          <a:lstStyle/>
+          <a:p>
+            <a:pPr algn="ctr"/>
+            <a:r>
+              <a:rPr sz="1100" b="1">
+                <a:solidFill>
+                  <a:srgbClr val="4664AA"/>
+                </a:solidFill>
+              </a:rPr>
+              <a:t>Active</a:t>
+            </a:r>
+          </a:p>
+        </p:txBody>
+      </p:sp>
+      <p:sp>
+        <p:nvSpPr>
           <p:cNvPr id="8" name="Oval 7"/>
           <p:cNvSpPr/>
           <p:nvPr/>
@@ -14198,7 +14199,7 @@
           <p:cNvPr id="18" name="Connector 17"/>
           <p:cNvCxnSpPr>
             <a:stCxn id="8" idx="1"/>
-            <a:endCxn id="5" idx="3"/>
+            <a:endCxn id="6" idx="3"/>
           </p:cNvCxnSpPr>
           <p:nvPr/>
         </p:nvCxnSpPr>
@@ -14449,7 +14450,7 @@
         <p:nvCxnSpPr>
           <p:cNvPr id="29" name="Connector 28"/>
           <p:cNvCxnSpPr>
-            <a:stCxn id="5" idx="1"/>
+            <a:stCxn id="6" idx="1"/>
             <a:endCxn id="9" idx="3"/>
           </p:cNvCxnSpPr>
           <p:nvPr/>
@@ -17608,7 +17609,7 @@
           <a:lstStyle/>
           <a:p>
             <a:r>
-              <a:t>8. 円グラフ（Pie Chart）</a:t>
+              <a:t>8a. 円グラフ（Pie Chart） - パーセント表示（showData なし）</a:t>
             </a:r>
           </a:p>
         </p:txBody>
@@ -17625,28 +17626,6 @@
         </p:nvSpPr>
         <p:spPr/>
         <p:txBody>
-          <a:bodyPr wrap="square"/>
-          <a:lstStyle/>
-          <a:p>
-            <a:r>
-              <a:rPr sz="1800"/>
-              <a:t>パーセント + 実数値表示（showData あり）:</a:t>
-            </a:r>
-          </a:p>
-        </p:txBody>
-      </p:sp>
-      <p:sp>
-        <p:nvSpPr>
-          <p:cNvPr id="4" name="Text Placeholder 3"/>
-          <p:cNvSpPr>
-            <a:spLocks noGrp="1"/>
-          </p:cNvSpPr>
-          <p:nvPr>
-            <p:ph type="body" idx="2" sz="half"/>
-          </p:nvPr>
-        </p:nvSpPr>
-        <p:spPr/>
-        <p:txBody>
           <a:bodyPr/>
           <a:lstStyle/>
           <a:p/>
@@ -17654,37 +17633,19 @@
       </p:sp>
       <p:graphicFrame>
         <p:nvGraphicFramePr>
-          <p:cNvPr id="5" name="Chart 4"/>
+          <p:cNvPr id="4" name="Chart 3"/>
           <p:cNvGraphicFramePr>
             <a:graphicFrameLocks noGrp="1"/>
           </p:cNvGraphicFramePr>
           <p:nvPr/>
         </p:nvGraphicFramePr>
         <p:xfrm>
-          <a:off x="3575050" y="273050"/>
-          <a:ext cx="5111750" cy="5853113"/>
+          <a:off x="457200" y="1600200"/>
+          <a:ext cx="8229600" cy="4525963"/>
         </p:xfrm>
         <a:graphic>
           <a:graphicData uri="http://schemas.openxmlformats.org/drawingml/2006/chart">
             <c:chart xmlns:c="http://schemas.openxmlformats.org/drawingml/2006/chart" r:id="rId2"/>
-          </a:graphicData>
-        </a:graphic>
-      </p:graphicFrame>
-      <p:graphicFrame>
-        <p:nvGraphicFramePr>
-          <p:cNvPr id="6" name="Chart 5"/>
-          <p:cNvGraphicFramePr>
-            <a:graphicFrameLocks noGrp="1"/>
-          </p:cNvGraphicFramePr>
-          <p:nvPr/>
-        </p:nvGraphicFramePr>
-        <p:xfrm>
-          <a:off x="3575050" y="273050"/>
-          <a:ext cx="5111750" cy="5853113"/>
-        </p:xfrm>
-        <a:graphic>
-          <a:graphicData uri="http://schemas.openxmlformats.org/drawingml/2006/chart">
-            <c:chart xmlns:c="http://schemas.openxmlformats.org/drawingml/2006/chart" r:id="rId3"/>
           </a:graphicData>
         </a:graphic>
       </p:graphicFrame>
@@ -17722,7 +17683,7 @@
           <a:lstStyle/>
           <a:p>
             <a:r>
-              <a:t>9. 象限チャート（Quadrant Chart）</a:t>
+              <a:t>8b. 円グラフ（Pie Chart） - パーセント + 実数値表示（showData あり）:</a:t>
             </a:r>
           </a:p>
         </p:txBody>
@@ -17744,48 +17705,24 @@
           <a:p/>
         </p:txBody>
       </p:sp>
-      <p:sp>
-        <p:nvSpPr>
-          <p:cNvPr id="4" name="TextBox 3"/>
-          <p:cNvSpPr txBox="1"/>
-          <p:nvPr/>
-        </p:nvSpPr>
-        <p:spPr>
-          <a:xfrm>
-            <a:off x="457200" y="1600200"/>
-            <a:ext cx="8229600" cy="4525963"/>
-          </a:xfrm>
-          <a:prstGeom prst="rect">
-            <a:avLst/>
-          </a:prstGeom>
-          <a:noFill/>
-        </p:spPr>
-        <p:txBody>
-          <a:bodyPr wrap="square">
-            <a:spAutoFit/>
-          </a:bodyPr>
-          <a:lstStyle/>
-          <a:p>
-            <a:r>
-              <a:rPr sz="1000">
-                <a:latin typeface="Courier New"/>
-              </a:rPr>
-              <a:t>quadrantChart
-    title 製品ポートフォリオ分析
-    x-axis 低成長 --&gt; 高成長
-    y-axis 低シェア --&gt; 高シェア
-    quadrant-1 スター
-    quadrant-2 問題児
-    quadrant-3 負け犬
-    quadrant-4 金のなる木
-    製品A: [0.7, 0.8]
-    製品B: [0.3, 0.7]
-    製品C: [0.2, 0.3]
-    製品D: [0.8, 0.3]</a:t>
-            </a:r>
-          </a:p>
-        </p:txBody>
-      </p:sp>
+      <p:graphicFrame>
+        <p:nvGraphicFramePr>
+          <p:cNvPr id="4" name="Chart 3"/>
+          <p:cNvGraphicFramePr>
+            <a:graphicFrameLocks noGrp="1"/>
+          </p:cNvGraphicFramePr>
+          <p:nvPr/>
+        </p:nvGraphicFramePr>
+        <p:xfrm>
+          <a:off x="457200" y="1600200"/>
+          <a:ext cx="8229600" cy="4525963"/>
+        </p:xfrm>
+        <a:graphic>
+          <a:graphicData uri="http://schemas.openxmlformats.org/drawingml/2006/chart">
+            <c:chart xmlns:c="http://schemas.openxmlformats.org/drawingml/2006/chart" r:id="rId2"/>
+          </a:graphicData>
+        </a:graphic>
+      </p:graphicFrame>
     </p:spTree>
   </p:cSld>
   <p:clrMapOvr>
@@ -17820,7 +17757,7 @@
           <a:lstStyle/>
           <a:p>
             <a:r>
-              <a:t>10. 要件図（Requirement Diagram）</a:t>
+              <a:t>9. 象限チャート（Quadrant Chart）</a:t>
             </a:r>
           </a:p>
         </p:txBody>
@@ -17868,20 +17805,18 @@
               <a:rPr sz="1000">
                 <a:latin typeface="Courier New"/>
               </a:rPr>
-              <a:t>requirementDiagram
-    requirement test_req {
-        id: 1
-        text: システムは99.9%の可用性を持つこと
-        risk: high
-        verifymethod: test
-    }
-    functionalRequirement login_req {
-        id: 2
-        text: ユーザーはログインできること
-        risk: medium
-        verifymethod: inspection
-    }
-    test_req - traces -&gt; login_req</a:t>
+              <a:t>quadrantChart
+    title 製品ポートフォリオ分析
+    x-axis 低成長 --&gt; 高成長
+    y-axis 低シェア --&gt; 高シェア
+    quadrant-1 スター
+    quadrant-2 問題児
+    quadrant-3 負け犬
+    quadrant-4 金のなる木
+    製品A: [0.7, 0.8]
+    製品B: [0.3, 0.7]
+    製品C: [0.2, 0.3]
+    製品D: [0.8, 0.3]</a:t>
             </a:r>
           </a:p>
         </p:txBody>
@@ -17920,7 +17855,7 @@
           <a:lstStyle/>
           <a:p>
             <a:r>
-              <a:t>11. Gitグラフ（Git Graph）</a:t>
+              <a:t>10. 要件図（Requirement Diagram）</a:t>
             </a:r>
           </a:p>
         </p:txBody>
@@ -17968,16 +17903,20 @@
               <a:rPr sz="1000">
                 <a:latin typeface="Courier New"/>
               </a:rPr>
-              <a:t>gitGraph
-    commit id: "initial"
-    commit id: "feat: add login"
-    branch develop
-    checkout develop
-    commit id: "fix: typo"
-    commit id: "feat: add API"
-    checkout main
-    merge develop id: "merge develop"
-    commit id: "release: v1.0"</a:t>
+              <a:t>requirementDiagram
+    requirement test_req {
+        id: 1
+        text: システムは99.9%の可用性を持つこと
+        risk: high
+        verifymethod: test
+    }
+    functionalRequirement login_req {
+        id: 2
+        text: ユーザーはログインできること
+        risk: medium
+        verifymethod: inspection
+    }
+    test_req - traces -&gt; login_req</a:t>
             </a:r>
           </a:p>
         </p:txBody>
@@ -18016,7 +17955,7 @@
           <a:lstStyle/>
           <a:p>
             <a:r>
-              <a:t>12. マインドマップ（Mindmap）</a:t>
+              <a:t>11. Gitグラフ（Git Graph）</a:t>
             </a:r>
           </a:p>
         </p:txBody>
@@ -18040,1676 +17979,44 @@
       </p:sp>
       <p:sp>
         <p:nvSpPr>
-          <p:cNvPr id="4" name="Rectangle 3"/>
-          <p:cNvSpPr/>
-          <p:nvPr/>
-        </p:nvSpPr>
-        <p:spPr>
-          <a:xfrm>
-            <a:off x="3822000" y="3573181"/>
-            <a:ext cx="1500000" cy="580000"/>
-          </a:xfrm>
-          <a:prstGeom prst="ellipse">
-            <a:avLst/>
-          </a:prstGeom>
-          <a:solidFill>
-            <a:srgbClr val="4646B4"/>
-          </a:solidFill>
-          <a:ln>
-            <a:solidFill>
-              <a:srgbClr val="1E1E8C"/>
-            </a:solidFill>
-          </a:ln>
-        </p:spPr>
-        <p:style>
-          <a:lnRef idx="1">
-            <a:schemeClr val="accent1"/>
-          </a:lnRef>
-          <a:fillRef idx="3">
-            <a:schemeClr val="accent1"/>
-          </a:fillRef>
-          <a:effectRef idx="2">
-            <a:schemeClr val="accent1"/>
-          </a:effectRef>
-          <a:fontRef idx="minor">
-            <a:schemeClr val="lt1"/>
-          </a:fontRef>
-        </p:style>
-        <p:txBody>
-          <a:bodyPr rtlCol="0" anchor="ctr" wrap="square"/>
-          <a:lstStyle/>
-          <a:p>
-            <a:r>
-              <a:rPr sz="1600">
-                <a:solidFill>
-                  <a:srgbClr val="FFFFFF"/>
-                </a:solidFill>
+          <p:cNvPr id="4" name="TextBox 3"/>
+          <p:cNvSpPr txBox="1"/>
+          <p:nvPr/>
+        </p:nvSpPr>
+        <p:spPr>
+          <a:xfrm>
+            <a:off x="457200" y="1600200"/>
+            <a:ext cx="8229600" cy="4525963"/>
+          </a:xfrm>
+          <a:prstGeom prst="rect">
+            <a:avLst/>
+          </a:prstGeom>
+          <a:noFill/>
+        </p:spPr>
+        <p:txBody>
+          <a:bodyPr wrap="square">
+            <a:spAutoFit/>
+          </a:bodyPr>
+          <a:lstStyle/>
+          <a:p>
+            <a:r>
+              <a:rPr sz="1000">
+                <a:latin typeface="Courier New"/>
               </a:rPr>
-              <a:t>プログラミング言語</a:t>
-            </a:r>
-          </a:p>
-        </p:txBody>
-      </p:sp>
-      <p:sp>
-        <p:nvSpPr>
-          <p:cNvPr id="5" name="Rectangle 4"/>
-          <p:cNvSpPr/>
-          <p:nvPr/>
-        </p:nvSpPr>
-        <p:spPr>
-          <a:xfrm>
-            <a:off x="5270072" y="4264839"/>
-            <a:ext cx="1100000" cy="440000"/>
-          </a:xfrm>
-          <a:prstGeom prst="roundRect">
-            <a:avLst/>
-          </a:prstGeom>
-          <a:solidFill>
-            <a:srgbClr val="E74C3C"/>
-          </a:solidFill>
-          <a:ln>
-            <a:solidFill>
-              <a:srgbClr val="BF2414"/>
-            </a:solidFill>
-          </a:ln>
-        </p:spPr>
-        <p:style>
-          <a:lnRef idx="1">
-            <a:schemeClr val="accent1"/>
-          </a:lnRef>
-          <a:fillRef idx="3">
-            <a:schemeClr val="accent1"/>
-          </a:fillRef>
-          <a:effectRef idx="2">
-            <a:schemeClr val="accent1"/>
-          </a:effectRef>
-          <a:fontRef idx="minor">
-            <a:schemeClr val="lt1"/>
-          </a:fontRef>
-        </p:style>
-        <p:txBody>
-          <a:bodyPr rtlCol="0" anchor="ctr" wrap="square"/>
-          <a:lstStyle/>
-          <a:p>
-            <a:r>
-              <a:rPr sz="1300">
-                <a:solidFill>
-                  <a:srgbClr val="1E1E1E"/>
-                </a:solidFill>
-              </a:rPr>
-              <a:t>スクリプト系</a:t>
-            </a:r>
-          </a:p>
-        </p:txBody>
-      </p:sp>
-      <p:sp>
-        <p:nvSpPr>
-          <p:cNvPr id="6" name="Rectangle 5"/>
-          <p:cNvSpPr/>
-          <p:nvPr/>
-        </p:nvSpPr>
-        <p:spPr>
-          <a:xfrm>
-            <a:off x="7399912" y="4146883"/>
-            <a:ext cx="820000" cy="330000"/>
-          </a:xfrm>
-          <a:prstGeom prst="ellipse">
-            <a:avLst/>
-          </a:prstGeom>
-          <a:solidFill>
-            <a:srgbClr val="F0938A"/>
-          </a:solidFill>
-          <a:ln>
-            <a:solidFill>
-              <a:srgbClr val="C86B62"/>
-            </a:solidFill>
-          </a:ln>
-        </p:spPr>
-        <p:style>
-          <a:lnRef idx="1">
-            <a:schemeClr val="accent1"/>
-          </a:lnRef>
-          <a:fillRef idx="3">
-            <a:schemeClr val="accent1"/>
-          </a:fillRef>
-          <a:effectRef idx="2">
-            <a:schemeClr val="accent1"/>
-          </a:effectRef>
-          <a:fontRef idx="minor">
-            <a:schemeClr val="lt1"/>
-          </a:fontRef>
-        </p:style>
-        <p:txBody>
-          <a:bodyPr rtlCol="0" anchor="ctr" wrap="square"/>
-          <a:lstStyle/>
-          <a:p>
-            <a:r>
-              <a:rPr sz="1100">
-                <a:solidFill>
-                  <a:srgbClr val="1E1E1E"/>
-                </a:solidFill>
-              </a:rPr>
-              <a:t>Python</a:t>
-            </a:r>
-          </a:p>
-        </p:txBody>
-      </p:sp>
-      <p:sp>
-        <p:nvSpPr>
-          <p:cNvPr id="7" name="Rectangle 6"/>
-          <p:cNvSpPr/>
-          <p:nvPr/>
-        </p:nvSpPr>
-        <p:spPr>
-          <a:xfrm>
-            <a:off x="6658145" y="4941497"/>
-            <a:ext cx="820000" cy="330000"/>
-          </a:xfrm>
-          <a:prstGeom prst="ellipse">
-            <a:avLst/>
-          </a:prstGeom>
-          <a:solidFill>
-            <a:srgbClr val="F0938A"/>
-          </a:solidFill>
-          <a:ln>
-            <a:solidFill>
-              <a:srgbClr val="C86B62"/>
-            </a:solidFill>
-          </a:ln>
-        </p:spPr>
-        <p:style>
-          <a:lnRef idx="1">
-            <a:schemeClr val="accent1"/>
-          </a:lnRef>
-          <a:fillRef idx="3">
-            <a:schemeClr val="accent1"/>
-          </a:fillRef>
-          <a:effectRef idx="2">
-            <a:schemeClr val="accent1"/>
-          </a:effectRef>
-          <a:fontRef idx="minor">
-            <a:schemeClr val="lt1"/>
-          </a:fontRef>
-        </p:style>
-        <p:txBody>
-          <a:bodyPr rtlCol="0" anchor="ctr" wrap="square"/>
-          <a:lstStyle/>
-          <a:p>
-            <a:r>
-              <a:rPr sz="1100">
-                <a:solidFill>
-                  <a:srgbClr val="1E1E1E"/>
-                </a:solidFill>
-              </a:rPr>
-              <a:t>Ruby</a:t>
-            </a:r>
-          </a:p>
-        </p:txBody>
-      </p:sp>
-      <p:sp>
-        <p:nvSpPr>
-          <p:cNvPr id="8" name="Rectangle 7"/>
-          <p:cNvSpPr/>
-          <p:nvPr/>
-        </p:nvSpPr>
-        <p:spPr>
-          <a:xfrm>
-            <a:off x="5344542" y="5451282"/>
-            <a:ext cx="820000" cy="330000"/>
-          </a:xfrm>
-          <a:prstGeom prst="ellipse">
-            <a:avLst/>
-          </a:prstGeom>
-          <a:solidFill>
-            <a:srgbClr val="F0938A"/>
-          </a:solidFill>
-          <a:ln>
-            <a:solidFill>
-              <a:srgbClr val="C86B62"/>
-            </a:solidFill>
-          </a:ln>
-        </p:spPr>
-        <p:style>
-          <a:lnRef idx="1">
-            <a:schemeClr val="accent1"/>
-          </a:lnRef>
-          <a:fillRef idx="3">
-            <a:schemeClr val="accent1"/>
-          </a:fillRef>
-          <a:effectRef idx="2">
-            <a:schemeClr val="accent1"/>
-          </a:effectRef>
-          <a:fontRef idx="minor">
-            <a:schemeClr val="lt1"/>
-          </a:fontRef>
-        </p:style>
-        <p:txBody>
-          <a:bodyPr rtlCol="0" anchor="ctr" wrap="square"/>
-          <a:lstStyle/>
-          <a:p>
-            <a:r>
-              <a:rPr sz="1100">
-                <a:solidFill>
-                  <a:srgbClr val="1E1E1E"/>
-                </a:solidFill>
-              </a:rPr>
-              <a:t>JavaScript</a:t>
-            </a:r>
-          </a:p>
-        </p:txBody>
-      </p:sp>
-      <p:sp>
-        <p:nvSpPr>
-          <p:cNvPr id="9" name="Rectangle 8"/>
-          <p:cNvSpPr/>
-          <p:nvPr/>
-        </p:nvSpPr>
-        <p:spPr>
-          <a:xfrm>
-            <a:off x="3074805" y="4414704"/>
-            <a:ext cx="1100000" cy="440000"/>
-          </a:xfrm>
-          <a:prstGeom prst="rect">
-            <a:avLst/>
-          </a:prstGeom>
-          <a:solidFill>
-            <a:srgbClr val="E67E22"/>
-          </a:solidFill>
-          <a:ln>
-            <a:solidFill>
-              <a:srgbClr val="BE5600"/>
-            </a:solidFill>
-          </a:ln>
-        </p:spPr>
-        <p:style>
-          <a:lnRef idx="1">
-            <a:schemeClr val="accent1"/>
-          </a:lnRef>
-          <a:fillRef idx="3">
-            <a:schemeClr val="accent1"/>
-          </a:fillRef>
-          <a:effectRef idx="2">
-            <a:schemeClr val="accent1"/>
-          </a:effectRef>
-          <a:fontRef idx="minor">
-            <a:schemeClr val="lt1"/>
-          </a:fontRef>
-        </p:style>
-        <p:txBody>
-          <a:bodyPr rtlCol="0" anchor="ctr" wrap="square"/>
-          <a:lstStyle/>
-          <a:p>
-            <a:r>
-              <a:rPr sz="1300">
-                <a:solidFill>
-                  <a:srgbClr val="1E1E1E"/>
-                </a:solidFill>
-              </a:rPr>
-              <a:t>静的型付け</a:t>
-            </a:r>
-          </a:p>
-        </p:txBody>
-      </p:sp>
-      <p:sp>
-        <p:nvSpPr>
-          <p:cNvPr id="10" name="Rectangle 9"/>
-          <p:cNvSpPr/>
-          <p:nvPr/>
-        </p:nvSpPr>
-        <p:spPr>
-          <a:xfrm>
-            <a:off x="3760033" y="5559452"/>
-            <a:ext cx="820000" cy="330000"/>
-          </a:xfrm>
-          <a:prstGeom prst="hexagon">
-            <a:avLst/>
-          </a:prstGeom>
-          <a:solidFill>
-            <a:srgbClr val="F0B17A"/>
-          </a:solidFill>
-          <a:ln>
-            <a:solidFill>
-              <a:srgbClr val="C88952"/>
-            </a:solidFill>
-          </a:ln>
-        </p:spPr>
-        <p:style>
-          <a:lnRef idx="1">
-            <a:schemeClr val="accent1"/>
-          </a:lnRef>
-          <a:fillRef idx="3">
-            <a:schemeClr val="accent1"/>
-          </a:fillRef>
-          <a:effectRef idx="2">
-            <a:schemeClr val="accent1"/>
-          </a:effectRef>
-          <a:fontRef idx="minor">
-            <a:schemeClr val="lt1"/>
-          </a:fontRef>
-        </p:style>
-        <p:txBody>
-          <a:bodyPr rtlCol="0" anchor="ctr" wrap="square"/>
-          <a:lstStyle/>
-          <a:p>
-            <a:r>
-              <a:rPr sz="1100">
-                <a:solidFill>
-                  <a:srgbClr val="1E1E1E"/>
-                </a:solidFill>
-              </a:rPr>
-              <a:t>Rust</a:t>
-            </a:r>
-          </a:p>
-        </p:txBody>
-      </p:sp>
-      <p:sp>
-        <p:nvSpPr>
-          <p:cNvPr id="11" name="Rectangle 10"/>
-          <p:cNvSpPr/>
-          <p:nvPr/>
-        </p:nvSpPr>
-        <p:spPr>
-          <a:xfrm>
-            <a:off x="2267609" y="5241228"/>
-            <a:ext cx="820000" cy="330000"/>
-          </a:xfrm>
-          <a:prstGeom prst="hexagon">
-            <a:avLst/>
-          </a:prstGeom>
-          <a:solidFill>
-            <a:srgbClr val="F0B17A"/>
-          </a:solidFill>
-          <a:ln>
-            <a:solidFill>
-              <a:srgbClr val="C88952"/>
-            </a:solidFill>
-          </a:ln>
-        </p:spPr>
-        <p:style>
-          <a:lnRef idx="1">
-            <a:schemeClr val="accent1"/>
-          </a:lnRef>
-          <a:fillRef idx="3">
-            <a:schemeClr val="accent1"/>
-          </a:fillRef>
-          <a:effectRef idx="2">
-            <a:schemeClr val="accent1"/>
-          </a:effectRef>
-          <a:fontRef idx="minor">
-            <a:schemeClr val="lt1"/>
-          </a:fontRef>
-        </p:style>
-        <p:txBody>
-          <a:bodyPr rtlCol="0" anchor="ctr" wrap="square"/>
-          <a:lstStyle/>
-          <a:p>
-            <a:r>
-              <a:rPr sz="1100">
-                <a:solidFill>
-                  <a:srgbClr val="1E1E1E"/>
-                </a:solidFill>
-              </a:rPr>
-              <a:t>Go</a:t>
-            </a:r>
-          </a:p>
-        </p:txBody>
-      </p:sp>
-      <p:sp>
-        <p:nvSpPr>
-          <p:cNvPr id="12" name="Rectangle 11"/>
-          <p:cNvSpPr/>
-          <p:nvPr/>
-        </p:nvSpPr>
-        <p:spPr>
-          <a:xfrm>
-            <a:off x="1209168" y="4569509"/>
-            <a:ext cx="820000" cy="330000"/>
-          </a:xfrm>
-          <a:prstGeom prst="roundRect">
-            <a:avLst/>
-          </a:prstGeom>
-          <a:solidFill>
-            <a:srgbClr val="F0B17A"/>
-          </a:solidFill>
-          <a:ln>
-            <a:solidFill>
-              <a:srgbClr val="C88952"/>
-            </a:solidFill>
-          </a:ln>
-        </p:spPr>
-        <p:style>
-          <a:lnRef idx="1">
-            <a:schemeClr val="accent1"/>
-          </a:lnRef>
-          <a:fillRef idx="3">
-            <a:schemeClr val="accent1"/>
-          </a:fillRef>
-          <a:effectRef idx="2">
-            <a:schemeClr val="accent1"/>
-          </a:effectRef>
-          <a:fontRef idx="minor">
-            <a:schemeClr val="lt1"/>
-          </a:fontRef>
-        </p:style>
-        <p:txBody>
-          <a:bodyPr rtlCol="0" anchor="ctr" wrap="square"/>
-          <a:lstStyle/>
-          <a:p>
-            <a:r>
-              <a:rPr sz="1100">
-                <a:solidFill>
-                  <a:srgbClr val="1E1E1E"/>
-                </a:solidFill>
-              </a:rPr>
-              <a:t>Java</a:t>
-            </a:r>
-          </a:p>
-        </p:txBody>
-      </p:sp>
-      <p:sp>
-        <p:nvSpPr>
-          <p:cNvPr id="13" name="Rectangle 12"/>
-          <p:cNvSpPr/>
-          <p:nvPr/>
-        </p:nvSpPr>
-        <p:spPr>
-          <a:xfrm>
-            <a:off x="2403044" y="3418830"/>
-            <a:ext cx="1100000" cy="440000"/>
-          </a:xfrm>
-          <a:prstGeom prst="roundRect">
-            <a:avLst/>
-          </a:prstGeom>
-          <a:solidFill>
-            <a:srgbClr val="F1C40F"/>
-          </a:solidFill>
-          <a:ln>
-            <a:solidFill>
-              <a:srgbClr val="C99C00"/>
-            </a:solidFill>
-          </a:ln>
-        </p:spPr>
-        <p:style>
-          <a:lnRef idx="1">
-            <a:schemeClr val="accent1"/>
-          </a:lnRef>
-          <a:fillRef idx="3">
-            <a:schemeClr val="accent1"/>
-          </a:fillRef>
-          <a:effectRef idx="2">
-            <a:schemeClr val="accent1"/>
-          </a:effectRef>
-          <a:fontRef idx="minor">
-            <a:schemeClr val="lt1"/>
-          </a:fontRef>
-        </p:style>
-        <p:txBody>
-          <a:bodyPr rtlCol="0" anchor="ctr" wrap="square"/>
-          <a:lstStyle/>
-          <a:p>
-            <a:r>
-              <a:rPr sz="1300">
-                <a:solidFill>
-                  <a:srgbClr val="1E1E1E"/>
-                </a:solidFill>
-              </a:rPr>
-              <a:t>関数型</a:t>
-            </a:r>
-          </a:p>
-        </p:txBody>
-      </p:sp>
-      <p:sp>
-        <p:nvSpPr>
-          <p:cNvPr id="14" name="Rectangle 13"/>
-          <p:cNvSpPr/>
-          <p:nvPr/>
-        </p:nvSpPr>
-        <p:spPr>
-          <a:xfrm>
-            <a:off x="827184" y="3698181"/>
-            <a:ext cx="820000" cy="330000"/>
-          </a:xfrm>
-          <a:prstGeom prst="irregularSeal1">
-            <a:avLst/>
-          </a:prstGeom>
-          <a:solidFill>
-            <a:srgbClr val="F6DB6F"/>
-          </a:solidFill>
-          <a:ln>
-            <a:solidFill>
-              <a:srgbClr val="CEB347"/>
-            </a:solidFill>
-          </a:ln>
-        </p:spPr>
-        <p:style>
-          <a:lnRef idx="1">
-            <a:schemeClr val="accent1"/>
-          </a:lnRef>
-          <a:fillRef idx="3">
-            <a:schemeClr val="accent1"/>
-          </a:fillRef>
-          <a:effectRef idx="2">
-            <a:schemeClr val="accent1"/>
-          </a:effectRef>
-          <a:fontRef idx="minor">
-            <a:schemeClr val="lt1"/>
-          </a:fontRef>
-        </p:style>
-        <p:txBody>
-          <a:bodyPr rtlCol="0" anchor="ctr" wrap="square"/>
-          <a:lstStyle/>
-          <a:p>
-            <a:r>
-              <a:rPr sz="1100">
-                <a:solidFill>
-                  <a:srgbClr val="1E1E1E"/>
-                </a:solidFill>
-              </a:rPr>
-              <a:t>Haskell</a:t>
-            </a:r>
-          </a:p>
-        </p:txBody>
-      </p:sp>
-      <p:sp>
-        <p:nvSpPr>
-          <p:cNvPr id="15" name="Rectangle 14"/>
-          <p:cNvSpPr/>
-          <p:nvPr/>
-        </p:nvSpPr>
-        <p:spPr>
-          <a:xfrm>
-            <a:off x="1209168" y="2826853"/>
-            <a:ext cx="820000" cy="330000"/>
-          </a:xfrm>
-          <a:prstGeom prst="irregularSeal1">
-            <a:avLst/>
-          </a:prstGeom>
-          <a:solidFill>
-            <a:srgbClr val="F6DB6F"/>
-          </a:solidFill>
-          <a:ln>
-            <a:solidFill>
-              <a:srgbClr val="CEB347"/>
-            </a:solidFill>
-          </a:ln>
-        </p:spPr>
-        <p:style>
-          <a:lnRef idx="1">
-            <a:schemeClr val="accent1"/>
-          </a:lnRef>
-          <a:fillRef idx="3">
-            <a:schemeClr val="accent1"/>
-          </a:fillRef>
-          <a:effectRef idx="2">
-            <a:schemeClr val="accent1"/>
-          </a:effectRef>
-          <a:fontRef idx="minor">
-            <a:schemeClr val="lt1"/>
-          </a:fontRef>
-        </p:style>
-        <p:txBody>
-          <a:bodyPr rtlCol="0" anchor="ctr" wrap="square"/>
-          <a:lstStyle/>
-          <a:p>
-            <a:r>
-              <a:rPr sz="1100">
-                <a:solidFill>
-                  <a:srgbClr val="1E1E1E"/>
-                </a:solidFill>
-              </a:rPr>
-              <a:t>Erlang</a:t>
-            </a:r>
-          </a:p>
-        </p:txBody>
-      </p:sp>
-      <p:sp>
-        <p:nvSpPr>
-          <p:cNvPr id="16" name="Rectangle 15"/>
-          <p:cNvSpPr/>
-          <p:nvPr/>
-        </p:nvSpPr>
-        <p:spPr>
-          <a:xfrm>
-            <a:off x="3821017" y="2712546"/>
-            <a:ext cx="1100000" cy="440000"/>
-          </a:xfrm>
-          <a:prstGeom prst="roundRect">
-            <a:avLst/>
-          </a:prstGeom>
-          <a:solidFill>
-            <a:srgbClr val="27AE60"/>
-          </a:solidFill>
-          <a:ln>
-            <a:solidFill>
-              <a:srgbClr val="008638"/>
-            </a:solidFill>
-          </a:ln>
-        </p:spPr>
-        <p:style>
-          <a:lnRef idx="1">
-            <a:schemeClr val="accent1"/>
-          </a:lnRef>
-          <a:fillRef idx="3">
-            <a:schemeClr val="accent1"/>
-          </a:fillRef>
-          <a:effectRef idx="2">
-            <a:schemeClr val="accent1"/>
-          </a:effectRef>
-          <a:fontRef idx="minor">
-            <a:schemeClr val="lt1"/>
-          </a:fontRef>
-        </p:style>
-        <p:txBody>
-          <a:bodyPr rtlCol="0" anchor="ctr" wrap="square"/>
-          <a:lstStyle/>
-          <a:p>
-            <a:r>
-              <a:rPr sz="1300">
-                <a:solidFill>
-                  <a:srgbClr val="1E1E1E"/>
-                </a:solidFill>
-              </a:rPr>
-              <a:t>Web</a:t>
-            </a:r>
-          </a:p>
-        </p:txBody>
-      </p:sp>
-      <p:sp>
-        <p:nvSpPr>
-          <p:cNvPr id="17" name="Rectangle 16"/>
-          <p:cNvSpPr/>
-          <p:nvPr/>
-        </p:nvSpPr>
-        <p:spPr>
-          <a:xfrm>
-            <a:off x="2267609" y="2155134"/>
-            <a:ext cx="820000" cy="330000"/>
-          </a:xfrm>
-          <a:prstGeom prst="rect">
-            <a:avLst/>
-          </a:prstGeom>
-          <a:solidFill>
-            <a:srgbClr val="7DCE9F"/>
-          </a:solidFill>
-          <a:ln>
-            <a:solidFill>
-              <a:srgbClr val="55A677"/>
-            </a:solidFill>
-          </a:ln>
-        </p:spPr>
-        <p:style>
-          <a:lnRef idx="1">
-            <a:schemeClr val="accent1"/>
-          </a:lnRef>
-          <a:fillRef idx="3">
-            <a:schemeClr val="accent1"/>
-          </a:fillRef>
-          <a:effectRef idx="2">
-            <a:schemeClr val="accent1"/>
-          </a:effectRef>
-          <a:fontRef idx="minor">
-            <a:schemeClr val="lt1"/>
-          </a:fontRef>
-        </p:style>
-        <p:txBody>
-          <a:bodyPr rtlCol="0" anchor="ctr" wrap="square"/>
-          <a:lstStyle/>
-          <a:p>
-            <a:r>
-              <a:rPr sz="1100">
-                <a:solidFill>
-                  <a:srgbClr val="1E1E1E"/>
-                </a:solidFill>
-              </a:rPr>
-              <a:t>HTML</a:t>
-            </a:r>
-          </a:p>
-        </p:txBody>
-      </p:sp>
-      <p:sp>
-        <p:nvSpPr>
-          <p:cNvPr id="18" name="Rectangle 17"/>
-          <p:cNvSpPr/>
-          <p:nvPr/>
-        </p:nvSpPr>
-        <p:spPr>
-          <a:xfrm>
-            <a:off x="3760033" y="1836910"/>
-            <a:ext cx="820000" cy="330000"/>
-          </a:xfrm>
-          <a:prstGeom prst="rect">
-            <a:avLst/>
-          </a:prstGeom>
-          <a:solidFill>
-            <a:srgbClr val="7DCE9F"/>
-          </a:solidFill>
-          <a:ln>
-            <a:solidFill>
-              <a:srgbClr val="55A677"/>
-            </a:solidFill>
-          </a:ln>
-        </p:spPr>
-        <p:style>
-          <a:lnRef idx="1">
-            <a:schemeClr val="accent1"/>
-          </a:lnRef>
-          <a:fillRef idx="3">
-            <a:schemeClr val="accent1"/>
-          </a:fillRef>
-          <a:effectRef idx="2">
-            <a:schemeClr val="accent1"/>
-          </a:effectRef>
-          <a:fontRef idx="minor">
-            <a:schemeClr val="lt1"/>
-          </a:fontRef>
-        </p:style>
-        <p:txBody>
-          <a:bodyPr rtlCol="0" anchor="ctr" wrap="square"/>
-          <a:lstStyle/>
-          <a:p>
-            <a:r>
-              <a:rPr sz="1100">
-                <a:solidFill>
-                  <a:srgbClr val="1E1E1E"/>
-                </a:solidFill>
-              </a:rPr>
-              <a:t>CSS</a:t>
-            </a:r>
-          </a:p>
-        </p:txBody>
-      </p:sp>
-      <p:sp>
-        <p:nvSpPr>
-          <p:cNvPr id="19" name="Rectangle 18"/>
-          <p:cNvSpPr/>
-          <p:nvPr/>
-        </p:nvSpPr>
-        <p:spPr>
-          <a:xfrm>
-            <a:off x="5344542" y="1945080"/>
-            <a:ext cx="820000" cy="330000"/>
-          </a:xfrm>
-          <a:prstGeom prst="roundRect">
-            <a:avLst/>
-          </a:prstGeom>
-          <a:solidFill>
-            <a:srgbClr val="7DCE9F"/>
-          </a:solidFill>
-          <a:ln>
-            <a:solidFill>
-              <a:srgbClr val="55A677"/>
-            </a:solidFill>
-          </a:ln>
-        </p:spPr>
-        <p:style>
-          <a:lnRef idx="1">
-            <a:schemeClr val="accent1"/>
-          </a:lnRef>
-          <a:fillRef idx="3">
-            <a:schemeClr val="accent1"/>
-          </a:fillRef>
-          <a:effectRef idx="2">
-            <a:schemeClr val="accent1"/>
-          </a:effectRef>
-          <a:fontRef idx="minor">
-            <a:schemeClr val="lt1"/>
-          </a:fontRef>
-        </p:style>
-        <p:txBody>
-          <a:bodyPr rtlCol="0" anchor="ctr" wrap="square"/>
-          <a:lstStyle/>
-          <a:p>
-            <a:r>
-              <a:rPr sz="1100">
-                <a:solidFill>
-                  <a:srgbClr val="1E1E1E"/>
-                </a:solidFill>
-              </a:rPr>
-              <a:t>TypeScript</a:t>
-            </a:r>
-          </a:p>
-        </p:txBody>
-      </p:sp>
-      <p:sp>
-        <p:nvSpPr>
-          <p:cNvPr id="20" name="Rectangle 19"/>
-          <p:cNvSpPr/>
-          <p:nvPr/>
-        </p:nvSpPr>
-        <p:spPr>
-          <a:xfrm>
-            <a:off x="5498416" y="3207517"/>
-            <a:ext cx="1100000" cy="440000"/>
-          </a:xfrm>
-          <a:prstGeom prst="cloud">
-            <a:avLst/>
-          </a:prstGeom>
-          <a:solidFill>
-            <a:srgbClr val="1ABC9C"/>
-          </a:solidFill>
-          <a:ln>
-            <a:solidFill>
-              <a:srgbClr val="009474"/>
-            </a:solidFill>
-          </a:ln>
-        </p:spPr>
-        <p:style>
-          <a:lnRef idx="1">
-            <a:schemeClr val="accent1"/>
-          </a:lnRef>
-          <a:fillRef idx="3">
-            <a:schemeClr val="accent1"/>
-          </a:fillRef>
-          <a:effectRef idx="2">
-            <a:schemeClr val="accent1"/>
-          </a:effectRef>
-          <a:fontRef idx="minor">
-            <a:schemeClr val="lt1"/>
-          </a:fontRef>
-        </p:style>
-        <p:txBody>
-          <a:bodyPr rtlCol="0" anchor="ctr" wrap="square"/>
-          <a:lstStyle/>
-          <a:p>
-            <a:r>
-              <a:rPr sz="1300">
-                <a:solidFill>
-                  <a:srgbClr val="1E1E1E"/>
-                </a:solidFill>
-              </a:rPr>
-              <a:t>クエリ言語</a:t>
-            </a:r>
-          </a:p>
-        </p:txBody>
-      </p:sp>
-      <p:sp>
-        <p:nvSpPr>
-          <p:cNvPr id="21" name="Rectangle 20"/>
-          <p:cNvSpPr/>
-          <p:nvPr/>
-        </p:nvSpPr>
-        <p:spPr>
-          <a:xfrm>
-            <a:off x="6658145" y="2454865"/>
-            <a:ext cx="820000" cy="330000"/>
-          </a:xfrm>
-          <a:prstGeom prst="rect">
-            <a:avLst/>
-          </a:prstGeom>
-          <a:solidFill>
-            <a:srgbClr val="75D6C3"/>
-          </a:solidFill>
-          <a:ln>
-            <a:solidFill>
-              <a:srgbClr val="4DAE9B"/>
-            </a:solidFill>
-          </a:ln>
-        </p:spPr>
-        <p:style>
-          <a:lnRef idx="1">
-            <a:schemeClr val="accent1"/>
-          </a:lnRef>
-          <a:fillRef idx="3">
-            <a:schemeClr val="accent1"/>
-          </a:fillRef>
-          <a:effectRef idx="2">
-            <a:schemeClr val="accent1"/>
-          </a:effectRef>
-          <a:fontRef idx="minor">
-            <a:schemeClr val="lt1"/>
-          </a:fontRef>
-        </p:style>
-        <p:txBody>
-          <a:bodyPr rtlCol="0" anchor="ctr" wrap="square"/>
-          <a:lstStyle/>
-          <a:p>
-            <a:r>
-              <a:rPr sz="1100">
-                <a:solidFill>
-                  <a:srgbClr val="1E1E1E"/>
-                </a:solidFill>
-              </a:rPr>
-              <a:t>SQL</a:t>
-            </a:r>
-          </a:p>
-        </p:txBody>
-      </p:sp>
-      <p:sp>
-        <p:nvSpPr>
-          <p:cNvPr id="22" name="Rectangle 21"/>
-          <p:cNvSpPr/>
-          <p:nvPr/>
-        </p:nvSpPr>
-        <p:spPr>
-          <a:xfrm>
-            <a:off x="7399912" y="3249479"/>
-            <a:ext cx="820000" cy="330000"/>
-          </a:xfrm>
-          <a:prstGeom prst="rect">
-            <a:avLst/>
-          </a:prstGeom>
-          <a:solidFill>
-            <a:srgbClr val="75D6C3"/>
-          </a:solidFill>
-          <a:ln>
-            <a:solidFill>
-              <a:srgbClr val="4DAE9B"/>
-            </a:solidFill>
-          </a:ln>
-        </p:spPr>
-        <p:style>
-          <a:lnRef idx="1">
-            <a:schemeClr val="accent1"/>
-          </a:lnRef>
-          <a:fillRef idx="3">
-            <a:schemeClr val="accent1"/>
-          </a:fillRef>
-          <a:effectRef idx="2">
-            <a:schemeClr val="accent1"/>
-          </a:effectRef>
-          <a:fontRef idx="minor">
-            <a:schemeClr val="lt1"/>
-          </a:fontRef>
-        </p:style>
-        <p:txBody>
-          <a:bodyPr rtlCol="0" anchor="ctr" wrap="square"/>
-          <a:lstStyle/>
-          <a:p>
-            <a:r>
-              <a:rPr sz="1100">
-                <a:solidFill>
-                  <a:srgbClr val="1E1E1E"/>
-                </a:solidFill>
-              </a:rPr>
-              <a:t>GraphQL</a:t>
-            </a:r>
-          </a:p>
-        </p:txBody>
-      </p:sp>
-      <p:cxnSp>
-        <p:nvCxnSpPr>
-          <p:cNvPr id="23" name="Connector 22"/>
-          <p:cNvCxnSpPr>
-            <a:stCxn id="4" idx="1"/>
-            <a:endCxn id="5" idx="3"/>
-          </p:cNvCxnSpPr>
-          <p:nvPr/>
-        </p:nvCxnSpPr>
-        <p:spPr>
-          <a:xfrm>
-            <a:off x="3822000" y="3863181"/>
-            <a:ext cx="2548072" cy="621658"/>
-          </a:xfrm>
-          <a:prstGeom prst="curvedConnector3">
-            <a:avLst/>
-          </a:prstGeom>
-          <a:ln w="25400">
-            <a:solidFill>
-              <a:srgbClr val="E74C3C"/>
-            </a:solidFill>
-          </a:ln>
-        </p:spPr>
-        <p:style>
-          <a:lnRef idx="2">
-            <a:schemeClr val="accent1"/>
-          </a:lnRef>
-          <a:fillRef idx="0">
-            <a:schemeClr val="accent1"/>
-          </a:fillRef>
-          <a:effectRef idx="1">
-            <a:schemeClr val="accent1"/>
-          </a:effectRef>
-          <a:fontRef idx="minor">
-            <a:schemeClr val="tx1"/>
-          </a:fontRef>
-        </p:style>
-      </p:cxnSp>
-      <p:cxnSp>
-        <p:nvCxnSpPr>
-          <p:cNvPr id="24" name="Connector 23"/>
-          <p:cNvCxnSpPr>
-            <a:stCxn id="5" idx="1"/>
-            <a:endCxn id="6" idx="3"/>
-          </p:cNvCxnSpPr>
-          <p:nvPr/>
-        </p:nvCxnSpPr>
-        <p:spPr>
-          <a:xfrm flipV="1">
-            <a:off x="5270072" y="4311883"/>
-            <a:ext cx="2949840" cy="172956"/>
-          </a:xfrm>
-          <a:prstGeom prst="curvedConnector3">
-            <a:avLst/>
-          </a:prstGeom>
-          <a:ln w="25400">
-            <a:solidFill>
-              <a:srgbClr val="F0938A"/>
-            </a:solidFill>
-          </a:ln>
-        </p:spPr>
-        <p:style>
-          <a:lnRef idx="2">
-            <a:schemeClr val="accent1"/>
-          </a:lnRef>
-          <a:fillRef idx="0">
-            <a:schemeClr val="accent1"/>
-          </a:fillRef>
-          <a:effectRef idx="1">
-            <a:schemeClr val="accent1"/>
-          </a:effectRef>
-          <a:fontRef idx="minor">
-            <a:schemeClr val="tx1"/>
-          </a:fontRef>
-        </p:style>
-      </p:cxnSp>
-      <p:cxnSp>
-        <p:nvCxnSpPr>
-          <p:cNvPr id="25" name="Connector 24"/>
-          <p:cNvCxnSpPr>
-            <a:stCxn id="5" idx="1"/>
-            <a:endCxn id="7" idx="3"/>
-          </p:cNvCxnSpPr>
-          <p:nvPr/>
-        </p:nvCxnSpPr>
-        <p:spPr>
-          <a:xfrm>
-            <a:off x="5270072" y="4484839"/>
-            <a:ext cx="2208073" cy="621658"/>
-          </a:xfrm>
-          <a:prstGeom prst="curvedConnector3">
-            <a:avLst/>
-          </a:prstGeom>
-          <a:ln w="25400">
-            <a:solidFill>
-              <a:srgbClr val="F0938A"/>
-            </a:solidFill>
-          </a:ln>
-        </p:spPr>
-        <p:style>
-          <a:lnRef idx="2">
-            <a:schemeClr val="accent1"/>
-          </a:lnRef>
-          <a:fillRef idx="0">
-            <a:schemeClr val="accent1"/>
-          </a:fillRef>
-          <a:effectRef idx="1">
-            <a:schemeClr val="accent1"/>
-          </a:effectRef>
-          <a:fontRef idx="minor">
-            <a:schemeClr val="tx1"/>
-          </a:fontRef>
-        </p:style>
-      </p:cxnSp>
-      <p:cxnSp>
-        <p:nvCxnSpPr>
-          <p:cNvPr id="26" name="Connector 25"/>
-          <p:cNvCxnSpPr>
-            <a:stCxn id="5" idx="2"/>
-            <a:endCxn id="8" idx="0"/>
-          </p:cNvCxnSpPr>
-          <p:nvPr/>
-        </p:nvCxnSpPr>
-        <p:spPr>
-          <a:xfrm flipH="1">
-            <a:off x="5754542" y="4704839"/>
-            <a:ext cx="65530" cy="746443"/>
-          </a:xfrm>
-          <a:prstGeom prst="curvedConnector3">
-            <a:avLst/>
-          </a:prstGeom>
-          <a:ln w="25400">
-            <a:solidFill>
-              <a:srgbClr val="F0938A"/>
-            </a:solidFill>
-          </a:ln>
-        </p:spPr>
-        <p:style>
-          <a:lnRef idx="2">
-            <a:schemeClr val="accent1"/>
-          </a:lnRef>
-          <a:fillRef idx="0">
-            <a:schemeClr val="accent1"/>
-          </a:fillRef>
-          <a:effectRef idx="1">
-            <a:schemeClr val="accent1"/>
-          </a:effectRef>
-          <a:fontRef idx="minor">
-            <a:schemeClr val="tx1"/>
-          </a:fontRef>
-        </p:style>
-      </p:cxnSp>
-      <p:cxnSp>
-        <p:nvCxnSpPr>
-          <p:cNvPr id="27" name="Connector 26"/>
-          <p:cNvCxnSpPr>
-            <a:stCxn id="4" idx="3"/>
-            <a:endCxn id="9" idx="1"/>
-          </p:cNvCxnSpPr>
-          <p:nvPr/>
-        </p:nvCxnSpPr>
-        <p:spPr>
-          <a:xfrm flipH="1">
-            <a:off x="3074805" y="3863181"/>
-            <a:ext cx="2247195" cy="771523"/>
-          </a:xfrm>
-          <a:prstGeom prst="curvedConnector3">
-            <a:avLst/>
-          </a:prstGeom>
-          <a:ln w="25400">
-            <a:solidFill>
-              <a:srgbClr val="E67E22"/>
-            </a:solidFill>
-          </a:ln>
-        </p:spPr>
-        <p:style>
-          <a:lnRef idx="2">
-            <a:schemeClr val="accent1"/>
-          </a:lnRef>
-          <a:fillRef idx="0">
-            <a:schemeClr val="accent1"/>
-          </a:fillRef>
-          <a:effectRef idx="1">
-            <a:schemeClr val="accent1"/>
-          </a:effectRef>
-          <a:fontRef idx="minor">
-            <a:schemeClr val="tx1"/>
-          </a:fontRef>
-        </p:style>
-      </p:cxnSp>
-      <p:cxnSp>
-        <p:nvCxnSpPr>
-          <p:cNvPr id="28" name="Connector 27"/>
-          <p:cNvCxnSpPr>
-            <a:stCxn id="9" idx="2"/>
-            <a:endCxn id="10" idx="0"/>
-          </p:cNvCxnSpPr>
-          <p:nvPr/>
-        </p:nvCxnSpPr>
-        <p:spPr>
-          <a:xfrm>
-            <a:off x="3624805" y="4854704"/>
-            <a:ext cx="545228" cy="704748"/>
-          </a:xfrm>
-          <a:prstGeom prst="curvedConnector3">
-            <a:avLst/>
-          </a:prstGeom>
-          <a:ln w="25400">
-            <a:solidFill>
-              <a:srgbClr val="F0B17A"/>
-            </a:solidFill>
-          </a:ln>
-        </p:spPr>
-        <p:style>
-          <a:lnRef idx="2">
-            <a:schemeClr val="accent1"/>
-          </a:lnRef>
-          <a:fillRef idx="0">
-            <a:schemeClr val="accent1"/>
-          </a:fillRef>
-          <a:effectRef idx="1">
-            <a:schemeClr val="accent1"/>
-          </a:effectRef>
-          <a:fontRef idx="minor">
-            <a:schemeClr val="tx1"/>
-          </a:fontRef>
-        </p:style>
-      </p:cxnSp>
-      <p:cxnSp>
-        <p:nvCxnSpPr>
-          <p:cNvPr id="29" name="Connector 28"/>
-          <p:cNvCxnSpPr>
-            <a:stCxn id="9" idx="3"/>
-            <a:endCxn id="11" idx="1"/>
-          </p:cNvCxnSpPr>
-          <p:nvPr/>
-        </p:nvCxnSpPr>
-        <p:spPr>
-          <a:xfrm flipH="1">
-            <a:off x="2267609" y="4634704"/>
-            <a:ext cx="1907196" cy="771524"/>
-          </a:xfrm>
-          <a:prstGeom prst="curvedConnector3">
-            <a:avLst/>
-          </a:prstGeom>
-          <a:ln w="25400">
-            <a:solidFill>
-              <a:srgbClr val="F0B17A"/>
-            </a:solidFill>
-          </a:ln>
-        </p:spPr>
-        <p:style>
-          <a:lnRef idx="2">
-            <a:schemeClr val="accent1"/>
-          </a:lnRef>
-          <a:fillRef idx="0">
-            <a:schemeClr val="accent1"/>
-          </a:fillRef>
-          <a:effectRef idx="1">
-            <a:schemeClr val="accent1"/>
-          </a:effectRef>
-          <a:fontRef idx="minor">
-            <a:schemeClr val="tx1"/>
-          </a:fontRef>
-        </p:style>
-      </p:cxnSp>
-      <p:cxnSp>
-        <p:nvCxnSpPr>
-          <p:cNvPr id="30" name="Connector 29"/>
-          <p:cNvCxnSpPr>
-            <a:stCxn id="9" idx="3"/>
-            <a:endCxn id="12" idx="1"/>
-          </p:cNvCxnSpPr>
-          <p:nvPr/>
-        </p:nvCxnSpPr>
-        <p:spPr>
-          <a:xfrm flipH="1">
-            <a:off x="1209168" y="4634704"/>
-            <a:ext cx="2965637" cy="99805"/>
-          </a:xfrm>
-          <a:prstGeom prst="curvedConnector3">
-            <a:avLst/>
-          </a:prstGeom>
-          <a:ln w="25400">
-            <a:solidFill>
-              <a:srgbClr val="F0B17A"/>
-            </a:solidFill>
-          </a:ln>
-        </p:spPr>
-        <p:style>
-          <a:lnRef idx="2">
-            <a:schemeClr val="accent1"/>
-          </a:lnRef>
-          <a:fillRef idx="0">
-            <a:schemeClr val="accent1"/>
-          </a:fillRef>
-          <a:effectRef idx="1">
-            <a:schemeClr val="accent1"/>
-          </a:effectRef>
-          <a:fontRef idx="minor">
-            <a:schemeClr val="tx1"/>
-          </a:fontRef>
-        </p:style>
-      </p:cxnSp>
-      <p:cxnSp>
-        <p:nvCxnSpPr>
-          <p:cNvPr id="31" name="Connector 30"/>
-          <p:cNvCxnSpPr>
-            <a:stCxn id="4" idx="3"/>
-            <a:endCxn id="13" idx="1"/>
-          </p:cNvCxnSpPr>
-          <p:nvPr/>
-        </p:nvCxnSpPr>
-        <p:spPr>
-          <a:xfrm flipH="1" flipV="1">
-            <a:off x="2403044" y="3638830"/>
-            <a:ext cx="2918956" cy="224351"/>
-          </a:xfrm>
-          <a:prstGeom prst="curvedConnector3">
-            <a:avLst/>
-          </a:prstGeom>
-          <a:ln w="25400">
-            <a:solidFill>
-              <a:srgbClr val="F1C40F"/>
-            </a:solidFill>
-          </a:ln>
-        </p:spPr>
-        <p:style>
-          <a:lnRef idx="2">
-            <a:schemeClr val="accent1"/>
-          </a:lnRef>
-          <a:fillRef idx="0">
-            <a:schemeClr val="accent1"/>
-          </a:fillRef>
-          <a:effectRef idx="1">
-            <a:schemeClr val="accent1"/>
-          </a:effectRef>
-          <a:fontRef idx="minor">
-            <a:schemeClr val="tx1"/>
-          </a:fontRef>
-        </p:style>
-      </p:cxnSp>
-      <p:cxnSp>
-        <p:nvCxnSpPr>
-          <p:cNvPr id="32" name="Connector 31"/>
-          <p:cNvCxnSpPr>
-            <a:stCxn id="13" idx="3"/>
-            <a:endCxn id="14" idx="1"/>
-          </p:cNvCxnSpPr>
-          <p:nvPr/>
-        </p:nvCxnSpPr>
-        <p:spPr>
-          <a:xfrm flipH="1">
-            <a:off x="827184" y="3638830"/>
-            <a:ext cx="2675860" cy="224351"/>
-          </a:xfrm>
-          <a:prstGeom prst="curvedConnector3">
-            <a:avLst/>
-          </a:prstGeom>
-          <a:ln w="25400">
-            <a:solidFill>
-              <a:srgbClr val="F6DB6F"/>
-            </a:solidFill>
-          </a:ln>
-        </p:spPr>
-        <p:style>
-          <a:lnRef idx="2">
-            <a:schemeClr val="accent1"/>
-          </a:lnRef>
-          <a:fillRef idx="0">
-            <a:schemeClr val="accent1"/>
-          </a:fillRef>
-          <a:effectRef idx="1">
-            <a:schemeClr val="accent1"/>
-          </a:effectRef>
-          <a:fontRef idx="minor">
-            <a:schemeClr val="tx1"/>
-          </a:fontRef>
-        </p:style>
-      </p:cxnSp>
-      <p:cxnSp>
-        <p:nvCxnSpPr>
-          <p:cNvPr id="33" name="Connector 32"/>
-          <p:cNvCxnSpPr>
-            <a:stCxn id="13" idx="3"/>
-            <a:endCxn id="15" idx="1"/>
-          </p:cNvCxnSpPr>
-          <p:nvPr/>
-        </p:nvCxnSpPr>
-        <p:spPr>
-          <a:xfrm flipH="1" flipV="1">
-            <a:off x="1209168" y="2991853"/>
-            <a:ext cx="2293876" cy="646977"/>
-          </a:xfrm>
-          <a:prstGeom prst="curvedConnector3">
-            <a:avLst/>
-          </a:prstGeom>
-          <a:ln w="25400">
-            <a:solidFill>
-              <a:srgbClr val="F6DB6F"/>
-            </a:solidFill>
-          </a:ln>
-        </p:spPr>
-        <p:style>
-          <a:lnRef idx="2">
-            <a:schemeClr val="accent1"/>
-          </a:lnRef>
-          <a:fillRef idx="0">
-            <a:schemeClr val="accent1"/>
-          </a:fillRef>
-          <a:effectRef idx="1">
-            <a:schemeClr val="accent1"/>
-          </a:effectRef>
-          <a:fontRef idx="minor">
-            <a:schemeClr val="tx1"/>
-          </a:fontRef>
-        </p:style>
-      </p:cxnSp>
-      <p:cxnSp>
-        <p:nvCxnSpPr>
-          <p:cNvPr id="34" name="Connector 33"/>
-          <p:cNvCxnSpPr>
-            <a:stCxn id="4" idx="0"/>
-            <a:endCxn id="16" idx="2"/>
-          </p:cNvCxnSpPr>
-          <p:nvPr/>
-        </p:nvCxnSpPr>
-        <p:spPr>
-          <a:xfrm flipH="1" flipV="1">
-            <a:off x="4371017" y="3152546"/>
-            <a:ext cx="200983" cy="420635"/>
-          </a:xfrm>
-          <a:prstGeom prst="curvedConnector3">
-            <a:avLst/>
-          </a:prstGeom>
-          <a:ln w="25400">
-            <a:solidFill>
-              <a:srgbClr val="27AE60"/>
-            </a:solidFill>
-          </a:ln>
-        </p:spPr>
-        <p:style>
-          <a:lnRef idx="2">
-            <a:schemeClr val="accent1"/>
-          </a:lnRef>
-          <a:fillRef idx="0">
-            <a:schemeClr val="accent1"/>
-          </a:fillRef>
-          <a:effectRef idx="1">
-            <a:schemeClr val="accent1"/>
-          </a:effectRef>
-          <a:fontRef idx="minor">
-            <a:schemeClr val="tx1"/>
-          </a:fontRef>
-        </p:style>
-      </p:cxnSp>
-      <p:cxnSp>
-        <p:nvCxnSpPr>
-          <p:cNvPr id="35" name="Connector 34"/>
-          <p:cNvCxnSpPr>
-            <a:stCxn id="16" idx="3"/>
-            <a:endCxn id="17" idx="1"/>
-          </p:cNvCxnSpPr>
-          <p:nvPr/>
-        </p:nvCxnSpPr>
-        <p:spPr>
-          <a:xfrm flipH="1" flipV="1">
-            <a:off x="2267609" y="2320134"/>
-            <a:ext cx="2653408" cy="612412"/>
-          </a:xfrm>
-          <a:prstGeom prst="curvedConnector3">
-            <a:avLst/>
-          </a:prstGeom>
-          <a:ln w="25400">
-            <a:solidFill>
-              <a:srgbClr val="7DCE9F"/>
-            </a:solidFill>
-          </a:ln>
-        </p:spPr>
-        <p:style>
-          <a:lnRef idx="2">
-            <a:schemeClr val="accent1"/>
-          </a:lnRef>
-          <a:fillRef idx="0">
-            <a:schemeClr val="accent1"/>
-          </a:fillRef>
-          <a:effectRef idx="1">
-            <a:schemeClr val="accent1"/>
-          </a:effectRef>
-          <a:fontRef idx="minor">
-            <a:schemeClr val="tx1"/>
-          </a:fontRef>
-        </p:style>
-      </p:cxnSp>
-      <p:cxnSp>
-        <p:nvCxnSpPr>
-          <p:cNvPr id="36" name="Connector 35"/>
-          <p:cNvCxnSpPr>
-            <a:stCxn id="16" idx="0"/>
-            <a:endCxn id="18" idx="2"/>
-          </p:cNvCxnSpPr>
-          <p:nvPr/>
-        </p:nvCxnSpPr>
-        <p:spPr>
-          <a:xfrm flipH="1" flipV="1">
-            <a:off x="4170033" y="2166910"/>
-            <a:ext cx="200984" cy="545636"/>
-          </a:xfrm>
-          <a:prstGeom prst="curvedConnector3">
-            <a:avLst/>
-          </a:prstGeom>
-          <a:ln w="25400">
-            <a:solidFill>
-              <a:srgbClr val="7DCE9F"/>
-            </a:solidFill>
-          </a:ln>
-        </p:spPr>
-        <p:style>
-          <a:lnRef idx="2">
-            <a:schemeClr val="accent1"/>
-          </a:lnRef>
-          <a:fillRef idx="0">
-            <a:schemeClr val="accent1"/>
-          </a:fillRef>
-          <a:effectRef idx="1">
-            <a:schemeClr val="accent1"/>
-          </a:effectRef>
-          <a:fontRef idx="minor">
-            <a:schemeClr val="tx1"/>
-          </a:fontRef>
-        </p:style>
-      </p:cxnSp>
-      <p:cxnSp>
-        <p:nvCxnSpPr>
-          <p:cNvPr id="37" name="Connector 36"/>
-          <p:cNvCxnSpPr>
-            <a:stCxn id="16" idx="1"/>
-            <a:endCxn id="19" idx="3"/>
-          </p:cNvCxnSpPr>
-          <p:nvPr/>
-        </p:nvCxnSpPr>
-        <p:spPr>
-          <a:xfrm flipV="1">
-            <a:off x="3821017" y="2110080"/>
-            <a:ext cx="2343525" cy="822466"/>
-          </a:xfrm>
-          <a:prstGeom prst="curvedConnector3">
-            <a:avLst/>
-          </a:prstGeom>
-          <a:ln w="25400">
-            <a:solidFill>
-              <a:srgbClr val="7DCE9F"/>
-            </a:solidFill>
-          </a:ln>
-        </p:spPr>
-        <p:style>
-          <a:lnRef idx="2">
-            <a:schemeClr val="accent1"/>
-          </a:lnRef>
-          <a:fillRef idx="0">
-            <a:schemeClr val="accent1"/>
-          </a:fillRef>
-          <a:effectRef idx="1">
-            <a:schemeClr val="accent1"/>
-          </a:effectRef>
-          <a:fontRef idx="minor">
-            <a:schemeClr val="tx1"/>
-          </a:fontRef>
-        </p:style>
-      </p:cxnSp>
-      <p:cxnSp>
-        <p:nvCxnSpPr>
-          <p:cNvPr id="38" name="Connector 37"/>
-          <p:cNvCxnSpPr>
-            <a:stCxn id="4" idx="1"/>
-            <a:endCxn id="20" idx="3"/>
-          </p:cNvCxnSpPr>
-          <p:nvPr/>
-        </p:nvCxnSpPr>
-        <p:spPr>
-          <a:xfrm flipV="1">
-            <a:off x="3822000" y="3427517"/>
-            <a:ext cx="2776416" cy="435664"/>
-          </a:xfrm>
-          <a:prstGeom prst="curvedConnector3">
-            <a:avLst/>
-          </a:prstGeom>
-          <a:ln w="25400">
-            <a:solidFill>
-              <a:srgbClr val="1ABC9C"/>
-            </a:solidFill>
-          </a:ln>
-        </p:spPr>
-        <p:style>
-          <a:lnRef idx="2">
-            <a:schemeClr val="accent1"/>
-          </a:lnRef>
-          <a:fillRef idx="0">
-            <a:schemeClr val="accent1"/>
-          </a:fillRef>
-          <a:effectRef idx="1">
-            <a:schemeClr val="accent1"/>
-          </a:effectRef>
-          <a:fontRef idx="minor">
-            <a:schemeClr val="tx1"/>
-          </a:fontRef>
-        </p:style>
-      </p:cxnSp>
-      <p:cxnSp>
-        <p:nvCxnSpPr>
-          <p:cNvPr id="39" name="Connector 38"/>
-          <p:cNvCxnSpPr>
-            <a:stCxn id="20" idx="1"/>
-            <a:endCxn id="21" idx="3"/>
-          </p:cNvCxnSpPr>
-          <p:nvPr/>
-        </p:nvCxnSpPr>
-        <p:spPr>
-          <a:xfrm flipV="1">
-            <a:off x="5498416" y="2619865"/>
-            <a:ext cx="1979729" cy="807652"/>
-          </a:xfrm>
-          <a:prstGeom prst="curvedConnector3">
-            <a:avLst/>
-          </a:prstGeom>
-          <a:ln w="25400">
-            <a:solidFill>
-              <a:srgbClr val="75D6C3"/>
-            </a:solidFill>
-          </a:ln>
-        </p:spPr>
-        <p:style>
-          <a:lnRef idx="2">
-            <a:schemeClr val="accent1"/>
-          </a:lnRef>
-          <a:fillRef idx="0">
-            <a:schemeClr val="accent1"/>
-          </a:fillRef>
-          <a:effectRef idx="1">
-            <a:schemeClr val="accent1"/>
-          </a:effectRef>
-          <a:fontRef idx="minor">
-            <a:schemeClr val="tx1"/>
-          </a:fontRef>
-        </p:style>
-      </p:cxnSp>
-      <p:cxnSp>
-        <p:nvCxnSpPr>
-          <p:cNvPr id="40" name="Connector 39"/>
-          <p:cNvCxnSpPr>
-            <a:stCxn id="20" idx="1"/>
-            <a:endCxn id="22" idx="3"/>
-          </p:cNvCxnSpPr>
-          <p:nvPr/>
-        </p:nvCxnSpPr>
-        <p:spPr>
-          <a:xfrm flipV="1">
-            <a:off x="5498416" y="3414479"/>
-            <a:ext cx="2721496" cy="13038"/>
-          </a:xfrm>
-          <a:prstGeom prst="curvedConnector3">
-            <a:avLst/>
-          </a:prstGeom>
-          <a:ln w="25400">
-            <a:solidFill>
-              <a:srgbClr val="75D6C3"/>
-            </a:solidFill>
-          </a:ln>
-        </p:spPr>
-        <p:style>
-          <a:lnRef idx="2">
-            <a:schemeClr val="accent1"/>
-          </a:lnRef>
-          <a:fillRef idx="0">
-            <a:schemeClr val="accent1"/>
-          </a:fillRef>
-          <a:effectRef idx="1">
-            <a:schemeClr val="accent1"/>
-          </a:effectRef>
-          <a:fontRef idx="minor">
-            <a:schemeClr val="tx1"/>
-          </a:fontRef>
-        </p:style>
-      </p:cxnSp>
+              <a:t>gitGraph
+    commit id: "initial"
+    commit id: "feat: add login"
+    branch develop
+    checkout develop
+    commit id: "fix: typo"
+    commit id: "feat: add API"
+    checkout main
+    merge develop id: "merge develop"
+    commit id: "release: v1.0"</a:t>
+            </a:r>
+          </a:p>
+        </p:txBody>
+      </p:sp>
     </p:spTree>
   </p:cSld>
   <p:clrMapOvr>
@@ -19805,7 +18112,7 @@
           <a:lstStyle/>
           <a:p>
             <a:r>
-              <a:t>13. タイムライン（Timeline）</a:t>
+              <a:t>12. マインドマップ（Mindmap）</a:t>
             </a:r>
           </a:p>
         </p:txBody>
@@ -19829,47 +18136,1676 @@
       </p:sp>
       <p:sp>
         <p:nvSpPr>
-          <p:cNvPr id="4" name="TextBox 3"/>
-          <p:cNvSpPr txBox="1"/>
-          <p:nvPr/>
-        </p:nvSpPr>
-        <p:spPr>
-          <a:xfrm>
-            <a:off x="457200" y="1600200"/>
-            <a:ext cx="8229600" cy="4525963"/>
+          <p:cNvPr id="4" name="Rectangle 3"/>
+          <p:cNvSpPr/>
+          <p:nvPr/>
+        </p:nvSpPr>
+        <p:spPr>
+          <a:xfrm>
+            <a:off x="3822000" y="3573181"/>
+            <a:ext cx="1500000" cy="580000"/>
+          </a:xfrm>
+          <a:prstGeom prst="ellipse">
+            <a:avLst/>
+          </a:prstGeom>
+          <a:solidFill>
+            <a:srgbClr val="4646B4"/>
+          </a:solidFill>
+          <a:ln>
+            <a:solidFill>
+              <a:srgbClr val="1E1E8C"/>
+            </a:solidFill>
+          </a:ln>
+        </p:spPr>
+        <p:style>
+          <a:lnRef idx="1">
+            <a:schemeClr val="accent1"/>
+          </a:lnRef>
+          <a:fillRef idx="3">
+            <a:schemeClr val="accent1"/>
+          </a:fillRef>
+          <a:effectRef idx="2">
+            <a:schemeClr val="accent1"/>
+          </a:effectRef>
+          <a:fontRef idx="minor">
+            <a:schemeClr val="lt1"/>
+          </a:fontRef>
+        </p:style>
+        <p:txBody>
+          <a:bodyPr rtlCol="0" anchor="ctr" wrap="square"/>
+          <a:lstStyle/>
+          <a:p>
+            <a:r>
+              <a:rPr sz="1600">
+                <a:solidFill>
+                  <a:srgbClr val="FFFFFF"/>
+                </a:solidFill>
+              </a:rPr>
+              <a:t>プログラミング言語</a:t>
+            </a:r>
+          </a:p>
+        </p:txBody>
+      </p:sp>
+      <p:sp>
+        <p:nvSpPr>
+          <p:cNvPr id="5" name="Rectangle 4"/>
+          <p:cNvSpPr/>
+          <p:nvPr/>
+        </p:nvSpPr>
+        <p:spPr>
+          <a:xfrm>
+            <a:off x="5270072" y="4264839"/>
+            <a:ext cx="1100000" cy="440000"/>
+          </a:xfrm>
+          <a:prstGeom prst="roundRect">
+            <a:avLst/>
+          </a:prstGeom>
+          <a:solidFill>
+            <a:srgbClr val="E74C3C"/>
+          </a:solidFill>
+          <a:ln>
+            <a:solidFill>
+              <a:srgbClr val="BF2414"/>
+            </a:solidFill>
+          </a:ln>
+        </p:spPr>
+        <p:style>
+          <a:lnRef idx="1">
+            <a:schemeClr val="accent1"/>
+          </a:lnRef>
+          <a:fillRef idx="3">
+            <a:schemeClr val="accent1"/>
+          </a:fillRef>
+          <a:effectRef idx="2">
+            <a:schemeClr val="accent1"/>
+          </a:effectRef>
+          <a:fontRef idx="minor">
+            <a:schemeClr val="lt1"/>
+          </a:fontRef>
+        </p:style>
+        <p:txBody>
+          <a:bodyPr rtlCol="0" anchor="ctr" wrap="square"/>
+          <a:lstStyle/>
+          <a:p>
+            <a:r>
+              <a:rPr sz="1300">
+                <a:solidFill>
+                  <a:srgbClr val="1E1E1E"/>
+                </a:solidFill>
+              </a:rPr>
+              <a:t>スクリプト系</a:t>
+            </a:r>
+          </a:p>
+        </p:txBody>
+      </p:sp>
+      <p:sp>
+        <p:nvSpPr>
+          <p:cNvPr id="6" name="Rectangle 5"/>
+          <p:cNvSpPr/>
+          <p:nvPr/>
+        </p:nvSpPr>
+        <p:spPr>
+          <a:xfrm>
+            <a:off x="7399912" y="4146883"/>
+            <a:ext cx="820000" cy="330000"/>
+          </a:xfrm>
+          <a:prstGeom prst="ellipse">
+            <a:avLst/>
+          </a:prstGeom>
+          <a:solidFill>
+            <a:srgbClr val="F0938A"/>
+          </a:solidFill>
+          <a:ln>
+            <a:solidFill>
+              <a:srgbClr val="C86B62"/>
+            </a:solidFill>
+          </a:ln>
+        </p:spPr>
+        <p:style>
+          <a:lnRef idx="1">
+            <a:schemeClr val="accent1"/>
+          </a:lnRef>
+          <a:fillRef idx="3">
+            <a:schemeClr val="accent1"/>
+          </a:fillRef>
+          <a:effectRef idx="2">
+            <a:schemeClr val="accent1"/>
+          </a:effectRef>
+          <a:fontRef idx="minor">
+            <a:schemeClr val="lt1"/>
+          </a:fontRef>
+        </p:style>
+        <p:txBody>
+          <a:bodyPr rtlCol="0" anchor="ctr" wrap="square"/>
+          <a:lstStyle/>
+          <a:p>
+            <a:r>
+              <a:rPr sz="1100">
+                <a:solidFill>
+                  <a:srgbClr val="1E1E1E"/>
+                </a:solidFill>
+              </a:rPr>
+              <a:t>Python</a:t>
+            </a:r>
+          </a:p>
+        </p:txBody>
+      </p:sp>
+      <p:sp>
+        <p:nvSpPr>
+          <p:cNvPr id="7" name="Rectangle 6"/>
+          <p:cNvSpPr/>
+          <p:nvPr/>
+        </p:nvSpPr>
+        <p:spPr>
+          <a:xfrm>
+            <a:off x="6658145" y="4941497"/>
+            <a:ext cx="820000" cy="330000"/>
+          </a:xfrm>
+          <a:prstGeom prst="ellipse">
+            <a:avLst/>
+          </a:prstGeom>
+          <a:solidFill>
+            <a:srgbClr val="F0938A"/>
+          </a:solidFill>
+          <a:ln>
+            <a:solidFill>
+              <a:srgbClr val="C86B62"/>
+            </a:solidFill>
+          </a:ln>
+        </p:spPr>
+        <p:style>
+          <a:lnRef idx="1">
+            <a:schemeClr val="accent1"/>
+          </a:lnRef>
+          <a:fillRef idx="3">
+            <a:schemeClr val="accent1"/>
+          </a:fillRef>
+          <a:effectRef idx="2">
+            <a:schemeClr val="accent1"/>
+          </a:effectRef>
+          <a:fontRef idx="minor">
+            <a:schemeClr val="lt1"/>
+          </a:fontRef>
+        </p:style>
+        <p:txBody>
+          <a:bodyPr rtlCol="0" anchor="ctr" wrap="square"/>
+          <a:lstStyle/>
+          <a:p>
+            <a:r>
+              <a:rPr sz="1100">
+                <a:solidFill>
+                  <a:srgbClr val="1E1E1E"/>
+                </a:solidFill>
+              </a:rPr>
+              <a:t>Ruby</a:t>
+            </a:r>
+          </a:p>
+        </p:txBody>
+      </p:sp>
+      <p:sp>
+        <p:nvSpPr>
+          <p:cNvPr id="8" name="Rectangle 7"/>
+          <p:cNvSpPr/>
+          <p:nvPr/>
+        </p:nvSpPr>
+        <p:spPr>
+          <a:xfrm>
+            <a:off x="5344542" y="5451282"/>
+            <a:ext cx="820000" cy="330000"/>
+          </a:xfrm>
+          <a:prstGeom prst="ellipse">
+            <a:avLst/>
+          </a:prstGeom>
+          <a:solidFill>
+            <a:srgbClr val="F0938A"/>
+          </a:solidFill>
+          <a:ln>
+            <a:solidFill>
+              <a:srgbClr val="C86B62"/>
+            </a:solidFill>
+          </a:ln>
+        </p:spPr>
+        <p:style>
+          <a:lnRef idx="1">
+            <a:schemeClr val="accent1"/>
+          </a:lnRef>
+          <a:fillRef idx="3">
+            <a:schemeClr val="accent1"/>
+          </a:fillRef>
+          <a:effectRef idx="2">
+            <a:schemeClr val="accent1"/>
+          </a:effectRef>
+          <a:fontRef idx="minor">
+            <a:schemeClr val="lt1"/>
+          </a:fontRef>
+        </p:style>
+        <p:txBody>
+          <a:bodyPr rtlCol="0" anchor="ctr" wrap="square"/>
+          <a:lstStyle/>
+          <a:p>
+            <a:r>
+              <a:rPr sz="1100">
+                <a:solidFill>
+                  <a:srgbClr val="1E1E1E"/>
+                </a:solidFill>
+              </a:rPr>
+              <a:t>JavaScript</a:t>
+            </a:r>
+          </a:p>
+        </p:txBody>
+      </p:sp>
+      <p:sp>
+        <p:nvSpPr>
+          <p:cNvPr id="9" name="Rectangle 8"/>
+          <p:cNvSpPr/>
+          <p:nvPr/>
+        </p:nvSpPr>
+        <p:spPr>
+          <a:xfrm>
+            <a:off x="3074805" y="4414704"/>
+            <a:ext cx="1100000" cy="440000"/>
           </a:xfrm>
           <a:prstGeom prst="rect">
             <a:avLst/>
           </a:prstGeom>
-          <a:noFill/>
-        </p:spPr>
-        <p:txBody>
-          <a:bodyPr wrap="square">
-            <a:spAutoFit/>
-          </a:bodyPr>
-          <a:lstStyle/>
-          <a:p>
-            <a:r>
-              <a:rPr sz="1000">
-                <a:latin typeface="Courier New"/>
+          <a:solidFill>
+            <a:srgbClr val="E67E22"/>
+          </a:solidFill>
+          <a:ln>
+            <a:solidFill>
+              <a:srgbClr val="BE5600"/>
+            </a:solidFill>
+          </a:ln>
+        </p:spPr>
+        <p:style>
+          <a:lnRef idx="1">
+            <a:schemeClr val="accent1"/>
+          </a:lnRef>
+          <a:fillRef idx="3">
+            <a:schemeClr val="accent1"/>
+          </a:fillRef>
+          <a:effectRef idx="2">
+            <a:schemeClr val="accent1"/>
+          </a:effectRef>
+          <a:fontRef idx="minor">
+            <a:schemeClr val="lt1"/>
+          </a:fontRef>
+        </p:style>
+        <p:txBody>
+          <a:bodyPr rtlCol="0" anchor="ctr" wrap="square"/>
+          <a:lstStyle/>
+          <a:p>
+            <a:r>
+              <a:rPr sz="1300">
+                <a:solidFill>
+                  <a:srgbClr val="1E1E1E"/>
+                </a:solidFill>
               </a:rPr>
-              <a:t>timeline
-    title ソフトウェア開発史
-    1960 : アセンブリ言語
-    1970 : C言語
-         : Unix
-    1980 : C++
-         : Macintosh
-    1990 : Java
-         : World Wide Web
-    2000 : Python普及
-         : Agile開発
-    2010 : クラウドコンピューティング
-    2020 : AI・機械学習</a:t>
-            </a:r>
-          </a:p>
-        </p:txBody>
-      </p:sp>
+              <a:t>静的型付け</a:t>
+            </a:r>
+          </a:p>
+        </p:txBody>
+      </p:sp>
+      <p:sp>
+        <p:nvSpPr>
+          <p:cNvPr id="10" name="Rectangle 9"/>
+          <p:cNvSpPr/>
+          <p:nvPr/>
+        </p:nvSpPr>
+        <p:spPr>
+          <a:xfrm>
+            <a:off x="3760033" y="5559452"/>
+            <a:ext cx="820000" cy="330000"/>
+          </a:xfrm>
+          <a:prstGeom prst="hexagon">
+            <a:avLst/>
+          </a:prstGeom>
+          <a:solidFill>
+            <a:srgbClr val="F0B17A"/>
+          </a:solidFill>
+          <a:ln>
+            <a:solidFill>
+              <a:srgbClr val="C88952"/>
+            </a:solidFill>
+          </a:ln>
+        </p:spPr>
+        <p:style>
+          <a:lnRef idx="1">
+            <a:schemeClr val="accent1"/>
+          </a:lnRef>
+          <a:fillRef idx="3">
+            <a:schemeClr val="accent1"/>
+          </a:fillRef>
+          <a:effectRef idx="2">
+            <a:schemeClr val="accent1"/>
+          </a:effectRef>
+          <a:fontRef idx="minor">
+            <a:schemeClr val="lt1"/>
+          </a:fontRef>
+        </p:style>
+        <p:txBody>
+          <a:bodyPr rtlCol="0" anchor="ctr" wrap="square"/>
+          <a:lstStyle/>
+          <a:p>
+            <a:r>
+              <a:rPr sz="1100">
+                <a:solidFill>
+                  <a:srgbClr val="1E1E1E"/>
+                </a:solidFill>
+              </a:rPr>
+              <a:t>Rust</a:t>
+            </a:r>
+          </a:p>
+        </p:txBody>
+      </p:sp>
+      <p:sp>
+        <p:nvSpPr>
+          <p:cNvPr id="11" name="Rectangle 10"/>
+          <p:cNvSpPr/>
+          <p:nvPr/>
+        </p:nvSpPr>
+        <p:spPr>
+          <a:xfrm>
+            <a:off x="2267609" y="5241228"/>
+            <a:ext cx="820000" cy="330000"/>
+          </a:xfrm>
+          <a:prstGeom prst="hexagon">
+            <a:avLst/>
+          </a:prstGeom>
+          <a:solidFill>
+            <a:srgbClr val="F0B17A"/>
+          </a:solidFill>
+          <a:ln>
+            <a:solidFill>
+              <a:srgbClr val="C88952"/>
+            </a:solidFill>
+          </a:ln>
+        </p:spPr>
+        <p:style>
+          <a:lnRef idx="1">
+            <a:schemeClr val="accent1"/>
+          </a:lnRef>
+          <a:fillRef idx="3">
+            <a:schemeClr val="accent1"/>
+          </a:fillRef>
+          <a:effectRef idx="2">
+            <a:schemeClr val="accent1"/>
+          </a:effectRef>
+          <a:fontRef idx="minor">
+            <a:schemeClr val="lt1"/>
+          </a:fontRef>
+        </p:style>
+        <p:txBody>
+          <a:bodyPr rtlCol="0" anchor="ctr" wrap="square"/>
+          <a:lstStyle/>
+          <a:p>
+            <a:r>
+              <a:rPr sz="1100">
+                <a:solidFill>
+                  <a:srgbClr val="1E1E1E"/>
+                </a:solidFill>
+              </a:rPr>
+              <a:t>Go</a:t>
+            </a:r>
+          </a:p>
+        </p:txBody>
+      </p:sp>
+      <p:sp>
+        <p:nvSpPr>
+          <p:cNvPr id="12" name="Rectangle 11"/>
+          <p:cNvSpPr/>
+          <p:nvPr/>
+        </p:nvSpPr>
+        <p:spPr>
+          <a:xfrm>
+            <a:off x="1209168" y="4569509"/>
+            <a:ext cx="820000" cy="330000"/>
+          </a:xfrm>
+          <a:prstGeom prst="roundRect">
+            <a:avLst/>
+          </a:prstGeom>
+          <a:solidFill>
+            <a:srgbClr val="F0B17A"/>
+          </a:solidFill>
+          <a:ln>
+            <a:solidFill>
+              <a:srgbClr val="C88952"/>
+            </a:solidFill>
+          </a:ln>
+        </p:spPr>
+        <p:style>
+          <a:lnRef idx="1">
+            <a:schemeClr val="accent1"/>
+          </a:lnRef>
+          <a:fillRef idx="3">
+            <a:schemeClr val="accent1"/>
+          </a:fillRef>
+          <a:effectRef idx="2">
+            <a:schemeClr val="accent1"/>
+          </a:effectRef>
+          <a:fontRef idx="minor">
+            <a:schemeClr val="lt1"/>
+          </a:fontRef>
+        </p:style>
+        <p:txBody>
+          <a:bodyPr rtlCol="0" anchor="ctr" wrap="square"/>
+          <a:lstStyle/>
+          <a:p>
+            <a:r>
+              <a:rPr sz="1100">
+                <a:solidFill>
+                  <a:srgbClr val="1E1E1E"/>
+                </a:solidFill>
+              </a:rPr>
+              <a:t>Java</a:t>
+            </a:r>
+          </a:p>
+        </p:txBody>
+      </p:sp>
+      <p:sp>
+        <p:nvSpPr>
+          <p:cNvPr id="13" name="Rectangle 12"/>
+          <p:cNvSpPr/>
+          <p:nvPr/>
+        </p:nvSpPr>
+        <p:spPr>
+          <a:xfrm>
+            <a:off x="2403044" y="3418830"/>
+            <a:ext cx="1100000" cy="440000"/>
+          </a:xfrm>
+          <a:prstGeom prst="roundRect">
+            <a:avLst/>
+          </a:prstGeom>
+          <a:solidFill>
+            <a:srgbClr val="F1C40F"/>
+          </a:solidFill>
+          <a:ln>
+            <a:solidFill>
+              <a:srgbClr val="C99C00"/>
+            </a:solidFill>
+          </a:ln>
+        </p:spPr>
+        <p:style>
+          <a:lnRef idx="1">
+            <a:schemeClr val="accent1"/>
+          </a:lnRef>
+          <a:fillRef idx="3">
+            <a:schemeClr val="accent1"/>
+          </a:fillRef>
+          <a:effectRef idx="2">
+            <a:schemeClr val="accent1"/>
+          </a:effectRef>
+          <a:fontRef idx="minor">
+            <a:schemeClr val="lt1"/>
+          </a:fontRef>
+        </p:style>
+        <p:txBody>
+          <a:bodyPr rtlCol="0" anchor="ctr" wrap="square"/>
+          <a:lstStyle/>
+          <a:p>
+            <a:r>
+              <a:rPr sz="1300">
+                <a:solidFill>
+                  <a:srgbClr val="1E1E1E"/>
+                </a:solidFill>
+              </a:rPr>
+              <a:t>関数型</a:t>
+            </a:r>
+          </a:p>
+        </p:txBody>
+      </p:sp>
+      <p:sp>
+        <p:nvSpPr>
+          <p:cNvPr id="14" name="Rectangle 13"/>
+          <p:cNvSpPr/>
+          <p:nvPr/>
+        </p:nvSpPr>
+        <p:spPr>
+          <a:xfrm>
+            <a:off x="827184" y="3698181"/>
+            <a:ext cx="820000" cy="330000"/>
+          </a:xfrm>
+          <a:prstGeom prst="irregularSeal1">
+            <a:avLst/>
+          </a:prstGeom>
+          <a:solidFill>
+            <a:srgbClr val="F6DB6F"/>
+          </a:solidFill>
+          <a:ln>
+            <a:solidFill>
+              <a:srgbClr val="CEB347"/>
+            </a:solidFill>
+          </a:ln>
+        </p:spPr>
+        <p:style>
+          <a:lnRef idx="1">
+            <a:schemeClr val="accent1"/>
+          </a:lnRef>
+          <a:fillRef idx="3">
+            <a:schemeClr val="accent1"/>
+          </a:fillRef>
+          <a:effectRef idx="2">
+            <a:schemeClr val="accent1"/>
+          </a:effectRef>
+          <a:fontRef idx="minor">
+            <a:schemeClr val="lt1"/>
+          </a:fontRef>
+        </p:style>
+        <p:txBody>
+          <a:bodyPr rtlCol="0" anchor="ctr" wrap="square"/>
+          <a:lstStyle/>
+          <a:p>
+            <a:r>
+              <a:rPr sz="1100">
+                <a:solidFill>
+                  <a:srgbClr val="1E1E1E"/>
+                </a:solidFill>
+              </a:rPr>
+              <a:t>Haskell</a:t>
+            </a:r>
+          </a:p>
+        </p:txBody>
+      </p:sp>
+      <p:sp>
+        <p:nvSpPr>
+          <p:cNvPr id="15" name="Rectangle 14"/>
+          <p:cNvSpPr/>
+          <p:nvPr/>
+        </p:nvSpPr>
+        <p:spPr>
+          <a:xfrm>
+            <a:off x="1209168" y="2826853"/>
+            <a:ext cx="820000" cy="330000"/>
+          </a:xfrm>
+          <a:prstGeom prst="irregularSeal1">
+            <a:avLst/>
+          </a:prstGeom>
+          <a:solidFill>
+            <a:srgbClr val="F6DB6F"/>
+          </a:solidFill>
+          <a:ln>
+            <a:solidFill>
+              <a:srgbClr val="CEB347"/>
+            </a:solidFill>
+          </a:ln>
+        </p:spPr>
+        <p:style>
+          <a:lnRef idx="1">
+            <a:schemeClr val="accent1"/>
+          </a:lnRef>
+          <a:fillRef idx="3">
+            <a:schemeClr val="accent1"/>
+          </a:fillRef>
+          <a:effectRef idx="2">
+            <a:schemeClr val="accent1"/>
+          </a:effectRef>
+          <a:fontRef idx="minor">
+            <a:schemeClr val="lt1"/>
+          </a:fontRef>
+        </p:style>
+        <p:txBody>
+          <a:bodyPr rtlCol="0" anchor="ctr" wrap="square"/>
+          <a:lstStyle/>
+          <a:p>
+            <a:r>
+              <a:rPr sz="1100">
+                <a:solidFill>
+                  <a:srgbClr val="1E1E1E"/>
+                </a:solidFill>
+              </a:rPr>
+              <a:t>Erlang</a:t>
+            </a:r>
+          </a:p>
+        </p:txBody>
+      </p:sp>
+      <p:sp>
+        <p:nvSpPr>
+          <p:cNvPr id="16" name="Rectangle 15"/>
+          <p:cNvSpPr/>
+          <p:nvPr/>
+        </p:nvSpPr>
+        <p:spPr>
+          <a:xfrm>
+            <a:off x="3821017" y="2712546"/>
+            <a:ext cx="1100000" cy="440000"/>
+          </a:xfrm>
+          <a:prstGeom prst="roundRect">
+            <a:avLst/>
+          </a:prstGeom>
+          <a:solidFill>
+            <a:srgbClr val="27AE60"/>
+          </a:solidFill>
+          <a:ln>
+            <a:solidFill>
+              <a:srgbClr val="008638"/>
+            </a:solidFill>
+          </a:ln>
+        </p:spPr>
+        <p:style>
+          <a:lnRef idx="1">
+            <a:schemeClr val="accent1"/>
+          </a:lnRef>
+          <a:fillRef idx="3">
+            <a:schemeClr val="accent1"/>
+          </a:fillRef>
+          <a:effectRef idx="2">
+            <a:schemeClr val="accent1"/>
+          </a:effectRef>
+          <a:fontRef idx="minor">
+            <a:schemeClr val="lt1"/>
+          </a:fontRef>
+        </p:style>
+        <p:txBody>
+          <a:bodyPr rtlCol="0" anchor="ctr" wrap="square"/>
+          <a:lstStyle/>
+          <a:p>
+            <a:r>
+              <a:rPr sz="1300">
+                <a:solidFill>
+                  <a:srgbClr val="1E1E1E"/>
+                </a:solidFill>
+              </a:rPr>
+              <a:t>Web</a:t>
+            </a:r>
+          </a:p>
+        </p:txBody>
+      </p:sp>
+      <p:sp>
+        <p:nvSpPr>
+          <p:cNvPr id="17" name="Rectangle 16"/>
+          <p:cNvSpPr/>
+          <p:nvPr/>
+        </p:nvSpPr>
+        <p:spPr>
+          <a:xfrm>
+            <a:off x="2267609" y="2155134"/>
+            <a:ext cx="820000" cy="330000"/>
+          </a:xfrm>
+          <a:prstGeom prst="rect">
+            <a:avLst/>
+          </a:prstGeom>
+          <a:solidFill>
+            <a:srgbClr val="7DCE9F"/>
+          </a:solidFill>
+          <a:ln>
+            <a:solidFill>
+              <a:srgbClr val="55A677"/>
+            </a:solidFill>
+          </a:ln>
+        </p:spPr>
+        <p:style>
+          <a:lnRef idx="1">
+            <a:schemeClr val="accent1"/>
+          </a:lnRef>
+          <a:fillRef idx="3">
+            <a:schemeClr val="accent1"/>
+          </a:fillRef>
+          <a:effectRef idx="2">
+            <a:schemeClr val="accent1"/>
+          </a:effectRef>
+          <a:fontRef idx="minor">
+            <a:schemeClr val="lt1"/>
+          </a:fontRef>
+        </p:style>
+        <p:txBody>
+          <a:bodyPr rtlCol="0" anchor="ctr" wrap="square"/>
+          <a:lstStyle/>
+          <a:p>
+            <a:r>
+              <a:rPr sz="1100">
+                <a:solidFill>
+                  <a:srgbClr val="1E1E1E"/>
+                </a:solidFill>
+              </a:rPr>
+              <a:t>HTML</a:t>
+            </a:r>
+          </a:p>
+        </p:txBody>
+      </p:sp>
+      <p:sp>
+        <p:nvSpPr>
+          <p:cNvPr id="18" name="Rectangle 17"/>
+          <p:cNvSpPr/>
+          <p:nvPr/>
+        </p:nvSpPr>
+        <p:spPr>
+          <a:xfrm>
+            <a:off x="3760033" y="1836910"/>
+            <a:ext cx="820000" cy="330000"/>
+          </a:xfrm>
+          <a:prstGeom prst="rect">
+            <a:avLst/>
+          </a:prstGeom>
+          <a:solidFill>
+            <a:srgbClr val="7DCE9F"/>
+          </a:solidFill>
+          <a:ln>
+            <a:solidFill>
+              <a:srgbClr val="55A677"/>
+            </a:solidFill>
+          </a:ln>
+        </p:spPr>
+        <p:style>
+          <a:lnRef idx="1">
+            <a:schemeClr val="accent1"/>
+          </a:lnRef>
+          <a:fillRef idx="3">
+            <a:schemeClr val="accent1"/>
+          </a:fillRef>
+          <a:effectRef idx="2">
+            <a:schemeClr val="accent1"/>
+          </a:effectRef>
+          <a:fontRef idx="minor">
+            <a:schemeClr val="lt1"/>
+          </a:fontRef>
+        </p:style>
+        <p:txBody>
+          <a:bodyPr rtlCol="0" anchor="ctr" wrap="square"/>
+          <a:lstStyle/>
+          <a:p>
+            <a:r>
+              <a:rPr sz="1100">
+                <a:solidFill>
+                  <a:srgbClr val="1E1E1E"/>
+                </a:solidFill>
+              </a:rPr>
+              <a:t>CSS</a:t>
+            </a:r>
+          </a:p>
+        </p:txBody>
+      </p:sp>
+      <p:sp>
+        <p:nvSpPr>
+          <p:cNvPr id="19" name="Rectangle 18"/>
+          <p:cNvSpPr/>
+          <p:nvPr/>
+        </p:nvSpPr>
+        <p:spPr>
+          <a:xfrm>
+            <a:off x="5344542" y="1945080"/>
+            <a:ext cx="820000" cy="330000"/>
+          </a:xfrm>
+          <a:prstGeom prst="roundRect">
+            <a:avLst/>
+          </a:prstGeom>
+          <a:solidFill>
+            <a:srgbClr val="7DCE9F"/>
+          </a:solidFill>
+          <a:ln>
+            <a:solidFill>
+              <a:srgbClr val="55A677"/>
+            </a:solidFill>
+          </a:ln>
+        </p:spPr>
+        <p:style>
+          <a:lnRef idx="1">
+            <a:schemeClr val="accent1"/>
+          </a:lnRef>
+          <a:fillRef idx="3">
+            <a:schemeClr val="accent1"/>
+          </a:fillRef>
+          <a:effectRef idx="2">
+            <a:schemeClr val="accent1"/>
+          </a:effectRef>
+          <a:fontRef idx="minor">
+            <a:schemeClr val="lt1"/>
+          </a:fontRef>
+        </p:style>
+        <p:txBody>
+          <a:bodyPr rtlCol="0" anchor="ctr" wrap="square"/>
+          <a:lstStyle/>
+          <a:p>
+            <a:r>
+              <a:rPr sz="1100">
+                <a:solidFill>
+                  <a:srgbClr val="1E1E1E"/>
+                </a:solidFill>
+              </a:rPr>
+              <a:t>TypeScript</a:t>
+            </a:r>
+          </a:p>
+        </p:txBody>
+      </p:sp>
+      <p:sp>
+        <p:nvSpPr>
+          <p:cNvPr id="20" name="Rectangle 19"/>
+          <p:cNvSpPr/>
+          <p:nvPr/>
+        </p:nvSpPr>
+        <p:spPr>
+          <a:xfrm>
+            <a:off x="5498416" y="3207517"/>
+            <a:ext cx="1100000" cy="440000"/>
+          </a:xfrm>
+          <a:prstGeom prst="cloud">
+            <a:avLst/>
+          </a:prstGeom>
+          <a:solidFill>
+            <a:srgbClr val="1ABC9C"/>
+          </a:solidFill>
+          <a:ln>
+            <a:solidFill>
+              <a:srgbClr val="009474"/>
+            </a:solidFill>
+          </a:ln>
+        </p:spPr>
+        <p:style>
+          <a:lnRef idx="1">
+            <a:schemeClr val="accent1"/>
+          </a:lnRef>
+          <a:fillRef idx="3">
+            <a:schemeClr val="accent1"/>
+          </a:fillRef>
+          <a:effectRef idx="2">
+            <a:schemeClr val="accent1"/>
+          </a:effectRef>
+          <a:fontRef idx="minor">
+            <a:schemeClr val="lt1"/>
+          </a:fontRef>
+        </p:style>
+        <p:txBody>
+          <a:bodyPr rtlCol="0" anchor="ctr" wrap="square"/>
+          <a:lstStyle/>
+          <a:p>
+            <a:r>
+              <a:rPr sz="1300">
+                <a:solidFill>
+                  <a:srgbClr val="1E1E1E"/>
+                </a:solidFill>
+              </a:rPr>
+              <a:t>クエリ言語</a:t>
+            </a:r>
+          </a:p>
+        </p:txBody>
+      </p:sp>
+      <p:sp>
+        <p:nvSpPr>
+          <p:cNvPr id="21" name="Rectangle 20"/>
+          <p:cNvSpPr/>
+          <p:nvPr/>
+        </p:nvSpPr>
+        <p:spPr>
+          <a:xfrm>
+            <a:off x="6658145" y="2454865"/>
+            <a:ext cx="820000" cy="330000"/>
+          </a:xfrm>
+          <a:prstGeom prst="rect">
+            <a:avLst/>
+          </a:prstGeom>
+          <a:solidFill>
+            <a:srgbClr val="75D6C3"/>
+          </a:solidFill>
+          <a:ln>
+            <a:solidFill>
+              <a:srgbClr val="4DAE9B"/>
+            </a:solidFill>
+          </a:ln>
+        </p:spPr>
+        <p:style>
+          <a:lnRef idx="1">
+            <a:schemeClr val="accent1"/>
+          </a:lnRef>
+          <a:fillRef idx="3">
+            <a:schemeClr val="accent1"/>
+          </a:fillRef>
+          <a:effectRef idx="2">
+            <a:schemeClr val="accent1"/>
+          </a:effectRef>
+          <a:fontRef idx="minor">
+            <a:schemeClr val="lt1"/>
+          </a:fontRef>
+        </p:style>
+        <p:txBody>
+          <a:bodyPr rtlCol="0" anchor="ctr" wrap="square"/>
+          <a:lstStyle/>
+          <a:p>
+            <a:r>
+              <a:rPr sz="1100">
+                <a:solidFill>
+                  <a:srgbClr val="1E1E1E"/>
+                </a:solidFill>
+              </a:rPr>
+              <a:t>SQL</a:t>
+            </a:r>
+          </a:p>
+        </p:txBody>
+      </p:sp>
+      <p:sp>
+        <p:nvSpPr>
+          <p:cNvPr id="22" name="Rectangle 21"/>
+          <p:cNvSpPr/>
+          <p:nvPr/>
+        </p:nvSpPr>
+        <p:spPr>
+          <a:xfrm>
+            <a:off x="7399912" y="3249479"/>
+            <a:ext cx="820000" cy="330000"/>
+          </a:xfrm>
+          <a:prstGeom prst="rect">
+            <a:avLst/>
+          </a:prstGeom>
+          <a:solidFill>
+            <a:srgbClr val="75D6C3"/>
+          </a:solidFill>
+          <a:ln>
+            <a:solidFill>
+              <a:srgbClr val="4DAE9B"/>
+            </a:solidFill>
+          </a:ln>
+        </p:spPr>
+        <p:style>
+          <a:lnRef idx="1">
+            <a:schemeClr val="accent1"/>
+          </a:lnRef>
+          <a:fillRef idx="3">
+            <a:schemeClr val="accent1"/>
+          </a:fillRef>
+          <a:effectRef idx="2">
+            <a:schemeClr val="accent1"/>
+          </a:effectRef>
+          <a:fontRef idx="minor">
+            <a:schemeClr val="lt1"/>
+          </a:fontRef>
+        </p:style>
+        <p:txBody>
+          <a:bodyPr rtlCol="0" anchor="ctr" wrap="square"/>
+          <a:lstStyle/>
+          <a:p>
+            <a:r>
+              <a:rPr sz="1100">
+                <a:solidFill>
+                  <a:srgbClr val="1E1E1E"/>
+                </a:solidFill>
+              </a:rPr>
+              <a:t>GraphQL</a:t>
+            </a:r>
+          </a:p>
+        </p:txBody>
+      </p:sp>
+      <p:cxnSp>
+        <p:nvCxnSpPr>
+          <p:cNvPr id="23" name="Connector 22"/>
+          <p:cNvCxnSpPr>
+            <a:stCxn id="4" idx="1"/>
+            <a:endCxn id="5" idx="3"/>
+          </p:cNvCxnSpPr>
+          <p:nvPr/>
+        </p:nvCxnSpPr>
+        <p:spPr>
+          <a:xfrm>
+            <a:off x="3822000" y="3863181"/>
+            <a:ext cx="2548072" cy="621658"/>
+          </a:xfrm>
+          <a:prstGeom prst="curvedConnector3">
+            <a:avLst/>
+          </a:prstGeom>
+          <a:ln w="25400">
+            <a:solidFill>
+              <a:srgbClr val="E74C3C"/>
+            </a:solidFill>
+          </a:ln>
+        </p:spPr>
+        <p:style>
+          <a:lnRef idx="2">
+            <a:schemeClr val="accent1"/>
+          </a:lnRef>
+          <a:fillRef idx="0">
+            <a:schemeClr val="accent1"/>
+          </a:fillRef>
+          <a:effectRef idx="1">
+            <a:schemeClr val="accent1"/>
+          </a:effectRef>
+          <a:fontRef idx="minor">
+            <a:schemeClr val="tx1"/>
+          </a:fontRef>
+        </p:style>
+      </p:cxnSp>
+      <p:cxnSp>
+        <p:nvCxnSpPr>
+          <p:cNvPr id="24" name="Connector 23"/>
+          <p:cNvCxnSpPr>
+            <a:stCxn id="5" idx="1"/>
+            <a:endCxn id="6" idx="3"/>
+          </p:cNvCxnSpPr>
+          <p:nvPr/>
+        </p:nvCxnSpPr>
+        <p:spPr>
+          <a:xfrm flipV="1">
+            <a:off x="5270072" y="4311883"/>
+            <a:ext cx="2949840" cy="172956"/>
+          </a:xfrm>
+          <a:prstGeom prst="curvedConnector3">
+            <a:avLst/>
+          </a:prstGeom>
+          <a:ln w="25400">
+            <a:solidFill>
+              <a:srgbClr val="F0938A"/>
+            </a:solidFill>
+          </a:ln>
+        </p:spPr>
+        <p:style>
+          <a:lnRef idx="2">
+            <a:schemeClr val="accent1"/>
+          </a:lnRef>
+          <a:fillRef idx="0">
+            <a:schemeClr val="accent1"/>
+          </a:fillRef>
+          <a:effectRef idx="1">
+            <a:schemeClr val="accent1"/>
+          </a:effectRef>
+          <a:fontRef idx="minor">
+            <a:schemeClr val="tx1"/>
+          </a:fontRef>
+        </p:style>
+      </p:cxnSp>
+      <p:cxnSp>
+        <p:nvCxnSpPr>
+          <p:cNvPr id="25" name="Connector 24"/>
+          <p:cNvCxnSpPr>
+            <a:stCxn id="5" idx="1"/>
+            <a:endCxn id="7" idx="3"/>
+          </p:cNvCxnSpPr>
+          <p:nvPr/>
+        </p:nvCxnSpPr>
+        <p:spPr>
+          <a:xfrm>
+            <a:off x="5270072" y="4484839"/>
+            <a:ext cx="2208073" cy="621658"/>
+          </a:xfrm>
+          <a:prstGeom prst="curvedConnector3">
+            <a:avLst/>
+          </a:prstGeom>
+          <a:ln w="25400">
+            <a:solidFill>
+              <a:srgbClr val="F0938A"/>
+            </a:solidFill>
+          </a:ln>
+        </p:spPr>
+        <p:style>
+          <a:lnRef idx="2">
+            <a:schemeClr val="accent1"/>
+          </a:lnRef>
+          <a:fillRef idx="0">
+            <a:schemeClr val="accent1"/>
+          </a:fillRef>
+          <a:effectRef idx="1">
+            <a:schemeClr val="accent1"/>
+          </a:effectRef>
+          <a:fontRef idx="minor">
+            <a:schemeClr val="tx1"/>
+          </a:fontRef>
+        </p:style>
+      </p:cxnSp>
+      <p:cxnSp>
+        <p:nvCxnSpPr>
+          <p:cNvPr id="26" name="Connector 25"/>
+          <p:cNvCxnSpPr>
+            <a:stCxn id="5" idx="2"/>
+            <a:endCxn id="8" idx="0"/>
+          </p:cNvCxnSpPr>
+          <p:nvPr/>
+        </p:nvCxnSpPr>
+        <p:spPr>
+          <a:xfrm flipH="1">
+            <a:off x="5754542" y="4704839"/>
+            <a:ext cx="65530" cy="746443"/>
+          </a:xfrm>
+          <a:prstGeom prst="curvedConnector3">
+            <a:avLst/>
+          </a:prstGeom>
+          <a:ln w="25400">
+            <a:solidFill>
+              <a:srgbClr val="F0938A"/>
+            </a:solidFill>
+          </a:ln>
+        </p:spPr>
+        <p:style>
+          <a:lnRef idx="2">
+            <a:schemeClr val="accent1"/>
+          </a:lnRef>
+          <a:fillRef idx="0">
+            <a:schemeClr val="accent1"/>
+          </a:fillRef>
+          <a:effectRef idx="1">
+            <a:schemeClr val="accent1"/>
+          </a:effectRef>
+          <a:fontRef idx="minor">
+            <a:schemeClr val="tx1"/>
+          </a:fontRef>
+        </p:style>
+      </p:cxnSp>
+      <p:cxnSp>
+        <p:nvCxnSpPr>
+          <p:cNvPr id="27" name="Connector 26"/>
+          <p:cNvCxnSpPr>
+            <a:stCxn id="4" idx="3"/>
+            <a:endCxn id="9" idx="1"/>
+          </p:cNvCxnSpPr>
+          <p:nvPr/>
+        </p:nvCxnSpPr>
+        <p:spPr>
+          <a:xfrm flipH="1">
+            <a:off x="3074805" y="3863181"/>
+            <a:ext cx="2247195" cy="771523"/>
+          </a:xfrm>
+          <a:prstGeom prst="curvedConnector3">
+            <a:avLst/>
+          </a:prstGeom>
+          <a:ln w="25400">
+            <a:solidFill>
+              <a:srgbClr val="E67E22"/>
+            </a:solidFill>
+          </a:ln>
+        </p:spPr>
+        <p:style>
+          <a:lnRef idx="2">
+            <a:schemeClr val="accent1"/>
+          </a:lnRef>
+          <a:fillRef idx="0">
+            <a:schemeClr val="accent1"/>
+          </a:fillRef>
+          <a:effectRef idx="1">
+            <a:schemeClr val="accent1"/>
+          </a:effectRef>
+          <a:fontRef idx="minor">
+            <a:schemeClr val="tx1"/>
+          </a:fontRef>
+        </p:style>
+      </p:cxnSp>
+      <p:cxnSp>
+        <p:nvCxnSpPr>
+          <p:cNvPr id="28" name="Connector 27"/>
+          <p:cNvCxnSpPr>
+            <a:stCxn id="9" idx="2"/>
+            <a:endCxn id="10" idx="0"/>
+          </p:cNvCxnSpPr>
+          <p:nvPr/>
+        </p:nvCxnSpPr>
+        <p:spPr>
+          <a:xfrm>
+            <a:off x="3624805" y="4854704"/>
+            <a:ext cx="545228" cy="704748"/>
+          </a:xfrm>
+          <a:prstGeom prst="curvedConnector3">
+            <a:avLst/>
+          </a:prstGeom>
+          <a:ln w="25400">
+            <a:solidFill>
+              <a:srgbClr val="F0B17A"/>
+            </a:solidFill>
+          </a:ln>
+        </p:spPr>
+        <p:style>
+          <a:lnRef idx="2">
+            <a:schemeClr val="accent1"/>
+          </a:lnRef>
+          <a:fillRef idx="0">
+            <a:schemeClr val="accent1"/>
+          </a:fillRef>
+          <a:effectRef idx="1">
+            <a:schemeClr val="accent1"/>
+          </a:effectRef>
+          <a:fontRef idx="minor">
+            <a:schemeClr val="tx1"/>
+          </a:fontRef>
+        </p:style>
+      </p:cxnSp>
+      <p:cxnSp>
+        <p:nvCxnSpPr>
+          <p:cNvPr id="29" name="Connector 28"/>
+          <p:cNvCxnSpPr>
+            <a:stCxn id="9" idx="3"/>
+            <a:endCxn id="11" idx="1"/>
+          </p:cNvCxnSpPr>
+          <p:nvPr/>
+        </p:nvCxnSpPr>
+        <p:spPr>
+          <a:xfrm flipH="1">
+            <a:off x="2267609" y="4634704"/>
+            <a:ext cx="1907196" cy="771524"/>
+          </a:xfrm>
+          <a:prstGeom prst="curvedConnector3">
+            <a:avLst/>
+          </a:prstGeom>
+          <a:ln w="25400">
+            <a:solidFill>
+              <a:srgbClr val="F0B17A"/>
+            </a:solidFill>
+          </a:ln>
+        </p:spPr>
+        <p:style>
+          <a:lnRef idx="2">
+            <a:schemeClr val="accent1"/>
+          </a:lnRef>
+          <a:fillRef idx="0">
+            <a:schemeClr val="accent1"/>
+          </a:fillRef>
+          <a:effectRef idx="1">
+            <a:schemeClr val="accent1"/>
+          </a:effectRef>
+          <a:fontRef idx="minor">
+            <a:schemeClr val="tx1"/>
+          </a:fontRef>
+        </p:style>
+      </p:cxnSp>
+      <p:cxnSp>
+        <p:nvCxnSpPr>
+          <p:cNvPr id="30" name="Connector 29"/>
+          <p:cNvCxnSpPr>
+            <a:stCxn id="9" idx="3"/>
+            <a:endCxn id="12" idx="1"/>
+          </p:cNvCxnSpPr>
+          <p:nvPr/>
+        </p:nvCxnSpPr>
+        <p:spPr>
+          <a:xfrm flipH="1">
+            <a:off x="1209168" y="4634704"/>
+            <a:ext cx="2965637" cy="99805"/>
+          </a:xfrm>
+          <a:prstGeom prst="curvedConnector3">
+            <a:avLst/>
+          </a:prstGeom>
+          <a:ln w="25400">
+            <a:solidFill>
+              <a:srgbClr val="F0B17A"/>
+            </a:solidFill>
+          </a:ln>
+        </p:spPr>
+        <p:style>
+          <a:lnRef idx="2">
+            <a:schemeClr val="accent1"/>
+          </a:lnRef>
+          <a:fillRef idx="0">
+            <a:schemeClr val="accent1"/>
+          </a:fillRef>
+          <a:effectRef idx="1">
+            <a:schemeClr val="accent1"/>
+          </a:effectRef>
+          <a:fontRef idx="minor">
+            <a:schemeClr val="tx1"/>
+          </a:fontRef>
+        </p:style>
+      </p:cxnSp>
+      <p:cxnSp>
+        <p:nvCxnSpPr>
+          <p:cNvPr id="31" name="Connector 30"/>
+          <p:cNvCxnSpPr>
+            <a:stCxn id="4" idx="3"/>
+            <a:endCxn id="13" idx="1"/>
+          </p:cNvCxnSpPr>
+          <p:nvPr/>
+        </p:nvCxnSpPr>
+        <p:spPr>
+          <a:xfrm flipH="1" flipV="1">
+            <a:off x="2403044" y="3638830"/>
+            <a:ext cx="2918956" cy="224351"/>
+          </a:xfrm>
+          <a:prstGeom prst="curvedConnector3">
+            <a:avLst/>
+          </a:prstGeom>
+          <a:ln w="25400">
+            <a:solidFill>
+              <a:srgbClr val="F1C40F"/>
+            </a:solidFill>
+          </a:ln>
+        </p:spPr>
+        <p:style>
+          <a:lnRef idx="2">
+            <a:schemeClr val="accent1"/>
+          </a:lnRef>
+          <a:fillRef idx="0">
+            <a:schemeClr val="accent1"/>
+          </a:fillRef>
+          <a:effectRef idx="1">
+            <a:schemeClr val="accent1"/>
+          </a:effectRef>
+          <a:fontRef idx="minor">
+            <a:schemeClr val="tx1"/>
+          </a:fontRef>
+        </p:style>
+      </p:cxnSp>
+      <p:cxnSp>
+        <p:nvCxnSpPr>
+          <p:cNvPr id="32" name="Connector 31"/>
+          <p:cNvCxnSpPr>
+            <a:stCxn id="13" idx="3"/>
+            <a:endCxn id="14" idx="1"/>
+          </p:cNvCxnSpPr>
+          <p:nvPr/>
+        </p:nvCxnSpPr>
+        <p:spPr>
+          <a:xfrm flipH="1">
+            <a:off x="827184" y="3638830"/>
+            <a:ext cx="2675860" cy="224351"/>
+          </a:xfrm>
+          <a:prstGeom prst="curvedConnector3">
+            <a:avLst/>
+          </a:prstGeom>
+          <a:ln w="25400">
+            <a:solidFill>
+              <a:srgbClr val="F6DB6F"/>
+            </a:solidFill>
+          </a:ln>
+        </p:spPr>
+        <p:style>
+          <a:lnRef idx="2">
+            <a:schemeClr val="accent1"/>
+          </a:lnRef>
+          <a:fillRef idx="0">
+            <a:schemeClr val="accent1"/>
+          </a:fillRef>
+          <a:effectRef idx="1">
+            <a:schemeClr val="accent1"/>
+          </a:effectRef>
+          <a:fontRef idx="minor">
+            <a:schemeClr val="tx1"/>
+          </a:fontRef>
+        </p:style>
+      </p:cxnSp>
+      <p:cxnSp>
+        <p:nvCxnSpPr>
+          <p:cNvPr id="33" name="Connector 32"/>
+          <p:cNvCxnSpPr>
+            <a:stCxn id="13" idx="3"/>
+            <a:endCxn id="15" idx="1"/>
+          </p:cNvCxnSpPr>
+          <p:nvPr/>
+        </p:nvCxnSpPr>
+        <p:spPr>
+          <a:xfrm flipH="1" flipV="1">
+            <a:off x="1209168" y="2991853"/>
+            <a:ext cx="2293876" cy="646977"/>
+          </a:xfrm>
+          <a:prstGeom prst="curvedConnector3">
+            <a:avLst/>
+          </a:prstGeom>
+          <a:ln w="25400">
+            <a:solidFill>
+              <a:srgbClr val="F6DB6F"/>
+            </a:solidFill>
+          </a:ln>
+        </p:spPr>
+        <p:style>
+          <a:lnRef idx="2">
+            <a:schemeClr val="accent1"/>
+          </a:lnRef>
+          <a:fillRef idx="0">
+            <a:schemeClr val="accent1"/>
+          </a:fillRef>
+          <a:effectRef idx="1">
+            <a:schemeClr val="accent1"/>
+          </a:effectRef>
+          <a:fontRef idx="minor">
+            <a:schemeClr val="tx1"/>
+          </a:fontRef>
+        </p:style>
+      </p:cxnSp>
+      <p:cxnSp>
+        <p:nvCxnSpPr>
+          <p:cNvPr id="34" name="Connector 33"/>
+          <p:cNvCxnSpPr>
+            <a:stCxn id="4" idx="0"/>
+            <a:endCxn id="16" idx="2"/>
+          </p:cNvCxnSpPr>
+          <p:nvPr/>
+        </p:nvCxnSpPr>
+        <p:spPr>
+          <a:xfrm flipH="1" flipV="1">
+            <a:off x="4371017" y="3152546"/>
+            <a:ext cx="200983" cy="420635"/>
+          </a:xfrm>
+          <a:prstGeom prst="curvedConnector3">
+            <a:avLst/>
+          </a:prstGeom>
+          <a:ln w="25400">
+            <a:solidFill>
+              <a:srgbClr val="27AE60"/>
+            </a:solidFill>
+          </a:ln>
+        </p:spPr>
+        <p:style>
+          <a:lnRef idx="2">
+            <a:schemeClr val="accent1"/>
+          </a:lnRef>
+          <a:fillRef idx="0">
+            <a:schemeClr val="accent1"/>
+          </a:fillRef>
+          <a:effectRef idx="1">
+            <a:schemeClr val="accent1"/>
+          </a:effectRef>
+          <a:fontRef idx="minor">
+            <a:schemeClr val="tx1"/>
+          </a:fontRef>
+        </p:style>
+      </p:cxnSp>
+      <p:cxnSp>
+        <p:nvCxnSpPr>
+          <p:cNvPr id="35" name="Connector 34"/>
+          <p:cNvCxnSpPr>
+            <a:stCxn id="16" idx="3"/>
+            <a:endCxn id="17" idx="1"/>
+          </p:cNvCxnSpPr>
+          <p:nvPr/>
+        </p:nvCxnSpPr>
+        <p:spPr>
+          <a:xfrm flipH="1" flipV="1">
+            <a:off x="2267609" y="2320134"/>
+            <a:ext cx="2653408" cy="612412"/>
+          </a:xfrm>
+          <a:prstGeom prst="curvedConnector3">
+            <a:avLst/>
+          </a:prstGeom>
+          <a:ln w="25400">
+            <a:solidFill>
+              <a:srgbClr val="7DCE9F"/>
+            </a:solidFill>
+          </a:ln>
+        </p:spPr>
+        <p:style>
+          <a:lnRef idx="2">
+            <a:schemeClr val="accent1"/>
+          </a:lnRef>
+          <a:fillRef idx="0">
+            <a:schemeClr val="accent1"/>
+          </a:fillRef>
+          <a:effectRef idx="1">
+            <a:schemeClr val="accent1"/>
+          </a:effectRef>
+          <a:fontRef idx="minor">
+            <a:schemeClr val="tx1"/>
+          </a:fontRef>
+        </p:style>
+      </p:cxnSp>
+      <p:cxnSp>
+        <p:nvCxnSpPr>
+          <p:cNvPr id="36" name="Connector 35"/>
+          <p:cNvCxnSpPr>
+            <a:stCxn id="16" idx="0"/>
+            <a:endCxn id="18" idx="2"/>
+          </p:cNvCxnSpPr>
+          <p:nvPr/>
+        </p:nvCxnSpPr>
+        <p:spPr>
+          <a:xfrm flipH="1" flipV="1">
+            <a:off x="4170033" y="2166910"/>
+            <a:ext cx="200984" cy="545636"/>
+          </a:xfrm>
+          <a:prstGeom prst="curvedConnector3">
+            <a:avLst/>
+          </a:prstGeom>
+          <a:ln w="25400">
+            <a:solidFill>
+              <a:srgbClr val="7DCE9F"/>
+            </a:solidFill>
+          </a:ln>
+        </p:spPr>
+        <p:style>
+          <a:lnRef idx="2">
+            <a:schemeClr val="accent1"/>
+          </a:lnRef>
+          <a:fillRef idx="0">
+            <a:schemeClr val="accent1"/>
+          </a:fillRef>
+          <a:effectRef idx="1">
+            <a:schemeClr val="accent1"/>
+          </a:effectRef>
+          <a:fontRef idx="minor">
+            <a:schemeClr val="tx1"/>
+          </a:fontRef>
+        </p:style>
+      </p:cxnSp>
+      <p:cxnSp>
+        <p:nvCxnSpPr>
+          <p:cNvPr id="37" name="Connector 36"/>
+          <p:cNvCxnSpPr>
+            <a:stCxn id="16" idx="1"/>
+            <a:endCxn id="19" idx="3"/>
+          </p:cNvCxnSpPr>
+          <p:nvPr/>
+        </p:nvCxnSpPr>
+        <p:spPr>
+          <a:xfrm flipV="1">
+            <a:off x="3821017" y="2110080"/>
+            <a:ext cx="2343525" cy="822466"/>
+          </a:xfrm>
+          <a:prstGeom prst="curvedConnector3">
+            <a:avLst/>
+          </a:prstGeom>
+          <a:ln w="25400">
+            <a:solidFill>
+              <a:srgbClr val="7DCE9F"/>
+            </a:solidFill>
+          </a:ln>
+        </p:spPr>
+        <p:style>
+          <a:lnRef idx="2">
+            <a:schemeClr val="accent1"/>
+          </a:lnRef>
+          <a:fillRef idx="0">
+            <a:schemeClr val="accent1"/>
+          </a:fillRef>
+          <a:effectRef idx="1">
+            <a:schemeClr val="accent1"/>
+          </a:effectRef>
+          <a:fontRef idx="minor">
+            <a:schemeClr val="tx1"/>
+          </a:fontRef>
+        </p:style>
+      </p:cxnSp>
+      <p:cxnSp>
+        <p:nvCxnSpPr>
+          <p:cNvPr id="38" name="Connector 37"/>
+          <p:cNvCxnSpPr>
+            <a:stCxn id="4" idx="1"/>
+            <a:endCxn id="20" idx="3"/>
+          </p:cNvCxnSpPr>
+          <p:nvPr/>
+        </p:nvCxnSpPr>
+        <p:spPr>
+          <a:xfrm flipV="1">
+            <a:off x="3822000" y="3427517"/>
+            <a:ext cx="2776416" cy="435664"/>
+          </a:xfrm>
+          <a:prstGeom prst="curvedConnector3">
+            <a:avLst/>
+          </a:prstGeom>
+          <a:ln w="25400">
+            <a:solidFill>
+              <a:srgbClr val="1ABC9C"/>
+            </a:solidFill>
+          </a:ln>
+        </p:spPr>
+        <p:style>
+          <a:lnRef idx="2">
+            <a:schemeClr val="accent1"/>
+          </a:lnRef>
+          <a:fillRef idx="0">
+            <a:schemeClr val="accent1"/>
+          </a:fillRef>
+          <a:effectRef idx="1">
+            <a:schemeClr val="accent1"/>
+          </a:effectRef>
+          <a:fontRef idx="minor">
+            <a:schemeClr val="tx1"/>
+          </a:fontRef>
+        </p:style>
+      </p:cxnSp>
+      <p:cxnSp>
+        <p:nvCxnSpPr>
+          <p:cNvPr id="39" name="Connector 38"/>
+          <p:cNvCxnSpPr>
+            <a:stCxn id="20" idx="1"/>
+            <a:endCxn id="21" idx="3"/>
+          </p:cNvCxnSpPr>
+          <p:nvPr/>
+        </p:nvCxnSpPr>
+        <p:spPr>
+          <a:xfrm flipV="1">
+            <a:off x="5498416" y="2619865"/>
+            <a:ext cx="1979729" cy="807652"/>
+          </a:xfrm>
+          <a:prstGeom prst="curvedConnector3">
+            <a:avLst/>
+          </a:prstGeom>
+          <a:ln w="25400">
+            <a:solidFill>
+              <a:srgbClr val="75D6C3"/>
+            </a:solidFill>
+          </a:ln>
+        </p:spPr>
+        <p:style>
+          <a:lnRef idx="2">
+            <a:schemeClr val="accent1"/>
+          </a:lnRef>
+          <a:fillRef idx="0">
+            <a:schemeClr val="accent1"/>
+          </a:fillRef>
+          <a:effectRef idx="1">
+            <a:schemeClr val="accent1"/>
+          </a:effectRef>
+          <a:fontRef idx="minor">
+            <a:schemeClr val="tx1"/>
+          </a:fontRef>
+        </p:style>
+      </p:cxnSp>
+      <p:cxnSp>
+        <p:nvCxnSpPr>
+          <p:cNvPr id="40" name="Connector 39"/>
+          <p:cNvCxnSpPr>
+            <a:stCxn id="20" idx="1"/>
+            <a:endCxn id="22" idx="3"/>
+          </p:cNvCxnSpPr>
+          <p:nvPr/>
+        </p:nvCxnSpPr>
+        <p:spPr>
+          <a:xfrm flipV="1">
+            <a:off x="5498416" y="3414479"/>
+            <a:ext cx="2721496" cy="13038"/>
+          </a:xfrm>
+          <a:prstGeom prst="curvedConnector3">
+            <a:avLst/>
+          </a:prstGeom>
+          <a:ln w="25400">
+            <a:solidFill>
+              <a:srgbClr val="75D6C3"/>
+            </a:solidFill>
+          </a:ln>
+        </p:spPr>
+        <p:style>
+          <a:lnRef idx="2">
+            <a:schemeClr val="accent1"/>
+          </a:lnRef>
+          <a:fillRef idx="0">
+            <a:schemeClr val="accent1"/>
+          </a:fillRef>
+          <a:effectRef idx="1">
+            <a:schemeClr val="accent1"/>
+          </a:effectRef>
+          <a:fontRef idx="minor">
+            <a:schemeClr val="tx1"/>
+          </a:fontRef>
+        </p:style>
+      </p:cxnSp>
     </p:spTree>
   </p:cSld>
   <p:clrMapOvr>
@@ -19904,7 +19840,7 @@
           <a:lstStyle/>
           <a:p>
             <a:r>
-              <a:t>14. ZenUML</a:t>
+              <a:t>13. タイムライン（Timeline）</a:t>
             </a:r>
           </a:p>
         </p:txBody>
@@ -19952,14 +19888,19 @@
               <a:rPr sz="1000">
                 <a:latin typeface="Courier New"/>
               </a:rPr>
-              <a:t>zenuml
-    title 注文処理
-    @Actor Client
-    @Database DB
-    Client -&gt; Server.process(order) {
-        Server -&gt; DB.save(order)
-        return orderId
-    }</a:t>
+              <a:t>timeline
+    title ソフトウェア開発史
+    1960 : アセンブリ言語
+    1970 : C言語
+         : Unix
+    1980 : C++
+         : Macintosh
+    1990 : Java
+         : World Wide Web
+    2000 : Python普及
+         : Agile開発
+    2010 : クラウドコンピューティング
+    2020 : AI・機械学習</a:t>
             </a:r>
           </a:p>
         </p:txBody>
@@ -19998,7 +19939,7 @@
           <a:lstStyle/>
           <a:p>
             <a:r>
-              <a:t>15. サンキー図（Sankey Diagram）</a:t>
+              <a:t>14. ZenUML</a:t>
             </a:r>
           </a:p>
         </p:txBody>
@@ -20046,13 +19987,14 @@
               <a:rPr sz="1000">
                 <a:latin typeface="Courier New"/>
               </a:rPr>
-              <a:t>sankey-beta
-    エネルギー源,電力,60
-    エネルギー源,熱,40
-    電力,家庭用,25
-    電力,産業用,35
-    熱,暖房,30
-    熱,給湯,10</a:t>
+              <a:t>zenuml
+    title 注文処理
+    @Actor Client
+    @Database DB
+    Client -&gt; Server.process(order) {
+        Server -&gt; DB.save(order)
+        return orderId
+    }</a:t>
             </a:r>
           </a:p>
         </p:txBody>
@@ -20091,7 +20033,7 @@
           <a:lstStyle/>
           <a:p>
             <a:r>
-              <a:t>16. XYチャート（XY Chart）</a:t>
+              <a:t>15. サンキー図（Sankey Diagram）</a:t>
             </a:r>
           </a:p>
         </p:txBody>
@@ -20139,12 +20081,13 @@
               <a:rPr sz="1000">
                 <a:latin typeface="Courier New"/>
               </a:rPr>
-              <a:t>xychart-beta
-    title "月別売上推移"
-    x-axis [1月, 2月, 3月, 4月, 5月, 6月]
-    y-axis "売上（万円）" 0 --&gt; 1000
-    bar [400, 500, 650, 720, 850, 900]
-    line [400, 500, 650, 720, 850, 900]</a:t>
+              <a:t>sankey-beta
+    エネルギー源,電力,60
+    エネルギー源,熱,40
+    電力,家庭用,25
+    電力,産業用,35
+    熱,暖房,30
+    熱,給湯,10</a:t>
             </a:r>
           </a:p>
         </p:txBody>
@@ -20183,7 +20126,7 @@
           <a:lstStyle/>
           <a:p>
             <a:r>
-              <a:t>17. ブロック図（Block Diagram）</a:t>
+              <a:t>16. XYチャート（XY Chart）</a:t>
             </a:r>
           </a:p>
         </p:txBody>
@@ -20231,19 +20174,12 @@
               <a:rPr sz="1000">
                 <a:latin typeface="Courier New"/>
               </a:rPr>
-              <a:t>block-beta
-    columns 3
-    A["フロントエンド"]:1
-    B["APIゲートウェイ"]:1
-    C["バックエンド"]:1
-    D["認証サービス"]:1
-    E["データベース"]:1
-    F["キャッシュ"]:1
-    A --&gt; B
-    B --&gt; C
-    B --&gt; D
-    C --&gt; E
-    C --&gt; F</a:t>
+              <a:t>xychart-beta
+    title "月別売上推移"
+    x-axis [1月, 2月, 3月, 4月, 5月, 6月]
+    y-axis "売上（万円）" 0 --&gt; 1000
+    bar [400, 500, 650, 720, 850, 900]
+    line [400, 500, 650, 720, 850, 900]</a:t>
             </a:r>
           </a:p>
         </p:txBody>
@@ -20282,7 +20218,7 @@
           <a:lstStyle/>
           <a:p>
             <a:r>
-              <a:t>18. パケット図（Packet Diagram）</a:t>
+              <a:t>17. ブロック図（Block Diagram）</a:t>
             </a:r>
           </a:p>
         </p:txBody>
@@ -20330,16 +20266,19 @@
               <a:rPr sz="1000">
                 <a:latin typeface="Courier New"/>
               </a:rPr>
-              <a:t>packet-beta
-    title TCP パケット構造
-    0-15: "送信元ポート"
-    16-31: "宛先ポート"
-    32-63: "シーケンス番号"
-    64-95: "確認応答番号"
-    96-99: "データオフセット"
-    100-105: "予約"
-    106-111: "フラグ"
-    112-127: "ウィンドウサイズ"</a:t>
+              <a:t>block-beta
+    columns 3
+    A["フロントエンド"]:1
+    B["APIゲートウェイ"]:1
+    C["バックエンド"]:1
+    D["認証サービス"]:1
+    E["データベース"]:1
+    F["キャッシュ"]:1
+    A --&gt; B
+    B --&gt; C
+    B --&gt; D
+    C --&gt; E
+    C --&gt; F</a:t>
             </a:r>
           </a:p>
         </p:txBody>
@@ -20378,7 +20317,7 @@
           <a:lstStyle/>
           <a:p>
             <a:r>
-              <a:t>19. カンバン（Kanban）</a:t>
+              <a:t>18. パケット図（Packet Diagram）</a:t>
             </a:r>
           </a:p>
         </p:txBody>
@@ -20426,16 +20365,16 @@
               <a:rPr sz="1000">
                 <a:latin typeface="Courier New"/>
               </a:rPr>
-              <a:t>kanban
-    todo["To Do"]
-        task1["要件定義"]
-        task2["DB設計"]
-    inprogress["In Progress"]
-        task3["API実装"]
-        task4["テスト作成"]
-    done["Done"]
-        task5["環境構築"]
-        task6["仕様策定"]</a:t>
+              <a:t>packet-beta
+    title TCP パケット構造
+    0-15: "送信元ポート"
+    16-31: "宛先ポート"
+    32-63: "シーケンス番号"
+    64-95: "確認応答番号"
+    96-99: "データオフセット"
+    100-105: "予約"
+    106-111: "フラグ"
+    112-127: "ウィンドウサイズ"</a:t>
             </a:r>
           </a:p>
         </p:txBody>
@@ -20474,7 +20413,7 @@
           <a:lstStyle/>
           <a:p>
             <a:r>
-              <a:t>20. アーキテクチャ図（Architecture Diagram）</a:t>
+              <a:t>19. カンバン（Kanban）</a:t>
             </a:r>
           </a:p>
         </p:txBody>
@@ -20522,15 +20461,16 @@
               <a:rPr sz="1000">
                 <a:latin typeface="Courier New"/>
               </a:rPr>
-              <a:t>architecture-beta
-    group cloud(cloud)[クラウド]
-    service web(internet)[Webサーバー] in cloud
-    service api(server)[APIサーバー] in cloud
-    service db(database)[データベース] in cloud
-    service cache(disk)[キャッシュ] in cloud
-    web:R --&gt; L:api
-    api:R --&gt; L:db
-    api:B --&gt; T:cache</a:t>
+              <a:t>kanban
+    todo["To Do"]
+        task1["要件定義"]
+        task2["DB設計"]
+    inprogress["In Progress"]
+        task3["API実装"]
+        task4["テスト作成"]
+    done["Done"]
+        task5["環境構築"]
+        task6["仕様策定"]</a:t>
             </a:r>
           </a:p>
         </p:txBody>
@@ -20569,7 +20509,7 @@
           <a:lstStyle/>
           <a:p>
             <a:r>
-              <a:t>21. C4図（C4 Diagram）</a:t>
+              <a:t>20. アーキテクチャ図（Architecture Diagram）</a:t>
             </a:r>
           </a:p>
         </p:txBody>
@@ -20617,15 +20557,15 @@
               <a:rPr sz="1000">
                 <a:latin typeface="Courier New"/>
               </a:rPr>
-              <a:t>C4Context
-    title システムコンテキスト図
-    Person(user, "ユーザー", "アプリケーションを利用する人")
-    System(app, "Webアプリ", "主要なシステム")
-    System_Ext(email, "メールサービス", "通知送信")
-    System_Ext(payment, "決済サービス", "支払い処理")
-    Rel(user, app, "利用する", "HTTPS")
-    Rel(app, email, "送信する", "SMTP")
-    Rel(app, payment, "呼び出す", "API")</a:t>
+              <a:t>architecture-beta
+    group cloud(cloud)[クラウド]
+    service web(internet)[Webサーバー] in cloud
+    service api(server)[APIサーバー] in cloud
+    service db(database)[データベース] in cloud
+    service cache(disk)[キャッシュ] in cloud
+    web:R --&gt; L:api
+    api:R --&gt; L:db
+    api:B --&gt; T:cache</a:t>
             </a:r>
           </a:p>
         </p:txBody>
@@ -20664,7 +20604,7 @@
           <a:lstStyle/>
           <a:p>
             <a:r>
-              <a:t>22. Quartoネイティブ記法</a:t>
+              <a:t>21. C4図（C4 Diagram）</a:t>
             </a:r>
           </a:p>
         </p:txBody>
@@ -20688,196 +20628,43 @@
       </p:sp>
       <p:sp>
         <p:nvSpPr>
-          <p:cNvPr id="4" name="Rectangle 3"/>
-          <p:cNvSpPr/>
-          <p:nvPr/>
-        </p:nvSpPr>
-        <p:spPr>
-          <a:xfrm>
-            <a:off x="457200" y="3613181"/>
-            <a:ext cx="1200000" cy="500000"/>
+          <p:cNvPr id="4" name="TextBox 3"/>
+          <p:cNvSpPr txBox="1"/>
+          <p:nvPr/>
+        </p:nvSpPr>
+        <p:spPr>
+          <a:xfrm>
+            <a:off x="457200" y="1600200"/>
+            <a:ext cx="8229600" cy="4525963"/>
           </a:xfrm>
           <a:prstGeom prst="rect">
             <a:avLst/>
           </a:prstGeom>
-        </p:spPr>
-        <p:style>
-          <a:lnRef idx="1">
-            <a:schemeClr val="accent1"/>
-          </a:lnRef>
-          <a:fillRef idx="3">
-            <a:schemeClr val="accent1"/>
-          </a:fillRef>
-          <a:effectRef idx="2">
-            <a:schemeClr val="accent1"/>
-          </a:effectRef>
-          <a:fontRef idx="minor">
-            <a:schemeClr val="lt1"/>
-          </a:fontRef>
-        </p:style>
-        <p:txBody>
-          <a:bodyPr rtlCol="0" anchor="ctr"/>
-          <a:lstStyle/>
-          <a:p>
-            <a:r>
-              <a:rPr sz="1200"/>
-              <a:t>スタート</a:t>
-            </a:r>
-          </a:p>
-        </p:txBody>
-      </p:sp>
-      <p:sp>
-        <p:nvSpPr>
-          <p:cNvPr id="5" name="Rectangle 4"/>
-          <p:cNvSpPr/>
-          <p:nvPr/>
-        </p:nvSpPr>
-        <p:spPr>
-          <a:xfrm>
-            <a:off x="3972000" y="3613181"/>
-            <a:ext cx="1200000" cy="500000"/>
-          </a:xfrm>
-          <a:prstGeom prst="rect">
-            <a:avLst/>
-          </a:prstGeom>
-        </p:spPr>
-        <p:style>
-          <a:lnRef idx="1">
-            <a:schemeClr val="accent1"/>
-          </a:lnRef>
-          <a:fillRef idx="3">
-            <a:schemeClr val="accent1"/>
-          </a:fillRef>
-          <a:effectRef idx="2">
-            <a:schemeClr val="accent1"/>
-          </a:effectRef>
-          <a:fontRef idx="minor">
-            <a:schemeClr val="lt1"/>
-          </a:fontRef>
-        </p:style>
-        <p:txBody>
-          <a:bodyPr rtlCol="0" anchor="ctr"/>
-          <a:lstStyle/>
-          <a:p>
-            <a:r>
-              <a:rPr sz="1200"/>
-              <a:t>処理</a:t>
-            </a:r>
-          </a:p>
-        </p:txBody>
-      </p:sp>
-      <p:sp>
-        <p:nvSpPr>
-          <p:cNvPr id="6" name="Rectangle 5"/>
-          <p:cNvSpPr/>
-          <p:nvPr/>
-        </p:nvSpPr>
-        <p:spPr>
-          <a:xfrm>
-            <a:off x="7486800" y="3613181"/>
-            <a:ext cx="1200000" cy="500000"/>
-          </a:xfrm>
-          <a:prstGeom prst="rect">
-            <a:avLst/>
-          </a:prstGeom>
-        </p:spPr>
-        <p:style>
-          <a:lnRef idx="1">
-            <a:schemeClr val="accent1"/>
-          </a:lnRef>
-          <a:fillRef idx="3">
-            <a:schemeClr val="accent1"/>
-          </a:fillRef>
-          <a:effectRef idx="2">
-            <a:schemeClr val="accent1"/>
-          </a:effectRef>
-          <a:fontRef idx="minor">
-            <a:schemeClr val="lt1"/>
-          </a:fontRef>
-        </p:style>
-        <p:txBody>
-          <a:bodyPr rtlCol="0" anchor="ctr"/>
-          <a:lstStyle/>
-          <a:p>
-            <a:r>
-              <a:rPr sz="1200"/>
-              <a:t>エンド</a:t>
-            </a:r>
-          </a:p>
-        </p:txBody>
-      </p:sp>
-      <p:cxnSp>
-        <p:nvCxnSpPr>
-          <p:cNvPr id="7" name="Connector 6"/>
-          <p:cNvCxnSpPr>
-            <a:stCxn id="4" idx="1"/>
-            <a:endCxn id="5" idx="3"/>
-          </p:cNvCxnSpPr>
-          <p:nvPr/>
-        </p:nvCxnSpPr>
-        <p:spPr>
-          <a:xfrm>
-            <a:off x="457200" y="3863181"/>
-            <a:ext cx="4714800" cy="0"/>
-          </a:xfrm>
-          <a:prstGeom prst="curvedConnector3">
-            <a:avLst/>
-          </a:prstGeom>
-          <a:ln>
-            <a:headEnd type="arrow" w="med" len="med"/>
-          </a:ln>
-        </p:spPr>
-        <p:style>
-          <a:lnRef idx="2">
-            <a:schemeClr val="accent1"/>
-          </a:lnRef>
-          <a:fillRef idx="0">
-            <a:schemeClr val="accent1"/>
-          </a:fillRef>
-          <a:effectRef idx="1">
-            <a:schemeClr val="accent1"/>
-          </a:effectRef>
-          <a:fontRef idx="minor">
-            <a:schemeClr val="tx1"/>
-          </a:fontRef>
-        </p:style>
-      </p:cxnSp>
-      <p:cxnSp>
-        <p:nvCxnSpPr>
-          <p:cNvPr id="8" name="Connector 7"/>
-          <p:cNvCxnSpPr>
-            <a:stCxn id="5" idx="1"/>
-            <a:endCxn id="6" idx="3"/>
-          </p:cNvCxnSpPr>
-          <p:nvPr/>
-        </p:nvCxnSpPr>
-        <p:spPr>
-          <a:xfrm>
-            <a:off x="3972000" y="3863181"/>
-            <a:ext cx="4714800" cy="0"/>
-          </a:xfrm>
-          <a:prstGeom prst="curvedConnector3">
-            <a:avLst/>
-          </a:prstGeom>
-          <a:ln>
-            <a:headEnd type="arrow" w="med" len="med"/>
-          </a:ln>
-        </p:spPr>
-        <p:style>
-          <a:lnRef idx="2">
-            <a:schemeClr val="accent1"/>
-          </a:lnRef>
-          <a:fillRef idx="0">
-            <a:schemeClr val="accent1"/>
-          </a:fillRef>
-          <a:effectRef idx="1">
-            <a:schemeClr val="accent1"/>
-          </a:effectRef>
-          <a:fontRef idx="minor">
-            <a:schemeClr val="tx1"/>
-          </a:fontRef>
-        </p:style>
-      </p:cxnSp>
+          <a:noFill/>
+        </p:spPr>
+        <p:txBody>
+          <a:bodyPr wrap="square">
+            <a:spAutoFit/>
+          </a:bodyPr>
+          <a:lstStyle/>
+          <a:p>
+            <a:r>
+              <a:rPr sz="1000">
+                <a:latin typeface="Courier New"/>
+              </a:rPr>
+              <a:t>C4Context
+    title システムコンテキスト図
+    Person(user, "ユーザー", "アプリケーションを利用する人")
+    System(app, "Webアプリ", "主要なシステム")
+    System_Ext(email, "メールサービス", "通知送信")
+    System_Ext(payment, "決済サービス", "支払い処理")
+    Rel(user, app, "利用する", "HTTPS")
+    Rel(app, email, "送信する", "SMTP")
+    Rel(app, payment, "呼び出す", "API")</a:t>
+            </a:r>
+          </a:p>
+        </p:txBody>
+      </p:sp>
     </p:spTree>
   </p:cSld>
   <p:clrMapOvr>
@@ -21002,7 +20789,7 @@
           <a:lstStyle/>
           <a:p>
             <a:r>
-              <a:t>Quartoコードブロック記法</a:t>
+              <a:t>22. Quartoネイティブ記法</a:t>
             </a:r>
           </a:p>
         </p:txBody>
@@ -21019,43 +20806,203 @@
         </p:nvSpPr>
         <p:spPr/>
         <p:txBody>
-          <a:bodyPr wrap="none"/>
-          <a:lstStyle/>
-          <a:p>
-            <a:pPr>
-              <a:buNone/>
-            </a:pPr>
-            <a:r>
-              <a:rPr lang="" dirty="0" sz="1400">
-                <a:latin typeface="Courier New"/>
-              </a:rPr>
-              <a:t>import math</a:t>
-            </a:r>
-            <a:br>
-              <a:rPr lang="" dirty="0">
-                <a:latin typeface="Courier New"/>
-              </a:rPr>
-            </a:br>
-            <a:r>
-              <a:rPr lang="" dirty="0" sz="1400">
-                <a:latin typeface="Courier New"/>
-              </a:rPr>
-              <a:t>print(math.pi)</a:t>
-            </a:r>
-            <a:br>
-              <a:rPr lang="" dirty="0">
-                <a:latin typeface="Courier New"/>
-              </a:rPr>
-            </a:br>
-            <a:r>
-              <a:rPr lang="" dirty="0" sz="1400">
-                <a:latin typeface="Courier New"/>
-              </a:rPr>
-              <a:t/>
-            </a:r>
-          </a:p>
-        </p:txBody>
-      </p:sp>
+          <a:bodyPr/>
+          <a:lstStyle/>
+          <a:p/>
+        </p:txBody>
+      </p:sp>
+      <p:sp>
+        <p:nvSpPr>
+          <p:cNvPr id="4" name="Rectangle 3"/>
+          <p:cNvSpPr/>
+          <p:nvPr/>
+        </p:nvSpPr>
+        <p:spPr>
+          <a:xfrm>
+            <a:off x="457200" y="3613181"/>
+            <a:ext cx="1200000" cy="500000"/>
+          </a:xfrm>
+          <a:prstGeom prst="rect">
+            <a:avLst/>
+          </a:prstGeom>
+        </p:spPr>
+        <p:style>
+          <a:lnRef idx="1">
+            <a:schemeClr val="accent1"/>
+          </a:lnRef>
+          <a:fillRef idx="3">
+            <a:schemeClr val="accent1"/>
+          </a:fillRef>
+          <a:effectRef idx="2">
+            <a:schemeClr val="accent1"/>
+          </a:effectRef>
+          <a:fontRef idx="minor">
+            <a:schemeClr val="lt1"/>
+          </a:fontRef>
+        </p:style>
+        <p:txBody>
+          <a:bodyPr rtlCol="0" anchor="ctr"/>
+          <a:lstStyle/>
+          <a:p>
+            <a:r>
+              <a:rPr sz="1200"/>
+              <a:t>スタート</a:t>
+            </a:r>
+          </a:p>
+        </p:txBody>
+      </p:sp>
+      <p:sp>
+        <p:nvSpPr>
+          <p:cNvPr id="5" name="Rectangle 4"/>
+          <p:cNvSpPr/>
+          <p:nvPr/>
+        </p:nvSpPr>
+        <p:spPr>
+          <a:xfrm>
+            <a:off x="3972000" y="3613181"/>
+            <a:ext cx="1200000" cy="500000"/>
+          </a:xfrm>
+          <a:prstGeom prst="rect">
+            <a:avLst/>
+          </a:prstGeom>
+        </p:spPr>
+        <p:style>
+          <a:lnRef idx="1">
+            <a:schemeClr val="accent1"/>
+          </a:lnRef>
+          <a:fillRef idx="3">
+            <a:schemeClr val="accent1"/>
+          </a:fillRef>
+          <a:effectRef idx="2">
+            <a:schemeClr val="accent1"/>
+          </a:effectRef>
+          <a:fontRef idx="minor">
+            <a:schemeClr val="lt1"/>
+          </a:fontRef>
+        </p:style>
+        <p:txBody>
+          <a:bodyPr rtlCol="0" anchor="ctr"/>
+          <a:lstStyle/>
+          <a:p>
+            <a:r>
+              <a:rPr sz="1200"/>
+              <a:t>処理</a:t>
+            </a:r>
+          </a:p>
+        </p:txBody>
+      </p:sp>
+      <p:sp>
+        <p:nvSpPr>
+          <p:cNvPr id="6" name="Rectangle 5"/>
+          <p:cNvSpPr/>
+          <p:nvPr/>
+        </p:nvSpPr>
+        <p:spPr>
+          <a:xfrm>
+            <a:off x="7486800" y="3613181"/>
+            <a:ext cx="1200000" cy="500000"/>
+          </a:xfrm>
+          <a:prstGeom prst="rect">
+            <a:avLst/>
+          </a:prstGeom>
+        </p:spPr>
+        <p:style>
+          <a:lnRef idx="1">
+            <a:schemeClr val="accent1"/>
+          </a:lnRef>
+          <a:fillRef idx="3">
+            <a:schemeClr val="accent1"/>
+          </a:fillRef>
+          <a:effectRef idx="2">
+            <a:schemeClr val="accent1"/>
+          </a:effectRef>
+          <a:fontRef idx="minor">
+            <a:schemeClr val="lt1"/>
+          </a:fontRef>
+        </p:style>
+        <p:txBody>
+          <a:bodyPr rtlCol="0" anchor="ctr"/>
+          <a:lstStyle/>
+          <a:p>
+            <a:r>
+              <a:rPr sz="1200"/>
+              <a:t>エンド</a:t>
+            </a:r>
+          </a:p>
+        </p:txBody>
+      </p:sp>
+      <p:cxnSp>
+        <p:nvCxnSpPr>
+          <p:cNvPr id="7" name="Connector 6"/>
+          <p:cNvCxnSpPr>
+            <a:stCxn id="4" idx="1"/>
+            <a:endCxn id="5" idx="3"/>
+          </p:cNvCxnSpPr>
+          <p:nvPr/>
+        </p:nvCxnSpPr>
+        <p:spPr>
+          <a:xfrm>
+            <a:off x="457200" y="3863181"/>
+            <a:ext cx="4714800" cy="0"/>
+          </a:xfrm>
+          <a:prstGeom prst="curvedConnector3">
+            <a:avLst/>
+          </a:prstGeom>
+          <a:ln>
+            <a:headEnd type="arrow" w="med" len="med"/>
+          </a:ln>
+        </p:spPr>
+        <p:style>
+          <a:lnRef idx="2">
+            <a:schemeClr val="accent1"/>
+          </a:lnRef>
+          <a:fillRef idx="0">
+            <a:schemeClr val="accent1"/>
+          </a:fillRef>
+          <a:effectRef idx="1">
+            <a:schemeClr val="accent1"/>
+          </a:effectRef>
+          <a:fontRef idx="minor">
+            <a:schemeClr val="tx1"/>
+          </a:fontRef>
+        </p:style>
+      </p:cxnSp>
+      <p:cxnSp>
+        <p:nvCxnSpPr>
+          <p:cNvPr id="8" name="Connector 7"/>
+          <p:cNvCxnSpPr>
+            <a:stCxn id="5" idx="1"/>
+            <a:endCxn id="6" idx="3"/>
+          </p:cNvCxnSpPr>
+          <p:nvPr/>
+        </p:nvCxnSpPr>
+        <p:spPr>
+          <a:xfrm>
+            <a:off x="3972000" y="3863181"/>
+            <a:ext cx="4714800" cy="0"/>
+          </a:xfrm>
+          <a:prstGeom prst="curvedConnector3">
+            <a:avLst/>
+          </a:prstGeom>
+          <a:ln>
+            <a:headEnd type="arrow" w="med" len="med"/>
+          </a:ln>
+        </p:spPr>
+        <p:style>
+          <a:lnRef idx="2">
+            <a:schemeClr val="accent1"/>
+          </a:lnRef>
+          <a:fillRef idx="0">
+            <a:schemeClr val="accent1"/>
+          </a:fillRef>
+          <a:effectRef idx="1">
+            <a:schemeClr val="accent1"/>
+          </a:effectRef>
+          <a:fontRef idx="minor">
+            <a:schemeClr val="tx1"/>
+          </a:fontRef>
+        </p:style>
+      </p:cxnSp>
     </p:spTree>
   </p:cSld>
   <p:clrMapOvr>
@@ -21090,26 +21037,58 @@
           <a:lstStyle/>
           <a:p>
             <a:r>
-              <a:t>アニメーション・レイアウト</a:t>
-            </a:r>
-          </a:p>
-        </p:txBody>
-      </p:sp>
-      <p:sp>
-        <p:nvSpPr>
-          <p:cNvPr id="3" name="Text Placeholder 2"/>
+              <a:t>Quartoコードブロック記法</a:t>
+            </a:r>
+          </a:p>
+        </p:txBody>
+      </p:sp>
+      <p:sp>
+        <p:nvSpPr>
+          <p:cNvPr id="3" name="Content Placeholder 2"/>
           <p:cNvSpPr>
             <a:spLocks noGrp="1"/>
           </p:cNvSpPr>
           <p:nvPr>
-            <p:ph type="body" idx="1"/>
+            <p:ph idx="1"/>
           </p:nvPr>
         </p:nvSpPr>
         <p:spPr/>
         <p:txBody>
-          <a:bodyPr/>
-          <a:lstStyle/>
-          <a:p/>
+          <a:bodyPr wrap="none"/>
+          <a:lstStyle/>
+          <a:p>
+            <a:pPr>
+              <a:buNone/>
+            </a:pPr>
+            <a:r>
+              <a:rPr lang="" dirty="0" sz="1400">
+                <a:latin typeface="Courier New"/>
+              </a:rPr>
+              <a:t>import math</a:t>
+            </a:r>
+            <a:br>
+              <a:rPr lang="" dirty="0">
+                <a:latin typeface="Courier New"/>
+              </a:rPr>
+            </a:br>
+            <a:r>
+              <a:rPr lang="" dirty="0" sz="1400">
+                <a:latin typeface="Courier New"/>
+              </a:rPr>
+              <a:t>print(math.pi)</a:t>
+            </a:r>
+            <a:br>
+              <a:rPr lang="" dirty="0">
+                <a:latin typeface="Courier New"/>
+              </a:rPr>
+            </a:br>
+            <a:r>
+              <a:rPr lang="" dirty="0" sz="1400">
+                <a:latin typeface="Courier New"/>
+              </a:rPr>
+              <a:t/>
+            </a:r>
+          </a:p>
         </p:txBody>
       </p:sp>
     </p:spTree>
@@ -21146,46 +21125,26 @@
           <a:lstStyle/>
           <a:p>
             <a:r>
-              <a:t>インクリメンタルリスト</a:t>
-            </a:r>
-          </a:p>
-        </p:txBody>
-      </p:sp>
-      <p:sp>
-        <p:nvSpPr>
-          <p:cNvPr id="3" name="Content Placeholder 2"/>
+              <a:t>アニメーション・レイアウト</a:t>
+            </a:r>
+          </a:p>
+        </p:txBody>
+      </p:sp>
+      <p:sp>
+        <p:nvSpPr>
+          <p:cNvPr id="3" name="Text Placeholder 2"/>
           <p:cNvSpPr>
             <a:spLocks noGrp="1"/>
           </p:cNvSpPr>
           <p:nvPr>
-            <p:ph idx="1"/>
+            <p:ph type="body" idx="1"/>
           </p:nvPr>
         </p:nvSpPr>
         <p:spPr/>
         <p:txBody>
-          <a:bodyPr wrap="square"/>
-          <a:lstStyle/>
-          <a:p>
-            <a:pPr/>
-            <a:r>
-              <a:rPr sz="1800"/>
-              <a:t>まず最初に表示</a:t>
-            </a:r>
-          </a:p>
-          <a:p>
-            <a:pPr/>
-            <a:r>
-              <a:rPr sz="1800"/>
-              <a:t>次にこれが表示</a:t>
-            </a:r>
-          </a:p>
-          <a:p>
-            <a:pPr/>
-            <a:r>
-              <a:rPr sz="1800"/>
-              <a:t>最後にこれが表示</a:t>
-            </a:r>
-          </a:p>
+          <a:bodyPr/>
+          <a:lstStyle/>
+          <a:p/>
         </p:txBody>
       </p:sp>
     </p:spTree>
@@ -21222,7 +21181,7 @@
           <a:lstStyle/>
           <a:p>
             <a:r>
-              <a:t>非インクリメンタルリスト</a:t>
+              <a:t>インクリメンタルリスト</a:t>
             </a:r>
           </a:p>
         </p:txBody>
@@ -21245,21 +21204,21 @@
             <a:pPr/>
             <a:r>
               <a:rPr sz="1800"/>
-              <a:t>一括表示アイテム1</a:t>
+              <a:t>まず最初に表示</a:t>
             </a:r>
           </a:p>
           <a:p>
             <a:pPr/>
             <a:r>
               <a:rPr sz="1800"/>
-              <a:t>一括表示アイテム2</a:t>
+              <a:t>次にこれが表示</a:t>
             </a:r>
           </a:p>
           <a:p>
             <a:pPr/>
             <a:r>
               <a:rPr sz="1800"/>
-              <a:t>一括表示アイテム3</a:t>
+              <a:t>最後にこれが表示</a:t>
             </a:r>
           </a:p>
         </p:txBody>
@@ -21298,7 +21257,7 @@
           <a:lstStyle/>
           <a:p>
             <a:r>
-              <a:t>2カラムレイアウト</a:t>
+              <a:t>非インクリメンタルリスト</a:t>
             </a:r>
           </a:p>
         </p:txBody>
@@ -21310,7 +21269,7 @@
             <a:spLocks noGrp="1"/>
           </p:cNvSpPr>
           <p:nvPr>
-            <p:ph idx="1" sz="half"/>
+            <p:ph idx="1"/>
           </p:nvPr>
         </p:nvSpPr>
         <p:spPr/>
@@ -21321,58 +21280,21 @@
             <a:pPr/>
             <a:r>
               <a:rPr sz="1800"/>
-              <a:t>左の項目1</a:t>
+              <a:t>一括表示アイテム1</a:t>
             </a:r>
           </a:p>
           <a:p>
             <a:pPr/>
             <a:r>
               <a:rPr sz="1800"/>
-              <a:t>左の項目2</a:t>
+              <a:t>一括表示アイテム2</a:t>
             </a:r>
           </a:p>
           <a:p>
             <a:pPr/>
             <a:r>
               <a:rPr sz="1800"/>
-              <a:t>左の項目3</a:t>
-            </a:r>
-          </a:p>
-        </p:txBody>
-      </p:sp>
-      <p:sp>
-        <p:nvSpPr>
-          <p:cNvPr id="4" name="Content Placeholder 3"/>
-          <p:cNvSpPr>
-            <a:spLocks noGrp="1"/>
-          </p:cNvSpPr>
-          <p:nvPr>
-            <p:ph idx="2" sz="half"/>
-          </p:nvPr>
-        </p:nvSpPr>
-        <p:spPr/>
-        <p:txBody>
-          <a:bodyPr wrap="square"/>
-          <a:lstStyle/>
-          <a:p>
-            <a:pPr/>
-            <a:r>
-              <a:rPr sz="1800"/>
-              <a:t>右の項目1</a:t>
-            </a:r>
-          </a:p>
-          <a:p>
-            <a:pPr/>
-            <a:r>
-              <a:rPr sz="1800"/>
-              <a:t>右の項目2</a:t>
-            </a:r>
-          </a:p>
-          <a:p>
-            <a:pPr/>
-            <a:r>
-              <a:rPr sz="1800"/>
-              <a:t>右の項目3</a:t>
+              <a:t>一括表示アイテム3</a:t>
             </a:r>
           </a:p>
         </p:txBody>
@@ -21411,7 +21333,7 @@
           <a:lstStyle/>
           <a:p>
             <a:r>
-              <a:t>スピーカーノート付きスライド</a:t>
+              <a:t>2カラムレイアウト</a:t>
             </a:r>
           </a:p>
         </p:txBody>
@@ -21423,7 +21345,7 @@
             <a:spLocks noGrp="1"/>
           </p:cNvSpPr>
           <p:nvPr>
-            <p:ph idx="1"/>
+            <p:ph idx="1" sz="half"/>
           </p:nvPr>
         </p:nvSpPr>
         <p:spPr/>
@@ -21431,9 +21353,61 @@
           <a:bodyPr wrap="square"/>
           <a:lstStyle/>
           <a:p>
+            <a:pPr/>
             <a:r>
               <a:rPr sz="1800"/>
-              <a:t>このスライドには発表者向けのノートが埋め込まれています。</a:t>
+              <a:t>左の項目1</a:t>
+            </a:r>
+          </a:p>
+          <a:p>
+            <a:pPr/>
+            <a:r>
+              <a:rPr sz="1800"/>
+              <a:t>左の項目2</a:t>
+            </a:r>
+          </a:p>
+          <a:p>
+            <a:pPr/>
+            <a:r>
+              <a:rPr sz="1800"/>
+              <a:t>左の項目3</a:t>
+            </a:r>
+          </a:p>
+        </p:txBody>
+      </p:sp>
+      <p:sp>
+        <p:nvSpPr>
+          <p:cNvPr id="4" name="Content Placeholder 3"/>
+          <p:cNvSpPr>
+            <a:spLocks noGrp="1"/>
+          </p:cNvSpPr>
+          <p:nvPr>
+            <p:ph idx="2" sz="half"/>
+          </p:nvPr>
+        </p:nvSpPr>
+        <p:spPr/>
+        <p:txBody>
+          <a:bodyPr wrap="square"/>
+          <a:lstStyle/>
+          <a:p>
+            <a:pPr/>
+            <a:r>
+              <a:rPr sz="1800"/>
+              <a:t>右の項目1</a:t>
+            </a:r>
+          </a:p>
+          <a:p>
+            <a:pPr/>
+            <a:r>
+              <a:rPr sz="1800"/>
+              <a:t>右の項目2</a:t>
+            </a:r>
+          </a:p>
+          <a:p>
+            <a:pPr/>
+            <a:r>
+              <a:rPr sz="1800"/>
+              <a:t>右の項目3</a:t>
             </a:r>
           </a:p>
         </p:txBody>
@@ -21470,7 +21444,11 @@
         <p:txBody>
           <a:bodyPr/>
           <a:lstStyle/>
-          <a:p/>
+          <a:p>
+            <a:r>
+              <a:t>スピーカーノート付きスライド</a:t>
+            </a:r>
+          </a:p>
         </p:txBody>
       </p:sp>
       <p:sp>
@@ -21490,7 +21468,7 @@
           <a:p>
             <a:r>
               <a:rPr sz="1800"/>
-              <a:t>水平区切り線（---）によって生成されたタイトルなしスライドです。</a:t>
+              <a:t>このスライドには発表者向けのノートが埋め込まれています。</a:t>
             </a:r>
           </a:p>
         </p:txBody>
@@ -21527,28 +21505,29 @@
         <p:txBody>
           <a:bodyPr/>
           <a:lstStyle/>
-          <a:p>
-            <a:r>
-              <a:t>まとめ</a:t>
-            </a:r>
-          </a:p>
-        </p:txBody>
-      </p:sp>
-      <p:sp>
-        <p:nvSpPr>
-          <p:cNvPr id="3" name="Text Placeholder 2"/>
+          <a:p/>
+        </p:txBody>
+      </p:sp>
+      <p:sp>
+        <p:nvSpPr>
+          <p:cNvPr id="3" name="Content Placeholder 2"/>
           <p:cNvSpPr>
             <a:spLocks noGrp="1"/>
           </p:cNvSpPr>
           <p:nvPr>
-            <p:ph type="body" idx="1"/>
+            <p:ph idx="1"/>
           </p:nvPr>
         </p:nvSpPr>
         <p:spPr/>
         <p:txBody>
-          <a:bodyPr/>
-          <a:lstStyle/>
-          <a:p/>
+          <a:bodyPr wrap="square"/>
+          <a:lstStyle/>
+          <a:p>
+            <a:r>
+              <a:rPr sz="1800"/>
+              <a:t>水平区切り線（---）によって生成されたタイトルなしスライドです。</a:t>
+            </a:r>
+          </a:p>
         </p:txBody>
       </p:sp>
     </p:spTree>
@@ -21560,6 +21539,62 @@
 </file>
 
 <file path=ppt/slides/slide48.xml><?xml version="1.0" encoding="utf-8"?>
+<p:sld xmlns:a="http://schemas.openxmlformats.org/drawingml/2006/main" xmlns:p="http://schemas.openxmlformats.org/presentationml/2006/main" xmlns:r="http://schemas.openxmlformats.org/officeDocument/2006/relationships">
+  <p:cSld>
+    <p:spTree>
+      <p:nvGrpSpPr>
+        <p:cNvPr id="1" name=""/>
+        <p:cNvGrpSpPr/>
+        <p:nvPr/>
+      </p:nvGrpSpPr>
+      <p:grpSpPr/>
+      <p:sp>
+        <p:nvSpPr>
+          <p:cNvPr id="2" name="Title 1"/>
+          <p:cNvSpPr>
+            <a:spLocks noGrp="1"/>
+          </p:cNvSpPr>
+          <p:nvPr>
+            <p:ph type="title"/>
+          </p:nvPr>
+        </p:nvSpPr>
+        <p:spPr/>
+        <p:txBody>
+          <a:bodyPr/>
+          <a:lstStyle/>
+          <a:p>
+            <a:r>
+              <a:t>まとめ</a:t>
+            </a:r>
+          </a:p>
+        </p:txBody>
+      </p:sp>
+      <p:sp>
+        <p:nvSpPr>
+          <p:cNvPr id="3" name="Text Placeholder 2"/>
+          <p:cNvSpPr>
+            <a:spLocks noGrp="1"/>
+          </p:cNvSpPr>
+          <p:nvPr>
+            <p:ph type="body" idx="1"/>
+          </p:nvPr>
+        </p:nvSpPr>
+        <p:spPr/>
+        <p:txBody>
+          <a:bodyPr/>
+          <a:lstStyle/>
+          <a:p/>
+        </p:txBody>
+      </p:sp>
+    </p:spTree>
+  </p:cSld>
+  <p:clrMapOvr>
+    <a:masterClrMapping/>
+  </p:clrMapOvr>
+</p:sld>
+</file>
+
+<file path=ppt/slides/slide49.xml><?xml version="1.0" encoding="utf-8"?>
 <p:sld xmlns:a="http://schemas.openxmlformats.org/drawingml/2006/main" xmlns:p="http://schemas.openxmlformats.org/presentationml/2006/main" xmlns:r="http://schemas.openxmlformats.org/officeDocument/2006/relationships">
   <p:cSld>
     <p:spTree>

--- a/demo_full.pptx
+++ b/demo_full.pptx
@@ -244,6 +244,7 @@
           </c:val>
         </c:ser>
         <c:dLbls>
+          <c:dLblPos val="bestFit"/>
           <c:showLegendKey val="0"/>
           <c:showVal val="0"/>
           <c:showCatName val="1"/>
@@ -251,7 +252,6 @@
           <c:showPercent val="1"/>
           <c:showBubbleSize val="0"/>
           <c:showLeaderLines val="1"/>
-          <c:dLblPos val="bestFit"/>
         </c:dLbls>
       </c:pieChart>
     </c:plotArea>
@@ -357,6 +357,7 @@
           </c:val>
         </c:ser>
         <c:dLbls>
+          <c:dLblPos val="bestFit"/>
           <c:showLegendKey val="0"/>
           <c:showVal val="1"/>
           <c:showCatName val="1"/>
@@ -364,7 +365,6 @@
           <c:showPercent val="1"/>
           <c:showBubbleSize val="0"/>
           <c:showLeaderLines val="1"/>
-          <c:dLblPos val="bestFit"/>
         </c:dLbls>
       </c:pieChart>
     </c:plotArea>
@@ -3791,7 +3791,14 @@
         <p:cNvGrpSpPr/>
         <p:nvPr/>
       </p:nvGrpSpPr>
-      <p:grpSpPr/>
+      <p:grpSpPr>
+        <a:xfrm>
+          <a:off x="0" y="0"/>
+          <a:ext cx="0" cy="0"/>
+          <a:chOff x="0" y="0"/>
+          <a:chExt cx="0" cy="0"/>
+        </a:xfrm>
+      </p:grpSpPr>
       <p:sp>
         <p:nvSpPr>
           <p:cNvPr id="2" name="Title 1"/>
@@ -3854,7 +3861,14 @@
         <p:cNvGrpSpPr/>
         <p:nvPr/>
       </p:nvGrpSpPr>
-      <p:grpSpPr/>
+      <p:grpSpPr>
+        <a:xfrm>
+          <a:off x="0" y="0"/>
+          <a:ext cx="0" cy="0"/>
+          <a:chOff x="0" y="0"/>
+          <a:chExt cx="0" cy="0"/>
+        </a:xfrm>
+      </p:grpSpPr>
       <p:sp>
         <p:nvSpPr>
           <p:cNvPr id="2" name="Title 1"/>
@@ -4053,7 +4067,14 @@
         <p:cNvGrpSpPr/>
         <p:nvPr/>
       </p:nvGrpSpPr>
-      <p:grpSpPr/>
+      <p:grpSpPr>
+        <a:xfrm>
+          <a:off x="0" y="0"/>
+          <a:ext cx="0" cy="0"/>
+          <a:chOff x="0" y="0"/>
+          <a:chExt cx="0" cy="0"/>
+        </a:xfrm>
+      </p:grpSpPr>
       <p:sp>
         <p:nvSpPr>
           <p:cNvPr id="2" name="Title 1"/>
@@ -4324,7 +4345,14 @@
         <p:cNvGrpSpPr/>
         <p:nvPr/>
       </p:nvGrpSpPr>
-      <p:grpSpPr/>
+      <p:grpSpPr>
+        <a:xfrm>
+          <a:off x="0" y="0"/>
+          <a:ext cx="0" cy="0"/>
+          <a:chOff x="0" y="0"/>
+          <a:chExt cx="0" cy="0"/>
+        </a:xfrm>
+      </p:grpSpPr>
       <p:sp>
         <p:nvSpPr>
           <p:cNvPr id="2" name="Title 1"/>
@@ -4380,7 +4408,14 @@
         <p:cNvGrpSpPr/>
         <p:nvPr/>
       </p:nvGrpSpPr>
-      <p:grpSpPr/>
+      <p:grpSpPr>
+        <a:xfrm>
+          <a:off x="0" y="0"/>
+          <a:ext cx="0" cy="0"/>
+          <a:chOff x="0" y="0"/>
+          <a:chExt cx="0" cy="0"/>
+        </a:xfrm>
+      </p:grpSpPr>
       <p:sp>
         <p:nvSpPr>
           <p:cNvPr id="2" name="Title 1"/>
@@ -5464,7 +5499,14 @@
         <p:cNvGrpSpPr/>
         <p:nvPr/>
       </p:nvGrpSpPr>
-      <p:grpSpPr/>
+      <p:grpSpPr>
+        <a:xfrm>
+          <a:off x="0" y="0"/>
+          <a:ext cx="0" cy="0"/>
+          <a:chOff x="0" y="0"/>
+          <a:chExt cx="0" cy="0"/>
+        </a:xfrm>
+      </p:grpSpPr>
       <p:sp>
         <p:nvSpPr>
           <p:cNvPr id="2" name="Title 1"/>
@@ -6332,6 +6374,11 @@
         </p:style>
       </p:cxnSp>
       <p:grpSp>
+        <p:nvGrpSpPr>
+          <p:cNvPr id="33" name="グループ 33"/>
+          <p:cNvGrpSpPr/>
+          <p:nvPr/>
+        </p:nvGrpSpPr>
         <p:grpSpPr>
           <a:xfrm>
             <a:off x="3372000" y="2405392"/>
@@ -6448,6 +6495,11 @@
         </p:sp>
       </p:grpSp>
       <p:grpSp>
+        <p:nvGrpSpPr>
+          <p:cNvPr id="34" name="グループ 34"/>
+          <p:cNvGrpSpPr/>
+          <p:nvPr/>
+        </p:nvGrpSpPr>
         <p:grpSpPr>
           <a:xfrm>
             <a:off x="457200" y="4015777"/>
@@ -6613,7 +6665,14 @@
         <p:cNvGrpSpPr/>
         <p:nvPr/>
       </p:nvGrpSpPr>
-      <p:grpSpPr/>
+      <p:grpSpPr>
+        <a:xfrm>
+          <a:off x="0" y="0"/>
+          <a:ext cx="0" cy="0"/>
+          <a:chOff x="0" y="0"/>
+          <a:chExt cx="0" cy="0"/>
+        </a:xfrm>
+      </p:grpSpPr>
       <p:sp>
         <p:nvSpPr>
           <p:cNvPr id="2" name="Title 1"/>
@@ -7219,6 +7278,11 @@
         </p:style>
       </p:cxnSp>
       <p:grpSp>
+        <p:nvGrpSpPr>
+          <p:cNvPr id="27" name="グループ 27"/>
+          <p:cNvGrpSpPr/>
+          <p:nvPr/>
+        </p:nvGrpSpPr>
         <p:grpSpPr>
           <a:xfrm>
             <a:off x="2064600" y="1600200"/>
@@ -7302,6 +7366,11 @@
         </p:sp>
       </p:grpSp>
       <p:grpSp>
+        <p:nvGrpSpPr>
+          <p:cNvPr id="28" name="グループ 28"/>
+          <p:cNvGrpSpPr/>
+          <p:nvPr/>
+        </p:nvGrpSpPr>
         <p:grpSpPr>
           <a:xfrm>
             <a:off x="2064600" y="2405392"/>
@@ -7385,6 +7454,11 @@
         </p:sp>
       </p:grpSp>
       <p:grpSp>
+        <p:nvGrpSpPr>
+          <p:cNvPr id="29" name="グループ 29"/>
+          <p:cNvGrpSpPr/>
+          <p:nvPr/>
+        </p:nvGrpSpPr>
         <p:grpSpPr>
           <a:xfrm>
             <a:off x="2064600" y="3210585"/>
@@ -7468,6 +7542,11 @@
         </p:sp>
       </p:grpSp>
       <p:grpSp>
+        <p:nvGrpSpPr>
+          <p:cNvPr id="30" name="グループ 30"/>
+          <p:cNvGrpSpPr/>
+          <p:nvPr/>
+        </p:nvGrpSpPr>
         <p:grpSpPr>
           <a:xfrm>
             <a:off x="2064600" y="5501164"/>
@@ -7567,7 +7646,14 @@
         <p:cNvGrpSpPr/>
         <p:nvPr/>
       </p:nvGrpSpPr>
-      <p:grpSpPr/>
+      <p:grpSpPr>
+        <a:xfrm>
+          <a:off x="0" y="0"/>
+          <a:ext cx="0" cy="0"/>
+          <a:chOff x="0" y="0"/>
+          <a:chExt cx="0" cy="0"/>
+        </a:xfrm>
+      </p:grpSpPr>
       <p:sp>
         <p:nvSpPr>
           <p:cNvPr id="2" name="Title 1"/>
@@ -8755,7 +8841,14 @@
         <p:cNvGrpSpPr/>
         <p:nvPr/>
       </p:nvGrpSpPr>
-      <p:grpSpPr/>
+      <p:grpSpPr>
+        <a:xfrm>
+          <a:off x="0" y="0"/>
+          <a:ext cx="0" cy="0"/>
+          <a:chOff x="0" y="0"/>
+          <a:chExt cx="0" cy="0"/>
+        </a:xfrm>
+      </p:grpSpPr>
       <p:sp>
         <p:nvSpPr>
           <p:cNvPr id="4" name="Rectangle 3"/>
@@ -9820,7 +9913,14 @@
         <p:cNvGrpSpPr/>
         <p:nvPr/>
       </p:nvGrpSpPr>
-      <p:grpSpPr/>
+      <p:grpSpPr>
+        <a:xfrm>
+          <a:off x="0" y="0"/>
+          <a:ext cx="0" cy="0"/>
+          <a:chOff x="0" y="0"/>
+          <a:chExt cx="0" cy="0"/>
+        </a:xfrm>
+      </p:grpSpPr>
       <p:sp>
         <p:nvSpPr>
           <p:cNvPr id="2" name="Title 1"/>
@@ -11484,7 +11584,14 @@
         <p:cNvGrpSpPr/>
         <p:nvPr/>
       </p:nvGrpSpPr>
-      <p:grpSpPr/>
+      <p:grpSpPr>
+        <a:xfrm>
+          <a:off x="0" y="0"/>
+          <a:ext cx="0" cy="0"/>
+          <a:chOff x="0" y="0"/>
+          <a:chExt cx="0" cy="0"/>
+        </a:xfrm>
+      </p:grpSpPr>
       <p:sp>
         <p:nvSpPr>
           <p:cNvPr id="2" name="Title 1"/>
@@ -12908,7 +13015,14 @@
         <p:cNvGrpSpPr/>
         <p:nvPr/>
       </p:nvGrpSpPr>
-      <p:grpSpPr/>
+      <p:grpSpPr>
+        <a:xfrm>
+          <a:off x="0" y="0"/>
+          <a:ext cx="0" cy="0"/>
+          <a:chOff x="0" y="0"/>
+          <a:chExt cx="0" cy="0"/>
+        </a:xfrm>
+      </p:grpSpPr>
       <p:sp>
         <p:nvSpPr>
           <p:cNvPr id="2" name="Title 1"/>
@@ -12964,7 +13078,14 @@
         <p:cNvGrpSpPr/>
         <p:nvPr/>
       </p:nvGrpSpPr>
-      <p:grpSpPr/>
+      <p:grpSpPr>
+        <a:xfrm>
+          <a:off x="0" y="0"/>
+          <a:ext cx="0" cy="0"/>
+          <a:chOff x="0" y="0"/>
+          <a:chExt cx="0" cy="0"/>
+        </a:xfrm>
+      </p:grpSpPr>
       <p:sp>
         <p:nvSpPr>
           <p:cNvPr id="2" name="Title 1"/>
@@ -13396,6 +13517,11 @@
         </p:style>
       </p:cxnSp>
       <p:grpSp>
+        <p:nvGrpSpPr>
+          <p:cNvPr id="21" name="グループ 21"/>
+          <p:cNvGrpSpPr/>
+          <p:nvPr/>
+        </p:nvGrpSpPr>
         <p:grpSpPr>
           <a:xfrm>
             <a:off x="3972000" y="2707339"/>
@@ -13492,6 +13618,11 @@
         </p:sp>
       </p:grpSp>
       <p:grpSp>
+        <p:nvGrpSpPr>
+          <p:cNvPr id="22" name="グループ 22"/>
+          <p:cNvGrpSpPr/>
+          <p:nvPr/>
+        </p:nvGrpSpPr>
         <p:grpSpPr>
           <a:xfrm>
             <a:off x="3372000" y="3613181"/>
@@ -13621,6 +13752,11 @@
         </p:sp>
       </p:grpSp>
       <p:grpSp>
+        <p:nvGrpSpPr>
+          <p:cNvPr id="23" name="グループ 23"/>
+          <p:cNvGrpSpPr/>
+          <p:nvPr/>
+        </p:nvGrpSpPr>
         <p:grpSpPr>
           <a:xfrm>
             <a:off x="808679" y="4394023"/>
@@ -13733,7 +13869,14 @@
         <p:cNvGrpSpPr/>
         <p:nvPr/>
       </p:nvGrpSpPr>
-      <p:grpSpPr/>
+      <p:grpSpPr>
+        <a:xfrm>
+          <a:off x="0" y="0"/>
+          <a:ext cx="0" cy="0"/>
+          <a:chOff x="0" y="0"/>
+          <a:chExt cx="0" cy="0"/>
+        </a:xfrm>
+      </p:grpSpPr>
       <p:sp>
         <p:nvSpPr>
           <p:cNvPr id="2" name="Title 1"/>
@@ -13780,7 +13923,84 @@
         </p:nvSpPr>
         <p:spPr>
           <a:xfrm>
-            <a:off x="2272000" y="2188180"/>
+            <a:off x="2872000" y="2653181"/>
+            <a:ext cx="3400000" cy="2420000"/>
+          </a:xfrm>
+          <a:prstGeom prst="roundRect">
+            <a:avLst/>
+          </a:prstGeom>
+          <a:solidFill>
+            <a:srgbClr val="EEF4FF"/>
+          </a:solidFill>
+          <a:ln>
+            <a:solidFill>
+              <a:srgbClr val="4664AA"/>
+            </a:solidFill>
+          </a:ln>
+        </p:spPr>
+        <p:style>
+          <a:lnRef idx="1">
+            <a:schemeClr val="accent1"/>
+          </a:lnRef>
+          <a:fillRef idx="3">
+            <a:schemeClr val="accent1"/>
+          </a:fillRef>
+          <a:effectRef idx="2">
+            <a:schemeClr val="accent1"/>
+          </a:effectRef>
+          <a:fontRef idx="minor">
+            <a:schemeClr val="lt1"/>
+          </a:fontRef>
+        </p:style>
+        <p:txBody>
+          <a:bodyPr rtlCol="0" anchor="ctr"/>
+          <a:lstStyle/>
+          <a:p/>
+        </p:txBody>
+      </p:sp>
+      <p:sp>
+        <p:nvSpPr>
+          <p:cNvPr id="5" name="TextBox 4"/>
+          <p:cNvSpPr txBox="1"/>
+          <p:nvPr/>
+        </p:nvSpPr>
+        <p:spPr>
+          <a:xfrm>
+            <a:off x="2872000" y="2653181"/>
+            <a:ext cx="3400000" cy="420000"/>
+          </a:xfrm>
+          <a:prstGeom prst="rect">
+            <a:avLst/>
+          </a:prstGeom>
+          <a:noFill/>
+        </p:spPr>
+        <p:txBody>
+          <a:bodyPr wrap="none">
+            <a:spAutoFit/>
+          </a:bodyPr>
+          <a:lstStyle/>
+          <a:p>
+            <a:pPr algn="ctr"/>
+            <a:r>
+              <a:rPr sz="1100" b="1">
+                <a:solidFill>
+                  <a:srgbClr val="4664AA"/>
+                </a:solidFill>
+              </a:rPr>
+              <a:t>Active</a:t>
+            </a:r>
+          </a:p>
+        </p:txBody>
+      </p:sp>
+      <p:sp>
+        <p:nvSpPr>
+          <p:cNvPr id="6" name="Rounded Rectangle 5"/>
+          <p:cNvSpPr/>
+          <p:nvPr/>
+        </p:nvSpPr>
+        <p:spPr>
+          <a:xfrm>
+            <a:off x="2272000" y="3538181"/>
             <a:ext cx="4600000" cy="2420000"/>
           </a:xfrm>
           <a:prstGeom prst="roundRect">
@@ -13818,13 +14038,13 @@
       </p:sp>
       <p:sp>
         <p:nvSpPr>
-          <p:cNvPr id="5" name="Rounded Rectangle 4"/>
+          <p:cNvPr id="7" name="Rounded Rectangle 6"/>
           <p:cNvSpPr/>
           <p:nvPr/>
         </p:nvSpPr>
         <p:spPr>
           <a:xfrm>
-            <a:off x="2272000" y="3538181"/>
+            <a:off x="2272000" y="2188180"/>
             <a:ext cx="4600000" cy="2420000"/>
           </a:xfrm>
           <a:prstGeom prst="roundRect">
@@ -13862,83 +14082,6 @@
       </p:sp>
       <p:sp>
         <p:nvSpPr>
-          <p:cNvPr id="6" name="Rounded Rectangle 5"/>
-          <p:cNvSpPr/>
-          <p:nvPr/>
-        </p:nvSpPr>
-        <p:spPr>
-          <a:xfrm>
-            <a:off x="2872000" y="2653181"/>
-            <a:ext cx="3400000" cy="2420000"/>
-          </a:xfrm>
-          <a:prstGeom prst="roundRect">
-            <a:avLst/>
-          </a:prstGeom>
-          <a:solidFill>
-            <a:srgbClr val="EEF4FF"/>
-          </a:solidFill>
-          <a:ln>
-            <a:solidFill>
-              <a:srgbClr val="4664AA"/>
-            </a:solidFill>
-          </a:ln>
-        </p:spPr>
-        <p:style>
-          <a:lnRef idx="1">
-            <a:schemeClr val="accent1"/>
-          </a:lnRef>
-          <a:fillRef idx="3">
-            <a:schemeClr val="accent1"/>
-          </a:fillRef>
-          <a:effectRef idx="2">
-            <a:schemeClr val="accent1"/>
-          </a:effectRef>
-          <a:fontRef idx="minor">
-            <a:schemeClr val="lt1"/>
-          </a:fontRef>
-        </p:style>
-        <p:txBody>
-          <a:bodyPr rtlCol="0" anchor="ctr"/>
-          <a:lstStyle/>
-          <a:p/>
-        </p:txBody>
-      </p:sp>
-      <p:sp>
-        <p:nvSpPr>
-          <p:cNvPr id="7" name="TextBox 6"/>
-          <p:cNvSpPr txBox="1"/>
-          <p:nvPr/>
-        </p:nvSpPr>
-        <p:spPr>
-          <a:xfrm>
-            <a:off x="2872000" y="2653181"/>
-            <a:ext cx="3400000" cy="420000"/>
-          </a:xfrm>
-          <a:prstGeom prst="rect">
-            <a:avLst/>
-          </a:prstGeom>
-          <a:noFill/>
-        </p:spPr>
-        <p:txBody>
-          <a:bodyPr wrap="none">
-            <a:spAutoFit/>
-          </a:bodyPr>
-          <a:lstStyle/>
-          <a:p>
-            <a:pPr algn="ctr"/>
-            <a:r>
-              <a:rPr sz="1100" b="1">
-                <a:solidFill>
-                  <a:srgbClr val="4664AA"/>
-                </a:solidFill>
-              </a:rPr>
-              <a:t>Active</a:t>
-            </a:r>
-          </a:p>
-        </p:txBody>
-      </p:sp>
-      <p:sp>
-        <p:nvSpPr>
           <p:cNvPr id="8" name="Oval 7"/>
           <p:cNvSpPr/>
           <p:nvPr/>
@@ -14199,7 +14342,7 @@
           <p:cNvPr id="18" name="Connector 17"/>
           <p:cNvCxnSpPr>
             <a:stCxn id="8" idx="1"/>
-            <a:endCxn id="6" idx="3"/>
+            <a:endCxn id="4" idx="3"/>
           </p:cNvCxnSpPr>
           <p:nvPr/>
         </p:nvCxnSpPr>
@@ -14450,7 +14593,7 @@
         <p:nvCxnSpPr>
           <p:cNvPr id="29" name="Connector 28"/>
           <p:cNvCxnSpPr>
-            <a:stCxn id="6" idx="1"/>
+            <a:stCxn id="4" idx="1"/>
             <a:endCxn id="9" idx="3"/>
           </p:cNvCxnSpPr>
           <p:nvPr/>
@@ -14483,6 +14626,11 @@
         </p:style>
       </p:cxnSp>
       <p:grpSp>
+        <p:nvGrpSpPr>
+          <p:cNvPr id="30" name="グループ 30"/>
+          <p:cNvGrpSpPr/>
+          <p:nvPr/>
+        </p:nvGrpSpPr>
         <p:grpSpPr>
           <a:xfrm>
             <a:off x="3972000" y="3358180"/>
@@ -14579,6 +14727,11 @@
         </p:sp>
       </p:grpSp>
       <p:grpSp>
+        <p:nvGrpSpPr>
+          <p:cNvPr id="31" name="グループ 31"/>
+          <p:cNvGrpSpPr/>
+          <p:nvPr/>
+        </p:nvGrpSpPr>
         <p:grpSpPr>
           <a:xfrm>
             <a:off x="4992000" y="3358180"/>
@@ -14675,6 +14828,11 @@
         </p:sp>
       </p:grpSp>
       <p:grpSp>
+        <p:nvGrpSpPr>
+          <p:cNvPr id="32" name="グループ 32"/>
+          <p:cNvGrpSpPr/>
+          <p:nvPr/>
+        </p:nvGrpSpPr>
         <p:grpSpPr>
           <a:xfrm>
             <a:off x="3972000" y="4708181"/>
@@ -14771,6 +14929,11 @@
         </p:sp>
       </p:grpSp>
       <p:grpSp>
+        <p:nvGrpSpPr>
+          <p:cNvPr id="33" name="グループ 33"/>
+          <p:cNvGrpSpPr/>
+          <p:nvPr/>
+        </p:nvGrpSpPr>
         <p:grpSpPr>
           <a:xfrm>
             <a:off x="4992000" y="4708181"/>
@@ -14883,7 +15046,14 @@
         <p:cNvGrpSpPr/>
         <p:nvPr/>
       </p:nvGrpSpPr>
-      <p:grpSpPr/>
+      <p:grpSpPr>
+        <a:xfrm>
+          <a:off x="0" y="0"/>
+          <a:ext cx="0" cy="0"/>
+          <a:chOff x="0" y="0"/>
+          <a:chExt cx="0" cy="0"/>
+        </a:xfrm>
+      </p:grpSpPr>
       <p:sp>
         <p:nvSpPr>
           <p:cNvPr id="2" name="Title 1"/>
@@ -15517,6 +15687,11 @@
         </p:style>
       </p:cxnSp>
       <p:grpSp>
+        <p:nvGrpSpPr>
+          <p:cNvPr id="26" name="グループ 26"/>
+          <p:cNvGrpSpPr/>
+          <p:nvPr/>
+        </p:nvGrpSpPr>
         <p:grpSpPr>
           <a:xfrm>
             <a:off x="3372000" y="2707339"/>
@@ -15646,6 +15821,11 @@
         </p:sp>
       </p:grpSp>
       <p:grpSp>
+        <p:nvGrpSpPr>
+          <p:cNvPr id="27" name="グループ 27"/>
+          <p:cNvGrpSpPr/>
+          <p:nvPr/>
+        </p:nvGrpSpPr>
         <p:grpSpPr>
           <a:xfrm>
             <a:off x="3972000" y="4054022"/>
@@ -15742,6 +15922,11 @@
         </p:sp>
       </p:grpSp>
       <p:grpSp>
+        <p:nvGrpSpPr>
+          <p:cNvPr id="28" name="グループ 28"/>
+          <p:cNvGrpSpPr/>
+          <p:nvPr/>
+        </p:nvGrpSpPr>
         <p:grpSpPr>
           <a:xfrm>
             <a:off x="3972000" y="5279023"/>
@@ -15854,7 +16039,14 @@
         <p:cNvGrpSpPr/>
         <p:nvPr/>
       </p:nvGrpSpPr>
-      <p:grpSpPr/>
+      <p:grpSpPr>
+        <a:xfrm>
+          <a:off x="0" y="0"/>
+          <a:ext cx="0" cy="0"/>
+          <a:chOff x="0" y="0"/>
+          <a:chExt cx="0" cy="0"/>
+        </a:xfrm>
+      </p:grpSpPr>
       <p:sp>
         <p:nvSpPr>
           <p:cNvPr id="2" name="Title 1"/>
@@ -15894,6 +16086,11 @@
         </p:txBody>
       </p:sp>
       <p:grpSp>
+        <p:nvGrpSpPr>
+          <p:cNvPr id="33" name="グループ 33"/>
+          <p:cNvGrpSpPr/>
+          <p:nvPr/>
+        </p:nvGrpSpPr>
         <p:grpSpPr>
           <a:xfrm>
             <a:off x="6019516" y="4036394"/>
@@ -16261,6 +16458,11 @@
         </p:sp>
       </p:grpSp>
       <p:grpSp>
+        <p:nvGrpSpPr>
+          <p:cNvPr id="34" name="グループ 34"/>
+          <p:cNvGrpSpPr/>
+          <p:nvPr/>
+        </p:nvGrpSpPr>
         <p:grpSpPr>
           <a:xfrm>
             <a:off x="5045176" y="2502705"/>
@@ -16657,6 +16859,11 @@
         </p:sp>
       </p:grpSp>
       <p:grpSp>
+        <p:nvGrpSpPr>
+          <p:cNvPr id="35" name="グループ 35"/>
+          <p:cNvGrpSpPr/>
+          <p:nvPr/>
+        </p:nvGrpSpPr>
         <p:grpSpPr>
           <a:xfrm>
             <a:off x="2496601" y="1800200"/>
@@ -17006,6 +17213,11 @@
         </p:sp>
       </p:grpSp>
       <p:grpSp>
+        <p:nvGrpSpPr>
+          <p:cNvPr id="36" name="グループ 36"/>
+          <p:cNvGrpSpPr/>
+          <p:nvPr/>
+        </p:nvGrpSpPr>
         <p:grpSpPr>
           <a:xfrm>
             <a:off x="657200" y="3090233"/>
@@ -17366,7 +17578,7 @@
       </p:grpSp>
       <p:cxnSp>
         <p:nvCxnSpPr>
-          <p:cNvPr id="33" name="Connector 32"/>
+          <p:cNvPr id="37" name="Connector 36"/>
           <p:cNvCxnSpPr>
             <a:stCxn id="4" idx="0"/>
             <a:endCxn id="9" idx="2"/>
@@ -17404,7 +17616,7 @@
       </p:cxnSp>
       <p:cxnSp>
         <p:nvCxnSpPr>
-          <p:cNvPr id="34" name="Connector 33"/>
+          <p:cNvPr id="38" name="Connector 37"/>
           <p:cNvCxnSpPr>
             <a:stCxn id="9" idx="3"/>
             <a:endCxn id="14" idx="1"/>
@@ -17442,7 +17654,7 @@
       </p:cxnSp>
       <p:cxnSp>
         <p:nvCxnSpPr>
-          <p:cNvPr id="35" name="Connector 34"/>
+          <p:cNvPr id="39" name="Connector 38"/>
           <p:cNvCxnSpPr>
             <a:stCxn id="19" idx="1"/>
             <a:endCxn id="14" idx="3"/>
@@ -17496,7 +17708,14 @@
         <p:cNvGrpSpPr/>
         <p:nvPr/>
       </p:nvGrpSpPr>
-      <p:grpSpPr/>
+      <p:grpSpPr>
+        <a:xfrm>
+          <a:off x="0" y="0"/>
+          <a:ext cx="0" cy="0"/>
+          <a:chOff x="0" y="0"/>
+          <a:chExt cx="0" cy="0"/>
+        </a:xfrm>
+      </p:grpSpPr>
       <p:sp>
         <p:nvSpPr>
           <p:cNvPr id="2" name="Title 1"/>
@@ -17592,7 +17811,14 @@
         <p:cNvGrpSpPr/>
         <p:nvPr/>
       </p:nvGrpSpPr>
-      <p:grpSpPr/>
+      <p:grpSpPr>
+        <a:xfrm>
+          <a:off x="0" y="0"/>
+          <a:ext cx="0" cy="0"/>
+          <a:chOff x="0" y="0"/>
+          <a:chExt cx="0" cy="0"/>
+        </a:xfrm>
+      </p:grpSpPr>
       <p:sp>
         <p:nvSpPr>
           <p:cNvPr id="2" name="Title 1"/>
@@ -17666,7 +17892,14 @@
         <p:cNvGrpSpPr/>
         <p:nvPr/>
       </p:nvGrpSpPr>
-      <p:grpSpPr/>
+      <p:grpSpPr>
+        <a:xfrm>
+          <a:off x="0" y="0"/>
+          <a:ext cx="0" cy="0"/>
+          <a:chOff x="0" y="0"/>
+          <a:chExt cx="0" cy="0"/>
+        </a:xfrm>
+      </p:grpSpPr>
       <p:sp>
         <p:nvSpPr>
           <p:cNvPr id="2" name="Title 1"/>
@@ -17740,7 +17973,14 @@
         <p:cNvGrpSpPr/>
         <p:nvPr/>
       </p:nvGrpSpPr>
-      <p:grpSpPr/>
+      <p:grpSpPr>
+        <a:xfrm>
+          <a:off x="0" y="0"/>
+          <a:ext cx="0" cy="0"/>
+          <a:chOff x="0" y="0"/>
+          <a:chExt cx="0" cy="0"/>
+        </a:xfrm>
+      </p:grpSpPr>
       <p:sp>
         <p:nvSpPr>
           <p:cNvPr id="2" name="Title 1"/>
@@ -17838,7 +18078,14 @@
         <p:cNvGrpSpPr/>
         <p:nvPr/>
       </p:nvGrpSpPr>
-      <p:grpSpPr/>
+      <p:grpSpPr>
+        <a:xfrm>
+          <a:off x="0" y="0"/>
+          <a:ext cx="0" cy="0"/>
+          <a:chOff x="0" y="0"/>
+          <a:chExt cx="0" cy="0"/>
+        </a:xfrm>
+      </p:grpSpPr>
       <p:sp>
         <p:nvSpPr>
           <p:cNvPr id="2" name="Title 1"/>
@@ -17938,7 +18185,14 @@
         <p:cNvGrpSpPr/>
         <p:nvPr/>
       </p:nvGrpSpPr>
-      <p:grpSpPr/>
+      <p:grpSpPr>
+        <a:xfrm>
+          <a:off x="0" y="0"/>
+          <a:ext cx="0" cy="0"/>
+          <a:chOff x="0" y="0"/>
+          <a:chExt cx="0" cy="0"/>
+        </a:xfrm>
+      </p:grpSpPr>
       <p:sp>
         <p:nvSpPr>
           <p:cNvPr id="2" name="Title 1"/>
@@ -18034,7 +18288,14 @@
         <p:cNvGrpSpPr/>
         <p:nvPr/>
       </p:nvGrpSpPr>
-      <p:grpSpPr/>
+      <p:grpSpPr>
+        <a:xfrm>
+          <a:off x="0" y="0"/>
+          <a:ext cx="0" cy="0"/>
+          <a:chOff x="0" y="0"/>
+          <a:chExt cx="0" cy="0"/>
+        </a:xfrm>
+      </p:grpSpPr>
       <p:sp>
         <p:nvSpPr>
           <p:cNvPr id="2" name="Title 1"/>
@@ -18095,7 +18356,14 @@
         <p:cNvGrpSpPr/>
         <p:nvPr/>
       </p:nvGrpSpPr>
-      <p:grpSpPr/>
+      <p:grpSpPr>
+        <a:xfrm>
+          <a:off x="0" y="0"/>
+          <a:ext cx="0" cy="0"/>
+          <a:chOff x="0" y="0"/>
+          <a:chExt cx="0" cy="0"/>
+        </a:xfrm>
+      </p:grpSpPr>
       <p:sp>
         <p:nvSpPr>
           <p:cNvPr id="2" name="Title 1"/>
@@ -19823,7 +20091,14 @@
         <p:cNvGrpSpPr/>
         <p:nvPr/>
       </p:nvGrpSpPr>
-      <p:grpSpPr/>
+      <p:grpSpPr>
+        <a:xfrm>
+          <a:off x="0" y="0"/>
+          <a:ext cx="0" cy="0"/>
+          <a:chOff x="0" y="0"/>
+          <a:chExt cx="0" cy="0"/>
+        </a:xfrm>
+      </p:grpSpPr>
       <p:sp>
         <p:nvSpPr>
           <p:cNvPr id="2" name="Title 1"/>
@@ -19922,7 +20197,14 @@
         <p:cNvGrpSpPr/>
         <p:nvPr/>
       </p:nvGrpSpPr>
-      <p:grpSpPr/>
+      <p:grpSpPr>
+        <a:xfrm>
+          <a:off x="0" y="0"/>
+          <a:ext cx="0" cy="0"/>
+          <a:chOff x="0" y="0"/>
+          <a:chExt cx="0" cy="0"/>
+        </a:xfrm>
+      </p:grpSpPr>
       <p:sp>
         <p:nvSpPr>
           <p:cNvPr id="2" name="Title 1"/>
@@ -20016,7 +20298,14 @@
         <p:cNvGrpSpPr/>
         <p:nvPr/>
       </p:nvGrpSpPr>
-      <p:grpSpPr/>
+      <p:grpSpPr>
+        <a:xfrm>
+          <a:off x="0" y="0"/>
+          <a:ext cx="0" cy="0"/>
+          <a:chOff x="0" y="0"/>
+          <a:chExt cx="0" cy="0"/>
+        </a:xfrm>
+      </p:grpSpPr>
       <p:sp>
         <p:nvSpPr>
           <p:cNvPr id="2" name="Title 1"/>
@@ -20109,7 +20398,14 @@
         <p:cNvGrpSpPr/>
         <p:nvPr/>
       </p:nvGrpSpPr>
-      <p:grpSpPr/>
+      <p:grpSpPr>
+        <a:xfrm>
+          <a:off x="0" y="0"/>
+          <a:ext cx="0" cy="0"/>
+          <a:chOff x="0" y="0"/>
+          <a:chExt cx="0" cy="0"/>
+        </a:xfrm>
+      </p:grpSpPr>
       <p:sp>
         <p:nvSpPr>
           <p:cNvPr id="2" name="Title 1"/>
@@ -20201,7 +20497,14 @@
         <p:cNvGrpSpPr/>
         <p:nvPr/>
       </p:nvGrpSpPr>
-      <p:grpSpPr/>
+      <p:grpSpPr>
+        <a:xfrm>
+          <a:off x="0" y="0"/>
+          <a:ext cx="0" cy="0"/>
+          <a:chOff x="0" y="0"/>
+          <a:chExt cx="0" cy="0"/>
+        </a:xfrm>
+      </p:grpSpPr>
       <p:sp>
         <p:nvSpPr>
           <p:cNvPr id="2" name="Title 1"/>
@@ -20300,7 +20603,14 @@
         <p:cNvGrpSpPr/>
         <p:nvPr/>
       </p:nvGrpSpPr>
-      <p:grpSpPr/>
+      <p:grpSpPr>
+        <a:xfrm>
+          <a:off x="0" y="0"/>
+          <a:ext cx="0" cy="0"/>
+          <a:chOff x="0" y="0"/>
+          <a:chExt cx="0" cy="0"/>
+        </a:xfrm>
+      </p:grpSpPr>
       <p:sp>
         <p:nvSpPr>
           <p:cNvPr id="2" name="Title 1"/>
@@ -20396,7 +20706,14 @@
         <p:cNvGrpSpPr/>
         <p:nvPr/>
       </p:nvGrpSpPr>
-      <p:grpSpPr/>
+      <p:grpSpPr>
+        <a:xfrm>
+          <a:off x="0" y="0"/>
+          <a:ext cx="0" cy="0"/>
+          <a:chOff x="0" y="0"/>
+          <a:chExt cx="0" cy="0"/>
+        </a:xfrm>
+      </p:grpSpPr>
       <p:sp>
         <p:nvSpPr>
           <p:cNvPr id="2" name="Title 1"/>
@@ -20492,7 +20809,14 @@
         <p:cNvGrpSpPr/>
         <p:nvPr/>
       </p:nvGrpSpPr>
-      <p:grpSpPr/>
+      <p:grpSpPr>
+        <a:xfrm>
+          <a:off x="0" y="0"/>
+          <a:ext cx="0" cy="0"/>
+          <a:chOff x="0" y="0"/>
+          <a:chExt cx="0" cy="0"/>
+        </a:xfrm>
+      </p:grpSpPr>
       <p:sp>
         <p:nvSpPr>
           <p:cNvPr id="2" name="Title 1"/>
@@ -20587,7 +20911,14 @@
         <p:cNvGrpSpPr/>
         <p:nvPr/>
       </p:nvGrpSpPr>
-      <p:grpSpPr/>
+      <p:grpSpPr>
+        <a:xfrm>
+          <a:off x="0" y="0"/>
+          <a:ext cx="0" cy="0"/>
+          <a:chOff x="0" y="0"/>
+          <a:chExt cx="0" cy="0"/>
+        </a:xfrm>
+      </p:grpSpPr>
       <p:sp>
         <p:nvSpPr>
           <p:cNvPr id="2" name="Title 1"/>
@@ -20682,7 +21013,14 @@
         <p:cNvGrpSpPr/>
         <p:nvPr/>
       </p:nvGrpSpPr>
-      <p:grpSpPr/>
+      <p:grpSpPr>
+        <a:xfrm>
+          <a:off x="0" y="0"/>
+          <a:ext cx="0" cy="0"/>
+          <a:chOff x="0" y="0"/>
+          <a:chExt cx="0" cy="0"/>
+        </a:xfrm>
+      </p:grpSpPr>
       <p:sp>
         <p:nvSpPr>
           <p:cNvPr id="2" name="Title 1"/>
@@ -20772,7 +21110,14 @@
         <p:cNvGrpSpPr/>
         <p:nvPr/>
       </p:nvGrpSpPr>
-      <p:grpSpPr/>
+      <p:grpSpPr>
+        <a:xfrm>
+          <a:off x="0" y="0"/>
+          <a:ext cx="0" cy="0"/>
+          <a:chOff x="0" y="0"/>
+          <a:chExt cx="0" cy="0"/>
+        </a:xfrm>
+      </p:grpSpPr>
       <p:sp>
         <p:nvSpPr>
           <p:cNvPr id="2" name="Title 1"/>
@@ -21020,7 +21365,14 @@
         <p:cNvGrpSpPr/>
         <p:nvPr/>
       </p:nvGrpSpPr>
-      <p:grpSpPr/>
+      <p:grpSpPr>
+        <a:xfrm>
+          <a:off x="0" y="0"/>
+          <a:ext cx="0" cy="0"/>
+          <a:chOff x="0" y="0"/>
+          <a:chExt cx="0" cy="0"/>
+        </a:xfrm>
+      </p:grpSpPr>
       <p:sp>
         <p:nvSpPr>
           <p:cNvPr id="2" name="Title 1"/>
@@ -21108,7 +21460,14 @@
         <p:cNvGrpSpPr/>
         <p:nvPr/>
       </p:nvGrpSpPr>
-      <p:grpSpPr/>
+      <p:grpSpPr>
+        <a:xfrm>
+          <a:off x="0" y="0"/>
+          <a:ext cx="0" cy="0"/>
+          <a:chOff x="0" y="0"/>
+          <a:chExt cx="0" cy="0"/>
+        </a:xfrm>
+      </p:grpSpPr>
       <p:sp>
         <p:nvSpPr>
           <p:cNvPr id="2" name="Title 1"/>
@@ -21164,7 +21523,14 @@
         <p:cNvGrpSpPr/>
         <p:nvPr/>
       </p:nvGrpSpPr>
-      <p:grpSpPr/>
+      <p:grpSpPr>
+        <a:xfrm>
+          <a:off x="0" y="0"/>
+          <a:ext cx="0" cy="0"/>
+          <a:chOff x="0" y="0"/>
+          <a:chExt cx="0" cy="0"/>
+        </a:xfrm>
+      </p:grpSpPr>
       <p:sp>
         <p:nvSpPr>
           <p:cNvPr id="2" name="Title 1"/>
@@ -21240,7 +21606,14 @@
         <p:cNvGrpSpPr/>
         <p:nvPr/>
       </p:nvGrpSpPr>
-      <p:grpSpPr/>
+      <p:grpSpPr>
+        <a:xfrm>
+          <a:off x="0" y="0"/>
+          <a:ext cx="0" cy="0"/>
+          <a:chOff x="0" y="0"/>
+          <a:chExt cx="0" cy="0"/>
+        </a:xfrm>
+      </p:grpSpPr>
       <p:sp>
         <p:nvSpPr>
           <p:cNvPr id="2" name="Title 1"/>
@@ -21316,7 +21689,14 @@
         <p:cNvGrpSpPr/>
         <p:nvPr/>
       </p:nvGrpSpPr>
-      <p:grpSpPr/>
+      <p:grpSpPr>
+        <a:xfrm>
+          <a:off x="0" y="0"/>
+          <a:ext cx="0" cy="0"/>
+          <a:chOff x="0" y="0"/>
+          <a:chExt cx="0" cy="0"/>
+        </a:xfrm>
+      </p:grpSpPr>
       <p:sp>
         <p:nvSpPr>
           <p:cNvPr id="2" name="Title 1"/>
@@ -21429,7 +21809,14 @@
         <p:cNvGrpSpPr/>
         <p:nvPr/>
       </p:nvGrpSpPr>
-      <p:grpSpPr/>
+      <p:grpSpPr>
+        <a:xfrm>
+          <a:off x="0" y="0"/>
+          <a:ext cx="0" cy="0"/>
+          <a:chOff x="0" y="0"/>
+          <a:chExt cx="0" cy="0"/>
+        </a:xfrm>
+      </p:grpSpPr>
       <p:sp>
         <p:nvSpPr>
           <p:cNvPr id="2" name="Title 1"/>
@@ -21490,7 +21877,14 @@
         <p:cNvGrpSpPr/>
         <p:nvPr/>
       </p:nvGrpSpPr>
-      <p:grpSpPr/>
+      <p:grpSpPr>
+        <a:xfrm>
+          <a:off x="0" y="0"/>
+          <a:ext cx="0" cy="0"/>
+          <a:chOff x="0" y="0"/>
+          <a:chExt cx="0" cy="0"/>
+        </a:xfrm>
+      </p:grpSpPr>
       <p:sp>
         <p:nvSpPr>
           <p:cNvPr id="2" name="Title 1"/>
@@ -21547,7 +21941,14 @@
         <p:cNvGrpSpPr/>
         <p:nvPr/>
       </p:nvGrpSpPr>
-      <p:grpSpPr/>
+      <p:grpSpPr>
+        <a:xfrm>
+          <a:off x="0" y="0"/>
+          <a:ext cx="0" cy="0"/>
+          <a:chOff x="0" y="0"/>
+          <a:chExt cx="0" cy="0"/>
+        </a:xfrm>
+      </p:grpSpPr>
       <p:sp>
         <p:nvSpPr>
           <p:cNvPr id="2" name="Title 1"/>
@@ -21603,7 +22004,14 @@
         <p:cNvGrpSpPr/>
         <p:nvPr/>
       </p:nvGrpSpPr>
-      <p:grpSpPr/>
+      <p:grpSpPr>
+        <a:xfrm>
+          <a:off x="0" y="0"/>
+          <a:ext cx="0" cy="0"/>
+          <a:chOff x="0" y="0"/>
+          <a:chExt cx="0" cy="0"/>
+        </a:xfrm>
+      </p:grpSpPr>
       <p:sp>
         <p:nvSpPr>
           <p:cNvPr id="2" name="Title 1"/>
@@ -21742,7 +22150,14 @@
         <p:cNvGrpSpPr/>
         <p:nvPr/>
       </p:nvGrpSpPr>
-      <p:grpSpPr/>
+      <p:grpSpPr>
+        <a:xfrm>
+          <a:off x="0" y="0"/>
+          <a:ext cx="0" cy="0"/>
+          <a:chOff x="0" y="0"/>
+          <a:chExt cx="0" cy="0"/>
+        </a:xfrm>
+      </p:grpSpPr>
       <p:sp>
         <p:nvSpPr>
           <p:cNvPr id="2" name="Title 1"/>
@@ -21824,7 +22239,14 @@
         <p:cNvGrpSpPr/>
         <p:nvPr/>
       </p:nvGrpSpPr>
-      <p:grpSpPr/>
+      <p:grpSpPr>
+        <a:xfrm>
+          <a:off x="0" y="0"/>
+          <a:ext cx="0" cy="0"/>
+          <a:chOff x="0" y="0"/>
+          <a:chExt cx="0" cy="0"/>
+        </a:xfrm>
+      </p:grpSpPr>
       <p:sp>
         <p:nvSpPr>
           <p:cNvPr id="2" name="Title 1"/>
@@ -22062,7 +22484,14 @@
         <p:cNvGrpSpPr/>
         <p:nvPr/>
       </p:nvGrpSpPr>
-      <p:grpSpPr/>
+      <p:grpSpPr>
+        <a:xfrm>
+          <a:off x="0" y="0"/>
+          <a:ext cx="0" cy="0"/>
+          <a:chOff x="0" y="0"/>
+          <a:chExt cx="0" cy="0"/>
+        </a:xfrm>
+      </p:grpSpPr>
       <p:sp>
         <p:nvSpPr>
           <p:cNvPr id="2" name="Title 1"/>
@@ -22172,7 +22601,14 @@
         <p:cNvGrpSpPr/>
         <p:nvPr/>
       </p:nvGrpSpPr>
-      <p:grpSpPr/>
+      <p:grpSpPr>
+        <a:xfrm>
+          <a:off x="0" y="0"/>
+          <a:ext cx="0" cy="0"/>
+          <a:chOff x="0" y="0"/>
+          <a:chExt cx="0" cy="0"/>
+        </a:xfrm>
+      </p:grpSpPr>
       <p:sp>
         <p:nvSpPr>
           <p:cNvPr id="2" name="Title 1"/>
@@ -22228,7 +22664,14 @@
         <p:cNvGrpSpPr/>
         <p:nvPr/>
       </p:nvGrpSpPr>
-      <p:grpSpPr/>
+      <p:grpSpPr>
+        <a:xfrm>
+          <a:off x="0" y="0"/>
+          <a:ext cx="0" cy="0"/>
+          <a:chOff x="0" y="0"/>
+          <a:chExt cx="0" cy="0"/>
+        </a:xfrm>
+      </p:grpSpPr>
       <p:sp>
         <p:nvSpPr>
           <p:cNvPr id="2" name="Title 1"/>

--- a/demo_full.pptx
+++ b/demo_full.pptx
@@ -5018,21 +5018,21 @@
         <p:nvCxnSpPr>
           <p:cNvPr id="18" name="Connector 17"/>
           <p:cNvCxnSpPr>
-            <a:stCxn id="4" idx="1"/>
-            <a:endCxn id="5" idx="3"/>
+            <a:stCxn id="4" idx="3"/>
+            <a:endCxn id="5" idx="1"/>
           </p:cNvCxnSpPr>
           <p:nvPr/>
         </p:nvCxnSpPr>
         <p:spPr>
           <a:xfrm>
-            <a:off x="457200" y="2437860"/>
-            <a:ext cx="2605920" cy="0"/>
+            <a:off x="1657200" y="2437860"/>
+            <a:ext cx="205920" cy="0"/>
           </a:xfrm>
           <a:prstGeom prst="curvedConnector3">
             <a:avLst/>
           </a:prstGeom>
           <a:ln>
-            <a:headEnd type="arrow" w="med" len="med"/>
+            <a:tailEnd type="arrow" w="med" len="med"/>
           </a:ln>
         </p:spPr>
         <p:style>
@@ -5054,21 +5054,21 @@
         <p:nvCxnSpPr>
           <p:cNvPr id="19" name="Connector 18"/>
           <p:cNvCxnSpPr>
-            <a:stCxn id="5" idx="1"/>
-            <a:endCxn id="6" idx="3"/>
+            <a:stCxn id="5" idx="3"/>
+            <a:endCxn id="6" idx="1"/>
           </p:cNvCxnSpPr>
           <p:nvPr/>
         </p:nvCxnSpPr>
         <p:spPr>
           <a:xfrm>
-            <a:off x="1863120" y="2437860"/>
-            <a:ext cx="2605920" cy="0"/>
+            <a:off x="3063120" y="2437860"/>
+            <a:ext cx="205920" cy="0"/>
           </a:xfrm>
           <a:prstGeom prst="curvedConnector3">
             <a:avLst/>
           </a:prstGeom>
           <a:ln>
-            <a:headEnd type="arrow" w="med" len="med"/>
+            <a:tailEnd type="arrow" w="med" len="med"/>
           </a:ln>
         </p:spPr>
         <p:style>
@@ -5090,21 +5090,21 @@
         <p:nvCxnSpPr>
           <p:cNvPr id="20" name="Connector 19"/>
           <p:cNvCxnSpPr>
-            <a:stCxn id="6" idx="1"/>
-            <a:endCxn id="7" idx="3"/>
+            <a:stCxn id="6" idx="3"/>
+            <a:endCxn id="7" idx="1"/>
           </p:cNvCxnSpPr>
           <p:nvPr/>
         </p:nvCxnSpPr>
         <p:spPr>
           <a:xfrm>
-            <a:off x="3269040" y="2437860"/>
-            <a:ext cx="2605920" cy="0"/>
+            <a:off x="4469040" y="2437860"/>
+            <a:ext cx="205920" cy="0"/>
           </a:xfrm>
           <a:prstGeom prst="curvedConnector3">
             <a:avLst/>
           </a:prstGeom>
           <a:ln>
-            <a:headEnd type="arrow" w="med" len="med"/>
+            <a:tailEnd type="arrow" w="med" len="med"/>
           </a:ln>
         </p:spPr>
         <p:style>
@@ -5126,21 +5126,21 @@
         <p:nvCxnSpPr>
           <p:cNvPr id="21" name="Connector 20"/>
           <p:cNvCxnSpPr>
-            <a:stCxn id="7" idx="1"/>
-            <a:endCxn id="8" idx="3"/>
+            <a:stCxn id="7" idx="3"/>
+            <a:endCxn id="8" idx="1"/>
           </p:cNvCxnSpPr>
           <p:nvPr/>
         </p:nvCxnSpPr>
         <p:spPr>
           <a:xfrm>
-            <a:off x="4674960" y="2437860"/>
-            <a:ext cx="2605920" cy="0"/>
+            <a:off x="5874960" y="2437860"/>
+            <a:ext cx="205920" cy="0"/>
           </a:xfrm>
           <a:prstGeom prst="curvedConnector3">
             <a:avLst/>
           </a:prstGeom>
           <a:ln>
-            <a:headEnd type="arrow" w="med" len="med"/>
+            <a:tailEnd type="arrow" w="med" len="med"/>
           </a:ln>
         </p:spPr>
         <p:style>
@@ -5162,21 +5162,21 @@
         <p:nvCxnSpPr>
           <p:cNvPr id="22" name="Connector 21"/>
           <p:cNvCxnSpPr>
-            <a:stCxn id="8" idx="1"/>
-            <a:endCxn id="9" idx="3"/>
+            <a:stCxn id="8" idx="3"/>
+            <a:endCxn id="9" idx="1"/>
           </p:cNvCxnSpPr>
           <p:nvPr/>
         </p:nvCxnSpPr>
         <p:spPr>
           <a:xfrm>
-            <a:off x="6080880" y="2437860"/>
-            <a:ext cx="2605920" cy="0"/>
+            <a:off x="7280880" y="2437860"/>
+            <a:ext cx="205920" cy="0"/>
           </a:xfrm>
           <a:prstGeom prst="curvedConnector3">
             <a:avLst/>
           </a:prstGeom>
           <a:ln>
-            <a:headEnd type="arrow" w="med" len="med"/>
+            <a:tailEnd type="arrow" w="med" len="med"/>
           </a:ln>
         </p:spPr>
         <p:style>
@@ -5198,21 +5198,21 @@
         <p:nvCxnSpPr>
           <p:cNvPr id="23" name="Connector 22"/>
           <p:cNvCxnSpPr>
-            <a:stCxn id="9" idx="3"/>
-            <a:endCxn id="10" idx="1"/>
+            <a:stCxn id="9" idx="1"/>
+            <a:endCxn id="10" idx="3"/>
           </p:cNvCxnSpPr>
           <p:nvPr/>
         </p:nvCxnSpPr>
         <p:spPr>
           <a:xfrm flipH="1">
-            <a:off x="457200" y="2437860"/>
-            <a:ext cx="8229600" cy="1425321"/>
+            <a:off x="1657200" y="2437860"/>
+            <a:ext cx="5829600" cy="1425321"/>
           </a:xfrm>
           <a:prstGeom prst="curvedConnector3">
             <a:avLst/>
           </a:prstGeom>
           <a:ln>
-            <a:headEnd type="arrow" w="med" len="med"/>
+            <a:tailEnd type="arrow" w="med" len="med"/>
           </a:ln>
         </p:spPr>
         <p:style>
@@ -5234,21 +5234,21 @@
         <p:nvCxnSpPr>
           <p:cNvPr id="24" name="Connector 23"/>
           <p:cNvCxnSpPr>
-            <a:stCxn id="10" idx="1"/>
-            <a:endCxn id="11" idx="3"/>
+            <a:stCxn id="10" idx="3"/>
+            <a:endCxn id="11" idx="1"/>
           </p:cNvCxnSpPr>
           <p:nvPr/>
         </p:nvCxnSpPr>
         <p:spPr>
           <a:xfrm>
-            <a:off x="457200" y="3863181"/>
-            <a:ext cx="2605920" cy="0"/>
+            <a:off x="1657200" y="3863181"/>
+            <a:ext cx="205920" cy="0"/>
           </a:xfrm>
           <a:prstGeom prst="curvedConnector3">
             <a:avLst/>
           </a:prstGeom>
           <a:ln>
-            <a:headEnd type="arrow" w="med" len="med"/>
+            <a:tailEnd type="arrow" w="med" len="med"/>
           </a:ln>
         </p:spPr>
         <p:style>
@@ -5270,21 +5270,21 @@
         <p:nvCxnSpPr>
           <p:cNvPr id="25" name="Connector 24"/>
           <p:cNvCxnSpPr>
-            <a:stCxn id="11" idx="1"/>
-            <a:endCxn id="12" idx="3"/>
+            <a:stCxn id="11" idx="3"/>
+            <a:endCxn id="12" idx="1"/>
           </p:cNvCxnSpPr>
           <p:nvPr/>
         </p:nvCxnSpPr>
         <p:spPr>
           <a:xfrm>
-            <a:off x="1863120" y="3863181"/>
-            <a:ext cx="2605920" cy="0"/>
+            <a:off x="3063120" y="3863181"/>
+            <a:ext cx="205920" cy="0"/>
           </a:xfrm>
           <a:prstGeom prst="curvedConnector3">
             <a:avLst/>
           </a:prstGeom>
           <a:ln>
-            <a:headEnd type="arrow" w="med" len="med"/>
+            <a:tailEnd type="arrow" w="med" len="med"/>
           </a:ln>
         </p:spPr>
         <p:style>
@@ -5306,21 +5306,21 @@
         <p:nvCxnSpPr>
           <p:cNvPr id="26" name="Connector 25"/>
           <p:cNvCxnSpPr>
-            <a:stCxn id="12" idx="1"/>
-            <a:endCxn id="13" idx="3"/>
+            <a:stCxn id="12" idx="3"/>
+            <a:endCxn id="13" idx="1"/>
           </p:cNvCxnSpPr>
           <p:nvPr/>
         </p:nvCxnSpPr>
         <p:spPr>
           <a:xfrm>
-            <a:off x="3269040" y="3863181"/>
-            <a:ext cx="2605920" cy="0"/>
+            <a:off x="4469040" y="3863181"/>
+            <a:ext cx="205920" cy="0"/>
           </a:xfrm>
           <a:prstGeom prst="curvedConnector3">
             <a:avLst/>
           </a:prstGeom>
           <a:ln>
-            <a:headEnd type="arrow" w="med" len="med"/>
+            <a:tailEnd type="arrow" w="med" len="med"/>
           </a:ln>
         </p:spPr>
         <p:style>
@@ -5342,21 +5342,21 @@
         <p:nvCxnSpPr>
           <p:cNvPr id="27" name="Connector 26"/>
           <p:cNvCxnSpPr>
-            <a:stCxn id="13" idx="1"/>
-            <a:endCxn id="14" idx="3"/>
+            <a:stCxn id="13" idx="3"/>
+            <a:endCxn id="14" idx="1"/>
           </p:cNvCxnSpPr>
           <p:nvPr/>
         </p:nvCxnSpPr>
         <p:spPr>
           <a:xfrm>
-            <a:off x="4674960" y="3863181"/>
-            <a:ext cx="2605920" cy="0"/>
+            <a:off x="5874960" y="3863181"/>
+            <a:ext cx="205920" cy="0"/>
           </a:xfrm>
           <a:prstGeom prst="curvedConnector3">
             <a:avLst/>
           </a:prstGeom>
           <a:ln>
-            <a:headEnd type="arrow" w="med" len="med"/>
+            <a:tailEnd type="arrow" w="med" len="med"/>
           </a:ln>
         </p:spPr>
         <p:style>
@@ -5378,21 +5378,21 @@
         <p:nvCxnSpPr>
           <p:cNvPr id="28" name="Connector 27"/>
           <p:cNvCxnSpPr>
-            <a:stCxn id="14" idx="1"/>
-            <a:endCxn id="15" idx="3"/>
+            <a:stCxn id="14" idx="3"/>
+            <a:endCxn id="15" idx="1"/>
           </p:cNvCxnSpPr>
           <p:nvPr/>
         </p:nvCxnSpPr>
         <p:spPr>
           <a:xfrm>
-            <a:off x="6080880" y="3863181"/>
-            <a:ext cx="2605920" cy="0"/>
+            <a:off x="7280880" y="3863181"/>
+            <a:ext cx="205920" cy="0"/>
           </a:xfrm>
           <a:prstGeom prst="curvedConnector3">
             <a:avLst/>
           </a:prstGeom>
           <a:ln>
-            <a:headEnd type="arrow" w="med" len="med"/>
+            <a:tailEnd type="arrow" w="med" len="med"/>
           </a:ln>
         </p:spPr>
         <p:style>
@@ -5414,21 +5414,21 @@
         <p:nvCxnSpPr>
           <p:cNvPr id="29" name="Connector 28"/>
           <p:cNvCxnSpPr>
-            <a:stCxn id="15" idx="3"/>
-            <a:endCxn id="16" idx="1"/>
+            <a:stCxn id="15" idx="1"/>
+            <a:endCxn id="16" idx="3"/>
           </p:cNvCxnSpPr>
           <p:nvPr/>
         </p:nvCxnSpPr>
         <p:spPr>
           <a:xfrm flipH="1">
-            <a:off x="457200" y="3863181"/>
-            <a:ext cx="8229600" cy="1425321"/>
+            <a:off x="1657200" y="3863181"/>
+            <a:ext cx="5829600" cy="1425321"/>
           </a:xfrm>
           <a:prstGeom prst="curvedConnector3">
             <a:avLst/>
           </a:prstGeom>
           <a:ln>
-            <a:headEnd type="arrow" w="med" len="med"/>
+            <a:tailEnd type="arrow" w="med" len="med"/>
           </a:ln>
         </p:spPr>
         <p:style>
@@ -5450,21 +5450,21 @@
         <p:nvCxnSpPr>
           <p:cNvPr id="30" name="Connector 29"/>
           <p:cNvCxnSpPr>
-            <a:stCxn id="16" idx="1"/>
-            <a:endCxn id="17" idx="3"/>
+            <a:stCxn id="16" idx="3"/>
+            <a:endCxn id="17" idx="1"/>
           </p:cNvCxnSpPr>
           <p:nvPr/>
         </p:nvCxnSpPr>
         <p:spPr>
           <a:xfrm>
-            <a:off x="457200" y="5288502"/>
-            <a:ext cx="8229600" cy="0"/>
+            <a:off x="1657200" y="5288502"/>
+            <a:ext cx="5829600" cy="0"/>
           </a:xfrm>
           <a:prstGeom prst="curvedConnector3">
             <a:avLst/>
           </a:prstGeom>
           <a:ln>
-            <a:headEnd type="arrow" w="med" len="med"/>
+            <a:tailEnd type="arrow" w="med" len="med"/>
           </a:ln>
         </p:spPr>
         <p:style>
@@ -5923,7 +5923,7 @@
             <a:avLst/>
           </a:prstGeom>
           <a:ln>
-            <a:headEnd type="arrow" w="med" len="med"/>
+            <a:tailEnd type="arrow" w="med" len="med"/>
           </a:ln>
         </p:spPr>
         <p:style>
@@ -5945,21 +5945,21 @@
         <p:nvCxnSpPr>
           <p:cNvPr id="16" name="Connector 15"/>
           <p:cNvCxnSpPr>
-            <a:stCxn id="5" idx="3"/>
-            <a:endCxn id="6" idx="1"/>
+            <a:stCxn id="5" idx="1"/>
+            <a:endCxn id="6" idx="3"/>
           </p:cNvCxnSpPr>
           <p:nvPr/>
         </p:nvCxnSpPr>
         <p:spPr>
           <a:xfrm flipH="1">
-            <a:off x="457200" y="2655392"/>
-            <a:ext cx="4714800" cy="805193"/>
+            <a:off x="1657200" y="2655392"/>
+            <a:ext cx="2314800" cy="805193"/>
           </a:xfrm>
           <a:prstGeom prst="curvedConnector3">
             <a:avLst/>
           </a:prstGeom>
           <a:ln>
-            <a:headEnd type="arrow" w="med" len="med"/>
+            <a:tailEnd type="arrow" w="med" len="med"/>
           </a:ln>
         </p:spPr>
         <p:style>
@@ -5981,21 +5981,21 @@
         <p:nvCxnSpPr>
           <p:cNvPr id="18" name="Connector 17"/>
           <p:cNvCxnSpPr>
-            <a:stCxn id="5" idx="1"/>
-            <a:endCxn id="7" idx="3"/>
+            <a:stCxn id="5" idx="3"/>
+            <a:endCxn id="7" idx="1"/>
           </p:cNvCxnSpPr>
           <p:nvPr/>
         </p:nvCxnSpPr>
         <p:spPr>
           <a:xfrm>
-            <a:off x="3972000" y="2655392"/>
-            <a:ext cx="4714800" cy="805193"/>
+            <a:off x="5172000" y="2655392"/>
+            <a:ext cx="2314800" cy="805193"/>
           </a:xfrm>
           <a:prstGeom prst="curvedConnector3">
             <a:avLst/>
           </a:prstGeom>
           <a:ln>
-            <a:headEnd type="arrow" w="med" len="med"/>
+            <a:tailEnd type="arrow" w="med" len="med"/>
           </a:ln>
         </p:spPr>
         <p:style>
@@ -6031,7 +6031,7 @@
             <a:avLst/>
           </a:prstGeom>
           <a:ln>
-            <a:headEnd type="arrow" w="med" len="med"/>
+            <a:tailEnd type="arrow" w="med" len="med"/>
           </a:ln>
         </p:spPr>
         <p:style>
@@ -6067,7 +6067,7 @@
             <a:avLst/>
           </a:prstGeom>
           <a:ln>
-            <a:headEnd type="arrow" w="med" len="med"/>
+            <a:tailEnd type="arrow" w="med" len="med"/>
           </a:ln>
         </p:spPr>
         <p:style>
@@ -6103,7 +6103,7 @@
             <a:avLst/>
           </a:prstGeom>
           <a:ln>
-            <a:headEnd type="arrow" w="med" len="med"/>
+            <a:tailEnd type="arrow" w="med" len="med"/>
           </a:ln>
         </p:spPr>
         <p:style>
@@ -6125,21 +6125,21 @@
         <p:nvCxnSpPr>
           <p:cNvPr id="24" name="Connector 23"/>
           <p:cNvCxnSpPr>
-            <a:stCxn id="8" idx="1"/>
-            <a:endCxn id="11" idx="3"/>
+            <a:stCxn id="8" idx="3"/>
+            <a:endCxn id="11" idx="1"/>
           </p:cNvCxnSpPr>
           <p:nvPr/>
         </p:nvCxnSpPr>
         <p:spPr>
           <a:xfrm>
-            <a:off x="457200" y="4265777"/>
-            <a:ext cx="3543200" cy="805193"/>
+            <a:off x="1657200" y="4265777"/>
+            <a:ext cx="1143200" cy="805193"/>
           </a:xfrm>
           <a:prstGeom prst="curvedConnector3">
             <a:avLst/>
           </a:prstGeom>
           <a:ln>
-            <a:headEnd type="arrow" w="med" len="med"/>
+            <a:tailEnd type="arrow" w="med" len="med"/>
           </a:ln>
         </p:spPr>
         <p:style>
@@ -6161,21 +6161,21 @@
         <p:nvCxnSpPr>
           <p:cNvPr id="26" name="Connector 25"/>
           <p:cNvCxnSpPr>
-            <a:stCxn id="8" idx="1"/>
-            <a:endCxn id="12" idx="3"/>
+            <a:stCxn id="8" idx="3"/>
+            <a:endCxn id="12" idx="1"/>
           </p:cNvCxnSpPr>
           <p:nvPr/>
         </p:nvCxnSpPr>
         <p:spPr>
           <a:xfrm>
-            <a:off x="457200" y="4265777"/>
-            <a:ext cx="5886400" cy="805193"/>
+            <a:off x="1657200" y="4265777"/>
+            <a:ext cx="3486400" cy="805193"/>
           </a:xfrm>
           <a:prstGeom prst="curvedConnector3">
             <a:avLst/>
           </a:prstGeom>
           <a:ln>
-            <a:headEnd type="arrow" w="med" len="med"/>
+            <a:tailEnd type="arrow" w="med" len="med"/>
           </a:ln>
         </p:spPr>
         <p:style>
@@ -6211,7 +6211,7 @@
             <a:avLst/>
           </a:prstGeom>
           <a:ln>
-            <a:headEnd type="arrow" w="med" len="med"/>
+            <a:tailEnd type="arrow" w="med" len="med"/>
           </a:ln>
         </p:spPr>
         <p:style>
@@ -6233,21 +6233,21 @@
         <p:nvCxnSpPr>
           <p:cNvPr id="29" name="Connector 28"/>
           <p:cNvCxnSpPr>
-            <a:stCxn id="10" idx="1"/>
-            <a:endCxn id="14" idx="3"/>
+            <a:stCxn id="10" idx="3"/>
+            <a:endCxn id="14" idx="1"/>
           </p:cNvCxnSpPr>
           <p:nvPr/>
         </p:nvCxnSpPr>
         <p:spPr>
           <a:xfrm>
-            <a:off x="457200" y="5070970"/>
-            <a:ext cx="4714800" cy="805193"/>
+            <a:off x="1657200" y="5070970"/>
+            <a:ext cx="2314800" cy="805193"/>
           </a:xfrm>
           <a:prstGeom prst="curvedConnector3">
             <a:avLst/>
           </a:prstGeom>
           <a:ln>
-            <a:headEnd type="arrow" w="med" len="med"/>
+            <a:tailEnd type="arrow" w="med" len="med"/>
           </a:ln>
         </p:spPr>
         <p:style>
@@ -6283,7 +6283,7 @@
             <a:avLst/>
           </a:prstGeom>
           <a:ln>
-            <a:headEnd type="arrow" w="med" len="med"/>
+            <a:tailEnd type="arrow" w="med" len="med"/>
           </a:ln>
         </p:spPr>
         <p:style>
@@ -6319,7 +6319,7 @@
             <a:avLst/>
           </a:prstGeom>
           <a:ln>
-            <a:headEnd type="arrow" w="med" len="med"/>
+            <a:tailEnd type="arrow" w="med" len="med"/>
           </a:ln>
         </p:spPr>
         <p:style>
@@ -6341,21 +6341,21 @@
         <p:nvCxnSpPr>
           <p:cNvPr id="32" name="Connector 31"/>
           <p:cNvCxnSpPr>
-            <a:stCxn id="13" idx="3"/>
-            <a:endCxn id="14" idx="1"/>
+            <a:stCxn id="13" idx="1"/>
+            <a:endCxn id="14" idx="3"/>
           </p:cNvCxnSpPr>
           <p:nvPr/>
         </p:nvCxnSpPr>
         <p:spPr>
           <a:xfrm flipH="1">
-            <a:off x="3972000" y="5070970"/>
-            <a:ext cx="4714800" cy="805193"/>
+            <a:off x="5172000" y="5070970"/>
+            <a:ext cx="2314800" cy="805193"/>
           </a:xfrm>
           <a:prstGeom prst="curvedConnector3">
             <a:avLst/>
           </a:prstGeom>
           <a:ln>
-            <a:headEnd type="arrow" w="med" len="med"/>
+            <a:tailEnd type="arrow" w="med" len="med"/>
           </a:ln>
         </p:spPr>
         <p:style>
@@ -6969,7 +6969,7 @@
             <a:avLst/>
           </a:prstGeom>
           <a:ln>
-            <a:headEnd type="arrow" w="med" len="med"/>
+            <a:tailEnd type="arrow" w="med" len="med"/>
           </a:ln>
         </p:spPr>
         <p:style>
@@ -7006,7 +7006,7 @@
           </a:prstGeom>
           <a:ln>
             <a:prstDash val="dash"/>
-            <a:headEnd type="arrow" w="med" len="med"/>
+            <a:tailEnd type="arrow" w="med" len="med"/>
           </a:ln>
         </p:spPr>
         <p:style>
@@ -7042,7 +7042,7 @@
             <a:avLst/>
           </a:prstGeom>
           <a:ln w="38100">
-            <a:headEnd type="arrow" w="med" len="med"/>
+            <a:tailEnd type="arrow" w="med" len="med"/>
           </a:ln>
         </p:spPr>
         <p:style>
@@ -7078,7 +7078,7 @@
             <a:avLst/>
           </a:prstGeom>
           <a:ln>
-            <a:headEnd type="oval" w="med" len="med"/>
+            <a:tailEnd type="oval" w="med" len="med"/>
           </a:ln>
         </p:spPr>
         <p:style>
@@ -7114,7 +7114,7 @@
             <a:avLst/>
           </a:prstGeom>
           <a:ln>
-            <a:headEnd type="arrow" w="med" len="med"/>
+            <a:tailEnd type="arrow" w="med" len="med"/>
           </a:ln>
         </p:spPr>
         <p:style>
@@ -7187,7 +7187,7 @@
             <a:avLst/>
           </a:prstGeom>
           <a:ln>
-            <a:headEnd type="arrow" w="med" len="med"/>
+            <a:tailEnd type="arrow" w="med" len="med"/>
           </a:ln>
         </p:spPr>
         <p:style>
@@ -7223,7 +7223,7 @@
             <a:avLst/>
           </a:prstGeom>
           <a:ln>
-            <a:headEnd type="arrow" w="med" len="med"/>
+            <a:tailEnd type="arrow" w="med" len="med"/>
           </a:ln>
         </p:spPr>
         <p:style>
@@ -7259,7 +7259,7 @@
             <a:avLst/>
           </a:prstGeom>
           <a:ln>
-            <a:headEnd type="arrow" w="med" len="med"/>
+            <a:tailEnd type="arrow" w="med" len="med"/>
           </a:ln>
         </p:spPr>
         <p:style>
@@ -8283,7 +8283,7 @@
             <a:avLst/>
           </a:prstGeom>
           <a:ln>
-            <a:headEnd type="stealth" w="med" len="med"/>
+            <a:tailEnd type="stealth" w="med" len="med"/>
           </a:ln>
         </p:spPr>
         <p:style>
@@ -8346,7 +8346,7 @@
             <a:avLst/>
           </a:prstGeom>
           <a:ln>
-            <a:headEnd type="stealth" w="med" len="med"/>
+            <a:tailEnd type="stealth" w="med" len="med"/>
           </a:ln>
         </p:spPr>
         <p:style>
@@ -8409,7 +8409,7 @@
             <a:avLst/>
           </a:prstGeom>
           <a:ln>
-            <a:headEnd type="stealth" w="med" len="med"/>
+            <a:tailEnd type="stealth" w="med" len="med"/>
           </a:ln>
         </p:spPr>
         <p:style>
@@ -8473,7 +8473,7 @@
           </a:prstGeom>
           <a:ln>
             <a:prstDash val="dash"/>
-            <a:headEnd type="stealth" w="med" len="med"/>
+            <a:tailEnd type="stealth" w="med" len="med"/>
           </a:ln>
         </p:spPr>
         <p:style>
@@ -8537,7 +8537,7 @@
           </a:prstGeom>
           <a:ln>
             <a:prstDash val="dash"/>
-            <a:headEnd type="stealth" w="med" len="med"/>
+            <a:tailEnd type="stealth" w="med" len="med"/>
           </a:ln>
         </p:spPr>
         <p:style>
@@ -8601,7 +8601,7 @@
           </a:prstGeom>
           <a:ln>
             <a:prstDash val="dash"/>
-            <a:headEnd type="stealth" w="med" len="med"/>
+            <a:tailEnd type="stealth" w="med" len="med"/>
           </a:ln>
         </p:spPr>
         <p:style>
@@ -8664,7 +8664,7 @@
             <a:avLst/>
           </a:prstGeom>
           <a:ln>
-            <a:headEnd type="stealth" w="med" len="med"/>
+            <a:tailEnd type="stealth" w="med" len="med"/>
           </a:ln>
         </p:spPr>
         <p:style>
@@ -8728,7 +8728,7 @@
           </a:prstGeom>
           <a:ln>
             <a:prstDash val="dash"/>
-            <a:headEnd type="stealth" w="med" len="med"/>
+            <a:tailEnd type="stealth" w="med" len="med"/>
           </a:ln>
         </p:spPr>
         <p:style>
@@ -9485,7 +9485,7 @@
             <a:avLst/>
           </a:prstGeom>
           <a:ln>
-            <a:headEnd type="stealth" w="med" len="med"/>
+            <a:tailEnd type="stealth" w="med" len="med"/>
           </a:ln>
         </p:spPr>
         <p:style>
@@ -9548,7 +9548,7 @@
             <a:avLst/>
           </a:prstGeom>
           <a:ln>
-            <a:headEnd type="stealth" w="med" len="med"/>
+            <a:tailEnd type="stealth" w="med" len="med"/>
           </a:ln>
         </p:spPr>
         <p:style>
@@ -9612,7 +9612,7 @@
           </a:prstGeom>
           <a:ln>
             <a:prstDash val="dash"/>
-            <a:headEnd type="stealth" w="med" len="med"/>
+            <a:tailEnd type="stealth" w="med" len="med"/>
           </a:ln>
         </p:spPr>
         <p:style>
@@ -9675,7 +9675,7 @@
             <a:avLst/>
           </a:prstGeom>
           <a:ln>
-            <a:headEnd type="stealth" w="med" len="med"/>
+            <a:tailEnd type="stealth" w="med" len="med"/>
           </a:ln>
         </p:spPr>
         <p:style>
@@ -9738,7 +9738,7 @@
             <a:avLst/>
           </a:prstGeom>
           <a:ln>
-            <a:headEnd type="stealth" w="med" len="med"/>
+            <a:tailEnd type="stealth" w="med" len="med"/>
           </a:ln>
         </p:spPr>
         <p:style>
@@ -9801,7 +9801,7 @@
             <a:avLst/>
           </a:prstGeom>
           <a:ln>
-            <a:headEnd type="stealth" w="med" len="med"/>
+            <a:tailEnd type="stealth" w="med" len="med"/>
           </a:ln>
         </p:spPr>
         <p:style>
@@ -12714,15 +12714,15 @@
         <p:nvCxnSpPr>
           <p:cNvPr id="36" name="Connector 35"/>
           <p:cNvCxnSpPr>
-            <a:stCxn id="4" idx="1"/>
-            <a:endCxn id="8" idx="3"/>
+            <a:stCxn id="4" idx="3"/>
+            <a:endCxn id="8" idx="1"/>
           </p:cNvCxnSpPr>
           <p:nvPr/>
         </p:nvCxnSpPr>
         <p:spPr>
           <a:xfrm>
-            <a:off x="457200" y="1820200"/>
-            <a:ext cx="4964800" cy="0"/>
+            <a:off x="2157200" y="1820200"/>
+            <a:ext cx="1564800" cy="0"/>
           </a:xfrm>
           <a:prstGeom prst="curvedConnector3">
             <a:avLst/>
@@ -12750,15 +12750,15 @@
         <p:nvCxnSpPr>
           <p:cNvPr id="37" name="Connector 36"/>
           <p:cNvCxnSpPr>
-            <a:stCxn id="8" idx="1"/>
-            <a:endCxn id="12" idx="3"/>
+            <a:stCxn id="8" idx="3"/>
+            <a:endCxn id="12" idx="1"/>
           </p:cNvCxnSpPr>
           <p:nvPr/>
         </p:nvCxnSpPr>
         <p:spPr>
           <a:xfrm>
-            <a:off x="3722000" y="1820200"/>
-            <a:ext cx="4964800" cy="0"/>
+            <a:off x="5422000" y="1820200"/>
+            <a:ext cx="1564800" cy="0"/>
           </a:xfrm>
           <a:prstGeom prst="curvedConnector3">
             <a:avLst/>
@@ -12786,15 +12786,15 @@
         <p:nvCxnSpPr>
           <p:cNvPr id="38" name="Connector 37"/>
           <p:cNvCxnSpPr>
-            <a:stCxn id="8" idx="3"/>
-            <a:endCxn id="16" idx="1"/>
+            <a:stCxn id="8" idx="1"/>
+            <a:endCxn id="16" idx="3"/>
           </p:cNvCxnSpPr>
           <p:nvPr/>
         </p:nvCxnSpPr>
         <p:spPr>
           <a:xfrm flipH="1">
-            <a:off x="457200" y="1820200"/>
-            <a:ext cx="4964800" cy="1722981"/>
+            <a:off x="2157200" y="1820200"/>
+            <a:ext cx="1564800" cy="1722981"/>
           </a:xfrm>
           <a:prstGeom prst="curvedConnector3">
             <a:avLst/>
@@ -12892,15 +12892,15 @@
         <p:nvCxnSpPr>
           <p:cNvPr id="41" name="Connector 40"/>
           <p:cNvCxnSpPr>
-            <a:stCxn id="20" idx="3"/>
-            <a:endCxn id="28" idx="1"/>
+            <a:stCxn id="20" idx="1"/>
+            <a:endCxn id="28" idx="3"/>
           </p:cNvCxnSpPr>
           <p:nvPr/>
         </p:nvCxnSpPr>
         <p:spPr>
           <a:xfrm flipH="1">
-            <a:off x="457200" y="3543181"/>
-            <a:ext cx="4964800" cy="1722982"/>
+            <a:off x="2157200" y="3543181"/>
+            <a:ext cx="1564800" cy="1722982"/>
           </a:xfrm>
           <a:prstGeom prst="curvedConnector3">
             <a:avLst/>
@@ -12929,15 +12929,15 @@
         <p:nvCxnSpPr>
           <p:cNvPr id="42" name="Connector 41"/>
           <p:cNvCxnSpPr>
-            <a:stCxn id="8" idx="1"/>
-            <a:endCxn id="24" idx="3"/>
+            <a:stCxn id="8" idx="3"/>
+            <a:endCxn id="24" idx="1"/>
           </p:cNvCxnSpPr>
           <p:nvPr/>
         </p:nvCxnSpPr>
         <p:spPr>
           <a:xfrm>
-            <a:off x="3722000" y="1820200"/>
-            <a:ext cx="4964800" cy="1722981"/>
+            <a:off x="5422000" y="1820200"/>
+            <a:ext cx="1564800" cy="1722981"/>
           </a:xfrm>
           <a:prstGeom prst="curvedConnector3">
             <a:avLst/>
@@ -12966,15 +12966,15 @@
         <p:nvCxnSpPr>
           <p:cNvPr id="43" name="Connector 42"/>
           <p:cNvCxnSpPr>
-            <a:stCxn id="32" idx="3"/>
-            <a:endCxn id="28" idx="1"/>
+            <a:stCxn id="32" idx="1"/>
+            <a:endCxn id="28" idx="3"/>
           </p:cNvCxnSpPr>
           <p:nvPr/>
         </p:nvCxnSpPr>
         <p:spPr>
           <a:xfrm flipH="1">
-            <a:off x="457200" y="5266163"/>
-            <a:ext cx="4964800" cy="0"/>
+            <a:off x="2157200" y="5266163"/>
+            <a:ext cx="1564800" cy="0"/>
           </a:xfrm>
           <a:prstGeom prst="curvedConnector3">
             <a:avLst/>
@@ -13318,7 +13318,7 @@
             <a:avLst/>
           </a:prstGeom>
           <a:ln>
-            <a:headEnd type="arrow" w="med" len="med"/>
+            <a:tailEnd type="arrow" w="med" len="med"/>
           </a:ln>
         </p:spPr>
         <p:style>
@@ -13354,7 +13354,7 @@
             <a:avLst/>
           </a:prstGeom>
           <a:ln>
-            <a:headEnd type="arrow" w="med" len="med"/>
+            <a:tailEnd type="arrow" w="med" len="med"/>
           </a:ln>
         </p:spPr>
         <p:style>
@@ -13376,21 +13376,21 @@
         <p:nvCxnSpPr>
           <p:cNvPr id="14" name="Connector 13"/>
           <p:cNvCxnSpPr>
-            <a:stCxn id="6" idx="1"/>
-            <a:endCxn id="7" idx="3"/>
+            <a:stCxn id="6" idx="3"/>
+            <a:endCxn id="7" idx="1"/>
           </p:cNvCxnSpPr>
           <p:nvPr/>
         </p:nvCxnSpPr>
         <p:spPr>
           <a:xfrm>
-            <a:off x="3972000" y="3863181"/>
-            <a:ext cx="4363320" cy="905842"/>
+            <a:off x="5172000" y="3863181"/>
+            <a:ext cx="1963320" cy="905842"/>
           </a:xfrm>
           <a:prstGeom prst="curvedConnector3">
             <a:avLst/>
           </a:prstGeom>
           <a:ln>
-            <a:headEnd type="arrow" w="med" len="med"/>
+            <a:tailEnd type="arrow" w="med" len="med"/>
           </a:ln>
         </p:spPr>
         <p:style>
@@ -13412,21 +13412,21 @@
         <p:nvCxnSpPr>
           <p:cNvPr id="16" name="Connector 15"/>
           <p:cNvCxnSpPr>
-            <a:stCxn id="6" idx="3"/>
-            <a:endCxn id="8" idx="1"/>
+            <a:stCxn id="6" idx="1"/>
+            <a:endCxn id="8" idx="3"/>
           </p:cNvCxnSpPr>
           <p:nvPr/>
         </p:nvCxnSpPr>
         <p:spPr>
           <a:xfrm flipH="1">
-            <a:off x="808679" y="3863181"/>
-            <a:ext cx="4363321" cy="905842"/>
+            <a:off x="2008679" y="3863181"/>
+            <a:ext cx="1963321" cy="905842"/>
           </a:xfrm>
           <a:prstGeom prst="curvedConnector3">
             <a:avLst/>
           </a:prstGeom>
           <a:ln>
-            <a:headEnd type="arrow" w="med" len="med"/>
+            <a:tailEnd type="arrow" w="med" len="med"/>
           </a:ln>
         </p:spPr>
         <p:style>
@@ -13448,21 +13448,21 @@
         <p:nvCxnSpPr>
           <p:cNvPr id="18" name="Connector 17"/>
           <p:cNvCxnSpPr>
-            <a:stCxn id="8" idx="1"/>
-            <a:endCxn id="5" idx="3"/>
+            <a:stCxn id="8" idx="3"/>
+            <a:endCxn id="5" idx="1"/>
           </p:cNvCxnSpPr>
           <p:nvPr/>
         </p:nvCxnSpPr>
         <p:spPr>
           <a:xfrm flipV="1">
-            <a:off x="808679" y="2957339"/>
-            <a:ext cx="4363321" cy="1811684"/>
+            <a:off x="2008679" y="2957339"/>
+            <a:ext cx="1963321" cy="1811684"/>
           </a:xfrm>
           <a:prstGeom prst="curvedConnector3">
             <a:avLst/>
           </a:prstGeom>
           <a:ln>
-            <a:headEnd type="arrow" w="med" len="med"/>
+            <a:tailEnd type="arrow" w="med" len="med"/>
           </a:ln>
         </p:spPr>
         <p:style>
@@ -13484,21 +13484,21 @@
         <p:nvCxnSpPr>
           <p:cNvPr id="20" name="Connector 19"/>
           <p:cNvCxnSpPr>
-            <a:stCxn id="7" idx="3"/>
-            <a:endCxn id="9" idx="1"/>
+            <a:stCxn id="7" idx="1"/>
+            <a:endCxn id="9" idx="3"/>
           </p:cNvCxnSpPr>
           <p:nvPr/>
         </p:nvCxnSpPr>
         <p:spPr>
           <a:xfrm flipH="1">
-            <a:off x="4347000" y="4769023"/>
-            <a:ext cx="3988320" cy="905841"/>
+            <a:off x="4797000" y="4769023"/>
+            <a:ext cx="2338320" cy="905841"/>
           </a:xfrm>
           <a:prstGeom prst="curvedConnector3">
             <a:avLst/>
           </a:prstGeom>
           <a:ln>
-            <a:headEnd type="arrow" w="med" len="med"/>
+            <a:tailEnd type="arrow" w="med" len="med"/>
           </a:ln>
         </p:spPr>
         <p:style>
@@ -13923,83 +13923,6 @@
         </p:nvSpPr>
         <p:spPr>
           <a:xfrm>
-            <a:off x="2872000" y="2653181"/>
-            <a:ext cx="3400000" cy="2420000"/>
-          </a:xfrm>
-          <a:prstGeom prst="roundRect">
-            <a:avLst/>
-          </a:prstGeom>
-          <a:solidFill>
-            <a:srgbClr val="EEF4FF"/>
-          </a:solidFill>
-          <a:ln>
-            <a:solidFill>
-              <a:srgbClr val="4664AA"/>
-            </a:solidFill>
-          </a:ln>
-        </p:spPr>
-        <p:style>
-          <a:lnRef idx="1">
-            <a:schemeClr val="accent1"/>
-          </a:lnRef>
-          <a:fillRef idx="3">
-            <a:schemeClr val="accent1"/>
-          </a:fillRef>
-          <a:effectRef idx="2">
-            <a:schemeClr val="accent1"/>
-          </a:effectRef>
-          <a:fontRef idx="minor">
-            <a:schemeClr val="lt1"/>
-          </a:fontRef>
-        </p:style>
-        <p:txBody>
-          <a:bodyPr rtlCol="0" anchor="ctr"/>
-          <a:lstStyle/>
-          <a:p/>
-        </p:txBody>
-      </p:sp>
-      <p:sp>
-        <p:nvSpPr>
-          <p:cNvPr id="5" name="TextBox 4"/>
-          <p:cNvSpPr txBox="1"/>
-          <p:nvPr/>
-        </p:nvSpPr>
-        <p:spPr>
-          <a:xfrm>
-            <a:off x="2872000" y="2653181"/>
-            <a:ext cx="3400000" cy="420000"/>
-          </a:xfrm>
-          <a:prstGeom prst="rect">
-            <a:avLst/>
-          </a:prstGeom>
-          <a:noFill/>
-        </p:spPr>
-        <p:txBody>
-          <a:bodyPr wrap="none">
-            <a:spAutoFit/>
-          </a:bodyPr>
-          <a:lstStyle/>
-          <a:p>
-            <a:pPr algn="ctr"/>
-            <a:r>
-              <a:rPr sz="1100" b="1">
-                <a:solidFill>
-                  <a:srgbClr val="4664AA"/>
-                </a:solidFill>
-              </a:rPr>
-              <a:t>Active</a:t>
-            </a:r>
-          </a:p>
-        </p:txBody>
-      </p:sp>
-      <p:sp>
-        <p:nvSpPr>
-          <p:cNvPr id="6" name="Rounded Rectangle 5"/>
-          <p:cNvSpPr/>
-          <p:nvPr/>
-        </p:nvSpPr>
-        <p:spPr>
-          <a:xfrm>
             <a:off x="2272000" y="3538181"/>
             <a:ext cx="4600000" cy="2420000"/>
           </a:xfrm>
@@ -14038,7 +13961,7 @@
       </p:sp>
       <p:sp>
         <p:nvSpPr>
-          <p:cNvPr id="7" name="Rounded Rectangle 6"/>
+          <p:cNvPr id="5" name="Rounded Rectangle 4"/>
           <p:cNvSpPr/>
           <p:nvPr/>
         </p:nvSpPr>
@@ -14082,6 +14005,83 @@
       </p:sp>
       <p:sp>
         <p:nvSpPr>
+          <p:cNvPr id="6" name="Rounded Rectangle 5"/>
+          <p:cNvSpPr/>
+          <p:nvPr/>
+        </p:nvSpPr>
+        <p:spPr>
+          <a:xfrm>
+            <a:off x="2872000" y="2653181"/>
+            <a:ext cx="3400000" cy="2420000"/>
+          </a:xfrm>
+          <a:prstGeom prst="roundRect">
+            <a:avLst/>
+          </a:prstGeom>
+          <a:solidFill>
+            <a:srgbClr val="EEF4FF"/>
+          </a:solidFill>
+          <a:ln>
+            <a:solidFill>
+              <a:srgbClr val="4664AA"/>
+            </a:solidFill>
+          </a:ln>
+        </p:spPr>
+        <p:style>
+          <a:lnRef idx="1">
+            <a:schemeClr val="accent1"/>
+          </a:lnRef>
+          <a:fillRef idx="3">
+            <a:schemeClr val="accent1"/>
+          </a:fillRef>
+          <a:effectRef idx="2">
+            <a:schemeClr val="accent1"/>
+          </a:effectRef>
+          <a:fontRef idx="minor">
+            <a:schemeClr val="lt1"/>
+          </a:fontRef>
+        </p:style>
+        <p:txBody>
+          <a:bodyPr rtlCol="0" anchor="ctr"/>
+          <a:lstStyle/>
+          <a:p/>
+        </p:txBody>
+      </p:sp>
+      <p:sp>
+        <p:nvSpPr>
+          <p:cNvPr id="7" name="TextBox 6"/>
+          <p:cNvSpPr txBox="1"/>
+          <p:nvPr/>
+        </p:nvSpPr>
+        <p:spPr>
+          <a:xfrm>
+            <a:off x="2872000" y="2653181"/>
+            <a:ext cx="3400000" cy="420000"/>
+          </a:xfrm>
+          <a:prstGeom prst="rect">
+            <a:avLst/>
+          </a:prstGeom>
+          <a:noFill/>
+        </p:spPr>
+        <p:txBody>
+          <a:bodyPr wrap="none">
+            <a:spAutoFit/>
+          </a:bodyPr>
+          <a:lstStyle/>
+          <a:p>
+            <a:pPr algn="ctr"/>
+            <a:r>
+              <a:rPr sz="1100" b="1">
+                <a:solidFill>
+                  <a:srgbClr val="4664AA"/>
+                </a:solidFill>
+              </a:rPr>
+              <a:t>Active</a:t>
+            </a:r>
+          </a:p>
+        </p:txBody>
+      </p:sp>
+      <p:sp>
+        <p:nvSpPr>
           <p:cNvPr id="8" name="Oval 7"/>
           <p:cNvSpPr/>
           <p:nvPr/>
@@ -14341,21 +14341,21 @@
         <p:nvCxnSpPr>
           <p:cNvPr id="18" name="Connector 17"/>
           <p:cNvCxnSpPr>
-            <a:stCxn id="8" idx="1"/>
-            <a:endCxn id="4" idx="3"/>
+            <a:stCxn id="8" idx="3"/>
+            <a:endCxn id="6" idx="1"/>
           </p:cNvCxnSpPr>
           <p:nvPr/>
         </p:nvCxnSpPr>
         <p:spPr>
           <a:xfrm>
-            <a:off x="1218679" y="3863181"/>
-            <a:ext cx="5053321" cy="0"/>
+            <a:off x="1598679" y="3863181"/>
+            <a:ext cx="1273321" cy="0"/>
           </a:xfrm>
           <a:prstGeom prst="curvedConnector3">
             <a:avLst/>
           </a:prstGeom>
           <a:ln>
-            <a:headEnd type="arrow" w="med" len="med"/>
+            <a:tailEnd type="arrow" w="med" len="med"/>
           </a:ln>
         </p:spPr>
         <p:style>
@@ -14377,21 +14377,21 @@
         <p:nvCxnSpPr>
           <p:cNvPr id="19" name="Connector 18"/>
           <p:cNvCxnSpPr>
-            <a:stCxn id="11" idx="1"/>
-            <a:endCxn id="12" idx="3"/>
+            <a:stCxn id="11" idx="3"/>
+            <a:endCxn id="12" idx="1"/>
           </p:cNvCxnSpPr>
           <p:nvPr/>
         </p:nvCxnSpPr>
         <p:spPr>
           <a:xfrm>
-            <a:off x="2761999" y="3608180"/>
-            <a:ext cx="2410001" cy="0"/>
+            <a:off x="3141999" y="3608180"/>
+            <a:ext cx="830001" cy="0"/>
           </a:xfrm>
           <a:prstGeom prst="curvedConnector3">
             <a:avLst/>
           </a:prstGeom>
           <a:ln>
-            <a:headEnd type="arrow" w="med" len="med"/>
+            <a:tailEnd type="arrow" w="med" len="med"/>
           </a:ln>
         </p:spPr>
         <p:style>
@@ -14413,21 +14413,21 @@
         <p:nvCxnSpPr>
           <p:cNvPr id="20" name="Connector 19"/>
           <p:cNvCxnSpPr>
-            <a:stCxn id="12" idx="1"/>
-            <a:endCxn id="13" idx="3"/>
+            <a:stCxn id="12" idx="3"/>
+            <a:endCxn id="13" idx="1"/>
           </p:cNvCxnSpPr>
           <p:nvPr/>
         </p:nvCxnSpPr>
         <p:spPr>
           <a:xfrm>
-            <a:off x="3972000" y="3608180"/>
-            <a:ext cx="2820000" cy="0"/>
+            <a:off x="5172000" y="3608180"/>
+            <a:ext cx="420000" cy="0"/>
           </a:xfrm>
           <a:prstGeom prst="curvedConnector3">
             <a:avLst/>
           </a:prstGeom>
           <a:ln>
-            <a:headEnd type="arrow" w="med" len="med"/>
+            <a:tailEnd type="arrow" w="med" len="med"/>
           </a:ln>
         </p:spPr>
         <p:style>
@@ -14449,21 +14449,21 @@
         <p:nvCxnSpPr>
           <p:cNvPr id="22" name="Connector 21"/>
           <p:cNvCxnSpPr>
-            <a:stCxn id="13" idx="3"/>
-            <a:endCxn id="12" idx="1"/>
+            <a:stCxn id="13" idx="1"/>
+            <a:endCxn id="12" idx="3"/>
           </p:cNvCxnSpPr>
           <p:nvPr/>
         </p:nvCxnSpPr>
         <p:spPr>
           <a:xfrm flipH="1">
-            <a:off x="3972000" y="3608180"/>
-            <a:ext cx="2820000" cy="0"/>
+            <a:off x="5172000" y="3608180"/>
+            <a:ext cx="420000" cy="0"/>
           </a:xfrm>
           <a:prstGeom prst="curvedConnector3">
             <a:avLst/>
           </a:prstGeom>
           <a:ln>
-            <a:headEnd type="arrow" w="med" len="med"/>
+            <a:tailEnd type="arrow" w="med" len="med"/>
           </a:ln>
         </p:spPr>
         <p:style>
@@ -14485,21 +14485,21 @@
         <p:nvCxnSpPr>
           <p:cNvPr id="24" name="Connector 23"/>
           <p:cNvCxnSpPr>
-            <a:stCxn id="14" idx="1"/>
-            <a:endCxn id="15" idx="3"/>
+            <a:stCxn id="14" idx="3"/>
+            <a:endCxn id="15" idx="1"/>
           </p:cNvCxnSpPr>
           <p:nvPr/>
         </p:nvCxnSpPr>
         <p:spPr>
           <a:xfrm>
-            <a:off x="2761999" y="4958181"/>
-            <a:ext cx="2410001" cy="0"/>
+            <a:off x="3141999" y="4958181"/>
+            <a:ext cx="830001" cy="0"/>
           </a:xfrm>
           <a:prstGeom prst="curvedConnector3">
             <a:avLst/>
           </a:prstGeom>
           <a:ln>
-            <a:headEnd type="arrow" w="med" len="med"/>
+            <a:tailEnd type="arrow" w="med" len="med"/>
           </a:ln>
         </p:spPr>
         <p:style>
@@ -14521,21 +14521,21 @@
         <p:nvCxnSpPr>
           <p:cNvPr id="25" name="Connector 24"/>
           <p:cNvCxnSpPr>
-            <a:stCxn id="15" idx="1"/>
-            <a:endCxn id="16" idx="3"/>
+            <a:stCxn id="15" idx="3"/>
+            <a:endCxn id="16" idx="1"/>
           </p:cNvCxnSpPr>
           <p:nvPr/>
         </p:nvCxnSpPr>
         <p:spPr>
           <a:xfrm>
-            <a:off x="3972000" y="4958181"/>
-            <a:ext cx="2820000" cy="0"/>
+            <a:off x="5172000" y="4958181"/>
+            <a:ext cx="420000" cy="0"/>
           </a:xfrm>
           <a:prstGeom prst="curvedConnector3">
             <a:avLst/>
           </a:prstGeom>
           <a:ln>
-            <a:headEnd type="arrow" w="med" len="med"/>
+            <a:tailEnd type="arrow" w="med" len="med"/>
           </a:ln>
         </p:spPr>
         <p:style>
@@ -14557,21 +14557,21 @@
         <p:nvCxnSpPr>
           <p:cNvPr id="27" name="Connector 26"/>
           <p:cNvCxnSpPr>
-            <a:stCxn id="16" idx="3"/>
-            <a:endCxn id="15" idx="1"/>
+            <a:stCxn id="16" idx="1"/>
+            <a:endCxn id="15" idx="3"/>
           </p:cNvCxnSpPr>
           <p:nvPr/>
         </p:nvCxnSpPr>
         <p:spPr>
           <a:xfrm flipH="1">
-            <a:off x="3972000" y="4958181"/>
-            <a:ext cx="2820000" cy="0"/>
+            <a:off x="5172000" y="4958181"/>
+            <a:ext cx="420000" cy="0"/>
           </a:xfrm>
           <a:prstGeom prst="curvedConnector3">
             <a:avLst/>
           </a:prstGeom>
           <a:ln>
-            <a:headEnd type="arrow" w="med" len="med"/>
+            <a:tailEnd type="arrow" w="med" len="med"/>
           </a:ln>
         </p:spPr>
         <p:style>
@@ -14593,21 +14593,21 @@
         <p:nvCxnSpPr>
           <p:cNvPr id="29" name="Connector 28"/>
           <p:cNvCxnSpPr>
-            <a:stCxn id="4" idx="1"/>
-            <a:endCxn id="9" idx="3"/>
+            <a:stCxn id="6" idx="3"/>
+            <a:endCxn id="9" idx="1"/>
           </p:cNvCxnSpPr>
           <p:nvPr/>
         </p:nvCxnSpPr>
         <p:spPr>
           <a:xfrm>
-            <a:off x="2872000" y="3863181"/>
-            <a:ext cx="5088320" cy="0"/>
+            <a:off x="6272000" y="3863181"/>
+            <a:ext cx="1238320" cy="0"/>
           </a:xfrm>
           <a:prstGeom prst="curvedConnector3">
             <a:avLst/>
           </a:prstGeom>
           <a:ln>
-            <a:headEnd type="arrow" w="med" len="med"/>
+            <a:tailEnd type="arrow" w="med" len="med"/>
           </a:ln>
         </p:spPr>
         <p:style>
@@ -15416,7 +15416,7 @@
             <a:avLst/>
           </a:prstGeom>
           <a:ln>
-            <a:headEnd type="arrow" w="med" len="med"/>
+            <a:tailEnd type="arrow" w="med" len="med"/>
           </a:ln>
         </p:spPr>
         <p:style>
@@ -15438,21 +15438,21 @@
         <p:nvCxnSpPr>
           <p:cNvPr id="15" name="Connector 14"/>
           <p:cNvCxnSpPr>
-            <a:stCxn id="7" idx="3"/>
-            <a:endCxn id="8" idx="1"/>
+            <a:stCxn id="7" idx="1"/>
+            <a:endCxn id="8" idx="3"/>
           </p:cNvCxnSpPr>
           <p:nvPr/>
         </p:nvCxnSpPr>
         <p:spPr>
           <a:xfrm flipH="1">
-            <a:off x="808679" y="2957339"/>
-            <a:ext cx="4363321" cy="905842"/>
+            <a:off x="2008679" y="2957339"/>
+            <a:ext cx="1963321" cy="905842"/>
           </a:xfrm>
           <a:prstGeom prst="curvedConnector3">
             <a:avLst/>
           </a:prstGeom>
           <a:ln>
-            <a:headEnd type="arrow" w="med" len="med"/>
+            <a:tailEnd type="arrow" w="med" len="med"/>
           </a:ln>
         </p:spPr>
         <p:style>
@@ -15474,21 +15474,21 @@
         <p:nvCxnSpPr>
           <p:cNvPr id="17" name="Connector 16"/>
           <p:cNvCxnSpPr>
-            <a:stCxn id="7" idx="1"/>
-            <a:endCxn id="9" idx="3"/>
+            <a:stCxn id="7" idx="3"/>
+            <a:endCxn id="9" idx="1"/>
           </p:cNvCxnSpPr>
           <p:nvPr/>
         </p:nvCxnSpPr>
         <p:spPr>
           <a:xfrm>
-            <a:off x="3972000" y="2957339"/>
-            <a:ext cx="4363320" cy="905842"/>
+            <a:off x="5172000" y="2957339"/>
+            <a:ext cx="1963320" cy="905842"/>
           </a:xfrm>
           <a:prstGeom prst="curvedConnector3">
             <a:avLst/>
           </a:prstGeom>
           <a:ln>
-            <a:headEnd type="arrow" w="med" len="med"/>
+            <a:tailEnd type="arrow" w="med" len="med"/>
           </a:ln>
         </p:spPr>
         <p:style>
@@ -15524,7 +15524,7 @@
             <a:avLst/>
           </a:prstGeom>
           <a:ln>
-            <a:headEnd type="arrow" w="med" len="med"/>
+            <a:tailEnd type="arrow" w="med" len="med"/>
           </a:ln>
         </p:spPr>
         <p:style>
@@ -15560,7 +15560,7 @@
             <a:avLst/>
           </a:prstGeom>
           <a:ln>
-            <a:headEnd type="arrow" w="med" len="med"/>
+            <a:tailEnd type="arrow" w="med" len="med"/>
           </a:ln>
         </p:spPr>
         <p:style>
@@ -15582,21 +15582,21 @@
         <p:nvCxnSpPr>
           <p:cNvPr id="23" name="Connector 22"/>
           <p:cNvCxnSpPr>
-            <a:stCxn id="8" idx="1"/>
-            <a:endCxn id="4" idx="3"/>
+            <a:stCxn id="8" idx="3"/>
+            <a:endCxn id="4" idx="1"/>
           </p:cNvCxnSpPr>
           <p:nvPr/>
         </p:nvCxnSpPr>
         <p:spPr>
           <a:xfrm>
-            <a:off x="808679" y="3863181"/>
-            <a:ext cx="5463321" cy="905842"/>
+            <a:off x="2008679" y="3863181"/>
+            <a:ext cx="863321" cy="905842"/>
           </a:xfrm>
           <a:prstGeom prst="curvedConnector3">
             <a:avLst/>
           </a:prstGeom>
           <a:ln>
-            <a:headEnd type="arrow" w="med" len="med"/>
+            <a:tailEnd type="arrow" w="med" len="med"/>
           </a:ln>
         </p:spPr>
         <p:style>
@@ -15618,21 +15618,21 @@
         <p:nvCxnSpPr>
           <p:cNvPr id="24" name="Connector 23"/>
           <p:cNvCxnSpPr>
-            <a:stCxn id="9" idx="3"/>
-            <a:endCxn id="4" idx="1"/>
+            <a:stCxn id="9" idx="1"/>
+            <a:endCxn id="4" idx="3"/>
           </p:cNvCxnSpPr>
           <p:nvPr/>
         </p:nvCxnSpPr>
         <p:spPr>
           <a:xfrm flipH="1">
-            <a:off x="2872000" y="3863181"/>
-            <a:ext cx="5463320" cy="905842"/>
+            <a:off x="6272000" y="3863181"/>
+            <a:ext cx="863320" cy="905842"/>
           </a:xfrm>
           <a:prstGeom prst="curvedConnector3">
             <a:avLst/>
           </a:prstGeom>
           <a:ln>
-            <a:headEnd type="arrow" w="med" len="med"/>
+            <a:tailEnd type="arrow" w="med" len="med"/>
           </a:ln>
         </p:spPr>
         <p:style>
@@ -15668,7 +15668,7 @@
             <a:avLst/>
           </a:prstGeom>
           <a:ln>
-            <a:headEnd type="arrow" w="med" len="med"/>
+            <a:tailEnd type="arrow" w="med" len="med"/>
           </a:ln>
         </p:spPr>
         <p:style>
@@ -17618,15 +17618,15 @@
         <p:nvCxnSpPr>
           <p:cNvPr id="38" name="Connector 37"/>
           <p:cNvCxnSpPr>
-            <a:stCxn id="9" idx="3"/>
-            <a:endCxn id="14" idx="1"/>
+            <a:stCxn id="9" idx="1"/>
+            <a:endCxn id="14" idx="3"/>
           </p:cNvCxnSpPr>
           <p:nvPr/>
         </p:nvCxnSpPr>
         <p:spPr>
           <a:xfrm flipH="1" flipV="1">
-            <a:off x="2496601" y="2460200"/>
-            <a:ext cx="5990199" cy="702505"/>
+            <a:off x="4896601" y="2460200"/>
+            <a:ext cx="1190199" cy="702505"/>
           </a:xfrm>
           <a:prstGeom prst="line">
             <a:avLst/>
@@ -17656,15 +17656,15 @@
         <p:nvCxnSpPr>
           <p:cNvPr id="39" name="Connector 38"/>
           <p:cNvCxnSpPr>
-            <a:stCxn id="19" idx="1"/>
-            <a:endCxn id="14" idx="3"/>
+            <a:stCxn id="19" idx="3"/>
+            <a:endCxn id="14" idx="1"/>
           </p:cNvCxnSpPr>
           <p:nvPr/>
         </p:nvCxnSpPr>
         <p:spPr>
-          <a:xfrm flipV="1">
-            <a:off x="657200" y="2460200"/>
-            <a:ext cx="4239401" cy="1717108"/>
+          <a:xfrm flipV="1" flipH="1">
+            <a:off x="2496601" y="2460200"/>
+            <a:ext cx="560599" cy="1717108"/>
           </a:xfrm>
           <a:prstGeom prst="line">
             <a:avLst/>
@@ -19394,15 +19394,15 @@
         <p:nvCxnSpPr>
           <p:cNvPr id="23" name="Connector 22"/>
           <p:cNvCxnSpPr>
-            <a:stCxn id="4" idx="1"/>
-            <a:endCxn id="5" idx="3"/>
+            <a:stCxn id="4" idx="3"/>
+            <a:endCxn id="5" idx="1"/>
           </p:cNvCxnSpPr>
           <p:nvPr/>
         </p:nvCxnSpPr>
         <p:spPr>
-          <a:xfrm>
-            <a:off x="3822000" y="3863181"/>
-            <a:ext cx="2548072" cy="621658"/>
+          <a:xfrm flipH="1">
+            <a:off x="5270072" y="3863181"/>
+            <a:ext cx="51928" cy="621658"/>
           </a:xfrm>
           <a:prstGeom prst="curvedConnector3">
             <a:avLst/>
@@ -19432,15 +19432,15 @@
         <p:nvCxnSpPr>
           <p:cNvPr id="24" name="Connector 23"/>
           <p:cNvCxnSpPr>
-            <a:stCxn id="5" idx="1"/>
-            <a:endCxn id="6" idx="3"/>
+            <a:stCxn id="5" idx="3"/>
+            <a:endCxn id="6" idx="1"/>
           </p:cNvCxnSpPr>
           <p:nvPr/>
         </p:nvCxnSpPr>
         <p:spPr>
           <a:xfrm flipV="1">
-            <a:off x="5270072" y="4311883"/>
-            <a:ext cx="2949840" cy="172956"/>
+            <a:off x="6370072" y="4311883"/>
+            <a:ext cx="1029840" cy="172956"/>
           </a:xfrm>
           <a:prstGeom prst="curvedConnector3">
             <a:avLst/>
@@ -19470,15 +19470,15 @@
         <p:nvCxnSpPr>
           <p:cNvPr id="25" name="Connector 24"/>
           <p:cNvCxnSpPr>
-            <a:stCxn id="5" idx="1"/>
-            <a:endCxn id="7" idx="3"/>
+            <a:stCxn id="5" idx="3"/>
+            <a:endCxn id="7" idx="1"/>
           </p:cNvCxnSpPr>
           <p:nvPr/>
         </p:nvCxnSpPr>
         <p:spPr>
           <a:xfrm>
-            <a:off x="5270072" y="4484839"/>
-            <a:ext cx="2208073" cy="621658"/>
+            <a:off x="6370072" y="4484839"/>
+            <a:ext cx="288073" cy="621658"/>
           </a:xfrm>
           <a:prstGeom prst="curvedConnector3">
             <a:avLst/>
@@ -19546,15 +19546,15 @@
         <p:nvCxnSpPr>
           <p:cNvPr id="27" name="Connector 26"/>
           <p:cNvCxnSpPr>
-            <a:stCxn id="4" idx="3"/>
-            <a:endCxn id="9" idx="1"/>
+            <a:stCxn id="4" idx="1"/>
+            <a:endCxn id="9" idx="3"/>
           </p:cNvCxnSpPr>
           <p:nvPr/>
         </p:nvCxnSpPr>
         <p:spPr>
-          <a:xfrm flipH="1">
-            <a:off x="3074805" y="3863181"/>
-            <a:ext cx="2247195" cy="771523"/>
+          <a:xfrm>
+            <a:off x="3822000" y="3863181"/>
+            <a:ext cx="352805" cy="771523"/>
           </a:xfrm>
           <a:prstGeom prst="curvedConnector3">
             <a:avLst/>
@@ -19622,15 +19622,15 @@
         <p:nvCxnSpPr>
           <p:cNvPr id="29" name="Connector 28"/>
           <p:cNvCxnSpPr>
-            <a:stCxn id="9" idx="3"/>
-            <a:endCxn id="11" idx="1"/>
+            <a:stCxn id="9" idx="1"/>
+            <a:endCxn id="11" idx="3"/>
           </p:cNvCxnSpPr>
           <p:nvPr/>
         </p:nvCxnSpPr>
         <p:spPr>
-          <a:xfrm flipH="1">
-            <a:off x="2267609" y="4634704"/>
-            <a:ext cx="1907196" cy="771524"/>
+          <a:xfrm>
+            <a:off x="3074805" y="4634704"/>
+            <a:ext cx="12804" cy="771524"/>
           </a:xfrm>
           <a:prstGeom prst="curvedConnector3">
             <a:avLst/>
@@ -19660,15 +19660,15 @@
         <p:nvCxnSpPr>
           <p:cNvPr id="30" name="Connector 29"/>
           <p:cNvCxnSpPr>
-            <a:stCxn id="9" idx="3"/>
-            <a:endCxn id="12" idx="1"/>
+            <a:stCxn id="9" idx="1"/>
+            <a:endCxn id="12" idx="3"/>
           </p:cNvCxnSpPr>
           <p:nvPr/>
         </p:nvCxnSpPr>
         <p:spPr>
           <a:xfrm flipH="1">
-            <a:off x="1209168" y="4634704"/>
-            <a:ext cx="2965637" cy="99805"/>
+            <a:off x="2029168" y="4634704"/>
+            <a:ext cx="1045637" cy="99805"/>
           </a:xfrm>
           <a:prstGeom prst="curvedConnector3">
             <a:avLst/>
@@ -19698,15 +19698,15 @@
         <p:nvCxnSpPr>
           <p:cNvPr id="31" name="Connector 30"/>
           <p:cNvCxnSpPr>
-            <a:stCxn id="4" idx="3"/>
-            <a:endCxn id="13" idx="1"/>
+            <a:stCxn id="4" idx="1"/>
+            <a:endCxn id="13" idx="3"/>
           </p:cNvCxnSpPr>
           <p:nvPr/>
         </p:nvCxnSpPr>
         <p:spPr>
           <a:xfrm flipH="1" flipV="1">
-            <a:off x="2403044" y="3638830"/>
-            <a:ext cx="2918956" cy="224351"/>
+            <a:off x="3503044" y="3638830"/>
+            <a:ext cx="318956" cy="224351"/>
           </a:xfrm>
           <a:prstGeom prst="curvedConnector3">
             <a:avLst/>
@@ -19736,15 +19736,15 @@
         <p:nvCxnSpPr>
           <p:cNvPr id="32" name="Connector 31"/>
           <p:cNvCxnSpPr>
-            <a:stCxn id="13" idx="3"/>
-            <a:endCxn id="14" idx="1"/>
+            <a:stCxn id="13" idx="1"/>
+            <a:endCxn id="14" idx="3"/>
           </p:cNvCxnSpPr>
           <p:nvPr/>
         </p:nvCxnSpPr>
         <p:spPr>
           <a:xfrm flipH="1">
-            <a:off x="827184" y="3638830"/>
-            <a:ext cx="2675860" cy="224351"/>
+            <a:off x="1647184" y="3638830"/>
+            <a:ext cx="755860" cy="224351"/>
           </a:xfrm>
           <a:prstGeom prst="curvedConnector3">
             <a:avLst/>
@@ -19774,15 +19774,15 @@
         <p:nvCxnSpPr>
           <p:cNvPr id="33" name="Connector 32"/>
           <p:cNvCxnSpPr>
-            <a:stCxn id="13" idx="3"/>
-            <a:endCxn id="15" idx="1"/>
+            <a:stCxn id="13" idx="1"/>
+            <a:endCxn id="15" idx="3"/>
           </p:cNvCxnSpPr>
           <p:nvPr/>
         </p:nvCxnSpPr>
         <p:spPr>
           <a:xfrm flipH="1" flipV="1">
-            <a:off x="1209168" y="2991853"/>
-            <a:ext cx="2293876" cy="646977"/>
+            <a:off x="2029168" y="2991853"/>
+            <a:ext cx="373876" cy="646977"/>
           </a:xfrm>
           <a:prstGeom prst="curvedConnector3">
             <a:avLst/>
@@ -19850,15 +19850,15 @@
         <p:nvCxnSpPr>
           <p:cNvPr id="35" name="Connector 34"/>
           <p:cNvCxnSpPr>
-            <a:stCxn id="16" idx="3"/>
-            <a:endCxn id="17" idx="1"/>
+            <a:stCxn id="16" idx="1"/>
+            <a:endCxn id="17" idx="3"/>
           </p:cNvCxnSpPr>
           <p:nvPr/>
         </p:nvCxnSpPr>
         <p:spPr>
           <a:xfrm flipH="1" flipV="1">
-            <a:off x="2267609" y="2320134"/>
-            <a:ext cx="2653408" cy="612412"/>
+            <a:off x="3087609" y="2320134"/>
+            <a:ext cx="733408" cy="612412"/>
           </a:xfrm>
           <a:prstGeom prst="curvedConnector3">
             <a:avLst/>
@@ -19926,15 +19926,15 @@
         <p:nvCxnSpPr>
           <p:cNvPr id="37" name="Connector 36"/>
           <p:cNvCxnSpPr>
-            <a:stCxn id="16" idx="1"/>
-            <a:endCxn id="19" idx="3"/>
+            <a:stCxn id="16" idx="3"/>
+            <a:endCxn id="19" idx="1"/>
           </p:cNvCxnSpPr>
           <p:nvPr/>
         </p:nvCxnSpPr>
         <p:spPr>
           <a:xfrm flipV="1">
-            <a:off x="3821017" y="2110080"/>
-            <a:ext cx="2343525" cy="822466"/>
+            <a:off x="4921017" y="2110080"/>
+            <a:ext cx="423525" cy="822466"/>
           </a:xfrm>
           <a:prstGeom prst="curvedConnector3">
             <a:avLst/>
@@ -19964,15 +19964,15 @@
         <p:nvCxnSpPr>
           <p:cNvPr id="38" name="Connector 37"/>
           <p:cNvCxnSpPr>
-            <a:stCxn id="4" idx="1"/>
-            <a:endCxn id="20" idx="3"/>
+            <a:stCxn id="4" idx="3"/>
+            <a:endCxn id="20" idx="1"/>
           </p:cNvCxnSpPr>
           <p:nvPr/>
         </p:nvCxnSpPr>
         <p:spPr>
           <a:xfrm flipV="1">
-            <a:off x="3822000" y="3427517"/>
-            <a:ext cx="2776416" cy="435664"/>
+            <a:off x="5322000" y="3427517"/>
+            <a:ext cx="176416" cy="435664"/>
           </a:xfrm>
           <a:prstGeom prst="curvedConnector3">
             <a:avLst/>
@@ -20002,15 +20002,15 @@
         <p:nvCxnSpPr>
           <p:cNvPr id="39" name="Connector 38"/>
           <p:cNvCxnSpPr>
-            <a:stCxn id="20" idx="1"/>
-            <a:endCxn id="21" idx="3"/>
+            <a:stCxn id="20" idx="3"/>
+            <a:endCxn id="21" idx="1"/>
           </p:cNvCxnSpPr>
           <p:nvPr/>
         </p:nvCxnSpPr>
         <p:spPr>
           <a:xfrm flipV="1">
-            <a:off x="5498416" y="2619865"/>
-            <a:ext cx="1979729" cy="807652"/>
+            <a:off x="6598416" y="2619865"/>
+            <a:ext cx="59729" cy="807652"/>
           </a:xfrm>
           <a:prstGeom prst="curvedConnector3">
             <a:avLst/>
@@ -20040,15 +20040,15 @@
         <p:nvCxnSpPr>
           <p:cNvPr id="40" name="Connector 39"/>
           <p:cNvCxnSpPr>
-            <a:stCxn id="20" idx="1"/>
-            <a:endCxn id="22" idx="3"/>
+            <a:stCxn id="20" idx="3"/>
+            <a:endCxn id="22" idx="1"/>
           </p:cNvCxnSpPr>
           <p:nvPr/>
         </p:nvCxnSpPr>
         <p:spPr>
           <a:xfrm flipV="1">
-            <a:off x="5498416" y="3414479"/>
-            <a:ext cx="2721496" cy="13038"/>
+            <a:off x="6598416" y="3414479"/>
+            <a:ext cx="801496" cy="13038"/>
           </a:xfrm>
           <a:prstGeom prst="curvedConnector3">
             <a:avLst/>
@@ -21280,21 +21280,21 @@
         <p:nvCxnSpPr>
           <p:cNvPr id="7" name="Connector 6"/>
           <p:cNvCxnSpPr>
-            <a:stCxn id="4" idx="1"/>
-            <a:endCxn id="5" idx="3"/>
+            <a:stCxn id="4" idx="3"/>
+            <a:endCxn id="5" idx="1"/>
           </p:cNvCxnSpPr>
           <p:nvPr/>
         </p:nvCxnSpPr>
         <p:spPr>
           <a:xfrm>
-            <a:off x="457200" y="3863181"/>
-            <a:ext cx="4714800" cy="0"/>
+            <a:off x="1657200" y="3863181"/>
+            <a:ext cx="2314800" cy="0"/>
           </a:xfrm>
           <a:prstGeom prst="curvedConnector3">
             <a:avLst/>
           </a:prstGeom>
           <a:ln>
-            <a:headEnd type="arrow" w="med" len="med"/>
+            <a:tailEnd type="arrow" w="med" len="med"/>
           </a:ln>
         </p:spPr>
         <p:style>
@@ -21316,21 +21316,21 @@
         <p:nvCxnSpPr>
           <p:cNvPr id="8" name="Connector 7"/>
           <p:cNvCxnSpPr>
-            <a:stCxn id="5" idx="1"/>
-            <a:endCxn id="6" idx="3"/>
+            <a:stCxn id="5" idx="3"/>
+            <a:endCxn id="6" idx="1"/>
           </p:cNvCxnSpPr>
           <p:nvPr/>
         </p:nvCxnSpPr>
         <p:spPr>
           <a:xfrm>
-            <a:off x="3972000" y="3863181"/>
-            <a:ext cx="4714800" cy="0"/>
+            <a:off x="5172000" y="3863181"/>
+            <a:ext cx="2314800" cy="0"/>
           </a:xfrm>
           <a:prstGeom prst="curvedConnector3">
             <a:avLst/>
           </a:prstGeom>
           <a:ln>
-            <a:headEnd type="arrow" w="med" len="med"/>
+            <a:tailEnd type="arrow" w="med" len="med"/>
           </a:ln>
         </p:spPr>
         <p:style>

--- a/demo_full.pptx
+++ b/demo_full.pptx
@@ -13923,7 +13923,7 @@
         </p:nvSpPr>
         <p:spPr>
           <a:xfrm>
-            <a:off x="2272000" y="3538181"/>
+            <a:off x="2272000" y="2188180"/>
             <a:ext cx="4600000" cy="2420000"/>
           </a:xfrm>
           <a:prstGeom prst="roundRect">
@@ -13967,7 +13967,84 @@
         </p:nvSpPr>
         <p:spPr>
           <a:xfrm>
-            <a:off x="2272000" y="2188180"/>
+            <a:off x="2872000" y="2653181"/>
+            <a:ext cx="3400000" cy="2420000"/>
+          </a:xfrm>
+          <a:prstGeom prst="roundRect">
+            <a:avLst/>
+          </a:prstGeom>
+          <a:solidFill>
+            <a:srgbClr val="EEF4FF"/>
+          </a:solidFill>
+          <a:ln>
+            <a:solidFill>
+              <a:srgbClr val="4664AA"/>
+            </a:solidFill>
+          </a:ln>
+        </p:spPr>
+        <p:style>
+          <a:lnRef idx="1">
+            <a:schemeClr val="accent1"/>
+          </a:lnRef>
+          <a:fillRef idx="3">
+            <a:schemeClr val="accent1"/>
+          </a:fillRef>
+          <a:effectRef idx="2">
+            <a:schemeClr val="accent1"/>
+          </a:effectRef>
+          <a:fontRef idx="minor">
+            <a:schemeClr val="lt1"/>
+          </a:fontRef>
+        </p:style>
+        <p:txBody>
+          <a:bodyPr rtlCol="0" anchor="ctr"/>
+          <a:lstStyle/>
+          <a:p/>
+        </p:txBody>
+      </p:sp>
+      <p:sp>
+        <p:nvSpPr>
+          <p:cNvPr id="6" name="TextBox 5"/>
+          <p:cNvSpPr txBox="1"/>
+          <p:nvPr/>
+        </p:nvSpPr>
+        <p:spPr>
+          <a:xfrm>
+            <a:off x="2872000" y="2653181"/>
+            <a:ext cx="3400000" cy="420000"/>
+          </a:xfrm>
+          <a:prstGeom prst="rect">
+            <a:avLst/>
+          </a:prstGeom>
+          <a:noFill/>
+        </p:spPr>
+        <p:txBody>
+          <a:bodyPr wrap="none">
+            <a:spAutoFit/>
+          </a:bodyPr>
+          <a:lstStyle/>
+          <a:p>
+            <a:pPr algn="ctr"/>
+            <a:r>
+              <a:rPr sz="1100" b="1">
+                <a:solidFill>
+                  <a:srgbClr val="4664AA"/>
+                </a:solidFill>
+              </a:rPr>
+              <a:t>Active</a:t>
+            </a:r>
+          </a:p>
+        </p:txBody>
+      </p:sp>
+      <p:sp>
+        <p:nvSpPr>
+          <p:cNvPr id="7" name="Rounded Rectangle 6"/>
+          <p:cNvSpPr/>
+          <p:nvPr/>
+        </p:nvSpPr>
+        <p:spPr>
+          <a:xfrm>
+            <a:off x="2272000" y="3538181"/>
             <a:ext cx="4600000" cy="2420000"/>
           </a:xfrm>
           <a:prstGeom prst="roundRect">
@@ -14005,83 +14082,6 @@
       </p:sp>
       <p:sp>
         <p:nvSpPr>
-          <p:cNvPr id="6" name="Rounded Rectangle 5"/>
-          <p:cNvSpPr/>
-          <p:nvPr/>
-        </p:nvSpPr>
-        <p:spPr>
-          <a:xfrm>
-            <a:off x="2872000" y="2653181"/>
-            <a:ext cx="3400000" cy="2420000"/>
-          </a:xfrm>
-          <a:prstGeom prst="roundRect">
-            <a:avLst/>
-          </a:prstGeom>
-          <a:solidFill>
-            <a:srgbClr val="EEF4FF"/>
-          </a:solidFill>
-          <a:ln>
-            <a:solidFill>
-              <a:srgbClr val="4664AA"/>
-            </a:solidFill>
-          </a:ln>
-        </p:spPr>
-        <p:style>
-          <a:lnRef idx="1">
-            <a:schemeClr val="accent1"/>
-          </a:lnRef>
-          <a:fillRef idx="3">
-            <a:schemeClr val="accent1"/>
-          </a:fillRef>
-          <a:effectRef idx="2">
-            <a:schemeClr val="accent1"/>
-          </a:effectRef>
-          <a:fontRef idx="minor">
-            <a:schemeClr val="lt1"/>
-          </a:fontRef>
-        </p:style>
-        <p:txBody>
-          <a:bodyPr rtlCol="0" anchor="ctr"/>
-          <a:lstStyle/>
-          <a:p/>
-        </p:txBody>
-      </p:sp>
-      <p:sp>
-        <p:nvSpPr>
-          <p:cNvPr id="7" name="TextBox 6"/>
-          <p:cNvSpPr txBox="1"/>
-          <p:nvPr/>
-        </p:nvSpPr>
-        <p:spPr>
-          <a:xfrm>
-            <a:off x="2872000" y="2653181"/>
-            <a:ext cx="3400000" cy="420000"/>
-          </a:xfrm>
-          <a:prstGeom prst="rect">
-            <a:avLst/>
-          </a:prstGeom>
-          <a:noFill/>
-        </p:spPr>
-        <p:txBody>
-          <a:bodyPr wrap="none">
-            <a:spAutoFit/>
-          </a:bodyPr>
-          <a:lstStyle/>
-          <a:p>
-            <a:pPr algn="ctr"/>
-            <a:r>
-              <a:rPr sz="1100" b="1">
-                <a:solidFill>
-                  <a:srgbClr val="4664AA"/>
-                </a:solidFill>
-              </a:rPr>
-              <a:t>Active</a:t>
-            </a:r>
-          </a:p>
-        </p:txBody>
-      </p:sp>
-      <p:sp>
-        <p:nvSpPr>
           <p:cNvPr id="8" name="Oval 7"/>
           <p:cNvSpPr/>
           <p:nvPr/>
@@ -14342,7 +14342,7 @@
           <p:cNvPr id="18" name="Connector 17"/>
           <p:cNvCxnSpPr>
             <a:stCxn id="8" idx="3"/>
-            <a:endCxn id="6" idx="1"/>
+            <a:endCxn id="5" idx="1"/>
           </p:cNvCxnSpPr>
           <p:nvPr/>
         </p:nvCxnSpPr>
@@ -14593,7 +14593,7 @@
         <p:nvCxnSpPr>
           <p:cNvPr id="29" name="Connector 28"/>
           <p:cNvCxnSpPr>
-            <a:stCxn id="6" idx="3"/>
+            <a:stCxn id="5" idx="3"/>
             <a:endCxn id="9" idx="1"/>
           </p:cNvCxnSpPr>
           <p:nvPr/>
@@ -17763,7 +17763,86 @@
         <p:spPr>
           <a:xfrm>
             <a:off x="457200" y="1600200"/>
-            <a:ext cx="8229600" cy="4525963"/>
+            <a:ext cx="8229600" cy="543115"/>
+          </a:xfrm>
+          <a:prstGeom prst="rect">
+            <a:avLst/>
+          </a:prstGeom>
+          <a:noFill/>
+        </p:spPr>
+        <p:txBody>
+          <a:bodyPr wrap="none">
+            <a:spAutoFit/>
+          </a:bodyPr>
+          <a:lstStyle/>
+          <a:p>
+            <a:pPr algn="ctr"/>
+            <a:r>
+              <a:rPr sz="2000" b="1">
+                <a:solidFill>
+                  <a:srgbClr val="1E1E3C"/>
+                </a:solidFill>
+              </a:rPr>
+              <a:t>オンラインショッピング体験</a:t>
+            </a:r>
+          </a:p>
+        </p:txBody>
+      </p:sp>
+      <p:sp>
+        <p:nvSpPr>
+          <p:cNvPr id="5" name="Oval 4"/>
+          <p:cNvSpPr/>
+          <p:nvPr/>
+        </p:nvSpPr>
+        <p:spPr>
+          <a:xfrm>
+            <a:off x="537200" y="2263315"/>
+            <a:ext cx="160000" cy="160000"/>
+          </a:xfrm>
+          <a:prstGeom prst="ellipse">
+            <a:avLst/>
+          </a:prstGeom>
+          <a:solidFill>
+            <a:srgbClr val="8FBC8F"/>
+          </a:solidFill>
+          <a:ln w="9525">
+            <a:solidFill>
+              <a:srgbClr val="505050"/>
+            </a:solidFill>
+          </a:ln>
+        </p:spPr>
+        <p:style>
+          <a:lnRef idx="1">
+            <a:schemeClr val="accent1"/>
+          </a:lnRef>
+          <a:fillRef idx="3">
+            <a:schemeClr val="accent1"/>
+          </a:fillRef>
+          <a:effectRef idx="2">
+            <a:schemeClr val="accent1"/>
+          </a:effectRef>
+          <a:fontRef idx="minor">
+            <a:schemeClr val="lt1"/>
+          </a:fontRef>
+        </p:style>
+        <p:txBody>
+          <a:bodyPr rtlCol="0" anchor="ctr"/>
+          <a:lstStyle/>
+          <a:p>
+            <a:pPr algn="ctr"/>
+          </a:p>
+        </p:txBody>
+      </p:sp>
+      <p:sp>
+        <p:nvSpPr>
+          <p:cNvPr id="6" name="TextBox 5"/>
+          <p:cNvSpPr txBox="1"/>
+          <p:nvPr/>
+        </p:nvSpPr>
+        <p:spPr>
+          <a:xfrm>
+            <a:off x="757200" y="2143315"/>
+            <a:ext cx="720000" cy="400000"/>
           </a:xfrm>
           <a:prstGeom prst="rect">
             <a:avLst/>
@@ -17777,20 +17856,997 @@
           <a:lstStyle/>
           <a:p>
             <a:r>
-              <a:rPr sz="1000">
-                <a:latin typeface="Courier New"/>
+              <a:rPr sz="1100">
+                <a:solidFill>
+                  <a:srgbClr val="28283C"/>
+                </a:solidFill>
               </a:rPr>
-              <a:t>journey
-    title オンラインショッピング体験
-    section 商品探し
-        サイト訪問    : 5: ユーザー
-        検索実行      : 3: ユーザー
-        商品選択      : 4: ユーザー
-    section 購入
-        カートに追加  : 5: ユーザー
-        決済手続き    : 2: ユーザー
-        注文完了      : 5: ユーザー</a:t>
-            </a:r>
+              <a:t>ユーザー</a:t>
+            </a:r>
+          </a:p>
+        </p:txBody>
+      </p:sp>
+      <p:sp>
+        <p:nvSpPr>
+          <p:cNvPr id="7" name="Rounded Rectangle 6"/>
+          <p:cNvSpPr/>
+          <p:nvPr/>
+        </p:nvSpPr>
+        <p:spPr>
+          <a:xfrm>
+            <a:off x="1557200" y="2143315"/>
+            <a:ext cx="3539800" cy="796569"/>
+          </a:xfrm>
+          <a:prstGeom prst="roundRect">
+            <a:avLst/>
+          </a:prstGeom>
+          <a:solidFill>
+            <a:srgbClr val="5B4AA0"/>
+          </a:solidFill>
+          <a:ln>
+            <a:noFill/>
+          </a:ln>
+        </p:spPr>
+        <p:style>
+          <a:lnRef idx="1">
+            <a:schemeClr val="accent1"/>
+          </a:lnRef>
+          <a:fillRef idx="3">
+            <a:schemeClr val="accent1"/>
+          </a:fillRef>
+          <a:effectRef idx="2">
+            <a:schemeClr val="accent1"/>
+          </a:effectRef>
+          <a:fontRef idx="minor">
+            <a:schemeClr val="lt1"/>
+          </a:fontRef>
+        </p:style>
+        <p:txBody>
+          <a:bodyPr rtlCol="0" anchor="ctr" wrap="square"/>
+          <a:lstStyle/>
+          <a:p>
+            <a:pPr algn="ctr"/>
+            <a:r>
+              <a:rPr sz="1200" b="1">
+                <a:solidFill>
+                  <a:srgbClr val="FFFFFF"/>
+                </a:solidFill>
+              </a:rPr>
+              <a:t>商品探し</a:t>
+            </a:r>
+          </a:p>
+        </p:txBody>
+      </p:sp>
+      <p:sp>
+        <p:nvSpPr>
+          <p:cNvPr id="8" name="Oval 7"/>
+          <p:cNvSpPr/>
+          <p:nvPr/>
+        </p:nvSpPr>
+        <p:spPr>
+          <a:xfrm>
+            <a:off x="1602901" y="2969884"/>
+            <a:ext cx="1055197" cy="1055197"/>
+          </a:xfrm>
+          <a:prstGeom prst="ellipse">
+            <a:avLst/>
+          </a:prstGeom>
+          <a:solidFill>
+            <a:srgbClr val="FFFDC8"/>
+          </a:solidFill>
+          <a:ln w="9525">
+            <a:solidFill>
+              <a:srgbClr val="C8B450"/>
+            </a:solidFill>
+          </a:ln>
+        </p:spPr>
+        <p:style>
+          <a:lnRef idx="1">
+            <a:schemeClr val="accent1"/>
+          </a:lnRef>
+          <a:fillRef idx="3">
+            <a:schemeClr val="accent1"/>
+          </a:fillRef>
+          <a:effectRef idx="2">
+            <a:schemeClr val="accent1"/>
+          </a:effectRef>
+          <a:fontRef idx="minor">
+            <a:schemeClr val="lt1"/>
+          </a:fontRef>
+        </p:style>
+        <p:txBody>
+          <a:bodyPr rtlCol="0" anchor="ctr" wrap="none"/>
+          <a:lstStyle/>
+          <a:p>
+            <a:pPr algn="ctr"/>
+            <a:r>
+              <a:rPr sz="1600"/>
+              <a:t>😊</a:t>
+            </a:r>
+          </a:p>
+        </p:txBody>
+      </p:sp>
+      <p:sp>
+        <p:nvSpPr>
+          <p:cNvPr id="9" name="Rounded Rectangle 8"/>
+          <p:cNvSpPr/>
+          <p:nvPr/>
+        </p:nvSpPr>
+        <p:spPr>
+          <a:xfrm>
+            <a:off x="1597200" y="4095081"/>
+            <a:ext cx="1066600" cy="1274168"/>
+          </a:xfrm>
+          <a:prstGeom prst="roundRect">
+            <a:avLst/>
+          </a:prstGeom>
+          <a:solidFill>
+            <a:srgbClr val="F5F5FA"/>
+          </a:solidFill>
+          <a:ln w="19050">
+            <a:solidFill>
+              <a:srgbClr val="5B4AA0"/>
+            </a:solidFill>
+          </a:ln>
+        </p:spPr>
+        <p:style>
+          <a:lnRef idx="1">
+            <a:schemeClr val="accent1"/>
+          </a:lnRef>
+          <a:fillRef idx="3">
+            <a:schemeClr val="accent1"/>
+          </a:fillRef>
+          <a:effectRef idx="2">
+            <a:schemeClr val="accent1"/>
+          </a:effectRef>
+          <a:fontRef idx="minor">
+            <a:schemeClr val="lt1"/>
+          </a:fontRef>
+        </p:style>
+        <p:txBody>
+          <a:bodyPr rtlCol="0" anchor="ctr" wrap="square"/>
+          <a:lstStyle/>
+          <a:p>
+            <a:pPr algn="ctr"/>
+            <a:r>
+              <a:rPr sz="1100">
+                <a:solidFill>
+                  <a:srgbClr val="28283C"/>
+                </a:solidFill>
+              </a:rPr>
+              <a:t>サイト訪問</a:t>
+            </a:r>
+          </a:p>
+        </p:txBody>
+      </p:sp>
+      <p:sp>
+        <p:nvSpPr>
+          <p:cNvPr id="10" name="Oval 9"/>
+          <p:cNvSpPr/>
+          <p:nvPr/>
+        </p:nvSpPr>
+        <p:spPr>
+          <a:xfrm>
+            <a:off x="2035500" y="5672705"/>
+            <a:ext cx="190000" cy="190000"/>
+          </a:xfrm>
+          <a:prstGeom prst="ellipse">
+            <a:avLst/>
+          </a:prstGeom>
+          <a:solidFill>
+            <a:srgbClr val="8FBC8F"/>
+          </a:solidFill>
+          <a:ln w="9525">
+            <a:solidFill>
+              <a:srgbClr val="505050"/>
+            </a:solidFill>
+          </a:ln>
+        </p:spPr>
+        <p:style>
+          <a:lnRef idx="1">
+            <a:schemeClr val="accent1"/>
+          </a:lnRef>
+          <a:fillRef idx="3">
+            <a:schemeClr val="accent1"/>
+          </a:fillRef>
+          <a:effectRef idx="2">
+            <a:schemeClr val="accent1"/>
+          </a:effectRef>
+          <a:fontRef idx="minor">
+            <a:schemeClr val="lt1"/>
+          </a:fontRef>
+        </p:style>
+        <p:txBody>
+          <a:bodyPr rtlCol="0" anchor="ctr"/>
+          <a:lstStyle/>
+          <a:p>
+            <a:pPr algn="ctr"/>
+          </a:p>
+        </p:txBody>
+      </p:sp>
+      <p:sp>
+        <p:nvSpPr>
+          <p:cNvPr id="11" name="Oval 10"/>
+          <p:cNvSpPr/>
+          <p:nvPr/>
+        </p:nvSpPr>
+        <p:spPr>
+          <a:xfrm>
+            <a:off x="2799501" y="2969884"/>
+            <a:ext cx="1055197" cy="1055197"/>
+          </a:xfrm>
+          <a:prstGeom prst="ellipse">
+            <a:avLst/>
+          </a:prstGeom>
+          <a:solidFill>
+            <a:srgbClr val="FFFDC8"/>
+          </a:solidFill>
+          <a:ln w="9525">
+            <a:solidFill>
+              <a:srgbClr val="C8B450"/>
+            </a:solidFill>
+          </a:ln>
+        </p:spPr>
+        <p:style>
+          <a:lnRef idx="1">
+            <a:schemeClr val="accent1"/>
+          </a:lnRef>
+          <a:fillRef idx="3">
+            <a:schemeClr val="accent1"/>
+          </a:fillRef>
+          <a:effectRef idx="2">
+            <a:schemeClr val="accent1"/>
+          </a:effectRef>
+          <a:fontRef idx="minor">
+            <a:schemeClr val="lt1"/>
+          </a:fontRef>
+        </p:style>
+        <p:txBody>
+          <a:bodyPr rtlCol="0" anchor="ctr" wrap="none"/>
+          <a:lstStyle/>
+          <a:p>
+            <a:pPr algn="ctr"/>
+            <a:r>
+              <a:rPr sz="1600"/>
+              <a:t>😐</a:t>
+            </a:r>
+          </a:p>
+        </p:txBody>
+      </p:sp>
+      <p:sp>
+        <p:nvSpPr>
+          <p:cNvPr id="12" name="Rounded Rectangle 11"/>
+          <p:cNvSpPr/>
+          <p:nvPr/>
+        </p:nvSpPr>
+        <p:spPr>
+          <a:xfrm>
+            <a:off x="2793800" y="4095081"/>
+            <a:ext cx="1066600" cy="1274168"/>
+          </a:xfrm>
+          <a:prstGeom prst="roundRect">
+            <a:avLst/>
+          </a:prstGeom>
+          <a:solidFill>
+            <a:srgbClr val="F5F5FA"/>
+          </a:solidFill>
+          <a:ln w="19050">
+            <a:solidFill>
+              <a:srgbClr val="5B4AA0"/>
+            </a:solidFill>
+          </a:ln>
+        </p:spPr>
+        <p:style>
+          <a:lnRef idx="1">
+            <a:schemeClr val="accent1"/>
+          </a:lnRef>
+          <a:fillRef idx="3">
+            <a:schemeClr val="accent1"/>
+          </a:fillRef>
+          <a:effectRef idx="2">
+            <a:schemeClr val="accent1"/>
+          </a:effectRef>
+          <a:fontRef idx="minor">
+            <a:schemeClr val="lt1"/>
+          </a:fontRef>
+        </p:style>
+        <p:txBody>
+          <a:bodyPr rtlCol="0" anchor="ctr" wrap="square"/>
+          <a:lstStyle/>
+          <a:p>
+            <a:pPr algn="ctr"/>
+            <a:r>
+              <a:rPr sz="1100">
+                <a:solidFill>
+                  <a:srgbClr val="28283C"/>
+                </a:solidFill>
+              </a:rPr>
+              <a:t>検索実行</a:t>
+            </a:r>
+          </a:p>
+        </p:txBody>
+      </p:sp>
+      <p:sp>
+        <p:nvSpPr>
+          <p:cNvPr id="13" name="Oval 12"/>
+          <p:cNvSpPr/>
+          <p:nvPr/>
+        </p:nvSpPr>
+        <p:spPr>
+          <a:xfrm>
+            <a:off x="3232100" y="5672705"/>
+            <a:ext cx="190000" cy="190000"/>
+          </a:xfrm>
+          <a:prstGeom prst="ellipse">
+            <a:avLst/>
+          </a:prstGeom>
+          <a:solidFill>
+            <a:srgbClr val="8FBC8F"/>
+          </a:solidFill>
+          <a:ln w="9525">
+            <a:solidFill>
+              <a:srgbClr val="505050"/>
+            </a:solidFill>
+          </a:ln>
+        </p:spPr>
+        <p:style>
+          <a:lnRef idx="1">
+            <a:schemeClr val="accent1"/>
+          </a:lnRef>
+          <a:fillRef idx="3">
+            <a:schemeClr val="accent1"/>
+          </a:fillRef>
+          <a:effectRef idx="2">
+            <a:schemeClr val="accent1"/>
+          </a:effectRef>
+          <a:fontRef idx="minor">
+            <a:schemeClr val="lt1"/>
+          </a:fontRef>
+        </p:style>
+        <p:txBody>
+          <a:bodyPr rtlCol="0" anchor="ctr"/>
+          <a:lstStyle/>
+          <a:p>
+            <a:pPr algn="ctr"/>
+          </a:p>
+        </p:txBody>
+      </p:sp>
+      <p:sp>
+        <p:nvSpPr>
+          <p:cNvPr id="14" name="Oval 13"/>
+          <p:cNvSpPr/>
+          <p:nvPr/>
+        </p:nvSpPr>
+        <p:spPr>
+          <a:xfrm>
+            <a:off x="3996101" y="2969884"/>
+            <a:ext cx="1055197" cy="1055197"/>
+          </a:xfrm>
+          <a:prstGeom prst="ellipse">
+            <a:avLst/>
+          </a:prstGeom>
+          <a:solidFill>
+            <a:srgbClr val="FFFDC8"/>
+          </a:solidFill>
+          <a:ln w="9525">
+            <a:solidFill>
+              <a:srgbClr val="C8B450"/>
+            </a:solidFill>
+          </a:ln>
+        </p:spPr>
+        <p:style>
+          <a:lnRef idx="1">
+            <a:schemeClr val="accent1"/>
+          </a:lnRef>
+          <a:fillRef idx="3">
+            <a:schemeClr val="accent1"/>
+          </a:fillRef>
+          <a:effectRef idx="2">
+            <a:schemeClr val="accent1"/>
+          </a:effectRef>
+          <a:fontRef idx="minor">
+            <a:schemeClr val="lt1"/>
+          </a:fontRef>
+        </p:style>
+        <p:txBody>
+          <a:bodyPr rtlCol="0" anchor="ctr" wrap="none"/>
+          <a:lstStyle/>
+          <a:p>
+            <a:pPr algn="ctr"/>
+            <a:r>
+              <a:rPr sz="1600"/>
+              <a:t>😊</a:t>
+            </a:r>
+          </a:p>
+        </p:txBody>
+      </p:sp>
+      <p:sp>
+        <p:nvSpPr>
+          <p:cNvPr id="15" name="Rounded Rectangle 14"/>
+          <p:cNvSpPr/>
+          <p:nvPr/>
+        </p:nvSpPr>
+        <p:spPr>
+          <a:xfrm>
+            <a:off x="3990400" y="4095081"/>
+            <a:ext cx="1066600" cy="1274168"/>
+          </a:xfrm>
+          <a:prstGeom prst="roundRect">
+            <a:avLst/>
+          </a:prstGeom>
+          <a:solidFill>
+            <a:srgbClr val="F5F5FA"/>
+          </a:solidFill>
+          <a:ln w="19050">
+            <a:solidFill>
+              <a:srgbClr val="5B4AA0"/>
+            </a:solidFill>
+          </a:ln>
+        </p:spPr>
+        <p:style>
+          <a:lnRef idx="1">
+            <a:schemeClr val="accent1"/>
+          </a:lnRef>
+          <a:fillRef idx="3">
+            <a:schemeClr val="accent1"/>
+          </a:fillRef>
+          <a:effectRef idx="2">
+            <a:schemeClr val="accent1"/>
+          </a:effectRef>
+          <a:fontRef idx="minor">
+            <a:schemeClr val="lt1"/>
+          </a:fontRef>
+        </p:style>
+        <p:txBody>
+          <a:bodyPr rtlCol="0" anchor="ctr" wrap="square"/>
+          <a:lstStyle/>
+          <a:p>
+            <a:pPr algn="ctr"/>
+            <a:r>
+              <a:rPr sz="1100">
+                <a:solidFill>
+                  <a:srgbClr val="28283C"/>
+                </a:solidFill>
+              </a:rPr>
+              <a:t>商品選択</a:t>
+            </a:r>
+          </a:p>
+        </p:txBody>
+      </p:sp>
+      <p:sp>
+        <p:nvSpPr>
+          <p:cNvPr id="16" name="Oval 15"/>
+          <p:cNvSpPr/>
+          <p:nvPr/>
+        </p:nvSpPr>
+        <p:spPr>
+          <a:xfrm>
+            <a:off x="4428700" y="5672705"/>
+            <a:ext cx="190000" cy="190000"/>
+          </a:xfrm>
+          <a:prstGeom prst="ellipse">
+            <a:avLst/>
+          </a:prstGeom>
+          <a:solidFill>
+            <a:srgbClr val="8FBC8F"/>
+          </a:solidFill>
+          <a:ln w="9525">
+            <a:solidFill>
+              <a:srgbClr val="505050"/>
+            </a:solidFill>
+          </a:ln>
+        </p:spPr>
+        <p:style>
+          <a:lnRef idx="1">
+            <a:schemeClr val="accent1"/>
+          </a:lnRef>
+          <a:fillRef idx="3">
+            <a:schemeClr val="accent1"/>
+          </a:fillRef>
+          <a:effectRef idx="2">
+            <a:schemeClr val="accent1"/>
+          </a:effectRef>
+          <a:fontRef idx="minor">
+            <a:schemeClr val="lt1"/>
+          </a:fontRef>
+        </p:style>
+        <p:txBody>
+          <a:bodyPr rtlCol="0" anchor="ctr"/>
+          <a:lstStyle/>
+          <a:p>
+            <a:pPr algn="ctr"/>
+          </a:p>
+        </p:txBody>
+      </p:sp>
+      <p:sp>
+        <p:nvSpPr>
+          <p:cNvPr id="17" name="Rounded Rectangle 16"/>
+          <p:cNvSpPr/>
+          <p:nvPr/>
+        </p:nvSpPr>
+        <p:spPr>
+          <a:xfrm>
+            <a:off x="5147000" y="2143315"/>
+            <a:ext cx="3539800" cy="796569"/>
+          </a:xfrm>
+          <a:prstGeom prst="roundRect">
+            <a:avLst/>
+          </a:prstGeom>
+          <a:solidFill>
+            <a:srgbClr val="2E64A0"/>
+          </a:solidFill>
+          <a:ln>
+            <a:noFill/>
+          </a:ln>
+        </p:spPr>
+        <p:style>
+          <a:lnRef idx="1">
+            <a:schemeClr val="accent1"/>
+          </a:lnRef>
+          <a:fillRef idx="3">
+            <a:schemeClr val="accent1"/>
+          </a:fillRef>
+          <a:effectRef idx="2">
+            <a:schemeClr val="accent1"/>
+          </a:effectRef>
+          <a:fontRef idx="minor">
+            <a:schemeClr val="lt1"/>
+          </a:fontRef>
+        </p:style>
+        <p:txBody>
+          <a:bodyPr rtlCol="0" anchor="ctr" wrap="square"/>
+          <a:lstStyle/>
+          <a:p>
+            <a:pPr algn="ctr"/>
+            <a:r>
+              <a:rPr sz="1200" b="1">
+                <a:solidFill>
+                  <a:srgbClr val="FFFFFF"/>
+                </a:solidFill>
+              </a:rPr>
+              <a:t>購入</a:t>
+            </a:r>
+          </a:p>
+        </p:txBody>
+      </p:sp>
+      <p:sp>
+        <p:nvSpPr>
+          <p:cNvPr id="18" name="Oval 17"/>
+          <p:cNvSpPr/>
+          <p:nvPr/>
+        </p:nvSpPr>
+        <p:spPr>
+          <a:xfrm>
+            <a:off x="5192701" y="2969884"/>
+            <a:ext cx="1055197" cy="1055197"/>
+          </a:xfrm>
+          <a:prstGeom prst="ellipse">
+            <a:avLst/>
+          </a:prstGeom>
+          <a:solidFill>
+            <a:srgbClr val="FFFDC8"/>
+          </a:solidFill>
+          <a:ln w="9525">
+            <a:solidFill>
+              <a:srgbClr val="C8B450"/>
+            </a:solidFill>
+          </a:ln>
+        </p:spPr>
+        <p:style>
+          <a:lnRef idx="1">
+            <a:schemeClr val="accent1"/>
+          </a:lnRef>
+          <a:fillRef idx="3">
+            <a:schemeClr val="accent1"/>
+          </a:fillRef>
+          <a:effectRef idx="2">
+            <a:schemeClr val="accent1"/>
+          </a:effectRef>
+          <a:fontRef idx="minor">
+            <a:schemeClr val="lt1"/>
+          </a:fontRef>
+        </p:style>
+        <p:txBody>
+          <a:bodyPr rtlCol="0" anchor="ctr" wrap="none"/>
+          <a:lstStyle/>
+          <a:p>
+            <a:pPr algn="ctr"/>
+            <a:r>
+              <a:rPr sz="1600"/>
+              <a:t>😊</a:t>
+            </a:r>
+          </a:p>
+        </p:txBody>
+      </p:sp>
+      <p:sp>
+        <p:nvSpPr>
+          <p:cNvPr id="19" name="Rounded Rectangle 18"/>
+          <p:cNvSpPr/>
+          <p:nvPr/>
+        </p:nvSpPr>
+        <p:spPr>
+          <a:xfrm>
+            <a:off x="5187000" y="4095081"/>
+            <a:ext cx="1066600" cy="1274168"/>
+          </a:xfrm>
+          <a:prstGeom prst="roundRect">
+            <a:avLst/>
+          </a:prstGeom>
+          <a:solidFill>
+            <a:srgbClr val="F5F5FA"/>
+          </a:solidFill>
+          <a:ln w="19050">
+            <a:solidFill>
+              <a:srgbClr val="2E64A0"/>
+            </a:solidFill>
+          </a:ln>
+        </p:spPr>
+        <p:style>
+          <a:lnRef idx="1">
+            <a:schemeClr val="accent1"/>
+          </a:lnRef>
+          <a:fillRef idx="3">
+            <a:schemeClr val="accent1"/>
+          </a:fillRef>
+          <a:effectRef idx="2">
+            <a:schemeClr val="accent1"/>
+          </a:effectRef>
+          <a:fontRef idx="minor">
+            <a:schemeClr val="lt1"/>
+          </a:fontRef>
+        </p:style>
+        <p:txBody>
+          <a:bodyPr rtlCol="0" anchor="ctr" wrap="square"/>
+          <a:lstStyle/>
+          <a:p>
+            <a:pPr algn="ctr"/>
+            <a:r>
+              <a:rPr sz="1100">
+                <a:solidFill>
+                  <a:srgbClr val="28283C"/>
+                </a:solidFill>
+              </a:rPr>
+              <a:t>カートに追加</a:t>
+            </a:r>
+          </a:p>
+        </p:txBody>
+      </p:sp>
+      <p:sp>
+        <p:nvSpPr>
+          <p:cNvPr id="20" name="Oval 19"/>
+          <p:cNvSpPr/>
+          <p:nvPr/>
+        </p:nvSpPr>
+        <p:spPr>
+          <a:xfrm>
+            <a:off x="5625300" y="5672705"/>
+            <a:ext cx="190000" cy="190000"/>
+          </a:xfrm>
+          <a:prstGeom prst="ellipse">
+            <a:avLst/>
+          </a:prstGeom>
+          <a:solidFill>
+            <a:srgbClr val="8FBC8F"/>
+          </a:solidFill>
+          <a:ln w="9525">
+            <a:solidFill>
+              <a:srgbClr val="505050"/>
+            </a:solidFill>
+          </a:ln>
+        </p:spPr>
+        <p:style>
+          <a:lnRef idx="1">
+            <a:schemeClr val="accent1"/>
+          </a:lnRef>
+          <a:fillRef idx="3">
+            <a:schemeClr val="accent1"/>
+          </a:fillRef>
+          <a:effectRef idx="2">
+            <a:schemeClr val="accent1"/>
+          </a:effectRef>
+          <a:fontRef idx="minor">
+            <a:schemeClr val="lt1"/>
+          </a:fontRef>
+        </p:style>
+        <p:txBody>
+          <a:bodyPr rtlCol="0" anchor="ctr"/>
+          <a:lstStyle/>
+          <a:p>
+            <a:pPr algn="ctr"/>
+          </a:p>
+        </p:txBody>
+      </p:sp>
+      <p:sp>
+        <p:nvSpPr>
+          <p:cNvPr id="21" name="Oval 20"/>
+          <p:cNvSpPr/>
+          <p:nvPr/>
+        </p:nvSpPr>
+        <p:spPr>
+          <a:xfrm>
+            <a:off x="6389301" y="2969884"/>
+            <a:ext cx="1055197" cy="1055197"/>
+          </a:xfrm>
+          <a:prstGeom prst="ellipse">
+            <a:avLst/>
+          </a:prstGeom>
+          <a:solidFill>
+            <a:srgbClr val="FFFDC8"/>
+          </a:solidFill>
+          <a:ln w="9525">
+            <a:solidFill>
+              <a:srgbClr val="C8B450"/>
+            </a:solidFill>
+          </a:ln>
+        </p:spPr>
+        <p:style>
+          <a:lnRef idx="1">
+            <a:schemeClr val="accent1"/>
+          </a:lnRef>
+          <a:fillRef idx="3">
+            <a:schemeClr val="accent1"/>
+          </a:fillRef>
+          <a:effectRef idx="2">
+            <a:schemeClr val="accent1"/>
+          </a:effectRef>
+          <a:fontRef idx="minor">
+            <a:schemeClr val="lt1"/>
+          </a:fontRef>
+        </p:style>
+        <p:txBody>
+          <a:bodyPr rtlCol="0" anchor="ctr" wrap="none"/>
+          <a:lstStyle/>
+          <a:p>
+            <a:pPr algn="ctr"/>
+            <a:r>
+              <a:rPr sz="1600"/>
+              <a:t>😢</a:t>
+            </a:r>
+          </a:p>
+        </p:txBody>
+      </p:sp>
+      <p:sp>
+        <p:nvSpPr>
+          <p:cNvPr id="22" name="Rounded Rectangle 21"/>
+          <p:cNvSpPr/>
+          <p:nvPr/>
+        </p:nvSpPr>
+        <p:spPr>
+          <a:xfrm>
+            <a:off x="6383600" y="4095081"/>
+            <a:ext cx="1066600" cy="1274168"/>
+          </a:xfrm>
+          <a:prstGeom prst="roundRect">
+            <a:avLst/>
+          </a:prstGeom>
+          <a:solidFill>
+            <a:srgbClr val="F5F5FA"/>
+          </a:solidFill>
+          <a:ln w="19050">
+            <a:solidFill>
+              <a:srgbClr val="2E64A0"/>
+            </a:solidFill>
+          </a:ln>
+        </p:spPr>
+        <p:style>
+          <a:lnRef idx="1">
+            <a:schemeClr val="accent1"/>
+          </a:lnRef>
+          <a:fillRef idx="3">
+            <a:schemeClr val="accent1"/>
+          </a:fillRef>
+          <a:effectRef idx="2">
+            <a:schemeClr val="accent1"/>
+          </a:effectRef>
+          <a:fontRef idx="minor">
+            <a:schemeClr val="lt1"/>
+          </a:fontRef>
+        </p:style>
+        <p:txBody>
+          <a:bodyPr rtlCol="0" anchor="ctr" wrap="square"/>
+          <a:lstStyle/>
+          <a:p>
+            <a:pPr algn="ctr"/>
+            <a:r>
+              <a:rPr sz="1100">
+                <a:solidFill>
+                  <a:srgbClr val="28283C"/>
+                </a:solidFill>
+              </a:rPr>
+              <a:t>決済手続き</a:t>
+            </a:r>
+          </a:p>
+        </p:txBody>
+      </p:sp>
+      <p:sp>
+        <p:nvSpPr>
+          <p:cNvPr id="23" name="Oval 22"/>
+          <p:cNvSpPr/>
+          <p:nvPr/>
+        </p:nvSpPr>
+        <p:spPr>
+          <a:xfrm>
+            <a:off x="6821900" y="5672705"/>
+            <a:ext cx="190000" cy="190000"/>
+          </a:xfrm>
+          <a:prstGeom prst="ellipse">
+            <a:avLst/>
+          </a:prstGeom>
+          <a:solidFill>
+            <a:srgbClr val="8FBC8F"/>
+          </a:solidFill>
+          <a:ln w="9525">
+            <a:solidFill>
+              <a:srgbClr val="505050"/>
+            </a:solidFill>
+          </a:ln>
+        </p:spPr>
+        <p:style>
+          <a:lnRef idx="1">
+            <a:schemeClr val="accent1"/>
+          </a:lnRef>
+          <a:fillRef idx="3">
+            <a:schemeClr val="accent1"/>
+          </a:fillRef>
+          <a:effectRef idx="2">
+            <a:schemeClr val="accent1"/>
+          </a:effectRef>
+          <a:fontRef idx="minor">
+            <a:schemeClr val="lt1"/>
+          </a:fontRef>
+        </p:style>
+        <p:txBody>
+          <a:bodyPr rtlCol="0" anchor="ctr"/>
+          <a:lstStyle/>
+          <a:p>
+            <a:pPr algn="ctr"/>
+          </a:p>
+        </p:txBody>
+      </p:sp>
+      <p:sp>
+        <p:nvSpPr>
+          <p:cNvPr id="24" name="Oval 23"/>
+          <p:cNvSpPr/>
+          <p:nvPr/>
+        </p:nvSpPr>
+        <p:spPr>
+          <a:xfrm>
+            <a:off x="7585901" y="2969884"/>
+            <a:ext cx="1055197" cy="1055197"/>
+          </a:xfrm>
+          <a:prstGeom prst="ellipse">
+            <a:avLst/>
+          </a:prstGeom>
+          <a:solidFill>
+            <a:srgbClr val="FFFDC8"/>
+          </a:solidFill>
+          <a:ln w="9525">
+            <a:solidFill>
+              <a:srgbClr val="C8B450"/>
+            </a:solidFill>
+          </a:ln>
+        </p:spPr>
+        <p:style>
+          <a:lnRef idx="1">
+            <a:schemeClr val="accent1"/>
+          </a:lnRef>
+          <a:fillRef idx="3">
+            <a:schemeClr val="accent1"/>
+          </a:fillRef>
+          <a:effectRef idx="2">
+            <a:schemeClr val="accent1"/>
+          </a:effectRef>
+          <a:fontRef idx="minor">
+            <a:schemeClr val="lt1"/>
+          </a:fontRef>
+        </p:style>
+        <p:txBody>
+          <a:bodyPr rtlCol="0" anchor="ctr" wrap="none"/>
+          <a:lstStyle/>
+          <a:p>
+            <a:pPr algn="ctr"/>
+            <a:r>
+              <a:rPr sz="1600"/>
+              <a:t>😊</a:t>
+            </a:r>
+          </a:p>
+        </p:txBody>
+      </p:sp>
+      <p:sp>
+        <p:nvSpPr>
+          <p:cNvPr id="25" name="Rounded Rectangle 24"/>
+          <p:cNvSpPr/>
+          <p:nvPr/>
+        </p:nvSpPr>
+        <p:spPr>
+          <a:xfrm>
+            <a:off x="7580200" y="4095081"/>
+            <a:ext cx="1066600" cy="1274168"/>
+          </a:xfrm>
+          <a:prstGeom prst="roundRect">
+            <a:avLst/>
+          </a:prstGeom>
+          <a:solidFill>
+            <a:srgbClr val="F5F5FA"/>
+          </a:solidFill>
+          <a:ln w="19050">
+            <a:solidFill>
+              <a:srgbClr val="2E64A0"/>
+            </a:solidFill>
+          </a:ln>
+        </p:spPr>
+        <p:style>
+          <a:lnRef idx="1">
+            <a:schemeClr val="accent1"/>
+          </a:lnRef>
+          <a:fillRef idx="3">
+            <a:schemeClr val="accent1"/>
+          </a:fillRef>
+          <a:effectRef idx="2">
+            <a:schemeClr val="accent1"/>
+          </a:effectRef>
+          <a:fontRef idx="minor">
+            <a:schemeClr val="lt1"/>
+          </a:fontRef>
+        </p:style>
+        <p:txBody>
+          <a:bodyPr rtlCol="0" anchor="ctr" wrap="square"/>
+          <a:lstStyle/>
+          <a:p>
+            <a:pPr algn="ctr"/>
+            <a:r>
+              <a:rPr sz="1100">
+                <a:solidFill>
+                  <a:srgbClr val="28283C"/>
+                </a:solidFill>
+              </a:rPr>
+              <a:t>注文完了</a:t>
+            </a:r>
+          </a:p>
+        </p:txBody>
+      </p:sp>
+      <p:sp>
+        <p:nvSpPr>
+          <p:cNvPr id="26" name="Oval 25"/>
+          <p:cNvSpPr/>
+          <p:nvPr/>
+        </p:nvSpPr>
+        <p:spPr>
+          <a:xfrm>
+            <a:off x="8018500" y="5672705"/>
+            <a:ext cx="190000" cy="190000"/>
+          </a:xfrm>
+          <a:prstGeom prst="ellipse">
+            <a:avLst/>
+          </a:prstGeom>
+          <a:solidFill>
+            <a:srgbClr val="8FBC8F"/>
+          </a:solidFill>
+          <a:ln w="9525">
+            <a:solidFill>
+              <a:srgbClr val="505050"/>
+            </a:solidFill>
+          </a:ln>
+        </p:spPr>
+        <p:style>
+          <a:lnRef idx="1">
+            <a:schemeClr val="accent1"/>
+          </a:lnRef>
+          <a:fillRef idx="3">
+            <a:schemeClr val="accent1"/>
+          </a:fillRef>
+          <a:effectRef idx="2">
+            <a:schemeClr val="accent1"/>
+          </a:effectRef>
+          <a:fontRef idx="minor">
+            <a:schemeClr val="lt1"/>
+          </a:fontRef>
+        </p:style>
+        <p:txBody>
+          <a:bodyPr rtlCol="0" anchor="ctr"/>
+          <a:lstStyle/>
+          <a:p>
+            <a:pPr algn="ctr"/>
           </a:p>
         </p:txBody>
       </p:sp>

--- a/demo_full.pptx
+++ b/demo_full.pptx
@@ -13923,7 +13923,84 @@
         </p:nvSpPr>
         <p:spPr>
           <a:xfrm>
-            <a:off x="2272000" y="2188180"/>
+            <a:off x="2872000" y="2653181"/>
+            <a:ext cx="3400000" cy="2420000"/>
+          </a:xfrm>
+          <a:prstGeom prst="roundRect">
+            <a:avLst/>
+          </a:prstGeom>
+          <a:solidFill>
+            <a:srgbClr val="EEF4FF"/>
+          </a:solidFill>
+          <a:ln>
+            <a:solidFill>
+              <a:srgbClr val="4664AA"/>
+            </a:solidFill>
+          </a:ln>
+        </p:spPr>
+        <p:style>
+          <a:lnRef idx="1">
+            <a:schemeClr val="accent1"/>
+          </a:lnRef>
+          <a:fillRef idx="3">
+            <a:schemeClr val="accent1"/>
+          </a:fillRef>
+          <a:effectRef idx="2">
+            <a:schemeClr val="accent1"/>
+          </a:effectRef>
+          <a:fontRef idx="minor">
+            <a:schemeClr val="lt1"/>
+          </a:fontRef>
+        </p:style>
+        <p:txBody>
+          <a:bodyPr rtlCol="0" anchor="ctr"/>
+          <a:lstStyle/>
+          <a:p/>
+        </p:txBody>
+      </p:sp>
+      <p:sp>
+        <p:nvSpPr>
+          <p:cNvPr id="5" name="TextBox 4"/>
+          <p:cNvSpPr txBox="1"/>
+          <p:nvPr/>
+        </p:nvSpPr>
+        <p:spPr>
+          <a:xfrm>
+            <a:off x="2872000" y="2653181"/>
+            <a:ext cx="3400000" cy="420000"/>
+          </a:xfrm>
+          <a:prstGeom prst="rect">
+            <a:avLst/>
+          </a:prstGeom>
+          <a:noFill/>
+        </p:spPr>
+        <p:txBody>
+          <a:bodyPr wrap="none">
+            <a:spAutoFit/>
+          </a:bodyPr>
+          <a:lstStyle/>
+          <a:p>
+            <a:pPr algn="ctr"/>
+            <a:r>
+              <a:rPr sz="1100" b="1">
+                <a:solidFill>
+                  <a:srgbClr val="4664AA"/>
+                </a:solidFill>
+              </a:rPr>
+              <a:t>Active</a:t>
+            </a:r>
+          </a:p>
+        </p:txBody>
+      </p:sp>
+      <p:sp>
+        <p:nvSpPr>
+          <p:cNvPr id="6" name="Rounded Rectangle 5"/>
+          <p:cNvSpPr/>
+          <p:nvPr/>
+        </p:nvSpPr>
+        <p:spPr>
+          <a:xfrm>
+            <a:off x="2272000" y="3538181"/>
             <a:ext cx="4600000" cy="2420000"/>
           </a:xfrm>
           <a:prstGeom prst="roundRect">
@@ -13961,90 +14038,13 @@
       </p:sp>
       <p:sp>
         <p:nvSpPr>
-          <p:cNvPr id="5" name="Rounded Rectangle 4"/>
-          <p:cNvSpPr/>
-          <p:nvPr/>
-        </p:nvSpPr>
-        <p:spPr>
-          <a:xfrm>
-            <a:off x="2872000" y="2653181"/>
-            <a:ext cx="3400000" cy="2420000"/>
-          </a:xfrm>
-          <a:prstGeom prst="roundRect">
-            <a:avLst/>
-          </a:prstGeom>
-          <a:solidFill>
-            <a:srgbClr val="EEF4FF"/>
-          </a:solidFill>
-          <a:ln>
-            <a:solidFill>
-              <a:srgbClr val="4664AA"/>
-            </a:solidFill>
-          </a:ln>
-        </p:spPr>
-        <p:style>
-          <a:lnRef idx="1">
-            <a:schemeClr val="accent1"/>
-          </a:lnRef>
-          <a:fillRef idx="3">
-            <a:schemeClr val="accent1"/>
-          </a:fillRef>
-          <a:effectRef idx="2">
-            <a:schemeClr val="accent1"/>
-          </a:effectRef>
-          <a:fontRef idx="minor">
-            <a:schemeClr val="lt1"/>
-          </a:fontRef>
-        </p:style>
-        <p:txBody>
-          <a:bodyPr rtlCol="0" anchor="ctr"/>
-          <a:lstStyle/>
-          <a:p/>
-        </p:txBody>
-      </p:sp>
-      <p:sp>
-        <p:nvSpPr>
-          <p:cNvPr id="6" name="TextBox 5"/>
-          <p:cNvSpPr txBox="1"/>
-          <p:nvPr/>
-        </p:nvSpPr>
-        <p:spPr>
-          <a:xfrm>
-            <a:off x="2872000" y="2653181"/>
-            <a:ext cx="3400000" cy="420000"/>
-          </a:xfrm>
-          <a:prstGeom prst="rect">
-            <a:avLst/>
-          </a:prstGeom>
-          <a:noFill/>
-        </p:spPr>
-        <p:txBody>
-          <a:bodyPr wrap="none">
-            <a:spAutoFit/>
-          </a:bodyPr>
-          <a:lstStyle/>
-          <a:p>
-            <a:pPr algn="ctr"/>
-            <a:r>
-              <a:rPr sz="1100" b="1">
-                <a:solidFill>
-                  <a:srgbClr val="4664AA"/>
-                </a:solidFill>
-              </a:rPr>
-              <a:t>Active</a:t>
-            </a:r>
-          </a:p>
-        </p:txBody>
-      </p:sp>
-      <p:sp>
-        <p:nvSpPr>
           <p:cNvPr id="7" name="Rounded Rectangle 6"/>
           <p:cNvSpPr/>
           <p:nvPr/>
         </p:nvSpPr>
         <p:spPr>
           <a:xfrm>
-            <a:off x="2272000" y="3538181"/>
+            <a:off x="2272000" y="2188180"/>
             <a:ext cx="4600000" cy="2420000"/>
           </a:xfrm>
           <a:prstGeom prst="roundRect">
@@ -14342,7 +14342,7 @@
           <p:cNvPr id="18" name="Connector 17"/>
           <p:cNvCxnSpPr>
             <a:stCxn id="8" idx="3"/>
-            <a:endCxn id="5" idx="1"/>
+            <a:endCxn id="4" idx="1"/>
           </p:cNvCxnSpPr>
           <p:nvPr/>
         </p:nvCxnSpPr>
@@ -14593,7 +14593,7 @@
         <p:nvCxnSpPr>
           <p:cNvPr id="29" name="Connector 28"/>
           <p:cNvCxnSpPr>
-            <a:stCxn id="5" idx="3"/>
+            <a:stCxn id="4" idx="3"/>
             <a:endCxn id="9" idx="1"/>
           </p:cNvCxnSpPr>
           <p:nvPr/>
@@ -19084,7 +19084,326 @@
         <p:spPr>
           <a:xfrm>
             <a:off x="457200" y="1600200"/>
-            <a:ext cx="8229600" cy="4525963"/>
+            <a:ext cx="8229600" cy="362077"/>
+          </a:xfrm>
+          <a:prstGeom prst="rect">
+            <a:avLst/>
+          </a:prstGeom>
+          <a:noFill/>
+        </p:spPr>
+        <p:txBody>
+          <a:bodyPr wrap="none">
+            <a:spAutoFit/>
+          </a:bodyPr>
+          <a:lstStyle/>
+          <a:p>
+            <a:pPr algn="ctr"/>
+            <a:r>
+              <a:rPr sz="2000" b="1">
+                <a:solidFill>
+                  <a:srgbClr val="1E1E3C"/>
+                </a:solidFill>
+              </a:rPr>
+              <a:t>製品ポートフォリオ分析</a:t>
+            </a:r>
+          </a:p>
+        </p:txBody>
+      </p:sp>
+      <p:sp>
+        <p:nvSpPr>
+          <p:cNvPr id="5" name="Rectangle 4"/>
+          <p:cNvSpPr/>
+          <p:nvPr/>
+        </p:nvSpPr>
+        <p:spPr>
+          <a:xfrm>
+            <a:off x="1033272" y="1962277"/>
+            <a:ext cx="3826764" cy="1878275"/>
+          </a:xfrm>
+          <a:prstGeom prst="rect">
+            <a:avLst/>
+          </a:prstGeom>
+          <a:solidFill>
+            <a:srgbClr val="D0E4FF"/>
+          </a:solidFill>
+          <a:ln>
+            <a:noFill/>
+          </a:ln>
+        </p:spPr>
+        <p:style>
+          <a:lnRef idx="1">
+            <a:schemeClr val="accent1"/>
+          </a:lnRef>
+          <a:fillRef idx="3">
+            <a:schemeClr val="accent1"/>
+          </a:fillRef>
+          <a:effectRef idx="2">
+            <a:schemeClr val="accent1"/>
+          </a:effectRef>
+          <a:fontRef idx="minor">
+            <a:schemeClr val="lt1"/>
+          </a:fontRef>
+        </p:style>
+        <p:txBody>
+          <a:bodyPr rtlCol="0" anchor="ctr"/>
+          <a:lstStyle/>
+          <a:p>
+            <a:pPr algn="ctr"/>
+          </a:p>
+        </p:txBody>
+      </p:sp>
+      <p:sp>
+        <p:nvSpPr>
+          <p:cNvPr id="6" name="Rectangle 5"/>
+          <p:cNvSpPr/>
+          <p:nvPr/>
+        </p:nvSpPr>
+        <p:spPr>
+          <a:xfrm>
+            <a:off x="4860036" y="1962277"/>
+            <a:ext cx="3826764" cy="1878275"/>
+          </a:xfrm>
+          <a:prstGeom prst="rect">
+            <a:avLst/>
+          </a:prstGeom>
+          <a:solidFill>
+            <a:srgbClr val="ECEAFF"/>
+          </a:solidFill>
+          <a:ln>
+            <a:noFill/>
+          </a:ln>
+        </p:spPr>
+        <p:style>
+          <a:lnRef idx="1">
+            <a:schemeClr val="accent1"/>
+          </a:lnRef>
+          <a:fillRef idx="3">
+            <a:schemeClr val="accent1"/>
+          </a:fillRef>
+          <a:effectRef idx="2">
+            <a:schemeClr val="accent1"/>
+          </a:effectRef>
+          <a:fontRef idx="minor">
+            <a:schemeClr val="lt1"/>
+          </a:fontRef>
+        </p:style>
+        <p:txBody>
+          <a:bodyPr rtlCol="0" anchor="ctr"/>
+          <a:lstStyle/>
+          <a:p>
+            <a:pPr algn="ctr"/>
+          </a:p>
+        </p:txBody>
+      </p:sp>
+      <p:sp>
+        <p:nvSpPr>
+          <p:cNvPr id="7" name="Rectangle 6"/>
+          <p:cNvSpPr/>
+          <p:nvPr/>
+        </p:nvSpPr>
+        <p:spPr>
+          <a:xfrm>
+            <a:off x="1033272" y="3840552"/>
+            <a:ext cx="3826764" cy="1878275"/>
+          </a:xfrm>
+          <a:prstGeom prst="rect">
+            <a:avLst/>
+          </a:prstGeom>
+          <a:solidFill>
+            <a:srgbClr val="FFF4D0"/>
+          </a:solidFill>
+          <a:ln>
+            <a:noFill/>
+          </a:ln>
+        </p:spPr>
+        <p:style>
+          <a:lnRef idx="1">
+            <a:schemeClr val="accent1"/>
+          </a:lnRef>
+          <a:fillRef idx="3">
+            <a:schemeClr val="accent1"/>
+          </a:fillRef>
+          <a:effectRef idx="2">
+            <a:schemeClr val="accent1"/>
+          </a:effectRef>
+          <a:fontRef idx="minor">
+            <a:schemeClr val="lt1"/>
+          </a:fontRef>
+        </p:style>
+        <p:txBody>
+          <a:bodyPr rtlCol="0" anchor="ctr"/>
+          <a:lstStyle/>
+          <a:p>
+            <a:pPr algn="ctr"/>
+          </a:p>
+        </p:txBody>
+      </p:sp>
+      <p:sp>
+        <p:nvSpPr>
+          <p:cNvPr id="8" name="Rectangle 7"/>
+          <p:cNvSpPr/>
+          <p:nvPr/>
+        </p:nvSpPr>
+        <p:spPr>
+          <a:xfrm>
+            <a:off x="4860036" y="3840552"/>
+            <a:ext cx="3826764" cy="1878275"/>
+          </a:xfrm>
+          <a:prstGeom prst="rect">
+            <a:avLst/>
+          </a:prstGeom>
+          <a:solidFill>
+            <a:srgbClr val="D0FFE4"/>
+          </a:solidFill>
+          <a:ln>
+            <a:noFill/>
+          </a:ln>
+        </p:spPr>
+        <p:style>
+          <a:lnRef idx="1">
+            <a:schemeClr val="accent1"/>
+          </a:lnRef>
+          <a:fillRef idx="3">
+            <a:schemeClr val="accent1"/>
+          </a:fillRef>
+          <a:effectRef idx="2">
+            <a:schemeClr val="accent1"/>
+          </a:effectRef>
+          <a:fontRef idx="minor">
+            <a:schemeClr val="lt1"/>
+          </a:fontRef>
+        </p:style>
+        <p:txBody>
+          <a:bodyPr rtlCol="0" anchor="ctr"/>
+          <a:lstStyle/>
+          <a:p>
+            <a:pPr algn="ctr"/>
+          </a:p>
+        </p:txBody>
+      </p:sp>
+      <p:sp>
+        <p:nvSpPr>
+          <p:cNvPr id="9" name="Rectangle 8"/>
+          <p:cNvSpPr/>
+          <p:nvPr/>
+        </p:nvSpPr>
+        <p:spPr>
+          <a:xfrm>
+            <a:off x="1033272" y="1962277"/>
+            <a:ext cx="7653528" cy="3756550"/>
+          </a:xfrm>
+          <a:prstGeom prst="rect">
+            <a:avLst/>
+          </a:prstGeom>
+          <a:noFill/>
+          <a:ln w="19050">
+            <a:solidFill>
+              <a:srgbClr val="646464"/>
+            </a:solidFill>
+          </a:ln>
+        </p:spPr>
+        <p:style>
+          <a:lnRef idx="1">
+            <a:schemeClr val="accent1"/>
+          </a:lnRef>
+          <a:fillRef idx="3">
+            <a:schemeClr val="accent1"/>
+          </a:fillRef>
+          <a:effectRef idx="2">
+            <a:schemeClr val="accent1"/>
+          </a:effectRef>
+          <a:fontRef idx="minor">
+            <a:schemeClr val="lt1"/>
+          </a:fontRef>
+        </p:style>
+        <p:txBody>
+          <a:bodyPr rtlCol="0" anchor="ctr"/>
+          <a:lstStyle/>
+          <a:p>
+            <a:pPr algn="ctr"/>
+          </a:p>
+        </p:txBody>
+      </p:sp>
+      <p:cxnSp>
+        <p:nvCxnSpPr>
+          <p:cNvPr id="10" name="Connector 9"/>
+          <p:cNvCxnSpPr/>
+          <p:nvPr/>
+        </p:nvCxnSpPr>
+        <p:spPr>
+          <a:xfrm>
+            <a:off x="1033272" y="3840552"/>
+            <a:ext cx="7653528" cy="0"/>
+          </a:xfrm>
+          <a:prstGeom prst="line">
+            <a:avLst/>
+          </a:prstGeom>
+          <a:ln w="12700">
+            <a:solidFill>
+              <a:srgbClr val="A0A0A0"/>
+            </a:solidFill>
+          </a:ln>
+        </p:spPr>
+        <p:style>
+          <a:lnRef idx="2">
+            <a:schemeClr val="accent1"/>
+          </a:lnRef>
+          <a:fillRef idx="0">
+            <a:schemeClr val="accent1"/>
+          </a:fillRef>
+          <a:effectRef idx="1">
+            <a:schemeClr val="accent1"/>
+          </a:effectRef>
+          <a:fontRef idx="minor">
+            <a:schemeClr val="tx1"/>
+          </a:fontRef>
+        </p:style>
+      </p:cxnSp>
+      <p:cxnSp>
+        <p:nvCxnSpPr>
+          <p:cNvPr id="11" name="Connector 10"/>
+          <p:cNvCxnSpPr/>
+          <p:nvPr/>
+        </p:nvCxnSpPr>
+        <p:spPr>
+          <a:xfrm>
+            <a:off x="4860036" y="1962277"/>
+            <a:ext cx="0" cy="3756550"/>
+          </a:xfrm>
+          <a:prstGeom prst="line">
+            <a:avLst/>
+          </a:prstGeom>
+          <a:ln w="12700">
+            <a:solidFill>
+              <a:srgbClr val="A0A0A0"/>
+            </a:solidFill>
+          </a:ln>
+        </p:spPr>
+        <p:style>
+          <a:lnRef idx="2">
+            <a:schemeClr val="accent1"/>
+          </a:lnRef>
+          <a:fillRef idx="0">
+            <a:schemeClr val="accent1"/>
+          </a:fillRef>
+          <a:effectRef idx="1">
+            <a:schemeClr val="accent1"/>
+          </a:effectRef>
+          <a:fontRef idx="minor">
+            <a:schemeClr val="tx1"/>
+          </a:fontRef>
+        </p:style>
+      </p:cxnSp>
+      <p:sp>
+        <p:nvSpPr>
+          <p:cNvPr id="12" name="TextBox 11"/>
+          <p:cNvSpPr txBox="1"/>
+          <p:nvPr/>
+        </p:nvSpPr>
+        <p:spPr>
+          <a:xfrm>
+            <a:off x="1083272" y="2012277"/>
+            <a:ext cx="3726764" cy="300000"/>
           </a:xfrm>
           <a:prstGeom prst="rect">
             <a:avLst/>
@@ -19097,22 +19416,568 @@
           </a:bodyPr>
           <a:lstStyle/>
           <a:p>
+            <a:pPr algn="ctr"/>
+            <a:r>
+              <a:rPr sz="1200" b="1">
+                <a:solidFill>
+                  <a:srgbClr val="2850A0"/>
+                </a:solidFill>
+              </a:rPr>
+              <a:t>問題児</a:t>
+            </a:r>
+          </a:p>
+        </p:txBody>
+      </p:sp>
+      <p:sp>
+        <p:nvSpPr>
+          <p:cNvPr id="13" name="TextBox 12"/>
+          <p:cNvSpPr txBox="1"/>
+          <p:nvPr/>
+        </p:nvSpPr>
+        <p:spPr>
+          <a:xfrm>
+            <a:off x="4910036" y="2012277"/>
+            <a:ext cx="3726764" cy="300000"/>
+          </a:xfrm>
+          <a:prstGeom prst="rect">
+            <a:avLst/>
+          </a:prstGeom>
+          <a:noFill/>
+        </p:spPr>
+        <p:txBody>
+          <a:bodyPr wrap="square">
+            <a:spAutoFit/>
+          </a:bodyPr>
+          <a:lstStyle/>
+          <a:p>
+            <a:pPr algn="ctr"/>
+            <a:r>
+              <a:rPr sz="1200" b="1">
+                <a:solidFill>
+                  <a:srgbClr val="503CA0"/>
+                </a:solidFill>
+              </a:rPr>
+              <a:t>スター</a:t>
+            </a:r>
+          </a:p>
+        </p:txBody>
+      </p:sp>
+      <p:sp>
+        <p:nvSpPr>
+          <p:cNvPr id="14" name="TextBox 13"/>
+          <p:cNvSpPr txBox="1"/>
+          <p:nvPr/>
+        </p:nvSpPr>
+        <p:spPr>
+          <a:xfrm>
+            <a:off x="1083272" y="3890552"/>
+            <a:ext cx="3726764" cy="300000"/>
+          </a:xfrm>
+          <a:prstGeom prst="rect">
+            <a:avLst/>
+          </a:prstGeom>
+          <a:noFill/>
+        </p:spPr>
+        <p:txBody>
+          <a:bodyPr wrap="square">
+            <a:spAutoFit/>
+          </a:bodyPr>
+          <a:lstStyle/>
+          <a:p>
+            <a:pPr algn="ctr"/>
+            <a:r>
+              <a:rPr sz="1200" b="1">
+                <a:solidFill>
+                  <a:srgbClr val="78641E"/>
+                </a:solidFill>
+              </a:rPr>
+              <a:t>負け犬</a:t>
+            </a:r>
+          </a:p>
+        </p:txBody>
+      </p:sp>
+      <p:sp>
+        <p:nvSpPr>
+          <p:cNvPr id="15" name="TextBox 14"/>
+          <p:cNvSpPr txBox="1"/>
+          <p:nvPr/>
+        </p:nvSpPr>
+        <p:spPr>
+          <a:xfrm>
+            <a:off x="4910036" y="3890552"/>
+            <a:ext cx="3726764" cy="300000"/>
+          </a:xfrm>
+          <a:prstGeom prst="rect">
+            <a:avLst/>
+          </a:prstGeom>
+          <a:noFill/>
+        </p:spPr>
+        <p:txBody>
+          <a:bodyPr wrap="square">
+            <a:spAutoFit/>
+          </a:bodyPr>
+          <a:lstStyle/>
+          <a:p>
+            <a:pPr algn="ctr"/>
+            <a:r>
+              <a:rPr sz="1200" b="1">
+                <a:solidFill>
+                  <a:srgbClr val="1E7846"/>
+                </a:solidFill>
+              </a:rPr>
+              <a:t>金のなる木</a:t>
+            </a:r>
+          </a:p>
+        </p:txBody>
+      </p:sp>
+      <p:sp>
+        <p:nvSpPr>
+          <p:cNvPr id="16" name="TextBox 15"/>
+          <p:cNvSpPr txBox="1"/>
+          <p:nvPr/>
+        </p:nvSpPr>
+        <p:spPr>
+          <a:xfrm>
+            <a:off x="1033272" y="5718827"/>
+            <a:ext cx="3826764" cy="407336"/>
+          </a:xfrm>
+          <a:prstGeom prst="rect">
+            <a:avLst/>
+          </a:prstGeom>
+          <a:noFill/>
+        </p:spPr>
+        <p:txBody>
+          <a:bodyPr wrap="none">
+            <a:spAutoFit/>
+          </a:bodyPr>
+          <a:lstStyle/>
+          <a:p>
+            <a:pPr algn="l"/>
+            <a:r>
+              <a:rPr sz="1100">
+                <a:solidFill>
+                  <a:srgbClr val="505064"/>
+                </a:solidFill>
+              </a:rPr>
+              <a:t>低成長</a:t>
+            </a:r>
+          </a:p>
+        </p:txBody>
+      </p:sp>
+      <p:sp>
+        <p:nvSpPr>
+          <p:cNvPr id="17" name="TextBox 16"/>
+          <p:cNvSpPr txBox="1"/>
+          <p:nvPr/>
+        </p:nvSpPr>
+        <p:spPr>
+          <a:xfrm>
+            <a:off x="4860036" y="5718827"/>
+            <a:ext cx="3826764" cy="407336"/>
+          </a:xfrm>
+          <a:prstGeom prst="rect">
+            <a:avLst/>
+          </a:prstGeom>
+          <a:noFill/>
+        </p:spPr>
+        <p:txBody>
+          <a:bodyPr wrap="none">
+            <a:spAutoFit/>
+          </a:bodyPr>
+          <a:lstStyle/>
+          <a:p>
+            <a:pPr algn="r"/>
+            <a:r>
+              <a:rPr sz="1100">
+                <a:solidFill>
+                  <a:srgbClr val="505064"/>
+                </a:solidFill>
+              </a:rPr>
+              <a:t>高成長</a:t>
+            </a:r>
+          </a:p>
+        </p:txBody>
+      </p:sp>
+      <p:sp>
+        <p:nvSpPr>
+          <p:cNvPr id="18" name="TextBox 17"/>
+          <p:cNvSpPr txBox="1"/>
+          <p:nvPr/>
+        </p:nvSpPr>
+        <p:spPr>
+          <a:xfrm rot="16200000">
+            <a:off x="-193901" y="4501653"/>
+            <a:ext cx="1878275" cy="556072"/>
+          </a:xfrm>
+          <a:prstGeom prst="rect">
+            <a:avLst/>
+          </a:prstGeom>
+          <a:noFill/>
+        </p:spPr>
+        <p:txBody>
+          <a:bodyPr wrap="none">
+            <a:spAutoFit/>
+          </a:bodyPr>
+          <a:lstStyle/>
+          <a:p>
+            <a:pPr algn="l"/>
+            <a:r>
+              <a:rPr sz="1100">
+                <a:solidFill>
+                  <a:srgbClr val="505064"/>
+                </a:solidFill>
+              </a:rPr>
+              <a:t>低シェア</a:t>
+            </a:r>
+          </a:p>
+        </p:txBody>
+      </p:sp>
+      <p:sp>
+        <p:nvSpPr>
+          <p:cNvPr id="19" name="TextBox 18"/>
+          <p:cNvSpPr txBox="1"/>
+          <p:nvPr/>
+        </p:nvSpPr>
+        <p:spPr>
+          <a:xfrm rot="16200000">
+            <a:off x="-193901" y="2623378"/>
+            <a:ext cx="1878275" cy="556072"/>
+          </a:xfrm>
+          <a:prstGeom prst="rect">
+            <a:avLst/>
+          </a:prstGeom>
+          <a:noFill/>
+        </p:spPr>
+        <p:txBody>
+          <a:bodyPr wrap="none">
+            <a:spAutoFit/>
+          </a:bodyPr>
+          <a:lstStyle/>
+          <a:p>
+            <a:pPr algn="l"/>
+            <a:r>
+              <a:rPr sz="1100">
+                <a:solidFill>
+                  <a:srgbClr val="505064"/>
+                </a:solidFill>
+              </a:rPr>
+              <a:t>高シェア</a:t>
+            </a:r>
+          </a:p>
+        </p:txBody>
+      </p:sp>
+      <p:sp>
+        <p:nvSpPr>
+          <p:cNvPr id="20" name="Oval 19"/>
+          <p:cNvSpPr/>
+          <p:nvPr/>
+        </p:nvSpPr>
+        <p:spPr>
+          <a:xfrm>
+            <a:off x="6343116" y="2665961"/>
+            <a:ext cx="95250" cy="95250"/>
+          </a:xfrm>
+          <a:prstGeom prst="ellipse">
+            <a:avLst/>
+          </a:prstGeom>
+          <a:solidFill>
+            <a:srgbClr val="808080"/>
+          </a:solidFill>
+          <a:ln w="9525">
+            <a:solidFill>
+              <a:srgbClr val="505050"/>
+            </a:solidFill>
+          </a:ln>
+        </p:spPr>
+        <p:style>
+          <a:lnRef idx="1">
+            <a:schemeClr val="accent1"/>
+          </a:lnRef>
+          <a:fillRef idx="3">
+            <a:schemeClr val="accent1"/>
+          </a:fillRef>
+          <a:effectRef idx="2">
+            <a:schemeClr val="accent1"/>
+          </a:effectRef>
+          <a:fontRef idx="minor">
+            <a:schemeClr val="lt1"/>
+          </a:fontRef>
+        </p:style>
+        <p:txBody>
+          <a:bodyPr rtlCol="0" anchor="ctr"/>
+          <a:lstStyle/>
+          <a:p>
+            <a:pPr algn="ctr"/>
+          </a:p>
+        </p:txBody>
+      </p:sp>
+      <p:sp>
+        <p:nvSpPr>
+          <p:cNvPr id="21" name="TextBox 20"/>
+          <p:cNvSpPr txBox="1"/>
+          <p:nvPr/>
+        </p:nvSpPr>
+        <p:spPr>
+          <a:xfrm>
+            <a:off x="5990741" y="2786211"/>
+            <a:ext cx="800000" cy="200000"/>
+          </a:xfrm>
+          <a:prstGeom prst="rect">
+            <a:avLst/>
+          </a:prstGeom>
+          <a:noFill/>
+        </p:spPr>
+        <p:txBody>
+          <a:bodyPr wrap="none">
+            <a:spAutoFit/>
+          </a:bodyPr>
+          <a:lstStyle/>
+          <a:p>
+            <a:pPr algn="ctr"/>
             <a:r>
               <a:rPr sz="1000">
-                <a:latin typeface="Courier New"/>
+                <a:solidFill>
+                  <a:srgbClr val="323232"/>
+                </a:solidFill>
               </a:rPr>
-              <a:t>quadrantChart
-    title 製品ポートフォリオ分析
-    x-axis 低成長 --&gt; 高成長
-    y-axis 低シェア --&gt; 高シェア
-    quadrant-1 スター
-    quadrant-2 問題児
-    quadrant-3 負け犬
-    quadrant-4 金のなる木
-    製品A: [0.7, 0.8]
-    製品B: [0.3, 0.7]
-    製品C: [0.2, 0.3]
-    製品D: [0.8, 0.3]</a:t>
+              <a:t>製品A</a:t>
+            </a:r>
+          </a:p>
+        </p:txBody>
+      </p:sp>
+      <p:sp>
+        <p:nvSpPr>
+          <p:cNvPr id="22" name="Oval 21"/>
+          <p:cNvSpPr/>
+          <p:nvPr/>
+        </p:nvSpPr>
+        <p:spPr>
+          <a:xfrm>
+            <a:off x="3281705" y="3041617"/>
+            <a:ext cx="95250" cy="95250"/>
+          </a:xfrm>
+          <a:prstGeom prst="ellipse">
+            <a:avLst/>
+          </a:prstGeom>
+          <a:solidFill>
+            <a:srgbClr val="808080"/>
+          </a:solidFill>
+          <a:ln w="9525">
+            <a:solidFill>
+              <a:srgbClr val="505050"/>
+            </a:solidFill>
+          </a:ln>
+        </p:spPr>
+        <p:style>
+          <a:lnRef idx="1">
+            <a:schemeClr val="accent1"/>
+          </a:lnRef>
+          <a:fillRef idx="3">
+            <a:schemeClr val="accent1"/>
+          </a:fillRef>
+          <a:effectRef idx="2">
+            <a:schemeClr val="accent1"/>
+          </a:effectRef>
+          <a:fontRef idx="minor">
+            <a:schemeClr val="lt1"/>
+          </a:fontRef>
+        </p:style>
+        <p:txBody>
+          <a:bodyPr rtlCol="0" anchor="ctr"/>
+          <a:lstStyle/>
+          <a:p>
+            <a:pPr algn="ctr"/>
+          </a:p>
+        </p:txBody>
+      </p:sp>
+      <p:sp>
+        <p:nvSpPr>
+          <p:cNvPr id="23" name="TextBox 22"/>
+          <p:cNvSpPr txBox="1"/>
+          <p:nvPr/>
+        </p:nvSpPr>
+        <p:spPr>
+          <a:xfrm>
+            <a:off x="2929330" y="3161867"/>
+            <a:ext cx="800000" cy="200000"/>
+          </a:xfrm>
+          <a:prstGeom prst="rect">
+            <a:avLst/>
+          </a:prstGeom>
+          <a:noFill/>
+        </p:spPr>
+        <p:txBody>
+          <a:bodyPr wrap="none">
+            <a:spAutoFit/>
+          </a:bodyPr>
+          <a:lstStyle/>
+          <a:p>
+            <a:pPr algn="ctr"/>
+            <a:r>
+              <a:rPr sz="1000">
+                <a:solidFill>
+                  <a:srgbClr val="323232"/>
+                </a:solidFill>
+              </a:rPr>
+              <a:t>製品B</a:t>
+            </a:r>
+          </a:p>
+        </p:txBody>
+      </p:sp>
+      <p:sp>
+        <p:nvSpPr>
+          <p:cNvPr id="24" name="Oval 23"/>
+          <p:cNvSpPr/>
+          <p:nvPr/>
+        </p:nvSpPr>
+        <p:spPr>
+          <a:xfrm>
+            <a:off x="2516352" y="4544237"/>
+            <a:ext cx="95250" cy="95250"/>
+          </a:xfrm>
+          <a:prstGeom prst="ellipse">
+            <a:avLst/>
+          </a:prstGeom>
+          <a:solidFill>
+            <a:srgbClr val="808080"/>
+          </a:solidFill>
+          <a:ln w="9525">
+            <a:solidFill>
+              <a:srgbClr val="505050"/>
+            </a:solidFill>
+          </a:ln>
+        </p:spPr>
+        <p:style>
+          <a:lnRef idx="1">
+            <a:schemeClr val="accent1"/>
+          </a:lnRef>
+          <a:fillRef idx="3">
+            <a:schemeClr val="accent1"/>
+          </a:fillRef>
+          <a:effectRef idx="2">
+            <a:schemeClr val="accent1"/>
+          </a:effectRef>
+          <a:fontRef idx="minor">
+            <a:schemeClr val="lt1"/>
+          </a:fontRef>
+        </p:style>
+        <p:txBody>
+          <a:bodyPr rtlCol="0" anchor="ctr"/>
+          <a:lstStyle/>
+          <a:p>
+            <a:pPr algn="ctr"/>
+          </a:p>
+        </p:txBody>
+      </p:sp>
+      <p:sp>
+        <p:nvSpPr>
+          <p:cNvPr id="25" name="TextBox 24"/>
+          <p:cNvSpPr txBox="1"/>
+          <p:nvPr/>
+        </p:nvSpPr>
+        <p:spPr>
+          <a:xfrm>
+            <a:off x="2163977" y="4664487"/>
+            <a:ext cx="800000" cy="200000"/>
+          </a:xfrm>
+          <a:prstGeom prst="rect">
+            <a:avLst/>
+          </a:prstGeom>
+          <a:noFill/>
+        </p:spPr>
+        <p:txBody>
+          <a:bodyPr wrap="none">
+            <a:spAutoFit/>
+          </a:bodyPr>
+          <a:lstStyle/>
+          <a:p>
+            <a:pPr algn="ctr"/>
+            <a:r>
+              <a:rPr sz="1000">
+                <a:solidFill>
+                  <a:srgbClr val="323232"/>
+                </a:solidFill>
+              </a:rPr>
+              <a:t>製品C</a:t>
+            </a:r>
+          </a:p>
+        </p:txBody>
+      </p:sp>
+      <p:sp>
+        <p:nvSpPr>
+          <p:cNvPr id="26" name="Oval 25"/>
+          <p:cNvSpPr/>
+          <p:nvPr/>
+        </p:nvSpPr>
+        <p:spPr>
+          <a:xfrm>
+            <a:off x="7108469" y="4544237"/>
+            <a:ext cx="95250" cy="95250"/>
+          </a:xfrm>
+          <a:prstGeom prst="ellipse">
+            <a:avLst/>
+          </a:prstGeom>
+          <a:solidFill>
+            <a:srgbClr val="808080"/>
+          </a:solidFill>
+          <a:ln w="9525">
+            <a:solidFill>
+              <a:srgbClr val="505050"/>
+            </a:solidFill>
+          </a:ln>
+        </p:spPr>
+        <p:style>
+          <a:lnRef idx="1">
+            <a:schemeClr val="accent1"/>
+          </a:lnRef>
+          <a:fillRef idx="3">
+            <a:schemeClr val="accent1"/>
+          </a:fillRef>
+          <a:effectRef idx="2">
+            <a:schemeClr val="accent1"/>
+          </a:effectRef>
+          <a:fontRef idx="minor">
+            <a:schemeClr val="lt1"/>
+          </a:fontRef>
+        </p:style>
+        <p:txBody>
+          <a:bodyPr rtlCol="0" anchor="ctr"/>
+          <a:lstStyle/>
+          <a:p>
+            <a:pPr algn="ctr"/>
+          </a:p>
+        </p:txBody>
+      </p:sp>
+      <p:sp>
+        <p:nvSpPr>
+          <p:cNvPr id="27" name="TextBox 26"/>
+          <p:cNvSpPr txBox="1"/>
+          <p:nvPr/>
+        </p:nvSpPr>
+        <p:spPr>
+          <a:xfrm>
+            <a:off x="6756094" y="4664487"/>
+            <a:ext cx="800000" cy="200000"/>
+          </a:xfrm>
+          <a:prstGeom prst="rect">
+            <a:avLst/>
+          </a:prstGeom>
+          <a:noFill/>
+        </p:spPr>
+        <p:txBody>
+          <a:bodyPr wrap="none">
+            <a:spAutoFit/>
+          </a:bodyPr>
+          <a:lstStyle/>
+          <a:p>
+            <a:pPr algn="ctr"/>
+            <a:r>
+              <a:rPr sz="1000">
+                <a:solidFill>
+                  <a:srgbClr val="323232"/>
+                </a:solidFill>
+              </a:rPr>
+              <a:t>製品D</a:t>
             </a:r>
           </a:p>
         </p:txBody>

--- a/demo_full.pptx
+++ b/demo_full.pptx
@@ -20045,46 +20045,509 @@
           <a:p/>
         </p:txBody>
       </p:sp>
-      <p:sp>
-        <p:nvSpPr>
-          <p:cNvPr id="4" name="TextBox 3"/>
+      <p:grpSp>
+        <p:nvGrpSpPr>
+          <p:cNvPr id="7" name="Group 6"/>
+          <p:cNvGrpSpPr/>
+          <p:nvPr/>
+        </p:nvGrpSpPr>
+        <p:grpSpPr>
+          <a:xfrm>
+            <a:off x="2372000" y="2933181"/>
+            <a:ext cx="2000000" cy="1860000"/>
+            <a:chOff x="2372000" y="2933181"/>
+            <a:chExt cx="2000000" cy="1860000"/>
+          </a:xfrm>
+        </p:grpSpPr>
+        <p:sp>
+          <p:nvSpPr>
+            <p:cNvPr id="4" name="Rectangle 3"/>
+            <p:cNvSpPr/>
+            <p:nvPr/>
+          </p:nvSpPr>
+          <p:spPr>
+            <a:xfrm>
+              <a:off x="2372000" y="2933181"/>
+              <a:ext cx="2000000" cy="320000"/>
+            </a:xfrm>
+            <a:prstGeom prst="rect">
+              <a:avLst/>
+            </a:prstGeom>
+            <a:solidFill>
+              <a:srgbClr val="A0C8F0"/>
+            </a:solidFill>
+            <a:ln w="12700">
+              <a:solidFill>
+                <a:srgbClr val="646E82"/>
+              </a:solidFill>
+            </a:ln>
+          </p:spPr>
+          <p:style>
+            <a:lnRef idx="1">
+              <a:schemeClr val="accent1"/>
+            </a:lnRef>
+            <a:fillRef idx="3">
+              <a:schemeClr val="accent1"/>
+            </a:fillRef>
+            <a:effectRef idx="2">
+              <a:schemeClr val="accent1"/>
+            </a:effectRef>
+            <a:fontRef idx="minor">
+              <a:schemeClr val="lt1"/>
+            </a:fontRef>
+          </p:style>
+          <p:txBody>
+            <a:bodyPr rtlCol="0" anchor="ctr" lIns="60000" rIns="60000" tIns="30000" bIns="30000"/>
+            <a:lstStyle/>
+            <a:p>
+              <a:pPr algn="ctr"/>
+              <a:r>
+                <a:rPr sz="900" i="1">
+                  <a:solidFill>
+                    <a:srgbClr val="1E1E3C"/>
+                  </a:solidFill>
+                </a:rPr>
+                <a:t>&lt;&lt;Requirement&gt;&gt;</a:t>
+              </a:r>
+            </a:p>
+          </p:txBody>
+        </p:sp>
+        <p:sp>
+          <p:nvSpPr>
+            <p:cNvPr id="5" name="Rectangle 4"/>
+            <p:cNvSpPr/>
+            <p:nvPr/>
+          </p:nvSpPr>
+          <p:spPr>
+            <a:xfrm>
+              <a:off x="2372000" y="3253181"/>
+              <a:ext cx="2000000" cy="380000"/>
+            </a:xfrm>
+            <a:prstGeom prst="rect">
+              <a:avLst/>
+            </a:prstGeom>
+            <a:solidFill>
+              <a:srgbClr val="D0E8FF"/>
+            </a:solidFill>
+            <a:ln w="12700">
+              <a:solidFill>
+                <a:srgbClr val="646E82"/>
+              </a:solidFill>
+            </a:ln>
+          </p:spPr>
+          <p:style>
+            <a:lnRef idx="1">
+              <a:schemeClr val="accent1"/>
+            </a:lnRef>
+            <a:fillRef idx="3">
+              <a:schemeClr val="accent1"/>
+            </a:fillRef>
+            <a:effectRef idx="2">
+              <a:schemeClr val="accent1"/>
+            </a:effectRef>
+            <a:fontRef idx="minor">
+              <a:schemeClr val="lt1"/>
+            </a:fontRef>
+          </p:style>
+          <p:txBody>
+            <a:bodyPr rtlCol="0" anchor="ctr" lIns="60000" rIns="60000" tIns="40000" bIns="40000"/>
+            <a:lstStyle/>
+            <a:p>
+              <a:pPr algn="ctr"/>
+              <a:r>
+                <a:rPr sz="1100" b="1" i="0">
+                  <a:solidFill>
+                    <a:srgbClr val="1E1E3C"/>
+                  </a:solidFill>
+                </a:rPr>
+                <a:t>test_req</a:t>
+              </a:r>
+            </a:p>
+          </p:txBody>
+        </p:sp>
+        <p:sp>
+          <p:nvSpPr>
+            <p:cNvPr id="6" name="Rectangle 5"/>
+            <p:cNvSpPr/>
+            <p:nvPr/>
+          </p:nvSpPr>
+          <p:spPr>
+            <a:xfrm>
+              <a:off x="2372000" y="3633181"/>
+              <a:ext cx="2000000" cy="1160000"/>
+            </a:xfrm>
+            <a:prstGeom prst="rect">
+              <a:avLst/>
+            </a:prstGeom>
+            <a:solidFill>
+              <a:srgbClr val="EEF7FF"/>
+            </a:solidFill>
+            <a:ln w="12700">
+              <a:solidFill>
+                <a:srgbClr val="646E82"/>
+              </a:solidFill>
+            </a:ln>
+          </p:spPr>
+          <p:style>
+            <a:lnRef idx="1">
+              <a:schemeClr val="accent1"/>
+            </a:lnRef>
+            <a:fillRef idx="3">
+              <a:schemeClr val="accent1"/>
+            </a:fillRef>
+            <a:effectRef idx="2">
+              <a:schemeClr val="accent1"/>
+            </a:effectRef>
+            <a:fontRef idx="minor">
+              <a:schemeClr val="lt1"/>
+            </a:fontRef>
+          </p:style>
+          <p:txBody>
+            <a:bodyPr rtlCol="0" anchor="ctr" wrap="square" lIns="80000" rIns="60000" tIns="40000" bIns="40000"/>
+            <a:lstStyle/>
+            <a:p>
+              <a:pPr algn="l"/>
+              <a:r>
+                <a:rPr sz="900" b="0">
+                  <a:solidFill>
+                    <a:srgbClr val="282828"/>
+                  </a:solidFill>
+                </a:rPr>
+                <a:t>ID: 1</a:t>
+              </a:r>
+            </a:p>
+            <a:p>
+              <a:pPr algn="l"/>
+              <a:r>
+                <a:rPr sz="900" b="0">
+                  <a:solidFill>
+                    <a:srgbClr val="282828"/>
+                  </a:solidFill>
+                </a:rPr>
+                <a:t>Text: </a:t>
+              </a:r>
+              <a:r>
+                <a:rPr sz="900" b="0" i="0">
+                  <a:solidFill>
+                    <a:srgbClr val="282828"/>
+                  </a:solidFill>
+                </a:rPr>
+                <a:t>システムは99.9%の可用性を持つこと</a:t>
+              </a:r>
+            </a:p>
+            <a:p>
+              <a:pPr algn="l"/>
+              <a:r>
+                <a:rPr sz="900" b="0">
+                  <a:solidFill>
+                    <a:srgbClr val="282828"/>
+                  </a:solidFill>
+                </a:rPr>
+                <a:t>Risk: High</a:t>
+              </a:r>
+            </a:p>
+            <a:p>
+              <a:pPr algn="l"/>
+              <a:r>
+                <a:rPr sz="900" b="0">
+                  <a:solidFill>
+                    <a:srgbClr val="282828"/>
+                  </a:solidFill>
+                </a:rPr>
+                <a:t>Verification: Test</a:t>
+              </a:r>
+            </a:p>
+          </p:txBody>
+        </p:sp>
+      </p:grpSp>
+      <p:grpSp>
+        <p:nvGrpSpPr>
+          <p:cNvPr id="11" name="Group 10"/>
+          <p:cNvGrpSpPr/>
+          <p:nvPr/>
+        </p:nvGrpSpPr>
+        <p:grpSpPr>
+          <a:xfrm>
+            <a:off x="4772000" y="2933181"/>
+            <a:ext cx="2000000" cy="1860000"/>
+            <a:chOff x="4772000" y="2933181"/>
+            <a:chExt cx="2000000" cy="1860000"/>
+          </a:xfrm>
+        </p:grpSpPr>
+        <p:sp>
+          <p:nvSpPr>
+            <p:cNvPr id="8" name="Rectangle 7"/>
+            <p:cNvSpPr/>
+            <p:nvPr/>
+          </p:nvSpPr>
+          <p:spPr>
+            <a:xfrm>
+              <a:off x="4772000" y="2933181"/>
+              <a:ext cx="2000000" cy="320000"/>
+            </a:xfrm>
+            <a:prstGeom prst="rect">
+              <a:avLst/>
+            </a:prstGeom>
+            <a:solidFill>
+              <a:srgbClr val="C8A0F0"/>
+            </a:solidFill>
+            <a:ln w="12700">
+              <a:solidFill>
+                <a:srgbClr val="646E82"/>
+              </a:solidFill>
+            </a:ln>
+          </p:spPr>
+          <p:style>
+            <a:lnRef idx="1">
+              <a:schemeClr val="accent1"/>
+            </a:lnRef>
+            <a:fillRef idx="3">
+              <a:schemeClr val="accent1"/>
+            </a:fillRef>
+            <a:effectRef idx="2">
+              <a:schemeClr val="accent1"/>
+            </a:effectRef>
+            <a:fontRef idx="minor">
+              <a:schemeClr val="lt1"/>
+            </a:fontRef>
+          </p:style>
+          <p:txBody>
+            <a:bodyPr rtlCol="0" anchor="ctr" lIns="60000" rIns="60000" tIns="30000" bIns="30000"/>
+            <a:lstStyle/>
+            <a:p>
+              <a:pPr algn="ctr"/>
+              <a:r>
+                <a:rPr sz="900" i="1">
+                  <a:solidFill>
+                    <a:srgbClr val="1E1E3C"/>
+                  </a:solidFill>
+                </a:rPr>
+                <a:t>&lt;&lt;Functional Requirement&gt;&gt;</a:t>
+              </a:r>
+            </a:p>
+          </p:txBody>
+        </p:sp>
+        <p:sp>
+          <p:nvSpPr>
+            <p:cNvPr id="9" name="Rectangle 8"/>
+            <p:cNvSpPr/>
+            <p:nvPr/>
+          </p:nvSpPr>
+          <p:spPr>
+            <a:xfrm>
+              <a:off x="4772000" y="3253181"/>
+              <a:ext cx="2000000" cy="380000"/>
+            </a:xfrm>
+            <a:prstGeom prst="rect">
+              <a:avLst/>
+            </a:prstGeom>
+            <a:solidFill>
+              <a:srgbClr val="E8D0FF"/>
+            </a:solidFill>
+            <a:ln w="12700">
+              <a:solidFill>
+                <a:srgbClr val="646E82"/>
+              </a:solidFill>
+            </a:ln>
+          </p:spPr>
+          <p:style>
+            <a:lnRef idx="1">
+              <a:schemeClr val="accent1"/>
+            </a:lnRef>
+            <a:fillRef idx="3">
+              <a:schemeClr val="accent1"/>
+            </a:fillRef>
+            <a:effectRef idx="2">
+              <a:schemeClr val="accent1"/>
+            </a:effectRef>
+            <a:fontRef idx="minor">
+              <a:schemeClr val="lt1"/>
+            </a:fontRef>
+          </p:style>
+          <p:txBody>
+            <a:bodyPr rtlCol="0" anchor="ctr" lIns="60000" rIns="60000" tIns="40000" bIns="40000"/>
+            <a:lstStyle/>
+            <a:p>
+              <a:pPr algn="ctr"/>
+              <a:r>
+                <a:rPr sz="1100" b="1" i="0">
+                  <a:solidFill>
+                    <a:srgbClr val="1E1E3C"/>
+                  </a:solidFill>
+                </a:rPr>
+                <a:t>login_req</a:t>
+              </a:r>
+            </a:p>
+          </p:txBody>
+        </p:sp>
+        <p:sp>
+          <p:nvSpPr>
+            <p:cNvPr id="10" name="Rectangle 9"/>
+            <p:cNvSpPr/>
+            <p:nvPr/>
+          </p:nvSpPr>
+          <p:spPr>
+            <a:xfrm>
+              <a:off x="4772000" y="3633181"/>
+              <a:ext cx="2000000" cy="1160000"/>
+            </a:xfrm>
+            <a:prstGeom prst="rect">
+              <a:avLst/>
+            </a:prstGeom>
+            <a:solidFill>
+              <a:srgbClr val="F7EEFF"/>
+            </a:solidFill>
+            <a:ln w="12700">
+              <a:solidFill>
+                <a:srgbClr val="646E82"/>
+              </a:solidFill>
+            </a:ln>
+          </p:spPr>
+          <p:style>
+            <a:lnRef idx="1">
+              <a:schemeClr val="accent1"/>
+            </a:lnRef>
+            <a:fillRef idx="3">
+              <a:schemeClr val="accent1"/>
+            </a:fillRef>
+            <a:effectRef idx="2">
+              <a:schemeClr val="accent1"/>
+            </a:effectRef>
+            <a:fontRef idx="minor">
+              <a:schemeClr val="lt1"/>
+            </a:fontRef>
+          </p:style>
+          <p:txBody>
+            <a:bodyPr rtlCol="0" anchor="ctr" wrap="square" lIns="80000" rIns="60000" tIns="40000" bIns="40000"/>
+            <a:lstStyle/>
+            <a:p>
+              <a:pPr algn="l"/>
+              <a:r>
+                <a:rPr sz="900" b="0">
+                  <a:solidFill>
+                    <a:srgbClr val="282828"/>
+                  </a:solidFill>
+                </a:rPr>
+                <a:t>ID: 2</a:t>
+              </a:r>
+            </a:p>
+            <a:p>
+              <a:pPr algn="l"/>
+              <a:r>
+                <a:rPr sz="900" b="0">
+                  <a:solidFill>
+                    <a:srgbClr val="282828"/>
+                  </a:solidFill>
+                </a:rPr>
+                <a:t>Text: </a:t>
+              </a:r>
+              <a:r>
+                <a:rPr sz="900" b="0" i="0">
+                  <a:solidFill>
+                    <a:srgbClr val="282828"/>
+                  </a:solidFill>
+                </a:rPr>
+                <a:t>ユーザーはログインできること</a:t>
+              </a:r>
+            </a:p>
+            <a:p>
+              <a:pPr algn="l"/>
+              <a:r>
+                <a:rPr sz="900" b="0">
+                  <a:solidFill>
+                    <a:srgbClr val="282828"/>
+                  </a:solidFill>
+                </a:rPr>
+                <a:t>Risk: Medium</a:t>
+              </a:r>
+            </a:p>
+            <a:p>
+              <a:pPr algn="l"/>
+              <a:r>
+                <a:rPr sz="900" b="0">
+                  <a:solidFill>
+                    <a:srgbClr val="282828"/>
+                  </a:solidFill>
+                </a:rPr>
+                <a:t>Verification: Inspection</a:t>
+              </a:r>
+            </a:p>
+          </p:txBody>
+        </p:sp>
+      </p:grpSp>
+      <p:cxnSp>
+        <p:nvCxnSpPr>
+          <p:cNvPr id="12" name="Connector 11"/>
+          <p:cNvCxnSpPr>
+            <a:stCxn id="5" idx="3"/>
+            <a:endCxn id="9" idx="1"/>
+          </p:cNvCxnSpPr>
+          <p:nvPr/>
+        </p:nvCxnSpPr>
+        <p:spPr>
+          <a:xfrm>
+            <a:off x="4372000" y="3443181"/>
+            <a:ext cx="400000" cy="0"/>
+          </a:xfrm>
+          <a:prstGeom prst="line">
+            <a:avLst/>
+          </a:prstGeom>
+          <a:ln w="12700">
+            <a:solidFill>
+              <a:srgbClr val="505A6E"/>
+            </a:solidFill>
+            <a:headEnd type="arrow" w="med" len="med"/>
+            <a:tailEnd type="none"/>
+          </a:ln>
+        </p:spPr>
+        <p:style>
+          <a:lnRef idx="2">
+            <a:schemeClr val="accent1"/>
+          </a:lnRef>
+          <a:fillRef idx="0">
+            <a:schemeClr val="accent1"/>
+          </a:fillRef>
+          <a:effectRef idx="1">
+            <a:schemeClr val="accent1"/>
+          </a:effectRef>
+          <a:fontRef idx="minor">
+            <a:schemeClr val="tx1"/>
+          </a:fontRef>
+        </p:style>
+      </p:cxnSp>
+      <p:sp>
+        <p:nvSpPr>
+          <p:cNvPr id="13" name="TextBox 12"/>
           <p:cNvSpPr txBox="1"/>
           <p:nvPr/>
         </p:nvSpPr>
         <p:spPr>
           <a:xfrm>
-            <a:off x="457200" y="1600200"/>
-            <a:ext cx="8229600" cy="4525963"/>
+            <a:off x="4172000" y="3318181"/>
+            <a:ext cx="800000" cy="250000"/>
           </a:xfrm>
           <a:prstGeom prst="rect">
             <a:avLst/>
           </a:prstGeom>
           <a:noFill/>
-        </p:spPr>
-        <p:txBody>
-          <a:bodyPr wrap="square">
+          <a:ln>
+            <a:noFill/>
+          </a:ln>
+        </p:spPr>
+        <p:txBody>
+          <a:bodyPr wrap="none">
             <a:spAutoFit/>
           </a:bodyPr>
           <a:lstStyle/>
           <a:p>
-            <a:r>
-              <a:rPr sz="1000">
-                <a:latin typeface="Courier New"/>
+            <a:pPr algn="ctr"/>
+            <a:r>
+              <a:rPr sz="900" i="1">
+                <a:solidFill>
+                  <a:srgbClr val="3C3C50"/>
+                </a:solidFill>
               </a:rPr>
-              <a:t>requirementDiagram
-    requirement test_req {
-        id: 1
-        text: システムは99.9%の可用性を持つこと
-        risk: high
-        verifymethod: test
-    }
-    functionalRequirement login_req {
-        id: 2
-        text: ユーザーはログインできること
-        risk: medium
-        verifymethod: inspection
-    }
-    test_req - traces -&gt; login_req</a:t>
+              <a:t>«traces»</a:t>
             </a:r>
           </a:p>
         </p:txBody>

--- a/demo_full.pptx
+++ b/demo_full.pptx
@@ -5,7 +5,7 @@
     <p:sldMasterId id="2147483648" r:id="rId1"/>
   </p:sldMasterIdLst>
   <p:notesMasterIdLst>
-    <p:notesMasterId r:id="rId58"/>
+    <p:notesMasterId r:id="rId55"/>
   </p:notesMasterIdLst>
   <p:sldIdLst>
     <p:sldId id="256" r:id="rId7"/>
@@ -56,12 +56,9 @@
     <p:sldId id="301" r:id="rId52"/>
     <p:sldId id="302" r:id="rId53"/>
     <p:sldId id="303" r:id="rId54"/>
-    <p:sldId id="304" r:id="rId55"/>
-    <p:sldId id="305" r:id="rId56"/>
-    <p:sldId id="306" r:id="rId57"/>
-    <p:sldId id="307" r:id="rId59"/>
-    <p:sldId id="308" r:id="rId60"/>
-    <p:sldId id="309" r:id="rId61"/>
+    <p:sldId id="304" r:id="rId56"/>
+    <p:sldId id="305" r:id="rId57"/>
+    <p:sldId id="306" r:id="rId58"/>
   </p:sldIdLst>
   <p:sldSz cx="9144000" cy="6858000" type="screen4x3"/>
   <p:notesSz cx="6858000" cy="9144000"/>
@@ -13928,84 +13925,7 @@
         </p:nvSpPr>
         <p:spPr>
           <a:xfrm>
-            <a:off x="2872000" y="2653181"/>
-            <a:ext cx="3400000" cy="2420000"/>
-          </a:xfrm>
-          <a:prstGeom prst="roundRect">
-            <a:avLst/>
-          </a:prstGeom>
-          <a:solidFill>
-            <a:srgbClr val="EEF4FF"/>
-          </a:solidFill>
-          <a:ln>
-            <a:solidFill>
-              <a:srgbClr val="4664AA"/>
-            </a:solidFill>
-          </a:ln>
-        </p:spPr>
-        <p:style>
-          <a:lnRef idx="1">
-            <a:schemeClr val="accent1"/>
-          </a:lnRef>
-          <a:fillRef idx="3">
-            <a:schemeClr val="accent1"/>
-          </a:fillRef>
-          <a:effectRef idx="2">
-            <a:schemeClr val="accent1"/>
-          </a:effectRef>
-          <a:fontRef idx="minor">
-            <a:schemeClr val="lt1"/>
-          </a:fontRef>
-        </p:style>
-        <p:txBody>
-          <a:bodyPr rtlCol="0" anchor="ctr"/>
-          <a:lstStyle/>
-          <a:p/>
-        </p:txBody>
-      </p:sp>
-      <p:sp>
-        <p:nvSpPr>
-          <p:cNvPr id="5" name="TextBox 4"/>
-          <p:cNvSpPr txBox="1"/>
-          <p:nvPr/>
-        </p:nvSpPr>
-        <p:spPr>
-          <a:xfrm>
-            <a:off x="2872000" y="2653181"/>
-            <a:ext cx="3400000" cy="420000"/>
-          </a:xfrm>
-          <a:prstGeom prst="rect">
-            <a:avLst/>
-          </a:prstGeom>
-          <a:noFill/>
-        </p:spPr>
-        <p:txBody>
-          <a:bodyPr wrap="none">
-            <a:spAutoFit/>
-          </a:bodyPr>
-          <a:lstStyle/>
-          <a:p>
-            <a:pPr algn="ctr"/>
-            <a:r>
-              <a:rPr sz="1100" b="1">
-                <a:solidFill>
-                  <a:srgbClr val="4664AA"/>
-                </a:solidFill>
-              </a:rPr>
-              <a:t>Active</a:t>
-            </a:r>
-          </a:p>
-        </p:txBody>
-      </p:sp>
-      <p:sp>
-        <p:nvSpPr>
-          <p:cNvPr id="6" name="Rounded Rectangle 5"/>
-          <p:cNvSpPr/>
-          <p:nvPr/>
-        </p:nvSpPr>
-        <p:spPr>
-          <a:xfrm>
-            <a:off x="2272000" y="2188180"/>
+            <a:off x="2272000" y="3538181"/>
             <a:ext cx="4600000" cy="2420000"/>
           </a:xfrm>
           <a:prstGeom prst="roundRect">
@@ -14043,13 +13963,90 @@
       </p:sp>
       <p:sp>
         <p:nvSpPr>
+          <p:cNvPr id="5" name="Rounded Rectangle 4"/>
+          <p:cNvSpPr/>
+          <p:nvPr/>
+        </p:nvSpPr>
+        <p:spPr>
+          <a:xfrm>
+            <a:off x="2872000" y="2653181"/>
+            <a:ext cx="3400000" cy="2420000"/>
+          </a:xfrm>
+          <a:prstGeom prst="roundRect">
+            <a:avLst/>
+          </a:prstGeom>
+          <a:solidFill>
+            <a:srgbClr val="EEF4FF"/>
+          </a:solidFill>
+          <a:ln>
+            <a:solidFill>
+              <a:srgbClr val="4664AA"/>
+            </a:solidFill>
+          </a:ln>
+        </p:spPr>
+        <p:style>
+          <a:lnRef idx="1">
+            <a:schemeClr val="accent1"/>
+          </a:lnRef>
+          <a:fillRef idx="3">
+            <a:schemeClr val="accent1"/>
+          </a:fillRef>
+          <a:effectRef idx="2">
+            <a:schemeClr val="accent1"/>
+          </a:effectRef>
+          <a:fontRef idx="minor">
+            <a:schemeClr val="lt1"/>
+          </a:fontRef>
+        </p:style>
+        <p:txBody>
+          <a:bodyPr rtlCol="0" anchor="ctr"/>
+          <a:lstStyle/>
+          <a:p/>
+        </p:txBody>
+      </p:sp>
+      <p:sp>
+        <p:nvSpPr>
+          <p:cNvPr id="6" name="TextBox 5"/>
+          <p:cNvSpPr txBox="1"/>
+          <p:nvPr/>
+        </p:nvSpPr>
+        <p:spPr>
+          <a:xfrm>
+            <a:off x="2872000" y="2653181"/>
+            <a:ext cx="3400000" cy="420000"/>
+          </a:xfrm>
+          <a:prstGeom prst="rect">
+            <a:avLst/>
+          </a:prstGeom>
+          <a:noFill/>
+        </p:spPr>
+        <p:txBody>
+          <a:bodyPr wrap="none">
+            <a:spAutoFit/>
+          </a:bodyPr>
+          <a:lstStyle/>
+          <a:p>
+            <a:pPr algn="ctr"/>
+            <a:r>
+              <a:rPr sz="1100" b="1">
+                <a:solidFill>
+                  <a:srgbClr val="4664AA"/>
+                </a:solidFill>
+              </a:rPr>
+              <a:t>Active</a:t>
+            </a:r>
+          </a:p>
+        </p:txBody>
+      </p:sp>
+      <p:sp>
+        <p:nvSpPr>
           <p:cNvPr id="7" name="Rounded Rectangle 6"/>
           <p:cNvSpPr/>
           <p:nvPr/>
         </p:nvSpPr>
         <p:spPr>
           <a:xfrm>
-            <a:off x="2272000" y="3538181"/>
+            <a:off x="2272000" y="2188180"/>
             <a:ext cx="4600000" cy="2420000"/>
           </a:xfrm>
           <a:prstGeom prst="roundRect">
@@ -14347,7 +14344,7 @@
           <p:cNvPr id="18" name="Connector 17"/>
           <p:cNvCxnSpPr>
             <a:stCxn id="8" idx="3"/>
-            <a:endCxn id="4" idx="1"/>
+            <a:endCxn id="5" idx="1"/>
           </p:cNvCxnSpPr>
           <p:nvPr/>
         </p:nvCxnSpPr>
@@ -14598,7 +14595,7 @@
         <p:nvCxnSpPr>
           <p:cNvPr id="29" name="Connector 28"/>
           <p:cNvCxnSpPr>
-            <a:stCxn id="4" idx="3"/>
+            <a:stCxn id="5" idx="3"/>
             <a:endCxn id="9" idx="1"/>
           </p:cNvCxnSpPr>
           <p:nvPr/>
@@ -23292,7 +23289,7 @@
                   <a:srgbClr val="505050"/>
                 </a:solidFill>
               </a:rPr>
-              <a:t>6-010952a</a:t>
+              <a:t>6-dedf573</a:t>
             </a:r>
           </a:p>
         </p:txBody>
@@ -28822,7 +28819,7 @@
           <a:lstStyle/>
           <a:p>
             <a:r>
-              <a:t>13. タイムライン（Timeline）</a:t>
+              <a:t>13a. タイムライン — 基本（section なし・複数イベント）</a:t>
             </a:r>
           </a:p>
         </p:txBody>
@@ -28853,36 +28850,1087 @@
         <p:spPr>
           <a:xfrm>
             <a:off x="457200" y="1600200"/>
-            <a:ext cx="8229600" cy="4525963"/>
+            <a:ext cx="8229600" cy="452596"/>
           </a:xfrm>
           <a:prstGeom prst="rect">
             <a:avLst/>
           </a:prstGeom>
           <a:noFill/>
-        </p:spPr>
-        <p:txBody>
-          <a:bodyPr wrap="square">
-            <a:spAutoFit/>
-          </a:bodyPr>
-          <a:lstStyle/>
-          <a:p>
-            <a:r>
-              <a:rPr sz="1000">
-                <a:latin typeface="Courier New"/>
-              </a:rPr>
-              <a:t>timeline
-    title ソフトウェア開発史
-    1960 : アセンブリ言語
-    1970 : C言語
-         : Unix
-    1980 : C++
-         : Macintosh
-    1990 : Java
-         : World Wide Web
-    2000 : Python普及
-         : Agile開発
-    2010 : クラウドコンピューティング
-    2020 : AI・機械学習</a:t>
+          <a:ln>
+            <a:noFill/>
+          </a:ln>
+        </p:spPr>
+        <p:txBody>
+          <a:bodyPr wrap="square" tIns="20000"/>
+          <a:lstStyle/>
+          <a:p>
+            <a:pPr algn="ctr">
+              <a:defRPr sz="2000" b="1">
+                <a:solidFill>
+                  <a:srgbClr val="1E1E3C"/>
+                </a:solidFill>
+              </a:defRPr>
+            </a:pPr>
+            <a:r>
+              <a:t>History of Social Media Platform</a:t>
+            </a:r>
+          </a:p>
+        </p:txBody>
+      </p:sp>
+      <p:sp>
+        <p:nvSpPr>
+          <p:cNvPr id="5" name="Rectangle 4"/>
+          <p:cNvSpPr/>
+          <p:nvPr/>
+        </p:nvSpPr>
+        <p:spPr>
+          <a:xfrm>
+            <a:off x="457200" y="4033745"/>
+            <a:ext cx="8229600" cy="30000"/>
+          </a:xfrm>
+          <a:prstGeom prst="rect">
+            <a:avLst/>
+          </a:prstGeom>
+          <a:solidFill>
+            <a:srgbClr val="B4B4C8"/>
+          </a:solidFill>
+          <a:ln>
+            <a:noFill/>
+          </a:ln>
+        </p:spPr>
+        <p:style>
+          <a:lnRef idx="1">
+            <a:schemeClr val="accent1"/>
+          </a:lnRef>
+          <a:fillRef idx="3">
+            <a:schemeClr val="accent1"/>
+          </a:fillRef>
+          <a:effectRef idx="2">
+            <a:schemeClr val="accent1"/>
+          </a:effectRef>
+          <a:fontRef idx="minor">
+            <a:schemeClr val="lt1"/>
+          </a:fontRef>
+        </p:style>
+        <p:txBody>
+          <a:bodyPr rtlCol="0" anchor="ctr"/>
+          <a:lstStyle/>
+          <a:p>
+            <a:pPr algn="ctr"/>
+          </a:p>
+        </p:txBody>
+      </p:sp>
+      <p:sp>
+        <p:nvSpPr>
+          <p:cNvPr id="6" name="Oval 5"/>
+          <p:cNvSpPr/>
+          <p:nvPr/>
+        </p:nvSpPr>
+        <p:spPr>
+          <a:xfrm>
+            <a:off x="845434" y="3849151"/>
+            <a:ext cx="399188" cy="399188"/>
+          </a:xfrm>
+          <a:prstGeom prst="ellipse">
+            <a:avLst/>
+          </a:prstGeom>
+          <a:solidFill>
+            <a:srgbClr val="FFB347"/>
+          </a:solidFill>
+          <a:ln w="19050">
+            <a:solidFill>
+              <a:srgbClr val="CC8F38"/>
+            </a:solidFill>
+          </a:ln>
+        </p:spPr>
+        <p:style>
+          <a:lnRef idx="1">
+            <a:schemeClr val="accent1"/>
+          </a:lnRef>
+          <a:fillRef idx="3">
+            <a:schemeClr val="accent1"/>
+          </a:fillRef>
+          <a:effectRef idx="2">
+            <a:schemeClr val="accent1"/>
+          </a:effectRef>
+          <a:fontRef idx="minor">
+            <a:schemeClr val="lt1"/>
+          </a:fontRef>
+        </p:style>
+        <p:txBody>
+          <a:bodyPr rtlCol="0" anchor="ctr"/>
+          <a:lstStyle/>
+          <a:p>
+            <a:pPr algn="ctr"/>
+          </a:p>
+        </p:txBody>
+      </p:sp>
+      <p:sp>
+        <p:nvSpPr>
+          <p:cNvPr id="7" name="Rounded Rectangle 6"/>
+          <p:cNvSpPr/>
+          <p:nvPr/>
+        </p:nvSpPr>
+        <p:spPr>
+          <a:xfrm>
+            <a:off x="517200" y="2893203"/>
+            <a:ext cx="1055657" cy="790407"/>
+          </a:xfrm>
+          <a:prstGeom prst="roundRect">
+            <a:avLst>
+              <a:gd name="adj" fmla="val 2000000000"/>
+            </a:avLst>
+          </a:prstGeom>
+          <a:solidFill>
+            <a:srgbClr val="FFDCAC"/>
+          </a:solidFill>
+          <a:ln w="12700">
+            <a:solidFill>
+              <a:srgbClr val="CC8F38"/>
+            </a:solidFill>
+          </a:ln>
+        </p:spPr>
+        <p:style>
+          <a:lnRef idx="1">
+            <a:schemeClr val="accent1"/>
+          </a:lnRef>
+          <a:fillRef idx="3">
+            <a:schemeClr val="accent1"/>
+          </a:fillRef>
+          <a:effectRef idx="2">
+            <a:schemeClr val="accent1"/>
+          </a:effectRef>
+          <a:fontRef idx="minor">
+            <a:schemeClr val="lt1"/>
+          </a:fontRef>
+        </p:style>
+        <p:txBody>
+          <a:bodyPr rtlCol="0" anchor="ctr" wrap="square" tIns="30000" bIns="30000" lIns="40000" rIns="40000"/>
+          <a:lstStyle/>
+          <a:p>
+            <a:pPr algn="ctr">
+              <a:defRPr sz="900" b="0">
+                <a:solidFill>
+                  <a:srgbClr val="1E1E3C"/>
+                </a:solidFill>
+              </a:defRPr>
+            </a:pPr>
+            <a:r>
+              <a:t>LinkedIn</a:t>
+            </a:r>
+          </a:p>
+        </p:txBody>
+      </p:sp>
+      <p:sp>
+        <p:nvSpPr>
+          <p:cNvPr id="8" name="TextBox 7"/>
+          <p:cNvSpPr txBox="1"/>
+          <p:nvPr/>
+        </p:nvSpPr>
+        <p:spPr>
+          <a:xfrm>
+            <a:off x="487200" y="4393881"/>
+            <a:ext cx="1115657" cy="1732282"/>
+          </a:xfrm>
+          <a:prstGeom prst="rect">
+            <a:avLst/>
+          </a:prstGeom>
+          <a:noFill/>
+          <a:ln>
+            <a:noFill/>
+          </a:ln>
+        </p:spPr>
+        <p:txBody>
+          <a:bodyPr wrap="square"/>
+          <a:lstStyle/>
+          <a:p>
+            <a:pPr algn="ctr">
+              <a:defRPr sz="1000" b="1">
+                <a:solidFill>
+                  <a:srgbClr val="1E1E3C"/>
+                </a:solidFill>
+              </a:defRPr>
+            </a:pPr>
+            <a:r>
+              <a:t>2002</a:t>
+            </a:r>
+          </a:p>
+        </p:txBody>
+      </p:sp>
+      <p:sp>
+        <p:nvSpPr>
+          <p:cNvPr id="9" name="Oval 8"/>
+          <p:cNvSpPr/>
+          <p:nvPr/>
+        </p:nvSpPr>
+        <p:spPr>
+          <a:xfrm>
+            <a:off x="2021091" y="3849151"/>
+            <a:ext cx="399188" cy="399188"/>
+          </a:xfrm>
+          <a:prstGeom prst="ellipse">
+            <a:avLst/>
+          </a:prstGeom>
+          <a:solidFill>
+            <a:srgbClr val="58C496"/>
+          </a:solidFill>
+          <a:ln w="19050">
+            <a:solidFill>
+              <a:srgbClr val="469C78"/>
+            </a:solidFill>
+          </a:ln>
+        </p:spPr>
+        <p:style>
+          <a:lnRef idx="1">
+            <a:schemeClr val="accent1"/>
+          </a:lnRef>
+          <a:fillRef idx="3">
+            <a:schemeClr val="accent1"/>
+          </a:fillRef>
+          <a:effectRef idx="2">
+            <a:schemeClr val="accent1"/>
+          </a:effectRef>
+          <a:fontRef idx="minor">
+            <a:schemeClr val="lt1"/>
+          </a:fontRef>
+        </p:style>
+        <p:txBody>
+          <a:bodyPr rtlCol="0" anchor="ctr"/>
+          <a:lstStyle/>
+          <a:p>
+            <a:pPr algn="ctr"/>
+          </a:p>
+        </p:txBody>
+      </p:sp>
+      <p:sp>
+        <p:nvSpPr>
+          <p:cNvPr id="10" name="Rounded Rectangle 9"/>
+          <p:cNvSpPr/>
+          <p:nvPr/>
+        </p:nvSpPr>
+        <p:spPr>
+          <a:xfrm>
+            <a:off x="1692857" y="2893203"/>
+            <a:ext cx="1055657" cy="790407"/>
+          </a:xfrm>
+          <a:prstGeom prst="roundRect">
+            <a:avLst>
+              <a:gd name="adj" fmla="val 2000000000"/>
+            </a:avLst>
+          </a:prstGeom>
+          <a:solidFill>
+            <a:srgbClr val="B3E4CF"/>
+          </a:solidFill>
+          <a:ln w="12700">
+            <a:solidFill>
+              <a:srgbClr val="469C78"/>
+            </a:solidFill>
+          </a:ln>
+        </p:spPr>
+        <p:style>
+          <a:lnRef idx="1">
+            <a:schemeClr val="accent1"/>
+          </a:lnRef>
+          <a:fillRef idx="3">
+            <a:schemeClr val="accent1"/>
+          </a:fillRef>
+          <a:effectRef idx="2">
+            <a:schemeClr val="accent1"/>
+          </a:effectRef>
+          <a:fontRef idx="minor">
+            <a:schemeClr val="lt1"/>
+          </a:fontRef>
+        </p:style>
+        <p:txBody>
+          <a:bodyPr rtlCol="0" anchor="ctr" wrap="square" tIns="30000" bIns="30000" lIns="40000" rIns="40000"/>
+          <a:lstStyle/>
+          <a:p>
+            <a:pPr algn="ctr">
+              <a:defRPr sz="900" b="0">
+                <a:solidFill>
+                  <a:srgbClr val="1E1E3C"/>
+                </a:solidFill>
+              </a:defRPr>
+            </a:pPr>
+            <a:r>
+              <a:t>Facebook</a:t>
+            </a:r>
+          </a:p>
+        </p:txBody>
+      </p:sp>
+      <p:sp>
+        <p:nvSpPr>
+          <p:cNvPr id="11" name="Rounded Rectangle 10"/>
+          <p:cNvSpPr/>
+          <p:nvPr/>
+        </p:nvSpPr>
+        <p:spPr>
+          <a:xfrm>
+            <a:off x="1692857" y="2052796"/>
+            <a:ext cx="1055657" cy="790407"/>
+          </a:xfrm>
+          <a:prstGeom prst="roundRect">
+            <a:avLst>
+              <a:gd name="adj" fmla="val 2000000000"/>
+            </a:avLst>
+          </a:prstGeom>
+          <a:solidFill>
+            <a:srgbClr val="B3E4CF"/>
+          </a:solidFill>
+          <a:ln w="12700">
+            <a:solidFill>
+              <a:srgbClr val="469C78"/>
+            </a:solidFill>
+          </a:ln>
+        </p:spPr>
+        <p:style>
+          <a:lnRef idx="1">
+            <a:schemeClr val="accent1"/>
+          </a:lnRef>
+          <a:fillRef idx="3">
+            <a:schemeClr val="accent1"/>
+          </a:fillRef>
+          <a:effectRef idx="2">
+            <a:schemeClr val="accent1"/>
+          </a:effectRef>
+          <a:fontRef idx="minor">
+            <a:schemeClr val="lt1"/>
+          </a:fontRef>
+        </p:style>
+        <p:txBody>
+          <a:bodyPr rtlCol="0" anchor="ctr" wrap="square" tIns="30000" bIns="30000" lIns="40000" rIns="40000"/>
+          <a:lstStyle/>
+          <a:p>
+            <a:pPr algn="ctr">
+              <a:defRPr sz="900" b="0">
+                <a:solidFill>
+                  <a:srgbClr val="1E1E3C"/>
+                </a:solidFill>
+              </a:defRPr>
+            </a:pPr>
+            <a:r>
+              <a:t>Google</a:t>
+            </a:r>
+          </a:p>
+        </p:txBody>
+      </p:sp>
+      <p:sp>
+        <p:nvSpPr>
+          <p:cNvPr id="12" name="TextBox 11"/>
+          <p:cNvSpPr txBox="1"/>
+          <p:nvPr/>
+        </p:nvSpPr>
+        <p:spPr>
+          <a:xfrm>
+            <a:off x="1662857" y="4393881"/>
+            <a:ext cx="1115657" cy="1732282"/>
+          </a:xfrm>
+          <a:prstGeom prst="rect">
+            <a:avLst/>
+          </a:prstGeom>
+          <a:noFill/>
+          <a:ln>
+            <a:noFill/>
+          </a:ln>
+        </p:spPr>
+        <p:txBody>
+          <a:bodyPr wrap="square"/>
+          <a:lstStyle/>
+          <a:p>
+            <a:pPr algn="ctr">
+              <a:defRPr sz="1000" b="1">
+                <a:solidFill>
+                  <a:srgbClr val="1E1E3C"/>
+                </a:solidFill>
+              </a:defRPr>
+            </a:pPr>
+            <a:r>
+              <a:t>2004</a:t>
+            </a:r>
+          </a:p>
+        </p:txBody>
+      </p:sp>
+      <p:sp>
+        <p:nvSpPr>
+          <p:cNvPr id="13" name="Oval 12"/>
+          <p:cNvSpPr/>
+          <p:nvPr/>
+        </p:nvSpPr>
+        <p:spPr>
+          <a:xfrm>
+            <a:off x="3196748" y="3849151"/>
+            <a:ext cx="399188" cy="399188"/>
+          </a:xfrm>
+          <a:prstGeom prst="ellipse">
+            <a:avLst/>
+          </a:prstGeom>
+          <a:solidFill>
+            <a:srgbClr val="66B2FF"/>
+          </a:solidFill>
+          <a:ln w="19050">
+            <a:solidFill>
+              <a:srgbClr val="518ECC"/>
+            </a:solidFill>
+          </a:ln>
+        </p:spPr>
+        <p:style>
+          <a:lnRef idx="1">
+            <a:schemeClr val="accent1"/>
+          </a:lnRef>
+          <a:fillRef idx="3">
+            <a:schemeClr val="accent1"/>
+          </a:fillRef>
+          <a:effectRef idx="2">
+            <a:schemeClr val="accent1"/>
+          </a:effectRef>
+          <a:fontRef idx="minor">
+            <a:schemeClr val="lt1"/>
+          </a:fontRef>
+        </p:style>
+        <p:txBody>
+          <a:bodyPr rtlCol="0" anchor="ctr"/>
+          <a:lstStyle/>
+          <a:p>
+            <a:pPr algn="ctr"/>
+          </a:p>
+        </p:txBody>
+      </p:sp>
+      <p:sp>
+        <p:nvSpPr>
+          <p:cNvPr id="14" name="Rounded Rectangle 13"/>
+          <p:cNvSpPr/>
+          <p:nvPr/>
+        </p:nvSpPr>
+        <p:spPr>
+          <a:xfrm>
+            <a:off x="2868514" y="2893203"/>
+            <a:ext cx="1055657" cy="790407"/>
+          </a:xfrm>
+          <a:prstGeom prst="roundRect">
+            <a:avLst>
+              <a:gd name="adj" fmla="val 2000000000"/>
+            </a:avLst>
+          </a:prstGeom>
+          <a:solidFill>
+            <a:srgbClr val="BADCFF"/>
+          </a:solidFill>
+          <a:ln w="12700">
+            <a:solidFill>
+              <a:srgbClr val="518ECC"/>
+            </a:solidFill>
+          </a:ln>
+        </p:spPr>
+        <p:style>
+          <a:lnRef idx="1">
+            <a:schemeClr val="accent1"/>
+          </a:lnRef>
+          <a:fillRef idx="3">
+            <a:schemeClr val="accent1"/>
+          </a:fillRef>
+          <a:effectRef idx="2">
+            <a:schemeClr val="accent1"/>
+          </a:effectRef>
+          <a:fontRef idx="minor">
+            <a:schemeClr val="lt1"/>
+          </a:fontRef>
+        </p:style>
+        <p:txBody>
+          <a:bodyPr rtlCol="0" anchor="ctr" wrap="square" tIns="30000" bIns="30000" lIns="40000" rIns="40000"/>
+          <a:lstStyle/>
+          <a:p>
+            <a:pPr algn="ctr">
+              <a:defRPr sz="900" b="0">
+                <a:solidFill>
+                  <a:srgbClr val="1E1E3C"/>
+                </a:solidFill>
+              </a:defRPr>
+            </a:pPr>
+            <a:r>
+              <a:t>YouTube</a:t>
+            </a:r>
+          </a:p>
+        </p:txBody>
+      </p:sp>
+      <p:sp>
+        <p:nvSpPr>
+          <p:cNvPr id="15" name="TextBox 14"/>
+          <p:cNvSpPr txBox="1"/>
+          <p:nvPr/>
+        </p:nvSpPr>
+        <p:spPr>
+          <a:xfrm>
+            <a:off x="2838514" y="4393881"/>
+            <a:ext cx="1115657" cy="1732282"/>
+          </a:xfrm>
+          <a:prstGeom prst="rect">
+            <a:avLst/>
+          </a:prstGeom>
+          <a:noFill/>
+          <a:ln>
+            <a:noFill/>
+          </a:ln>
+        </p:spPr>
+        <p:txBody>
+          <a:bodyPr wrap="square"/>
+          <a:lstStyle/>
+          <a:p>
+            <a:pPr algn="ctr">
+              <a:defRPr sz="1000" b="1">
+                <a:solidFill>
+                  <a:srgbClr val="1E1E3C"/>
+                </a:solidFill>
+              </a:defRPr>
+            </a:pPr>
+            <a:r>
+              <a:t>2005</a:t>
+            </a:r>
+          </a:p>
+        </p:txBody>
+      </p:sp>
+      <p:sp>
+        <p:nvSpPr>
+          <p:cNvPr id="16" name="Oval 15"/>
+          <p:cNvSpPr/>
+          <p:nvPr/>
+        </p:nvSpPr>
+        <p:spPr>
+          <a:xfrm>
+            <a:off x="4372405" y="3849151"/>
+            <a:ext cx="399188" cy="399188"/>
+          </a:xfrm>
+          <a:prstGeom prst="ellipse">
+            <a:avLst/>
+          </a:prstGeom>
+          <a:solidFill>
+            <a:srgbClr val="FF6F69"/>
+          </a:solidFill>
+          <a:ln w="19050">
+            <a:solidFill>
+              <a:srgbClr val="CC5854"/>
+            </a:solidFill>
+          </a:ln>
+        </p:spPr>
+        <p:style>
+          <a:lnRef idx="1">
+            <a:schemeClr val="accent1"/>
+          </a:lnRef>
+          <a:fillRef idx="3">
+            <a:schemeClr val="accent1"/>
+          </a:fillRef>
+          <a:effectRef idx="2">
+            <a:schemeClr val="accent1"/>
+          </a:effectRef>
+          <a:fontRef idx="minor">
+            <a:schemeClr val="lt1"/>
+          </a:fontRef>
+        </p:style>
+        <p:txBody>
+          <a:bodyPr rtlCol="0" anchor="ctr"/>
+          <a:lstStyle/>
+          <a:p>
+            <a:pPr algn="ctr"/>
+          </a:p>
+        </p:txBody>
+      </p:sp>
+      <p:sp>
+        <p:nvSpPr>
+          <p:cNvPr id="17" name="Rounded Rectangle 16"/>
+          <p:cNvSpPr/>
+          <p:nvPr/>
+        </p:nvSpPr>
+        <p:spPr>
+          <a:xfrm>
+            <a:off x="4044171" y="2893203"/>
+            <a:ext cx="1055657" cy="790407"/>
+          </a:xfrm>
+          <a:prstGeom prst="roundRect">
+            <a:avLst>
+              <a:gd name="adj" fmla="val 2000000000"/>
+            </a:avLst>
+          </a:prstGeom>
+          <a:solidFill>
+            <a:srgbClr val="FFBEBB"/>
+          </a:solidFill>
+          <a:ln w="12700">
+            <a:solidFill>
+              <a:srgbClr val="CC5854"/>
+            </a:solidFill>
+          </a:ln>
+        </p:spPr>
+        <p:style>
+          <a:lnRef idx="1">
+            <a:schemeClr val="accent1"/>
+          </a:lnRef>
+          <a:fillRef idx="3">
+            <a:schemeClr val="accent1"/>
+          </a:fillRef>
+          <a:effectRef idx="2">
+            <a:schemeClr val="accent1"/>
+          </a:effectRef>
+          <a:fontRef idx="minor">
+            <a:schemeClr val="lt1"/>
+          </a:fontRef>
+        </p:style>
+        <p:txBody>
+          <a:bodyPr rtlCol="0" anchor="ctr" wrap="square" tIns="30000" bIns="30000" lIns="40000" rIns="40000"/>
+          <a:lstStyle/>
+          <a:p>
+            <a:pPr algn="ctr">
+              <a:defRPr sz="900" b="0">
+                <a:solidFill>
+                  <a:srgbClr val="1E1E3C"/>
+                </a:solidFill>
+              </a:defRPr>
+            </a:pPr>
+            <a:r>
+              <a:t>Twitter</a:t>
+            </a:r>
+          </a:p>
+        </p:txBody>
+      </p:sp>
+      <p:sp>
+        <p:nvSpPr>
+          <p:cNvPr id="18" name="TextBox 17"/>
+          <p:cNvSpPr txBox="1"/>
+          <p:nvPr/>
+        </p:nvSpPr>
+        <p:spPr>
+          <a:xfrm>
+            <a:off x="4014171" y="4393881"/>
+            <a:ext cx="1115657" cy="1732282"/>
+          </a:xfrm>
+          <a:prstGeom prst="rect">
+            <a:avLst/>
+          </a:prstGeom>
+          <a:noFill/>
+          <a:ln>
+            <a:noFill/>
+          </a:ln>
+        </p:spPr>
+        <p:txBody>
+          <a:bodyPr wrap="square"/>
+          <a:lstStyle/>
+          <a:p>
+            <a:pPr algn="ctr">
+              <a:defRPr sz="1000" b="1">
+                <a:solidFill>
+                  <a:srgbClr val="1E1E3C"/>
+                </a:solidFill>
+              </a:defRPr>
+            </a:pPr>
+            <a:r>
+              <a:t>2006</a:t>
+            </a:r>
+          </a:p>
+        </p:txBody>
+      </p:sp>
+      <p:sp>
+        <p:nvSpPr>
+          <p:cNvPr id="19" name="Oval 18"/>
+          <p:cNvSpPr/>
+          <p:nvPr/>
+        </p:nvSpPr>
+        <p:spPr>
+          <a:xfrm>
+            <a:off x="5548062" y="3849151"/>
+            <a:ext cx="399188" cy="399188"/>
+          </a:xfrm>
+          <a:prstGeom prst="ellipse">
+            <a:avLst/>
+          </a:prstGeom>
+          <a:solidFill>
+            <a:srgbClr val="B488D1"/>
+          </a:solidFill>
+          <a:ln w="19050">
+            <a:solidFill>
+              <a:srgbClr val="906CA7"/>
+            </a:solidFill>
+          </a:ln>
+        </p:spPr>
+        <p:style>
+          <a:lnRef idx="1">
+            <a:schemeClr val="accent1"/>
+          </a:lnRef>
+          <a:fillRef idx="3">
+            <a:schemeClr val="accent1"/>
+          </a:fillRef>
+          <a:effectRef idx="2">
+            <a:schemeClr val="accent1"/>
+          </a:effectRef>
+          <a:fontRef idx="minor">
+            <a:schemeClr val="lt1"/>
+          </a:fontRef>
+        </p:style>
+        <p:txBody>
+          <a:bodyPr rtlCol="0" anchor="ctr"/>
+          <a:lstStyle/>
+          <a:p>
+            <a:pPr algn="ctr"/>
+          </a:p>
+        </p:txBody>
+      </p:sp>
+      <p:sp>
+        <p:nvSpPr>
+          <p:cNvPr id="20" name="Rounded Rectangle 19"/>
+          <p:cNvSpPr/>
+          <p:nvPr/>
+        </p:nvSpPr>
+        <p:spPr>
+          <a:xfrm>
+            <a:off x="5219828" y="2893203"/>
+            <a:ext cx="1055657" cy="790407"/>
+          </a:xfrm>
+          <a:prstGeom prst="roundRect">
+            <a:avLst>
+              <a:gd name="adj" fmla="val 2000000000"/>
+            </a:avLst>
+          </a:prstGeom>
+          <a:solidFill>
+            <a:srgbClr val="DDC9EA"/>
+          </a:solidFill>
+          <a:ln w="12700">
+            <a:solidFill>
+              <a:srgbClr val="906CA7"/>
+            </a:solidFill>
+          </a:ln>
+        </p:spPr>
+        <p:style>
+          <a:lnRef idx="1">
+            <a:schemeClr val="accent1"/>
+          </a:lnRef>
+          <a:fillRef idx="3">
+            <a:schemeClr val="accent1"/>
+          </a:fillRef>
+          <a:effectRef idx="2">
+            <a:schemeClr val="accent1"/>
+          </a:effectRef>
+          <a:fontRef idx="minor">
+            <a:schemeClr val="lt1"/>
+          </a:fontRef>
+        </p:style>
+        <p:txBody>
+          <a:bodyPr rtlCol="0" anchor="ctr" wrap="square" tIns="30000" bIns="30000" lIns="40000" rIns="40000"/>
+          <a:lstStyle/>
+          <a:p>
+            <a:pPr algn="ctr">
+              <a:defRPr sz="900" b="0">
+                <a:solidFill>
+                  <a:srgbClr val="1E1E3C"/>
+                </a:solidFill>
+              </a:defRPr>
+            </a:pPr>
+            <a:r>
+              <a:t>Tumblr</a:t>
+            </a:r>
+          </a:p>
+        </p:txBody>
+      </p:sp>
+      <p:sp>
+        <p:nvSpPr>
+          <p:cNvPr id="21" name="TextBox 20"/>
+          <p:cNvSpPr txBox="1"/>
+          <p:nvPr/>
+        </p:nvSpPr>
+        <p:spPr>
+          <a:xfrm>
+            <a:off x="5189828" y="4393881"/>
+            <a:ext cx="1115657" cy="1732282"/>
+          </a:xfrm>
+          <a:prstGeom prst="rect">
+            <a:avLst/>
+          </a:prstGeom>
+          <a:noFill/>
+          <a:ln>
+            <a:noFill/>
+          </a:ln>
+        </p:spPr>
+        <p:txBody>
+          <a:bodyPr wrap="square"/>
+          <a:lstStyle/>
+          <a:p>
+            <a:pPr algn="ctr">
+              <a:defRPr sz="1000" b="1">
+                <a:solidFill>
+                  <a:srgbClr val="1E1E3C"/>
+                </a:solidFill>
+              </a:defRPr>
+            </a:pPr>
+            <a:r>
+              <a:t>2007</a:t>
+            </a:r>
+          </a:p>
+        </p:txBody>
+      </p:sp>
+      <p:sp>
+        <p:nvSpPr>
+          <p:cNvPr id="22" name="Oval 21"/>
+          <p:cNvSpPr/>
+          <p:nvPr/>
+        </p:nvSpPr>
+        <p:spPr>
+          <a:xfrm>
+            <a:off x="6723719" y="3849151"/>
+            <a:ext cx="399188" cy="399188"/>
+          </a:xfrm>
+          <a:prstGeom prst="ellipse">
+            <a:avLst/>
+          </a:prstGeom>
+          <a:solidFill>
+            <a:srgbClr val="FFCF8C"/>
+          </a:solidFill>
+          <a:ln w="19050">
+            <a:solidFill>
+              <a:srgbClr val="CCA570"/>
+            </a:solidFill>
+          </a:ln>
+        </p:spPr>
+        <p:style>
+          <a:lnRef idx="1">
+            <a:schemeClr val="accent1"/>
+          </a:lnRef>
+          <a:fillRef idx="3">
+            <a:schemeClr val="accent1"/>
+          </a:fillRef>
+          <a:effectRef idx="2">
+            <a:schemeClr val="accent1"/>
+          </a:effectRef>
+          <a:fontRef idx="minor">
+            <a:schemeClr val="lt1"/>
+          </a:fontRef>
+        </p:style>
+        <p:txBody>
+          <a:bodyPr rtlCol="0" anchor="ctr"/>
+          <a:lstStyle/>
+          <a:p>
+            <a:pPr algn="ctr"/>
+          </a:p>
+        </p:txBody>
+      </p:sp>
+      <p:sp>
+        <p:nvSpPr>
+          <p:cNvPr id="23" name="Rounded Rectangle 22"/>
+          <p:cNvSpPr/>
+          <p:nvPr/>
+        </p:nvSpPr>
+        <p:spPr>
+          <a:xfrm>
+            <a:off x="6395485" y="2893203"/>
+            <a:ext cx="1055657" cy="790407"/>
+          </a:xfrm>
+          <a:prstGeom prst="roundRect">
+            <a:avLst>
+              <a:gd name="adj" fmla="val 2000000000"/>
+            </a:avLst>
+          </a:prstGeom>
+          <a:solidFill>
+            <a:srgbClr val="FFE9CB"/>
+          </a:solidFill>
+          <a:ln w="12700">
+            <a:solidFill>
+              <a:srgbClr val="CCA570"/>
+            </a:solidFill>
+          </a:ln>
+        </p:spPr>
+        <p:style>
+          <a:lnRef idx="1">
+            <a:schemeClr val="accent1"/>
+          </a:lnRef>
+          <a:fillRef idx="3">
+            <a:schemeClr val="accent1"/>
+          </a:fillRef>
+          <a:effectRef idx="2">
+            <a:schemeClr val="accent1"/>
+          </a:effectRef>
+          <a:fontRef idx="minor">
+            <a:schemeClr val="lt1"/>
+          </a:fontRef>
+        </p:style>
+        <p:txBody>
+          <a:bodyPr rtlCol="0" anchor="ctr" wrap="square" tIns="30000" bIns="30000" lIns="40000" rIns="40000"/>
+          <a:lstStyle/>
+          <a:p>
+            <a:pPr algn="ctr">
+              <a:defRPr sz="900" b="0">
+                <a:solidFill>
+                  <a:srgbClr val="1E1E3C"/>
+                </a:solidFill>
+              </a:defRPr>
+            </a:pPr>
+            <a:r>
+              <a:t>Instagram</a:t>
+            </a:r>
+          </a:p>
+        </p:txBody>
+      </p:sp>
+      <p:sp>
+        <p:nvSpPr>
+          <p:cNvPr id="24" name="TextBox 23"/>
+          <p:cNvSpPr txBox="1"/>
+          <p:nvPr/>
+        </p:nvSpPr>
+        <p:spPr>
+          <a:xfrm>
+            <a:off x="6365485" y="4393881"/>
+            <a:ext cx="1115657" cy="1732282"/>
+          </a:xfrm>
+          <a:prstGeom prst="rect">
+            <a:avLst/>
+          </a:prstGeom>
+          <a:noFill/>
+          <a:ln>
+            <a:noFill/>
+          </a:ln>
+        </p:spPr>
+        <p:txBody>
+          <a:bodyPr wrap="square"/>
+          <a:lstStyle/>
+          <a:p>
+            <a:pPr algn="ctr">
+              <a:defRPr sz="1000" b="1">
+                <a:solidFill>
+                  <a:srgbClr val="1E1E3C"/>
+                </a:solidFill>
+              </a:defRPr>
+            </a:pPr>
+            <a:r>
+              <a:t>2008</a:t>
+            </a:r>
+          </a:p>
+        </p:txBody>
+      </p:sp>
+      <p:sp>
+        <p:nvSpPr>
+          <p:cNvPr id="25" name="Oval 24"/>
+          <p:cNvSpPr/>
+          <p:nvPr/>
+        </p:nvSpPr>
+        <p:spPr>
+          <a:xfrm>
+            <a:off x="7899376" y="3849151"/>
+            <a:ext cx="399188" cy="399188"/>
+          </a:xfrm>
+          <a:prstGeom prst="ellipse">
+            <a:avLst/>
+          </a:prstGeom>
+          <a:solidFill>
+            <a:srgbClr val="64C0C0"/>
+          </a:solidFill>
+          <a:ln w="19050">
+            <a:solidFill>
+              <a:srgbClr val="509999"/>
+            </a:solidFill>
+          </a:ln>
+        </p:spPr>
+        <p:style>
+          <a:lnRef idx="1">
+            <a:schemeClr val="accent1"/>
+          </a:lnRef>
+          <a:fillRef idx="3">
+            <a:schemeClr val="accent1"/>
+          </a:fillRef>
+          <a:effectRef idx="2">
+            <a:schemeClr val="accent1"/>
+          </a:effectRef>
+          <a:fontRef idx="minor">
+            <a:schemeClr val="lt1"/>
+          </a:fontRef>
+        </p:style>
+        <p:txBody>
+          <a:bodyPr rtlCol="0" anchor="ctr"/>
+          <a:lstStyle/>
+          <a:p>
+            <a:pPr algn="ctr"/>
+          </a:p>
+        </p:txBody>
+      </p:sp>
+      <p:sp>
+        <p:nvSpPr>
+          <p:cNvPr id="26" name="Rounded Rectangle 25"/>
+          <p:cNvSpPr/>
+          <p:nvPr/>
+        </p:nvSpPr>
+        <p:spPr>
+          <a:xfrm>
+            <a:off x="7571142" y="2893203"/>
+            <a:ext cx="1055657" cy="790407"/>
+          </a:xfrm>
+          <a:prstGeom prst="roundRect">
+            <a:avLst>
+              <a:gd name="adj" fmla="val 2000000000"/>
+            </a:avLst>
+          </a:prstGeom>
+          <a:solidFill>
+            <a:srgbClr val="B9E2E2"/>
+          </a:solidFill>
+          <a:ln w="12700">
+            <a:solidFill>
+              <a:srgbClr val="509999"/>
+            </a:solidFill>
+          </a:ln>
+        </p:spPr>
+        <p:style>
+          <a:lnRef idx="1">
+            <a:schemeClr val="accent1"/>
+          </a:lnRef>
+          <a:fillRef idx="3">
+            <a:schemeClr val="accent1"/>
+          </a:fillRef>
+          <a:effectRef idx="2">
+            <a:schemeClr val="accent1"/>
+          </a:effectRef>
+          <a:fontRef idx="minor">
+            <a:schemeClr val="lt1"/>
+          </a:fontRef>
+        </p:style>
+        <p:txBody>
+          <a:bodyPr rtlCol="0" anchor="ctr" wrap="square" tIns="30000" bIns="30000" lIns="40000" rIns="40000"/>
+          <a:lstStyle/>
+          <a:p>
+            <a:pPr algn="ctr">
+              <a:defRPr sz="900" b="0">
+                <a:solidFill>
+                  <a:srgbClr val="1E1E3C"/>
+                </a:solidFill>
+              </a:defRPr>
+            </a:pPr>
+            <a:r>
+              <a:t>Pinterest</a:t>
+            </a:r>
+          </a:p>
+        </p:txBody>
+      </p:sp>
+      <p:sp>
+        <p:nvSpPr>
+          <p:cNvPr id="27" name="TextBox 26"/>
+          <p:cNvSpPr txBox="1"/>
+          <p:nvPr/>
+        </p:nvSpPr>
+        <p:spPr>
+          <a:xfrm>
+            <a:off x="7541142" y="4393881"/>
+            <a:ext cx="1115657" cy="1732282"/>
+          </a:xfrm>
+          <a:prstGeom prst="rect">
+            <a:avLst/>
+          </a:prstGeom>
+          <a:noFill/>
+          <a:ln>
+            <a:noFill/>
+          </a:ln>
+        </p:spPr>
+        <p:txBody>
+          <a:bodyPr wrap="square"/>
+          <a:lstStyle/>
+          <a:p>
+            <a:pPr algn="ctr">
+              <a:defRPr sz="1000" b="1">
+                <a:solidFill>
+                  <a:srgbClr val="1E1E3C"/>
+                </a:solidFill>
+              </a:defRPr>
+            </a:pPr>
+            <a:r>
+              <a:t>2010</a:t>
             </a:r>
           </a:p>
         </p:txBody>
@@ -28928,7 +29976,7 @@
           <a:lstStyle/>
           <a:p>
             <a:r>
-              <a:t>14. ZenUML</a:t>
+              <a:t>13b. タイムライン — section グループ化（産業革命）</a:t>
             </a:r>
           </a:p>
         </p:txBody>
@@ -28959,31 +30007,869 @@
         <p:spPr>
           <a:xfrm>
             <a:off x="457200" y="1600200"/>
-            <a:ext cx="8229600" cy="4525963"/>
+            <a:ext cx="8229600" cy="452596"/>
           </a:xfrm>
           <a:prstGeom prst="rect">
             <a:avLst/>
           </a:prstGeom>
           <a:noFill/>
-        </p:spPr>
-        <p:txBody>
-          <a:bodyPr wrap="square">
-            <a:spAutoFit/>
-          </a:bodyPr>
-          <a:lstStyle/>
-          <a:p>
-            <a:r>
-              <a:rPr sz="1000">
-                <a:latin typeface="Courier New"/>
-              </a:rPr>
-              <a:t>zenuml
-    title 注文処理
-    @Actor Client
-    @Database DB
-    Client -&gt; Server.process(order) {
-        Server -&gt; DB.save(order)
-        return orderId
-    }</a:t>
+          <a:ln>
+            <a:noFill/>
+          </a:ln>
+        </p:spPr>
+        <p:txBody>
+          <a:bodyPr wrap="square" tIns="20000"/>
+          <a:lstStyle/>
+          <a:p>
+            <a:pPr algn="ctr">
+              <a:defRPr sz="2000" b="1">
+                <a:solidFill>
+                  <a:srgbClr val="1E1E3C"/>
+                </a:solidFill>
+              </a:defRPr>
+            </a:pPr>
+            <a:r>
+              <a:t>Timeline of Industrial Revolution</a:t>
+            </a:r>
+          </a:p>
+        </p:txBody>
+      </p:sp>
+      <p:sp>
+        <p:nvSpPr>
+          <p:cNvPr id="5" name="Rectangle 4"/>
+          <p:cNvSpPr/>
+          <p:nvPr/>
+        </p:nvSpPr>
+        <p:spPr>
+          <a:xfrm>
+            <a:off x="457200" y="4563282"/>
+            <a:ext cx="8229600" cy="30000"/>
+          </a:xfrm>
+          <a:prstGeom prst="rect">
+            <a:avLst/>
+          </a:prstGeom>
+          <a:solidFill>
+            <a:srgbClr val="B4B4C8"/>
+          </a:solidFill>
+          <a:ln>
+            <a:noFill/>
+          </a:ln>
+        </p:spPr>
+        <p:style>
+          <a:lnRef idx="1">
+            <a:schemeClr val="accent1"/>
+          </a:lnRef>
+          <a:fillRef idx="3">
+            <a:schemeClr val="accent1"/>
+          </a:fillRef>
+          <a:effectRef idx="2">
+            <a:schemeClr val="accent1"/>
+          </a:effectRef>
+          <a:fontRef idx="minor">
+            <a:schemeClr val="lt1"/>
+          </a:fontRef>
+        </p:style>
+        <p:txBody>
+          <a:bodyPr rtlCol="0" anchor="ctr"/>
+          <a:lstStyle/>
+          <a:p>
+            <a:pPr algn="ctr"/>
+          </a:p>
+        </p:txBody>
+      </p:sp>
+      <p:sp>
+        <p:nvSpPr>
+          <p:cNvPr id="6" name="Rounded Rectangle 5"/>
+          <p:cNvSpPr/>
+          <p:nvPr/>
+        </p:nvSpPr>
+        <p:spPr>
+          <a:xfrm>
+            <a:off x="457200" y="2052796"/>
+            <a:ext cx="4937760" cy="529537"/>
+          </a:xfrm>
+          <a:prstGeom prst="roundRect">
+            <a:avLst>
+              <a:gd name="adj" fmla="val 1500000000"/>
+            </a:avLst>
+          </a:prstGeom>
+          <a:solidFill>
+            <a:srgbClr val="FFE8C7"/>
+          </a:solidFill>
+          <a:ln w="12700">
+            <a:solidFill>
+              <a:srgbClr val="D8983C"/>
+            </a:solidFill>
+          </a:ln>
+        </p:spPr>
+        <p:style>
+          <a:lnRef idx="1">
+            <a:schemeClr val="accent1"/>
+          </a:lnRef>
+          <a:fillRef idx="3">
+            <a:schemeClr val="accent1"/>
+          </a:fillRef>
+          <a:effectRef idx="2">
+            <a:schemeClr val="accent1"/>
+          </a:effectRef>
+          <a:fontRef idx="minor">
+            <a:schemeClr val="lt1"/>
+          </a:fontRef>
+        </p:style>
+        <p:txBody>
+          <a:bodyPr rtlCol="0" anchor="ctr" wrap="square" tIns="30000"/>
+          <a:lstStyle/>
+          <a:p>
+            <a:pPr algn="ctr">
+              <a:defRPr sz="1100" b="1">
+                <a:solidFill>
+                  <a:srgbClr val="996B2A"/>
+                </a:solidFill>
+              </a:defRPr>
+            </a:pPr>
+            <a:r>
+              <a:t>17th-20th century</a:t>
+            </a:r>
+          </a:p>
+        </p:txBody>
+      </p:sp>
+      <p:sp>
+        <p:nvSpPr>
+          <p:cNvPr id="7" name="Rounded Rectangle 6"/>
+          <p:cNvSpPr/>
+          <p:nvPr/>
+        </p:nvSpPr>
+        <p:spPr>
+          <a:xfrm>
+            <a:off x="5394960" y="2052796"/>
+            <a:ext cx="3291840" cy="529537"/>
+          </a:xfrm>
+          <a:prstGeom prst="roundRect">
+            <a:avLst>
+              <a:gd name="adj" fmla="val 1500000000"/>
+            </a:avLst>
+          </a:prstGeom>
+          <a:solidFill>
+            <a:srgbClr val="CCEDDF"/>
+          </a:solidFill>
+          <a:ln w="12700">
+            <a:solidFill>
+              <a:srgbClr val="4AA67F"/>
+            </a:solidFill>
+          </a:ln>
+        </p:spPr>
+        <p:style>
+          <a:lnRef idx="1">
+            <a:schemeClr val="accent1"/>
+          </a:lnRef>
+          <a:fillRef idx="3">
+            <a:schemeClr val="accent1"/>
+          </a:fillRef>
+          <a:effectRef idx="2">
+            <a:schemeClr val="accent1"/>
+          </a:effectRef>
+          <a:fontRef idx="minor">
+            <a:schemeClr val="lt1"/>
+          </a:fontRef>
+        </p:style>
+        <p:txBody>
+          <a:bodyPr rtlCol="0" anchor="ctr" wrap="square" tIns="30000"/>
+          <a:lstStyle/>
+          <a:p>
+            <a:pPr algn="ctr">
+              <a:defRPr sz="1100" b="1">
+                <a:solidFill>
+                  <a:srgbClr val="34755A"/>
+                </a:solidFill>
+              </a:defRPr>
+            </a:pPr>
+            <a:r>
+              <a:t>21st century</a:t>
+            </a:r>
+          </a:p>
+        </p:txBody>
+      </p:sp>
+      <p:sp>
+        <p:nvSpPr>
+          <p:cNvPr id="8" name="Oval 7"/>
+          <p:cNvSpPr/>
+          <p:nvPr/>
+        </p:nvSpPr>
+        <p:spPr>
+          <a:xfrm>
+            <a:off x="1080566" y="4378688"/>
+            <a:ext cx="399188" cy="399188"/>
+          </a:xfrm>
+          <a:prstGeom prst="ellipse">
+            <a:avLst/>
+          </a:prstGeom>
+          <a:solidFill>
+            <a:srgbClr val="FFB347"/>
+          </a:solidFill>
+          <a:ln w="19050">
+            <a:solidFill>
+              <a:srgbClr val="CC8F38"/>
+            </a:solidFill>
+          </a:ln>
+        </p:spPr>
+        <p:style>
+          <a:lnRef idx="1">
+            <a:schemeClr val="accent1"/>
+          </a:lnRef>
+          <a:fillRef idx="3">
+            <a:schemeClr val="accent1"/>
+          </a:fillRef>
+          <a:effectRef idx="2">
+            <a:schemeClr val="accent1"/>
+          </a:effectRef>
+          <a:fontRef idx="minor">
+            <a:schemeClr val="lt1"/>
+          </a:fontRef>
+        </p:style>
+        <p:txBody>
+          <a:bodyPr rtlCol="0" anchor="ctr"/>
+          <a:lstStyle/>
+          <a:p>
+            <a:pPr algn="ctr"/>
+          </a:p>
+        </p:txBody>
+      </p:sp>
+      <p:sp>
+        <p:nvSpPr>
+          <p:cNvPr id="9" name="Rounded Rectangle 8"/>
+          <p:cNvSpPr/>
+          <p:nvPr/>
+        </p:nvSpPr>
+        <p:spPr>
+          <a:xfrm>
+            <a:off x="517200" y="2582333"/>
+            <a:ext cx="1525920" cy="1630814"/>
+          </a:xfrm>
+          <a:prstGeom prst="roundRect">
+            <a:avLst>
+              <a:gd name="adj" fmla="val 2000000000"/>
+            </a:avLst>
+          </a:prstGeom>
+          <a:solidFill>
+            <a:srgbClr val="FFDCAC"/>
+          </a:solidFill>
+          <a:ln w="12700">
+            <a:solidFill>
+              <a:srgbClr val="CC8F38"/>
+            </a:solidFill>
+          </a:ln>
+        </p:spPr>
+        <p:style>
+          <a:lnRef idx="1">
+            <a:schemeClr val="accent1"/>
+          </a:lnRef>
+          <a:fillRef idx="3">
+            <a:schemeClr val="accent1"/>
+          </a:fillRef>
+          <a:effectRef idx="2">
+            <a:schemeClr val="accent1"/>
+          </a:effectRef>
+          <a:fontRef idx="minor">
+            <a:schemeClr val="lt1"/>
+          </a:fontRef>
+        </p:style>
+        <p:txBody>
+          <a:bodyPr rtlCol="0" anchor="ctr" wrap="square" tIns="30000" bIns="30000" lIns="40000" rIns="40000"/>
+          <a:lstStyle/>
+          <a:p>
+            <a:pPr algn="ctr">
+              <a:defRPr sz="900" b="0">
+                <a:solidFill>
+                  <a:srgbClr val="1E1E3C"/>
+                </a:solidFill>
+              </a:defRPr>
+            </a:pPr>
+            <a:r>
+              <a:t>Machinery, Water power, Steam power</a:t>
+            </a:r>
+          </a:p>
+        </p:txBody>
+      </p:sp>
+      <p:sp>
+        <p:nvSpPr>
+          <p:cNvPr id="10" name="TextBox 9"/>
+          <p:cNvSpPr txBox="1"/>
+          <p:nvPr/>
+        </p:nvSpPr>
+        <p:spPr>
+          <a:xfrm>
+            <a:off x="487200" y="4923418"/>
+            <a:ext cx="1585920" cy="1202745"/>
+          </a:xfrm>
+          <a:prstGeom prst="rect">
+            <a:avLst/>
+          </a:prstGeom>
+          <a:noFill/>
+          <a:ln>
+            <a:noFill/>
+          </a:ln>
+        </p:spPr>
+        <p:txBody>
+          <a:bodyPr wrap="square"/>
+          <a:lstStyle/>
+          <a:p>
+            <a:pPr algn="ctr">
+              <a:defRPr sz="1000" b="1">
+                <a:solidFill>
+                  <a:srgbClr val="1E1E3C"/>
+                </a:solidFill>
+              </a:defRPr>
+            </a:pPr>
+            <a:r>
+              <a:t>Industry 1.0</a:t>
+            </a:r>
+          </a:p>
+        </p:txBody>
+      </p:sp>
+      <p:sp>
+        <p:nvSpPr>
+          <p:cNvPr id="11" name="Oval 10"/>
+          <p:cNvSpPr/>
+          <p:nvPr/>
+        </p:nvSpPr>
+        <p:spPr>
+          <a:xfrm>
+            <a:off x="2726486" y="4378688"/>
+            <a:ext cx="399188" cy="399188"/>
+          </a:xfrm>
+          <a:prstGeom prst="ellipse">
+            <a:avLst/>
+          </a:prstGeom>
+          <a:solidFill>
+            <a:srgbClr val="FFB347"/>
+          </a:solidFill>
+          <a:ln w="19050">
+            <a:solidFill>
+              <a:srgbClr val="CC8F38"/>
+            </a:solidFill>
+          </a:ln>
+        </p:spPr>
+        <p:style>
+          <a:lnRef idx="1">
+            <a:schemeClr val="accent1"/>
+          </a:lnRef>
+          <a:fillRef idx="3">
+            <a:schemeClr val="accent1"/>
+          </a:fillRef>
+          <a:effectRef idx="2">
+            <a:schemeClr val="accent1"/>
+          </a:effectRef>
+          <a:fontRef idx="minor">
+            <a:schemeClr val="lt1"/>
+          </a:fontRef>
+        </p:style>
+        <p:txBody>
+          <a:bodyPr rtlCol="0" anchor="ctr"/>
+          <a:lstStyle/>
+          <a:p>
+            <a:pPr algn="ctr"/>
+          </a:p>
+        </p:txBody>
+      </p:sp>
+      <p:sp>
+        <p:nvSpPr>
+          <p:cNvPr id="12" name="Rounded Rectangle 11"/>
+          <p:cNvSpPr/>
+          <p:nvPr/>
+        </p:nvSpPr>
+        <p:spPr>
+          <a:xfrm>
+            <a:off x="2163120" y="2582333"/>
+            <a:ext cx="1525920" cy="1630814"/>
+          </a:xfrm>
+          <a:prstGeom prst="roundRect">
+            <a:avLst>
+              <a:gd name="adj" fmla="val 2000000000"/>
+            </a:avLst>
+          </a:prstGeom>
+          <a:solidFill>
+            <a:srgbClr val="FFDCAC"/>
+          </a:solidFill>
+          <a:ln w="12700">
+            <a:solidFill>
+              <a:srgbClr val="CC8F38"/>
+            </a:solidFill>
+          </a:ln>
+        </p:spPr>
+        <p:style>
+          <a:lnRef idx="1">
+            <a:schemeClr val="accent1"/>
+          </a:lnRef>
+          <a:fillRef idx="3">
+            <a:schemeClr val="accent1"/>
+          </a:fillRef>
+          <a:effectRef idx="2">
+            <a:schemeClr val="accent1"/>
+          </a:effectRef>
+          <a:fontRef idx="minor">
+            <a:schemeClr val="lt1"/>
+          </a:fontRef>
+        </p:style>
+        <p:txBody>
+          <a:bodyPr rtlCol="0" anchor="ctr" wrap="square" tIns="30000" bIns="30000" lIns="40000" rIns="40000"/>
+          <a:lstStyle/>
+          <a:p>
+            <a:pPr algn="ctr">
+              <a:defRPr sz="900" b="0">
+                <a:solidFill>
+                  <a:srgbClr val="1E1E3C"/>
+                </a:solidFill>
+              </a:defRPr>
+            </a:pPr>
+            <a:r>
+              <a:t>Electricity, Internal combustion engine, Mass production</a:t>
+            </a:r>
+          </a:p>
+        </p:txBody>
+      </p:sp>
+      <p:sp>
+        <p:nvSpPr>
+          <p:cNvPr id="13" name="TextBox 12"/>
+          <p:cNvSpPr txBox="1"/>
+          <p:nvPr/>
+        </p:nvSpPr>
+        <p:spPr>
+          <a:xfrm>
+            <a:off x="2133120" y="4923418"/>
+            <a:ext cx="1585920" cy="1202745"/>
+          </a:xfrm>
+          <a:prstGeom prst="rect">
+            <a:avLst/>
+          </a:prstGeom>
+          <a:noFill/>
+          <a:ln>
+            <a:noFill/>
+          </a:ln>
+        </p:spPr>
+        <p:txBody>
+          <a:bodyPr wrap="square"/>
+          <a:lstStyle/>
+          <a:p>
+            <a:pPr algn="ctr">
+              <a:defRPr sz="1000" b="1">
+                <a:solidFill>
+                  <a:srgbClr val="1E1E3C"/>
+                </a:solidFill>
+              </a:defRPr>
+            </a:pPr>
+            <a:r>
+              <a:t>Industry 2.0</a:t>
+            </a:r>
+          </a:p>
+        </p:txBody>
+      </p:sp>
+      <p:sp>
+        <p:nvSpPr>
+          <p:cNvPr id="14" name="Oval 13"/>
+          <p:cNvSpPr/>
+          <p:nvPr/>
+        </p:nvSpPr>
+        <p:spPr>
+          <a:xfrm>
+            <a:off x="4372406" y="4378688"/>
+            <a:ext cx="399188" cy="399188"/>
+          </a:xfrm>
+          <a:prstGeom prst="ellipse">
+            <a:avLst/>
+          </a:prstGeom>
+          <a:solidFill>
+            <a:srgbClr val="FFB347"/>
+          </a:solidFill>
+          <a:ln w="19050">
+            <a:solidFill>
+              <a:srgbClr val="CC8F38"/>
+            </a:solidFill>
+          </a:ln>
+        </p:spPr>
+        <p:style>
+          <a:lnRef idx="1">
+            <a:schemeClr val="accent1"/>
+          </a:lnRef>
+          <a:fillRef idx="3">
+            <a:schemeClr val="accent1"/>
+          </a:fillRef>
+          <a:effectRef idx="2">
+            <a:schemeClr val="accent1"/>
+          </a:effectRef>
+          <a:fontRef idx="minor">
+            <a:schemeClr val="lt1"/>
+          </a:fontRef>
+        </p:style>
+        <p:txBody>
+          <a:bodyPr rtlCol="0" anchor="ctr"/>
+          <a:lstStyle/>
+          <a:p>
+            <a:pPr algn="ctr"/>
+          </a:p>
+        </p:txBody>
+      </p:sp>
+      <p:sp>
+        <p:nvSpPr>
+          <p:cNvPr id="15" name="Rounded Rectangle 14"/>
+          <p:cNvSpPr/>
+          <p:nvPr/>
+        </p:nvSpPr>
+        <p:spPr>
+          <a:xfrm>
+            <a:off x="3809040" y="2582333"/>
+            <a:ext cx="1525920" cy="1630814"/>
+          </a:xfrm>
+          <a:prstGeom prst="roundRect">
+            <a:avLst>
+              <a:gd name="adj" fmla="val 2000000000"/>
+            </a:avLst>
+          </a:prstGeom>
+          <a:solidFill>
+            <a:srgbClr val="FFDCAC"/>
+          </a:solidFill>
+          <a:ln w="12700">
+            <a:solidFill>
+              <a:srgbClr val="CC8F38"/>
+            </a:solidFill>
+          </a:ln>
+        </p:spPr>
+        <p:style>
+          <a:lnRef idx="1">
+            <a:schemeClr val="accent1"/>
+          </a:lnRef>
+          <a:fillRef idx="3">
+            <a:schemeClr val="accent1"/>
+          </a:fillRef>
+          <a:effectRef idx="2">
+            <a:schemeClr val="accent1"/>
+          </a:effectRef>
+          <a:fontRef idx="minor">
+            <a:schemeClr val="lt1"/>
+          </a:fontRef>
+        </p:style>
+        <p:txBody>
+          <a:bodyPr rtlCol="0" anchor="ctr" wrap="square" tIns="30000" bIns="30000" lIns="40000" rIns="40000"/>
+          <a:lstStyle/>
+          <a:p>
+            <a:pPr algn="ctr">
+              <a:defRPr sz="900" b="0">
+                <a:solidFill>
+                  <a:srgbClr val="1E1E3C"/>
+                </a:solidFill>
+              </a:defRPr>
+            </a:pPr>
+            <a:r>
+              <a:t>Electronics, Computers, Automation</a:t>
+            </a:r>
+          </a:p>
+        </p:txBody>
+      </p:sp>
+      <p:sp>
+        <p:nvSpPr>
+          <p:cNvPr id="16" name="TextBox 15"/>
+          <p:cNvSpPr txBox="1"/>
+          <p:nvPr/>
+        </p:nvSpPr>
+        <p:spPr>
+          <a:xfrm>
+            <a:off x="3779040" y="4923418"/>
+            <a:ext cx="1585920" cy="1202745"/>
+          </a:xfrm>
+          <a:prstGeom prst="rect">
+            <a:avLst/>
+          </a:prstGeom>
+          <a:noFill/>
+          <a:ln>
+            <a:noFill/>
+          </a:ln>
+        </p:spPr>
+        <p:txBody>
+          <a:bodyPr wrap="square"/>
+          <a:lstStyle/>
+          <a:p>
+            <a:pPr algn="ctr">
+              <a:defRPr sz="1000" b="1">
+                <a:solidFill>
+                  <a:srgbClr val="1E1E3C"/>
+                </a:solidFill>
+              </a:defRPr>
+            </a:pPr>
+            <a:r>
+              <a:t>Industry 3.0</a:t>
+            </a:r>
+          </a:p>
+        </p:txBody>
+      </p:sp>
+      <p:sp>
+        <p:nvSpPr>
+          <p:cNvPr id="17" name="Oval 16"/>
+          <p:cNvSpPr/>
+          <p:nvPr/>
+        </p:nvSpPr>
+        <p:spPr>
+          <a:xfrm>
+            <a:off x="6018326" y="4378688"/>
+            <a:ext cx="399188" cy="399188"/>
+          </a:xfrm>
+          <a:prstGeom prst="ellipse">
+            <a:avLst/>
+          </a:prstGeom>
+          <a:solidFill>
+            <a:srgbClr val="58C496"/>
+          </a:solidFill>
+          <a:ln w="19050">
+            <a:solidFill>
+              <a:srgbClr val="469C78"/>
+            </a:solidFill>
+          </a:ln>
+        </p:spPr>
+        <p:style>
+          <a:lnRef idx="1">
+            <a:schemeClr val="accent1"/>
+          </a:lnRef>
+          <a:fillRef idx="3">
+            <a:schemeClr val="accent1"/>
+          </a:fillRef>
+          <a:effectRef idx="2">
+            <a:schemeClr val="accent1"/>
+          </a:effectRef>
+          <a:fontRef idx="minor">
+            <a:schemeClr val="lt1"/>
+          </a:fontRef>
+        </p:style>
+        <p:txBody>
+          <a:bodyPr rtlCol="0" anchor="ctr"/>
+          <a:lstStyle/>
+          <a:p>
+            <a:pPr algn="ctr"/>
+          </a:p>
+        </p:txBody>
+      </p:sp>
+      <p:sp>
+        <p:nvSpPr>
+          <p:cNvPr id="18" name="Rounded Rectangle 17"/>
+          <p:cNvSpPr/>
+          <p:nvPr/>
+        </p:nvSpPr>
+        <p:spPr>
+          <a:xfrm>
+            <a:off x="5454960" y="2582333"/>
+            <a:ext cx="1525920" cy="1630814"/>
+          </a:xfrm>
+          <a:prstGeom prst="roundRect">
+            <a:avLst>
+              <a:gd name="adj" fmla="val 2000000000"/>
+            </a:avLst>
+          </a:prstGeom>
+          <a:solidFill>
+            <a:srgbClr val="B3E4CF"/>
+          </a:solidFill>
+          <a:ln w="12700">
+            <a:solidFill>
+              <a:srgbClr val="469C78"/>
+            </a:solidFill>
+          </a:ln>
+        </p:spPr>
+        <p:style>
+          <a:lnRef idx="1">
+            <a:schemeClr val="accent1"/>
+          </a:lnRef>
+          <a:fillRef idx="3">
+            <a:schemeClr val="accent1"/>
+          </a:fillRef>
+          <a:effectRef idx="2">
+            <a:schemeClr val="accent1"/>
+          </a:effectRef>
+          <a:fontRef idx="minor">
+            <a:schemeClr val="lt1"/>
+          </a:fontRef>
+        </p:style>
+        <p:txBody>
+          <a:bodyPr rtlCol="0" anchor="ctr" wrap="square" tIns="30000" bIns="30000" lIns="40000" rIns="40000"/>
+          <a:lstStyle/>
+          <a:p>
+            <a:pPr algn="ctr">
+              <a:defRPr sz="900" b="0">
+                <a:solidFill>
+                  <a:srgbClr val="1E1E3C"/>
+                </a:solidFill>
+              </a:defRPr>
+            </a:pPr>
+            <a:r>
+              <a:t>Internet, Robotics, Internet of Things</a:t>
+            </a:r>
+          </a:p>
+        </p:txBody>
+      </p:sp>
+      <p:sp>
+        <p:nvSpPr>
+          <p:cNvPr id="19" name="TextBox 18"/>
+          <p:cNvSpPr txBox="1"/>
+          <p:nvPr/>
+        </p:nvSpPr>
+        <p:spPr>
+          <a:xfrm>
+            <a:off x="5424960" y="4923418"/>
+            <a:ext cx="1585920" cy="1202745"/>
+          </a:xfrm>
+          <a:prstGeom prst="rect">
+            <a:avLst/>
+          </a:prstGeom>
+          <a:noFill/>
+          <a:ln>
+            <a:noFill/>
+          </a:ln>
+        </p:spPr>
+        <p:txBody>
+          <a:bodyPr wrap="square"/>
+          <a:lstStyle/>
+          <a:p>
+            <a:pPr algn="ctr">
+              <a:defRPr sz="1000" b="1">
+                <a:solidFill>
+                  <a:srgbClr val="1E1E3C"/>
+                </a:solidFill>
+              </a:defRPr>
+            </a:pPr>
+            <a:r>
+              <a:t>Industry 4.0</a:t>
+            </a:r>
+          </a:p>
+        </p:txBody>
+      </p:sp>
+      <p:sp>
+        <p:nvSpPr>
+          <p:cNvPr id="20" name="Oval 19"/>
+          <p:cNvSpPr/>
+          <p:nvPr/>
+        </p:nvSpPr>
+        <p:spPr>
+          <a:xfrm>
+            <a:off x="7664246" y="4378688"/>
+            <a:ext cx="399188" cy="399188"/>
+          </a:xfrm>
+          <a:prstGeom prst="ellipse">
+            <a:avLst/>
+          </a:prstGeom>
+          <a:solidFill>
+            <a:srgbClr val="58C496"/>
+          </a:solidFill>
+          <a:ln w="19050">
+            <a:solidFill>
+              <a:srgbClr val="469C78"/>
+            </a:solidFill>
+          </a:ln>
+        </p:spPr>
+        <p:style>
+          <a:lnRef idx="1">
+            <a:schemeClr val="accent1"/>
+          </a:lnRef>
+          <a:fillRef idx="3">
+            <a:schemeClr val="accent1"/>
+          </a:fillRef>
+          <a:effectRef idx="2">
+            <a:schemeClr val="accent1"/>
+          </a:effectRef>
+          <a:fontRef idx="minor">
+            <a:schemeClr val="lt1"/>
+          </a:fontRef>
+        </p:style>
+        <p:txBody>
+          <a:bodyPr rtlCol="0" anchor="ctr"/>
+          <a:lstStyle/>
+          <a:p>
+            <a:pPr algn="ctr"/>
+          </a:p>
+        </p:txBody>
+      </p:sp>
+      <p:sp>
+        <p:nvSpPr>
+          <p:cNvPr id="21" name="Rounded Rectangle 20"/>
+          <p:cNvSpPr/>
+          <p:nvPr/>
+        </p:nvSpPr>
+        <p:spPr>
+          <a:xfrm>
+            <a:off x="7100880" y="2582333"/>
+            <a:ext cx="1525920" cy="1630814"/>
+          </a:xfrm>
+          <a:prstGeom prst="roundRect">
+            <a:avLst>
+              <a:gd name="adj" fmla="val 2000000000"/>
+            </a:avLst>
+          </a:prstGeom>
+          <a:solidFill>
+            <a:srgbClr val="B3E4CF"/>
+          </a:solidFill>
+          <a:ln w="12700">
+            <a:solidFill>
+              <a:srgbClr val="469C78"/>
+            </a:solidFill>
+          </a:ln>
+        </p:spPr>
+        <p:style>
+          <a:lnRef idx="1">
+            <a:schemeClr val="accent1"/>
+          </a:lnRef>
+          <a:fillRef idx="3">
+            <a:schemeClr val="accent1"/>
+          </a:fillRef>
+          <a:effectRef idx="2">
+            <a:schemeClr val="accent1"/>
+          </a:effectRef>
+          <a:fontRef idx="minor">
+            <a:schemeClr val="lt1"/>
+          </a:fontRef>
+        </p:style>
+        <p:txBody>
+          <a:bodyPr rtlCol="0" anchor="ctr" wrap="square" tIns="30000" bIns="30000" lIns="40000" rIns="40000"/>
+          <a:lstStyle/>
+          <a:p>
+            <a:pPr algn="ctr">
+              <a:defRPr sz="900" b="0">
+                <a:solidFill>
+                  <a:srgbClr val="1E1E3C"/>
+                </a:solidFill>
+              </a:defRPr>
+            </a:pPr>
+            <a:r>
+              <a:t>Artificial intelligence, Big data, 3D printing</a:t>
+            </a:r>
+          </a:p>
+        </p:txBody>
+      </p:sp>
+      <p:sp>
+        <p:nvSpPr>
+          <p:cNvPr id="22" name="TextBox 21"/>
+          <p:cNvSpPr txBox="1"/>
+          <p:nvPr/>
+        </p:nvSpPr>
+        <p:spPr>
+          <a:xfrm>
+            <a:off x="7070880" y="4923418"/>
+            <a:ext cx="1585920" cy="1202745"/>
+          </a:xfrm>
+          <a:prstGeom prst="rect">
+            <a:avLst/>
+          </a:prstGeom>
+          <a:noFill/>
+          <a:ln>
+            <a:noFill/>
+          </a:ln>
+        </p:spPr>
+        <p:txBody>
+          <a:bodyPr wrap="square"/>
+          <a:lstStyle/>
+          <a:p>
+            <a:pPr algn="ctr">
+              <a:defRPr sz="1000" b="1">
+                <a:solidFill>
+                  <a:srgbClr val="1E1E3C"/>
+                </a:solidFill>
+              </a:defRPr>
+            </a:pPr>
+            <a:r>
+              <a:t>Industry 5.0</a:t>
             </a:r>
           </a:p>
         </p:txBody>
@@ -29029,7 +30915,7 @@
           <a:lstStyle/>
           <a:p>
             <a:r>
-              <a:t>15. サンキー図（Sankey Diagram）</a:t>
+              <a:t>13c. タイムライン — テキスト折り返し・&lt;br&gt;強制改行</a:t>
             </a:r>
           </a:p>
         </p:txBody>
@@ -29060,30 +30946,824 @@
         <p:spPr>
           <a:xfrm>
             <a:off x="457200" y="1600200"/>
-            <a:ext cx="8229600" cy="4525963"/>
+            <a:ext cx="8229600" cy="452596"/>
           </a:xfrm>
           <a:prstGeom prst="rect">
             <a:avLst/>
           </a:prstGeom>
           <a:noFill/>
-        </p:spPr>
-        <p:txBody>
-          <a:bodyPr wrap="square">
-            <a:spAutoFit/>
-          </a:bodyPr>
-          <a:lstStyle/>
-          <a:p>
-            <a:r>
-              <a:rPr sz="1000">
-                <a:latin typeface="Courier New"/>
-              </a:rPr>
-              <a:t>sankey-beta
-    エネルギー源,電力,60
-    エネルギー源,熱,40
-    電力,家庭用,25
-    電力,産業用,35
-    熱,暖房,30
-    熱,給湯,10</a:t>
+          <a:ln>
+            <a:noFill/>
+          </a:ln>
+        </p:spPr>
+        <p:txBody>
+          <a:bodyPr wrap="square" tIns="20000"/>
+          <a:lstStyle/>
+          <a:p>
+            <a:pPr algn="ctr">
+              <a:defRPr sz="2000" b="1">
+                <a:solidFill>
+                  <a:srgbClr val="1E1E3C"/>
+                </a:solidFill>
+              </a:defRPr>
+            </a:pPr>
+            <a:r>
+              <a:t>England's History Timeline</a:t>
+            </a:r>
+          </a:p>
+        </p:txBody>
+      </p:sp>
+      <p:sp>
+        <p:nvSpPr>
+          <p:cNvPr id="5" name="Rectangle 4"/>
+          <p:cNvSpPr/>
+          <p:nvPr/>
+        </p:nvSpPr>
+        <p:spPr>
+          <a:xfrm>
+            <a:off x="457200" y="4563282"/>
+            <a:ext cx="8229600" cy="30000"/>
+          </a:xfrm>
+          <a:prstGeom prst="rect">
+            <a:avLst/>
+          </a:prstGeom>
+          <a:solidFill>
+            <a:srgbClr val="B4B4C8"/>
+          </a:solidFill>
+          <a:ln>
+            <a:noFill/>
+          </a:ln>
+        </p:spPr>
+        <p:style>
+          <a:lnRef idx="1">
+            <a:schemeClr val="accent1"/>
+          </a:lnRef>
+          <a:fillRef idx="3">
+            <a:schemeClr val="accent1"/>
+          </a:fillRef>
+          <a:effectRef idx="2">
+            <a:schemeClr val="accent1"/>
+          </a:effectRef>
+          <a:fontRef idx="minor">
+            <a:schemeClr val="lt1"/>
+          </a:fontRef>
+        </p:style>
+        <p:txBody>
+          <a:bodyPr rtlCol="0" anchor="ctr"/>
+          <a:lstStyle/>
+          <a:p>
+            <a:pPr algn="ctr"/>
+          </a:p>
+        </p:txBody>
+      </p:sp>
+      <p:sp>
+        <p:nvSpPr>
+          <p:cNvPr id="6" name="Rounded Rectangle 5"/>
+          <p:cNvSpPr/>
+          <p:nvPr/>
+        </p:nvSpPr>
+        <p:spPr>
+          <a:xfrm>
+            <a:off x="457200" y="2052796"/>
+            <a:ext cx="4114800" cy="529537"/>
+          </a:xfrm>
+          <a:prstGeom prst="roundRect">
+            <a:avLst>
+              <a:gd name="adj" fmla="val 1500000000"/>
+            </a:avLst>
+          </a:prstGeom>
+          <a:solidFill>
+            <a:srgbClr val="FFE8C7"/>
+          </a:solidFill>
+          <a:ln w="12700">
+            <a:solidFill>
+              <a:srgbClr val="D8983C"/>
+            </a:solidFill>
+          </a:ln>
+        </p:spPr>
+        <p:style>
+          <a:lnRef idx="1">
+            <a:schemeClr val="accent1"/>
+          </a:lnRef>
+          <a:fillRef idx="3">
+            <a:schemeClr val="accent1"/>
+          </a:fillRef>
+          <a:effectRef idx="2">
+            <a:schemeClr val="accent1"/>
+          </a:effectRef>
+          <a:fontRef idx="minor">
+            <a:schemeClr val="lt1"/>
+          </a:fontRef>
+        </p:style>
+        <p:txBody>
+          <a:bodyPr rtlCol="0" anchor="ctr" wrap="square" tIns="30000"/>
+          <a:lstStyle/>
+          <a:p>
+            <a:pPr algn="ctr">
+              <a:defRPr sz="1100" b="1">
+                <a:solidFill>
+                  <a:srgbClr val="996B2A"/>
+                </a:solidFill>
+              </a:defRPr>
+            </a:pPr>
+            <a:r>
+              <a:t>Stone Age</a:t>
+            </a:r>
+          </a:p>
+        </p:txBody>
+      </p:sp>
+      <p:sp>
+        <p:nvSpPr>
+          <p:cNvPr id="7" name="Rounded Rectangle 6"/>
+          <p:cNvSpPr/>
+          <p:nvPr/>
+        </p:nvSpPr>
+        <p:spPr>
+          <a:xfrm>
+            <a:off x="4572000" y="2052796"/>
+            <a:ext cx="4114800" cy="529537"/>
+          </a:xfrm>
+          <a:prstGeom prst="roundRect">
+            <a:avLst>
+              <a:gd name="adj" fmla="val 1500000000"/>
+            </a:avLst>
+          </a:prstGeom>
+          <a:solidFill>
+            <a:srgbClr val="CCEDDF"/>
+          </a:solidFill>
+          <a:ln w="12700">
+            <a:solidFill>
+              <a:srgbClr val="4AA67F"/>
+            </a:solidFill>
+          </a:ln>
+        </p:spPr>
+        <p:style>
+          <a:lnRef idx="1">
+            <a:schemeClr val="accent1"/>
+          </a:lnRef>
+          <a:fillRef idx="3">
+            <a:schemeClr val="accent1"/>
+          </a:fillRef>
+          <a:effectRef idx="2">
+            <a:schemeClr val="accent1"/>
+          </a:effectRef>
+          <a:fontRef idx="minor">
+            <a:schemeClr val="lt1"/>
+          </a:fontRef>
+        </p:style>
+        <p:txBody>
+          <a:bodyPr rtlCol="0" anchor="ctr" wrap="square" tIns="30000"/>
+          <a:lstStyle/>
+          <a:p>
+            <a:pPr algn="ctr">
+              <a:defRPr sz="1100" b="1">
+                <a:solidFill>
+                  <a:srgbClr val="34755A"/>
+                </a:solidFill>
+              </a:defRPr>
+            </a:pPr>
+            <a:r>
+              <a:t>Bronze Age</a:t>
+            </a:r>
+          </a:p>
+        </p:txBody>
+      </p:sp>
+      <p:sp>
+        <p:nvSpPr>
+          <p:cNvPr id="8" name="Oval 7"/>
+          <p:cNvSpPr/>
+          <p:nvPr/>
+        </p:nvSpPr>
+        <p:spPr>
+          <a:xfrm>
+            <a:off x="1286306" y="4378688"/>
+            <a:ext cx="399188" cy="399188"/>
+          </a:xfrm>
+          <a:prstGeom prst="ellipse">
+            <a:avLst/>
+          </a:prstGeom>
+          <a:solidFill>
+            <a:srgbClr val="FFB347"/>
+          </a:solidFill>
+          <a:ln w="19050">
+            <a:solidFill>
+              <a:srgbClr val="CC8F38"/>
+            </a:solidFill>
+          </a:ln>
+        </p:spPr>
+        <p:style>
+          <a:lnRef idx="1">
+            <a:schemeClr val="accent1"/>
+          </a:lnRef>
+          <a:fillRef idx="3">
+            <a:schemeClr val="accent1"/>
+          </a:fillRef>
+          <a:effectRef idx="2">
+            <a:schemeClr val="accent1"/>
+          </a:effectRef>
+          <a:fontRef idx="minor">
+            <a:schemeClr val="lt1"/>
+          </a:fontRef>
+        </p:style>
+        <p:txBody>
+          <a:bodyPr rtlCol="0" anchor="ctr"/>
+          <a:lstStyle/>
+          <a:p>
+            <a:pPr algn="ctr"/>
+          </a:p>
+        </p:txBody>
+      </p:sp>
+      <p:sp>
+        <p:nvSpPr>
+          <p:cNvPr id="9" name="Rounded Rectangle 8"/>
+          <p:cNvSpPr/>
+          <p:nvPr/>
+        </p:nvSpPr>
+        <p:spPr>
+          <a:xfrm>
+            <a:off x="517200" y="3422740"/>
+            <a:ext cx="1937400" cy="790407"/>
+          </a:xfrm>
+          <a:prstGeom prst="roundRect">
+            <a:avLst>
+              <a:gd name="adj" fmla="val 2000000000"/>
+            </a:avLst>
+          </a:prstGeom>
+          <a:solidFill>
+            <a:srgbClr val="FFDCAC"/>
+          </a:solidFill>
+          <a:ln w="12700">
+            <a:solidFill>
+              <a:srgbClr val="CC8F38"/>
+            </a:solidFill>
+          </a:ln>
+        </p:spPr>
+        <p:style>
+          <a:lnRef idx="1">
+            <a:schemeClr val="accent1"/>
+          </a:lnRef>
+          <a:fillRef idx="3">
+            <a:schemeClr val="accent1"/>
+          </a:fillRef>
+          <a:effectRef idx="2">
+            <a:schemeClr val="accent1"/>
+          </a:effectRef>
+          <a:fontRef idx="minor">
+            <a:schemeClr val="lt1"/>
+          </a:fontRef>
+        </p:style>
+        <p:txBody>
+          <a:bodyPr rtlCol="0" anchor="ctr" wrap="square" tIns="30000" bIns="30000" lIns="40000" rIns="40000"/>
+          <a:lstStyle/>
+          <a:p>
+            <a:pPr algn="ctr">
+              <a:defRPr sz="900" b="0">
+                <a:solidFill>
+                  <a:srgbClr val="1E1E3C"/>
+                </a:solidFill>
+              </a:defRPr>
+            </a:pPr>
+            <a:r>
+              <a:t>Britain's oldest known house was built in Orkney, Scotland</a:t>
+            </a:r>
+          </a:p>
+        </p:txBody>
+      </p:sp>
+      <p:sp>
+        <p:nvSpPr>
+          <p:cNvPr id="10" name="TextBox 9"/>
+          <p:cNvSpPr txBox="1"/>
+          <p:nvPr/>
+        </p:nvSpPr>
+        <p:spPr>
+          <a:xfrm>
+            <a:off x="487200" y="4923418"/>
+            <a:ext cx="1997400" cy="1202745"/>
+          </a:xfrm>
+          <a:prstGeom prst="rect">
+            <a:avLst/>
+          </a:prstGeom>
+          <a:noFill/>
+          <a:ln>
+            <a:noFill/>
+          </a:ln>
+        </p:spPr>
+        <p:txBody>
+          <a:bodyPr wrap="square"/>
+          <a:lstStyle/>
+          <a:p>
+            <a:pPr algn="ctr">
+              <a:defRPr sz="1000" b="1">
+                <a:solidFill>
+                  <a:srgbClr val="1E1E3C"/>
+                </a:solidFill>
+              </a:defRPr>
+            </a:pPr>
+            <a:r>
+              <a:t>7600 BC</a:t>
+            </a:r>
+          </a:p>
+        </p:txBody>
+      </p:sp>
+      <p:sp>
+        <p:nvSpPr>
+          <p:cNvPr id="11" name="Oval 10"/>
+          <p:cNvSpPr/>
+          <p:nvPr/>
+        </p:nvSpPr>
+        <p:spPr>
+          <a:xfrm>
+            <a:off x="3343706" y="4378688"/>
+            <a:ext cx="399188" cy="399188"/>
+          </a:xfrm>
+          <a:prstGeom prst="ellipse">
+            <a:avLst/>
+          </a:prstGeom>
+          <a:solidFill>
+            <a:srgbClr val="FFB347"/>
+          </a:solidFill>
+          <a:ln w="19050">
+            <a:solidFill>
+              <a:srgbClr val="CC8F38"/>
+            </a:solidFill>
+          </a:ln>
+        </p:spPr>
+        <p:style>
+          <a:lnRef idx="1">
+            <a:schemeClr val="accent1"/>
+          </a:lnRef>
+          <a:fillRef idx="3">
+            <a:schemeClr val="accent1"/>
+          </a:fillRef>
+          <a:effectRef idx="2">
+            <a:schemeClr val="accent1"/>
+          </a:effectRef>
+          <a:fontRef idx="minor">
+            <a:schemeClr val="lt1"/>
+          </a:fontRef>
+        </p:style>
+        <p:txBody>
+          <a:bodyPr rtlCol="0" anchor="ctr"/>
+          <a:lstStyle/>
+          <a:p>
+            <a:pPr algn="ctr"/>
+          </a:p>
+        </p:txBody>
+      </p:sp>
+      <p:sp>
+        <p:nvSpPr>
+          <p:cNvPr id="12" name="Rounded Rectangle 11"/>
+          <p:cNvSpPr/>
+          <p:nvPr/>
+        </p:nvSpPr>
+        <p:spPr>
+          <a:xfrm>
+            <a:off x="2574600" y="3422740"/>
+            <a:ext cx="1937400" cy="790407"/>
+          </a:xfrm>
+          <a:prstGeom prst="roundRect">
+            <a:avLst>
+              <a:gd name="adj" fmla="val 2000000000"/>
+            </a:avLst>
+          </a:prstGeom>
+          <a:solidFill>
+            <a:srgbClr val="FFDCAC"/>
+          </a:solidFill>
+          <a:ln w="12700">
+            <a:solidFill>
+              <a:srgbClr val="CC8F38"/>
+            </a:solidFill>
+          </a:ln>
+        </p:spPr>
+        <p:style>
+          <a:lnRef idx="1">
+            <a:schemeClr val="accent1"/>
+          </a:lnRef>
+          <a:fillRef idx="3">
+            <a:schemeClr val="accent1"/>
+          </a:fillRef>
+          <a:effectRef idx="2">
+            <a:schemeClr val="accent1"/>
+          </a:effectRef>
+          <a:fontRef idx="minor">
+            <a:schemeClr val="lt1"/>
+          </a:fontRef>
+        </p:style>
+        <p:txBody>
+          <a:bodyPr rtlCol="0" anchor="ctr" wrap="square" tIns="30000" bIns="30000" lIns="40000" rIns="40000"/>
+          <a:lstStyle/>
+          <a:p>
+            <a:pPr algn="ctr">
+              <a:defRPr sz="900" b="0">
+                <a:solidFill>
+                  <a:srgbClr val="1E1E3C"/>
+                </a:solidFill>
+              </a:defRPr>
+            </a:pPr>
+            <a:r>
+              <a:t>Sea levels rise and Britain becomes an island.</a:t>
+            </a:r>
+          </a:p>
+          <a:p>
+            <a:pPr algn="ctr">
+              <a:defRPr sz="900" b="0">
+                <a:solidFill>
+                  <a:srgbClr val="1E1E3C"/>
+                </a:solidFill>
+              </a:defRPr>
+            </a:pPr>
+            <a:r>
+              <a:t> The people who live here are hunter-gatherers.</a:t>
+            </a:r>
+          </a:p>
+        </p:txBody>
+      </p:sp>
+      <p:sp>
+        <p:nvSpPr>
+          <p:cNvPr id="13" name="TextBox 12"/>
+          <p:cNvSpPr txBox="1"/>
+          <p:nvPr/>
+        </p:nvSpPr>
+        <p:spPr>
+          <a:xfrm>
+            <a:off x="2544600" y="4923418"/>
+            <a:ext cx="1997400" cy="1202745"/>
+          </a:xfrm>
+          <a:prstGeom prst="rect">
+            <a:avLst/>
+          </a:prstGeom>
+          <a:noFill/>
+          <a:ln>
+            <a:noFill/>
+          </a:ln>
+        </p:spPr>
+        <p:txBody>
+          <a:bodyPr wrap="square"/>
+          <a:lstStyle/>
+          <a:p>
+            <a:pPr algn="ctr">
+              <a:defRPr sz="1000" b="1">
+                <a:solidFill>
+                  <a:srgbClr val="1E1E3C"/>
+                </a:solidFill>
+              </a:defRPr>
+            </a:pPr>
+            <a:r>
+              <a:t>6000 BC</a:t>
+            </a:r>
+          </a:p>
+        </p:txBody>
+      </p:sp>
+      <p:sp>
+        <p:nvSpPr>
+          <p:cNvPr id="14" name="Oval 13"/>
+          <p:cNvSpPr/>
+          <p:nvPr/>
+        </p:nvSpPr>
+        <p:spPr>
+          <a:xfrm>
+            <a:off x="5401106" y="4378688"/>
+            <a:ext cx="399188" cy="399188"/>
+          </a:xfrm>
+          <a:prstGeom prst="ellipse">
+            <a:avLst/>
+          </a:prstGeom>
+          <a:solidFill>
+            <a:srgbClr val="58C496"/>
+          </a:solidFill>
+          <a:ln w="19050">
+            <a:solidFill>
+              <a:srgbClr val="469C78"/>
+            </a:solidFill>
+          </a:ln>
+        </p:spPr>
+        <p:style>
+          <a:lnRef idx="1">
+            <a:schemeClr val="accent1"/>
+          </a:lnRef>
+          <a:fillRef idx="3">
+            <a:schemeClr val="accent1"/>
+          </a:fillRef>
+          <a:effectRef idx="2">
+            <a:schemeClr val="accent1"/>
+          </a:effectRef>
+          <a:fontRef idx="minor">
+            <a:schemeClr val="lt1"/>
+          </a:fontRef>
+        </p:style>
+        <p:txBody>
+          <a:bodyPr rtlCol="0" anchor="ctr"/>
+          <a:lstStyle/>
+          <a:p>
+            <a:pPr algn="ctr"/>
+          </a:p>
+        </p:txBody>
+      </p:sp>
+      <p:sp>
+        <p:nvSpPr>
+          <p:cNvPr id="15" name="Rounded Rectangle 14"/>
+          <p:cNvSpPr/>
+          <p:nvPr/>
+        </p:nvSpPr>
+        <p:spPr>
+          <a:xfrm>
+            <a:off x="4632000" y="3422740"/>
+            <a:ext cx="1937400" cy="790407"/>
+          </a:xfrm>
+          <a:prstGeom prst="roundRect">
+            <a:avLst>
+              <a:gd name="adj" fmla="val 2000000000"/>
+            </a:avLst>
+          </a:prstGeom>
+          <a:solidFill>
+            <a:srgbClr val="B3E4CF"/>
+          </a:solidFill>
+          <a:ln w="12700">
+            <a:solidFill>
+              <a:srgbClr val="469C78"/>
+            </a:solidFill>
+          </a:ln>
+        </p:spPr>
+        <p:style>
+          <a:lnRef idx="1">
+            <a:schemeClr val="accent1"/>
+          </a:lnRef>
+          <a:fillRef idx="3">
+            <a:schemeClr val="accent1"/>
+          </a:fillRef>
+          <a:effectRef idx="2">
+            <a:schemeClr val="accent1"/>
+          </a:effectRef>
+          <a:fontRef idx="minor">
+            <a:schemeClr val="lt1"/>
+          </a:fontRef>
+        </p:style>
+        <p:txBody>
+          <a:bodyPr rtlCol="0" anchor="ctr" wrap="square" tIns="30000" bIns="30000" lIns="40000" rIns="40000"/>
+          <a:lstStyle/>
+          <a:p>
+            <a:pPr algn="ctr">
+              <a:defRPr sz="900" b="0">
+                <a:solidFill>
+                  <a:srgbClr val="1E1E3C"/>
+                </a:solidFill>
+              </a:defRPr>
+            </a:pPr>
+            <a:r>
+              <a:t>People arrive from Europe and settle in Britain.</a:t>
+            </a:r>
+          </a:p>
+          <a:p>
+            <a:pPr algn="ctr">
+              <a:defRPr sz="900" b="0">
+                <a:solidFill>
+                  <a:srgbClr val="1E1E3C"/>
+                </a:solidFill>
+              </a:defRPr>
+            </a:pPr>
+            <a:r>
+              <a:t>They bring farming and metalworking.</a:t>
+            </a:r>
+          </a:p>
+        </p:txBody>
+      </p:sp>
+      <p:sp>
+        <p:nvSpPr>
+          <p:cNvPr id="16" name="Rounded Rectangle 15"/>
+          <p:cNvSpPr/>
+          <p:nvPr/>
+        </p:nvSpPr>
+        <p:spPr>
+          <a:xfrm>
+            <a:off x="4632000" y="2582333"/>
+            <a:ext cx="1937400" cy="790407"/>
+          </a:xfrm>
+          <a:prstGeom prst="roundRect">
+            <a:avLst>
+              <a:gd name="adj" fmla="val 2000000000"/>
+            </a:avLst>
+          </a:prstGeom>
+          <a:solidFill>
+            <a:srgbClr val="B3E4CF"/>
+          </a:solidFill>
+          <a:ln w="12700">
+            <a:solidFill>
+              <a:srgbClr val="469C78"/>
+            </a:solidFill>
+          </a:ln>
+        </p:spPr>
+        <p:style>
+          <a:lnRef idx="1">
+            <a:schemeClr val="accent1"/>
+          </a:lnRef>
+          <a:fillRef idx="3">
+            <a:schemeClr val="accent1"/>
+          </a:fillRef>
+          <a:effectRef idx="2">
+            <a:schemeClr val="accent1"/>
+          </a:effectRef>
+          <a:fontRef idx="minor">
+            <a:schemeClr val="lt1"/>
+          </a:fontRef>
+        </p:style>
+        <p:txBody>
+          <a:bodyPr rtlCol="0" anchor="ctr" wrap="square" tIns="30000" bIns="30000" lIns="40000" rIns="40000"/>
+          <a:lstStyle/>
+          <a:p>
+            <a:pPr algn="ctr">
+              <a:defRPr sz="900" b="0">
+                <a:solidFill>
+                  <a:srgbClr val="1E1E3C"/>
+                </a:solidFill>
+              </a:defRPr>
+            </a:pPr>
+            <a:r>
+              <a:t>New styles of pottery and ways of burying the dead appear.</a:t>
+            </a:r>
+          </a:p>
+        </p:txBody>
+      </p:sp>
+      <p:sp>
+        <p:nvSpPr>
+          <p:cNvPr id="17" name="TextBox 16"/>
+          <p:cNvSpPr txBox="1"/>
+          <p:nvPr/>
+        </p:nvSpPr>
+        <p:spPr>
+          <a:xfrm>
+            <a:off x="4602000" y="4923418"/>
+            <a:ext cx="1997400" cy="1202745"/>
+          </a:xfrm>
+          <a:prstGeom prst="rect">
+            <a:avLst/>
+          </a:prstGeom>
+          <a:noFill/>
+          <a:ln>
+            <a:noFill/>
+          </a:ln>
+        </p:spPr>
+        <p:txBody>
+          <a:bodyPr wrap="square"/>
+          <a:lstStyle/>
+          <a:p>
+            <a:pPr algn="ctr">
+              <a:defRPr sz="1000" b="1">
+                <a:solidFill>
+                  <a:srgbClr val="1E1E3C"/>
+                </a:solidFill>
+              </a:defRPr>
+            </a:pPr>
+            <a:r>
+              <a:t>2300 BC</a:t>
+            </a:r>
+          </a:p>
+        </p:txBody>
+      </p:sp>
+      <p:sp>
+        <p:nvSpPr>
+          <p:cNvPr id="18" name="Oval 17"/>
+          <p:cNvSpPr/>
+          <p:nvPr/>
+        </p:nvSpPr>
+        <p:spPr>
+          <a:xfrm>
+            <a:off x="7458506" y="4378688"/>
+            <a:ext cx="399188" cy="399188"/>
+          </a:xfrm>
+          <a:prstGeom prst="ellipse">
+            <a:avLst/>
+          </a:prstGeom>
+          <a:solidFill>
+            <a:srgbClr val="58C496"/>
+          </a:solidFill>
+          <a:ln w="19050">
+            <a:solidFill>
+              <a:srgbClr val="469C78"/>
+            </a:solidFill>
+          </a:ln>
+        </p:spPr>
+        <p:style>
+          <a:lnRef idx="1">
+            <a:schemeClr val="accent1"/>
+          </a:lnRef>
+          <a:fillRef idx="3">
+            <a:schemeClr val="accent1"/>
+          </a:fillRef>
+          <a:effectRef idx="2">
+            <a:schemeClr val="accent1"/>
+          </a:effectRef>
+          <a:fontRef idx="minor">
+            <a:schemeClr val="lt1"/>
+          </a:fontRef>
+        </p:style>
+        <p:txBody>
+          <a:bodyPr rtlCol="0" anchor="ctr"/>
+          <a:lstStyle/>
+          <a:p>
+            <a:pPr algn="ctr"/>
+          </a:p>
+        </p:txBody>
+      </p:sp>
+      <p:sp>
+        <p:nvSpPr>
+          <p:cNvPr id="19" name="Rounded Rectangle 18"/>
+          <p:cNvSpPr/>
+          <p:nvPr/>
+        </p:nvSpPr>
+        <p:spPr>
+          <a:xfrm>
+            <a:off x="6689400" y="3422740"/>
+            <a:ext cx="1937400" cy="790407"/>
+          </a:xfrm>
+          <a:prstGeom prst="roundRect">
+            <a:avLst>
+              <a:gd name="adj" fmla="val 2000000000"/>
+            </a:avLst>
+          </a:prstGeom>
+          <a:solidFill>
+            <a:srgbClr val="B3E4CF"/>
+          </a:solidFill>
+          <a:ln w="12700">
+            <a:solidFill>
+              <a:srgbClr val="469C78"/>
+            </a:solidFill>
+          </a:ln>
+        </p:spPr>
+        <p:style>
+          <a:lnRef idx="1">
+            <a:schemeClr val="accent1"/>
+          </a:lnRef>
+          <a:fillRef idx="3">
+            <a:schemeClr val="accent1"/>
+          </a:fillRef>
+          <a:effectRef idx="2">
+            <a:schemeClr val="accent1"/>
+          </a:effectRef>
+          <a:fontRef idx="minor">
+            <a:schemeClr val="lt1"/>
+          </a:fontRef>
+        </p:style>
+        <p:txBody>
+          <a:bodyPr rtlCol="0" anchor="ctr" wrap="square" tIns="30000" bIns="30000" lIns="40000" rIns="40000"/>
+          <a:lstStyle/>
+          <a:p>
+            <a:pPr algn="ctr">
+              <a:defRPr sz="900" b="0">
+                <a:solidFill>
+                  <a:srgbClr val="1E1E3C"/>
+                </a:solidFill>
+              </a:defRPr>
+            </a:pPr>
+            <a:r>
+              <a:t>The last major building works are completed at Stonehenge.</a:t>
+            </a:r>
+          </a:p>
+          <a:p>
+            <a:pPr algn="ctr">
+              <a:defRPr sz="900" b="0">
+                <a:solidFill>
+                  <a:srgbClr val="1E1E3C"/>
+                </a:solidFill>
+              </a:defRPr>
+            </a:pPr>
+            <a:r>
+              <a:t> People now bury their dead in stone circles.</a:t>
+            </a:r>
+          </a:p>
+        </p:txBody>
+      </p:sp>
+      <p:sp>
+        <p:nvSpPr>
+          <p:cNvPr id="20" name="TextBox 19"/>
+          <p:cNvSpPr txBox="1"/>
+          <p:nvPr/>
+        </p:nvSpPr>
+        <p:spPr>
+          <a:xfrm>
+            <a:off x="6659400" y="4923418"/>
+            <a:ext cx="1997400" cy="1202745"/>
+          </a:xfrm>
+          <a:prstGeom prst="rect">
+            <a:avLst/>
+          </a:prstGeom>
+          <a:noFill/>
+          <a:ln>
+            <a:noFill/>
+          </a:ln>
+        </p:spPr>
+        <p:txBody>
+          <a:bodyPr wrap="square"/>
+          <a:lstStyle/>
+          <a:p>
+            <a:pPr algn="ctr">
+              <a:defRPr sz="1000" b="1">
+                <a:solidFill>
+                  <a:srgbClr val="1E1E3C"/>
+                </a:solidFill>
+              </a:defRPr>
+            </a:pPr>
+            <a:r>
+              <a:t>2200 BC</a:t>
             </a:r>
           </a:p>
         </p:txBody>
@@ -29129,7 +31809,7 @@
           <a:lstStyle/>
           <a:p>
             <a:r>
-              <a:t>16. XYチャート（XY Chart）</a:t>
+              <a:t>13d. タイムライン — 同行複数イベント・継続行</a:t>
             </a:r>
           </a:p>
         </p:txBody>
@@ -29160,29 +31840,1092 @@
         <p:spPr>
           <a:xfrm>
             <a:off x="457200" y="1600200"/>
-            <a:ext cx="8229600" cy="4525963"/>
+            <a:ext cx="8229600" cy="452596"/>
           </a:xfrm>
           <a:prstGeom prst="rect">
             <a:avLst/>
           </a:prstGeom>
           <a:noFill/>
-        </p:spPr>
-        <p:txBody>
-          <a:bodyPr wrap="square">
-            <a:spAutoFit/>
-          </a:bodyPr>
-          <a:lstStyle/>
-          <a:p>
-            <a:r>
-              <a:rPr sz="1000">
-                <a:latin typeface="Courier New"/>
-              </a:rPr>
-              <a:t>xychart-beta
-    title "月別売上推移"
-    x-axis [1月, 2月, 3月, 4月, 5月, 6月]
-    y-axis "売上（万円）" 0 --&gt; 1000
-    bar [400, 500, 650, 720, 850, 900]
-    line [400, 500, 650, 720, 850, 900]</a:t>
+          <a:ln>
+            <a:noFill/>
+          </a:ln>
+        </p:spPr>
+        <p:txBody>
+          <a:bodyPr wrap="square" tIns="20000"/>
+          <a:lstStyle/>
+          <a:p>
+            <a:pPr algn="ctr">
+              <a:defRPr sz="2000" b="1">
+                <a:solidFill>
+                  <a:srgbClr val="1E1E3C"/>
+                </a:solidFill>
+              </a:defRPr>
+            </a:pPr>
+            <a:r>
+              <a:t>MermaidChart 2023 Timeline</a:t>
+            </a:r>
+          </a:p>
+        </p:txBody>
+      </p:sp>
+      <p:sp>
+        <p:nvSpPr>
+          <p:cNvPr id="5" name="Rectangle 4"/>
+          <p:cNvSpPr/>
+          <p:nvPr/>
+        </p:nvSpPr>
+        <p:spPr>
+          <a:xfrm>
+            <a:off x="457200" y="4563282"/>
+            <a:ext cx="8229600" cy="30000"/>
+          </a:xfrm>
+          <a:prstGeom prst="rect">
+            <a:avLst/>
+          </a:prstGeom>
+          <a:solidFill>
+            <a:srgbClr val="B4B4C8"/>
+          </a:solidFill>
+          <a:ln>
+            <a:noFill/>
+          </a:ln>
+        </p:spPr>
+        <p:style>
+          <a:lnRef idx="1">
+            <a:schemeClr val="accent1"/>
+          </a:lnRef>
+          <a:fillRef idx="3">
+            <a:schemeClr val="accent1"/>
+          </a:fillRef>
+          <a:effectRef idx="2">
+            <a:schemeClr val="accent1"/>
+          </a:effectRef>
+          <a:fontRef idx="minor">
+            <a:schemeClr val="lt1"/>
+          </a:fontRef>
+        </p:style>
+        <p:txBody>
+          <a:bodyPr rtlCol="0" anchor="ctr"/>
+          <a:lstStyle/>
+          <a:p>
+            <a:pPr algn="ctr"/>
+          </a:p>
+        </p:txBody>
+      </p:sp>
+      <p:sp>
+        <p:nvSpPr>
+          <p:cNvPr id="6" name="Rounded Rectangle 5"/>
+          <p:cNvSpPr/>
+          <p:nvPr/>
+        </p:nvSpPr>
+        <p:spPr>
+          <a:xfrm>
+            <a:off x="457200" y="2052796"/>
+            <a:ext cx="4114800" cy="529537"/>
+          </a:xfrm>
+          <a:prstGeom prst="roundRect">
+            <a:avLst>
+              <a:gd name="adj" fmla="val 1500000000"/>
+            </a:avLst>
+          </a:prstGeom>
+          <a:solidFill>
+            <a:srgbClr val="FFE8C7"/>
+          </a:solidFill>
+          <a:ln w="12700">
+            <a:solidFill>
+              <a:srgbClr val="D8983C"/>
+            </a:solidFill>
+          </a:ln>
+        </p:spPr>
+        <p:style>
+          <a:lnRef idx="1">
+            <a:schemeClr val="accent1"/>
+          </a:lnRef>
+          <a:fillRef idx="3">
+            <a:schemeClr val="accent1"/>
+          </a:fillRef>
+          <a:effectRef idx="2">
+            <a:schemeClr val="accent1"/>
+          </a:effectRef>
+          <a:fontRef idx="minor">
+            <a:schemeClr val="lt1"/>
+          </a:fontRef>
+        </p:style>
+        <p:txBody>
+          <a:bodyPr rtlCol="0" anchor="ctr" wrap="square" tIns="30000"/>
+          <a:lstStyle/>
+          <a:p>
+            <a:pPr algn="ctr">
+              <a:defRPr sz="1100" b="1">
+                <a:solidFill>
+                  <a:srgbClr val="996B2A"/>
+                </a:solidFill>
+              </a:defRPr>
+            </a:pPr>
+            <a:r>
+              <a:t>2023 Q1 </a:t>
+            </a:r>
+          </a:p>
+          <a:p>
+            <a:pPr algn="ctr">
+              <a:defRPr sz="1100" b="1">
+                <a:solidFill>
+                  <a:srgbClr val="996B2A"/>
+                </a:solidFill>
+              </a:defRPr>
+            </a:pPr>
+            <a:r>
+              <a:t> Release Personal Tier</a:t>
+            </a:r>
+          </a:p>
+        </p:txBody>
+      </p:sp>
+      <p:sp>
+        <p:nvSpPr>
+          <p:cNvPr id="7" name="Rounded Rectangle 6"/>
+          <p:cNvSpPr/>
+          <p:nvPr/>
+        </p:nvSpPr>
+        <p:spPr>
+          <a:xfrm>
+            <a:off x="4572000" y="2052796"/>
+            <a:ext cx="4114800" cy="529537"/>
+          </a:xfrm>
+          <a:prstGeom prst="roundRect">
+            <a:avLst>
+              <a:gd name="adj" fmla="val 1500000000"/>
+            </a:avLst>
+          </a:prstGeom>
+          <a:solidFill>
+            <a:srgbClr val="CCEDDF"/>
+          </a:solidFill>
+          <a:ln w="12700">
+            <a:solidFill>
+              <a:srgbClr val="4AA67F"/>
+            </a:solidFill>
+          </a:ln>
+        </p:spPr>
+        <p:style>
+          <a:lnRef idx="1">
+            <a:schemeClr val="accent1"/>
+          </a:lnRef>
+          <a:fillRef idx="3">
+            <a:schemeClr val="accent1"/>
+          </a:fillRef>
+          <a:effectRef idx="2">
+            <a:schemeClr val="accent1"/>
+          </a:effectRef>
+          <a:fontRef idx="minor">
+            <a:schemeClr val="lt1"/>
+          </a:fontRef>
+        </p:style>
+        <p:txBody>
+          <a:bodyPr rtlCol="0" anchor="ctr" wrap="square" tIns="30000"/>
+          <a:lstStyle/>
+          <a:p>
+            <a:pPr algn="ctr">
+              <a:defRPr sz="1100" b="1">
+                <a:solidFill>
+                  <a:srgbClr val="34755A"/>
+                </a:solidFill>
+              </a:defRPr>
+            </a:pPr>
+            <a:r>
+              <a:t>2023 Q2 </a:t>
+            </a:r>
+          </a:p>
+          <a:p>
+            <a:pPr algn="ctr">
+              <a:defRPr sz="1100" b="1">
+                <a:solidFill>
+                  <a:srgbClr val="34755A"/>
+                </a:solidFill>
+              </a:defRPr>
+            </a:pPr>
+            <a:r>
+              <a:t> Release XYZ Tier</a:t>
+            </a:r>
+          </a:p>
+        </p:txBody>
+      </p:sp>
+      <p:sp>
+        <p:nvSpPr>
+          <p:cNvPr id="8" name="Oval 7"/>
+          <p:cNvSpPr/>
+          <p:nvPr/>
+        </p:nvSpPr>
+        <p:spPr>
+          <a:xfrm>
+            <a:off x="1286306" y="4378688"/>
+            <a:ext cx="399188" cy="399188"/>
+          </a:xfrm>
+          <a:prstGeom prst="ellipse">
+            <a:avLst/>
+          </a:prstGeom>
+          <a:solidFill>
+            <a:srgbClr val="FFB347"/>
+          </a:solidFill>
+          <a:ln w="19050">
+            <a:solidFill>
+              <a:srgbClr val="CC8F38"/>
+            </a:solidFill>
+          </a:ln>
+        </p:spPr>
+        <p:style>
+          <a:lnRef idx="1">
+            <a:schemeClr val="accent1"/>
+          </a:lnRef>
+          <a:fillRef idx="3">
+            <a:schemeClr val="accent1"/>
+          </a:fillRef>
+          <a:effectRef idx="2">
+            <a:schemeClr val="accent1"/>
+          </a:effectRef>
+          <a:fontRef idx="minor">
+            <a:schemeClr val="lt1"/>
+          </a:fontRef>
+        </p:style>
+        <p:txBody>
+          <a:bodyPr rtlCol="0" anchor="ctr"/>
+          <a:lstStyle/>
+          <a:p>
+            <a:pPr algn="ctr"/>
+          </a:p>
+        </p:txBody>
+      </p:sp>
+      <p:sp>
+        <p:nvSpPr>
+          <p:cNvPr id="9" name="Rounded Rectangle 8"/>
+          <p:cNvSpPr/>
+          <p:nvPr/>
+        </p:nvSpPr>
+        <p:spPr>
+          <a:xfrm>
+            <a:off x="517200" y="3702876"/>
+            <a:ext cx="1937400" cy="510271"/>
+          </a:xfrm>
+          <a:prstGeom prst="roundRect">
+            <a:avLst>
+              <a:gd name="adj" fmla="val 2000000000"/>
+            </a:avLst>
+          </a:prstGeom>
+          <a:solidFill>
+            <a:srgbClr val="FFDCAC"/>
+          </a:solidFill>
+          <a:ln w="12700">
+            <a:solidFill>
+              <a:srgbClr val="CC8F38"/>
+            </a:solidFill>
+          </a:ln>
+        </p:spPr>
+        <p:style>
+          <a:lnRef idx="1">
+            <a:schemeClr val="accent1"/>
+          </a:lnRef>
+          <a:fillRef idx="3">
+            <a:schemeClr val="accent1"/>
+          </a:fillRef>
+          <a:effectRef idx="2">
+            <a:schemeClr val="accent1"/>
+          </a:effectRef>
+          <a:fontRef idx="minor">
+            <a:schemeClr val="lt1"/>
+          </a:fontRef>
+        </p:style>
+        <p:txBody>
+          <a:bodyPr rtlCol="0" anchor="ctr" wrap="square" tIns="30000" bIns="30000" lIns="40000" rIns="40000"/>
+          <a:lstStyle/>
+          <a:p>
+            <a:pPr algn="ctr">
+              <a:defRPr sz="900" b="0">
+                <a:solidFill>
+                  <a:srgbClr val="1E1E3C"/>
+                </a:solidFill>
+              </a:defRPr>
+            </a:pPr>
+            <a:r>
+              <a:t>sub-point 1a</a:t>
+            </a:r>
+          </a:p>
+        </p:txBody>
+      </p:sp>
+      <p:sp>
+        <p:nvSpPr>
+          <p:cNvPr id="10" name="Rounded Rectangle 9"/>
+          <p:cNvSpPr/>
+          <p:nvPr/>
+        </p:nvSpPr>
+        <p:spPr>
+          <a:xfrm>
+            <a:off x="517200" y="3142605"/>
+            <a:ext cx="1937400" cy="510271"/>
+          </a:xfrm>
+          <a:prstGeom prst="roundRect">
+            <a:avLst>
+              <a:gd name="adj" fmla="val 2000000000"/>
+            </a:avLst>
+          </a:prstGeom>
+          <a:solidFill>
+            <a:srgbClr val="FFDCAC"/>
+          </a:solidFill>
+          <a:ln w="12700">
+            <a:solidFill>
+              <a:srgbClr val="CC8F38"/>
+            </a:solidFill>
+          </a:ln>
+        </p:spPr>
+        <p:style>
+          <a:lnRef idx="1">
+            <a:schemeClr val="accent1"/>
+          </a:lnRef>
+          <a:fillRef idx="3">
+            <a:schemeClr val="accent1"/>
+          </a:fillRef>
+          <a:effectRef idx="2">
+            <a:schemeClr val="accent1"/>
+          </a:effectRef>
+          <a:fontRef idx="minor">
+            <a:schemeClr val="lt1"/>
+          </a:fontRef>
+        </p:style>
+        <p:txBody>
+          <a:bodyPr rtlCol="0" anchor="ctr" wrap="square" tIns="30000" bIns="30000" lIns="40000" rIns="40000"/>
+          <a:lstStyle/>
+          <a:p>
+            <a:pPr algn="ctr">
+              <a:defRPr sz="900" b="0">
+                <a:solidFill>
+                  <a:srgbClr val="1E1E3C"/>
+                </a:solidFill>
+              </a:defRPr>
+            </a:pPr>
+            <a:r>
+              <a:t>sub-point 1b</a:t>
+            </a:r>
+          </a:p>
+        </p:txBody>
+      </p:sp>
+      <p:sp>
+        <p:nvSpPr>
+          <p:cNvPr id="11" name="Rounded Rectangle 10"/>
+          <p:cNvSpPr/>
+          <p:nvPr/>
+        </p:nvSpPr>
+        <p:spPr>
+          <a:xfrm>
+            <a:off x="517200" y="2582334"/>
+            <a:ext cx="1937400" cy="510271"/>
+          </a:xfrm>
+          <a:prstGeom prst="roundRect">
+            <a:avLst>
+              <a:gd name="adj" fmla="val 2000000000"/>
+            </a:avLst>
+          </a:prstGeom>
+          <a:solidFill>
+            <a:srgbClr val="FFDCAC"/>
+          </a:solidFill>
+          <a:ln w="12700">
+            <a:solidFill>
+              <a:srgbClr val="CC8F38"/>
+            </a:solidFill>
+          </a:ln>
+        </p:spPr>
+        <p:style>
+          <a:lnRef idx="1">
+            <a:schemeClr val="accent1"/>
+          </a:lnRef>
+          <a:fillRef idx="3">
+            <a:schemeClr val="accent1"/>
+          </a:fillRef>
+          <a:effectRef idx="2">
+            <a:schemeClr val="accent1"/>
+          </a:effectRef>
+          <a:fontRef idx="minor">
+            <a:schemeClr val="lt1"/>
+          </a:fontRef>
+        </p:style>
+        <p:txBody>
+          <a:bodyPr rtlCol="0" anchor="ctr" wrap="square" tIns="30000" bIns="30000" lIns="40000" rIns="40000"/>
+          <a:lstStyle/>
+          <a:p>
+            <a:pPr algn="ctr">
+              <a:defRPr sz="900" b="0">
+                <a:solidFill>
+                  <a:srgbClr val="1E1E3C"/>
+                </a:solidFill>
+              </a:defRPr>
+            </a:pPr>
+            <a:r>
+              <a:t>sub-point 1c</a:t>
+            </a:r>
+          </a:p>
+        </p:txBody>
+      </p:sp>
+      <p:sp>
+        <p:nvSpPr>
+          <p:cNvPr id="12" name="TextBox 11"/>
+          <p:cNvSpPr txBox="1"/>
+          <p:nvPr/>
+        </p:nvSpPr>
+        <p:spPr>
+          <a:xfrm>
+            <a:off x="487200" y="4923418"/>
+            <a:ext cx="1997400" cy="1202745"/>
+          </a:xfrm>
+          <a:prstGeom prst="rect">
+            <a:avLst/>
+          </a:prstGeom>
+          <a:noFill/>
+          <a:ln>
+            <a:noFill/>
+          </a:ln>
+        </p:spPr>
+        <p:txBody>
+          <a:bodyPr wrap="square"/>
+          <a:lstStyle/>
+          <a:p>
+            <a:pPr algn="ctr">
+              <a:defRPr sz="1000" b="1">
+                <a:solidFill>
+                  <a:srgbClr val="1E1E3C"/>
+                </a:solidFill>
+              </a:defRPr>
+            </a:pPr>
+            <a:r>
+              <a:t>Bullet 1</a:t>
+            </a:r>
+          </a:p>
+        </p:txBody>
+      </p:sp>
+      <p:sp>
+        <p:nvSpPr>
+          <p:cNvPr id="13" name="Oval 12"/>
+          <p:cNvSpPr/>
+          <p:nvPr/>
+        </p:nvSpPr>
+        <p:spPr>
+          <a:xfrm>
+            <a:off x="3343706" y="4378688"/>
+            <a:ext cx="399188" cy="399188"/>
+          </a:xfrm>
+          <a:prstGeom prst="ellipse">
+            <a:avLst/>
+          </a:prstGeom>
+          <a:solidFill>
+            <a:srgbClr val="FFB347"/>
+          </a:solidFill>
+          <a:ln w="19050">
+            <a:solidFill>
+              <a:srgbClr val="CC8F38"/>
+            </a:solidFill>
+          </a:ln>
+        </p:spPr>
+        <p:style>
+          <a:lnRef idx="1">
+            <a:schemeClr val="accent1"/>
+          </a:lnRef>
+          <a:fillRef idx="3">
+            <a:schemeClr val="accent1"/>
+          </a:fillRef>
+          <a:effectRef idx="2">
+            <a:schemeClr val="accent1"/>
+          </a:effectRef>
+          <a:fontRef idx="minor">
+            <a:schemeClr val="lt1"/>
+          </a:fontRef>
+        </p:style>
+        <p:txBody>
+          <a:bodyPr rtlCol="0" anchor="ctr"/>
+          <a:lstStyle/>
+          <a:p>
+            <a:pPr algn="ctr"/>
+          </a:p>
+        </p:txBody>
+      </p:sp>
+      <p:sp>
+        <p:nvSpPr>
+          <p:cNvPr id="14" name="Rounded Rectangle 13"/>
+          <p:cNvSpPr/>
+          <p:nvPr/>
+        </p:nvSpPr>
+        <p:spPr>
+          <a:xfrm>
+            <a:off x="2574600" y="3702876"/>
+            <a:ext cx="1937400" cy="510271"/>
+          </a:xfrm>
+          <a:prstGeom prst="roundRect">
+            <a:avLst>
+              <a:gd name="adj" fmla="val 2000000000"/>
+            </a:avLst>
+          </a:prstGeom>
+          <a:solidFill>
+            <a:srgbClr val="FFDCAC"/>
+          </a:solidFill>
+          <a:ln w="12700">
+            <a:solidFill>
+              <a:srgbClr val="CC8F38"/>
+            </a:solidFill>
+          </a:ln>
+        </p:spPr>
+        <p:style>
+          <a:lnRef idx="1">
+            <a:schemeClr val="accent1"/>
+          </a:lnRef>
+          <a:fillRef idx="3">
+            <a:schemeClr val="accent1"/>
+          </a:fillRef>
+          <a:effectRef idx="2">
+            <a:schemeClr val="accent1"/>
+          </a:effectRef>
+          <a:fontRef idx="minor">
+            <a:schemeClr val="lt1"/>
+          </a:fontRef>
+        </p:style>
+        <p:txBody>
+          <a:bodyPr rtlCol="0" anchor="ctr" wrap="square" tIns="30000" bIns="30000" lIns="40000" rIns="40000"/>
+          <a:lstStyle/>
+          <a:p>
+            <a:pPr algn="ctr">
+              <a:defRPr sz="900" b="0">
+                <a:solidFill>
+                  <a:srgbClr val="1E1E3C"/>
+                </a:solidFill>
+              </a:defRPr>
+            </a:pPr>
+            <a:r>
+              <a:t>sub-point 2a</a:t>
+            </a:r>
+          </a:p>
+        </p:txBody>
+      </p:sp>
+      <p:sp>
+        <p:nvSpPr>
+          <p:cNvPr id="15" name="Rounded Rectangle 14"/>
+          <p:cNvSpPr/>
+          <p:nvPr/>
+        </p:nvSpPr>
+        <p:spPr>
+          <a:xfrm>
+            <a:off x="2574600" y="3142605"/>
+            <a:ext cx="1937400" cy="510271"/>
+          </a:xfrm>
+          <a:prstGeom prst="roundRect">
+            <a:avLst>
+              <a:gd name="adj" fmla="val 2000000000"/>
+            </a:avLst>
+          </a:prstGeom>
+          <a:solidFill>
+            <a:srgbClr val="FFDCAC"/>
+          </a:solidFill>
+          <a:ln w="12700">
+            <a:solidFill>
+              <a:srgbClr val="CC8F38"/>
+            </a:solidFill>
+          </a:ln>
+        </p:spPr>
+        <p:style>
+          <a:lnRef idx="1">
+            <a:schemeClr val="accent1"/>
+          </a:lnRef>
+          <a:fillRef idx="3">
+            <a:schemeClr val="accent1"/>
+          </a:fillRef>
+          <a:effectRef idx="2">
+            <a:schemeClr val="accent1"/>
+          </a:effectRef>
+          <a:fontRef idx="minor">
+            <a:schemeClr val="lt1"/>
+          </a:fontRef>
+        </p:style>
+        <p:txBody>
+          <a:bodyPr rtlCol="0" anchor="ctr" wrap="square" tIns="30000" bIns="30000" lIns="40000" rIns="40000"/>
+          <a:lstStyle/>
+          <a:p>
+            <a:pPr algn="ctr">
+              <a:defRPr sz="900" b="0">
+                <a:solidFill>
+                  <a:srgbClr val="1E1E3C"/>
+                </a:solidFill>
+              </a:defRPr>
+            </a:pPr>
+            <a:r>
+              <a:t>sub-point 2b</a:t>
+            </a:r>
+          </a:p>
+        </p:txBody>
+      </p:sp>
+      <p:sp>
+        <p:nvSpPr>
+          <p:cNvPr id="16" name="TextBox 15"/>
+          <p:cNvSpPr txBox="1"/>
+          <p:nvPr/>
+        </p:nvSpPr>
+        <p:spPr>
+          <a:xfrm>
+            <a:off x="2544600" y="4923418"/>
+            <a:ext cx="1997400" cy="1202745"/>
+          </a:xfrm>
+          <a:prstGeom prst="rect">
+            <a:avLst/>
+          </a:prstGeom>
+          <a:noFill/>
+          <a:ln>
+            <a:noFill/>
+          </a:ln>
+        </p:spPr>
+        <p:txBody>
+          <a:bodyPr wrap="square"/>
+          <a:lstStyle/>
+          <a:p>
+            <a:pPr algn="ctr">
+              <a:defRPr sz="1000" b="1">
+                <a:solidFill>
+                  <a:srgbClr val="1E1E3C"/>
+                </a:solidFill>
+              </a:defRPr>
+            </a:pPr>
+            <a:r>
+              <a:t>Bullet 2</a:t>
+            </a:r>
+          </a:p>
+        </p:txBody>
+      </p:sp>
+      <p:sp>
+        <p:nvSpPr>
+          <p:cNvPr id="17" name="Oval 16"/>
+          <p:cNvSpPr/>
+          <p:nvPr/>
+        </p:nvSpPr>
+        <p:spPr>
+          <a:xfrm>
+            <a:off x="5401106" y="4378688"/>
+            <a:ext cx="399188" cy="399188"/>
+          </a:xfrm>
+          <a:prstGeom prst="ellipse">
+            <a:avLst/>
+          </a:prstGeom>
+          <a:solidFill>
+            <a:srgbClr val="58C496"/>
+          </a:solidFill>
+          <a:ln w="19050">
+            <a:solidFill>
+              <a:srgbClr val="469C78"/>
+            </a:solidFill>
+          </a:ln>
+        </p:spPr>
+        <p:style>
+          <a:lnRef idx="1">
+            <a:schemeClr val="accent1"/>
+          </a:lnRef>
+          <a:fillRef idx="3">
+            <a:schemeClr val="accent1"/>
+          </a:fillRef>
+          <a:effectRef idx="2">
+            <a:schemeClr val="accent1"/>
+          </a:effectRef>
+          <a:fontRef idx="minor">
+            <a:schemeClr val="lt1"/>
+          </a:fontRef>
+        </p:style>
+        <p:txBody>
+          <a:bodyPr rtlCol="0" anchor="ctr"/>
+          <a:lstStyle/>
+          <a:p>
+            <a:pPr algn="ctr"/>
+          </a:p>
+        </p:txBody>
+      </p:sp>
+      <p:sp>
+        <p:nvSpPr>
+          <p:cNvPr id="18" name="Rounded Rectangle 17"/>
+          <p:cNvSpPr/>
+          <p:nvPr/>
+        </p:nvSpPr>
+        <p:spPr>
+          <a:xfrm>
+            <a:off x="4632000" y="3702876"/>
+            <a:ext cx="1937400" cy="510271"/>
+          </a:xfrm>
+          <a:prstGeom prst="roundRect">
+            <a:avLst>
+              <a:gd name="adj" fmla="val 2000000000"/>
+            </a:avLst>
+          </a:prstGeom>
+          <a:solidFill>
+            <a:srgbClr val="B3E4CF"/>
+          </a:solidFill>
+          <a:ln w="12700">
+            <a:solidFill>
+              <a:srgbClr val="469C78"/>
+            </a:solidFill>
+          </a:ln>
+        </p:spPr>
+        <p:style>
+          <a:lnRef idx="1">
+            <a:schemeClr val="accent1"/>
+          </a:lnRef>
+          <a:fillRef idx="3">
+            <a:schemeClr val="accent1"/>
+          </a:fillRef>
+          <a:effectRef idx="2">
+            <a:schemeClr val="accent1"/>
+          </a:effectRef>
+          <a:fontRef idx="minor">
+            <a:schemeClr val="lt1"/>
+          </a:fontRef>
+        </p:style>
+        <p:txBody>
+          <a:bodyPr rtlCol="0" anchor="ctr" wrap="square" tIns="30000" bIns="30000" lIns="40000" rIns="40000"/>
+          <a:lstStyle/>
+          <a:p>
+            <a:pPr algn="ctr">
+              <a:defRPr sz="900" b="0">
+                <a:solidFill>
+                  <a:srgbClr val="1E1E3C"/>
+                </a:solidFill>
+              </a:defRPr>
+            </a:pPr>
+            <a:r>
+              <a:t>sub-point 3a</a:t>
+            </a:r>
+          </a:p>
+        </p:txBody>
+      </p:sp>
+      <p:sp>
+        <p:nvSpPr>
+          <p:cNvPr id="19" name="Rounded Rectangle 18"/>
+          <p:cNvSpPr/>
+          <p:nvPr/>
+        </p:nvSpPr>
+        <p:spPr>
+          <a:xfrm>
+            <a:off x="4632000" y="3142605"/>
+            <a:ext cx="1937400" cy="510271"/>
+          </a:xfrm>
+          <a:prstGeom prst="roundRect">
+            <a:avLst>
+              <a:gd name="adj" fmla="val 2000000000"/>
+            </a:avLst>
+          </a:prstGeom>
+          <a:solidFill>
+            <a:srgbClr val="B3E4CF"/>
+          </a:solidFill>
+          <a:ln w="12700">
+            <a:solidFill>
+              <a:srgbClr val="469C78"/>
+            </a:solidFill>
+          </a:ln>
+        </p:spPr>
+        <p:style>
+          <a:lnRef idx="1">
+            <a:schemeClr val="accent1"/>
+          </a:lnRef>
+          <a:fillRef idx="3">
+            <a:schemeClr val="accent1"/>
+          </a:fillRef>
+          <a:effectRef idx="2">
+            <a:schemeClr val="accent1"/>
+          </a:effectRef>
+          <a:fontRef idx="minor">
+            <a:schemeClr val="lt1"/>
+          </a:fontRef>
+        </p:style>
+        <p:txBody>
+          <a:bodyPr rtlCol="0" anchor="ctr" wrap="square" tIns="30000" bIns="30000" lIns="40000" rIns="40000"/>
+          <a:lstStyle/>
+          <a:p>
+            <a:pPr algn="ctr">
+              <a:defRPr sz="900" b="0">
+                <a:solidFill>
+                  <a:srgbClr val="1E1E3C"/>
+                </a:solidFill>
+              </a:defRPr>
+            </a:pPr>
+            <a:r>
+              <a:t>sub-point 3b</a:t>
+            </a:r>
+          </a:p>
+        </p:txBody>
+      </p:sp>
+      <p:sp>
+        <p:nvSpPr>
+          <p:cNvPr id="20" name="Rounded Rectangle 19"/>
+          <p:cNvSpPr/>
+          <p:nvPr/>
+        </p:nvSpPr>
+        <p:spPr>
+          <a:xfrm>
+            <a:off x="4632000" y="2582334"/>
+            <a:ext cx="1937400" cy="510271"/>
+          </a:xfrm>
+          <a:prstGeom prst="roundRect">
+            <a:avLst>
+              <a:gd name="adj" fmla="val 2000000000"/>
+            </a:avLst>
+          </a:prstGeom>
+          <a:solidFill>
+            <a:srgbClr val="B3E4CF"/>
+          </a:solidFill>
+          <a:ln w="12700">
+            <a:solidFill>
+              <a:srgbClr val="469C78"/>
+            </a:solidFill>
+          </a:ln>
+        </p:spPr>
+        <p:style>
+          <a:lnRef idx="1">
+            <a:schemeClr val="accent1"/>
+          </a:lnRef>
+          <a:fillRef idx="3">
+            <a:schemeClr val="accent1"/>
+          </a:fillRef>
+          <a:effectRef idx="2">
+            <a:schemeClr val="accent1"/>
+          </a:effectRef>
+          <a:fontRef idx="minor">
+            <a:schemeClr val="lt1"/>
+          </a:fontRef>
+        </p:style>
+        <p:txBody>
+          <a:bodyPr rtlCol="0" anchor="ctr" wrap="square" tIns="30000" bIns="30000" lIns="40000" rIns="40000"/>
+          <a:lstStyle/>
+          <a:p>
+            <a:pPr algn="ctr">
+              <a:defRPr sz="900" b="0">
+                <a:solidFill>
+                  <a:srgbClr val="1E1E3C"/>
+                </a:solidFill>
+              </a:defRPr>
+            </a:pPr>
+            <a:r>
+              <a:t>sub-point 3c</a:t>
+            </a:r>
+          </a:p>
+        </p:txBody>
+      </p:sp>
+      <p:sp>
+        <p:nvSpPr>
+          <p:cNvPr id="21" name="TextBox 20"/>
+          <p:cNvSpPr txBox="1"/>
+          <p:nvPr/>
+        </p:nvSpPr>
+        <p:spPr>
+          <a:xfrm>
+            <a:off x="4602000" y="4923418"/>
+            <a:ext cx="1997400" cy="1202745"/>
+          </a:xfrm>
+          <a:prstGeom prst="rect">
+            <a:avLst/>
+          </a:prstGeom>
+          <a:noFill/>
+          <a:ln>
+            <a:noFill/>
+          </a:ln>
+        </p:spPr>
+        <p:txBody>
+          <a:bodyPr wrap="square"/>
+          <a:lstStyle/>
+          <a:p>
+            <a:pPr algn="ctr">
+              <a:defRPr sz="1000" b="1">
+                <a:solidFill>
+                  <a:srgbClr val="1E1E3C"/>
+                </a:solidFill>
+              </a:defRPr>
+            </a:pPr>
+            <a:r>
+              <a:t>Bullet 3</a:t>
+            </a:r>
+          </a:p>
+        </p:txBody>
+      </p:sp>
+      <p:sp>
+        <p:nvSpPr>
+          <p:cNvPr id="22" name="Oval 21"/>
+          <p:cNvSpPr/>
+          <p:nvPr/>
+        </p:nvSpPr>
+        <p:spPr>
+          <a:xfrm>
+            <a:off x="7458506" y="4378688"/>
+            <a:ext cx="399188" cy="399188"/>
+          </a:xfrm>
+          <a:prstGeom prst="ellipse">
+            <a:avLst/>
+          </a:prstGeom>
+          <a:solidFill>
+            <a:srgbClr val="58C496"/>
+          </a:solidFill>
+          <a:ln w="19050">
+            <a:solidFill>
+              <a:srgbClr val="469C78"/>
+            </a:solidFill>
+          </a:ln>
+        </p:spPr>
+        <p:style>
+          <a:lnRef idx="1">
+            <a:schemeClr val="accent1"/>
+          </a:lnRef>
+          <a:fillRef idx="3">
+            <a:schemeClr val="accent1"/>
+          </a:fillRef>
+          <a:effectRef idx="2">
+            <a:schemeClr val="accent1"/>
+          </a:effectRef>
+          <a:fontRef idx="minor">
+            <a:schemeClr val="lt1"/>
+          </a:fontRef>
+        </p:style>
+        <p:txBody>
+          <a:bodyPr rtlCol="0" anchor="ctr"/>
+          <a:lstStyle/>
+          <a:p>
+            <a:pPr algn="ctr"/>
+          </a:p>
+        </p:txBody>
+      </p:sp>
+      <p:sp>
+        <p:nvSpPr>
+          <p:cNvPr id="23" name="Rounded Rectangle 22"/>
+          <p:cNvSpPr/>
+          <p:nvPr/>
+        </p:nvSpPr>
+        <p:spPr>
+          <a:xfrm>
+            <a:off x="6689400" y="3702876"/>
+            <a:ext cx="1937400" cy="510271"/>
+          </a:xfrm>
+          <a:prstGeom prst="roundRect">
+            <a:avLst>
+              <a:gd name="adj" fmla="val 2000000000"/>
+            </a:avLst>
+          </a:prstGeom>
+          <a:solidFill>
+            <a:srgbClr val="B3E4CF"/>
+          </a:solidFill>
+          <a:ln w="12700">
+            <a:solidFill>
+              <a:srgbClr val="469C78"/>
+            </a:solidFill>
+          </a:ln>
+        </p:spPr>
+        <p:style>
+          <a:lnRef idx="1">
+            <a:schemeClr val="accent1"/>
+          </a:lnRef>
+          <a:fillRef idx="3">
+            <a:schemeClr val="accent1"/>
+          </a:fillRef>
+          <a:effectRef idx="2">
+            <a:schemeClr val="accent1"/>
+          </a:effectRef>
+          <a:fontRef idx="minor">
+            <a:schemeClr val="lt1"/>
+          </a:fontRef>
+        </p:style>
+        <p:txBody>
+          <a:bodyPr rtlCol="0" anchor="ctr" wrap="square" tIns="30000" bIns="30000" lIns="40000" rIns="40000"/>
+          <a:lstStyle/>
+          <a:p>
+            <a:pPr algn="ctr">
+              <a:defRPr sz="900" b="0">
+                <a:solidFill>
+                  <a:srgbClr val="1E1E3C"/>
+                </a:solidFill>
+              </a:defRPr>
+            </a:pPr>
+            <a:r>
+              <a:t>sub-point 4a</a:t>
+            </a:r>
+          </a:p>
+        </p:txBody>
+      </p:sp>
+      <p:sp>
+        <p:nvSpPr>
+          <p:cNvPr id="24" name="Rounded Rectangle 23"/>
+          <p:cNvSpPr/>
+          <p:nvPr/>
+        </p:nvSpPr>
+        <p:spPr>
+          <a:xfrm>
+            <a:off x="6689400" y="3142605"/>
+            <a:ext cx="1937400" cy="510271"/>
+          </a:xfrm>
+          <a:prstGeom prst="roundRect">
+            <a:avLst>
+              <a:gd name="adj" fmla="val 2000000000"/>
+            </a:avLst>
+          </a:prstGeom>
+          <a:solidFill>
+            <a:srgbClr val="B3E4CF"/>
+          </a:solidFill>
+          <a:ln w="12700">
+            <a:solidFill>
+              <a:srgbClr val="469C78"/>
+            </a:solidFill>
+          </a:ln>
+        </p:spPr>
+        <p:style>
+          <a:lnRef idx="1">
+            <a:schemeClr val="accent1"/>
+          </a:lnRef>
+          <a:fillRef idx="3">
+            <a:schemeClr val="accent1"/>
+          </a:fillRef>
+          <a:effectRef idx="2">
+            <a:schemeClr val="accent1"/>
+          </a:effectRef>
+          <a:fontRef idx="minor">
+            <a:schemeClr val="lt1"/>
+          </a:fontRef>
+        </p:style>
+        <p:txBody>
+          <a:bodyPr rtlCol="0" anchor="ctr" wrap="square" tIns="30000" bIns="30000" lIns="40000" rIns="40000"/>
+          <a:lstStyle/>
+          <a:p>
+            <a:pPr algn="ctr">
+              <a:defRPr sz="900" b="0">
+                <a:solidFill>
+                  <a:srgbClr val="1E1E3C"/>
+                </a:solidFill>
+              </a:defRPr>
+            </a:pPr>
+            <a:r>
+              <a:t>sub-point 4b</a:t>
+            </a:r>
+          </a:p>
+        </p:txBody>
+      </p:sp>
+      <p:sp>
+        <p:nvSpPr>
+          <p:cNvPr id="25" name="TextBox 24"/>
+          <p:cNvSpPr txBox="1"/>
+          <p:nvPr/>
+        </p:nvSpPr>
+        <p:spPr>
+          <a:xfrm>
+            <a:off x="6659400" y="4923418"/>
+            <a:ext cx="1997400" cy="1202745"/>
+          </a:xfrm>
+          <a:prstGeom prst="rect">
+            <a:avLst/>
+          </a:prstGeom>
+          <a:noFill/>
+          <a:ln>
+            <a:noFill/>
+          </a:ln>
+        </p:spPr>
+        <p:txBody>
+          <a:bodyPr wrap="square"/>
+          <a:lstStyle/>
+          <a:p>
+            <a:pPr algn="ctr">
+              <a:defRPr sz="1000" b="1">
+                <a:solidFill>
+                  <a:srgbClr val="1E1E3C"/>
+                </a:solidFill>
+              </a:defRPr>
+            </a:pPr>
+            <a:r>
+              <a:t>Bullet 4</a:t>
             </a:r>
           </a:p>
         </p:txBody>
@@ -29325,7 +33068,7 @@
           <a:lstStyle/>
           <a:p>
             <a:r>
-              <a:t>17. ブロック図（Block Diagram）</a:t>
+              <a:t>13e. タイムライン — 日本語・ソフトウェア開発史</a:t>
             </a:r>
           </a:p>
         </p:txBody>
@@ -29356,36 +33099,2064 @@
         <p:spPr>
           <a:xfrm>
             <a:off x="457200" y="1600200"/>
-            <a:ext cx="8229600" cy="4525963"/>
+            <a:ext cx="8229600" cy="452596"/>
           </a:xfrm>
           <a:prstGeom prst="rect">
             <a:avLst/>
           </a:prstGeom>
           <a:noFill/>
-        </p:spPr>
-        <p:txBody>
-          <a:bodyPr wrap="square">
-            <a:spAutoFit/>
-          </a:bodyPr>
-          <a:lstStyle/>
-          <a:p>
-            <a:r>
-              <a:rPr sz="1000">
-                <a:latin typeface="Courier New"/>
-              </a:rPr>
-              <a:t>block-beta
-    columns 3
-    A["フロントエンド"]:1
-    B["APIゲートウェイ"]:1
-    C["バックエンド"]:1
-    D["認証サービス"]:1
-    E["データベース"]:1
-    F["キャッシュ"]:1
-    A --&gt; B
-    B --&gt; C
-    B --&gt; D
-    C --&gt; E
-    C --&gt; F</a:t>
+          <a:ln>
+            <a:noFill/>
+          </a:ln>
+        </p:spPr>
+        <p:txBody>
+          <a:bodyPr wrap="square" tIns="20000"/>
+          <a:lstStyle/>
+          <a:p>
+            <a:pPr algn="ctr">
+              <a:defRPr sz="2000" b="1">
+                <a:solidFill>
+                  <a:srgbClr val="1E1E3C"/>
+                </a:solidFill>
+              </a:defRPr>
+            </a:pPr>
+            <a:r>
+              <a:t>ソフトウェア開発史</a:t>
+            </a:r>
+          </a:p>
+        </p:txBody>
+      </p:sp>
+      <p:sp>
+        <p:nvSpPr>
+          <p:cNvPr id="5" name="Rectangle 4"/>
+          <p:cNvSpPr/>
+          <p:nvPr/>
+        </p:nvSpPr>
+        <p:spPr>
+          <a:xfrm>
+            <a:off x="457200" y="4563282"/>
+            <a:ext cx="8229600" cy="30000"/>
+          </a:xfrm>
+          <a:prstGeom prst="rect">
+            <a:avLst/>
+          </a:prstGeom>
+          <a:solidFill>
+            <a:srgbClr val="B4B4C8"/>
+          </a:solidFill>
+          <a:ln>
+            <a:noFill/>
+          </a:ln>
+        </p:spPr>
+        <p:style>
+          <a:lnRef idx="1">
+            <a:schemeClr val="accent1"/>
+          </a:lnRef>
+          <a:fillRef idx="3">
+            <a:schemeClr val="accent1"/>
+          </a:fillRef>
+          <a:effectRef idx="2">
+            <a:schemeClr val="accent1"/>
+          </a:effectRef>
+          <a:fontRef idx="minor">
+            <a:schemeClr val="lt1"/>
+          </a:fontRef>
+        </p:style>
+        <p:txBody>
+          <a:bodyPr rtlCol="0" anchor="ctr"/>
+          <a:lstStyle/>
+          <a:p>
+            <a:pPr algn="ctr"/>
+          </a:p>
+        </p:txBody>
+      </p:sp>
+      <p:sp>
+        <p:nvSpPr>
+          <p:cNvPr id="6" name="Rounded Rectangle 5"/>
+          <p:cNvSpPr/>
+          <p:nvPr/>
+        </p:nvSpPr>
+        <p:spPr>
+          <a:xfrm>
+            <a:off x="457200" y="2052796"/>
+            <a:ext cx="2057400" cy="529537"/>
+          </a:xfrm>
+          <a:prstGeom prst="roundRect">
+            <a:avLst>
+              <a:gd name="adj" fmla="val 1500000000"/>
+            </a:avLst>
+          </a:prstGeom>
+          <a:solidFill>
+            <a:srgbClr val="FFE8C7"/>
+          </a:solidFill>
+          <a:ln w="12700">
+            <a:solidFill>
+              <a:srgbClr val="D8983C"/>
+            </a:solidFill>
+          </a:ln>
+        </p:spPr>
+        <p:style>
+          <a:lnRef idx="1">
+            <a:schemeClr val="accent1"/>
+          </a:lnRef>
+          <a:fillRef idx="3">
+            <a:schemeClr val="accent1"/>
+          </a:fillRef>
+          <a:effectRef idx="2">
+            <a:schemeClr val="accent1"/>
+          </a:effectRef>
+          <a:fontRef idx="minor">
+            <a:schemeClr val="lt1"/>
+          </a:fontRef>
+        </p:style>
+        <p:txBody>
+          <a:bodyPr rtlCol="0" anchor="ctr" wrap="square" tIns="30000"/>
+          <a:lstStyle/>
+          <a:p>
+            <a:pPr algn="ctr">
+              <a:defRPr sz="1100" b="1">
+                <a:solidFill>
+                  <a:srgbClr val="996B2A"/>
+                </a:solidFill>
+              </a:defRPr>
+            </a:pPr>
+            <a:r>
+              <a:t>黎明期</a:t>
+            </a:r>
+          </a:p>
+        </p:txBody>
+      </p:sp>
+      <p:sp>
+        <p:nvSpPr>
+          <p:cNvPr id="7" name="Rounded Rectangle 6"/>
+          <p:cNvSpPr/>
+          <p:nvPr/>
+        </p:nvSpPr>
+        <p:spPr>
+          <a:xfrm>
+            <a:off x="2514600" y="2052796"/>
+            <a:ext cx="2057400" cy="529537"/>
+          </a:xfrm>
+          <a:prstGeom prst="roundRect">
+            <a:avLst>
+              <a:gd name="adj" fmla="val 1500000000"/>
+            </a:avLst>
+          </a:prstGeom>
+          <a:solidFill>
+            <a:srgbClr val="CCEDDF"/>
+          </a:solidFill>
+          <a:ln w="12700">
+            <a:solidFill>
+              <a:srgbClr val="4AA67F"/>
+            </a:solidFill>
+          </a:ln>
+        </p:spPr>
+        <p:style>
+          <a:lnRef idx="1">
+            <a:schemeClr val="accent1"/>
+          </a:lnRef>
+          <a:fillRef idx="3">
+            <a:schemeClr val="accent1"/>
+          </a:fillRef>
+          <a:effectRef idx="2">
+            <a:schemeClr val="accent1"/>
+          </a:effectRef>
+          <a:fontRef idx="minor">
+            <a:schemeClr val="lt1"/>
+          </a:fontRef>
+        </p:style>
+        <p:txBody>
+          <a:bodyPr rtlCol="0" anchor="ctr" wrap="square" tIns="30000"/>
+          <a:lstStyle/>
+          <a:p>
+            <a:pPr algn="ctr">
+              <a:defRPr sz="1100" b="1">
+                <a:solidFill>
+                  <a:srgbClr val="34755A"/>
+                </a:solidFill>
+              </a:defRPr>
+            </a:pPr>
+            <a:r>
+              <a:t>普及期</a:t>
+            </a:r>
+          </a:p>
+        </p:txBody>
+      </p:sp>
+      <p:sp>
+        <p:nvSpPr>
+          <p:cNvPr id="8" name="Rounded Rectangle 7"/>
+          <p:cNvSpPr/>
+          <p:nvPr/>
+        </p:nvSpPr>
+        <p:spPr>
+          <a:xfrm>
+            <a:off x="4572000" y="2052796"/>
+            <a:ext cx="2057400" cy="529537"/>
+          </a:xfrm>
+          <a:prstGeom prst="roundRect">
+            <a:avLst>
+              <a:gd name="adj" fmla="val 1500000000"/>
+            </a:avLst>
+          </a:prstGeom>
+          <a:solidFill>
+            <a:srgbClr val="D1E7FF"/>
+          </a:solidFill>
+          <a:ln w="12700">
+            <a:solidFill>
+              <a:srgbClr val="5697D8"/>
+            </a:solidFill>
+          </a:ln>
+        </p:spPr>
+        <p:style>
+          <a:lnRef idx="1">
+            <a:schemeClr val="accent1"/>
+          </a:lnRef>
+          <a:fillRef idx="3">
+            <a:schemeClr val="accent1"/>
+          </a:fillRef>
+          <a:effectRef idx="2">
+            <a:schemeClr val="accent1"/>
+          </a:effectRef>
+          <a:fontRef idx="minor">
+            <a:schemeClr val="lt1"/>
+          </a:fontRef>
+        </p:style>
+        <p:txBody>
+          <a:bodyPr rtlCol="0" anchor="ctr" wrap="square" tIns="30000"/>
+          <a:lstStyle/>
+          <a:p>
+            <a:pPr algn="ctr">
+              <a:defRPr sz="1100" b="1">
+                <a:solidFill>
+                  <a:srgbClr val="3D6A99"/>
+                </a:solidFill>
+              </a:defRPr>
+            </a:pPr>
+            <a:r>
+              <a:t>インターネット時代</a:t>
+            </a:r>
+          </a:p>
+        </p:txBody>
+      </p:sp>
+      <p:sp>
+        <p:nvSpPr>
+          <p:cNvPr id="9" name="Rounded Rectangle 8"/>
+          <p:cNvSpPr/>
+          <p:nvPr/>
+        </p:nvSpPr>
+        <p:spPr>
+          <a:xfrm>
+            <a:off x="6629400" y="2052796"/>
+            <a:ext cx="2057400" cy="529537"/>
+          </a:xfrm>
+          <a:prstGeom prst="roundRect">
+            <a:avLst>
+              <a:gd name="adj" fmla="val 1500000000"/>
+            </a:avLst>
+          </a:prstGeom>
+          <a:solidFill>
+            <a:srgbClr val="FFD3D2"/>
+          </a:solidFill>
+          <a:ln w="12700">
+            <a:solidFill>
+              <a:srgbClr val="D85E59"/>
+            </a:solidFill>
+          </a:ln>
+        </p:spPr>
+        <p:style>
+          <a:lnRef idx="1">
+            <a:schemeClr val="accent1"/>
+          </a:lnRef>
+          <a:fillRef idx="3">
+            <a:schemeClr val="accent1"/>
+          </a:fillRef>
+          <a:effectRef idx="2">
+            <a:schemeClr val="accent1"/>
+          </a:effectRef>
+          <a:fontRef idx="minor">
+            <a:schemeClr val="lt1"/>
+          </a:fontRef>
+        </p:style>
+        <p:txBody>
+          <a:bodyPr rtlCol="0" anchor="ctr" wrap="square" tIns="30000"/>
+          <a:lstStyle/>
+          <a:p>
+            <a:pPr algn="ctr">
+              <a:defRPr sz="1100" b="1">
+                <a:solidFill>
+                  <a:srgbClr val="99423F"/>
+                </a:solidFill>
+              </a:defRPr>
+            </a:pPr>
+            <a:r>
+              <a:t>クラウド・AI時代</a:t>
+            </a:r>
+          </a:p>
+        </p:txBody>
+      </p:sp>
+      <p:sp>
+        <p:nvSpPr>
+          <p:cNvPr id="10" name="Oval 9"/>
+          <p:cNvSpPr/>
+          <p:nvPr/>
+        </p:nvSpPr>
+        <p:spPr>
+          <a:xfrm>
+            <a:off x="771956" y="4378688"/>
+            <a:ext cx="399188" cy="399188"/>
+          </a:xfrm>
+          <a:prstGeom prst="ellipse">
+            <a:avLst/>
+          </a:prstGeom>
+          <a:solidFill>
+            <a:srgbClr val="FFB347"/>
+          </a:solidFill>
+          <a:ln w="19050">
+            <a:solidFill>
+              <a:srgbClr val="CC8F38"/>
+            </a:solidFill>
+          </a:ln>
+        </p:spPr>
+        <p:style>
+          <a:lnRef idx="1">
+            <a:schemeClr val="accent1"/>
+          </a:lnRef>
+          <a:fillRef idx="3">
+            <a:schemeClr val="accent1"/>
+          </a:fillRef>
+          <a:effectRef idx="2">
+            <a:schemeClr val="accent1"/>
+          </a:effectRef>
+          <a:fontRef idx="minor">
+            <a:schemeClr val="lt1"/>
+          </a:fontRef>
+        </p:style>
+        <p:txBody>
+          <a:bodyPr rtlCol="0" anchor="ctr"/>
+          <a:lstStyle/>
+          <a:p>
+            <a:pPr algn="ctr"/>
+          </a:p>
+        </p:txBody>
+      </p:sp>
+      <p:sp>
+        <p:nvSpPr>
+          <p:cNvPr id="11" name="Rounded Rectangle 10"/>
+          <p:cNvSpPr/>
+          <p:nvPr/>
+        </p:nvSpPr>
+        <p:spPr>
+          <a:xfrm>
+            <a:off x="517200" y="3702876"/>
+            <a:ext cx="908700" cy="510271"/>
+          </a:xfrm>
+          <a:prstGeom prst="roundRect">
+            <a:avLst>
+              <a:gd name="adj" fmla="val 2000000000"/>
+            </a:avLst>
+          </a:prstGeom>
+          <a:solidFill>
+            <a:srgbClr val="FFDCAC"/>
+          </a:solidFill>
+          <a:ln w="12700">
+            <a:solidFill>
+              <a:srgbClr val="CC8F38"/>
+            </a:solidFill>
+          </a:ln>
+        </p:spPr>
+        <p:style>
+          <a:lnRef idx="1">
+            <a:schemeClr val="accent1"/>
+          </a:lnRef>
+          <a:fillRef idx="3">
+            <a:schemeClr val="accent1"/>
+          </a:fillRef>
+          <a:effectRef idx="2">
+            <a:schemeClr val="accent1"/>
+          </a:effectRef>
+          <a:fontRef idx="minor">
+            <a:schemeClr val="lt1"/>
+          </a:fontRef>
+        </p:style>
+        <p:txBody>
+          <a:bodyPr rtlCol="0" anchor="ctr" wrap="square" tIns="30000" bIns="30000" lIns="40000" rIns="40000"/>
+          <a:lstStyle/>
+          <a:p>
+            <a:pPr algn="ctr">
+              <a:defRPr sz="900" b="0">
+                <a:solidFill>
+                  <a:srgbClr val="1E1E3C"/>
+                </a:solidFill>
+              </a:defRPr>
+            </a:pPr>
+            <a:r>
+              <a:t>アセンブリ言語</a:t>
+            </a:r>
+          </a:p>
+        </p:txBody>
+      </p:sp>
+      <p:sp>
+        <p:nvSpPr>
+          <p:cNvPr id="12" name="Rounded Rectangle 11"/>
+          <p:cNvSpPr/>
+          <p:nvPr/>
+        </p:nvSpPr>
+        <p:spPr>
+          <a:xfrm>
+            <a:off x="517200" y="3142605"/>
+            <a:ext cx="908700" cy="510271"/>
+          </a:xfrm>
+          <a:prstGeom prst="roundRect">
+            <a:avLst>
+              <a:gd name="adj" fmla="val 2000000000"/>
+            </a:avLst>
+          </a:prstGeom>
+          <a:solidFill>
+            <a:srgbClr val="FFDCAC"/>
+          </a:solidFill>
+          <a:ln w="12700">
+            <a:solidFill>
+              <a:srgbClr val="CC8F38"/>
+            </a:solidFill>
+          </a:ln>
+        </p:spPr>
+        <p:style>
+          <a:lnRef idx="1">
+            <a:schemeClr val="accent1"/>
+          </a:lnRef>
+          <a:fillRef idx="3">
+            <a:schemeClr val="accent1"/>
+          </a:fillRef>
+          <a:effectRef idx="2">
+            <a:schemeClr val="accent1"/>
+          </a:effectRef>
+          <a:fontRef idx="minor">
+            <a:schemeClr val="lt1"/>
+          </a:fontRef>
+        </p:style>
+        <p:txBody>
+          <a:bodyPr rtlCol="0" anchor="ctr" wrap="square" tIns="30000" bIns="30000" lIns="40000" rIns="40000"/>
+          <a:lstStyle/>
+          <a:p>
+            <a:pPr algn="ctr">
+              <a:defRPr sz="900" b="0">
+                <a:solidFill>
+                  <a:srgbClr val="1E1E3C"/>
+                </a:solidFill>
+              </a:defRPr>
+            </a:pPr>
+            <a:r>
+              <a:t>Fortran誕生</a:t>
+            </a:r>
+          </a:p>
+        </p:txBody>
+      </p:sp>
+      <p:sp>
+        <p:nvSpPr>
+          <p:cNvPr id="13" name="TextBox 12"/>
+          <p:cNvSpPr txBox="1"/>
+          <p:nvPr/>
+        </p:nvSpPr>
+        <p:spPr>
+          <a:xfrm>
+            <a:off x="487200" y="4923418"/>
+            <a:ext cx="968700" cy="1202745"/>
+          </a:xfrm>
+          <a:prstGeom prst="rect">
+            <a:avLst/>
+          </a:prstGeom>
+          <a:noFill/>
+          <a:ln>
+            <a:noFill/>
+          </a:ln>
+        </p:spPr>
+        <p:txBody>
+          <a:bodyPr wrap="square"/>
+          <a:lstStyle/>
+          <a:p>
+            <a:pPr algn="ctr">
+              <a:defRPr sz="1000" b="1">
+                <a:solidFill>
+                  <a:srgbClr val="1E1E3C"/>
+                </a:solidFill>
+              </a:defRPr>
+            </a:pPr>
+            <a:r>
+              <a:t>1950年代</a:t>
+            </a:r>
+          </a:p>
+        </p:txBody>
+      </p:sp>
+      <p:sp>
+        <p:nvSpPr>
+          <p:cNvPr id="14" name="Oval 13"/>
+          <p:cNvSpPr/>
+          <p:nvPr/>
+        </p:nvSpPr>
+        <p:spPr>
+          <a:xfrm>
+            <a:off x="1800656" y="4378688"/>
+            <a:ext cx="399188" cy="399188"/>
+          </a:xfrm>
+          <a:prstGeom prst="ellipse">
+            <a:avLst/>
+          </a:prstGeom>
+          <a:solidFill>
+            <a:srgbClr val="FFB347"/>
+          </a:solidFill>
+          <a:ln w="19050">
+            <a:solidFill>
+              <a:srgbClr val="CC8F38"/>
+            </a:solidFill>
+          </a:ln>
+        </p:spPr>
+        <p:style>
+          <a:lnRef idx="1">
+            <a:schemeClr val="accent1"/>
+          </a:lnRef>
+          <a:fillRef idx="3">
+            <a:schemeClr val="accent1"/>
+          </a:fillRef>
+          <a:effectRef idx="2">
+            <a:schemeClr val="accent1"/>
+          </a:effectRef>
+          <a:fontRef idx="minor">
+            <a:schemeClr val="lt1"/>
+          </a:fontRef>
+        </p:style>
+        <p:txBody>
+          <a:bodyPr rtlCol="0" anchor="ctr"/>
+          <a:lstStyle/>
+          <a:p>
+            <a:pPr algn="ctr"/>
+          </a:p>
+        </p:txBody>
+      </p:sp>
+      <p:sp>
+        <p:nvSpPr>
+          <p:cNvPr id="15" name="Rounded Rectangle 14"/>
+          <p:cNvSpPr/>
+          <p:nvPr/>
+        </p:nvSpPr>
+        <p:spPr>
+          <a:xfrm>
+            <a:off x="1545900" y="3702876"/>
+            <a:ext cx="908700" cy="510271"/>
+          </a:xfrm>
+          <a:prstGeom prst="roundRect">
+            <a:avLst>
+              <a:gd name="adj" fmla="val 2000000000"/>
+            </a:avLst>
+          </a:prstGeom>
+          <a:solidFill>
+            <a:srgbClr val="FFDCAC"/>
+          </a:solidFill>
+          <a:ln w="12700">
+            <a:solidFill>
+              <a:srgbClr val="CC8F38"/>
+            </a:solidFill>
+          </a:ln>
+        </p:spPr>
+        <p:style>
+          <a:lnRef idx="1">
+            <a:schemeClr val="accent1"/>
+          </a:lnRef>
+          <a:fillRef idx="3">
+            <a:schemeClr val="accent1"/>
+          </a:fillRef>
+          <a:effectRef idx="2">
+            <a:schemeClr val="accent1"/>
+          </a:effectRef>
+          <a:fontRef idx="minor">
+            <a:schemeClr val="lt1"/>
+          </a:fontRef>
+        </p:style>
+        <p:txBody>
+          <a:bodyPr rtlCol="0" anchor="ctr" wrap="square" tIns="30000" bIns="30000" lIns="40000" rIns="40000"/>
+          <a:lstStyle/>
+          <a:p>
+            <a:pPr algn="ctr">
+              <a:defRPr sz="900" b="0">
+                <a:solidFill>
+                  <a:srgbClr val="1E1E3C"/>
+                </a:solidFill>
+              </a:defRPr>
+            </a:pPr>
+            <a:r>
+              <a:t>COBOL</a:t>
+            </a:r>
+          </a:p>
+        </p:txBody>
+      </p:sp>
+      <p:sp>
+        <p:nvSpPr>
+          <p:cNvPr id="16" name="Rounded Rectangle 15"/>
+          <p:cNvSpPr/>
+          <p:nvPr/>
+        </p:nvSpPr>
+        <p:spPr>
+          <a:xfrm>
+            <a:off x="1545900" y="3142605"/>
+            <a:ext cx="908700" cy="510271"/>
+          </a:xfrm>
+          <a:prstGeom prst="roundRect">
+            <a:avLst>
+              <a:gd name="adj" fmla="val 2000000000"/>
+            </a:avLst>
+          </a:prstGeom>
+          <a:solidFill>
+            <a:srgbClr val="FFDCAC"/>
+          </a:solidFill>
+          <a:ln w="12700">
+            <a:solidFill>
+              <a:srgbClr val="CC8F38"/>
+            </a:solidFill>
+          </a:ln>
+        </p:spPr>
+        <p:style>
+          <a:lnRef idx="1">
+            <a:schemeClr val="accent1"/>
+          </a:lnRef>
+          <a:fillRef idx="3">
+            <a:schemeClr val="accent1"/>
+          </a:fillRef>
+          <a:effectRef idx="2">
+            <a:schemeClr val="accent1"/>
+          </a:effectRef>
+          <a:fontRef idx="minor">
+            <a:schemeClr val="lt1"/>
+          </a:fontRef>
+        </p:style>
+        <p:txBody>
+          <a:bodyPr rtlCol="0" anchor="ctr" wrap="square" tIns="30000" bIns="30000" lIns="40000" rIns="40000"/>
+          <a:lstStyle/>
+          <a:p>
+            <a:pPr algn="ctr">
+              <a:defRPr sz="900" b="0">
+                <a:solidFill>
+                  <a:srgbClr val="1E1E3C"/>
+                </a:solidFill>
+              </a:defRPr>
+            </a:pPr>
+            <a:r>
+              <a:t>BASIC</a:t>
+            </a:r>
+          </a:p>
+        </p:txBody>
+      </p:sp>
+      <p:sp>
+        <p:nvSpPr>
+          <p:cNvPr id="17" name="Rounded Rectangle 16"/>
+          <p:cNvSpPr/>
+          <p:nvPr/>
+        </p:nvSpPr>
+        <p:spPr>
+          <a:xfrm>
+            <a:off x="1545900" y="2582334"/>
+            <a:ext cx="908700" cy="510271"/>
+          </a:xfrm>
+          <a:prstGeom prst="roundRect">
+            <a:avLst>
+              <a:gd name="adj" fmla="val 2000000000"/>
+            </a:avLst>
+          </a:prstGeom>
+          <a:solidFill>
+            <a:srgbClr val="FFDCAC"/>
+          </a:solidFill>
+          <a:ln w="12700">
+            <a:solidFill>
+              <a:srgbClr val="CC8F38"/>
+            </a:solidFill>
+          </a:ln>
+        </p:spPr>
+        <p:style>
+          <a:lnRef idx="1">
+            <a:schemeClr val="accent1"/>
+          </a:lnRef>
+          <a:fillRef idx="3">
+            <a:schemeClr val="accent1"/>
+          </a:fillRef>
+          <a:effectRef idx="2">
+            <a:schemeClr val="accent1"/>
+          </a:effectRef>
+          <a:fontRef idx="minor">
+            <a:schemeClr val="lt1"/>
+          </a:fontRef>
+        </p:style>
+        <p:txBody>
+          <a:bodyPr rtlCol="0" anchor="ctr" wrap="square" tIns="30000" bIns="30000" lIns="40000" rIns="40000"/>
+          <a:lstStyle/>
+          <a:p>
+            <a:pPr algn="ctr">
+              <a:defRPr sz="900" b="0">
+                <a:solidFill>
+                  <a:srgbClr val="1E1E3C"/>
+                </a:solidFill>
+              </a:defRPr>
+            </a:pPr>
+            <a:r>
+              <a:t>構造化プログラミング</a:t>
+            </a:r>
+          </a:p>
+        </p:txBody>
+      </p:sp>
+      <p:sp>
+        <p:nvSpPr>
+          <p:cNvPr id="18" name="TextBox 17"/>
+          <p:cNvSpPr txBox="1"/>
+          <p:nvPr/>
+        </p:nvSpPr>
+        <p:spPr>
+          <a:xfrm>
+            <a:off x="1515900" y="4923418"/>
+            <a:ext cx="968700" cy="1202745"/>
+          </a:xfrm>
+          <a:prstGeom prst="rect">
+            <a:avLst/>
+          </a:prstGeom>
+          <a:noFill/>
+          <a:ln>
+            <a:noFill/>
+          </a:ln>
+        </p:spPr>
+        <p:txBody>
+          <a:bodyPr wrap="square"/>
+          <a:lstStyle/>
+          <a:p>
+            <a:pPr algn="ctr">
+              <a:defRPr sz="1000" b="1">
+                <a:solidFill>
+                  <a:srgbClr val="1E1E3C"/>
+                </a:solidFill>
+              </a:defRPr>
+            </a:pPr>
+            <a:r>
+              <a:t>1960年代</a:t>
+            </a:r>
+          </a:p>
+        </p:txBody>
+      </p:sp>
+      <p:sp>
+        <p:nvSpPr>
+          <p:cNvPr id="19" name="Oval 18"/>
+          <p:cNvSpPr/>
+          <p:nvPr/>
+        </p:nvSpPr>
+        <p:spPr>
+          <a:xfrm>
+            <a:off x="2829356" y="4378688"/>
+            <a:ext cx="399188" cy="399188"/>
+          </a:xfrm>
+          <a:prstGeom prst="ellipse">
+            <a:avLst/>
+          </a:prstGeom>
+          <a:solidFill>
+            <a:srgbClr val="58C496"/>
+          </a:solidFill>
+          <a:ln w="19050">
+            <a:solidFill>
+              <a:srgbClr val="469C78"/>
+            </a:solidFill>
+          </a:ln>
+        </p:spPr>
+        <p:style>
+          <a:lnRef idx="1">
+            <a:schemeClr val="accent1"/>
+          </a:lnRef>
+          <a:fillRef idx="3">
+            <a:schemeClr val="accent1"/>
+          </a:fillRef>
+          <a:effectRef idx="2">
+            <a:schemeClr val="accent1"/>
+          </a:effectRef>
+          <a:fontRef idx="minor">
+            <a:schemeClr val="lt1"/>
+          </a:fontRef>
+        </p:style>
+        <p:txBody>
+          <a:bodyPr rtlCol="0" anchor="ctr"/>
+          <a:lstStyle/>
+          <a:p>
+            <a:pPr algn="ctr"/>
+          </a:p>
+        </p:txBody>
+      </p:sp>
+      <p:sp>
+        <p:nvSpPr>
+          <p:cNvPr id="20" name="Rounded Rectangle 19"/>
+          <p:cNvSpPr/>
+          <p:nvPr/>
+        </p:nvSpPr>
+        <p:spPr>
+          <a:xfrm>
+            <a:off x="2574600" y="3702876"/>
+            <a:ext cx="908700" cy="510271"/>
+          </a:xfrm>
+          <a:prstGeom prst="roundRect">
+            <a:avLst>
+              <a:gd name="adj" fmla="val 2000000000"/>
+            </a:avLst>
+          </a:prstGeom>
+          <a:solidFill>
+            <a:srgbClr val="B3E4CF"/>
+          </a:solidFill>
+          <a:ln w="12700">
+            <a:solidFill>
+              <a:srgbClr val="469C78"/>
+            </a:solidFill>
+          </a:ln>
+        </p:spPr>
+        <p:style>
+          <a:lnRef idx="1">
+            <a:schemeClr val="accent1"/>
+          </a:lnRef>
+          <a:fillRef idx="3">
+            <a:schemeClr val="accent1"/>
+          </a:fillRef>
+          <a:effectRef idx="2">
+            <a:schemeClr val="accent1"/>
+          </a:effectRef>
+          <a:fontRef idx="minor">
+            <a:schemeClr val="lt1"/>
+          </a:fontRef>
+        </p:style>
+        <p:txBody>
+          <a:bodyPr rtlCol="0" anchor="ctr" wrap="square" tIns="30000" bIns="30000" lIns="40000" rIns="40000"/>
+          <a:lstStyle/>
+          <a:p>
+            <a:pPr algn="ctr">
+              <a:defRPr sz="900" b="0">
+                <a:solidFill>
+                  <a:srgbClr val="1E1E3C"/>
+                </a:solidFill>
+              </a:defRPr>
+            </a:pPr>
+            <a:r>
+              <a:t>C言語</a:t>
+            </a:r>
+          </a:p>
+        </p:txBody>
+      </p:sp>
+      <p:sp>
+        <p:nvSpPr>
+          <p:cNvPr id="21" name="Rounded Rectangle 20"/>
+          <p:cNvSpPr/>
+          <p:nvPr/>
+        </p:nvSpPr>
+        <p:spPr>
+          <a:xfrm>
+            <a:off x="2574600" y="3142605"/>
+            <a:ext cx="908700" cy="510271"/>
+          </a:xfrm>
+          <a:prstGeom prst="roundRect">
+            <a:avLst>
+              <a:gd name="adj" fmla="val 2000000000"/>
+            </a:avLst>
+          </a:prstGeom>
+          <a:solidFill>
+            <a:srgbClr val="B3E4CF"/>
+          </a:solidFill>
+          <a:ln w="12700">
+            <a:solidFill>
+              <a:srgbClr val="469C78"/>
+            </a:solidFill>
+          </a:ln>
+        </p:spPr>
+        <p:style>
+          <a:lnRef idx="1">
+            <a:schemeClr val="accent1"/>
+          </a:lnRef>
+          <a:fillRef idx="3">
+            <a:schemeClr val="accent1"/>
+          </a:fillRef>
+          <a:effectRef idx="2">
+            <a:schemeClr val="accent1"/>
+          </a:effectRef>
+          <a:fontRef idx="minor">
+            <a:schemeClr val="lt1"/>
+          </a:fontRef>
+        </p:style>
+        <p:txBody>
+          <a:bodyPr rtlCol="0" anchor="ctr" wrap="square" tIns="30000" bIns="30000" lIns="40000" rIns="40000"/>
+          <a:lstStyle/>
+          <a:p>
+            <a:pPr algn="ctr">
+              <a:defRPr sz="900" b="0">
+                <a:solidFill>
+                  <a:srgbClr val="1E1E3C"/>
+                </a:solidFill>
+              </a:defRPr>
+            </a:pPr>
+            <a:r>
+              <a:t>Unix開発</a:t>
+            </a:r>
+          </a:p>
+        </p:txBody>
+      </p:sp>
+      <p:sp>
+        <p:nvSpPr>
+          <p:cNvPr id="22" name="TextBox 21"/>
+          <p:cNvSpPr txBox="1"/>
+          <p:nvPr/>
+        </p:nvSpPr>
+        <p:spPr>
+          <a:xfrm>
+            <a:off x="2544600" y="4923418"/>
+            <a:ext cx="968700" cy="1202745"/>
+          </a:xfrm>
+          <a:prstGeom prst="rect">
+            <a:avLst/>
+          </a:prstGeom>
+          <a:noFill/>
+          <a:ln>
+            <a:noFill/>
+          </a:ln>
+        </p:spPr>
+        <p:txBody>
+          <a:bodyPr wrap="square"/>
+          <a:lstStyle/>
+          <a:p>
+            <a:pPr algn="ctr">
+              <a:defRPr sz="1000" b="1">
+                <a:solidFill>
+                  <a:srgbClr val="1E1E3C"/>
+                </a:solidFill>
+              </a:defRPr>
+            </a:pPr>
+            <a:r>
+              <a:t>1970年代</a:t>
+            </a:r>
+          </a:p>
+        </p:txBody>
+      </p:sp>
+      <p:sp>
+        <p:nvSpPr>
+          <p:cNvPr id="23" name="Oval 22"/>
+          <p:cNvSpPr/>
+          <p:nvPr/>
+        </p:nvSpPr>
+        <p:spPr>
+          <a:xfrm>
+            <a:off x="3858056" y="4378688"/>
+            <a:ext cx="399188" cy="399188"/>
+          </a:xfrm>
+          <a:prstGeom prst="ellipse">
+            <a:avLst/>
+          </a:prstGeom>
+          <a:solidFill>
+            <a:srgbClr val="58C496"/>
+          </a:solidFill>
+          <a:ln w="19050">
+            <a:solidFill>
+              <a:srgbClr val="469C78"/>
+            </a:solidFill>
+          </a:ln>
+        </p:spPr>
+        <p:style>
+          <a:lnRef idx="1">
+            <a:schemeClr val="accent1"/>
+          </a:lnRef>
+          <a:fillRef idx="3">
+            <a:schemeClr val="accent1"/>
+          </a:fillRef>
+          <a:effectRef idx="2">
+            <a:schemeClr val="accent1"/>
+          </a:effectRef>
+          <a:fontRef idx="minor">
+            <a:schemeClr val="lt1"/>
+          </a:fontRef>
+        </p:style>
+        <p:txBody>
+          <a:bodyPr rtlCol="0" anchor="ctr"/>
+          <a:lstStyle/>
+          <a:p>
+            <a:pPr algn="ctr"/>
+          </a:p>
+        </p:txBody>
+      </p:sp>
+      <p:sp>
+        <p:nvSpPr>
+          <p:cNvPr id="24" name="Rounded Rectangle 23"/>
+          <p:cNvSpPr/>
+          <p:nvPr/>
+        </p:nvSpPr>
+        <p:spPr>
+          <a:xfrm>
+            <a:off x="3603300" y="3702876"/>
+            <a:ext cx="908700" cy="510271"/>
+          </a:xfrm>
+          <a:prstGeom prst="roundRect">
+            <a:avLst>
+              <a:gd name="adj" fmla="val 2000000000"/>
+            </a:avLst>
+          </a:prstGeom>
+          <a:solidFill>
+            <a:srgbClr val="B3E4CF"/>
+          </a:solidFill>
+          <a:ln w="12700">
+            <a:solidFill>
+              <a:srgbClr val="469C78"/>
+            </a:solidFill>
+          </a:ln>
+        </p:spPr>
+        <p:style>
+          <a:lnRef idx="1">
+            <a:schemeClr val="accent1"/>
+          </a:lnRef>
+          <a:fillRef idx="3">
+            <a:schemeClr val="accent1"/>
+          </a:fillRef>
+          <a:effectRef idx="2">
+            <a:schemeClr val="accent1"/>
+          </a:effectRef>
+          <a:fontRef idx="minor">
+            <a:schemeClr val="lt1"/>
+          </a:fontRef>
+        </p:style>
+        <p:txBody>
+          <a:bodyPr rtlCol="0" anchor="ctr" wrap="square" tIns="30000" bIns="30000" lIns="40000" rIns="40000"/>
+          <a:lstStyle/>
+          <a:p>
+            <a:pPr algn="ctr">
+              <a:defRPr sz="900" b="0">
+                <a:solidFill>
+                  <a:srgbClr val="1E1E3C"/>
+                </a:solidFill>
+              </a:defRPr>
+            </a:pPr>
+            <a:r>
+              <a:t>C++</a:t>
+            </a:r>
+          </a:p>
+        </p:txBody>
+      </p:sp>
+      <p:sp>
+        <p:nvSpPr>
+          <p:cNvPr id="25" name="Rounded Rectangle 24"/>
+          <p:cNvSpPr/>
+          <p:nvPr/>
+        </p:nvSpPr>
+        <p:spPr>
+          <a:xfrm>
+            <a:off x="3603300" y="3142605"/>
+            <a:ext cx="908700" cy="510271"/>
+          </a:xfrm>
+          <a:prstGeom prst="roundRect">
+            <a:avLst>
+              <a:gd name="adj" fmla="val 2000000000"/>
+            </a:avLst>
+          </a:prstGeom>
+          <a:solidFill>
+            <a:srgbClr val="B3E4CF"/>
+          </a:solidFill>
+          <a:ln w="12700">
+            <a:solidFill>
+              <a:srgbClr val="469C78"/>
+            </a:solidFill>
+          </a:ln>
+        </p:spPr>
+        <p:style>
+          <a:lnRef idx="1">
+            <a:schemeClr val="accent1"/>
+          </a:lnRef>
+          <a:fillRef idx="3">
+            <a:schemeClr val="accent1"/>
+          </a:fillRef>
+          <a:effectRef idx="2">
+            <a:schemeClr val="accent1"/>
+          </a:effectRef>
+          <a:fontRef idx="minor">
+            <a:schemeClr val="lt1"/>
+          </a:fontRef>
+        </p:style>
+        <p:txBody>
+          <a:bodyPr rtlCol="0" anchor="ctr" wrap="square" tIns="30000" bIns="30000" lIns="40000" rIns="40000"/>
+          <a:lstStyle/>
+          <a:p>
+            <a:pPr algn="ctr">
+              <a:defRPr sz="900" b="0">
+                <a:solidFill>
+                  <a:srgbClr val="1E1E3C"/>
+                </a:solidFill>
+              </a:defRPr>
+            </a:pPr>
+            <a:r>
+              <a:t>Macintosh</a:t>
+            </a:r>
+          </a:p>
+        </p:txBody>
+      </p:sp>
+      <p:sp>
+        <p:nvSpPr>
+          <p:cNvPr id="26" name="Rounded Rectangle 25"/>
+          <p:cNvSpPr/>
+          <p:nvPr/>
+        </p:nvSpPr>
+        <p:spPr>
+          <a:xfrm>
+            <a:off x="3603300" y="2582334"/>
+            <a:ext cx="908700" cy="510271"/>
+          </a:xfrm>
+          <a:prstGeom prst="roundRect">
+            <a:avLst>
+              <a:gd name="adj" fmla="val 2000000000"/>
+            </a:avLst>
+          </a:prstGeom>
+          <a:solidFill>
+            <a:srgbClr val="B3E4CF"/>
+          </a:solidFill>
+          <a:ln w="12700">
+            <a:solidFill>
+              <a:srgbClr val="469C78"/>
+            </a:solidFill>
+          </a:ln>
+        </p:spPr>
+        <p:style>
+          <a:lnRef idx="1">
+            <a:schemeClr val="accent1"/>
+          </a:lnRef>
+          <a:fillRef idx="3">
+            <a:schemeClr val="accent1"/>
+          </a:fillRef>
+          <a:effectRef idx="2">
+            <a:schemeClr val="accent1"/>
+          </a:effectRef>
+          <a:fontRef idx="minor">
+            <a:schemeClr val="lt1"/>
+          </a:fontRef>
+        </p:style>
+        <p:txBody>
+          <a:bodyPr rtlCol="0" anchor="ctr" wrap="square" tIns="30000" bIns="30000" lIns="40000" rIns="40000"/>
+          <a:lstStyle/>
+          <a:p>
+            <a:pPr algn="ctr">
+              <a:defRPr sz="900" b="0">
+                <a:solidFill>
+                  <a:srgbClr val="1E1E3C"/>
+                </a:solidFill>
+              </a:defRPr>
+            </a:pPr>
+            <a:r>
+              <a:t>PC普及</a:t>
+            </a:r>
+          </a:p>
+        </p:txBody>
+      </p:sp>
+      <p:sp>
+        <p:nvSpPr>
+          <p:cNvPr id="27" name="TextBox 26"/>
+          <p:cNvSpPr txBox="1"/>
+          <p:nvPr/>
+        </p:nvSpPr>
+        <p:spPr>
+          <a:xfrm>
+            <a:off x="3573300" y="4923418"/>
+            <a:ext cx="968700" cy="1202745"/>
+          </a:xfrm>
+          <a:prstGeom prst="rect">
+            <a:avLst/>
+          </a:prstGeom>
+          <a:noFill/>
+          <a:ln>
+            <a:noFill/>
+          </a:ln>
+        </p:spPr>
+        <p:txBody>
+          <a:bodyPr wrap="square"/>
+          <a:lstStyle/>
+          <a:p>
+            <a:pPr algn="ctr">
+              <a:defRPr sz="1000" b="1">
+                <a:solidFill>
+                  <a:srgbClr val="1E1E3C"/>
+                </a:solidFill>
+              </a:defRPr>
+            </a:pPr>
+            <a:r>
+              <a:t>1980年代</a:t>
+            </a:r>
+          </a:p>
+        </p:txBody>
+      </p:sp>
+      <p:sp>
+        <p:nvSpPr>
+          <p:cNvPr id="28" name="Oval 27"/>
+          <p:cNvSpPr/>
+          <p:nvPr/>
+        </p:nvSpPr>
+        <p:spPr>
+          <a:xfrm>
+            <a:off x="4886756" y="4378688"/>
+            <a:ext cx="399188" cy="399188"/>
+          </a:xfrm>
+          <a:prstGeom prst="ellipse">
+            <a:avLst/>
+          </a:prstGeom>
+          <a:solidFill>
+            <a:srgbClr val="66B2FF"/>
+          </a:solidFill>
+          <a:ln w="19050">
+            <a:solidFill>
+              <a:srgbClr val="518ECC"/>
+            </a:solidFill>
+          </a:ln>
+        </p:spPr>
+        <p:style>
+          <a:lnRef idx="1">
+            <a:schemeClr val="accent1"/>
+          </a:lnRef>
+          <a:fillRef idx="3">
+            <a:schemeClr val="accent1"/>
+          </a:fillRef>
+          <a:effectRef idx="2">
+            <a:schemeClr val="accent1"/>
+          </a:effectRef>
+          <a:fontRef idx="minor">
+            <a:schemeClr val="lt1"/>
+          </a:fontRef>
+        </p:style>
+        <p:txBody>
+          <a:bodyPr rtlCol="0" anchor="ctr"/>
+          <a:lstStyle/>
+          <a:p>
+            <a:pPr algn="ctr"/>
+          </a:p>
+        </p:txBody>
+      </p:sp>
+      <p:sp>
+        <p:nvSpPr>
+          <p:cNvPr id="29" name="Rounded Rectangle 28"/>
+          <p:cNvSpPr/>
+          <p:nvPr/>
+        </p:nvSpPr>
+        <p:spPr>
+          <a:xfrm>
+            <a:off x="4632000" y="3702876"/>
+            <a:ext cx="908700" cy="510271"/>
+          </a:xfrm>
+          <a:prstGeom prst="roundRect">
+            <a:avLst>
+              <a:gd name="adj" fmla="val 2000000000"/>
+            </a:avLst>
+          </a:prstGeom>
+          <a:solidFill>
+            <a:srgbClr val="BADCFF"/>
+          </a:solidFill>
+          <a:ln w="12700">
+            <a:solidFill>
+              <a:srgbClr val="518ECC"/>
+            </a:solidFill>
+          </a:ln>
+        </p:spPr>
+        <p:style>
+          <a:lnRef idx="1">
+            <a:schemeClr val="accent1"/>
+          </a:lnRef>
+          <a:fillRef idx="3">
+            <a:schemeClr val="accent1"/>
+          </a:fillRef>
+          <a:effectRef idx="2">
+            <a:schemeClr val="accent1"/>
+          </a:effectRef>
+          <a:fontRef idx="minor">
+            <a:schemeClr val="lt1"/>
+          </a:fontRef>
+        </p:style>
+        <p:txBody>
+          <a:bodyPr rtlCol="0" anchor="ctr" wrap="square" tIns="30000" bIns="30000" lIns="40000" rIns="40000"/>
+          <a:lstStyle/>
+          <a:p>
+            <a:pPr algn="ctr">
+              <a:defRPr sz="900" b="0">
+                <a:solidFill>
+                  <a:srgbClr val="1E1E3C"/>
+                </a:solidFill>
+              </a:defRPr>
+            </a:pPr>
+            <a:r>
+              <a:t>Java</a:t>
+            </a:r>
+          </a:p>
+        </p:txBody>
+      </p:sp>
+      <p:sp>
+        <p:nvSpPr>
+          <p:cNvPr id="30" name="Rounded Rectangle 29"/>
+          <p:cNvSpPr/>
+          <p:nvPr/>
+        </p:nvSpPr>
+        <p:spPr>
+          <a:xfrm>
+            <a:off x="4632000" y="3142605"/>
+            <a:ext cx="908700" cy="510271"/>
+          </a:xfrm>
+          <a:prstGeom prst="roundRect">
+            <a:avLst>
+              <a:gd name="adj" fmla="val 2000000000"/>
+            </a:avLst>
+          </a:prstGeom>
+          <a:solidFill>
+            <a:srgbClr val="BADCFF"/>
+          </a:solidFill>
+          <a:ln w="12700">
+            <a:solidFill>
+              <a:srgbClr val="518ECC"/>
+            </a:solidFill>
+          </a:ln>
+        </p:spPr>
+        <p:style>
+          <a:lnRef idx="1">
+            <a:schemeClr val="accent1"/>
+          </a:lnRef>
+          <a:fillRef idx="3">
+            <a:schemeClr val="accent1"/>
+          </a:fillRef>
+          <a:effectRef idx="2">
+            <a:schemeClr val="accent1"/>
+          </a:effectRef>
+          <a:fontRef idx="minor">
+            <a:schemeClr val="lt1"/>
+          </a:fontRef>
+        </p:style>
+        <p:txBody>
+          <a:bodyPr rtlCol="0" anchor="ctr" wrap="square" tIns="30000" bIns="30000" lIns="40000" rIns="40000"/>
+          <a:lstStyle/>
+          <a:p>
+            <a:pPr algn="ctr">
+              <a:defRPr sz="900" b="0">
+                <a:solidFill>
+                  <a:srgbClr val="1E1E3C"/>
+                </a:solidFill>
+              </a:defRPr>
+            </a:pPr>
+            <a:r>
+              <a:t>World Wide Web</a:t>
+            </a:r>
+          </a:p>
+        </p:txBody>
+      </p:sp>
+      <p:sp>
+        <p:nvSpPr>
+          <p:cNvPr id="31" name="Rounded Rectangle 30"/>
+          <p:cNvSpPr/>
+          <p:nvPr/>
+        </p:nvSpPr>
+        <p:spPr>
+          <a:xfrm>
+            <a:off x="4632000" y="2582334"/>
+            <a:ext cx="908700" cy="510271"/>
+          </a:xfrm>
+          <a:prstGeom prst="roundRect">
+            <a:avLst>
+              <a:gd name="adj" fmla="val 2000000000"/>
+            </a:avLst>
+          </a:prstGeom>
+          <a:solidFill>
+            <a:srgbClr val="BADCFF"/>
+          </a:solidFill>
+          <a:ln w="12700">
+            <a:solidFill>
+              <a:srgbClr val="518ECC"/>
+            </a:solidFill>
+          </a:ln>
+        </p:spPr>
+        <p:style>
+          <a:lnRef idx="1">
+            <a:schemeClr val="accent1"/>
+          </a:lnRef>
+          <a:fillRef idx="3">
+            <a:schemeClr val="accent1"/>
+          </a:fillRef>
+          <a:effectRef idx="2">
+            <a:schemeClr val="accent1"/>
+          </a:effectRef>
+          <a:fontRef idx="minor">
+            <a:schemeClr val="lt1"/>
+          </a:fontRef>
+        </p:style>
+        <p:txBody>
+          <a:bodyPr rtlCol="0" anchor="ctr" wrap="square" tIns="30000" bIns="30000" lIns="40000" rIns="40000"/>
+          <a:lstStyle/>
+          <a:p>
+            <a:pPr algn="ctr">
+              <a:defRPr sz="900" b="0">
+                <a:solidFill>
+                  <a:srgbClr val="1E1E3C"/>
+                </a:solidFill>
+              </a:defRPr>
+            </a:pPr>
+            <a:r>
+              <a:t>オープンソース運動</a:t>
+            </a:r>
+          </a:p>
+        </p:txBody>
+      </p:sp>
+      <p:sp>
+        <p:nvSpPr>
+          <p:cNvPr id="32" name="TextBox 31"/>
+          <p:cNvSpPr txBox="1"/>
+          <p:nvPr/>
+        </p:nvSpPr>
+        <p:spPr>
+          <a:xfrm>
+            <a:off x="4602000" y="4923418"/>
+            <a:ext cx="968700" cy="1202745"/>
+          </a:xfrm>
+          <a:prstGeom prst="rect">
+            <a:avLst/>
+          </a:prstGeom>
+          <a:noFill/>
+          <a:ln>
+            <a:noFill/>
+          </a:ln>
+        </p:spPr>
+        <p:txBody>
+          <a:bodyPr wrap="square"/>
+          <a:lstStyle/>
+          <a:p>
+            <a:pPr algn="ctr">
+              <a:defRPr sz="1000" b="1">
+                <a:solidFill>
+                  <a:srgbClr val="1E1E3C"/>
+                </a:solidFill>
+              </a:defRPr>
+            </a:pPr>
+            <a:r>
+              <a:t>1990年代</a:t>
+            </a:r>
+          </a:p>
+        </p:txBody>
+      </p:sp>
+      <p:sp>
+        <p:nvSpPr>
+          <p:cNvPr id="33" name="Oval 32"/>
+          <p:cNvSpPr/>
+          <p:nvPr/>
+        </p:nvSpPr>
+        <p:spPr>
+          <a:xfrm>
+            <a:off x="5915456" y="4378688"/>
+            <a:ext cx="399188" cy="399188"/>
+          </a:xfrm>
+          <a:prstGeom prst="ellipse">
+            <a:avLst/>
+          </a:prstGeom>
+          <a:solidFill>
+            <a:srgbClr val="66B2FF"/>
+          </a:solidFill>
+          <a:ln w="19050">
+            <a:solidFill>
+              <a:srgbClr val="518ECC"/>
+            </a:solidFill>
+          </a:ln>
+        </p:spPr>
+        <p:style>
+          <a:lnRef idx="1">
+            <a:schemeClr val="accent1"/>
+          </a:lnRef>
+          <a:fillRef idx="3">
+            <a:schemeClr val="accent1"/>
+          </a:fillRef>
+          <a:effectRef idx="2">
+            <a:schemeClr val="accent1"/>
+          </a:effectRef>
+          <a:fontRef idx="minor">
+            <a:schemeClr val="lt1"/>
+          </a:fontRef>
+        </p:style>
+        <p:txBody>
+          <a:bodyPr rtlCol="0" anchor="ctr"/>
+          <a:lstStyle/>
+          <a:p>
+            <a:pPr algn="ctr"/>
+          </a:p>
+        </p:txBody>
+      </p:sp>
+      <p:sp>
+        <p:nvSpPr>
+          <p:cNvPr id="34" name="Rounded Rectangle 33"/>
+          <p:cNvSpPr/>
+          <p:nvPr/>
+        </p:nvSpPr>
+        <p:spPr>
+          <a:xfrm>
+            <a:off x="5660700" y="3702876"/>
+            <a:ext cx="908700" cy="510271"/>
+          </a:xfrm>
+          <a:prstGeom prst="roundRect">
+            <a:avLst>
+              <a:gd name="adj" fmla="val 2000000000"/>
+            </a:avLst>
+          </a:prstGeom>
+          <a:solidFill>
+            <a:srgbClr val="BADCFF"/>
+          </a:solidFill>
+          <a:ln w="12700">
+            <a:solidFill>
+              <a:srgbClr val="518ECC"/>
+            </a:solidFill>
+          </a:ln>
+        </p:spPr>
+        <p:style>
+          <a:lnRef idx="1">
+            <a:schemeClr val="accent1"/>
+          </a:lnRef>
+          <a:fillRef idx="3">
+            <a:schemeClr val="accent1"/>
+          </a:fillRef>
+          <a:effectRef idx="2">
+            <a:schemeClr val="accent1"/>
+          </a:effectRef>
+          <a:fontRef idx="minor">
+            <a:schemeClr val="lt1"/>
+          </a:fontRef>
+        </p:style>
+        <p:txBody>
+          <a:bodyPr rtlCol="0" anchor="ctr" wrap="square" tIns="30000" bIns="30000" lIns="40000" rIns="40000"/>
+          <a:lstStyle/>
+          <a:p>
+            <a:pPr algn="ctr">
+              <a:defRPr sz="900" b="0">
+                <a:solidFill>
+                  <a:srgbClr val="1E1E3C"/>
+                </a:solidFill>
+              </a:defRPr>
+            </a:pPr>
+            <a:r>
+              <a:t>Python普及</a:t>
+            </a:r>
+          </a:p>
+        </p:txBody>
+      </p:sp>
+      <p:sp>
+        <p:nvSpPr>
+          <p:cNvPr id="35" name="Rounded Rectangle 34"/>
+          <p:cNvSpPr/>
+          <p:nvPr/>
+        </p:nvSpPr>
+        <p:spPr>
+          <a:xfrm>
+            <a:off x="5660700" y="3142605"/>
+            <a:ext cx="908700" cy="510271"/>
+          </a:xfrm>
+          <a:prstGeom prst="roundRect">
+            <a:avLst>
+              <a:gd name="adj" fmla="val 2000000000"/>
+            </a:avLst>
+          </a:prstGeom>
+          <a:solidFill>
+            <a:srgbClr val="BADCFF"/>
+          </a:solidFill>
+          <a:ln w="12700">
+            <a:solidFill>
+              <a:srgbClr val="518ECC"/>
+            </a:solidFill>
+          </a:ln>
+        </p:spPr>
+        <p:style>
+          <a:lnRef idx="1">
+            <a:schemeClr val="accent1"/>
+          </a:lnRef>
+          <a:fillRef idx="3">
+            <a:schemeClr val="accent1"/>
+          </a:fillRef>
+          <a:effectRef idx="2">
+            <a:schemeClr val="accent1"/>
+          </a:effectRef>
+          <a:fontRef idx="minor">
+            <a:schemeClr val="lt1"/>
+          </a:fontRef>
+        </p:style>
+        <p:txBody>
+          <a:bodyPr rtlCol="0" anchor="ctr" wrap="square" tIns="30000" bIns="30000" lIns="40000" rIns="40000"/>
+          <a:lstStyle/>
+          <a:p>
+            <a:pPr algn="ctr">
+              <a:defRPr sz="900" b="0">
+                <a:solidFill>
+                  <a:srgbClr val="1E1E3C"/>
+                </a:solidFill>
+              </a:defRPr>
+            </a:pPr>
+            <a:r>
+              <a:t>Agile開発</a:t>
+            </a:r>
+          </a:p>
+        </p:txBody>
+      </p:sp>
+      <p:sp>
+        <p:nvSpPr>
+          <p:cNvPr id="36" name="Rounded Rectangle 35"/>
+          <p:cNvSpPr/>
+          <p:nvPr/>
+        </p:nvSpPr>
+        <p:spPr>
+          <a:xfrm>
+            <a:off x="5660700" y="2582334"/>
+            <a:ext cx="908700" cy="510271"/>
+          </a:xfrm>
+          <a:prstGeom prst="roundRect">
+            <a:avLst>
+              <a:gd name="adj" fmla="val 2000000000"/>
+            </a:avLst>
+          </a:prstGeom>
+          <a:solidFill>
+            <a:srgbClr val="BADCFF"/>
+          </a:solidFill>
+          <a:ln w="12700">
+            <a:solidFill>
+              <a:srgbClr val="518ECC"/>
+            </a:solidFill>
+          </a:ln>
+        </p:spPr>
+        <p:style>
+          <a:lnRef idx="1">
+            <a:schemeClr val="accent1"/>
+          </a:lnRef>
+          <a:fillRef idx="3">
+            <a:schemeClr val="accent1"/>
+          </a:fillRef>
+          <a:effectRef idx="2">
+            <a:schemeClr val="accent1"/>
+          </a:effectRef>
+          <a:fontRef idx="minor">
+            <a:schemeClr val="lt1"/>
+          </a:fontRef>
+        </p:style>
+        <p:txBody>
+          <a:bodyPr rtlCol="0" anchor="ctr" wrap="square" tIns="30000" bIns="30000" lIns="40000" rIns="40000"/>
+          <a:lstStyle/>
+          <a:p>
+            <a:pPr algn="ctr">
+              <a:defRPr sz="900" b="0">
+                <a:solidFill>
+                  <a:srgbClr val="1E1E3C"/>
+                </a:solidFill>
+              </a:defRPr>
+            </a:pPr>
+            <a:r>
+              <a:t>SNS台頭</a:t>
+            </a:r>
+          </a:p>
+        </p:txBody>
+      </p:sp>
+      <p:sp>
+        <p:nvSpPr>
+          <p:cNvPr id="37" name="TextBox 36"/>
+          <p:cNvSpPr txBox="1"/>
+          <p:nvPr/>
+        </p:nvSpPr>
+        <p:spPr>
+          <a:xfrm>
+            <a:off x="5630700" y="4923418"/>
+            <a:ext cx="968700" cy="1202745"/>
+          </a:xfrm>
+          <a:prstGeom prst="rect">
+            <a:avLst/>
+          </a:prstGeom>
+          <a:noFill/>
+          <a:ln>
+            <a:noFill/>
+          </a:ln>
+        </p:spPr>
+        <p:txBody>
+          <a:bodyPr wrap="square"/>
+          <a:lstStyle/>
+          <a:p>
+            <a:pPr algn="ctr">
+              <a:defRPr sz="1000" b="1">
+                <a:solidFill>
+                  <a:srgbClr val="1E1E3C"/>
+                </a:solidFill>
+              </a:defRPr>
+            </a:pPr>
+            <a:r>
+              <a:t>2000年代</a:t>
+            </a:r>
+          </a:p>
+        </p:txBody>
+      </p:sp>
+      <p:sp>
+        <p:nvSpPr>
+          <p:cNvPr id="38" name="Oval 37"/>
+          <p:cNvSpPr/>
+          <p:nvPr/>
+        </p:nvSpPr>
+        <p:spPr>
+          <a:xfrm>
+            <a:off x="6944156" y="4378688"/>
+            <a:ext cx="399188" cy="399188"/>
+          </a:xfrm>
+          <a:prstGeom prst="ellipse">
+            <a:avLst/>
+          </a:prstGeom>
+          <a:solidFill>
+            <a:srgbClr val="FF6F69"/>
+          </a:solidFill>
+          <a:ln w="19050">
+            <a:solidFill>
+              <a:srgbClr val="CC5854"/>
+            </a:solidFill>
+          </a:ln>
+        </p:spPr>
+        <p:style>
+          <a:lnRef idx="1">
+            <a:schemeClr val="accent1"/>
+          </a:lnRef>
+          <a:fillRef idx="3">
+            <a:schemeClr val="accent1"/>
+          </a:fillRef>
+          <a:effectRef idx="2">
+            <a:schemeClr val="accent1"/>
+          </a:effectRef>
+          <a:fontRef idx="minor">
+            <a:schemeClr val="lt1"/>
+          </a:fontRef>
+        </p:style>
+        <p:txBody>
+          <a:bodyPr rtlCol="0" anchor="ctr"/>
+          <a:lstStyle/>
+          <a:p>
+            <a:pPr algn="ctr"/>
+          </a:p>
+        </p:txBody>
+      </p:sp>
+      <p:sp>
+        <p:nvSpPr>
+          <p:cNvPr id="39" name="Rounded Rectangle 38"/>
+          <p:cNvSpPr/>
+          <p:nvPr/>
+        </p:nvSpPr>
+        <p:spPr>
+          <a:xfrm>
+            <a:off x="6689400" y="3702876"/>
+            <a:ext cx="908700" cy="510271"/>
+          </a:xfrm>
+          <a:prstGeom prst="roundRect">
+            <a:avLst>
+              <a:gd name="adj" fmla="val 2000000000"/>
+            </a:avLst>
+          </a:prstGeom>
+          <a:solidFill>
+            <a:srgbClr val="FFBEBB"/>
+          </a:solidFill>
+          <a:ln w="12700">
+            <a:solidFill>
+              <a:srgbClr val="CC5854"/>
+            </a:solidFill>
+          </a:ln>
+        </p:spPr>
+        <p:style>
+          <a:lnRef idx="1">
+            <a:schemeClr val="accent1"/>
+          </a:lnRef>
+          <a:fillRef idx="3">
+            <a:schemeClr val="accent1"/>
+          </a:fillRef>
+          <a:effectRef idx="2">
+            <a:schemeClr val="accent1"/>
+          </a:effectRef>
+          <a:fontRef idx="minor">
+            <a:schemeClr val="lt1"/>
+          </a:fontRef>
+        </p:style>
+        <p:txBody>
+          <a:bodyPr rtlCol="0" anchor="ctr" wrap="square" tIns="30000" bIns="30000" lIns="40000" rIns="40000"/>
+          <a:lstStyle/>
+          <a:p>
+            <a:pPr algn="ctr">
+              <a:defRPr sz="900" b="0">
+                <a:solidFill>
+                  <a:srgbClr val="1E1E3C"/>
+                </a:solidFill>
+              </a:defRPr>
+            </a:pPr>
+            <a:r>
+              <a:t>クラウドコンピューティング</a:t>
+            </a:r>
+          </a:p>
+        </p:txBody>
+      </p:sp>
+      <p:sp>
+        <p:nvSpPr>
+          <p:cNvPr id="40" name="Rounded Rectangle 39"/>
+          <p:cNvSpPr/>
+          <p:nvPr/>
+        </p:nvSpPr>
+        <p:spPr>
+          <a:xfrm>
+            <a:off x="6689400" y="3142605"/>
+            <a:ext cx="908700" cy="510271"/>
+          </a:xfrm>
+          <a:prstGeom prst="roundRect">
+            <a:avLst>
+              <a:gd name="adj" fmla="val 2000000000"/>
+            </a:avLst>
+          </a:prstGeom>
+          <a:solidFill>
+            <a:srgbClr val="FFBEBB"/>
+          </a:solidFill>
+          <a:ln w="12700">
+            <a:solidFill>
+              <a:srgbClr val="CC5854"/>
+            </a:solidFill>
+          </a:ln>
+        </p:spPr>
+        <p:style>
+          <a:lnRef idx="1">
+            <a:schemeClr val="accent1"/>
+          </a:lnRef>
+          <a:fillRef idx="3">
+            <a:schemeClr val="accent1"/>
+          </a:fillRef>
+          <a:effectRef idx="2">
+            <a:schemeClr val="accent1"/>
+          </a:effectRef>
+          <a:fontRef idx="minor">
+            <a:schemeClr val="lt1"/>
+          </a:fontRef>
+        </p:style>
+        <p:txBody>
+          <a:bodyPr rtlCol="0" anchor="ctr" wrap="square" tIns="30000" bIns="30000" lIns="40000" rIns="40000"/>
+          <a:lstStyle/>
+          <a:p>
+            <a:pPr algn="ctr">
+              <a:defRPr sz="900" b="0">
+                <a:solidFill>
+                  <a:srgbClr val="1E1E3C"/>
+                </a:solidFill>
+              </a:defRPr>
+            </a:pPr>
+            <a:r>
+              <a:t>スマートフォン全盛</a:t>
+            </a:r>
+          </a:p>
+        </p:txBody>
+      </p:sp>
+      <p:sp>
+        <p:nvSpPr>
+          <p:cNvPr id="41" name="TextBox 40"/>
+          <p:cNvSpPr txBox="1"/>
+          <p:nvPr/>
+        </p:nvSpPr>
+        <p:spPr>
+          <a:xfrm>
+            <a:off x="6659400" y="4923418"/>
+            <a:ext cx="968700" cy="1202745"/>
+          </a:xfrm>
+          <a:prstGeom prst="rect">
+            <a:avLst/>
+          </a:prstGeom>
+          <a:noFill/>
+          <a:ln>
+            <a:noFill/>
+          </a:ln>
+        </p:spPr>
+        <p:txBody>
+          <a:bodyPr wrap="square"/>
+          <a:lstStyle/>
+          <a:p>
+            <a:pPr algn="ctr">
+              <a:defRPr sz="1000" b="1">
+                <a:solidFill>
+                  <a:srgbClr val="1E1E3C"/>
+                </a:solidFill>
+              </a:defRPr>
+            </a:pPr>
+            <a:r>
+              <a:t>2010年代</a:t>
+            </a:r>
+          </a:p>
+        </p:txBody>
+      </p:sp>
+      <p:sp>
+        <p:nvSpPr>
+          <p:cNvPr id="42" name="Oval 41"/>
+          <p:cNvSpPr/>
+          <p:nvPr/>
+        </p:nvSpPr>
+        <p:spPr>
+          <a:xfrm>
+            <a:off x="7972856" y="4378688"/>
+            <a:ext cx="399188" cy="399188"/>
+          </a:xfrm>
+          <a:prstGeom prst="ellipse">
+            <a:avLst/>
+          </a:prstGeom>
+          <a:solidFill>
+            <a:srgbClr val="FF6F69"/>
+          </a:solidFill>
+          <a:ln w="19050">
+            <a:solidFill>
+              <a:srgbClr val="CC5854"/>
+            </a:solidFill>
+          </a:ln>
+        </p:spPr>
+        <p:style>
+          <a:lnRef idx="1">
+            <a:schemeClr val="accent1"/>
+          </a:lnRef>
+          <a:fillRef idx="3">
+            <a:schemeClr val="accent1"/>
+          </a:fillRef>
+          <a:effectRef idx="2">
+            <a:schemeClr val="accent1"/>
+          </a:effectRef>
+          <a:fontRef idx="minor">
+            <a:schemeClr val="lt1"/>
+          </a:fontRef>
+        </p:style>
+        <p:txBody>
+          <a:bodyPr rtlCol="0" anchor="ctr"/>
+          <a:lstStyle/>
+          <a:p>
+            <a:pPr algn="ctr"/>
+          </a:p>
+        </p:txBody>
+      </p:sp>
+      <p:sp>
+        <p:nvSpPr>
+          <p:cNvPr id="43" name="Rounded Rectangle 42"/>
+          <p:cNvSpPr/>
+          <p:nvPr/>
+        </p:nvSpPr>
+        <p:spPr>
+          <a:xfrm>
+            <a:off x="7718100" y="3702876"/>
+            <a:ext cx="908700" cy="510271"/>
+          </a:xfrm>
+          <a:prstGeom prst="roundRect">
+            <a:avLst>
+              <a:gd name="adj" fmla="val 2000000000"/>
+            </a:avLst>
+          </a:prstGeom>
+          <a:solidFill>
+            <a:srgbClr val="FFBEBB"/>
+          </a:solidFill>
+          <a:ln w="12700">
+            <a:solidFill>
+              <a:srgbClr val="CC5854"/>
+            </a:solidFill>
+          </a:ln>
+        </p:spPr>
+        <p:style>
+          <a:lnRef idx="1">
+            <a:schemeClr val="accent1"/>
+          </a:lnRef>
+          <a:fillRef idx="3">
+            <a:schemeClr val="accent1"/>
+          </a:fillRef>
+          <a:effectRef idx="2">
+            <a:schemeClr val="accent1"/>
+          </a:effectRef>
+          <a:fontRef idx="minor">
+            <a:schemeClr val="lt1"/>
+          </a:fontRef>
+        </p:style>
+        <p:txBody>
+          <a:bodyPr rtlCol="0" anchor="ctr" wrap="square" tIns="30000" bIns="30000" lIns="40000" rIns="40000"/>
+          <a:lstStyle/>
+          <a:p>
+            <a:pPr algn="ctr">
+              <a:defRPr sz="900" b="0">
+                <a:solidFill>
+                  <a:srgbClr val="1E1E3C"/>
+                </a:solidFill>
+              </a:defRPr>
+            </a:pPr>
+            <a:r>
+              <a:t>AI・機械学習</a:t>
+            </a:r>
+          </a:p>
+        </p:txBody>
+      </p:sp>
+      <p:sp>
+        <p:nvSpPr>
+          <p:cNvPr id="44" name="Rounded Rectangle 43"/>
+          <p:cNvSpPr/>
+          <p:nvPr/>
+        </p:nvSpPr>
+        <p:spPr>
+          <a:xfrm>
+            <a:off x="7718100" y="3142605"/>
+            <a:ext cx="908700" cy="510271"/>
+          </a:xfrm>
+          <a:prstGeom prst="roundRect">
+            <a:avLst>
+              <a:gd name="adj" fmla="val 2000000000"/>
+            </a:avLst>
+          </a:prstGeom>
+          <a:solidFill>
+            <a:srgbClr val="FFBEBB"/>
+          </a:solidFill>
+          <a:ln w="12700">
+            <a:solidFill>
+              <a:srgbClr val="CC5854"/>
+            </a:solidFill>
+          </a:ln>
+        </p:spPr>
+        <p:style>
+          <a:lnRef idx="1">
+            <a:schemeClr val="accent1"/>
+          </a:lnRef>
+          <a:fillRef idx="3">
+            <a:schemeClr val="accent1"/>
+          </a:fillRef>
+          <a:effectRef idx="2">
+            <a:schemeClr val="accent1"/>
+          </a:effectRef>
+          <a:fontRef idx="minor">
+            <a:schemeClr val="lt1"/>
+          </a:fontRef>
+        </p:style>
+        <p:txBody>
+          <a:bodyPr rtlCol="0" anchor="ctr" wrap="square" tIns="30000" bIns="30000" lIns="40000" rIns="40000"/>
+          <a:lstStyle/>
+          <a:p>
+            <a:pPr algn="ctr">
+              <a:defRPr sz="900" b="0">
+                <a:solidFill>
+                  <a:srgbClr val="1E1E3C"/>
+                </a:solidFill>
+              </a:defRPr>
+            </a:pPr>
+            <a:r>
+              <a:t>大規模言語モデル</a:t>
+            </a:r>
+          </a:p>
+        </p:txBody>
+      </p:sp>
+      <p:sp>
+        <p:nvSpPr>
+          <p:cNvPr id="45" name="TextBox 44"/>
+          <p:cNvSpPr txBox="1"/>
+          <p:nvPr/>
+        </p:nvSpPr>
+        <p:spPr>
+          <a:xfrm>
+            <a:off x="7688100" y="4923418"/>
+            <a:ext cx="968700" cy="1202745"/>
+          </a:xfrm>
+          <a:prstGeom prst="rect">
+            <a:avLst/>
+          </a:prstGeom>
+          <a:noFill/>
+          <a:ln>
+            <a:noFill/>
+          </a:ln>
+        </p:spPr>
+        <p:txBody>
+          <a:bodyPr wrap="square"/>
+          <a:lstStyle/>
+          <a:p>
+            <a:pPr algn="ctr">
+              <a:defRPr sz="1000" b="1">
+                <a:solidFill>
+                  <a:srgbClr val="1E1E3C"/>
+                </a:solidFill>
+              </a:defRPr>
+            </a:pPr>
+            <a:r>
+              <a:t>2020年代</a:t>
             </a:r>
           </a:p>
         </p:txBody>
@@ -29431,7 +35202,7 @@
           <a:lstStyle/>
           <a:p>
             <a:r>
-              <a:t>18. パケット図（Packet Diagram）</a:t>
+              <a:t>13f. タイムライン — section なし・カラーサイクル確認</a:t>
             </a:r>
           </a:p>
         </p:txBody>
@@ -29462,33 +35233,1828 @@
         <p:spPr>
           <a:xfrm>
             <a:off x="457200" y="1600200"/>
-            <a:ext cx="8229600" cy="4525963"/>
+            <a:ext cx="8229600" cy="452596"/>
           </a:xfrm>
           <a:prstGeom prst="rect">
             <a:avLst/>
           </a:prstGeom>
           <a:noFill/>
-        </p:spPr>
-        <p:txBody>
-          <a:bodyPr wrap="square">
-            <a:spAutoFit/>
-          </a:bodyPr>
-          <a:lstStyle/>
-          <a:p>
-            <a:r>
-              <a:rPr sz="1000">
-                <a:latin typeface="Courier New"/>
-              </a:rPr>
-              <a:t>packet-beta
-    title TCP パケット構造
-    0-15: "送信元ポート"
-    16-31: "宛先ポート"
-    32-63: "シーケンス番号"
-    64-95: "確認応答番号"
-    96-99: "データオフセット"
-    100-105: "予約"
-    106-111: "フラグ"
-    112-127: "ウィンドウサイズ"</a:t>
+          <a:ln>
+            <a:noFill/>
+          </a:ln>
+        </p:spPr>
+        <p:txBody>
+          <a:bodyPr wrap="square" tIns="20000"/>
+          <a:lstStyle/>
+          <a:p>
+            <a:pPr algn="ctr">
+              <a:defRPr sz="2000" b="1">
+                <a:solidFill>
+                  <a:srgbClr val="1E1E3C"/>
+                </a:solidFill>
+              </a:defRPr>
+            </a:pPr>
+            <a:r>
+              <a:t>プログラミング言語の歴史（カラーサイクルデモ）</a:t>
+            </a:r>
+          </a:p>
+        </p:txBody>
+      </p:sp>
+      <p:sp>
+        <p:nvSpPr>
+          <p:cNvPr id="5" name="Rectangle 4"/>
+          <p:cNvSpPr/>
+          <p:nvPr/>
+        </p:nvSpPr>
+        <p:spPr>
+          <a:xfrm>
+            <a:off x="457200" y="4033745"/>
+            <a:ext cx="8229600" cy="30000"/>
+          </a:xfrm>
+          <a:prstGeom prst="rect">
+            <a:avLst/>
+          </a:prstGeom>
+          <a:solidFill>
+            <a:srgbClr val="B4B4C8"/>
+          </a:solidFill>
+          <a:ln>
+            <a:noFill/>
+          </a:ln>
+        </p:spPr>
+        <p:style>
+          <a:lnRef idx="1">
+            <a:schemeClr val="accent1"/>
+          </a:lnRef>
+          <a:fillRef idx="3">
+            <a:schemeClr val="accent1"/>
+          </a:fillRef>
+          <a:effectRef idx="2">
+            <a:schemeClr val="accent1"/>
+          </a:effectRef>
+          <a:fontRef idx="minor">
+            <a:schemeClr val="lt1"/>
+          </a:fontRef>
+        </p:style>
+        <p:txBody>
+          <a:bodyPr rtlCol="0" anchor="ctr"/>
+          <a:lstStyle/>
+          <a:p>
+            <a:pPr algn="ctr"/>
+          </a:p>
+        </p:txBody>
+      </p:sp>
+      <p:sp>
+        <p:nvSpPr>
+          <p:cNvPr id="6" name="Oval 5"/>
+          <p:cNvSpPr/>
+          <p:nvPr/>
+        </p:nvSpPr>
+        <p:spPr>
+          <a:xfrm>
+            <a:off x="600506" y="3849151"/>
+            <a:ext cx="399188" cy="399188"/>
+          </a:xfrm>
+          <a:prstGeom prst="ellipse">
+            <a:avLst/>
+          </a:prstGeom>
+          <a:solidFill>
+            <a:srgbClr val="FFB347"/>
+          </a:solidFill>
+          <a:ln w="19050">
+            <a:solidFill>
+              <a:srgbClr val="CC8F38"/>
+            </a:solidFill>
+          </a:ln>
+        </p:spPr>
+        <p:style>
+          <a:lnRef idx="1">
+            <a:schemeClr val="accent1"/>
+          </a:lnRef>
+          <a:fillRef idx="3">
+            <a:schemeClr val="accent1"/>
+          </a:fillRef>
+          <a:effectRef idx="2">
+            <a:schemeClr val="accent1"/>
+          </a:effectRef>
+          <a:fontRef idx="minor">
+            <a:schemeClr val="lt1"/>
+          </a:fontRef>
+        </p:style>
+        <p:txBody>
+          <a:bodyPr rtlCol="0" anchor="ctr"/>
+          <a:lstStyle/>
+          <a:p>
+            <a:pPr algn="ctr"/>
+          </a:p>
+        </p:txBody>
+      </p:sp>
+      <p:sp>
+        <p:nvSpPr>
+          <p:cNvPr id="7" name="Rounded Rectangle 6"/>
+          <p:cNvSpPr/>
+          <p:nvPr/>
+        </p:nvSpPr>
+        <p:spPr>
+          <a:xfrm>
+            <a:off x="517200" y="3173339"/>
+            <a:ext cx="565800" cy="510271"/>
+          </a:xfrm>
+          <a:prstGeom prst="roundRect">
+            <a:avLst>
+              <a:gd name="adj" fmla="val 2000000000"/>
+            </a:avLst>
+          </a:prstGeom>
+          <a:solidFill>
+            <a:srgbClr val="FFDCAC"/>
+          </a:solidFill>
+          <a:ln w="12700">
+            <a:solidFill>
+              <a:srgbClr val="CC8F38"/>
+            </a:solidFill>
+          </a:ln>
+        </p:spPr>
+        <p:style>
+          <a:lnRef idx="1">
+            <a:schemeClr val="accent1"/>
+          </a:lnRef>
+          <a:fillRef idx="3">
+            <a:schemeClr val="accent1"/>
+          </a:fillRef>
+          <a:effectRef idx="2">
+            <a:schemeClr val="accent1"/>
+          </a:effectRef>
+          <a:fontRef idx="minor">
+            <a:schemeClr val="lt1"/>
+          </a:fontRef>
+        </p:style>
+        <p:txBody>
+          <a:bodyPr rtlCol="0" anchor="ctr" wrap="square" tIns="30000" bIns="30000" lIns="40000" rIns="40000"/>
+          <a:lstStyle/>
+          <a:p>
+            <a:pPr algn="ctr">
+              <a:defRPr sz="900" b="0">
+                <a:solidFill>
+                  <a:srgbClr val="1E1E3C"/>
+                </a:solidFill>
+              </a:defRPr>
+            </a:pPr>
+            <a:r>
+              <a:t>Fortran</a:t>
+            </a:r>
+          </a:p>
+        </p:txBody>
+      </p:sp>
+      <p:sp>
+        <p:nvSpPr>
+          <p:cNvPr id="8" name="TextBox 7"/>
+          <p:cNvSpPr txBox="1"/>
+          <p:nvPr/>
+        </p:nvSpPr>
+        <p:spPr>
+          <a:xfrm>
+            <a:off x="487200" y="4393881"/>
+            <a:ext cx="625800" cy="1732282"/>
+          </a:xfrm>
+          <a:prstGeom prst="rect">
+            <a:avLst/>
+          </a:prstGeom>
+          <a:noFill/>
+          <a:ln>
+            <a:noFill/>
+          </a:ln>
+        </p:spPr>
+        <p:txBody>
+          <a:bodyPr wrap="square"/>
+          <a:lstStyle/>
+          <a:p>
+            <a:pPr algn="ctr">
+              <a:defRPr sz="1000" b="1">
+                <a:solidFill>
+                  <a:srgbClr val="1E1E3C"/>
+                </a:solidFill>
+              </a:defRPr>
+            </a:pPr>
+            <a:r>
+              <a:t>1957</a:t>
+            </a:r>
+          </a:p>
+        </p:txBody>
+      </p:sp>
+      <p:sp>
+        <p:nvSpPr>
+          <p:cNvPr id="9" name="Oval 8"/>
+          <p:cNvSpPr/>
+          <p:nvPr/>
+        </p:nvSpPr>
+        <p:spPr>
+          <a:xfrm>
+            <a:off x="1286306" y="3849151"/>
+            <a:ext cx="399188" cy="399188"/>
+          </a:xfrm>
+          <a:prstGeom prst="ellipse">
+            <a:avLst/>
+          </a:prstGeom>
+          <a:solidFill>
+            <a:srgbClr val="58C496"/>
+          </a:solidFill>
+          <a:ln w="19050">
+            <a:solidFill>
+              <a:srgbClr val="469C78"/>
+            </a:solidFill>
+          </a:ln>
+        </p:spPr>
+        <p:style>
+          <a:lnRef idx="1">
+            <a:schemeClr val="accent1"/>
+          </a:lnRef>
+          <a:fillRef idx="3">
+            <a:schemeClr val="accent1"/>
+          </a:fillRef>
+          <a:effectRef idx="2">
+            <a:schemeClr val="accent1"/>
+          </a:effectRef>
+          <a:fontRef idx="minor">
+            <a:schemeClr val="lt1"/>
+          </a:fontRef>
+        </p:style>
+        <p:txBody>
+          <a:bodyPr rtlCol="0" anchor="ctr"/>
+          <a:lstStyle/>
+          <a:p>
+            <a:pPr algn="ctr"/>
+          </a:p>
+        </p:txBody>
+      </p:sp>
+      <p:sp>
+        <p:nvSpPr>
+          <p:cNvPr id="10" name="Rounded Rectangle 9"/>
+          <p:cNvSpPr/>
+          <p:nvPr/>
+        </p:nvSpPr>
+        <p:spPr>
+          <a:xfrm>
+            <a:off x="1203000" y="3173339"/>
+            <a:ext cx="565800" cy="510271"/>
+          </a:xfrm>
+          <a:prstGeom prst="roundRect">
+            <a:avLst>
+              <a:gd name="adj" fmla="val 2000000000"/>
+            </a:avLst>
+          </a:prstGeom>
+          <a:solidFill>
+            <a:srgbClr val="B3E4CF"/>
+          </a:solidFill>
+          <a:ln w="12700">
+            <a:solidFill>
+              <a:srgbClr val="469C78"/>
+            </a:solidFill>
+          </a:ln>
+        </p:spPr>
+        <p:style>
+          <a:lnRef idx="1">
+            <a:schemeClr val="accent1"/>
+          </a:lnRef>
+          <a:fillRef idx="3">
+            <a:schemeClr val="accent1"/>
+          </a:fillRef>
+          <a:effectRef idx="2">
+            <a:schemeClr val="accent1"/>
+          </a:effectRef>
+          <a:fontRef idx="minor">
+            <a:schemeClr val="lt1"/>
+          </a:fontRef>
+        </p:style>
+        <p:txBody>
+          <a:bodyPr rtlCol="0" anchor="ctr" wrap="square" tIns="30000" bIns="30000" lIns="40000" rIns="40000"/>
+          <a:lstStyle/>
+          <a:p>
+            <a:pPr algn="ctr">
+              <a:defRPr sz="900" b="0">
+                <a:solidFill>
+                  <a:srgbClr val="1E1E3C"/>
+                </a:solidFill>
+              </a:defRPr>
+            </a:pPr>
+            <a:r>
+              <a:t>COBOL</a:t>
+            </a:r>
+          </a:p>
+        </p:txBody>
+      </p:sp>
+      <p:sp>
+        <p:nvSpPr>
+          <p:cNvPr id="11" name="TextBox 10"/>
+          <p:cNvSpPr txBox="1"/>
+          <p:nvPr/>
+        </p:nvSpPr>
+        <p:spPr>
+          <a:xfrm>
+            <a:off x="1173000" y="4393881"/>
+            <a:ext cx="625800" cy="1732282"/>
+          </a:xfrm>
+          <a:prstGeom prst="rect">
+            <a:avLst/>
+          </a:prstGeom>
+          <a:noFill/>
+          <a:ln>
+            <a:noFill/>
+          </a:ln>
+        </p:spPr>
+        <p:txBody>
+          <a:bodyPr wrap="square"/>
+          <a:lstStyle/>
+          <a:p>
+            <a:pPr algn="ctr">
+              <a:defRPr sz="1000" b="1">
+                <a:solidFill>
+                  <a:srgbClr val="1E1E3C"/>
+                </a:solidFill>
+              </a:defRPr>
+            </a:pPr>
+            <a:r>
+              <a:t>1959</a:t>
+            </a:r>
+          </a:p>
+        </p:txBody>
+      </p:sp>
+      <p:sp>
+        <p:nvSpPr>
+          <p:cNvPr id="12" name="Oval 11"/>
+          <p:cNvSpPr/>
+          <p:nvPr/>
+        </p:nvSpPr>
+        <p:spPr>
+          <a:xfrm>
+            <a:off x="1972106" y="3849151"/>
+            <a:ext cx="399188" cy="399188"/>
+          </a:xfrm>
+          <a:prstGeom prst="ellipse">
+            <a:avLst/>
+          </a:prstGeom>
+          <a:solidFill>
+            <a:srgbClr val="66B2FF"/>
+          </a:solidFill>
+          <a:ln w="19050">
+            <a:solidFill>
+              <a:srgbClr val="518ECC"/>
+            </a:solidFill>
+          </a:ln>
+        </p:spPr>
+        <p:style>
+          <a:lnRef idx="1">
+            <a:schemeClr val="accent1"/>
+          </a:lnRef>
+          <a:fillRef idx="3">
+            <a:schemeClr val="accent1"/>
+          </a:fillRef>
+          <a:effectRef idx="2">
+            <a:schemeClr val="accent1"/>
+          </a:effectRef>
+          <a:fontRef idx="minor">
+            <a:schemeClr val="lt1"/>
+          </a:fontRef>
+        </p:style>
+        <p:txBody>
+          <a:bodyPr rtlCol="0" anchor="ctr"/>
+          <a:lstStyle/>
+          <a:p>
+            <a:pPr algn="ctr"/>
+          </a:p>
+        </p:txBody>
+      </p:sp>
+      <p:sp>
+        <p:nvSpPr>
+          <p:cNvPr id="13" name="Rounded Rectangle 12"/>
+          <p:cNvSpPr/>
+          <p:nvPr/>
+        </p:nvSpPr>
+        <p:spPr>
+          <a:xfrm>
+            <a:off x="1888800" y="3173339"/>
+            <a:ext cx="565800" cy="510271"/>
+          </a:xfrm>
+          <a:prstGeom prst="roundRect">
+            <a:avLst>
+              <a:gd name="adj" fmla="val 2000000000"/>
+            </a:avLst>
+          </a:prstGeom>
+          <a:solidFill>
+            <a:srgbClr val="BADCFF"/>
+          </a:solidFill>
+          <a:ln w="12700">
+            <a:solidFill>
+              <a:srgbClr val="518ECC"/>
+            </a:solidFill>
+          </a:ln>
+        </p:spPr>
+        <p:style>
+          <a:lnRef idx="1">
+            <a:schemeClr val="accent1"/>
+          </a:lnRef>
+          <a:fillRef idx="3">
+            <a:schemeClr val="accent1"/>
+          </a:fillRef>
+          <a:effectRef idx="2">
+            <a:schemeClr val="accent1"/>
+          </a:effectRef>
+          <a:fontRef idx="minor">
+            <a:schemeClr val="lt1"/>
+          </a:fontRef>
+        </p:style>
+        <p:txBody>
+          <a:bodyPr rtlCol="0" anchor="ctr" wrap="square" tIns="30000" bIns="30000" lIns="40000" rIns="40000"/>
+          <a:lstStyle/>
+          <a:p>
+            <a:pPr algn="ctr">
+              <a:defRPr sz="900" b="0">
+                <a:solidFill>
+                  <a:srgbClr val="1E1E3C"/>
+                </a:solidFill>
+              </a:defRPr>
+            </a:pPr>
+            <a:r>
+              <a:t>BASIC</a:t>
+            </a:r>
+          </a:p>
+        </p:txBody>
+      </p:sp>
+      <p:sp>
+        <p:nvSpPr>
+          <p:cNvPr id="14" name="TextBox 13"/>
+          <p:cNvSpPr txBox="1"/>
+          <p:nvPr/>
+        </p:nvSpPr>
+        <p:spPr>
+          <a:xfrm>
+            <a:off x="1858800" y="4393881"/>
+            <a:ext cx="625800" cy="1732282"/>
+          </a:xfrm>
+          <a:prstGeom prst="rect">
+            <a:avLst/>
+          </a:prstGeom>
+          <a:noFill/>
+          <a:ln>
+            <a:noFill/>
+          </a:ln>
+        </p:spPr>
+        <p:txBody>
+          <a:bodyPr wrap="square"/>
+          <a:lstStyle/>
+          <a:p>
+            <a:pPr algn="ctr">
+              <a:defRPr sz="1000" b="1">
+                <a:solidFill>
+                  <a:srgbClr val="1E1E3C"/>
+                </a:solidFill>
+              </a:defRPr>
+            </a:pPr>
+            <a:r>
+              <a:t>1964</a:t>
+            </a:r>
+          </a:p>
+        </p:txBody>
+      </p:sp>
+      <p:sp>
+        <p:nvSpPr>
+          <p:cNvPr id="15" name="Oval 14"/>
+          <p:cNvSpPr/>
+          <p:nvPr/>
+        </p:nvSpPr>
+        <p:spPr>
+          <a:xfrm>
+            <a:off x="2657906" y="3849151"/>
+            <a:ext cx="399188" cy="399188"/>
+          </a:xfrm>
+          <a:prstGeom prst="ellipse">
+            <a:avLst/>
+          </a:prstGeom>
+          <a:solidFill>
+            <a:srgbClr val="FF6F69"/>
+          </a:solidFill>
+          <a:ln w="19050">
+            <a:solidFill>
+              <a:srgbClr val="CC5854"/>
+            </a:solidFill>
+          </a:ln>
+        </p:spPr>
+        <p:style>
+          <a:lnRef idx="1">
+            <a:schemeClr val="accent1"/>
+          </a:lnRef>
+          <a:fillRef idx="3">
+            <a:schemeClr val="accent1"/>
+          </a:fillRef>
+          <a:effectRef idx="2">
+            <a:schemeClr val="accent1"/>
+          </a:effectRef>
+          <a:fontRef idx="minor">
+            <a:schemeClr val="lt1"/>
+          </a:fontRef>
+        </p:style>
+        <p:txBody>
+          <a:bodyPr rtlCol="0" anchor="ctr"/>
+          <a:lstStyle/>
+          <a:p>
+            <a:pPr algn="ctr"/>
+          </a:p>
+        </p:txBody>
+      </p:sp>
+      <p:sp>
+        <p:nvSpPr>
+          <p:cNvPr id="16" name="Rounded Rectangle 15"/>
+          <p:cNvSpPr/>
+          <p:nvPr/>
+        </p:nvSpPr>
+        <p:spPr>
+          <a:xfrm>
+            <a:off x="2574600" y="3173339"/>
+            <a:ext cx="565800" cy="510271"/>
+          </a:xfrm>
+          <a:prstGeom prst="roundRect">
+            <a:avLst>
+              <a:gd name="adj" fmla="val 2000000000"/>
+            </a:avLst>
+          </a:prstGeom>
+          <a:solidFill>
+            <a:srgbClr val="FFBEBB"/>
+          </a:solidFill>
+          <a:ln w="12700">
+            <a:solidFill>
+              <a:srgbClr val="CC5854"/>
+            </a:solidFill>
+          </a:ln>
+        </p:spPr>
+        <p:style>
+          <a:lnRef idx="1">
+            <a:schemeClr val="accent1"/>
+          </a:lnRef>
+          <a:fillRef idx="3">
+            <a:schemeClr val="accent1"/>
+          </a:fillRef>
+          <a:effectRef idx="2">
+            <a:schemeClr val="accent1"/>
+          </a:effectRef>
+          <a:fontRef idx="minor">
+            <a:schemeClr val="lt1"/>
+          </a:fontRef>
+        </p:style>
+        <p:txBody>
+          <a:bodyPr rtlCol="0" anchor="ctr" wrap="square" tIns="30000" bIns="30000" lIns="40000" rIns="40000"/>
+          <a:lstStyle/>
+          <a:p>
+            <a:pPr algn="ctr">
+              <a:defRPr sz="900" b="0">
+                <a:solidFill>
+                  <a:srgbClr val="1E1E3C"/>
+                </a:solidFill>
+              </a:defRPr>
+            </a:pPr>
+            <a:r>
+              <a:t>C言語</a:t>
+            </a:r>
+          </a:p>
+        </p:txBody>
+      </p:sp>
+      <p:sp>
+        <p:nvSpPr>
+          <p:cNvPr id="17" name="TextBox 16"/>
+          <p:cNvSpPr txBox="1"/>
+          <p:nvPr/>
+        </p:nvSpPr>
+        <p:spPr>
+          <a:xfrm>
+            <a:off x="2544600" y="4393881"/>
+            <a:ext cx="625800" cy="1732282"/>
+          </a:xfrm>
+          <a:prstGeom prst="rect">
+            <a:avLst/>
+          </a:prstGeom>
+          <a:noFill/>
+          <a:ln>
+            <a:noFill/>
+          </a:ln>
+        </p:spPr>
+        <p:txBody>
+          <a:bodyPr wrap="square"/>
+          <a:lstStyle/>
+          <a:p>
+            <a:pPr algn="ctr">
+              <a:defRPr sz="1000" b="1">
+                <a:solidFill>
+                  <a:srgbClr val="1E1E3C"/>
+                </a:solidFill>
+              </a:defRPr>
+            </a:pPr>
+            <a:r>
+              <a:t>1972</a:t>
+            </a:r>
+          </a:p>
+        </p:txBody>
+      </p:sp>
+      <p:sp>
+        <p:nvSpPr>
+          <p:cNvPr id="18" name="Oval 17"/>
+          <p:cNvSpPr/>
+          <p:nvPr/>
+        </p:nvSpPr>
+        <p:spPr>
+          <a:xfrm>
+            <a:off x="3343706" y="3849151"/>
+            <a:ext cx="399188" cy="399188"/>
+          </a:xfrm>
+          <a:prstGeom prst="ellipse">
+            <a:avLst/>
+          </a:prstGeom>
+          <a:solidFill>
+            <a:srgbClr val="B488D1"/>
+          </a:solidFill>
+          <a:ln w="19050">
+            <a:solidFill>
+              <a:srgbClr val="906CA7"/>
+            </a:solidFill>
+          </a:ln>
+        </p:spPr>
+        <p:style>
+          <a:lnRef idx="1">
+            <a:schemeClr val="accent1"/>
+          </a:lnRef>
+          <a:fillRef idx="3">
+            <a:schemeClr val="accent1"/>
+          </a:fillRef>
+          <a:effectRef idx="2">
+            <a:schemeClr val="accent1"/>
+          </a:effectRef>
+          <a:fontRef idx="minor">
+            <a:schemeClr val="lt1"/>
+          </a:fontRef>
+        </p:style>
+        <p:txBody>
+          <a:bodyPr rtlCol="0" anchor="ctr"/>
+          <a:lstStyle/>
+          <a:p>
+            <a:pPr algn="ctr"/>
+          </a:p>
+        </p:txBody>
+      </p:sp>
+      <p:sp>
+        <p:nvSpPr>
+          <p:cNvPr id="19" name="Rounded Rectangle 18"/>
+          <p:cNvSpPr/>
+          <p:nvPr/>
+        </p:nvSpPr>
+        <p:spPr>
+          <a:xfrm>
+            <a:off x="3260400" y="3173339"/>
+            <a:ext cx="565800" cy="510271"/>
+          </a:xfrm>
+          <a:prstGeom prst="roundRect">
+            <a:avLst>
+              <a:gd name="adj" fmla="val 2000000000"/>
+            </a:avLst>
+          </a:prstGeom>
+          <a:solidFill>
+            <a:srgbClr val="DDC9EA"/>
+          </a:solidFill>
+          <a:ln w="12700">
+            <a:solidFill>
+              <a:srgbClr val="906CA7"/>
+            </a:solidFill>
+          </a:ln>
+        </p:spPr>
+        <p:style>
+          <a:lnRef idx="1">
+            <a:schemeClr val="accent1"/>
+          </a:lnRef>
+          <a:fillRef idx="3">
+            <a:schemeClr val="accent1"/>
+          </a:fillRef>
+          <a:effectRef idx="2">
+            <a:schemeClr val="accent1"/>
+          </a:effectRef>
+          <a:fontRef idx="minor">
+            <a:schemeClr val="lt1"/>
+          </a:fontRef>
+        </p:style>
+        <p:txBody>
+          <a:bodyPr rtlCol="0" anchor="ctr" wrap="square" tIns="30000" bIns="30000" lIns="40000" rIns="40000"/>
+          <a:lstStyle/>
+          <a:p>
+            <a:pPr algn="ctr">
+              <a:defRPr sz="900" b="0">
+                <a:solidFill>
+                  <a:srgbClr val="1E1E3C"/>
+                </a:solidFill>
+              </a:defRPr>
+            </a:pPr>
+            <a:r>
+              <a:t>C++</a:t>
+            </a:r>
+          </a:p>
+        </p:txBody>
+      </p:sp>
+      <p:sp>
+        <p:nvSpPr>
+          <p:cNvPr id="20" name="TextBox 19"/>
+          <p:cNvSpPr txBox="1"/>
+          <p:nvPr/>
+        </p:nvSpPr>
+        <p:spPr>
+          <a:xfrm>
+            <a:off x="3230400" y="4393881"/>
+            <a:ext cx="625800" cy="1732282"/>
+          </a:xfrm>
+          <a:prstGeom prst="rect">
+            <a:avLst/>
+          </a:prstGeom>
+          <a:noFill/>
+          <a:ln>
+            <a:noFill/>
+          </a:ln>
+        </p:spPr>
+        <p:txBody>
+          <a:bodyPr wrap="square"/>
+          <a:lstStyle/>
+          <a:p>
+            <a:pPr algn="ctr">
+              <a:defRPr sz="1000" b="1">
+                <a:solidFill>
+                  <a:srgbClr val="1E1E3C"/>
+                </a:solidFill>
+              </a:defRPr>
+            </a:pPr>
+            <a:r>
+              <a:t>1983</a:t>
+            </a:r>
+          </a:p>
+        </p:txBody>
+      </p:sp>
+      <p:sp>
+        <p:nvSpPr>
+          <p:cNvPr id="21" name="Oval 20"/>
+          <p:cNvSpPr/>
+          <p:nvPr/>
+        </p:nvSpPr>
+        <p:spPr>
+          <a:xfrm>
+            <a:off x="4029506" y="3849151"/>
+            <a:ext cx="399188" cy="399188"/>
+          </a:xfrm>
+          <a:prstGeom prst="ellipse">
+            <a:avLst/>
+          </a:prstGeom>
+          <a:solidFill>
+            <a:srgbClr val="FFCF8C"/>
+          </a:solidFill>
+          <a:ln w="19050">
+            <a:solidFill>
+              <a:srgbClr val="CCA570"/>
+            </a:solidFill>
+          </a:ln>
+        </p:spPr>
+        <p:style>
+          <a:lnRef idx="1">
+            <a:schemeClr val="accent1"/>
+          </a:lnRef>
+          <a:fillRef idx="3">
+            <a:schemeClr val="accent1"/>
+          </a:fillRef>
+          <a:effectRef idx="2">
+            <a:schemeClr val="accent1"/>
+          </a:effectRef>
+          <a:fontRef idx="minor">
+            <a:schemeClr val="lt1"/>
+          </a:fontRef>
+        </p:style>
+        <p:txBody>
+          <a:bodyPr rtlCol="0" anchor="ctr"/>
+          <a:lstStyle/>
+          <a:p>
+            <a:pPr algn="ctr"/>
+          </a:p>
+        </p:txBody>
+      </p:sp>
+      <p:sp>
+        <p:nvSpPr>
+          <p:cNvPr id="22" name="Rounded Rectangle 21"/>
+          <p:cNvSpPr/>
+          <p:nvPr/>
+        </p:nvSpPr>
+        <p:spPr>
+          <a:xfrm>
+            <a:off x="3946200" y="3173339"/>
+            <a:ext cx="565800" cy="510271"/>
+          </a:xfrm>
+          <a:prstGeom prst="roundRect">
+            <a:avLst>
+              <a:gd name="adj" fmla="val 2000000000"/>
+            </a:avLst>
+          </a:prstGeom>
+          <a:solidFill>
+            <a:srgbClr val="FFE9CB"/>
+          </a:solidFill>
+          <a:ln w="12700">
+            <a:solidFill>
+              <a:srgbClr val="CCA570"/>
+            </a:solidFill>
+          </a:ln>
+        </p:spPr>
+        <p:style>
+          <a:lnRef idx="1">
+            <a:schemeClr val="accent1"/>
+          </a:lnRef>
+          <a:fillRef idx="3">
+            <a:schemeClr val="accent1"/>
+          </a:fillRef>
+          <a:effectRef idx="2">
+            <a:schemeClr val="accent1"/>
+          </a:effectRef>
+          <a:fontRef idx="minor">
+            <a:schemeClr val="lt1"/>
+          </a:fontRef>
+        </p:style>
+        <p:txBody>
+          <a:bodyPr rtlCol="0" anchor="ctr" wrap="square" tIns="30000" bIns="30000" lIns="40000" rIns="40000"/>
+          <a:lstStyle/>
+          <a:p>
+            <a:pPr algn="ctr">
+              <a:defRPr sz="900" b="0">
+                <a:solidFill>
+                  <a:srgbClr val="1E1E3C"/>
+                </a:solidFill>
+              </a:defRPr>
+            </a:pPr>
+            <a:r>
+              <a:t>Python</a:t>
+            </a:r>
+          </a:p>
+        </p:txBody>
+      </p:sp>
+      <p:sp>
+        <p:nvSpPr>
+          <p:cNvPr id="23" name="TextBox 22"/>
+          <p:cNvSpPr txBox="1"/>
+          <p:nvPr/>
+        </p:nvSpPr>
+        <p:spPr>
+          <a:xfrm>
+            <a:off x="3916200" y="4393881"/>
+            <a:ext cx="625800" cy="1732282"/>
+          </a:xfrm>
+          <a:prstGeom prst="rect">
+            <a:avLst/>
+          </a:prstGeom>
+          <a:noFill/>
+          <a:ln>
+            <a:noFill/>
+          </a:ln>
+        </p:spPr>
+        <p:txBody>
+          <a:bodyPr wrap="square"/>
+          <a:lstStyle/>
+          <a:p>
+            <a:pPr algn="ctr">
+              <a:defRPr sz="1000" b="1">
+                <a:solidFill>
+                  <a:srgbClr val="1E1E3C"/>
+                </a:solidFill>
+              </a:defRPr>
+            </a:pPr>
+            <a:r>
+              <a:t>1991</a:t>
+            </a:r>
+          </a:p>
+        </p:txBody>
+      </p:sp>
+      <p:sp>
+        <p:nvSpPr>
+          <p:cNvPr id="24" name="Oval 23"/>
+          <p:cNvSpPr/>
+          <p:nvPr/>
+        </p:nvSpPr>
+        <p:spPr>
+          <a:xfrm>
+            <a:off x="4715306" y="3849151"/>
+            <a:ext cx="399188" cy="399188"/>
+          </a:xfrm>
+          <a:prstGeom prst="ellipse">
+            <a:avLst/>
+          </a:prstGeom>
+          <a:solidFill>
+            <a:srgbClr val="64C0C0"/>
+          </a:solidFill>
+          <a:ln w="19050">
+            <a:solidFill>
+              <a:srgbClr val="509999"/>
+            </a:solidFill>
+          </a:ln>
+        </p:spPr>
+        <p:style>
+          <a:lnRef idx="1">
+            <a:schemeClr val="accent1"/>
+          </a:lnRef>
+          <a:fillRef idx="3">
+            <a:schemeClr val="accent1"/>
+          </a:fillRef>
+          <a:effectRef idx="2">
+            <a:schemeClr val="accent1"/>
+          </a:effectRef>
+          <a:fontRef idx="minor">
+            <a:schemeClr val="lt1"/>
+          </a:fontRef>
+        </p:style>
+        <p:txBody>
+          <a:bodyPr rtlCol="0" anchor="ctr"/>
+          <a:lstStyle/>
+          <a:p>
+            <a:pPr algn="ctr"/>
+          </a:p>
+        </p:txBody>
+      </p:sp>
+      <p:sp>
+        <p:nvSpPr>
+          <p:cNvPr id="25" name="Rounded Rectangle 24"/>
+          <p:cNvSpPr/>
+          <p:nvPr/>
+        </p:nvSpPr>
+        <p:spPr>
+          <a:xfrm>
+            <a:off x="4632000" y="3173339"/>
+            <a:ext cx="565800" cy="510271"/>
+          </a:xfrm>
+          <a:prstGeom prst="roundRect">
+            <a:avLst>
+              <a:gd name="adj" fmla="val 2000000000"/>
+            </a:avLst>
+          </a:prstGeom>
+          <a:solidFill>
+            <a:srgbClr val="B9E2E2"/>
+          </a:solidFill>
+          <a:ln w="12700">
+            <a:solidFill>
+              <a:srgbClr val="509999"/>
+            </a:solidFill>
+          </a:ln>
+        </p:spPr>
+        <p:style>
+          <a:lnRef idx="1">
+            <a:schemeClr val="accent1"/>
+          </a:lnRef>
+          <a:fillRef idx="3">
+            <a:schemeClr val="accent1"/>
+          </a:fillRef>
+          <a:effectRef idx="2">
+            <a:schemeClr val="accent1"/>
+          </a:effectRef>
+          <a:fontRef idx="minor">
+            <a:schemeClr val="lt1"/>
+          </a:fontRef>
+        </p:style>
+        <p:txBody>
+          <a:bodyPr rtlCol="0" anchor="ctr" wrap="square" tIns="30000" bIns="30000" lIns="40000" rIns="40000"/>
+          <a:lstStyle/>
+          <a:p>
+            <a:pPr algn="ctr">
+              <a:defRPr sz="900" b="0">
+                <a:solidFill>
+                  <a:srgbClr val="1E1E3C"/>
+                </a:solidFill>
+              </a:defRPr>
+            </a:pPr>
+            <a:r>
+              <a:t>Java</a:t>
+            </a:r>
+          </a:p>
+        </p:txBody>
+      </p:sp>
+      <p:sp>
+        <p:nvSpPr>
+          <p:cNvPr id="26" name="Rounded Rectangle 25"/>
+          <p:cNvSpPr/>
+          <p:nvPr/>
+        </p:nvSpPr>
+        <p:spPr>
+          <a:xfrm>
+            <a:off x="4632000" y="2613068"/>
+            <a:ext cx="565800" cy="510271"/>
+          </a:xfrm>
+          <a:prstGeom prst="roundRect">
+            <a:avLst>
+              <a:gd name="adj" fmla="val 2000000000"/>
+            </a:avLst>
+          </a:prstGeom>
+          <a:solidFill>
+            <a:srgbClr val="B9E2E2"/>
+          </a:solidFill>
+          <a:ln w="12700">
+            <a:solidFill>
+              <a:srgbClr val="509999"/>
+            </a:solidFill>
+          </a:ln>
+        </p:spPr>
+        <p:style>
+          <a:lnRef idx="1">
+            <a:schemeClr val="accent1"/>
+          </a:lnRef>
+          <a:fillRef idx="3">
+            <a:schemeClr val="accent1"/>
+          </a:fillRef>
+          <a:effectRef idx="2">
+            <a:schemeClr val="accent1"/>
+          </a:effectRef>
+          <a:fontRef idx="minor">
+            <a:schemeClr val="lt1"/>
+          </a:fontRef>
+        </p:style>
+        <p:txBody>
+          <a:bodyPr rtlCol="0" anchor="ctr" wrap="square" tIns="30000" bIns="30000" lIns="40000" rIns="40000"/>
+          <a:lstStyle/>
+          <a:p>
+            <a:pPr algn="ctr">
+              <a:defRPr sz="900" b="0">
+                <a:solidFill>
+                  <a:srgbClr val="1E1E3C"/>
+                </a:solidFill>
+              </a:defRPr>
+            </a:pPr>
+            <a:r>
+              <a:t>JavaScript</a:t>
+            </a:r>
+          </a:p>
+        </p:txBody>
+      </p:sp>
+      <p:sp>
+        <p:nvSpPr>
+          <p:cNvPr id="27" name="Rounded Rectangle 26"/>
+          <p:cNvSpPr/>
+          <p:nvPr/>
+        </p:nvSpPr>
+        <p:spPr>
+          <a:xfrm>
+            <a:off x="4632000" y="2052797"/>
+            <a:ext cx="565800" cy="510271"/>
+          </a:xfrm>
+          <a:prstGeom prst="roundRect">
+            <a:avLst>
+              <a:gd name="adj" fmla="val 2000000000"/>
+            </a:avLst>
+          </a:prstGeom>
+          <a:solidFill>
+            <a:srgbClr val="B9E2E2"/>
+          </a:solidFill>
+          <a:ln w="12700">
+            <a:solidFill>
+              <a:srgbClr val="509999"/>
+            </a:solidFill>
+          </a:ln>
+        </p:spPr>
+        <p:style>
+          <a:lnRef idx="1">
+            <a:schemeClr val="accent1"/>
+          </a:lnRef>
+          <a:fillRef idx="3">
+            <a:schemeClr val="accent1"/>
+          </a:fillRef>
+          <a:effectRef idx="2">
+            <a:schemeClr val="accent1"/>
+          </a:effectRef>
+          <a:fontRef idx="minor">
+            <a:schemeClr val="lt1"/>
+          </a:fontRef>
+        </p:style>
+        <p:txBody>
+          <a:bodyPr rtlCol="0" anchor="ctr" wrap="square" tIns="30000" bIns="30000" lIns="40000" rIns="40000"/>
+          <a:lstStyle/>
+          <a:p>
+            <a:pPr algn="ctr">
+              <a:defRPr sz="900" b="0">
+                <a:solidFill>
+                  <a:srgbClr val="1E1E3C"/>
+                </a:solidFill>
+              </a:defRPr>
+            </a:pPr>
+            <a:r>
+              <a:t>Ruby</a:t>
+            </a:r>
+          </a:p>
+        </p:txBody>
+      </p:sp>
+      <p:sp>
+        <p:nvSpPr>
+          <p:cNvPr id="28" name="TextBox 27"/>
+          <p:cNvSpPr txBox="1"/>
+          <p:nvPr/>
+        </p:nvSpPr>
+        <p:spPr>
+          <a:xfrm>
+            <a:off x="4602000" y="4393881"/>
+            <a:ext cx="625800" cy="1732282"/>
+          </a:xfrm>
+          <a:prstGeom prst="rect">
+            <a:avLst/>
+          </a:prstGeom>
+          <a:noFill/>
+          <a:ln>
+            <a:noFill/>
+          </a:ln>
+        </p:spPr>
+        <p:txBody>
+          <a:bodyPr wrap="square"/>
+          <a:lstStyle/>
+          <a:p>
+            <a:pPr algn="ctr">
+              <a:defRPr sz="1000" b="1">
+                <a:solidFill>
+                  <a:srgbClr val="1E1E3C"/>
+                </a:solidFill>
+              </a:defRPr>
+            </a:pPr>
+            <a:r>
+              <a:t>1995</a:t>
+            </a:r>
+          </a:p>
+        </p:txBody>
+      </p:sp>
+      <p:sp>
+        <p:nvSpPr>
+          <p:cNvPr id="29" name="Oval 28"/>
+          <p:cNvSpPr/>
+          <p:nvPr/>
+        </p:nvSpPr>
+        <p:spPr>
+          <a:xfrm>
+            <a:off x="5401106" y="3849151"/>
+            <a:ext cx="399188" cy="399188"/>
+          </a:xfrm>
+          <a:prstGeom prst="ellipse">
+            <a:avLst/>
+          </a:prstGeom>
+          <a:solidFill>
+            <a:srgbClr val="FFA0B4"/>
+          </a:solidFill>
+          <a:ln w="19050">
+            <a:solidFill>
+              <a:srgbClr val="CC8090"/>
+            </a:solidFill>
+          </a:ln>
+        </p:spPr>
+        <p:style>
+          <a:lnRef idx="1">
+            <a:schemeClr val="accent1"/>
+          </a:lnRef>
+          <a:fillRef idx="3">
+            <a:schemeClr val="accent1"/>
+          </a:fillRef>
+          <a:effectRef idx="2">
+            <a:schemeClr val="accent1"/>
+          </a:effectRef>
+          <a:fontRef idx="minor">
+            <a:schemeClr val="lt1"/>
+          </a:fontRef>
+        </p:style>
+        <p:txBody>
+          <a:bodyPr rtlCol="0" anchor="ctr"/>
+          <a:lstStyle/>
+          <a:p>
+            <a:pPr algn="ctr"/>
+          </a:p>
+        </p:txBody>
+      </p:sp>
+      <p:sp>
+        <p:nvSpPr>
+          <p:cNvPr id="30" name="Rounded Rectangle 29"/>
+          <p:cNvSpPr/>
+          <p:nvPr/>
+        </p:nvSpPr>
+        <p:spPr>
+          <a:xfrm>
+            <a:off x="5317800" y="3173339"/>
+            <a:ext cx="565800" cy="510271"/>
+          </a:xfrm>
+          <a:prstGeom prst="roundRect">
+            <a:avLst>
+              <a:gd name="adj" fmla="val 2000000000"/>
+            </a:avLst>
+          </a:prstGeom>
+          <a:solidFill>
+            <a:srgbClr val="FFD4DD"/>
+          </a:solidFill>
+          <a:ln w="12700">
+            <a:solidFill>
+              <a:srgbClr val="CC8090"/>
+            </a:solidFill>
+          </a:ln>
+        </p:spPr>
+        <p:style>
+          <a:lnRef idx="1">
+            <a:schemeClr val="accent1"/>
+          </a:lnRef>
+          <a:fillRef idx="3">
+            <a:schemeClr val="accent1"/>
+          </a:fillRef>
+          <a:effectRef idx="2">
+            <a:schemeClr val="accent1"/>
+          </a:effectRef>
+          <a:fontRef idx="minor">
+            <a:schemeClr val="lt1"/>
+          </a:fontRef>
+        </p:style>
+        <p:txBody>
+          <a:bodyPr rtlCol="0" anchor="ctr" wrap="square" tIns="30000" bIns="30000" lIns="40000" rIns="40000"/>
+          <a:lstStyle/>
+          <a:p>
+            <a:pPr algn="ctr">
+              <a:defRPr sz="900" b="0">
+                <a:solidFill>
+                  <a:srgbClr val="1E1E3C"/>
+                </a:solidFill>
+              </a:defRPr>
+            </a:pPr>
+            <a:r>
+              <a:t>Scala</a:t>
+            </a:r>
+          </a:p>
+        </p:txBody>
+      </p:sp>
+      <p:sp>
+        <p:nvSpPr>
+          <p:cNvPr id="31" name="TextBox 30"/>
+          <p:cNvSpPr txBox="1"/>
+          <p:nvPr/>
+        </p:nvSpPr>
+        <p:spPr>
+          <a:xfrm>
+            <a:off x="5287800" y="4393881"/>
+            <a:ext cx="625800" cy="1732282"/>
+          </a:xfrm>
+          <a:prstGeom prst="rect">
+            <a:avLst/>
+          </a:prstGeom>
+          <a:noFill/>
+          <a:ln>
+            <a:noFill/>
+          </a:ln>
+        </p:spPr>
+        <p:txBody>
+          <a:bodyPr wrap="square"/>
+          <a:lstStyle/>
+          <a:p>
+            <a:pPr algn="ctr">
+              <a:defRPr sz="1000" b="1">
+                <a:solidFill>
+                  <a:srgbClr val="1E1E3C"/>
+                </a:solidFill>
+              </a:defRPr>
+            </a:pPr>
+            <a:r>
+              <a:t>2003</a:t>
+            </a:r>
+          </a:p>
+        </p:txBody>
+      </p:sp>
+      <p:sp>
+        <p:nvSpPr>
+          <p:cNvPr id="32" name="Oval 31"/>
+          <p:cNvSpPr/>
+          <p:nvPr/>
+        </p:nvSpPr>
+        <p:spPr>
+          <a:xfrm>
+            <a:off x="6086906" y="3849151"/>
+            <a:ext cx="399188" cy="399188"/>
+          </a:xfrm>
+          <a:prstGeom prst="ellipse">
+            <a:avLst/>
+          </a:prstGeom>
+          <a:solidFill>
+            <a:srgbClr val="96C8DC"/>
+          </a:solidFill>
+          <a:ln w="19050">
+            <a:solidFill>
+              <a:srgbClr val="78A0B0"/>
+            </a:solidFill>
+          </a:ln>
+        </p:spPr>
+        <p:style>
+          <a:lnRef idx="1">
+            <a:schemeClr val="accent1"/>
+          </a:lnRef>
+          <a:fillRef idx="3">
+            <a:schemeClr val="accent1"/>
+          </a:fillRef>
+          <a:effectRef idx="2">
+            <a:schemeClr val="accent1"/>
+          </a:effectRef>
+          <a:fontRef idx="minor">
+            <a:schemeClr val="lt1"/>
+          </a:fontRef>
+        </p:style>
+        <p:txBody>
+          <a:bodyPr rtlCol="0" anchor="ctr"/>
+          <a:lstStyle/>
+          <a:p>
+            <a:pPr algn="ctr"/>
+          </a:p>
+        </p:txBody>
+      </p:sp>
+      <p:sp>
+        <p:nvSpPr>
+          <p:cNvPr id="33" name="Rounded Rectangle 32"/>
+          <p:cNvSpPr/>
+          <p:nvPr/>
+        </p:nvSpPr>
+        <p:spPr>
+          <a:xfrm>
+            <a:off x="6003600" y="3173339"/>
+            <a:ext cx="565800" cy="510271"/>
+          </a:xfrm>
+          <a:prstGeom prst="roundRect">
+            <a:avLst>
+              <a:gd name="adj" fmla="val 2000000000"/>
+            </a:avLst>
+          </a:prstGeom>
+          <a:solidFill>
+            <a:srgbClr val="CFE6EF"/>
+          </a:solidFill>
+          <a:ln w="12700">
+            <a:solidFill>
+              <a:srgbClr val="78A0B0"/>
+            </a:solidFill>
+          </a:ln>
+        </p:spPr>
+        <p:style>
+          <a:lnRef idx="1">
+            <a:schemeClr val="accent1"/>
+          </a:lnRef>
+          <a:fillRef idx="3">
+            <a:schemeClr val="accent1"/>
+          </a:fillRef>
+          <a:effectRef idx="2">
+            <a:schemeClr val="accent1"/>
+          </a:effectRef>
+          <a:fontRef idx="minor">
+            <a:schemeClr val="lt1"/>
+          </a:fontRef>
+        </p:style>
+        <p:txBody>
+          <a:bodyPr rtlCol="0" anchor="ctr" wrap="square" tIns="30000" bIns="30000" lIns="40000" rIns="40000"/>
+          <a:lstStyle/>
+          <a:p>
+            <a:pPr algn="ctr">
+              <a:defRPr sz="900" b="0">
+                <a:solidFill>
+                  <a:srgbClr val="1E1E3C"/>
+                </a:solidFill>
+              </a:defRPr>
+            </a:pPr>
+            <a:r>
+              <a:t>Go</a:t>
+            </a:r>
+          </a:p>
+        </p:txBody>
+      </p:sp>
+      <p:sp>
+        <p:nvSpPr>
+          <p:cNvPr id="34" name="TextBox 33"/>
+          <p:cNvSpPr txBox="1"/>
+          <p:nvPr/>
+        </p:nvSpPr>
+        <p:spPr>
+          <a:xfrm>
+            <a:off x="5973600" y="4393881"/>
+            <a:ext cx="625800" cy="1732282"/>
+          </a:xfrm>
+          <a:prstGeom prst="rect">
+            <a:avLst/>
+          </a:prstGeom>
+          <a:noFill/>
+          <a:ln>
+            <a:noFill/>
+          </a:ln>
+        </p:spPr>
+        <p:txBody>
+          <a:bodyPr wrap="square"/>
+          <a:lstStyle/>
+          <a:p>
+            <a:pPr algn="ctr">
+              <a:defRPr sz="1000" b="1">
+                <a:solidFill>
+                  <a:srgbClr val="1E1E3C"/>
+                </a:solidFill>
+              </a:defRPr>
+            </a:pPr>
+            <a:r>
+              <a:t>2009</a:t>
+            </a:r>
+          </a:p>
+        </p:txBody>
+      </p:sp>
+      <p:sp>
+        <p:nvSpPr>
+          <p:cNvPr id="35" name="Oval 34"/>
+          <p:cNvSpPr/>
+          <p:nvPr/>
+        </p:nvSpPr>
+        <p:spPr>
+          <a:xfrm>
+            <a:off x="6772706" y="3849151"/>
+            <a:ext cx="399188" cy="399188"/>
+          </a:xfrm>
+          <a:prstGeom prst="ellipse">
+            <a:avLst/>
+          </a:prstGeom>
+          <a:solidFill>
+            <a:srgbClr val="C8E696"/>
+          </a:solidFill>
+          <a:ln w="19050">
+            <a:solidFill>
+              <a:srgbClr val="A0B878"/>
+            </a:solidFill>
+          </a:ln>
+        </p:spPr>
+        <p:style>
+          <a:lnRef idx="1">
+            <a:schemeClr val="accent1"/>
+          </a:lnRef>
+          <a:fillRef idx="3">
+            <a:schemeClr val="accent1"/>
+          </a:fillRef>
+          <a:effectRef idx="2">
+            <a:schemeClr val="accent1"/>
+          </a:effectRef>
+          <a:fontRef idx="minor">
+            <a:schemeClr val="lt1"/>
+          </a:fontRef>
+        </p:style>
+        <p:txBody>
+          <a:bodyPr rtlCol="0" anchor="ctr"/>
+          <a:lstStyle/>
+          <a:p>
+            <a:pPr algn="ctr"/>
+          </a:p>
+        </p:txBody>
+      </p:sp>
+      <p:sp>
+        <p:nvSpPr>
+          <p:cNvPr id="36" name="Rounded Rectangle 35"/>
+          <p:cNvSpPr/>
+          <p:nvPr/>
+        </p:nvSpPr>
+        <p:spPr>
+          <a:xfrm>
+            <a:off x="6689400" y="3173339"/>
+            <a:ext cx="565800" cy="510271"/>
+          </a:xfrm>
+          <a:prstGeom prst="roundRect">
+            <a:avLst>
+              <a:gd name="adj" fmla="val 2000000000"/>
+            </a:avLst>
+          </a:prstGeom>
+          <a:solidFill>
+            <a:srgbClr val="E6F3CF"/>
+          </a:solidFill>
+          <a:ln w="12700">
+            <a:solidFill>
+              <a:srgbClr val="A0B878"/>
+            </a:solidFill>
+          </a:ln>
+        </p:spPr>
+        <p:style>
+          <a:lnRef idx="1">
+            <a:schemeClr val="accent1"/>
+          </a:lnRef>
+          <a:fillRef idx="3">
+            <a:schemeClr val="accent1"/>
+          </a:fillRef>
+          <a:effectRef idx="2">
+            <a:schemeClr val="accent1"/>
+          </a:effectRef>
+          <a:fontRef idx="minor">
+            <a:schemeClr val="lt1"/>
+          </a:fontRef>
+        </p:style>
+        <p:txBody>
+          <a:bodyPr rtlCol="0" anchor="ctr" wrap="square" tIns="30000" bIns="30000" lIns="40000" rIns="40000"/>
+          <a:lstStyle/>
+          <a:p>
+            <a:pPr algn="ctr">
+              <a:defRPr sz="900" b="0">
+                <a:solidFill>
+                  <a:srgbClr val="1E1E3C"/>
+                </a:solidFill>
+              </a:defRPr>
+            </a:pPr>
+            <a:r>
+              <a:t>TypeScript</a:t>
+            </a:r>
+          </a:p>
+        </p:txBody>
+      </p:sp>
+      <p:sp>
+        <p:nvSpPr>
+          <p:cNvPr id="37" name="TextBox 36"/>
+          <p:cNvSpPr txBox="1"/>
+          <p:nvPr/>
+        </p:nvSpPr>
+        <p:spPr>
+          <a:xfrm>
+            <a:off x="6659400" y="4393881"/>
+            <a:ext cx="625800" cy="1732282"/>
+          </a:xfrm>
+          <a:prstGeom prst="rect">
+            <a:avLst/>
+          </a:prstGeom>
+          <a:noFill/>
+          <a:ln>
+            <a:noFill/>
+          </a:ln>
+        </p:spPr>
+        <p:txBody>
+          <a:bodyPr wrap="square"/>
+          <a:lstStyle/>
+          <a:p>
+            <a:pPr algn="ctr">
+              <a:defRPr sz="1000" b="1">
+                <a:solidFill>
+                  <a:srgbClr val="1E1E3C"/>
+                </a:solidFill>
+              </a:defRPr>
+            </a:pPr>
+            <a:r>
+              <a:t>2012</a:t>
+            </a:r>
+          </a:p>
+        </p:txBody>
+      </p:sp>
+      <p:sp>
+        <p:nvSpPr>
+          <p:cNvPr id="38" name="Oval 37"/>
+          <p:cNvSpPr/>
+          <p:nvPr/>
+        </p:nvSpPr>
+        <p:spPr>
+          <a:xfrm>
+            <a:off x="7458506" y="3849151"/>
+            <a:ext cx="399188" cy="399188"/>
+          </a:xfrm>
+          <a:prstGeom prst="ellipse">
+            <a:avLst/>
+          </a:prstGeom>
+          <a:solidFill>
+            <a:srgbClr val="DC9664"/>
+          </a:solidFill>
+          <a:ln w="19050">
+            <a:solidFill>
+              <a:srgbClr val="B07850"/>
+            </a:solidFill>
+          </a:ln>
+        </p:spPr>
+        <p:style>
+          <a:lnRef idx="1">
+            <a:schemeClr val="accent1"/>
+          </a:lnRef>
+          <a:fillRef idx="3">
+            <a:schemeClr val="accent1"/>
+          </a:fillRef>
+          <a:effectRef idx="2">
+            <a:schemeClr val="accent1"/>
+          </a:effectRef>
+          <a:fontRef idx="minor">
+            <a:schemeClr val="lt1"/>
+          </a:fontRef>
+        </p:style>
+        <p:txBody>
+          <a:bodyPr rtlCol="0" anchor="ctr"/>
+          <a:lstStyle/>
+          <a:p>
+            <a:pPr algn="ctr"/>
+          </a:p>
+        </p:txBody>
+      </p:sp>
+      <p:sp>
+        <p:nvSpPr>
+          <p:cNvPr id="39" name="Rounded Rectangle 38"/>
+          <p:cNvSpPr/>
+          <p:nvPr/>
+        </p:nvSpPr>
+        <p:spPr>
+          <a:xfrm>
+            <a:off x="7375200" y="3173339"/>
+            <a:ext cx="565800" cy="510271"/>
+          </a:xfrm>
+          <a:prstGeom prst="roundRect">
+            <a:avLst>
+              <a:gd name="adj" fmla="val 2000000000"/>
+            </a:avLst>
+          </a:prstGeom>
+          <a:solidFill>
+            <a:srgbClr val="EFCFB9"/>
+          </a:solidFill>
+          <a:ln w="12700">
+            <a:solidFill>
+              <a:srgbClr val="B07850"/>
+            </a:solidFill>
+          </a:ln>
+        </p:spPr>
+        <p:style>
+          <a:lnRef idx="1">
+            <a:schemeClr val="accent1"/>
+          </a:lnRef>
+          <a:fillRef idx="3">
+            <a:schemeClr val="accent1"/>
+          </a:fillRef>
+          <a:effectRef idx="2">
+            <a:schemeClr val="accent1"/>
+          </a:effectRef>
+          <a:fontRef idx="minor">
+            <a:schemeClr val="lt1"/>
+          </a:fontRef>
+        </p:style>
+        <p:txBody>
+          <a:bodyPr rtlCol="0" anchor="ctr" wrap="square" tIns="30000" bIns="30000" lIns="40000" rIns="40000"/>
+          <a:lstStyle/>
+          <a:p>
+            <a:pPr algn="ctr">
+              <a:defRPr sz="900" b="0">
+                <a:solidFill>
+                  <a:srgbClr val="1E1E3C"/>
+                </a:solidFill>
+              </a:defRPr>
+            </a:pPr>
+            <a:r>
+              <a:t>Rust</a:t>
+            </a:r>
+          </a:p>
+        </p:txBody>
+      </p:sp>
+      <p:sp>
+        <p:nvSpPr>
+          <p:cNvPr id="40" name="TextBox 39"/>
+          <p:cNvSpPr txBox="1"/>
+          <p:nvPr/>
+        </p:nvSpPr>
+        <p:spPr>
+          <a:xfrm>
+            <a:off x="7345200" y="4393881"/>
+            <a:ext cx="625800" cy="1732282"/>
+          </a:xfrm>
+          <a:prstGeom prst="rect">
+            <a:avLst/>
+          </a:prstGeom>
+          <a:noFill/>
+          <a:ln>
+            <a:noFill/>
+          </a:ln>
+        </p:spPr>
+        <p:txBody>
+          <a:bodyPr wrap="square"/>
+          <a:lstStyle/>
+          <a:p>
+            <a:pPr algn="ctr">
+              <a:defRPr sz="1000" b="1">
+                <a:solidFill>
+                  <a:srgbClr val="1E1E3C"/>
+                </a:solidFill>
+              </a:defRPr>
+            </a:pPr>
+            <a:r>
+              <a:t>2015</a:t>
+            </a:r>
+          </a:p>
+        </p:txBody>
+      </p:sp>
+      <p:sp>
+        <p:nvSpPr>
+          <p:cNvPr id="41" name="Oval 40"/>
+          <p:cNvSpPr/>
+          <p:nvPr/>
+        </p:nvSpPr>
+        <p:spPr>
+          <a:xfrm>
+            <a:off x="8144306" y="3849151"/>
+            <a:ext cx="399188" cy="399188"/>
+          </a:xfrm>
+          <a:prstGeom prst="ellipse">
+            <a:avLst/>
+          </a:prstGeom>
+          <a:solidFill>
+            <a:srgbClr val="A0B4F0"/>
+          </a:solidFill>
+          <a:ln w="19050">
+            <a:solidFill>
+              <a:srgbClr val="8090C0"/>
+            </a:solidFill>
+          </a:ln>
+        </p:spPr>
+        <p:style>
+          <a:lnRef idx="1">
+            <a:schemeClr val="accent1"/>
+          </a:lnRef>
+          <a:fillRef idx="3">
+            <a:schemeClr val="accent1"/>
+          </a:fillRef>
+          <a:effectRef idx="2">
+            <a:schemeClr val="accent1"/>
+          </a:effectRef>
+          <a:fontRef idx="minor">
+            <a:schemeClr val="lt1"/>
+          </a:fontRef>
+        </p:style>
+        <p:txBody>
+          <a:bodyPr rtlCol="0" anchor="ctr"/>
+          <a:lstStyle/>
+          <a:p>
+            <a:pPr algn="ctr"/>
+          </a:p>
+        </p:txBody>
+      </p:sp>
+      <p:sp>
+        <p:nvSpPr>
+          <p:cNvPr id="42" name="Rounded Rectangle 41"/>
+          <p:cNvSpPr/>
+          <p:nvPr/>
+        </p:nvSpPr>
+        <p:spPr>
+          <a:xfrm>
+            <a:off x="8061000" y="3173339"/>
+            <a:ext cx="565800" cy="510271"/>
+          </a:xfrm>
+          <a:prstGeom prst="roundRect">
+            <a:avLst>
+              <a:gd name="adj" fmla="val 2000000000"/>
+            </a:avLst>
+          </a:prstGeom>
+          <a:solidFill>
+            <a:srgbClr val="D4DDF8"/>
+          </a:solidFill>
+          <a:ln w="12700">
+            <a:solidFill>
+              <a:srgbClr val="8090C0"/>
+            </a:solidFill>
+          </a:ln>
+        </p:spPr>
+        <p:style>
+          <a:lnRef idx="1">
+            <a:schemeClr val="accent1"/>
+          </a:lnRef>
+          <a:fillRef idx="3">
+            <a:schemeClr val="accent1"/>
+          </a:fillRef>
+          <a:effectRef idx="2">
+            <a:schemeClr val="accent1"/>
+          </a:effectRef>
+          <a:fontRef idx="minor">
+            <a:schemeClr val="lt1"/>
+          </a:fontRef>
+        </p:style>
+        <p:txBody>
+          <a:bodyPr rtlCol="0" anchor="ctr" wrap="square" tIns="30000" bIns="30000" lIns="40000" rIns="40000"/>
+          <a:lstStyle/>
+          <a:p>
+            <a:pPr algn="ctr">
+              <a:defRPr sz="900" b="0">
+                <a:solidFill>
+                  <a:srgbClr val="1E1E3C"/>
+                </a:solidFill>
+              </a:defRPr>
+            </a:pPr>
+            <a:r>
+              <a:t>Carbon</a:t>
+            </a:r>
+          </a:p>
+        </p:txBody>
+      </p:sp>
+      <p:sp>
+        <p:nvSpPr>
+          <p:cNvPr id="43" name="TextBox 42"/>
+          <p:cNvSpPr txBox="1"/>
+          <p:nvPr/>
+        </p:nvSpPr>
+        <p:spPr>
+          <a:xfrm>
+            <a:off x="8031000" y="4393881"/>
+            <a:ext cx="625800" cy="1732282"/>
+          </a:xfrm>
+          <a:prstGeom prst="rect">
+            <a:avLst/>
+          </a:prstGeom>
+          <a:noFill/>
+          <a:ln>
+            <a:noFill/>
+          </a:ln>
+        </p:spPr>
+        <p:txBody>
+          <a:bodyPr wrap="square"/>
+          <a:lstStyle/>
+          <a:p>
+            <a:pPr algn="ctr">
+              <a:defRPr sz="1000" b="1">
+                <a:solidFill>
+                  <a:srgbClr val="1E1E3C"/>
+                </a:solidFill>
+              </a:defRPr>
+            </a:pPr>
+            <a:r>
+              <a:t>2022</a:t>
             </a:r>
           </a:p>
         </p:txBody>
@@ -29534,7 +37100,7 @@
           <a:lstStyle/>
           <a:p>
             <a:r>
-              <a:t>19. カンバン（Kanban）</a:t>
+              <a:t>14. Quartoネイティブ記法</a:t>
             </a:r>
           </a:p>
         </p:txBody>
@@ -29558,44 +37124,196 @@
       </p:sp>
       <p:sp>
         <p:nvSpPr>
-          <p:cNvPr id="4" name="TextBox 3"/>
-          <p:cNvSpPr txBox="1"/>
-          <p:nvPr/>
-        </p:nvSpPr>
-        <p:spPr>
-          <a:xfrm>
-            <a:off x="457200" y="1600200"/>
-            <a:ext cx="8229600" cy="4525963"/>
+          <p:cNvPr id="4" name="Rectangle 3"/>
+          <p:cNvSpPr/>
+          <p:nvPr/>
+        </p:nvSpPr>
+        <p:spPr>
+          <a:xfrm>
+            <a:off x="457200" y="3613181"/>
+            <a:ext cx="1200000" cy="500000"/>
           </a:xfrm>
           <a:prstGeom prst="rect">
             <a:avLst/>
           </a:prstGeom>
-          <a:noFill/>
-        </p:spPr>
-        <p:txBody>
-          <a:bodyPr wrap="square">
-            <a:spAutoFit/>
-          </a:bodyPr>
-          <a:lstStyle/>
-          <a:p>
-            <a:r>
-              <a:rPr sz="1000">
-                <a:latin typeface="Courier New"/>
-              </a:rPr>
-              <a:t>kanban
-    todo["To Do"]
-        task1["要件定義"]
-        task2["DB設計"]
-    inprogress["In Progress"]
-        task3["API実装"]
-        task4["テスト作成"]
-    done["Done"]
-        task5["環境構築"]
-        task6["仕様策定"]</a:t>
-            </a:r>
-          </a:p>
-        </p:txBody>
-      </p:sp>
+        </p:spPr>
+        <p:style>
+          <a:lnRef idx="1">
+            <a:schemeClr val="accent1"/>
+          </a:lnRef>
+          <a:fillRef idx="3">
+            <a:schemeClr val="accent1"/>
+          </a:fillRef>
+          <a:effectRef idx="2">
+            <a:schemeClr val="accent1"/>
+          </a:effectRef>
+          <a:fontRef idx="minor">
+            <a:schemeClr val="lt1"/>
+          </a:fontRef>
+        </p:style>
+        <p:txBody>
+          <a:bodyPr rtlCol="0" anchor="ctr"/>
+          <a:lstStyle/>
+          <a:p>
+            <a:r>
+              <a:rPr sz="1200"/>
+              <a:t>スタート</a:t>
+            </a:r>
+          </a:p>
+        </p:txBody>
+      </p:sp>
+      <p:sp>
+        <p:nvSpPr>
+          <p:cNvPr id="5" name="Rectangle 4"/>
+          <p:cNvSpPr/>
+          <p:nvPr/>
+        </p:nvSpPr>
+        <p:spPr>
+          <a:xfrm>
+            <a:off x="3972000" y="3613181"/>
+            <a:ext cx="1200000" cy="500000"/>
+          </a:xfrm>
+          <a:prstGeom prst="rect">
+            <a:avLst/>
+          </a:prstGeom>
+        </p:spPr>
+        <p:style>
+          <a:lnRef idx="1">
+            <a:schemeClr val="accent1"/>
+          </a:lnRef>
+          <a:fillRef idx="3">
+            <a:schemeClr val="accent1"/>
+          </a:fillRef>
+          <a:effectRef idx="2">
+            <a:schemeClr val="accent1"/>
+          </a:effectRef>
+          <a:fontRef idx="minor">
+            <a:schemeClr val="lt1"/>
+          </a:fontRef>
+        </p:style>
+        <p:txBody>
+          <a:bodyPr rtlCol="0" anchor="ctr"/>
+          <a:lstStyle/>
+          <a:p>
+            <a:r>
+              <a:rPr sz="1200"/>
+              <a:t>処理</a:t>
+            </a:r>
+          </a:p>
+        </p:txBody>
+      </p:sp>
+      <p:sp>
+        <p:nvSpPr>
+          <p:cNvPr id="6" name="Rectangle 5"/>
+          <p:cNvSpPr/>
+          <p:nvPr/>
+        </p:nvSpPr>
+        <p:spPr>
+          <a:xfrm>
+            <a:off x="7486800" y="3613181"/>
+            <a:ext cx="1200000" cy="500000"/>
+          </a:xfrm>
+          <a:prstGeom prst="rect">
+            <a:avLst/>
+          </a:prstGeom>
+        </p:spPr>
+        <p:style>
+          <a:lnRef idx="1">
+            <a:schemeClr val="accent1"/>
+          </a:lnRef>
+          <a:fillRef idx="3">
+            <a:schemeClr val="accent1"/>
+          </a:fillRef>
+          <a:effectRef idx="2">
+            <a:schemeClr val="accent1"/>
+          </a:effectRef>
+          <a:fontRef idx="minor">
+            <a:schemeClr val="lt1"/>
+          </a:fontRef>
+        </p:style>
+        <p:txBody>
+          <a:bodyPr rtlCol="0" anchor="ctr"/>
+          <a:lstStyle/>
+          <a:p>
+            <a:r>
+              <a:rPr sz="1200"/>
+              <a:t>エンド</a:t>
+            </a:r>
+          </a:p>
+        </p:txBod